--- a/Lessons/04_classification_and_metrics/Slides/classification_and_metrics_slides.pptx
+++ b/Lessons/04_classification_and_metrics/Slides/classification_and_metrics_slides.pptx
@@ -5882,7 +5882,21 @@
             </a:pPr>
             <a:r>
               <a:rPr/>
-              <a:t>Left: the curve. Steep in the middle, flat at both ends. Make the case that the flatness is the right behaviour, not a compromise - going from 0 to 4 reallocated sectors should change your mind a lot; going from 40 to 44 should barely register, because you had already concluded the drive was finished. Evidence has diminishing returns.</a:t>
+              <a:t>Left: the curve. Steep in the middle, flat at both ends. Make the case that the flatness is the right behaviour, not a compromise - and be precise about what is diminishing. It is the total evidence z, not any one counter. Two units of log-odds from z = 0 take the probability from 0.50 to 0.88; the same two from z = 6 take it from 0.9975 to 0.9997, 178 times less.</a:t>
+            </a:r>
+          </a:p>
+          <a:p>
+            <a:pPr lvl="0" indent="0" marL="0">
+              <a:buNone/>
+            </a:pPr>
+          </a:p>
+          <a:p>
+            <a:pPr lvl="0" indent="0" marL="0">
+              <a:buNone/>
+            </a:pPr>
+            <a:r>
+              <a:rPr/>
+              <a:t>Expect someone to object that the previous figure says otherwise. That curve is drawn against raw reallocated sectors, not against z, so it is steepest at 13.2 and the first four sectors move it by only 0.03. Both pictures are right: the counters act on a log scale, and on that scale four sectors are worth +4.7 in log-odds, taking a drive from a 0.01% chance of failing to 1.3%. Handout section 1.1.</a:t>
             </a:r>
           </a:p>
           <a:p>

--- a/Lessons/04_classification_and_metrics/Slides/classification_and_metrics_slides.pptx
+++ b/Lessons/04_classification_and_metrics/Slides/classification_and_metrics_slides.pptx
@@ -2936,7 +2936,21 @@
             </a:pPr>
             <a:r>
               <a:rPr/>
-              <a:t>classification_report prints three summary rows and students quote whichever is biggest. Give them the rule.</a:t>
+              <a:t>classification_report is scikit-learn’s summary table, and they will print it themselves in notebook 2 in about five minutes: one row per class, then three summary rows - accuracy, macro avg, weighted avg. The two numbers on this slide are the f1-score column of the last two.</a:t>
+            </a:r>
+          </a:p>
+          <a:p>
+            <a:pPr lvl="0" indent="0" marL="0">
+              <a:buNone/>
+            </a:pPr>
+          </a:p>
+          <a:p>
+            <a:pPr lvl="0" indent="0" marL="0">
+              <a:buNone/>
+            </a:pPr>
+            <a:r>
+              <a:rPr/>
+              <a:t>Anticipating it by one slide is deliberate. The rule for choosing between those rows is what they need in their heads while they run the notebook, not afterwards - left to themselves they quote whichever is biggest.</a:t>
             </a:r>
           </a:p>
           <a:p>

--- a/Lessons/04_classification_and_metrics/Slides/classification_and_metrics_slides.pptx
+++ b/Lessons/04_classification_and_metrics/Slides/classification_and_metrics_slides.pptx
@@ -5538,7 +5538,7 @@
             </a:pPr>
             <a:r>
               <a:rPr/>
-              <a:t>Set it explicitly and say out loud when it comes back: the first ten minutes of next Friday, 23 October.</a:t>
+              <a:t>Set it explicitly and say out loud when it comes back: the first ten minutes of next Friday, 30 October.</a:t>
             </a:r>
           </a:p>
           <a:p>
@@ -9297,7 +9297,7 @@
             </a:pPr>
             <a:r>
               <a:rPr/>
-              <a:t>16 October 2026</a:t>
+              <a:t>23 October 2026</a:t>
             </a:r>
           </a:p>
         </p:txBody>
@@ -14891,7 +14891,7 @@
             </a:r>
             <a:r>
               <a:rPr b="1"/>
-              <a:t>Friday 23 October</a:t>
+              <a:t>Friday 30 October</a:t>
             </a:r>
           </a:p>
           <a:p>

--- a/Lessons/04_classification_and_metrics/Slides/classification_and_metrics_slides.pptx
+++ b/Lessons/04_classification_and_metrics/Slides/classification_and_metrics_slides.pptx
@@ -2812,7 +2812,7 @@
             </a:pPr>
             <a:r>
               <a:rPr/>
-              <a:t>The ordinary average gives that model 0.519, which looks respectable. Anyone scanning a results table would not blink at 0.52.</a:t>
+              <a:t>The ordinary average gives that model 0.519, which looks respectable. Anyone scanning a results table would not blink at 0.519.</a:t>
             </a:r>
           </a:p>
           <a:p>
@@ -3432,7 +3432,7 @@
             </a:pPr>
             <a:r>
               <a:rPr/>
-              <a:t>Now the accuracy column, which is the slide’s real argument. From 0.10 upwards it moves by three percentage points while recall falls from 0.80 to 0.18. And its maximum is at 0.5 - the threshold that misses 33 of the 76 failures.</a:t>
+              <a:t>Now the accuracy column, which is the slide’s real argument. From 0.10 upwards it moves by three and a half percentage points, 0.942 to 0.977, while recall falls from 0.803 to 0.184. And its maximum is at 0.5 - the threshold that misses 33 of the 76 failures.</a:t>
             </a:r>
           </a:p>
           <a:p>

--- a/Lessons/04_classification_and_metrics/Slides/classification_and_metrics_slides.pptx
+++ b/Lessons/04_classification_and_metrics/Slides/classification_and_metrics_slides.pptx
@@ -13286,7 +13286,7 @@
             <a:pPr lvl="0"/>
             <a:r>
               <a:rPr b="1"/>
-              <a:t>AUC = the probability that a random failing drive scores above a random healthy one</a:t>
+              <a:t>Area under the curve (AUC) = the probability that a random failing drive scores above a random healthy one</a:t>
             </a:r>
           </a:p>
           <a:p>
@@ -13550,7 +13550,7 @@
             <a:pPr lvl="0"/>
             <a:r>
               <a:rPr/>
-              <a:t>FPR divides by </a:t>
+              <a:t>False positive rate (FPR) divides by </a:t>
             </a:r>
             <a:r>
               <a:rPr b="1"/>

--- a/Lessons/04_classification_and_metrics/Slides/classification_and_metrics_slides.pptx
+++ b/Lessons/04_classification_and_metrics/Slides/classification_and_metrics_slides.pptx
@@ -586,7 +586,7 @@
             </a:pPr>
             <a:r>
               <a:rPr/>
-              <a:t>The one to watch for: choosing the penalty by looking at the test error. It is the natural thing to do because the test error is the number they were told to care about, and it is exactly the sin lesson 1 named. Today’s lesson ends up in the same place from a different direction, when we choose a decision threshold. Lesson 5 gives them the machinery to do both honestly.</a:t>
+              <a:t>The one to watch for: choosing the penalty by looking at the test error. It is the natural thing to do because the test error is the number they were told to care about, and it is exactly the mistake lesson 1 named. Today’s lesson ends up in the same place from a different direction, when we choose a decision threshold. Lesson 5 gives them the machinery to do both honestly.</a:t>
             </a:r>
           </a:p>
         </p:txBody>
@@ -668,7 +668,7 @@
             </a:pPr>
             <a:r>
               <a:rPr/>
-              <a:t>Notebook 1, last section. This is the payoff of using synthetic data: we are not admiring the estimates, we are marking them.</a:t>
+              <a:t>Notebook 1, last section. This is the payoff of using synthetic data: we do not just look at the estimates, we check them against the truth.</a:t>
             </a:r>
           </a:p>
           <a:p>
@@ -806,6 +806,20 @@
             </a:pPr>
             <a:r>
               <a:rPr/>
+              <a:t>Say first what the intercept is NOT: it is not the base rate. The fleet fails at 3.8%; the intercept describes a drive whose every counter sits at the average, and such a drive almost never fails. The failures come from the small group of drives far above average on one or more counters. Handout section 2.4.</a:t>
+            </a:r>
+          </a:p>
+          <a:p>
+            <a:pPr lvl="0" indent="0" marL="0">
+              <a:buNone/>
+            </a:pPr>
+          </a:p>
+          <a:p>
+            <a:pPr lvl="0" indent="0" marL="0">
+              <a:buNone/>
+            </a:pPr>
+            <a:r>
+              <a:rPr/>
               <a:t>An average drive has a 0.2% chance of failing in thirty days. For the model to reach an even bet - probability one half, log-odds zero - the evidence has to move the log-odds by more than six. Only badly degraded drives manage that.</a:t>
             </a:r>
           </a:p>
@@ -1122,7 +1136,7 @@
             </a:pPr>
             <a:r>
               <a:rPr/>
-              <a:t>This is the loss on ONE example, L, not the cost over the training set. Say the missing half rather than showing it: the cost J is the average of this over the m examples, one over m times the sum. Written out in full the formula reached the slide edge and came out at 26pt, smaller than the bullets on the slide before it.</a:t>
+              <a:t>This is the loss on ONE example, L, not the cost over the training set; p is the predicted probability, the same number the next slide writes as y-hat. Say the other half aloud rather than showing it: the cost J is the average of this over the m examples, one over m times the sum. Written out in full the formula reached the slide edge and came out at 26pt, smaller than the bullets on the slide before it.</a:t>
             </a:r>
           </a:p>
           <a:p>
@@ -1618,7 +1632,7 @@
             </a:pPr>
             <a:r>
               <a:rPr/>
-              <a:t>Run notebooks/01. Twenty minutes. The parts worth stopping on:</a:t>
+              <a:t>Fifteen lines of NumPy, then one line of scikit-learn, and the same answer. Run notebook 01. Twenty minutes. The parts worth stopping on:</a:t>
             </a:r>
           </a:p>
           <a:p>
@@ -1880,7 +1894,7 @@
             </a:pPr>
             <a:r>
               <a:rPr/>
-              <a:t>Agenda. Flag the proportion out loud, because it is the point of the lesson: about a third of today is the model, two thirds is how to tell whether it works.</a:t>
+              <a:t>The agenda. Point out the proportion, because it is the point of the lesson: about a third of today is the model, two thirds is how to tell whether it works.</a:t>
             </a:r>
           </a:p>
           <a:p>
@@ -2564,7 +2578,7 @@
             </a:pPr>
             <a:r>
               <a:rPr/>
-              <a:t>This picture is the antidote to the most reliable confusion in the lesson. Both metrics divide the true positives. The difference is entirely in what goes underneath, and the shading shows it.</a:t>
+              <a:t>This picture prevents the most common confusion of the lesson. Both metrics divide the true positives. The difference is entirely in what goes underneath, and the shading shows it.</a:t>
             </a:r>
           </a:p>
           <a:p>
@@ -3074,7 +3088,7 @@
             </a:pPr>
             <a:r>
               <a:rPr/>
-              <a:t>Run notebooks/02. Twenty minutes.</a:t>
+              <a:t>The confusion matrix by hand, then from scikit-learn, then the threshold sweep. Run notebook 02. Twenty minutes.</a:t>
             </a:r>
           </a:p>
           <a:p>
@@ -3102,7 +3116,7 @@
             </a:pPr>
             <a:r>
               <a:rPr/>
-              <a:t>The cell to linger on is the threshold sweep table. Do not explain it first - let them read the columns and say what they see. Somebody will notice that accuracy barely moves. That is the moment to make the next slide.</a:t>
+              <a:t>Spend time on the threshold sweep table. Do not explain it first - let them read the columns and say what they see. Somebody will notice that accuracy barely moves. That is the moment to make the next slide.</a:t>
             </a:r>
           </a:p>
         </p:txBody>
@@ -4988,7 +5002,7 @@
             </a:pPr>
             <a:r>
               <a:rPr/>
-              <a:t>That matters because class weighting is usually presented as a REMEDY for imbalance. It is not a remedy; it is a reparameterisation of the same decision. The remedy, where one exists, is more positive examples.</a:t>
+              <a:t>That matters because class weighting is usually presented as a REMEDY for imbalance. It is not a remedy; it is another way of setting the same decision. The remedy, where one exists, is more positive examples.</a:t>
             </a:r>
           </a:p>
           <a:p>
@@ -5016,7 +5030,7 @@
             </a:pPr>
             <a:r>
               <a:rPr/>
-              <a:t>Same caution for resampling and SMOTE - and it must happen inside the cross-validation fold, for the reasons lesson 2 gave about imputation.</a:t>
+              <a:t>Same caution for resampling and for SMOTE (synthetic minority oversampling technique, which builds artificial minority examples) - and it must happen inside the cross-validation fold, for the reasons lesson 2 gave about imputation.</a:t>
             </a:r>
           </a:p>
         </p:txBody>
@@ -5098,21 +5112,21 @@
             </a:pPr>
             <a:r>
               <a:rPr/>
-              <a:t>Run notebooks/03. Twenty minutes if the clock allows, otherwise show the pairs experiment and the imbalance comparison and leave the rest for them.</a:t>
-            </a:r>
-          </a:p>
-          <a:p>
-            <a:pPr lvl="0" indent="0" marL="0">
-              <a:buNone/>
-            </a:pPr>
-          </a:p>
-          <a:p>
-            <a:pPr lvl="0" indent="0" marL="0">
-              <a:buNone/>
-            </a:pPr>
-            <a:r>
-              <a:rPr/>
-              <a:t>The pairs experiment is the cell worth protecting if time is short: it turns a definition they would otherwise memorise into something they watched happen.</a:t>
+              <a:t>The ROC curve by hand, the 200,000-pair experiment, the cost curve, then the multiclass matrix. Run notebook 03. Twenty minutes if the clock allows, otherwise show the pairs experiment and the imbalance comparison and leave the rest for them.</a:t>
+            </a:r>
+          </a:p>
+          <a:p>
+            <a:pPr lvl="0" indent="0" marL="0">
+              <a:buNone/>
+            </a:pPr>
+          </a:p>
+          <a:p>
+            <a:pPr lvl="0" indent="0" marL="0">
+              <a:buNone/>
+            </a:pPr>
+            <a:r>
+              <a:rPr/>
+              <a:t>If time is short, keep the pairs experiment: it turns a definition they would otherwise memorise into something they watched happen.</a:t>
             </a:r>
           </a:p>
         </p:txBody>
@@ -9377,7 +9391,7 @@
             <a:pPr lvl="0"/>
             <a:r>
               <a:rPr/>
-              <a:t>The model is linear in the log-odds, so </a:t>
+              <a:t>The model is linear in the log-odds, log(p ÷ (1 − p)), so </a:t>
             </a:r>
             <a:r>
               <a:rPr>
@@ -9393,6 +9407,10 @@
               <a:rPr b="1"/>
               <a:t>odds</a:t>
             </a:r>
+            <a:r>
+              <a:rPr/>
+              <a:t>, p ÷ (1 − p)</a:t>
+            </a:r>
           </a:p>
           <a:p>
             <a:pPr lvl="0"/>
@@ -9414,6 +9432,19 @@
             <a:r>
               <a:rPr/>
               <a:t> of failing</a:t>
+            </a:r>
+          </a:p>
+          <a:p>
+            <a:pPr lvl="0"/>
+            <a:r>
+              <a:rPr/>
+              <a:t>In code: </a:t>
+            </a:r>
+            <a:r>
+              <a:rPr>
+                <a:latin typeface="Courier"/>
+              </a:rPr>
+              <a:t>make_pipeline(StandardScaler(), LogisticRegression())</a:t>
             </a:r>
           </a:p>
         </p:txBody>
@@ -9985,7 +10016,7 @@
             </a:pPr>
             <a:r>
               <a:rPr/>
-              <a:t>The intercept is the base rate</a:t>
+              <a:t>The intercept is the average drive’s chance</a:t>
             </a:r>
           </a:p>
         </p:txBody>
@@ -10024,7 +10055,14 @@
             <a:pPr lvl="0"/>
             <a:r>
               <a:rPr/>
-              <a:t>σ(-6.09) = 0.0023: a 0.2% chance for an average drive</a:t>
+              <a:t>σ(-6.09) = 0.0023: a 0.2% chance for a drive average on every counter</a:t>
+            </a:r>
+          </a:p>
+          <a:p>
+            <a:pPr lvl="0"/>
+            <a:r>
+              <a:rPr/>
+              <a:t>The fleet fails at 3.8%: the failures come from the few drives far above average</a:t>
             </a:r>
           </a:p>
         </p:txBody>
@@ -10191,7 +10229,7 @@
             <a:pPr lvl="0"/>
             <a:r>
               <a:rPr/>
-              <a:t>The model has a knob; each setting assigns a probability to what happened</a:t>
+              <a:t>The parameters w and b are a knob: each setting gives a probability to what actually happened</a:t>
             </a:r>
           </a:p>
           <a:p>
@@ -10596,41 +10634,282 @@
           </a:p>
         </p:txBody>
       </p:sp>
-      <p:sp>
-        <p:nvSpPr>
-          <p:cNvPr id="3" name="Content Placeholder 2"/>
-          <p:cNvSpPr>
-            <a:spLocks noGrp="1"/>
-          </p:cNvSpPr>
+      <p:graphicFrame>
+        <p:nvGraphicFramePr>
+          <p:cNvPr id="6" name="Content Placeholder 5"/>
+          <p:cNvGraphicFramePr>
+            <a:graphicFrameLocks noGrp="1"/>
+          </p:cNvGraphicFramePr>
           <p:nvPr>
             <p:ph idx="1"/>
           </p:nvPr>
-        </p:nvSpPr>
-        <p:spPr>
-          <a:xfrm>
-            <a:off x="457200" y="1200151"/>
-            <a:ext cx="8229600" cy="3394472"/>
-          </a:xfrm>
-        </p:spPr>
-        <p:txBody>
-          <a:bodyPr/>
-          <a:lstStyle/>
-          <a:p>
-            <a:pPr lvl="0"/>
-            <a:r>
-              <a:rPr/>
-              <a:t>Fifteen lines of NumPy, then one line of scikit-learn</a:t>
-            </a:r>
-          </a:p>
-          <a:p>
-            <a:pPr lvl="0"/>
-            <a:r>
-              <a:rPr/>
-              <a:t>Same answer</a:t>
-            </a:r>
-          </a:p>
-        </p:txBody>
-      </p:sp>
+        </p:nvGraphicFramePr>
+        <p:xfrm>
+          <a:off x="457200" y="1166099"/>
+          <a:ext cx="8229600" cy="3390900"/>
+        </p:xfrm>
+        <a:graphic>
+          <a:graphicData uri="http://schemas.openxmlformats.org/drawingml/2006/table">
+            <a:tbl>
+              <a:tblPr firstRow="1" bandRow="1">
+                <a:tableStyleId>{5C22544A-7EE6-4342-B048-85BDC9FD1C3A}</a:tableStyleId>
+              </a:tblPr>
+              <a:tblGrid>
+                <a:gridCol w="4114800"/>
+                <a:gridCol w="4114800"/>
+              </a:tblGrid>
+              <a:tr h="0">
+                <a:tc>
+                  <a:txBody>
+                    <a:bodyPr/>
+                    <a:lstStyle/>
+                    <a:p>
+                      <a:pPr lvl="0" indent="0" marL="0">
+                        <a:buNone/>
+                      </a:pPr>
+                      <a:r>
+                        <a:rPr/>
+                        <a:t>section, and its slides</a:t>
+                      </a:r>
+                    </a:p>
+                  </a:txBody>
+                  <a:tcPr/>
+                </a:tc>
+                <a:tc>
+                  <a:txBody>
+                    <a:bodyPr/>
+                    <a:lstStyle/>
+                    <a:p>
+                      <a:pPr lvl="0" indent="0" marL="0">
+                        <a:buNone/>
+                      </a:pPr>
+                      <a:r>
+                        <a:rPr/>
+                        <a:t>you call (→ the number to come back with)</a:t>
+                      </a:r>
+                    </a:p>
+                  </a:txBody>
+                  <a:tcPr/>
+                </a:tc>
+              </a:tr>
+              <a:tr h="0">
+                <a:tc>
+                  <a:txBody>
+                    <a:bodyPr/>
+                    <a:lstStyle/>
+                    <a:p>
+                      <a:pPr lvl="0" indent="0" marL="0">
+                        <a:buNone/>
+                      </a:pPr>
+                      <a:r>
+                        <a:rPr/>
+                        <a:t>a line on a 0/1 label, 7</a:t>
+                      </a:r>
+                    </a:p>
+                  </a:txBody>
+                </a:tc>
+                <a:tc>
+                  <a:txBody>
+                    <a:bodyPr/>
+                    <a:lstStyle/>
+                    <a:p>
+                      <a:pPr lvl="0" indent="0" marL="0">
+                        <a:buNone/>
+                      </a:pPr>
+                      <a:r>
+                        <a:rPr>
+                          <a:latin typeface="Courier"/>
+                        </a:rPr>
+                        <a:t>LinearRegression</a:t>
+                      </a:r>
+                      <a:r>
+                        <a:rPr/>
+                        <a:t> → 3,606 negative probabilities</a:t>
+                      </a:r>
+                    </a:p>
+                  </a:txBody>
+                </a:tc>
+              </a:tr>
+              <a:tr h="0">
+                <a:tc>
+                  <a:txBody>
+                    <a:bodyPr/>
+                    <a:lstStyle/>
+                    <a:p>
+                      <a:pPr lvl="0" indent="0" marL="0">
+                        <a:buNone/>
+                      </a:pPr>
+                      <a:r>
+                        <a:rPr/>
+                        <a:t>odds, and why not squared error, 8-18</a:t>
+                      </a:r>
+                    </a:p>
+                  </a:txBody>
+                </a:tc>
+                <a:tc>
+                  <a:txBody>
+                    <a:bodyPr/>
+                    <a:lstStyle/>
+                    <a:p>
+                      <a:pPr lvl="0" indent="0" marL="0">
+                        <a:buNone/>
+                      </a:pPr>
+                      <a:r>
+                        <a:rPr/>
+                        <a:t>NumPy only: the sigmoid, the two losses, their gradients</a:t>
+                      </a:r>
+                    </a:p>
+                  </a:txBody>
+                </a:tc>
+              </a:tr>
+              <a:tr h="0">
+                <a:tc>
+                  <a:txBody>
+                    <a:bodyPr/>
+                    <a:lstStyle/>
+                    <a:p>
+                      <a:pPr lvl="0" indent="0" marL="0">
+                        <a:buNone/>
+                      </a:pPr>
+                      <a:r>
+                        <a:rPr/>
+                        <a:t>gradient descent, 16</a:t>
+                      </a:r>
+                    </a:p>
+                  </a:txBody>
+                </a:tc>
+                <a:tc>
+                  <a:txBody>
+                    <a:bodyPr/>
+                    <a:lstStyle/>
+                    <a:p>
+                      <a:pPr lvl="0" indent="0" marL="0">
+                        <a:buNone/>
+                      </a:pPr>
+                      <a:r>
+                        <a:rPr>
+                          <a:latin typeface="Courier"/>
+                        </a:rPr>
+                        <a:t>train_test_split</a:t>
+                      </a:r>
+                      <a:r>
+                        <a:rPr/>
+                        <a:t>, </a:t>
+                      </a:r>
+                      <a:r>
+                        <a:rPr>
+                          <a:latin typeface="Courier"/>
+                        </a:rPr>
+                        <a:t>StandardScaler</a:t>
+                      </a:r>
+                      <a:r>
+                        <a:rPr/>
+                        <a:t>, fifteen lines of NumPy → log loss 0.6931 to 0.0692</a:t>
+                      </a:r>
+                    </a:p>
+                  </a:txBody>
+                </a:tc>
+              </a:tr>
+              <a:tr h="0">
+                <a:tc>
+                  <a:txBody>
+                    <a:bodyPr/>
+                    <a:lstStyle/>
+                    <a:p>
+                      <a:pPr lvl="0" indent="0" marL="0">
+                        <a:buNone/>
+                      </a:pPr>
+                      <a:r>
+                        <a:rPr/>
+                        <a:t>the decision boundary, 20</a:t>
+                      </a:r>
+                    </a:p>
+                  </a:txBody>
+                </a:tc>
+                <a:tc>
+                  <a:txBody>
+                    <a:bodyPr/>
+                    <a:lstStyle/>
+                    <a:p>
+                      <a:pPr lvl="0" indent="0" marL="0">
+                        <a:buNone/>
+                      </a:pPr>
+                      <a:r>
+                        <a:rPr>
+                          <a:latin typeface="Courier"/>
+                        </a:rPr>
+                        <a:t>make_pipeline(StandardScaler(), LogisticRegression())</a:t>
+                      </a:r>
+                      <a:r>
+                        <a:rPr/>
+                        <a:t> on two features</a:t>
+                      </a:r>
+                    </a:p>
+                  </a:txBody>
+                </a:tc>
+              </a:tr>
+              <a:tr h="0">
+                <a:tc>
+                  <a:txBody>
+                    <a:bodyPr/>
+                    <a:lstStyle/>
+                    <a:p>
+                      <a:pPr lvl="0" indent="0" marL="0">
+                        <a:buNone/>
+                      </a:pPr>
+                      <a:r>
+                        <a:rPr/>
+                        <a:t>the truth, recovered, 11-12</a:t>
+                      </a:r>
+                    </a:p>
+                  </a:txBody>
+                </a:tc>
+                <a:tc>
+                  <a:txBody>
+                    <a:bodyPr/>
+                    <a:lstStyle/>
+                    <a:p>
+                      <a:pPr lvl="0" indent="0" marL="0">
+                        <a:buNone/>
+                      </a:pPr>
+                      <a:r>
+                        <a:rPr>
+                          <a:latin typeface="Courier"/>
+                        </a:rPr>
+                        <a:t>LogisticRegression</a:t>
+                      </a:r>
+                      <a:r>
+                        <a:rPr/>
+                        <a:t>, </a:t>
+                      </a:r>
+                      <a:r>
+                        <a:rPr>
+                          <a:latin typeface="Courier"/>
+                        </a:rPr>
+                        <a:t>.coef_</a:t>
+                      </a:r>
+                      <a:r>
+                        <a:rPr/>
+                        <a:t>, </a:t>
+                      </a:r>
+                      <a:r>
+                        <a:rPr>
+                          <a:latin typeface="Courier"/>
+                        </a:rPr>
+                        <a:t>.intercept_</a:t>
+                      </a:r>
+                      <a:r>
+                        <a:rPr/>
+                        <a:t> → seek_error_rate 0.02, intercept −6.09</a:t>
+                      </a:r>
+                    </a:p>
+                  </a:txBody>
+                </a:tc>
+              </a:tr>
+            </a:tbl>
+          </a:graphicData>
+        </a:graphic>
+      </p:graphicFrame>
     </p:spTree>
   </p:cSld>
 </p:sld>
@@ -11549,7 +11828,14 @@
             <a:pPr lvl="0"/>
             <a:r>
               <a:rPr/>
-              <a:t>Precision </a:t>
+              <a:t>True and false positives and negatives: TP, FP, FN, TN</a:t>
+            </a:r>
+          </a:p>
+          <a:p>
+            <a:pPr lvl="0"/>
+            <a:r>
+              <a:rPr/>
+              <a:t>Precision = TP ÷ (TP + FP) = 43 ÷ 56 = </a:t>
             </a:r>
             <a:r>
               <a:rPr b="1"/>
@@ -11557,14 +11843,14 @@
             </a:r>
             <a:r>
               <a:rPr/>
-              <a:t>: of 56 drives flagged, 43 really failed</a:t>
+              <a:t>: of the drives flagged</a:t>
             </a:r>
           </a:p>
           <a:p>
             <a:pPr lvl="0"/>
             <a:r>
               <a:rPr/>
-              <a:t>Recall </a:t>
+              <a:t>Recall = TP ÷ (TP + FN) = 43 ÷ 76 = </a:t>
             </a:r>
             <a:r>
               <a:rPr b="1"/>
@@ -11572,14 +11858,37 @@
             </a:r>
             <a:r>
               <a:rPr/>
-              <a:t>: of 76 drives that failed, we found 43</a:t>
+              <a:t>: of the drives that failed</a:t>
             </a:r>
           </a:p>
           <a:p>
             <a:pPr lvl="0"/>
             <a:r>
               <a:rPr/>
-              <a:t>Specificity 0.993: of 1,924 healthy drives, we left 1,911 alone</a:t>
+              <a:t>Specificity = TN ÷ (TN + FP) = 1,911 ÷ 1,924 = 0.993</a:t>
+            </a:r>
+          </a:p>
+          <a:p>
+            <a:pPr lvl="0"/>
+            <a:r>
+              <a:rPr/>
+              <a:t>In code: </a:t>
+            </a:r>
+            <a:r>
+              <a:rPr>
+                <a:latin typeface="Courier"/>
+              </a:rPr>
+              <a:t>precision_score</a:t>
+            </a:r>
+            <a:r>
+              <a:rPr/>
+              <a:t>, </a:t>
+            </a:r>
+            <a:r>
+              <a:rPr>
+                <a:latin typeface="Courier"/>
+              </a:rPr>
+              <a:t>recall_score</a:t>
             </a:r>
           </a:p>
         </p:txBody>
@@ -11722,7 +12031,7 @@
                       </a:pPr>
                       <a:r>
                         <a:rPr/>
-                        <a:t>Arithmetic</a:t>
+                        <a:t>Arithmetic mean</a:t>
                       </a:r>
                     </a:p>
                   </a:txBody>
@@ -11738,7 +12047,7 @@
                       </a:pPr>
                       <a:r>
                         <a:rPr/>
-                        <a:t>Harmonic</a:t>
+                        <a:t>Harmonic, F1 = 2PR ÷ (P + R)</a:t>
                       </a:r>
                     </a:p>
                   </a:txBody>
@@ -11939,6 +12248,23 @@
               <a:t> (both classes get an equal say)</a:t>
             </a:r>
           </a:p>
+          <a:p>
+            <a:pPr lvl="0"/>
+            <a:r>
+              <a:rPr/>
+              <a:t>In code: </a:t>
+            </a:r>
+            <a:r>
+              <a:rPr>
+                <a:latin typeface="Courier"/>
+              </a:rPr>
+              <a:t>classification_report(y_test, y_pred)</a:t>
+            </a:r>
+            <a:r>
+              <a:rPr/>
+              <a:t> prints both rows</a:t>
+            </a:r>
+          </a:p>
         </p:txBody>
       </p:sp>
     </p:spTree>
@@ -12101,41 +12427,308 @@
           </a:p>
         </p:txBody>
       </p:sp>
-      <p:sp>
-        <p:nvSpPr>
-          <p:cNvPr id="3" name="Content Placeholder 2"/>
-          <p:cNvSpPr>
-            <a:spLocks noGrp="1"/>
-          </p:cNvSpPr>
+      <p:graphicFrame>
+        <p:nvGraphicFramePr>
+          <p:cNvPr id="6" name="Content Placeholder 5"/>
+          <p:cNvGraphicFramePr>
+            <a:graphicFrameLocks noGrp="1"/>
+          </p:cNvGraphicFramePr>
           <p:nvPr>
             <p:ph idx="1"/>
           </p:nvPr>
-        </p:nvSpPr>
-        <p:spPr>
-          <a:xfrm>
-            <a:off x="457200" y="1200151"/>
-            <a:ext cx="8229600" cy="3394472"/>
-          </a:xfrm>
-        </p:spPr>
-        <p:txBody>
-          <a:bodyPr/>
-          <a:lstStyle/>
-          <a:p>
-            <a:pPr lvl="0"/>
-            <a:r>
-              <a:rPr/>
-              <a:t>The confusion matrix by hand, then from scikit-learn</a:t>
-            </a:r>
-          </a:p>
-          <a:p>
-            <a:pPr lvl="0"/>
-            <a:r>
-              <a:rPr/>
-              <a:t>Then the threshold sweep</a:t>
-            </a:r>
-          </a:p>
-        </p:txBody>
-      </p:sp>
+        </p:nvGraphicFramePr>
+        <p:xfrm>
+          <a:off x="457200" y="1166099"/>
+          <a:ext cx="8229600" cy="3390900"/>
+        </p:xfrm>
+        <a:graphic>
+          <a:graphicData uri="http://schemas.openxmlformats.org/drawingml/2006/table">
+            <a:tbl>
+              <a:tblPr firstRow="1" bandRow="1">
+                <a:tableStyleId>{5C22544A-7EE6-4342-B048-85BDC9FD1C3A}</a:tableStyleId>
+              </a:tblPr>
+              <a:tblGrid>
+                <a:gridCol w="4114800"/>
+                <a:gridCol w="4114800"/>
+              </a:tblGrid>
+              <a:tr h="0">
+                <a:tc>
+                  <a:txBody>
+                    <a:bodyPr/>
+                    <a:lstStyle/>
+                    <a:p>
+                      <a:pPr lvl="0" indent="0" marL="0">
+                        <a:buNone/>
+                      </a:pPr>
+                      <a:r>
+                        <a:rPr/>
+                        <a:t>section, and its slides</a:t>
+                      </a:r>
+                    </a:p>
+                  </a:txBody>
+                  <a:tcPr/>
+                </a:tc>
+                <a:tc>
+                  <a:txBody>
+                    <a:bodyPr/>
+                    <a:lstStyle/>
+                    <a:p>
+                      <a:pPr lvl="0" indent="0" marL="0">
+                        <a:buNone/>
+                      </a:pPr>
+                      <a:r>
+                        <a:rPr/>
+                        <a:t>you call (→ the number to come back with)</a:t>
+                      </a:r>
+                    </a:p>
+                  </a:txBody>
+                  <a:tcPr/>
+                </a:tc>
+              </a:tr>
+              <a:tr h="0">
+                <a:tc>
+                  <a:txBody>
+                    <a:bodyPr/>
+                    <a:lstStyle/>
+                    <a:p>
+                      <a:pPr lvl="0" indent="0" marL="0">
+                        <a:buNone/>
+                      </a:pPr>
+                      <a:r>
+                        <a:rPr/>
+                        <a:t>the number that should worry you, 22</a:t>
+                      </a:r>
+                    </a:p>
+                  </a:txBody>
+                </a:tc>
+                <a:tc>
+                  <a:txBody>
+                    <a:bodyPr/>
+                    <a:lstStyle/>
+                    <a:p>
+                      <a:pPr lvl="0" indent="0" marL="0">
+                        <a:buNone/>
+                      </a:pPr>
+                      <a:r>
+                        <a:rPr>
+                          <a:latin typeface="Courier"/>
+                        </a:rPr>
+                        <a:t>accuracy_score</a:t>
+                      </a:r>
+                      <a:r>
+                        <a:rPr/>
+                        <a:t> → 96.20% for “always healthy”</a:t>
+                      </a:r>
+                    </a:p>
+                  </a:txBody>
+                </a:tc>
+              </a:tr>
+              <a:tr h="0">
+                <a:tc>
+                  <a:txBody>
+                    <a:bodyPr/>
+                    <a:lstStyle/>
+                    <a:p>
+                      <a:pPr lvl="0" indent="0" marL="0">
+                        <a:buNone/>
+                      </a:pPr>
+                      <a:r>
+                        <a:rPr/>
+                        <a:t>the confusion matrix, 24</a:t>
+                      </a:r>
+                    </a:p>
+                  </a:txBody>
+                </a:tc>
+                <a:tc>
+                  <a:txBody>
+                    <a:bodyPr/>
+                    <a:lstStyle/>
+                    <a:p>
+                      <a:pPr lvl="0" indent="0" marL="0">
+                        <a:buNone/>
+                      </a:pPr>
+                      <a:r>
+                        <a:rPr/>
+                        <a:t>counts by hand, then </a:t>
+                      </a:r>
+                      <a:r>
+                        <a:rPr>
+                          <a:latin typeface="Courier"/>
+                        </a:rPr>
+                        <a:t>confusion_matrix</a:t>
+                      </a:r>
+                      <a:r>
+                        <a:rPr/>
+                        <a:t>, </a:t>
+                      </a:r>
+                      <a:r>
+                        <a:rPr>
+                          <a:latin typeface="Courier"/>
+                        </a:rPr>
+                        <a:t>ConfusionMatrixDisplay</a:t>
+                      </a:r>
+                      <a:r>
+                        <a:rPr/>
+                        <a:t> → TP 43</a:t>
+                      </a:r>
+                    </a:p>
+                  </a:txBody>
+                </a:tc>
+              </a:tr>
+              <a:tr h="0">
+                <a:tc>
+                  <a:txBody>
+                    <a:bodyPr/>
+                    <a:lstStyle/>
+                    <a:p>
+                      <a:pPr lvl="0" indent="0" marL="0">
+                        <a:buNone/>
+                      </a:pPr>
+                      <a:r>
+                        <a:rPr/>
+                        <a:t>precision and recall, 26-29</a:t>
+                      </a:r>
+                    </a:p>
+                  </a:txBody>
+                </a:tc>
+                <a:tc>
+                  <a:txBody>
+                    <a:bodyPr/>
+                    <a:lstStyle/>
+                    <a:p>
+                      <a:pPr lvl="0" indent="0" marL="0">
+                        <a:buNone/>
+                      </a:pPr>
+                      <a:r>
+                        <a:rPr>
+                          <a:latin typeface="Courier"/>
+                        </a:rPr>
+                        <a:t>precision_score</a:t>
+                      </a:r>
+                      <a:r>
+                        <a:rPr/>
+                        <a:t>, </a:t>
+                      </a:r>
+                      <a:r>
+                        <a:rPr>
+                          <a:latin typeface="Courier"/>
+                        </a:rPr>
+                        <a:t>recall_score</a:t>
+                      </a:r>
+                      <a:r>
+                        <a:rPr/>
+                        <a:t>, </a:t>
+                      </a:r>
+                      <a:r>
+                        <a:rPr>
+                          <a:latin typeface="Courier"/>
+                        </a:rPr>
+                        <a:t>f1_score</a:t>
+                      </a:r>
+                      <a:r>
+                        <a:rPr/>
+                        <a:t>, </a:t>
+                      </a:r>
+                      <a:r>
+                        <a:rPr>
+                          <a:latin typeface="Courier"/>
+                        </a:rPr>
+                        <a:t>classification_report</a:t>
+                      </a:r>
+                    </a:p>
+                  </a:txBody>
+                </a:tc>
+              </a:tr>
+              <a:tr h="0">
+                <a:tc>
+                  <a:txBody>
+                    <a:bodyPr/>
+                    <a:lstStyle/>
+                    <a:p>
+                      <a:pPr lvl="0" indent="0" marL="0">
+                        <a:buNone/>
+                      </a:pPr>
+                      <a:r>
+                        <a:rPr/>
+                        <a:t>the threshold sweep, 31-32</a:t>
+                      </a:r>
+                    </a:p>
+                  </a:txBody>
+                </a:tc>
+                <a:tc>
+                  <a:txBody>
+                    <a:bodyPr/>
+                    <a:lstStyle/>
+                    <a:p>
+                      <a:pPr lvl="0" indent="0" marL="0">
+                        <a:buNone/>
+                      </a:pPr>
+                      <a:r>
+                        <a:rPr>
+                          <a:latin typeface="Courier"/>
+                        </a:rPr>
+                        <a:t>predict_proba</a:t>
+                      </a:r>
+                      <a:r>
+                        <a:rPr/>
+                        <a:t>, then the metrics at each threshold</a:t>
+                      </a:r>
+                    </a:p>
+                  </a:txBody>
+                </a:tc>
+              </a:tr>
+              <a:tr h="0">
+                <a:tc>
+                  <a:txBody>
+                    <a:bodyPr/>
+                    <a:lstStyle/>
+                    <a:p>
+                      <a:pPr lvl="0" indent="0" marL="0">
+                        <a:buNone/>
+                      </a:pPr>
+                      <a:r>
+                        <a:rPr/>
+                        <a:t>the precision-recall curve, 33</a:t>
+                      </a:r>
+                    </a:p>
+                  </a:txBody>
+                </a:tc>
+                <a:tc>
+                  <a:txBody>
+                    <a:bodyPr/>
+                    <a:lstStyle/>
+                    <a:p>
+                      <a:pPr lvl="0" indent="0" marL="0">
+                        <a:buNone/>
+                      </a:pPr>
+                      <a:r>
+                        <a:rPr>
+                          <a:latin typeface="Courier"/>
+                        </a:rPr>
+                        <a:t>precision_recall_curve</a:t>
+                      </a:r>
+                      <a:r>
+                        <a:rPr/>
+                        <a:t>, </a:t>
+                      </a:r>
+                      <a:r>
+                        <a:rPr>
+                          <a:latin typeface="Courier"/>
+                        </a:rPr>
+                        <a:t>average_precision_score</a:t>
+                      </a:r>
+                      <a:r>
+                        <a:rPr/>
+                        <a:t> → 0.717 against 0.038</a:t>
+                      </a:r>
+                    </a:p>
+                  </a:txBody>
+                </a:tc>
+              </a:tr>
+            </a:tbl>
+          </a:graphicData>
+        </a:graphic>
+      </p:graphicFrame>
     </p:spTree>
   </p:cSld>
 </p:sld>
@@ -13296,6 +13889,19 @@
               <a:t>Ours: 0.949</a:t>
             </a:r>
           </a:p>
+          <a:p>
+            <a:pPr lvl="0"/>
+            <a:r>
+              <a:rPr/>
+              <a:t>In code: </a:t>
+            </a:r>
+            <a:r>
+              <a:rPr>
+                <a:latin typeface="Courier"/>
+              </a:rPr>
+              <a:t>roc_auc_score(y_test, scores)</a:t>
+            </a:r>
+          </a:p>
         </p:txBody>
       </p:sp>
     </p:spTree>
@@ -13762,6 +14368,31 @@
               <a:t>Never instead of it, and never AUC alone</a:t>
             </a:r>
           </a:p>
+          <a:p>
+            <a:pPr lvl="0"/>
+            <a:r>
+              <a:rPr/>
+              <a:t>Its area is the </a:t>
+            </a:r>
+            <a:r>
+              <a:rPr b="1"/>
+              <a:t>average precision</a:t>
+            </a:r>
+            <a:r>
+              <a:rPr/>
+              <a:t>, </a:t>
+            </a:r>
+            <a:r>
+              <a:rPr>
+                <a:latin typeface="Courier"/>
+              </a:rPr>
+              <a:t>average_precision_score</a:t>
+            </a:r>
+            <a:r>
+              <a:rPr/>
+              <a:t>: 0.717 here, against a floor of 0.038</a:t>
+            </a:r>
+          </a:p>
         </p:txBody>
       </p:sp>
     </p:spTree>
@@ -14345,7 +14976,7 @@
                       </a:pPr>
                       <a:r>
                         <a:rPr/>
-                        <a:t>Balanced weights, 0.50</a:t>
+                        <a:t>Balanced class weights, 0.50</a:t>
                       </a:r>
                     </a:p>
                   </a:txBody>
@@ -14467,41 +15098,310 @@
           </a:p>
         </p:txBody>
       </p:sp>
-      <p:sp>
-        <p:nvSpPr>
-          <p:cNvPr id="3" name="Content Placeholder 2"/>
-          <p:cNvSpPr>
-            <a:spLocks noGrp="1"/>
-          </p:cNvSpPr>
+      <p:graphicFrame>
+        <p:nvGraphicFramePr>
+          <p:cNvPr id="6" name="Content Placeholder 5"/>
+          <p:cNvGraphicFramePr>
+            <a:graphicFrameLocks noGrp="1"/>
+          </p:cNvGraphicFramePr>
           <p:nvPr>
             <p:ph idx="1"/>
           </p:nvPr>
-        </p:nvSpPr>
-        <p:spPr>
-          <a:xfrm>
-            <a:off x="457200" y="1200151"/>
-            <a:ext cx="8229600" cy="3394472"/>
-          </a:xfrm>
-        </p:spPr>
-        <p:txBody>
-          <a:bodyPr/>
-          <a:lstStyle/>
-          <a:p>
-            <a:pPr lvl="0"/>
-            <a:r>
-              <a:rPr/>
-              <a:t>ROC by hand, the 200,000-pair experiment, the cost curve</a:t>
-            </a:r>
-          </a:p>
-          <a:p>
-            <a:pPr lvl="0"/>
-            <a:r>
-              <a:rPr/>
-              <a:t>Then the multiclass matrix</a:t>
-            </a:r>
-          </a:p>
-        </p:txBody>
-      </p:sp>
+        </p:nvGraphicFramePr>
+        <p:xfrm>
+          <a:off x="457200" y="1166099"/>
+          <a:ext cx="8229600" cy="3390900"/>
+        </p:xfrm>
+        <a:graphic>
+          <a:graphicData uri="http://schemas.openxmlformats.org/drawingml/2006/table">
+            <a:tbl>
+              <a:tblPr firstRow="1" bandRow="1">
+                <a:tableStyleId>{5C22544A-7EE6-4342-B048-85BDC9FD1C3A}</a:tableStyleId>
+              </a:tblPr>
+              <a:tblGrid>
+                <a:gridCol w="4114800"/>
+                <a:gridCol w="4114800"/>
+              </a:tblGrid>
+              <a:tr h="0">
+                <a:tc>
+                  <a:txBody>
+                    <a:bodyPr/>
+                    <a:lstStyle/>
+                    <a:p>
+                      <a:pPr lvl="0" indent="0" marL="0">
+                        <a:buNone/>
+                      </a:pPr>
+                      <a:r>
+                        <a:rPr/>
+                        <a:t>section, and its slides</a:t>
+                      </a:r>
+                    </a:p>
+                  </a:txBody>
+                  <a:tcPr/>
+                </a:tc>
+                <a:tc>
+                  <a:txBody>
+                    <a:bodyPr/>
+                    <a:lstStyle/>
+                    <a:p>
+                      <a:pPr lvl="0" indent="0" marL="0">
+                        <a:buNone/>
+                      </a:pPr>
+                      <a:r>
+                        <a:rPr/>
+                        <a:t>you call (→ the number to come back with)</a:t>
+                      </a:r>
+                    </a:p>
+                  </a:txBody>
+                  <a:tcPr/>
+                </a:tc>
+              </a:tr>
+              <a:tr h="0">
+                <a:tc>
+                  <a:txBody>
+                    <a:bodyPr/>
+                    <a:lstStyle/>
+                    <a:p>
+                      <a:pPr lvl="0" indent="0" marL="0">
+                        <a:buNone/>
+                      </a:pPr>
+                      <a:r>
+                        <a:rPr/>
+                        <a:t>the ROC curve by hand, 35</a:t>
+                      </a:r>
+                    </a:p>
+                  </a:txBody>
+                </a:tc>
+                <a:tc>
+                  <a:txBody>
+                    <a:bodyPr/>
+                    <a:lstStyle/>
+                    <a:p>
+                      <a:pPr lvl="0" indent="0" marL="0">
+                        <a:buNone/>
+                      </a:pPr>
+                      <a:r>
+                        <a:rPr>
+                          <a:latin typeface="Courier"/>
+                        </a:rPr>
+                        <a:t>roc_curve</a:t>
+                      </a:r>
+                      <a:r>
+                        <a:rPr/>
+                        <a:t>, </a:t>
+                      </a:r>
+                      <a:r>
+                        <a:rPr>
+                          <a:latin typeface="Courier"/>
+                        </a:rPr>
+                        <a:t>roc_auc_score</a:t>
+                      </a:r>
+                      <a:r>
+                        <a:rPr/>
+                        <a:t> → 0.9493</a:t>
+                      </a:r>
+                    </a:p>
+                  </a:txBody>
+                </a:tc>
+              </a:tr>
+              <a:tr h="0">
+                <a:tc>
+                  <a:txBody>
+                    <a:bodyPr/>
+                    <a:lstStyle/>
+                    <a:p>
+                      <a:pPr lvl="0" indent="0" marL="0">
+                        <a:buNone/>
+                      </a:pPr>
+                      <a:r>
+                        <a:rPr/>
+                        <a:t>what AUC means, 36</a:t>
+                      </a:r>
+                    </a:p>
+                  </a:txBody>
+                </a:tc>
+                <a:tc>
+                  <a:txBody>
+                    <a:bodyPr/>
+                    <a:lstStyle/>
+                    <a:p>
+                      <a:pPr lvl="0" indent="0" marL="0">
+                        <a:buNone/>
+                      </a:pPr>
+                      <a:r>
+                        <a:rPr/>
+                        <a:t>200,000 random (failing, healthy) pairs → 0.9488</a:t>
+                      </a:r>
+                    </a:p>
+                  </a:txBody>
+                </a:tc>
+              </a:tr>
+              <a:tr h="0">
+                <a:tc>
+                  <a:txBody>
+                    <a:bodyPr/>
+                    <a:lstStyle/>
+                    <a:p>
+                      <a:pPr lvl="0" indent="0" marL="0">
+                        <a:buNone/>
+                      </a:pPr>
+                      <a:r>
+                        <a:rPr/>
+                        <a:t>the rare-positive trap, 38-39</a:t>
+                      </a:r>
+                    </a:p>
+                  </a:txBody>
+                </a:tc>
+                <a:tc>
+                  <a:txBody>
+                    <a:bodyPr/>
+                    <a:lstStyle/>
+                    <a:p>
+                      <a:pPr lvl="0" indent="0" marL="0">
+                        <a:buNone/>
+                      </a:pPr>
+                      <a:r>
+                        <a:rPr>
+                          <a:latin typeface="Courier"/>
+                        </a:rPr>
+                        <a:t>average_precision_score</a:t>
+                      </a:r>
+                      <a:r>
+                        <a:rPr/>
+                        <a:t> beside </a:t>
+                      </a:r>
+                      <a:r>
+                        <a:rPr>
+                          <a:latin typeface="Courier"/>
+                        </a:rPr>
+                        <a:t>roc_auc_score</a:t>
+                      </a:r>
+                      <a:r>
+                        <a:rPr/>
+                        <a:t> → AP 0.706 to 0.361, AUC unmoved</a:t>
+                      </a:r>
+                    </a:p>
+                  </a:txBody>
+                </a:tc>
+              </a:tr>
+              <a:tr h="0">
+                <a:tc>
+                  <a:txBody>
+                    <a:bodyPr/>
+                    <a:lstStyle/>
+                    <a:p>
+                      <a:pPr lvl="0" indent="0" marL="0">
+                        <a:buNone/>
+                      </a:pPr>
+                      <a:r>
+                        <a:rPr/>
+                        <a:t>the threshold from costs, 41-43</a:t>
+                      </a:r>
+                    </a:p>
+                  </a:txBody>
+                </a:tc>
+                <a:tc>
+                  <a:txBody>
+                    <a:bodyPr/>
+                    <a:lstStyle/>
+                    <a:p>
+                      <a:pPr lvl="0" indent="0" marL="0">
+                        <a:buNone/>
+                      </a:pPr>
+                      <a:r>
+                        <a:rPr>
+                          <a:latin typeface="Courier"/>
+                        </a:rPr>
+                        <a:t>confusion_matrix</a:t>
+                      </a:r>
+                      <a:r>
+                        <a:rPr/>
+                        <a:t> at each threshold → 45,540 EUR at 0.08, against 87,620 at 0.50</a:t>
+                      </a:r>
+                    </a:p>
+                  </a:txBody>
+                </a:tc>
+              </a:tr>
+              <a:tr h="0">
+                <a:tc>
+                  <a:txBody>
+                    <a:bodyPr/>
+                    <a:lstStyle/>
+                    <a:p>
+                      <a:pPr lvl="0" indent="0" marL="0">
+                        <a:buNone/>
+                      </a:pPr>
+                      <a:r>
+                        <a:rPr/>
+                        <a:t>class weights, 44</a:t>
+                      </a:r>
+                    </a:p>
+                  </a:txBody>
+                </a:tc>
+                <a:tc>
+                  <a:txBody>
+                    <a:bodyPr/>
+                    <a:lstStyle/>
+                    <a:p>
+                      <a:pPr lvl="0" indent="0" marL="0">
+                        <a:buNone/>
+                      </a:pPr>
+                      <a:r>
+                        <a:rPr>
+                          <a:latin typeface="Courier"/>
+                        </a:rPr>
+                        <a:t>LogisticRegression</a:t>
+                      </a:r>
+                      <a:r>
+                        <a:rPr/>
+                        <a:t> with balanced class weights → AUC 0.950</a:t>
+                      </a:r>
+                    </a:p>
+                  </a:txBody>
+                </a:tc>
+              </a:tr>
+              <a:tr h="0">
+                <a:tc>
+                  <a:txBody>
+                    <a:bodyPr/>
+                    <a:lstStyle/>
+                    <a:p>
+                      <a:pPr lvl="0" indent="0" marL="0">
+                        <a:buNone/>
+                      </a:pPr>
+                      <a:r>
+                        <a:rPr/>
+                        <a:t>three classes, 46-47</a:t>
+                      </a:r>
+                    </a:p>
+                  </a:txBody>
+                </a:tc>
+                <a:tc>
+                  <a:txBody>
+                    <a:bodyPr/>
+                    <a:lstStyle/>
+                    <a:p>
+                      <a:pPr lvl="0" indent="0" marL="0">
+                        <a:buNone/>
+                      </a:pPr>
+                      <a:r>
+                        <a:rPr>
+                          <a:latin typeface="Courier"/>
+                        </a:rPr>
+                        <a:t>classification_report</a:t>
+                      </a:r>
+                      <a:r>
+                        <a:rPr/>
+                        <a:t> → macro F1 0.707, weighted 0.883</a:t>
+                      </a:r>
+                    </a:p>
+                  </a:txBody>
+                </a:tc>
+              </a:tr>
+            </a:tbl>
+          </a:graphicData>
+        </a:graphic>
+      </p:graphicFrame>
     </p:spTree>
   </p:cSld>
 </p:sld>
@@ -14997,6 +15897,19 @@
             <a:r>
               <a:rPr/>
               <a:t>Label: did it fail within thirty days?</a:t>
+            </a:r>
+          </a:p>
+          <a:p>
+            <a:pPr lvl="0"/>
+            <a:r>
+              <a:rPr>
+                <a:latin typeface="Courier"/>
+              </a:rPr>
+              <a:t>train_test_split(..., stratify=y)</a:t>
+            </a:r>
+            <a:r>
+              <a:rPr/>
+              <a:t>: 6,000 to train, 2,000 to test</a:t>
             </a:r>
           </a:p>
         </p:txBody>

--- a/Lessons/04_classification_and_metrics/Slides/classification_and_metrics_slides.pptx
+++ b/Lessons/04_classification_and_metrics/Slides/classification_and_metrics_slides.pptx
@@ -586,7 +586,7 @@
             </a:pPr>
             <a:r>
               <a:rPr/>
-              <a:t>The one to watch for: choosing the penalty by looking at the test error. It is the natural thing to do because the test error is the number they were told to care about, and it is exactly the mistake lesson 1 named. Today’s lesson ends up in the same place from a different direction, when we choose a decision threshold. Lesson 5 gives them the machinery to do both honestly.</a:t>
+              <a:t>The one to watch for: choosing the penalty by looking at the test error. It is the natural thing to do because the test error is the number they were told to care about, and it is exactly the mistake lesson 1 named. Today’s lesson ends up in the same place from a different direction, on slide 43, when we choose a decision threshold by looking at the test set. Lesson 5 gives them the machinery to do both honestly.</a:t>
             </a:r>
           </a:p>
         </p:txBody>
@@ -696,7 +696,7 @@
             </a:pPr>
             <a:r>
               <a:rPr/>
-              <a:t>Then the last row, which is the one to pause on. seek_error_rate was generated with a coefficient of exactly zero: a real-looking counter with no connection to failure. The model estimates 0.02, an odds multiplier of 1.03. It did not fall for it.</a:t>
+              <a:t>Then the last row, which is the one to pause on. seek_error_rate was generated with a coefficient of exactly zero: a real-looking counter with no connection to failure. The model estimates 0.02, an odds multiplier of 1.03 (the table rounds the coefficient; the multiplier is computed from the unrounded value). It did not fall for it.</a:t>
             </a:r>
           </a:p>
           <a:p>
@@ -1040,7 +1040,7 @@
             </a:pPr>
             <a:r>
               <a:rPr/>
-              <a:t>Two practical notes worth saying aloud. We take the logarithm because it turns the product into a sum, which differentiates one term at a time - and because with 8,000 factors below 1 the product is about 10 to the minus 1000, which a 64-bit float stores as exactly zero. Every real implementation works in log space, and not for elegance.</a:t>
+              <a:t>Two practical notes worth saying aloud. We take the logarithm because it turns the product into a sum, which differentiates one term at a time - and because the product itself is too small to store. Gradient descent starts with every probability at 0.5, and 0.5 multiplied by itself 6,000 times, once per training drive, is about 10 to the minus 1806. The smallest number a 64-bit float holds is about 10 to the minus 308, so the computer stores exactly zero. Every real implementation works in log space, and not for elegance.</a:t>
             </a:r>
           </a:p>
           <a:p>
@@ -1398,7 +1398,7 @@
             </a:pPr>
             <a:r>
               <a:rPr/>
-              <a:t>Right panel is the real argument, so spend the time here. The gradient is what the optimiser actually uses. Squared error’s gradient through the sigmoid carries a factor p times one-minus-p - which is exactly the sigmoid derivative from ten minutes ago - and that factor goes to zero as p goes to zero.</a:t>
+              <a:t>Right panel is the real argument, so spend the time here. The gradient is what the optimiser actually uses. Squared error’s gradient through the sigmoid carries a factor p times one-minus-p - which is exactly the sigmoid derivative from slide 9 - and that factor goes to zero as p goes to zero.</a:t>
             </a:r>
           </a:p>
           <a:p>
@@ -1812,7 +1812,7 @@
             </a:pPr>
             <a:r>
               <a:rPr/>
-              <a:t>Ask: is that a bad model? Take answers. Then say: the probabilities are fine. The threshold is a habit. Telling those two apart is the next two hours.</a:t>
+              <a:t>Ask: is that a bad model? Take answers. Then say: the probabilities are fine. The threshold of 0.5 is a habit. Telling those two apart is the rest of the lesson.</a:t>
             </a:r>
           </a:p>
         </p:txBody>
@@ -2248,7 +2248,7 @@
             </a:pPr>
             <a:r>
               <a:rPr/>
-              <a:t>The general statement, worth putting on the board: with a positive rate pi, the trivial always-negative classifier scores 1 minus pi. Here 96.2%. In some fraud problems, where the rate is one in a thousand, 99.9%.</a:t>
+              <a:t>The general statement, worth putting on the board: if a share pi of the cases are positive (the positive rate), the trivial always-negative classifier scores 1 minus pi. Here 96.2%. In some fraud problems, where the rate is one in a thousand, 99.9%.</a:t>
             </a:r>
           </a:p>
           <a:p>
@@ -2578,7 +2578,7 @@
             </a:pPr>
             <a:r>
               <a:rPr/>
-              <a:t>This picture prevents the most common confusion of the lesson. Both metrics divide the true positives. The difference is entirely in what goes underneath, and the shading shows it.</a:t>
+              <a:t>This picture prevents the most common confusion of the lesson. Both metrics put the true positives - failed drives we flagged - on top of the fraction. The difference is entirely in what goes underneath, and the shading shows it.</a:t>
             </a:r>
           </a:p>
           <a:p>
@@ -2716,7 +2716,7 @@
             </a:pPr>
             <a:r>
               <a:rPr/>
-              <a:t>Specificity is recall for the negative class, and one minus it is the false positive rate, which comes back in the ROC section. Mention it now so the term is not new later.</a:t>
+              <a:t>Specificity is recall for the negative class: of the healthy drives, how many did we leave alone. One minus it is the false positive rate, which comes back in the receiver operating characteristic (ROC) section. Mention it now so the term is not new later.</a:t>
             </a:r>
           </a:p>
           <a:p>
@@ -2868,7 +2868,7 @@
             </a:pPr>
             <a:r>
               <a:rPr/>
-              <a:t>Mention F-beta in one sentence: beta above 1 weights recall more, which is what you want here where misses cost nineteen times more. F2 is the usual choice.</a:t>
+              <a:t>Mention F-beta in one sentence: a version of F1 with a weight beta, where beta above 1 counts recall more than precision. That is what you want here, where a miss costs about nineteen times a false alarm (2,600 against 140 euros). F2 is the usual choice.</a:t>
             </a:r>
           </a:p>
         </p:txBody>
@@ -3556,7 +3556,7 @@
             </a:pPr>
             <a:r>
               <a:rPr/>
-              <a:t>The part to teach is the baseline. A model with random scores has precision equal to the positive rate - 0.038 here - at every recall. That flat red line, not 0.5, is what “no skill” looks like on an imbalanced problem.</a:t>
+              <a:t>The part to teach is the baseline. A model with random scores has precision equal to the positive rate - 0.038 here - at every recall. That flat dashed line, not 0.5, is what “no skill” looks like on an imbalanced problem.</a:t>
             </a:r>
           </a:p>
           <a:p>
@@ -3584,7 +3584,7 @@
             </a:pPr>
             <a:r>
               <a:rPr/>
-              <a:t>The three marked dots are the same three thresholds from the last two slides, so they can see the correspondence.</a:t>
+              <a:t>The three marked dots are thresholds 0.5, 0.3 and 0.05. The first two are rows of the table on the previous slide, so they can check the correspondence: at 0.5, recall 0.566 and precision 0.768.</a:t>
             </a:r>
           </a:p>
         </p:txBody>
@@ -3790,7 +3790,7 @@
             </a:pPr>
             <a:r>
               <a:rPr/>
-              <a:t>The two axes: true positive rate, which is recall under another name - the failures we catch. False positive rate - the healthy drives we condemn.</a:t>
+              <a:t>The two axes: the true positive rate (TPR), which is recall under another name - the share of failures we catch. The false positive rate (FPR) - the share of healthy drives we condemn.</a:t>
             </a:r>
           </a:p>
           <a:p>
@@ -4052,21 +4052,21 @@
             </a:pPr>
             <a:r>
               <a:rPr/>
-              <a:t>The consequence: AUC says nothing about whether “0.7” means anything. If you need the probabilities to be believable - because you are computing expected costs, as we will in ten minutes - AUC is not the check you want.</a:t>
-            </a:r>
-          </a:p>
-          <a:p>
-            <a:pPr lvl="0" indent="0" marL="0">
-              <a:buNone/>
-            </a:pPr>
-          </a:p>
-          <a:p>
-            <a:pPr lvl="0" indent="0" marL="0">
-              <a:buNone/>
-            </a:pPr>
-            <a:r>
-              <a:rPr/>
-              <a:t>Good place to mention calibration exists as a topic, without going into it.</a:t>
+              <a:t>The consequence: AUC says nothing about whether “0.7” means anything. If you need the probabilities to be believable - because you are computing expected costs, as slide 41 does - AUC is not the check you want.</a:t>
+            </a:r>
+          </a:p>
+          <a:p>
+            <a:pPr lvl="0" indent="0" marL="0">
+              <a:buNone/>
+            </a:pPr>
+          </a:p>
+          <a:p>
+            <a:pPr lvl="0" indent="0" marL="0">
+              <a:buNone/>
+            </a:pPr>
+            <a:r>
+              <a:rPr/>
+              <a:t>Good place to mention that calibration - whether a predicted 0.7 really comes true 70% of the time - is a topic of its own, without going into it.</a:t>
             </a:r>
           </a:p>
         </p:txBody>
@@ -4162,21 +4162,21 @@
             </a:pPr>
             <a:r>
               <a:rPr/>
-              <a:t>Left: the three ROC curves sit on top of each other. AUC 0.968, 0.965, 0.974. It reports an excellent model throughout, and at the rarest setting a marginally better one, which is sampling noise on 231 positives.</a:t>
-            </a:r>
-          </a:p>
-          <a:p>
-            <a:pPr lvl="0" indent="0" marL="0">
-              <a:buNone/>
-            </a:pPr>
-          </a:p>
-          <a:p>
-            <a:pPr lvl="0" indent="0" marL="0">
-              <a:buNone/>
-            </a:pPr>
-            <a:r>
-              <a:rPr/>
-              <a:t>Right: the precision-recall curves are in three different worlds. Average precision falls from 0.706 to 0.361, and precision at the same threshold falls from 0.79 to 0.26 - two alarms in three now false.</a:t>
+              <a:t>Left panel: the three ROC curves sit on top of each other. AUC 0.968, 0.965, 0.974. It reports an excellent model throughout, and at the rarest setting a marginally better one, which is sampling noise on 231 positives.</a:t>
+            </a:r>
+          </a:p>
+          <a:p>
+            <a:pPr lvl="0" indent="0" marL="0">
+              <a:buNone/>
+            </a:pPr>
+          </a:p>
+          <a:p>
+            <a:pPr lvl="0" indent="0" marL="0">
+              <a:buNone/>
+            </a:pPr>
+            <a:r>
+              <a:rPr/>
+              <a:t>Right panel: the precision-recall curves are in three different worlds. Average precision falls from 0.706 to 0.361, and precision at the same threshold falls from 0.79 to 0.26 - two alarms in three now false.</a:t>
             </a:r>
           </a:p>
           <a:p>
@@ -4492,7 +4492,7 @@
             </a:pPr>
             <a:r>
               <a:rPr/>
-              <a:t>SMART is the diagnostic data a drive keeps about itself: reallocated sectors, spin retries, read error rate, temperature, hours in service. Expand the acronym on the slide and out loud - it is the kind of thing that gets skipped and then quietly blocks a student for the rest of the hour.</a:t>
+              <a:t>SMART is the diagnostic data a drive keeps about itself: reallocated sectors (bad patches of the disk the drive has had to replace), spin retries, read error rate, temperature, hours in service, and seek error rate. Expand the acronym on the slide and out loud - it is the kind of thing that gets skipped and then quietly blocks a student for the rest of the hour.</a:t>
             </a:r>
           </a:p>
           <a:p>
@@ -4602,7 +4602,7 @@
             </a:pPr>
             <a:r>
               <a:rPr/>
-              <a:t>Finally, the honest way to pick a threshold. It needs one ingredient no metric can supply: what the errors cost. We wrote those down an hour ago - €140 for a needless replacement, €2,600 for a drive that dies in service.</a:t>
+              <a:t>Finally, the honest way to pick a threshold. It needs one ingredient no metric can supply: what the errors cost. We wrote those down on slide 25 - €140 for a needless replacement, €2,600 for a drive that dies in service.</a:t>
             </a:r>
           </a:p>
           <a:p>
@@ -4850,7 +4850,7 @@
             </a:pPr>
             <a:r>
               <a:rPr/>
-              <a:t>Say this out loud rather than leaving it in the handout, because it is the same mistake you may have just named to them, this morning, on exercise 3.</a:t>
+              <a:t>Say this out loud rather than leaving it in the handout, because it is the same mistake you may have named at the start of today’s lesson, in the discussion of exercise 3.</a:t>
             </a:r>
           </a:p>
           <a:p>
@@ -4974,7 +4974,7 @@
             </a:pPr>
             <a:r>
               <a:rPr/>
-              <a:t>class_weight=“balanced” makes each rare example count as many, here about 25. It changes the training rather than the decision.</a:t>
+              <a:t>class_weight=“balanced” makes each failed drive count, in the cost, as much as about 25 healthy ones - the ratio of healthy to failed drives in the training set. It changes the training rather than the decision.</a:t>
             </a:r>
           </a:p>
           <a:p>
@@ -5030,7 +5030,7 @@
             </a:pPr>
             <a:r>
               <a:rPr/>
-              <a:t>Same caution for resampling and for SMOTE (synthetic minority oversampling technique, which builds artificial minority examples) - and it must happen inside the cross-validation fold, for the reasons lesson 2 gave about imputation.</a:t>
+              <a:t>The same reading holds for resampling and for SMOTE (synthetic minority oversampling technique, which builds artificial minority examples): they move the operating point too. And both must be applied to the training rows only - inside each cross-validation fold, once lesson 5 introduces folds - for the reasons lesson 2 gave about imputation.</a:t>
             </a:r>
           </a:p>
         </p:txBody>
@@ -5222,7 +5222,7 @@
             </a:pPr>
             <a:r>
               <a:rPr/>
-              <a:t>For K classes the model produces one score per class and normalises them - the softmax, which for two classes reduces exactly to the sigmoid. The cost generalises to categorical cross-entropy, and it is the same idea: the negative log of the probability assigned to what actually happened. Handout section 10.</a:t>
+              <a:t>For K classes the model produces one score per class and turns them into K probabilities that add up to 1 - the softmax, which for two classes reduces exactly to the sigmoid. The cost generalises to categorical cross-entropy, and it is the same idea: the negative log of the probability assigned to what actually happened. Handout section 10.</a:t>
             </a:r>
           </a:p>
           <a:p>
@@ -5704,7 +5704,7 @@
             </a:pPr>
             <a:r>
               <a:rPr/>
-              <a:t>Somebody will say “healthy, every time”. Agree, and move on. Do not explain the consequence yet - it lands far harder in section 5 when they see 96.2% printed as a model’s accuracy score.</a:t>
+              <a:t>Somebody will say “healthy, every time”. Agree, and move on. Do not explain the consequence yet - it lands far harder on slide 22, after the break, when they see 96.2% printed as a model’s accuracy score.</a:t>
             </a:r>
           </a:p>
         </p:txBody>
@@ -5924,21 +5924,21 @@
             </a:pPr>
             <a:r>
               <a:rPr/>
-              <a:t>Expect someone to object that the previous figure says otherwise. That curve is drawn against raw reallocated sectors, not against z, so it is steepest at 13.2 and the first four sectors move it by only 0.03. Both pictures are right: the counters act on a log scale, and on that scale four sectors are worth +4.7 in log-odds, taking a drive from a 0.01% chance of failing to 1.3%. Handout section 1.1.</a:t>
-            </a:r>
-          </a:p>
-          <a:p>
-            <a:pPr lvl="0" indent="0" marL="0">
-              <a:buNone/>
-            </a:pPr>
-          </a:p>
-          <a:p>
-            <a:pPr lvl="0" indent="0" marL="0">
-              <a:buNone/>
-            </a:pPr>
-            <a:r>
-              <a:rPr/>
-              <a:t>Right: the same relationship inverted. This is the slide that explains WHY this particular curve and not some other S-shape. A probability is trapped in [0,1]. The odds - p over 1 minus p - remove the ceiling. The log of the odds removes the floor too, leaving something that runs over all of the real line.</a:t>
+              <a:t>Expect someone to object that the previous figure says otherwise: there the curve is flat at the START, where drives have few reallocated sectors, not only at the ends. The answer is the horizontal axis. That curve is drawn against raw reallocated sectors, not against z, so it is steepest at 13.2 sectors and the first four sectors move it by only 0.03. Both pictures are right: the counters act on a log scale, and on that scale four sectors are worth +4.7 in log-odds, taking a drive from a 0.012% chance of failing to 1.3%, about a hundred times more. Handout section 1.1.</a:t>
+            </a:r>
+          </a:p>
+          <a:p>
+            <a:pPr lvl="0" indent="0" marL="0">
+              <a:buNone/>
+            </a:pPr>
+          </a:p>
+          <a:p>
+            <a:pPr lvl="0" indent="0" marL="0">
+              <a:buNone/>
+            </a:pPr>
+            <a:r>
+              <a:rPr/>
+              <a:t>Right panel: the same relationship inverted. This is the slide that explains WHY this particular curve and not some other S-shape. A probability is trapped in [0,1]. The odds - p over 1 minus p - remove the ceiling. The log of the odds removes the floor too, leaving something that runs over all of the real line.</a:t>
             </a:r>
           </a:p>
           <a:p>
@@ -6062,7 +6062,7 @@
             </a:pPr>
             <a:r>
               <a:rPr/>
-              <a:t>That last one is the one to flag. It is largest in the middle, one quarter, and it decays to zero at both ends. In fifteen minutes that fact will be simultaneously the reason the sigmoid works and the reason squared error does not.</a:t>
+              <a:t>That last one is the one to flag. It is largest in the middle, one quarter, and it decays to zero at both ends. On slide 17 that fact will be simultaneously the reason the sigmoid works and the reason squared error does not.</a:t>
             </a:r>
           </a:p>
         </p:txBody>

--- a/Lessons/04_classification_and_metrics/Slides/classification_and_metrics_slides.pptx
+++ b/Lessons/04_classification_and_metrics/Slides/classification_and_metrics_slides.pptx
@@ -2978,7 +2978,7 @@
             </a:pPr>
             <a:r>
               <a:rPr/>
-              <a:t>The weighted average weights each class by how common it is, so on this problem it is essentially the healthy class talking, and it reads close to accuracy - inheriting exactly the blindness we spent twenty minutes on.</a:t>
+              <a:t>The weighted average weights each class by how common it is, so on this problem it is essentially the healthy class talking, and it reads close to accuracy - inheriting exactly the blindness slides 22 to 25 were about.</a:t>
             </a:r>
           </a:p>
           <a:p>
@@ -5112,7 +5112,7 @@
             </a:pPr>
             <a:r>
               <a:rPr/>
-              <a:t>The ROC curve by hand, the 200,000-pair experiment, the cost curve, then the multiclass matrix. Run notebook 03. Twenty minutes if the clock allows, otherwise show the pairs experiment and the imbalance comparison and leave the rest for them.</a:t>
+              <a:t>The ROC curve by hand, the 200,000-pair experiment, the cost curve, then the multiclass matrix. Run notebook 03. Fifteen minutes, and the two multiclass slides that follow (46 and 47) are shown when the notebook reaches its last section, so they run alongside it rather than after it.</a:t>
             </a:r>
           </a:p>
           <a:p>

--- a/Lessons/04_classification_and_metrics/Slides/classification_and_metrics_slides.pptx
+++ b/Lessons/04_classification_and_metrics/Slides/classification_and_metrics_slides.pptx
@@ -3192,6 +3192,20 @@
         <p:txBody>
           <a:bodyPr/>
           <a:lstStyle/>
+          <a:p>
+            <a:pPr lvl="0" indent="0" marL="0">
+              <a:buNone/>
+            </a:pPr>
+            <a:r>
+              <a:rPr/>
+              <a:t>Read the third bullet aloud: “the probability that y equals 1, given x”. The vertical bar is read “given”: everything to its right is what we know about the drive, everything to its left is what we want to know. The two inequalities are the point of writing it this way - whatever the model outputs has to stay between 0 and 1, and slide 7 shows a straight line failing exactly that.</a:t>
+            </a:r>
+          </a:p>
+          <a:p>
+            <a:pPr lvl="0" indent="0" marL="0">
+              <a:buNone/>
+            </a:pPr>
+          </a:p>
           <a:p>
             <a:pPr lvl="0" indent="0" marL="0">
               <a:buNone/>
@@ -14275,6 +14289,20 @@
             <a:r>
               <a:rPr b="1"/>
               <a:t>will it fail?</a:t>
+            </a:r>
+          </a:p>
+          <a:p>
+            <a:pPr lvl="0"/>
+            <a:r>
+              <a:rPr/>
+              <a:t>Answer with a probability: 0 ≤ P(y = 1 | x) ≤ 1</a:t>
+            </a:r>
+          </a:p>
+          <a:p>
+            <a:pPr lvl="0"/>
+            <a:r>
+              <a:rPr/>
+              <a:t>y = 1 if the drive failed, y = 0 if not; x holds its six counters</a:t>
             </a:r>
           </a:p>
         </p:txBody>

--- a/Lessons/04_classification_and_metrics/Slides/classification_and_metrics_slides.pptx
+++ b/Lessons/04_classification_and_metrics/Slides/classification_and_metrics_slides.pptx
@@ -5,7 +5,7 @@
     <p:sldMasterId id="2147483648" r:id="rId1"/>
   </p:sldMasterIdLst>
   <p:notesMasterIdLst>
-    <p:notesMasterId r:id="rId51"/>
+    <p:notesMasterId r:id="rId52"/>
   </p:notesMasterIdLst>
   <p:sldIdLst>
     <p:sldId id="256" r:id="rId2"/>
@@ -57,6 +57,7 @@
     <p:sldId id="302" r:id="rId48"/>
     <p:sldId id="303" r:id="rId49"/>
     <p:sldId id="304" r:id="rId50"/>
+    <p:sldId id="305" r:id="rId51"/>
   </p:sldIdLst>
   <p:sldSz cx="9144000" cy="5143500" type="screen16x9"/>
   <p:notesSz cx="6858000" cy="9144000"/>
@@ -586,7 +587,7 @@
             </a:pPr>
             <a:r>
               <a:rPr/>
-              <a:t>The one to watch for: choosing the penalty by looking at the test error. It is the natural thing to do because the test error is the number they were told to care about, and it is exactly the mistake lesson 1 named. Today’s lesson ends up in the same place from a different direction, on slide 43, when we choose a decision threshold by looking at the test set. Lesson 5 gives them the machinery to do both honestly.</a:t>
+              <a:t>The one to watch for: choosing the penalty by looking at the test error. It is the natural thing to do because the test error is the number they were told to care about, and it is exactly the mistake lesson 1 named. Today’s lesson ends up in the same place from a different direction, on slide 44, when we choose a decision threshold by looking at the test set. Lesson 5 gives them the machinery to do both honestly.</a:t>
             </a:r>
           </a:p>
         </p:txBody>
@@ -668,49 +669,35 @@
             </a:pPr>
             <a:r>
               <a:rPr/>
-              <a:t>Notebook 1, last section. This is the payoff of using synthetic data: we do not just look at the estimates, we check them against the truth.</a:t>
-            </a:r>
-          </a:p>
-          <a:p>
-            <a:pPr lvl="0" indent="0" marL="0">
-              <a:buNone/>
-            </a:pPr>
-          </a:p>
-          <a:p>
-            <a:pPr lvl="0" indent="0" marL="0">
-              <a:buNone/>
-            </a:pPr>
-            <a:r>
-              <a:rPr/>
-              <a:t>Go down the column. Everything is close. Nothing is exact, and say why - 6,000 training drives carrying 230 failures is a modest amount of evidence, and 230 is the number that matters, not 6,000.</a:t>
-            </a:r>
-          </a:p>
-          <a:p>
-            <a:pPr lvl="0" indent="0" marL="0">
-              <a:buNone/>
-            </a:pPr>
-          </a:p>
-          <a:p>
-            <a:pPr lvl="0" indent="0" marL="0">
-              <a:buNone/>
-            </a:pPr>
-            <a:r>
-              <a:rPr/>
-              <a:t>Then the last row, which is the one to pause on. seek_error_rate was generated with a coefficient of exactly zero: a real-looking counter with no connection to failure. The model estimates 0.02, an odds multiplier of 1.03 (the table rounds the coefficient; the multiplier is computed from the unrounded value). It did not fall for it.</a:t>
-            </a:r>
-          </a:p>
-          <a:p>
-            <a:pPr lvl="0" indent="0" marL="0">
-              <a:buNone/>
-            </a:pPr>
-          </a:p>
-          <a:p>
-            <a:pPr lvl="0" indent="0" marL="0">
-              <a:buNone/>
-            </a:pPr>
-            <a:r>
-              <a:rPr/>
-              <a:t>Then ask the room the harder question: would you have noticed, if I had not told you? Leave it hanging. It is lesson 5.</a:t>
+              <a:t>This is the interpretability that keeps logistic regression in production in medicine and credit scoring. A coefficient of 1.80 means: a drive one standard deviation worse on that counter has exp(1.80), about six times, the odds of failing.</a:t>
+            </a:r>
+          </a:p>
+          <a:p>
+            <a:pPr lvl="0" indent="0" marL="0">
+              <a:buNone/>
+            </a:pPr>
+          </a:p>
+          <a:p>
+            <a:pPr lvl="0" indent="0" marL="0">
+              <a:buNone/>
+            </a:pPr>
+            <a:r>
+              <a:rPr/>
+              <a:t>Now the mistake they will make, and it is a reasonable one. They will read “six times the odds” as “six times as likely”. For rare events those are nearly the same number, so here it is almost right - which is exactly why the habit survives until it does damage.</a:t>
+            </a:r>
+          </a:p>
+          <a:p>
+            <a:pPr lvl="0" indent="0" marL="0">
+              <a:buNone/>
+            </a:pPr>
+          </a:p>
+          <a:p>
+            <a:pPr lvl="0" indent="0" marL="0">
+              <a:buNone/>
+            </a:pPr>
+            <a:r>
+              <a:rPr/>
+              <a:t>Give them the counterexample out loud: odds of 9, a probability of 0.90, multiplied by 5 gives odds of 45 - a probability of 0.978. The odds went up fivefold; the probability moved eight points. Odds ratios multiply odds.</a:t>
             </a:r>
           </a:p>
         </p:txBody>
@@ -792,49 +779,49 @@
             </a:pPr>
             <a:r>
               <a:rPr/>
-              <a:t>This is the slide that quietly explains everything in the second half of the lesson, so do not rush it.</a:t>
-            </a:r>
-          </a:p>
-          <a:p>
-            <a:pPr lvl="0" indent="0" marL="0">
-              <a:buNone/>
-            </a:pPr>
-          </a:p>
-          <a:p>
-            <a:pPr lvl="0" indent="0" marL="0">
-              <a:buNone/>
-            </a:pPr>
-            <a:r>
-              <a:rPr/>
-              <a:t>Say first what the intercept is NOT: it is not the base rate. The fleet fails at 3.8%; the intercept describes a drive whose every counter sits at the average, and such a drive almost never fails. The failures come from the small group of drives far above average on one or more counters. Handout section 2.4.</a:t>
-            </a:r>
-          </a:p>
-          <a:p>
-            <a:pPr lvl="0" indent="0" marL="0">
-              <a:buNone/>
-            </a:pPr>
-          </a:p>
-          <a:p>
-            <a:pPr lvl="0" indent="0" marL="0">
-              <a:buNone/>
-            </a:pPr>
-            <a:r>
-              <a:rPr/>
-              <a:t>An average drive has a 0.2% chance of failing in thirty days. For the model to reach an even bet - probability one half, log-odds zero - the evidence has to move the log-odds by more than six. Only badly degraded drives manage that.</a:t>
-            </a:r>
-          </a:p>
-          <a:p>
-            <a:pPr lvl="0" indent="0" marL="0">
-              <a:buNone/>
-            </a:pPr>
-          </a:p>
-          <a:p>
-            <a:pPr lvl="0" indent="0" marL="0">
-              <a:buNone/>
-            </a:pPr>
-            <a:r>
-              <a:rPr/>
-              <a:t>So the model will assign small probabilities to almost everything, and a threshold of 0.5 will flag almost nothing. That is not the model being timid. It is the model being correct about a rare event. Everything that looks like a failure of the classifier in the next hour traces back to this number.</a:t>
+              <a:t>Notebook 1, last section. This is the payoff of using synthetic data: we do not just look at the estimates, we check them against the truth.</a:t>
+            </a:r>
+          </a:p>
+          <a:p>
+            <a:pPr lvl="0" indent="0" marL="0">
+              <a:buNone/>
+            </a:pPr>
+          </a:p>
+          <a:p>
+            <a:pPr lvl="0" indent="0" marL="0">
+              <a:buNone/>
+            </a:pPr>
+            <a:r>
+              <a:rPr/>
+              <a:t>Go down the column. Everything is close. Nothing is exact, and say why - 6,000 training drives carrying 230 failures is a modest amount of evidence, and 230 is the number that matters, not 6,000.</a:t>
+            </a:r>
+          </a:p>
+          <a:p>
+            <a:pPr lvl="0" indent="0" marL="0">
+              <a:buNone/>
+            </a:pPr>
+          </a:p>
+          <a:p>
+            <a:pPr lvl="0" indent="0" marL="0">
+              <a:buNone/>
+            </a:pPr>
+            <a:r>
+              <a:rPr/>
+              <a:t>Then the last row, which is the one to pause on. seek_error_rate was generated with a coefficient of exactly zero: a real-looking counter with no connection to failure. The model estimates 0.02, an odds multiplier of 1.03 (the table rounds the coefficient; the multiplier is computed from the unrounded value). It did not fall for it.</a:t>
+            </a:r>
+          </a:p>
+          <a:p>
+            <a:pPr lvl="0" indent="0" marL="0">
+              <a:buNone/>
+            </a:pPr>
+          </a:p>
+          <a:p>
+            <a:pPr lvl="0" indent="0" marL="0">
+              <a:buNone/>
+            </a:pPr>
+            <a:r>
+              <a:rPr/>
+              <a:t>Then ask the room the harder question: would you have noticed, if I had not told you? Leave it hanging. It is lesson 5.</a:t>
             </a:r>
           </a:p>
         </p:txBody>
@@ -916,21 +903,49 @@
             </a:pPr>
             <a:r>
               <a:rPr/>
-              <a:t>Put the question to the room and take answers before showing the next slide. This is a good place for them to be wrong out loud, because the honest answer is not obvious and the usual first guesses (“it’s not differentiable”, “it doesn’t work for categories”) are wrong.</a:t>
-            </a:r>
-          </a:p>
-          <a:p>
-            <a:pPr lvl="0" indent="0" marL="0">
-              <a:buNone/>
-            </a:pPr>
-          </a:p>
-          <a:p>
-            <a:pPr lvl="0" indent="0" marL="0">
-              <a:buNone/>
-            </a:pPr>
-            <a:r>
-              <a:rPr/>
-              <a:t>Squared error on the sigmoid IS differentiable, and it does produce a working model on easy problems. The reason to reject it is subtler and more interesting, which is what makes it worth ten minutes.</a:t>
+              <a:t>This is the slide that quietly explains everything in the second half of the lesson, so do not rush it.</a:t>
+            </a:r>
+          </a:p>
+          <a:p>
+            <a:pPr lvl="0" indent="0" marL="0">
+              <a:buNone/>
+            </a:pPr>
+          </a:p>
+          <a:p>
+            <a:pPr lvl="0" indent="0" marL="0">
+              <a:buNone/>
+            </a:pPr>
+            <a:r>
+              <a:rPr/>
+              <a:t>Say first what the intercept is NOT: it is not the base rate. The fleet fails at 3.8%; the intercept describes a drive whose every counter sits at the average, and such a drive almost never fails. The failures come from the small group of drives far above average on one or more counters. Handout section 2.4.</a:t>
+            </a:r>
+          </a:p>
+          <a:p>
+            <a:pPr lvl="0" indent="0" marL="0">
+              <a:buNone/>
+            </a:pPr>
+          </a:p>
+          <a:p>
+            <a:pPr lvl="0" indent="0" marL="0">
+              <a:buNone/>
+            </a:pPr>
+            <a:r>
+              <a:rPr/>
+              <a:t>An average drive has a 0.2% chance of failing in thirty days. For the model to reach an even bet - probability one half, log-odds zero - the evidence has to move the log-odds by more than six. Only badly degraded drives manage that.</a:t>
+            </a:r>
+          </a:p>
+          <a:p>
+            <a:pPr lvl="0" indent="0" marL="0">
+              <a:buNone/>
+            </a:pPr>
+          </a:p>
+          <a:p>
+            <a:pPr lvl="0" indent="0" marL="0">
+              <a:buNone/>
+            </a:pPr>
+            <a:r>
+              <a:rPr/>
+              <a:t>So the model will assign small probabilities to almost everything, and a threshold of 0.5 will flag almost nothing. That is not the model being timid. It is the model being correct about a rare event. Everything that looks like a failure of the classifier in the next hour traces back to this number.</a:t>
             </a:r>
           </a:p>
         </p:txBody>
@@ -1012,49 +1027,21 @@
             </a:pPr>
             <a:r>
               <a:rPr/>
-              <a:t>Say this before any algebra. It is the whole idea, and once they have it the derivation is bookkeeping.</a:t>
-            </a:r>
-          </a:p>
-          <a:p>
-            <a:pPr lvl="0" indent="0" marL="0">
-              <a:buNone/>
-            </a:pPr>
-          </a:p>
-          <a:p>
-            <a:pPr lvl="0" indent="0" marL="0">
-              <a:buNone/>
-            </a:pPr>
-            <a:r>
-              <a:rPr/>
-              <a:t>Each drive contributes one factor: the probability the model gave to what actually occurred. Multiply across the fleet and you have the probability of the whole dataset under that setting of the parameters. Choose the setting that makes it largest.</a:t>
-            </a:r>
-          </a:p>
-          <a:p>
-            <a:pPr lvl="0" indent="0" marL="0">
-              <a:buNone/>
-            </a:pPr>
-          </a:p>
-          <a:p>
-            <a:pPr lvl="0" indent="0" marL="0">
-              <a:buNone/>
-            </a:pPr>
-            <a:r>
-              <a:rPr/>
-              <a:t>Two practical notes worth saying aloud. We take the logarithm because it turns the product into a sum, which differentiates one term at a time - and because the product itself is too small to store. Gradient descent starts with every probability at 0.5, and 0.5 multiplied by itself 6,000 times, once per training drive, is about 10 to the minus 1806. The smallest number a 64-bit float holds is about 10 to the minus 308, so the computer stores exactly zero. Every real implementation works in log space, and not for elegance.</a:t>
-            </a:r>
-          </a:p>
-          <a:p>
-            <a:pPr lvl="0" indent="0" marL="0">
-              <a:buNone/>
-            </a:pPr>
-          </a:p>
-          <a:p>
-            <a:pPr lvl="0" indent="0" marL="0">
-              <a:buNone/>
-            </a:pPr>
-            <a:r>
-              <a:rPr/>
-              <a:t>Then negate, so we minimise as in lesson 3.</a:t>
+              <a:t>Put the question to the room and take answers before showing the next slide. This is a good place for them to be wrong out loud, because the honest answer is not obvious and the usual first guesses (“it’s not differentiable”, “it doesn’t work for categories”) are wrong.</a:t>
+            </a:r>
+          </a:p>
+          <a:p>
+            <a:pPr lvl="0" indent="0" marL="0">
+              <a:buNone/>
+            </a:pPr>
+          </a:p>
+          <a:p>
+            <a:pPr lvl="0" indent="0" marL="0">
+              <a:buNone/>
+            </a:pPr>
+            <a:r>
+              <a:rPr/>
+              <a:t>Squared error on the sigmoid IS differentiable, and it does produce a working model on easy problems. The reason to reject it is subtler and more interesting, which is what makes it worth ten minutes.</a:t>
             </a:r>
           </a:p>
         </p:txBody>
@@ -1136,63 +1123,49 @@
             </a:pPr>
             <a:r>
               <a:rPr/>
-              <a:t>This is the loss on ONE example, L, not the cost over the training set; p is the predicted probability, the same number the next slide writes as y-hat. Say the other half aloud rather than showing it: the cost J is the average of this over the m examples, one over m times the sum. Written out in full the formula reached the slide edge and came out at 26pt, smaller than the bullets on the slide before it.</a:t>
-            </a:r>
-          </a:p>
-          <a:p>
-            <a:pPr lvl="0" indent="0" marL="0">
-              <a:buNone/>
-            </a:pPr>
-          </a:p>
-          <a:p>
-            <a:pPr lvl="0" indent="0" marL="0">
-              <a:buNone/>
-            </a:pPr>
-            <a:r>
-              <a:rPr/>
-              <a:t>Do not derive it here - the handout, section 3, does it in full. Show it and read it.</a:t>
-            </a:r>
-          </a:p>
-          <a:p>
-            <a:pPr lvl="0" indent="0" marL="0">
-              <a:buNone/>
-            </a:pPr>
-          </a:p>
-          <a:p>
-            <a:pPr lvl="0" indent="0" marL="0">
-              <a:buNone/>
-            </a:pPr>
-            <a:r>
-              <a:rPr/>
-              <a:t>The reading that makes it stick: the cost of an outcome is the SURPRISE of seeing it. Something you called certain costs nothing. Something you gave a probability of one in a thousand costs log 1000, about 6.9. Something you declared impossible costs infinity.</a:t>
-            </a:r>
-          </a:p>
-          <a:p>
-            <a:pPr lvl="0" indent="0" marL="0">
-              <a:buNone/>
-            </a:pPr>
-          </a:p>
-          <a:p>
-            <a:pPr lvl="0" indent="0" marL="0">
-              <a:buNone/>
-            </a:pPr>
-            <a:r>
-              <a:rPr/>
-              <a:t>Only one of the two terms is ever active, because y is 0 or 1. The bracket is a way of writing an if-statement in algebra, nothing more.</a:t>
-            </a:r>
-          </a:p>
-          <a:p>
-            <a:pPr lvl="0" indent="0" marL="0">
-              <a:buNone/>
-            </a:pPr>
-          </a:p>
-          <a:p>
-            <a:pPr lvl="0" indent="0" marL="0">
-              <a:buNone/>
-            </a:pPr>
-            <a:r>
-              <a:rPr/>
-              <a:t>And the headline: nobody designed this function. It fell out of asking for the parameters that make the data least surprising.</a:t>
+              <a:t>Say this before any algebra. It is the whole idea, and once they have it the derivation is bookkeeping.</a:t>
+            </a:r>
+          </a:p>
+          <a:p>
+            <a:pPr lvl="0" indent="0" marL="0">
+              <a:buNone/>
+            </a:pPr>
+          </a:p>
+          <a:p>
+            <a:pPr lvl="0" indent="0" marL="0">
+              <a:buNone/>
+            </a:pPr>
+            <a:r>
+              <a:rPr/>
+              <a:t>Each drive contributes one factor: the probability the model gave to what actually occurred. Multiply across the fleet and you have the probability of the whole dataset under that setting of the parameters. Choose the setting that makes it largest.</a:t>
+            </a:r>
+          </a:p>
+          <a:p>
+            <a:pPr lvl="0" indent="0" marL="0">
+              <a:buNone/>
+            </a:pPr>
+          </a:p>
+          <a:p>
+            <a:pPr lvl="0" indent="0" marL="0">
+              <a:buNone/>
+            </a:pPr>
+            <a:r>
+              <a:rPr/>
+              <a:t>Two practical notes worth saying aloud. We take the logarithm because it turns the product into a sum, which differentiates one term at a time - and because the product itself is too small to store. Gradient descent starts with every probability at 0.5, and 0.5 multiplied by itself 6,000 times, once per training drive, is about 10 to the minus 1806. The smallest number a 64-bit float holds is about 10 to the minus 308, so the computer stores exactly zero. Every real implementation works in log space, and not for elegance.</a:t>
+            </a:r>
+          </a:p>
+          <a:p>
+            <a:pPr lvl="0" indent="0" marL="0">
+              <a:buNone/>
+            </a:pPr>
+          </a:p>
+          <a:p>
+            <a:pPr lvl="0" indent="0" marL="0">
+              <a:buNone/>
+            </a:pPr>
+            <a:r>
+              <a:rPr/>
+              <a:t>Then negate, so we minimise as in lesson 3.</a:t>
             </a:r>
           </a:p>
         </p:txBody>
@@ -1274,35 +1247,63 @@
             </a:pPr>
             <a:r>
               <a:rPr/>
-              <a:t>Prediction error times feature, averaged. Character for character the gradient of lesson 3, with a different model and a different cost function.</a:t>
-            </a:r>
-          </a:p>
-          <a:p>
-            <a:pPr lvl="0" indent="0" marL="0">
-              <a:buNone/>
-            </a:pPr>
-          </a:p>
-          <a:p>
-            <a:pPr lvl="0" indent="0" marL="0">
-              <a:buNone/>
-            </a:pPr>
-            <a:r>
-              <a:rPr/>
-              <a:t>The cancellation is worth showing on the board if there is appetite: the sigma times one-minus-sigma from the chain rule cancels against the one-over-sigma from the logarithm. Handout section 3.4 has it.</a:t>
-            </a:r>
-          </a:p>
-          <a:p>
-            <a:pPr lvl="0" indent="0" marL="0">
-              <a:buNone/>
-            </a:pPr>
-          </a:p>
-          <a:p>
-            <a:pPr lvl="0" indent="0" marL="0">
-              <a:buNone/>
-            </a:pPr>
-            <a:r>
-              <a:rPr/>
-              <a:t>If someone asks whether that is a coincidence: no. Both are generalised linear models fitted by maximum likelihood - Gaussian noise for regression, Bernoulli outcomes for classification - and the whole exponential family gives this form. They do not need that theory to use either method, but it is why the same gradient descent code, unchanged, trains both.</a:t>
+              <a:t>This is the loss on ONE example, L, not the cost over the training set; p is the predicted probability, the same number the next slide writes as y-hat. Say the other half aloud rather than showing it: the cost J is the average of this over the m examples, one over m times the sum. Written out in full the formula reached the slide edge and came out at 26pt, smaller than the bullets on the slide before it.</a:t>
+            </a:r>
+          </a:p>
+          <a:p>
+            <a:pPr lvl="0" indent="0" marL="0">
+              <a:buNone/>
+            </a:pPr>
+          </a:p>
+          <a:p>
+            <a:pPr lvl="0" indent="0" marL="0">
+              <a:buNone/>
+            </a:pPr>
+            <a:r>
+              <a:rPr/>
+              <a:t>Do not derive it here - the handout, section 3, does it in full. Show it and read it.</a:t>
+            </a:r>
+          </a:p>
+          <a:p>
+            <a:pPr lvl="0" indent="0" marL="0">
+              <a:buNone/>
+            </a:pPr>
+          </a:p>
+          <a:p>
+            <a:pPr lvl="0" indent="0" marL="0">
+              <a:buNone/>
+            </a:pPr>
+            <a:r>
+              <a:rPr/>
+              <a:t>The reading that makes it stick: the cost of an outcome is the SURPRISE of seeing it. Something you called certain costs nothing. Something you gave a probability of one in a thousand costs log 1000, about 6.9. Something you declared impossible costs infinity.</a:t>
+            </a:r>
+          </a:p>
+          <a:p>
+            <a:pPr lvl="0" indent="0" marL="0">
+              <a:buNone/>
+            </a:pPr>
+          </a:p>
+          <a:p>
+            <a:pPr lvl="0" indent="0" marL="0">
+              <a:buNone/>
+            </a:pPr>
+            <a:r>
+              <a:rPr/>
+              <a:t>Only one of the two terms is ever active, because y is 0 or 1. The bracket is a way of writing an if-statement in algebra, nothing more.</a:t>
+            </a:r>
+          </a:p>
+          <a:p>
+            <a:pPr lvl="0" indent="0" marL="0">
+              <a:buNone/>
+            </a:pPr>
+          </a:p>
+          <a:p>
+            <a:pPr lvl="0" indent="0" marL="0">
+              <a:buNone/>
+            </a:pPr>
+            <a:r>
+              <a:rPr/>
+              <a:t>And the headline: nobody designed this function. It fell out of asking for the parameters that make the data least surprising.</a:t>
             </a:r>
           </a:p>
         </p:txBody>
@@ -1384,49 +1385,35 @@
             </a:pPr>
             <a:r>
               <a:rPr/>
-              <a:t>Left panel, the costs. A drive failed and the model said 0.0001. Squared error charges 0.9998. An honest “don’t know” - 0.5 - costs 0.25. So the worst possible answer is four times worse than a shrug. Log loss charges 9.2 against 0.69, and the ratio grows without bound.</a:t>
-            </a:r>
-          </a:p>
-          <a:p>
-            <a:pPr lvl="0" indent="0" marL="0">
-              <a:buNone/>
-            </a:pPr>
-          </a:p>
-          <a:p>
-            <a:pPr lvl="0" indent="0" marL="0">
-              <a:buNone/>
-            </a:pPr>
-            <a:r>
-              <a:rPr/>
-              <a:t>Right panel is the real argument, so spend the time here. The gradient is what the optimiser actually uses. Squared error’s gradient through the sigmoid carries a factor p times one-minus-p - which is exactly the sigmoid derivative from slide 9 - and that factor goes to zero as p goes to zero.</a:t>
-            </a:r>
-          </a:p>
-          <a:p>
-            <a:pPr lvl="0" indent="0" marL="0">
-              <a:buNone/>
-            </a:pPr>
-          </a:p>
-          <a:p>
-            <a:pPr lvl="0" indent="0" marL="0">
-              <a:buNone/>
-            </a:pPr>
-            <a:r>
-              <a:rPr/>
-              <a:t>Say it as a sentence: the wronger the model gets, the less squared error asks it to change. At p = 0.001 the gradient is a five-hundredth of log loss’s. Log loss goes the other way, approaching its maximum push exactly where the error is worst.</a:t>
-            </a:r>
-          </a:p>
-          <a:p>
-            <a:pPr lvl="0" indent="0" marL="0">
-              <a:buNone/>
-            </a:pPr>
-          </a:p>
-          <a:p>
-            <a:pPr lvl="0" indent="0" marL="0">
-              <a:buNone/>
-            </a:pPr>
-            <a:r>
-              <a:rPr/>
-              <a:t>That is the failure. Not that squared error scores badly - that it stops teaching.</a:t>
+              <a:t>Prediction error times feature, averaged. Character for character the gradient of lesson 3, with a different model and a different cost function.</a:t>
+            </a:r>
+          </a:p>
+          <a:p>
+            <a:pPr lvl="0" indent="0" marL="0">
+              <a:buNone/>
+            </a:pPr>
+          </a:p>
+          <a:p>
+            <a:pPr lvl="0" indent="0" marL="0">
+              <a:buNone/>
+            </a:pPr>
+            <a:r>
+              <a:rPr/>
+              <a:t>The cancellation is worth showing on the board if there is appetite: the sigma times one-minus-sigma from the chain rule cancels against the one-over-sigma from the logarithm. Handout section 3.4 has it.</a:t>
+            </a:r>
+          </a:p>
+          <a:p>
+            <a:pPr lvl="0" indent="0" marL="0">
+              <a:buNone/>
+            </a:pPr>
+          </a:p>
+          <a:p>
+            <a:pPr lvl="0" indent="0" marL="0">
+              <a:buNone/>
+            </a:pPr>
+            <a:r>
+              <a:rPr/>
+              <a:t>If someone asks whether that is a coincidence: no. Both are generalised linear models fitted by maximum likelihood - Gaussian noise for regression, Bernoulli outcomes for classification - and the whole exponential family gives this form. They do not need that theory to use either method, but it is why the same gradient descent code, unchanged, trains both.</a:t>
             </a:r>
           </a:p>
         </p:txBody>
@@ -1508,49 +1495,49 @@
             </a:pPr>
             <a:r>
               <a:rPr/>
-              <a:t>State it, do not prove it; the handout section 4.3 has the argument.</a:t>
-            </a:r>
-          </a:p>
-          <a:p>
-            <a:pPr lvl="0" indent="0" marL="0">
-              <a:buNone/>
-            </a:pPr>
-          </a:p>
-          <a:p>
-            <a:pPr lvl="0" indent="0" marL="0">
-              <a:buNone/>
-            </a:pPr>
-            <a:r>
-              <a:rPr/>
-              <a:t>The consequence is practical: gradient descent on log loss cannot get trapped. Squared error through a sigmoid has no such guarantee and is in general non-convex.</a:t>
-            </a:r>
-          </a:p>
-          <a:p>
-            <a:pPr lvl="0" indent="0" marL="0">
-              <a:buNone/>
-            </a:pPr>
-          </a:p>
-          <a:p>
-            <a:pPr lvl="0" indent="0" marL="0">
-              <a:buNone/>
-            </a:pPr>
-            <a:r>
-              <a:rPr/>
-              <a:t>Now the caution that catches people, and it is worth ten seconds because they will hit it in the notebook. Convex does NOT mean there is a closed-form solution. Setting the gradient to zero gives X-transpose times sigma of Xw minus y equals zero, which is not linear in w - the sigmoid is in the way.</a:t>
-            </a:r>
-          </a:p>
-          <a:p>
-            <a:pPr lvl="0" indent="0" marL="0">
-              <a:buNone/>
-            </a:pPr>
-          </a:p>
-          <a:p>
-            <a:pPr lvl="0" indent="0" marL="0">
-              <a:buNone/>
-            </a:pPr>
-            <a:r>
-              <a:rPr/>
-              <a:t>There is no normal equation for logistic regression. It has to be solved iteratively, which is why LogisticRegression has a max_iter argument and LinearRegression does not. If a student ever sees a convergence warning, that is what it is about.</a:t>
+              <a:t>Left panel, the costs. A drive failed and the model said 0.0001. Squared error charges 0.9998. An honest “don’t know” - 0.5 - costs 0.25. So the worst possible answer is four times worse than a shrug. Log loss charges 9.2 against 0.69, and the ratio grows without bound.</a:t>
+            </a:r>
+          </a:p>
+          <a:p>
+            <a:pPr lvl="0" indent="0" marL="0">
+              <a:buNone/>
+            </a:pPr>
+          </a:p>
+          <a:p>
+            <a:pPr lvl="0" indent="0" marL="0">
+              <a:buNone/>
+            </a:pPr>
+            <a:r>
+              <a:rPr/>
+              <a:t>Right panel is the real argument, so spend the time here. The gradient is what the optimiser actually uses. Squared error’s gradient through the sigmoid carries a factor p times one-minus-p - which is exactly the sigmoid derivative from slide 10 - and that factor goes to zero as p goes to zero.</a:t>
+            </a:r>
+          </a:p>
+          <a:p>
+            <a:pPr lvl="0" indent="0" marL="0">
+              <a:buNone/>
+            </a:pPr>
+          </a:p>
+          <a:p>
+            <a:pPr lvl="0" indent="0" marL="0">
+              <a:buNone/>
+            </a:pPr>
+            <a:r>
+              <a:rPr/>
+              <a:t>Say it as a sentence: the wronger the model gets, the less squared error asks it to change. At p = 0.001 the gradient is a five-hundredth of log loss’s. Log loss goes the other way, approaching its maximum push exactly where the error is worst.</a:t>
+            </a:r>
+          </a:p>
+          <a:p>
+            <a:pPr lvl="0" indent="0" marL="0">
+              <a:buNone/>
+            </a:pPr>
+          </a:p>
+          <a:p>
+            <a:pPr lvl="0" indent="0" marL="0">
+              <a:buNone/>
+            </a:pPr>
+            <a:r>
+              <a:rPr/>
+              <a:t>That is the failure. Not that squared error scores badly - that it stops teaching.</a:t>
             </a:r>
           </a:p>
         </p:txBody>
@@ -1632,63 +1619,49 @@
             </a:pPr>
             <a:r>
               <a:rPr/>
-              <a:t>Fifteen lines of NumPy, then one line of scikit-learn, and the same answer. Run notebook 01. Twenty minutes. The parts worth stopping on:</a:t>
-            </a:r>
-          </a:p>
-          <a:p>
-            <a:pPr lvl="0" indent="0" marL="0">
-              <a:buNone/>
-            </a:pPr>
-          </a:p>
-          <a:p>
-            <a:pPr lvl="0" indent="0" marL="0">
-              <a:buNone/>
-            </a:pPr>
-            <a:r>
-              <a:rPr/>
-              <a:t>The linear-fit failure - let them see 3,606 negative probabilities printed rather than being told.</a:t>
-            </a:r>
-          </a:p>
-          <a:p>
-            <a:pPr lvl="0" indent="0" marL="0">
-              <a:buNone/>
-            </a:pPr>
-          </a:p>
-          <a:p>
-            <a:pPr lvl="0" indent="0" marL="0">
-              <a:buNone/>
-            </a:pPr>
-            <a:r>
-              <a:rPr/>
-              <a:t>The gradient/loss figure, which is the argument you just made, in code they can change. Invite them to change it: what happens to the squared-error gradient at p = 0.5?</a:t>
-            </a:r>
-          </a:p>
-          <a:p>
-            <a:pPr lvl="0" indent="0" marL="0">
-              <a:buNone/>
-            </a:pPr>
-          </a:p>
-          <a:p>
-            <a:pPr lvl="0" indent="0" marL="0">
-              <a:buNone/>
-            </a:pPr>
-            <a:r>
-              <a:rPr/>
-              <a:t>The coefficient recovery table, including the decoy.</a:t>
-            </a:r>
-          </a:p>
-          <a:p>
-            <a:pPr lvl="0" indent="0" marL="0">
-              <a:buNone/>
-            </a:pPr>
-          </a:p>
-          <a:p>
-            <a:pPr lvl="0" indent="0" marL="0">
-              <a:buNone/>
-            </a:pPr>
-            <a:r>
-              <a:rPr/>
-              <a:t>If time is short, skip the descent curve - it is the least surprising cell and they saw the same picture in lesson 3.</a:t>
+              <a:t>State it, do not prove it; the handout section 4.3 has the argument.</a:t>
+            </a:r>
+          </a:p>
+          <a:p>
+            <a:pPr lvl="0" indent="0" marL="0">
+              <a:buNone/>
+            </a:pPr>
+          </a:p>
+          <a:p>
+            <a:pPr lvl="0" indent="0" marL="0">
+              <a:buNone/>
+            </a:pPr>
+            <a:r>
+              <a:rPr/>
+              <a:t>The consequence is practical: gradient descent on log loss cannot get trapped. Squared error through a sigmoid has no such guarantee and is in general non-convex.</a:t>
+            </a:r>
+          </a:p>
+          <a:p>
+            <a:pPr lvl="0" indent="0" marL="0">
+              <a:buNone/>
+            </a:pPr>
+          </a:p>
+          <a:p>
+            <a:pPr lvl="0" indent="0" marL="0">
+              <a:buNone/>
+            </a:pPr>
+            <a:r>
+              <a:rPr/>
+              <a:t>Now the caution that catches people, and it is worth ten seconds because they will hit it in the notebook. Convex does NOT mean there is a closed-form solution. Setting the gradient to zero gives X-transpose times sigma of Xw minus y equals zero, which is not linear in w - the sigmoid is in the way.</a:t>
+            </a:r>
+          </a:p>
+          <a:p>
+            <a:pPr lvl="0" indent="0" marL="0">
+              <a:buNone/>
+            </a:pPr>
+          </a:p>
+          <a:p>
+            <a:pPr lvl="0" indent="0" marL="0">
+              <a:buNone/>
+            </a:pPr>
+            <a:r>
+              <a:rPr/>
+              <a:t>There is no normal equation for logistic regression. It has to be solved iteratively, which is why LogisticRegression has a max_iter argument and LinearRegression does not. If a student ever sees a convergence warning, that is what it is about.</a:t>
             </a:r>
           </a:p>
         </p:txBody>
@@ -1770,49 +1743,63 @@
             </a:pPr>
             <a:r>
               <a:rPr/>
-              <a:t>Two features, so the model can be drawn. The black line is where the predicted probability is exactly 0.5 - equivalently, where the log-odds are zero.</a:t>
-            </a:r>
-          </a:p>
-          <a:p>
-            <a:pPr lvl="0" indent="0" marL="0">
-              <a:buNone/>
-            </a:pPr>
-          </a:p>
-          <a:p>
-            <a:pPr lvl="0" indent="0" marL="0">
-              <a:buNone/>
-            </a:pPr>
-            <a:r>
-              <a:rPr/>
-              <a:t>First observation: it is STRAIGHT. Logistic regression is a linear classifier. The curve is in the probabilities, not in the boundary. That surprises people who expected the sigmoid to bend it.</a:t>
-            </a:r>
-          </a:p>
-          <a:p>
-            <a:pPr lvl="0" indent="0" marL="0">
-              <a:buNone/>
-            </a:pPr>
-          </a:p>
-          <a:p>
-            <a:pPr lvl="0" indent="0" marL="0">
-              <a:buNone/>
-            </a:pPr>
-            <a:r>
-              <a:rPr/>
-              <a:t>Second observation, and this is the bridge to the rest of the lesson: almost every gold point - every drive that actually failed - is on the blue side of the line. At a threshold of 0.5 this model calls nearly the whole fleet healthy, including most of the drives that failed.</a:t>
-            </a:r>
-          </a:p>
-          <a:p>
-            <a:pPr lvl="0" indent="0" marL="0">
-              <a:buNone/>
-            </a:pPr>
-          </a:p>
-          <a:p>
-            <a:pPr lvl="0" indent="0" marL="0">
-              <a:buNone/>
-            </a:pPr>
-            <a:r>
-              <a:rPr/>
-              <a:t>Ask: is that a bad model? Take answers. Then say: the probabilities are fine. The threshold of 0.5 is a habit. Telling those two apart is the rest of the lesson.</a:t>
+              <a:t>Fifteen lines of NumPy, then one line of scikit-learn, and the same answer. Run notebook 01. Twenty minutes. The parts worth stopping on:</a:t>
+            </a:r>
+          </a:p>
+          <a:p>
+            <a:pPr lvl="0" indent="0" marL="0">
+              <a:buNone/>
+            </a:pPr>
+          </a:p>
+          <a:p>
+            <a:pPr lvl="0" indent="0" marL="0">
+              <a:buNone/>
+            </a:pPr>
+            <a:r>
+              <a:rPr/>
+              <a:t>The linear-fit failure - let them see 3,606 negative probabilities printed rather than being told.</a:t>
+            </a:r>
+          </a:p>
+          <a:p>
+            <a:pPr lvl="0" indent="0" marL="0">
+              <a:buNone/>
+            </a:pPr>
+          </a:p>
+          <a:p>
+            <a:pPr lvl="0" indent="0" marL="0">
+              <a:buNone/>
+            </a:pPr>
+            <a:r>
+              <a:rPr/>
+              <a:t>The gradient/loss figure, which is the argument you just made, in code they can change. Invite them to change it: what happens to the squared-error gradient at p = 0.5?</a:t>
+            </a:r>
+          </a:p>
+          <a:p>
+            <a:pPr lvl="0" indent="0" marL="0">
+              <a:buNone/>
+            </a:pPr>
+          </a:p>
+          <a:p>
+            <a:pPr lvl="0" indent="0" marL="0">
+              <a:buNone/>
+            </a:pPr>
+            <a:r>
+              <a:rPr/>
+              <a:t>The coefficient recovery table, including the decoy.</a:t>
+            </a:r>
+          </a:p>
+          <a:p>
+            <a:pPr lvl="0" indent="0" marL="0">
+              <a:buNone/>
+            </a:pPr>
+          </a:p>
+          <a:p>
+            <a:pPr lvl="0" indent="0" marL="0">
+              <a:buNone/>
+            </a:pPr>
+            <a:r>
+              <a:rPr/>
+              <a:t>If time is short, skip the descent curve - it is the least surprising cell and they saw the same picture in lesson 3.</a:t>
             </a:r>
           </a:p>
         </p:txBody>
@@ -2004,7 +1991,49 @@
             </a:pPr>
             <a:r>
               <a:rPr/>
-              <a:t>Ten minutes. When they come back, the first slide is the trap, and it works best if they have not been thinking about it.</a:t>
+              <a:t>Two features, so the model can be drawn. The black line is where the predicted probability is exactly 0.5 - equivalently, where the log-odds are zero.</a:t>
+            </a:r>
+          </a:p>
+          <a:p>
+            <a:pPr lvl="0" indent="0" marL="0">
+              <a:buNone/>
+            </a:pPr>
+          </a:p>
+          <a:p>
+            <a:pPr lvl="0" indent="0" marL="0">
+              <a:buNone/>
+            </a:pPr>
+            <a:r>
+              <a:rPr/>
+              <a:t>First observation: it is STRAIGHT. Logistic regression is a linear classifier. The curve is in the probabilities, not in the boundary. That surprises people who expected the sigmoid to bend it.</a:t>
+            </a:r>
+          </a:p>
+          <a:p>
+            <a:pPr lvl="0" indent="0" marL="0">
+              <a:buNone/>
+            </a:pPr>
+          </a:p>
+          <a:p>
+            <a:pPr lvl="0" indent="0" marL="0">
+              <a:buNone/>
+            </a:pPr>
+            <a:r>
+              <a:rPr/>
+              <a:t>Second observation, and this is the bridge to the rest of the lesson: almost every gold point - every drive that actually failed - is on the blue side of the line. At a threshold of 0.5 this model calls nearly the whole fleet healthy, including most of the drives that failed.</a:t>
+            </a:r>
+          </a:p>
+          <a:p>
+            <a:pPr lvl="0" indent="0" marL="0">
+              <a:buNone/>
+            </a:pPr>
+          </a:p>
+          <a:p>
+            <a:pPr lvl="0" indent="0" marL="0">
+              <a:buNone/>
+            </a:pPr>
+            <a:r>
+              <a:rPr/>
+              <a:t>Ask: is that a bad model? Take answers. Then say: the probabilities are fine. The threshold of 0.5 is a habit. Telling those two apart is the rest of the lesson.</a:t>
             </a:r>
           </a:p>
         </p:txBody>
@@ -2086,59 +2115,7 @@
             </a:pPr>
             <a:r>
               <a:rPr/>
-              <a:t>This is the number to remember from lesson 4. Put it up and say nothing for a moment.</a:t>
-            </a:r>
-          </a:p>
-          <a:p>
-            <a:pPr lvl="0" indent="0" marL="0">
-              <a:buNone/>
-            </a:pPr>
-          </a:p>
-          <a:p>
-            <a:pPr lvl="0" indent="0" marL="0">
-              <a:buNone/>
-            </a:pPr>
-            <a:r>
-              <a:rPr/>
-              <a:t>A model that could be written </a:t>
-            </a:r>
-            <a:r>
-              <a:rPr>
-                <a:latin typeface="Courier"/>
-              </a:rPr>
-              <a:t>return 0</a:t>
-            </a:r>
-            <a:r>
-              <a:rPr/>
-              <a:t> - no learning, no data, no features - scores 96.20%. The model they just built, which finds more than half the failing drives, scores 97.70%. One and a half percentage points separate a real model from a worthless one.</a:t>
-            </a:r>
-          </a:p>
-          <a:p>
-            <a:pPr lvl="0" indent="0" marL="0">
-              <a:buNone/>
-            </a:pPr>
-          </a:p>
-          <a:p>
-            <a:pPr lvl="0" indent="0" marL="0">
-              <a:buNone/>
-            </a:pPr>
-            <a:r>
-              <a:rPr/>
-              <a:t>The arithmetic is not subtle: 1,924 of the 2,000 test drives are healthy, so answering “healthy” collects them all for free. Only 3.8% of the test set is left to compete over.</a:t>
-            </a:r>
-          </a:p>
-          <a:p>
-            <a:pPr lvl="0" indent="0" marL="0">
-              <a:buNone/>
-            </a:pPr>
-          </a:p>
-          <a:p>
-            <a:pPr lvl="0" indent="0" marL="0">
-              <a:buNone/>
-            </a:pPr>
-            <a:r>
-              <a:rPr/>
-              <a:t>This is the 306 from the first ten minutes, coming back as an accuracy score.</a:t>
+              <a:t>Ten minutes. When they come back, the first slide is the trap, and it works best if they have not been thinking about it.</a:t>
             </a:r>
           </a:p>
         </p:txBody>
@@ -2220,49 +2197,59 @@
             </a:pPr>
             <a:r>
               <a:rPr/>
-              <a:t>Be careful to defend the instinct rather than mock it. Accuracy is not a naive metric, and students who reached for it were not being lazy - on a balanced problem it is the correct summary and everything else is a complication.</a:t>
-            </a:r>
-          </a:p>
-          <a:p>
-            <a:pPr lvl="0" indent="0" marL="0">
-              <a:buNone/>
-            </a:pPr>
-          </a:p>
-          <a:p>
-            <a:pPr lvl="0" indent="0" marL="0">
-              <a:buNone/>
-            </a:pPr>
-            <a:r>
-              <a:rPr/>
-              <a:t>It stops being informative precisely when one class is rare. And then list the problems: fraud, disease screening, intrusion detection, equipment failure, spam. In every one of them the class you care about is the small one.</a:t>
-            </a:r>
-          </a:p>
-          <a:p>
-            <a:pPr lvl="0" indent="0" marL="0">
-              <a:buNone/>
-            </a:pPr>
-          </a:p>
-          <a:p>
-            <a:pPr lvl="0" indent="0" marL="0">
-              <a:buNone/>
-            </a:pPr>
-            <a:r>
-              <a:rPr/>
-              <a:t>The general statement, worth putting on the board: if a share pi of the cases are positive (the positive rate), the trivial always-negative classifier scores 1 minus pi. Here 96.2%. In some fraud problems, where the rate is one in a thousand, 99.9%.</a:t>
-            </a:r>
-          </a:p>
-          <a:p>
-            <a:pPr lvl="0" indent="0" marL="0">
-              <a:buNone/>
-            </a:pPr>
-          </a:p>
-          <a:p>
-            <a:pPr lvl="0" indent="0" marL="0">
-              <a:buNone/>
-            </a:pPr>
-            <a:r>
-              <a:rPr/>
-              <a:t>Accuracy is not wrong. It is answering a question nobody asked.</a:t>
+              <a:t>This is the number to remember from lesson 4. Put it up and say nothing for a moment.</a:t>
+            </a:r>
+          </a:p>
+          <a:p>
+            <a:pPr lvl="0" indent="0" marL="0">
+              <a:buNone/>
+            </a:pPr>
+          </a:p>
+          <a:p>
+            <a:pPr lvl="0" indent="0" marL="0">
+              <a:buNone/>
+            </a:pPr>
+            <a:r>
+              <a:rPr/>
+              <a:t>A model that could be written </a:t>
+            </a:r>
+            <a:r>
+              <a:rPr>
+                <a:latin typeface="Courier"/>
+              </a:rPr>
+              <a:t>return 0</a:t>
+            </a:r>
+            <a:r>
+              <a:rPr/>
+              <a:t> - no learning, no data, no features - scores 96.20%. The model they just built, which finds more than half the failing drives, scores 97.70%. One and a half percentage points separate a real model from a worthless one.</a:t>
+            </a:r>
+          </a:p>
+          <a:p>
+            <a:pPr lvl="0" indent="0" marL="0">
+              <a:buNone/>
+            </a:pPr>
+          </a:p>
+          <a:p>
+            <a:pPr lvl="0" indent="0" marL="0">
+              <a:buNone/>
+            </a:pPr>
+            <a:r>
+              <a:rPr/>
+              <a:t>The arithmetic is not subtle: 1,924 of the 2,000 test drives are healthy, so answering “healthy” collects them all for free. Only 3.8% of the test set is left to compete over.</a:t>
+            </a:r>
+          </a:p>
+          <a:p>
+            <a:pPr lvl="0" indent="0" marL="0">
+              <a:buNone/>
+            </a:pPr>
+          </a:p>
+          <a:p>
+            <a:pPr lvl="0" indent="0" marL="0">
+              <a:buNone/>
+            </a:pPr>
+            <a:r>
+              <a:rPr/>
+              <a:t>This is the 306 from the first ten minutes, coming back as an accuracy score.</a:t>
             </a:r>
           </a:p>
         </p:txBody>
@@ -2344,49 +2331,49 @@
             </a:pPr>
             <a:r>
               <a:rPr/>
-              <a:t>The fix is to stop collapsing four outcomes into one number.</a:t>
-            </a:r>
-          </a:p>
-          <a:p>
-            <a:pPr lvl="0" indent="0" marL="0">
-              <a:buNone/>
-            </a:pPr>
-          </a:p>
-          <a:p>
-            <a:pPr lvl="0" indent="0" marL="0">
-              <a:buNone/>
-            </a:pPr>
-            <a:r>
-              <a:rPr/>
-              <a:t>Side by side, the two models are obviously not comparable - and the number that separates them, 0 caught against 43, is nowhere in the accuracy figure.</a:t>
-            </a:r>
-          </a:p>
-          <a:p>
-            <a:pPr lvl="0" indent="0" marL="0">
-              <a:buNone/>
-            </a:pPr>
-          </a:p>
-          <a:p>
-            <a:pPr lvl="0" indent="0" marL="0">
-              <a:buNone/>
-            </a:pPr>
-            <a:r>
-              <a:rPr/>
-              <a:t>Teach them to read the bottom-left cell first when misses are expensive: 33 drives failed and were called healthy. That is the cell that costs money, and it is the one a single-number metric hides.</a:t>
-            </a:r>
-          </a:p>
-          <a:p>
-            <a:pPr lvl="0" indent="0" marL="0">
-              <a:buNone/>
-            </a:pPr>
-          </a:p>
-          <a:p>
-            <a:pPr lvl="0" indent="0" marL="0">
-              <a:buNone/>
-            </a:pPr>
-            <a:r>
-              <a:rPr/>
-              <a:t>Worth naming the convention while it is on screen, because half the world uses the transpose: scikit-learn puts truth in rows and predictions in columns. Any time they read a confusion matrix from a paper, check which way round it is before drawing conclusions.</a:t>
+              <a:t>Be careful to defend the instinct rather than mock it. Accuracy is not a naive metric, and students who reached for it were not being lazy - on a balanced problem it is the correct summary and everything else is a complication.</a:t>
+            </a:r>
+          </a:p>
+          <a:p>
+            <a:pPr lvl="0" indent="0" marL="0">
+              <a:buNone/>
+            </a:pPr>
+          </a:p>
+          <a:p>
+            <a:pPr lvl="0" indent="0" marL="0">
+              <a:buNone/>
+            </a:pPr>
+            <a:r>
+              <a:rPr/>
+              <a:t>It stops being informative precisely when one class is rare. And then list the problems: fraud, disease screening, intrusion detection, equipment failure, spam. In every one of them the class you care about is the small one.</a:t>
+            </a:r>
+          </a:p>
+          <a:p>
+            <a:pPr lvl="0" indent="0" marL="0">
+              <a:buNone/>
+            </a:pPr>
+          </a:p>
+          <a:p>
+            <a:pPr lvl="0" indent="0" marL="0">
+              <a:buNone/>
+            </a:pPr>
+            <a:r>
+              <a:rPr/>
+              <a:t>The general statement, worth putting on the board: if a share pi of the cases are positive (the positive rate), the trivial always-negative classifier scores 1 minus pi. Here 96.2%. In some fraud problems, where the rate is one in a thousand, 99.9%.</a:t>
+            </a:r>
+          </a:p>
+          <a:p>
+            <a:pPr lvl="0" indent="0" marL="0">
+              <a:buNone/>
+            </a:pPr>
+          </a:p>
+          <a:p>
+            <a:pPr lvl="0" indent="0" marL="0">
+              <a:buNone/>
+            </a:pPr>
+            <a:r>
+              <a:rPr/>
+              <a:t>Accuracy is not wrong. It is answering a question nobody asked.</a:t>
             </a:r>
           </a:p>
         </p:txBody>
@@ -2468,35 +2455,49 @@
             </a:pPr>
             <a:r>
               <a:rPr/>
-              <a:t>The names are jargon until they are attached to consequences, so attach them here and keep the numbers visible - they come back at the end of the lesson when we choose a threshold.</a:t>
-            </a:r>
-          </a:p>
-          <a:p>
-            <a:pPr lvl="0" indent="0" marL="0">
-              <a:buNone/>
-            </a:pPr>
-          </a:p>
-          <a:p>
-            <a:pPr lvl="0" indent="0" marL="0">
-              <a:buNone/>
-            </a:pPr>
-            <a:r>
-              <a:rPr/>
-              <a:t>The essential point: these two errors are NOT the same size, and no single-number metric knows that. Accuracy treats them as identical. F1 treats them as identical. Only a cost, supplied from outside the data, distinguishes them.</a:t>
-            </a:r>
-          </a:p>
-          <a:p>
-            <a:pPr lvl="0" indent="0" marL="0">
-              <a:buNone/>
-            </a:pPr>
-          </a:p>
-          <a:p>
-            <a:pPr lvl="0" indent="0" marL="0">
-              <a:buNone/>
-            </a:pPr>
-            <a:r>
-              <a:rPr/>
-              <a:t>Ask for a domain where the ratio goes the other way - where a false positive is the expensive one. Medical screening that triggers an invasive biopsy is the usual answer; content moderation that removes a legitimate post is another.</a:t>
+              <a:t>The fix is to stop collapsing four outcomes into one number.</a:t>
+            </a:r>
+          </a:p>
+          <a:p>
+            <a:pPr lvl="0" indent="0" marL="0">
+              <a:buNone/>
+            </a:pPr>
+          </a:p>
+          <a:p>
+            <a:pPr lvl="0" indent="0" marL="0">
+              <a:buNone/>
+            </a:pPr>
+            <a:r>
+              <a:rPr/>
+              <a:t>Side by side, the two models are obviously not comparable - and the number that separates them, 0 caught against 43, is nowhere in the accuracy figure.</a:t>
+            </a:r>
+          </a:p>
+          <a:p>
+            <a:pPr lvl="0" indent="0" marL="0">
+              <a:buNone/>
+            </a:pPr>
+          </a:p>
+          <a:p>
+            <a:pPr lvl="0" indent="0" marL="0">
+              <a:buNone/>
+            </a:pPr>
+            <a:r>
+              <a:rPr/>
+              <a:t>Teach them to read the bottom-left cell first when misses are expensive: 33 drives failed and were called healthy. That is the cell that costs money, and it is the one a single-number metric hides.</a:t>
+            </a:r>
+          </a:p>
+          <a:p>
+            <a:pPr lvl="0" indent="0" marL="0">
+              <a:buNone/>
+            </a:pPr>
+          </a:p>
+          <a:p>
+            <a:pPr lvl="0" indent="0" marL="0">
+              <a:buNone/>
+            </a:pPr>
+            <a:r>
+              <a:rPr/>
+              <a:t>Worth naming the convention while it is on screen, because half the world uses the transpose: scikit-learn puts truth in rows and predictions in columns. Any time they read a confusion matrix from a paper, check which way round it is before drawing conclusions.</a:t>
             </a:r>
           </a:p>
         </p:txBody>
@@ -2578,49 +2579,35 @@
             </a:pPr>
             <a:r>
               <a:rPr/>
-              <a:t>This picture prevents the most common confusion of the lesson. Both metrics put the true positives - failed drives we flagged - on top of the fraction. The difference is entirely in what goes underneath, and the shading shows it.</a:t>
-            </a:r>
-          </a:p>
-          <a:p>
-            <a:pPr lvl="0" indent="0" marL="0">
-              <a:buNone/>
-            </a:pPr>
-          </a:p>
-          <a:p>
-            <a:pPr lvl="0" indent="0" marL="0">
-              <a:buNone/>
-            </a:pPr>
-            <a:r>
-              <a:rPr/>
-              <a:t>Precision divides by the COLUMN - everything we flagged. When this model raises an alarm, how often is it right? That is the technician’s question: how much of my time are you wasting?</a:t>
-            </a:r>
-          </a:p>
-          <a:p>
-            <a:pPr lvl="0" indent="0" marL="0">
-              <a:buNone/>
-            </a:pPr>
-          </a:p>
-          <a:p>
-            <a:pPr lvl="0" indent="0" marL="0">
-              <a:buNone/>
-            </a:pPr>
-            <a:r>
-              <a:rPr/>
-              <a:t>Recall divides by the ROW - everything that actually failed. Of the drives that were going to fail, how many did we find? That is the operations manager’s question: how exposed am I still?</a:t>
-            </a:r>
-          </a:p>
-          <a:p>
-            <a:pPr lvl="0" indent="0" marL="0">
-              <a:buNone/>
-            </a:pPr>
-          </a:p>
-          <a:p>
-            <a:pPr lvl="0" indent="0" marL="0">
-              <a:buNone/>
-            </a:pPr>
-            <a:r>
-              <a:rPr/>
-              <a:t>Give them the hook and make them repeat it: precision is about the alarms, recall is about the failures. When in doubt, find the denominator and ask which population it is.</a:t>
+              <a:t>The names are jargon until they are attached to consequences, so attach them here and keep the numbers visible - they come back at the end of the lesson when we choose a threshold.</a:t>
+            </a:r>
+          </a:p>
+          <a:p>
+            <a:pPr lvl="0" indent="0" marL="0">
+              <a:buNone/>
+            </a:pPr>
+          </a:p>
+          <a:p>
+            <a:pPr lvl="0" indent="0" marL="0">
+              <a:buNone/>
+            </a:pPr>
+            <a:r>
+              <a:rPr/>
+              <a:t>The essential point: these two errors are NOT the same size, and no single-number metric knows that. Accuracy treats them as identical. F1 treats them as identical. Only a cost, supplied from outside the data, distinguishes them.</a:t>
+            </a:r>
+          </a:p>
+          <a:p>
+            <a:pPr lvl="0" indent="0" marL="0">
+              <a:buNone/>
+            </a:pPr>
+          </a:p>
+          <a:p>
+            <a:pPr lvl="0" indent="0" marL="0">
+              <a:buNone/>
+            </a:pPr>
+            <a:r>
+              <a:rPr/>
+              <a:t>Ask for a domain where the ratio goes the other way - where a false positive is the expensive one. Medical screening that triggers an invasive biopsy is the usual answer; content moderation that removes a legitimate post is another.</a:t>
             </a:r>
           </a:p>
         </p:txBody>
@@ -2702,35 +2689,49 @@
             </a:pPr>
             <a:r>
               <a:rPr/>
-              <a:t>Read each line as an English sentence with the counts in it, not as a ratio. That is the habit worth building: a metric that cannot be said as a sentence about actual objects has not been understood.</a:t>
-            </a:r>
-          </a:p>
-          <a:p>
-            <a:pPr lvl="0" indent="0" marL="0">
-              <a:buNone/>
-            </a:pPr>
-          </a:p>
-          <a:p>
-            <a:pPr lvl="0" indent="0" marL="0">
-              <a:buNone/>
-            </a:pPr>
-            <a:r>
-              <a:rPr/>
-              <a:t>Specificity is recall for the negative class: of the healthy drives, how many did we leave alone. One minus it is the false positive rate, which comes back in the receiver operating characteristic (ROC) section. Mention it now so the term is not new later.</a:t>
-            </a:r>
-          </a:p>
-          <a:p>
-            <a:pPr lvl="0" indent="0" marL="0">
-              <a:buNone/>
-            </a:pPr>
-          </a:p>
-          <a:p>
-            <a:pPr lvl="0" indent="0" marL="0">
-              <a:buNone/>
-            </a:pPr>
-            <a:r>
-              <a:rPr/>
-              <a:t>If someone asks which of the three to report: the answer is that it depends on who is asking, which is the honest answer and also the lesson.</a:t>
+              <a:t>This picture prevents the most common confusion of the lesson. Both metrics put the true positives - failed drives we flagged - on top of the fraction. The difference is entirely in what goes underneath, and the shading shows it.</a:t>
+            </a:r>
+          </a:p>
+          <a:p>
+            <a:pPr lvl="0" indent="0" marL="0">
+              <a:buNone/>
+            </a:pPr>
+          </a:p>
+          <a:p>
+            <a:pPr lvl="0" indent="0" marL="0">
+              <a:buNone/>
+            </a:pPr>
+            <a:r>
+              <a:rPr/>
+              <a:t>Precision divides by the COLUMN - everything we flagged. When this model raises an alarm, how often is it right? That is the technician’s question: how much of my time are you wasting?</a:t>
+            </a:r>
+          </a:p>
+          <a:p>
+            <a:pPr lvl="0" indent="0" marL="0">
+              <a:buNone/>
+            </a:pPr>
+          </a:p>
+          <a:p>
+            <a:pPr lvl="0" indent="0" marL="0">
+              <a:buNone/>
+            </a:pPr>
+            <a:r>
+              <a:rPr/>
+              <a:t>Recall divides by the ROW - everything that actually failed. Of the drives that were going to fail, how many did we find? That is the operations manager’s question: how exposed am I still?</a:t>
+            </a:r>
+          </a:p>
+          <a:p>
+            <a:pPr lvl="0" indent="0" marL="0">
+              <a:buNone/>
+            </a:pPr>
+          </a:p>
+          <a:p>
+            <a:pPr lvl="0" indent="0" marL="0">
+              <a:buNone/>
+            </a:pPr>
+            <a:r>
+              <a:rPr/>
+              <a:t>Give them the hook and make them repeat it: precision is about the alarms, recall is about the failures. When in doubt, find the denominator and ask which population it is.</a:t>
             </a:r>
           </a:p>
         </p:txBody>
@@ -2812,63 +2813,35 @@
             </a:pPr>
             <a:r>
               <a:rPr/>
-              <a:t>Take the stupidest possible model - flag every single drive - and score it. Recall is a perfect 1.0. Precision is 0.038.</a:t>
-            </a:r>
-          </a:p>
-          <a:p>
-            <a:pPr lvl="0" indent="0" marL="0">
-              <a:buNone/>
-            </a:pPr>
-          </a:p>
-          <a:p>
-            <a:pPr lvl="0" indent="0" marL="0">
-              <a:buNone/>
-            </a:pPr>
-            <a:r>
-              <a:rPr/>
-              <a:t>The ordinary average gives that model 0.519, which looks respectable. Anyone scanning a results table would not blink at 0.519.</a:t>
-            </a:r>
-          </a:p>
-          <a:p>
-            <a:pPr lvl="0" indent="0" marL="0">
-              <a:buNone/>
-            </a:pPr>
-          </a:p>
-          <a:p>
-            <a:pPr lvl="0" indent="0" marL="0">
-              <a:buNone/>
-            </a:pPr>
-            <a:r>
-              <a:rPr/>
-              <a:t>The harmonic mean gives it 0.073, which is the truth.</a:t>
-            </a:r>
-          </a:p>
-          <a:p>
-            <a:pPr lvl="0" indent="0" marL="0">
-              <a:buNone/>
-            </a:pPr>
-          </a:p>
-          <a:p>
-            <a:pPr lvl="0" indent="0" marL="0">
-              <a:buNone/>
-            </a:pPr>
-            <a:r>
-              <a:rPr/>
-              <a:t>The reason: the harmonic mean is dominated by the smaller of the two numbers. A model is only as good as its weaker side, and F1 refuses to let a perfect score on one axis buy a pass on the other.</a:t>
-            </a:r>
-          </a:p>
-          <a:p>
-            <a:pPr lvl="0" indent="0" marL="0">
-              <a:buNone/>
-            </a:pPr>
-          </a:p>
-          <a:p>
-            <a:pPr lvl="0" indent="0" marL="0">
-              <a:buNone/>
-            </a:pPr>
-            <a:r>
-              <a:rPr/>
-              <a:t>Mention F-beta in one sentence: a version of F1 with a weight beta, where beta above 1 counts recall more than precision. That is what you want here, where a miss costs about nineteen times a false alarm (2,600 against 140 euros). F2 is the usual choice.</a:t>
+              <a:t>Read each line as an English sentence with the counts in it, not as a ratio. That is the habit worth building: a metric that cannot be said as a sentence about actual objects has not been understood.</a:t>
+            </a:r>
+          </a:p>
+          <a:p>
+            <a:pPr lvl="0" indent="0" marL="0">
+              <a:buNone/>
+            </a:pPr>
+          </a:p>
+          <a:p>
+            <a:pPr lvl="0" indent="0" marL="0">
+              <a:buNone/>
+            </a:pPr>
+            <a:r>
+              <a:rPr/>
+              <a:t>Specificity is recall for the negative class: of the healthy drives, how many did we leave alone. One minus it is the false positive rate, which comes back in the receiver operating characteristic (ROC) section. Mention it now so the term is not new later.</a:t>
+            </a:r>
+          </a:p>
+          <a:p>
+            <a:pPr lvl="0" indent="0" marL="0">
+              <a:buNone/>
+            </a:pPr>
+          </a:p>
+          <a:p>
+            <a:pPr lvl="0" indent="0" marL="0">
+              <a:buNone/>
+            </a:pPr>
+            <a:r>
+              <a:rPr/>
+              <a:t>If someone asks which of the three to report: the answer is that it depends on who is asking, which is the honest answer and also the lesson.</a:t>
             </a:r>
           </a:p>
         </p:txBody>
@@ -2950,63 +2923,63 @@
             </a:pPr>
             <a:r>
               <a:rPr/>
-              <a:t>classification_report is scikit-learn’s summary table, and they will print it themselves in notebook 2 in about five minutes: one row per class, then three summary rows - accuracy, macro avg, weighted avg. The two numbers on this slide are the f1-score column of the last two.</a:t>
-            </a:r>
-          </a:p>
-          <a:p>
-            <a:pPr lvl="0" indent="0" marL="0">
-              <a:buNone/>
-            </a:pPr>
-          </a:p>
-          <a:p>
-            <a:pPr lvl="0" indent="0" marL="0">
-              <a:buNone/>
-            </a:pPr>
-            <a:r>
-              <a:rPr/>
-              <a:t>Anticipating it by one slide is deliberate. The rule for choosing between those rows is what they need in their heads while they run the notebook, not afterwards - left to themselves they quote whichever is biggest.</a:t>
-            </a:r>
-          </a:p>
-          <a:p>
-            <a:pPr lvl="0" indent="0" marL="0">
-              <a:buNone/>
-            </a:pPr>
-          </a:p>
-          <a:p>
-            <a:pPr lvl="0" indent="0" marL="0">
-              <a:buNone/>
-            </a:pPr>
-            <a:r>
-              <a:rPr/>
-              <a:t>The weighted average weights each class by how common it is, so on this problem it is essentially the healthy class talking, and it reads close to accuracy - inheriting exactly the blindness slides 22 to 25 were about.</a:t>
-            </a:r>
-          </a:p>
-          <a:p>
-            <a:pPr lvl="0" indent="0" marL="0">
-              <a:buNone/>
-            </a:pPr>
-          </a:p>
-          <a:p>
-            <a:pPr lvl="0" indent="0" marL="0">
-              <a:buNone/>
-            </a:pPr>
-            <a:r>
-              <a:rPr/>
-              <a:t>The macro average gives the two classes equal weight, so the rare class actually registers. 0.820 against 0.975 for the same model.</a:t>
-            </a:r>
-          </a:p>
-          <a:p>
-            <a:pPr lvl="0" indent="0" marL="0">
-              <a:buNone/>
-            </a:pPr>
-          </a:p>
-          <a:p>
-            <a:pPr lvl="0" indent="0" marL="0">
-              <a:buNone/>
-            </a:pPr>
-            <a:r>
-              <a:rPr/>
-              <a:t>The rule: on an imbalanced problem, quote the macro average or the minority class directly. Reporting the weighted average is not incorrect - it is the number that makes a mediocre model look finished, and choosing it without saying so is how a result gets oversold.</a:t>
+              <a:t>Take the stupidest possible model - flag every single drive - and score it. Recall is a perfect 1.0. Precision is 0.038.</a:t>
+            </a:r>
+          </a:p>
+          <a:p>
+            <a:pPr lvl="0" indent="0" marL="0">
+              <a:buNone/>
+            </a:pPr>
+          </a:p>
+          <a:p>
+            <a:pPr lvl="0" indent="0" marL="0">
+              <a:buNone/>
+            </a:pPr>
+            <a:r>
+              <a:rPr/>
+              <a:t>The ordinary average gives that model 0.519, which looks respectable. Anyone scanning a results table would not blink at 0.519.</a:t>
+            </a:r>
+          </a:p>
+          <a:p>
+            <a:pPr lvl="0" indent="0" marL="0">
+              <a:buNone/>
+            </a:pPr>
+          </a:p>
+          <a:p>
+            <a:pPr lvl="0" indent="0" marL="0">
+              <a:buNone/>
+            </a:pPr>
+            <a:r>
+              <a:rPr/>
+              <a:t>The harmonic mean gives it 0.073, which is the truth.</a:t>
+            </a:r>
+          </a:p>
+          <a:p>
+            <a:pPr lvl="0" indent="0" marL="0">
+              <a:buNone/>
+            </a:pPr>
+          </a:p>
+          <a:p>
+            <a:pPr lvl="0" indent="0" marL="0">
+              <a:buNone/>
+            </a:pPr>
+            <a:r>
+              <a:rPr/>
+              <a:t>The reason: the harmonic mean is dominated by the smaller of the two numbers. A model is only as good as its weaker side, and F1 refuses to let a perfect score on one axis buy a pass on the other.</a:t>
+            </a:r>
+          </a:p>
+          <a:p>
+            <a:pPr lvl="0" indent="0" marL="0">
+              <a:buNone/>
+            </a:pPr>
+          </a:p>
+          <a:p>
+            <a:pPr lvl="0" indent="0" marL="0">
+              <a:buNone/>
+            </a:pPr>
+            <a:r>
+              <a:rPr/>
+              <a:t>Mention F-beta in one sentence: a version of F1 with a weight beta, where beta above 1 counts recall more than precision. That is what you want here, where a miss costs about nineteen times a false alarm (2,600 against 140 euros). F2 is the usual choice.</a:t>
             </a:r>
           </a:p>
         </p:txBody>
@@ -3088,35 +3061,63 @@
             </a:pPr>
             <a:r>
               <a:rPr/>
-              <a:t>The confusion matrix by hand, then from scikit-learn, then the threshold sweep. Run notebook 02. Twenty minutes.</a:t>
-            </a:r>
-          </a:p>
-          <a:p>
-            <a:pPr lvl="0" indent="0" marL="0">
-              <a:buNone/>
-            </a:pPr>
-          </a:p>
-          <a:p>
-            <a:pPr lvl="0" indent="0" marL="0">
-              <a:buNone/>
-            </a:pPr>
-            <a:r>
-              <a:rPr/>
-              <a:t>Have them build the four counts by hand before calling confusion_matrix. It is four comparisons and it takes two minutes, and it is what makes the jargon stop being jargon.</a:t>
-            </a:r>
-          </a:p>
-          <a:p>
-            <a:pPr lvl="0" indent="0" marL="0">
-              <a:buNone/>
-            </a:pPr>
-          </a:p>
-          <a:p>
-            <a:pPr lvl="0" indent="0" marL="0">
-              <a:buNone/>
-            </a:pPr>
-            <a:r>
-              <a:rPr/>
-              <a:t>Spend time on the threshold sweep table. Do not explain it first - let them read the columns and say what they see. Somebody will notice that accuracy barely moves. That is the moment to make the next slide.</a:t>
+              <a:t>classification_report is scikit-learn’s summary table, and they will print it themselves in notebook 2 in about five minutes: one row per class, then three summary rows - accuracy, macro avg, weighted avg. The two numbers on this slide are the f1-score column of the last two.</a:t>
+            </a:r>
+          </a:p>
+          <a:p>
+            <a:pPr lvl="0" indent="0" marL="0">
+              <a:buNone/>
+            </a:pPr>
+          </a:p>
+          <a:p>
+            <a:pPr lvl="0" indent="0" marL="0">
+              <a:buNone/>
+            </a:pPr>
+            <a:r>
+              <a:rPr/>
+              <a:t>Anticipating it by one slide is deliberate. The rule for choosing between those rows is what they need in their heads while they run the notebook, not afterwards - left to themselves they quote whichever is biggest.</a:t>
+            </a:r>
+          </a:p>
+          <a:p>
+            <a:pPr lvl="0" indent="0" marL="0">
+              <a:buNone/>
+            </a:pPr>
+          </a:p>
+          <a:p>
+            <a:pPr lvl="0" indent="0" marL="0">
+              <a:buNone/>
+            </a:pPr>
+            <a:r>
+              <a:rPr/>
+              <a:t>The weighted average weights each class by how common it is, so on this problem it is essentially the healthy class talking, and it reads close to accuracy - inheriting exactly the blindness slides 23 to 26 were about.</a:t>
+            </a:r>
+          </a:p>
+          <a:p>
+            <a:pPr lvl="0" indent="0" marL="0">
+              <a:buNone/>
+            </a:pPr>
+          </a:p>
+          <a:p>
+            <a:pPr lvl="0" indent="0" marL="0">
+              <a:buNone/>
+            </a:pPr>
+            <a:r>
+              <a:rPr/>
+              <a:t>The macro average gives the two classes equal weight, so the rare class actually registers. 0.820 against 0.975 for the same model.</a:t>
+            </a:r>
+          </a:p>
+          <a:p>
+            <a:pPr lvl="0" indent="0" marL="0">
+              <a:buNone/>
+            </a:pPr>
+          </a:p>
+          <a:p>
+            <a:pPr lvl="0" indent="0" marL="0">
+              <a:buNone/>
+            </a:pPr>
+            <a:r>
+              <a:rPr/>
+              <a:t>The rule: on an imbalanced problem, quote the macro average or the minority class directly. Reporting the weighted average is not incorrect - it is the number that makes a mediocre model look finished, and choosing it without saying so is how a result gets oversold.</a:t>
             </a:r>
           </a:p>
         </p:txBody>
@@ -3322,35 +3323,35 @@
             </a:pPr>
             <a:r>
               <a:rPr/>
-              <a:t>The title of that figure is the point: nothing about the model changes along the x-axis. Same coefficients, same probabilities, same drives. All that moves is where we draw the line between “leave it” and “replace it”.</a:t>
-            </a:r>
-          </a:p>
-          <a:p>
-            <a:pPr lvl="0" indent="0" marL="0">
-              <a:buNone/>
-            </a:pPr>
-          </a:p>
-          <a:p>
-            <a:pPr lvl="0" indent="0" marL="0">
-              <a:buNone/>
-            </a:pPr>
-            <a:r>
-              <a:rPr/>
-              <a:t>That 0.5 is predict()’s default and nothing more. It is the right choice when the two errors cost the same AND the classes are balanced. Neither is true here, and neither is true in most real problems.</a:t>
-            </a:r>
-          </a:p>
-          <a:p>
-            <a:pPr lvl="0" indent="0" marL="0">
-              <a:buNone/>
-            </a:pPr>
-          </a:p>
-          <a:p>
-            <a:pPr lvl="0" indent="0" marL="0">
-              <a:buNone/>
-            </a:pPr>
-            <a:r>
-              <a:rPr/>
-              <a:t>So when a paper or a colleague reports 77% precision, the useful follow-up is: at what threshold, and why that one? Most of the time there is no answer, because nobody chose it.</a:t>
+              <a:t>The confusion matrix by hand, then from scikit-learn, then the threshold sweep. Run notebook 02. Twenty minutes.</a:t>
+            </a:r>
+          </a:p>
+          <a:p>
+            <a:pPr lvl="0" indent="0" marL="0">
+              <a:buNone/>
+            </a:pPr>
+          </a:p>
+          <a:p>
+            <a:pPr lvl="0" indent="0" marL="0">
+              <a:buNone/>
+            </a:pPr>
+            <a:r>
+              <a:rPr/>
+              <a:t>Have them build the four counts by hand before calling confusion_matrix. It is four comparisons and it takes two minutes, and it is what makes the jargon stop being jargon.</a:t>
+            </a:r>
+          </a:p>
+          <a:p>
+            <a:pPr lvl="0" indent="0" marL="0">
+              <a:buNone/>
+            </a:pPr>
+          </a:p>
+          <a:p>
+            <a:pPr lvl="0" indent="0" marL="0">
+              <a:buNone/>
+            </a:pPr>
+            <a:r>
+              <a:rPr/>
+              <a:t>Spend time on the threshold sweep table. Do not explain it first - let them read the columns and say what they see. Somebody will notice that accuracy barely moves. That is the moment to make the next slide.</a:t>
             </a:r>
           </a:p>
         </p:txBody>
@@ -3432,49 +3433,35 @@
             </a:pPr>
             <a:r>
               <a:rPr/>
-              <a:t>Read it column by column with the room.</a:t>
-            </a:r>
-          </a:p>
-          <a:p>
-            <a:pPr lvl="0" indent="0" marL="0">
-              <a:buNone/>
-            </a:pPr>
-          </a:p>
-          <a:p>
-            <a:pPr lvl="0" indent="0" marL="0">
-              <a:buNone/>
-            </a:pPr>
-            <a:r>
-              <a:rPr/>
-              <a:t>Lower the threshold: recall rises, precision falls. At 0.02 we catch 69 of 76 failures and replace 284 healthy drives to do it. At 0.90 every alarm is justified and we catch fewer than a quarter.</a:t>
-            </a:r>
-          </a:p>
-          <a:p>
-            <a:pPr lvl="0" indent="0" marL="0">
-              <a:buNone/>
-            </a:pPr>
-          </a:p>
-          <a:p>
-            <a:pPr lvl="0" indent="0" marL="0">
-              <a:buNone/>
-            </a:pPr>
-            <a:r>
-              <a:rPr/>
-              <a:t>Now the accuracy column, which is the slide’s real argument. From 0.10 upwards it moves by three and a half percentage points, 0.942 to 0.977, while recall falls from 0.803 to 0.184. And its maximum is at 0.5 - the threshold that misses 33 of the 76 failures.</a:t>
-            </a:r>
-          </a:p>
-          <a:p>
-            <a:pPr lvl="0" indent="0" marL="0">
-              <a:buNone/>
-            </a:pPr>
-          </a:p>
-          <a:p>
-            <a:pPr lvl="0" indent="0" marL="0">
-              <a:buNone/>
-            </a:pPr>
-            <a:r>
-              <a:rPr/>
-              <a:t>Say the consequence plainly: tune on accuracy and it will quietly recommend catching fewer failures, because every alarm it drops was a possible false positive.</a:t>
+              <a:t>The title of that figure is the point: nothing about the model changes along the x-axis. Same coefficients, same probabilities, same drives. All that moves is where we draw the line between “leave it” and “replace it”.</a:t>
+            </a:r>
+          </a:p>
+          <a:p>
+            <a:pPr lvl="0" indent="0" marL="0">
+              <a:buNone/>
+            </a:pPr>
+          </a:p>
+          <a:p>
+            <a:pPr lvl="0" indent="0" marL="0">
+              <a:buNone/>
+            </a:pPr>
+            <a:r>
+              <a:rPr/>
+              <a:t>That 0.5 is predict()’s default and nothing more. It is the right choice when the two errors cost the same AND the classes are balanced. Neither is true here, and neither is true in most real problems.</a:t>
+            </a:r>
+          </a:p>
+          <a:p>
+            <a:pPr lvl="0" indent="0" marL="0">
+              <a:buNone/>
+            </a:pPr>
+          </a:p>
+          <a:p>
+            <a:pPr lvl="0" indent="0" marL="0">
+              <a:buNone/>
+            </a:pPr>
+            <a:r>
+              <a:rPr/>
+              <a:t>So when a paper or a colleague reports 77% precision, the useful follow-up is: at what threshold, and why that one? Most of the time there is no answer, because nobody chose it.</a:t>
             </a:r>
           </a:p>
         </p:txBody>
@@ -3556,49 +3543,49 @@
             </a:pPr>
             <a:r>
               <a:rPr/>
-              <a:t>The sweep traced a path through precision-recall space; this is that path drawn directly. Every threshold at once.</a:t>
-            </a:r>
-          </a:p>
-          <a:p>
-            <a:pPr lvl="0" indent="0" marL="0">
-              <a:buNone/>
-            </a:pPr>
-          </a:p>
-          <a:p>
-            <a:pPr lvl="0" indent="0" marL="0">
-              <a:buNone/>
-            </a:pPr>
-            <a:r>
-              <a:rPr/>
-              <a:t>The part to teach is the baseline. A model with random scores has precision equal to the positive rate - 0.038 here - at every recall. That flat dashed line, not 0.5, is what “no skill” looks like on an imbalanced problem.</a:t>
-            </a:r>
-          </a:p>
-          <a:p>
-            <a:pPr lvl="0" indent="0" marL="0">
-              <a:buNone/>
-            </a:pPr>
-          </a:p>
-          <a:p>
-            <a:pPr lvl="0" indent="0" marL="0">
-              <a:buNone/>
-            </a:pPr>
-            <a:r>
-              <a:rPr/>
-              <a:t>That is why this curve is so much more informative than accuracy when positives are rare: the floor is where the difficulty actually is. Our model’s area under it, the average precision, is 0.717 against a floor of 0.038.</a:t>
-            </a:r>
-          </a:p>
-          <a:p>
-            <a:pPr lvl="0" indent="0" marL="0">
-              <a:buNone/>
-            </a:pPr>
-          </a:p>
-          <a:p>
-            <a:pPr lvl="0" indent="0" marL="0">
-              <a:buNone/>
-            </a:pPr>
-            <a:r>
-              <a:rPr/>
-              <a:t>The three marked dots are thresholds 0.5, 0.3 and 0.05. The first two are rows of the table on the previous slide, so they can check the correspondence: at 0.5, recall 0.566 and precision 0.768.</a:t>
+              <a:t>Read it column by column with the room.</a:t>
+            </a:r>
+          </a:p>
+          <a:p>
+            <a:pPr lvl="0" indent="0" marL="0">
+              <a:buNone/>
+            </a:pPr>
+          </a:p>
+          <a:p>
+            <a:pPr lvl="0" indent="0" marL="0">
+              <a:buNone/>
+            </a:pPr>
+            <a:r>
+              <a:rPr/>
+              <a:t>Lower the threshold: recall rises, precision falls. At 0.02 we catch 69 of 76 failures and replace 284 healthy drives to do it. At 0.90 every alarm is justified and we catch fewer than a quarter.</a:t>
+            </a:r>
+          </a:p>
+          <a:p>
+            <a:pPr lvl="0" indent="0" marL="0">
+              <a:buNone/>
+            </a:pPr>
+          </a:p>
+          <a:p>
+            <a:pPr lvl="0" indent="0" marL="0">
+              <a:buNone/>
+            </a:pPr>
+            <a:r>
+              <a:rPr/>
+              <a:t>Now the accuracy column, which is the slide’s real argument. From 0.10 upwards it moves by three and a half percentage points, 0.942 to 0.977, while recall falls from 0.803 to 0.184. And its maximum is at 0.5 - the threshold that misses 33 of the 76 failures.</a:t>
+            </a:r>
+          </a:p>
+          <a:p>
+            <a:pPr lvl="0" indent="0" marL="0">
+              <a:buNone/>
+            </a:pPr>
+          </a:p>
+          <a:p>
+            <a:pPr lvl="0" indent="0" marL="0">
+              <a:buNone/>
+            </a:pPr>
+            <a:r>
+              <a:rPr/>
+              <a:t>Say the consequence plainly: tune on accuracy and it will quietly recommend catching fewer failures, because every alarm it drops was a possible false positive.</a:t>
             </a:r>
           </a:p>
         </p:txBody>
@@ -3680,35 +3667,49 @@
             </a:pPr>
             <a:r>
               <a:rPr/>
-              <a:t>Set up the next section as a question rather than announcing a tool.</a:t>
-            </a:r>
-          </a:p>
-          <a:p>
-            <a:pPr lvl="0" indent="0" marL="0">
-              <a:buNone/>
-            </a:pPr>
-          </a:p>
-          <a:p>
-            <a:pPr lvl="0" indent="0" marL="0">
-              <a:buNone/>
-            </a:pPr>
-            <a:r>
-              <a:rPr/>
-              <a:t>Everything so far has needed a threshold. That is fine when you know the costs, and we will come back to it. But often you want to compare two models before committing - is model A better than model B, at any operating point?</a:t>
-            </a:r>
-          </a:p>
-          <a:p>
-            <a:pPr lvl="0" indent="0" marL="0">
-              <a:buNone/>
-            </a:pPr>
-          </a:p>
-          <a:p>
-            <a:pPr lvl="0" indent="0" marL="0">
-              <a:buNone/>
-            </a:pPr>
-            <a:r>
-              <a:rPr/>
-              <a:t>The move is to stop asking “how many did it get right” and start asking “did it put the failures at the top of the list”. That is a question about ranking, and ranking has no threshold in it.</a:t>
+              <a:t>The sweep traced a path through precision-recall space; this is that path drawn directly. Every threshold at once.</a:t>
+            </a:r>
+          </a:p>
+          <a:p>
+            <a:pPr lvl="0" indent="0" marL="0">
+              <a:buNone/>
+            </a:pPr>
+          </a:p>
+          <a:p>
+            <a:pPr lvl="0" indent="0" marL="0">
+              <a:buNone/>
+            </a:pPr>
+            <a:r>
+              <a:rPr/>
+              <a:t>The part to teach is the baseline. A model with random scores has precision equal to the positive rate - 0.038 here - at every recall. That flat dashed line, not 0.5, is what “no skill” looks like on an imbalanced problem.</a:t>
+            </a:r>
+          </a:p>
+          <a:p>
+            <a:pPr lvl="0" indent="0" marL="0">
+              <a:buNone/>
+            </a:pPr>
+          </a:p>
+          <a:p>
+            <a:pPr lvl="0" indent="0" marL="0">
+              <a:buNone/>
+            </a:pPr>
+            <a:r>
+              <a:rPr/>
+              <a:t>That is why this curve is so much more informative than accuracy when positives are rare: the floor is where the difficulty actually is. Our model’s area under it, the average precision, is 0.717 against a floor of 0.038.</a:t>
+            </a:r>
+          </a:p>
+          <a:p>
+            <a:pPr lvl="0" indent="0" marL="0">
+              <a:buNone/>
+            </a:pPr>
+          </a:p>
+          <a:p>
+            <a:pPr lvl="0" indent="0" marL="0">
+              <a:buNone/>
+            </a:pPr>
+            <a:r>
+              <a:rPr/>
+              <a:t>The three marked dots are thresholds 0.5, 0.3 and 0.05. The first two are rows of the table on the previous slide, so they can check the correspondence: at 0.5, recall 0.566 and precision 0.768.</a:t>
             </a:r>
           </a:p>
         </p:txBody>
@@ -3790,49 +3791,35 @@
             </a:pPr>
             <a:r>
               <a:rPr/>
-              <a:t>Receiver operating characteristic - expand it, and say where the name comes from, because it makes the idea concrete. Wartime radar: operators tuning receivers to spot aircraft without chasing flocks of birds. Same problem shape, literally the same trade-off.</a:t>
-            </a:r>
-          </a:p>
-          <a:p>
-            <a:pPr lvl="0" indent="0" marL="0">
-              <a:buNone/>
-            </a:pPr>
-          </a:p>
-          <a:p>
-            <a:pPr lvl="0" indent="0" marL="0">
-              <a:buNone/>
-            </a:pPr>
-            <a:r>
-              <a:rPr/>
-              <a:t>The two axes: the true positive rate (TPR), which is recall under another name - the share of failures we catch. The false positive rate (FPR) - the share of healthy drives we condemn.</a:t>
-            </a:r>
-          </a:p>
-          <a:p>
-            <a:pPr lvl="0" indent="0" marL="0">
-              <a:buNone/>
-            </a:pPr>
-          </a:p>
-          <a:p>
-            <a:pPr lvl="0" indent="0" marL="0">
-              <a:buNone/>
-            </a:pPr>
-            <a:r>
-              <a:rPr/>
-              <a:t>The intuition worth saying slowly: at threshold 1 both are zero, flag nothing. At threshold 0 both are one. The entire content of the curve is the ORDER in which they get there. A good model raises TPR fast while FPR is still low, because its highest scores really are the failures. A useless model raises them together and traces the diagonal.</a:t>
-            </a:r>
-          </a:p>
-          <a:p>
-            <a:pPr lvl="0" indent="0" marL="0">
-              <a:buNone/>
-            </a:pPr>
-          </a:p>
-          <a:p>
-            <a:pPr lvl="0" indent="0" marL="0">
-              <a:buNone/>
-            </a:pPr>
-            <a:r>
-              <a:rPr/>
-              <a:t>So the curve asks: as we grow more willing to raise alarms, do we catch failures faster than we annoy technicians?</a:t>
+              <a:t>Set up the next section as a question rather than announcing a tool.</a:t>
+            </a:r>
+          </a:p>
+          <a:p>
+            <a:pPr lvl="0" indent="0" marL="0">
+              <a:buNone/>
+            </a:pPr>
+          </a:p>
+          <a:p>
+            <a:pPr lvl="0" indent="0" marL="0">
+              <a:buNone/>
+            </a:pPr>
+            <a:r>
+              <a:rPr/>
+              <a:t>Everything so far has needed a threshold. That is fine when you know the costs, and we will come back to it. But often you want to compare two models before committing - is model A better than model B, at any operating point?</a:t>
+            </a:r>
+          </a:p>
+          <a:p>
+            <a:pPr lvl="0" indent="0" marL="0">
+              <a:buNone/>
+            </a:pPr>
+          </a:p>
+          <a:p>
+            <a:pPr lvl="0" indent="0" marL="0">
+              <a:buNone/>
+            </a:pPr>
+            <a:r>
+              <a:rPr/>
+              <a:t>The move is to stop asking “how many did it get right” and start asking “did it put the failures at the top of the list”. That is a question about ranking, and ranking has no threshold in it.</a:t>
             </a:r>
           </a:p>
         </p:txBody>
@@ -3914,49 +3901,49 @@
             </a:pPr>
             <a:r>
               <a:rPr/>
-              <a:t>This is the definition to remember, and it is much more useful than “area under the curve”, which is a geometric fact rather than a meaning.</a:t>
-            </a:r>
-          </a:p>
-          <a:p>
-            <a:pPr lvl="0" indent="0" marL="0">
-              <a:buNone/>
-            </a:pPr>
-          </a:p>
-          <a:p>
-            <a:pPr lvl="0" indent="0" marL="0">
-              <a:buNone/>
-            </a:pPr>
-            <a:r>
-              <a:rPr/>
-              <a:t>Say it concretely: pick one drive that failed and one that did not, at random. 95 times out of 100 the model gave the failing one a higher score.</a:t>
-            </a:r>
-          </a:p>
-          <a:p>
-            <a:pPr lvl="0" indent="0" marL="0">
-              <a:buNone/>
-            </a:pPr>
-          </a:p>
-          <a:p>
-            <a:pPr lvl="0" indent="0" marL="0">
-              <a:buNone/>
-            </a:pPr>
-            <a:r>
-              <a:rPr/>
-              <a:t>That makes AUC a measure of RANKING quality. It is threshold-free because ranking is threshold-free.</a:t>
-            </a:r>
-          </a:p>
-          <a:p>
-            <a:pPr lvl="0" indent="0" marL="0">
-              <a:buNone/>
-            </a:pPr>
-          </a:p>
-          <a:p>
-            <a:pPr lvl="0" indent="0" marL="0">
-              <a:buNone/>
-            </a:pPr>
-            <a:r>
-              <a:rPr/>
-              <a:t>The identity with the Mann-Whitney U statistic is in the handout, section 8.2, for anyone who wants the proof. But notebook 3 does something better than a proof for this audience: it draws 200,000 random pairs and counts. 0.9488 against roc_auc_score’s 0.9493.</a:t>
+              <a:t>Receiver operating characteristic - expand it, and say where the name comes from, because it makes the idea concrete. Wartime radar: operators tuning receivers to spot aircraft without chasing flocks of birds. Same problem shape, literally the same trade-off.</a:t>
+            </a:r>
+          </a:p>
+          <a:p>
+            <a:pPr lvl="0" indent="0" marL="0">
+              <a:buNone/>
+            </a:pPr>
+          </a:p>
+          <a:p>
+            <a:pPr lvl="0" indent="0" marL="0">
+              <a:buNone/>
+            </a:pPr>
+            <a:r>
+              <a:rPr/>
+              <a:t>The two axes: the true positive rate (TPR), which is recall under another name - the share of failures we catch. The false positive rate (FPR) - the share of healthy drives we condemn.</a:t>
+            </a:r>
+          </a:p>
+          <a:p>
+            <a:pPr lvl="0" indent="0" marL="0">
+              <a:buNone/>
+            </a:pPr>
+          </a:p>
+          <a:p>
+            <a:pPr lvl="0" indent="0" marL="0">
+              <a:buNone/>
+            </a:pPr>
+            <a:r>
+              <a:rPr/>
+              <a:t>The intuition worth saying slowly: at threshold 1 both are zero, flag nothing. At threshold 0 both are one. The entire content of the curve is the ORDER in which they get there. A good model raises TPR fast while FPR is still low, because its highest scores really are the failures. A useless model raises them together and traces the diagonal.</a:t>
+            </a:r>
+          </a:p>
+          <a:p>
+            <a:pPr lvl="0" indent="0" marL="0">
+              <a:buNone/>
+            </a:pPr>
+          </a:p>
+          <a:p>
+            <a:pPr lvl="0" indent="0" marL="0">
+              <a:buNone/>
+            </a:pPr>
+            <a:r>
+              <a:rPr/>
+              <a:t>So the curve asks: as we grow more willing to raise alarms, do we catch failures faster than we annoy technicians?</a:t>
             </a:r>
           </a:p>
         </p:txBody>
@@ -4038,49 +4025,49 @@
             </a:pPr>
             <a:r>
               <a:rPr/>
-              <a:t>Short slide, important consequence. AUC depends only on the ordering, so it is invariant under any monotone transformation of the scores.</a:t>
-            </a:r>
-          </a:p>
-          <a:p>
-            <a:pPr lvl="0" indent="0" marL="0">
-              <a:buNone/>
-            </a:pPr>
-          </a:p>
-          <a:p>
-            <a:pPr lvl="0" indent="0" marL="0">
-              <a:buNone/>
-            </a:pPr>
-            <a:r>
-              <a:rPr/>
-              <a:t>Divide all the probabilities by ten and the ranking is identical, so the AUC is identical - while the model is now badly calibrated and every threshold-based decision it makes is different.</a:t>
-            </a:r>
-          </a:p>
-          <a:p>
-            <a:pPr lvl="0" indent="0" marL="0">
-              <a:buNone/>
-            </a:pPr>
-          </a:p>
-          <a:p>
-            <a:pPr lvl="0" indent="0" marL="0">
-              <a:buNone/>
-            </a:pPr>
-            <a:r>
-              <a:rPr/>
-              <a:t>The consequence: AUC says nothing about whether “0.7” means anything. If you need the probabilities to be believable - because you are computing expected costs, as slide 41 does - AUC is not the check you want.</a:t>
-            </a:r>
-          </a:p>
-          <a:p>
-            <a:pPr lvl="0" indent="0" marL="0">
-              <a:buNone/>
-            </a:pPr>
-          </a:p>
-          <a:p>
-            <a:pPr lvl="0" indent="0" marL="0">
-              <a:buNone/>
-            </a:pPr>
-            <a:r>
-              <a:rPr/>
-              <a:t>Good place to mention that calibration - whether a predicted 0.7 really comes true 70% of the time - is a topic of its own, without going into it.</a:t>
+              <a:t>This is the definition to remember, and it is much more useful than “area under the curve”, which is a geometric fact rather than a meaning.</a:t>
+            </a:r>
+          </a:p>
+          <a:p>
+            <a:pPr lvl="0" indent="0" marL="0">
+              <a:buNone/>
+            </a:pPr>
+          </a:p>
+          <a:p>
+            <a:pPr lvl="0" indent="0" marL="0">
+              <a:buNone/>
+            </a:pPr>
+            <a:r>
+              <a:rPr/>
+              <a:t>Say it concretely: pick one drive that failed and one that did not, at random. 95 times out of 100 the model gave the failing one a higher score.</a:t>
+            </a:r>
+          </a:p>
+          <a:p>
+            <a:pPr lvl="0" indent="0" marL="0">
+              <a:buNone/>
+            </a:pPr>
+          </a:p>
+          <a:p>
+            <a:pPr lvl="0" indent="0" marL="0">
+              <a:buNone/>
+            </a:pPr>
+            <a:r>
+              <a:rPr/>
+              <a:t>That makes AUC a measure of RANKING quality. It is threshold-free because ranking is threshold-free.</a:t>
+            </a:r>
+          </a:p>
+          <a:p>
+            <a:pPr lvl="0" indent="0" marL="0">
+              <a:buNone/>
+            </a:pPr>
+          </a:p>
+          <a:p>
+            <a:pPr lvl="0" indent="0" marL="0">
+              <a:buNone/>
+            </a:pPr>
+            <a:r>
+              <a:rPr/>
+              <a:t>The identity with the Mann-Whitney U statistic is in the handout, section 8.2, for anyone who wants the proof. But notebook 3 does something better than a proof for this audience: it draws 200,000 random pairs and counts. 0.9488 against roc_auc_score’s 0.9493.</a:t>
             </a:r>
           </a:p>
         </p:txBody>
@@ -4162,49 +4149,49 @@
             </a:pPr>
             <a:r>
               <a:rPr/>
-              <a:t>Same model. Not retrained. We keep every healthy drive in a fleet of 60,000 and thin the FAILURES until they are 0.4% instead of 3.8% - the direction reality moves in fraud, disease, hardware failure.</a:t>
-            </a:r>
-          </a:p>
-          <a:p>
-            <a:pPr lvl="0" indent="0" marL="0">
-              <a:buNone/>
-            </a:pPr>
-          </a:p>
-          <a:p>
-            <a:pPr lvl="0" indent="0" marL="0">
-              <a:buNone/>
-            </a:pPr>
-            <a:r>
-              <a:rPr/>
-              <a:t>Left panel: the three ROC curves sit on top of each other. AUC 0.968, 0.965, 0.974. It reports an excellent model throughout, and at the rarest setting a marginally better one, which is sampling noise on 231 positives.</a:t>
-            </a:r>
-          </a:p>
-          <a:p>
-            <a:pPr lvl="0" indent="0" marL="0">
-              <a:buNone/>
-            </a:pPr>
-          </a:p>
-          <a:p>
-            <a:pPr lvl="0" indent="0" marL="0">
-              <a:buNone/>
-            </a:pPr>
-            <a:r>
-              <a:rPr/>
-              <a:t>Right panel: the precision-recall curves are in three different worlds. Average precision falls from 0.706 to 0.361, and precision at the same threshold falls from 0.79 to 0.26 - two alarms in three now false.</a:t>
-            </a:r>
-          </a:p>
-          <a:p>
-            <a:pPr lvl="0" indent="0" marL="0">
-              <a:buNone/>
-            </a:pPr>
-          </a:p>
-          <a:p>
-            <a:pPr lvl="0" indent="0" marL="0">
-              <a:buNone/>
-            </a:pPr>
-            <a:r>
-              <a:rPr/>
-              <a:t>Three curves on the left, one model, no problem. Three curves on the right, same model, a disaster. Let that sit for a second before explaining.</a:t>
+              <a:t>Short slide, important consequence. AUC depends only on the ordering, so it is invariant under any monotone transformation of the scores.</a:t>
+            </a:r>
+          </a:p>
+          <a:p>
+            <a:pPr lvl="0" indent="0" marL="0">
+              <a:buNone/>
+            </a:pPr>
+          </a:p>
+          <a:p>
+            <a:pPr lvl="0" indent="0" marL="0">
+              <a:buNone/>
+            </a:pPr>
+            <a:r>
+              <a:rPr/>
+              <a:t>Divide all the probabilities by ten and the ranking is identical, so the AUC is identical - while the model is now badly calibrated and every threshold-based decision it makes is different.</a:t>
+            </a:r>
+          </a:p>
+          <a:p>
+            <a:pPr lvl="0" indent="0" marL="0">
+              <a:buNone/>
+            </a:pPr>
+          </a:p>
+          <a:p>
+            <a:pPr lvl="0" indent="0" marL="0">
+              <a:buNone/>
+            </a:pPr>
+            <a:r>
+              <a:rPr/>
+              <a:t>The consequence: AUC says nothing about whether “0.7” means anything. If you need the probabilities to be believable - because you are computing expected costs, as slide 42 does - AUC is not the check you want.</a:t>
+            </a:r>
+          </a:p>
+          <a:p>
+            <a:pPr lvl="0" indent="0" marL="0">
+              <a:buNone/>
+            </a:pPr>
+          </a:p>
+          <a:p>
+            <a:pPr lvl="0" indent="0" marL="0">
+              <a:buNone/>
+            </a:pPr>
+            <a:r>
+              <a:rPr/>
+              <a:t>Good place to mention that calibration - whether a predicted 0.7 really comes true 70% of the time - is a topic of its own, without going into it.</a:t>
             </a:r>
           </a:p>
         </p:txBody>
@@ -4286,49 +4273,49 @@
             </a:pPr>
             <a:r>
               <a:rPr/>
-              <a:t>The explanation is entirely in the denominators, and it is worth writing on the board.</a:t>
-            </a:r>
-          </a:p>
-          <a:p>
-            <a:pPr lvl="0" indent="0" marL="0">
-              <a:buNone/>
-            </a:pPr>
-          </a:p>
-          <a:p>
-            <a:pPr lvl="0" indent="0" marL="0">
-              <a:buNone/>
-            </a:pPr>
-            <a:r>
-              <a:rPr/>
-              <a:t>A thousand false alarms among a hundred thousand healthy drives is a false positive rate of 0.01 - invisible on the ROC axis, a rounding error. The same thousand false alarms, set against the alarms actually raised, may be most of them.</a:t>
-            </a:r>
-          </a:p>
-          <a:p>
-            <a:pPr lvl="0" indent="0" marL="0">
-              <a:buNone/>
-            </a:pPr>
-          </a:p>
-          <a:p>
-            <a:pPr lvl="0" indent="0" marL="0">
-              <a:buNone/>
-            </a:pPr>
-            <a:r>
-              <a:rPr/>
-              <a:t>So ROC is measuring the false alarms against a population nobody experiences. The technician does not see the 99,000 drives left alone; they see the alarm queue.</a:t>
-            </a:r>
-          </a:p>
-          <a:p>
-            <a:pPr lvl="0" indent="0" marL="0">
-              <a:buNone/>
-            </a:pPr>
-          </a:p>
-          <a:p>
-            <a:pPr lvl="0" indent="0" marL="0">
-              <a:buNone/>
-            </a:pPr>
-            <a:r>
-              <a:rPr/>
-              <a:t>This is the second predictable mistake of the lesson, and again defend the instinct: AUC is threshold-free, comparable across models and datasets, bounded in a familiar range. Those are real virtues. It simply answers a question about ranking when the question was about the alarm queue.</a:t>
+              <a:t>Same model. Not retrained. We keep every healthy drive in a fleet of 60,000 and thin the FAILURES until they are 0.4% instead of 3.8% - the direction reality moves in fraud, disease, hardware failure.</a:t>
+            </a:r>
+          </a:p>
+          <a:p>
+            <a:pPr lvl="0" indent="0" marL="0">
+              <a:buNone/>
+            </a:pPr>
+          </a:p>
+          <a:p>
+            <a:pPr lvl="0" indent="0" marL="0">
+              <a:buNone/>
+            </a:pPr>
+            <a:r>
+              <a:rPr/>
+              <a:t>Left panel: the three ROC curves sit on top of each other. AUC 0.968, 0.965, 0.974. It reports an excellent model throughout, and at the rarest setting a marginally better one, which is sampling noise on 231 positives.</a:t>
+            </a:r>
+          </a:p>
+          <a:p>
+            <a:pPr lvl="0" indent="0" marL="0">
+              <a:buNone/>
+            </a:pPr>
+          </a:p>
+          <a:p>
+            <a:pPr lvl="0" indent="0" marL="0">
+              <a:buNone/>
+            </a:pPr>
+            <a:r>
+              <a:rPr/>
+              <a:t>Right panel: the precision-recall curves are in three different worlds. Average precision falls from 0.706 to 0.361, and precision at the same threshold falls from 0.79 to 0.26 - two alarms in three now false.</a:t>
+            </a:r>
+          </a:p>
+          <a:p>
+            <a:pPr lvl="0" indent="0" marL="0">
+              <a:buNone/>
+            </a:pPr>
+          </a:p>
+          <a:p>
+            <a:pPr lvl="0" indent="0" marL="0">
+              <a:buNone/>
+            </a:pPr>
+            <a:r>
+              <a:rPr/>
+              <a:t>Three curves on the left, one model, no problem. Three curves on the right, same model, a disaster. Let that sit for a second before explaining.</a:t>
             </a:r>
           </a:p>
         </p:txBody>
@@ -4410,21 +4397,49 @@
             </a:pPr>
             <a:r>
               <a:rPr/>
-              <a:t>Short and quotable, and this is the thing to have on the board when they write their exercise reports.</a:t>
-            </a:r>
-          </a:p>
-          <a:p>
-            <a:pPr lvl="0" indent="0" marL="0">
-              <a:buNone/>
-            </a:pPr>
-          </a:p>
-          <a:p>
-            <a:pPr lvl="0" indent="0" marL="0">
-              <a:buNone/>
-            </a:pPr>
-            <a:r>
-              <a:rPr/>
-              <a:t>If someone asks which single number to use when a single number is demanded: average precision, because its baseline moves with the problem. But push back on the premise - the reason to demand a single number is usually to avoid thinking, and this lesson is about the thinking.</a:t>
+              <a:t>The explanation is entirely in the denominators, and it is worth writing on the board.</a:t>
+            </a:r>
+          </a:p>
+          <a:p>
+            <a:pPr lvl="0" indent="0" marL="0">
+              <a:buNone/>
+            </a:pPr>
+          </a:p>
+          <a:p>
+            <a:pPr lvl="0" indent="0" marL="0">
+              <a:buNone/>
+            </a:pPr>
+            <a:r>
+              <a:rPr/>
+              <a:t>A thousand false alarms among a hundred thousand healthy drives is a false positive rate of 0.01 - invisible on the ROC axis, a rounding error. The same thousand false alarms, set against the alarms actually raised, may be most of them.</a:t>
+            </a:r>
+          </a:p>
+          <a:p>
+            <a:pPr lvl="0" indent="0" marL="0">
+              <a:buNone/>
+            </a:pPr>
+          </a:p>
+          <a:p>
+            <a:pPr lvl="0" indent="0" marL="0">
+              <a:buNone/>
+            </a:pPr>
+            <a:r>
+              <a:rPr/>
+              <a:t>So ROC is measuring the false alarms against a population nobody experiences. The technician does not see the 99,000 drives left alone; they see the alarm queue.</a:t>
+            </a:r>
+          </a:p>
+          <a:p>
+            <a:pPr lvl="0" indent="0" marL="0">
+              <a:buNone/>
+            </a:pPr>
+          </a:p>
+          <a:p>
+            <a:pPr lvl="0" indent="0" marL="0">
+              <a:buNone/>
+            </a:pPr>
+            <a:r>
+              <a:rPr/>
+              <a:t>This is the second predictable mistake of the lesson, and again defend the instinct: AUC is threshold-free, comparable across models and datasets, bounded in a familiar range. Those are real virtues. It simply answers a question about ranking when the question was about the alarm queue.</a:t>
             </a:r>
           </a:p>
         </p:txBody>
@@ -4616,49 +4631,21 @@
             </a:pPr>
             <a:r>
               <a:rPr/>
-              <a:t>Finally, the honest way to pick a threshold. It needs one ingredient no metric can supply: what the errors cost. We wrote those down on slide 25 - €140 for a needless replacement, €2,600 for a drive that dies in service.</a:t>
-            </a:r>
-          </a:p>
-          <a:p>
-            <a:pPr lvl="0" indent="0" marL="0">
-              <a:buNone/>
-            </a:pPr>
-          </a:p>
-          <a:p>
-            <a:pPr lvl="0" indent="0" marL="0">
-              <a:buNone/>
-            </a:pPr>
-            <a:r>
-              <a:rPr/>
-              <a:t>The curve is the total cost on the test set as the threshold moves. The default 0.5 costs €87,620. The cheapest, at 0.08, costs €45,540.</a:t>
-            </a:r>
-          </a:p>
-          <a:p>
-            <a:pPr lvl="0" indent="0" marL="0">
-              <a:buNone/>
-            </a:pPr>
-          </a:p>
-          <a:p>
-            <a:pPr lvl="0" indent="0" marL="0">
-              <a:buNone/>
-            </a:pPr>
-            <a:r>
-              <a:rPr/>
-              <a:t>Choosing the threshold on purpose HALVED the cost of the same model. No retraining, no new features, no better algorithm. One number, taken from the economics instead of from the library default.</a:t>
-            </a:r>
-          </a:p>
-          <a:p>
-            <a:pPr lvl="0" indent="0" marL="0">
-              <a:buNone/>
-            </a:pPr>
-          </a:p>
-          <a:p>
-            <a:pPr lvl="0" indent="0" marL="0">
-              <a:buNone/>
-            </a:pPr>
-            <a:r>
-              <a:rPr/>
-              <a:t>Note the flatness around the minimum, and say why it is good news: the exact threshold does not have to be right. Which is fortunate, because cost estimates never are.</a:t>
+              <a:t>Short and quotable, and this is the thing to have on the board when they write their exercise reports.</a:t>
+            </a:r>
+          </a:p>
+          <a:p>
+            <a:pPr lvl="0" indent="0" marL="0">
+              <a:buNone/>
+            </a:pPr>
+          </a:p>
+          <a:p>
+            <a:pPr lvl="0" indent="0" marL="0">
+              <a:buNone/>
+            </a:pPr>
+            <a:r>
+              <a:rPr/>
+              <a:t>If someone asks which single number to use when a single number is demanded: average precision, because its baseline moves with the problem. But push back on the premise - the reason to demand a single number is usually to avoid thinking, and this lesson is about the thinking.</a:t>
             </a:r>
           </a:p>
         </p:txBody>
@@ -4740,49 +4727,49 @@
             </a:pPr>
             <a:r>
               <a:rPr/>
-              <a:t>Derive it in one line on the board, because it is two steps and it lands: flag the drive if the expected cost of flagging is lower than the expected cost of not. Flagging costs C-FP if the drive was healthy, which happens with probability 1 minus p. Leaving it costs C-FN if it fails, probability p. Set one below the other and solve.</a:t>
-            </a:r>
-          </a:p>
-          <a:p>
-            <a:pPr lvl="0" indent="0" marL="0">
-              <a:buNone/>
-            </a:pPr>
-          </a:p>
-          <a:p>
-            <a:pPr lvl="0" indent="0" marL="0">
-              <a:buNone/>
-            </a:pPr>
-            <a:r>
-              <a:rPr/>
-              <a:t>Then read the formula rather than the number, which is the part worth remembering: the optimal threshold does not depend on the model, the dataset, or the class balance. Only on the RATIO of the two costs.</a:t>
-            </a:r>
-          </a:p>
-          <a:p>
-            <a:pPr lvl="0" indent="0" marL="0">
-              <a:buNone/>
-            </a:pPr>
-          </a:p>
-          <a:p>
-            <a:pPr lvl="0" indent="0" marL="0">
-              <a:buNone/>
-            </a:pPr>
-            <a:r>
-              <a:rPr/>
-              <a:t>If the errors cost the same, t-star is 0.5 and the default was right all along. As misses grow more expensive, it falls towards zero.</a:t>
-            </a:r>
-          </a:p>
-          <a:p>
-            <a:pPr lvl="0" indent="0" marL="0">
-              <a:buNone/>
-            </a:pPr>
-          </a:p>
-          <a:p>
-            <a:pPr lvl="0" indent="0" marL="0">
-              <a:buNone/>
-            </a:pPr>
-            <a:r>
-              <a:rPr/>
-              <a:t>Empirically we found 0.08 against a theoretical 0.051, and the curve is flat between them.</a:t>
+              <a:t>Finally, the honest way to pick a threshold. It needs one ingredient no metric can supply: what the errors cost. We wrote those down on slide 26 - €140 for a needless replacement, €2,600 for a drive that dies in service.</a:t>
+            </a:r>
+          </a:p>
+          <a:p>
+            <a:pPr lvl="0" indent="0" marL="0">
+              <a:buNone/>
+            </a:pPr>
+          </a:p>
+          <a:p>
+            <a:pPr lvl="0" indent="0" marL="0">
+              <a:buNone/>
+            </a:pPr>
+            <a:r>
+              <a:rPr/>
+              <a:t>The curve is the total cost on the test set as the threshold moves. The default 0.5 costs €87,620. The cheapest, at 0.08, costs €45,540.</a:t>
+            </a:r>
+          </a:p>
+          <a:p>
+            <a:pPr lvl="0" indent="0" marL="0">
+              <a:buNone/>
+            </a:pPr>
+          </a:p>
+          <a:p>
+            <a:pPr lvl="0" indent="0" marL="0">
+              <a:buNone/>
+            </a:pPr>
+            <a:r>
+              <a:rPr/>
+              <a:t>Choosing the threshold on purpose HALVED the cost of the same model. No retraining, no new features, no better algorithm. One number, taken from the economics instead of from the library default.</a:t>
+            </a:r>
+          </a:p>
+          <a:p>
+            <a:pPr lvl="0" indent="0" marL="0">
+              <a:buNone/>
+            </a:pPr>
+          </a:p>
+          <a:p>
+            <a:pPr lvl="0" indent="0" marL="0">
+              <a:buNone/>
+            </a:pPr>
+            <a:r>
+              <a:rPr/>
+              <a:t>Note the flatness around the minimum, and say why it is good news: the exact threshold does not have to be right. Which is fortunate, because cost estimates never are.</a:t>
             </a:r>
           </a:p>
         </p:txBody>
@@ -4864,49 +4851,49 @@
             </a:pPr>
             <a:r>
               <a:rPr/>
-              <a:t>Say this out loud rather than leaving it in the handout, because it is the same mistake you may have named at the start of today’s lesson, in the discussion of exercise 3.</a:t>
-            </a:r>
-          </a:p>
-          <a:p>
-            <a:pPr lvl="0" indent="0" marL="0">
-              <a:buNone/>
-            </a:pPr>
-          </a:p>
-          <a:p>
-            <a:pPr lvl="0" indent="0" marL="0">
-              <a:buNone/>
-            </a:pPr>
-            <a:r>
-              <a:rPr/>
-              <a:t>The threshold is a parameter. Choosing it by looking at the test set means the test set has influenced the model, and the number it then reports is optimistic.</a:t>
-            </a:r>
-          </a:p>
-          <a:p>
-            <a:pPr lvl="0" indent="0" marL="0">
-              <a:buNone/>
-            </a:pPr>
-          </a:p>
-          <a:p>
-            <a:pPr lvl="0" indent="0" marL="0">
-              <a:buNone/>
-            </a:pPr>
-            <a:r>
-              <a:rPr/>
-              <a:t>Done properly: choose the threshold on a validation set, then measure once on test. Lesson 5 builds exactly that machinery, and this is the concrete reason it is needed - not a hygiene rule, a thing that changes the number you report.</a:t>
-            </a:r>
-          </a:p>
-          <a:p>
-            <a:pPr lvl="0" indent="0" marL="0">
-              <a:buNone/>
-            </a:pPr>
-          </a:p>
-          <a:p>
-            <a:pPr lvl="0" indent="0" marL="0">
-              <a:buNone/>
-            </a:pPr>
-            <a:r>
-              <a:rPr/>
-              <a:t>Until then, treat the 0.08 as a demonstration of a method, not a result anyone could publish.</a:t>
+              <a:t>Derive it in one line on the board, because it is two steps and it lands: flag the drive if the expected cost of flagging is lower than the expected cost of not. Flagging costs C-FP if the drive was healthy, which happens with probability 1 minus p. Leaving it costs C-FN if it fails, probability p. Set one below the other and solve.</a:t>
+            </a:r>
+          </a:p>
+          <a:p>
+            <a:pPr lvl="0" indent="0" marL="0">
+              <a:buNone/>
+            </a:pPr>
+          </a:p>
+          <a:p>
+            <a:pPr lvl="0" indent="0" marL="0">
+              <a:buNone/>
+            </a:pPr>
+            <a:r>
+              <a:rPr/>
+              <a:t>Then read the formula rather than the number, which is the part worth remembering: the optimal threshold does not depend on the model, the dataset, or the class balance. Only on the RATIO of the two costs.</a:t>
+            </a:r>
+          </a:p>
+          <a:p>
+            <a:pPr lvl="0" indent="0" marL="0">
+              <a:buNone/>
+            </a:pPr>
+          </a:p>
+          <a:p>
+            <a:pPr lvl="0" indent="0" marL="0">
+              <a:buNone/>
+            </a:pPr>
+            <a:r>
+              <a:rPr/>
+              <a:t>If the errors cost the same, t-star is 0.5 and the default was right all along. As misses grow more expensive, it falls towards zero.</a:t>
+            </a:r>
+          </a:p>
+          <a:p>
+            <a:pPr lvl="0" indent="0" marL="0">
+              <a:buNone/>
+            </a:pPr>
+          </a:p>
+          <a:p>
+            <a:pPr lvl="0" indent="0" marL="0">
+              <a:buNone/>
+            </a:pPr>
+            <a:r>
+              <a:rPr/>
+              <a:t>Empirically we found 0.08 against a theoretical 0.051, and the curve is flat between them.</a:t>
             </a:r>
           </a:p>
         </p:txBody>
@@ -4988,63 +4975,49 @@
             </a:pPr>
             <a:r>
               <a:rPr/>
-              <a:t>class_weight=“balanced” makes each failed drive count, in the cost, as much as about 25 healthy ones - the ratio of healthy to failed drives in the training set. It changes the training rather than the decision.</a:t>
-            </a:r>
-          </a:p>
-          <a:p>
-            <a:pPr lvl="0" indent="0" marL="0">
-              <a:buNone/>
-            </a:pPr>
-          </a:p>
-          <a:p>
-            <a:pPr lvl="0" indent="0" marL="0">
-              <a:buNone/>
-            </a:pPr>
-            <a:r>
-              <a:rPr/>
-              <a:t>Point at the AUC column: 0.949 against 0.950. Reweighting taught the model essentially nothing new about disk failure. What it did was move where the model puts its 0.5 line - the same lever as the threshold, pulled at a different moment.</a:t>
-            </a:r>
-          </a:p>
-          <a:p>
-            <a:pPr lvl="0" indent="0" marL="0">
-              <a:buNone/>
-            </a:pPr>
-          </a:p>
-          <a:p>
-            <a:pPr lvl="0" indent="0" marL="0">
-              <a:buNone/>
-            </a:pPr>
-            <a:r>
-              <a:rPr/>
-              <a:t>That matters because class weighting is usually presented as a REMEDY for imbalance. It is not a remedy; it is another way of setting the same decision. The remedy, where one exists, is more positive examples.</a:t>
-            </a:r>
-          </a:p>
-          <a:p>
-            <a:pPr lvl="0" indent="0" marL="0">
-              <a:buNone/>
-            </a:pPr>
-          </a:p>
-          <a:p>
-            <a:pPr lvl="0" indent="0" marL="0">
-              <a:buNone/>
-            </a:pPr>
-            <a:r>
-              <a:rPr/>
-              <a:t>Where it earns its place: when a downstream tool insists on predict() and gives you no threshold to move. Then this is how you shift the operating point.</a:t>
-            </a:r>
-          </a:p>
-          <a:p>
-            <a:pPr lvl="0" indent="0" marL="0">
-              <a:buNone/>
-            </a:pPr>
-          </a:p>
-          <a:p>
-            <a:pPr lvl="0" indent="0" marL="0">
-              <a:buNone/>
-            </a:pPr>
-            <a:r>
-              <a:rPr/>
-              <a:t>The same reading holds for resampling and for SMOTE (synthetic minority oversampling technique, which builds artificial minority examples): they move the operating point too. And both must be applied to the training rows only - inside each cross-validation fold, once lesson 5 introduces folds - for the reasons lesson 2 gave about imputation.</a:t>
+              <a:t>Say this out loud rather than leaving it in the handout, because it is the same mistake you may have named at the start of today’s lesson, in the discussion of exercise 3.</a:t>
+            </a:r>
+          </a:p>
+          <a:p>
+            <a:pPr lvl="0" indent="0" marL="0">
+              <a:buNone/>
+            </a:pPr>
+          </a:p>
+          <a:p>
+            <a:pPr lvl="0" indent="0" marL="0">
+              <a:buNone/>
+            </a:pPr>
+            <a:r>
+              <a:rPr/>
+              <a:t>The threshold is a parameter. Choosing it by looking at the test set means the test set has influenced the model, and the number it then reports is optimistic.</a:t>
+            </a:r>
+          </a:p>
+          <a:p>
+            <a:pPr lvl="0" indent="0" marL="0">
+              <a:buNone/>
+            </a:pPr>
+          </a:p>
+          <a:p>
+            <a:pPr lvl="0" indent="0" marL="0">
+              <a:buNone/>
+            </a:pPr>
+            <a:r>
+              <a:rPr/>
+              <a:t>Done properly: choose the threshold on a validation set, then measure once on test. Lesson 5 builds exactly that machinery, and this is the concrete reason it is needed - not a hygiene rule, a thing that changes the number you report.</a:t>
+            </a:r>
+          </a:p>
+          <a:p>
+            <a:pPr lvl="0" indent="0" marL="0">
+              <a:buNone/>
+            </a:pPr>
+          </a:p>
+          <a:p>
+            <a:pPr lvl="0" indent="0" marL="0">
+              <a:buNone/>
+            </a:pPr>
+            <a:r>
+              <a:rPr/>
+              <a:t>Until then, treat the 0.08 as a demonstration of a method, not a result anyone could publish.</a:t>
             </a:r>
           </a:p>
         </p:txBody>
@@ -5126,21 +5099,63 @@
             </a:pPr>
             <a:r>
               <a:rPr/>
-              <a:t>The ROC curve by hand, the 200,000-pair experiment, the cost curve, then the multiclass matrix. Run notebook 03. Fifteen minutes, and the two multiclass slides that follow (46 and 47) are shown when the notebook reaches its last section, so they run alongside it rather than after it.</a:t>
-            </a:r>
-          </a:p>
-          <a:p>
-            <a:pPr lvl="0" indent="0" marL="0">
-              <a:buNone/>
-            </a:pPr>
-          </a:p>
-          <a:p>
-            <a:pPr lvl="0" indent="0" marL="0">
-              <a:buNone/>
-            </a:pPr>
-            <a:r>
-              <a:rPr/>
-              <a:t>If time is short, keep the pairs experiment: it turns a definition they would otherwise memorise into something they watched happen.</a:t>
+              <a:t>class_weight=“balanced” makes each failed drive count, in the cost, as much as about 25 healthy ones - the ratio of healthy to failed drives in the training set. It changes the training rather than the decision.</a:t>
+            </a:r>
+          </a:p>
+          <a:p>
+            <a:pPr lvl="0" indent="0" marL="0">
+              <a:buNone/>
+            </a:pPr>
+          </a:p>
+          <a:p>
+            <a:pPr lvl="0" indent="0" marL="0">
+              <a:buNone/>
+            </a:pPr>
+            <a:r>
+              <a:rPr/>
+              <a:t>Point at the AUC column: 0.949 against 0.950. Reweighting taught the model essentially nothing new about disk failure. What it did was move where the model puts its 0.5 line - the same lever as the threshold, pulled at a different moment.</a:t>
+            </a:r>
+          </a:p>
+          <a:p>
+            <a:pPr lvl="0" indent="0" marL="0">
+              <a:buNone/>
+            </a:pPr>
+          </a:p>
+          <a:p>
+            <a:pPr lvl="0" indent="0" marL="0">
+              <a:buNone/>
+            </a:pPr>
+            <a:r>
+              <a:rPr/>
+              <a:t>That matters because class weighting is usually presented as a REMEDY for imbalance. It is not a remedy; it is another way of setting the same decision. The remedy, where one exists, is more positive examples.</a:t>
+            </a:r>
+          </a:p>
+          <a:p>
+            <a:pPr lvl="0" indent="0" marL="0">
+              <a:buNone/>
+            </a:pPr>
+          </a:p>
+          <a:p>
+            <a:pPr lvl="0" indent="0" marL="0">
+              <a:buNone/>
+            </a:pPr>
+            <a:r>
+              <a:rPr/>
+              <a:t>Where it earns its place: when a downstream tool insists on predict() and gives you no threshold to move. Then this is how you shift the operating point.</a:t>
+            </a:r>
+          </a:p>
+          <a:p>
+            <a:pPr lvl="0" indent="0" marL="0">
+              <a:buNone/>
+            </a:pPr>
+          </a:p>
+          <a:p>
+            <a:pPr lvl="0" indent="0" marL="0">
+              <a:buNone/>
+            </a:pPr>
+            <a:r>
+              <a:rPr/>
+              <a:t>The same reading holds for resampling and for SMOTE (synthetic minority oversampling technique, which builds artificial minority examples): they move the operating point too. And both must be applied to the training rows only - inside each cross-validation fold, once lesson 5 introduces folds - for the reasons lesson 2 gave about imputation.</a:t>
             </a:r>
           </a:p>
         </p:txBody>
@@ -5222,49 +5237,21 @@
             </a:pPr>
             <a:r>
               <a:rPr/>
-              <a:t>Real fleets are not healthy-or-dead. A drive can be degraded: readable, but reporting errors, and worth replacing at the next maintenance window rather than at three in the morning.</a:t>
-            </a:r>
-          </a:p>
-          <a:p>
-            <a:pPr lvl="0" indent="0" marL="0">
-              <a:buNone/>
-            </a:pPr>
-          </a:p>
-          <a:p>
-            <a:pPr lvl="0" indent="0" marL="0">
-              <a:buNone/>
-            </a:pPr>
-            <a:r>
-              <a:rPr/>
-              <a:t>For K classes the model produces one score per class and turns them into K probabilities that add up to 1 - the softmax, which for two classes reduces exactly to the sigmoid. The cost generalises to categorical cross-entropy, and it is the same idea: the negative log of the probability assigned to what actually happened. Handout section 10.</a:t>
-            </a:r>
-          </a:p>
-          <a:p>
-            <a:pPr lvl="0" indent="0" marL="0">
-              <a:buNone/>
-            </a:pPr>
-          </a:p>
-          <a:p>
-            <a:pPr lvl="0" indent="0" marL="0">
-              <a:buNone/>
-            </a:pPr>
-            <a:r>
-              <a:rPr/>
-              <a:t>Read the off-diagonal cells rather than the accuracy. Degraded is the hard class, and understandably - it sits between two neighbours that both look like it from a distance.</a:t>
-            </a:r>
-          </a:p>
-          <a:p>
-            <a:pPr lvl="0" indent="0" marL="0">
-              <a:buNone/>
-            </a:pPr>
-          </a:p>
-          <a:p>
-            <a:pPr lvl="0" indent="0" marL="0">
-              <a:buNone/>
-            </a:pPr>
-            <a:r>
-              <a:rPr/>
-              <a:t>Precision and recall are computed one class at a time: each class in turn is the positive one, the rest are negative.</a:t>
+              <a:t>The ROC curve by hand, the 200,000-pair experiment, the cost curve, then the multiclass matrix. Run notebook 03. Fifteen minutes, and the two multiclass slides that follow (46 and 47) are shown when the notebook reaches its last section, so they run alongside it rather than after it.</a:t>
+            </a:r>
+          </a:p>
+          <a:p>
+            <a:pPr lvl="0" indent="0" marL="0">
+              <a:buNone/>
+            </a:pPr>
+          </a:p>
+          <a:p>
+            <a:pPr lvl="0" indent="0" marL="0">
+              <a:buNone/>
+            </a:pPr>
+            <a:r>
+              <a:rPr/>
+              <a:t>If time is short, keep the pairs experiment: it turns a definition they would otherwise memorise into something they watched happen.</a:t>
             </a:r>
           </a:p>
         </p:txBody>
@@ -5346,35 +5333,49 @@
             </a:pPr>
             <a:r>
               <a:rPr/>
-              <a:t>The same choice as before, now with a much starker gap on three classes.</a:t>
-            </a:r>
-          </a:p>
-          <a:p>
-            <a:pPr lvl="0" indent="0" marL="0">
-              <a:buNone/>
-            </a:pPr>
-          </a:p>
-          <a:p>
-            <a:pPr lvl="0" indent="0" marL="0">
-              <a:buNone/>
-            </a:pPr>
-            <a:r>
-              <a:rPr/>
-              <a:t>Macro treats the three conditions as equally important. Weighted lets the healthy class - five drives in six - do most of the talking.</a:t>
-            </a:r>
-          </a:p>
-          <a:p>
-            <a:pPr lvl="0" indent="0" marL="0">
-              <a:buNone/>
-            </a:pPr>
-          </a:p>
-          <a:p>
-            <a:pPr lvl="0" indent="0" marL="0">
-              <a:buNone/>
-            </a:pPr>
-            <a:r>
-              <a:rPr/>
-              <a:t>Which to quote is a question about the application, not about statistics. If missing a failure matters as much as missing a healthy drive, macro is the honest one. Say which you used, always.</a:t>
+              <a:t>Real fleets are not healthy-or-dead. A drive can be degraded: readable, but reporting errors, and worth replacing at the next maintenance window rather than at three in the morning.</a:t>
+            </a:r>
+          </a:p>
+          <a:p>
+            <a:pPr lvl="0" indent="0" marL="0">
+              <a:buNone/>
+            </a:pPr>
+          </a:p>
+          <a:p>
+            <a:pPr lvl="0" indent="0" marL="0">
+              <a:buNone/>
+            </a:pPr>
+            <a:r>
+              <a:rPr/>
+              <a:t>For K classes the model produces one score per class and turns them into K probabilities that add up to 1 - the softmax, which for two classes reduces exactly to the sigmoid. The cost generalises to categorical cross-entropy, and it is the same idea: the negative log of the probability assigned to what actually happened. Handout section 10.</a:t>
+            </a:r>
+          </a:p>
+          <a:p>
+            <a:pPr lvl="0" indent="0" marL="0">
+              <a:buNone/>
+            </a:pPr>
+          </a:p>
+          <a:p>
+            <a:pPr lvl="0" indent="0" marL="0">
+              <a:buNone/>
+            </a:pPr>
+            <a:r>
+              <a:rPr/>
+              <a:t>Read the off-diagonal cells rather than the accuracy. Degraded is the hard class, and understandably - it sits between two neighbours that both look like it from a distance.</a:t>
+            </a:r>
+          </a:p>
+          <a:p>
+            <a:pPr lvl="0" indent="0" marL="0">
+              <a:buNone/>
+            </a:pPr>
+          </a:p>
+          <a:p>
+            <a:pPr lvl="0" indent="0" marL="0">
+              <a:buNone/>
+            </a:pPr>
+            <a:r>
+              <a:rPr/>
+              <a:t>Precision and recall are computed one class at a time: each class in turn is the positive one, the rest are negative.</a:t>
             </a:r>
           </a:p>
         </p:txBody>
@@ -5456,35 +5457,35 @@
             </a:pPr>
             <a:r>
               <a:rPr/>
-              <a:t>Close on the number they started with. 306 failures out of 8,000; 96.2% accuracy for a model that does nothing.</a:t>
-            </a:r>
-          </a:p>
-          <a:p>
-            <a:pPr lvl="0" indent="0" marL="0">
-              <a:buNone/>
-            </a:pPr>
-          </a:p>
-          <a:p>
-            <a:pPr lvl="0" indent="0" marL="0">
-              <a:buNone/>
-            </a:pPr>
-            <a:r>
-              <a:rPr/>
-              <a:t>If they remember one thing from today, it should be the reflex to ask “what’s the base rate?” before believing any accuracy figure. That reflex is worth more than any of the formulas.</a:t>
-            </a:r>
-          </a:p>
-          <a:p>
-            <a:pPr lvl="0" indent="0" marL="0">
-              <a:buNone/>
-            </a:pPr>
-          </a:p>
-          <a:p>
-            <a:pPr lvl="0" indent="0" marL="0">
-              <a:buNone/>
-            </a:pPr>
-            <a:r>
-              <a:rPr/>
-              <a:t>The second thing: every metric on the slide depended on a threshold, and the threshold has an answer - C-FP over C-FP plus C-FN - that comes from the business, not from the data.</a:t>
+              <a:t>The same choice as before, now with a much starker gap on three classes.</a:t>
+            </a:r>
+          </a:p>
+          <a:p>
+            <a:pPr lvl="0" indent="0" marL="0">
+              <a:buNone/>
+            </a:pPr>
+          </a:p>
+          <a:p>
+            <a:pPr lvl="0" indent="0" marL="0">
+              <a:buNone/>
+            </a:pPr>
+            <a:r>
+              <a:rPr/>
+              <a:t>Macro treats the three conditions as equally important. Weighted lets the healthy class - five drives in six - do most of the talking.</a:t>
+            </a:r>
+          </a:p>
+          <a:p>
+            <a:pPr lvl="0" indent="0" marL="0">
+              <a:buNone/>
+            </a:pPr>
+          </a:p>
+          <a:p>
+            <a:pPr lvl="0" indent="0" marL="0">
+              <a:buNone/>
+            </a:pPr>
+            <a:r>
+              <a:rPr/>
+              <a:t>Which to quote is a question about the application, not about statistics. If missing a failure matters as much as missing a healthy drive, macro is the honest one. Say which you used, always.</a:t>
             </a:r>
           </a:p>
         </p:txBody>
@@ -5566,49 +5567,35 @@
             </a:pPr>
             <a:r>
               <a:rPr/>
-              <a:t>Set it explicitly and say out loud when it comes back: the first ten minutes of next Friday, 30 October.</a:t>
-            </a:r>
-          </a:p>
-          <a:p>
-            <a:pPr lvl="0" indent="0" marL="0">
-              <a:buNone/>
-            </a:pPr>
-          </a:p>
-          <a:p>
-            <a:pPr lvl="0" indent="0" marL="0">
-              <a:buNone/>
-            </a:pPr>
-            <a:r>
-              <a:rPr/>
-              <a:t>Emphasise which part carries the marks. The classifier is a few lines and everyone will get it. The paragraph defending the threshold choice is where the learning is, and it is where the marks are.</a:t>
-            </a:r>
-          </a:p>
-          <a:p>
-            <a:pPr lvl="0" indent="0" marL="0">
-              <a:buNone/>
-            </a:pPr>
-          </a:p>
-          <a:p>
-            <a:pPr lvl="0" indent="0" marL="0">
-              <a:buNone/>
-            </a:pPr>
-            <a:r>
-              <a:rPr/>
-              <a:t>Warn them about the trap deliberately planted: the dataset has a decoy column, as this one did, and the exercise asks them to report AUC and average precision together. Anyone reporting AUC alone will be reporting a number that looks better than the model is.</a:t>
-            </a:r>
-          </a:p>
-          <a:p>
-            <a:pPr lvl="0" indent="0" marL="0">
-              <a:buNone/>
-            </a:pPr>
-          </a:p>
-          <a:p>
-            <a:pPr lvl="0" indent="0" marL="0">
-              <a:buNone/>
-            </a:pPr>
-            <a:r>
-              <a:rPr/>
-              <a:t>Next week: experimental methodology. Cross-validation, bias-variance, and the honest way to make every choice we made by hand today.</a:t>
+              <a:t>Close on the number they started with. 306 failures out of 8,000; 96.2% accuracy for a model that does nothing.</a:t>
+            </a:r>
+          </a:p>
+          <a:p>
+            <a:pPr lvl="0" indent="0" marL="0">
+              <a:buNone/>
+            </a:pPr>
+          </a:p>
+          <a:p>
+            <a:pPr lvl="0" indent="0" marL="0">
+              <a:buNone/>
+            </a:pPr>
+            <a:r>
+              <a:rPr/>
+              <a:t>If they remember one thing from today, it should be the reflex to ask “what’s the base rate?” before believing any accuracy figure. That reflex is worth more than any of the formulas.</a:t>
+            </a:r>
+          </a:p>
+          <a:p>
+            <a:pPr lvl="0" indent="0" marL="0">
+              <a:buNone/>
+            </a:pPr>
+          </a:p>
+          <a:p>
+            <a:pPr lvl="0" indent="0" marL="0">
+              <a:buNone/>
+            </a:pPr>
+            <a:r>
+              <a:rPr/>
+              <a:t>The second thing: every metric on the slide depended on a threshold, and the threshold has an answer - C-FP over C-FP plus C-FN - that comes from the business, not from the data.</a:t>
             </a:r>
           </a:p>
         </p:txBody>
@@ -5631,6 +5618,130 @@
             <a:fld id="{18BDFEC3-8487-43E8-A154-7C12CBC1FFF2}" type="slidenum">
               <a:rPr lang="en-US"/>
               <a:t>49</a:t>
+            </a:fld>
+            <a:endParaRPr lang="en-US"/>
+          </a:p>
+        </p:txBody>
+      </p:sp>
+    </p:spTree>
+  </p:cSld>
+</p:notes>
+</file>
+
+<file path=ppt/notesSlides/notesSlide49.xml><?xml version="1.0" encoding="utf-8"?>
+<p:notes xmlns:a="http://schemas.openxmlformats.org/drawingml/2006/main" xmlns:r="http://schemas.openxmlformats.org/officeDocument/2006/relationships" xmlns:p="http://schemas.openxmlformats.org/presentationml/2006/main">
+  <p:cSld>
+    <p:spTree>
+      <p:nvGrpSpPr>
+        <p:cNvPr id="1" name=""/>
+        <p:cNvGrpSpPr/>
+        <p:nvPr/>
+      </p:nvGrpSpPr>
+      <p:grpSpPr>
+        <a:xfrm>
+          <a:off x="0" y="0"/>
+          <a:ext cx="0" cy="0"/>
+          <a:chOff x="0" y="0"/>
+          <a:chExt cx="0" cy="0"/>
+        </a:xfrm>
+      </p:grpSpPr>
+      <p:sp>
+        <p:nvSpPr>
+          <p:cNvPr id="2" name="Slide Image Placeholder 1"/>
+          <p:cNvSpPr>
+            <a:spLocks noGrp="1" noRot="1" noChangeAspect="1"/>
+          </p:cNvSpPr>
+          <p:nvPr>
+            <p:ph type="sldImg"/>
+          </p:nvPr>
+        </p:nvSpPr>
+        <p:spPr/>
+      </p:sp>
+      <p:sp>
+        <p:nvSpPr>
+          <p:cNvPr id="3" name="Notes Placeholder 2"/>
+          <p:cNvSpPr>
+            <a:spLocks noGrp="1"/>
+          </p:cNvSpPr>
+          <p:nvPr>
+            <p:ph type="body" idx="1"/>
+          </p:nvPr>
+        </p:nvSpPr>
+        <p:spPr/>
+        <p:txBody>
+          <a:bodyPr/>
+          <a:lstStyle/>
+          <a:p>
+            <a:pPr lvl="0" indent="0" marL="0">
+              <a:buNone/>
+            </a:pPr>
+            <a:r>
+              <a:rPr/>
+              <a:t>Set it explicitly and say out loud when it comes back: the first ten minutes of next Friday, 30 October.</a:t>
+            </a:r>
+          </a:p>
+          <a:p>
+            <a:pPr lvl="0" indent="0" marL="0">
+              <a:buNone/>
+            </a:pPr>
+          </a:p>
+          <a:p>
+            <a:pPr lvl="0" indent="0" marL="0">
+              <a:buNone/>
+            </a:pPr>
+            <a:r>
+              <a:rPr/>
+              <a:t>Emphasise which part carries the marks. The classifier is a few lines and everyone will get it. The paragraph defending the threshold choice is where the learning is, and it is where the marks are.</a:t>
+            </a:r>
+          </a:p>
+          <a:p>
+            <a:pPr lvl="0" indent="0" marL="0">
+              <a:buNone/>
+            </a:pPr>
+          </a:p>
+          <a:p>
+            <a:pPr lvl="0" indent="0" marL="0">
+              <a:buNone/>
+            </a:pPr>
+            <a:r>
+              <a:rPr/>
+              <a:t>Warn them about the trap deliberately planted: the dataset has a decoy column, as this one did, and the exercise asks them to report AUC and average precision together. Anyone reporting AUC alone will be reporting a number that looks better than the model is.</a:t>
+            </a:r>
+          </a:p>
+          <a:p>
+            <a:pPr lvl="0" indent="0" marL="0">
+              <a:buNone/>
+            </a:pPr>
+          </a:p>
+          <a:p>
+            <a:pPr lvl="0" indent="0" marL="0">
+              <a:buNone/>
+            </a:pPr>
+            <a:r>
+              <a:rPr/>
+              <a:t>Next week: experimental methodology. Cross-validation, bias-variance, and the honest way to make every choice we made by hand today.</a:t>
+            </a:r>
+          </a:p>
+        </p:txBody>
+      </p:sp>
+      <p:sp>
+        <p:nvSpPr>
+          <p:cNvPr id="4" name="Slide Number Placeholder 3"/>
+          <p:cNvSpPr>
+            <a:spLocks noGrp="1"/>
+          </p:cNvSpPr>
+          <p:nvPr>
+            <p:ph type="sldNum" sz="quarter" idx="10"/>
+          </p:nvPr>
+        </p:nvSpPr>
+        <p:spPr/>
+        <p:txBody>
+          <a:bodyPr/>
+          <a:lstStyle/>
+          <a:p>
+            <a:fld id="{18BDFEC3-8487-43E8-A154-7C12CBC1FFF2}" type="slidenum">
+              <a:rPr lang="en-US"/>
+              <a:t>50</a:t>
             </a:fld>
             <a:endParaRPr lang="en-US"/>
           </a:p>
@@ -5718,7 +5829,7 @@
             </a:pPr>
             <a:r>
               <a:rPr/>
-              <a:t>Somebody will say “healthy, every time”. Agree, and move on. Do not explain the consequence yet - it lands far harder on slide 22, after the break, when they see 96.2% printed as a model’s accuracy score.</a:t>
+              <a:t>Somebody will say “healthy, every time”. Agree, and move on. Do not explain the consequence yet - it lands far harder on slide 23, after the break, when they see 96.2% printed as a model’s accuracy score.</a:t>
             </a:r>
           </a:p>
         </p:txBody>
@@ -6048,35 +6159,63 @@
             </a:pPr>
             <a:r>
               <a:rPr/>
-              <a:t>Read it aloud as a sentence: take the linear model of lesson 3, and instead of calling its output a prediction, call it the log-odds and convert.</a:t>
-            </a:r>
-          </a:p>
-          <a:p>
-            <a:pPr lvl="0" indent="0" marL="0">
-              <a:buNone/>
-            </a:pPr>
-          </a:p>
-          <a:p>
-            <a:pPr lvl="0" indent="0" marL="0">
-              <a:buNone/>
-            </a:pPr>
-            <a:r>
-              <a:rPr/>
-              <a:t>Name the three properties we will use, without deriving them here - the handout section 2.2 does that: sigma of 0 is a half; sigma of minus z is 1 minus sigma of z; and the derivative is sigma times one minus sigma.</a:t>
-            </a:r>
-          </a:p>
-          <a:p>
-            <a:pPr lvl="0" indent="0" marL="0">
-              <a:buNone/>
-            </a:pPr>
-          </a:p>
-          <a:p>
-            <a:pPr lvl="0" indent="0" marL="0">
-              <a:buNone/>
-            </a:pPr>
-            <a:r>
-              <a:rPr/>
-              <a:t>That last one is the one to flag. It is largest in the middle, one quarter, and it decays to zero at both ends. On slide 17 that fact will be simultaneously the reason the sigmoid works and the reason squared error does not.</a:t>
+              <a:t>This is the step from the previous figure to the next slide, done on the board. p is shorthand for P(y = 1 | x), the probability from slide 4.</a:t>
+            </a:r>
+          </a:p>
+          <a:p>
+            <a:pPr lvl="0" indent="0" marL="0">
+              <a:buNone/>
+            </a:pPr>
+          </a:p>
+          <a:p>
+            <a:pPr lvl="0" indent="0" marL="0">
+              <a:buNone/>
+            </a:pPr>
+            <a:r>
+              <a:rPr/>
+              <a:t>The left-hand equation is the modelling decision. The log-odds runs over the whole real line - the right panel of the previous slide - so it is the one version of the probability a line can predict without ever leaving the range. So put the linear model of lesson 3 there, unchanged.</a:t>
+            </a:r>
+          </a:p>
+          <a:p>
+            <a:pPr lvl="0" indent="0" marL="0">
+              <a:buNone/>
+            </a:pPr>
+          </a:p>
+          <a:p>
+            <a:pPr lvl="0" indent="0" marL="0">
+              <a:buNone/>
+            </a:pPr>
+            <a:r>
+              <a:rPr/>
+              <a:t>The right-hand side is algebra, three lines. Write z for w-transpose-x plus b. Exponentiate both sides: p over 1 minus p equals e to the z. Multiply out and collect p: p times (1 plus e to the z) equals e to the z, so p is e to the z over 1 plus e to the z. Divide top and bottom by e to the z: p is 1 over 1 plus e to the minus z. That function has a name, and the next slide gives it.</a:t>
+            </a:r>
+          </a:p>
+          <a:p>
+            <a:pPr lvl="0" indent="0" marL="0">
+              <a:buNone/>
+            </a:pPr>
+          </a:p>
+          <a:p>
+            <a:pPr lvl="0" indent="0" marL="0">
+              <a:buNone/>
+            </a:pPr>
+            <a:r>
+              <a:rPr/>
+              <a:t>Check it with a number from the handout’s table in section 2.3: a log-odds of +2.20 gives back 1 over (1 plus e to the minus 2.2), which is 0.90. A log-odds of 0 gives back exactly a half.</a:t>
+            </a:r>
+          </a:p>
+          <a:p>
+            <a:pPr lvl="0" indent="0" marL="0">
+              <a:buNone/>
+            </a:pPr>
+          </a:p>
+          <a:p>
+            <a:pPr lvl="0" indent="0" marL="0">
+              <a:buNone/>
+            </a:pPr>
+            <a:r>
+              <a:rPr/>
+              <a:t>The handout runs the same algebra in the other direction, from the sigmoid to the log-odds, in section 2.3.</a:t>
             </a:r>
           </a:p>
         </p:txBody>
@@ -6158,35 +6297,35 @@
             </a:pPr>
             <a:r>
               <a:rPr/>
-              <a:t>This is the interpretability that keeps logistic regression in production in medicine and credit scoring. A coefficient of 1.80 means: a drive one standard deviation worse on that counter has exp(1.80), about six times, the odds of failing.</a:t>
-            </a:r>
-          </a:p>
-          <a:p>
-            <a:pPr lvl="0" indent="0" marL="0">
-              <a:buNone/>
-            </a:pPr>
-          </a:p>
-          <a:p>
-            <a:pPr lvl="0" indent="0" marL="0">
-              <a:buNone/>
-            </a:pPr>
-            <a:r>
-              <a:rPr/>
-              <a:t>Now the mistake they will make, and it is a reasonable one. They will read “six times the odds” as “six times as likely”. For rare events those are nearly the same number, so here it is almost right - which is exactly why the habit survives until it does damage.</a:t>
-            </a:r>
-          </a:p>
-          <a:p>
-            <a:pPr lvl="0" indent="0" marL="0">
-              <a:buNone/>
-            </a:pPr>
-          </a:p>
-          <a:p>
-            <a:pPr lvl="0" indent="0" marL="0">
-              <a:buNone/>
-            </a:pPr>
-            <a:r>
-              <a:rPr/>
-              <a:t>Give them the counterexample out loud: odds of 9, a probability of 0.90, multiplied by 5 gives odds of 45 - a probability of 0.978. The odds went up fivefold; the probability moved eight points. Odds ratios multiply odds.</a:t>
+              <a:t>Read it aloud as a sentence: take the linear model of lesson 3, and instead of calling its output a prediction, call it the log-odds and convert.</a:t>
+            </a:r>
+          </a:p>
+          <a:p>
+            <a:pPr lvl="0" indent="0" marL="0">
+              <a:buNone/>
+            </a:pPr>
+          </a:p>
+          <a:p>
+            <a:pPr lvl="0" indent="0" marL="0">
+              <a:buNone/>
+            </a:pPr>
+            <a:r>
+              <a:rPr/>
+              <a:t>Name the three properties we will use, without deriving them here - the handout section 2.2 does that: sigma of 0 is a half; sigma of minus z is 1 minus sigma of z; and the derivative is sigma times one minus sigma.</a:t>
+            </a:r>
+          </a:p>
+          <a:p>
+            <a:pPr lvl="0" indent="0" marL="0">
+              <a:buNone/>
+            </a:pPr>
+          </a:p>
+          <a:p>
+            <a:pPr lvl="0" indent="0" marL="0">
+              <a:buNone/>
+            </a:pPr>
+            <a:r>
+              <a:rPr/>
+              <a:t>That last one is the one to flag. It is largest in the middle, one quarter, and it decays to zero at both ends. On slide 18 that fact will be simultaneously the reason the sigmoid works and the reason squared error does not.</a:t>
             </a:r>
           </a:p>
         </p:txBody>
@@ -9377,6 +9516,88 @@
             </a:pPr>
             <a:r>
               <a:rPr/>
+              <a:t>The model, in one line</a:t>
+            </a:r>
+          </a:p>
+        </p:txBody>
+      </p:sp>
+      <p:pic>
+        <p:nvPicPr>
+          <p:cNvPr descr="eq_e936e058d0.png" id="0" name="Picture 1"/>
+          <p:cNvPicPr>
+            <a:picLocks noGrp="1" noChangeAspect="1"/>
+          </p:cNvPicPr>
+          <p:nvPr/>
+        </p:nvPicPr>
+        <p:blipFill>
+          <a:blip r:embed="rId3"/>
+          <a:stretch>
+            <a:fillRect/>
+          </a:stretch>
+        </p:blipFill>
+        <p:spPr bwMode="auto">
+          <a:xfrm>
+            <a:off x="457200" y="2535039"/>
+            <a:ext cx="8229600" cy="622300"/>
+          </a:xfrm>
+          <a:prstGeom prst="rect">
+            <a:avLst/>
+          </a:prstGeom>
+          <a:noFill/>
+          <a:ln w="9525">
+            <a:noFill/>
+            <a:headEnd/>
+            <a:tailEnd/>
+          </a:ln>
+        </p:spPr>
+      </p:pic>
+    </p:spTree>
+  </p:cSld>
+</p:sld>
+</file>
+
+<file path=ppt/slides/slide11.xml><?xml version="1.0" encoding="utf-8"?>
+<p:sld xmlns:a="http://schemas.openxmlformats.org/drawingml/2006/main" xmlns:r="http://schemas.openxmlformats.org/officeDocument/2006/relationships" xmlns:p="http://schemas.openxmlformats.org/presentationml/2006/main">
+  <p:cSld>
+    <p:spTree>
+      <p:nvGrpSpPr>
+        <p:cNvPr id="1" name=""/>
+        <p:cNvGrpSpPr/>
+        <p:nvPr/>
+      </p:nvGrpSpPr>
+      <p:grpSpPr>
+        <a:xfrm>
+          <a:off x="0" y="0"/>
+          <a:ext cx="0" cy="0"/>
+          <a:chOff x="0" y="0"/>
+          <a:chExt cx="0" cy="0"/>
+        </a:xfrm>
+      </p:grpSpPr>
+      <p:sp>
+        <p:nvSpPr>
+          <p:cNvPr id="2" name="Title 1"/>
+          <p:cNvSpPr>
+            <a:spLocks noGrp="1"/>
+          </p:cNvSpPr>
+          <p:nvPr>
+            <p:ph type="title"/>
+          </p:nvPr>
+        </p:nvSpPr>
+        <p:spPr>
+          <a:xfrm>
+            <a:off x="457200" y="205979"/>
+            <a:ext cx="8229600" cy="857250"/>
+          </a:xfrm>
+        </p:spPr>
+        <p:txBody>
+          <a:bodyPr/>
+          <a:lstStyle/>
+          <a:p>
+            <a:pPr lvl="0" indent="0" marL="0">
+              <a:buNone/>
+            </a:pPr>
+            <a:r>
+              <a:rPr/>
               <a:t>What the coefficients mean</a:t>
             </a:r>
           </a:p>
@@ -9468,7 +9689,7 @@
 </p:sld>
 </file>
 
-<file path=ppt/slides/slide11.xml><?xml version="1.0" encoding="utf-8"?>
+<file path=ppt/slides/slide12.xml><?xml version="1.0" encoding="utf-8"?>
 <p:sld xmlns:a="http://schemas.openxmlformats.org/drawingml/2006/main" xmlns:r="http://schemas.openxmlformats.org/officeDocument/2006/relationships" xmlns:p="http://schemas.openxmlformats.org/presentationml/2006/main">
   <p:cSld>
     <p:spTree>
@@ -9988,104 +10209,6 @@
 </p:sld>
 </file>
 
-<file path=ppt/slides/slide12.xml><?xml version="1.0" encoding="utf-8"?>
-<p:sld xmlns:a="http://schemas.openxmlformats.org/drawingml/2006/main" xmlns:r="http://schemas.openxmlformats.org/officeDocument/2006/relationships" xmlns:p="http://schemas.openxmlformats.org/presentationml/2006/main">
-  <p:cSld>
-    <p:spTree>
-      <p:nvGrpSpPr>
-        <p:cNvPr id="1" name=""/>
-        <p:cNvGrpSpPr/>
-        <p:nvPr/>
-      </p:nvGrpSpPr>
-      <p:grpSpPr>
-        <a:xfrm>
-          <a:off x="0" y="0"/>
-          <a:ext cx="0" cy="0"/>
-          <a:chOff x="0" y="0"/>
-          <a:chExt cx="0" cy="0"/>
-        </a:xfrm>
-      </p:grpSpPr>
-      <p:sp>
-        <p:nvSpPr>
-          <p:cNvPr id="2" name="Title 1"/>
-          <p:cNvSpPr>
-            <a:spLocks noGrp="1"/>
-          </p:cNvSpPr>
-          <p:nvPr>
-            <p:ph type="title"/>
-          </p:nvPr>
-        </p:nvSpPr>
-        <p:spPr>
-          <a:xfrm>
-            <a:off x="457200" y="205979"/>
-            <a:ext cx="8229600" cy="857250"/>
-          </a:xfrm>
-        </p:spPr>
-        <p:txBody>
-          <a:bodyPr/>
-          <a:lstStyle/>
-          <a:p>
-            <a:pPr lvl="0" indent="0" marL="0">
-              <a:buNone/>
-            </a:pPr>
-            <a:r>
-              <a:rPr/>
-              <a:t>The intercept is the average drive’s chance</a:t>
-            </a:r>
-          </a:p>
-        </p:txBody>
-      </p:sp>
-      <p:sp>
-        <p:nvSpPr>
-          <p:cNvPr id="3" name="Content Placeholder 2"/>
-          <p:cNvSpPr>
-            <a:spLocks noGrp="1"/>
-          </p:cNvSpPr>
-          <p:nvPr>
-            <p:ph idx="1"/>
-          </p:nvPr>
-        </p:nvSpPr>
-        <p:spPr>
-          <a:xfrm>
-            <a:off x="457200" y="1200151"/>
-            <a:ext cx="8229600" cy="3394472"/>
-          </a:xfrm>
-        </p:spPr>
-        <p:txBody>
-          <a:bodyPr/>
-          <a:lstStyle/>
-          <a:p>
-            <a:pPr lvl="0"/>
-            <a:r>
-              <a:rPr/>
-              <a:t>Fitted intercept: </a:t>
-            </a:r>
-            <a:r>
-              <a:rPr b="1"/>
-              <a:t>−6.09</a:t>
-            </a:r>
-          </a:p>
-          <a:p>
-            <a:pPr lvl="0"/>
-            <a:r>
-              <a:rPr/>
-              <a:t>σ(-6.09) = 0.0023: a 0.2% chance for a drive average on every counter</a:t>
-            </a:r>
-          </a:p>
-          <a:p>
-            <a:pPr lvl="0"/>
-            <a:r>
-              <a:rPr/>
-              <a:t>The fleet fails at 3.8%: the failures come from the few drives far above average</a:t>
-            </a:r>
-          </a:p>
-        </p:txBody>
-      </p:sp>
-    </p:spTree>
-  </p:cSld>
-</p:sld>
-</file>
-
 <file path=ppt/slides/slide13.xml><?xml version="1.0" encoding="utf-8"?>
 <p:sld xmlns:a="http://schemas.openxmlformats.org/drawingml/2006/main" xmlns:r="http://schemas.openxmlformats.org/officeDocument/2006/relationships" xmlns:p="http://schemas.openxmlformats.org/presentationml/2006/main">
   <p:cSld>
@@ -10128,7 +10251,7 @@
             </a:pPr>
             <a:r>
               <a:rPr/>
-              <a:t>Fitting means minimising something, but what?</a:t>
+              <a:t>The intercept is the average drive’s chance</a:t>
             </a:r>
           </a:p>
         </p:txBody>
@@ -10156,14 +10279,25 @@
             <a:pPr lvl="0"/>
             <a:r>
               <a:rPr/>
-              <a:t>Squared error worked for lesson 3</a:t>
+              <a:t>Fitted intercept: </a:t>
+            </a:r>
+            <a:r>
+              <a:rPr b="1"/>
+              <a:t>−6.09</a:t>
             </a:r>
           </a:p>
           <a:p>
             <a:pPr lvl="0"/>
             <a:r>
               <a:rPr/>
-              <a:t>Why not just apply it to the sigmoid’s output?</a:t>
+              <a:t>σ(-6.09) = 0.0023: a 0.2% chance for a drive average on every counter</a:t>
+            </a:r>
+          </a:p>
+          <a:p>
+            <a:pPr lvl="0"/>
+            <a:r>
+              <a:rPr/>
+              <a:t>The fleet fails at 3.8%: the failures come from the few drives far above average</a:t>
             </a:r>
           </a:p>
         </p:txBody>
@@ -10215,7 +10349,7 @@
             </a:pPr>
             <a:r>
               <a:rPr/>
-              <a:t>Maximum likelihood, in one sentence</a:t>
+              <a:t>Fitting means minimising something, but what?</a:t>
             </a:r>
           </a:p>
         </p:txBody>
@@ -10243,14 +10377,14 @@
             <a:pPr lvl="0"/>
             <a:r>
               <a:rPr/>
-              <a:t>The parameters w and b are a knob: each setting gives a probability to what actually happened</a:t>
+              <a:t>Squared error worked for lesson 3</a:t>
             </a:r>
           </a:p>
           <a:p>
             <a:pPr lvl="0"/>
             <a:r>
-              <a:rPr b="1"/>
-              <a:t>Turn the knob so that what actually happened is least surprising</a:t>
+              <a:rPr/>
+              <a:t>Why not just apply it to the sigmoid’s output?</a:t>
             </a:r>
           </a:p>
         </p:txBody>
@@ -10261,6 +10395,93 @@
 </file>
 
 <file path=ppt/slides/slide15.xml><?xml version="1.0" encoding="utf-8"?>
+<p:sld xmlns:a="http://schemas.openxmlformats.org/drawingml/2006/main" xmlns:r="http://schemas.openxmlformats.org/officeDocument/2006/relationships" xmlns:p="http://schemas.openxmlformats.org/presentationml/2006/main">
+  <p:cSld>
+    <p:spTree>
+      <p:nvGrpSpPr>
+        <p:cNvPr id="1" name=""/>
+        <p:cNvGrpSpPr/>
+        <p:nvPr/>
+      </p:nvGrpSpPr>
+      <p:grpSpPr>
+        <a:xfrm>
+          <a:off x="0" y="0"/>
+          <a:ext cx="0" cy="0"/>
+          <a:chOff x="0" y="0"/>
+          <a:chExt cx="0" cy="0"/>
+        </a:xfrm>
+      </p:grpSpPr>
+      <p:sp>
+        <p:nvSpPr>
+          <p:cNvPr id="2" name="Title 1"/>
+          <p:cNvSpPr>
+            <a:spLocks noGrp="1"/>
+          </p:cNvSpPr>
+          <p:nvPr>
+            <p:ph type="title"/>
+          </p:nvPr>
+        </p:nvSpPr>
+        <p:spPr>
+          <a:xfrm>
+            <a:off x="457200" y="205979"/>
+            <a:ext cx="8229600" cy="857250"/>
+          </a:xfrm>
+        </p:spPr>
+        <p:txBody>
+          <a:bodyPr/>
+          <a:lstStyle/>
+          <a:p>
+            <a:pPr lvl="0" indent="0" marL="0">
+              <a:buNone/>
+            </a:pPr>
+            <a:r>
+              <a:rPr/>
+              <a:t>Maximum likelihood, in one sentence</a:t>
+            </a:r>
+          </a:p>
+        </p:txBody>
+      </p:sp>
+      <p:sp>
+        <p:nvSpPr>
+          <p:cNvPr id="3" name="Content Placeholder 2"/>
+          <p:cNvSpPr>
+            <a:spLocks noGrp="1"/>
+          </p:cNvSpPr>
+          <p:nvPr>
+            <p:ph idx="1"/>
+          </p:nvPr>
+        </p:nvSpPr>
+        <p:spPr>
+          <a:xfrm>
+            <a:off x="457200" y="1200151"/>
+            <a:ext cx="8229600" cy="3394472"/>
+          </a:xfrm>
+        </p:spPr>
+        <p:txBody>
+          <a:bodyPr/>
+          <a:lstStyle/>
+          <a:p>
+            <a:pPr lvl="0"/>
+            <a:r>
+              <a:rPr/>
+              <a:t>The parameters w and b are a knob: each setting gives a probability to what actually happened</a:t>
+            </a:r>
+          </a:p>
+          <a:p>
+            <a:pPr lvl="0"/>
+            <a:r>
+              <a:rPr b="1"/>
+              <a:t>Turn the knob so that what actually happened is least surprising</a:t>
+            </a:r>
+          </a:p>
+        </p:txBody>
+      </p:sp>
+    </p:spTree>
+  </p:cSld>
+</p:sld>
+</file>
+
+<file path=ppt/slides/slide16.xml><?xml version="1.0" encoding="utf-8"?>
 <p:sld xmlns:a="http://schemas.openxmlformats.org/drawingml/2006/main" xmlns:r="http://schemas.openxmlformats.org/officeDocument/2006/relationships" xmlns:p="http://schemas.openxmlformats.org/presentationml/2006/main">
   <p:cSld>
     <p:spTree>
@@ -10342,7 +10563,7 @@
 </p:sld>
 </file>
 
-<file path=ppt/slides/slide16.xml><?xml version="1.0" encoding="utf-8"?>
+<file path=ppt/slides/slide17.xml><?xml version="1.0" encoding="utf-8"?>
 <p:sld xmlns:a="http://schemas.openxmlformats.org/drawingml/2006/main" xmlns:r="http://schemas.openxmlformats.org/officeDocument/2006/relationships" xmlns:p="http://schemas.openxmlformats.org/presentationml/2006/main">
   <p:cSld>
     <p:spTree>
@@ -10424,7 +10645,7 @@
 </p:sld>
 </file>
 
-<file path=ppt/slides/slide17.xml><?xml version="1.0" encoding="utf-8"?>
+<file path=ppt/slides/slide18.xml><?xml version="1.0" encoding="utf-8"?>
 <p:sld xmlns:a="http://schemas.openxmlformats.org/drawingml/2006/main" xmlns:r="http://schemas.openxmlformats.org/officeDocument/2006/relationships" xmlns:p="http://schemas.openxmlformats.org/presentationml/2006/main">
   <p:cSld>
     <p:spTree>
@@ -10506,7 +10727,7 @@
 </p:sld>
 </file>
 
-<file path=ppt/slides/slide18.xml><?xml version="1.0" encoding="utf-8"?>
+<file path=ppt/slides/slide19.xml><?xml version="1.0" encoding="utf-8"?>
 <p:sld xmlns:a="http://schemas.openxmlformats.org/drawingml/2006/main" xmlns:r="http://schemas.openxmlformats.org/officeDocument/2006/relationships" xmlns:p="http://schemas.openxmlformats.org/presentationml/2006/main">
   <p:cSld>
     <p:spTree>
@@ -10601,7 +10822,94 @@
 </p:sld>
 </file>
 
-<file path=ppt/slides/slide19.xml><?xml version="1.0" encoding="utf-8"?>
+<file path=ppt/slides/slide2.xml><?xml version="1.0" encoding="utf-8"?>
+<p:sld xmlns:a="http://schemas.openxmlformats.org/drawingml/2006/main" xmlns:r="http://schemas.openxmlformats.org/officeDocument/2006/relationships" xmlns:p="http://schemas.openxmlformats.org/presentationml/2006/main">
+  <p:cSld>
+    <p:spTree>
+      <p:nvGrpSpPr>
+        <p:cNvPr id="1" name=""/>
+        <p:cNvGrpSpPr/>
+        <p:nvPr/>
+      </p:nvGrpSpPr>
+      <p:grpSpPr>
+        <a:xfrm>
+          <a:off x="0" y="0"/>
+          <a:ext cx="0" cy="0"/>
+          <a:chOff x="0" y="0"/>
+          <a:chExt cx="0" cy="0"/>
+        </a:xfrm>
+      </p:grpSpPr>
+      <p:sp>
+        <p:nvSpPr>
+          <p:cNvPr id="2" name="Title 1"/>
+          <p:cNvSpPr>
+            <a:spLocks noGrp="1"/>
+          </p:cNvSpPr>
+          <p:nvPr>
+            <p:ph type="title"/>
+          </p:nvPr>
+        </p:nvSpPr>
+        <p:spPr>
+          <a:xfrm>
+            <a:off x="457200" y="205979"/>
+            <a:ext cx="8229600" cy="857250"/>
+          </a:xfrm>
+        </p:spPr>
+        <p:txBody>
+          <a:bodyPr/>
+          <a:lstStyle/>
+          <a:p>
+            <a:pPr lvl="0" indent="0" marL="0">
+              <a:buNone/>
+            </a:pPr>
+            <a:r>
+              <a:rPr/>
+              <a:t>Before we start</a:t>
+            </a:r>
+          </a:p>
+        </p:txBody>
+      </p:sp>
+      <p:sp>
+        <p:nvSpPr>
+          <p:cNvPr id="3" name="Content Placeholder 2"/>
+          <p:cNvSpPr>
+            <a:spLocks noGrp="1"/>
+          </p:cNvSpPr>
+          <p:nvPr>
+            <p:ph idx="1"/>
+          </p:nvPr>
+        </p:nvSpPr>
+        <p:spPr>
+          <a:xfrm>
+            <a:off x="457200" y="1200151"/>
+            <a:ext cx="8229600" cy="3394472"/>
+          </a:xfrm>
+        </p:spPr>
+        <p:txBody>
+          <a:bodyPr/>
+          <a:lstStyle/>
+          <a:p>
+            <a:pPr lvl="0"/>
+            <a:r>
+              <a:rPr/>
+              <a:t>Exercise 3, which we discuss now</a:t>
+            </a:r>
+          </a:p>
+          <a:p>
+            <a:pPr lvl="0"/>
+            <a:r>
+              <a:rPr/>
+              <a:t>Ridge, Lasso, and the choice of the penalty strength</a:t>
+            </a:r>
+          </a:p>
+        </p:txBody>
+      </p:sp>
+    </p:spTree>
+  </p:cSld>
+</p:sld>
+</file>
+
+<file path=ppt/slides/slide20.xml><?xml version="1.0" encoding="utf-8"?>
 <p:sld xmlns:a="http://schemas.openxmlformats.org/drawingml/2006/main" xmlns:r="http://schemas.openxmlformats.org/officeDocument/2006/relationships" xmlns:p="http://schemas.openxmlformats.org/presentationml/2006/main">
   <p:cSld>
     <p:spTree>
@@ -10929,94 +11237,7 @@
 </p:sld>
 </file>
 
-<file path=ppt/slides/slide2.xml><?xml version="1.0" encoding="utf-8"?>
-<p:sld xmlns:a="http://schemas.openxmlformats.org/drawingml/2006/main" xmlns:r="http://schemas.openxmlformats.org/officeDocument/2006/relationships" xmlns:p="http://schemas.openxmlformats.org/presentationml/2006/main">
-  <p:cSld>
-    <p:spTree>
-      <p:nvGrpSpPr>
-        <p:cNvPr id="1" name=""/>
-        <p:cNvGrpSpPr/>
-        <p:nvPr/>
-      </p:nvGrpSpPr>
-      <p:grpSpPr>
-        <a:xfrm>
-          <a:off x="0" y="0"/>
-          <a:ext cx="0" cy="0"/>
-          <a:chOff x="0" y="0"/>
-          <a:chExt cx="0" cy="0"/>
-        </a:xfrm>
-      </p:grpSpPr>
-      <p:sp>
-        <p:nvSpPr>
-          <p:cNvPr id="2" name="Title 1"/>
-          <p:cNvSpPr>
-            <a:spLocks noGrp="1"/>
-          </p:cNvSpPr>
-          <p:nvPr>
-            <p:ph type="title"/>
-          </p:nvPr>
-        </p:nvSpPr>
-        <p:spPr>
-          <a:xfrm>
-            <a:off x="457200" y="205979"/>
-            <a:ext cx="8229600" cy="857250"/>
-          </a:xfrm>
-        </p:spPr>
-        <p:txBody>
-          <a:bodyPr/>
-          <a:lstStyle/>
-          <a:p>
-            <a:pPr lvl="0" indent="0" marL="0">
-              <a:buNone/>
-            </a:pPr>
-            <a:r>
-              <a:rPr/>
-              <a:t>Before we start</a:t>
-            </a:r>
-          </a:p>
-        </p:txBody>
-      </p:sp>
-      <p:sp>
-        <p:nvSpPr>
-          <p:cNvPr id="3" name="Content Placeholder 2"/>
-          <p:cNvSpPr>
-            <a:spLocks noGrp="1"/>
-          </p:cNvSpPr>
-          <p:nvPr>
-            <p:ph idx="1"/>
-          </p:nvPr>
-        </p:nvSpPr>
-        <p:spPr>
-          <a:xfrm>
-            <a:off x="457200" y="1200151"/>
-            <a:ext cx="8229600" cy="3394472"/>
-          </a:xfrm>
-        </p:spPr>
-        <p:txBody>
-          <a:bodyPr/>
-          <a:lstStyle/>
-          <a:p>
-            <a:pPr lvl="0"/>
-            <a:r>
-              <a:rPr/>
-              <a:t>Exercise 3, which we discuss now</a:t>
-            </a:r>
-          </a:p>
-          <a:p>
-            <a:pPr lvl="0"/>
-            <a:r>
-              <a:rPr/>
-              <a:t>Ridge, Lasso, and the choice of the penalty strength</a:t>
-            </a:r>
-          </a:p>
-        </p:txBody>
-      </p:sp>
-    </p:spTree>
-  </p:cSld>
-</p:sld>
-</file>
-
-<file path=ppt/slides/slide20.xml><?xml version="1.0" encoding="utf-8"?>
+<file path=ppt/slides/slide21.xml><?xml version="1.0" encoding="utf-8"?>
 <p:sld xmlns:a="http://schemas.openxmlformats.org/drawingml/2006/main" xmlns:r="http://schemas.openxmlformats.org/officeDocument/2006/relationships" xmlns:p="http://schemas.openxmlformats.org/presentationml/2006/main">
   <p:cSld>
     <p:spTree>
@@ -11098,7 +11319,7 @@
 </p:sld>
 </file>
 
-<file path=ppt/slides/slide21.xml><?xml version="1.0" encoding="utf-8"?>
+<file path=ppt/slides/slide22.xml><?xml version="1.0" encoding="utf-8"?>
 <p:sld xmlns:a="http://schemas.openxmlformats.org/drawingml/2006/main" xmlns:r="http://schemas.openxmlformats.org/officeDocument/2006/relationships" xmlns:p="http://schemas.openxmlformats.org/presentationml/2006/main">
   <p:cSld>
     <p:spTree>
@@ -11178,7 +11399,7 @@
 </p:sld>
 </file>
 
-<file path=ppt/slides/slide22.xml><?xml version="1.0" encoding="utf-8"?>
+<file path=ppt/slides/slide23.xml><?xml version="1.0" encoding="utf-8"?>
 <p:sld xmlns:a="http://schemas.openxmlformats.org/drawingml/2006/main" xmlns:r="http://schemas.openxmlformats.org/officeDocument/2006/relationships" xmlns:p="http://schemas.openxmlformats.org/presentationml/2006/main">
   <p:cSld>
     <p:spTree>
@@ -11403,7 +11624,7 @@
 </p:sld>
 </file>
 
-<file path=ppt/slides/slide23.xml><?xml version="1.0" encoding="utf-8"?>
+<file path=ppt/slides/slide24.xml><?xml version="1.0" encoding="utf-8"?>
 <p:sld xmlns:a="http://schemas.openxmlformats.org/drawingml/2006/main" xmlns:r="http://schemas.openxmlformats.org/officeDocument/2006/relationships" xmlns:p="http://schemas.openxmlformats.org/presentationml/2006/main">
   <p:cSld>
     <p:spTree>
@@ -11513,7 +11734,7 @@
 </p:sld>
 </file>
 
-<file path=ppt/slides/slide24.xml><?xml version="1.0" encoding="utf-8"?>
+<file path=ppt/slides/slide25.xml><?xml version="1.0" encoding="utf-8"?>
 <p:sld xmlns:a="http://schemas.openxmlformats.org/drawingml/2006/main" xmlns:r="http://schemas.openxmlformats.org/officeDocument/2006/relationships" xmlns:p="http://schemas.openxmlformats.org/presentationml/2006/main">
   <p:cSld>
     <p:spTree>
@@ -11595,7 +11816,7 @@
 </p:sld>
 </file>
 
-<file path=ppt/slides/slide25.xml><?xml version="1.0" encoding="utf-8"?>
+<file path=ppt/slides/slide26.xml><?xml version="1.0" encoding="utf-8"?>
 <p:sld xmlns:a="http://schemas.openxmlformats.org/drawingml/2006/main" xmlns:r="http://schemas.openxmlformats.org/officeDocument/2006/relationships" xmlns:p="http://schemas.openxmlformats.org/presentationml/2006/main">
   <p:cSld>
     <p:spTree>
@@ -11690,7 +11911,7 @@
 </p:sld>
 </file>
 
-<file path=ppt/slides/slide26.xml><?xml version="1.0" encoding="utf-8"?>
+<file path=ppt/slides/slide27.xml><?xml version="1.0" encoding="utf-8"?>
 <p:sld xmlns:a="http://schemas.openxmlformats.org/drawingml/2006/main" xmlns:r="http://schemas.openxmlformats.org/officeDocument/2006/relationships" xmlns:p="http://schemas.openxmlformats.org/presentationml/2006/main">
   <p:cSld>
     <p:spTree>
@@ -11772,7 +11993,7 @@
 </p:sld>
 </file>
 
-<file path=ppt/slides/slide27.xml><?xml version="1.0" encoding="utf-8"?>
+<file path=ppt/slides/slide28.xml><?xml version="1.0" encoding="utf-8"?>
 <p:sld xmlns:a="http://schemas.openxmlformats.org/drawingml/2006/main" xmlns:r="http://schemas.openxmlformats.org/officeDocument/2006/relationships" xmlns:p="http://schemas.openxmlformats.org/presentationml/2006/main">
   <p:cSld>
     <p:spTree>
@@ -11912,7 +12133,7 @@
 </p:sld>
 </file>
 
-<file path=ppt/slides/slide28.xml><?xml version="1.0" encoding="utf-8"?>
+<file path=ppt/slides/slide29.xml><?xml version="1.0" encoding="utf-8"?>
 <p:sld xmlns:a="http://schemas.openxmlformats.org/drawingml/2006/main" xmlns:r="http://schemas.openxmlformats.org/officeDocument/2006/relationships" xmlns:p="http://schemas.openxmlformats.org/presentationml/2006/main">
   <p:cSld>
     <p:spTree>
@@ -12154,138 +12375,6 @@
 </p:sld>
 </file>
 
-<file path=ppt/slides/slide29.xml><?xml version="1.0" encoding="utf-8"?>
-<p:sld xmlns:a="http://schemas.openxmlformats.org/drawingml/2006/main" xmlns:r="http://schemas.openxmlformats.org/officeDocument/2006/relationships" xmlns:p="http://schemas.openxmlformats.org/presentationml/2006/main">
-  <p:cSld>
-    <p:spTree>
-      <p:nvGrpSpPr>
-        <p:cNvPr id="1" name=""/>
-        <p:cNvGrpSpPr/>
-        <p:nvPr/>
-      </p:nvGrpSpPr>
-      <p:grpSpPr>
-        <a:xfrm>
-          <a:off x="0" y="0"/>
-          <a:ext cx="0" cy="0"/>
-          <a:chOff x="0" y="0"/>
-          <a:chExt cx="0" cy="0"/>
-        </a:xfrm>
-      </p:grpSpPr>
-      <p:sp>
-        <p:nvSpPr>
-          <p:cNvPr id="2" name="Title 1"/>
-          <p:cNvSpPr>
-            <a:spLocks noGrp="1"/>
-          </p:cNvSpPr>
-          <p:nvPr>
-            <p:ph type="title"/>
-          </p:nvPr>
-        </p:nvSpPr>
-        <p:spPr>
-          <a:xfrm>
-            <a:off x="457200" y="205979"/>
-            <a:ext cx="8229600" cy="857250"/>
-          </a:xfrm>
-        </p:spPr>
-        <p:txBody>
-          <a:bodyPr/>
-          <a:lstStyle/>
-          <a:p>
-            <a:pPr lvl="0" indent="0" marL="0">
-              <a:buNone/>
-            </a:pPr>
-            <a:r>
-              <a:rPr/>
-              <a:t>Read the minority class, not the average</a:t>
-            </a:r>
-          </a:p>
-        </p:txBody>
-      </p:sp>
-      <p:sp>
-        <p:nvSpPr>
-          <p:cNvPr id="3" name="Content Placeholder 2"/>
-          <p:cNvSpPr>
-            <a:spLocks noGrp="1"/>
-          </p:cNvSpPr>
-          <p:nvPr>
-            <p:ph idx="1"/>
-          </p:nvPr>
-        </p:nvSpPr>
-        <p:spPr>
-          <a:xfrm>
-            <a:off x="457200" y="1200151"/>
-            <a:ext cx="8229600" cy="3394472"/>
-          </a:xfrm>
-        </p:spPr>
-        <p:txBody>
-          <a:bodyPr/>
-          <a:lstStyle/>
-          <a:p>
-            <a:pPr lvl="0"/>
-            <a:r>
-              <a:rPr>
-                <a:latin typeface="Courier"/>
-              </a:rPr>
-              <a:t>weighted avg</a:t>
-            </a:r>
-            <a:r>
-              <a:rPr/>
-              <a:t> F1: </a:t>
-            </a:r>
-            <a:r>
-              <a:rPr b="1"/>
-              <a:t>0.975</a:t>
-            </a:r>
-            <a:r>
-              <a:rPr/>
-              <a:t> (dominated by the healthy class)</a:t>
-            </a:r>
-          </a:p>
-          <a:p>
-            <a:pPr lvl="0"/>
-            <a:r>
-              <a:rPr>
-                <a:latin typeface="Courier"/>
-              </a:rPr>
-              <a:t>macro avg</a:t>
-            </a:r>
-            <a:r>
-              <a:rPr/>
-              <a:t> F1: </a:t>
-            </a:r>
-            <a:r>
-              <a:rPr b="1"/>
-              <a:t>0.820</a:t>
-            </a:r>
-            <a:r>
-              <a:rPr/>
-              <a:t> (both classes get an equal say)</a:t>
-            </a:r>
-          </a:p>
-          <a:p>
-            <a:pPr lvl="0"/>
-            <a:r>
-              <a:rPr/>
-              <a:t>In code: </a:t>
-            </a:r>
-            <a:r>
-              <a:rPr>
-                <a:latin typeface="Courier"/>
-              </a:rPr>
-              <a:t>classification_report(y_test, y_pred)</a:t>
-            </a:r>
-            <a:r>
-              <a:rPr/>
-              <a:t> prints both rows</a:t>
-            </a:r>
-          </a:p>
-        </p:txBody>
-      </p:sp>
-    </p:spTree>
-  </p:cSld>
-</p:sld>
-</file>
-
 <file path=ppt/slides/slide3.xml><?xml version="1.0" encoding="utf-8"?>
 <p:sld xmlns:a="http://schemas.openxmlformats.org/drawingml/2006/main" xmlns:r="http://schemas.openxmlformats.org/officeDocument/2006/relationships" xmlns:p="http://schemas.openxmlformats.org/presentationml/2006/main">
   <p:cSld>
@@ -12395,6 +12484,138 @@
 </file>
 
 <file path=ppt/slides/slide30.xml><?xml version="1.0" encoding="utf-8"?>
+<p:sld xmlns:a="http://schemas.openxmlformats.org/drawingml/2006/main" xmlns:r="http://schemas.openxmlformats.org/officeDocument/2006/relationships" xmlns:p="http://schemas.openxmlformats.org/presentationml/2006/main">
+  <p:cSld>
+    <p:spTree>
+      <p:nvGrpSpPr>
+        <p:cNvPr id="1" name=""/>
+        <p:cNvGrpSpPr/>
+        <p:nvPr/>
+      </p:nvGrpSpPr>
+      <p:grpSpPr>
+        <a:xfrm>
+          <a:off x="0" y="0"/>
+          <a:ext cx="0" cy="0"/>
+          <a:chOff x="0" y="0"/>
+          <a:chExt cx="0" cy="0"/>
+        </a:xfrm>
+      </p:grpSpPr>
+      <p:sp>
+        <p:nvSpPr>
+          <p:cNvPr id="2" name="Title 1"/>
+          <p:cNvSpPr>
+            <a:spLocks noGrp="1"/>
+          </p:cNvSpPr>
+          <p:nvPr>
+            <p:ph type="title"/>
+          </p:nvPr>
+        </p:nvSpPr>
+        <p:spPr>
+          <a:xfrm>
+            <a:off x="457200" y="205979"/>
+            <a:ext cx="8229600" cy="857250"/>
+          </a:xfrm>
+        </p:spPr>
+        <p:txBody>
+          <a:bodyPr/>
+          <a:lstStyle/>
+          <a:p>
+            <a:pPr lvl="0" indent="0" marL="0">
+              <a:buNone/>
+            </a:pPr>
+            <a:r>
+              <a:rPr/>
+              <a:t>Read the minority class, not the average</a:t>
+            </a:r>
+          </a:p>
+        </p:txBody>
+      </p:sp>
+      <p:sp>
+        <p:nvSpPr>
+          <p:cNvPr id="3" name="Content Placeholder 2"/>
+          <p:cNvSpPr>
+            <a:spLocks noGrp="1"/>
+          </p:cNvSpPr>
+          <p:nvPr>
+            <p:ph idx="1"/>
+          </p:nvPr>
+        </p:nvSpPr>
+        <p:spPr>
+          <a:xfrm>
+            <a:off x="457200" y="1200151"/>
+            <a:ext cx="8229600" cy="3394472"/>
+          </a:xfrm>
+        </p:spPr>
+        <p:txBody>
+          <a:bodyPr/>
+          <a:lstStyle/>
+          <a:p>
+            <a:pPr lvl="0"/>
+            <a:r>
+              <a:rPr>
+                <a:latin typeface="Courier"/>
+              </a:rPr>
+              <a:t>weighted avg</a:t>
+            </a:r>
+            <a:r>
+              <a:rPr/>
+              <a:t> F1: </a:t>
+            </a:r>
+            <a:r>
+              <a:rPr b="1"/>
+              <a:t>0.975</a:t>
+            </a:r>
+            <a:r>
+              <a:rPr/>
+              <a:t> (dominated by the healthy class)</a:t>
+            </a:r>
+          </a:p>
+          <a:p>
+            <a:pPr lvl="0"/>
+            <a:r>
+              <a:rPr>
+                <a:latin typeface="Courier"/>
+              </a:rPr>
+              <a:t>macro avg</a:t>
+            </a:r>
+            <a:r>
+              <a:rPr/>
+              <a:t> F1: </a:t>
+            </a:r>
+            <a:r>
+              <a:rPr b="1"/>
+              <a:t>0.820</a:t>
+            </a:r>
+            <a:r>
+              <a:rPr/>
+              <a:t> (both classes get an equal say)</a:t>
+            </a:r>
+          </a:p>
+          <a:p>
+            <a:pPr lvl="0"/>
+            <a:r>
+              <a:rPr/>
+              <a:t>In code: </a:t>
+            </a:r>
+            <a:r>
+              <a:rPr>
+                <a:latin typeface="Courier"/>
+              </a:rPr>
+              <a:t>classification_report(y_test, y_pred)</a:t>
+            </a:r>
+            <a:r>
+              <a:rPr/>
+              <a:t> prints both rows</a:t>
+            </a:r>
+          </a:p>
+        </p:txBody>
+      </p:sp>
+    </p:spTree>
+  </p:cSld>
+</p:sld>
+</file>
+
+<file path=ppt/slides/slide31.xml><?xml version="1.0" encoding="utf-8"?>
 <p:sld xmlns:a="http://schemas.openxmlformats.org/drawingml/2006/main" xmlns:r="http://schemas.openxmlformats.org/officeDocument/2006/relationships" xmlns:p="http://schemas.openxmlformats.org/presentationml/2006/main">
   <p:cSld>
     <p:spTree>
@@ -12748,7 +12969,7 @@
 </p:sld>
 </file>
 
-<file path=ppt/slides/slide31.xml><?xml version="1.0" encoding="utf-8"?>
+<file path=ppt/slides/slide32.xml><?xml version="1.0" encoding="utf-8"?>
 <p:sld xmlns:a="http://schemas.openxmlformats.org/drawingml/2006/main" xmlns:r="http://schemas.openxmlformats.org/officeDocument/2006/relationships" xmlns:p="http://schemas.openxmlformats.org/presentationml/2006/main">
   <p:cSld>
     <p:spTree>
@@ -12830,7 +13051,7 @@
 </p:sld>
 </file>
 
-<file path=ppt/slides/slide32.xml><?xml version="1.0" encoding="utf-8"?>
+<file path=ppt/slides/slide33.xml><?xml version="1.0" encoding="utf-8"?>
 <p:sld xmlns:a="http://schemas.openxmlformats.org/drawingml/2006/main" xmlns:r="http://schemas.openxmlformats.org/officeDocument/2006/relationships" xmlns:p="http://schemas.openxmlformats.org/presentationml/2006/main">
   <p:cSld>
     <p:spTree>
@@ -13564,7 +13785,7 @@
 </p:sld>
 </file>
 
-<file path=ppt/slides/slide33.xml><?xml version="1.0" encoding="utf-8"?>
+<file path=ppt/slides/slide34.xml><?xml version="1.0" encoding="utf-8"?>
 <p:sld xmlns:a="http://schemas.openxmlformats.org/drawingml/2006/main" xmlns:r="http://schemas.openxmlformats.org/officeDocument/2006/relationships" xmlns:p="http://schemas.openxmlformats.org/presentationml/2006/main">
   <p:cSld>
     <p:spTree>
@@ -13646,7 +13867,7 @@
 </p:sld>
 </file>
 
-<file path=ppt/slides/slide34.xml><?xml version="1.0" encoding="utf-8"?>
+<file path=ppt/slides/slide35.xml><?xml version="1.0" encoding="utf-8"?>
 <p:sld xmlns:a="http://schemas.openxmlformats.org/drawingml/2006/main" xmlns:r="http://schemas.openxmlformats.org/officeDocument/2006/relationships" xmlns:p="http://schemas.openxmlformats.org/presentationml/2006/main">
   <p:cSld>
     <p:spTree>
@@ -13741,7 +13962,7 @@
 </p:sld>
 </file>
 
-<file path=ppt/slides/slide35.xml><?xml version="1.0" encoding="utf-8"?>
+<file path=ppt/slides/slide36.xml><?xml version="1.0" encoding="utf-8"?>
 <p:sld xmlns:a="http://schemas.openxmlformats.org/drawingml/2006/main" xmlns:r="http://schemas.openxmlformats.org/officeDocument/2006/relationships" xmlns:p="http://schemas.openxmlformats.org/presentationml/2006/main">
   <p:cSld>
     <p:spTree>
@@ -13823,106 +14044,6 @@
 </p:sld>
 </file>
 
-<file path=ppt/slides/slide36.xml><?xml version="1.0" encoding="utf-8"?>
-<p:sld xmlns:a="http://schemas.openxmlformats.org/drawingml/2006/main" xmlns:r="http://schemas.openxmlformats.org/officeDocument/2006/relationships" xmlns:p="http://schemas.openxmlformats.org/presentationml/2006/main">
-  <p:cSld>
-    <p:spTree>
-      <p:nvGrpSpPr>
-        <p:cNvPr id="1" name=""/>
-        <p:cNvGrpSpPr/>
-        <p:nvPr/>
-      </p:nvGrpSpPr>
-      <p:grpSpPr>
-        <a:xfrm>
-          <a:off x="0" y="0"/>
-          <a:ext cx="0" cy="0"/>
-          <a:chOff x="0" y="0"/>
-          <a:chExt cx="0" cy="0"/>
-        </a:xfrm>
-      </p:grpSpPr>
-      <p:sp>
-        <p:nvSpPr>
-          <p:cNvPr id="2" name="Title 1"/>
-          <p:cNvSpPr>
-            <a:spLocks noGrp="1"/>
-          </p:cNvSpPr>
-          <p:nvPr>
-            <p:ph type="title"/>
-          </p:nvPr>
-        </p:nvSpPr>
-        <p:spPr>
-          <a:xfrm>
-            <a:off x="457200" y="205979"/>
-            <a:ext cx="8229600" cy="857250"/>
-          </a:xfrm>
-        </p:spPr>
-        <p:txBody>
-          <a:bodyPr/>
-          <a:lstStyle/>
-          <a:p>
-            <a:pPr lvl="0" indent="0" marL="0">
-              <a:buNone/>
-            </a:pPr>
-            <a:r>
-              <a:rPr/>
-              <a:t>What the area means</a:t>
-            </a:r>
-          </a:p>
-        </p:txBody>
-      </p:sp>
-      <p:sp>
-        <p:nvSpPr>
-          <p:cNvPr id="3" name="Content Placeholder 2"/>
-          <p:cNvSpPr>
-            <a:spLocks noGrp="1"/>
-          </p:cNvSpPr>
-          <p:nvPr>
-            <p:ph idx="1"/>
-          </p:nvPr>
-        </p:nvSpPr>
-        <p:spPr>
-          <a:xfrm>
-            <a:off x="457200" y="1200151"/>
-            <a:ext cx="8229600" cy="3394472"/>
-          </a:xfrm>
-        </p:spPr>
-        <p:txBody>
-          <a:bodyPr/>
-          <a:lstStyle/>
-          <a:p>
-            <a:pPr lvl="0"/>
-            <a:r>
-              <a:rPr b="1"/>
-              <a:t>Area under the curve (AUC) = the probability that a random failing drive scores above a random healthy one</a:t>
-            </a:r>
-          </a:p>
-          <a:p>
-            <a:pPr lvl="0"/>
-            <a:r>
-              <a:rPr/>
-              <a:t>Ours: 0.949</a:t>
-            </a:r>
-          </a:p>
-          <a:p>
-            <a:pPr lvl="0"/>
-            <a:r>
-              <a:rPr/>
-              <a:t>In code: </a:t>
-            </a:r>
-            <a:r>
-              <a:rPr>
-                <a:latin typeface="Courier"/>
-              </a:rPr>
-              <a:t>roc_auc_score(y_test, scores)</a:t>
-            </a:r>
-          </a:p>
-        </p:txBody>
-      </p:sp>
-    </p:spTree>
-  </p:cSld>
-</p:sld>
-</file>
-
 <file path=ppt/slides/slide37.xml><?xml version="1.0" encoding="utf-8"?>
 <p:sld xmlns:a="http://schemas.openxmlformats.org/drawingml/2006/main" xmlns:r="http://schemas.openxmlformats.org/officeDocument/2006/relationships" xmlns:p="http://schemas.openxmlformats.org/presentationml/2006/main">
   <p:cSld>
@@ -13965,7 +14086,7 @@
             </a:pPr>
             <a:r>
               <a:rPr/>
-              <a:t>What AUC does not tell you</a:t>
+              <a:t>What the area means</a:t>
             </a:r>
           </a:p>
         </p:txBody>
@@ -13992,23 +14113,28 @@
           <a:p>
             <a:pPr lvl="0"/>
             <a:r>
-              <a:rPr/>
-              <a:t>Divide every predicted probability by 10</a:t>
+              <a:rPr b="1"/>
+              <a:t>Area under the curve (AUC) = the probability that a random failing drive scores above a random healthy one</a:t>
             </a:r>
           </a:p>
           <a:p>
             <a:pPr lvl="0"/>
             <a:r>
               <a:rPr/>
-              <a:t>AUC is </a:t>
-            </a:r>
-            <a:r>
-              <a:rPr b="1"/>
-              <a:t>unchanged</a:t>
-            </a:r>
-            <a:r>
-              <a:rPr/>
-              <a:t>; every decision changes</a:t>
+              <a:t>Ours: 0.949</a:t>
+            </a:r>
+          </a:p>
+          <a:p>
+            <a:pPr lvl="0"/>
+            <a:r>
+              <a:rPr/>
+              <a:t>In code: </a:t>
+            </a:r>
+            <a:r>
+              <a:rPr>
+                <a:latin typeface="Courier"/>
+              </a:rPr>
+              <a:t>roc_auc_score(y_test, scores)</a:t>
             </a:r>
           </a:p>
         </p:txBody>
@@ -14019,6 +14145,101 @@
 </file>
 
 <file path=ppt/slides/slide38.xml><?xml version="1.0" encoding="utf-8"?>
+<p:sld xmlns:a="http://schemas.openxmlformats.org/drawingml/2006/main" xmlns:r="http://schemas.openxmlformats.org/officeDocument/2006/relationships" xmlns:p="http://schemas.openxmlformats.org/presentationml/2006/main">
+  <p:cSld>
+    <p:spTree>
+      <p:nvGrpSpPr>
+        <p:cNvPr id="1" name=""/>
+        <p:cNvGrpSpPr/>
+        <p:nvPr/>
+      </p:nvGrpSpPr>
+      <p:grpSpPr>
+        <a:xfrm>
+          <a:off x="0" y="0"/>
+          <a:ext cx="0" cy="0"/>
+          <a:chOff x="0" y="0"/>
+          <a:chExt cx="0" cy="0"/>
+        </a:xfrm>
+      </p:grpSpPr>
+      <p:sp>
+        <p:nvSpPr>
+          <p:cNvPr id="2" name="Title 1"/>
+          <p:cNvSpPr>
+            <a:spLocks noGrp="1"/>
+          </p:cNvSpPr>
+          <p:nvPr>
+            <p:ph type="title"/>
+          </p:nvPr>
+        </p:nvSpPr>
+        <p:spPr>
+          <a:xfrm>
+            <a:off x="457200" y="205979"/>
+            <a:ext cx="8229600" cy="857250"/>
+          </a:xfrm>
+        </p:spPr>
+        <p:txBody>
+          <a:bodyPr/>
+          <a:lstStyle/>
+          <a:p>
+            <a:pPr lvl="0" indent="0" marL="0">
+              <a:buNone/>
+            </a:pPr>
+            <a:r>
+              <a:rPr/>
+              <a:t>What AUC does not tell you</a:t>
+            </a:r>
+          </a:p>
+        </p:txBody>
+      </p:sp>
+      <p:sp>
+        <p:nvSpPr>
+          <p:cNvPr id="3" name="Content Placeholder 2"/>
+          <p:cNvSpPr>
+            <a:spLocks noGrp="1"/>
+          </p:cNvSpPr>
+          <p:nvPr>
+            <p:ph idx="1"/>
+          </p:nvPr>
+        </p:nvSpPr>
+        <p:spPr>
+          <a:xfrm>
+            <a:off x="457200" y="1200151"/>
+            <a:ext cx="8229600" cy="3394472"/>
+          </a:xfrm>
+        </p:spPr>
+        <p:txBody>
+          <a:bodyPr/>
+          <a:lstStyle/>
+          <a:p>
+            <a:pPr lvl="0"/>
+            <a:r>
+              <a:rPr/>
+              <a:t>Divide every predicted probability by 10</a:t>
+            </a:r>
+          </a:p>
+          <a:p>
+            <a:pPr lvl="0"/>
+            <a:r>
+              <a:rPr/>
+              <a:t>AUC is </a:t>
+            </a:r>
+            <a:r>
+              <a:rPr b="1"/>
+              <a:t>unchanged</a:t>
+            </a:r>
+            <a:r>
+              <a:rPr/>
+              <a:t>; every decision changes</a:t>
+            </a:r>
+          </a:p>
+        </p:txBody>
+      </p:sp>
+    </p:spTree>
+  </p:cSld>
+</p:sld>
+</file>
+
+<file path=ppt/slides/slide39.xml><?xml version="1.0" encoding="utf-8"?>
 <p:sld xmlns:a="http://schemas.openxmlformats.org/drawingml/2006/main" xmlns:r="http://schemas.openxmlformats.org/officeDocument/2006/relationships" xmlns:p="http://schemas.openxmlformats.org/presentationml/2006/main">
   <p:cSld>
     <p:spTree>
@@ -14100,109 +14321,6 @@
 </p:sld>
 </file>
 
-<file path=ppt/slides/slide39.xml><?xml version="1.0" encoding="utf-8"?>
-<p:sld xmlns:a="http://schemas.openxmlformats.org/drawingml/2006/main" xmlns:r="http://schemas.openxmlformats.org/officeDocument/2006/relationships" xmlns:p="http://schemas.openxmlformats.org/presentationml/2006/main">
-  <p:cSld>
-    <p:spTree>
-      <p:nvGrpSpPr>
-        <p:cNvPr id="1" name=""/>
-        <p:cNvGrpSpPr/>
-        <p:nvPr/>
-      </p:nvGrpSpPr>
-      <p:grpSpPr>
-        <a:xfrm>
-          <a:off x="0" y="0"/>
-          <a:ext cx="0" cy="0"/>
-          <a:chOff x="0" y="0"/>
-          <a:chExt cx="0" cy="0"/>
-        </a:xfrm>
-      </p:grpSpPr>
-      <p:sp>
-        <p:nvSpPr>
-          <p:cNvPr id="2" name="Title 1"/>
-          <p:cNvSpPr>
-            <a:spLocks noGrp="1"/>
-          </p:cNvSpPr>
-          <p:nvPr>
-            <p:ph type="title"/>
-          </p:nvPr>
-        </p:nvSpPr>
-        <p:spPr>
-          <a:xfrm>
-            <a:off x="457200" y="205979"/>
-            <a:ext cx="8229600" cy="857250"/>
-          </a:xfrm>
-        </p:spPr>
-        <p:txBody>
-          <a:bodyPr/>
-          <a:lstStyle/>
-          <a:p>
-            <a:pPr lvl="0" indent="0" marL="0">
-              <a:buNone/>
-            </a:pPr>
-            <a:r>
-              <a:rPr/>
-              <a:t>Why the two disagree</a:t>
-            </a:r>
-          </a:p>
-        </p:txBody>
-      </p:sp>
-      <p:sp>
-        <p:nvSpPr>
-          <p:cNvPr id="3" name="Content Placeholder 2"/>
-          <p:cNvSpPr>
-            <a:spLocks noGrp="1"/>
-          </p:cNvSpPr>
-          <p:nvPr>
-            <p:ph idx="1"/>
-          </p:nvPr>
-        </p:nvSpPr>
-        <p:spPr>
-          <a:xfrm>
-            <a:off x="457200" y="1200151"/>
-            <a:ext cx="8229600" cy="3394472"/>
-          </a:xfrm>
-        </p:spPr>
-        <p:txBody>
-          <a:bodyPr/>
-          <a:lstStyle/>
-          <a:p>
-            <a:pPr lvl="0"/>
-            <a:r>
-              <a:rPr/>
-              <a:t>False positive rate (FPR) divides by </a:t>
-            </a:r>
-            <a:r>
-              <a:rPr b="1"/>
-              <a:t>all healthy drives</a:t>
-            </a:r>
-            <a:r>
-              <a:rPr/>
-              <a:t>: an enormous, growing denominator</a:t>
-            </a:r>
-          </a:p>
-          <a:p>
-            <a:pPr lvl="0"/>
-            <a:r>
-              <a:rPr/>
-              <a:t>Precision divides by </a:t>
-            </a:r>
-            <a:r>
-              <a:rPr b="1"/>
-              <a:t>the alarms raised</a:t>
-            </a:r>
-            <a:r>
-              <a:rPr/>
-              <a:t>, where the false ones dominate</a:t>
-            </a:r>
-          </a:p>
-        </p:txBody>
-      </p:sp>
-    </p:spTree>
-  </p:cSld>
-</p:sld>
-</file>
-
 <file path=ppt/slides/slide4.xml><?xml version="1.0" encoding="utf-8"?>
 <p:sld xmlns:a="http://schemas.openxmlformats.org/drawingml/2006/main" xmlns:r="http://schemas.openxmlformats.org/officeDocument/2006/relationships" xmlns:p="http://schemas.openxmlformats.org/presentationml/2006/main">
   <p:cSld>
@@ -14354,7 +14472,7 @@
             </a:pPr>
             <a:r>
               <a:rPr/>
-              <a:t>The rule</a:t>
+              <a:t>Why the two disagree</a:t>
             </a:r>
           </a:p>
         </p:txBody>
@@ -14382,43 +14500,30 @@
             <a:pPr lvl="0"/>
             <a:r>
               <a:rPr/>
-              <a:t>On an imbalanced problem, report the </a:t>
+              <a:t>False positive rate (FPR) divides by </a:t>
             </a:r>
             <a:r>
               <a:rPr b="1"/>
-              <a:t>precision-recall curve alongside AUC</a:t>
+              <a:t>all healthy drives</a:t>
+            </a:r>
+            <a:r>
+              <a:rPr/>
+              <a:t>: an enormous, growing denominator</a:t>
             </a:r>
           </a:p>
           <a:p>
             <a:pPr lvl="0"/>
             <a:r>
               <a:rPr/>
-              <a:t>Never instead of it, and never AUC alone</a:t>
-            </a:r>
-          </a:p>
-          <a:p>
-            <a:pPr lvl="0"/>
-            <a:r>
-              <a:rPr/>
-              <a:t>Its area is the </a:t>
+              <a:t>Precision divides by </a:t>
             </a:r>
             <a:r>
               <a:rPr b="1"/>
-              <a:t>average precision</a:t>
-            </a:r>
-            <a:r>
-              <a:rPr/>
-              <a:t>, </a:t>
-            </a:r>
-            <a:r>
-              <a:rPr>
-                <a:latin typeface="Courier"/>
-              </a:rPr>
-              <a:t>average_precision_score</a:t>
-            </a:r>
-            <a:r>
-              <a:rPr/>
-              <a:t>: 0.717 here, against a floor of 0.038</a:t>
+              <a:t>the alarms raised</a:t>
+            </a:r>
+            <a:r>
+              <a:rPr/>
+              <a:t>, where the false ones dominate</a:t>
             </a:r>
           </a:p>
         </p:txBody>
@@ -14429,6 +14534,122 @@
 </file>
 
 <file path=ppt/slides/slide41.xml><?xml version="1.0" encoding="utf-8"?>
+<p:sld xmlns:a="http://schemas.openxmlformats.org/drawingml/2006/main" xmlns:r="http://schemas.openxmlformats.org/officeDocument/2006/relationships" xmlns:p="http://schemas.openxmlformats.org/presentationml/2006/main">
+  <p:cSld>
+    <p:spTree>
+      <p:nvGrpSpPr>
+        <p:cNvPr id="1" name=""/>
+        <p:cNvGrpSpPr/>
+        <p:nvPr/>
+      </p:nvGrpSpPr>
+      <p:grpSpPr>
+        <a:xfrm>
+          <a:off x="0" y="0"/>
+          <a:ext cx="0" cy="0"/>
+          <a:chOff x="0" y="0"/>
+          <a:chExt cx="0" cy="0"/>
+        </a:xfrm>
+      </p:grpSpPr>
+      <p:sp>
+        <p:nvSpPr>
+          <p:cNvPr id="2" name="Title 1"/>
+          <p:cNvSpPr>
+            <a:spLocks noGrp="1"/>
+          </p:cNvSpPr>
+          <p:nvPr>
+            <p:ph type="title"/>
+          </p:nvPr>
+        </p:nvSpPr>
+        <p:spPr>
+          <a:xfrm>
+            <a:off x="457200" y="205979"/>
+            <a:ext cx="8229600" cy="857250"/>
+          </a:xfrm>
+        </p:spPr>
+        <p:txBody>
+          <a:bodyPr/>
+          <a:lstStyle/>
+          <a:p>
+            <a:pPr lvl="0" indent="0" marL="0">
+              <a:buNone/>
+            </a:pPr>
+            <a:r>
+              <a:rPr/>
+              <a:t>The rule</a:t>
+            </a:r>
+          </a:p>
+        </p:txBody>
+      </p:sp>
+      <p:sp>
+        <p:nvSpPr>
+          <p:cNvPr id="3" name="Content Placeholder 2"/>
+          <p:cNvSpPr>
+            <a:spLocks noGrp="1"/>
+          </p:cNvSpPr>
+          <p:nvPr>
+            <p:ph idx="1"/>
+          </p:nvPr>
+        </p:nvSpPr>
+        <p:spPr>
+          <a:xfrm>
+            <a:off x="457200" y="1200151"/>
+            <a:ext cx="8229600" cy="3394472"/>
+          </a:xfrm>
+        </p:spPr>
+        <p:txBody>
+          <a:bodyPr/>
+          <a:lstStyle/>
+          <a:p>
+            <a:pPr lvl="0"/>
+            <a:r>
+              <a:rPr/>
+              <a:t>On an imbalanced problem, report the </a:t>
+            </a:r>
+            <a:r>
+              <a:rPr b="1"/>
+              <a:t>precision-recall curve alongside AUC</a:t>
+            </a:r>
+          </a:p>
+          <a:p>
+            <a:pPr lvl="0"/>
+            <a:r>
+              <a:rPr/>
+              <a:t>Never instead of it, and never AUC alone</a:t>
+            </a:r>
+          </a:p>
+          <a:p>
+            <a:pPr lvl="0"/>
+            <a:r>
+              <a:rPr/>
+              <a:t>Its area is the </a:t>
+            </a:r>
+            <a:r>
+              <a:rPr b="1"/>
+              <a:t>average precision</a:t>
+            </a:r>
+            <a:r>
+              <a:rPr/>
+              <a:t>, </a:t>
+            </a:r>
+            <a:r>
+              <a:rPr>
+                <a:latin typeface="Courier"/>
+              </a:rPr>
+              <a:t>average_precision_score</a:t>
+            </a:r>
+            <a:r>
+              <a:rPr/>
+              <a:t>: 0.717 here, against a floor of 0.038</a:t>
+            </a:r>
+          </a:p>
+        </p:txBody>
+      </p:sp>
+    </p:spTree>
+  </p:cSld>
+</p:sld>
+</file>
+
+<file path=ppt/slides/slide42.xml><?xml version="1.0" encoding="utf-8"?>
 <p:sld xmlns:a="http://schemas.openxmlformats.org/drawingml/2006/main" xmlns:r="http://schemas.openxmlformats.org/officeDocument/2006/relationships" xmlns:p="http://schemas.openxmlformats.org/presentationml/2006/main">
   <p:cSld>
     <p:spTree>
@@ -14510,7 +14731,7 @@
 </p:sld>
 </file>
 
-<file path=ppt/slides/slide42.xml><?xml version="1.0" encoding="utf-8"?>
+<file path=ppt/slides/slide43.xml><?xml version="1.0" encoding="utf-8"?>
 <p:sld xmlns:a="http://schemas.openxmlformats.org/drawingml/2006/main" xmlns:r="http://schemas.openxmlformats.org/officeDocument/2006/relationships" xmlns:p="http://schemas.openxmlformats.org/presentationml/2006/main">
   <p:cSld>
     <p:spTree>
@@ -14592,7 +14813,7 @@
 </p:sld>
 </file>
 
-<file path=ppt/slides/slide43.xml><?xml version="1.0" encoding="utf-8"?>
+<file path=ppt/slides/slide44.xml><?xml version="1.0" encoding="utf-8"?>
 <p:sld xmlns:a="http://schemas.openxmlformats.org/drawingml/2006/main" xmlns:r="http://schemas.openxmlformats.org/officeDocument/2006/relationships" xmlns:p="http://schemas.openxmlformats.org/presentationml/2006/main">
   <p:cSld>
     <p:spTree>
@@ -14683,7 +14904,7 @@
 </p:sld>
 </file>
 
-<file path=ppt/slides/slide44.xml><?xml version="1.0" encoding="utf-8"?>
+<file path=ppt/slides/slide45.xml><?xml version="1.0" encoding="utf-8"?>
 <p:sld xmlns:a="http://schemas.openxmlformats.org/drawingml/2006/main" xmlns:r="http://schemas.openxmlformats.org/officeDocument/2006/relationships" xmlns:p="http://schemas.openxmlformats.org/presentationml/2006/main">
   <p:cSld>
     <p:spTree>
@@ -15079,7 +15300,7 @@
 </p:sld>
 </file>
 
-<file path=ppt/slides/slide45.xml><?xml version="1.0" encoding="utf-8"?>
+<file path=ppt/slides/slide46.xml><?xml version="1.0" encoding="utf-8"?>
 <p:sld xmlns:a="http://schemas.openxmlformats.org/drawingml/2006/main" xmlns:r="http://schemas.openxmlformats.org/officeDocument/2006/relationships" xmlns:p="http://schemas.openxmlformats.org/presentationml/2006/main">
   <p:cSld>
     <p:spTree>
@@ -15435,7 +15656,7 @@
 </p:sld>
 </file>
 
-<file path=ppt/slides/slide46.xml><?xml version="1.0" encoding="utf-8"?>
+<file path=ppt/slides/slide47.xml><?xml version="1.0" encoding="utf-8"?>
 <p:sld xmlns:a="http://schemas.openxmlformats.org/drawingml/2006/main" xmlns:r="http://schemas.openxmlformats.org/officeDocument/2006/relationships" xmlns:p="http://schemas.openxmlformats.org/presentationml/2006/main">
   <p:cSld>
     <p:spTree>
@@ -15517,101 +15738,6 @@
 </p:sld>
 </file>
 
-<file path=ppt/slides/slide47.xml><?xml version="1.0" encoding="utf-8"?>
-<p:sld xmlns:a="http://schemas.openxmlformats.org/drawingml/2006/main" xmlns:r="http://schemas.openxmlformats.org/officeDocument/2006/relationships" xmlns:p="http://schemas.openxmlformats.org/presentationml/2006/main">
-  <p:cSld>
-    <p:spTree>
-      <p:nvGrpSpPr>
-        <p:cNvPr id="1" name=""/>
-        <p:cNvGrpSpPr/>
-        <p:nvPr/>
-      </p:nvGrpSpPr>
-      <p:grpSpPr>
-        <a:xfrm>
-          <a:off x="0" y="0"/>
-          <a:ext cx="0" cy="0"/>
-          <a:chOff x="0" y="0"/>
-          <a:chExt cx="0" cy="0"/>
-        </a:xfrm>
-      </p:grpSpPr>
-      <p:sp>
-        <p:nvSpPr>
-          <p:cNvPr id="2" name="Title 1"/>
-          <p:cNvSpPr>
-            <a:spLocks noGrp="1"/>
-          </p:cNvSpPr>
-          <p:nvPr>
-            <p:ph type="title"/>
-          </p:nvPr>
-        </p:nvSpPr>
-        <p:spPr>
-          <a:xfrm>
-            <a:off x="457200" y="205979"/>
-            <a:ext cx="8229600" cy="857250"/>
-          </a:xfrm>
-        </p:spPr>
-        <p:txBody>
-          <a:bodyPr/>
-          <a:lstStyle/>
-          <a:p>
-            <a:pPr lvl="0" indent="0" marL="0">
-              <a:buNone/>
-            </a:pPr>
-            <a:r>
-              <a:rPr/>
-              <a:t>Macro against weighted, one last time</a:t>
-            </a:r>
-          </a:p>
-        </p:txBody>
-      </p:sp>
-      <p:sp>
-        <p:nvSpPr>
-          <p:cNvPr id="3" name="Content Placeholder 2"/>
-          <p:cNvSpPr>
-            <a:spLocks noGrp="1"/>
-          </p:cNvSpPr>
-          <p:nvPr>
-            <p:ph idx="1"/>
-          </p:nvPr>
-        </p:nvSpPr>
-        <p:spPr>
-          <a:xfrm>
-            <a:off x="457200" y="1200151"/>
-            <a:ext cx="8229600" cy="3394472"/>
-          </a:xfrm>
-        </p:spPr>
-        <p:txBody>
-          <a:bodyPr/>
-          <a:lstStyle/>
-          <a:p>
-            <a:pPr lvl="0"/>
-            <a:r>
-              <a:rPr/>
-              <a:t>macro avg F1: </a:t>
-            </a:r>
-            <a:r>
-              <a:rPr b="1"/>
-              <a:t>0.707</a:t>
-            </a:r>
-          </a:p>
-          <a:p>
-            <a:pPr lvl="0"/>
-            <a:r>
-              <a:rPr/>
-              <a:t>weighted avg F1: </a:t>
-            </a:r>
-            <a:r>
-              <a:rPr b="1"/>
-              <a:t>0.883</a:t>
-            </a:r>
-          </a:p>
-        </p:txBody>
-      </p:sp>
-    </p:spTree>
-  </p:cSld>
-</p:sld>
-</file>
-
 <file path=ppt/slides/slide48.xml><?xml version="1.0" encoding="utf-8"?>
 <p:sld xmlns:a="http://schemas.openxmlformats.org/drawingml/2006/main" xmlns:r="http://schemas.openxmlformats.org/officeDocument/2006/relationships" xmlns:p="http://schemas.openxmlformats.org/presentationml/2006/main">
   <p:cSld>
@@ -15654,7 +15780,7 @@
             </a:pPr>
             <a:r>
               <a:rPr/>
-              <a:t>What to take away</a:t>
+              <a:t>Macro against weighted, one last time</a:t>
             </a:r>
           </a:p>
         </p:txBody>
@@ -15681,57 +15807,23 @@
           <a:p>
             <a:pPr lvl="0"/>
             <a:r>
+              <a:rPr/>
+              <a:t>macro avg F1: </a:t>
+            </a:r>
+            <a:r>
               <a:rPr b="1"/>
-              <a:t>96.20% accuracy, nothing caught.</a:t>
-            </a:r>
-            <a:r>
-              <a:rPr/>
-              <a:t> Accuracy measures the majority class</a:t>
+              <a:t>0.707</a:t>
             </a:r>
           </a:p>
           <a:p>
             <a:pPr lvl="0"/>
             <a:r>
               <a:rPr/>
-              <a:t>Precision is about the </a:t>
+              <a:t>weighted avg F1: </a:t>
             </a:r>
             <a:r>
               <a:rPr b="1"/>
-              <a:t>alarms</a:t>
-            </a:r>
-            <a:r>
-              <a:rPr/>
-              <a:t>, recall is about the </a:t>
-            </a:r>
-            <a:r>
-              <a:rPr b="1"/>
-              <a:t>failures</a:t>
-            </a:r>
-          </a:p>
-          <a:p>
-            <a:pPr lvl="0"/>
-            <a:r>
-              <a:rPr/>
-              <a:t>The </a:t>
-            </a:r>
-            <a:r>
-              <a:rPr b="1"/>
-              <a:t>threshold is a decision</a:t>
-            </a:r>
-            <a:r>
-              <a:rPr/>
-              <a:t>, and it has a formula</a:t>
-            </a:r>
-          </a:p>
-          <a:p>
-            <a:pPr lvl="0"/>
-            <a:r>
-              <a:rPr b="1"/>
-              <a:t>AUC measures ranking</a:t>
-            </a:r>
-            <a:r>
-              <a:rPr/>
-              <a:t> and hides imbalance</a:t>
+              <a:t>0.883</a:t>
             </a:r>
           </a:p>
         </p:txBody>
@@ -15783,7 +15875,7 @@
             </a:pPr>
             <a:r>
               <a:rPr/>
-              <a:t>Homework</a:t>
+              <a:t>What to take away</a:t>
             </a:r>
           </a:p>
         </p:txBody>
@@ -15811,22 +15903,56 @@
             <a:pPr lvl="0"/>
             <a:r>
               <a:rPr b="1"/>
-              <a:t>Exercise 4</a:t>
-            </a:r>
-            <a:r>
-              <a:rPr/>
-              <a:t>, discussed at the start of </a:t>
+              <a:t>96.20% accuracy, nothing caught.</a:t>
+            </a:r>
+            <a:r>
+              <a:rPr/>
+              <a:t> Accuracy measures the majority class</a:t>
+            </a:r>
+          </a:p>
+          <a:p>
+            <a:pPr lvl="0"/>
+            <a:r>
+              <a:rPr/>
+              <a:t>Precision is about the </a:t>
             </a:r>
             <a:r>
               <a:rPr b="1"/>
-              <a:t>Friday 30 October</a:t>
+              <a:t>alarms</a:t>
+            </a:r>
+            <a:r>
+              <a:rPr/>
+              <a:t>, recall is about the </a:t>
+            </a:r>
+            <a:r>
+              <a:rPr b="1"/>
+              <a:t>failures</a:t>
             </a:r>
           </a:p>
           <a:p>
             <a:pPr lvl="0"/>
             <a:r>
               <a:rPr/>
-              <a:t>Build a classifier, choose a threshold from a stated cost ratio, defend it</a:t>
+              <a:t>The </a:t>
+            </a:r>
+            <a:r>
+              <a:rPr b="1"/>
+              <a:t>threshold is a decision</a:t>
+            </a:r>
+            <a:r>
+              <a:rPr/>
+              <a:t>, and it has a formula</a:t>
+            </a:r>
+          </a:p>
+          <a:p>
+            <a:pPr lvl="0"/>
+            <a:r>
+              <a:rPr b="1"/>
+              <a:t>AUC measures ranking</a:t>
+            </a:r>
+            <a:r>
+              <a:rPr/>
+              <a:t> and hides imbalance</a:t>
             </a:r>
           </a:p>
         </p:txBody>
@@ -15938,6 +16064,101 @@
             <a:r>
               <a:rPr/>
               <a:t>: 6,000 to train, 2,000 to test</a:t>
+            </a:r>
+          </a:p>
+        </p:txBody>
+      </p:sp>
+    </p:spTree>
+  </p:cSld>
+</p:sld>
+</file>
+
+<file path=ppt/slides/slide50.xml><?xml version="1.0" encoding="utf-8"?>
+<p:sld xmlns:a="http://schemas.openxmlformats.org/drawingml/2006/main" xmlns:r="http://schemas.openxmlformats.org/officeDocument/2006/relationships" xmlns:p="http://schemas.openxmlformats.org/presentationml/2006/main">
+  <p:cSld>
+    <p:spTree>
+      <p:nvGrpSpPr>
+        <p:cNvPr id="1" name=""/>
+        <p:cNvGrpSpPr/>
+        <p:nvPr/>
+      </p:nvGrpSpPr>
+      <p:grpSpPr>
+        <a:xfrm>
+          <a:off x="0" y="0"/>
+          <a:ext cx="0" cy="0"/>
+          <a:chOff x="0" y="0"/>
+          <a:chExt cx="0" cy="0"/>
+        </a:xfrm>
+      </p:grpSpPr>
+      <p:sp>
+        <p:nvSpPr>
+          <p:cNvPr id="2" name="Title 1"/>
+          <p:cNvSpPr>
+            <a:spLocks noGrp="1"/>
+          </p:cNvSpPr>
+          <p:nvPr>
+            <p:ph type="title"/>
+          </p:nvPr>
+        </p:nvSpPr>
+        <p:spPr>
+          <a:xfrm>
+            <a:off x="457200" y="205979"/>
+            <a:ext cx="8229600" cy="857250"/>
+          </a:xfrm>
+        </p:spPr>
+        <p:txBody>
+          <a:bodyPr/>
+          <a:lstStyle/>
+          <a:p>
+            <a:pPr lvl="0" indent="0" marL="0">
+              <a:buNone/>
+            </a:pPr>
+            <a:r>
+              <a:rPr/>
+              <a:t>Homework</a:t>
+            </a:r>
+          </a:p>
+        </p:txBody>
+      </p:sp>
+      <p:sp>
+        <p:nvSpPr>
+          <p:cNvPr id="3" name="Content Placeholder 2"/>
+          <p:cNvSpPr>
+            <a:spLocks noGrp="1"/>
+          </p:cNvSpPr>
+          <p:nvPr>
+            <p:ph idx="1"/>
+          </p:nvPr>
+        </p:nvSpPr>
+        <p:spPr>
+          <a:xfrm>
+            <a:off x="457200" y="1200151"/>
+            <a:ext cx="8229600" cy="3394472"/>
+          </a:xfrm>
+        </p:spPr>
+        <p:txBody>
+          <a:bodyPr/>
+          <a:lstStyle/>
+          <a:p>
+            <a:pPr lvl="0"/>
+            <a:r>
+              <a:rPr b="1"/>
+              <a:t>Exercise 4</a:t>
+            </a:r>
+            <a:r>
+              <a:rPr/>
+              <a:t>, discussed at the start of </a:t>
+            </a:r>
+            <a:r>
+              <a:rPr b="1"/>
+              <a:t>Friday 30 October</a:t>
+            </a:r>
+          </a:p>
+          <a:p>
+            <a:pPr lvl="0"/>
+            <a:r>
+              <a:rPr/>
+              <a:t>Build a classifier, choose a threshold from a stated cost ratio, defend it</a:t>
             </a:r>
           </a:p>
         </p:txBody>
@@ -16244,14 +16465,14 @@
             </a:pPr>
             <a:r>
               <a:rPr/>
-              <a:t>The model, in one line</a:t>
+              <a:t>Log-odds of p = P(y = 1 | x): a line</a:t>
             </a:r>
           </a:p>
         </p:txBody>
       </p:sp>
       <p:pic>
         <p:nvPicPr>
-          <p:cNvPr descr="eq_e936e058d0.png" id="0" name="Picture 1"/>
+          <p:cNvPr descr="eq_2e0b8814eb.png" id="0" name="Picture 1"/>
           <p:cNvPicPr>
             <a:picLocks noGrp="1" noChangeAspect="1"/>
           </p:cNvPicPr>
@@ -16265,8 +16486,8 @@
         </p:blipFill>
         <p:spPr bwMode="auto">
           <a:xfrm>
-            <a:off x="457200" y="2535039"/>
-            <a:ext cx="8229600" cy="622300"/>
+            <a:off x="457200" y="2477889"/>
+            <a:ext cx="8229600" cy="736600"/>
           </a:xfrm>
           <a:prstGeom prst="rect">
             <a:avLst/>

--- a/Lessons/04_classification_and_metrics/Slides/classification_and_metrics_slides.pptx
+++ b/Lessons/04_classification_and_metrics/Slides/classification_and_metrics_slides.pptx
@@ -5,7 +5,7 @@
     <p:sldMasterId id="2147483648" r:id="rId1"/>
   </p:sldMasterIdLst>
   <p:notesMasterIdLst>
-    <p:notesMasterId r:id="rId52"/>
+    <p:notesMasterId r:id="rId53"/>
   </p:notesMasterIdLst>
   <p:sldIdLst>
     <p:sldId id="256" r:id="rId2"/>
@@ -58,6 +58,7 @@
     <p:sldId id="303" r:id="rId49"/>
     <p:sldId id="304" r:id="rId50"/>
     <p:sldId id="305" r:id="rId51"/>
+    <p:sldId id="306" r:id="rId52"/>
   </p:sldIdLst>
   <p:sldSz cx="9144000" cy="5143500" type="screen16x9"/>
   <p:notesSz cx="6858000" cy="9144000"/>
@@ -587,7 +588,7 @@
             </a:pPr>
             <a:r>
               <a:rPr/>
-              <a:t>The one to watch for: choosing the penalty by looking at the test error. It is the natural thing to do because the test error is the number they were told to care about, and it is exactly the mistake lesson 1 named. Today’s lesson ends up in the same place from a different direction, on slide 44, when we choose a decision threshold by looking at the test set. Lesson 5 gives them the machinery to do both honestly.</a:t>
+              <a:t>The one to watch for: choosing the penalty by looking at the test error. It is the natural thing to do because the test error is the number they were told to care about, and it is exactly the mistake lesson 1 named. Today’s lesson ends up in the same place from a different direction, on slide 45, when we choose a decision threshold by looking at the test set. Lesson 5 gives them the machinery to do both honestly.</a:t>
             </a:r>
           </a:p>
         </p:txBody>
@@ -669,35 +670,35 @@
             </a:pPr>
             <a:r>
               <a:rPr/>
-              <a:t>This is the interpretability that keeps logistic regression in production in medicine and credit scoring. A coefficient of 1.80 means: a drive one standard deviation worse on that counter has exp(1.80), about six times, the odds of failing.</a:t>
-            </a:r>
-          </a:p>
-          <a:p>
-            <a:pPr lvl="0" indent="0" marL="0">
-              <a:buNone/>
-            </a:pPr>
-          </a:p>
-          <a:p>
-            <a:pPr lvl="0" indent="0" marL="0">
-              <a:buNone/>
-            </a:pPr>
-            <a:r>
-              <a:rPr/>
-              <a:t>Now the mistake they will make, and it is a reasonable one. They will read “six times the odds” as “six times as likely”. For rare events those are nearly the same number, so here it is almost right - which is exactly why the habit survives until it does damage.</a:t>
-            </a:r>
-          </a:p>
-          <a:p>
-            <a:pPr lvl="0" indent="0" marL="0">
-              <a:buNone/>
-            </a:pPr>
-          </a:p>
-          <a:p>
-            <a:pPr lvl="0" indent="0" marL="0">
-              <a:buNone/>
-            </a:pPr>
-            <a:r>
-              <a:rPr/>
-              <a:t>Give them the counterexample out loud: odds of 9, a probability of 0.90, multiplied by 5 gives odds of 45 - a probability of 0.978. The odds went up fivefold; the probability moved eight points. Odds ratios multiply odds.</a:t>
+              <a:t>Read it aloud as a sentence: take the linear model of lesson 3, and instead of calling its output a prediction, call it the log-odds and convert.</a:t>
+            </a:r>
+          </a:p>
+          <a:p>
+            <a:pPr lvl="0" indent="0" marL="0">
+              <a:buNone/>
+            </a:pPr>
+          </a:p>
+          <a:p>
+            <a:pPr lvl="0" indent="0" marL="0">
+              <a:buNone/>
+            </a:pPr>
+            <a:r>
+              <a:rPr/>
+              <a:t>Name the three properties we will use, without deriving them here - the handout section 2.2 does that: sigma of 0 is a half; sigma of minus z is 1 minus sigma of z; and the derivative is sigma times one minus sigma.</a:t>
+            </a:r>
+          </a:p>
+          <a:p>
+            <a:pPr lvl="0" indent="0" marL="0">
+              <a:buNone/>
+            </a:pPr>
+          </a:p>
+          <a:p>
+            <a:pPr lvl="0" indent="0" marL="0">
+              <a:buNone/>
+            </a:pPr>
+            <a:r>
+              <a:rPr/>
+              <a:t>That last one is the one to flag. It is largest in the middle, one quarter, and it decays to zero at both ends. On slide 19 that fact will be simultaneously the reason the sigmoid works and the reason squared error does not.</a:t>
             </a:r>
           </a:p>
         </p:txBody>
@@ -779,49 +780,35 @@
             </a:pPr>
             <a:r>
               <a:rPr/>
-              <a:t>Notebook 1, last section. This is the payoff of using synthetic data: we do not just look at the estimates, we check them against the truth.</a:t>
-            </a:r>
-          </a:p>
-          <a:p>
-            <a:pPr lvl="0" indent="0" marL="0">
-              <a:buNone/>
-            </a:pPr>
-          </a:p>
-          <a:p>
-            <a:pPr lvl="0" indent="0" marL="0">
-              <a:buNone/>
-            </a:pPr>
-            <a:r>
-              <a:rPr/>
-              <a:t>Go down the column. Everything is close. Nothing is exact, and say why - 6,000 training drives carrying 230 failures is a modest amount of evidence, and 230 is the number that matters, not 6,000.</a:t>
-            </a:r>
-          </a:p>
-          <a:p>
-            <a:pPr lvl="0" indent="0" marL="0">
-              <a:buNone/>
-            </a:pPr>
-          </a:p>
-          <a:p>
-            <a:pPr lvl="0" indent="0" marL="0">
-              <a:buNone/>
-            </a:pPr>
-            <a:r>
-              <a:rPr/>
-              <a:t>Then the last row, which is the one to pause on. seek_error_rate was generated with a coefficient of exactly zero: a real-looking counter with no connection to failure. The model estimates 0.02, an odds multiplier of 1.03 (the table rounds the coefficient; the multiplier is computed from the unrounded value). It did not fall for it.</a:t>
-            </a:r>
-          </a:p>
-          <a:p>
-            <a:pPr lvl="0" indent="0" marL="0">
-              <a:buNone/>
-            </a:pPr>
-          </a:p>
-          <a:p>
-            <a:pPr lvl="0" indent="0" marL="0">
-              <a:buNone/>
-            </a:pPr>
-            <a:r>
-              <a:rPr/>
-              <a:t>Then ask the room the harder question: would you have noticed, if I had not told you? Leave it hanging. It is lesson 5.</a:t>
+              <a:t>This is the interpretability that keeps logistic regression in production in medicine and credit scoring. A coefficient of 1.80 means: a drive one standard deviation worse on that counter has exp(1.80), about six times, the odds of failing.</a:t>
+            </a:r>
+          </a:p>
+          <a:p>
+            <a:pPr lvl="0" indent="0" marL="0">
+              <a:buNone/>
+            </a:pPr>
+          </a:p>
+          <a:p>
+            <a:pPr lvl="0" indent="0" marL="0">
+              <a:buNone/>
+            </a:pPr>
+            <a:r>
+              <a:rPr/>
+              <a:t>Now the mistake they will make, and it is a reasonable one. They will read “six times the odds” as “six times as likely”. For rare events those are nearly the same number, so here it is almost right - which is exactly why the habit survives until it does damage.</a:t>
+            </a:r>
+          </a:p>
+          <a:p>
+            <a:pPr lvl="0" indent="0" marL="0">
+              <a:buNone/>
+            </a:pPr>
+          </a:p>
+          <a:p>
+            <a:pPr lvl="0" indent="0" marL="0">
+              <a:buNone/>
+            </a:pPr>
+            <a:r>
+              <a:rPr/>
+              <a:t>Give them the counterexample out loud: odds of 9, a probability of 0.90, multiplied by 5 gives odds of 45 - a probability of 0.978. The odds went up fivefold; the probability moved eight points. Odds ratios multiply odds.</a:t>
             </a:r>
           </a:p>
         </p:txBody>
@@ -903,49 +890,49 @@
             </a:pPr>
             <a:r>
               <a:rPr/>
-              <a:t>This is the slide that quietly explains everything in the second half of the lesson, so do not rush it.</a:t>
-            </a:r>
-          </a:p>
-          <a:p>
-            <a:pPr lvl="0" indent="0" marL="0">
-              <a:buNone/>
-            </a:pPr>
-          </a:p>
-          <a:p>
-            <a:pPr lvl="0" indent="0" marL="0">
-              <a:buNone/>
-            </a:pPr>
-            <a:r>
-              <a:rPr/>
-              <a:t>Say first what the intercept is NOT: it is not the base rate. The fleet fails at 3.8%; the intercept describes a drive whose every counter sits at the average, and such a drive almost never fails. The failures come from the small group of drives far above average on one or more counters. Handout section 2.4.</a:t>
-            </a:r>
-          </a:p>
-          <a:p>
-            <a:pPr lvl="0" indent="0" marL="0">
-              <a:buNone/>
-            </a:pPr>
-          </a:p>
-          <a:p>
-            <a:pPr lvl="0" indent="0" marL="0">
-              <a:buNone/>
-            </a:pPr>
-            <a:r>
-              <a:rPr/>
-              <a:t>An average drive has a 0.2% chance of failing in thirty days. For the model to reach an even bet - probability one half, log-odds zero - the evidence has to move the log-odds by more than six. Only badly degraded drives manage that.</a:t>
-            </a:r>
-          </a:p>
-          <a:p>
-            <a:pPr lvl="0" indent="0" marL="0">
-              <a:buNone/>
-            </a:pPr>
-          </a:p>
-          <a:p>
-            <a:pPr lvl="0" indent="0" marL="0">
-              <a:buNone/>
-            </a:pPr>
-            <a:r>
-              <a:rPr/>
-              <a:t>So the model will assign small probabilities to almost everything, and a threshold of 0.5 will flag almost nothing. That is not the model being timid. It is the model being correct about a rare event. Everything that looks like a failure of the classifier in the next hour traces back to this number.</a:t>
+              <a:t>Notebook 1, last section. This is the payoff of using synthetic data: we do not just look at the estimates, we check them against the truth.</a:t>
+            </a:r>
+          </a:p>
+          <a:p>
+            <a:pPr lvl="0" indent="0" marL="0">
+              <a:buNone/>
+            </a:pPr>
+          </a:p>
+          <a:p>
+            <a:pPr lvl="0" indent="0" marL="0">
+              <a:buNone/>
+            </a:pPr>
+            <a:r>
+              <a:rPr/>
+              <a:t>Go down the column. Everything is close. Nothing is exact, and say why - 6,000 training drives carrying 230 failures is a modest amount of evidence, and 230 is the number that matters, not 6,000.</a:t>
+            </a:r>
+          </a:p>
+          <a:p>
+            <a:pPr lvl="0" indent="0" marL="0">
+              <a:buNone/>
+            </a:pPr>
+          </a:p>
+          <a:p>
+            <a:pPr lvl="0" indent="0" marL="0">
+              <a:buNone/>
+            </a:pPr>
+            <a:r>
+              <a:rPr/>
+              <a:t>Then the last row, which is the one to pause on. seek_error_rate was generated with a coefficient of exactly zero: a real-looking counter with no connection to failure. The model estimates 0.02, an odds multiplier of 1.03 (the table rounds the coefficient; the multiplier is computed from the unrounded value). It did not fall for it.</a:t>
+            </a:r>
+          </a:p>
+          <a:p>
+            <a:pPr lvl="0" indent="0" marL="0">
+              <a:buNone/>
+            </a:pPr>
+          </a:p>
+          <a:p>
+            <a:pPr lvl="0" indent="0" marL="0">
+              <a:buNone/>
+            </a:pPr>
+            <a:r>
+              <a:rPr/>
+              <a:t>Then ask the room the harder question: would you have noticed, if I had not told you? Leave it hanging. It is lesson 5.</a:t>
             </a:r>
           </a:p>
         </p:txBody>
@@ -1027,21 +1014,49 @@
             </a:pPr>
             <a:r>
               <a:rPr/>
-              <a:t>Put the question to the room and take answers before showing the next slide. This is a good place for them to be wrong out loud, because the honest answer is not obvious and the usual first guesses (“it’s not differentiable”, “it doesn’t work for categories”) are wrong.</a:t>
-            </a:r>
-          </a:p>
-          <a:p>
-            <a:pPr lvl="0" indent="0" marL="0">
-              <a:buNone/>
-            </a:pPr>
-          </a:p>
-          <a:p>
-            <a:pPr lvl="0" indent="0" marL="0">
-              <a:buNone/>
-            </a:pPr>
-            <a:r>
-              <a:rPr/>
-              <a:t>Squared error on the sigmoid IS differentiable, and it does produce a working model on easy problems. The reason to reject it is subtler and more interesting, which is what makes it worth ten minutes.</a:t>
+              <a:t>This is the slide that quietly explains everything in the second half of the lesson, so do not rush it.</a:t>
+            </a:r>
+          </a:p>
+          <a:p>
+            <a:pPr lvl="0" indent="0" marL="0">
+              <a:buNone/>
+            </a:pPr>
+          </a:p>
+          <a:p>
+            <a:pPr lvl="0" indent="0" marL="0">
+              <a:buNone/>
+            </a:pPr>
+            <a:r>
+              <a:rPr/>
+              <a:t>Say first what the intercept is NOT: it is not the base rate. The fleet fails at 3.8%; the intercept describes a drive whose every counter sits at the average, and such a drive almost never fails. The failures come from the small group of drives far above average on one or more counters. Handout section 2.4.</a:t>
+            </a:r>
+          </a:p>
+          <a:p>
+            <a:pPr lvl="0" indent="0" marL="0">
+              <a:buNone/>
+            </a:pPr>
+          </a:p>
+          <a:p>
+            <a:pPr lvl="0" indent="0" marL="0">
+              <a:buNone/>
+            </a:pPr>
+            <a:r>
+              <a:rPr/>
+              <a:t>An average drive has a 0.2% chance of failing in thirty days. For the model to reach an even bet - probability one half, log-odds zero - the evidence has to move the log-odds by more than six. Only badly degraded drives manage that.</a:t>
+            </a:r>
+          </a:p>
+          <a:p>
+            <a:pPr lvl="0" indent="0" marL="0">
+              <a:buNone/>
+            </a:pPr>
+          </a:p>
+          <a:p>
+            <a:pPr lvl="0" indent="0" marL="0">
+              <a:buNone/>
+            </a:pPr>
+            <a:r>
+              <a:rPr/>
+              <a:t>So the model will assign small probabilities to almost everything, and a threshold of 0.5 will flag almost nothing. That is not the model being timid. It is the model being correct about a rare event. Everything that looks like a failure of the classifier in the next hour traces back to this number.</a:t>
             </a:r>
           </a:p>
         </p:txBody>
@@ -1123,49 +1138,21 @@
             </a:pPr>
             <a:r>
               <a:rPr/>
-              <a:t>Say this before any algebra. It is the whole idea, and once they have it the derivation is bookkeeping.</a:t>
-            </a:r>
-          </a:p>
-          <a:p>
-            <a:pPr lvl="0" indent="0" marL="0">
-              <a:buNone/>
-            </a:pPr>
-          </a:p>
-          <a:p>
-            <a:pPr lvl="0" indent="0" marL="0">
-              <a:buNone/>
-            </a:pPr>
-            <a:r>
-              <a:rPr/>
-              <a:t>Each drive contributes one factor: the probability the model gave to what actually occurred. Multiply across the fleet and you have the probability of the whole dataset under that setting of the parameters. Choose the setting that makes it largest.</a:t>
-            </a:r>
-          </a:p>
-          <a:p>
-            <a:pPr lvl="0" indent="0" marL="0">
-              <a:buNone/>
-            </a:pPr>
-          </a:p>
-          <a:p>
-            <a:pPr lvl="0" indent="0" marL="0">
-              <a:buNone/>
-            </a:pPr>
-            <a:r>
-              <a:rPr/>
-              <a:t>Two practical notes worth saying aloud. We take the logarithm because it turns the product into a sum, which differentiates one term at a time - and because the product itself is too small to store. Gradient descent starts with every probability at 0.5, and 0.5 multiplied by itself 6,000 times, once per training drive, is about 10 to the minus 1806. The smallest number a 64-bit float holds is about 10 to the minus 308, so the computer stores exactly zero. Every real implementation works in log space, and not for elegance.</a:t>
-            </a:r>
-          </a:p>
-          <a:p>
-            <a:pPr lvl="0" indent="0" marL="0">
-              <a:buNone/>
-            </a:pPr>
-          </a:p>
-          <a:p>
-            <a:pPr lvl="0" indent="0" marL="0">
-              <a:buNone/>
-            </a:pPr>
-            <a:r>
-              <a:rPr/>
-              <a:t>Then negate, so we minimise as in lesson 3.</a:t>
+              <a:t>Put the question to the room and take answers before showing the next slide. This is a good place for them to be wrong out loud, because the honest answer is not obvious and the usual first guesses (“it’s not differentiable”, “it doesn’t work for categories”) are wrong.</a:t>
+            </a:r>
+          </a:p>
+          <a:p>
+            <a:pPr lvl="0" indent="0" marL="0">
+              <a:buNone/>
+            </a:pPr>
+          </a:p>
+          <a:p>
+            <a:pPr lvl="0" indent="0" marL="0">
+              <a:buNone/>
+            </a:pPr>
+            <a:r>
+              <a:rPr/>
+              <a:t>Squared error on the sigmoid IS differentiable, and it does produce a working model on easy problems. The reason to reject it is subtler and more interesting, which is what makes it worth ten minutes.</a:t>
             </a:r>
           </a:p>
         </p:txBody>
@@ -1247,63 +1234,49 @@
             </a:pPr>
             <a:r>
               <a:rPr/>
-              <a:t>This is the loss on ONE example, L, not the cost over the training set; p is the predicted probability, the same number the next slide writes as y-hat. Say the other half aloud rather than showing it: the cost J is the average of this over the m examples, one over m times the sum. Written out in full the formula reached the slide edge and came out at 26pt, smaller than the bullets on the slide before it.</a:t>
-            </a:r>
-          </a:p>
-          <a:p>
-            <a:pPr lvl="0" indent="0" marL="0">
-              <a:buNone/>
-            </a:pPr>
-          </a:p>
-          <a:p>
-            <a:pPr lvl="0" indent="0" marL="0">
-              <a:buNone/>
-            </a:pPr>
-            <a:r>
-              <a:rPr/>
-              <a:t>Do not derive it here - the handout, section 3, does it in full. Show it and read it.</a:t>
-            </a:r>
-          </a:p>
-          <a:p>
-            <a:pPr lvl="0" indent="0" marL="0">
-              <a:buNone/>
-            </a:pPr>
-          </a:p>
-          <a:p>
-            <a:pPr lvl="0" indent="0" marL="0">
-              <a:buNone/>
-            </a:pPr>
-            <a:r>
-              <a:rPr/>
-              <a:t>The reading that makes it stick: the cost of an outcome is the SURPRISE of seeing it. Something you called certain costs nothing. Something you gave a probability of one in a thousand costs log 1000, about 6.9. Something you declared impossible costs infinity.</a:t>
-            </a:r>
-          </a:p>
-          <a:p>
-            <a:pPr lvl="0" indent="0" marL="0">
-              <a:buNone/>
-            </a:pPr>
-          </a:p>
-          <a:p>
-            <a:pPr lvl="0" indent="0" marL="0">
-              <a:buNone/>
-            </a:pPr>
-            <a:r>
-              <a:rPr/>
-              <a:t>Only one of the two terms is ever active, because y is 0 or 1. The bracket is a way of writing an if-statement in algebra, nothing more.</a:t>
-            </a:r>
-          </a:p>
-          <a:p>
-            <a:pPr lvl="0" indent="0" marL="0">
-              <a:buNone/>
-            </a:pPr>
-          </a:p>
-          <a:p>
-            <a:pPr lvl="0" indent="0" marL="0">
-              <a:buNone/>
-            </a:pPr>
-            <a:r>
-              <a:rPr/>
-              <a:t>And the headline: nobody designed this function. It fell out of asking for the parameters that make the data least surprising.</a:t>
+              <a:t>Say this before any algebra. It is the whole idea, and once they have it the derivation is bookkeeping.</a:t>
+            </a:r>
+          </a:p>
+          <a:p>
+            <a:pPr lvl="0" indent="0" marL="0">
+              <a:buNone/>
+            </a:pPr>
+          </a:p>
+          <a:p>
+            <a:pPr lvl="0" indent="0" marL="0">
+              <a:buNone/>
+            </a:pPr>
+            <a:r>
+              <a:rPr/>
+              <a:t>Each drive contributes one factor: the probability the model gave to what actually occurred. Multiply across the fleet and you have the probability of the whole dataset under that setting of the parameters. Choose the setting that makes it largest.</a:t>
+            </a:r>
+          </a:p>
+          <a:p>
+            <a:pPr lvl="0" indent="0" marL="0">
+              <a:buNone/>
+            </a:pPr>
+          </a:p>
+          <a:p>
+            <a:pPr lvl="0" indent="0" marL="0">
+              <a:buNone/>
+            </a:pPr>
+            <a:r>
+              <a:rPr/>
+              <a:t>Two practical notes worth saying aloud. We take the logarithm because it turns the product into a sum, which differentiates one term at a time - and because the product itself is too small to store. Gradient descent starts with every probability at 0.5, and 0.5 multiplied by itself 6,000 times, once per training drive, is about 10 to the minus 1806. The smallest number a 64-bit float holds is about 10 to the minus 308, so the computer stores exactly zero. Every real implementation works in log space, and not for elegance.</a:t>
+            </a:r>
+          </a:p>
+          <a:p>
+            <a:pPr lvl="0" indent="0" marL="0">
+              <a:buNone/>
+            </a:pPr>
+          </a:p>
+          <a:p>
+            <a:pPr lvl="0" indent="0" marL="0">
+              <a:buNone/>
+            </a:pPr>
+            <a:r>
+              <a:rPr/>
+              <a:t>Then negate, so we minimise as in lesson 3.</a:t>
             </a:r>
           </a:p>
         </p:txBody>
@@ -1385,35 +1358,63 @@
             </a:pPr>
             <a:r>
               <a:rPr/>
-              <a:t>Prediction error times feature, averaged. Character for character the gradient of lesson 3, with a different model and a different cost function.</a:t>
-            </a:r>
-          </a:p>
-          <a:p>
-            <a:pPr lvl="0" indent="0" marL="0">
-              <a:buNone/>
-            </a:pPr>
-          </a:p>
-          <a:p>
-            <a:pPr lvl="0" indent="0" marL="0">
-              <a:buNone/>
-            </a:pPr>
-            <a:r>
-              <a:rPr/>
-              <a:t>The cancellation is worth showing on the board if there is appetite: the sigma times one-minus-sigma from the chain rule cancels against the one-over-sigma from the logarithm. Handout section 3.4 has it.</a:t>
-            </a:r>
-          </a:p>
-          <a:p>
-            <a:pPr lvl="0" indent="0" marL="0">
-              <a:buNone/>
-            </a:pPr>
-          </a:p>
-          <a:p>
-            <a:pPr lvl="0" indent="0" marL="0">
-              <a:buNone/>
-            </a:pPr>
-            <a:r>
-              <a:rPr/>
-              <a:t>If someone asks whether that is a coincidence: no. Both are generalised linear models fitted by maximum likelihood - Gaussian noise for regression, Bernoulli outcomes for classification - and the whole exponential family gives this form. They do not need that theory to use either method, but it is why the same gradient descent code, unchanged, trains both.</a:t>
+              <a:t>This is the loss on ONE example, L, not the cost over the training set; p is the predicted probability, the same number the next slide writes as y-hat. Say the other half aloud rather than showing it: the cost J is the average of this over the m examples, one over m times the sum. Written out in full the formula reached the slide edge and came out at 26pt, smaller than the bullets on the slide before it.</a:t>
+            </a:r>
+          </a:p>
+          <a:p>
+            <a:pPr lvl="0" indent="0" marL="0">
+              <a:buNone/>
+            </a:pPr>
+          </a:p>
+          <a:p>
+            <a:pPr lvl="0" indent="0" marL="0">
+              <a:buNone/>
+            </a:pPr>
+            <a:r>
+              <a:rPr/>
+              <a:t>Do not derive it here - the handout, section 3, does it in full. Show it and read it.</a:t>
+            </a:r>
+          </a:p>
+          <a:p>
+            <a:pPr lvl="0" indent="0" marL="0">
+              <a:buNone/>
+            </a:pPr>
+          </a:p>
+          <a:p>
+            <a:pPr lvl="0" indent="0" marL="0">
+              <a:buNone/>
+            </a:pPr>
+            <a:r>
+              <a:rPr/>
+              <a:t>The reading that makes it stick: the cost of an outcome is the SURPRISE of seeing it. Something you called certain costs nothing. Something you gave a probability of one in a thousand costs log 1000, about 6.9. Something you declared impossible costs infinity.</a:t>
+            </a:r>
+          </a:p>
+          <a:p>
+            <a:pPr lvl="0" indent="0" marL="0">
+              <a:buNone/>
+            </a:pPr>
+          </a:p>
+          <a:p>
+            <a:pPr lvl="0" indent="0" marL="0">
+              <a:buNone/>
+            </a:pPr>
+            <a:r>
+              <a:rPr/>
+              <a:t>Only one of the two terms is ever active, because y is 0 or 1. The bracket is a way of writing an if-statement in algebra, nothing more.</a:t>
+            </a:r>
+          </a:p>
+          <a:p>
+            <a:pPr lvl="0" indent="0" marL="0">
+              <a:buNone/>
+            </a:pPr>
+          </a:p>
+          <a:p>
+            <a:pPr lvl="0" indent="0" marL="0">
+              <a:buNone/>
+            </a:pPr>
+            <a:r>
+              <a:rPr/>
+              <a:t>And the headline: nobody designed this function. It fell out of asking for the parameters that make the data least surprising.</a:t>
             </a:r>
           </a:p>
         </p:txBody>
@@ -1495,49 +1496,35 @@
             </a:pPr>
             <a:r>
               <a:rPr/>
-              <a:t>Left panel, the costs. A drive failed and the model said 0.0001. Squared error charges 0.9998. An honest “don’t know” - 0.5 - costs 0.25. So the worst possible answer is four times worse than a shrug. Log loss charges 9.2 against 0.69, and the ratio grows without bound.</a:t>
-            </a:r>
-          </a:p>
-          <a:p>
-            <a:pPr lvl="0" indent="0" marL="0">
-              <a:buNone/>
-            </a:pPr>
-          </a:p>
-          <a:p>
-            <a:pPr lvl="0" indent="0" marL="0">
-              <a:buNone/>
-            </a:pPr>
-            <a:r>
-              <a:rPr/>
-              <a:t>Right panel is the real argument, so spend the time here. The gradient is what the optimiser actually uses. Squared error’s gradient through the sigmoid carries a factor p times one-minus-p - which is exactly the sigmoid derivative from slide 10 - and that factor goes to zero as p goes to zero.</a:t>
-            </a:r>
-          </a:p>
-          <a:p>
-            <a:pPr lvl="0" indent="0" marL="0">
-              <a:buNone/>
-            </a:pPr>
-          </a:p>
-          <a:p>
-            <a:pPr lvl="0" indent="0" marL="0">
-              <a:buNone/>
-            </a:pPr>
-            <a:r>
-              <a:rPr/>
-              <a:t>Say it as a sentence: the wronger the model gets, the less squared error asks it to change. At p = 0.001 the gradient is a five-hundredth of log loss’s. Log loss goes the other way, approaching its maximum push exactly where the error is worst.</a:t>
-            </a:r>
-          </a:p>
-          <a:p>
-            <a:pPr lvl="0" indent="0" marL="0">
-              <a:buNone/>
-            </a:pPr>
-          </a:p>
-          <a:p>
-            <a:pPr lvl="0" indent="0" marL="0">
-              <a:buNone/>
-            </a:pPr>
-            <a:r>
-              <a:rPr/>
-              <a:t>That is the failure. Not that squared error scores badly - that it stops teaching.</a:t>
+              <a:t>Prediction error times feature, averaged. Character for character the gradient of lesson 3, with a different model and a different cost function.</a:t>
+            </a:r>
+          </a:p>
+          <a:p>
+            <a:pPr lvl="0" indent="0" marL="0">
+              <a:buNone/>
+            </a:pPr>
+          </a:p>
+          <a:p>
+            <a:pPr lvl="0" indent="0" marL="0">
+              <a:buNone/>
+            </a:pPr>
+            <a:r>
+              <a:rPr/>
+              <a:t>The cancellation is worth showing on the board if there is appetite: the sigma times one-minus-sigma from the chain rule cancels against the one-over-sigma from the logarithm. Handout section 3.4 has it.</a:t>
+            </a:r>
+          </a:p>
+          <a:p>
+            <a:pPr lvl="0" indent="0" marL="0">
+              <a:buNone/>
+            </a:pPr>
+          </a:p>
+          <a:p>
+            <a:pPr lvl="0" indent="0" marL="0">
+              <a:buNone/>
+            </a:pPr>
+            <a:r>
+              <a:rPr/>
+              <a:t>If someone asks whether that is a coincidence: no. Both are generalised linear models fitted by maximum likelihood - Gaussian noise for regression, Bernoulli outcomes for classification - and the whole exponential family gives this form. They do not need that theory to use either method, but it is why the same gradient descent code, unchanged, trains both.</a:t>
             </a:r>
           </a:p>
         </p:txBody>
@@ -1619,49 +1606,49 @@
             </a:pPr>
             <a:r>
               <a:rPr/>
-              <a:t>State it, do not prove it; the handout section 4.3 has the argument.</a:t>
-            </a:r>
-          </a:p>
-          <a:p>
-            <a:pPr lvl="0" indent="0" marL="0">
-              <a:buNone/>
-            </a:pPr>
-          </a:p>
-          <a:p>
-            <a:pPr lvl="0" indent="0" marL="0">
-              <a:buNone/>
-            </a:pPr>
-            <a:r>
-              <a:rPr/>
-              <a:t>The consequence is practical: gradient descent on log loss cannot get trapped. Squared error through a sigmoid has no such guarantee and is in general non-convex.</a:t>
-            </a:r>
-          </a:p>
-          <a:p>
-            <a:pPr lvl="0" indent="0" marL="0">
-              <a:buNone/>
-            </a:pPr>
-          </a:p>
-          <a:p>
-            <a:pPr lvl="0" indent="0" marL="0">
-              <a:buNone/>
-            </a:pPr>
-            <a:r>
-              <a:rPr/>
-              <a:t>Now the caution that catches people, and it is worth ten seconds because they will hit it in the notebook. Convex does NOT mean there is a closed-form solution. Setting the gradient to zero gives X-transpose times sigma of Xw minus y equals zero, which is not linear in w - the sigmoid is in the way.</a:t>
-            </a:r>
-          </a:p>
-          <a:p>
-            <a:pPr lvl="0" indent="0" marL="0">
-              <a:buNone/>
-            </a:pPr>
-          </a:p>
-          <a:p>
-            <a:pPr lvl="0" indent="0" marL="0">
-              <a:buNone/>
-            </a:pPr>
-            <a:r>
-              <a:rPr/>
-              <a:t>There is no normal equation for logistic regression. It has to be solved iteratively, which is why LogisticRegression has a max_iter argument and LinearRegression does not. If a student ever sees a convergence warning, that is what it is about.</a:t>
+              <a:t>Left panel, the costs. A drive failed and the model said 0.0001. Squared error charges 0.9998. An honest “don’t know” - 0.5 - costs 0.25. So the worst possible answer is four times worse than a shrug. Log loss charges 9.2 against 0.69, and the ratio grows without bound.</a:t>
+            </a:r>
+          </a:p>
+          <a:p>
+            <a:pPr lvl="0" indent="0" marL="0">
+              <a:buNone/>
+            </a:pPr>
+          </a:p>
+          <a:p>
+            <a:pPr lvl="0" indent="0" marL="0">
+              <a:buNone/>
+            </a:pPr>
+            <a:r>
+              <a:rPr/>
+              <a:t>Right panel is the real argument, so spend the time here. The gradient is what the optimiser actually uses. Squared error’s gradient through the sigmoid carries a factor p times one-minus-p - which is exactly the sigmoid derivative from slide 11 - and that factor goes to zero as p goes to zero.</a:t>
+            </a:r>
+          </a:p>
+          <a:p>
+            <a:pPr lvl="0" indent="0" marL="0">
+              <a:buNone/>
+            </a:pPr>
+          </a:p>
+          <a:p>
+            <a:pPr lvl="0" indent="0" marL="0">
+              <a:buNone/>
+            </a:pPr>
+            <a:r>
+              <a:rPr/>
+              <a:t>Say it as a sentence: the wronger the model gets, the less squared error asks it to change. At p = 0.001 the gradient is a five-hundredth of log loss’s. Log loss goes the other way, approaching its maximum push exactly where the error is worst.</a:t>
+            </a:r>
+          </a:p>
+          <a:p>
+            <a:pPr lvl="0" indent="0" marL="0">
+              <a:buNone/>
+            </a:pPr>
+          </a:p>
+          <a:p>
+            <a:pPr lvl="0" indent="0" marL="0">
+              <a:buNone/>
+            </a:pPr>
+            <a:r>
+              <a:rPr/>
+              <a:t>That is the failure. Not that squared error scores badly - that it stops teaching.</a:t>
             </a:r>
           </a:p>
         </p:txBody>
@@ -1743,63 +1730,49 @@
             </a:pPr>
             <a:r>
               <a:rPr/>
-              <a:t>Fifteen lines of NumPy, then one line of scikit-learn, and the same answer. Run notebook 01. Twenty minutes. The parts worth stopping on:</a:t>
-            </a:r>
-          </a:p>
-          <a:p>
-            <a:pPr lvl="0" indent="0" marL="0">
-              <a:buNone/>
-            </a:pPr>
-          </a:p>
-          <a:p>
-            <a:pPr lvl="0" indent="0" marL="0">
-              <a:buNone/>
-            </a:pPr>
-            <a:r>
-              <a:rPr/>
-              <a:t>The linear-fit failure - let them see 3,606 negative probabilities printed rather than being told.</a:t>
-            </a:r>
-          </a:p>
-          <a:p>
-            <a:pPr lvl="0" indent="0" marL="0">
-              <a:buNone/>
-            </a:pPr>
-          </a:p>
-          <a:p>
-            <a:pPr lvl="0" indent="0" marL="0">
-              <a:buNone/>
-            </a:pPr>
-            <a:r>
-              <a:rPr/>
-              <a:t>The gradient/loss figure, which is the argument you just made, in code they can change. Invite them to change it: what happens to the squared-error gradient at p = 0.5?</a:t>
-            </a:r>
-          </a:p>
-          <a:p>
-            <a:pPr lvl="0" indent="0" marL="0">
-              <a:buNone/>
-            </a:pPr>
-          </a:p>
-          <a:p>
-            <a:pPr lvl="0" indent="0" marL="0">
-              <a:buNone/>
-            </a:pPr>
-            <a:r>
-              <a:rPr/>
-              <a:t>The coefficient recovery table, including the decoy.</a:t>
-            </a:r>
-          </a:p>
-          <a:p>
-            <a:pPr lvl="0" indent="0" marL="0">
-              <a:buNone/>
-            </a:pPr>
-          </a:p>
-          <a:p>
-            <a:pPr lvl="0" indent="0" marL="0">
-              <a:buNone/>
-            </a:pPr>
-            <a:r>
-              <a:rPr/>
-              <a:t>If time is short, skip the descent curve - it is the least surprising cell and they saw the same picture in lesson 3.</a:t>
+              <a:t>State it, do not prove it; the handout section 4.3 has the argument.</a:t>
+            </a:r>
+          </a:p>
+          <a:p>
+            <a:pPr lvl="0" indent="0" marL="0">
+              <a:buNone/>
+            </a:pPr>
+          </a:p>
+          <a:p>
+            <a:pPr lvl="0" indent="0" marL="0">
+              <a:buNone/>
+            </a:pPr>
+            <a:r>
+              <a:rPr/>
+              <a:t>The consequence is practical: gradient descent on log loss cannot get trapped. Squared error through a sigmoid has no such guarantee and is in general non-convex.</a:t>
+            </a:r>
+          </a:p>
+          <a:p>
+            <a:pPr lvl="0" indent="0" marL="0">
+              <a:buNone/>
+            </a:pPr>
+          </a:p>
+          <a:p>
+            <a:pPr lvl="0" indent="0" marL="0">
+              <a:buNone/>
+            </a:pPr>
+            <a:r>
+              <a:rPr/>
+              <a:t>Now the caution that catches people, and it is worth ten seconds because they will hit it in the notebook. Convex does NOT mean there is a closed-form solution. Setting the gradient to zero gives X-transpose times sigma of Xw minus y equals zero, which is not linear in w - the sigmoid is in the way.</a:t>
+            </a:r>
+          </a:p>
+          <a:p>
+            <a:pPr lvl="0" indent="0" marL="0">
+              <a:buNone/>
+            </a:pPr>
+          </a:p>
+          <a:p>
+            <a:pPr lvl="0" indent="0" marL="0">
+              <a:buNone/>
+            </a:pPr>
+            <a:r>
+              <a:rPr/>
+              <a:t>There is no normal equation for logistic regression. It has to be solved iteratively, which is why LogisticRegression has a max_iter argument and LinearRegression does not. If a student ever sees a convergence warning, that is what it is about.</a:t>
             </a:r>
           </a:p>
         </p:txBody>
@@ -1991,49 +1964,63 @@
             </a:pPr>
             <a:r>
               <a:rPr/>
-              <a:t>Two features, so the model can be drawn. The black line is where the predicted probability is exactly 0.5 - equivalently, where the log-odds are zero.</a:t>
-            </a:r>
-          </a:p>
-          <a:p>
-            <a:pPr lvl="0" indent="0" marL="0">
-              <a:buNone/>
-            </a:pPr>
-          </a:p>
-          <a:p>
-            <a:pPr lvl="0" indent="0" marL="0">
-              <a:buNone/>
-            </a:pPr>
-            <a:r>
-              <a:rPr/>
-              <a:t>First observation: it is STRAIGHT. Logistic regression is a linear classifier. The curve is in the probabilities, not in the boundary. That surprises people who expected the sigmoid to bend it.</a:t>
-            </a:r>
-          </a:p>
-          <a:p>
-            <a:pPr lvl="0" indent="0" marL="0">
-              <a:buNone/>
-            </a:pPr>
-          </a:p>
-          <a:p>
-            <a:pPr lvl="0" indent="0" marL="0">
-              <a:buNone/>
-            </a:pPr>
-            <a:r>
-              <a:rPr/>
-              <a:t>Second observation, and this is the bridge to the rest of the lesson: almost every gold point - every drive that actually failed - is on the blue side of the line. At a threshold of 0.5 this model calls nearly the whole fleet healthy, including most of the drives that failed.</a:t>
-            </a:r>
-          </a:p>
-          <a:p>
-            <a:pPr lvl="0" indent="0" marL="0">
-              <a:buNone/>
-            </a:pPr>
-          </a:p>
-          <a:p>
-            <a:pPr lvl="0" indent="0" marL="0">
-              <a:buNone/>
-            </a:pPr>
-            <a:r>
-              <a:rPr/>
-              <a:t>Ask: is that a bad model? Take answers. Then say: the probabilities are fine. The threshold of 0.5 is a habit. Telling those two apart is the rest of the lesson.</a:t>
+              <a:t>Fifteen lines of NumPy, then one line of scikit-learn, and the same answer. Run notebook 01. Twenty minutes. The parts worth stopping on:</a:t>
+            </a:r>
+          </a:p>
+          <a:p>
+            <a:pPr lvl="0" indent="0" marL="0">
+              <a:buNone/>
+            </a:pPr>
+          </a:p>
+          <a:p>
+            <a:pPr lvl="0" indent="0" marL="0">
+              <a:buNone/>
+            </a:pPr>
+            <a:r>
+              <a:rPr/>
+              <a:t>The linear-fit failure - let them see 3,606 negative probabilities printed rather than being told.</a:t>
+            </a:r>
+          </a:p>
+          <a:p>
+            <a:pPr lvl="0" indent="0" marL="0">
+              <a:buNone/>
+            </a:pPr>
+          </a:p>
+          <a:p>
+            <a:pPr lvl="0" indent="0" marL="0">
+              <a:buNone/>
+            </a:pPr>
+            <a:r>
+              <a:rPr/>
+              <a:t>The gradient/loss figure, which is the argument you just made, in code they can change. Invite them to change it: what happens to the squared-error gradient at p = 0.5?</a:t>
+            </a:r>
+          </a:p>
+          <a:p>
+            <a:pPr lvl="0" indent="0" marL="0">
+              <a:buNone/>
+            </a:pPr>
+          </a:p>
+          <a:p>
+            <a:pPr lvl="0" indent="0" marL="0">
+              <a:buNone/>
+            </a:pPr>
+            <a:r>
+              <a:rPr/>
+              <a:t>The coefficient recovery table, including the decoy.</a:t>
+            </a:r>
+          </a:p>
+          <a:p>
+            <a:pPr lvl="0" indent="0" marL="0">
+              <a:buNone/>
+            </a:pPr>
+          </a:p>
+          <a:p>
+            <a:pPr lvl="0" indent="0" marL="0">
+              <a:buNone/>
+            </a:pPr>
+            <a:r>
+              <a:rPr/>
+              <a:t>If time is short, skip the descent curve - it is the least surprising cell and they saw the same picture in lesson 3.</a:t>
             </a:r>
           </a:p>
         </p:txBody>
@@ -2115,7 +2102,49 @@
             </a:pPr>
             <a:r>
               <a:rPr/>
-              <a:t>Ten minutes. When they come back, the first slide is the trap, and it works best if they have not been thinking about it.</a:t>
+              <a:t>Two features, so the model can be drawn. The black line is where the predicted probability is exactly 0.5 - equivalently, where the log-odds are zero.</a:t>
+            </a:r>
+          </a:p>
+          <a:p>
+            <a:pPr lvl="0" indent="0" marL="0">
+              <a:buNone/>
+            </a:pPr>
+          </a:p>
+          <a:p>
+            <a:pPr lvl="0" indent="0" marL="0">
+              <a:buNone/>
+            </a:pPr>
+            <a:r>
+              <a:rPr/>
+              <a:t>First observation: it is STRAIGHT. Logistic regression is a linear classifier. The curve is in the probabilities, not in the boundary. That surprises people who expected the sigmoid to bend it.</a:t>
+            </a:r>
+          </a:p>
+          <a:p>
+            <a:pPr lvl="0" indent="0" marL="0">
+              <a:buNone/>
+            </a:pPr>
+          </a:p>
+          <a:p>
+            <a:pPr lvl="0" indent="0" marL="0">
+              <a:buNone/>
+            </a:pPr>
+            <a:r>
+              <a:rPr/>
+              <a:t>Second observation, and this is the bridge to the rest of the lesson: almost every gold point - every drive that actually failed - is on the blue side of the line. At a threshold of 0.5 this model calls nearly the whole fleet healthy, including most of the drives that failed.</a:t>
+            </a:r>
+          </a:p>
+          <a:p>
+            <a:pPr lvl="0" indent="0" marL="0">
+              <a:buNone/>
+            </a:pPr>
+          </a:p>
+          <a:p>
+            <a:pPr lvl="0" indent="0" marL="0">
+              <a:buNone/>
+            </a:pPr>
+            <a:r>
+              <a:rPr/>
+              <a:t>Ask: is that a bad model? Take answers. Then say: the probabilities are fine. The threshold of 0.5 is a habit. Telling those two apart is the rest of the lesson.</a:t>
             </a:r>
           </a:p>
         </p:txBody>
@@ -2197,59 +2226,7 @@
             </a:pPr>
             <a:r>
               <a:rPr/>
-              <a:t>This is the number to remember from lesson 4. Put it up and say nothing for a moment.</a:t>
-            </a:r>
-          </a:p>
-          <a:p>
-            <a:pPr lvl="0" indent="0" marL="0">
-              <a:buNone/>
-            </a:pPr>
-          </a:p>
-          <a:p>
-            <a:pPr lvl="0" indent="0" marL="0">
-              <a:buNone/>
-            </a:pPr>
-            <a:r>
-              <a:rPr/>
-              <a:t>A model that could be written </a:t>
-            </a:r>
-            <a:r>
-              <a:rPr>
-                <a:latin typeface="Courier"/>
-              </a:rPr>
-              <a:t>return 0</a:t>
-            </a:r>
-            <a:r>
-              <a:rPr/>
-              <a:t> - no learning, no data, no features - scores 96.20%. The model they just built, which finds more than half the failing drives, scores 97.70%. One and a half percentage points separate a real model from a worthless one.</a:t>
-            </a:r>
-          </a:p>
-          <a:p>
-            <a:pPr lvl="0" indent="0" marL="0">
-              <a:buNone/>
-            </a:pPr>
-          </a:p>
-          <a:p>
-            <a:pPr lvl="0" indent="0" marL="0">
-              <a:buNone/>
-            </a:pPr>
-            <a:r>
-              <a:rPr/>
-              <a:t>The arithmetic is not subtle: 1,924 of the 2,000 test drives are healthy, so answering “healthy” collects them all for free. Only 3.8% of the test set is left to compete over.</a:t>
-            </a:r>
-          </a:p>
-          <a:p>
-            <a:pPr lvl="0" indent="0" marL="0">
-              <a:buNone/>
-            </a:pPr>
-          </a:p>
-          <a:p>
-            <a:pPr lvl="0" indent="0" marL="0">
-              <a:buNone/>
-            </a:pPr>
-            <a:r>
-              <a:rPr/>
-              <a:t>This is the 306 from the first ten minutes, coming back as an accuracy score.</a:t>
+              <a:t>Ten minutes. When they come back, the first slide is the trap, and it works best if they have not been thinking about it.</a:t>
             </a:r>
           </a:p>
         </p:txBody>
@@ -2331,49 +2308,59 @@
             </a:pPr>
             <a:r>
               <a:rPr/>
-              <a:t>Be careful to defend the instinct rather than mock it. Accuracy is not a naive metric, and students who reached for it were not being lazy - on a balanced problem it is the correct summary and everything else is a complication.</a:t>
-            </a:r>
-          </a:p>
-          <a:p>
-            <a:pPr lvl="0" indent="0" marL="0">
-              <a:buNone/>
-            </a:pPr>
-          </a:p>
-          <a:p>
-            <a:pPr lvl="0" indent="0" marL="0">
-              <a:buNone/>
-            </a:pPr>
-            <a:r>
-              <a:rPr/>
-              <a:t>It stops being informative precisely when one class is rare. And then list the problems: fraud, disease screening, intrusion detection, equipment failure, spam. In every one of them the class you care about is the small one.</a:t>
-            </a:r>
-          </a:p>
-          <a:p>
-            <a:pPr lvl="0" indent="0" marL="0">
-              <a:buNone/>
-            </a:pPr>
-          </a:p>
-          <a:p>
-            <a:pPr lvl="0" indent="0" marL="0">
-              <a:buNone/>
-            </a:pPr>
-            <a:r>
-              <a:rPr/>
-              <a:t>The general statement, worth putting on the board: if a share pi of the cases are positive (the positive rate), the trivial always-negative classifier scores 1 minus pi. Here 96.2%. In some fraud problems, where the rate is one in a thousand, 99.9%.</a:t>
-            </a:r>
-          </a:p>
-          <a:p>
-            <a:pPr lvl="0" indent="0" marL="0">
-              <a:buNone/>
-            </a:pPr>
-          </a:p>
-          <a:p>
-            <a:pPr lvl="0" indent="0" marL="0">
-              <a:buNone/>
-            </a:pPr>
-            <a:r>
-              <a:rPr/>
-              <a:t>Accuracy is not wrong. It is answering a question nobody asked.</a:t>
+              <a:t>This is the number to remember from lesson 4. Put it up and say nothing for a moment.</a:t>
+            </a:r>
+          </a:p>
+          <a:p>
+            <a:pPr lvl="0" indent="0" marL="0">
+              <a:buNone/>
+            </a:pPr>
+          </a:p>
+          <a:p>
+            <a:pPr lvl="0" indent="0" marL="0">
+              <a:buNone/>
+            </a:pPr>
+            <a:r>
+              <a:rPr/>
+              <a:t>A model that could be written </a:t>
+            </a:r>
+            <a:r>
+              <a:rPr>
+                <a:latin typeface="Courier"/>
+              </a:rPr>
+              <a:t>return 0</a:t>
+            </a:r>
+            <a:r>
+              <a:rPr/>
+              <a:t> - no learning, no data, no features - scores 96.20%. The model they just built, which finds more than half the failing drives, scores 97.70%. One and a half percentage points separate a real model from a worthless one.</a:t>
+            </a:r>
+          </a:p>
+          <a:p>
+            <a:pPr lvl="0" indent="0" marL="0">
+              <a:buNone/>
+            </a:pPr>
+          </a:p>
+          <a:p>
+            <a:pPr lvl="0" indent="0" marL="0">
+              <a:buNone/>
+            </a:pPr>
+            <a:r>
+              <a:rPr/>
+              <a:t>The arithmetic is not subtle: 1,924 of the 2,000 test drives are healthy, so answering “healthy” collects them all for free. Only 3.8% of the test set is left to compete over.</a:t>
+            </a:r>
+          </a:p>
+          <a:p>
+            <a:pPr lvl="0" indent="0" marL="0">
+              <a:buNone/>
+            </a:pPr>
+          </a:p>
+          <a:p>
+            <a:pPr lvl="0" indent="0" marL="0">
+              <a:buNone/>
+            </a:pPr>
+            <a:r>
+              <a:rPr/>
+              <a:t>This is the 306 from the first ten minutes, coming back as an accuracy score.</a:t>
             </a:r>
           </a:p>
         </p:txBody>
@@ -2455,49 +2442,49 @@
             </a:pPr>
             <a:r>
               <a:rPr/>
-              <a:t>The fix is to stop collapsing four outcomes into one number.</a:t>
-            </a:r>
-          </a:p>
-          <a:p>
-            <a:pPr lvl="0" indent="0" marL="0">
-              <a:buNone/>
-            </a:pPr>
-          </a:p>
-          <a:p>
-            <a:pPr lvl="0" indent="0" marL="0">
-              <a:buNone/>
-            </a:pPr>
-            <a:r>
-              <a:rPr/>
-              <a:t>Side by side, the two models are obviously not comparable - and the number that separates them, 0 caught against 43, is nowhere in the accuracy figure.</a:t>
-            </a:r>
-          </a:p>
-          <a:p>
-            <a:pPr lvl="0" indent="0" marL="0">
-              <a:buNone/>
-            </a:pPr>
-          </a:p>
-          <a:p>
-            <a:pPr lvl="0" indent="0" marL="0">
-              <a:buNone/>
-            </a:pPr>
-            <a:r>
-              <a:rPr/>
-              <a:t>Teach them to read the bottom-left cell first when misses are expensive: 33 drives failed and were called healthy. That is the cell that costs money, and it is the one a single-number metric hides.</a:t>
-            </a:r>
-          </a:p>
-          <a:p>
-            <a:pPr lvl="0" indent="0" marL="0">
-              <a:buNone/>
-            </a:pPr>
-          </a:p>
-          <a:p>
-            <a:pPr lvl="0" indent="0" marL="0">
-              <a:buNone/>
-            </a:pPr>
-            <a:r>
-              <a:rPr/>
-              <a:t>Worth naming the convention while it is on screen, because half the world uses the transpose: scikit-learn puts truth in rows and predictions in columns. Any time they read a confusion matrix from a paper, check which way round it is before drawing conclusions.</a:t>
+              <a:t>Be careful to defend the instinct rather than mock it. Accuracy is not a naive metric, and students who reached for it were not being lazy - on a balanced problem it is the correct summary and everything else is a complication.</a:t>
+            </a:r>
+          </a:p>
+          <a:p>
+            <a:pPr lvl="0" indent="0" marL="0">
+              <a:buNone/>
+            </a:pPr>
+          </a:p>
+          <a:p>
+            <a:pPr lvl="0" indent="0" marL="0">
+              <a:buNone/>
+            </a:pPr>
+            <a:r>
+              <a:rPr/>
+              <a:t>It stops being informative precisely when one class is rare. And then list the problems: fraud, disease screening, intrusion detection, equipment failure, spam. In every one of them the class you care about is the small one.</a:t>
+            </a:r>
+          </a:p>
+          <a:p>
+            <a:pPr lvl="0" indent="0" marL="0">
+              <a:buNone/>
+            </a:pPr>
+          </a:p>
+          <a:p>
+            <a:pPr lvl="0" indent="0" marL="0">
+              <a:buNone/>
+            </a:pPr>
+            <a:r>
+              <a:rPr/>
+              <a:t>The general statement, worth putting on the board: if a share pi of the cases are positive (the positive rate), the trivial always-negative classifier scores 1 minus pi. Here 96.2%. In some fraud problems, where the rate is one in a thousand, 99.9%.</a:t>
+            </a:r>
+          </a:p>
+          <a:p>
+            <a:pPr lvl="0" indent="0" marL="0">
+              <a:buNone/>
+            </a:pPr>
+          </a:p>
+          <a:p>
+            <a:pPr lvl="0" indent="0" marL="0">
+              <a:buNone/>
+            </a:pPr>
+            <a:r>
+              <a:rPr/>
+              <a:t>Accuracy is not wrong. It is answering a question nobody asked.</a:t>
             </a:r>
           </a:p>
         </p:txBody>
@@ -2579,35 +2566,49 @@
             </a:pPr>
             <a:r>
               <a:rPr/>
-              <a:t>The names are jargon until they are attached to consequences, so attach them here and keep the numbers visible - they come back at the end of the lesson when we choose a threshold.</a:t>
-            </a:r>
-          </a:p>
-          <a:p>
-            <a:pPr lvl="0" indent="0" marL="0">
-              <a:buNone/>
-            </a:pPr>
-          </a:p>
-          <a:p>
-            <a:pPr lvl="0" indent="0" marL="0">
-              <a:buNone/>
-            </a:pPr>
-            <a:r>
-              <a:rPr/>
-              <a:t>The essential point: these two errors are NOT the same size, and no single-number metric knows that. Accuracy treats them as identical. F1 treats them as identical. Only a cost, supplied from outside the data, distinguishes them.</a:t>
-            </a:r>
-          </a:p>
-          <a:p>
-            <a:pPr lvl="0" indent="0" marL="0">
-              <a:buNone/>
-            </a:pPr>
-          </a:p>
-          <a:p>
-            <a:pPr lvl="0" indent="0" marL="0">
-              <a:buNone/>
-            </a:pPr>
-            <a:r>
-              <a:rPr/>
-              <a:t>Ask for a domain where the ratio goes the other way - where a false positive is the expensive one. Medical screening that triggers an invasive biopsy is the usual answer; content moderation that removes a legitimate post is another.</a:t>
+              <a:t>The fix is to stop collapsing four outcomes into one number.</a:t>
+            </a:r>
+          </a:p>
+          <a:p>
+            <a:pPr lvl="0" indent="0" marL="0">
+              <a:buNone/>
+            </a:pPr>
+          </a:p>
+          <a:p>
+            <a:pPr lvl="0" indent="0" marL="0">
+              <a:buNone/>
+            </a:pPr>
+            <a:r>
+              <a:rPr/>
+              <a:t>Side by side, the two models are obviously not comparable - and the number that separates them, 0 caught against 43, is nowhere in the accuracy figure.</a:t>
+            </a:r>
+          </a:p>
+          <a:p>
+            <a:pPr lvl="0" indent="0" marL="0">
+              <a:buNone/>
+            </a:pPr>
+          </a:p>
+          <a:p>
+            <a:pPr lvl="0" indent="0" marL="0">
+              <a:buNone/>
+            </a:pPr>
+            <a:r>
+              <a:rPr/>
+              <a:t>Teach them to read the bottom-left cell first when misses are expensive: 33 drives failed and were called healthy. That is the cell that costs money, and it is the one a single-number metric hides.</a:t>
+            </a:r>
+          </a:p>
+          <a:p>
+            <a:pPr lvl="0" indent="0" marL="0">
+              <a:buNone/>
+            </a:pPr>
+          </a:p>
+          <a:p>
+            <a:pPr lvl="0" indent="0" marL="0">
+              <a:buNone/>
+            </a:pPr>
+            <a:r>
+              <a:rPr/>
+              <a:t>Worth naming the convention while it is on screen, because half the world uses the transpose: scikit-learn puts truth in rows and predictions in columns. Any time they read a confusion matrix from a paper, check which way round it is before drawing conclusions.</a:t>
             </a:r>
           </a:p>
         </p:txBody>
@@ -2689,49 +2690,35 @@
             </a:pPr>
             <a:r>
               <a:rPr/>
-              <a:t>This picture prevents the most common confusion of the lesson. Both metrics put the true positives - failed drives we flagged - on top of the fraction. The difference is entirely in what goes underneath, and the shading shows it.</a:t>
-            </a:r>
-          </a:p>
-          <a:p>
-            <a:pPr lvl="0" indent="0" marL="0">
-              <a:buNone/>
-            </a:pPr>
-          </a:p>
-          <a:p>
-            <a:pPr lvl="0" indent="0" marL="0">
-              <a:buNone/>
-            </a:pPr>
-            <a:r>
-              <a:rPr/>
-              <a:t>Precision divides by the COLUMN - everything we flagged. When this model raises an alarm, how often is it right? That is the technician’s question: how much of my time are you wasting?</a:t>
-            </a:r>
-          </a:p>
-          <a:p>
-            <a:pPr lvl="0" indent="0" marL="0">
-              <a:buNone/>
-            </a:pPr>
-          </a:p>
-          <a:p>
-            <a:pPr lvl="0" indent="0" marL="0">
-              <a:buNone/>
-            </a:pPr>
-            <a:r>
-              <a:rPr/>
-              <a:t>Recall divides by the ROW - everything that actually failed. Of the drives that were going to fail, how many did we find? That is the operations manager’s question: how exposed am I still?</a:t>
-            </a:r>
-          </a:p>
-          <a:p>
-            <a:pPr lvl="0" indent="0" marL="0">
-              <a:buNone/>
-            </a:pPr>
-          </a:p>
-          <a:p>
-            <a:pPr lvl="0" indent="0" marL="0">
-              <a:buNone/>
-            </a:pPr>
-            <a:r>
-              <a:rPr/>
-              <a:t>Give them the hook and make them repeat it: precision is about the alarms, recall is about the failures. When in doubt, find the denominator and ask which population it is.</a:t>
+              <a:t>The names are jargon until they are attached to consequences, so attach them here and keep the numbers visible - they come back at the end of the lesson when we choose a threshold.</a:t>
+            </a:r>
+          </a:p>
+          <a:p>
+            <a:pPr lvl="0" indent="0" marL="0">
+              <a:buNone/>
+            </a:pPr>
+          </a:p>
+          <a:p>
+            <a:pPr lvl="0" indent="0" marL="0">
+              <a:buNone/>
+            </a:pPr>
+            <a:r>
+              <a:rPr/>
+              <a:t>The essential point: these two errors are NOT the same size, and no single-number metric knows that. Accuracy treats them as identical. F1 treats them as identical. Only a cost, supplied from outside the data, distinguishes them.</a:t>
+            </a:r>
+          </a:p>
+          <a:p>
+            <a:pPr lvl="0" indent="0" marL="0">
+              <a:buNone/>
+            </a:pPr>
+          </a:p>
+          <a:p>
+            <a:pPr lvl="0" indent="0" marL="0">
+              <a:buNone/>
+            </a:pPr>
+            <a:r>
+              <a:rPr/>
+              <a:t>Ask for a domain where the ratio goes the other way - where a false positive is the expensive one. Medical screening that triggers an invasive biopsy is the usual answer; content moderation that removes a legitimate post is another.</a:t>
             </a:r>
           </a:p>
         </p:txBody>
@@ -2813,35 +2800,49 @@
             </a:pPr>
             <a:r>
               <a:rPr/>
-              <a:t>Read each line as an English sentence with the counts in it, not as a ratio. That is the habit worth building: a metric that cannot be said as a sentence about actual objects has not been understood.</a:t>
-            </a:r>
-          </a:p>
-          <a:p>
-            <a:pPr lvl="0" indent="0" marL="0">
-              <a:buNone/>
-            </a:pPr>
-          </a:p>
-          <a:p>
-            <a:pPr lvl="0" indent="0" marL="0">
-              <a:buNone/>
-            </a:pPr>
-            <a:r>
-              <a:rPr/>
-              <a:t>Specificity is recall for the negative class: of the healthy drives, how many did we leave alone. One minus it is the false positive rate, which comes back in the receiver operating characteristic (ROC) section. Mention it now so the term is not new later.</a:t>
-            </a:r>
-          </a:p>
-          <a:p>
-            <a:pPr lvl="0" indent="0" marL="0">
-              <a:buNone/>
-            </a:pPr>
-          </a:p>
-          <a:p>
-            <a:pPr lvl="0" indent="0" marL="0">
-              <a:buNone/>
-            </a:pPr>
-            <a:r>
-              <a:rPr/>
-              <a:t>If someone asks which of the three to report: the answer is that it depends on who is asking, which is the honest answer and also the lesson.</a:t>
+              <a:t>This picture prevents the most common confusion of the lesson. Both metrics put the true positives - failed drives we flagged - on top of the fraction. The difference is entirely in what goes underneath, and the shading shows it.</a:t>
+            </a:r>
+          </a:p>
+          <a:p>
+            <a:pPr lvl="0" indent="0" marL="0">
+              <a:buNone/>
+            </a:pPr>
+          </a:p>
+          <a:p>
+            <a:pPr lvl="0" indent="0" marL="0">
+              <a:buNone/>
+            </a:pPr>
+            <a:r>
+              <a:rPr/>
+              <a:t>Precision divides by the COLUMN - everything we flagged. When this model raises an alarm, how often is it right? That is the technician’s question: how much of my time are you wasting?</a:t>
+            </a:r>
+          </a:p>
+          <a:p>
+            <a:pPr lvl="0" indent="0" marL="0">
+              <a:buNone/>
+            </a:pPr>
+          </a:p>
+          <a:p>
+            <a:pPr lvl="0" indent="0" marL="0">
+              <a:buNone/>
+            </a:pPr>
+            <a:r>
+              <a:rPr/>
+              <a:t>Recall divides by the ROW - everything that actually failed. Of the drives that were going to fail, how many did we find? That is the operations manager’s question: how exposed am I still?</a:t>
+            </a:r>
+          </a:p>
+          <a:p>
+            <a:pPr lvl="0" indent="0" marL="0">
+              <a:buNone/>
+            </a:pPr>
+          </a:p>
+          <a:p>
+            <a:pPr lvl="0" indent="0" marL="0">
+              <a:buNone/>
+            </a:pPr>
+            <a:r>
+              <a:rPr/>
+              <a:t>Give them the hook and make them repeat it: precision is about the alarms, recall is about the failures. When in doubt, find the denominator and ask which population it is.</a:t>
             </a:r>
           </a:p>
         </p:txBody>
@@ -2923,63 +2924,35 @@
             </a:pPr>
             <a:r>
               <a:rPr/>
-              <a:t>Take the stupidest possible model - flag every single drive - and score it. Recall is a perfect 1.0. Precision is 0.038.</a:t>
-            </a:r>
-          </a:p>
-          <a:p>
-            <a:pPr lvl="0" indent="0" marL="0">
-              <a:buNone/>
-            </a:pPr>
-          </a:p>
-          <a:p>
-            <a:pPr lvl="0" indent="0" marL="0">
-              <a:buNone/>
-            </a:pPr>
-            <a:r>
-              <a:rPr/>
-              <a:t>The ordinary average gives that model 0.519, which looks respectable. Anyone scanning a results table would not blink at 0.519.</a:t>
-            </a:r>
-          </a:p>
-          <a:p>
-            <a:pPr lvl="0" indent="0" marL="0">
-              <a:buNone/>
-            </a:pPr>
-          </a:p>
-          <a:p>
-            <a:pPr lvl="0" indent="0" marL="0">
-              <a:buNone/>
-            </a:pPr>
-            <a:r>
-              <a:rPr/>
-              <a:t>The harmonic mean gives it 0.073, which is the truth.</a:t>
-            </a:r>
-          </a:p>
-          <a:p>
-            <a:pPr lvl="0" indent="0" marL="0">
-              <a:buNone/>
-            </a:pPr>
-          </a:p>
-          <a:p>
-            <a:pPr lvl="0" indent="0" marL="0">
-              <a:buNone/>
-            </a:pPr>
-            <a:r>
-              <a:rPr/>
-              <a:t>The reason: the harmonic mean is dominated by the smaller of the two numbers. A model is only as good as its weaker side, and F1 refuses to let a perfect score on one axis buy a pass on the other.</a:t>
-            </a:r>
-          </a:p>
-          <a:p>
-            <a:pPr lvl="0" indent="0" marL="0">
-              <a:buNone/>
-            </a:pPr>
-          </a:p>
-          <a:p>
-            <a:pPr lvl="0" indent="0" marL="0">
-              <a:buNone/>
-            </a:pPr>
-            <a:r>
-              <a:rPr/>
-              <a:t>Mention F-beta in one sentence: a version of F1 with a weight beta, where beta above 1 counts recall more than precision. That is what you want here, where a miss costs about nineteen times a false alarm (2,600 against 140 euros). F2 is the usual choice.</a:t>
+              <a:t>Read each line as an English sentence with the counts in it, not as a ratio. That is the habit worth building: a metric that cannot be said as a sentence about actual objects has not been understood.</a:t>
+            </a:r>
+          </a:p>
+          <a:p>
+            <a:pPr lvl="0" indent="0" marL="0">
+              <a:buNone/>
+            </a:pPr>
+          </a:p>
+          <a:p>
+            <a:pPr lvl="0" indent="0" marL="0">
+              <a:buNone/>
+            </a:pPr>
+            <a:r>
+              <a:rPr/>
+              <a:t>Specificity is recall for the negative class: of the healthy drives, how many did we leave alone. One minus it is the false positive rate, which comes back in the receiver operating characteristic (ROC) section. Mention it now so the term is not new later.</a:t>
+            </a:r>
+          </a:p>
+          <a:p>
+            <a:pPr lvl="0" indent="0" marL="0">
+              <a:buNone/>
+            </a:pPr>
+          </a:p>
+          <a:p>
+            <a:pPr lvl="0" indent="0" marL="0">
+              <a:buNone/>
+            </a:pPr>
+            <a:r>
+              <a:rPr/>
+              <a:t>If someone asks which of the three to report: the answer is that it depends on who is asking, which is the honest answer and also the lesson.</a:t>
             </a:r>
           </a:p>
         </p:txBody>
@@ -3061,63 +3034,63 @@
             </a:pPr>
             <a:r>
               <a:rPr/>
-              <a:t>classification_report is scikit-learn’s summary table, and they will print it themselves in notebook 2 in about five minutes: one row per class, then three summary rows - accuracy, macro avg, weighted avg. The two numbers on this slide are the f1-score column of the last two.</a:t>
-            </a:r>
-          </a:p>
-          <a:p>
-            <a:pPr lvl="0" indent="0" marL="0">
-              <a:buNone/>
-            </a:pPr>
-          </a:p>
-          <a:p>
-            <a:pPr lvl="0" indent="0" marL="0">
-              <a:buNone/>
-            </a:pPr>
-            <a:r>
-              <a:rPr/>
-              <a:t>Anticipating it by one slide is deliberate. The rule for choosing between those rows is what they need in their heads while they run the notebook, not afterwards - left to themselves they quote whichever is biggest.</a:t>
-            </a:r>
-          </a:p>
-          <a:p>
-            <a:pPr lvl="0" indent="0" marL="0">
-              <a:buNone/>
-            </a:pPr>
-          </a:p>
-          <a:p>
-            <a:pPr lvl="0" indent="0" marL="0">
-              <a:buNone/>
-            </a:pPr>
-            <a:r>
-              <a:rPr/>
-              <a:t>The weighted average weights each class by how common it is, so on this problem it is essentially the healthy class talking, and it reads close to accuracy - inheriting exactly the blindness slides 23 to 26 were about.</a:t>
-            </a:r>
-          </a:p>
-          <a:p>
-            <a:pPr lvl="0" indent="0" marL="0">
-              <a:buNone/>
-            </a:pPr>
-          </a:p>
-          <a:p>
-            <a:pPr lvl="0" indent="0" marL="0">
-              <a:buNone/>
-            </a:pPr>
-            <a:r>
-              <a:rPr/>
-              <a:t>The macro average gives the two classes equal weight, so the rare class actually registers. 0.820 against 0.975 for the same model.</a:t>
-            </a:r>
-          </a:p>
-          <a:p>
-            <a:pPr lvl="0" indent="0" marL="0">
-              <a:buNone/>
-            </a:pPr>
-          </a:p>
-          <a:p>
-            <a:pPr lvl="0" indent="0" marL="0">
-              <a:buNone/>
-            </a:pPr>
-            <a:r>
-              <a:rPr/>
-              <a:t>The rule: on an imbalanced problem, quote the macro average or the minority class directly. Reporting the weighted average is not incorrect - it is the number that makes a mediocre model look finished, and choosing it without saying so is how a result gets oversold.</a:t>
+              <a:t>Take the stupidest possible model - flag every single drive - and score it. Recall is a perfect 1.0. Precision is 0.038.</a:t>
+            </a:r>
+          </a:p>
+          <a:p>
+            <a:pPr lvl="0" indent="0" marL="0">
+              <a:buNone/>
+            </a:pPr>
+          </a:p>
+          <a:p>
+            <a:pPr lvl="0" indent="0" marL="0">
+              <a:buNone/>
+            </a:pPr>
+            <a:r>
+              <a:rPr/>
+              <a:t>The ordinary average gives that model 0.519, which looks respectable. Anyone scanning a results table would not blink at 0.519.</a:t>
+            </a:r>
+          </a:p>
+          <a:p>
+            <a:pPr lvl="0" indent="0" marL="0">
+              <a:buNone/>
+            </a:pPr>
+          </a:p>
+          <a:p>
+            <a:pPr lvl="0" indent="0" marL="0">
+              <a:buNone/>
+            </a:pPr>
+            <a:r>
+              <a:rPr/>
+              <a:t>The harmonic mean gives it 0.073, which is the truth.</a:t>
+            </a:r>
+          </a:p>
+          <a:p>
+            <a:pPr lvl="0" indent="0" marL="0">
+              <a:buNone/>
+            </a:pPr>
+          </a:p>
+          <a:p>
+            <a:pPr lvl="0" indent="0" marL="0">
+              <a:buNone/>
+            </a:pPr>
+            <a:r>
+              <a:rPr/>
+              <a:t>The reason: the harmonic mean is dominated by the smaller of the two numbers. A model is only as good as its weaker side, and F1 refuses to let a perfect score on one axis buy a pass on the other.</a:t>
+            </a:r>
+          </a:p>
+          <a:p>
+            <a:pPr lvl="0" indent="0" marL="0">
+              <a:buNone/>
+            </a:pPr>
+          </a:p>
+          <a:p>
+            <a:pPr lvl="0" indent="0" marL="0">
+              <a:buNone/>
+            </a:pPr>
+            <a:r>
+              <a:rPr/>
+              <a:t>Mention F-beta in one sentence: a version of F1 with a weight beta, where beta above 1 counts recall more than precision. That is what you want here, where a miss costs about nineteen times a false alarm (2,600 against 140 euros). F2 is the usual choice.</a:t>
             </a:r>
           </a:p>
         </p:txBody>
@@ -3323,35 +3296,63 @@
             </a:pPr>
             <a:r>
               <a:rPr/>
-              <a:t>The confusion matrix by hand, then from scikit-learn, then the threshold sweep. Run notebook 02. Twenty minutes.</a:t>
-            </a:r>
-          </a:p>
-          <a:p>
-            <a:pPr lvl="0" indent="0" marL="0">
-              <a:buNone/>
-            </a:pPr>
-          </a:p>
-          <a:p>
-            <a:pPr lvl="0" indent="0" marL="0">
-              <a:buNone/>
-            </a:pPr>
-            <a:r>
-              <a:rPr/>
-              <a:t>Have them build the four counts by hand before calling confusion_matrix. It is four comparisons and it takes two minutes, and it is what makes the jargon stop being jargon.</a:t>
-            </a:r>
-          </a:p>
-          <a:p>
-            <a:pPr lvl="0" indent="0" marL="0">
-              <a:buNone/>
-            </a:pPr>
-          </a:p>
-          <a:p>
-            <a:pPr lvl="0" indent="0" marL="0">
-              <a:buNone/>
-            </a:pPr>
-            <a:r>
-              <a:rPr/>
-              <a:t>Spend time on the threshold sweep table. Do not explain it first - let them read the columns and say what they see. Somebody will notice that accuracy barely moves. That is the moment to make the next slide.</a:t>
+              <a:t>classification_report is scikit-learn’s summary table, and they will print it themselves in notebook 2 in about five minutes: one row per class, then three summary rows - accuracy, macro avg, weighted avg. The two numbers on this slide are the f1-score column of the last two.</a:t>
+            </a:r>
+          </a:p>
+          <a:p>
+            <a:pPr lvl="0" indent="0" marL="0">
+              <a:buNone/>
+            </a:pPr>
+          </a:p>
+          <a:p>
+            <a:pPr lvl="0" indent="0" marL="0">
+              <a:buNone/>
+            </a:pPr>
+            <a:r>
+              <a:rPr/>
+              <a:t>Anticipating it by one slide is deliberate. The rule for choosing between those rows is what they need in their heads while they run the notebook, not afterwards - left to themselves they quote whichever is biggest.</a:t>
+            </a:r>
+          </a:p>
+          <a:p>
+            <a:pPr lvl="0" indent="0" marL="0">
+              <a:buNone/>
+            </a:pPr>
+          </a:p>
+          <a:p>
+            <a:pPr lvl="0" indent="0" marL="0">
+              <a:buNone/>
+            </a:pPr>
+            <a:r>
+              <a:rPr/>
+              <a:t>The weighted average weights each class by how common it is, so on this problem it is essentially the healthy class talking, and it reads close to accuracy - inheriting exactly the blindness slides 24 to 27 were about.</a:t>
+            </a:r>
+          </a:p>
+          <a:p>
+            <a:pPr lvl="0" indent="0" marL="0">
+              <a:buNone/>
+            </a:pPr>
+          </a:p>
+          <a:p>
+            <a:pPr lvl="0" indent="0" marL="0">
+              <a:buNone/>
+            </a:pPr>
+            <a:r>
+              <a:rPr/>
+              <a:t>The macro average gives the two classes equal weight, so the rare class actually registers. 0.820 against 0.975 for the same model.</a:t>
+            </a:r>
+          </a:p>
+          <a:p>
+            <a:pPr lvl="0" indent="0" marL="0">
+              <a:buNone/>
+            </a:pPr>
+          </a:p>
+          <a:p>
+            <a:pPr lvl="0" indent="0" marL="0">
+              <a:buNone/>
+            </a:pPr>
+            <a:r>
+              <a:rPr/>
+              <a:t>The rule: on an imbalanced problem, quote the macro average or the minority class directly. Reporting the weighted average is not incorrect - it is the number that makes a mediocre model look finished, and choosing it without saying so is how a result gets oversold.</a:t>
             </a:r>
           </a:p>
         </p:txBody>
@@ -3433,35 +3434,35 @@
             </a:pPr>
             <a:r>
               <a:rPr/>
-              <a:t>The title of that figure is the point: nothing about the model changes along the x-axis. Same coefficients, same probabilities, same drives. All that moves is where we draw the line between “leave it” and “replace it”.</a:t>
-            </a:r>
-          </a:p>
-          <a:p>
-            <a:pPr lvl="0" indent="0" marL="0">
-              <a:buNone/>
-            </a:pPr>
-          </a:p>
-          <a:p>
-            <a:pPr lvl="0" indent="0" marL="0">
-              <a:buNone/>
-            </a:pPr>
-            <a:r>
-              <a:rPr/>
-              <a:t>That 0.5 is predict()’s default and nothing more. It is the right choice when the two errors cost the same AND the classes are balanced. Neither is true here, and neither is true in most real problems.</a:t>
-            </a:r>
-          </a:p>
-          <a:p>
-            <a:pPr lvl="0" indent="0" marL="0">
-              <a:buNone/>
-            </a:pPr>
-          </a:p>
-          <a:p>
-            <a:pPr lvl="0" indent="0" marL="0">
-              <a:buNone/>
-            </a:pPr>
-            <a:r>
-              <a:rPr/>
-              <a:t>So when a paper or a colleague reports 77% precision, the useful follow-up is: at what threshold, and why that one? Most of the time there is no answer, because nobody chose it.</a:t>
+              <a:t>The confusion matrix by hand, then from scikit-learn, then the threshold sweep. Run notebook 02. Twenty minutes.</a:t>
+            </a:r>
+          </a:p>
+          <a:p>
+            <a:pPr lvl="0" indent="0" marL="0">
+              <a:buNone/>
+            </a:pPr>
+          </a:p>
+          <a:p>
+            <a:pPr lvl="0" indent="0" marL="0">
+              <a:buNone/>
+            </a:pPr>
+            <a:r>
+              <a:rPr/>
+              <a:t>Have them build the four counts by hand before calling confusion_matrix. It is four comparisons and it takes two minutes, and it is what makes the jargon stop being jargon.</a:t>
+            </a:r>
+          </a:p>
+          <a:p>
+            <a:pPr lvl="0" indent="0" marL="0">
+              <a:buNone/>
+            </a:pPr>
+          </a:p>
+          <a:p>
+            <a:pPr lvl="0" indent="0" marL="0">
+              <a:buNone/>
+            </a:pPr>
+            <a:r>
+              <a:rPr/>
+              <a:t>Spend time on the threshold sweep table. Do not explain it first - let them read the columns and say what they see. Somebody will notice that accuracy barely moves. That is the moment to make the next slide.</a:t>
             </a:r>
           </a:p>
         </p:txBody>
@@ -3543,49 +3544,35 @@
             </a:pPr>
             <a:r>
               <a:rPr/>
-              <a:t>Read it column by column with the room.</a:t>
-            </a:r>
-          </a:p>
-          <a:p>
-            <a:pPr lvl="0" indent="0" marL="0">
-              <a:buNone/>
-            </a:pPr>
-          </a:p>
-          <a:p>
-            <a:pPr lvl="0" indent="0" marL="0">
-              <a:buNone/>
-            </a:pPr>
-            <a:r>
-              <a:rPr/>
-              <a:t>Lower the threshold: recall rises, precision falls. At 0.02 we catch 69 of 76 failures and replace 284 healthy drives to do it. At 0.90 every alarm is justified and we catch fewer than a quarter.</a:t>
-            </a:r>
-          </a:p>
-          <a:p>
-            <a:pPr lvl="0" indent="0" marL="0">
-              <a:buNone/>
-            </a:pPr>
-          </a:p>
-          <a:p>
-            <a:pPr lvl="0" indent="0" marL="0">
-              <a:buNone/>
-            </a:pPr>
-            <a:r>
-              <a:rPr/>
-              <a:t>Now the accuracy column, which is the slide’s real argument. From 0.10 upwards it moves by three and a half percentage points, 0.942 to 0.977, while recall falls from 0.803 to 0.184. And its maximum is at 0.5 - the threshold that misses 33 of the 76 failures.</a:t>
-            </a:r>
-          </a:p>
-          <a:p>
-            <a:pPr lvl="0" indent="0" marL="0">
-              <a:buNone/>
-            </a:pPr>
-          </a:p>
-          <a:p>
-            <a:pPr lvl="0" indent="0" marL="0">
-              <a:buNone/>
-            </a:pPr>
-            <a:r>
-              <a:rPr/>
-              <a:t>Say the consequence plainly: tune on accuracy and it will quietly recommend catching fewer failures, because every alarm it drops was a possible false positive.</a:t>
+              <a:t>The title of that figure is the point: nothing about the model changes along the x-axis. Same coefficients, same probabilities, same drives. All that moves is where we draw the line between “leave it” and “replace it”.</a:t>
+            </a:r>
+          </a:p>
+          <a:p>
+            <a:pPr lvl="0" indent="0" marL="0">
+              <a:buNone/>
+            </a:pPr>
+          </a:p>
+          <a:p>
+            <a:pPr lvl="0" indent="0" marL="0">
+              <a:buNone/>
+            </a:pPr>
+            <a:r>
+              <a:rPr/>
+              <a:t>That 0.5 is predict()’s default and nothing more. It is the right choice when the two errors cost the same AND the classes are balanced. Neither is true here, and neither is true in most real problems.</a:t>
+            </a:r>
+          </a:p>
+          <a:p>
+            <a:pPr lvl="0" indent="0" marL="0">
+              <a:buNone/>
+            </a:pPr>
+          </a:p>
+          <a:p>
+            <a:pPr lvl="0" indent="0" marL="0">
+              <a:buNone/>
+            </a:pPr>
+            <a:r>
+              <a:rPr/>
+              <a:t>So when a paper or a colleague reports 77% precision, the useful follow-up is: at what threshold, and why that one? Most of the time there is no answer, because nobody chose it.</a:t>
             </a:r>
           </a:p>
         </p:txBody>
@@ -3667,49 +3654,49 @@
             </a:pPr>
             <a:r>
               <a:rPr/>
-              <a:t>The sweep traced a path through precision-recall space; this is that path drawn directly. Every threshold at once.</a:t>
-            </a:r>
-          </a:p>
-          <a:p>
-            <a:pPr lvl="0" indent="0" marL="0">
-              <a:buNone/>
-            </a:pPr>
-          </a:p>
-          <a:p>
-            <a:pPr lvl="0" indent="0" marL="0">
-              <a:buNone/>
-            </a:pPr>
-            <a:r>
-              <a:rPr/>
-              <a:t>The part to teach is the baseline. A model with random scores has precision equal to the positive rate - 0.038 here - at every recall. That flat dashed line, not 0.5, is what “no skill” looks like on an imbalanced problem.</a:t>
-            </a:r>
-          </a:p>
-          <a:p>
-            <a:pPr lvl="0" indent="0" marL="0">
-              <a:buNone/>
-            </a:pPr>
-          </a:p>
-          <a:p>
-            <a:pPr lvl="0" indent="0" marL="0">
-              <a:buNone/>
-            </a:pPr>
-            <a:r>
-              <a:rPr/>
-              <a:t>That is why this curve is so much more informative than accuracy when positives are rare: the floor is where the difficulty actually is. Our model’s area under it, the average precision, is 0.717 against a floor of 0.038.</a:t>
-            </a:r>
-          </a:p>
-          <a:p>
-            <a:pPr lvl="0" indent="0" marL="0">
-              <a:buNone/>
-            </a:pPr>
-          </a:p>
-          <a:p>
-            <a:pPr lvl="0" indent="0" marL="0">
-              <a:buNone/>
-            </a:pPr>
-            <a:r>
-              <a:rPr/>
-              <a:t>The three marked dots are thresholds 0.5, 0.3 and 0.05. The first two are rows of the table on the previous slide, so they can check the correspondence: at 0.5, recall 0.566 and precision 0.768.</a:t>
+              <a:t>Read it column by column with the room.</a:t>
+            </a:r>
+          </a:p>
+          <a:p>
+            <a:pPr lvl="0" indent="0" marL="0">
+              <a:buNone/>
+            </a:pPr>
+          </a:p>
+          <a:p>
+            <a:pPr lvl="0" indent="0" marL="0">
+              <a:buNone/>
+            </a:pPr>
+            <a:r>
+              <a:rPr/>
+              <a:t>Lower the threshold: recall rises, precision falls. At 0.02 we catch 69 of 76 failures and replace 284 healthy drives to do it. At 0.90 every alarm is justified and we catch fewer than a quarter.</a:t>
+            </a:r>
+          </a:p>
+          <a:p>
+            <a:pPr lvl="0" indent="0" marL="0">
+              <a:buNone/>
+            </a:pPr>
+          </a:p>
+          <a:p>
+            <a:pPr lvl="0" indent="0" marL="0">
+              <a:buNone/>
+            </a:pPr>
+            <a:r>
+              <a:rPr/>
+              <a:t>Now the accuracy column, which is the slide’s real argument. From 0.10 upwards it moves by three and a half percentage points, 0.942 to 0.977, while recall falls from 0.803 to 0.184. And its maximum is at 0.5 - the threshold that misses 33 of the 76 failures.</a:t>
+            </a:r>
+          </a:p>
+          <a:p>
+            <a:pPr lvl="0" indent="0" marL="0">
+              <a:buNone/>
+            </a:pPr>
+          </a:p>
+          <a:p>
+            <a:pPr lvl="0" indent="0" marL="0">
+              <a:buNone/>
+            </a:pPr>
+            <a:r>
+              <a:rPr/>
+              <a:t>Say the consequence plainly: tune on accuracy and it will quietly recommend catching fewer failures, because every alarm it drops was a possible false positive.</a:t>
             </a:r>
           </a:p>
         </p:txBody>
@@ -3791,35 +3778,49 @@
             </a:pPr>
             <a:r>
               <a:rPr/>
-              <a:t>Set up the next section as a question rather than announcing a tool.</a:t>
-            </a:r>
-          </a:p>
-          <a:p>
-            <a:pPr lvl="0" indent="0" marL="0">
-              <a:buNone/>
-            </a:pPr>
-          </a:p>
-          <a:p>
-            <a:pPr lvl="0" indent="0" marL="0">
-              <a:buNone/>
-            </a:pPr>
-            <a:r>
-              <a:rPr/>
-              <a:t>Everything so far has needed a threshold. That is fine when you know the costs, and we will come back to it. But often you want to compare two models before committing - is model A better than model B, at any operating point?</a:t>
-            </a:r>
-          </a:p>
-          <a:p>
-            <a:pPr lvl="0" indent="0" marL="0">
-              <a:buNone/>
-            </a:pPr>
-          </a:p>
-          <a:p>
-            <a:pPr lvl="0" indent="0" marL="0">
-              <a:buNone/>
-            </a:pPr>
-            <a:r>
-              <a:rPr/>
-              <a:t>The move is to stop asking “how many did it get right” and start asking “did it put the failures at the top of the list”. That is a question about ranking, and ranking has no threshold in it.</a:t>
+              <a:t>The sweep traced a path through precision-recall space; this is that path drawn directly. Every threshold at once.</a:t>
+            </a:r>
+          </a:p>
+          <a:p>
+            <a:pPr lvl="0" indent="0" marL="0">
+              <a:buNone/>
+            </a:pPr>
+          </a:p>
+          <a:p>
+            <a:pPr lvl="0" indent="0" marL="0">
+              <a:buNone/>
+            </a:pPr>
+            <a:r>
+              <a:rPr/>
+              <a:t>The part to teach is the baseline. A model with random scores has precision equal to the positive rate - 0.038 here - at every recall. That flat dashed line, not 0.5, is what “no skill” looks like on an imbalanced problem.</a:t>
+            </a:r>
+          </a:p>
+          <a:p>
+            <a:pPr lvl="0" indent="0" marL="0">
+              <a:buNone/>
+            </a:pPr>
+          </a:p>
+          <a:p>
+            <a:pPr lvl="0" indent="0" marL="0">
+              <a:buNone/>
+            </a:pPr>
+            <a:r>
+              <a:rPr/>
+              <a:t>That is why this curve is so much more informative than accuracy when positives are rare: the floor is where the difficulty actually is. Our model’s area under it, the average precision, is 0.717 against a floor of 0.038.</a:t>
+            </a:r>
+          </a:p>
+          <a:p>
+            <a:pPr lvl="0" indent="0" marL="0">
+              <a:buNone/>
+            </a:pPr>
+          </a:p>
+          <a:p>
+            <a:pPr lvl="0" indent="0" marL="0">
+              <a:buNone/>
+            </a:pPr>
+            <a:r>
+              <a:rPr/>
+              <a:t>The three marked dots are thresholds 0.5, 0.3 and 0.05. The first two are rows of the table on the previous slide, so they can check the correspondence: at 0.5, recall 0.566 and precision 0.768.</a:t>
             </a:r>
           </a:p>
         </p:txBody>
@@ -3901,49 +3902,35 @@
             </a:pPr>
             <a:r>
               <a:rPr/>
-              <a:t>Receiver operating characteristic - expand it, and say where the name comes from, because it makes the idea concrete. Wartime radar: operators tuning receivers to spot aircraft without chasing flocks of birds. Same problem shape, literally the same trade-off.</a:t>
-            </a:r>
-          </a:p>
-          <a:p>
-            <a:pPr lvl="0" indent="0" marL="0">
-              <a:buNone/>
-            </a:pPr>
-          </a:p>
-          <a:p>
-            <a:pPr lvl="0" indent="0" marL="0">
-              <a:buNone/>
-            </a:pPr>
-            <a:r>
-              <a:rPr/>
-              <a:t>The two axes: the true positive rate (TPR), which is recall under another name - the share of failures we catch. The false positive rate (FPR) - the share of healthy drives we condemn.</a:t>
-            </a:r>
-          </a:p>
-          <a:p>
-            <a:pPr lvl="0" indent="0" marL="0">
-              <a:buNone/>
-            </a:pPr>
-          </a:p>
-          <a:p>
-            <a:pPr lvl="0" indent="0" marL="0">
-              <a:buNone/>
-            </a:pPr>
-            <a:r>
-              <a:rPr/>
-              <a:t>The intuition worth saying slowly: at threshold 1 both are zero, flag nothing. At threshold 0 both are one. The entire content of the curve is the ORDER in which they get there. A good model raises TPR fast while FPR is still low, because its highest scores really are the failures. A useless model raises them together and traces the diagonal.</a:t>
-            </a:r>
-          </a:p>
-          <a:p>
-            <a:pPr lvl="0" indent="0" marL="0">
-              <a:buNone/>
-            </a:pPr>
-          </a:p>
-          <a:p>
-            <a:pPr lvl="0" indent="0" marL="0">
-              <a:buNone/>
-            </a:pPr>
-            <a:r>
-              <a:rPr/>
-              <a:t>So the curve asks: as we grow more willing to raise alarms, do we catch failures faster than we annoy technicians?</a:t>
+              <a:t>Set up the next section as a question rather than announcing a tool.</a:t>
+            </a:r>
+          </a:p>
+          <a:p>
+            <a:pPr lvl="0" indent="0" marL="0">
+              <a:buNone/>
+            </a:pPr>
+          </a:p>
+          <a:p>
+            <a:pPr lvl="0" indent="0" marL="0">
+              <a:buNone/>
+            </a:pPr>
+            <a:r>
+              <a:rPr/>
+              <a:t>Everything so far has needed a threshold. That is fine when you know the costs, and we will come back to it. But often you want to compare two models before committing - is model A better than model B, at any operating point?</a:t>
+            </a:r>
+          </a:p>
+          <a:p>
+            <a:pPr lvl="0" indent="0" marL="0">
+              <a:buNone/>
+            </a:pPr>
+          </a:p>
+          <a:p>
+            <a:pPr lvl="0" indent="0" marL="0">
+              <a:buNone/>
+            </a:pPr>
+            <a:r>
+              <a:rPr/>
+              <a:t>The move is to stop asking “how many did it get right” and start asking “did it put the failures at the top of the list”. That is a question about ranking, and ranking has no threshold in it.</a:t>
             </a:r>
           </a:p>
         </p:txBody>
@@ -4025,49 +4012,49 @@
             </a:pPr>
             <a:r>
               <a:rPr/>
-              <a:t>This is the definition to remember, and it is much more useful than “area under the curve”, which is a geometric fact rather than a meaning.</a:t>
-            </a:r>
-          </a:p>
-          <a:p>
-            <a:pPr lvl="0" indent="0" marL="0">
-              <a:buNone/>
-            </a:pPr>
-          </a:p>
-          <a:p>
-            <a:pPr lvl="0" indent="0" marL="0">
-              <a:buNone/>
-            </a:pPr>
-            <a:r>
-              <a:rPr/>
-              <a:t>Say it concretely: pick one drive that failed and one that did not, at random. 95 times out of 100 the model gave the failing one a higher score.</a:t>
-            </a:r>
-          </a:p>
-          <a:p>
-            <a:pPr lvl="0" indent="0" marL="0">
-              <a:buNone/>
-            </a:pPr>
-          </a:p>
-          <a:p>
-            <a:pPr lvl="0" indent="0" marL="0">
-              <a:buNone/>
-            </a:pPr>
-            <a:r>
-              <a:rPr/>
-              <a:t>That makes AUC a measure of RANKING quality. It is threshold-free because ranking is threshold-free.</a:t>
-            </a:r>
-          </a:p>
-          <a:p>
-            <a:pPr lvl="0" indent="0" marL="0">
-              <a:buNone/>
-            </a:pPr>
-          </a:p>
-          <a:p>
-            <a:pPr lvl="0" indent="0" marL="0">
-              <a:buNone/>
-            </a:pPr>
-            <a:r>
-              <a:rPr/>
-              <a:t>The identity with the Mann-Whitney U statistic is in the handout, section 8.2, for anyone who wants the proof. But notebook 3 does something better than a proof for this audience: it draws 200,000 random pairs and counts. 0.9488 against roc_auc_score’s 0.9493.</a:t>
+              <a:t>Receiver operating characteristic - expand it, and say where the name comes from, because it makes the idea concrete. Wartime radar: operators tuning receivers to spot aircraft without chasing flocks of birds. Same problem shape, literally the same trade-off.</a:t>
+            </a:r>
+          </a:p>
+          <a:p>
+            <a:pPr lvl="0" indent="0" marL="0">
+              <a:buNone/>
+            </a:pPr>
+          </a:p>
+          <a:p>
+            <a:pPr lvl="0" indent="0" marL="0">
+              <a:buNone/>
+            </a:pPr>
+            <a:r>
+              <a:rPr/>
+              <a:t>The two axes: the true positive rate (TPR), which is recall under another name - the share of failures we catch. The false positive rate (FPR) - the share of healthy drives we condemn.</a:t>
+            </a:r>
+          </a:p>
+          <a:p>
+            <a:pPr lvl="0" indent="0" marL="0">
+              <a:buNone/>
+            </a:pPr>
+          </a:p>
+          <a:p>
+            <a:pPr lvl="0" indent="0" marL="0">
+              <a:buNone/>
+            </a:pPr>
+            <a:r>
+              <a:rPr/>
+              <a:t>The intuition worth saying slowly: at threshold 1 both are zero, flag nothing. At threshold 0 both are one. The entire content of the curve is the ORDER in which they get there. A good model raises TPR fast while FPR is still low, because its highest scores really are the failures. A useless model raises them together and traces the diagonal.</a:t>
+            </a:r>
+          </a:p>
+          <a:p>
+            <a:pPr lvl="0" indent="0" marL="0">
+              <a:buNone/>
+            </a:pPr>
+          </a:p>
+          <a:p>
+            <a:pPr lvl="0" indent="0" marL="0">
+              <a:buNone/>
+            </a:pPr>
+            <a:r>
+              <a:rPr/>
+              <a:t>So the curve asks: as we grow more willing to raise alarms, do we catch failures faster than we annoy technicians?</a:t>
             </a:r>
           </a:p>
         </p:txBody>
@@ -4149,49 +4136,49 @@
             </a:pPr>
             <a:r>
               <a:rPr/>
-              <a:t>Short slide, important consequence. AUC depends only on the ordering, so it is invariant under any monotone transformation of the scores.</a:t>
-            </a:r>
-          </a:p>
-          <a:p>
-            <a:pPr lvl="0" indent="0" marL="0">
-              <a:buNone/>
-            </a:pPr>
-          </a:p>
-          <a:p>
-            <a:pPr lvl="0" indent="0" marL="0">
-              <a:buNone/>
-            </a:pPr>
-            <a:r>
-              <a:rPr/>
-              <a:t>Divide all the probabilities by ten and the ranking is identical, so the AUC is identical - while the model is now badly calibrated and every threshold-based decision it makes is different.</a:t>
-            </a:r>
-          </a:p>
-          <a:p>
-            <a:pPr lvl="0" indent="0" marL="0">
-              <a:buNone/>
-            </a:pPr>
-          </a:p>
-          <a:p>
-            <a:pPr lvl="0" indent="0" marL="0">
-              <a:buNone/>
-            </a:pPr>
-            <a:r>
-              <a:rPr/>
-              <a:t>The consequence: AUC says nothing about whether “0.7” means anything. If you need the probabilities to be believable - because you are computing expected costs, as slide 42 does - AUC is not the check you want.</a:t>
-            </a:r>
-          </a:p>
-          <a:p>
-            <a:pPr lvl="0" indent="0" marL="0">
-              <a:buNone/>
-            </a:pPr>
-          </a:p>
-          <a:p>
-            <a:pPr lvl="0" indent="0" marL="0">
-              <a:buNone/>
-            </a:pPr>
-            <a:r>
-              <a:rPr/>
-              <a:t>Good place to mention that calibration - whether a predicted 0.7 really comes true 70% of the time - is a topic of its own, without going into it.</a:t>
+              <a:t>This is the definition to remember, and it is much more useful than “area under the curve”, which is a geometric fact rather than a meaning.</a:t>
+            </a:r>
+          </a:p>
+          <a:p>
+            <a:pPr lvl="0" indent="0" marL="0">
+              <a:buNone/>
+            </a:pPr>
+          </a:p>
+          <a:p>
+            <a:pPr lvl="0" indent="0" marL="0">
+              <a:buNone/>
+            </a:pPr>
+            <a:r>
+              <a:rPr/>
+              <a:t>Say it concretely: pick one drive that failed and one that did not, at random. 95 times out of 100 the model gave the failing one a higher score.</a:t>
+            </a:r>
+          </a:p>
+          <a:p>
+            <a:pPr lvl="0" indent="0" marL="0">
+              <a:buNone/>
+            </a:pPr>
+          </a:p>
+          <a:p>
+            <a:pPr lvl="0" indent="0" marL="0">
+              <a:buNone/>
+            </a:pPr>
+            <a:r>
+              <a:rPr/>
+              <a:t>That makes AUC a measure of RANKING quality. It is threshold-free because ranking is threshold-free.</a:t>
+            </a:r>
+          </a:p>
+          <a:p>
+            <a:pPr lvl="0" indent="0" marL="0">
+              <a:buNone/>
+            </a:pPr>
+          </a:p>
+          <a:p>
+            <a:pPr lvl="0" indent="0" marL="0">
+              <a:buNone/>
+            </a:pPr>
+            <a:r>
+              <a:rPr/>
+              <a:t>The identity with the Mann-Whitney U statistic is in the handout, section 8.2, for anyone who wants the proof. But notebook 3 does something better than a proof for this audience: it draws 200,000 random pairs and counts. 0.9488 against roc_auc_score’s 0.9493.</a:t>
             </a:r>
           </a:p>
         </p:txBody>
@@ -4273,49 +4260,49 @@
             </a:pPr>
             <a:r>
               <a:rPr/>
-              <a:t>Same model. Not retrained. We keep every healthy drive in a fleet of 60,000 and thin the FAILURES until they are 0.4% instead of 3.8% - the direction reality moves in fraud, disease, hardware failure.</a:t>
-            </a:r>
-          </a:p>
-          <a:p>
-            <a:pPr lvl="0" indent="0" marL="0">
-              <a:buNone/>
-            </a:pPr>
-          </a:p>
-          <a:p>
-            <a:pPr lvl="0" indent="0" marL="0">
-              <a:buNone/>
-            </a:pPr>
-            <a:r>
-              <a:rPr/>
-              <a:t>Left panel: the three ROC curves sit on top of each other. AUC 0.968, 0.965, 0.974. It reports an excellent model throughout, and at the rarest setting a marginally better one, which is sampling noise on 231 positives.</a:t>
-            </a:r>
-          </a:p>
-          <a:p>
-            <a:pPr lvl="0" indent="0" marL="0">
-              <a:buNone/>
-            </a:pPr>
-          </a:p>
-          <a:p>
-            <a:pPr lvl="0" indent="0" marL="0">
-              <a:buNone/>
-            </a:pPr>
-            <a:r>
-              <a:rPr/>
-              <a:t>Right panel: the precision-recall curves are in three different worlds. Average precision falls from 0.706 to 0.361, and precision at the same threshold falls from 0.79 to 0.26 - two alarms in three now false.</a:t>
-            </a:r>
-          </a:p>
-          <a:p>
-            <a:pPr lvl="0" indent="0" marL="0">
-              <a:buNone/>
-            </a:pPr>
-          </a:p>
-          <a:p>
-            <a:pPr lvl="0" indent="0" marL="0">
-              <a:buNone/>
-            </a:pPr>
-            <a:r>
-              <a:rPr/>
-              <a:t>Three curves on the left, one model, no problem. Three curves on the right, same model, a disaster. Let that sit for a second before explaining.</a:t>
+              <a:t>Short slide, important consequence. AUC depends only on the ordering, so it is invariant under any monotone transformation of the scores.</a:t>
+            </a:r>
+          </a:p>
+          <a:p>
+            <a:pPr lvl="0" indent="0" marL="0">
+              <a:buNone/>
+            </a:pPr>
+          </a:p>
+          <a:p>
+            <a:pPr lvl="0" indent="0" marL="0">
+              <a:buNone/>
+            </a:pPr>
+            <a:r>
+              <a:rPr/>
+              <a:t>Divide all the probabilities by ten and the ranking is identical, so the AUC is identical - while the model is now badly calibrated and every threshold-based decision it makes is different.</a:t>
+            </a:r>
+          </a:p>
+          <a:p>
+            <a:pPr lvl="0" indent="0" marL="0">
+              <a:buNone/>
+            </a:pPr>
+          </a:p>
+          <a:p>
+            <a:pPr lvl="0" indent="0" marL="0">
+              <a:buNone/>
+            </a:pPr>
+            <a:r>
+              <a:rPr/>
+              <a:t>The consequence: AUC says nothing about whether “0.7” means anything. If you need the probabilities to be believable - because you are computing expected costs, as slide 43 does - AUC is not the check you want.</a:t>
+            </a:r>
+          </a:p>
+          <a:p>
+            <a:pPr lvl="0" indent="0" marL="0">
+              <a:buNone/>
+            </a:pPr>
+          </a:p>
+          <a:p>
+            <a:pPr lvl="0" indent="0" marL="0">
+              <a:buNone/>
+            </a:pPr>
+            <a:r>
+              <a:rPr/>
+              <a:t>Good place to mention that calibration - whether a predicted 0.7 really comes true 70% of the time - is a topic of its own, without going into it.</a:t>
             </a:r>
           </a:p>
         </p:txBody>
@@ -4397,49 +4384,49 @@
             </a:pPr>
             <a:r>
               <a:rPr/>
-              <a:t>The explanation is entirely in the denominators, and it is worth writing on the board.</a:t>
-            </a:r>
-          </a:p>
-          <a:p>
-            <a:pPr lvl="0" indent="0" marL="0">
-              <a:buNone/>
-            </a:pPr>
-          </a:p>
-          <a:p>
-            <a:pPr lvl="0" indent="0" marL="0">
-              <a:buNone/>
-            </a:pPr>
-            <a:r>
-              <a:rPr/>
-              <a:t>A thousand false alarms among a hundred thousand healthy drives is a false positive rate of 0.01 - invisible on the ROC axis, a rounding error. The same thousand false alarms, set against the alarms actually raised, may be most of them.</a:t>
-            </a:r>
-          </a:p>
-          <a:p>
-            <a:pPr lvl="0" indent="0" marL="0">
-              <a:buNone/>
-            </a:pPr>
-          </a:p>
-          <a:p>
-            <a:pPr lvl="0" indent="0" marL="0">
-              <a:buNone/>
-            </a:pPr>
-            <a:r>
-              <a:rPr/>
-              <a:t>So ROC is measuring the false alarms against a population nobody experiences. The technician does not see the 99,000 drives left alone; they see the alarm queue.</a:t>
-            </a:r>
-          </a:p>
-          <a:p>
-            <a:pPr lvl="0" indent="0" marL="0">
-              <a:buNone/>
-            </a:pPr>
-          </a:p>
-          <a:p>
-            <a:pPr lvl="0" indent="0" marL="0">
-              <a:buNone/>
-            </a:pPr>
-            <a:r>
-              <a:rPr/>
-              <a:t>This is the second predictable mistake of the lesson, and again defend the instinct: AUC is threshold-free, comparable across models and datasets, bounded in a familiar range. Those are real virtues. It simply answers a question about ranking when the question was about the alarm queue.</a:t>
+              <a:t>Same model. Not retrained. We keep every healthy drive in a fleet of 60,000 and thin the FAILURES until they are 0.4% instead of 3.8% - the direction reality moves in fraud, disease, hardware failure.</a:t>
+            </a:r>
+          </a:p>
+          <a:p>
+            <a:pPr lvl="0" indent="0" marL="0">
+              <a:buNone/>
+            </a:pPr>
+          </a:p>
+          <a:p>
+            <a:pPr lvl="0" indent="0" marL="0">
+              <a:buNone/>
+            </a:pPr>
+            <a:r>
+              <a:rPr/>
+              <a:t>Left panel: the three ROC curves sit on top of each other. AUC 0.968, 0.965, 0.974. It reports an excellent model throughout, and at the rarest setting a marginally better one, which is sampling noise on 231 positives.</a:t>
+            </a:r>
+          </a:p>
+          <a:p>
+            <a:pPr lvl="0" indent="0" marL="0">
+              <a:buNone/>
+            </a:pPr>
+          </a:p>
+          <a:p>
+            <a:pPr lvl="0" indent="0" marL="0">
+              <a:buNone/>
+            </a:pPr>
+            <a:r>
+              <a:rPr/>
+              <a:t>Right panel: the precision-recall curves are in three different worlds. Average precision falls from 0.706 to 0.361, and precision at the same threshold falls from 0.79 to 0.26 - two alarms in three now false.</a:t>
+            </a:r>
+          </a:p>
+          <a:p>
+            <a:pPr lvl="0" indent="0" marL="0">
+              <a:buNone/>
+            </a:pPr>
+          </a:p>
+          <a:p>
+            <a:pPr lvl="0" indent="0" marL="0">
+              <a:buNone/>
+            </a:pPr>
+            <a:r>
+              <a:rPr/>
+              <a:t>Three curves on the left, one model, no problem. Three curves on the right, same model, a disaster. Let that sit for a second before explaining.</a:t>
             </a:r>
           </a:p>
         </p:txBody>
@@ -4631,21 +4618,49 @@
             </a:pPr>
             <a:r>
               <a:rPr/>
-              <a:t>Short and quotable, and this is the thing to have on the board when they write their exercise reports.</a:t>
-            </a:r>
-          </a:p>
-          <a:p>
-            <a:pPr lvl="0" indent="0" marL="0">
-              <a:buNone/>
-            </a:pPr>
-          </a:p>
-          <a:p>
-            <a:pPr lvl="0" indent="0" marL="0">
-              <a:buNone/>
-            </a:pPr>
-            <a:r>
-              <a:rPr/>
-              <a:t>If someone asks which single number to use when a single number is demanded: average precision, because its baseline moves with the problem. But push back on the premise - the reason to demand a single number is usually to avoid thinking, and this lesson is about the thinking.</a:t>
+              <a:t>The explanation is entirely in the denominators, and it is worth writing on the board.</a:t>
+            </a:r>
+          </a:p>
+          <a:p>
+            <a:pPr lvl="0" indent="0" marL="0">
+              <a:buNone/>
+            </a:pPr>
+          </a:p>
+          <a:p>
+            <a:pPr lvl="0" indent="0" marL="0">
+              <a:buNone/>
+            </a:pPr>
+            <a:r>
+              <a:rPr/>
+              <a:t>A thousand false alarms among a hundred thousand healthy drives is a false positive rate of 0.01 - invisible on the ROC axis, a rounding error. The same thousand false alarms, set against the alarms actually raised, may be most of them.</a:t>
+            </a:r>
+          </a:p>
+          <a:p>
+            <a:pPr lvl="0" indent="0" marL="0">
+              <a:buNone/>
+            </a:pPr>
+          </a:p>
+          <a:p>
+            <a:pPr lvl="0" indent="0" marL="0">
+              <a:buNone/>
+            </a:pPr>
+            <a:r>
+              <a:rPr/>
+              <a:t>So ROC is measuring the false alarms against a population nobody experiences. The technician does not see the 99,000 drives left alone; they see the alarm queue.</a:t>
+            </a:r>
+          </a:p>
+          <a:p>
+            <a:pPr lvl="0" indent="0" marL="0">
+              <a:buNone/>
+            </a:pPr>
+          </a:p>
+          <a:p>
+            <a:pPr lvl="0" indent="0" marL="0">
+              <a:buNone/>
+            </a:pPr>
+            <a:r>
+              <a:rPr/>
+              <a:t>This is the second predictable mistake of the lesson, and again defend the instinct: AUC is threshold-free, comparable across models and datasets, bounded in a familiar range. Those are real virtues. It simply answers a question about ranking when the question was about the alarm queue.</a:t>
             </a:r>
           </a:p>
         </p:txBody>
@@ -4727,49 +4742,21 @@
             </a:pPr>
             <a:r>
               <a:rPr/>
-              <a:t>Finally, the honest way to pick a threshold. It needs one ingredient no metric can supply: what the errors cost. We wrote those down on slide 26 - €140 for a needless replacement, €2,600 for a drive that dies in service.</a:t>
-            </a:r>
-          </a:p>
-          <a:p>
-            <a:pPr lvl="0" indent="0" marL="0">
-              <a:buNone/>
-            </a:pPr>
-          </a:p>
-          <a:p>
-            <a:pPr lvl="0" indent="0" marL="0">
-              <a:buNone/>
-            </a:pPr>
-            <a:r>
-              <a:rPr/>
-              <a:t>The curve is the total cost on the test set as the threshold moves. The default 0.5 costs €87,620. The cheapest, at 0.08, costs €45,540.</a:t>
-            </a:r>
-          </a:p>
-          <a:p>
-            <a:pPr lvl="0" indent="0" marL="0">
-              <a:buNone/>
-            </a:pPr>
-          </a:p>
-          <a:p>
-            <a:pPr lvl="0" indent="0" marL="0">
-              <a:buNone/>
-            </a:pPr>
-            <a:r>
-              <a:rPr/>
-              <a:t>Choosing the threshold on purpose HALVED the cost of the same model. No retraining, no new features, no better algorithm. One number, taken from the economics instead of from the library default.</a:t>
-            </a:r>
-          </a:p>
-          <a:p>
-            <a:pPr lvl="0" indent="0" marL="0">
-              <a:buNone/>
-            </a:pPr>
-          </a:p>
-          <a:p>
-            <a:pPr lvl="0" indent="0" marL="0">
-              <a:buNone/>
-            </a:pPr>
-            <a:r>
-              <a:rPr/>
-              <a:t>Note the flatness around the minimum, and say why it is good news: the exact threshold does not have to be right. Which is fortunate, because cost estimates never are.</a:t>
+              <a:t>Short and quotable, and this is the thing to have on the board when they write their exercise reports.</a:t>
+            </a:r>
+          </a:p>
+          <a:p>
+            <a:pPr lvl="0" indent="0" marL="0">
+              <a:buNone/>
+            </a:pPr>
+          </a:p>
+          <a:p>
+            <a:pPr lvl="0" indent="0" marL="0">
+              <a:buNone/>
+            </a:pPr>
+            <a:r>
+              <a:rPr/>
+              <a:t>If someone asks which single number to use when a single number is demanded: average precision, because its baseline moves with the problem. But push back on the premise - the reason to demand a single number is usually to avoid thinking, and this lesson is about the thinking.</a:t>
             </a:r>
           </a:p>
         </p:txBody>
@@ -4851,49 +4838,49 @@
             </a:pPr>
             <a:r>
               <a:rPr/>
-              <a:t>Derive it in one line on the board, because it is two steps and it lands: flag the drive if the expected cost of flagging is lower than the expected cost of not. Flagging costs C-FP if the drive was healthy, which happens with probability 1 minus p. Leaving it costs C-FN if it fails, probability p. Set one below the other and solve.</a:t>
-            </a:r>
-          </a:p>
-          <a:p>
-            <a:pPr lvl="0" indent="0" marL="0">
-              <a:buNone/>
-            </a:pPr>
-          </a:p>
-          <a:p>
-            <a:pPr lvl="0" indent="0" marL="0">
-              <a:buNone/>
-            </a:pPr>
-            <a:r>
-              <a:rPr/>
-              <a:t>Then read the formula rather than the number, which is the part worth remembering: the optimal threshold does not depend on the model, the dataset, or the class balance. Only on the RATIO of the two costs.</a:t>
-            </a:r>
-          </a:p>
-          <a:p>
-            <a:pPr lvl="0" indent="0" marL="0">
-              <a:buNone/>
-            </a:pPr>
-          </a:p>
-          <a:p>
-            <a:pPr lvl="0" indent="0" marL="0">
-              <a:buNone/>
-            </a:pPr>
-            <a:r>
-              <a:rPr/>
-              <a:t>If the errors cost the same, t-star is 0.5 and the default was right all along. As misses grow more expensive, it falls towards zero.</a:t>
-            </a:r>
-          </a:p>
-          <a:p>
-            <a:pPr lvl="0" indent="0" marL="0">
-              <a:buNone/>
-            </a:pPr>
-          </a:p>
-          <a:p>
-            <a:pPr lvl="0" indent="0" marL="0">
-              <a:buNone/>
-            </a:pPr>
-            <a:r>
-              <a:rPr/>
-              <a:t>Empirically we found 0.08 against a theoretical 0.051, and the curve is flat between them.</a:t>
+              <a:t>Finally, the honest way to pick a threshold. It needs one ingredient no metric can supply: what the errors cost. We wrote those down on slide 27 - €140 for a needless replacement, €2,600 for a drive that dies in service.</a:t>
+            </a:r>
+          </a:p>
+          <a:p>
+            <a:pPr lvl="0" indent="0" marL="0">
+              <a:buNone/>
+            </a:pPr>
+          </a:p>
+          <a:p>
+            <a:pPr lvl="0" indent="0" marL="0">
+              <a:buNone/>
+            </a:pPr>
+            <a:r>
+              <a:rPr/>
+              <a:t>The curve is the total cost on the test set as the threshold moves. The default 0.5 costs €87,620. The cheapest, at 0.08, costs €45,540.</a:t>
+            </a:r>
+          </a:p>
+          <a:p>
+            <a:pPr lvl="0" indent="0" marL="0">
+              <a:buNone/>
+            </a:pPr>
+          </a:p>
+          <a:p>
+            <a:pPr lvl="0" indent="0" marL="0">
+              <a:buNone/>
+            </a:pPr>
+            <a:r>
+              <a:rPr/>
+              <a:t>Choosing the threshold on purpose HALVED the cost of the same model. No retraining, no new features, no better algorithm. One number, taken from the economics instead of from the library default.</a:t>
+            </a:r>
+          </a:p>
+          <a:p>
+            <a:pPr lvl="0" indent="0" marL="0">
+              <a:buNone/>
+            </a:pPr>
+          </a:p>
+          <a:p>
+            <a:pPr lvl="0" indent="0" marL="0">
+              <a:buNone/>
+            </a:pPr>
+            <a:r>
+              <a:rPr/>
+              <a:t>Note the flatness around the minimum, and say why it is good news: the exact threshold does not have to be right. Which is fortunate, because cost estimates never are.</a:t>
             </a:r>
           </a:p>
         </p:txBody>
@@ -4975,49 +4962,49 @@
             </a:pPr>
             <a:r>
               <a:rPr/>
-              <a:t>Say this out loud rather than leaving it in the handout, because it is the same mistake you may have named at the start of today’s lesson, in the discussion of exercise 3.</a:t>
-            </a:r>
-          </a:p>
-          <a:p>
-            <a:pPr lvl="0" indent="0" marL="0">
-              <a:buNone/>
-            </a:pPr>
-          </a:p>
-          <a:p>
-            <a:pPr lvl="0" indent="0" marL="0">
-              <a:buNone/>
-            </a:pPr>
-            <a:r>
-              <a:rPr/>
-              <a:t>The threshold is a parameter. Choosing it by looking at the test set means the test set has influenced the model, and the number it then reports is optimistic.</a:t>
-            </a:r>
-          </a:p>
-          <a:p>
-            <a:pPr lvl="0" indent="0" marL="0">
-              <a:buNone/>
-            </a:pPr>
-          </a:p>
-          <a:p>
-            <a:pPr lvl="0" indent="0" marL="0">
-              <a:buNone/>
-            </a:pPr>
-            <a:r>
-              <a:rPr/>
-              <a:t>Done properly: choose the threshold on a validation set, then measure once on test. Lesson 5 builds exactly that machinery, and this is the concrete reason it is needed - not a hygiene rule, a thing that changes the number you report.</a:t>
-            </a:r>
-          </a:p>
-          <a:p>
-            <a:pPr lvl="0" indent="0" marL="0">
-              <a:buNone/>
-            </a:pPr>
-          </a:p>
-          <a:p>
-            <a:pPr lvl="0" indent="0" marL="0">
-              <a:buNone/>
-            </a:pPr>
-            <a:r>
-              <a:rPr/>
-              <a:t>Until then, treat the 0.08 as a demonstration of a method, not a result anyone could publish.</a:t>
+              <a:t>Derive it in one line on the board, because it is two steps and it lands: flag the drive if the expected cost of flagging is lower than the expected cost of not. Flagging costs C-FP if the drive was healthy, which happens with probability 1 minus p. Leaving it costs C-FN if it fails, probability p. Set one below the other and solve.</a:t>
+            </a:r>
+          </a:p>
+          <a:p>
+            <a:pPr lvl="0" indent="0" marL="0">
+              <a:buNone/>
+            </a:pPr>
+          </a:p>
+          <a:p>
+            <a:pPr lvl="0" indent="0" marL="0">
+              <a:buNone/>
+            </a:pPr>
+            <a:r>
+              <a:rPr/>
+              <a:t>Then read the formula rather than the number, which is the part worth remembering: the optimal threshold does not depend on the model, the dataset, or the class balance. Only on the RATIO of the two costs.</a:t>
+            </a:r>
+          </a:p>
+          <a:p>
+            <a:pPr lvl="0" indent="0" marL="0">
+              <a:buNone/>
+            </a:pPr>
+          </a:p>
+          <a:p>
+            <a:pPr lvl="0" indent="0" marL="0">
+              <a:buNone/>
+            </a:pPr>
+            <a:r>
+              <a:rPr/>
+              <a:t>If the errors cost the same, t-star is 0.5 and the default was right all along. As misses grow more expensive, it falls towards zero.</a:t>
+            </a:r>
+          </a:p>
+          <a:p>
+            <a:pPr lvl="0" indent="0" marL="0">
+              <a:buNone/>
+            </a:pPr>
+          </a:p>
+          <a:p>
+            <a:pPr lvl="0" indent="0" marL="0">
+              <a:buNone/>
+            </a:pPr>
+            <a:r>
+              <a:rPr/>
+              <a:t>Empirically we found 0.08 against a theoretical 0.051, and the curve is flat between them.</a:t>
             </a:r>
           </a:p>
         </p:txBody>
@@ -5099,63 +5086,49 @@
             </a:pPr>
             <a:r>
               <a:rPr/>
-              <a:t>class_weight=“balanced” makes each failed drive count, in the cost, as much as about 25 healthy ones - the ratio of healthy to failed drives in the training set. It changes the training rather than the decision.</a:t>
-            </a:r>
-          </a:p>
-          <a:p>
-            <a:pPr lvl="0" indent="0" marL="0">
-              <a:buNone/>
-            </a:pPr>
-          </a:p>
-          <a:p>
-            <a:pPr lvl="0" indent="0" marL="0">
-              <a:buNone/>
-            </a:pPr>
-            <a:r>
-              <a:rPr/>
-              <a:t>Point at the AUC column: 0.949 against 0.950. Reweighting taught the model essentially nothing new about disk failure. What it did was move where the model puts its 0.5 line - the same lever as the threshold, pulled at a different moment.</a:t>
-            </a:r>
-          </a:p>
-          <a:p>
-            <a:pPr lvl="0" indent="0" marL="0">
-              <a:buNone/>
-            </a:pPr>
-          </a:p>
-          <a:p>
-            <a:pPr lvl="0" indent="0" marL="0">
-              <a:buNone/>
-            </a:pPr>
-            <a:r>
-              <a:rPr/>
-              <a:t>That matters because class weighting is usually presented as a REMEDY for imbalance. It is not a remedy; it is another way of setting the same decision. The remedy, where one exists, is more positive examples.</a:t>
-            </a:r>
-          </a:p>
-          <a:p>
-            <a:pPr lvl="0" indent="0" marL="0">
-              <a:buNone/>
-            </a:pPr>
-          </a:p>
-          <a:p>
-            <a:pPr lvl="0" indent="0" marL="0">
-              <a:buNone/>
-            </a:pPr>
-            <a:r>
-              <a:rPr/>
-              <a:t>Where it earns its place: when a downstream tool insists on predict() and gives you no threshold to move. Then this is how you shift the operating point.</a:t>
-            </a:r>
-          </a:p>
-          <a:p>
-            <a:pPr lvl="0" indent="0" marL="0">
-              <a:buNone/>
-            </a:pPr>
-          </a:p>
-          <a:p>
-            <a:pPr lvl="0" indent="0" marL="0">
-              <a:buNone/>
-            </a:pPr>
-            <a:r>
-              <a:rPr/>
-              <a:t>The same reading holds for resampling and for SMOTE (synthetic minority oversampling technique, which builds artificial minority examples): they move the operating point too. And both must be applied to the training rows only - inside each cross-validation fold, once lesson 5 introduces folds - for the reasons lesson 2 gave about imputation.</a:t>
+              <a:t>Say this out loud rather than leaving it in the handout, because it is the same mistake you may have named at the start of today’s lesson, in the discussion of exercise 3.</a:t>
+            </a:r>
+          </a:p>
+          <a:p>
+            <a:pPr lvl="0" indent="0" marL="0">
+              <a:buNone/>
+            </a:pPr>
+          </a:p>
+          <a:p>
+            <a:pPr lvl="0" indent="0" marL="0">
+              <a:buNone/>
+            </a:pPr>
+            <a:r>
+              <a:rPr/>
+              <a:t>The threshold is a parameter. Choosing it by looking at the test set means the test set has influenced the model, and the number it then reports is optimistic.</a:t>
+            </a:r>
+          </a:p>
+          <a:p>
+            <a:pPr lvl="0" indent="0" marL="0">
+              <a:buNone/>
+            </a:pPr>
+          </a:p>
+          <a:p>
+            <a:pPr lvl="0" indent="0" marL="0">
+              <a:buNone/>
+            </a:pPr>
+            <a:r>
+              <a:rPr/>
+              <a:t>Done properly: choose the threshold on a validation set, then measure once on test. Lesson 5 builds exactly that machinery, and this is the concrete reason it is needed - not a hygiene rule, a thing that changes the number you report.</a:t>
+            </a:r>
+          </a:p>
+          <a:p>
+            <a:pPr lvl="0" indent="0" marL="0">
+              <a:buNone/>
+            </a:pPr>
+          </a:p>
+          <a:p>
+            <a:pPr lvl="0" indent="0" marL="0">
+              <a:buNone/>
+            </a:pPr>
+            <a:r>
+              <a:rPr/>
+              <a:t>Until then, treat the 0.08 as a demonstration of a method, not a result anyone could publish.</a:t>
             </a:r>
           </a:p>
         </p:txBody>
@@ -5237,21 +5210,63 @@
             </a:pPr>
             <a:r>
               <a:rPr/>
-              <a:t>The ROC curve by hand, the 200,000-pair experiment, the cost curve, then the multiclass matrix. Run notebook 03. Fifteen minutes, and the two multiclass slides that follow (46 and 47) are shown when the notebook reaches its last section, so they run alongside it rather than after it.</a:t>
-            </a:r>
-          </a:p>
-          <a:p>
-            <a:pPr lvl="0" indent="0" marL="0">
-              <a:buNone/>
-            </a:pPr>
-          </a:p>
-          <a:p>
-            <a:pPr lvl="0" indent="0" marL="0">
-              <a:buNone/>
-            </a:pPr>
-            <a:r>
-              <a:rPr/>
-              <a:t>If time is short, keep the pairs experiment: it turns a definition they would otherwise memorise into something they watched happen.</a:t>
+              <a:t>class_weight=“balanced” makes each failed drive count, in the cost, as much as about 25 healthy ones - the ratio of healthy to failed drives in the training set. It changes the training rather than the decision.</a:t>
+            </a:r>
+          </a:p>
+          <a:p>
+            <a:pPr lvl="0" indent="0" marL="0">
+              <a:buNone/>
+            </a:pPr>
+          </a:p>
+          <a:p>
+            <a:pPr lvl="0" indent="0" marL="0">
+              <a:buNone/>
+            </a:pPr>
+            <a:r>
+              <a:rPr/>
+              <a:t>Point at the AUC column: 0.949 against 0.950. Reweighting taught the model essentially nothing new about disk failure. What it did was move where the model puts its 0.5 line - the same lever as the threshold, pulled at a different moment.</a:t>
+            </a:r>
+          </a:p>
+          <a:p>
+            <a:pPr lvl="0" indent="0" marL="0">
+              <a:buNone/>
+            </a:pPr>
+          </a:p>
+          <a:p>
+            <a:pPr lvl="0" indent="0" marL="0">
+              <a:buNone/>
+            </a:pPr>
+            <a:r>
+              <a:rPr/>
+              <a:t>That matters because class weighting is usually presented as a REMEDY for imbalance. It is not a remedy; it is another way of setting the same decision. The remedy, where one exists, is more positive examples.</a:t>
+            </a:r>
+          </a:p>
+          <a:p>
+            <a:pPr lvl="0" indent="0" marL="0">
+              <a:buNone/>
+            </a:pPr>
+          </a:p>
+          <a:p>
+            <a:pPr lvl="0" indent="0" marL="0">
+              <a:buNone/>
+            </a:pPr>
+            <a:r>
+              <a:rPr/>
+              <a:t>Where it earns its place: when a downstream tool insists on predict() and gives you no threshold to move. Then this is how you shift the operating point.</a:t>
+            </a:r>
+          </a:p>
+          <a:p>
+            <a:pPr lvl="0" indent="0" marL="0">
+              <a:buNone/>
+            </a:pPr>
+          </a:p>
+          <a:p>
+            <a:pPr lvl="0" indent="0" marL="0">
+              <a:buNone/>
+            </a:pPr>
+            <a:r>
+              <a:rPr/>
+              <a:t>The same reading holds for resampling and for SMOTE (synthetic minority oversampling technique, which builds artificial minority examples): they move the operating point too. And both must be applied to the training rows only - inside each cross-validation fold, once lesson 5 introduces folds - for the reasons lesson 2 gave about imputation.</a:t>
             </a:r>
           </a:p>
         </p:txBody>
@@ -5333,49 +5348,21 @@
             </a:pPr>
             <a:r>
               <a:rPr/>
-              <a:t>Real fleets are not healthy-or-dead. A drive can be degraded: readable, but reporting errors, and worth replacing at the next maintenance window rather than at three in the morning.</a:t>
-            </a:r>
-          </a:p>
-          <a:p>
-            <a:pPr lvl="0" indent="0" marL="0">
-              <a:buNone/>
-            </a:pPr>
-          </a:p>
-          <a:p>
-            <a:pPr lvl="0" indent="0" marL="0">
-              <a:buNone/>
-            </a:pPr>
-            <a:r>
-              <a:rPr/>
-              <a:t>For K classes the model produces one score per class and turns them into K probabilities that add up to 1 - the softmax, which for two classes reduces exactly to the sigmoid. The cost generalises to categorical cross-entropy, and it is the same idea: the negative log of the probability assigned to what actually happened. Handout section 10.</a:t>
-            </a:r>
-          </a:p>
-          <a:p>
-            <a:pPr lvl="0" indent="0" marL="0">
-              <a:buNone/>
-            </a:pPr>
-          </a:p>
-          <a:p>
-            <a:pPr lvl="0" indent="0" marL="0">
-              <a:buNone/>
-            </a:pPr>
-            <a:r>
-              <a:rPr/>
-              <a:t>Read the off-diagonal cells rather than the accuracy. Degraded is the hard class, and understandably - it sits between two neighbours that both look like it from a distance.</a:t>
-            </a:r>
-          </a:p>
-          <a:p>
-            <a:pPr lvl="0" indent="0" marL="0">
-              <a:buNone/>
-            </a:pPr>
-          </a:p>
-          <a:p>
-            <a:pPr lvl="0" indent="0" marL="0">
-              <a:buNone/>
-            </a:pPr>
-            <a:r>
-              <a:rPr/>
-              <a:t>Precision and recall are computed one class at a time: each class in turn is the positive one, the rest are negative.</a:t>
+              <a:t>The ROC curve by hand, the 200,000-pair experiment, the cost curve, then the multiclass matrix. Run notebook 03. Fifteen minutes, and the two multiclass slides that follow (46 and 47) are shown when the notebook reaches its last section, so they run alongside it rather than after it.</a:t>
+            </a:r>
+          </a:p>
+          <a:p>
+            <a:pPr lvl="0" indent="0" marL="0">
+              <a:buNone/>
+            </a:pPr>
+          </a:p>
+          <a:p>
+            <a:pPr lvl="0" indent="0" marL="0">
+              <a:buNone/>
+            </a:pPr>
+            <a:r>
+              <a:rPr/>
+              <a:t>If time is short, keep the pairs experiment: it turns a definition they would otherwise memorise into something they watched happen.</a:t>
             </a:r>
           </a:p>
         </p:txBody>
@@ -5457,35 +5444,49 @@
             </a:pPr>
             <a:r>
               <a:rPr/>
-              <a:t>The same choice as before, now with a much starker gap on three classes.</a:t>
-            </a:r>
-          </a:p>
-          <a:p>
-            <a:pPr lvl="0" indent="0" marL="0">
-              <a:buNone/>
-            </a:pPr>
-          </a:p>
-          <a:p>
-            <a:pPr lvl="0" indent="0" marL="0">
-              <a:buNone/>
-            </a:pPr>
-            <a:r>
-              <a:rPr/>
-              <a:t>Macro treats the three conditions as equally important. Weighted lets the healthy class - five drives in six - do most of the talking.</a:t>
-            </a:r>
-          </a:p>
-          <a:p>
-            <a:pPr lvl="0" indent="0" marL="0">
-              <a:buNone/>
-            </a:pPr>
-          </a:p>
-          <a:p>
-            <a:pPr lvl="0" indent="0" marL="0">
-              <a:buNone/>
-            </a:pPr>
-            <a:r>
-              <a:rPr/>
-              <a:t>Which to quote is a question about the application, not about statistics. If missing a failure matters as much as missing a healthy drive, macro is the honest one. Say which you used, always.</a:t>
+              <a:t>Real fleets are not healthy-or-dead. A drive can be degraded: readable, but reporting errors, and worth replacing at the next maintenance window rather than at three in the morning.</a:t>
+            </a:r>
+          </a:p>
+          <a:p>
+            <a:pPr lvl="0" indent="0" marL="0">
+              <a:buNone/>
+            </a:pPr>
+          </a:p>
+          <a:p>
+            <a:pPr lvl="0" indent="0" marL="0">
+              <a:buNone/>
+            </a:pPr>
+            <a:r>
+              <a:rPr/>
+              <a:t>For K classes the model produces one score per class and turns them into K probabilities that add up to 1 - the softmax, which for two classes reduces exactly to the sigmoid. The cost generalises to categorical cross-entropy, and it is the same idea: the negative log of the probability assigned to what actually happened. Handout section 10.</a:t>
+            </a:r>
+          </a:p>
+          <a:p>
+            <a:pPr lvl="0" indent="0" marL="0">
+              <a:buNone/>
+            </a:pPr>
+          </a:p>
+          <a:p>
+            <a:pPr lvl="0" indent="0" marL="0">
+              <a:buNone/>
+            </a:pPr>
+            <a:r>
+              <a:rPr/>
+              <a:t>Read the off-diagonal cells rather than the accuracy. Degraded is the hard class, and understandably - it sits between two neighbours that both look like it from a distance.</a:t>
+            </a:r>
+          </a:p>
+          <a:p>
+            <a:pPr lvl="0" indent="0" marL="0">
+              <a:buNone/>
+            </a:pPr>
+          </a:p>
+          <a:p>
+            <a:pPr lvl="0" indent="0" marL="0">
+              <a:buNone/>
+            </a:pPr>
+            <a:r>
+              <a:rPr/>
+              <a:t>Precision and recall are computed one class at a time: each class in turn is the positive one, the rest are negative.</a:t>
             </a:r>
           </a:p>
         </p:txBody>
@@ -5567,35 +5568,35 @@
             </a:pPr>
             <a:r>
               <a:rPr/>
-              <a:t>Close on the number they started with. 306 failures out of 8,000; 96.2% accuracy for a model that does nothing.</a:t>
-            </a:r>
-          </a:p>
-          <a:p>
-            <a:pPr lvl="0" indent="0" marL="0">
-              <a:buNone/>
-            </a:pPr>
-          </a:p>
-          <a:p>
-            <a:pPr lvl="0" indent="0" marL="0">
-              <a:buNone/>
-            </a:pPr>
-            <a:r>
-              <a:rPr/>
-              <a:t>If they remember one thing from today, it should be the reflex to ask “what’s the base rate?” before believing any accuracy figure. That reflex is worth more than any of the formulas.</a:t>
-            </a:r>
-          </a:p>
-          <a:p>
-            <a:pPr lvl="0" indent="0" marL="0">
-              <a:buNone/>
-            </a:pPr>
-          </a:p>
-          <a:p>
-            <a:pPr lvl="0" indent="0" marL="0">
-              <a:buNone/>
-            </a:pPr>
-            <a:r>
-              <a:rPr/>
-              <a:t>The second thing: every metric on the slide depended on a threshold, and the threshold has an answer - C-FP over C-FP plus C-FN - that comes from the business, not from the data.</a:t>
+              <a:t>The same choice as before, now with a much starker gap on three classes.</a:t>
+            </a:r>
+          </a:p>
+          <a:p>
+            <a:pPr lvl="0" indent="0" marL="0">
+              <a:buNone/>
+            </a:pPr>
+          </a:p>
+          <a:p>
+            <a:pPr lvl="0" indent="0" marL="0">
+              <a:buNone/>
+            </a:pPr>
+            <a:r>
+              <a:rPr/>
+              <a:t>Macro treats the three conditions as equally important. Weighted lets the healthy class - five drives in six - do most of the talking.</a:t>
+            </a:r>
+          </a:p>
+          <a:p>
+            <a:pPr lvl="0" indent="0" marL="0">
+              <a:buNone/>
+            </a:pPr>
+          </a:p>
+          <a:p>
+            <a:pPr lvl="0" indent="0" marL="0">
+              <a:buNone/>
+            </a:pPr>
+            <a:r>
+              <a:rPr/>
+              <a:t>Which to quote is a question about the application, not about statistics. If missing a failure matters as much as missing a healthy drive, macro is the honest one. Say which you used, always.</a:t>
             </a:r>
           </a:p>
         </p:txBody>
@@ -5677,49 +5678,35 @@
             </a:pPr>
             <a:r>
               <a:rPr/>
-              <a:t>Set it explicitly and say out loud when it comes back: the first ten minutes of next Friday, 30 October.</a:t>
-            </a:r>
-          </a:p>
-          <a:p>
-            <a:pPr lvl="0" indent="0" marL="0">
-              <a:buNone/>
-            </a:pPr>
-          </a:p>
-          <a:p>
-            <a:pPr lvl="0" indent="0" marL="0">
-              <a:buNone/>
-            </a:pPr>
-            <a:r>
-              <a:rPr/>
-              <a:t>Emphasise which part carries the marks. The classifier is a few lines and everyone will get it. The paragraph defending the threshold choice is where the learning is, and it is where the marks are.</a:t>
-            </a:r>
-          </a:p>
-          <a:p>
-            <a:pPr lvl="0" indent="0" marL="0">
-              <a:buNone/>
-            </a:pPr>
-          </a:p>
-          <a:p>
-            <a:pPr lvl="0" indent="0" marL="0">
-              <a:buNone/>
-            </a:pPr>
-            <a:r>
-              <a:rPr/>
-              <a:t>Warn them about the trap deliberately planted: the dataset has a decoy column, as this one did, and the exercise asks them to report AUC and average precision together. Anyone reporting AUC alone will be reporting a number that looks better than the model is.</a:t>
-            </a:r>
-          </a:p>
-          <a:p>
-            <a:pPr lvl="0" indent="0" marL="0">
-              <a:buNone/>
-            </a:pPr>
-          </a:p>
-          <a:p>
-            <a:pPr lvl="0" indent="0" marL="0">
-              <a:buNone/>
-            </a:pPr>
-            <a:r>
-              <a:rPr/>
-              <a:t>Next week: experimental methodology. Cross-validation, bias-variance, and the honest way to make every choice we made by hand today.</a:t>
+              <a:t>Close on the number they started with. 306 failures out of 8,000; 96.2% accuracy for a model that does nothing.</a:t>
+            </a:r>
+          </a:p>
+          <a:p>
+            <a:pPr lvl="0" indent="0" marL="0">
+              <a:buNone/>
+            </a:pPr>
+          </a:p>
+          <a:p>
+            <a:pPr lvl="0" indent="0" marL="0">
+              <a:buNone/>
+            </a:pPr>
+            <a:r>
+              <a:rPr/>
+              <a:t>If they remember one thing from today, it should be the reflex to ask “what’s the base rate?” before believing any accuracy figure. That reflex is worth more than any of the formulas.</a:t>
+            </a:r>
+          </a:p>
+          <a:p>
+            <a:pPr lvl="0" indent="0" marL="0">
+              <a:buNone/>
+            </a:pPr>
+          </a:p>
+          <a:p>
+            <a:pPr lvl="0" indent="0" marL="0">
+              <a:buNone/>
+            </a:pPr>
+            <a:r>
+              <a:rPr/>
+              <a:t>The second thing: every metric on the slide depended on a threshold, and the threshold has an answer - C-FP over C-FP plus C-FN - that comes from the business, not from the data.</a:t>
             </a:r>
           </a:p>
         </p:txBody>
@@ -5829,7 +5816,7 @@
             </a:pPr>
             <a:r>
               <a:rPr/>
-              <a:t>Somebody will say “healthy, every time”. Agree, and move on. Do not explain the consequence yet - it lands far harder on slide 23, after the break, when they see 96.2% printed as a model’s accuracy score.</a:t>
+              <a:t>Somebody will say “healthy, every time”. Agree, and move on. Do not explain the consequence yet - it lands far harder on slide 24, after the break, when they see 96.2% printed as a model’s accuracy score.</a:t>
             </a:r>
           </a:p>
         </p:txBody>
@@ -5852,6 +5839,130 @@
             <a:fld id="{18BDFEC3-8487-43E8-A154-7C12CBC1FFF2}" type="slidenum">
               <a:rPr lang="en-US"/>
               <a:t>6</a:t>
+            </a:fld>
+            <a:endParaRPr lang="en-US"/>
+          </a:p>
+        </p:txBody>
+      </p:sp>
+    </p:spTree>
+  </p:cSld>
+</p:notes>
+</file>
+
+<file path=ppt/notesSlides/notesSlide50.xml><?xml version="1.0" encoding="utf-8"?>
+<p:notes xmlns:a="http://schemas.openxmlformats.org/drawingml/2006/main" xmlns:r="http://schemas.openxmlformats.org/officeDocument/2006/relationships" xmlns:p="http://schemas.openxmlformats.org/presentationml/2006/main">
+  <p:cSld>
+    <p:spTree>
+      <p:nvGrpSpPr>
+        <p:cNvPr id="1" name=""/>
+        <p:cNvGrpSpPr/>
+        <p:nvPr/>
+      </p:nvGrpSpPr>
+      <p:grpSpPr>
+        <a:xfrm>
+          <a:off x="0" y="0"/>
+          <a:ext cx="0" cy="0"/>
+          <a:chOff x="0" y="0"/>
+          <a:chExt cx="0" cy="0"/>
+        </a:xfrm>
+      </p:grpSpPr>
+      <p:sp>
+        <p:nvSpPr>
+          <p:cNvPr id="2" name="Slide Image Placeholder 1"/>
+          <p:cNvSpPr>
+            <a:spLocks noGrp="1" noRot="1" noChangeAspect="1"/>
+          </p:cNvSpPr>
+          <p:nvPr>
+            <p:ph type="sldImg"/>
+          </p:nvPr>
+        </p:nvSpPr>
+        <p:spPr/>
+      </p:sp>
+      <p:sp>
+        <p:nvSpPr>
+          <p:cNvPr id="3" name="Notes Placeholder 2"/>
+          <p:cNvSpPr>
+            <a:spLocks noGrp="1"/>
+          </p:cNvSpPr>
+          <p:nvPr>
+            <p:ph type="body" idx="1"/>
+          </p:nvPr>
+        </p:nvSpPr>
+        <p:spPr/>
+        <p:txBody>
+          <a:bodyPr/>
+          <a:lstStyle/>
+          <a:p>
+            <a:pPr lvl="0" indent="0" marL="0">
+              <a:buNone/>
+            </a:pPr>
+            <a:r>
+              <a:rPr/>
+              <a:t>Set it explicitly and say out loud when it comes back: the first ten minutes of next Friday, 30 October.</a:t>
+            </a:r>
+          </a:p>
+          <a:p>
+            <a:pPr lvl="0" indent="0" marL="0">
+              <a:buNone/>
+            </a:pPr>
+          </a:p>
+          <a:p>
+            <a:pPr lvl="0" indent="0" marL="0">
+              <a:buNone/>
+            </a:pPr>
+            <a:r>
+              <a:rPr/>
+              <a:t>Emphasise which part carries the marks. The classifier is a few lines and everyone will get it. The paragraph defending the threshold choice is where the learning is, and it is where the marks are.</a:t>
+            </a:r>
+          </a:p>
+          <a:p>
+            <a:pPr lvl="0" indent="0" marL="0">
+              <a:buNone/>
+            </a:pPr>
+          </a:p>
+          <a:p>
+            <a:pPr lvl="0" indent="0" marL="0">
+              <a:buNone/>
+            </a:pPr>
+            <a:r>
+              <a:rPr/>
+              <a:t>Warn them about the trap deliberately planted: the dataset has a decoy column, as this one did, and the exercise asks them to report AUC and average precision together. Anyone reporting AUC alone will be reporting a number that looks better than the model is.</a:t>
+            </a:r>
+          </a:p>
+          <a:p>
+            <a:pPr lvl="0" indent="0" marL="0">
+              <a:buNone/>
+            </a:pPr>
+          </a:p>
+          <a:p>
+            <a:pPr lvl="0" indent="0" marL="0">
+              <a:buNone/>
+            </a:pPr>
+            <a:r>
+              <a:rPr/>
+              <a:t>Next week: experimental methodology. Cross-validation, bias-variance, and the honest way to make every choice we made by hand today.</a:t>
+            </a:r>
+          </a:p>
+        </p:txBody>
+      </p:sp>
+      <p:sp>
+        <p:nvSpPr>
+          <p:cNvPr id="4" name="Slide Number Placeholder 3"/>
+          <p:cNvSpPr>
+            <a:spLocks noGrp="1"/>
+          </p:cNvSpPr>
+          <p:nvPr>
+            <p:ph type="sldNum" sz="quarter" idx="10"/>
+          </p:nvPr>
+        </p:nvSpPr>
+        <p:spPr/>
+        <p:txBody>
+          <a:bodyPr/>
+          <a:lstStyle/>
+          <a:p>
+            <a:fld id="{18BDFEC3-8487-43E8-A154-7C12CBC1FFF2}" type="slidenum">
+              <a:rPr lang="en-US"/>
+              <a:t>51</a:t>
             </a:fld>
             <a:endParaRPr lang="en-US"/>
           </a:p>
@@ -6159,63 +6270,85 @@
             </a:pPr>
             <a:r>
               <a:rPr/>
-              <a:t>This is the step from the previous figure to the next slide, done on the board. p is shorthand for P(y = 1 | x), the probability from slide 4.</a:t>
-            </a:r>
-          </a:p>
-          <a:p>
-            <a:pPr lvl="0" indent="0" marL="0">
-              <a:buNone/>
-            </a:pPr>
-          </a:p>
-          <a:p>
-            <a:pPr lvl="0" indent="0" marL="0">
-              <a:buNone/>
-            </a:pPr>
-            <a:r>
-              <a:rPr/>
-              <a:t>The left-hand equation is the modelling decision. The log-odds runs over the whole real line - the right panel of the previous slide - so it is the one version of the probability a line can predict without ever leaving the range. So put the linear model of lesson 3 there, unchanged.</a:t>
-            </a:r>
-          </a:p>
-          <a:p>
-            <a:pPr lvl="0" indent="0" marL="0">
-              <a:buNone/>
-            </a:pPr>
-          </a:p>
-          <a:p>
-            <a:pPr lvl="0" indent="0" marL="0">
-              <a:buNone/>
-            </a:pPr>
-            <a:r>
-              <a:rPr/>
-              <a:t>The right-hand side is algebra, three lines. Write z for w-transpose-x plus b. Exponentiate both sides: p over 1 minus p equals e to the z. Multiply out and collect p: p times (1 plus e to the z) equals e to the z, so p is e to the z over 1 plus e to the z. Divide top and bottom by e to the z: p is 1 over 1 plus e to the minus z. That function has a name, and the next slide gives it.</a:t>
-            </a:r>
-          </a:p>
-          <a:p>
-            <a:pPr lvl="0" indent="0" marL="0">
-              <a:buNone/>
-            </a:pPr>
-          </a:p>
-          <a:p>
-            <a:pPr lvl="0" indent="0" marL="0">
-              <a:buNone/>
-            </a:pPr>
-            <a:r>
-              <a:rPr/>
-              <a:t>Check it with a number from the handout’s table in section 2.3: a log-odds of +2.20 gives back 1 over (1 plus e to the minus 2.2), which is 0.90. A log-odds of 0 gives back exactly a half.</a:t>
-            </a:r>
-          </a:p>
-          <a:p>
-            <a:pPr lvl="0" indent="0" marL="0">
-              <a:buNone/>
-            </a:pPr>
-          </a:p>
-          <a:p>
-            <a:pPr lvl="0" indent="0" marL="0">
-              <a:buNone/>
-            </a:pPr>
-            <a:r>
-              <a:rPr/>
-              <a:t>The handout runs the same algebra in the other direction, from the sigmoid to the log-odds, in section 2.3.</a:t>
+              <a:t>This slide puts in words what the right panel of slide 8 shows. Go through the two steps slowly; each removes one limit. Odds: a probability of 0.2 is odds of 0.25, and as the probability approaches 1 the odds run off to infinity - no ceiling. But odds are never negative, so there is still a floor at 0. The logarithm sends 0 to minus infinity, and the floor is gone too.</a:t>
+            </a:r>
+          </a:p>
+          <a:p>
+            <a:pPr lvl="0" indent="0" marL="0">
+              <a:buNone/>
+            </a:pPr>
+          </a:p>
+          <a:p>
+            <a:pPr lvl="0" indent="0" marL="0">
+              <a:buNone/>
+            </a:pPr>
+            <a:r>
+              <a:rPr/>
+              <a:t>Nothing is lost on the way: each probability has exactly one log-odds and back. The fourth bullet makes the stretch concrete - the scale is symmetric around a half, and the extremes are pushed outwards.</a:t>
+            </a:r>
+          </a:p>
+          <a:p>
+            <a:pPr lvl="0" indent="0" marL="0">
+              <a:buNone/>
+            </a:pPr>
+          </a:p>
+          <a:p>
+            <a:pPr lvl="0" indent="0" marL="0">
+              <a:buNone/>
+            </a:pPr>
+            <a:r>
+              <a:rPr/>
+              <a:t>The question a sharp student asks: why this function and not some other one that also maps (0, 1) onto the whole line? There are others; the probit, built on the inverse of the normal distribution, is the common one, and it gives almost the same S-shape. The log-odds wins on three counts, and the shape is not one of them:</a:t>
+            </a:r>
+          </a:p>
+          <a:p>
+            <a:pPr lvl="0" indent="0" marL="0">
+              <a:buNone/>
+            </a:pPr>
+          </a:p>
+          <a:p>
+            <a:pPr lvl="0"/>
+            <a:r>
+              <a:rPr/>
+              <a:t>the coefficients read as odds multipliers, which is slide 12;</a:t>
+            </a:r>
+          </a:p>
+          <a:p>
+            <a:pPr lvl="0" indent="0" marL="0">
+              <a:buNone/>
+            </a:pPr>
+          </a:p>
+          <a:p>
+            <a:pPr lvl="0"/>
+            <a:r>
+              <a:rPr/>
+              <a:t>it is the scale on which Bayes’ rule adds evidence - posterior log-odds is prior log-odds plus one term per independent piece of evidence - and a sum of terms is exactly what a linear model is;</a:t>
+            </a:r>
+          </a:p>
+          <a:p>
+            <a:pPr lvl="0" indent="0" marL="0">
+              <a:buNone/>
+            </a:pPr>
+          </a:p>
+          <a:p>
+            <a:pPr lvl="0"/>
+            <a:r>
+              <a:rPr/>
+              <a:t>with the cross-entropy cost of slide 17 the gradient comes out as (prediction minus label) times x, and the cost is convex - handout sections 3.4 and 4.3.</a:t>
+            </a:r>
+          </a:p>
+          <a:p>
+            <a:pPr lvl="0" indent="0" marL="0">
+              <a:buNone/>
+            </a:pPr>
+          </a:p>
+          <a:p>
+            <a:pPr lvl="0" indent="0" marL="0">
+              <a:buNone/>
+            </a:pPr>
+            <a:r>
+              <a:rPr/>
+              <a:t>The predictable mistake: students think the sigmoid was picked because it looks like the right S-shape. A reasonable reading, because the shape is what slide 8 shows first. But many curves have that shape; what singles this one out is the log-odds behind it. Handout section 2.3.</a:t>
             </a:r>
           </a:p>
         </p:txBody>
@@ -6297,35 +6430,63 @@
             </a:pPr>
             <a:r>
               <a:rPr/>
-              <a:t>Read it aloud as a sentence: take the linear model of lesson 3, and instead of calling its output a prediction, call it the log-odds and convert.</a:t>
-            </a:r>
-          </a:p>
-          <a:p>
-            <a:pPr lvl="0" indent="0" marL="0">
-              <a:buNone/>
-            </a:pPr>
-          </a:p>
-          <a:p>
-            <a:pPr lvl="0" indent="0" marL="0">
-              <a:buNone/>
-            </a:pPr>
-            <a:r>
-              <a:rPr/>
-              <a:t>Name the three properties we will use, without deriving them here - the handout section 2.2 does that: sigma of 0 is a half; sigma of minus z is 1 minus sigma of z; and the derivative is sigma times one minus sigma.</a:t>
-            </a:r>
-          </a:p>
-          <a:p>
-            <a:pPr lvl="0" indent="0" marL="0">
-              <a:buNone/>
-            </a:pPr>
-          </a:p>
-          <a:p>
-            <a:pPr lvl="0" indent="0" marL="0">
-              <a:buNone/>
-            </a:pPr>
-            <a:r>
-              <a:rPr/>
-              <a:t>That last one is the one to flag. It is largest in the middle, one quarter, and it decays to zero at both ends. On slide 18 that fact will be simultaneously the reason the sigmoid works and the reason squared error does not.</a:t>
+              <a:t>This is the step from the log-odds of slide 9 to the sigmoid of the next slide, done on the board. p is shorthand for P(y = 1 | x), the probability from slide 4.</a:t>
+            </a:r>
+          </a:p>
+          <a:p>
+            <a:pPr lvl="0" indent="0" marL="0">
+              <a:buNone/>
+            </a:pPr>
+          </a:p>
+          <a:p>
+            <a:pPr lvl="0" indent="0" marL="0">
+              <a:buNone/>
+            </a:pPr>
+            <a:r>
+              <a:rPr/>
+              <a:t>The left-hand equation is the modelling decision. The log-odds runs over the whole real line - the right panel of slide 8 - so it is the one version of the probability a line can predict without ever leaving the range. So put the linear model of lesson 3 there, unchanged.</a:t>
+            </a:r>
+          </a:p>
+          <a:p>
+            <a:pPr lvl="0" indent="0" marL="0">
+              <a:buNone/>
+            </a:pPr>
+          </a:p>
+          <a:p>
+            <a:pPr lvl="0" indent="0" marL="0">
+              <a:buNone/>
+            </a:pPr>
+            <a:r>
+              <a:rPr/>
+              <a:t>The right-hand side is algebra, three lines. Write z for w-transpose-x plus b. Exponentiate both sides: p over 1 minus p equals e to the z. Multiply out and collect p: p times (1 plus e to the z) equals e to the z, so p is e to the z over 1 plus e to the z. Divide top and bottom by e to the z: p is 1 over 1 plus e to the minus z. That function has a name, and the next slide gives it.</a:t>
+            </a:r>
+          </a:p>
+          <a:p>
+            <a:pPr lvl="0" indent="0" marL="0">
+              <a:buNone/>
+            </a:pPr>
+          </a:p>
+          <a:p>
+            <a:pPr lvl="0" indent="0" marL="0">
+              <a:buNone/>
+            </a:pPr>
+            <a:r>
+              <a:rPr/>
+              <a:t>Check it with a number from the handout’s table in section 2.3: a log-odds of +2.20 gives back 1 over (1 plus e to the minus 2.2), which is 0.90. A log-odds of 0 gives back exactly a half.</a:t>
+            </a:r>
+          </a:p>
+          <a:p>
+            <a:pPr lvl="0" indent="0" marL="0">
+              <a:buNone/>
+            </a:pPr>
+          </a:p>
+          <a:p>
+            <a:pPr lvl="0" indent="0" marL="0">
+              <a:buNone/>
+            </a:pPr>
+            <a:r>
+              <a:rPr/>
+              <a:t>The handout runs the same algebra in the other direction, from the sigmoid to the log-odds, in section 2.3.</a:t>
             </a:r>
           </a:p>
         </p:txBody>
@@ -9516,6 +9677,88 @@
             </a:pPr>
             <a:r>
               <a:rPr/>
+              <a:t>Log-odds of p = P(y = 1 | x): a line</a:t>
+            </a:r>
+          </a:p>
+        </p:txBody>
+      </p:sp>
+      <p:pic>
+        <p:nvPicPr>
+          <p:cNvPr descr="eq_2e0b8814eb.png" id="0" name="Picture 1"/>
+          <p:cNvPicPr>
+            <a:picLocks noGrp="1" noChangeAspect="1"/>
+          </p:cNvPicPr>
+          <p:nvPr/>
+        </p:nvPicPr>
+        <p:blipFill>
+          <a:blip r:embed="rId3"/>
+          <a:stretch>
+            <a:fillRect/>
+          </a:stretch>
+        </p:blipFill>
+        <p:spPr bwMode="auto">
+          <a:xfrm>
+            <a:off x="457200" y="2477889"/>
+            <a:ext cx="8229600" cy="736600"/>
+          </a:xfrm>
+          <a:prstGeom prst="rect">
+            <a:avLst/>
+          </a:prstGeom>
+          <a:noFill/>
+          <a:ln w="9525">
+            <a:noFill/>
+            <a:headEnd/>
+            <a:tailEnd/>
+          </a:ln>
+        </p:spPr>
+      </p:pic>
+    </p:spTree>
+  </p:cSld>
+</p:sld>
+</file>
+
+<file path=ppt/slides/slide11.xml><?xml version="1.0" encoding="utf-8"?>
+<p:sld xmlns:a="http://schemas.openxmlformats.org/drawingml/2006/main" xmlns:r="http://schemas.openxmlformats.org/officeDocument/2006/relationships" xmlns:p="http://schemas.openxmlformats.org/presentationml/2006/main">
+  <p:cSld>
+    <p:spTree>
+      <p:nvGrpSpPr>
+        <p:cNvPr id="1" name=""/>
+        <p:cNvGrpSpPr/>
+        <p:nvPr/>
+      </p:nvGrpSpPr>
+      <p:grpSpPr>
+        <a:xfrm>
+          <a:off x="0" y="0"/>
+          <a:ext cx="0" cy="0"/>
+          <a:chOff x="0" y="0"/>
+          <a:chExt cx="0" cy="0"/>
+        </a:xfrm>
+      </p:grpSpPr>
+      <p:sp>
+        <p:nvSpPr>
+          <p:cNvPr id="2" name="Title 1"/>
+          <p:cNvSpPr>
+            <a:spLocks noGrp="1"/>
+          </p:cNvSpPr>
+          <p:nvPr>
+            <p:ph type="title"/>
+          </p:nvPr>
+        </p:nvSpPr>
+        <p:spPr>
+          <a:xfrm>
+            <a:off x="457200" y="205979"/>
+            <a:ext cx="8229600" cy="857250"/>
+          </a:xfrm>
+        </p:spPr>
+        <p:txBody>
+          <a:bodyPr/>
+          <a:lstStyle/>
+          <a:p>
+            <a:pPr lvl="0" indent="0" marL="0">
+              <a:buNone/>
+            </a:pPr>
+            <a:r>
+              <a:rPr/>
               <a:t>The model, in one line</a:t>
             </a:r>
           </a:p>
@@ -9556,7 +9799,7 @@
 </p:sld>
 </file>
 
-<file path=ppt/slides/slide11.xml><?xml version="1.0" encoding="utf-8"?>
+<file path=ppt/slides/slide12.xml><?xml version="1.0" encoding="utf-8"?>
 <p:sld xmlns:a="http://schemas.openxmlformats.org/drawingml/2006/main" xmlns:r="http://schemas.openxmlformats.org/officeDocument/2006/relationships" xmlns:p="http://schemas.openxmlformats.org/presentationml/2006/main">
   <p:cSld>
     <p:spTree>
@@ -9689,7 +9932,7 @@
 </p:sld>
 </file>
 
-<file path=ppt/slides/slide12.xml><?xml version="1.0" encoding="utf-8"?>
+<file path=ppt/slides/slide13.xml><?xml version="1.0" encoding="utf-8"?>
 <p:sld xmlns:a="http://schemas.openxmlformats.org/drawingml/2006/main" xmlns:r="http://schemas.openxmlformats.org/officeDocument/2006/relationships" xmlns:p="http://schemas.openxmlformats.org/presentationml/2006/main">
   <p:cSld>
     <p:spTree>
@@ -10209,104 +10452,6 @@
 </p:sld>
 </file>
 
-<file path=ppt/slides/slide13.xml><?xml version="1.0" encoding="utf-8"?>
-<p:sld xmlns:a="http://schemas.openxmlformats.org/drawingml/2006/main" xmlns:r="http://schemas.openxmlformats.org/officeDocument/2006/relationships" xmlns:p="http://schemas.openxmlformats.org/presentationml/2006/main">
-  <p:cSld>
-    <p:spTree>
-      <p:nvGrpSpPr>
-        <p:cNvPr id="1" name=""/>
-        <p:cNvGrpSpPr/>
-        <p:nvPr/>
-      </p:nvGrpSpPr>
-      <p:grpSpPr>
-        <a:xfrm>
-          <a:off x="0" y="0"/>
-          <a:ext cx="0" cy="0"/>
-          <a:chOff x="0" y="0"/>
-          <a:chExt cx="0" cy="0"/>
-        </a:xfrm>
-      </p:grpSpPr>
-      <p:sp>
-        <p:nvSpPr>
-          <p:cNvPr id="2" name="Title 1"/>
-          <p:cNvSpPr>
-            <a:spLocks noGrp="1"/>
-          </p:cNvSpPr>
-          <p:nvPr>
-            <p:ph type="title"/>
-          </p:nvPr>
-        </p:nvSpPr>
-        <p:spPr>
-          <a:xfrm>
-            <a:off x="457200" y="205979"/>
-            <a:ext cx="8229600" cy="857250"/>
-          </a:xfrm>
-        </p:spPr>
-        <p:txBody>
-          <a:bodyPr/>
-          <a:lstStyle/>
-          <a:p>
-            <a:pPr lvl="0" indent="0" marL="0">
-              <a:buNone/>
-            </a:pPr>
-            <a:r>
-              <a:rPr/>
-              <a:t>The intercept is the average drive’s chance</a:t>
-            </a:r>
-          </a:p>
-        </p:txBody>
-      </p:sp>
-      <p:sp>
-        <p:nvSpPr>
-          <p:cNvPr id="3" name="Content Placeholder 2"/>
-          <p:cNvSpPr>
-            <a:spLocks noGrp="1"/>
-          </p:cNvSpPr>
-          <p:nvPr>
-            <p:ph idx="1"/>
-          </p:nvPr>
-        </p:nvSpPr>
-        <p:spPr>
-          <a:xfrm>
-            <a:off x="457200" y="1200151"/>
-            <a:ext cx="8229600" cy="3394472"/>
-          </a:xfrm>
-        </p:spPr>
-        <p:txBody>
-          <a:bodyPr/>
-          <a:lstStyle/>
-          <a:p>
-            <a:pPr lvl="0"/>
-            <a:r>
-              <a:rPr/>
-              <a:t>Fitted intercept: </a:t>
-            </a:r>
-            <a:r>
-              <a:rPr b="1"/>
-              <a:t>−6.09</a:t>
-            </a:r>
-          </a:p>
-          <a:p>
-            <a:pPr lvl="0"/>
-            <a:r>
-              <a:rPr/>
-              <a:t>σ(-6.09) = 0.0023: a 0.2% chance for a drive average on every counter</a:t>
-            </a:r>
-          </a:p>
-          <a:p>
-            <a:pPr lvl="0"/>
-            <a:r>
-              <a:rPr/>
-              <a:t>The fleet fails at 3.8%: the failures come from the few drives far above average</a:t>
-            </a:r>
-          </a:p>
-        </p:txBody>
-      </p:sp>
-    </p:spTree>
-  </p:cSld>
-</p:sld>
-</file>
-
 <file path=ppt/slides/slide14.xml><?xml version="1.0" encoding="utf-8"?>
 <p:sld xmlns:a="http://schemas.openxmlformats.org/drawingml/2006/main" xmlns:r="http://schemas.openxmlformats.org/officeDocument/2006/relationships" xmlns:p="http://schemas.openxmlformats.org/presentationml/2006/main">
   <p:cSld>
@@ -10349,7 +10494,7 @@
             </a:pPr>
             <a:r>
               <a:rPr/>
-              <a:t>Fitting means minimising something, but what?</a:t>
+              <a:t>The intercept is the average drive’s chance</a:t>
             </a:r>
           </a:p>
         </p:txBody>
@@ -10377,14 +10522,25 @@
             <a:pPr lvl="0"/>
             <a:r>
               <a:rPr/>
-              <a:t>Squared error worked for lesson 3</a:t>
+              <a:t>Fitted intercept: </a:t>
+            </a:r>
+            <a:r>
+              <a:rPr b="1"/>
+              <a:t>−6.09</a:t>
             </a:r>
           </a:p>
           <a:p>
             <a:pPr lvl="0"/>
             <a:r>
               <a:rPr/>
-              <a:t>Why not just apply it to the sigmoid’s output?</a:t>
+              <a:t>σ(-6.09) = 0.0023: a 0.2% chance for a drive average on every counter</a:t>
+            </a:r>
+          </a:p>
+          <a:p>
+            <a:pPr lvl="0"/>
+            <a:r>
+              <a:rPr/>
+              <a:t>The fleet fails at 3.8%: the failures come from the few drives far above average</a:t>
             </a:r>
           </a:p>
         </p:txBody>
@@ -10436,7 +10592,7 @@
             </a:pPr>
             <a:r>
               <a:rPr/>
-              <a:t>Maximum likelihood, in one sentence</a:t>
+              <a:t>Fitting means minimising something, but what?</a:t>
             </a:r>
           </a:p>
         </p:txBody>
@@ -10464,14 +10620,14 @@
             <a:pPr lvl="0"/>
             <a:r>
               <a:rPr/>
-              <a:t>The parameters w and b are a knob: each setting gives a probability to what actually happened</a:t>
+              <a:t>Squared error worked for lesson 3</a:t>
             </a:r>
           </a:p>
           <a:p>
             <a:pPr lvl="0"/>
             <a:r>
-              <a:rPr b="1"/>
-              <a:t>Turn the knob so that what actually happened is least surprising</a:t>
+              <a:rPr/>
+              <a:t>Why not just apply it to the sigmoid’s output?</a:t>
             </a:r>
           </a:p>
         </p:txBody>
@@ -10482,6 +10638,93 @@
 </file>
 
 <file path=ppt/slides/slide16.xml><?xml version="1.0" encoding="utf-8"?>
+<p:sld xmlns:a="http://schemas.openxmlformats.org/drawingml/2006/main" xmlns:r="http://schemas.openxmlformats.org/officeDocument/2006/relationships" xmlns:p="http://schemas.openxmlformats.org/presentationml/2006/main">
+  <p:cSld>
+    <p:spTree>
+      <p:nvGrpSpPr>
+        <p:cNvPr id="1" name=""/>
+        <p:cNvGrpSpPr/>
+        <p:nvPr/>
+      </p:nvGrpSpPr>
+      <p:grpSpPr>
+        <a:xfrm>
+          <a:off x="0" y="0"/>
+          <a:ext cx="0" cy="0"/>
+          <a:chOff x="0" y="0"/>
+          <a:chExt cx="0" cy="0"/>
+        </a:xfrm>
+      </p:grpSpPr>
+      <p:sp>
+        <p:nvSpPr>
+          <p:cNvPr id="2" name="Title 1"/>
+          <p:cNvSpPr>
+            <a:spLocks noGrp="1"/>
+          </p:cNvSpPr>
+          <p:nvPr>
+            <p:ph type="title"/>
+          </p:nvPr>
+        </p:nvSpPr>
+        <p:spPr>
+          <a:xfrm>
+            <a:off x="457200" y="205979"/>
+            <a:ext cx="8229600" cy="857250"/>
+          </a:xfrm>
+        </p:spPr>
+        <p:txBody>
+          <a:bodyPr/>
+          <a:lstStyle/>
+          <a:p>
+            <a:pPr lvl="0" indent="0" marL="0">
+              <a:buNone/>
+            </a:pPr>
+            <a:r>
+              <a:rPr/>
+              <a:t>Maximum likelihood, in one sentence</a:t>
+            </a:r>
+          </a:p>
+        </p:txBody>
+      </p:sp>
+      <p:sp>
+        <p:nvSpPr>
+          <p:cNvPr id="3" name="Content Placeholder 2"/>
+          <p:cNvSpPr>
+            <a:spLocks noGrp="1"/>
+          </p:cNvSpPr>
+          <p:nvPr>
+            <p:ph idx="1"/>
+          </p:nvPr>
+        </p:nvSpPr>
+        <p:spPr>
+          <a:xfrm>
+            <a:off x="457200" y="1200151"/>
+            <a:ext cx="8229600" cy="3394472"/>
+          </a:xfrm>
+        </p:spPr>
+        <p:txBody>
+          <a:bodyPr/>
+          <a:lstStyle/>
+          <a:p>
+            <a:pPr lvl="0"/>
+            <a:r>
+              <a:rPr/>
+              <a:t>The parameters w and b are a knob: each setting gives a probability to what actually happened</a:t>
+            </a:r>
+          </a:p>
+          <a:p>
+            <a:pPr lvl="0"/>
+            <a:r>
+              <a:rPr b="1"/>
+              <a:t>Turn the knob so that what actually happened is least surprising</a:t>
+            </a:r>
+          </a:p>
+        </p:txBody>
+      </p:sp>
+    </p:spTree>
+  </p:cSld>
+</p:sld>
+</file>
+
+<file path=ppt/slides/slide17.xml><?xml version="1.0" encoding="utf-8"?>
 <p:sld xmlns:a="http://schemas.openxmlformats.org/drawingml/2006/main" xmlns:r="http://schemas.openxmlformats.org/officeDocument/2006/relationships" xmlns:p="http://schemas.openxmlformats.org/presentationml/2006/main">
   <p:cSld>
     <p:spTree>
@@ -10563,7 +10806,7 @@
 </p:sld>
 </file>
 
-<file path=ppt/slides/slide17.xml><?xml version="1.0" encoding="utf-8"?>
+<file path=ppt/slides/slide18.xml><?xml version="1.0" encoding="utf-8"?>
 <p:sld xmlns:a="http://schemas.openxmlformats.org/drawingml/2006/main" xmlns:r="http://schemas.openxmlformats.org/officeDocument/2006/relationships" xmlns:p="http://schemas.openxmlformats.org/presentationml/2006/main">
   <p:cSld>
     <p:spTree>
@@ -10645,7 +10888,7 @@
 </p:sld>
 </file>
 
-<file path=ppt/slides/slide18.xml><?xml version="1.0" encoding="utf-8"?>
+<file path=ppt/slides/slide19.xml><?xml version="1.0" encoding="utf-8"?>
 <p:sld xmlns:a="http://schemas.openxmlformats.org/drawingml/2006/main" xmlns:r="http://schemas.openxmlformats.org/officeDocument/2006/relationships" xmlns:p="http://schemas.openxmlformats.org/presentationml/2006/main">
   <p:cSld>
     <p:spTree>
@@ -10727,101 +10970,6 @@
 </p:sld>
 </file>
 
-<file path=ppt/slides/slide19.xml><?xml version="1.0" encoding="utf-8"?>
-<p:sld xmlns:a="http://schemas.openxmlformats.org/drawingml/2006/main" xmlns:r="http://schemas.openxmlformats.org/officeDocument/2006/relationships" xmlns:p="http://schemas.openxmlformats.org/presentationml/2006/main">
-  <p:cSld>
-    <p:spTree>
-      <p:nvGrpSpPr>
-        <p:cNvPr id="1" name=""/>
-        <p:cNvGrpSpPr/>
-        <p:nvPr/>
-      </p:nvGrpSpPr>
-      <p:grpSpPr>
-        <a:xfrm>
-          <a:off x="0" y="0"/>
-          <a:ext cx="0" cy="0"/>
-          <a:chOff x="0" y="0"/>
-          <a:chExt cx="0" cy="0"/>
-        </a:xfrm>
-      </p:grpSpPr>
-      <p:sp>
-        <p:nvSpPr>
-          <p:cNvPr id="2" name="Title 1"/>
-          <p:cNvSpPr>
-            <a:spLocks noGrp="1"/>
-          </p:cNvSpPr>
-          <p:nvPr>
-            <p:ph type="title"/>
-          </p:nvPr>
-        </p:nvSpPr>
-        <p:spPr>
-          <a:xfrm>
-            <a:off x="457200" y="205979"/>
-            <a:ext cx="8229600" cy="857250"/>
-          </a:xfrm>
-        </p:spPr>
-        <p:txBody>
-          <a:bodyPr/>
-          <a:lstStyle/>
-          <a:p>
-            <a:pPr lvl="0" indent="0" marL="0">
-              <a:buNone/>
-            </a:pPr>
-            <a:r>
-              <a:rPr/>
-              <a:t>And it is convex, which squared error is not</a:t>
-            </a:r>
-          </a:p>
-        </p:txBody>
-      </p:sp>
-      <p:sp>
-        <p:nvSpPr>
-          <p:cNvPr id="3" name="Content Placeholder 2"/>
-          <p:cNvSpPr>
-            <a:spLocks noGrp="1"/>
-          </p:cNvSpPr>
-          <p:nvPr>
-            <p:ph idx="1"/>
-          </p:nvPr>
-        </p:nvSpPr>
-        <p:spPr>
-          <a:xfrm>
-            <a:off x="457200" y="1200151"/>
-            <a:ext cx="8229600" cy="3394472"/>
-          </a:xfrm>
-        </p:spPr>
-        <p:txBody>
-          <a:bodyPr/>
-          <a:lstStyle/>
-          <a:p>
-            <a:pPr lvl="0"/>
-            <a:r>
-              <a:rPr/>
-              <a:t>Log loss is </a:t>
-            </a:r>
-            <a:r>
-              <a:rPr b="1"/>
-              <a:t>convex</a:t>
-            </a:r>
-            <a:r>
-              <a:rPr/>
-              <a:t> in the weights, so any local minimum is global</a:t>
-            </a:r>
-          </a:p>
-          <a:p>
-            <a:pPr lvl="0"/>
-            <a:r>
-              <a:rPr/>
-              <a:t>Squared error through a sigmoid is not</a:t>
-            </a:r>
-          </a:p>
-        </p:txBody>
-      </p:sp>
-    </p:spTree>
-  </p:cSld>
-</p:sld>
-</file>
-
 <file path=ppt/slides/slide2.xml><?xml version="1.0" encoding="utf-8"?>
 <p:sld xmlns:a="http://schemas.openxmlformats.org/drawingml/2006/main" xmlns:r="http://schemas.openxmlformats.org/officeDocument/2006/relationships" xmlns:p="http://schemas.openxmlformats.org/presentationml/2006/main">
   <p:cSld>
@@ -10910,6 +11058,101 @@
 </file>
 
 <file path=ppt/slides/slide20.xml><?xml version="1.0" encoding="utf-8"?>
+<p:sld xmlns:a="http://schemas.openxmlformats.org/drawingml/2006/main" xmlns:r="http://schemas.openxmlformats.org/officeDocument/2006/relationships" xmlns:p="http://schemas.openxmlformats.org/presentationml/2006/main">
+  <p:cSld>
+    <p:spTree>
+      <p:nvGrpSpPr>
+        <p:cNvPr id="1" name=""/>
+        <p:cNvGrpSpPr/>
+        <p:nvPr/>
+      </p:nvGrpSpPr>
+      <p:grpSpPr>
+        <a:xfrm>
+          <a:off x="0" y="0"/>
+          <a:ext cx="0" cy="0"/>
+          <a:chOff x="0" y="0"/>
+          <a:chExt cx="0" cy="0"/>
+        </a:xfrm>
+      </p:grpSpPr>
+      <p:sp>
+        <p:nvSpPr>
+          <p:cNvPr id="2" name="Title 1"/>
+          <p:cNvSpPr>
+            <a:spLocks noGrp="1"/>
+          </p:cNvSpPr>
+          <p:nvPr>
+            <p:ph type="title"/>
+          </p:nvPr>
+        </p:nvSpPr>
+        <p:spPr>
+          <a:xfrm>
+            <a:off x="457200" y="205979"/>
+            <a:ext cx="8229600" cy="857250"/>
+          </a:xfrm>
+        </p:spPr>
+        <p:txBody>
+          <a:bodyPr/>
+          <a:lstStyle/>
+          <a:p>
+            <a:pPr lvl="0" indent="0" marL="0">
+              <a:buNone/>
+            </a:pPr>
+            <a:r>
+              <a:rPr/>
+              <a:t>And it is convex, which squared error is not</a:t>
+            </a:r>
+          </a:p>
+        </p:txBody>
+      </p:sp>
+      <p:sp>
+        <p:nvSpPr>
+          <p:cNvPr id="3" name="Content Placeholder 2"/>
+          <p:cNvSpPr>
+            <a:spLocks noGrp="1"/>
+          </p:cNvSpPr>
+          <p:nvPr>
+            <p:ph idx="1"/>
+          </p:nvPr>
+        </p:nvSpPr>
+        <p:spPr>
+          <a:xfrm>
+            <a:off x="457200" y="1200151"/>
+            <a:ext cx="8229600" cy="3394472"/>
+          </a:xfrm>
+        </p:spPr>
+        <p:txBody>
+          <a:bodyPr/>
+          <a:lstStyle/>
+          <a:p>
+            <a:pPr lvl="0"/>
+            <a:r>
+              <a:rPr/>
+              <a:t>Log loss is </a:t>
+            </a:r>
+            <a:r>
+              <a:rPr b="1"/>
+              <a:t>convex</a:t>
+            </a:r>
+            <a:r>
+              <a:rPr/>
+              <a:t> in the weights, so any local minimum is global</a:t>
+            </a:r>
+          </a:p>
+          <a:p>
+            <a:pPr lvl="0"/>
+            <a:r>
+              <a:rPr/>
+              <a:t>Squared error through a sigmoid is not</a:t>
+            </a:r>
+          </a:p>
+        </p:txBody>
+      </p:sp>
+    </p:spTree>
+  </p:cSld>
+</p:sld>
+</file>
+
+<file path=ppt/slides/slide21.xml><?xml version="1.0" encoding="utf-8"?>
 <p:sld xmlns:a="http://schemas.openxmlformats.org/drawingml/2006/main" xmlns:r="http://schemas.openxmlformats.org/officeDocument/2006/relationships" xmlns:p="http://schemas.openxmlformats.org/presentationml/2006/main">
   <p:cSld>
     <p:spTree>
@@ -11237,7 +11480,7 @@
 </p:sld>
 </file>
 
-<file path=ppt/slides/slide21.xml><?xml version="1.0" encoding="utf-8"?>
+<file path=ppt/slides/slide22.xml><?xml version="1.0" encoding="utf-8"?>
 <p:sld xmlns:a="http://schemas.openxmlformats.org/drawingml/2006/main" xmlns:r="http://schemas.openxmlformats.org/officeDocument/2006/relationships" xmlns:p="http://schemas.openxmlformats.org/presentationml/2006/main">
   <p:cSld>
     <p:spTree>
@@ -11319,7 +11562,7 @@
 </p:sld>
 </file>
 
-<file path=ppt/slides/slide22.xml><?xml version="1.0" encoding="utf-8"?>
+<file path=ppt/slides/slide23.xml><?xml version="1.0" encoding="utf-8"?>
 <p:sld xmlns:a="http://schemas.openxmlformats.org/drawingml/2006/main" xmlns:r="http://schemas.openxmlformats.org/officeDocument/2006/relationships" xmlns:p="http://schemas.openxmlformats.org/presentationml/2006/main">
   <p:cSld>
     <p:spTree>
@@ -11399,7 +11642,7 @@
 </p:sld>
 </file>
 
-<file path=ppt/slides/slide23.xml><?xml version="1.0" encoding="utf-8"?>
+<file path=ppt/slides/slide24.xml><?xml version="1.0" encoding="utf-8"?>
 <p:sld xmlns:a="http://schemas.openxmlformats.org/drawingml/2006/main" xmlns:r="http://schemas.openxmlformats.org/officeDocument/2006/relationships" xmlns:p="http://schemas.openxmlformats.org/presentationml/2006/main">
   <p:cSld>
     <p:spTree>
@@ -11624,7 +11867,7 @@
 </p:sld>
 </file>
 
-<file path=ppt/slides/slide24.xml><?xml version="1.0" encoding="utf-8"?>
+<file path=ppt/slides/slide25.xml><?xml version="1.0" encoding="utf-8"?>
 <p:sld xmlns:a="http://schemas.openxmlformats.org/drawingml/2006/main" xmlns:r="http://schemas.openxmlformats.org/officeDocument/2006/relationships" xmlns:p="http://schemas.openxmlformats.org/presentationml/2006/main">
   <p:cSld>
     <p:spTree>
@@ -11734,7 +11977,7 @@
 </p:sld>
 </file>
 
-<file path=ppt/slides/slide25.xml><?xml version="1.0" encoding="utf-8"?>
+<file path=ppt/slides/slide26.xml><?xml version="1.0" encoding="utf-8"?>
 <p:sld xmlns:a="http://schemas.openxmlformats.org/drawingml/2006/main" xmlns:r="http://schemas.openxmlformats.org/officeDocument/2006/relationships" xmlns:p="http://schemas.openxmlformats.org/presentationml/2006/main">
   <p:cSld>
     <p:spTree>
@@ -11816,7 +12059,7 @@
 </p:sld>
 </file>
 
-<file path=ppt/slides/slide26.xml><?xml version="1.0" encoding="utf-8"?>
+<file path=ppt/slides/slide27.xml><?xml version="1.0" encoding="utf-8"?>
 <p:sld xmlns:a="http://schemas.openxmlformats.org/drawingml/2006/main" xmlns:r="http://schemas.openxmlformats.org/officeDocument/2006/relationships" xmlns:p="http://schemas.openxmlformats.org/presentationml/2006/main">
   <p:cSld>
     <p:spTree>
@@ -11911,7 +12154,7 @@
 </p:sld>
 </file>
 
-<file path=ppt/slides/slide27.xml><?xml version="1.0" encoding="utf-8"?>
+<file path=ppt/slides/slide28.xml><?xml version="1.0" encoding="utf-8"?>
 <p:sld xmlns:a="http://schemas.openxmlformats.org/drawingml/2006/main" xmlns:r="http://schemas.openxmlformats.org/officeDocument/2006/relationships" xmlns:p="http://schemas.openxmlformats.org/presentationml/2006/main">
   <p:cSld>
     <p:spTree>
@@ -11993,7 +12236,7 @@
 </p:sld>
 </file>
 
-<file path=ppt/slides/slide28.xml><?xml version="1.0" encoding="utf-8"?>
+<file path=ppt/slides/slide29.xml><?xml version="1.0" encoding="utf-8"?>
 <p:sld xmlns:a="http://schemas.openxmlformats.org/drawingml/2006/main" xmlns:r="http://schemas.openxmlformats.org/officeDocument/2006/relationships" xmlns:p="http://schemas.openxmlformats.org/presentationml/2006/main">
   <p:cSld>
     <p:spTree>
@@ -12133,7 +12376,115 @@
 </p:sld>
 </file>
 
-<file path=ppt/slides/slide29.xml><?xml version="1.0" encoding="utf-8"?>
+<file path=ppt/slides/slide3.xml><?xml version="1.0" encoding="utf-8"?>
+<p:sld xmlns:a="http://schemas.openxmlformats.org/drawingml/2006/main" xmlns:r="http://schemas.openxmlformats.org/officeDocument/2006/relationships" xmlns:p="http://schemas.openxmlformats.org/presentationml/2006/main">
+  <p:cSld>
+    <p:spTree>
+      <p:nvGrpSpPr>
+        <p:cNvPr id="1" name=""/>
+        <p:cNvGrpSpPr/>
+        <p:nvPr/>
+      </p:nvGrpSpPr>
+      <p:grpSpPr>
+        <a:xfrm>
+          <a:off x="0" y="0"/>
+          <a:ext cx="0" cy="0"/>
+          <a:chOff x="0" y="0"/>
+          <a:chExt cx="0" cy="0"/>
+        </a:xfrm>
+      </p:grpSpPr>
+      <p:sp>
+        <p:nvSpPr>
+          <p:cNvPr id="2" name="Title 1"/>
+          <p:cNvSpPr>
+            <a:spLocks noGrp="1"/>
+          </p:cNvSpPr>
+          <p:nvPr>
+            <p:ph type="title"/>
+          </p:nvPr>
+        </p:nvSpPr>
+        <p:spPr>
+          <a:xfrm>
+            <a:off x="457200" y="205979"/>
+            <a:ext cx="8229600" cy="857250"/>
+          </a:xfrm>
+        </p:spPr>
+        <p:txBody>
+          <a:bodyPr/>
+          <a:lstStyle/>
+          <a:p>
+            <a:pPr lvl="0" indent="0" marL="0">
+              <a:buNone/>
+            </a:pPr>
+            <a:r>
+              <a:rPr/>
+              <a:t>Today: from a number to a decision</a:t>
+            </a:r>
+          </a:p>
+        </p:txBody>
+      </p:sp>
+      <p:sp>
+        <p:nvSpPr>
+          <p:cNvPr id="3" name="Content Placeholder 2"/>
+          <p:cNvSpPr>
+            <a:spLocks noGrp="1"/>
+          </p:cNvSpPr>
+          <p:nvPr>
+            <p:ph idx="1"/>
+          </p:nvPr>
+        </p:nvSpPr>
+        <p:spPr>
+          <a:xfrm>
+            <a:off x="457200" y="1200151"/>
+            <a:ext cx="8229600" cy="3394472"/>
+          </a:xfrm>
+        </p:spPr>
+        <p:txBody>
+          <a:bodyPr/>
+          <a:lstStyle/>
+          <a:p>
+            <a:pPr lvl="0"/>
+            <a:r>
+              <a:rPr/>
+              <a:t>Logistic regression: the model and why the cost had to change</a:t>
+            </a:r>
+          </a:p>
+          <a:p>
+            <a:pPr lvl="0"/>
+            <a:r>
+              <a:rPr/>
+              <a:t>The confusion matrix, and why accuracy lies</a:t>
+            </a:r>
+          </a:p>
+          <a:p>
+            <a:pPr lvl="0"/>
+            <a:r>
+              <a:rPr/>
+              <a:t>Precision, recall, F1, and the threshold nobody chose</a:t>
+            </a:r>
+          </a:p>
+          <a:p>
+            <a:pPr lvl="0"/>
+            <a:r>
+              <a:rPr/>
+              <a:t>Receiver operating characteristic (ROC) curves, and where they mislead</a:t>
+            </a:r>
+          </a:p>
+          <a:p>
+            <a:pPr lvl="0"/>
+            <a:r>
+              <a:rPr/>
+              <a:t>Choosing a threshold from money</a:t>
+            </a:r>
+          </a:p>
+        </p:txBody>
+      </p:sp>
+    </p:spTree>
+  </p:cSld>
+</p:sld>
+</file>
+
+<file path=ppt/slides/slide30.xml><?xml version="1.0" encoding="utf-8"?>
 <p:sld xmlns:a="http://schemas.openxmlformats.org/drawingml/2006/main" xmlns:r="http://schemas.openxmlformats.org/officeDocument/2006/relationships" xmlns:p="http://schemas.openxmlformats.org/presentationml/2006/main">
   <p:cSld>
     <p:spTree>
@@ -12375,7 +12726,7 @@
 </p:sld>
 </file>
 
-<file path=ppt/slides/slide3.xml><?xml version="1.0" encoding="utf-8"?>
+<file path=ppt/slides/slide31.xml><?xml version="1.0" encoding="utf-8"?>
 <p:sld xmlns:a="http://schemas.openxmlformats.org/drawingml/2006/main" xmlns:r="http://schemas.openxmlformats.org/officeDocument/2006/relationships" xmlns:p="http://schemas.openxmlformats.org/presentationml/2006/main">
   <p:cSld>
     <p:spTree>
@@ -12417,7 +12768,7 @@
             </a:pPr>
             <a:r>
               <a:rPr/>
-              <a:t>Today: from a number to a decision</a:t>
+              <a:t>Read the minority class, not the average</a:t>
             </a:r>
           </a:p>
         </p:txBody>
@@ -12444,36 +12795,60 @@
           <a:p>
             <a:pPr lvl="0"/>
             <a:r>
-              <a:rPr/>
-              <a:t>Logistic regression: the model and why the cost had to change</a:t>
+              <a:rPr>
+                <a:latin typeface="Courier"/>
+              </a:rPr>
+              <a:t>weighted avg</a:t>
+            </a:r>
+            <a:r>
+              <a:rPr/>
+              <a:t> F1: </a:t>
+            </a:r>
+            <a:r>
+              <a:rPr b="1"/>
+              <a:t>0.975</a:t>
+            </a:r>
+            <a:r>
+              <a:rPr/>
+              <a:t> (dominated by the healthy class)</a:t>
             </a:r>
           </a:p>
           <a:p>
             <a:pPr lvl="0"/>
             <a:r>
-              <a:rPr/>
-              <a:t>The confusion matrix, and why accuracy lies</a:t>
+              <a:rPr>
+                <a:latin typeface="Courier"/>
+              </a:rPr>
+              <a:t>macro avg</a:t>
+            </a:r>
+            <a:r>
+              <a:rPr/>
+              <a:t> F1: </a:t>
+            </a:r>
+            <a:r>
+              <a:rPr b="1"/>
+              <a:t>0.820</a:t>
+            </a:r>
+            <a:r>
+              <a:rPr/>
+              <a:t> (both classes get an equal say)</a:t>
             </a:r>
           </a:p>
           <a:p>
             <a:pPr lvl="0"/>
             <a:r>
               <a:rPr/>
-              <a:t>Precision, recall, F1, and the threshold nobody chose</a:t>
-            </a:r>
-          </a:p>
-          <a:p>
-            <a:pPr lvl="0"/>
-            <a:r>
-              <a:rPr/>
-              <a:t>Receiver operating characteristic (ROC) curves, and where they mislead</a:t>
-            </a:r>
-          </a:p>
-          <a:p>
-            <a:pPr lvl="0"/>
-            <a:r>
-              <a:rPr/>
-              <a:t>Choosing a threshold from money</a:t>
+              <a:t>In code: </a:t>
+            </a:r>
+            <a:r>
+              <a:rPr>
+                <a:latin typeface="Courier"/>
+              </a:rPr>
+              <a:t>classification_report(y_test, y_pred)</a:t>
+            </a:r>
+            <a:r>
+              <a:rPr/>
+              <a:t> prints both rows</a:t>
             </a:r>
           </a:p>
         </p:txBody>
@@ -12483,139 +12858,7 @@
 </p:sld>
 </file>
 
-<file path=ppt/slides/slide30.xml><?xml version="1.0" encoding="utf-8"?>
-<p:sld xmlns:a="http://schemas.openxmlformats.org/drawingml/2006/main" xmlns:r="http://schemas.openxmlformats.org/officeDocument/2006/relationships" xmlns:p="http://schemas.openxmlformats.org/presentationml/2006/main">
-  <p:cSld>
-    <p:spTree>
-      <p:nvGrpSpPr>
-        <p:cNvPr id="1" name=""/>
-        <p:cNvGrpSpPr/>
-        <p:nvPr/>
-      </p:nvGrpSpPr>
-      <p:grpSpPr>
-        <a:xfrm>
-          <a:off x="0" y="0"/>
-          <a:ext cx="0" cy="0"/>
-          <a:chOff x="0" y="0"/>
-          <a:chExt cx="0" cy="0"/>
-        </a:xfrm>
-      </p:grpSpPr>
-      <p:sp>
-        <p:nvSpPr>
-          <p:cNvPr id="2" name="Title 1"/>
-          <p:cNvSpPr>
-            <a:spLocks noGrp="1"/>
-          </p:cNvSpPr>
-          <p:nvPr>
-            <p:ph type="title"/>
-          </p:nvPr>
-        </p:nvSpPr>
-        <p:spPr>
-          <a:xfrm>
-            <a:off x="457200" y="205979"/>
-            <a:ext cx="8229600" cy="857250"/>
-          </a:xfrm>
-        </p:spPr>
-        <p:txBody>
-          <a:bodyPr/>
-          <a:lstStyle/>
-          <a:p>
-            <a:pPr lvl="0" indent="0" marL="0">
-              <a:buNone/>
-            </a:pPr>
-            <a:r>
-              <a:rPr/>
-              <a:t>Read the minority class, not the average</a:t>
-            </a:r>
-          </a:p>
-        </p:txBody>
-      </p:sp>
-      <p:sp>
-        <p:nvSpPr>
-          <p:cNvPr id="3" name="Content Placeholder 2"/>
-          <p:cNvSpPr>
-            <a:spLocks noGrp="1"/>
-          </p:cNvSpPr>
-          <p:nvPr>
-            <p:ph idx="1"/>
-          </p:nvPr>
-        </p:nvSpPr>
-        <p:spPr>
-          <a:xfrm>
-            <a:off x="457200" y="1200151"/>
-            <a:ext cx="8229600" cy="3394472"/>
-          </a:xfrm>
-        </p:spPr>
-        <p:txBody>
-          <a:bodyPr/>
-          <a:lstStyle/>
-          <a:p>
-            <a:pPr lvl="0"/>
-            <a:r>
-              <a:rPr>
-                <a:latin typeface="Courier"/>
-              </a:rPr>
-              <a:t>weighted avg</a:t>
-            </a:r>
-            <a:r>
-              <a:rPr/>
-              <a:t> F1: </a:t>
-            </a:r>
-            <a:r>
-              <a:rPr b="1"/>
-              <a:t>0.975</a:t>
-            </a:r>
-            <a:r>
-              <a:rPr/>
-              <a:t> (dominated by the healthy class)</a:t>
-            </a:r>
-          </a:p>
-          <a:p>
-            <a:pPr lvl="0"/>
-            <a:r>
-              <a:rPr>
-                <a:latin typeface="Courier"/>
-              </a:rPr>
-              <a:t>macro avg</a:t>
-            </a:r>
-            <a:r>
-              <a:rPr/>
-              <a:t> F1: </a:t>
-            </a:r>
-            <a:r>
-              <a:rPr b="1"/>
-              <a:t>0.820</a:t>
-            </a:r>
-            <a:r>
-              <a:rPr/>
-              <a:t> (both classes get an equal say)</a:t>
-            </a:r>
-          </a:p>
-          <a:p>
-            <a:pPr lvl="0"/>
-            <a:r>
-              <a:rPr/>
-              <a:t>In code: </a:t>
-            </a:r>
-            <a:r>
-              <a:rPr>
-                <a:latin typeface="Courier"/>
-              </a:rPr>
-              <a:t>classification_report(y_test, y_pred)</a:t>
-            </a:r>
-            <a:r>
-              <a:rPr/>
-              <a:t> prints both rows</a:t>
-            </a:r>
-          </a:p>
-        </p:txBody>
-      </p:sp>
-    </p:spTree>
-  </p:cSld>
-</p:sld>
-</file>
-
-<file path=ppt/slides/slide31.xml><?xml version="1.0" encoding="utf-8"?>
+<file path=ppt/slides/slide32.xml><?xml version="1.0" encoding="utf-8"?>
 <p:sld xmlns:a="http://schemas.openxmlformats.org/drawingml/2006/main" xmlns:r="http://schemas.openxmlformats.org/officeDocument/2006/relationships" xmlns:p="http://schemas.openxmlformats.org/presentationml/2006/main">
   <p:cSld>
     <p:spTree>
@@ -12969,7 +13212,7 @@
 </p:sld>
 </file>
 
-<file path=ppt/slides/slide32.xml><?xml version="1.0" encoding="utf-8"?>
+<file path=ppt/slides/slide33.xml><?xml version="1.0" encoding="utf-8"?>
 <p:sld xmlns:a="http://schemas.openxmlformats.org/drawingml/2006/main" xmlns:r="http://schemas.openxmlformats.org/officeDocument/2006/relationships" xmlns:p="http://schemas.openxmlformats.org/presentationml/2006/main">
   <p:cSld>
     <p:spTree>
@@ -13051,7 +13294,7 @@
 </p:sld>
 </file>
 
-<file path=ppt/slides/slide33.xml><?xml version="1.0" encoding="utf-8"?>
+<file path=ppt/slides/slide34.xml><?xml version="1.0" encoding="utf-8"?>
 <p:sld xmlns:a="http://schemas.openxmlformats.org/drawingml/2006/main" xmlns:r="http://schemas.openxmlformats.org/officeDocument/2006/relationships" xmlns:p="http://schemas.openxmlformats.org/presentationml/2006/main">
   <p:cSld>
     <p:spTree>
@@ -13785,7 +14028,7 @@
 </p:sld>
 </file>
 
-<file path=ppt/slides/slide34.xml><?xml version="1.0" encoding="utf-8"?>
+<file path=ppt/slides/slide35.xml><?xml version="1.0" encoding="utf-8"?>
 <p:sld xmlns:a="http://schemas.openxmlformats.org/drawingml/2006/main" xmlns:r="http://schemas.openxmlformats.org/officeDocument/2006/relationships" xmlns:p="http://schemas.openxmlformats.org/presentationml/2006/main">
   <p:cSld>
     <p:spTree>
@@ -13867,7 +14110,7 @@
 </p:sld>
 </file>
 
-<file path=ppt/slides/slide35.xml><?xml version="1.0" encoding="utf-8"?>
+<file path=ppt/slides/slide36.xml><?xml version="1.0" encoding="utf-8"?>
 <p:sld xmlns:a="http://schemas.openxmlformats.org/drawingml/2006/main" xmlns:r="http://schemas.openxmlformats.org/officeDocument/2006/relationships" xmlns:p="http://schemas.openxmlformats.org/presentationml/2006/main">
   <p:cSld>
     <p:spTree>
@@ -13962,7 +14205,7 @@
 </p:sld>
 </file>
 
-<file path=ppt/slides/slide36.xml><?xml version="1.0" encoding="utf-8"?>
+<file path=ppt/slides/slide37.xml><?xml version="1.0" encoding="utf-8"?>
 <p:sld xmlns:a="http://schemas.openxmlformats.org/drawingml/2006/main" xmlns:r="http://schemas.openxmlformats.org/officeDocument/2006/relationships" xmlns:p="http://schemas.openxmlformats.org/presentationml/2006/main">
   <p:cSld>
     <p:spTree>
@@ -14044,106 +14287,6 @@
 </p:sld>
 </file>
 
-<file path=ppt/slides/slide37.xml><?xml version="1.0" encoding="utf-8"?>
-<p:sld xmlns:a="http://schemas.openxmlformats.org/drawingml/2006/main" xmlns:r="http://schemas.openxmlformats.org/officeDocument/2006/relationships" xmlns:p="http://schemas.openxmlformats.org/presentationml/2006/main">
-  <p:cSld>
-    <p:spTree>
-      <p:nvGrpSpPr>
-        <p:cNvPr id="1" name=""/>
-        <p:cNvGrpSpPr/>
-        <p:nvPr/>
-      </p:nvGrpSpPr>
-      <p:grpSpPr>
-        <a:xfrm>
-          <a:off x="0" y="0"/>
-          <a:ext cx="0" cy="0"/>
-          <a:chOff x="0" y="0"/>
-          <a:chExt cx="0" cy="0"/>
-        </a:xfrm>
-      </p:grpSpPr>
-      <p:sp>
-        <p:nvSpPr>
-          <p:cNvPr id="2" name="Title 1"/>
-          <p:cNvSpPr>
-            <a:spLocks noGrp="1"/>
-          </p:cNvSpPr>
-          <p:nvPr>
-            <p:ph type="title"/>
-          </p:nvPr>
-        </p:nvSpPr>
-        <p:spPr>
-          <a:xfrm>
-            <a:off x="457200" y="205979"/>
-            <a:ext cx="8229600" cy="857250"/>
-          </a:xfrm>
-        </p:spPr>
-        <p:txBody>
-          <a:bodyPr/>
-          <a:lstStyle/>
-          <a:p>
-            <a:pPr lvl="0" indent="0" marL="0">
-              <a:buNone/>
-            </a:pPr>
-            <a:r>
-              <a:rPr/>
-              <a:t>What the area means</a:t>
-            </a:r>
-          </a:p>
-        </p:txBody>
-      </p:sp>
-      <p:sp>
-        <p:nvSpPr>
-          <p:cNvPr id="3" name="Content Placeholder 2"/>
-          <p:cNvSpPr>
-            <a:spLocks noGrp="1"/>
-          </p:cNvSpPr>
-          <p:nvPr>
-            <p:ph idx="1"/>
-          </p:nvPr>
-        </p:nvSpPr>
-        <p:spPr>
-          <a:xfrm>
-            <a:off x="457200" y="1200151"/>
-            <a:ext cx="8229600" cy="3394472"/>
-          </a:xfrm>
-        </p:spPr>
-        <p:txBody>
-          <a:bodyPr/>
-          <a:lstStyle/>
-          <a:p>
-            <a:pPr lvl="0"/>
-            <a:r>
-              <a:rPr b="1"/>
-              <a:t>Area under the curve (AUC) = the probability that a random failing drive scores above a random healthy one</a:t>
-            </a:r>
-          </a:p>
-          <a:p>
-            <a:pPr lvl="0"/>
-            <a:r>
-              <a:rPr/>
-              <a:t>Ours: 0.949</a:t>
-            </a:r>
-          </a:p>
-          <a:p>
-            <a:pPr lvl="0"/>
-            <a:r>
-              <a:rPr/>
-              <a:t>In code: </a:t>
-            </a:r>
-            <a:r>
-              <a:rPr>
-                <a:latin typeface="Courier"/>
-              </a:rPr>
-              <a:t>roc_auc_score(y_test, scores)</a:t>
-            </a:r>
-          </a:p>
-        </p:txBody>
-      </p:sp>
-    </p:spTree>
-  </p:cSld>
-</p:sld>
-</file>
-
 <file path=ppt/slides/slide38.xml><?xml version="1.0" encoding="utf-8"?>
 <p:sld xmlns:a="http://schemas.openxmlformats.org/drawingml/2006/main" xmlns:r="http://schemas.openxmlformats.org/officeDocument/2006/relationships" xmlns:p="http://schemas.openxmlformats.org/presentationml/2006/main">
   <p:cSld>
@@ -14186,7 +14329,7 @@
             </a:pPr>
             <a:r>
               <a:rPr/>
-              <a:t>What AUC does not tell you</a:t>
+              <a:t>What the area means</a:t>
             </a:r>
           </a:p>
         </p:txBody>
@@ -14213,23 +14356,28 @@
           <a:p>
             <a:pPr lvl="0"/>
             <a:r>
-              <a:rPr/>
-              <a:t>Divide every predicted probability by 10</a:t>
+              <a:rPr b="1"/>
+              <a:t>Area under the curve (AUC) = the probability that a random failing drive scores above a random healthy one</a:t>
             </a:r>
           </a:p>
           <a:p>
             <a:pPr lvl="0"/>
             <a:r>
               <a:rPr/>
-              <a:t>AUC is </a:t>
-            </a:r>
-            <a:r>
-              <a:rPr b="1"/>
-              <a:t>unchanged</a:t>
-            </a:r>
-            <a:r>
-              <a:rPr/>
-              <a:t>; every decision changes</a:t>
+              <a:t>Ours: 0.949</a:t>
+            </a:r>
+          </a:p>
+          <a:p>
+            <a:pPr lvl="0"/>
+            <a:r>
+              <a:rPr/>
+              <a:t>In code: </a:t>
+            </a:r>
+            <a:r>
+              <a:rPr>
+                <a:latin typeface="Courier"/>
+              </a:rPr>
+              <a:t>roc_auc_score(y_test, scores)</a:t>
             </a:r>
           </a:p>
         </p:txBody>
@@ -14240,6 +14388,210 @@
 </file>
 
 <file path=ppt/slides/slide39.xml><?xml version="1.0" encoding="utf-8"?>
+<p:sld xmlns:a="http://schemas.openxmlformats.org/drawingml/2006/main" xmlns:r="http://schemas.openxmlformats.org/officeDocument/2006/relationships" xmlns:p="http://schemas.openxmlformats.org/presentationml/2006/main">
+  <p:cSld>
+    <p:spTree>
+      <p:nvGrpSpPr>
+        <p:cNvPr id="1" name=""/>
+        <p:cNvGrpSpPr/>
+        <p:nvPr/>
+      </p:nvGrpSpPr>
+      <p:grpSpPr>
+        <a:xfrm>
+          <a:off x="0" y="0"/>
+          <a:ext cx="0" cy="0"/>
+          <a:chOff x="0" y="0"/>
+          <a:chExt cx="0" cy="0"/>
+        </a:xfrm>
+      </p:grpSpPr>
+      <p:sp>
+        <p:nvSpPr>
+          <p:cNvPr id="2" name="Title 1"/>
+          <p:cNvSpPr>
+            <a:spLocks noGrp="1"/>
+          </p:cNvSpPr>
+          <p:nvPr>
+            <p:ph type="title"/>
+          </p:nvPr>
+        </p:nvSpPr>
+        <p:spPr>
+          <a:xfrm>
+            <a:off x="457200" y="205979"/>
+            <a:ext cx="8229600" cy="857250"/>
+          </a:xfrm>
+        </p:spPr>
+        <p:txBody>
+          <a:bodyPr/>
+          <a:lstStyle/>
+          <a:p>
+            <a:pPr lvl="0" indent="0" marL="0">
+              <a:buNone/>
+            </a:pPr>
+            <a:r>
+              <a:rPr/>
+              <a:t>What AUC does not tell you</a:t>
+            </a:r>
+          </a:p>
+        </p:txBody>
+      </p:sp>
+      <p:sp>
+        <p:nvSpPr>
+          <p:cNvPr id="3" name="Content Placeholder 2"/>
+          <p:cNvSpPr>
+            <a:spLocks noGrp="1"/>
+          </p:cNvSpPr>
+          <p:nvPr>
+            <p:ph idx="1"/>
+          </p:nvPr>
+        </p:nvSpPr>
+        <p:spPr>
+          <a:xfrm>
+            <a:off x="457200" y="1200151"/>
+            <a:ext cx="8229600" cy="3394472"/>
+          </a:xfrm>
+        </p:spPr>
+        <p:txBody>
+          <a:bodyPr/>
+          <a:lstStyle/>
+          <a:p>
+            <a:pPr lvl="0"/>
+            <a:r>
+              <a:rPr/>
+              <a:t>Divide every predicted probability by 10</a:t>
+            </a:r>
+          </a:p>
+          <a:p>
+            <a:pPr lvl="0"/>
+            <a:r>
+              <a:rPr/>
+              <a:t>AUC is </a:t>
+            </a:r>
+            <a:r>
+              <a:rPr b="1"/>
+              <a:t>unchanged</a:t>
+            </a:r>
+            <a:r>
+              <a:rPr/>
+              <a:t>; every decision changes</a:t>
+            </a:r>
+          </a:p>
+        </p:txBody>
+      </p:sp>
+    </p:spTree>
+  </p:cSld>
+</p:sld>
+</file>
+
+<file path=ppt/slides/slide4.xml><?xml version="1.0" encoding="utf-8"?>
+<p:sld xmlns:a="http://schemas.openxmlformats.org/drawingml/2006/main" xmlns:r="http://schemas.openxmlformats.org/officeDocument/2006/relationships" xmlns:p="http://schemas.openxmlformats.org/presentationml/2006/main">
+  <p:cSld>
+    <p:spTree>
+      <p:nvGrpSpPr>
+        <p:cNvPr id="1" name=""/>
+        <p:cNvGrpSpPr/>
+        <p:nvPr/>
+      </p:nvGrpSpPr>
+      <p:grpSpPr>
+        <a:xfrm>
+          <a:off x="0" y="0"/>
+          <a:ext cx="0" cy="0"/>
+          <a:chOff x="0" y="0"/>
+          <a:chExt cx="0" cy="0"/>
+        </a:xfrm>
+      </p:grpSpPr>
+      <p:sp>
+        <p:nvSpPr>
+          <p:cNvPr id="2" name="Title 1"/>
+          <p:cNvSpPr>
+            <a:spLocks noGrp="1"/>
+          </p:cNvSpPr>
+          <p:nvPr>
+            <p:ph type="title"/>
+          </p:nvPr>
+        </p:nvSpPr>
+        <p:spPr>
+          <a:xfrm>
+            <a:off x="457200" y="205979"/>
+            <a:ext cx="8229600" cy="857250"/>
+          </a:xfrm>
+        </p:spPr>
+        <p:txBody>
+          <a:bodyPr/>
+          <a:lstStyle/>
+          <a:p>
+            <a:pPr lvl="0" indent="0" marL="0">
+              <a:buNone/>
+            </a:pPr>
+            <a:r>
+              <a:rPr/>
+              <a:t>The question has changed</a:t>
+            </a:r>
+          </a:p>
+        </p:txBody>
+      </p:sp>
+      <p:sp>
+        <p:nvSpPr>
+          <p:cNvPr id="3" name="Content Placeholder 2"/>
+          <p:cNvSpPr>
+            <a:spLocks noGrp="1"/>
+          </p:cNvSpPr>
+          <p:nvPr>
+            <p:ph idx="1"/>
+          </p:nvPr>
+        </p:nvSpPr>
+        <p:spPr>
+          <a:xfrm>
+            <a:off x="457200" y="1200151"/>
+            <a:ext cx="8229600" cy="3394472"/>
+          </a:xfrm>
+        </p:spPr>
+        <p:txBody>
+          <a:bodyPr/>
+          <a:lstStyle/>
+          <a:p>
+            <a:pPr lvl="0"/>
+            <a:r>
+              <a:rPr/>
+              <a:t>Lesson 3: given a house, </a:t>
+            </a:r>
+            <a:r>
+              <a:rPr b="1"/>
+              <a:t>how many euros?</a:t>
+            </a:r>
+          </a:p>
+          <a:p>
+            <a:pPr lvl="0"/>
+            <a:r>
+              <a:rPr/>
+              <a:t>Lesson 4: given a disk drive, </a:t>
+            </a:r>
+            <a:r>
+              <a:rPr b="1"/>
+              <a:t>will it fail?</a:t>
+            </a:r>
+          </a:p>
+          <a:p>
+            <a:pPr lvl="0"/>
+            <a:r>
+              <a:rPr/>
+              <a:t>Answer with a probability: 0 ≤ P(y = 1 | x) ≤ 1</a:t>
+            </a:r>
+          </a:p>
+          <a:p>
+            <a:pPr lvl="0"/>
+            <a:r>
+              <a:rPr/>
+              <a:t>y = 1 if the drive failed, y = 0 if not; x holds its six counters</a:t>
+            </a:r>
+          </a:p>
+        </p:txBody>
+      </p:sp>
+    </p:spTree>
+  </p:cSld>
+</p:sld>
+</file>
+
+<file path=ppt/slides/slide40.xml><?xml version="1.0" encoding="utf-8"?>
 <p:sld xmlns:a="http://schemas.openxmlformats.org/drawingml/2006/main" xmlns:r="http://schemas.openxmlformats.org/officeDocument/2006/relationships" xmlns:p="http://schemas.openxmlformats.org/presentationml/2006/main">
   <p:cSld>
     <p:spTree>
@@ -14321,218 +14673,6 @@
 </p:sld>
 </file>
 
-<file path=ppt/slides/slide4.xml><?xml version="1.0" encoding="utf-8"?>
-<p:sld xmlns:a="http://schemas.openxmlformats.org/drawingml/2006/main" xmlns:r="http://schemas.openxmlformats.org/officeDocument/2006/relationships" xmlns:p="http://schemas.openxmlformats.org/presentationml/2006/main">
-  <p:cSld>
-    <p:spTree>
-      <p:nvGrpSpPr>
-        <p:cNvPr id="1" name=""/>
-        <p:cNvGrpSpPr/>
-        <p:nvPr/>
-      </p:nvGrpSpPr>
-      <p:grpSpPr>
-        <a:xfrm>
-          <a:off x="0" y="0"/>
-          <a:ext cx="0" cy="0"/>
-          <a:chOff x="0" y="0"/>
-          <a:chExt cx="0" cy="0"/>
-        </a:xfrm>
-      </p:grpSpPr>
-      <p:sp>
-        <p:nvSpPr>
-          <p:cNvPr id="2" name="Title 1"/>
-          <p:cNvSpPr>
-            <a:spLocks noGrp="1"/>
-          </p:cNvSpPr>
-          <p:nvPr>
-            <p:ph type="title"/>
-          </p:nvPr>
-        </p:nvSpPr>
-        <p:spPr>
-          <a:xfrm>
-            <a:off x="457200" y="205979"/>
-            <a:ext cx="8229600" cy="857250"/>
-          </a:xfrm>
-        </p:spPr>
-        <p:txBody>
-          <a:bodyPr/>
-          <a:lstStyle/>
-          <a:p>
-            <a:pPr lvl="0" indent="0" marL="0">
-              <a:buNone/>
-            </a:pPr>
-            <a:r>
-              <a:rPr/>
-              <a:t>The question has changed</a:t>
-            </a:r>
-          </a:p>
-        </p:txBody>
-      </p:sp>
-      <p:sp>
-        <p:nvSpPr>
-          <p:cNvPr id="3" name="Content Placeholder 2"/>
-          <p:cNvSpPr>
-            <a:spLocks noGrp="1"/>
-          </p:cNvSpPr>
-          <p:nvPr>
-            <p:ph idx="1"/>
-          </p:nvPr>
-        </p:nvSpPr>
-        <p:spPr>
-          <a:xfrm>
-            <a:off x="457200" y="1200151"/>
-            <a:ext cx="8229600" cy="3394472"/>
-          </a:xfrm>
-        </p:spPr>
-        <p:txBody>
-          <a:bodyPr/>
-          <a:lstStyle/>
-          <a:p>
-            <a:pPr lvl="0"/>
-            <a:r>
-              <a:rPr/>
-              <a:t>Lesson 3: given a house, </a:t>
-            </a:r>
-            <a:r>
-              <a:rPr b="1"/>
-              <a:t>how many euros?</a:t>
-            </a:r>
-          </a:p>
-          <a:p>
-            <a:pPr lvl="0"/>
-            <a:r>
-              <a:rPr/>
-              <a:t>Lesson 4: given a disk drive, </a:t>
-            </a:r>
-            <a:r>
-              <a:rPr b="1"/>
-              <a:t>will it fail?</a:t>
-            </a:r>
-          </a:p>
-          <a:p>
-            <a:pPr lvl="0"/>
-            <a:r>
-              <a:rPr/>
-              <a:t>Answer with a probability: 0 ≤ P(y = 1 | x) ≤ 1</a:t>
-            </a:r>
-          </a:p>
-          <a:p>
-            <a:pPr lvl="0"/>
-            <a:r>
-              <a:rPr/>
-              <a:t>y = 1 if the drive failed, y = 0 if not; x holds its six counters</a:t>
-            </a:r>
-          </a:p>
-        </p:txBody>
-      </p:sp>
-    </p:spTree>
-  </p:cSld>
-</p:sld>
-</file>
-
-<file path=ppt/slides/slide40.xml><?xml version="1.0" encoding="utf-8"?>
-<p:sld xmlns:a="http://schemas.openxmlformats.org/drawingml/2006/main" xmlns:r="http://schemas.openxmlformats.org/officeDocument/2006/relationships" xmlns:p="http://schemas.openxmlformats.org/presentationml/2006/main">
-  <p:cSld>
-    <p:spTree>
-      <p:nvGrpSpPr>
-        <p:cNvPr id="1" name=""/>
-        <p:cNvGrpSpPr/>
-        <p:nvPr/>
-      </p:nvGrpSpPr>
-      <p:grpSpPr>
-        <a:xfrm>
-          <a:off x="0" y="0"/>
-          <a:ext cx="0" cy="0"/>
-          <a:chOff x="0" y="0"/>
-          <a:chExt cx="0" cy="0"/>
-        </a:xfrm>
-      </p:grpSpPr>
-      <p:sp>
-        <p:nvSpPr>
-          <p:cNvPr id="2" name="Title 1"/>
-          <p:cNvSpPr>
-            <a:spLocks noGrp="1"/>
-          </p:cNvSpPr>
-          <p:nvPr>
-            <p:ph type="title"/>
-          </p:nvPr>
-        </p:nvSpPr>
-        <p:spPr>
-          <a:xfrm>
-            <a:off x="457200" y="205979"/>
-            <a:ext cx="8229600" cy="857250"/>
-          </a:xfrm>
-        </p:spPr>
-        <p:txBody>
-          <a:bodyPr/>
-          <a:lstStyle/>
-          <a:p>
-            <a:pPr lvl="0" indent="0" marL="0">
-              <a:buNone/>
-            </a:pPr>
-            <a:r>
-              <a:rPr/>
-              <a:t>Why the two disagree</a:t>
-            </a:r>
-          </a:p>
-        </p:txBody>
-      </p:sp>
-      <p:sp>
-        <p:nvSpPr>
-          <p:cNvPr id="3" name="Content Placeholder 2"/>
-          <p:cNvSpPr>
-            <a:spLocks noGrp="1"/>
-          </p:cNvSpPr>
-          <p:nvPr>
-            <p:ph idx="1"/>
-          </p:nvPr>
-        </p:nvSpPr>
-        <p:spPr>
-          <a:xfrm>
-            <a:off x="457200" y="1200151"/>
-            <a:ext cx="8229600" cy="3394472"/>
-          </a:xfrm>
-        </p:spPr>
-        <p:txBody>
-          <a:bodyPr/>
-          <a:lstStyle/>
-          <a:p>
-            <a:pPr lvl="0"/>
-            <a:r>
-              <a:rPr/>
-              <a:t>False positive rate (FPR) divides by </a:t>
-            </a:r>
-            <a:r>
-              <a:rPr b="1"/>
-              <a:t>all healthy drives</a:t>
-            </a:r>
-            <a:r>
-              <a:rPr/>
-              <a:t>: an enormous, growing denominator</a:t>
-            </a:r>
-          </a:p>
-          <a:p>
-            <a:pPr lvl="0"/>
-            <a:r>
-              <a:rPr/>
-              <a:t>Precision divides by </a:t>
-            </a:r>
-            <a:r>
-              <a:rPr b="1"/>
-              <a:t>the alarms raised</a:t>
-            </a:r>
-            <a:r>
-              <a:rPr/>
-              <a:t>, where the false ones dominate</a:t>
-            </a:r>
-          </a:p>
-        </p:txBody>
-      </p:sp>
-    </p:spTree>
-  </p:cSld>
-</p:sld>
-</file>
-
 <file path=ppt/slides/slide41.xml><?xml version="1.0" encoding="utf-8"?>
 <p:sld xmlns:a="http://schemas.openxmlformats.org/drawingml/2006/main" xmlns:r="http://schemas.openxmlformats.org/officeDocument/2006/relationships" xmlns:p="http://schemas.openxmlformats.org/presentationml/2006/main">
   <p:cSld>
@@ -14575,7 +14715,7 @@
             </a:pPr>
             <a:r>
               <a:rPr/>
-              <a:t>The rule</a:t>
+              <a:t>Why the two disagree</a:t>
             </a:r>
           </a:p>
         </p:txBody>
@@ -14603,43 +14743,30 @@
             <a:pPr lvl="0"/>
             <a:r>
               <a:rPr/>
-              <a:t>On an imbalanced problem, report the </a:t>
+              <a:t>False positive rate (FPR) divides by </a:t>
             </a:r>
             <a:r>
               <a:rPr b="1"/>
-              <a:t>precision-recall curve alongside AUC</a:t>
+              <a:t>all healthy drives</a:t>
+            </a:r>
+            <a:r>
+              <a:rPr/>
+              <a:t>: an enormous, growing denominator</a:t>
             </a:r>
           </a:p>
           <a:p>
             <a:pPr lvl="0"/>
             <a:r>
               <a:rPr/>
-              <a:t>Never instead of it, and never AUC alone</a:t>
-            </a:r>
-          </a:p>
-          <a:p>
-            <a:pPr lvl="0"/>
-            <a:r>
-              <a:rPr/>
-              <a:t>Its area is the </a:t>
+              <a:t>Precision divides by </a:t>
             </a:r>
             <a:r>
               <a:rPr b="1"/>
-              <a:t>average precision</a:t>
-            </a:r>
-            <a:r>
-              <a:rPr/>
-              <a:t>, </a:t>
-            </a:r>
-            <a:r>
-              <a:rPr>
-                <a:latin typeface="Courier"/>
-              </a:rPr>
-              <a:t>average_precision_score</a:t>
-            </a:r>
-            <a:r>
-              <a:rPr/>
-              <a:t>: 0.717 here, against a floor of 0.038</a:t>
+              <a:t>the alarms raised</a:t>
+            </a:r>
+            <a:r>
+              <a:rPr/>
+              <a:t>, where the false ones dominate</a:t>
             </a:r>
           </a:p>
         </p:txBody>
@@ -14650,6 +14777,122 @@
 </file>
 
 <file path=ppt/slides/slide42.xml><?xml version="1.0" encoding="utf-8"?>
+<p:sld xmlns:a="http://schemas.openxmlformats.org/drawingml/2006/main" xmlns:r="http://schemas.openxmlformats.org/officeDocument/2006/relationships" xmlns:p="http://schemas.openxmlformats.org/presentationml/2006/main">
+  <p:cSld>
+    <p:spTree>
+      <p:nvGrpSpPr>
+        <p:cNvPr id="1" name=""/>
+        <p:cNvGrpSpPr/>
+        <p:nvPr/>
+      </p:nvGrpSpPr>
+      <p:grpSpPr>
+        <a:xfrm>
+          <a:off x="0" y="0"/>
+          <a:ext cx="0" cy="0"/>
+          <a:chOff x="0" y="0"/>
+          <a:chExt cx="0" cy="0"/>
+        </a:xfrm>
+      </p:grpSpPr>
+      <p:sp>
+        <p:nvSpPr>
+          <p:cNvPr id="2" name="Title 1"/>
+          <p:cNvSpPr>
+            <a:spLocks noGrp="1"/>
+          </p:cNvSpPr>
+          <p:nvPr>
+            <p:ph type="title"/>
+          </p:nvPr>
+        </p:nvSpPr>
+        <p:spPr>
+          <a:xfrm>
+            <a:off x="457200" y="205979"/>
+            <a:ext cx="8229600" cy="857250"/>
+          </a:xfrm>
+        </p:spPr>
+        <p:txBody>
+          <a:bodyPr/>
+          <a:lstStyle/>
+          <a:p>
+            <a:pPr lvl="0" indent="0" marL="0">
+              <a:buNone/>
+            </a:pPr>
+            <a:r>
+              <a:rPr/>
+              <a:t>The rule</a:t>
+            </a:r>
+          </a:p>
+        </p:txBody>
+      </p:sp>
+      <p:sp>
+        <p:nvSpPr>
+          <p:cNvPr id="3" name="Content Placeholder 2"/>
+          <p:cNvSpPr>
+            <a:spLocks noGrp="1"/>
+          </p:cNvSpPr>
+          <p:nvPr>
+            <p:ph idx="1"/>
+          </p:nvPr>
+        </p:nvSpPr>
+        <p:spPr>
+          <a:xfrm>
+            <a:off x="457200" y="1200151"/>
+            <a:ext cx="8229600" cy="3394472"/>
+          </a:xfrm>
+        </p:spPr>
+        <p:txBody>
+          <a:bodyPr/>
+          <a:lstStyle/>
+          <a:p>
+            <a:pPr lvl="0"/>
+            <a:r>
+              <a:rPr/>
+              <a:t>On an imbalanced problem, report the </a:t>
+            </a:r>
+            <a:r>
+              <a:rPr b="1"/>
+              <a:t>precision-recall curve alongside AUC</a:t>
+            </a:r>
+          </a:p>
+          <a:p>
+            <a:pPr lvl="0"/>
+            <a:r>
+              <a:rPr/>
+              <a:t>Never instead of it, and never AUC alone</a:t>
+            </a:r>
+          </a:p>
+          <a:p>
+            <a:pPr lvl="0"/>
+            <a:r>
+              <a:rPr/>
+              <a:t>Its area is the </a:t>
+            </a:r>
+            <a:r>
+              <a:rPr b="1"/>
+              <a:t>average precision</a:t>
+            </a:r>
+            <a:r>
+              <a:rPr/>
+              <a:t>, </a:t>
+            </a:r>
+            <a:r>
+              <a:rPr>
+                <a:latin typeface="Courier"/>
+              </a:rPr>
+              <a:t>average_precision_score</a:t>
+            </a:r>
+            <a:r>
+              <a:rPr/>
+              <a:t>: 0.717 here, against a floor of 0.038</a:t>
+            </a:r>
+          </a:p>
+        </p:txBody>
+      </p:sp>
+    </p:spTree>
+  </p:cSld>
+</p:sld>
+</file>
+
+<file path=ppt/slides/slide43.xml><?xml version="1.0" encoding="utf-8"?>
 <p:sld xmlns:a="http://schemas.openxmlformats.org/drawingml/2006/main" xmlns:r="http://schemas.openxmlformats.org/officeDocument/2006/relationships" xmlns:p="http://schemas.openxmlformats.org/presentationml/2006/main">
   <p:cSld>
     <p:spTree>
@@ -14731,7 +14974,7 @@
 </p:sld>
 </file>
 
-<file path=ppt/slides/slide43.xml><?xml version="1.0" encoding="utf-8"?>
+<file path=ppt/slides/slide44.xml><?xml version="1.0" encoding="utf-8"?>
 <p:sld xmlns:a="http://schemas.openxmlformats.org/drawingml/2006/main" xmlns:r="http://schemas.openxmlformats.org/officeDocument/2006/relationships" xmlns:p="http://schemas.openxmlformats.org/presentationml/2006/main">
   <p:cSld>
     <p:spTree>
@@ -14813,7 +15056,7 @@
 </p:sld>
 </file>
 
-<file path=ppt/slides/slide44.xml><?xml version="1.0" encoding="utf-8"?>
+<file path=ppt/slides/slide45.xml><?xml version="1.0" encoding="utf-8"?>
 <p:sld xmlns:a="http://schemas.openxmlformats.org/drawingml/2006/main" xmlns:r="http://schemas.openxmlformats.org/officeDocument/2006/relationships" xmlns:p="http://schemas.openxmlformats.org/presentationml/2006/main">
   <p:cSld>
     <p:spTree>
@@ -14904,7 +15147,7 @@
 </p:sld>
 </file>
 
-<file path=ppt/slides/slide45.xml><?xml version="1.0" encoding="utf-8"?>
+<file path=ppt/slides/slide46.xml><?xml version="1.0" encoding="utf-8"?>
 <p:sld xmlns:a="http://schemas.openxmlformats.org/drawingml/2006/main" xmlns:r="http://schemas.openxmlformats.org/officeDocument/2006/relationships" xmlns:p="http://schemas.openxmlformats.org/presentationml/2006/main">
   <p:cSld>
     <p:spTree>
@@ -15300,7 +15543,7 @@
 </p:sld>
 </file>
 
-<file path=ppt/slides/slide46.xml><?xml version="1.0" encoding="utf-8"?>
+<file path=ppt/slides/slide47.xml><?xml version="1.0" encoding="utf-8"?>
 <p:sld xmlns:a="http://schemas.openxmlformats.org/drawingml/2006/main" xmlns:r="http://schemas.openxmlformats.org/officeDocument/2006/relationships" xmlns:p="http://schemas.openxmlformats.org/presentationml/2006/main">
   <p:cSld>
     <p:spTree>
@@ -15656,7 +15899,7 @@
 </p:sld>
 </file>
 
-<file path=ppt/slides/slide47.xml><?xml version="1.0" encoding="utf-8"?>
+<file path=ppt/slides/slide48.xml><?xml version="1.0" encoding="utf-8"?>
 <p:sld xmlns:a="http://schemas.openxmlformats.org/drawingml/2006/main" xmlns:r="http://schemas.openxmlformats.org/officeDocument/2006/relationships" xmlns:p="http://schemas.openxmlformats.org/presentationml/2006/main">
   <p:cSld>
     <p:spTree>
@@ -15738,101 +15981,6 @@
 </p:sld>
 </file>
 
-<file path=ppt/slides/slide48.xml><?xml version="1.0" encoding="utf-8"?>
-<p:sld xmlns:a="http://schemas.openxmlformats.org/drawingml/2006/main" xmlns:r="http://schemas.openxmlformats.org/officeDocument/2006/relationships" xmlns:p="http://schemas.openxmlformats.org/presentationml/2006/main">
-  <p:cSld>
-    <p:spTree>
-      <p:nvGrpSpPr>
-        <p:cNvPr id="1" name=""/>
-        <p:cNvGrpSpPr/>
-        <p:nvPr/>
-      </p:nvGrpSpPr>
-      <p:grpSpPr>
-        <a:xfrm>
-          <a:off x="0" y="0"/>
-          <a:ext cx="0" cy="0"/>
-          <a:chOff x="0" y="0"/>
-          <a:chExt cx="0" cy="0"/>
-        </a:xfrm>
-      </p:grpSpPr>
-      <p:sp>
-        <p:nvSpPr>
-          <p:cNvPr id="2" name="Title 1"/>
-          <p:cNvSpPr>
-            <a:spLocks noGrp="1"/>
-          </p:cNvSpPr>
-          <p:nvPr>
-            <p:ph type="title"/>
-          </p:nvPr>
-        </p:nvSpPr>
-        <p:spPr>
-          <a:xfrm>
-            <a:off x="457200" y="205979"/>
-            <a:ext cx="8229600" cy="857250"/>
-          </a:xfrm>
-        </p:spPr>
-        <p:txBody>
-          <a:bodyPr/>
-          <a:lstStyle/>
-          <a:p>
-            <a:pPr lvl="0" indent="0" marL="0">
-              <a:buNone/>
-            </a:pPr>
-            <a:r>
-              <a:rPr/>
-              <a:t>Macro against weighted, one last time</a:t>
-            </a:r>
-          </a:p>
-        </p:txBody>
-      </p:sp>
-      <p:sp>
-        <p:nvSpPr>
-          <p:cNvPr id="3" name="Content Placeholder 2"/>
-          <p:cNvSpPr>
-            <a:spLocks noGrp="1"/>
-          </p:cNvSpPr>
-          <p:nvPr>
-            <p:ph idx="1"/>
-          </p:nvPr>
-        </p:nvSpPr>
-        <p:spPr>
-          <a:xfrm>
-            <a:off x="457200" y="1200151"/>
-            <a:ext cx="8229600" cy="3394472"/>
-          </a:xfrm>
-        </p:spPr>
-        <p:txBody>
-          <a:bodyPr/>
-          <a:lstStyle/>
-          <a:p>
-            <a:pPr lvl="0"/>
-            <a:r>
-              <a:rPr/>
-              <a:t>macro avg F1: </a:t>
-            </a:r>
-            <a:r>
-              <a:rPr b="1"/>
-              <a:t>0.707</a:t>
-            </a:r>
-          </a:p>
-          <a:p>
-            <a:pPr lvl="0"/>
-            <a:r>
-              <a:rPr/>
-              <a:t>weighted avg F1: </a:t>
-            </a:r>
-            <a:r>
-              <a:rPr b="1"/>
-              <a:t>0.883</a:t>
-            </a:r>
-          </a:p>
-        </p:txBody>
-      </p:sp>
-    </p:spTree>
-  </p:cSld>
-</p:sld>
-</file>
-
 <file path=ppt/slides/slide49.xml><?xml version="1.0" encoding="utf-8"?>
 <p:sld xmlns:a="http://schemas.openxmlformats.org/drawingml/2006/main" xmlns:r="http://schemas.openxmlformats.org/officeDocument/2006/relationships" xmlns:p="http://schemas.openxmlformats.org/presentationml/2006/main">
   <p:cSld>
@@ -15875,7 +16023,7 @@
             </a:pPr>
             <a:r>
               <a:rPr/>
-              <a:t>What to take away</a:t>
+              <a:t>Macro against weighted, one last time</a:t>
             </a:r>
           </a:p>
         </p:txBody>
@@ -15902,57 +16050,23 @@
           <a:p>
             <a:pPr lvl="0"/>
             <a:r>
+              <a:rPr/>
+              <a:t>macro avg F1: </a:t>
+            </a:r>
+            <a:r>
               <a:rPr b="1"/>
-              <a:t>96.20% accuracy, nothing caught.</a:t>
-            </a:r>
-            <a:r>
-              <a:rPr/>
-              <a:t> Accuracy measures the majority class</a:t>
+              <a:t>0.707</a:t>
             </a:r>
           </a:p>
           <a:p>
             <a:pPr lvl="0"/>
             <a:r>
               <a:rPr/>
-              <a:t>Precision is about the </a:t>
+              <a:t>weighted avg F1: </a:t>
             </a:r>
             <a:r>
               <a:rPr b="1"/>
-              <a:t>alarms</a:t>
-            </a:r>
-            <a:r>
-              <a:rPr/>
-              <a:t>, recall is about the </a:t>
-            </a:r>
-            <a:r>
-              <a:rPr b="1"/>
-              <a:t>failures</a:t>
-            </a:r>
-          </a:p>
-          <a:p>
-            <a:pPr lvl="0"/>
-            <a:r>
-              <a:rPr/>
-              <a:t>The </a:t>
-            </a:r>
-            <a:r>
-              <a:rPr b="1"/>
-              <a:t>threshold is a decision</a:t>
-            </a:r>
-            <a:r>
-              <a:rPr/>
-              <a:t>, and it has a formula</a:t>
-            </a:r>
-          </a:p>
-          <a:p>
-            <a:pPr lvl="0"/>
-            <a:r>
-              <a:rPr b="1"/>
-              <a:t>AUC measures ranking</a:t>
-            </a:r>
-            <a:r>
-              <a:rPr/>
-              <a:t> and hides imbalance</a:t>
+              <a:t>0.883</a:t>
             </a:r>
           </a:p>
         </p:txBody>
@@ -16074,6 +16188,135 @@
 </file>
 
 <file path=ppt/slides/slide50.xml><?xml version="1.0" encoding="utf-8"?>
+<p:sld xmlns:a="http://schemas.openxmlformats.org/drawingml/2006/main" xmlns:r="http://schemas.openxmlformats.org/officeDocument/2006/relationships" xmlns:p="http://schemas.openxmlformats.org/presentationml/2006/main">
+  <p:cSld>
+    <p:spTree>
+      <p:nvGrpSpPr>
+        <p:cNvPr id="1" name=""/>
+        <p:cNvGrpSpPr/>
+        <p:nvPr/>
+      </p:nvGrpSpPr>
+      <p:grpSpPr>
+        <a:xfrm>
+          <a:off x="0" y="0"/>
+          <a:ext cx="0" cy="0"/>
+          <a:chOff x="0" y="0"/>
+          <a:chExt cx="0" cy="0"/>
+        </a:xfrm>
+      </p:grpSpPr>
+      <p:sp>
+        <p:nvSpPr>
+          <p:cNvPr id="2" name="Title 1"/>
+          <p:cNvSpPr>
+            <a:spLocks noGrp="1"/>
+          </p:cNvSpPr>
+          <p:nvPr>
+            <p:ph type="title"/>
+          </p:nvPr>
+        </p:nvSpPr>
+        <p:spPr>
+          <a:xfrm>
+            <a:off x="457200" y="205979"/>
+            <a:ext cx="8229600" cy="857250"/>
+          </a:xfrm>
+        </p:spPr>
+        <p:txBody>
+          <a:bodyPr/>
+          <a:lstStyle/>
+          <a:p>
+            <a:pPr lvl="0" indent="0" marL="0">
+              <a:buNone/>
+            </a:pPr>
+            <a:r>
+              <a:rPr/>
+              <a:t>What to take away</a:t>
+            </a:r>
+          </a:p>
+        </p:txBody>
+      </p:sp>
+      <p:sp>
+        <p:nvSpPr>
+          <p:cNvPr id="3" name="Content Placeholder 2"/>
+          <p:cNvSpPr>
+            <a:spLocks noGrp="1"/>
+          </p:cNvSpPr>
+          <p:nvPr>
+            <p:ph idx="1"/>
+          </p:nvPr>
+        </p:nvSpPr>
+        <p:spPr>
+          <a:xfrm>
+            <a:off x="457200" y="1200151"/>
+            <a:ext cx="8229600" cy="3394472"/>
+          </a:xfrm>
+        </p:spPr>
+        <p:txBody>
+          <a:bodyPr/>
+          <a:lstStyle/>
+          <a:p>
+            <a:pPr lvl="0"/>
+            <a:r>
+              <a:rPr b="1"/>
+              <a:t>96.20% accuracy, nothing caught.</a:t>
+            </a:r>
+            <a:r>
+              <a:rPr/>
+              <a:t> Accuracy measures the majority class</a:t>
+            </a:r>
+          </a:p>
+          <a:p>
+            <a:pPr lvl="0"/>
+            <a:r>
+              <a:rPr/>
+              <a:t>Precision is about the </a:t>
+            </a:r>
+            <a:r>
+              <a:rPr b="1"/>
+              <a:t>alarms</a:t>
+            </a:r>
+            <a:r>
+              <a:rPr/>
+              <a:t>, recall is about the </a:t>
+            </a:r>
+            <a:r>
+              <a:rPr b="1"/>
+              <a:t>failures</a:t>
+            </a:r>
+          </a:p>
+          <a:p>
+            <a:pPr lvl="0"/>
+            <a:r>
+              <a:rPr/>
+              <a:t>The </a:t>
+            </a:r>
+            <a:r>
+              <a:rPr b="1"/>
+              <a:t>threshold is a decision</a:t>
+            </a:r>
+            <a:r>
+              <a:rPr/>
+              <a:t>, and it has a formula</a:t>
+            </a:r>
+          </a:p>
+          <a:p>
+            <a:pPr lvl="0"/>
+            <a:r>
+              <a:rPr b="1"/>
+              <a:t>AUC measures ranking</a:t>
+            </a:r>
+            <a:r>
+              <a:rPr/>
+              <a:t> and hides imbalance</a:t>
+            </a:r>
+          </a:p>
+        </p:txBody>
+      </p:sp>
+    </p:spTree>
+  </p:cSld>
+</p:sld>
+</file>
+
+<file path=ppt/slides/slide51.xml><?xml version="1.0" encoding="utf-8"?>
 <p:sld xmlns:a="http://schemas.openxmlformats.org/drawingml/2006/main" xmlns:r="http://schemas.openxmlformats.org/officeDocument/2006/relationships" xmlns:p="http://schemas.openxmlformats.org/presentationml/2006/main">
   <p:cSld>
     <p:spTree>
@@ -16465,41 +16708,67 @@
             </a:pPr>
             <a:r>
               <a:rPr/>
-              <a:t>Log-odds of p = P(y = 1 | x): a line</a:t>
-            </a:r>
-          </a:p>
-        </p:txBody>
-      </p:sp>
-      <p:pic>
-        <p:nvPicPr>
-          <p:cNvPr descr="eq_2e0b8814eb.png" id="0" name="Picture 1"/>
-          <p:cNvPicPr>
-            <a:picLocks noGrp="1" noChangeAspect="1"/>
-          </p:cNvPicPr>
-          <p:nvPr/>
-        </p:nvPicPr>
-        <p:blipFill>
-          <a:blip r:embed="rId3"/>
-          <a:stretch>
-            <a:fillRect/>
-          </a:stretch>
-        </p:blipFill>
-        <p:spPr bwMode="auto">
+              <a:t>Why the log-odds</a:t>
+            </a:r>
+          </a:p>
+        </p:txBody>
+      </p:sp>
+      <p:sp>
+        <p:nvSpPr>
+          <p:cNvPr id="3" name="Content Placeholder 2"/>
+          <p:cNvSpPr>
+            <a:spLocks noGrp="1"/>
+          </p:cNvSpPr>
+          <p:nvPr>
+            <p:ph idx="1"/>
+          </p:nvPr>
+        </p:nvSpPr>
+        <p:spPr>
           <a:xfrm>
-            <a:off x="457200" y="2477889"/>
-            <a:ext cx="8229600" cy="736600"/>
+            <a:off x="457200" y="1200151"/>
+            <a:ext cx="8229600" cy="3394472"/>
           </a:xfrm>
-          <a:prstGeom prst="rect">
-            <a:avLst/>
-          </a:prstGeom>
-          <a:noFill/>
-          <a:ln w="9525">
-            <a:noFill/>
-            <a:headEnd/>
-            <a:tailEnd/>
-          </a:ln>
         </p:spPr>
-      </p:pic>
+        <p:txBody>
+          <a:bodyPr/>
+          <a:lstStyle/>
+          <a:p>
+            <a:pPr lvl="0"/>
+            <a:r>
+              <a:rPr/>
+              <a:t>A line gives any number; a probability, only [0, 1]</a:t>
+            </a:r>
+          </a:p>
+          <a:p>
+            <a:pPr lvl="0"/>
+            <a:r>
+              <a:rPr/>
+              <a:t>Odds, p ÷ (1 − p): no ceiling, from 0 to ∞</a:t>
+            </a:r>
+          </a:p>
+          <a:p>
+            <a:pPr lvl="0"/>
+            <a:r>
+              <a:rPr/>
+              <a:t>Log of the odds: no floor either, −∞ to +∞</a:t>
+            </a:r>
+          </a:p>
+          <a:p>
+            <a:pPr lvl="0"/>
+            <a:r>
+              <a:rPr/>
+              <a:t>p = 0.01, 0.5, 0.99 → log-odds −4.60, 0, +4.60</a:t>
+            </a:r>
+          </a:p>
+          <a:p>
+            <a:pPr lvl="0"/>
+            <a:r>
+              <a:rPr/>
+              <a:t>Bonus: coefficients multiply the odds (slide 12)</a:t>
+            </a:r>
+          </a:p>
+        </p:txBody>
+      </p:sp>
     </p:spTree>
   </p:cSld>
 </p:sld>

--- a/Lessons/04_classification_and_metrics/Slides/classification_and_metrics_slides.pptx
+++ b/Lessons/04_classification_and_metrics/Slides/classification_and_metrics_slides.pptx
@@ -588,7 +588,7 @@
             </a:pPr>
             <a:r>
               <a:rPr/>
-              <a:t>The one to watch for: choosing the penalty by looking at the test error. It is the natural thing to do because the test error is the number they were told to care about, and it is exactly the mistake lesson 1 named. Today’s lesson ends up in the same place from a different direction, on slide 45, when we choose a decision threshold by looking at the test set. Lesson 5 gives them the machinery to do both honestly.</a:t>
+              <a:t>The one to watch for: choosing the penalty by looking at the test error. It is the natural thing to do because the test error is the number they were told to care about. It is exactly the mistake lesson 1 named: once the test set has helped choose anything, its score is no longer an honest estimate of how the model does on new data, because the choice was fitted to it. Today’s lesson ends up in the same place from a different direction, on slide 45, when we choose a decision threshold by looking at the test set. Lesson 5 gives them the machinery to do both honestly.</a:t>
             </a:r>
           </a:p>
         </p:txBody>
@@ -698,7 +698,7 @@
             </a:pPr>
             <a:r>
               <a:rPr/>
-              <a:t>That last one is the one to flag. It is largest in the middle, one quarter, and it decays to zero at both ends. On slide 19 that fact will be simultaneously the reason the sigmoid works and the reason squared error does not.</a:t>
+              <a:t>That last one is the one to flag. It is largest in the middle, one quarter, and it decays to zero at both ends. That one fact does two jobs later. It is why the sigmoid behaves well: flat ends mean that once the model is sure, extra evidence changes little (slide 8). And it is why squared error fails with it: slide 19 shows that the same factor ends up inside squared error’s gradient and switches learning off exactly when the model is confidently wrong.</a:t>
             </a:r>
           </a:p>
         </p:txBody>
@@ -780,7 +780,21 @@
             </a:pPr>
             <a:r>
               <a:rPr/>
-              <a:t>This is the interpretability that keeps logistic regression in production in medicine and credit scoring. A coefficient of 1.80 means: a drive one standard deviation worse on that counter has exp(1.80), about six times, the odds of failing.</a:t>
+              <a:t>This is the interpretability that keeps logistic regression in production in medicine and credit scoring. Standardising first (StandardScaler, lesson 3) puts every feature in the same unit, one standard deviation, so the coefficients can be compared with each other.</a:t>
+            </a:r>
+          </a:p>
+          <a:p>
+            <a:pPr lvl="0" indent="0" marL="0">
+              <a:buNone/>
+            </a:pPr>
+          </a:p>
+          <a:p>
+            <a:pPr lvl="0" indent="0" marL="0">
+              <a:buNone/>
+            </a:pPr>
+            <a:r>
+              <a:rPr/>
+              <a:t>1.80 is the true coefficient of reallocated_sectors, the one the data was generated with (next slide). It means: a drive one standard deviation worse on that counter has exp(1.80), about six times, the odds of failing. The fitted coefficient on the next slide is 1.66, a multiplier of 5.28.</a:t>
             </a:r>
           </a:p>
           <a:p>
@@ -904,6 +918,20 @@
             </a:pPr>
             <a:r>
               <a:rPr/>
+              <a:t>The columns: True is the coefficient disk_data.py generated the labels with, Fitted is what LogisticRegression estimated from 6,000 training drives, and “Odds ×” is exp(Fitted), the multiplier of slide 12.</a:t>
+            </a:r>
+          </a:p>
+          <a:p>
+            <a:pPr lvl="0" indent="0" marL="0">
+              <a:buNone/>
+            </a:pPr>
+          </a:p>
+          <a:p>
+            <a:pPr lvl="0" indent="0" marL="0">
+              <a:buNone/>
+            </a:pPr>
+            <a:r>
+              <a:rPr/>
               <a:t>Go down the column. Everything is close. Nothing is exact, and say why - 6,000 training drives carrying 230 failures is a modest amount of evidence, and 230 is the number that matters, not 6,000.</a:t>
             </a:r>
           </a:p>
@@ -1042,21 +1070,21 @@
             </a:pPr>
             <a:r>
               <a:rPr/>
-              <a:t>An average drive has a 0.2% chance of failing in thirty days. For the model to reach an even bet - probability one half, log-odds zero - the evidence has to move the log-odds by more than six. Only badly degraded drives manage that.</a:t>
-            </a:r>
-          </a:p>
-          <a:p>
-            <a:pPr lvl="0" indent="0" marL="0">
-              <a:buNone/>
-            </a:pPr>
-          </a:p>
-          <a:p>
-            <a:pPr lvl="0" indent="0" marL="0">
-              <a:buNone/>
-            </a:pPr>
-            <a:r>
-              <a:rPr/>
-              <a:t>So the model will assign small probabilities to almost everything, and a threshold of 0.5 will flag almost nothing. That is not the model being timid. It is the model being correct about a rare event. Everything that looks like a failure of the classifier in the next hour traces back to this number.</a:t>
+              <a:t>An average drive has a 0.2% chance of failing in thirty days. For the model to reach an even bet - probability one half, log-odds zero - the counters have to add more than 6.09 to the intercept’s -6.09. Only badly degraded drives manage that.</a:t>
+            </a:r>
+          </a:p>
+          <a:p>
+            <a:pPr lvl="0" indent="0" marL="0">
+              <a:buNone/>
+            </a:pPr>
+          </a:p>
+          <a:p>
+            <a:pPr lvl="0" indent="0" marL="0">
+              <a:buNone/>
+            </a:pPr>
+            <a:r>
+              <a:rPr/>
+              <a:t>So the model will assign small probabilities to almost everything. Introduce the word now: a model that outputs a probability still has to decide “fail” or “healthy”, and it does so with a threshold - flag the drive if its probability is at least the threshold. scikit-learn’s predict() uses 0.5. With these probabilities, a threshold of 0.5 will flag almost nothing. That is not the model being timid. It is the model being correct about a rare event. Everything that looks like a failure of the classifier in the next hour traces back to this number.</a:t>
             </a:r>
           </a:p>
         </p:txBody>
@@ -1262,7 +1290,7 @@
             </a:pPr>
             <a:r>
               <a:rPr/>
-              <a:t>Two practical notes worth saying aloud. We take the logarithm because it turns the product into a sum, which differentiates one term at a time - and because the product itself is too small to store. Gradient descent starts with every probability at 0.5, and 0.5 multiplied by itself 6,000 times, once per training drive, is about 10 to the minus 1806. The smallest number a 64-bit float holds is about 10 to the minus 308, so the computer stores exactly zero. Every real implementation works in log space, and not for elegance.</a:t>
+              <a:t>Two practical notes worth saying aloud. We take the logarithm because it turns the product into a sum, which differentiates one term at a time - and because the product itself is too small to store. Gradient descent starts with all weights at zero, so z is 0 for every drive and every probability is 0.5; 0.5 multiplied by itself 6,000 times, once per training drive, is about 10 to the minus 1806. The smallest number a 64-bit float holds is about 10 to the minus 308, so the computer stores exactly zero. Every real implementation therefore adds up the logarithms of the probabilities instead of multiplying the probabilities, and not for elegance.</a:t>
             </a:r>
           </a:p>
           <a:p>
@@ -1386,7 +1414,7 @@
             </a:pPr>
             <a:r>
               <a:rPr/>
-              <a:t>The reading that makes it stick: the cost of an outcome is the SURPRISE of seeing it. Something you called certain costs nothing. Something you gave a probability of one in a thousand costs log 1000, about 6.9. Something you declared impossible costs infinity.</a:t>
+              <a:t>The reading that makes it stick: the cost of an outcome is the SURPRISE of seeing it. Something you called certain costs nothing. Something you gave a probability of one in a thousand costs log 1000, about 6.9 (natural logarithm, as everywhere in this lesson). Something you declared impossible costs infinity.</a:t>
             </a:r>
           </a:p>
           <a:p>
@@ -1496,35 +1524,77 @@
             </a:pPr>
             <a:r>
               <a:rPr/>
-              <a:t>Prediction error times feature, averaged. Character for character the gradient of lesson 3, with a different model and a different cost function.</a:t>
-            </a:r>
-          </a:p>
-          <a:p>
-            <a:pPr lvl="0" indent="0" marL="0">
-              <a:buNone/>
-            </a:pPr>
-          </a:p>
-          <a:p>
-            <a:pPr lvl="0" indent="0" marL="0">
-              <a:buNone/>
-            </a:pPr>
-            <a:r>
-              <a:rPr/>
-              <a:t>The cancellation is worth showing on the board if there is appetite: the sigma times one-minus-sigma from the chain rule cancels against the one-over-sigma from the logarithm. Handout section 3.4 has it.</a:t>
-            </a:r>
-          </a:p>
-          <a:p>
-            <a:pPr lvl="0" indent="0" marL="0">
-              <a:buNone/>
-            </a:pPr>
-          </a:p>
-          <a:p>
-            <a:pPr lvl="0" indent="0" marL="0">
-              <a:buNone/>
-            </a:pPr>
-            <a:r>
-              <a:rPr/>
-              <a:t>If someone asks whether that is a coincidence: no. Both are generalised linear models fitted by maximum likelihood - Gaussian noise for regression, Bernoulli outcomes for classification - and the whole exponential family gives this form. They do not need that theory to use either method, but it is why the same gradient descent code, unchanged, trains both.</a:t>
+              <a:t>What the formula says, in words. To find how the cost J changes when the coefficient w_j is nudged up: take each training drive, compute its error - the predicted probability y-hat minus the true label y, which is 0 or 1 - multiply that error by the drive’s value of feature j, and average over the m drives. Gradient descent then steps w_j in the opposite direction.</a:t>
+            </a:r>
+          </a:p>
+          <a:p>
+            <a:pPr lvl="0" indent="0" marL="0">
+              <a:buNone/>
+            </a:pPr>
+          </a:p>
+          <a:p>
+            <a:pPr lvl="0" indent="0" marL="0">
+              <a:buNone/>
+            </a:pPr>
+            <a:r>
+              <a:rPr/>
+              <a:t>What is new, and what is not. The formula is written with exactly the symbols of lesson 3’s slide 23. The difference is hidden in y-hat: in lesson 3 it was the straight line w-transpose-x plus b, and here it is the sigmoid of that line, the probability of slide 11 - which is why the title says so. The cost is different too: squared error there, log loss (slide 17) here. Different model, different cost, and yet the same gradient.</a:t>
+            </a:r>
+          </a:p>
+          <a:p>
+            <a:pPr lvl="0" indent="0" marL="0">
+              <a:buNone/>
+            </a:pPr>
+          </a:p>
+          <a:p>
+            <a:pPr lvl="0" indent="0" marL="0">
+              <a:buNone/>
+            </a:pPr>
+            <a:r>
+              <a:rPr/>
+              <a:t>A concrete drive. A drive that failed, y = 1, to which the model gives y-hat = 0.2: its error is 0.2 minus 1, which is minus 0.8. A negative term means the cost falls if w_j rises, so this drive pulls w_j up, and pulls harder the larger its value of feature j. A healthy drive, y = 0, given the same 0.2 has error plus 0.2 and pulls the other way, four times more gently. This is lesson 3’s weighted vote: each drive pulls in proportion to how wrong it was and how large the feature was for it.</a:t>
+            </a:r>
+          </a:p>
+          <a:p>
+            <a:pPr lvl="0" indent="0" marL="0">
+              <a:buNone/>
+            </a:pPr>
+          </a:p>
+          <a:p>
+            <a:pPr lvl="0" indent="0" marL="0">
+              <a:buNone/>
+            </a:pPr>
+            <a:r>
+              <a:rPr/>
+              <a:t>Why it comes out the same - worth the board if there is appetite, handout section 3.4 has it in full. Follow one drive through the chain rule, in three links, with p for y-hat and z for w-transpose-x plus b: - how the loss changes with p: (p - y) divided by p times (1 - p) - the denominator comes from the logarithms in the log loss; - how p changes with z: p times (1 - p), the sigmoid’s derivative from slide 11; - how z changes with w_j: x_j. Multiply the three: the p times (1 - p) cancels, and what is left is (p - y) times x_j.</a:t>
+            </a:r>
+          </a:p>
+          <a:p>
+            <a:pPr lvl="0" indent="0" marL="0">
+              <a:buNone/>
+            </a:pPr>
+          </a:p>
+          <a:p>
+            <a:pPr lvl="0" indent="0" marL="0">
+              <a:buNone/>
+            </a:pPr>
+            <a:r>
+              <a:rPr/>
+              <a:t>Why that cancellation matters, and it is the bridge to the next slide: with squared error in place of log loss, nothing cancels the factor p times (1 - p), and slide 19 shows what it does to a drive the model is confidently wrong about.</a:t>
+            </a:r>
+          </a:p>
+          <a:p>
+            <a:pPr lvl="0" indent="0" marL="0">
+              <a:buNone/>
+            </a:pPr>
+          </a:p>
+          <a:p>
+            <a:pPr lvl="0" indent="0" marL="0">
+              <a:buNone/>
+            </a:pPr>
+            <a:r>
+              <a:rPr/>
+              <a:t>If someone asks whether the match is a coincidence: no, and one sentence is enough. Both costs come from maximum likelihood - squared error when the noise on y is Gaussian (lesson 3, handout section 2.2), log loss when y is a 0/1 outcome - and each paired with its own model gives this same form. Statisticians call the family “generalised linear models”; the name is not examinable. The practical consequence is: the same gradient descent code trains both models, and only the line that computes y-hat changes.</a:t>
             </a:r>
           </a:p>
         </p:txBody>
@@ -1606,6 +1676,20 @@
             </a:pPr>
             <a:r>
               <a:rPr/>
+              <a:t>Both panels take a drive that failed, y = 1, and move the model’s probability p for it along the horizontal axis. Squared error here is (p - 1) squared, the handout’s convention in section 4.</a:t>
+            </a:r>
+          </a:p>
+          <a:p>
+            <a:pPr lvl="0" indent="0" marL="0">
+              <a:buNone/>
+            </a:pPr>
+          </a:p>
+          <a:p>
+            <a:pPr lvl="0" indent="0" marL="0">
+              <a:buNone/>
+            </a:pPr>
+            <a:r>
+              <a:rPr/>
               <a:t>Left panel, the costs. A drive failed and the model said 0.0001. Squared error charges 0.9998. An honest “don’t know” - 0.5 - costs 0.25. So the worst possible answer is four times worse than a shrug. Log loss charges 9.2 against 0.69, and the ratio grows without bound.</a:t>
             </a:r>
           </a:p>
@@ -1620,7 +1704,7 @@
             </a:pPr>
             <a:r>
               <a:rPr/>
-              <a:t>Right panel is the real argument, so spend the time here. The gradient is what the optimiser actually uses. Squared error’s gradient through the sigmoid carries a factor p times one-minus-p - which is exactly the sigmoid derivative from slide 11 - and that factor goes to zero as p goes to zero.</a:t>
+              <a:t>Right panel is the real argument, so spend the time here. It shows the size of the gradient with respect to z, the push gradient descent gives the model. Log loss’s gradient is p - 1 (slide 18). Squared error’s is 2(p - 1) times p times (1 - p): the chain rule through the sigmoid brings in its derivative, p times one-minus-p, from slide 11, and nothing cancels it. That factor goes to zero as p goes to zero.</a:t>
             </a:r>
           </a:p>
           <a:p>
@@ -2704,7 +2788,7 @@
             </a:pPr>
             <a:r>
               <a:rPr/>
-              <a:t>The essential point: these two errors are NOT the same size, and no single-number metric knows that. Accuracy treats them as identical. F1 treats them as identical. Only a cost, supplied from outside the data, distinguishes them.</a:t>
+              <a:t>The essential point: these two errors are NOT the same size, and no single-number metric knows that. Accuracy treats them as identical. F1, the metric of slide 30, treats them as identical. Only a cost, supplied from outside the data, distinguishes them.</a:t>
             </a:r>
           </a:p>
           <a:p>
@@ -3558,7 +3642,7 @@
             </a:pPr>
             <a:r>
               <a:rPr/>
-              <a:t>That 0.5 is predict()’s default and nothing more. It is the right choice when the two errors cost the same AND the classes are balanced. Neither is true here, and neither is true in most real problems.</a:t>
+              <a:t>That 0.5 is predict()’s default and nothing more. It is the right choice only when the two errors cost the same and the probabilities are trustworthy - slide 44 derives the threshold from the costs, and it is 0.5 exactly when they are equal. Here a miss costs about nineteen times a false alarm, and in most real problems the costs differ too.</a:t>
             </a:r>
           </a:p>
           <a:p>
@@ -4288,7 +4372,7 @@
             </a:pPr>
             <a:r>
               <a:rPr/>
-              <a:t>The consequence: AUC says nothing about whether “0.7” means anything. If you need the probabilities to be believable - because you are computing expected costs, as slide 43 does - AUC is not the check you want.</a:t>
+              <a:t>The consequence: AUC says nothing about whether “0.7” means anything. If you need the probabilities to be believable - because you are computing expected costs, as slide 44 does - AUC is not the check you want.</a:t>
             </a:r>
           </a:p>
           <a:p>
@@ -4384,7 +4468,21 @@
             </a:pPr>
             <a:r>
               <a:rPr/>
-              <a:t>Same model. Not retrained. We keep every healthy drive in a fleet of 60,000 and thin the FAILURES until they are 0.4% instead of 3.8% - the direction reality moves in fraud, disease, hardware failure.</a:t>
+              <a:t>Same model. Not retrained. Notebook 3 generates a new, larger fleet of 60,000 drives from the same simulator, keeps every healthy drive, and throws away failures at random until they are 0.4% instead of 3.8% - the direction reality moves in fraud, disease, hardware failure.</a:t>
+            </a:r>
+          </a:p>
+          <a:p>
+            <a:pPr lvl="0" indent="0" marL="0">
+              <a:buNone/>
+            </a:pPr>
+          </a:p>
+          <a:p>
+            <a:pPr lvl="0" indent="0" marL="0">
+              <a:buNone/>
+            </a:pPr>
+            <a:r>
+              <a:rPr/>
+              <a:t>Someone will notice that at 3.8% the AUC reads 0.968, not the 0.949 of slide 38. Different drives: 0.949 rests on the 76 failures of our 2,000-drive test set, 0.968 on a fleet thirty times larger. Both are estimates of the same ranking ability.</a:t>
             </a:r>
           </a:p>
           <a:p>
@@ -4412,7 +4510,7 @@
             </a:pPr>
             <a:r>
               <a:rPr/>
-              <a:t>Right panel: the precision-recall curves are in three different worlds. Average precision falls from 0.706 to 0.361, and precision at the same threshold falls from 0.79 to 0.26 - two alarms in three now false.</a:t>
+              <a:t>Right panel: the precision-recall curves are in three different worlds. Average precision falls from 0.706 to 0.361, and precision at the same threshold falls from 0.79 to 0.26 - three alarms in four now false.</a:t>
             </a:r>
           </a:p>
           <a:p>
@@ -4990,6 +5088,20 @@
             </a:pPr>
             <a:r>
               <a:rPr/>
+              <a:t>State the condition, because the derivation used it: p must be an honest probability - among drives given 0.05, about 5% really fail. That property is called calibration (slide 39). Divide every probability by ten, as slide 39 did, and the formula would still say 0.051 while flagging far too few drives.</a:t>
+            </a:r>
+          </a:p>
+          <a:p>
+            <a:pPr lvl="0" indent="0" marL="0">
+              <a:buNone/>
+            </a:pPr>
+          </a:p>
+          <a:p>
+            <a:pPr lvl="0" indent="0" marL="0">
+              <a:buNone/>
+            </a:pPr>
+            <a:r>
+              <a:rPr/>
               <a:t>If the errors cost the same, t-star is 0.5 and the default was right all along. As misses grow more expensive, it falls towards zero.</a:t>
             </a:r>
           </a:p>
@@ -5004,7 +5116,7 @@
             </a:pPr>
             <a:r>
               <a:rPr/>
-              <a:t>Empirically we found 0.08 against a theoretical 0.051, and the curve is flat between them.</a:t>
+              <a:t>Empirically we found 0.08 against a theoretical 0.051, and the curve is flat between them. Two likely reasons for the gap: the test set holds only 76 failures, and the probabilities are good but not perfectly calibrated.</a:t>
             </a:r>
           </a:p>
         </p:txBody>
@@ -5348,7 +5460,7 @@
             </a:pPr>
             <a:r>
               <a:rPr/>
-              <a:t>The ROC curve by hand, the 200,000-pair experiment, the cost curve, then the multiclass matrix. Run notebook 03. Fifteen minutes, and the two multiclass slides that follow (46 and 47) are shown when the notebook reaches its last section, so they run alongside it rather than after it.</a:t>
+              <a:t>The ROC curve by hand, the 200,000-pair experiment, the cost curve, then the multiclass matrix. Run notebook 03. Fifteen minutes, and the two multiclass slides that follow (48 and 49) are shown when the notebook reaches its last section, so they run alongside it rather than after it.</a:t>
             </a:r>
           </a:p>
           <a:p>
@@ -5706,7 +5818,7 @@
             </a:pPr>
             <a:r>
               <a:rPr/>
-              <a:t>The second thing: every metric on the slide depended on a threshold, and the threshold has an answer - C-FP over C-FP plus C-FN - that comes from the business, not from the data.</a:t>
+              <a:t>The second thing: every metric on the slide depended on a threshold, and the threshold has an answer - C-FP over C-FP plus C-FN, for honest probabilities - that comes from the business, not from the data.</a:t>
             </a:r>
           </a:p>
         </p:txBody>
@@ -5912,7 +6024,7 @@
             </a:pPr>
             <a:r>
               <a:rPr/>
-              <a:t>Emphasise which part carries the marks. The classifier is a few lines and everyone will get it. The paragraph defending the threshold choice is where the learning is, and it is where the marks are.</a:t>
+              <a:t>Emphasise which part matters at the exam, where one of the ten exercises is drawn and they talk through their own notebook. The classifier is a few lines and everyone will get it. The paragraph defending the threshold choice is where the learning is, and it is what they will be asked to defend.</a:t>
             </a:r>
           </a:p>
           <a:p>
@@ -6146,35 +6258,49 @@
             </a:pPr>
             <a:r>
               <a:rPr/>
-              <a:t>Left: the curve. Steep in the middle, flat at both ends. Make the case that the flatness is the right behaviour, not a compromise - and be precise about what is diminishing. It is the total evidence z, not any one counter. Two units of log-odds from z = 0 take the probability from 0.50 to 0.88; the same two from z = 6 take it from 0.9975 to 0.9997, 178 times less.</a:t>
-            </a:r>
-          </a:p>
-          <a:p>
-            <a:pPr lvl="0" indent="0" marL="0">
-              <a:buNone/>
-            </a:pPr>
-          </a:p>
-          <a:p>
-            <a:pPr lvl="0" indent="0" marL="0">
-              <a:buNone/>
-            </a:pPr>
-            <a:r>
-              <a:rPr/>
-              <a:t>Expect someone to object that the previous figure says otherwise: there the curve is flat at the START, where drives have few reallocated sectors, not only at the ends. The answer is the horizontal axis. That curve is drawn against raw reallocated sectors, not against z, so it is steepest at 13.2 sectors and the first four sectors move it by only 0.03. Both pictures are right: the counters act on a log scale, and on that scale four sectors are worth +4.7 in log-odds, taking a drive from a 0.012% chance of failing to 1.3%, about a hundred times more. Handout section 1.1.</a:t>
-            </a:r>
-          </a:p>
-          <a:p>
-            <a:pPr lvl="0" indent="0" marL="0">
-              <a:buNone/>
-            </a:pPr>
-          </a:p>
-          <a:p>
-            <a:pPr lvl="0" indent="0" marL="0">
-              <a:buNone/>
-            </a:pPr>
-            <a:r>
-              <a:rPr/>
-              <a:t>Right panel: the same relationship inverted. This is the slide that explains WHY this particular curve and not some other S-shape. A probability is trapped in [0,1]. The odds - p over 1 minus p - remove the ceiling. The log of the odds removes the floor too, leaving something that runs over all of the real line.</a:t>
+              <a:t>Left: the curve. Its horizontal axis is z, the number the linear model w-transpose-x plus b produces for a drive - think of it as the total evidence that the drive will fail, all six counters added together with their weights. Its vertical axis is the probability. Slide 10 shows that z is exactly the log-odds; for now, z is “evidence”.</a:t>
+            </a:r>
+          </a:p>
+          <a:p>
+            <a:pPr lvl="0" indent="0" marL="0">
+              <a:buNone/>
+            </a:pPr>
+          </a:p>
+          <a:p>
+            <a:pPr lvl="0" indent="0" marL="0">
+              <a:buNone/>
+            </a:pPr>
+            <a:r>
+              <a:rPr/>
+              <a:t>Steep in the middle, flat at both ends. Make the case that the flatness is the right behaviour, not a compromise - and be precise about what is diminishing. It is the total evidence z, not any one counter. Two more units of z starting from z = 0 take the probability from 0.50 to 0.88; the same two units starting from z = 6 take it from 0.9975 to 0.9997, 178 times less. Once the model is nearly sure, more evidence barely changes its answer.</a:t>
+            </a:r>
+          </a:p>
+          <a:p>
+            <a:pPr lvl="0" indent="0" marL="0">
+              <a:buNone/>
+            </a:pPr>
+          </a:p>
+          <a:p>
+            <a:pPr lvl="0" indent="0" marL="0">
+              <a:buNone/>
+            </a:pPr>
+            <a:r>
+              <a:rPr/>
+              <a:t>Expect someone to object that the previous figure says otherwise: there the curve is flat at the START, where drives have few reallocated sectors, not only at the ends. The answer is the horizontal axis. That curve is drawn against raw reallocated sectors, not against z, so it is steepest at 13.2 sectors and the first four sectors move it by only 0.03. Both pictures are right. The model does not use the raw count: section 1.1 of the handout explains that four of the counters enter it as log(1 + count), so the first few sectors are a big step on the model’s own scale. On that scale four sectors add +4.7 to z: a drive with average telemetry and no reallocated sectors has a 0.012% chance of failing, and four sectors take it to 1.3%, about a hundred times more.</a:t>
+            </a:r>
+          </a:p>
+          <a:p>
+            <a:pPr lvl="0" indent="0" marL="0">
+              <a:buNone/>
+            </a:pPr>
+          </a:p>
+          <a:p>
+            <a:pPr lvl="0" indent="0" marL="0">
+              <a:buNone/>
+            </a:pPr>
+            <a:r>
+              <a:rPr/>
+              <a:t>Right panel: the same relationship inverted - probability on the horizontal axis, log-odds on the vertical one. This is the panel that explains WHY this particular curve and not some other S-shape; slide 9 says it in words. A probability is trapped in [0,1]. The odds - p over 1 minus p - remove the ceiling. The log of the odds removes the floor too, leaving something that runs over all of the real line.</a:t>
             </a:r>
           </a:p>
           <a:p>
@@ -6322,7 +6448,7 @@
             <a:pPr lvl="0"/>
             <a:r>
               <a:rPr/>
-              <a:t>it is the scale on which Bayes’ rule adds evidence - posterior log-odds is prior log-odds plus one term per independent piece of evidence - and a sum of terms is exactly what a linear model is;</a:t>
+              <a:t>it is the scale on which Bayes’ rule adds evidence: the log-odds after seeing a drive’s counters equals the log-odds before seeing them (from the base rate alone) plus one term per counter, if the counters are independent given the class - and a sum of one term per feature is exactly what a linear model is;</a:t>
             </a:r>
           </a:p>
           <a:p>
@@ -10848,7 +10974,7 @@
             </a:pPr>
             <a:r>
               <a:rPr/>
-              <a:t>The gradient is the one you already know</a:t>
+              <a:t>Lesson 3’s gradient, ŷ = σ(wᵀx + b)</a:t>
             </a:r>
           </a:p>
         </p:txBody>
@@ -11306,7 +11432,7 @@
                       </a:pPr>
                       <a:r>
                         <a:rPr/>
-                        <a:t>odds, and why not squared error, 8-18</a:t>
+                        <a:t>odds, and why not squared error, 8-20</a:t>
                       </a:r>
                     </a:p>
                   </a:txBody>
@@ -11338,7 +11464,7 @@
                       </a:pPr>
                       <a:r>
                         <a:rPr/>
-                        <a:t>gradient descent, 16</a:t>
+                        <a:t>gradient descent, 18</a:t>
                       </a:r>
                     </a:p>
                   </a:txBody>
@@ -11386,7 +11512,7 @@
                       </a:pPr>
                       <a:r>
                         <a:rPr/>
-                        <a:t>the decision boundary, 20</a:t>
+                        <a:t>the decision boundary, 22</a:t>
                       </a:r>
                     </a:p>
                   </a:txBody>
@@ -11424,7 +11550,7 @@
                       </a:pPr>
                       <a:r>
                         <a:rPr/>
-                        <a:t>the truth, recovered, 11-12</a:t>
+                        <a:t>the truth, recovered, 13-14</a:t>
                       </a:r>
                     </a:p>
                   </a:txBody>
@@ -12974,7 +13100,7 @@
                       </a:pPr>
                       <a:r>
                         <a:rPr/>
-                        <a:t>the number that should worry you, 22</a:t>
+                        <a:t>the number that should worry you, 24</a:t>
                       </a:r>
                     </a:p>
                   </a:txBody>
@@ -13012,7 +13138,7 @@
                       </a:pPr>
                       <a:r>
                         <a:rPr/>
-                        <a:t>the confusion matrix, 24</a:t>
+                        <a:t>the confusion matrix, 26</a:t>
                       </a:r>
                     </a:p>
                   </a:txBody>
@@ -13064,7 +13190,7 @@
                       </a:pPr>
                       <a:r>
                         <a:rPr/>
-                        <a:t>precision and recall, 26-29</a:t>
+                        <a:t>precision and recall, 28-31</a:t>
                       </a:r>
                     </a:p>
                   </a:txBody>
@@ -13128,7 +13254,7 @@
                       </a:pPr>
                       <a:r>
                         <a:rPr/>
-                        <a:t>the threshold sweep, 31-32</a:t>
+                        <a:t>the threshold sweep, 33-34</a:t>
                       </a:r>
                     </a:p>
                   </a:txBody>
@@ -13166,7 +13292,7 @@
                       </a:pPr>
                       <a:r>
                         <a:rPr/>
-                        <a:t>the precision-recall curve, 33</a:t>
+                        <a:t>the precision-recall curve, 35</a:t>
                       </a:r>
                     </a:p>
                   </a:txBody>
@@ -15659,7 +15785,7 @@
                       </a:pPr>
                       <a:r>
                         <a:rPr/>
-                        <a:t>the ROC curve by hand, 35</a:t>
+                        <a:t>the ROC curve by hand, 37</a:t>
                       </a:r>
                     </a:p>
                   </a:txBody>
@@ -15707,7 +15833,7 @@
                       </a:pPr>
                       <a:r>
                         <a:rPr/>
-                        <a:t>what AUC means, 36</a:t>
+                        <a:t>what AUC means, 38</a:t>
                       </a:r>
                     </a:p>
                   </a:txBody>
@@ -15739,7 +15865,7 @@
                       </a:pPr>
                       <a:r>
                         <a:rPr/>
-                        <a:t>the rare-positive trap, 38-39</a:t>
+                        <a:t>the rare-positive trap, 40-41</a:t>
                       </a:r>
                     </a:p>
                   </a:txBody>
@@ -15787,7 +15913,7 @@
                       </a:pPr>
                       <a:r>
                         <a:rPr/>
-                        <a:t>the threshold from costs, 41-43</a:t>
+                        <a:t>the threshold from costs, 43-45</a:t>
                       </a:r>
                     </a:p>
                   </a:txBody>
@@ -15825,7 +15951,7 @@
                       </a:pPr>
                       <a:r>
                         <a:rPr/>
-                        <a:t>class weights, 44</a:t>
+                        <a:t>class weights, 46</a:t>
                       </a:r>
                     </a:p>
                   </a:txBody>
@@ -15863,7 +15989,7 @@
                       </a:pPr>
                       <a:r>
                         <a:rPr/>
-                        <a:t>three classes, 46-47</a:t>
+                        <a:t>three classes, 48-49</a:t>
                       </a:r>
                     </a:p>
                   </a:txBody>

--- a/Lessons/04_classification_and_metrics/Slides/classification_and_metrics_slides.pptx
+++ b/Lessons/04_classification_and_metrics/Slides/classification_and_metrics_slides.pptx
@@ -1262,49 +1262,91 @@
             </a:pPr>
             <a:r>
               <a:rPr/>
-              <a:t>Say this before any algebra. It is the whole idea, and once they have it the derivation is bookkeeping.</a:t>
-            </a:r>
-          </a:p>
-          <a:p>
-            <a:pPr lvl="0" indent="0" marL="0">
-              <a:buNone/>
-            </a:pPr>
-          </a:p>
-          <a:p>
-            <a:pPr lvl="0" indent="0" marL="0">
-              <a:buNone/>
-            </a:pPr>
-            <a:r>
-              <a:rPr/>
-              <a:t>Each drive contributes one factor: the probability the model gave to what actually occurred. Multiply across the fleet and you have the probability of the whole dataset under that setting of the parameters. Choose the setting that makes it largest.</a:t>
-            </a:r>
-          </a:p>
-          <a:p>
-            <a:pPr lvl="0" indent="0" marL="0">
-              <a:buNone/>
-            </a:pPr>
-          </a:p>
-          <a:p>
-            <a:pPr lvl="0" indent="0" marL="0">
-              <a:buNone/>
-            </a:pPr>
-            <a:r>
-              <a:rPr/>
-              <a:t>Two practical notes worth saying aloud. We take the logarithm because it turns the product into a sum, which differentiates one term at a time - and because the product itself is too small to store. Gradient descent starts with all weights at zero, so z is 0 for every drive and every probability is 0.5; 0.5 multiplied by itself 6,000 times, once per training drive, is about 10 to the minus 1806. The smallest number a 64-bit float holds is about 10 to the minus 308, so the computer stores exactly zero. Every real implementation therefore adds up the logarithms of the probabilities instead of multiplying the probabilities, and not for elegance.</a:t>
-            </a:r>
-          </a:p>
-          <a:p>
-            <a:pPr lvl="0" indent="0" marL="0">
-              <a:buNone/>
-            </a:pPr>
-          </a:p>
-          <a:p>
-            <a:pPr lvl="0" indent="0" marL="0">
-              <a:buNone/>
-            </a:pPr>
-            <a:r>
-              <a:rPr/>
-              <a:t>Then negate, so we minimise as in lesson 3.</a:t>
+              <a:t>This is the whole idea of how logistic regression is fitted, so say it before any algebra, and say it on these three drives. The numbers are made up for the example; the three drives are not from the dataset.</a:t>
+            </a:r>
+          </a:p>
+          <a:p>
+            <a:pPr lvl="0" indent="0" marL="0">
+              <a:buNone/>
+            </a:pPr>
+          </a:p>
+          <a:p>
+            <a:pPr lvl="0" indent="0" marL="0">
+              <a:buNone/>
+            </a:pPr>
+            <a:r>
+              <a:rPr/>
+              <a:t>A “setting” is one choice of the coefficients w and the intercept b. Plug a drive’s counters into the model of slide 11 and the setting gives that drive a probability of failing, P(fail). Two settings, two columns.</a:t>
+            </a:r>
+          </a:p>
+          <a:p>
+            <a:pPr lvl="0" indent="0" marL="0">
+              <a:buNone/>
+            </a:pPr>
+          </a:p>
+          <a:p>
+            <a:pPr lvl="0" indent="0" marL="0">
+              <a:buNone/>
+            </a:pPr>
+            <a:r>
+              <a:rPr/>
+              <a:t>Now score each setting against what actually happened. Drive A failed, so the relevant number is the probability the setting gave to failing: 0.8 under setting 1, 0.3 under setting 2. Drives B and C stayed healthy, so the relevant number is the probability of staying healthy, 1 minus P(fail): under setting 1, 0.9 and 0.8; under setting 2, 0.4 and 0.5. That is what each arrow in the table does - it turns P(fail) into the probability of the outcome that really occurred.</a:t>
+            </a:r>
+          </a:p>
+          <a:p>
+            <a:pPr lvl="0" indent="0" marL="0">
+              <a:buNone/>
+            </a:pPr>
+          </a:p>
+          <a:p>
+            <a:pPr lvl="0" indent="0" marL="0">
+              <a:buNone/>
+            </a:pPr>
+            <a:r>
+              <a:rPr/>
+              <a:t>Multiply down each column, treating the drives as independent. The product is the probability that setting assigns to the whole dataset, exactly as it was observed: 0.576 for setting 1, 0.060 for setting 2. That product is called the likelihood. What actually happened is about ten times more probable under setting 1 (9.6 times), so setting 1 is the better explanation of the data.</a:t>
+            </a:r>
+          </a:p>
+          <a:p>
+            <a:pPr lvl="0" indent="0" marL="0">
+              <a:buNone/>
+            </a:pPr>
+          </a:p>
+          <a:p>
+            <a:pPr lvl="0" indent="0" marL="0">
+              <a:buNone/>
+            </a:pPr>
+            <a:r>
+              <a:rPr/>
+              <a:t>Maximum likelihood is this comparison, done over every possible setting rather than two: choose the w and b that make the likelihood as large as possible. Gradient descent does the searching, as in lesson 3.</a:t>
+            </a:r>
+          </a:p>
+          <a:p>
+            <a:pPr lvl="0" indent="0" marL="0">
+              <a:buNone/>
+            </a:pPr>
+          </a:p>
+          <a:p>
+            <a:pPr lvl="0" indent="0" marL="0">
+              <a:buNone/>
+            </a:pPr>
+            <a:r>
+              <a:rPr/>
+              <a:t>Why the products are never used as they are, and the bridge to the next slide. Take minus the logarithm of each factor and add, instead of multiplying: 0.55 for setting 1, 2.81 for setting 2. That is minus the log of the likelihood, so the order is the same, reversed - the better setting now has the SMALLER number, which gives us something to minimise, as in lesson 3. Minus the log of a probability is called the surprise: 0 for something you were certain of, large for something you said was unlikely. “Most likely” and “least surprising” are the same choice. Averaged over the drives instead of summed, it is the cost on the next slide.</a:t>
+            </a:r>
+          </a:p>
+          <a:p>
+            <a:pPr lvl="0" indent="0" marL="0">
+              <a:buNone/>
+            </a:pPr>
+          </a:p>
+          <a:p>
+            <a:pPr lvl="0" indent="0" marL="0">
+              <a:buNone/>
+            </a:pPr>
+            <a:r>
+              <a:rPr/>
+              <a:t>Two reasons for the logarithm, worth saying aloud. It turns the product into a sum, which differentiates one term at a time. And the product itself is too small to store. Gradient descent starts with all weights at zero, so z is 0 for every drive and every probability is 0.5; 0.5 multiplied by itself 6,000 times, once per training drive, is about 10 to the minus 1806. The smallest number a 64-bit float holds is about 10 to the minus 308, so the computer stores exactly zero. Every real implementation therefore adds up the logarithms of the probabilities instead of multiplying the probabilities, and not for elegance. Handout sections 3.1 to 3.3.</a:t>
             </a:r>
           </a:p>
         </p:txBody>
@@ -10805,46 +10847,343 @@
             </a:pPr>
             <a:r>
               <a:rPr/>
-              <a:t>Maximum likelihood, in one sentence</a:t>
-            </a:r>
-          </a:p>
-        </p:txBody>
-      </p:sp>
-      <p:sp>
-        <p:nvSpPr>
-          <p:cNvPr id="3" name="Content Placeholder 2"/>
-          <p:cNvSpPr>
-            <a:spLocks noGrp="1"/>
-          </p:cNvSpPr>
+              <a:t>Maximum likelihood, on three drives</a:t>
+            </a:r>
+          </a:p>
+        </p:txBody>
+      </p:sp>
+      <p:graphicFrame>
+        <p:nvGraphicFramePr>
+          <p:cNvPr id="6" name="Content Placeholder 5"/>
+          <p:cNvGraphicFramePr>
+            <a:graphicFrameLocks noGrp="1"/>
+          </p:cNvGraphicFramePr>
           <p:nvPr>
             <p:ph idx="1"/>
           </p:nvPr>
-        </p:nvSpPr>
-        <p:spPr>
-          <a:xfrm>
-            <a:off x="457200" y="1200151"/>
-            <a:ext cx="8229600" cy="3394472"/>
-          </a:xfrm>
-        </p:spPr>
-        <p:txBody>
-          <a:bodyPr/>
-          <a:lstStyle/>
-          <a:p>
-            <a:pPr lvl="0"/>
-            <a:r>
-              <a:rPr/>
-              <a:t>The parameters w and b are a knob: each setting gives a probability to what actually happened</a:t>
-            </a:r>
-          </a:p>
-          <a:p>
-            <a:pPr lvl="0"/>
-            <a:r>
-              <a:rPr b="1"/>
-              <a:t>Turn the knob so that what actually happened is least surprising</a:t>
-            </a:r>
-          </a:p>
-        </p:txBody>
-      </p:sp>
+        </p:nvGraphicFramePr>
+        <p:xfrm>
+          <a:off x="457200" y="1166099"/>
+          <a:ext cx="8229600" cy="3390900"/>
+        </p:xfrm>
+        <a:graphic>
+          <a:graphicData uri="http://schemas.openxmlformats.org/drawingml/2006/table">
+            <a:tbl>
+              <a:tblPr firstRow="1" bandRow="1">
+                <a:tableStyleId>{5C22544A-7EE6-4342-B048-85BDC9FD1C3A}</a:tableStyleId>
+              </a:tblPr>
+              <a:tblGrid>
+                <a:gridCol w="2743200"/>
+                <a:gridCol w="2743200"/>
+                <a:gridCol w="2743200"/>
+              </a:tblGrid>
+              <a:tr h="0">
+                <a:tc>
+                  <a:txBody>
+                    <a:bodyPr/>
+                    <a:lstStyle/>
+                    <a:p>
+                      <a:pPr lvl="0" indent="0" marL="0">
+                        <a:buNone/>
+                      </a:pPr>
+                      <a:r>
+                        <a:rPr/>
+                        <a:t>Drive, what happened</a:t>
+                      </a:r>
+                    </a:p>
+                  </a:txBody>
+                  <a:tcPr/>
+                </a:tc>
+                <a:tc>
+                  <a:txBody>
+                    <a:bodyPr/>
+                    <a:lstStyle/>
+                    <a:p>
+                      <a:pPr lvl="0" indent="0" marL="0">
+                        <a:buNone/>
+                      </a:pPr>
+                      <a:r>
+                        <a:rPr/>
+                        <a:t>Setting 1 of w, b: P(fail) → P(what happened)</a:t>
+                      </a:r>
+                    </a:p>
+                  </a:txBody>
+                  <a:tcPr/>
+                </a:tc>
+                <a:tc>
+                  <a:txBody>
+                    <a:bodyPr/>
+                    <a:lstStyle/>
+                    <a:p>
+                      <a:pPr lvl="0" indent="0" marL="0">
+                        <a:buNone/>
+                      </a:pPr>
+                      <a:r>
+                        <a:rPr/>
+                        <a:t>Setting 2 of w, b: P(fail) → P(what happened)</a:t>
+                      </a:r>
+                    </a:p>
+                  </a:txBody>
+                  <a:tcPr/>
+                </a:tc>
+              </a:tr>
+              <a:tr h="0">
+                <a:tc>
+                  <a:txBody>
+                    <a:bodyPr/>
+                    <a:lstStyle/>
+                    <a:p>
+                      <a:pPr lvl="0" indent="0" marL="0">
+                        <a:buNone/>
+                      </a:pPr>
+                      <a:r>
+                        <a:rPr/>
+                        <a:t>A, failed</a:t>
+                      </a:r>
+                    </a:p>
+                  </a:txBody>
+                </a:tc>
+                <a:tc>
+                  <a:txBody>
+                    <a:bodyPr/>
+                    <a:lstStyle/>
+                    <a:p>
+                      <a:pPr lvl="0" indent="0" marL="0">
+                        <a:buNone/>
+                      </a:pPr>
+                      <a:r>
+                        <a:rPr/>
+                        <a:t>0.8 → </a:t>
+                      </a:r>
+                      <a:r>
+                        <a:rPr b="1"/>
+                        <a:t>0.8</a:t>
+                      </a:r>
+                    </a:p>
+                  </a:txBody>
+                </a:tc>
+                <a:tc>
+                  <a:txBody>
+                    <a:bodyPr/>
+                    <a:lstStyle/>
+                    <a:p>
+                      <a:pPr lvl="0" indent="0" marL="0">
+                        <a:buNone/>
+                      </a:pPr>
+                      <a:r>
+                        <a:rPr/>
+                        <a:t>0.3 → </a:t>
+                      </a:r>
+                      <a:r>
+                        <a:rPr b="1"/>
+                        <a:t>0.3</a:t>
+                      </a:r>
+                    </a:p>
+                  </a:txBody>
+                </a:tc>
+              </a:tr>
+              <a:tr h="0">
+                <a:tc>
+                  <a:txBody>
+                    <a:bodyPr/>
+                    <a:lstStyle/>
+                    <a:p>
+                      <a:pPr lvl="0" indent="0" marL="0">
+                        <a:buNone/>
+                      </a:pPr>
+                      <a:r>
+                        <a:rPr/>
+                        <a:t>B, healthy</a:t>
+                      </a:r>
+                    </a:p>
+                  </a:txBody>
+                </a:tc>
+                <a:tc>
+                  <a:txBody>
+                    <a:bodyPr/>
+                    <a:lstStyle/>
+                    <a:p>
+                      <a:pPr lvl="0" indent="0" marL="0">
+                        <a:buNone/>
+                      </a:pPr>
+                      <a:r>
+                        <a:rPr/>
+                        <a:t>0.1 → </a:t>
+                      </a:r>
+                      <a:r>
+                        <a:rPr b="1"/>
+                        <a:t>0.9</a:t>
+                      </a:r>
+                    </a:p>
+                  </a:txBody>
+                </a:tc>
+                <a:tc>
+                  <a:txBody>
+                    <a:bodyPr/>
+                    <a:lstStyle/>
+                    <a:p>
+                      <a:pPr lvl="0" indent="0" marL="0">
+                        <a:buNone/>
+                      </a:pPr>
+                      <a:r>
+                        <a:rPr/>
+                        <a:t>0.6 → </a:t>
+                      </a:r>
+                      <a:r>
+                        <a:rPr b="1"/>
+                        <a:t>0.4</a:t>
+                      </a:r>
+                    </a:p>
+                  </a:txBody>
+                </a:tc>
+              </a:tr>
+              <a:tr h="0">
+                <a:tc>
+                  <a:txBody>
+                    <a:bodyPr/>
+                    <a:lstStyle/>
+                    <a:p>
+                      <a:pPr lvl="0" indent="0" marL="0">
+                        <a:buNone/>
+                      </a:pPr>
+                      <a:r>
+                        <a:rPr/>
+                        <a:t>C, healthy</a:t>
+                      </a:r>
+                    </a:p>
+                  </a:txBody>
+                </a:tc>
+                <a:tc>
+                  <a:txBody>
+                    <a:bodyPr/>
+                    <a:lstStyle/>
+                    <a:p>
+                      <a:pPr lvl="0" indent="0" marL="0">
+                        <a:buNone/>
+                      </a:pPr>
+                      <a:r>
+                        <a:rPr/>
+                        <a:t>0.2 → </a:t>
+                      </a:r>
+                      <a:r>
+                        <a:rPr b="1"/>
+                        <a:t>0.8</a:t>
+                      </a:r>
+                    </a:p>
+                  </a:txBody>
+                </a:tc>
+                <a:tc>
+                  <a:txBody>
+                    <a:bodyPr/>
+                    <a:lstStyle/>
+                    <a:p>
+                      <a:pPr lvl="0" indent="0" marL="0">
+                        <a:buNone/>
+                      </a:pPr>
+                      <a:r>
+                        <a:rPr/>
+                        <a:t>0.5 → </a:t>
+                      </a:r>
+                      <a:r>
+                        <a:rPr b="1"/>
+                        <a:t>0.5</a:t>
+                      </a:r>
+                    </a:p>
+                  </a:txBody>
+                </a:tc>
+              </a:tr>
+              <a:tr h="0">
+                <a:tc>
+                  <a:txBody>
+                    <a:bodyPr/>
+                    <a:lstStyle/>
+                    <a:p>
+                      <a:pPr lvl="0" indent="0" marL="0">
+                        <a:buNone/>
+                      </a:pPr>
+                      <a:r>
+                        <a:rPr/>
+                        <a:t>Multiplied: the likelihood</a:t>
+                      </a:r>
+                    </a:p>
+                  </a:txBody>
+                </a:tc>
+                <a:tc>
+                  <a:txBody>
+                    <a:bodyPr/>
+                    <a:lstStyle/>
+                    <a:p>
+                      <a:pPr lvl="0" indent="0" marL="0">
+                        <a:buNone/>
+                      </a:pPr>
+                      <a:r>
+                        <a:rPr b="1"/>
+                        <a:t>0.576</a:t>
+                      </a:r>
+                    </a:p>
+                  </a:txBody>
+                </a:tc>
+                <a:tc>
+                  <a:txBody>
+                    <a:bodyPr/>
+                    <a:lstStyle/>
+                    <a:p>
+                      <a:pPr lvl="0" indent="0" marL="0">
+                        <a:buNone/>
+                      </a:pPr>
+                      <a:r>
+                        <a:rPr b="1"/>
+                        <a:t>0.060</a:t>
+                      </a:r>
+                    </a:p>
+                  </a:txBody>
+                </a:tc>
+              </a:tr>
+              <a:tr h="0">
+                <a:tc>
+                  <a:txBody>
+                    <a:bodyPr/>
+                    <a:lstStyle/>
+                    <a:p>
+                      <a:pPr lvl="0" indent="0" marL="0">
+                        <a:buNone/>
+                      </a:pPr>
+                      <a:r>
+                        <a:rPr/>
+                        <a:t>Maximum likelihood keeps</a:t>
+                      </a:r>
+                    </a:p>
+                  </a:txBody>
+                </a:tc>
+                <a:tc>
+                  <a:txBody>
+                    <a:bodyPr/>
+                    <a:lstStyle/>
+                    <a:p>
+                      <a:pPr lvl="0" indent="0" marL="0">
+                        <a:buNone/>
+                      </a:pPr>
+                      <a:r>
+                        <a:rPr b="1"/>
+                        <a:t>setting 1</a:t>
+                      </a:r>
+                    </a:p>
+                  </a:txBody>
+                </a:tc>
+                <a:tc>
+                  <a:txBody>
+                    <a:bodyPr/>
+                    <a:lstStyle/>
+                    <a:p>
+                      <a:endParaRPr/>
+                    </a:p>
+                  </a:txBody>
+                </a:tc>
+              </a:tr>
+            </a:tbl>
+          </a:graphicData>
+        </a:graphic>
+      </p:graphicFrame>
     </p:spTree>
   </p:cSld>
 </p:sld>

--- a/Lessons/04_classification_and_metrics/Slides/classification_and_metrics_slides.pptx
+++ b/Lessons/04_classification_and_metrics/Slides/classification_and_metrics_slides.pptx
@@ -5,7 +5,7 @@
     <p:sldMasterId id="2147483648" r:id="rId1"/>
   </p:sldMasterIdLst>
   <p:notesMasterIdLst>
-    <p:notesMasterId r:id="rId53"/>
+    <p:notesMasterId r:id="rId57"/>
   </p:notesMasterIdLst>
   <p:sldIdLst>
     <p:sldId id="256" r:id="rId2"/>
@@ -59,6 +59,10 @@
     <p:sldId id="304" r:id="rId50"/>
     <p:sldId id="305" r:id="rId51"/>
     <p:sldId id="306" r:id="rId52"/>
+    <p:sldId id="307" r:id="rId53"/>
+    <p:sldId id="308" r:id="rId54"/>
+    <p:sldId id="309" r:id="rId55"/>
+    <p:sldId id="310" r:id="rId56"/>
   </p:sldIdLst>
   <p:sldSz cx="9144000" cy="5143500" type="screen16x9"/>
   <p:notesSz cx="6858000" cy="9144000"/>
@@ -588,7 +592,7 @@
             </a:pPr>
             <a:r>
               <a:rPr/>
-              <a:t>The one to watch for: choosing the penalty by looking at the test error. It is the natural thing to do because the test error is the number they were told to care about. It is exactly the mistake lesson 1 named: once the test set has helped choose anything, its score is no longer an honest estimate of how the model does on new data, because the choice was fitted to it. Today’s lesson ends up in the same place from a different direction, on slide 45, when we choose a decision threshold by looking at the test set. Lesson 5 gives them the machinery to do both honestly.</a:t>
+              <a:t>The one to watch for: choosing the penalty by looking at the test error. It is the natural thing to do because the test error is the number they were told to care about. It is exactly the mistake lesson 1 named: once the test set has helped choose anything, its score is no longer an honest estimate of how the model does on new data, because the choice was fitted to it. Today’s lesson ends up in the same place from a different direction, on slide 49, when we choose a decision threshold by looking at the test set. Lesson 5 gives them the machinery to do both honestly.</a:t>
             </a:r>
           </a:p>
         </p:txBody>
@@ -698,7 +702,7 @@
             </a:pPr>
             <a:r>
               <a:rPr/>
-              <a:t>That last one is the one to flag. It is largest in the middle, one quarter, and it decays to zero at both ends. That one fact does two jobs later. It is why the sigmoid behaves well: flat ends mean that once the model is sure, extra evidence changes little (slide 8). And it is why squared error fails with it: slide 19 shows that the same factor ends up inside squared error’s gradient and switches learning off exactly when the model is confidently wrong.</a:t>
+              <a:t>That last one is the one to flag. It is largest in the middle, one quarter, and it decays to zero at both ends. That one fact does two jobs later. It is why the sigmoid behaves well: flat ends mean that once the model is sure, extra evidence changes little (slide 8). And it is why squared error fails with it: slide 23 shows that the same factor ends up inside squared error’s gradient and switches learning off exactly when the model is confidently wrong.</a:t>
             </a:r>
           </a:p>
         </p:txBody>
@@ -1262,91 +1266,49 @@
             </a:pPr>
             <a:r>
               <a:rPr/>
-              <a:t>This is the whole idea of how logistic regression is fitted, so say it before any algebra, and say it on these three drives. The numbers are made up for the example; the three drives are not from the dataset.</a:t>
-            </a:r>
-          </a:p>
-          <a:p>
-            <a:pPr lvl="0" indent="0" marL="0">
-              <a:buNone/>
-            </a:pPr>
-          </a:p>
-          <a:p>
-            <a:pPr lvl="0" indent="0" marL="0">
-              <a:buNone/>
-            </a:pPr>
-            <a:r>
-              <a:rPr/>
-              <a:t>A “setting” is one choice of the coefficients w and the intercept b. Plug a drive’s counters into the model of slide 11 and the setting gives that drive a probability of failing, P(fail). Two settings, two columns.</a:t>
-            </a:r>
-          </a:p>
-          <a:p>
-            <a:pPr lvl="0" indent="0" marL="0">
-              <a:buNone/>
-            </a:pPr>
-          </a:p>
-          <a:p>
-            <a:pPr lvl="0" indent="0" marL="0">
-              <a:buNone/>
-            </a:pPr>
-            <a:r>
-              <a:rPr/>
-              <a:t>Now score each setting against what actually happened. Drive A failed, so the relevant number is the probability the setting gave to failing: 0.8 under setting 1, 0.3 under setting 2. Drives B and C stayed healthy, so the relevant number is the probability of staying healthy, 1 minus P(fail): under setting 1, 0.9 and 0.8; under setting 2, 0.4 and 0.5. That is what each arrow in the table does - it turns P(fail) into the probability of the outcome that really occurred.</a:t>
-            </a:r>
-          </a:p>
-          <a:p>
-            <a:pPr lvl="0" indent="0" marL="0">
-              <a:buNone/>
-            </a:pPr>
-          </a:p>
-          <a:p>
-            <a:pPr lvl="0" indent="0" marL="0">
-              <a:buNone/>
-            </a:pPr>
-            <a:r>
-              <a:rPr/>
-              <a:t>Multiply down each column, treating the drives as independent. The product is the probability that setting assigns to the whole dataset, exactly as it was observed: 0.576 for setting 1, 0.060 for setting 2. That product is called the likelihood. What actually happened is about ten times more probable under setting 1 (9.6 times), so setting 1 is the better explanation of the data.</a:t>
-            </a:r>
-          </a:p>
-          <a:p>
-            <a:pPr lvl="0" indent="0" marL="0">
-              <a:buNone/>
-            </a:pPr>
-          </a:p>
-          <a:p>
-            <a:pPr lvl="0" indent="0" marL="0">
-              <a:buNone/>
-            </a:pPr>
-            <a:r>
-              <a:rPr/>
-              <a:t>Maximum likelihood is this comparison, done over every possible setting rather than two: choose the w and b that make the likelihood as large as possible. Gradient descent does the searching, as in lesson 3.</a:t>
-            </a:r>
-          </a:p>
-          <a:p>
-            <a:pPr lvl="0" indent="0" marL="0">
-              <a:buNone/>
-            </a:pPr>
-          </a:p>
-          <a:p>
-            <a:pPr lvl="0" indent="0" marL="0">
-              <a:buNone/>
-            </a:pPr>
-            <a:r>
-              <a:rPr/>
-              <a:t>Why the products are never used as they are, and the bridge to the next slide. Take minus the logarithm of each factor and add, instead of multiplying: 0.55 for setting 1, 2.81 for setting 2. That is minus the log of the likelihood, so the order is the same, reversed - the better setting now has the SMALLER number, which gives us something to minimise, as in lesson 3. Minus the log of a probability is called the surprise: 0 for something you were certain of, large for something you said was unlikely. “Most likely” and “least surprising” are the same choice. Averaged over the drives instead of summed, it is the cost on the next slide.</a:t>
-            </a:r>
-          </a:p>
-          <a:p>
-            <a:pPr lvl="0" indent="0" marL="0">
-              <a:buNone/>
-            </a:pPr>
-          </a:p>
-          <a:p>
-            <a:pPr lvl="0" indent="0" marL="0">
-              <a:buNone/>
-            </a:pPr>
-            <a:r>
-              <a:rPr/>
-              <a:t>Two reasons for the logarithm, worth saying aloud. It turns the product into a sum, which differentiates one term at a time. And the product itself is too small to store. Gradient descent starts with all weights at zero, so z is 0 for every drive and every probability is 0.5; 0.5 multiplied by itself 6,000 times, once per training drive, is about 10 to the minus 1806. The smallest number a 64-bit float holds is about 10 to the minus 308, so the computer stores exactly zero. Every real implementation therefore adds up the logarithms of the probabilities instead of multiplying the probabilities, and not for elegance. Handout sections 3.1 to 3.3.</a:t>
+              <a:t>The next five slides answer the question of slide 15 - what should fitting minimise? - one step at a time, on three drives. The numbers are made up for the example; drives A, B and C are not from the dataset.</a:t>
+            </a:r>
+          </a:p>
+          <a:p>
+            <a:pPr lvl="0" indent="0" marL="0">
+              <a:buNone/>
+            </a:pPr>
+          </a:p>
+          <a:p>
+            <a:pPr lvl="0" indent="0" marL="0">
+              <a:buNone/>
+            </a:pPr>
+            <a:r>
+              <a:rPr/>
+              <a:t>Start from what the model does. Fitting means choosing the coefficients w and the intercept b. Call one particular choice of w and b a “setting”. Given a setting, the model of slide 11 turns each drive’s counters x into a probability of failing: p = sigma(w-transpose-x + b). This slide shows the p that one setting, setting 1, gives to each of the three drives.</a:t>
+            </a:r>
+          </a:p>
+          <a:p>
+            <a:pPr lvl="0" indent="0" marL="0">
+              <a:buNone/>
+            </a:pPr>
+          </a:p>
+          <a:p>
+            <a:pPr lvl="0" indent="0" marL="0">
+              <a:buNone/>
+            </a:pPr>
+            <a:r>
+              <a:rPr/>
+              <a:t>Next to it, what actually happened, and its label y: 1 for a drive that failed, 0 for one that stayed healthy - the convention of slide 4.</a:t>
+            </a:r>
+          </a:p>
+          <a:p>
+            <a:pPr lvl="0" indent="0" marL="0">
+              <a:buNone/>
+            </a:pPr>
+          </a:p>
+          <a:p>
+            <a:pPr lvl="0" indent="0" marL="0">
+              <a:buNone/>
+            </a:pPr>
+            <a:r>
+              <a:rPr/>
+              <a:t>Ask the room: is setting 1 a good setting? Let them argue it from the table. It gave the drive that failed a high p, and the two that survived a low one, so it looks good. The next slide turns that impression into a number.</a:t>
             </a:r>
           </a:p>
         </p:txBody>
@@ -1428,63 +1390,49 @@
             </a:pPr>
             <a:r>
               <a:rPr/>
-              <a:t>This is the loss on ONE example, L, not the cost over the training set; p is the predicted probability, the same number the next slide writes as y-hat. Say the other half aloud rather than showing it: the cost J is the average of this over the m examples, one over m times the sum. Written out in full the formula reached the slide edge and came out at 26pt, smaller than the bullets on the slide before it.</a:t>
-            </a:r>
-          </a:p>
-          <a:p>
-            <a:pPr lvl="0" indent="0" marL="0">
-              <a:buNone/>
-            </a:pPr>
-          </a:p>
-          <a:p>
-            <a:pPr lvl="0" indent="0" marL="0">
-              <a:buNone/>
-            </a:pPr>
-            <a:r>
-              <a:rPr/>
-              <a:t>Do not derive it here - the handout, section 3, does it in full. Show it and read it.</a:t>
-            </a:r>
-          </a:p>
-          <a:p>
-            <a:pPr lvl="0" indent="0" marL="0">
-              <a:buNone/>
-            </a:pPr>
-          </a:p>
-          <a:p>
-            <a:pPr lvl="0" indent="0" marL="0">
-              <a:buNone/>
-            </a:pPr>
-            <a:r>
-              <a:rPr/>
-              <a:t>The reading that makes it stick: the cost of an outcome is the SURPRISE of seeing it. Something you called certain costs nothing. Something you gave a probability of one in a thousand costs log 1000, about 6.9 (natural logarithm, as everywhere in this lesson). Something you declared impossible costs infinity.</a:t>
-            </a:r>
-          </a:p>
-          <a:p>
-            <a:pPr lvl="0" indent="0" marL="0">
-              <a:buNone/>
-            </a:pPr>
-          </a:p>
-          <a:p>
-            <a:pPr lvl="0" indent="0" marL="0">
-              <a:buNone/>
-            </a:pPr>
-            <a:r>
-              <a:rPr/>
-              <a:t>Only one of the two terms is ever active, because y is 0 or 1. The bracket is a way of writing an if-statement in algebra, nothing more.</a:t>
-            </a:r>
-          </a:p>
-          <a:p>
-            <a:pPr lvl="0" indent="0" marL="0">
-              <a:buNone/>
-            </a:pPr>
-          </a:p>
-          <a:p>
-            <a:pPr lvl="0" indent="0" marL="0">
-              <a:buNone/>
-            </a:pPr>
-            <a:r>
-              <a:rPr/>
-              <a:t>And the headline: nobody designed this function. It fell out of asking for the parameters that make the data least surprising.</a:t>
+              <a:t>The idea: judge a setting by how probable it made what really happened.</a:t>
+            </a:r>
+          </a:p>
+          <a:p>
+            <a:pPr lvl="0" indent="0" marL="0">
+              <a:buNone/>
+            </a:pPr>
+          </a:p>
+          <a:p>
+            <a:pPr lvl="0" indent="0" marL="0">
+              <a:buNone/>
+            </a:pPr>
+            <a:r>
+              <a:rPr/>
+              <a:t>p is the probability of failing. For drive A, which did fail, that is exactly the probability of what happened: 0.8. For drives B and C, which stayed healthy, the probability of what happened is the probability of staying healthy, which is 1 minus p: 1 - 0.1 = 0.9 and 1 - 0.2 = 0.8. That is the rule in the last column header: p if y = 1, 1 - p if y = 0.</a:t>
+            </a:r>
+          </a:p>
+          <a:p>
+            <a:pPr lvl="0" indent="0" marL="0">
+              <a:buNone/>
+            </a:pPr>
+          </a:p>
+          <a:p>
+            <a:pPr lvl="0" indent="0" marL="0">
+              <a:buNone/>
+            </a:pPr>
+            <a:r>
+              <a:rPr/>
+              <a:t>Then the three drives together. If the drives fail or survive independently of each other, the probability that all three outcomes happen is the product of the three: 0.8 times 0.9 times 0.8, which is 0.576. Under setting 1, what we observed had a 57.6% chance of happening.</a:t>
+            </a:r>
+          </a:p>
+          <a:p>
+            <a:pPr lvl="0" indent="0" marL="0">
+              <a:buNone/>
+            </a:pPr>
+          </a:p>
+          <a:p>
+            <a:pPr lvl="0" indent="0" marL="0">
+              <a:buNone/>
+            </a:pPr>
+            <a:r>
+              <a:rPr/>
+              <a:t>That product has a name: the likelihood of the setting. The next slide writes the same two rules as formulas.</a:t>
             </a:r>
           </a:p>
         </p:txBody>
@@ -1566,77 +1514,49 @@
             </a:pPr>
             <a:r>
               <a:rPr/>
-              <a:t>What the formula says, in words. To find how the cost J changes when the coefficient w_j is nudged up: take each training drive, compute its error - the predicted probability y-hat minus the true label y, which is 0 or 1 - multiply that error by the drive’s value of feature j, and average over the m drives. Gradient descent then steps w_j in the opposite direction.</a:t>
-            </a:r>
-          </a:p>
-          <a:p>
-            <a:pPr lvl="0" indent="0" marL="0">
-              <a:buNone/>
-            </a:pPr>
-          </a:p>
-          <a:p>
-            <a:pPr lvl="0" indent="0" marL="0">
-              <a:buNone/>
-            </a:pPr>
-            <a:r>
-              <a:rPr/>
-              <a:t>What is new, and what is not. The formula is written with exactly the symbols of lesson 3’s slide 23. The difference is hidden in y-hat: in lesson 3 it was the straight line w-transpose-x plus b, and here it is the sigmoid of that line, the probability of slide 11 - which is why the title says so. The cost is different too: squared error there, log loss (slide 17) here. Different model, different cost, and yet the same gradient.</a:t>
-            </a:r>
-          </a:p>
-          <a:p>
-            <a:pPr lvl="0" indent="0" marL="0">
-              <a:buNone/>
-            </a:pPr>
-          </a:p>
-          <a:p>
-            <a:pPr lvl="0" indent="0" marL="0">
-              <a:buNone/>
-            </a:pPr>
-            <a:r>
-              <a:rPr/>
-              <a:t>A concrete drive. A drive that failed, y = 1, to which the model gives y-hat = 0.2: its error is 0.2 minus 1, which is minus 0.8. A negative term means the cost falls if w_j rises, so this drive pulls w_j up, and pulls harder the larger its value of feature j. A healthy drive, y = 0, given the same 0.2 has error plus 0.2 and pulls the other way, four times more gently. This is lesson 3’s weighted vote: each drive pulls in proportion to how wrong it was and how large the feature was for it.</a:t>
-            </a:r>
-          </a:p>
-          <a:p>
-            <a:pPr lvl="0" indent="0" marL="0">
-              <a:buNone/>
-            </a:pPr>
-          </a:p>
-          <a:p>
-            <a:pPr lvl="0" indent="0" marL="0">
-              <a:buNone/>
-            </a:pPr>
-            <a:r>
-              <a:rPr/>
-              <a:t>Why it comes out the same - worth the board if there is appetite, handout section 3.4 has it in full. Follow one drive through the chain rule, in three links, with p for y-hat and z for w-transpose-x plus b: - how the loss changes with p: (p - y) divided by p times (1 - p) - the denominator comes from the logarithms in the log loss; - how p changes with z: p times (1 - p), the sigmoid’s derivative from slide 11; - how z changes with w_j: x_j. Multiply the three: the p times (1 - p) cancels, and what is left is (p - y) times x_j.</a:t>
-            </a:r>
-          </a:p>
-          <a:p>
-            <a:pPr lvl="0" indent="0" marL="0">
-              <a:buNone/>
-            </a:pPr>
-          </a:p>
-          <a:p>
-            <a:pPr lvl="0" indent="0" marL="0">
-              <a:buNone/>
-            </a:pPr>
-            <a:r>
-              <a:rPr/>
-              <a:t>Why that cancellation matters, and it is the bridge to the next slide: with squared error in place of log loss, nothing cancels the factor p times (1 - p), and slide 19 shows what it does to a drive the model is confidently wrong about.</a:t>
-            </a:r>
-          </a:p>
-          <a:p>
-            <a:pPr lvl="0" indent="0" marL="0">
-              <a:buNone/>
-            </a:pPr>
-          </a:p>
-          <a:p>
-            <a:pPr lvl="0" indent="0" marL="0">
-              <a:buNone/>
-            </a:pPr>
-            <a:r>
-              <a:rPr/>
-              <a:t>If someone asks whether the match is a coincidence: no, and one sentence is enough. Both costs come from maximum likelihood - squared error when the noise on y is Gaussian (lesson 3, handout section 2.2), log loss when y is a 0/1 outcome - and each paired with its own model gives this same form. Statisticians call the family “generalised linear models”; the name is not examinable. The practical consequence is: the same gradient descent code trains both models, and only the line that computes y-hat changes.</a:t>
+              <a:t>Two formulas, and both are the previous slide written in symbols.</a:t>
+            </a:r>
+          </a:p>
+          <a:p>
+            <a:pPr lvl="0" indent="0" marL="0">
+              <a:buNone/>
+            </a:pPr>
+          </a:p>
+          <a:p>
+            <a:pPr lvl="0" indent="0" marL="0">
+              <a:buNone/>
+            </a:pPr>
+            <a:r>
+              <a:rPr/>
+              <a:t>Left: the probability of what happened to one drive. It is the rule “p if y = 1, 1 - p if y = 0” in a single expression. Check it with y = 1: p to the power 1 is p, and (1 - p) to the power 0 is 1, so it gives p. With y = 0 it gives 1 times (1 - p). Do drive B on the board: 0.1 to the power 0 times 0.9 to the power 1 is 0.9, the number in the table. The exponents are just a way of writing an if-statement.</a:t>
+            </a:r>
+          </a:p>
+          <a:p>
+            <a:pPr lvl="0" indent="0" marL="0">
+              <a:buNone/>
+            </a:pPr>
+          </a:p>
+          <a:p>
+            <a:pPr lvl="0" indent="0" marL="0">
+              <a:buNone/>
+            </a:pPr>
+            <a:r>
+              <a:rPr/>
+              <a:t>Right: the likelihood, script L, of a setting (w, b). The capital pi means “multiply over all the drives”, i from 1 to m, the way a capital sigma means “add”. Each drive contributes its factor from the left formula; the superscript (i) says which drive. For our three drives, m = 3 and the product is 0.8 times 0.9 times 0.8 = 0.576.</a:t>
+            </a:r>
+          </a:p>
+          <a:p>
+            <a:pPr lvl="0" indent="0" marL="0">
+              <a:buNone/>
+            </a:pPr>
+          </a:p>
+          <a:p>
+            <a:pPr lvl="0" indent="0" marL="0">
+              <a:buNone/>
+            </a:pPr>
+            <a:r>
+              <a:rPr/>
+              <a:t>The p inside depends on w and b, through p = sigma(w-transpose-x + b). That is why L is written as a function of w and b: change the setting, every p changes, and the likelihood changes with them. Handout section 3.2.</a:t>
             </a:r>
           </a:p>
         </p:txBody>
@@ -1718,63 +1638,49 @@
             </a:pPr>
             <a:r>
               <a:rPr/>
-              <a:t>Both panels take a drive that failed, y = 1, and move the model’s probability p for it along the horizontal axis. Squared error here is (p - 1) squared, the handout’s convention in section 4.</a:t>
-            </a:r>
-          </a:p>
-          <a:p>
-            <a:pPr lvl="0" indent="0" marL="0">
-              <a:buNone/>
-            </a:pPr>
-          </a:p>
-          <a:p>
-            <a:pPr lvl="0" indent="0" marL="0">
-              <a:buNone/>
-            </a:pPr>
-            <a:r>
-              <a:rPr/>
-              <a:t>Left panel, the costs. A drive failed and the model said 0.0001. Squared error charges 0.9998. An honest “don’t know” - 0.5 - costs 0.25. So the worst possible answer is four times worse than a shrug. Log loss charges 9.2 against 0.69, and the ratio grows without bound.</a:t>
-            </a:r>
-          </a:p>
-          <a:p>
-            <a:pPr lvl="0" indent="0" marL="0">
-              <a:buNone/>
-            </a:pPr>
-          </a:p>
-          <a:p>
-            <a:pPr lvl="0" indent="0" marL="0">
-              <a:buNone/>
-            </a:pPr>
-            <a:r>
-              <a:rPr/>
-              <a:t>Right panel is the real argument, so spend the time here. It shows the size of the gradient with respect to z, the push gradient descent gives the model. Log loss’s gradient is p - 1 (slide 18). Squared error’s is 2(p - 1) times p times (1 - p): the chain rule through the sigmoid brings in its derivative, p times one-minus-p, from slide 11, and nothing cancels it. That factor goes to zero as p goes to zero.</a:t>
-            </a:r>
-          </a:p>
-          <a:p>
-            <a:pPr lvl="0" indent="0" marL="0">
-              <a:buNone/>
-            </a:pPr>
-          </a:p>
-          <a:p>
-            <a:pPr lvl="0" indent="0" marL="0">
-              <a:buNone/>
-            </a:pPr>
-            <a:r>
-              <a:rPr/>
-              <a:t>Say it as a sentence: the wronger the model gets, the less squared error asks it to change. At p = 0.001 the gradient is a five-hundredth of log loss’s. Log loss goes the other way, approaching its maximum push exactly where the error is worst.</a:t>
-            </a:r>
-          </a:p>
-          <a:p>
-            <a:pPr lvl="0" indent="0" marL="0">
-              <a:buNone/>
-            </a:pPr>
-          </a:p>
-          <a:p>
-            <a:pPr lvl="0" indent="0" marL="0">
-              <a:buNone/>
-            </a:pPr>
-            <a:r>
-              <a:rPr/>
-              <a:t>That is the failure. Not that squared error scores badly - that it stops teaching.</a:t>
+              <a:t>Now a second setting, a different choice of w and b. It gives the three drives p = 0.3, 0.6 and 0.5: a low p to the drive that failed, a high p to one that survived. It looks worse, and the likelihood says how much worse.</a:t>
+            </a:r>
+          </a:p>
+          <a:p>
+            <a:pPr lvl="0" indent="0" marL="0">
+              <a:buNone/>
+            </a:pPr>
+          </a:p>
+          <a:p>
+            <a:pPr lvl="0" indent="0" marL="0">
+              <a:buNone/>
+            </a:pPr>
+            <a:r>
+              <a:rPr/>
+              <a:t>Apply the same rule, column by column. A failed, so its factor is p = 0.3. B and C survived, so their factors are 1 - 0.6 = 0.4 and 1 - 0.5 = 0.5. Multiply: 0.3 times 0.4 times 0.5 = 0.060.</a:t>
+            </a:r>
+          </a:p>
+          <a:p>
+            <a:pPr lvl="0" indent="0" marL="0">
+              <a:buNone/>
+            </a:pPr>
+          </a:p>
+          <a:p>
+            <a:pPr lvl="0" indent="0" marL="0">
+              <a:buNone/>
+            </a:pPr>
+            <a:r>
+              <a:rPr/>
+              <a:t>Compare: 0.576 against 0.060. What actually happened is 9.6 times more probable under setting 1, so setting 1 explains the data better. Keep it.</a:t>
+            </a:r>
+          </a:p>
+          <a:p>
+            <a:pPr lvl="0" indent="0" marL="0">
+              <a:buNone/>
+            </a:pPr>
+          </a:p>
+          <a:p>
+            <a:pPr lvl="0" indent="0" marL="0">
+              <a:buNone/>
+            </a:pPr>
+            <a:r>
+              <a:rPr/>
+              <a:t>That comparison is maximum likelihood. Fitting a logistic regression is the same comparison made over every possible setting rather than two: choose the w and b with the largest likelihood. Nobody tries them one by one - gradient descent does the searching, as in lesson 3.</a:t>
             </a:r>
           </a:p>
         </p:txBody>
@@ -1856,49 +1762,63 @@
             </a:pPr>
             <a:r>
               <a:rPr/>
-              <a:t>State it, do not prove it; the handout section 4.3 has the argument.</a:t>
-            </a:r>
-          </a:p>
-          <a:p>
-            <a:pPr lvl="0" indent="0" marL="0">
-              <a:buNone/>
-            </a:pPr>
-          </a:p>
-          <a:p>
-            <a:pPr lvl="0" indent="0" marL="0">
-              <a:buNone/>
-            </a:pPr>
-            <a:r>
-              <a:rPr/>
-              <a:t>The consequence is practical: gradient descent on log loss cannot get trapped. Squared error through a sigmoid has no such guarantee and is in general non-convex.</a:t>
-            </a:r>
-          </a:p>
-          <a:p>
-            <a:pPr lvl="0" indent="0" marL="0">
-              <a:buNone/>
-            </a:pPr>
-          </a:p>
-          <a:p>
-            <a:pPr lvl="0" indent="0" marL="0">
-              <a:buNone/>
-            </a:pPr>
-            <a:r>
-              <a:rPr/>
-              <a:t>Now the caution that catches people, and it is worth ten seconds because they will hit it in the notebook. Convex does NOT mean there is a closed-form solution. Setting the gradient to zero gives X-transpose times sigma of Xw minus y equals zero, which is not linear in w - the sigmoid is in the way.</a:t>
-            </a:r>
-          </a:p>
-          <a:p>
-            <a:pPr lvl="0" indent="0" marL="0">
-              <a:buNone/>
-            </a:pPr>
-          </a:p>
-          <a:p>
-            <a:pPr lvl="0" indent="0" marL="0">
-              <a:buNone/>
-            </a:pPr>
-            <a:r>
-              <a:rPr/>
-              <a:t>There is no normal equation for logistic regression. It has to be solved iteratively, which is why LogisticRegression has a max_iter argument and LinearRegression does not. If a student ever sees a convergence warning, that is what it is about.</a:t>
+              <a:t>The last step turns “largest likelihood” into “smallest cost”, so it can be minimised as in lesson 3. Natural logarithms throughout.</a:t>
+            </a:r>
+          </a:p>
+          <a:p>
+            <a:pPr lvl="0" indent="0" marL="0">
+              <a:buNone/>
+            </a:pPr>
+          </a:p>
+          <a:p>
+            <a:pPr lvl="0" indent="0" marL="0">
+              <a:buNone/>
+            </a:pPr>
+            <a:r>
+              <a:rPr/>
+              <a:t>Take minus the logarithm of each drive’s factor and add them up. Because the log of a product is the sum of the logs, the sum is minus the log of the likelihood: 0.55 is minus the log of 0.576, and 2.81 is minus the log of 0.060. The logarithm keeps the order and the minus sign reverses it, so the better setting now has the SMALLER number - 0.55 against 2.81. Setting 1 still wins.</a:t>
+            </a:r>
+          </a:p>
+          <a:p>
+            <a:pPr lvl="0" indent="0" marL="0">
+              <a:buNone/>
+            </a:pPr>
+          </a:p>
+          <a:p>
+            <a:pPr lvl="0" indent="0" marL="0">
+              <a:buNone/>
+            </a:pPr>
+            <a:r>
+              <a:rPr/>
+              <a:t>Read the per-drive numbers too. Minus the log of a probability is called the surprise of an outcome: 0 for something you were certain of, large for something you said was unlikely. Setting 2 is most surprised by drive A, 1.20, because it gave A’s failure only 0.3. Maximum likelihood and least total surprise are the same choice.</a:t>
+            </a:r>
+          </a:p>
+          <a:p>
+            <a:pPr lvl="0" indent="0" marL="0">
+              <a:buNone/>
+            </a:pPr>
+          </a:p>
+          <a:p>
+            <a:pPr lvl="0" indent="0" marL="0">
+              <a:buNone/>
+            </a:pPr>
+            <a:r>
+              <a:rPr/>
+              <a:t>Two reasons we always work with the logarithm, worth saying aloud. A sum differentiates one term at a time. And the product itself is too small to store: gradient descent starts with all weights at zero, so z is 0 for every drive and every p is 0.5; 0.5 multiplied by itself 6,000 times, once per training drive, is about 10 to the minus 1806, while the smallest number a 64-bit float holds is about 10 to the minus 308. The computer would store exactly zero.</a:t>
+            </a:r>
+          </a:p>
+          <a:p>
+            <a:pPr lvl="0" indent="0" marL="0">
+              <a:buNone/>
+            </a:pPr>
+          </a:p>
+          <a:p>
+            <a:pPr lvl="0" indent="0" marL="0">
+              <a:buNone/>
+            </a:pPr>
+            <a:r>
+              <a:rPr/>
+              <a:t>Divide the sum by the number of drives and you have the average surprise: that is the log loss, and the next slide writes it as a formula. Handout sections 3.1 to 3.3.</a:t>
             </a:r>
           </a:p>
         </p:txBody>
@@ -2090,63 +2010,63 @@
             </a:pPr>
             <a:r>
               <a:rPr/>
-              <a:t>Fifteen lines of NumPy, then one line of scikit-learn, and the same answer. Run notebook 01. Twenty minutes. The parts worth stopping on:</a:t>
-            </a:r>
-          </a:p>
-          <a:p>
-            <a:pPr lvl="0" indent="0" marL="0">
-              <a:buNone/>
-            </a:pPr>
-          </a:p>
-          <a:p>
-            <a:pPr lvl="0" indent="0" marL="0">
-              <a:buNone/>
-            </a:pPr>
-            <a:r>
-              <a:rPr/>
-              <a:t>The linear-fit failure - let them see 3,606 negative probabilities printed rather than being told.</a:t>
-            </a:r>
-          </a:p>
-          <a:p>
-            <a:pPr lvl="0" indent="0" marL="0">
-              <a:buNone/>
-            </a:pPr>
-          </a:p>
-          <a:p>
-            <a:pPr lvl="0" indent="0" marL="0">
-              <a:buNone/>
-            </a:pPr>
-            <a:r>
-              <a:rPr/>
-              <a:t>The gradient/loss figure, which is the argument you just made, in code they can change. Invite them to change it: what happens to the squared-error gradient at p = 0.5?</a:t>
-            </a:r>
-          </a:p>
-          <a:p>
-            <a:pPr lvl="0" indent="0" marL="0">
-              <a:buNone/>
-            </a:pPr>
-          </a:p>
-          <a:p>
-            <a:pPr lvl="0" indent="0" marL="0">
-              <a:buNone/>
-            </a:pPr>
-            <a:r>
-              <a:rPr/>
-              <a:t>The coefficient recovery table, including the decoy.</a:t>
-            </a:r>
-          </a:p>
-          <a:p>
-            <a:pPr lvl="0" indent="0" marL="0">
-              <a:buNone/>
-            </a:pPr>
-          </a:p>
-          <a:p>
-            <a:pPr lvl="0" indent="0" marL="0">
-              <a:buNone/>
-            </a:pPr>
-            <a:r>
-              <a:rPr/>
-              <a:t>If time is short, skip the descent curve - it is the least surprising cell and they saw the same picture in lesson 3.</a:t>
+              <a:t>This is the loss on ONE example, L, not the cost over the training set; p is the predicted probability, the same number the next slide writes as y-hat. Say the other half aloud rather than showing it: the cost J is the average of this over the m examples, one over m times the sum. Written out in full the formula reached the slide edge and came out at 26pt, smaller than the bullets on the slide before it.</a:t>
+            </a:r>
+          </a:p>
+          <a:p>
+            <a:pPr lvl="0" indent="0" marL="0">
+              <a:buNone/>
+            </a:pPr>
+          </a:p>
+          <a:p>
+            <a:pPr lvl="0" indent="0" marL="0">
+              <a:buNone/>
+            </a:pPr>
+            <a:r>
+              <a:rPr/>
+              <a:t>Do not derive it here - the handout, section 3, does it in full. Show it and read it.</a:t>
+            </a:r>
+          </a:p>
+          <a:p>
+            <a:pPr lvl="0" indent="0" marL="0">
+              <a:buNone/>
+            </a:pPr>
+          </a:p>
+          <a:p>
+            <a:pPr lvl="0" indent="0" marL="0">
+              <a:buNone/>
+            </a:pPr>
+            <a:r>
+              <a:rPr/>
+              <a:t>The reading that makes it stick: the cost of an outcome is the SURPRISE of seeing it. Something you called certain costs nothing. Something you gave a probability of one in a thousand costs log 1000, about 6.9 (natural logarithm, as everywhere in this lesson). Something you declared impossible costs infinity.</a:t>
+            </a:r>
+          </a:p>
+          <a:p>
+            <a:pPr lvl="0" indent="0" marL="0">
+              <a:buNone/>
+            </a:pPr>
+          </a:p>
+          <a:p>
+            <a:pPr lvl="0" indent="0" marL="0">
+              <a:buNone/>
+            </a:pPr>
+            <a:r>
+              <a:rPr/>
+              <a:t>Only one of the two terms is ever active, because y is 0 or 1. The bracket is a way of writing an if-statement in algebra, nothing more.</a:t>
+            </a:r>
+          </a:p>
+          <a:p>
+            <a:pPr lvl="0" indent="0" marL="0">
+              <a:buNone/>
+            </a:pPr>
+          </a:p>
+          <a:p>
+            <a:pPr lvl="0" indent="0" marL="0">
+              <a:buNone/>
+            </a:pPr>
+            <a:r>
+              <a:rPr/>
+              <a:t>And the headline: nobody designed this function. It fell out of asking for the parameters that make the data least surprising.</a:t>
             </a:r>
           </a:p>
         </p:txBody>
@@ -2228,49 +2148,77 @@
             </a:pPr>
             <a:r>
               <a:rPr/>
-              <a:t>Two features, so the model can be drawn. The black line is where the predicted probability is exactly 0.5 - equivalently, where the log-odds are zero.</a:t>
-            </a:r>
-          </a:p>
-          <a:p>
-            <a:pPr lvl="0" indent="0" marL="0">
-              <a:buNone/>
-            </a:pPr>
-          </a:p>
-          <a:p>
-            <a:pPr lvl="0" indent="0" marL="0">
-              <a:buNone/>
-            </a:pPr>
-            <a:r>
-              <a:rPr/>
-              <a:t>First observation: it is STRAIGHT. Logistic regression is a linear classifier. The curve is in the probabilities, not in the boundary. That surprises people who expected the sigmoid to bend it.</a:t>
-            </a:r>
-          </a:p>
-          <a:p>
-            <a:pPr lvl="0" indent="0" marL="0">
-              <a:buNone/>
-            </a:pPr>
-          </a:p>
-          <a:p>
-            <a:pPr lvl="0" indent="0" marL="0">
-              <a:buNone/>
-            </a:pPr>
-            <a:r>
-              <a:rPr/>
-              <a:t>Second observation, and this is the bridge to the rest of the lesson: almost every gold point - every drive that actually failed - is on the blue side of the line. At a threshold of 0.5 this model calls nearly the whole fleet healthy, including most of the drives that failed.</a:t>
-            </a:r>
-          </a:p>
-          <a:p>
-            <a:pPr lvl="0" indent="0" marL="0">
-              <a:buNone/>
-            </a:pPr>
-          </a:p>
-          <a:p>
-            <a:pPr lvl="0" indent="0" marL="0">
-              <a:buNone/>
-            </a:pPr>
-            <a:r>
-              <a:rPr/>
-              <a:t>Ask: is that a bad model? Take answers. Then say: the probabilities are fine. The threshold of 0.5 is a habit. Telling those two apart is the rest of the lesson.</a:t>
+              <a:t>What the formula says, in words. To find how the cost J changes when the coefficient w_j is nudged up: take each training drive, compute its error - the predicted probability y-hat minus the true label y, which is 0 or 1 - multiply that error by the drive’s value of feature j, and average over the m drives. Gradient descent then steps w_j in the opposite direction.</a:t>
+            </a:r>
+          </a:p>
+          <a:p>
+            <a:pPr lvl="0" indent="0" marL="0">
+              <a:buNone/>
+            </a:pPr>
+          </a:p>
+          <a:p>
+            <a:pPr lvl="0" indent="0" marL="0">
+              <a:buNone/>
+            </a:pPr>
+            <a:r>
+              <a:rPr/>
+              <a:t>What is new, and what is not. The formula is written with exactly the symbols of lesson 3’s slide 23. The difference is hidden in y-hat: in lesson 3 it was the straight line w-transpose-x plus b, and here it is the sigmoid of that line, the probability of slide 11 - which is why the title says so. The cost is different too: squared error there, log loss (slide 21) here. Different model, different cost, and yet the same gradient.</a:t>
+            </a:r>
+          </a:p>
+          <a:p>
+            <a:pPr lvl="0" indent="0" marL="0">
+              <a:buNone/>
+            </a:pPr>
+          </a:p>
+          <a:p>
+            <a:pPr lvl="0" indent="0" marL="0">
+              <a:buNone/>
+            </a:pPr>
+            <a:r>
+              <a:rPr/>
+              <a:t>A concrete drive. A drive that failed, y = 1, to which the model gives y-hat = 0.2: its error is 0.2 minus 1, which is minus 0.8. A negative term means the cost falls if w_j rises, so this drive pulls w_j up, and pulls harder the larger its value of feature j. A healthy drive, y = 0, given the same 0.2 has error plus 0.2 and pulls the other way, four times more gently. This is lesson 3’s weighted vote: each drive pulls in proportion to how wrong it was and how large the feature was for it.</a:t>
+            </a:r>
+          </a:p>
+          <a:p>
+            <a:pPr lvl="0" indent="0" marL="0">
+              <a:buNone/>
+            </a:pPr>
+          </a:p>
+          <a:p>
+            <a:pPr lvl="0" indent="0" marL="0">
+              <a:buNone/>
+            </a:pPr>
+            <a:r>
+              <a:rPr/>
+              <a:t>Why it comes out the same - worth the board if there is appetite, handout section 3.4 has it in full. Follow one drive through the chain rule, in three links, with p for y-hat and z for w-transpose-x plus b: - how the loss changes with p: (p - y) divided by p times (1 - p) - the denominator comes from the logarithms in the log loss; - how p changes with z: p times (1 - p), the sigmoid’s derivative from slide 11; - how z changes with w_j: x_j. Multiply the three: the p times (1 - p) cancels, and what is left is (p - y) times x_j.</a:t>
+            </a:r>
+          </a:p>
+          <a:p>
+            <a:pPr lvl="0" indent="0" marL="0">
+              <a:buNone/>
+            </a:pPr>
+          </a:p>
+          <a:p>
+            <a:pPr lvl="0" indent="0" marL="0">
+              <a:buNone/>
+            </a:pPr>
+            <a:r>
+              <a:rPr/>
+              <a:t>Why that cancellation matters, and it is the bridge to the next slide: with squared error in place of log loss, nothing cancels the factor p times (1 - p), and slide 23 shows what it does to a drive the model is confidently wrong about.</a:t>
+            </a:r>
+          </a:p>
+          <a:p>
+            <a:pPr lvl="0" indent="0" marL="0">
+              <a:buNone/>
+            </a:pPr>
+          </a:p>
+          <a:p>
+            <a:pPr lvl="0" indent="0" marL="0">
+              <a:buNone/>
+            </a:pPr>
+            <a:r>
+              <a:rPr/>
+              <a:t>If someone asks whether the match is a coincidence: no, and one sentence is enough. Both costs come from maximum likelihood - squared error when the noise on y is Gaussian (lesson 3, handout section 2.2), log loss when y is a 0/1 outcome - and each paired with its own model gives this same form. Statisticians call the family “generalised linear models”; the name is not examinable. The practical consequence is: the same gradient descent code trains both models, and only the line that computes y-hat changes.</a:t>
             </a:r>
           </a:p>
         </p:txBody>
@@ -2352,7 +2300,63 @@
             </a:pPr>
             <a:r>
               <a:rPr/>
-              <a:t>Ten minutes. When they come back, the first slide is the trap, and it works best if they have not been thinking about it.</a:t>
+              <a:t>Both panels take a drive that failed, y = 1, and move the model’s probability p for it along the horizontal axis. Squared error here is (p - 1) squared, the handout’s convention in section 4.</a:t>
+            </a:r>
+          </a:p>
+          <a:p>
+            <a:pPr lvl="0" indent="0" marL="0">
+              <a:buNone/>
+            </a:pPr>
+          </a:p>
+          <a:p>
+            <a:pPr lvl="0" indent="0" marL="0">
+              <a:buNone/>
+            </a:pPr>
+            <a:r>
+              <a:rPr/>
+              <a:t>Left panel, the costs. A drive failed and the model said 0.0001. Squared error charges 0.9998. An honest “don’t know” - 0.5 - costs 0.25. So the worst possible answer is four times worse than a shrug. Log loss charges 9.2 against 0.69, and the ratio grows without bound.</a:t>
+            </a:r>
+          </a:p>
+          <a:p>
+            <a:pPr lvl="0" indent="0" marL="0">
+              <a:buNone/>
+            </a:pPr>
+          </a:p>
+          <a:p>
+            <a:pPr lvl="0" indent="0" marL="0">
+              <a:buNone/>
+            </a:pPr>
+            <a:r>
+              <a:rPr/>
+              <a:t>Right panel is the real argument, so spend the time here. It shows the size of the gradient with respect to z, the push gradient descent gives the model. Log loss’s gradient is p - 1 (slide 22). Squared error’s is 2(p - 1) times p times (1 - p): the chain rule through the sigmoid brings in its derivative, p times one-minus-p, from slide 11, and nothing cancels it. That factor goes to zero as p goes to zero.</a:t>
+            </a:r>
+          </a:p>
+          <a:p>
+            <a:pPr lvl="0" indent="0" marL="0">
+              <a:buNone/>
+            </a:pPr>
+          </a:p>
+          <a:p>
+            <a:pPr lvl="0" indent="0" marL="0">
+              <a:buNone/>
+            </a:pPr>
+            <a:r>
+              <a:rPr/>
+              <a:t>Say it as a sentence: the wronger the model gets, the less squared error asks it to change. At p = 0.001 the gradient is a five-hundredth of log loss’s. Log loss goes the other way, approaching its maximum push exactly where the error is worst.</a:t>
+            </a:r>
+          </a:p>
+          <a:p>
+            <a:pPr lvl="0" indent="0" marL="0">
+              <a:buNone/>
+            </a:pPr>
+          </a:p>
+          <a:p>
+            <a:pPr lvl="0" indent="0" marL="0">
+              <a:buNone/>
+            </a:pPr>
+            <a:r>
+              <a:rPr/>
+              <a:t>That is the failure. Not that squared error scores badly - that it stops teaching.</a:t>
             </a:r>
           </a:p>
         </p:txBody>
@@ -2434,59 +2438,49 @@
             </a:pPr>
             <a:r>
               <a:rPr/>
-              <a:t>This is the number to remember from lesson 4. Put it up and say nothing for a moment.</a:t>
-            </a:r>
-          </a:p>
-          <a:p>
-            <a:pPr lvl="0" indent="0" marL="0">
-              <a:buNone/>
-            </a:pPr>
-          </a:p>
-          <a:p>
-            <a:pPr lvl="0" indent="0" marL="0">
-              <a:buNone/>
-            </a:pPr>
-            <a:r>
-              <a:rPr/>
-              <a:t>A model that could be written </a:t>
-            </a:r>
-            <a:r>
-              <a:rPr>
-                <a:latin typeface="Courier"/>
-              </a:rPr>
-              <a:t>return 0</a:t>
-            </a:r>
-            <a:r>
-              <a:rPr/>
-              <a:t> - no learning, no data, no features - scores 96.20%. The model they just built, which finds more than half the failing drives, scores 97.70%. One and a half percentage points separate a real model from a worthless one.</a:t>
-            </a:r>
-          </a:p>
-          <a:p>
-            <a:pPr lvl="0" indent="0" marL="0">
-              <a:buNone/>
-            </a:pPr>
-          </a:p>
-          <a:p>
-            <a:pPr lvl="0" indent="0" marL="0">
-              <a:buNone/>
-            </a:pPr>
-            <a:r>
-              <a:rPr/>
-              <a:t>The arithmetic is not subtle: 1,924 of the 2,000 test drives are healthy, so answering “healthy” collects them all for free. Only 3.8% of the test set is left to compete over.</a:t>
-            </a:r>
-          </a:p>
-          <a:p>
-            <a:pPr lvl="0" indent="0" marL="0">
-              <a:buNone/>
-            </a:pPr>
-          </a:p>
-          <a:p>
-            <a:pPr lvl="0" indent="0" marL="0">
-              <a:buNone/>
-            </a:pPr>
-            <a:r>
-              <a:rPr/>
-              <a:t>This is the 306 from the first ten minutes, coming back as an accuracy score.</a:t>
+              <a:t>State it, do not prove it; the handout section 4.3 has the argument.</a:t>
+            </a:r>
+          </a:p>
+          <a:p>
+            <a:pPr lvl="0" indent="0" marL="0">
+              <a:buNone/>
+            </a:pPr>
+          </a:p>
+          <a:p>
+            <a:pPr lvl="0" indent="0" marL="0">
+              <a:buNone/>
+            </a:pPr>
+            <a:r>
+              <a:rPr/>
+              <a:t>The consequence is practical: gradient descent on log loss cannot get trapped. Squared error through a sigmoid has no such guarantee and is in general non-convex.</a:t>
+            </a:r>
+          </a:p>
+          <a:p>
+            <a:pPr lvl="0" indent="0" marL="0">
+              <a:buNone/>
+            </a:pPr>
+          </a:p>
+          <a:p>
+            <a:pPr lvl="0" indent="0" marL="0">
+              <a:buNone/>
+            </a:pPr>
+            <a:r>
+              <a:rPr/>
+              <a:t>Now the caution that catches people, and it is worth ten seconds because they will hit it in the notebook. Convex does NOT mean there is a closed-form solution. Setting the gradient to zero gives X-transpose times sigma of Xw minus y equals zero, which is not linear in w - the sigmoid is in the way.</a:t>
+            </a:r>
+          </a:p>
+          <a:p>
+            <a:pPr lvl="0" indent="0" marL="0">
+              <a:buNone/>
+            </a:pPr>
+          </a:p>
+          <a:p>
+            <a:pPr lvl="0" indent="0" marL="0">
+              <a:buNone/>
+            </a:pPr>
+            <a:r>
+              <a:rPr/>
+              <a:t>There is no normal equation for logistic regression. It has to be solved iteratively, which is why LogisticRegression has a max_iter argument and LinearRegression does not. If a student ever sees a convergence warning, that is what it is about.</a:t>
             </a:r>
           </a:p>
         </p:txBody>
@@ -2568,49 +2562,63 @@
             </a:pPr>
             <a:r>
               <a:rPr/>
-              <a:t>Be careful to defend the instinct rather than mock it. Accuracy is not a naive metric, and students who reached for it were not being lazy - on a balanced problem it is the correct summary and everything else is a complication.</a:t>
-            </a:r>
-          </a:p>
-          <a:p>
-            <a:pPr lvl="0" indent="0" marL="0">
-              <a:buNone/>
-            </a:pPr>
-          </a:p>
-          <a:p>
-            <a:pPr lvl="0" indent="0" marL="0">
-              <a:buNone/>
-            </a:pPr>
-            <a:r>
-              <a:rPr/>
-              <a:t>It stops being informative precisely when one class is rare. And then list the problems: fraud, disease screening, intrusion detection, equipment failure, spam. In every one of them the class you care about is the small one.</a:t>
-            </a:r>
-          </a:p>
-          <a:p>
-            <a:pPr lvl="0" indent="0" marL="0">
-              <a:buNone/>
-            </a:pPr>
-          </a:p>
-          <a:p>
-            <a:pPr lvl="0" indent="0" marL="0">
-              <a:buNone/>
-            </a:pPr>
-            <a:r>
-              <a:rPr/>
-              <a:t>The general statement, worth putting on the board: if a share pi of the cases are positive (the positive rate), the trivial always-negative classifier scores 1 minus pi. Here 96.2%. In some fraud problems, where the rate is one in a thousand, 99.9%.</a:t>
-            </a:r>
-          </a:p>
-          <a:p>
-            <a:pPr lvl="0" indent="0" marL="0">
-              <a:buNone/>
-            </a:pPr>
-          </a:p>
-          <a:p>
-            <a:pPr lvl="0" indent="0" marL="0">
-              <a:buNone/>
-            </a:pPr>
-            <a:r>
-              <a:rPr/>
-              <a:t>Accuracy is not wrong. It is answering a question nobody asked.</a:t>
+              <a:t>Fifteen lines of NumPy, then one line of scikit-learn, and the same answer. Run notebook 01. Twenty minutes. The parts worth stopping on:</a:t>
+            </a:r>
+          </a:p>
+          <a:p>
+            <a:pPr lvl="0" indent="0" marL="0">
+              <a:buNone/>
+            </a:pPr>
+          </a:p>
+          <a:p>
+            <a:pPr lvl="0" indent="0" marL="0">
+              <a:buNone/>
+            </a:pPr>
+            <a:r>
+              <a:rPr/>
+              <a:t>The linear-fit failure - let them see 3,606 negative probabilities printed rather than being told.</a:t>
+            </a:r>
+          </a:p>
+          <a:p>
+            <a:pPr lvl="0" indent="0" marL="0">
+              <a:buNone/>
+            </a:pPr>
+          </a:p>
+          <a:p>
+            <a:pPr lvl="0" indent="0" marL="0">
+              <a:buNone/>
+            </a:pPr>
+            <a:r>
+              <a:rPr/>
+              <a:t>The gradient/loss figure, which is the argument you just made, in code they can change. Invite them to change it: what happens to the squared-error gradient at p = 0.5?</a:t>
+            </a:r>
+          </a:p>
+          <a:p>
+            <a:pPr lvl="0" indent="0" marL="0">
+              <a:buNone/>
+            </a:pPr>
+          </a:p>
+          <a:p>
+            <a:pPr lvl="0" indent="0" marL="0">
+              <a:buNone/>
+            </a:pPr>
+            <a:r>
+              <a:rPr/>
+              <a:t>The coefficient recovery table, including the decoy.</a:t>
+            </a:r>
+          </a:p>
+          <a:p>
+            <a:pPr lvl="0" indent="0" marL="0">
+              <a:buNone/>
+            </a:pPr>
+          </a:p>
+          <a:p>
+            <a:pPr lvl="0" indent="0" marL="0">
+              <a:buNone/>
+            </a:pPr>
+            <a:r>
+              <a:rPr/>
+              <a:t>If time is short, skip the descent curve - it is the least surprising cell and they saw the same picture in lesson 3.</a:t>
             </a:r>
           </a:p>
         </p:txBody>
@@ -2692,49 +2700,49 @@
             </a:pPr>
             <a:r>
               <a:rPr/>
-              <a:t>The fix is to stop collapsing four outcomes into one number.</a:t>
-            </a:r>
-          </a:p>
-          <a:p>
-            <a:pPr lvl="0" indent="0" marL="0">
-              <a:buNone/>
-            </a:pPr>
-          </a:p>
-          <a:p>
-            <a:pPr lvl="0" indent="0" marL="0">
-              <a:buNone/>
-            </a:pPr>
-            <a:r>
-              <a:rPr/>
-              <a:t>Side by side, the two models are obviously not comparable - and the number that separates them, 0 caught against 43, is nowhere in the accuracy figure.</a:t>
-            </a:r>
-          </a:p>
-          <a:p>
-            <a:pPr lvl="0" indent="0" marL="0">
-              <a:buNone/>
-            </a:pPr>
-          </a:p>
-          <a:p>
-            <a:pPr lvl="0" indent="0" marL="0">
-              <a:buNone/>
-            </a:pPr>
-            <a:r>
-              <a:rPr/>
-              <a:t>Teach them to read the bottom-left cell first when misses are expensive: 33 drives failed and were called healthy. That is the cell that costs money, and it is the one a single-number metric hides.</a:t>
-            </a:r>
-          </a:p>
-          <a:p>
-            <a:pPr lvl="0" indent="0" marL="0">
-              <a:buNone/>
-            </a:pPr>
-          </a:p>
-          <a:p>
-            <a:pPr lvl="0" indent="0" marL="0">
-              <a:buNone/>
-            </a:pPr>
-            <a:r>
-              <a:rPr/>
-              <a:t>Worth naming the convention while it is on screen, because half the world uses the transpose: scikit-learn puts truth in rows and predictions in columns. Any time they read a confusion matrix from a paper, check which way round it is before drawing conclusions.</a:t>
+              <a:t>Two features, so the model can be drawn. The black line is where the predicted probability is exactly 0.5 - equivalently, where the log-odds are zero.</a:t>
+            </a:r>
+          </a:p>
+          <a:p>
+            <a:pPr lvl="0" indent="0" marL="0">
+              <a:buNone/>
+            </a:pPr>
+          </a:p>
+          <a:p>
+            <a:pPr lvl="0" indent="0" marL="0">
+              <a:buNone/>
+            </a:pPr>
+            <a:r>
+              <a:rPr/>
+              <a:t>First observation: it is STRAIGHT. Logistic regression is a linear classifier. The curve is in the probabilities, not in the boundary. That surprises people who expected the sigmoid to bend it.</a:t>
+            </a:r>
+          </a:p>
+          <a:p>
+            <a:pPr lvl="0" indent="0" marL="0">
+              <a:buNone/>
+            </a:pPr>
+          </a:p>
+          <a:p>
+            <a:pPr lvl="0" indent="0" marL="0">
+              <a:buNone/>
+            </a:pPr>
+            <a:r>
+              <a:rPr/>
+              <a:t>Second observation, and this is the bridge to the rest of the lesson: almost every gold point - every drive that actually failed - is on the blue side of the line. At a threshold of 0.5 this model calls nearly the whole fleet healthy, including most of the drives that failed.</a:t>
+            </a:r>
+          </a:p>
+          <a:p>
+            <a:pPr lvl="0" indent="0" marL="0">
+              <a:buNone/>
+            </a:pPr>
+          </a:p>
+          <a:p>
+            <a:pPr lvl="0" indent="0" marL="0">
+              <a:buNone/>
+            </a:pPr>
+            <a:r>
+              <a:rPr/>
+              <a:t>Ask: is that a bad model? Take answers. Then say: the probabilities are fine. The threshold of 0.5 is a habit. Telling those two apart is the rest of the lesson.</a:t>
             </a:r>
           </a:p>
         </p:txBody>
@@ -2816,35 +2824,7 @@
             </a:pPr>
             <a:r>
               <a:rPr/>
-              <a:t>The names are jargon until they are attached to consequences, so attach them here and keep the numbers visible - they come back at the end of the lesson when we choose a threshold.</a:t>
-            </a:r>
-          </a:p>
-          <a:p>
-            <a:pPr lvl="0" indent="0" marL="0">
-              <a:buNone/>
-            </a:pPr>
-          </a:p>
-          <a:p>
-            <a:pPr lvl="0" indent="0" marL="0">
-              <a:buNone/>
-            </a:pPr>
-            <a:r>
-              <a:rPr/>
-              <a:t>The essential point: these two errors are NOT the same size, and no single-number metric knows that. Accuracy treats them as identical. F1, the metric of slide 30, treats them as identical. Only a cost, supplied from outside the data, distinguishes them.</a:t>
-            </a:r>
-          </a:p>
-          <a:p>
-            <a:pPr lvl="0" indent="0" marL="0">
-              <a:buNone/>
-            </a:pPr>
-          </a:p>
-          <a:p>
-            <a:pPr lvl="0" indent="0" marL="0">
-              <a:buNone/>
-            </a:pPr>
-            <a:r>
-              <a:rPr/>
-              <a:t>Ask for a domain where the ratio goes the other way - where a false positive is the expensive one. Medical screening that triggers an invasive biopsy is the usual answer; content moderation that removes a legitimate post is another.</a:t>
+              <a:t>Ten minutes. When they come back, the first slide is the trap, and it works best if they have not been thinking about it.</a:t>
             </a:r>
           </a:p>
         </p:txBody>
@@ -2926,49 +2906,59 @@
             </a:pPr>
             <a:r>
               <a:rPr/>
-              <a:t>This picture prevents the most common confusion of the lesson. Both metrics put the true positives - failed drives we flagged - on top of the fraction. The difference is entirely in what goes underneath, and the shading shows it.</a:t>
-            </a:r>
-          </a:p>
-          <a:p>
-            <a:pPr lvl="0" indent="0" marL="0">
-              <a:buNone/>
-            </a:pPr>
-          </a:p>
-          <a:p>
-            <a:pPr lvl="0" indent="0" marL="0">
-              <a:buNone/>
-            </a:pPr>
-            <a:r>
-              <a:rPr/>
-              <a:t>Precision divides by the COLUMN - everything we flagged. When this model raises an alarm, how often is it right? That is the technician’s question: how much of my time are you wasting?</a:t>
-            </a:r>
-          </a:p>
-          <a:p>
-            <a:pPr lvl="0" indent="0" marL="0">
-              <a:buNone/>
-            </a:pPr>
-          </a:p>
-          <a:p>
-            <a:pPr lvl="0" indent="0" marL="0">
-              <a:buNone/>
-            </a:pPr>
-            <a:r>
-              <a:rPr/>
-              <a:t>Recall divides by the ROW - everything that actually failed. Of the drives that were going to fail, how many did we find? That is the operations manager’s question: how exposed am I still?</a:t>
-            </a:r>
-          </a:p>
-          <a:p>
-            <a:pPr lvl="0" indent="0" marL="0">
-              <a:buNone/>
-            </a:pPr>
-          </a:p>
-          <a:p>
-            <a:pPr lvl="0" indent="0" marL="0">
-              <a:buNone/>
-            </a:pPr>
-            <a:r>
-              <a:rPr/>
-              <a:t>Give them the hook and make them repeat it: precision is about the alarms, recall is about the failures. When in doubt, find the denominator and ask which population it is.</a:t>
+              <a:t>This is the number to remember from lesson 4. Put it up and say nothing for a moment.</a:t>
+            </a:r>
+          </a:p>
+          <a:p>
+            <a:pPr lvl="0" indent="0" marL="0">
+              <a:buNone/>
+            </a:pPr>
+          </a:p>
+          <a:p>
+            <a:pPr lvl="0" indent="0" marL="0">
+              <a:buNone/>
+            </a:pPr>
+            <a:r>
+              <a:rPr/>
+              <a:t>A model that could be written </a:t>
+            </a:r>
+            <a:r>
+              <a:rPr>
+                <a:latin typeface="Courier"/>
+              </a:rPr>
+              <a:t>return 0</a:t>
+            </a:r>
+            <a:r>
+              <a:rPr/>
+              <a:t> - no learning, no data, no features - scores 96.20%. The model they just built, which finds more than half the failing drives, scores 97.70%. One and a half percentage points separate a real model from a worthless one.</a:t>
+            </a:r>
+          </a:p>
+          <a:p>
+            <a:pPr lvl="0" indent="0" marL="0">
+              <a:buNone/>
+            </a:pPr>
+          </a:p>
+          <a:p>
+            <a:pPr lvl="0" indent="0" marL="0">
+              <a:buNone/>
+            </a:pPr>
+            <a:r>
+              <a:rPr/>
+              <a:t>The arithmetic is not subtle: 1,924 of the 2,000 test drives are healthy, so answering “healthy” collects them all for free. Only 3.8% of the test set is left to compete over.</a:t>
+            </a:r>
+          </a:p>
+          <a:p>
+            <a:pPr lvl="0" indent="0" marL="0">
+              <a:buNone/>
+            </a:pPr>
+          </a:p>
+          <a:p>
+            <a:pPr lvl="0" indent="0" marL="0">
+              <a:buNone/>
+            </a:pPr>
+            <a:r>
+              <a:rPr/>
+              <a:t>This is the 306 from the first ten minutes, coming back as an accuracy score.</a:t>
             </a:r>
           </a:p>
         </p:txBody>
@@ -3050,35 +3040,49 @@
             </a:pPr>
             <a:r>
               <a:rPr/>
-              <a:t>Read each line as an English sentence with the counts in it, not as a ratio. That is the habit worth building: a metric that cannot be said as a sentence about actual objects has not been understood.</a:t>
-            </a:r>
-          </a:p>
-          <a:p>
-            <a:pPr lvl="0" indent="0" marL="0">
-              <a:buNone/>
-            </a:pPr>
-          </a:p>
-          <a:p>
-            <a:pPr lvl="0" indent="0" marL="0">
-              <a:buNone/>
-            </a:pPr>
-            <a:r>
-              <a:rPr/>
-              <a:t>Specificity is recall for the negative class: of the healthy drives, how many did we leave alone. One minus it is the false positive rate, which comes back in the receiver operating characteristic (ROC) section. Mention it now so the term is not new later.</a:t>
-            </a:r>
-          </a:p>
-          <a:p>
-            <a:pPr lvl="0" indent="0" marL="0">
-              <a:buNone/>
-            </a:pPr>
-          </a:p>
-          <a:p>
-            <a:pPr lvl="0" indent="0" marL="0">
-              <a:buNone/>
-            </a:pPr>
-            <a:r>
-              <a:rPr/>
-              <a:t>If someone asks which of the three to report: the answer is that it depends on who is asking, which is the honest answer and also the lesson.</a:t>
+              <a:t>Be careful to defend the instinct rather than mock it. Accuracy is not a naive metric, and students who reached for it were not being lazy - on a balanced problem it is the correct summary and everything else is a complication.</a:t>
+            </a:r>
+          </a:p>
+          <a:p>
+            <a:pPr lvl="0" indent="0" marL="0">
+              <a:buNone/>
+            </a:pPr>
+          </a:p>
+          <a:p>
+            <a:pPr lvl="0" indent="0" marL="0">
+              <a:buNone/>
+            </a:pPr>
+            <a:r>
+              <a:rPr/>
+              <a:t>It stops being informative precisely when one class is rare. And then list the problems: fraud, disease screening, intrusion detection, equipment failure, spam. In every one of them the class you care about is the small one.</a:t>
+            </a:r>
+          </a:p>
+          <a:p>
+            <a:pPr lvl="0" indent="0" marL="0">
+              <a:buNone/>
+            </a:pPr>
+          </a:p>
+          <a:p>
+            <a:pPr lvl="0" indent="0" marL="0">
+              <a:buNone/>
+            </a:pPr>
+            <a:r>
+              <a:rPr/>
+              <a:t>The general statement, worth putting on the board: if a share pi of the cases are positive (the positive rate), the trivial always-negative classifier scores 1 minus pi. Here 96.2%. In some fraud problems, where the rate is one in a thousand, 99.9%.</a:t>
+            </a:r>
+          </a:p>
+          <a:p>
+            <a:pPr lvl="0" indent="0" marL="0">
+              <a:buNone/>
+            </a:pPr>
+          </a:p>
+          <a:p>
+            <a:pPr lvl="0" indent="0" marL="0">
+              <a:buNone/>
+            </a:pPr>
+            <a:r>
+              <a:rPr/>
+              <a:t>Accuracy is not wrong. It is answering a question nobody asked.</a:t>
             </a:r>
           </a:p>
         </p:txBody>
@@ -3160,63 +3164,49 @@
             </a:pPr>
             <a:r>
               <a:rPr/>
-              <a:t>Take the stupidest possible model - flag every single drive - and score it. Recall is a perfect 1.0. Precision is 0.038.</a:t>
-            </a:r>
-          </a:p>
-          <a:p>
-            <a:pPr lvl="0" indent="0" marL="0">
-              <a:buNone/>
-            </a:pPr>
-          </a:p>
-          <a:p>
-            <a:pPr lvl="0" indent="0" marL="0">
-              <a:buNone/>
-            </a:pPr>
-            <a:r>
-              <a:rPr/>
-              <a:t>The ordinary average gives that model 0.519, which looks respectable. Anyone scanning a results table would not blink at 0.519.</a:t>
-            </a:r>
-          </a:p>
-          <a:p>
-            <a:pPr lvl="0" indent="0" marL="0">
-              <a:buNone/>
-            </a:pPr>
-          </a:p>
-          <a:p>
-            <a:pPr lvl="0" indent="0" marL="0">
-              <a:buNone/>
-            </a:pPr>
-            <a:r>
-              <a:rPr/>
-              <a:t>The harmonic mean gives it 0.073, which is the truth.</a:t>
-            </a:r>
-          </a:p>
-          <a:p>
-            <a:pPr lvl="0" indent="0" marL="0">
-              <a:buNone/>
-            </a:pPr>
-          </a:p>
-          <a:p>
-            <a:pPr lvl="0" indent="0" marL="0">
-              <a:buNone/>
-            </a:pPr>
-            <a:r>
-              <a:rPr/>
-              <a:t>The reason: the harmonic mean is dominated by the smaller of the two numbers. A model is only as good as its weaker side, and F1 refuses to let a perfect score on one axis buy a pass on the other.</a:t>
-            </a:r>
-          </a:p>
-          <a:p>
-            <a:pPr lvl="0" indent="0" marL="0">
-              <a:buNone/>
-            </a:pPr>
-          </a:p>
-          <a:p>
-            <a:pPr lvl="0" indent="0" marL="0">
-              <a:buNone/>
-            </a:pPr>
-            <a:r>
-              <a:rPr/>
-              <a:t>Mention F-beta in one sentence: a version of F1 with a weight beta, where beta above 1 counts recall more than precision. That is what you want here, where a miss costs about nineteen times a false alarm (2,600 against 140 euros). F2 is the usual choice.</a:t>
+              <a:t>The fix is to stop collapsing four outcomes into one number.</a:t>
+            </a:r>
+          </a:p>
+          <a:p>
+            <a:pPr lvl="0" indent="0" marL="0">
+              <a:buNone/>
+            </a:pPr>
+          </a:p>
+          <a:p>
+            <a:pPr lvl="0" indent="0" marL="0">
+              <a:buNone/>
+            </a:pPr>
+            <a:r>
+              <a:rPr/>
+              <a:t>Side by side, the two models are obviously not comparable - and the number that separates them, 0 caught against 43, is nowhere in the accuracy figure.</a:t>
+            </a:r>
+          </a:p>
+          <a:p>
+            <a:pPr lvl="0" indent="0" marL="0">
+              <a:buNone/>
+            </a:pPr>
+          </a:p>
+          <a:p>
+            <a:pPr lvl="0" indent="0" marL="0">
+              <a:buNone/>
+            </a:pPr>
+            <a:r>
+              <a:rPr/>
+              <a:t>Teach them to read the bottom-left cell first when misses are expensive: 33 drives failed and were called healthy. That is the cell that costs money, and it is the one a single-number metric hides.</a:t>
+            </a:r>
+          </a:p>
+          <a:p>
+            <a:pPr lvl="0" indent="0" marL="0">
+              <a:buNone/>
+            </a:pPr>
+          </a:p>
+          <a:p>
+            <a:pPr lvl="0" indent="0" marL="0">
+              <a:buNone/>
+            </a:pPr>
+            <a:r>
+              <a:rPr/>
+              <a:t>Worth naming the convention while it is on screen, because half the world uses the transpose: scikit-learn puts truth in rows and predictions in columns. Any time they read a confusion matrix from a paper, check which way round it is before drawing conclusions.</a:t>
             </a:r>
           </a:p>
         </p:txBody>
@@ -3422,63 +3412,35 @@
             </a:pPr>
             <a:r>
               <a:rPr/>
-              <a:t>classification_report is scikit-learn’s summary table, and they will print it themselves in notebook 2 in about five minutes: one row per class, then three summary rows - accuracy, macro avg, weighted avg. The two numbers on this slide are the f1-score column of the last two.</a:t>
-            </a:r>
-          </a:p>
-          <a:p>
-            <a:pPr lvl="0" indent="0" marL="0">
-              <a:buNone/>
-            </a:pPr>
-          </a:p>
-          <a:p>
-            <a:pPr lvl="0" indent="0" marL="0">
-              <a:buNone/>
-            </a:pPr>
-            <a:r>
-              <a:rPr/>
-              <a:t>Anticipating it by one slide is deliberate. The rule for choosing between those rows is what they need in their heads while they run the notebook, not afterwards - left to themselves they quote whichever is biggest.</a:t>
-            </a:r>
-          </a:p>
-          <a:p>
-            <a:pPr lvl="0" indent="0" marL="0">
-              <a:buNone/>
-            </a:pPr>
-          </a:p>
-          <a:p>
-            <a:pPr lvl="0" indent="0" marL="0">
-              <a:buNone/>
-            </a:pPr>
-            <a:r>
-              <a:rPr/>
-              <a:t>The weighted average weights each class by how common it is, so on this problem it is essentially the healthy class talking, and it reads close to accuracy - inheriting exactly the blindness slides 24 to 27 were about.</a:t>
-            </a:r>
-          </a:p>
-          <a:p>
-            <a:pPr lvl="0" indent="0" marL="0">
-              <a:buNone/>
-            </a:pPr>
-          </a:p>
-          <a:p>
-            <a:pPr lvl="0" indent="0" marL="0">
-              <a:buNone/>
-            </a:pPr>
-            <a:r>
-              <a:rPr/>
-              <a:t>The macro average gives the two classes equal weight, so the rare class actually registers. 0.820 against 0.975 for the same model.</a:t>
-            </a:r>
-          </a:p>
-          <a:p>
-            <a:pPr lvl="0" indent="0" marL="0">
-              <a:buNone/>
-            </a:pPr>
-          </a:p>
-          <a:p>
-            <a:pPr lvl="0" indent="0" marL="0">
-              <a:buNone/>
-            </a:pPr>
-            <a:r>
-              <a:rPr/>
-              <a:t>The rule: on an imbalanced problem, quote the macro average or the minority class directly. Reporting the weighted average is not incorrect - it is the number that makes a mediocre model look finished, and choosing it without saying so is how a result gets oversold.</a:t>
+              <a:t>The names are jargon until they are attached to consequences, so attach them here and keep the numbers visible - they come back at the end of the lesson when we choose a threshold.</a:t>
+            </a:r>
+          </a:p>
+          <a:p>
+            <a:pPr lvl="0" indent="0" marL="0">
+              <a:buNone/>
+            </a:pPr>
+          </a:p>
+          <a:p>
+            <a:pPr lvl="0" indent="0" marL="0">
+              <a:buNone/>
+            </a:pPr>
+            <a:r>
+              <a:rPr/>
+              <a:t>The essential point: these two errors are NOT the same size, and no single-number metric knows that. Accuracy treats them as identical. F1, the metric of slide 34, treats them as identical. Only a cost, supplied from outside the data, distinguishes them.</a:t>
+            </a:r>
+          </a:p>
+          <a:p>
+            <a:pPr lvl="0" indent="0" marL="0">
+              <a:buNone/>
+            </a:pPr>
+          </a:p>
+          <a:p>
+            <a:pPr lvl="0" indent="0" marL="0">
+              <a:buNone/>
+            </a:pPr>
+            <a:r>
+              <a:rPr/>
+              <a:t>Ask for a domain where the ratio goes the other way - where a false positive is the expensive one. Medical screening that triggers an invasive biopsy is the usual answer; content moderation that removes a legitimate post is another.</a:t>
             </a:r>
           </a:p>
         </p:txBody>
@@ -3560,35 +3522,49 @@
             </a:pPr>
             <a:r>
               <a:rPr/>
-              <a:t>The confusion matrix by hand, then from scikit-learn, then the threshold sweep. Run notebook 02. Twenty minutes.</a:t>
-            </a:r>
-          </a:p>
-          <a:p>
-            <a:pPr lvl="0" indent="0" marL="0">
-              <a:buNone/>
-            </a:pPr>
-          </a:p>
-          <a:p>
-            <a:pPr lvl="0" indent="0" marL="0">
-              <a:buNone/>
-            </a:pPr>
-            <a:r>
-              <a:rPr/>
-              <a:t>Have them build the four counts by hand before calling confusion_matrix. It is four comparisons and it takes two minutes, and it is what makes the jargon stop being jargon.</a:t>
-            </a:r>
-          </a:p>
-          <a:p>
-            <a:pPr lvl="0" indent="0" marL="0">
-              <a:buNone/>
-            </a:pPr>
-          </a:p>
-          <a:p>
-            <a:pPr lvl="0" indent="0" marL="0">
-              <a:buNone/>
-            </a:pPr>
-            <a:r>
-              <a:rPr/>
-              <a:t>Spend time on the threshold sweep table. Do not explain it first - let them read the columns and say what they see. Somebody will notice that accuracy barely moves. That is the moment to make the next slide.</a:t>
+              <a:t>This picture prevents the most common confusion of the lesson. Both metrics put the true positives - failed drives we flagged - on top of the fraction. The difference is entirely in what goes underneath, and the shading shows it.</a:t>
+            </a:r>
+          </a:p>
+          <a:p>
+            <a:pPr lvl="0" indent="0" marL="0">
+              <a:buNone/>
+            </a:pPr>
+          </a:p>
+          <a:p>
+            <a:pPr lvl="0" indent="0" marL="0">
+              <a:buNone/>
+            </a:pPr>
+            <a:r>
+              <a:rPr/>
+              <a:t>Precision divides by the COLUMN - everything we flagged. When this model raises an alarm, how often is it right? That is the technician’s question: how much of my time are you wasting?</a:t>
+            </a:r>
+          </a:p>
+          <a:p>
+            <a:pPr lvl="0" indent="0" marL="0">
+              <a:buNone/>
+            </a:pPr>
+          </a:p>
+          <a:p>
+            <a:pPr lvl="0" indent="0" marL="0">
+              <a:buNone/>
+            </a:pPr>
+            <a:r>
+              <a:rPr/>
+              <a:t>Recall divides by the ROW - everything that actually failed. Of the drives that were going to fail, how many did we find? That is the operations manager’s question: how exposed am I still?</a:t>
+            </a:r>
+          </a:p>
+          <a:p>
+            <a:pPr lvl="0" indent="0" marL="0">
+              <a:buNone/>
+            </a:pPr>
+          </a:p>
+          <a:p>
+            <a:pPr lvl="0" indent="0" marL="0">
+              <a:buNone/>
+            </a:pPr>
+            <a:r>
+              <a:rPr/>
+              <a:t>Give them the hook and make them repeat it: precision is about the alarms, recall is about the failures. When in doubt, find the denominator and ask which population it is.</a:t>
             </a:r>
           </a:p>
         </p:txBody>
@@ -3670,35 +3646,35 @@
             </a:pPr>
             <a:r>
               <a:rPr/>
-              <a:t>The title of that figure is the point: nothing about the model changes along the x-axis. Same coefficients, same probabilities, same drives. All that moves is where we draw the line between “leave it” and “replace it”.</a:t>
-            </a:r>
-          </a:p>
-          <a:p>
-            <a:pPr lvl="0" indent="0" marL="0">
-              <a:buNone/>
-            </a:pPr>
-          </a:p>
-          <a:p>
-            <a:pPr lvl="0" indent="0" marL="0">
-              <a:buNone/>
-            </a:pPr>
-            <a:r>
-              <a:rPr/>
-              <a:t>That 0.5 is predict()’s default and nothing more. It is the right choice only when the two errors cost the same and the probabilities are trustworthy - slide 44 derives the threshold from the costs, and it is 0.5 exactly when they are equal. Here a miss costs about nineteen times a false alarm, and in most real problems the costs differ too.</a:t>
-            </a:r>
-          </a:p>
-          <a:p>
-            <a:pPr lvl="0" indent="0" marL="0">
-              <a:buNone/>
-            </a:pPr>
-          </a:p>
-          <a:p>
-            <a:pPr lvl="0" indent="0" marL="0">
-              <a:buNone/>
-            </a:pPr>
-            <a:r>
-              <a:rPr/>
-              <a:t>So when a paper or a colleague reports 77% precision, the useful follow-up is: at what threshold, and why that one? Most of the time there is no answer, because nobody chose it.</a:t>
+              <a:t>Read each line as an English sentence with the counts in it, not as a ratio. That is the habit worth building: a metric that cannot be said as a sentence about actual objects has not been understood.</a:t>
+            </a:r>
+          </a:p>
+          <a:p>
+            <a:pPr lvl="0" indent="0" marL="0">
+              <a:buNone/>
+            </a:pPr>
+          </a:p>
+          <a:p>
+            <a:pPr lvl="0" indent="0" marL="0">
+              <a:buNone/>
+            </a:pPr>
+            <a:r>
+              <a:rPr/>
+              <a:t>Specificity is recall for the negative class: of the healthy drives, how many did we leave alone. One minus it is the false positive rate, which comes back in the receiver operating characteristic (ROC) section. Mention it now so the term is not new later.</a:t>
+            </a:r>
+          </a:p>
+          <a:p>
+            <a:pPr lvl="0" indent="0" marL="0">
+              <a:buNone/>
+            </a:pPr>
+          </a:p>
+          <a:p>
+            <a:pPr lvl="0" indent="0" marL="0">
+              <a:buNone/>
+            </a:pPr>
+            <a:r>
+              <a:rPr/>
+              <a:t>If someone asks which of the three to report: the answer is that it depends on who is asking, which is the honest answer and also the lesson.</a:t>
             </a:r>
           </a:p>
         </p:txBody>
@@ -3780,49 +3756,63 @@
             </a:pPr>
             <a:r>
               <a:rPr/>
-              <a:t>Read it column by column with the room.</a:t>
-            </a:r>
-          </a:p>
-          <a:p>
-            <a:pPr lvl="0" indent="0" marL="0">
-              <a:buNone/>
-            </a:pPr>
-          </a:p>
-          <a:p>
-            <a:pPr lvl="0" indent="0" marL="0">
-              <a:buNone/>
-            </a:pPr>
-            <a:r>
-              <a:rPr/>
-              <a:t>Lower the threshold: recall rises, precision falls. At 0.02 we catch 69 of 76 failures and replace 284 healthy drives to do it. At 0.90 every alarm is justified and we catch fewer than a quarter.</a:t>
-            </a:r>
-          </a:p>
-          <a:p>
-            <a:pPr lvl="0" indent="0" marL="0">
-              <a:buNone/>
-            </a:pPr>
-          </a:p>
-          <a:p>
-            <a:pPr lvl="0" indent="0" marL="0">
-              <a:buNone/>
-            </a:pPr>
-            <a:r>
-              <a:rPr/>
-              <a:t>Now the accuracy column, which is the slide’s real argument. From 0.10 upwards it moves by three and a half percentage points, 0.942 to 0.977, while recall falls from 0.803 to 0.184. And its maximum is at 0.5 - the threshold that misses 33 of the 76 failures.</a:t>
-            </a:r>
-          </a:p>
-          <a:p>
-            <a:pPr lvl="0" indent="0" marL="0">
-              <a:buNone/>
-            </a:pPr>
-          </a:p>
-          <a:p>
-            <a:pPr lvl="0" indent="0" marL="0">
-              <a:buNone/>
-            </a:pPr>
-            <a:r>
-              <a:rPr/>
-              <a:t>Say the consequence plainly: tune on accuracy and it will quietly recommend catching fewer failures, because every alarm it drops was a possible false positive.</a:t>
+              <a:t>Take the stupidest possible model - flag every single drive - and score it. Recall is a perfect 1.0. Precision is 0.038.</a:t>
+            </a:r>
+          </a:p>
+          <a:p>
+            <a:pPr lvl="0" indent="0" marL="0">
+              <a:buNone/>
+            </a:pPr>
+          </a:p>
+          <a:p>
+            <a:pPr lvl="0" indent="0" marL="0">
+              <a:buNone/>
+            </a:pPr>
+            <a:r>
+              <a:rPr/>
+              <a:t>The ordinary average gives that model 0.519, which looks respectable. Anyone scanning a results table would not blink at 0.519.</a:t>
+            </a:r>
+          </a:p>
+          <a:p>
+            <a:pPr lvl="0" indent="0" marL="0">
+              <a:buNone/>
+            </a:pPr>
+          </a:p>
+          <a:p>
+            <a:pPr lvl="0" indent="0" marL="0">
+              <a:buNone/>
+            </a:pPr>
+            <a:r>
+              <a:rPr/>
+              <a:t>The harmonic mean gives it 0.073, which is the truth.</a:t>
+            </a:r>
+          </a:p>
+          <a:p>
+            <a:pPr lvl="0" indent="0" marL="0">
+              <a:buNone/>
+            </a:pPr>
+          </a:p>
+          <a:p>
+            <a:pPr lvl="0" indent="0" marL="0">
+              <a:buNone/>
+            </a:pPr>
+            <a:r>
+              <a:rPr/>
+              <a:t>The reason: the harmonic mean is dominated by the smaller of the two numbers. A model is only as good as its weaker side, and F1 refuses to let a perfect score on one axis buy a pass on the other.</a:t>
+            </a:r>
+          </a:p>
+          <a:p>
+            <a:pPr lvl="0" indent="0" marL="0">
+              <a:buNone/>
+            </a:pPr>
+          </a:p>
+          <a:p>
+            <a:pPr lvl="0" indent="0" marL="0">
+              <a:buNone/>
+            </a:pPr>
+            <a:r>
+              <a:rPr/>
+              <a:t>Mention F-beta in one sentence: a version of F1 with a weight beta, where beta above 1 counts recall more than precision. That is what you want here, where a miss costs about nineteen times a false alarm (2,600 against 140 euros). F2 is the usual choice.</a:t>
             </a:r>
           </a:p>
         </p:txBody>
@@ -3904,49 +3894,63 @@
             </a:pPr>
             <a:r>
               <a:rPr/>
-              <a:t>The sweep traced a path through precision-recall space; this is that path drawn directly. Every threshold at once.</a:t>
-            </a:r>
-          </a:p>
-          <a:p>
-            <a:pPr lvl="0" indent="0" marL="0">
-              <a:buNone/>
-            </a:pPr>
-          </a:p>
-          <a:p>
-            <a:pPr lvl="0" indent="0" marL="0">
-              <a:buNone/>
-            </a:pPr>
-            <a:r>
-              <a:rPr/>
-              <a:t>The part to teach is the baseline. A model with random scores has precision equal to the positive rate - 0.038 here - at every recall. That flat dashed line, not 0.5, is what “no skill” looks like on an imbalanced problem.</a:t>
-            </a:r>
-          </a:p>
-          <a:p>
-            <a:pPr lvl="0" indent="0" marL="0">
-              <a:buNone/>
-            </a:pPr>
-          </a:p>
-          <a:p>
-            <a:pPr lvl="0" indent="0" marL="0">
-              <a:buNone/>
-            </a:pPr>
-            <a:r>
-              <a:rPr/>
-              <a:t>That is why this curve is so much more informative than accuracy when positives are rare: the floor is where the difficulty actually is. Our model’s area under it, the average precision, is 0.717 against a floor of 0.038.</a:t>
-            </a:r>
-          </a:p>
-          <a:p>
-            <a:pPr lvl="0" indent="0" marL="0">
-              <a:buNone/>
-            </a:pPr>
-          </a:p>
-          <a:p>
-            <a:pPr lvl="0" indent="0" marL="0">
-              <a:buNone/>
-            </a:pPr>
-            <a:r>
-              <a:rPr/>
-              <a:t>The three marked dots are thresholds 0.5, 0.3 and 0.05. The first two are rows of the table on the previous slide, so they can check the correspondence: at 0.5, recall 0.566 and precision 0.768.</a:t>
+              <a:t>classification_report is scikit-learn’s summary table, and they will print it themselves in notebook 2 in about five minutes: one row per class, then three summary rows - accuracy, macro avg, weighted avg. The two numbers on this slide are the f1-score column of the last two.</a:t>
+            </a:r>
+          </a:p>
+          <a:p>
+            <a:pPr lvl="0" indent="0" marL="0">
+              <a:buNone/>
+            </a:pPr>
+          </a:p>
+          <a:p>
+            <a:pPr lvl="0" indent="0" marL="0">
+              <a:buNone/>
+            </a:pPr>
+            <a:r>
+              <a:rPr/>
+              <a:t>Anticipating it by one slide is deliberate. The rule for choosing between those rows is what they need in their heads while they run the notebook, not afterwards - left to themselves they quote whichever is biggest.</a:t>
+            </a:r>
+          </a:p>
+          <a:p>
+            <a:pPr lvl="0" indent="0" marL="0">
+              <a:buNone/>
+            </a:pPr>
+          </a:p>
+          <a:p>
+            <a:pPr lvl="0" indent="0" marL="0">
+              <a:buNone/>
+            </a:pPr>
+            <a:r>
+              <a:rPr/>
+              <a:t>The weighted average weights each class by how common it is, so on this problem it is essentially the healthy class talking, and it reads close to accuracy - inheriting exactly the blindness slides 28 to 31 were about.</a:t>
+            </a:r>
+          </a:p>
+          <a:p>
+            <a:pPr lvl="0" indent="0" marL="0">
+              <a:buNone/>
+            </a:pPr>
+          </a:p>
+          <a:p>
+            <a:pPr lvl="0" indent="0" marL="0">
+              <a:buNone/>
+            </a:pPr>
+            <a:r>
+              <a:rPr/>
+              <a:t>The macro average gives the two classes equal weight, so the rare class actually registers. 0.820 against 0.975 for the same model.</a:t>
+            </a:r>
+          </a:p>
+          <a:p>
+            <a:pPr lvl="0" indent="0" marL="0">
+              <a:buNone/>
+            </a:pPr>
+          </a:p>
+          <a:p>
+            <a:pPr lvl="0" indent="0" marL="0">
+              <a:buNone/>
+            </a:pPr>
+            <a:r>
+              <a:rPr/>
+              <a:t>The rule: on an imbalanced problem, quote the macro average or the minority class directly. Reporting the weighted average is not incorrect - it is the number that makes a mediocre model look finished, and choosing it without saying so is how a result gets oversold.</a:t>
             </a:r>
           </a:p>
         </p:txBody>
@@ -4028,35 +4032,35 @@
             </a:pPr>
             <a:r>
               <a:rPr/>
-              <a:t>Set up the next section as a question rather than announcing a tool.</a:t>
-            </a:r>
-          </a:p>
-          <a:p>
-            <a:pPr lvl="0" indent="0" marL="0">
-              <a:buNone/>
-            </a:pPr>
-          </a:p>
-          <a:p>
-            <a:pPr lvl="0" indent="0" marL="0">
-              <a:buNone/>
-            </a:pPr>
-            <a:r>
-              <a:rPr/>
-              <a:t>Everything so far has needed a threshold. That is fine when you know the costs, and we will come back to it. But often you want to compare two models before committing - is model A better than model B, at any operating point?</a:t>
-            </a:r>
-          </a:p>
-          <a:p>
-            <a:pPr lvl="0" indent="0" marL="0">
-              <a:buNone/>
-            </a:pPr>
-          </a:p>
-          <a:p>
-            <a:pPr lvl="0" indent="0" marL="0">
-              <a:buNone/>
-            </a:pPr>
-            <a:r>
-              <a:rPr/>
-              <a:t>The move is to stop asking “how many did it get right” and start asking “did it put the failures at the top of the list”. That is a question about ranking, and ranking has no threshold in it.</a:t>
+              <a:t>The confusion matrix by hand, then from scikit-learn, then the threshold sweep. Run notebook 02. Twenty minutes.</a:t>
+            </a:r>
+          </a:p>
+          <a:p>
+            <a:pPr lvl="0" indent="0" marL="0">
+              <a:buNone/>
+            </a:pPr>
+          </a:p>
+          <a:p>
+            <a:pPr lvl="0" indent="0" marL="0">
+              <a:buNone/>
+            </a:pPr>
+            <a:r>
+              <a:rPr/>
+              <a:t>Have them build the four counts by hand before calling confusion_matrix. It is four comparisons and it takes two minutes, and it is what makes the jargon stop being jargon.</a:t>
+            </a:r>
+          </a:p>
+          <a:p>
+            <a:pPr lvl="0" indent="0" marL="0">
+              <a:buNone/>
+            </a:pPr>
+          </a:p>
+          <a:p>
+            <a:pPr lvl="0" indent="0" marL="0">
+              <a:buNone/>
+            </a:pPr>
+            <a:r>
+              <a:rPr/>
+              <a:t>Spend time on the threshold sweep table. Do not explain it first - let them read the columns and say what they see. Somebody will notice that accuracy barely moves. That is the moment to make the next slide.</a:t>
             </a:r>
           </a:p>
         </p:txBody>
@@ -4138,49 +4142,35 @@
             </a:pPr>
             <a:r>
               <a:rPr/>
-              <a:t>Receiver operating characteristic - expand it, and say where the name comes from, because it makes the idea concrete. Wartime radar: operators tuning receivers to spot aircraft without chasing flocks of birds. Same problem shape, literally the same trade-off.</a:t>
-            </a:r>
-          </a:p>
-          <a:p>
-            <a:pPr lvl="0" indent="0" marL="0">
-              <a:buNone/>
-            </a:pPr>
-          </a:p>
-          <a:p>
-            <a:pPr lvl="0" indent="0" marL="0">
-              <a:buNone/>
-            </a:pPr>
-            <a:r>
-              <a:rPr/>
-              <a:t>The two axes: the true positive rate (TPR), which is recall under another name - the share of failures we catch. The false positive rate (FPR) - the share of healthy drives we condemn.</a:t>
-            </a:r>
-          </a:p>
-          <a:p>
-            <a:pPr lvl="0" indent="0" marL="0">
-              <a:buNone/>
-            </a:pPr>
-          </a:p>
-          <a:p>
-            <a:pPr lvl="0" indent="0" marL="0">
-              <a:buNone/>
-            </a:pPr>
-            <a:r>
-              <a:rPr/>
-              <a:t>The intuition worth saying slowly: at threshold 1 both are zero, flag nothing. At threshold 0 both are one. The entire content of the curve is the ORDER in which they get there. A good model raises TPR fast while FPR is still low, because its highest scores really are the failures. A useless model raises them together and traces the diagonal.</a:t>
-            </a:r>
-          </a:p>
-          <a:p>
-            <a:pPr lvl="0" indent="0" marL="0">
-              <a:buNone/>
-            </a:pPr>
-          </a:p>
-          <a:p>
-            <a:pPr lvl="0" indent="0" marL="0">
-              <a:buNone/>
-            </a:pPr>
-            <a:r>
-              <a:rPr/>
-              <a:t>So the curve asks: as we grow more willing to raise alarms, do we catch failures faster than we annoy technicians?</a:t>
+              <a:t>The title of that figure is the point: nothing about the model changes along the x-axis. Same coefficients, same probabilities, same drives. All that moves is where we draw the line between “leave it” and “replace it”.</a:t>
+            </a:r>
+          </a:p>
+          <a:p>
+            <a:pPr lvl="0" indent="0" marL="0">
+              <a:buNone/>
+            </a:pPr>
+          </a:p>
+          <a:p>
+            <a:pPr lvl="0" indent="0" marL="0">
+              <a:buNone/>
+            </a:pPr>
+            <a:r>
+              <a:rPr/>
+              <a:t>That 0.5 is predict()’s default and nothing more. It is the right choice only when the two errors cost the same and the probabilities are trustworthy - slide 48 derives the threshold from the costs, and it is 0.5 exactly when they are equal. Here a miss costs about nineteen times a false alarm, and in most real problems the costs differ too.</a:t>
+            </a:r>
+          </a:p>
+          <a:p>
+            <a:pPr lvl="0" indent="0" marL="0">
+              <a:buNone/>
+            </a:pPr>
+          </a:p>
+          <a:p>
+            <a:pPr lvl="0" indent="0" marL="0">
+              <a:buNone/>
+            </a:pPr>
+            <a:r>
+              <a:rPr/>
+              <a:t>So when a paper or a colleague reports 77% precision, the useful follow-up is: at what threshold, and why that one? Most of the time there is no answer, because nobody chose it.</a:t>
             </a:r>
           </a:p>
         </p:txBody>
@@ -4262,49 +4252,49 @@
             </a:pPr>
             <a:r>
               <a:rPr/>
-              <a:t>This is the definition to remember, and it is much more useful than “area under the curve”, which is a geometric fact rather than a meaning.</a:t>
-            </a:r>
-          </a:p>
-          <a:p>
-            <a:pPr lvl="0" indent="0" marL="0">
-              <a:buNone/>
-            </a:pPr>
-          </a:p>
-          <a:p>
-            <a:pPr lvl="0" indent="0" marL="0">
-              <a:buNone/>
-            </a:pPr>
-            <a:r>
-              <a:rPr/>
-              <a:t>Say it concretely: pick one drive that failed and one that did not, at random. 95 times out of 100 the model gave the failing one a higher score.</a:t>
-            </a:r>
-          </a:p>
-          <a:p>
-            <a:pPr lvl="0" indent="0" marL="0">
-              <a:buNone/>
-            </a:pPr>
-          </a:p>
-          <a:p>
-            <a:pPr lvl="0" indent="0" marL="0">
-              <a:buNone/>
-            </a:pPr>
-            <a:r>
-              <a:rPr/>
-              <a:t>That makes AUC a measure of RANKING quality. It is threshold-free because ranking is threshold-free.</a:t>
-            </a:r>
-          </a:p>
-          <a:p>
-            <a:pPr lvl="0" indent="0" marL="0">
-              <a:buNone/>
-            </a:pPr>
-          </a:p>
-          <a:p>
-            <a:pPr lvl="0" indent="0" marL="0">
-              <a:buNone/>
-            </a:pPr>
-            <a:r>
-              <a:rPr/>
-              <a:t>The identity with the Mann-Whitney U statistic is in the handout, section 8.2, for anyone who wants the proof. But notebook 3 does something better than a proof for this audience: it draws 200,000 random pairs and counts. 0.9488 against roc_auc_score’s 0.9493.</a:t>
+              <a:t>Read it column by column with the room.</a:t>
+            </a:r>
+          </a:p>
+          <a:p>
+            <a:pPr lvl="0" indent="0" marL="0">
+              <a:buNone/>
+            </a:pPr>
+          </a:p>
+          <a:p>
+            <a:pPr lvl="0" indent="0" marL="0">
+              <a:buNone/>
+            </a:pPr>
+            <a:r>
+              <a:rPr/>
+              <a:t>Lower the threshold: recall rises, precision falls. At 0.02 we catch 69 of 76 failures and replace 284 healthy drives to do it. At 0.90 every alarm is justified and we catch fewer than a quarter.</a:t>
+            </a:r>
+          </a:p>
+          <a:p>
+            <a:pPr lvl="0" indent="0" marL="0">
+              <a:buNone/>
+            </a:pPr>
+          </a:p>
+          <a:p>
+            <a:pPr lvl="0" indent="0" marL="0">
+              <a:buNone/>
+            </a:pPr>
+            <a:r>
+              <a:rPr/>
+              <a:t>Now the accuracy column, which is the slide’s real argument. From 0.10 upwards it moves by three and a half percentage points, 0.942 to 0.977, while recall falls from 0.803 to 0.184. And its maximum is at 0.5 - the threshold that misses 33 of the 76 failures.</a:t>
+            </a:r>
+          </a:p>
+          <a:p>
+            <a:pPr lvl="0" indent="0" marL="0">
+              <a:buNone/>
+            </a:pPr>
+          </a:p>
+          <a:p>
+            <a:pPr lvl="0" indent="0" marL="0">
+              <a:buNone/>
+            </a:pPr>
+            <a:r>
+              <a:rPr/>
+              <a:t>Say the consequence plainly: tune on accuracy and it will quietly recommend catching fewer failures, because every alarm it drops was a possible false positive.</a:t>
             </a:r>
           </a:p>
         </p:txBody>
@@ -4386,49 +4376,49 @@
             </a:pPr>
             <a:r>
               <a:rPr/>
-              <a:t>Short slide, important consequence. AUC depends only on the ordering, so it is invariant under any monotone transformation of the scores.</a:t>
-            </a:r>
-          </a:p>
-          <a:p>
-            <a:pPr lvl="0" indent="0" marL="0">
-              <a:buNone/>
-            </a:pPr>
-          </a:p>
-          <a:p>
-            <a:pPr lvl="0" indent="0" marL="0">
-              <a:buNone/>
-            </a:pPr>
-            <a:r>
-              <a:rPr/>
-              <a:t>Divide all the probabilities by ten and the ranking is identical, so the AUC is identical - while the model is now badly calibrated and every threshold-based decision it makes is different.</a:t>
-            </a:r>
-          </a:p>
-          <a:p>
-            <a:pPr lvl="0" indent="0" marL="0">
-              <a:buNone/>
-            </a:pPr>
-          </a:p>
-          <a:p>
-            <a:pPr lvl="0" indent="0" marL="0">
-              <a:buNone/>
-            </a:pPr>
-            <a:r>
-              <a:rPr/>
-              <a:t>The consequence: AUC says nothing about whether “0.7” means anything. If you need the probabilities to be believable - because you are computing expected costs, as slide 44 does - AUC is not the check you want.</a:t>
-            </a:r>
-          </a:p>
-          <a:p>
-            <a:pPr lvl="0" indent="0" marL="0">
-              <a:buNone/>
-            </a:pPr>
-          </a:p>
-          <a:p>
-            <a:pPr lvl="0" indent="0" marL="0">
-              <a:buNone/>
-            </a:pPr>
-            <a:r>
-              <a:rPr/>
-              <a:t>Good place to mention that calibration - whether a predicted 0.7 really comes true 70% of the time - is a topic of its own, without going into it.</a:t>
+              <a:t>The sweep traced a path through precision-recall space; this is that path drawn directly. Every threshold at once.</a:t>
+            </a:r>
+          </a:p>
+          <a:p>
+            <a:pPr lvl="0" indent="0" marL="0">
+              <a:buNone/>
+            </a:pPr>
+          </a:p>
+          <a:p>
+            <a:pPr lvl="0" indent="0" marL="0">
+              <a:buNone/>
+            </a:pPr>
+            <a:r>
+              <a:rPr/>
+              <a:t>The part to teach is the baseline. A model with random scores has precision equal to the positive rate - 0.038 here - at every recall. That flat dashed line, not 0.5, is what “no skill” looks like on an imbalanced problem.</a:t>
+            </a:r>
+          </a:p>
+          <a:p>
+            <a:pPr lvl="0" indent="0" marL="0">
+              <a:buNone/>
+            </a:pPr>
+          </a:p>
+          <a:p>
+            <a:pPr lvl="0" indent="0" marL="0">
+              <a:buNone/>
+            </a:pPr>
+            <a:r>
+              <a:rPr/>
+              <a:t>That is why this curve is so much more informative than accuracy when positives are rare: the floor is where the difficulty actually is. Our model’s area under it, the average precision, is 0.717 against a floor of 0.038.</a:t>
+            </a:r>
+          </a:p>
+          <a:p>
+            <a:pPr lvl="0" indent="0" marL="0">
+              <a:buNone/>
+            </a:pPr>
+          </a:p>
+          <a:p>
+            <a:pPr lvl="0" indent="0" marL="0">
+              <a:buNone/>
+            </a:pPr>
+            <a:r>
+              <a:rPr/>
+              <a:t>The three marked dots are thresholds 0.5, 0.3 and 0.05. The first two are rows of the table on the previous slide, so they can check the correspondence: at 0.5, recall 0.566 and precision 0.768.</a:t>
             </a:r>
           </a:p>
         </p:txBody>
@@ -4510,63 +4500,35 @@
             </a:pPr>
             <a:r>
               <a:rPr/>
-              <a:t>Same model. Not retrained. Notebook 3 generates a new, larger fleet of 60,000 drives from the same simulator, keeps every healthy drive, and throws away failures at random until they are 0.4% instead of 3.8% - the direction reality moves in fraud, disease, hardware failure.</a:t>
-            </a:r>
-          </a:p>
-          <a:p>
-            <a:pPr lvl="0" indent="0" marL="0">
-              <a:buNone/>
-            </a:pPr>
-          </a:p>
-          <a:p>
-            <a:pPr lvl="0" indent="0" marL="0">
-              <a:buNone/>
-            </a:pPr>
-            <a:r>
-              <a:rPr/>
-              <a:t>Someone will notice that at 3.8% the AUC reads 0.968, not the 0.949 of slide 38. Different drives: 0.949 rests on the 76 failures of our 2,000-drive test set, 0.968 on a fleet thirty times larger. Both are estimates of the same ranking ability.</a:t>
-            </a:r>
-          </a:p>
-          <a:p>
-            <a:pPr lvl="0" indent="0" marL="0">
-              <a:buNone/>
-            </a:pPr>
-          </a:p>
-          <a:p>
-            <a:pPr lvl="0" indent="0" marL="0">
-              <a:buNone/>
-            </a:pPr>
-            <a:r>
-              <a:rPr/>
-              <a:t>Left panel: the three ROC curves sit on top of each other. AUC 0.968, 0.965, 0.974. It reports an excellent model throughout, and at the rarest setting a marginally better one, which is sampling noise on 231 positives.</a:t>
-            </a:r>
-          </a:p>
-          <a:p>
-            <a:pPr lvl="0" indent="0" marL="0">
-              <a:buNone/>
-            </a:pPr>
-          </a:p>
-          <a:p>
-            <a:pPr lvl="0" indent="0" marL="0">
-              <a:buNone/>
-            </a:pPr>
-            <a:r>
-              <a:rPr/>
-              <a:t>Right panel: the precision-recall curves are in three different worlds. Average precision falls from 0.706 to 0.361, and precision at the same threshold falls from 0.79 to 0.26 - three alarms in four now false.</a:t>
-            </a:r>
-          </a:p>
-          <a:p>
-            <a:pPr lvl="0" indent="0" marL="0">
-              <a:buNone/>
-            </a:pPr>
-          </a:p>
-          <a:p>
-            <a:pPr lvl="0" indent="0" marL="0">
-              <a:buNone/>
-            </a:pPr>
-            <a:r>
-              <a:rPr/>
-              <a:t>Three curves on the left, one model, no problem. Three curves on the right, same model, a disaster. Let that sit for a second before explaining.</a:t>
+              <a:t>Set up the next section as a question rather than announcing a tool.</a:t>
+            </a:r>
+          </a:p>
+          <a:p>
+            <a:pPr lvl="0" indent="0" marL="0">
+              <a:buNone/>
+            </a:pPr>
+          </a:p>
+          <a:p>
+            <a:pPr lvl="0" indent="0" marL="0">
+              <a:buNone/>
+            </a:pPr>
+            <a:r>
+              <a:rPr/>
+              <a:t>Everything so far has needed a threshold. That is fine when you know the costs, and we will come back to it. But often you want to compare two models before committing - is model A better than model B, at any operating point?</a:t>
+            </a:r>
+          </a:p>
+          <a:p>
+            <a:pPr lvl="0" indent="0" marL="0">
+              <a:buNone/>
+            </a:pPr>
+          </a:p>
+          <a:p>
+            <a:pPr lvl="0" indent="0" marL="0">
+              <a:buNone/>
+            </a:pPr>
+            <a:r>
+              <a:rPr/>
+              <a:t>The move is to stop asking “how many did it get right” and start asking “did it put the failures at the top of the list”. That is a question about ranking, and ranking has no threshold in it.</a:t>
             </a:r>
           </a:p>
         </p:txBody>
@@ -4758,49 +4720,49 @@
             </a:pPr>
             <a:r>
               <a:rPr/>
-              <a:t>The explanation is entirely in the denominators, and it is worth writing on the board.</a:t>
-            </a:r>
-          </a:p>
-          <a:p>
-            <a:pPr lvl="0" indent="0" marL="0">
-              <a:buNone/>
-            </a:pPr>
-          </a:p>
-          <a:p>
-            <a:pPr lvl="0" indent="0" marL="0">
-              <a:buNone/>
-            </a:pPr>
-            <a:r>
-              <a:rPr/>
-              <a:t>A thousand false alarms among a hundred thousand healthy drives is a false positive rate of 0.01 - invisible on the ROC axis, a rounding error. The same thousand false alarms, set against the alarms actually raised, may be most of them.</a:t>
-            </a:r>
-          </a:p>
-          <a:p>
-            <a:pPr lvl="0" indent="0" marL="0">
-              <a:buNone/>
-            </a:pPr>
-          </a:p>
-          <a:p>
-            <a:pPr lvl="0" indent="0" marL="0">
-              <a:buNone/>
-            </a:pPr>
-            <a:r>
-              <a:rPr/>
-              <a:t>So ROC is measuring the false alarms against a population nobody experiences. The technician does not see the 99,000 drives left alone; they see the alarm queue.</a:t>
-            </a:r>
-          </a:p>
-          <a:p>
-            <a:pPr lvl="0" indent="0" marL="0">
-              <a:buNone/>
-            </a:pPr>
-          </a:p>
-          <a:p>
-            <a:pPr lvl="0" indent="0" marL="0">
-              <a:buNone/>
-            </a:pPr>
-            <a:r>
-              <a:rPr/>
-              <a:t>This is the second predictable mistake of the lesson, and again defend the instinct: AUC is threshold-free, comparable across models and datasets, bounded in a familiar range. Those are real virtues. It simply answers a question about ranking when the question was about the alarm queue.</a:t>
+              <a:t>Receiver operating characteristic - expand it, and say where the name comes from, because it makes the idea concrete. Wartime radar: operators tuning receivers to spot aircraft without chasing flocks of birds. Same problem shape, literally the same trade-off.</a:t>
+            </a:r>
+          </a:p>
+          <a:p>
+            <a:pPr lvl="0" indent="0" marL="0">
+              <a:buNone/>
+            </a:pPr>
+          </a:p>
+          <a:p>
+            <a:pPr lvl="0" indent="0" marL="0">
+              <a:buNone/>
+            </a:pPr>
+            <a:r>
+              <a:rPr/>
+              <a:t>The two axes: the true positive rate (TPR), which is recall under another name - the share of failures we catch. The false positive rate (FPR) - the share of healthy drives we condemn.</a:t>
+            </a:r>
+          </a:p>
+          <a:p>
+            <a:pPr lvl="0" indent="0" marL="0">
+              <a:buNone/>
+            </a:pPr>
+          </a:p>
+          <a:p>
+            <a:pPr lvl="0" indent="0" marL="0">
+              <a:buNone/>
+            </a:pPr>
+            <a:r>
+              <a:rPr/>
+              <a:t>The intuition worth saying slowly: at threshold 1 both are zero, flag nothing. At threshold 0 both are one. The entire content of the curve is the ORDER in which they get there. A good model raises TPR fast while FPR is still low, because its highest scores really are the failures. A useless model raises them together and traces the diagonal.</a:t>
+            </a:r>
+          </a:p>
+          <a:p>
+            <a:pPr lvl="0" indent="0" marL="0">
+              <a:buNone/>
+            </a:pPr>
+          </a:p>
+          <a:p>
+            <a:pPr lvl="0" indent="0" marL="0">
+              <a:buNone/>
+            </a:pPr>
+            <a:r>
+              <a:rPr/>
+              <a:t>So the curve asks: as we grow more willing to raise alarms, do we catch failures faster than we annoy technicians?</a:t>
             </a:r>
           </a:p>
         </p:txBody>
@@ -4882,21 +4844,49 @@
             </a:pPr>
             <a:r>
               <a:rPr/>
-              <a:t>Short and quotable, and this is the thing to have on the board when they write their exercise reports.</a:t>
-            </a:r>
-          </a:p>
-          <a:p>
-            <a:pPr lvl="0" indent="0" marL="0">
-              <a:buNone/>
-            </a:pPr>
-          </a:p>
-          <a:p>
-            <a:pPr lvl="0" indent="0" marL="0">
-              <a:buNone/>
-            </a:pPr>
-            <a:r>
-              <a:rPr/>
-              <a:t>If someone asks which single number to use when a single number is demanded: average precision, because its baseline moves with the problem. But push back on the premise - the reason to demand a single number is usually to avoid thinking, and this lesson is about the thinking.</a:t>
+              <a:t>This is the definition to remember, and it is much more useful than “area under the curve”, which is a geometric fact rather than a meaning.</a:t>
+            </a:r>
+          </a:p>
+          <a:p>
+            <a:pPr lvl="0" indent="0" marL="0">
+              <a:buNone/>
+            </a:pPr>
+          </a:p>
+          <a:p>
+            <a:pPr lvl="0" indent="0" marL="0">
+              <a:buNone/>
+            </a:pPr>
+            <a:r>
+              <a:rPr/>
+              <a:t>Say it concretely: pick one drive that failed and one that did not, at random. 95 times out of 100 the model gave the failing one a higher score.</a:t>
+            </a:r>
+          </a:p>
+          <a:p>
+            <a:pPr lvl="0" indent="0" marL="0">
+              <a:buNone/>
+            </a:pPr>
+          </a:p>
+          <a:p>
+            <a:pPr lvl="0" indent="0" marL="0">
+              <a:buNone/>
+            </a:pPr>
+            <a:r>
+              <a:rPr/>
+              <a:t>That makes AUC a measure of RANKING quality. It is threshold-free because ranking is threshold-free.</a:t>
+            </a:r>
+          </a:p>
+          <a:p>
+            <a:pPr lvl="0" indent="0" marL="0">
+              <a:buNone/>
+            </a:pPr>
+          </a:p>
+          <a:p>
+            <a:pPr lvl="0" indent="0" marL="0">
+              <a:buNone/>
+            </a:pPr>
+            <a:r>
+              <a:rPr/>
+              <a:t>The identity with the Mann-Whitney U statistic is in the handout, section 8.2, for anyone who wants the proof. But notebook 3 does something better than a proof for this audience: it draws 200,000 random pairs and counts. 0.9488 against roc_auc_score’s 0.9493.</a:t>
             </a:r>
           </a:p>
         </p:txBody>
@@ -4978,49 +4968,49 @@
             </a:pPr>
             <a:r>
               <a:rPr/>
-              <a:t>Finally, the honest way to pick a threshold. It needs one ingredient no metric can supply: what the errors cost. We wrote those down on slide 27 - €140 for a needless replacement, €2,600 for a drive that dies in service.</a:t>
-            </a:r>
-          </a:p>
-          <a:p>
-            <a:pPr lvl="0" indent="0" marL="0">
-              <a:buNone/>
-            </a:pPr>
-          </a:p>
-          <a:p>
-            <a:pPr lvl="0" indent="0" marL="0">
-              <a:buNone/>
-            </a:pPr>
-            <a:r>
-              <a:rPr/>
-              <a:t>The curve is the total cost on the test set as the threshold moves. The default 0.5 costs €87,620. The cheapest, at 0.08, costs €45,540.</a:t>
-            </a:r>
-          </a:p>
-          <a:p>
-            <a:pPr lvl="0" indent="0" marL="0">
-              <a:buNone/>
-            </a:pPr>
-          </a:p>
-          <a:p>
-            <a:pPr lvl="0" indent="0" marL="0">
-              <a:buNone/>
-            </a:pPr>
-            <a:r>
-              <a:rPr/>
-              <a:t>Choosing the threshold on purpose HALVED the cost of the same model. No retraining, no new features, no better algorithm. One number, taken from the economics instead of from the library default.</a:t>
-            </a:r>
-          </a:p>
-          <a:p>
-            <a:pPr lvl="0" indent="0" marL="0">
-              <a:buNone/>
-            </a:pPr>
-          </a:p>
-          <a:p>
-            <a:pPr lvl="0" indent="0" marL="0">
-              <a:buNone/>
-            </a:pPr>
-            <a:r>
-              <a:rPr/>
-              <a:t>Note the flatness around the minimum, and say why it is good news: the exact threshold does not have to be right. Which is fortunate, because cost estimates never are.</a:t>
+              <a:t>Short slide, important consequence. AUC depends only on the ordering, so it is invariant under any monotone transformation of the scores.</a:t>
+            </a:r>
+          </a:p>
+          <a:p>
+            <a:pPr lvl="0" indent="0" marL="0">
+              <a:buNone/>
+            </a:pPr>
+          </a:p>
+          <a:p>
+            <a:pPr lvl="0" indent="0" marL="0">
+              <a:buNone/>
+            </a:pPr>
+            <a:r>
+              <a:rPr/>
+              <a:t>Divide all the probabilities by ten and the ranking is identical, so the AUC is identical - while the model is now badly calibrated and every threshold-based decision it makes is different.</a:t>
+            </a:r>
+          </a:p>
+          <a:p>
+            <a:pPr lvl="0" indent="0" marL="0">
+              <a:buNone/>
+            </a:pPr>
+          </a:p>
+          <a:p>
+            <a:pPr lvl="0" indent="0" marL="0">
+              <a:buNone/>
+            </a:pPr>
+            <a:r>
+              <a:rPr/>
+              <a:t>The consequence: AUC says nothing about whether “0.7” means anything. If you need the probabilities to be believable - because you are computing expected costs, as slide 48 does - AUC is not the check you want.</a:t>
+            </a:r>
+          </a:p>
+          <a:p>
+            <a:pPr lvl="0" indent="0" marL="0">
+              <a:buNone/>
+            </a:pPr>
+          </a:p>
+          <a:p>
+            <a:pPr lvl="0" indent="0" marL="0">
+              <a:buNone/>
+            </a:pPr>
+            <a:r>
+              <a:rPr/>
+              <a:t>Good place to mention that calibration - whether a predicted 0.7 really comes true 70% of the time - is a topic of its own, without going into it.</a:t>
             </a:r>
           </a:p>
         </p:txBody>
@@ -5102,63 +5092,63 @@
             </a:pPr>
             <a:r>
               <a:rPr/>
-              <a:t>Derive it in one line on the board, because it is two steps and it lands: flag the drive if the expected cost of flagging is lower than the expected cost of not. Flagging costs C-FP if the drive was healthy, which happens with probability 1 minus p. Leaving it costs C-FN if it fails, probability p. Set one below the other and solve.</a:t>
-            </a:r>
-          </a:p>
-          <a:p>
-            <a:pPr lvl="0" indent="0" marL="0">
-              <a:buNone/>
-            </a:pPr>
-          </a:p>
-          <a:p>
-            <a:pPr lvl="0" indent="0" marL="0">
-              <a:buNone/>
-            </a:pPr>
-            <a:r>
-              <a:rPr/>
-              <a:t>Then read the formula rather than the number, which is the part worth remembering: the optimal threshold does not depend on the model, the dataset, or the class balance. Only on the RATIO of the two costs.</a:t>
-            </a:r>
-          </a:p>
-          <a:p>
-            <a:pPr lvl="0" indent="0" marL="0">
-              <a:buNone/>
-            </a:pPr>
-          </a:p>
-          <a:p>
-            <a:pPr lvl="0" indent="0" marL="0">
-              <a:buNone/>
-            </a:pPr>
-            <a:r>
-              <a:rPr/>
-              <a:t>State the condition, because the derivation used it: p must be an honest probability - among drives given 0.05, about 5% really fail. That property is called calibration (slide 39). Divide every probability by ten, as slide 39 did, and the formula would still say 0.051 while flagging far too few drives.</a:t>
-            </a:r>
-          </a:p>
-          <a:p>
-            <a:pPr lvl="0" indent="0" marL="0">
-              <a:buNone/>
-            </a:pPr>
-          </a:p>
-          <a:p>
-            <a:pPr lvl="0" indent="0" marL="0">
-              <a:buNone/>
-            </a:pPr>
-            <a:r>
-              <a:rPr/>
-              <a:t>If the errors cost the same, t-star is 0.5 and the default was right all along. As misses grow more expensive, it falls towards zero.</a:t>
-            </a:r>
-          </a:p>
-          <a:p>
-            <a:pPr lvl="0" indent="0" marL="0">
-              <a:buNone/>
-            </a:pPr>
-          </a:p>
-          <a:p>
-            <a:pPr lvl="0" indent="0" marL="0">
-              <a:buNone/>
-            </a:pPr>
-            <a:r>
-              <a:rPr/>
-              <a:t>Empirically we found 0.08 against a theoretical 0.051, and the curve is flat between them. Two likely reasons for the gap: the test set holds only 76 failures, and the probabilities are good but not perfectly calibrated.</a:t>
+              <a:t>Same model. Not retrained. Notebook 3 generates a new, larger fleet of 60,000 drives from the same simulator, keeps every healthy drive, and throws away failures at random until they are 0.4% instead of 3.8% - the direction reality moves in fraud, disease, hardware failure.</a:t>
+            </a:r>
+          </a:p>
+          <a:p>
+            <a:pPr lvl="0" indent="0" marL="0">
+              <a:buNone/>
+            </a:pPr>
+          </a:p>
+          <a:p>
+            <a:pPr lvl="0" indent="0" marL="0">
+              <a:buNone/>
+            </a:pPr>
+            <a:r>
+              <a:rPr/>
+              <a:t>Someone will notice that at 3.8% the AUC reads 0.968, not the 0.949 of slide 42. Different drives: 0.949 rests on the 76 failures of our 2,000-drive test set, 0.968 on a fleet thirty times larger. Both are estimates of the same ranking ability.</a:t>
+            </a:r>
+          </a:p>
+          <a:p>
+            <a:pPr lvl="0" indent="0" marL="0">
+              <a:buNone/>
+            </a:pPr>
+          </a:p>
+          <a:p>
+            <a:pPr lvl="0" indent="0" marL="0">
+              <a:buNone/>
+            </a:pPr>
+            <a:r>
+              <a:rPr/>
+              <a:t>Left panel: the three ROC curves sit on top of each other. AUC 0.968, 0.965, 0.974. It reports an excellent model throughout, and at the rarest setting a marginally better one, which is sampling noise on 231 positives.</a:t>
+            </a:r>
+          </a:p>
+          <a:p>
+            <a:pPr lvl="0" indent="0" marL="0">
+              <a:buNone/>
+            </a:pPr>
+          </a:p>
+          <a:p>
+            <a:pPr lvl="0" indent="0" marL="0">
+              <a:buNone/>
+            </a:pPr>
+            <a:r>
+              <a:rPr/>
+              <a:t>Right panel: the precision-recall curves are in three different worlds. Average precision falls from 0.706 to 0.361, and precision at the same threshold falls from 0.79 to 0.26 - three alarms in four now false.</a:t>
+            </a:r>
+          </a:p>
+          <a:p>
+            <a:pPr lvl="0" indent="0" marL="0">
+              <a:buNone/>
+            </a:pPr>
+          </a:p>
+          <a:p>
+            <a:pPr lvl="0" indent="0" marL="0">
+              <a:buNone/>
+            </a:pPr>
+            <a:r>
+              <a:rPr/>
+              <a:t>Three curves on the left, one model, no problem. Three curves on the right, same model, a disaster. Let that sit for a second before explaining.</a:t>
             </a:r>
           </a:p>
         </p:txBody>
@@ -5240,49 +5230,49 @@
             </a:pPr>
             <a:r>
               <a:rPr/>
-              <a:t>Say this out loud rather than leaving it in the handout, because it is the same mistake you may have named at the start of today’s lesson, in the discussion of exercise 3.</a:t>
-            </a:r>
-          </a:p>
-          <a:p>
-            <a:pPr lvl="0" indent="0" marL="0">
-              <a:buNone/>
-            </a:pPr>
-          </a:p>
-          <a:p>
-            <a:pPr lvl="0" indent="0" marL="0">
-              <a:buNone/>
-            </a:pPr>
-            <a:r>
-              <a:rPr/>
-              <a:t>The threshold is a parameter. Choosing it by looking at the test set means the test set has influenced the model, and the number it then reports is optimistic.</a:t>
-            </a:r>
-          </a:p>
-          <a:p>
-            <a:pPr lvl="0" indent="0" marL="0">
-              <a:buNone/>
-            </a:pPr>
-          </a:p>
-          <a:p>
-            <a:pPr lvl="0" indent="0" marL="0">
-              <a:buNone/>
-            </a:pPr>
-            <a:r>
-              <a:rPr/>
-              <a:t>Done properly: choose the threshold on a validation set, then measure once on test. Lesson 5 builds exactly that machinery, and this is the concrete reason it is needed - not a hygiene rule, a thing that changes the number you report.</a:t>
-            </a:r>
-          </a:p>
-          <a:p>
-            <a:pPr lvl="0" indent="0" marL="0">
-              <a:buNone/>
-            </a:pPr>
-          </a:p>
-          <a:p>
-            <a:pPr lvl="0" indent="0" marL="0">
-              <a:buNone/>
-            </a:pPr>
-            <a:r>
-              <a:rPr/>
-              <a:t>Until then, treat the 0.08 as a demonstration of a method, not a result anyone could publish.</a:t>
+              <a:t>The explanation is entirely in the denominators, and it is worth writing on the board.</a:t>
+            </a:r>
+          </a:p>
+          <a:p>
+            <a:pPr lvl="0" indent="0" marL="0">
+              <a:buNone/>
+            </a:pPr>
+          </a:p>
+          <a:p>
+            <a:pPr lvl="0" indent="0" marL="0">
+              <a:buNone/>
+            </a:pPr>
+            <a:r>
+              <a:rPr/>
+              <a:t>A thousand false alarms among a hundred thousand healthy drives is a false positive rate of 0.01 - invisible on the ROC axis, a rounding error. The same thousand false alarms, set against the alarms actually raised, may be most of them.</a:t>
+            </a:r>
+          </a:p>
+          <a:p>
+            <a:pPr lvl="0" indent="0" marL="0">
+              <a:buNone/>
+            </a:pPr>
+          </a:p>
+          <a:p>
+            <a:pPr lvl="0" indent="0" marL="0">
+              <a:buNone/>
+            </a:pPr>
+            <a:r>
+              <a:rPr/>
+              <a:t>So ROC is measuring the false alarms against a population nobody experiences. The technician does not see the 99,000 drives left alone; they see the alarm queue.</a:t>
+            </a:r>
+          </a:p>
+          <a:p>
+            <a:pPr lvl="0" indent="0" marL="0">
+              <a:buNone/>
+            </a:pPr>
+          </a:p>
+          <a:p>
+            <a:pPr lvl="0" indent="0" marL="0">
+              <a:buNone/>
+            </a:pPr>
+            <a:r>
+              <a:rPr/>
+              <a:t>This is the second predictable mistake of the lesson, and again defend the instinct: AUC is threshold-free, comparable across models and datasets, bounded in a familiar range. Those are real virtues. It simply answers a question about ranking when the question was about the alarm queue.</a:t>
             </a:r>
           </a:p>
         </p:txBody>
@@ -5364,63 +5354,21 @@
             </a:pPr>
             <a:r>
               <a:rPr/>
-              <a:t>class_weight=“balanced” makes each failed drive count, in the cost, as much as about 25 healthy ones - the ratio of healthy to failed drives in the training set. It changes the training rather than the decision.</a:t>
-            </a:r>
-          </a:p>
-          <a:p>
-            <a:pPr lvl="0" indent="0" marL="0">
-              <a:buNone/>
-            </a:pPr>
-          </a:p>
-          <a:p>
-            <a:pPr lvl="0" indent="0" marL="0">
-              <a:buNone/>
-            </a:pPr>
-            <a:r>
-              <a:rPr/>
-              <a:t>Point at the AUC column: 0.949 against 0.950. Reweighting taught the model essentially nothing new about disk failure. What it did was move where the model puts its 0.5 line - the same lever as the threshold, pulled at a different moment.</a:t>
-            </a:r>
-          </a:p>
-          <a:p>
-            <a:pPr lvl="0" indent="0" marL="0">
-              <a:buNone/>
-            </a:pPr>
-          </a:p>
-          <a:p>
-            <a:pPr lvl="0" indent="0" marL="0">
-              <a:buNone/>
-            </a:pPr>
-            <a:r>
-              <a:rPr/>
-              <a:t>That matters because class weighting is usually presented as a REMEDY for imbalance. It is not a remedy; it is another way of setting the same decision. The remedy, where one exists, is more positive examples.</a:t>
-            </a:r>
-          </a:p>
-          <a:p>
-            <a:pPr lvl="0" indent="0" marL="0">
-              <a:buNone/>
-            </a:pPr>
-          </a:p>
-          <a:p>
-            <a:pPr lvl="0" indent="0" marL="0">
-              <a:buNone/>
-            </a:pPr>
-            <a:r>
-              <a:rPr/>
-              <a:t>Where it earns its place: when a downstream tool insists on predict() and gives you no threshold to move. Then this is how you shift the operating point.</a:t>
-            </a:r>
-          </a:p>
-          <a:p>
-            <a:pPr lvl="0" indent="0" marL="0">
-              <a:buNone/>
-            </a:pPr>
-          </a:p>
-          <a:p>
-            <a:pPr lvl="0" indent="0" marL="0">
-              <a:buNone/>
-            </a:pPr>
-            <a:r>
-              <a:rPr/>
-              <a:t>The same reading holds for resampling and for SMOTE (synthetic minority oversampling technique, which builds artificial minority examples): they move the operating point too. And both must be applied to the training rows only - inside each cross-validation fold, once lesson 5 introduces folds - for the reasons lesson 2 gave about imputation.</a:t>
+              <a:t>Short and quotable, and this is the thing to have on the board when they write their exercise reports.</a:t>
+            </a:r>
+          </a:p>
+          <a:p>
+            <a:pPr lvl="0" indent="0" marL="0">
+              <a:buNone/>
+            </a:pPr>
+          </a:p>
+          <a:p>
+            <a:pPr lvl="0" indent="0" marL="0">
+              <a:buNone/>
+            </a:pPr>
+            <a:r>
+              <a:rPr/>
+              <a:t>If someone asks which single number to use when a single number is demanded: average precision, because its baseline moves with the problem. But push back on the premise - the reason to demand a single number is usually to avoid thinking, and this lesson is about the thinking.</a:t>
             </a:r>
           </a:p>
         </p:txBody>
@@ -5502,21 +5450,49 @@
             </a:pPr>
             <a:r>
               <a:rPr/>
-              <a:t>The ROC curve by hand, the 200,000-pair experiment, the cost curve, then the multiclass matrix. Run notebook 03. Fifteen minutes, and the two multiclass slides that follow (48 and 49) are shown when the notebook reaches its last section, so they run alongside it rather than after it.</a:t>
-            </a:r>
-          </a:p>
-          <a:p>
-            <a:pPr lvl="0" indent="0" marL="0">
-              <a:buNone/>
-            </a:pPr>
-          </a:p>
-          <a:p>
-            <a:pPr lvl="0" indent="0" marL="0">
-              <a:buNone/>
-            </a:pPr>
-            <a:r>
-              <a:rPr/>
-              <a:t>If time is short, keep the pairs experiment: it turns a definition they would otherwise memorise into something they watched happen.</a:t>
+              <a:t>Finally, the honest way to pick a threshold. It needs one ingredient no metric can supply: what the errors cost. We wrote those down on slide 31 - €140 for a needless replacement, €2,600 for a drive that dies in service.</a:t>
+            </a:r>
+          </a:p>
+          <a:p>
+            <a:pPr lvl="0" indent="0" marL="0">
+              <a:buNone/>
+            </a:pPr>
+          </a:p>
+          <a:p>
+            <a:pPr lvl="0" indent="0" marL="0">
+              <a:buNone/>
+            </a:pPr>
+            <a:r>
+              <a:rPr/>
+              <a:t>The curve is the total cost on the test set as the threshold moves. The default 0.5 costs €87,620. The cheapest, at 0.08, costs €45,540.</a:t>
+            </a:r>
+          </a:p>
+          <a:p>
+            <a:pPr lvl="0" indent="0" marL="0">
+              <a:buNone/>
+            </a:pPr>
+          </a:p>
+          <a:p>
+            <a:pPr lvl="0" indent="0" marL="0">
+              <a:buNone/>
+            </a:pPr>
+            <a:r>
+              <a:rPr/>
+              <a:t>Choosing the threshold on purpose HALVED the cost of the same model. No retraining, no new features, no better algorithm. One number, taken from the economics instead of from the library default.</a:t>
+            </a:r>
+          </a:p>
+          <a:p>
+            <a:pPr lvl="0" indent="0" marL="0">
+              <a:buNone/>
+            </a:pPr>
+          </a:p>
+          <a:p>
+            <a:pPr lvl="0" indent="0" marL="0">
+              <a:buNone/>
+            </a:pPr>
+            <a:r>
+              <a:rPr/>
+              <a:t>Note the flatness around the minimum, and say why it is good news: the exact threshold does not have to be right. Which is fortunate, because cost estimates never are.</a:t>
             </a:r>
           </a:p>
         </p:txBody>
@@ -5598,49 +5574,63 @@
             </a:pPr>
             <a:r>
               <a:rPr/>
-              <a:t>Real fleets are not healthy-or-dead. A drive can be degraded: readable, but reporting errors, and worth replacing at the next maintenance window rather than at three in the morning.</a:t>
-            </a:r>
-          </a:p>
-          <a:p>
-            <a:pPr lvl="0" indent="0" marL="0">
-              <a:buNone/>
-            </a:pPr>
-          </a:p>
-          <a:p>
-            <a:pPr lvl="0" indent="0" marL="0">
-              <a:buNone/>
-            </a:pPr>
-            <a:r>
-              <a:rPr/>
-              <a:t>For K classes the model produces one score per class and turns them into K probabilities that add up to 1 - the softmax, which for two classes reduces exactly to the sigmoid. The cost generalises to categorical cross-entropy, and it is the same idea: the negative log of the probability assigned to what actually happened. Handout section 10.</a:t>
-            </a:r>
-          </a:p>
-          <a:p>
-            <a:pPr lvl="0" indent="0" marL="0">
-              <a:buNone/>
-            </a:pPr>
-          </a:p>
-          <a:p>
-            <a:pPr lvl="0" indent="0" marL="0">
-              <a:buNone/>
-            </a:pPr>
-            <a:r>
-              <a:rPr/>
-              <a:t>Read the off-diagonal cells rather than the accuracy. Degraded is the hard class, and understandably - it sits between two neighbours that both look like it from a distance.</a:t>
-            </a:r>
-          </a:p>
-          <a:p>
-            <a:pPr lvl="0" indent="0" marL="0">
-              <a:buNone/>
-            </a:pPr>
-          </a:p>
-          <a:p>
-            <a:pPr lvl="0" indent="0" marL="0">
-              <a:buNone/>
-            </a:pPr>
-            <a:r>
-              <a:rPr/>
-              <a:t>Precision and recall are computed one class at a time: each class in turn is the positive one, the rest are negative.</a:t>
+              <a:t>Derive it in one line on the board, because it is two steps and it lands: flag the drive if the expected cost of flagging is lower than the expected cost of not. Flagging costs C-FP if the drive was healthy, which happens with probability 1 minus p. Leaving it costs C-FN if it fails, probability p. Set one below the other and solve.</a:t>
+            </a:r>
+          </a:p>
+          <a:p>
+            <a:pPr lvl="0" indent="0" marL="0">
+              <a:buNone/>
+            </a:pPr>
+          </a:p>
+          <a:p>
+            <a:pPr lvl="0" indent="0" marL="0">
+              <a:buNone/>
+            </a:pPr>
+            <a:r>
+              <a:rPr/>
+              <a:t>Then read the formula rather than the number, which is the part worth remembering: the optimal threshold does not depend on the model, the dataset, or the class balance. Only on the RATIO of the two costs.</a:t>
+            </a:r>
+          </a:p>
+          <a:p>
+            <a:pPr lvl="0" indent="0" marL="0">
+              <a:buNone/>
+            </a:pPr>
+          </a:p>
+          <a:p>
+            <a:pPr lvl="0" indent="0" marL="0">
+              <a:buNone/>
+            </a:pPr>
+            <a:r>
+              <a:rPr/>
+              <a:t>State the condition, because the derivation used it: p must be an honest probability - among drives given 0.05, about 5% really fail. That property is called calibration (slide 43). Divide every probability by ten, as slide 43 did, and the formula would still say 0.051 while flagging far too few drives.</a:t>
+            </a:r>
+          </a:p>
+          <a:p>
+            <a:pPr lvl="0" indent="0" marL="0">
+              <a:buNone/>
+            </a:pPr>
+          </a:p>
+          <a:p>
+            <a:pPr lvl="0" indent="0" marL="0">
+              <a:buNone/>
+            </a:pPr>
+            <a:r>
+              <a:rPr/>
+              <a:t>If the errors cost the same, t-star is 0.5 and the default was right all along. As misses grow more expensive, it falls towards zero.</a:t>
+            </a:r>
+          </a:p>
+          <a:p>
+            <a:pPr lvl="0" indent="0" marL="0">
+              <a:buNone/>
+            </a:pPr>
+          </a:p>
+          <a:p>
+            <a:pPr lvl="0" indent="0" marL="0">
+              <a:buNone/>
+            </a:pPr>
+            <a:r>
+              <a:rPr/>
+              <a:t>Empirically we found 0.08 against a theoretical 0.051, and the curve is flat between them. Two likely reasons for the gap: the test set holds only 76 failures, and the probabilities are good but not perfectly calibrated.</a:t>
             </a:r>
           </a:p>
         </p:txBody>
@@ -5722,35 +5712,49 @@
             </a:pPr>
             <a:r>
               <a:rPr/>
-              <a:t>The same choice as before, now with a much starker gap on three classes.</a:t>
-            </a:r>
-          </a:p>
-          <a:p>
-            <a:pPr lvl="0" indent="0" marL="0">
-              <a:buNone/>
-            </a:pPr>
-          </a:p>
-          <a:p>
-            <a:pPr lvl="0" indent="0" marL="0">
-              <a:buNone/>
-            </a:pPr>
-            <a:r>
-              <a:rPr/>
-              <a:t>Macro treats the three conditions as equally important. Weighted lets the healthy class - five drives in six - do most of the talking.</a:t>
-            </a:r>
-          </a:p>
-          <a:p>
-            <a:pPr lvl="0" indent="0" marL="0">
-              <a:buNone/>
-            </a:pPr>
-          </a:p>
-          <a:p>
-            <a:pPr lvl="0" indent="0" marL="0">
-              <a:buNone/>
-            </a:pPr>
-            <a:r>
-              <a:rPr/>
-              <a:t>Which to quote is a question about the application, not about statistics. If missing a failure matters as much as missing a healthy drive, macro is the honest one. Say which you used, always.</a:t>
+              <a:t>Say this out loud rather than leaving it in the handout, because it is the same mistake you may have named at the start of today’s lesson, in the discussion of exercise 3.</a:t>
+            </a:r>
+          </a:p>
+          <a:p>
+            <a:pPr lvl="0" indent="0" marL="0">
+              <a:buNone/>
+            </a:pPr>
+          </a:p>
+          <a:p>
+            <a:pPr lvl="0" indent="0" marL="0">
+              <a:buNone/>
+            </a:pPr>
+            <a:r>
+              <a:rPr/>
+              <a:t>The threshold is a parameter. Choosing it by looking at the test set means the test set has influenced the model, and the number it then reports is optimistic.</a:t>
+            </a:r>
+          </a:p>
+          <a:p>
+            <a:pPr lvl="0" indent="0" marL="0">
+              <a:buNone/>
+            </a:pPr>
+          </a:p>
+          <a:p>
+            <a:pPr lvl="0" indent="0" marL="0">
+              <a:buNone/>
+            </a:pPr>
+            <a:r>
+              <a:rPr/>
+              <a:t>Done properly: choose the threshold on a validation set, then measure once on test. Lesson 5 builds exactly that machinery, and this is the concrete reason it is needed - not a hygiene rule, a thing that changes the number you report.</a:t>
+            </a:r>
+          </a:p>
+          <a:p>
+            <a:pPr lvl="0" indent="0" marL="0">
+              <a:buNone/>
+            </a:pPr>
+          </a:p>
+          <a:p>
+            <a:pPr lvl="0" indent="0" marL="0">
+              <a:buNone/>
+            </a:pPr>
+            <a:r>
+              <a:rPr/>
+              <a:t>Until then, treat the 0.08 as a demonstration of a method, not a result anyone could publish.</a:t>
             </a:r>
           </a:p>
         </p:txBody>
@@ -5832,35 +5836,63 @@
             </a:pPr>
             <a:r>
               <a:rPr/>
-              <a:t>Close on the number they started with. 306 failures out of 8,000; 96.2% accuracy for a model that does nothing.</a:t>
-            </a:r>
-          </a:p>
-          <a:p>
-            <a:pPr lvl="0" indent="0" marL="0">
-              <a:buNone/>
-            </a:pPr>
-          </a:p>
-          <a:p>
-            <a:pPr lvl="0" indent="0" marL="0">
-              <a:buNone/>
-            </a:pPr>
-            <a:r>
-              <a:rPr/>
-              <a:t>If they remember one thing from today, it should be the reflex to ask “what’s the base rate?” before believing any accuracy figure. That reflex is worth more than any of the formulas.</a:t>
-            </a:r>
-          </a:p>
-          <a:p>
-            <a:pPr lvl="0" indent="0" marL="0">
-              <a:buNone/>
-            </a:pPr>
-          </a:p>
-          <a:p>
-            <a:pPr lvl="0" indent="0" marL="0">
-              <a:buNone/>
-            </a:pPr>
-            <a:r>
-              <a:rPr/>
-              <a:t>The second thing: every metric on the slide depended on a threshold, and the threshold has an answer - C-FP over C-FP plus C-FN, for honest probabilities - that comes from the business, not from the data.</a:t>
+              <a:t>class_weight=“balanced” makes each failed drive count, in the cost, as much as about 25 healthy ones - the ratio of healthy to failed drives in the training set. It changes the training rather than the decision.</a:t>
+            </a:r>
+          </a:p>
+          <a:p>
+            <a:pPr lvl="0" indent="0" marL="0">
+              <a:buNone/>
+            </a:pPr>
+          </a:p>
+          <a:p>
+            <a:pPr lvl="0" indent="0" marL="0">
+              <a:buNone/>
+            </a:pPr>
+            <a:r>
+              <a:rPr/>
+              <a:t>Point at the AUC column: 0.949 against 0.950. Reweighting taught the model essentially nothing new about disk failure. What it did was move where the model puts its 0.5 line - the same lever as the threshold, pulled at a different moment.</a:t>
+            </a:r>
+          </a:p>
+          <a:p>
+            <a:pPr lvl="0" indent="0" marL="0">
+              <a:buNone/>
+            </a:pPr>
+          </a:p>
+          <a:p>
+            <a:pPr lvl="0" indent="0" marL="0">
+              <a:buNone/>
+            </a:pPr>
+            <a:r>
+              <a:rPr/>
+              <a:t>That matters because class weighting is usually presented as a REMEDY for imbalance. It is not a remedy; it is another way of setting the same decision. The remedy, where one exists, is more positive examples.</a:t>
+            </a:r>
+          </a:p>
+          <a:p>
+            <a:pPr lvl="0" indent="0" marL="0">
+              <a:buNone/>
+            </a:pPr>
+          </a:p>
+          <a:p>
+            <a:pPr lvl="0" indent="0" marL="0">
+              <a:buNone/>
+            </a:pPr>
+            <a:r>
+              <a:rPr/>
+              <a:t>Where it earns its place: when a downstream tool insists on predict() and gives you no threshold to move. Then this is how you shift the operating point.</a:t>
+            </a:r>
+          </a:p>
+          <a:p>
+            <a:pPr lvl="0" indent="0" marL="0">
+              <a:buNone/>
+            </a:pPr>
+          </a:p>
+          <a:p>
+            <a:pPr lvl="0" indent="0" marL="0">
+              <a:buNone/>
+            </a:pPr>
+            <a:r>
+              <a:rPr/>
+              <a:t>The same reading holds for resampling and for SMOTE (synthetic minority oversampling technique, which builds artificial minority examples): they move the operating point too. And both must be applied to the training rows only - inside each cross-validation fold, once lesson 5 introduces folds - for the reasons lesson 2 gave about imputation.</a:t>
             </a:r>
           </a:p>
         </p:txBody>
@@ -5970,7 +6002,7 @@
             </a:pPr>
             <a:r>
               <a:rPr/>
-              <a:t>Somebody will say “healthy, every time”. Agree, and move on. Do not explain the consequence yet - it lands far harder on slide 24, after the break, when they see 96.2% printed as a model’s accuracy score.</a:t>
+              <a:t>Somebody will say “healthy, every time”. Agree, and move on. Do not explain the consequence yet - it lands far harder on slide 28, after the break, when they see 96.2% printed as a model’s accuracy score.</a:t>
             </a:r>
           </a:p>
         </p:txBody>
@@ -6052,49 +6084,21 @@
             </a:pPr>
             <a:r>
               <a:rPr/>
-              <a:t>Set it explicitly and say out loud when it comes back: the first ten minutes of next Friday, 30 October.</a:t>
-            </a:r>
-          </a:p>
-          <a:p>
-            <a:pPr lvl="0" indent="0" marL="0">
-              <a:buNone/>
-            </a:pPr>
-          </a:p>
-          <a:p>
-            <a:pPr lvl="0" indent="0" marL="0">
-              <a:buNone/>
-            </a:pPr>
-            <a:r>
-              <a:rPr/>
-              <a:t>Emphasise which part matters at the exam, where one of the ten exercises is drawn and they talk through their own notebook. The classifier is a few lines and everyone will get it. The paragraph defending the threshold choice is where the learning is, and it is what they will be asked to defend.</a:t>
-            </a:r>
-          </a:p>
-          <a:p>
-            <a:pPr lvl="0" indent="0" marL="0">
-              <a:buNone/>
-            </a:pPr>
-          </a:p>
-          <a:p>
-            <a:pPr lvl="0" indent="0" marL="0">
-              <a:buNone/>
-            </a:pPr>
-            <a:r>
-              <a:rPr/>
-              <a:t>Warn them about the trap deliberately planted: the dataset has a decoy column, as this one did, and the exercise asks them to report AUC and average precision together. Anyone reporting AUC alone will be reporting a number that looks better than the model is.</a:t>
-            </a:r>
-          </a:p>
-          <a:p>
-            <a:pPr lvl="0" indent="0" marL="0">
-              <a:buNone/>
-            </a:pPr>
-          </a:p>
-          <a:p>
-            <a:pPr lvl="0" indent="0" marL="0">
-              <a:buNone/>
-            </a:pPr>
-            <a:r>
-              <a:rPr/>
-              <a:t>Next week: experimental methodology. Cross-validation, bias-variance, and the honest way to make every choice we made by hand today.</a:t>
+              <a:t>The ROC curve by hand, the 200,000-pair experiment, the cost curve, then the multiclass matrix. Run notebook 03. Fifteen minutes, and the two multiclass slides that follow (52 and 53) are shown when the notebook reaches its last section, so they run alongside it rather than after it.</a:t>
+            </a:r>
+          </a:p>
+          <a:p>
+            <a:pPr lvl="0" indent="0" marL="0">
+              <a:buNone/>
+            </a:pPr>
+          </a:p>
+          <a:p>
+            <a:pPr lvl="0" indent="0" marL="0">
+              <a:buNone/>
+            </a:pPr>
+            <a:r>
+              <a:rPr/>
+              <a:t>If time is short, keep the pairs experiment: it turns a definition they would otherwise memorise into something they watched happen.</a:t>
             </a:r>
           </a:p>
         </p:txBody>
@@ -6117,6 +6121,474 @@
             <a:fld id="{18BDFEC3-8487-43E8-A154-7C12CBC1FFF2}" type="slidenum">
               <a:rPr lang="en-US"/>
               <a:t>51</a:t>
+            </a:fld>
+            <a:endParaRPr lang="en-US"/>
+          </a:p>
+        </p:txBody>
+      </p:sp>
+    </p:spTree>
+  </p:cSld>
+</p:notes>
+</file>
+
+<file path=ppt/notesSlides/notesSlide51.xml><?xml version="1.0" encoding="utf-8"?>
+<p:notes xmlns:a="http://schemas.openxmlformats.org/drawingml/2006/main" xmlns:r="http://schemas.openxmlformats.org/officeDocument/2006/relationships" xmlns:p="http://schemas.openxmlformats.org/presentationml/2006/main">
+  <p:cSld>
+    <p:spTree>
+      <p:nvGrpSpPr>
+        <p:cNvPr id="1" name=""/>
+        <p:cNvGrpSpPr/>
+        <p:nvPr/>
+      </p:nvGrpSpPr>
+      <p:grpSpPr>
+        <a:xfrm>
+          <a:off x="0" y="0"/>
+          <a:ext cx="0" cy="0"/>
+          <a:chOff x="0" y="0"/>
+          <a:chExt cx="0" cy="0"/>
+        </a:xfrm>
+      </p:grpSpPr>
+      <p:sp>
+        <p:nvSpPr>
+          <p:cNvPr id="2" name="Slide Image Placeholder 1"/>
+          <p:cNvSpPr>
+            <a:spLocks noGrp="1" noRot="1" noChangeAspect="1"/>
+          </p:cNvSpPr>
+          <p:nvPr>
+            <p:ph type="sldImg"/>
+          </p:nvPr>
+        </p:nvSpPr>
+        <p:spPr/>
+      </p:sp>
+      <p:sp>
+        <p:nvSpPr>
+          <p:cNvPr id="3" name="Notes Placeholder 2"/>
+          <p:cNvSpPr>
+            <a:spLocks noGrp="1"/>
+          </p:cNvSpPr>
+          <p:nvPr>
+            <p:ph type="body" idx="1"/>
+          </p:nvPr>
+        </p:nvSpPr>
+        <p:spPr/>
+        <p:txBody>
+          <a:bodyPr/>
+          <a:lstStyle/>
+          <a:p>
+            <a:pPr lvl="0" indent="0" marL="0">
+              <a:buNone/>
+            </a:pPr>
+            <a:r>
+              <a:rPr/>
+              <a:t>Real fleets are not healthy-or-dead. A drive can be degraded: readable, but reporting errors, and worth replacing at the next maintenance window rather than at three in the morning.</a:t>
+            </a:r>
+          </a:p>
+          <a:p>
+            <a:pPr lvl="0" indent="0" marL="0">
+              <a:buNone/>
+            </a:pPr>
+          </a:p>
+          <a:p>
+            <a:pPr lvl="0" indent="0" marL="0">
+              <a:buNone/>
+            </a:pPr>
+            <a:r>
+              <a:rPr/>
+              <a:t>For K classes the model produces one score per class and turns them into K probabilities that add up to 1 - the softmax, which for two classes reduces exactly to the sigmoid. The cost generalises to categorical cross-entropy, and it is the same idea: the negative log of the probability assigned to what actually happened. Handout section 10.</a:t>
+            </a:r>
+          </a:p>
+          <a:p>
+            <a:pPr lvl="0" indent="0" marL="0">
+              <a:buNone/>
+            </a:pPr>
+          </a:p>
+          <a:p>
+            <a:pPr lvl="0" indent="0" marL="0">
+              <a:buNone/>
+            </a:pPr>
+            <a:r>
+              <a:rPr/>
+              <a:t>Read the off-diagonal cells rather than the accuracy. Degraded is the hard class, and understandably - it sits between two neighbours that both look like it from a distance.</a:t>
+            </a:r>
+          </a:p>
+          <a:p>
+            <a:pPr lvl="0" indent="0" marL="0">
+              <a:buNone/>
+            </a:pPr>
+          </a:p>
+          <a:p>
+            <a:pPr lvl="0" indent="0" marL="0">
+              <a:buNone/>
+            </a:pPr>
+            <a:r>
+              <a:rPr/>
+              <a:t>Precision and recall are computed one class at a time: each class in turn is the positive one, the rest are negative.</a:t>
+            </a:r>
+          </a:p>
+        </p:txBody>
+      </p:sp>
+      <p:sp>
+        <p:nvSpPr>
+          <p:cNvPr id="4" name="Slide Number Placeholder 3"/>
+          <p:cNvSpPr>
+            <a:spLocks noGrp="1"/>
+          </p:cNvSpPr>
+          <p:nvPr>
+            <p:ph type="sldNum" sz="quarter" idx="10"/>
+          </p:nvPr>
+        </p:nvSpPr>
+        <p:spPr/>
+        <p:txBody>
+          <a:bodyPr/>
+          <a:lstStyle/>
+          <a:p>
+            <a:fld id="{18BDFEC3-8487-43E8-A154-7C12CBC1FFF2}" type="slidenum">
+              <a:rPr lang="en-US"/>
+              <a:t>52</a:t>
+            </a:fld>
+            <a:endParaRPr lang="en-US"/>
+          </a:p>
+        </p:txBody>
+      </p:sp>
+    </p:spTree>
+  </p:cSld>
+</p:notes>
+</file>
+
+<file path=ppt/notesSlides/notesSlide52.xml><?xml version="1.0" encoding="utf-8"?>
+<p:notes xmlns:a="http://schemas.openxmlformats.org/drawingml/2006/main" xmlns:r="http://schemas.openxmlformats.org/officeDocument/2006/relationships" xmlns:p="http://schemas.openxmlformats.org/presentationml/2006/main">
+  <p:cSld>
+    <p:spTree>
+      <p:nvGrpSpPr>
+        <p:cNvPr id="1" name=""/>
+        <p:cNvGrpSpPr/>
+        <p:nvPr/>
+      </p:nvGrpSpPr>
+      <p:grpSpPr>
+        <a:xfrm>
+          <a:off x="0" y="0"/>
+          <a:ext cx="0" cy="0"/>
+          <a:chOff x="0" y="0"/>
+          <a:chExt cx="0" cy="0"/>
+        </a:xfrm>
+      </p:grpSpPr>
+      <p:sp>
+        <p:nvSpPr>
+          <p:cNvPr id="2" name="Slide Image Placeholder 1"/>
+          <p:cNvSpPr>
+            <a:spLocks noGrp="1" noRot="1" noChangeAspect="1"/>
+          </p:cNvSpPr>
+          <p:nvPr>
+            <p:ph type="sldImg"/>
+          </p:nvPr>
+        </p:nvSpPr>
+        <p:spPr/>
+      </p:sp>
+      <p:sp>
+        <p:nvSpPr>
+          <p:cNvPr id="3" name="Notes Placeholder 2"/>
+          <p:cNvSpPr>
+            <a:spLocks noGrp="1"/>
+          </p:cNvSpPr>
+          <p:nvPr>
+            <p:ph type="body" idx="1"/>
+          </p:nvPr>
+        </p:nvSpPr>
+        <p:spPr/>
+        <p:txBody>
+          <a:bodyPr/>
+          <a:lstStyle/>
+          <a:p>
+            <a:pPr lvl="0" indent="0" marL="0">
+              <a:buNone/>
+            </a:pPr>
+            <a:r>
+              <a:rPr/>
+              <a:t>The same choice as before, now with a much starker gap on three classes.</a:t>
+            </a:r>
+          </a:p>
+          <a:p>
+            <a:pPr lvl="0" indent="0" marL="0">
+              <a:buNone/>
+            </a:pPr>
+          </a:p>
+          <a:p>
+            <a:pPr lvl="0" indent="0" marL="0">
+              <a:buNone/>
+            </a:pPr>
+            <a:r>
+              <a:rPr/>
+              <a:t>Macro treats the three conditions as equally important. Weighted lets the healthy class - five drives in six - do most of the talking.</a:t>
+            </a:r>
+          </a:p>
+          <a:p>
+            <a:pPr lvl="0" indent="0" marL="0">
+              <a:buNone/>
+            </a:pPr>
+          </a:p>
+          <a:p>
+            <a:pPr lvl="0" indent="0" marL="0">
+              <a:buNone/>
+            </a:pPr>
+            <a:r>
+              <a:rPr/>
+              <a:t>Which to quote is a question about the application, not about statistics. If missing a failure matters as much as missing a healthy drive, macro is the honest one. Say which you used, always.</a:t>
+            </a:r>
+          </a:p>
+        </p:txBody>
+      </p:sp>
+      <p:sp>
+        <p:nvSpPr>
+          <p:cNvPr id="4" name="Slide Number Placeholder 3"/>
+          <p:cNvSpPr>
+            <a:spLocks noGrp="1"/>
+          </p:cNvSpPr>
+          <p:nvPr>
+            <p:ph type="sldNum" sz="quarter" idx="10"/>
+          </p:nvPr>
+        </p:nvSpPr>
+        <p:spPr/>
+        <p:txBody>
+          <a:bodyPr/>
+          <a:lstStyle/>
+          <a:p>
+            <a:fld id="{18BDFEC3-8487-43E8-A154-7C12CBC1FFF2}" type="slidenum">
+              <a:rPr lang="en-US"/>
+              <a:t>53</a:t>
+            </a:fld>
+            <a:endParaRPr lang="en-US"/>
+          </a:p>
+        </p:txBody>
+      </p:sp>
+    </p:spTree>
+  </p:cSld>
+</p:notes>
+</file>
+
+<file path=ppt/notesSlides/notesSlide53.xml><?xml version="1.0" encoding="utf-8"?>
+<p:notes xmlns:a="http://schemas.openxmlformats.org/drawingml/2006/main" xmlns:r="http://schemas.openxmlformats.org/officeDocument/2006/relationships" xmlns:p="http://schemas.openxmlformats.org/presentationml/2006/main">
+  <p:cSld>
+    <p:spTree>
+      <p:nvGrpSpPr>
+        <p:cNvPr id="1" name=""/>
+        <p:cNvGrpSpPr/>
+        <p:nvPr/>
+      </p:nvGrpSpPr>
+      <p:grpSpPr>
+        <a:xfrm>
+          <a:off x="0" y="0"/>
+          <a:ext cx="0" cy="0"/>
+          <a:chOff x="0" y="0"/>
+          <a:chExt cx="0" cy="0"/>
+        </a:xfrm>
+      </p:grpSpPr>
+      <p:sp>
+        <p:nvSpPr>
+          <p:cNvPr id="2" name="Slide Image Placeholder 1"/>
+          <p:cNvSpPr>
+            <a:spLocks noGrp="1" noRot="1" noChangeAspect="1"/>
+          </p:cNvSpPr>
+          <p:nvPr>
+            <p:ph type="sldImg"/>
+          </p:nvPr>
+        </p:nvSpPr>
+        <p:spPr/>
+      </p:sp>
+      <p:sp>
+        <p:nvSpPr>
+          <p:cNvPr id="3" name="Notes Placeholder 2"/>
+          <p:cNvSpPr>
+            <a:spLocks noGrp="1"/>
+          </p:cNvSpPr>
+          <p:nvPr>
+            <p:ph type="body" idx="1"/>
+          </p:nvPr>
+        </p:nvSpPr>
+        <p:spPr/>
+        <p:txBody>
+          <a:bodyPr/>
+          <a:lstStyle/>
+          <a:p>
+            <a:pPr lvl="0" indent="0" marL="0">
+              <a:buNone/>
+            </a:pPr>
+            <a:r>
+              <a:rPr/>
+              <a:t>Close on the number they started with. 306 failures out of 8,000; 96.2% accuracy for a model that does nothing.</a:t>
+            </a:r>
+          </a:p>
+          <a:p>
+            <a:pPr lvl="0" indent="0" marL="0">
+              <a:buNone/>
+            </a:pPr>
+          </a:p>
+          <a:p>
+            <a:pPr lvl="0" indent="0" marL="0">
+              <a:buNone/>
+            </a:pPr>
+            <a:r>
+              <a:rPr/>
+              <a:t>If they remember one thing from today, it should be the reflex to ask “what’s the base rate?” before believing any accuracy figure. That reflex is worth more than any of the formulas.</a:t>
+            </a:r>
+          </a:p>
+          <a:p>
+            <a:pPr lvl="0" indent="0" marL="0">
+              <a:buNone/>
+            </a:pPr>
+          </a:p>
+          <a:p>
+            <a:pPr lvl="0" indent="0" marL="0">
+              <a:buNone/>
+            </a:pPr>
+            <a:r>
+              <a:rPr/>
+              <a:t>The second thing: every metric on the slide depended on a threshold, and the threshold has an answer - C-FP over C-FP plus C-FN, for honest probabilities - that comes from the business, not from the data.</a:t>
+            </a:r>
+          </a:p>
+        </p:txBody>
+      </p:sp>
+      <p:sp>
+        <p:nvSpPr>
+          <p:cNvPr id="4" name="Slide Number Placeholder 3"/>
+          <p:cNvSpPr>
+            <a:spLocks noGrp="1"/>
+          </p:cNvSpPr>
+          <p:nvPr>
+            <p:ph type="sldNum" sz="quarter" idx="10"/>
+          </p:nvPr>
+        </p:nvSpPr>
+        <p:spPr/>
+        <p:txBody>
+          <a:bodyPr/>
+          <a:lstStyle/>
+          <a:p>
+            <a:fld id="{18BDFEC3-8487-43E8-A154-7C12CBC1FFF2}" type="slidenum">
+              <a:rPr lang="en-US"/>
+              <a:t>54</a:t>
+            </a:fld>
+            <a:endParaRPr lang="en-US"/>
+          </a:p>
+        </p:txBody>
+      </p:sp>
+    </p:spTree>
+  </p:cSld>
+</p:notes>
+</file>
+
+<file path=ppt/notesSlides/notesSlide54.xml><?xml version="1.0" encoding="utf-8"?>
+<p:notes xmlns:a="http://schemas.openxmlformats.org/drawingml/2006/main" xmlns:r="http://schemas.openxmlformats.org/officeDocument/2006/relationships" xmlns:p="http://schemas.openxmlformats.org/presentationml/2006/main">
+  <p:cSld>
+    <p:spTree>
+      <p:nvGrpSpPr>
+        <p:cNvPr id="1" name=""/>
+        <p:cNvGrpSpPr/>
+        <p:nvPr/>
+      </p:nvGrpSpPr>
+      <p:grpSpPr>
+        <a:xfrm>
+          <a:off x="0" y="0"/>
+          <a:ext cx="0" cy="0"/>
+          <a:chOff x="0" y="0"/>
+          <a:chExt cx="0" cy="0"/>
+        </a:xfrm>
+      </p:grpSpPr>
+      <p:sp>
+        <p:nvSpPr>
+          <p:cNvPr id="2" name="Slide Image Placeholder 1"/>
+          <p:cNvSpPr>
+            <a:spLocks noGrp="1" noRot="1" noChangeAspect="1"/>
+          </p:cNvSpPr>
+          <p:nvPr>
+            <p:ph type="sldImg"/>
+          </p:nvPr>
+        </p:nvSpPr>
+        <p:spPr/>
+      </p:sp>
+      <p:sp>
+        <p:nvSpPr>
+          <p:cNvPr id="3" name="Notes Placeholder 2"/>
+          <p:cNvSpPr>
+            <a:spLocks noGrp="1"/>
+          </p:cNvSpPr>
+          <p:nvPr>
+            <p:ph type="body" idx="1"/>
+          </p:nvPr>
+        </p:nvSpPr>
+        <p:spPr/>
+        <p:txBody>
+          <a:bodyPr/>
+          <a:lstStyle/>
+          <a:p>
+            <a:pPr lvl="0" indent="0" marL="0">
+              <a:buNone/>
+            </a:pPr>
+            <a:r>
+              <a:rPr/>
+              <a:t>Set it explicitly and say out loud when it comes back: the first ten minutes of next Friday, 30 October.</a:t>
+            </a:r>
+          </a:p>
+          <a:p>
+            <a:pPr lvl="0" indent="0" marL="0">
+              <a:buNone/>
+            </a:pPr>
+          </a:p>
+          <a:p>
+            <a:pPr lvl="0" indent="0" marL="0">
+              <a:buNone/>
+            </a:pPr>
+            <a:r>
+              <a:rPr/>
+              <a:t>Emphasise which part matters at the exam, where one of the ten exercises is drawn and they talk through their own notebook. The classifier is a few lines and everyone will get it. The paragraph defending the threshold choice is where the learning is, and it is what they will be asked to defend.</a:t>
+            </a:r>
+          </a:p>
+          <a:p>
+            <a:pPr lvl="0" indent="0" marL="0">
+              <a:buNone/>
+            </a:pPr>
+          </a:p>
+          <a:p>
+            <a:pPr lvl="0" indent="0" marL="0">
+              <a:buNone/>
+            </a:pPr>
+            <a:r>
+              <a:rPr/>
+              <a:t>Warn them about the trap deliberately planted: the dataset has a decoy column, as this one did, and the exercise asks them to report AUC and average precision together. Anyone reporting AUC alone will be reporting a number that looks better than the model is.</a:t>
+            </a:r>
+          </a:p>
+          <a:p>
+            <a:pPr lvl="0" indent="0" marL="0">
+              <a:buNone/>
+            </a:pPr>
+          </a:p>
+          <a:p>
+            <a:pPr lvl="0" indent="0" marL="0">
+              <a:buNone/>
+            </a:pPr>
+            <a:r>
+              <a:rPr/>
+              <a:t>Next week: experimental methodology. Cross-validation, bias-variance, and the honest way to make every choice we made by hand today.</a:t>
+            </a:r>
+          </a:p>
+        </p:txBody>
+      </p:sp>
+      <p:sp>
+        <p:nvSpPr>
+          <p:cNvPr id="4" name="Slide Number Placeholder 3"/>
+          <p:cNvSpPr>
+            <a:spLocks noGrp="1"/>
+          </p:cNvSpPr>
+          <p:nvPr>
+            <p:ph type="sldNum" sz="quarter" idx="10"/>
+          </p:nvPr>
+        </p:nvSpPr>
+        <p:spPr/>
+        <p:txBody>
+          <a:bodyPr/>
+          <a:lstStyle/>
+          <a:p>
+            <a:fld id="{18BDFEC3-8487-43E8-A154-7C12CBC1FFF2}" type="slidenum">
+              <a:rPr lang="en-US"/>
+              <a:t>55</a:t>
             </a:fld>
             <a:endParaRPr lang="en-US"/>
           </a:p>
@@ -6502,7 +6974,7 @@
             <a:pPr lvl="0"/>
             <a:r>
               <a:rPr/>
-              <a:t>with the cross-entropy cost of slide 17 the gradient comes out as (prediction minus label) times x, and the cost is convex - handout sections 3.4 and 4.3.</a:t>
+              <a:t>with the cross-entropy cost of slide 21 the gradient comes out as (prediction minus label) times x, and the cost is convex - handout sections 3.4 and 4.3.</a:t>
             </a:r>
           </a:p>
           <a:p>
@@ -10847,7 +11319,7 @@
             </a:pPr>
             <a:r>
               <a:rPr/>
-              <a:t>Maximum likelihood, on three drives</a:t>
+              <a:t>Step 1: each drive gets a p</a:t>
             </a:r>
           </a:p>
         </p:txBody>
@@ -10873,9 +11345,10 @@
                 <a:tableStyleId>{5C22544A-7EE6-4342-B048-85BDC9FD1C3A}</a:tableStyleId>
               </a:tblPr>
               <a:tblGrid>
-                <a:gridCol w="2743200"/>
-                <a:gridCol w="2743200"/>
-                <a:gridCol w="2743200"/>
+                <a:gridCol w="2057400"/>
+                <a:gridCol w="2057400"/>
+                <a:gridCol w="2057400"/>
+                <a:gridCol w="2057400"/>
               </a:tblGrid>
               <a:tr h="0">
                 <a:tc>
@@ -10888,7 +11361,7 @@
                       </a:pPr>
                       <a:r>
                         <a:rPr/>
-                        <a:t>Drive, what happened</a:t>
+                        <a:t>Drive</a:t>
                       </a:r>
                     </a:p>
                   </a:txBody>
@@ -10904,7 +11377,7 @@
                       </a:pPr>
                       <a:r>
                         <a:rPr/>
-                        <a:t>Setting 1 of w, b: P(fail) → P(what happened)</a:t>
+                        <a:t>What happened</a:t>
                       </a:r>
                     </a:p>
                   </a:txBody>
@@ -10920,7 +11393,23 @@
                       </a:pPr>
                       <a:r>
                         <a:rPr/>
-                        <a:t>Setting 2 of w, b: P(fail) → P(what happened)</a:t>
+                        <a:t>y</a:t>
+                      </a:r>
+                    </a:p>
+                  </a:txBody>
+                  <a:tcPr/>
+                </a:tc>
+                <a:tc>
+                  <a:txBody>
+                    <a:bodyPr/>
+                    <a:lstStyle/>
+                    <a:p>
+                      <a:pPr lvl="0" indent="0" marL="0">
+                        <a:buNone/>
+                      </a:pPr>
+                      <a:r>
+                        <a:rPr/>
+                        <a:t>Setting 1: p = σ(wᵀx + b), the P(fail)</a:t>
                       </a:r>
                     </a:p>
                   </a:txBody>
@@ -10938,45 +11427,52 @@
                       </a:pPr>
                       <a:r>
                         <a:rPr/>
-                        <a:t>A, failed</a:t>
-                      </a:r>
-                    </a:p>
-                  </a:txBody>
-                </a:tc>
-                <a:tc>
-                  <a:txBody>
-                    <a:bodyPr/>
-                    <a:lstStyle/>
-                    <a:p>
-                      <a:pPr lvl="0" indent="0" marL="0">
-                        <a:buNone/>
-                      </a:pPr>
-                      <a:r>
-                        <a:rPr/>
-                        <a:t>0.8 → </a:t>
-                      </a:r>
-                      <a:r>
-                        <a:rPr b="1"/>
+                        <a:t>A</a:t>
+                      </a:r>
+                    </a:p>
+                  </a:txBody>
+                </a:tc>
+                <a:tc>
+                  <a:txBody>
+                    <a:bodyPr/>
+                    <a:lstStyle/>
+                    <a:p>
+                      <a:pPr lvl="0" indent="0" marL="0">
+                        <a:buNone/>
+                      </a:pPr>
+                      <a:r>
+                        <a:rPr/>
+                        <a:t>failed</a:t>
+                      </a:r>
+                    </a:p>
+                  </a:txBody>
+                </a:tc>
+                <a:tc>
+                  <a:txBody>
+                    <a:bodyPr/>
+                    <a:lstStyle/>
+                    <a:p>
+                      <a:pPr lvl="0" indent="0" marL="0">
+                        <a:buNone/>
+                      </a:pPr>
+                      <a:r>
+                        <a:rPr/>
+                        <a:t>1</a:t>
+                      </a:r>
+                    </a:p>
+                  </a:txBody>
+                </a:tc>
+                <a:tc>
+                  <a:txBody>
+                    <a:bodyPr/>
+                    <a:lstStyle/>
+                    <a:p>
+                      <a:pPr lvl="0" indent="0" marL="0">
+                        <a:buNone/>
+                      </a:pPr>
+                      <a:r>
+                        <a:rPr/>
                         <a:t>0.8</a:t>
-                      </a:r>
-                    </a:p>
-                  </a:txBody>
-                </a:tc>
-                <a:tc>
-                  <a:txBody>
-                    <a:bodyPr/>
-                    <a:lstStyle/>
-                    <a:p>
-                      <a:pPr lvl="0" indent="0" marL="0">
-                        <a:buNone/>
-                      </a:pPr>
-                      <a:r>
-                        <a:rPr/>
-                        <a:t>0.3 → </a:t>
-                      </a:r>
-                      <a:r>
-                        <a:rPr b="1"/>
-                        <a:t>0.3</a:t>
                       </a:r>
                     </a:p>
                   </a:txBody>
@@ -10993,45 +11489,52 @@
                       </a:pPr>
                       <a:r>
                         <a:rPr/>
-                        <a:t>B, healthy</a:t>
-                      </a:r>
-                    </a:p>
-                  </a:txBody>
-                </a:tc>
-                <a:tc>
-                  <a:txBody>
-                    <a:bodyPr/>
-                    <a:lstStyle/>
-                    <a:p>
-                      <a:pPr lvl="0" indent="0" marL="0">
-                        <a:buNone/>
-                      </a:pPr>
-                      <a:r>
-                        <a:rPr/>
-                        <a:t>0.1 → </a:t>
-                      </a:r>
-                      <a:r>
-                        <a:rPr b="1"/>
-                        <a:t>0.9</a:t>
-                      </a:r>
-                    </a:p>
-                  </a:txBody>
-                </a:tc>
-                <a:tc>
-                  <a:txBody>
-                    <a:bodyPr/>
-                    <a:lstStyle/>
-                    <a:p>
-                      <a:pPr lvl="0" indent="0" marL="0">
-                        <a:buNone/>
-                      </a:pPr>
-                      <a:r>
-                        <a:rPr/>
-                        <a:t>0.6 → </a:t>
-                      </a:r>
-                      <a:r>
-                        <a:rPr b="1"/>
-                        <a:t>0.4</a:t>
+                        <a:t>B</a:t>
+                      </a:r>
+                    </a:p>
+                  </a:txBody>
+                </a:tc>
+                <a:tc>
+                  <a:txBody>
+                    <a:bodyPr/>
+                    <a:lstStyle/>
+                    <a:p>
+                      <a:pPr lvl="0" indent="0" marL="0">
+                        <a:buNone/>
+                      </a:pPr>
+                      <a:r>
+                        <a:rPr/>
+                        <a:t>stayed healthy</a:t>
+                      </a:r>
+                    </a:p>
+                  </a:txBody>
+                </a:tc>
+                <a:tc>
+                  <a:txBody>
+                    <a:bodyPr/>
+                    <a:lstStyle/>
+                    <a:p>
+                      <a:pPr lvl="0" indent="0" marL="0">
+                        <a:buNone/>
+                      </a:pPr>
+                      <a:r>
+                        <a:rPr/>
+                        <a:t>0</a:t>
+                      </a:r>
+                    </a:p>
+                  </a:txBody>
+                </a:tc>
+                <a:tc>
+                  <a:txBody>
+                    <a:bodyPr/>
+                    <a:lstStyle/>
+                    <a:p>
+                      <a:pPr lvl="0" indent="0" marL="0">
+                        <a:buNone/>
+                      </a:pPr>
+                      <a:r>
+                        <a:rPr/>
+                        <a:t>0.1</a:t>
                       </a:r>
                     </a:p>
                   </a:txBody>
@@ -11048,134 +11551,53 @@
                       </a:pPr>
                       <a:r>
                         <a:rPr/>
-                        <a:t>C, healthy</a:t>
-                      </a:r>
-                    </a:p>
-                  </a:txBody>
-                </a:tc>
-                <a:tc>
-                  <a:txBody>
-                    <a:bodyPr/>
-                    <a:lstStyle/>
-                    <a:p>
-                      <a:pPr lvl="0" indent="0" marL="0">
-                        <a:buNone/>
-                      </a:pPr>
-                      <a:r>
-                        <a:rPr/>
-                        <a:t>0.2 → </a:t>
-                      </a:r>
-                      <a:r>
-                        <a:rPr b="1"/>
-                        <a:t>0.8</a:t>
-                      </a:r>
-                    </a:p>
-                  </a:txBody>
-                </a:tc>
-                <a:tc>
-                  <a:txBody>
-                    <a:bodyPr/>
-                    <a:lstStyle/>
-                    <a:p>
-                      <a:pPr lvl="0" indent="0" marL="0">
-                        <a:buNone/>
-                      </a:pPr>
-                      <a:r>
-                        <a:rPr/>
-                        <a:t>0.5 → </a:t>
-                      </a:r>
-                      <a:r>
-                        <a:rPr b="1"/>
-                        <a:t>0.5</a:t>
-                      </a:r>
-                    </a:p>
-                  </a:txBody>
-                </a:tc>
-              </a:tr>
-              <a:tr h="0">
-                <a:tc>
-                  <a:txBody>
-                    <a:bodyPr/>
-                    <a:lstStyle/>
-                    <a:p>
-                      <a:pPr lvl="0" indent="0" marL="0">
-                        <a:buNone/>
-                      </a:pPr>
-                      <a:r>
-                        <a:rPr/>
-                        <a:t>Multiplied: the likelihood</a:t>
-                      </a:r>
-                    </a:p>
-                  </a:txBody>
-                </a:tc>
-                <a:tc>
-                  <a:txBody>
-                    <a:bodyPr/>
-                    <a:lstStyle/>
-                    <a:p>
-                      <a:pPr lvl="0" indent="0" marL="0">
-                        <a:buNone/>
-                      </a:pPr>
-                      <a:r>
-                        <a:rPr b="1"/>
-                        <a:t>0.576</a:t>
-                      </a:r>
-                    </a:p>
-                  </a:txBody>
-                </a:tc>
-                <a:tc>
-                  <a:txBody>
-                    <a:bodyPr/>
-                    <a:lstStyle/>
-                    <a:p>
-                      <a:pPr lvl="0" indent="0" marL="0">
-                        <a:buNone/>
-                      </a:pPr>
-                      <a:r>
-                        <a:rPr b="1"/>
-                        <a:t>0.060</a:t>
-                      </a:r>
-                    </a:p>
-                  </a:txBody>
-                </a:tc>
-              </a:tr>
-              <a:tr h="0">
-                <a:tc>
-                  <a:txBody>
-                    <a:bodyPr/>
-                    <a:lstStyle/>
-                    <a:p>
-                      <a:pPr lvl="0" indent="0" marL="0">
-                        <a:buNone/>
-                      </a:pPr>
-                      <a:r>
-                        <a:rPr/>
-                        <a:t>Maximum likelihood keeps</a:t>
-                      </a:r>
-                    </a:p>
-                  </a:txBody>
-                </a:tc>
-                <a:tc>
-                  <a:txBody>
-                    <a:bodyPr/>
-                    <a:lstStyle/>
-                    <a:p>
-                      <a:pPr lvl="0" indent="0" marL="0">
-                        <a:buNone/>
-                      </a:pPr>
-                      <a:r>
-                        <a:rPr b="1"/>
-                        <a:t>setting 1</a:t>
-                      </a:r>
-                    </a:p>
-                  </a:txBody>
-                </a:tc>
-                <a:tc>
-                  <a:txBody>
-                    <a:bodyPr/>
-                    <a:lstStyle/>
-                    <a:p>
-                      <a:endParaRPr/>
+                        <a:t>C</a:t>
+                      </a:r>
+                    </a:p>
+                  </a:txBody>
+                </a:tc>
+                <a:tc>
+                  <a:txBody>
+                    <a:bodyPr/>
+                    <a:lstStyle/>
+                    <a:p>
+                      <a:pPr lvl="0" indent="0" marL="0">
+                        <a:buNone/>
+                      </a:pPr>
+                      <a:r>
+                        <a:rPr/>
+                        <a:t>stayed healthy</a:t>
+                      </a:r>
+                    </a:p>
+                  </a:txBody>
+                </a:tc>
+                <a:tc>
+                  <a:txBody>
+                    <a:bodyPr/>
+                    <a:lstStyle/>
+                    <a:p>
+                      <a:pPr lvl="0" indent="0" marL="0">
+                        <a:buNone/>
+                      </a:pPr>
+                      <a:r>
+                        <a:rPr/>
+                        <a:t>0</a:t>
+                      </a:r>
+                    </a:p>
+                  </a:txBody>
+                </a:tc>
+                <a:tc>
+                  <a:txBody>
+                    <a:bodyPr/>
+                    <a:lstStyle/>
+                    <a:p>
+                      <a:pPr lvl="0" indent="0" marL="0">
+                        <a:buNone/>
+                      </a:pPr>
+                      <a:r>
+                        <a:rPr/>
+                        <a:t>0.2</a:t>
+                      </a:r>
                     </a:p>
                   </a:txBody>
                 </a:tc>
@@ -11190,6 +11612,1485 @@
 </file>
 
 <file path=ppt/slides/slide17.xml><?xml version="1.0" encoding="utf-8"?>
+<p:sld xmlns:a="http://schemas.openxmlformats.org/drawingml/2006/main" xmlns:r="http://schemas.openxmlformats.org/officeDocument/2006/relationships" xmlns:p="http://schemas.openxmlformats.org/presentationml/2006/main">
+  <p:cSld>
+    <p:spTree>
+      <p:nvGrpSpPr>
+        <p:cNvPr id="1" name=""/>
+        <p:cNvGrpSpPr/>
+        <p:nvPr/>
+      </p:nvGrpSpPr>
+      <p:grpSpPr>
+        <a:xfrm>
+          <a:off x="0" y="0"/>
+          <a:ext cx="0" cy="0"/>
+          <a:chOff x="0" y="0"/>
+          <a:chExt cx="0" cy="0"/>
+        </a:xfrm>
+      </p:grpSpPr>
+      <p:sp>
+        <p:nvSpPr>
+          <p:cNvPr id="2" name="Title 1"/>
+          <p:cNvSpPr>
+            <a:spLocks noGrp="1"/>
+          </p:cNvSpPr>
+          <p:nvPr>
+            <p:ph type="title"/>
+          </p:nvPr>
+        </p:nvSpPr>
+        <p:spPr>
+          <a:xfrm>
+            <a:off x="457200" y="205979"/>
+            <a:ext cx="8229600" cy="857250"/>
+          </a:xfrm>
+        </p:spPr>
+        <p:txBody>
+          <a:bodyPr/>
+          <a:lstStyle/>
+          <a:p>
+            <a:pPr lvl="0" indent="0" marL="0">
+              <a:buNone/>
+            </a:pPr>
+            <a:r>
+              <a:rPr/>
+              <a:t>Step 2: how likely was the outcome?</a:t>
+            </a:r>
+          </a:p>
+        </p:txBody>
+      </p:sp>
+      <p:graphicFrame>
+        <p:nvGraphicFramePr>
+          <p:cNvPr id="6" name="Content Placeholder 5"/>
+          <p:cNvGraphicFramePr>
+            <a:graphicFrameLocks noGrp="1"/>
+          </p:cNvGraphicFramePr>
+          <p:nvPr>
+            <p:ph idx="1"/>
+          </p:nvPr>
+        </p:nvGraphicFramePr>
+        <p:xfrm>
+          <a:off x="457200" y="1166099"/>
+          <a:ext cx="8229600" cy="3390900"/>
+        </p:xfrm>
+        <a:graphic>
+          <a:graphicData uri="http://schemas.openxmlformats.org/drawingml/2006/table">
+            <a:tbl>
+              <a:tblPr firstRow="1" bandRow="1">
+                <a:tableStyleId>{5C22544A-7EE6-4342-B048-85BDC9FD1C3A}</a:tableStyleId>
+              </a:tblPr>
+              <a:tblGrid>
+                <a:gridCol w="2057400"/>
+                <a:gridCol w="2057400"/>
+                <a:gridCol w="2057400"/>
+                <a:gridCol w="2057400"/>
+              </a:tblGrid>
+              <a:tr h="0">
+                <a:tc>
+                  <a:txBody>
+                    <a:bodyPr/>
+                    <a:lstStyle/>
+                    <a:p>
+                      <a:pPr lvl="0" indent="0" marL="0">
+                        <a:buNone/>
+                      </a:pPr>
+                      <a:r>
+                        <a:rPr/>
+                        <a:t>Drive</a:t>
+                      </a:r>
+                    </a:p>
+                  </a:txBody>
+                  <a:tcPr/>
+                </a:tc>
+                <a:tc>
+                  <a:txBody>
+                    <a:bodyPr/>
+                    <a:lstStyle/>
+                    <a:p>
+                      <a:pPr lvl="0" indent="0" marL="0">
+                        <a:buNone/>
+                      </a:pPr>
+                      <a:r>
+                        <a:rPr/>
+                        <a:t>y</a:t>
+                      </a:r>
+                    </a:p>
+                  </a:txBody>
+                  <a:tcPr/>
+                </a:tc>
+                <a:tc>
+                  <a:txBody>
+                    <a:bodyPr/>
+                    <a:lstStyle/>
+                    <a:p>
+                      <a:pPr lvl="0" indent="0" marL="0">
+                        <a:buNone/>
+                      </a:pPr>
+                      <a:r>
+                        <a:rPr/>
+                        <a:t>p</a:t>
+                      </a:r>
+                    </a:p>
+                  </a:txBody>
+                  <a:tcPr/>
+                </a:tc>
+                <a:tc>
+                  <a:txBody>
+                    <a:bodyPr/>
+                    <a:lstStyle/>
+                    <a:p>
+                      <a:pPr lvl="0" indent="0" marL="0">
+                        <a:buNone/>
+                      </a:pPr>
+                      <a:r>
+                        <a:rPr/>
+                        <a:t>Probability of what happened: p if y = 1, 1 - p if y = 0</a:t>
+                      </a:r>
+                    </a:p>
+                  </a:txBody>
+                  <a:tcPr/>
+                </a:tc>
+              </a:tr>
+              <a:tr h="0">
+                <a:tc>
+                  <a:txBody>
+                    <a:bodyPr/>
+                    <a:lstStyle/>
+                    <a:p>
+                      <a:pPr lvl="0" indent="0" marL="0">
+                        <a:buNone/>
+                      </a:pPr>
+                      <a:r>
+                        <a:rPr/>
+                        <a:t>A</a:t>
+                      </a:r>
+                    </a:p>
+                  </a:txBody>
+                </a:tc>
+                <a:tc>
+                  <a:txBody>
+                    <a:bodyPr/>
+                    <a:lstStyle/>
+                    <a:p>
+                      <a:pPr lvl="0" indent="0" marL="0">
+                        <a:buNone/>
+                      </a:pPr>
+                      <a:r>
+                        <a:rPr/>
+                        <a:t>1</a:t>
+                      </a:r>
+                    </a:p>
+                  </a:txBody>
+                </a:tc>
+                <a:tc>
+                  <a:txBody>
+                    <a:bodyPr/>
+                    <a:lstStyle/>
+                    <a:p>
+                      <a:pPr lvl="0" indent="0" marL="0">
+                        <a:buNone/>
+                      </a:pPr>
+                      <a:r>
+                        <a:rPr/>
+                        <a:t>0.8</a:t>
+                      </a:r>
+                    </a:p>
+                  </a:txBody>
+                </a:tc>
+                <a:tc>
+                  <a:txBody>
+                    <a:bodyPr/>
+                    <a:lstStyle/>
+                    <a:p>
+                      <a:pPr lvl="0" indent="0" marL="0">
+                        <a:buNone/>
+                      </a:pPr>
+                      <a:r>
+                        <a:rPr/>
+                        <a:t>0.8</a:t>
+                      </a:r>
+                    </a:p>
+                  </a:txBody>
+                </a:tc>
+              </a:tr>
+              <a:tr h="0">
+                <a:tc>
+                  <a:txBody>
+                    <a:bodyPr/>
+                    <a:lstStyle/>
+                    <a:p>
+                      <a:pPr lvl="0" indent="0" marL="0">
+                        <a:buNone/>
+                      </a:pPr>
+                      <a:r>
+                        <a:rPr/>
+                        <a:t>B</a:t>
+                      </a:r>
+                    </a:p>
+                  </a:txBody>
+                </a:tc>
+                <a:tc>
+                  <a:txBody>
+                    <a:bodyPr/>
+                    <a:lstStyle/>
+                    <a:p>
+                      <a:pPr lvl="0" indent="0" marL="0">
+                        <a:buNone/>
+                      </a:pPr>
+                      <a:r>
+                        <a:rPr/>
+                        <a:t>0</a:t>
+                      </a:r>
+                    </a:p>
+                  </a:txBody>
+                </a:tc>
+                <a:tc>
+                  <a:txBody>
+                    <a:bodyPr/>
+                    <a:lstStyle/>
+                    <a:p>
+                      <a:pPr lvl="0" indent="0" marL="0">
+                        <a:buNone/>
+                      </a:pPr>
+                      <a:r>
+                        <a:rPr/>
+                        <a:t>0.1</a:t>
+                      </a:r>
+                    </a:p>
+                  </a:txBody>
+                </a:tc>
+                <a:tc>
+                  <a:txBody>
+                    <a:bodyPr/>
+                    <a:lstStyle/>
+                    <a:p>
+                      <a:pPr lvl="0" indent="0" marL="0">
+                        <a:buNone/>
+                      </a:pPr>
+                      <a:r>
+                        <a:rPr/>
+                        <a:t>1 − 0.1 = 0.9</a:t>
+                      </a:r>
+                    </a:p>
+                  </a:txBody>
+                </a:tc>
+              </a:tr>
+              <a:tr h="0">
+                <a:tc>
+                  <a:txBody>
+                    <a:bodyPr/>
+                    <a:lstStyle/>
+                    <a:p>
+                      <a:pPr lvl="0" indent="0" marL="0">
+                        <a:buNone/>
+                      </a:pPr>
+                      <a:r>
+                        <a:rPr/>
+                        <a:t>C</a:t>
+                      </a:r>
+                    </a:p>
+                  </a:txBody>
+                </a:tc>
+                <a:tc>
+                  <a:txBody>
+                    <a:bodyPr/>
+                    <a:lstStyle/>
+                    <a:p>
+                      <a:pPr lvl="0" indent="0" marL="0">
+                        <a:buNone/>
+                      </a:pPr>
+                      <a:r>
+                        <a:rPr/>
+                        <a:t>0</a:t>
+                      </a:r>
+                    </a:p>
+                  </a:txBody>
+                </a:tc>
+                <a:tc>
+                  <a:txBody>
+                    <a:bodyPr/>
+                    <a:lstStyle/>
+                    <a:p>
+                      <a:pPr lvl="0" indent="0" marL="0">
+                        <a:buNone/>
+                      </a:pPr>
+                      <a:r>
+                        <a:rPr/>
+                        <a:t>0.2</a:t>
+                      </a:r>
+                    </a:p>
+                  </a:txBody>
+                </a:tc>
+                <a:tc>
+                  <a:txBody>
+                    <a:bodyPr/>
+                    <a:lstStyle/>
+                    <a:p>
+                      <a:pPr lvl="0" indent="0" marL="0">
+                        <a:buNone/>
+                      </a:pPr>
+                      <a:r>
+                        <a:rPr/>
+                        <a:t>1 − 0.2 = 0.8</a:t>
+                      </a:r>
+                    </a:p>
+                  </a:txBody>
+                </a:tc>
+              </a:tr>
+              <a:tr h="0">
+                <a:tc>
+                  <a:txBody>
+                    <a:bodyPr/>
+                    <a:lstStyle/>
+                    <a:p>
+                      <a:pPr lvl="0" indent="0" marL="0">
+                        <a:buNone/>
+                      </a:pPr>
+                      <a:r>
+                        <a:rPr/>
+                        <a:t>All three: multiply</a:t>
+                      </a:r>
+                    </a:p>
+                  </a:txBody>
+                </a:tc>
+                <a:tc>
+                  <a:txBody>
+                    <a:bodyPr/>
+                    <a:lstStyle/>
+                    <a:p>
+                      <a:endParaRPr/>
+                    </a:p>
+                  </a:txBody>
+                </a:tc>
+                <a:tc>
+                  <a:txBody>
+                    <a:bodyPr/>
+                    <a:lstStyle/>
+                    <a:p>
+                      <a:endParaRPr/>
+                    </a:p>
+                  </a:txBody>
+                </a:tc>
+                <a:tc>
+                  <a:txBody>
+                    <a:bodyPr/>
+                    <a:lstStyle/>
+                    <a:p>
+                      <a:pPr lvl="0" indent="0" marL="0">
+                        <a:buNone/>
+                      </a:pPr>
+                      <a:r>
+                        <a:rPr/>
+                        <a:t>0.8 × 0.9 × 0.8 = </a:t>
+                      </a:r>
+                      <a:r>
+                        <a:rPr b="1"/>
+                        <a:t>0.576</a:t>
+                      </a:r>
+                    </a:p>
+                  </a:txBody>
+                </a:tc>
+              </a:tr>
+            </a:tbl>
+          </a:graphicData>
+        </a:graphic>
+      </p:graphicFrame>
+    </p:spTree>
+  </p:cSld>
+</p:sld>
+</file>
+
+<file path=ppt/slides/slide18.xml><?xml version="1.0" encoding="utf-8"?>
+<p:sld xmlns:a="http://schemas.openxmlformats.org/drawingml/2006/main" xmlns:r="http://schemas.openxmlformats.org/officeDocument/2006/relationships" xmlns:p="http://schemas.openxmlformats.org/presentationml/2006/main">
+  <p:cSld>
+    <p:spTree>
+      <p:nvGrpSpPr>
+        <p:cNvPr id="1" name=""/>
+        <p:cNvGrpSpPr/>
+        <p:nvPr/>
+      </p:nvGrpSpPr>
+      <p:grpSpPr>
+        <a:xfrm>
+          <a:off x="0" y="0"/>
+          <a:ext cx="0" cy="0"/>
+          <a:chOff x="0" y="0"/>
+          <a:chExt cx="0" cy="0"/>
+        </a:xfrm>
+      </p:grpSpPr>
+      <p:sp>
+        <p:nvSpPr>
+          <p:cNvPr id="2" name="Title 1"/>
+          <p:cNvSpPr>
+            <a:spLocks noGrp="1"/>
+          </p:cNvSpPr>
+          <p:nvPr>
+            <p:ph type="title"/>
+          </p:nvPr>
+        </p:nvSpPr>
+        <p:spPr>
+          <a:xfrm>
+            <a:off x="457200" y="205979"/>
+            <a:ext cx="8229600" cy="857250"/>
+          </a:xfrm>
+        </p:spPr>
+        <p:txBody>
+          <a:bodyPr/>
+          <a:lstStyle/>
+          <a:p>
+            <a:pPr lvl="0" indent="0" marL="0">
+              <a:buNone/>
+            </a:pPr>
+            <a:r>
+              <a:rPr/>
+              <a:t>Step 2 as formulas: the likelihood</a:t>
+            </a:r>
+          </a:p>
+        </p:txBody>
+      </p:sp>
+      <p:pic>
+        <p:nvPicPr>
+          <p:cNvPr descr="eq_f8ebc3d590.png" id="0" name="Picture 1"/>
+          <p:cNvPicPr>
+            <a:picLocks noGrp="1" noChangeAspect="1"/>
+          </p:cNvPicPr>
+          <p:nvPr/>
+        </p:nvPicPr>
+        <p:blipFill>
+          <a:blip r:embed="rId3"/>
+          <a:stretch>
+            <a:fillRect/>
+          </a:stretch>
+        </p:blipFill>
+        <p:spPr bwMode="auto">
+          <a:xfrm>
+            <a:off x="457200" y="2484239"/>
+            <a:ext cx="8229600" cy="723900"/>
+          </a:xfrm>
+          <a:prstGeom prst="rect">
+            <a:avLst/>
+          </a:prstGeom>
+          <a:noFill/>
+          <a:ln w="9525">
+            <a:noFill/>
+            <a:headEnd/>
+            <a:tailEnd/>
+          </a:ln>
+        </p:spPr>
+      </p:pic>
+    </p:spTree>
+  </p:cSld>
+</p:sld>
+</file>
+
+<file path=ppt/slides/slide19.xml><?xml version="1.0" encoding="utf-8"?>
+<p:sld xmlns:a="http://schemas.openxmlformats.org/drawingml/2006/main" xmlns:r="http://schemas.openxmlformats.org/officeDocument/2006/relationships" xmlns:p="http://schemas.openxmlformats.org/presentationml/2006/main">
+  <p:cSld>
+    <p:spTree>
+      <p:nvGrpSpPr>
+        <p:cNvPr id="1" name=""/>
+        <p:cNvGrpSpPr/>
+        <p:nvPr/>
+      </p:nvGrpSpPr>
+      <p:grpSpPr>
+        <a:xfrm>
+          <a:off x="0" y="0"/>
+          <a:ext cx="0" cy="0"/>
+          <a:chOff x="0" y="0"/>
+          <a:chExt cx="0" cy="0"/>
+        </a:xfrm>
+      </p:grpSpPr>
+      <p:sp>
+        <p:nvSpPr>
+          <p:cNvPr id="2" name="Title 1"/>
+          <p:cNvSpPr>
+            <a:spLocks noGrp="1"/>
+          </p:cNvSpPr>
+          <p:nvPr>
+            <p:ph type="title"/>
+          </p:nvPr>
+        </p:nvSpPr>
+        <p:spPr>
+          <a:xfrm>
+            <a:off x="457200" y="205979"/>
+            <a:ext cx="8229600" cy="857250"/>
+          </a:xfrm>
+        </p:spPr>
+        <p:txBody>
+          <a:bodyPr/>
+          <a:lstStyle/>
+          <a:p>
+            <a:pPr lvl="0" indent="0" marL="0">
+              <a:buNone/>
+            </a:pPr>
+            <a:r>
+              <a:rPr/>
+              <a:t>Step 3: two settings, the likelier wins</a:t>
+            </a:r>
+          </a:p>
+        </p:txBody>
+      </p:sp>
+      <p:graphicFrame>
+        <p:nvGraphicFramePr>
+          <p:cNvPr id="6" name="Content Placeholder 5"/>
+          <p:cNvGraphicFramePr>
+            <a:graphicFrameLocks noGrp="1"/>
+          </p:cNvGraphicFramePr>
+          <p:nvPr>
+            <p:ph idx="1"/>
+          </p:nvPr>
+        </p:nvGraphicFramePr>
+        <p:xfrm>
+          <a:off x="457200" y="1166099"/>
+          <a:ext cx="8229600" cy="3390900"/>
+        </p:xfrm>
+        <a:graphic>
+          <a:graphicData uri="http://schemas.openxmlformats.org/drawingml/2006/table">
+            <a:tbl>
+              <a:tblPr firstRow="1" bandRow="1">
+                <a:tableStyleId>{5C22544A-7EE6-4342-B048-85BDC9FD1C3A}</a:tableStyleId>
+              </a:tblPr>
+              <a:tblGrid>
+                <a:gridCol w="1371600"/>
+                <a:gridCol w="1371600"/>
+                <a:gridCol w="1371600"/>
+                <a:gridCol w="1371600"/>
+                <a:gridCol w="1371600"/>
+                <a:gridCol w="1371600"/>
+              </a:tblGrid>
+              <a:tr h="0">
+                <a:tc>
+                  <a:txBody>
+                    <a:bodyPr/>
+                    <a:lstStyle/>
+                    <a:p>
+                      <a:pPr lvl="0" indent="0" marL="0">
+                        <a:buNone/>
+                      </a:pPr>
+                      <a:r>
+                        <a:rPr/>
+                        <a:t>Drive</a:t>
+                      </a:r>
+                    </a:p>
+                  </a:txBody>
+                  <a:tcPr/>
+                </a:tc>
+                <a:tc>
+                  <a:txBody>
+                    <a:bodyPr/>
+                    <a:lstStyle/>
+                    <a:p>
+                      <a:pPr lvl="0" indent="0" marL="0">
+                        <a:buNone/>
+                      </a:pPr>
+                      <a:r>
+                        <a:rPr/>
+                        <a:t>y</a:t>
+                      </a:r>
+                    </a:p>
+                  </a:txBody>
+                  <a:tcPr/>
+                </a:tc>
+                <a:tc>
+                  <a:txBody>
+                    <a:bodyPr/>
+                    <a:lstStyle/>
+                    <a:p>
+                      <a:pPr lvl="0" indent="0" marL="0">
+                        <a:buNone/>
+                      </a:pPr>
+                      <a:r>
+                        <a:rPr/>
+                        <a:t>Setting 1: p</a:t>
+                      </a:r>
+                    </a:p>
+                  </a:txBody>
+                  <a:tcPr/>
+                </a:tc>
+                <a:tc>
+                  <a:txBody>
+                    <a:bodyPr/>
+                    <a:lstStyle/>
+                    <a:p>
+                      <a:pPr lvl="0" indent="0" marL="0">
+                        <a:buNone/>
+                      </a:pPr>
+                      <a:r>
+                        <a:rPr/>
+                        <a:t>Setting 1: probability of what happened</a:t>
+                      </a:r>
+                    </a:p>
+                  </a:txBody>
+                  <a:tcPr/>
+                </a:tc>
+                <a:tc>
+                  <a:txBody>
+                    <a:bodyPr/>
+                    <a:lstStyle/>
+                    <a:p>
+                      <a:pPr lvl="0" indent="0" marL="0">
+                        <a:buNone/>
+                      </a:pPr>
+                      <a:r>
+                        <a:rPr/>
+                        <a:t>Setting 2: p</a:t>
+                      </a:r>
+                    </a:p>
+                  </a:txBody>
+                  <a:tcPr/>
+                </a:tc>
+                <a:tc>
+                  <a:txBody>
+                    <a:bodyPr/>
+                    <a:lstStyle/>
+                    <a:p>
+                      <a:pPr lvl="0" indent="0" marL="0">
+                        <a:buNone/>
+                      </a:pPr>
+                      <a:r>
+                        <a:rPr/>
+                        <a:t>Setting 2: probability of what happened</a:t>
+                      </a:r>
+                    </a:p>
+                  </a:txBody>
+                  <a:tcPr/>
+                </a:tc>
+              </a:tr>
+              <a:tr h="0">
+                <a:tc>
+                  <a:txBody>
+                    <a:bodyPr/>
+                    <a:lstStyle/>
+                    <a:p>
+                      <a:pPr lvl="0" indent="0" marL="0">
+                        <a:buNone/>
+                      </a:pPr>
+                      <a:r>
+                        <a:rPr/>
+                        <a:t>A</a:t>
+                      </a:r>
+                    </a:p>
+                  </a:txBody>
+                </a:tc>
+                <a:tc>
+                  <a:txBody>
+                    <a:bodyPr/>
+                    <a:lstStyle/>
+                    <a:p>
+                      <a:pPr lvl="0" indent="0" marL="0">
+                        <a:buNone/>
+                      </a:pPr>
+                      <a:r>
+                        <a:rPr/>
+                        <a:t>1</a:t>
+                      </a:r>
+                    </a:p>
+                  </a:txBody>
+                </a:tc>
+                <a:tc>
+                  <a:txBody>
+                    <a:bodyPr/>
+                    <a:lstStyle/>
+                    <a:p>
+                      <a:pPr lvl="0" indent="0" marL="0">
+                        <a:buNone/>
+                      </a:pPr>
+                      <a:r>
+                        <a:rPr/>
+                        <a:t>0.8</a:t>
+                      </a:r>
+                    </a:p>
+                  </a:txBody>
+                </a:tc>
+                <a:tc>
+                  <a:txBody>
+                    <a:bodyPr/>
+                    <a:lstStyle/>
+                    <a:p>
+                      <a:pPr lvl="0" indent="0" marL="0">
+                        <a:buNone/>
+                      </a:pPr>
+                      <a:r>
+                        <a:rPr/>
+                        <a:t>0.8</a:t>
+                      </a:r>
+                    </a:p>
+                  </a:txBody>
+                </a:tc>
+                <a:tc>
+                  <a:txBody>
+                    <a:bodyPr/>
+                    <a:lstStyle/>
+                    <a:p>
+                      <a:pPr lvl="0" indent="0" marL="0">
+                        <a:buNone/>
+                      </a:pPr>
+                      <a:r>
+                        <a:rPr/>
+                        <a:t>0.3</a:t>
+                      </a:r>
+                    </a:p>
+                  </a:txBody>
+                </a:tc>
+                <a:tc>
+                  <a:txBody>
+                    <a:bodyPr/>
+                    <a:lstStyle/>
+                    <a:p>
+                      <a:pPr lvl="0" indent="0" marL="0">
+                        <a:buNone/>
+                      </a:pPr>
+                      <a:r>
+                        <a:rPr/>
+                        <a:t>0.3</a:t>
+                      </a:r>
+                    </a:p>
+                  </a:txBody>
+                </a:tc>
+              </a:tr>
+              <a:tr h="0">
+                <a:tc>
+                  <a:txBody>
+                    <a:bodyPr/>
+                    <a:lstStyle/>
+                    <a:p>
+                      <a:pPr lvl="0" indent="0" marL="0">
+                        <a:buNone/>
+                      </a:pPr>
+                      <a:r>
+                        <a:rPr/>
+                        <a:t>B</a:t>
+                      </a:r>
+                    </a:p>
+                  </a:txBody>
+                </a:tc>
+                <a:tc>
+                  <a:txBody>
+                    <a:bodyPr/>
+                    <a:lstStyle/>
+                    <a:p>
+                      <a:pPr lvl="0" indent="0" marL="0">
+                        <a:buNone/>
+                      </a:pPr>
+                      <a:r>
+                        <a:rPr/>
+                        <a:t>0</a:t>
+                      </a:r>
+                    </a:p>
+                  </a:txBody>
+                </a:tc>
+                <a:tc>
+                  <a:txBody>
+                    <a:bodyPr/>
+                    <a:lstStyle/>
+                    <a:p>
+                      <a:pPr lvl="0" indent="0" marL="0">
+                        <a:buNone/>
+                      </a:pPr>
+                      <a:r>
+                        <a:rPr/>
+                        <a:t>0.1</a:t>
+                      </a:r>
+                    </a:p>
+                  </a:txBody>
+                </a:tc>
+                <a:tc>
+                  <a:txBody>
+                    <a:bodyPr/>
+                    <a:lstStyle/>
+                    <a:p>
+                      <a:pPr lvl="0" indent="0" marL="0">
+                        <a:buNone/>
+                      </a:pPr>
+                      <a:r>
+                        <a:rPr/>
+                        <a:t>0.9</a:t>
+                      </a:r>
+                    </a:p>
+                  </a:txBody>
+                </a:tc>
+                <a:tc>
+                  <a:txBody>
+                    <a:bodyPr/>
+                    <a:lstStyle/>
+                    <a:p>
+                      <a:pPr lvl="0" indent="0" marL="0">
+                        <a:buNone/>
+                      </a:pPr>
+                      <a:r>
+                        <a:rPr/>
+                        <a:t>0.6</a:t>
+                      </a:r>
+                    </a:p>
+                  </a:txBody>
+                </a:tc>
+                <a:tc>
+                  <a:txBody>
+                    <a:bodyPr/>
+                    <a:lstStyle/>
+                    <a:p>
+                      <a:pPr lvl="0" indent="0" marL="0">
+                        <a:buNone/>
+                      </a:pPr>
+                      <a:r>
+                        <a:rPr/>
+                        <a:t>0.4</a:t>
+                      </a:r>
+                    </a:p>
+                  </a:txBody>
+                </a:tc>
+              </a:tr>
+              <a:tr h="0">
+                <a:tc>
+                  <a:txBody>
+                    <a:bodyPr/>
+                    <a:lstStyle/>
+                    <a:p>
+                      <a:pPr lvl="0" indent="0" marL="0">
+                        <a:buNone/>
+                      </a:pPr>
+                      <a:r>
+                        <a:rPr/>
+                        <a:t>C</a:t>
+                      </a:r>
+                    </a:p>
+                  </a:txBody>
+                </a:tc>
+                <a:tc>
+                  <a:txBody>
+                    <a:bodyPr/>
+                    <a:lstStyle/>
+                    <a:p>
+                      <a:pPr lvl="0" indent="0" marL="0">
+                        <a:buNone/>
+                      </a:pPr>
+                      <a:r>
+                        <a:rPr/>
+                        <a:t>0</a:t>
+                      </a:r>
+                    </a:p>
+                  </a:txBody>
+                </a:tc>
+                <a:tc>
+                  <a:txBody>
+                    <a:bodyPr/>
+                    <a:lstStyle/>
+                    <a:p>
+                      <a:pPr lvl="0" indent="0" marL="0">
+                        <a:buNone/>
+                      </a:pPr>
+                      <a:r>
+                        <a:rPr/>
+                        <a:t>0.2</a:t>
+                      </a:r>
+                    </a:p>
+                  </a:txBody>
+                </a:tc>
+                <a:tc>
+                  <a:txBody>
+                    <a:bodyPr/>
+                    <a:lstStyle/>
+                    <a:p>
+                      <a:pPr lvl="0" indent="0" marL="0">
+                        <a:buNone/>
+                      </a:pPr>
+                      <a:r>
+                        <a:rPr/>
+                        <a:t>0.8</a:t>
+                      </a:r>
+                    </a:p>
+                  </a:txBody>
+                </a:tc>
+                <a:tc>
+                  <a:txBody>
+                    <a:bodyPr/>
+                    <a:lstStyle/>
+                    <a:p>
+                      <a:pPr lvl="0" indent="0" marL="0">
+                        <a:buNone/>
+                      </a:pPr>
+                      <a:r>
+                        <a:rPr/>
+                        <a:t>0.5</a:t>
+                      </a:r>
+                    </a:p>
+                  </a:txBody>
+                </a:tc>
+                <a:tc>
+                  <a:txBody>
+                    <a:bodyPr/>
+                    <a:lstStyle/>
+                    <a:p>
+                      <a:pPr lvl="0" indent="0" marL="0">
+                        <a:buNone/>
+                      </a:pPr>
+                      <a:r>
+                        <a:rPr/>
+                        <a:t>0.5</a:t>
+                      </a:r>
+                    </a:p>
+                  </a:txBody>
+                </a:tc>
+              </a:tr>
+              <a:tr h="0">
+                <a:tc>
+                  <a:txBody>
+                    <a:bodyPr/>
+                    <a:lstStyle/>
+                    <a:p>
+                      <a:pPr lvl="0" indent="0" marL="0">
+                        <a:buNone/>
+                      </a:pPr>
+                      <a:r>
+                        <a:rPr/>
+                        <a:t>Likelihood: the product</a:t>
+                      </a:r>
+                    </a:p>
+                  </a:txBody>
+                </a:tc>
+                <a:tc>
+                  <a:txBody>
+                    <a:bodyPr/>
+                    <a:lstStyle/>
+                    <a:p>
+                      <a:endParaRPr/>
+                    </a:p>
+                  </a:txBody>
+                </a:tc>
+                <a:tc>
+                  <a:txBody>
+                    <a:bodyPr/>
+                    <a:lstStyle/>
+                    <a:p>
+                      <a:endParaRPr/>
+                    </a:p>
+                  </a:txBody>
+                </a:tc>
+                <a:tc>
+                  <a:txBody>
+                    <a:bodyPr/>
+                    <a:lstStyle/>
+                    <a:p>
+                      <a:pPr lvl="0" indent="0" marL="0">
+                        <a:buNone/>
+                      </a:pPr>
+                      <a:r>
+                        <a:rPr b="1"/>
+                        <a:t>0.576</a:t>
+                      </a:r>
+                    </a:p>
+                  </a:txBody>
+                </a:tc>
+                <a:tc>
+                  <a:txBody>
+                    <a:bodyPr/>
+                    <a:lstStyle/>
+                    <a:p>
+                      <a:endParaRPr/>
+                    </a:p>
+                  </a:txBody>
+                </a:tc>
+                <a:tc>
+                  <a:txBody>
+                    <a:bodyPr/>
+                    <a:lstStyle/>
+                    <a:p>
+                      <a:pPr lvl="0" indent="0" marL="0">
+                        <a:buNone/>
+                      </a:pPr>
+                      <a:r>
+                        <a:rPr b="1"/>
+                        <a:t>0.060</a:t>
+                      </a:r>
+                    </a:p>
+                  </a:txBody>
+                </a:tc>
+              </a:tr>
+            </a:tbl>
+          </a:graphicData>
+        </a:graphic>
+      </p:graphicFrame>
+    </p:spTree>
+  </p:cSld>
+</p:sld>
+</file>
+
+<file path=ppt/slides/slide2.xml><?xml version="1.0" encoding="utf-8"?>
+<p:sld xmlns:a="http://schemas.openxmlformats.org/drawingml/2006/main" xmlns:r="http://schemas.openxmlformats.org/officeDocument/2006/relationships" xmlns:p="http://schemas.openxmlformats.org/presentationml/2006/main">
+  <p:cSld>
+    <p:spTree>
+      <p:nvGrpSpPr>
+        <p:cNvPr id="1" name=""/>
+        <p:cNvGrpSpPr/>
+        <p:nvPr/>
+      </p:nvGrpSpPr>
+      <p:grpSpPr>
+        <a:xfrm>
+          <a:off x="0" y="0"/>
+          <a:ext cx="0" cy="0"/>
+          <a:chOff x="0" y="0"/>
+          <a:chExt cx="0" cy="0"/>
+        </a:xfrm>
+      </p:grpSpPr>
+      <p:sp>
+        <p:nvSpPr>
+          <p:cNvPr id="2" name="Title 1"/>
+          <p:cNvSpPr>
+            <a:spLocks noGrp="1"/>
+          </p:cNvSpPr>
+          <p:nvPr>
+            <p:ph type="title"/>
+          </p:nvPr>
+        </p:nvSpPr>
+        <p:spPr>
+          <a:xfrm>
+            <a:off x="457200" y="205979"/>
+            <a:ext cx="8229600" cy="857250"/>
+          </a:xfrm>
+        </p:spPr>
+        <p:txBody>
+          <a:bodyPr/>
+          <a:lstStyle/>
+          <a:p>
+            <a:pPr lvl="0" indent="0" marL="0">
+              <a:buNone/>
+            </a:pPr>
+            <a:r>
+              <a:rPr/>
+              <a:t>Before we start</a:t>
+            </a:r>
+          </a:p>
+        </p:txBody>
+      </p:sp>
+      <p:sp>
+        <p:nvSpPr>
+          <p:cNvPr id="3" name="Content Placeholder 2"/>
+          <p:cNvSpPr>
+            <a:spLocks noGrp="1"/>
+          </p:cNvSpPr>
+          <p:nvPr>
+            <p:ph idx="1"/>
+          </p:nvPr>
+        </p:nvSpPr>
+        <p:spPr>
+          <a:xfrm>
+            <a:off x="457200" y="1200151"/>
+            <a:ext cx="8229600" cy="3394472"/>
+          </a:xfrm>
+        </p:spPr>
+        <p:txBody>
+          <a:bodyPr/>
+          <a:lstStyle/>
+          <a:p>
+            <a:pPr lvl="0"/>
+            <a:r>
+              <a:rPr/>
+              <a:t>Exercise 3, which we discuss now</a:t>
+            </a:r>
+          </a:p>
+          <a:p>
+            <a:pPr lvl="0"/>
+            <a:r>
+              <a:rPr/>
+              <a:t>Ridge, Lasso, and the choice of the penalty strength</a:t>
+            </a:r>
+          </a:p>
+        </p:txBody>
+      </p:sp>
+    </p:spTree>
+  </p:cSld>
+</p:sld>
+</file>
+
+<file path=ppt/slides/slide20.xml><?xml version="1.0" encoding="utf-8"?>
+<p:sld xmlns:a="http://schemas.openxmlformats.org/drawingml/2006/main" xmlns:r="http://schemas.openxmlformats.org/officeDocument/2006/relationships" xmlns:p="http://schemas.openxmlformats.org/presentationml/2006/main">
+  <p:cSld>
+    <p:spTree>
+      <p:nvGrpSpPr>
+        <p:cNvPr id="1" name=""/>
+        <p:cNvGrpSpPr/>
+        <p:nvPr/>
+      </p:nvGrpSpPr>
+      <p:grpSpPr>
+        <a:xfrm>
+          <a:off x="0" y="0"/>
+          <a:ext cx="0" cy="0"/>
+          <a:chOff x="0" y="0"/>
+          <a:chExt cx="0" cy="0"/>
+        </a:xfrm>
+      </p:grpSpPr>
+      <p:sp>
+        <p:nvSpPr>
+          <p:cNvPr id="2" name="Title 1"/>
+          <p:cNvSpPr>
+            <a:spLocks noGrp="1"/>
+          </p:cNvSpPr>
+          <p:nvPr>
+            <p:ph type="title"/>
+          </p:nvPr>
+        </p:nvSpPr>
+        <p:spPr>
+          <a:xfrm>
+            <a:off x="457200" y="205979"/>
+            <a:ext cx="8229600" cy="857250"/>
+          </a:xfrm>
+        </p:spPr>
+        <p:txBody>
+          <a:bodyPr/>
+          <a:lstStyle/>
+          <a:p>
+            <a:pPr lvl="0" indent="0" marL="0">
+              <a:buNone/>
+            </a:pPr>
+            <a:r>
+              <a:rPr/>
+              <a:t>Step 4: minus the log, a cost</a:t>
+            </a:r>
+          </a:p>
+        </p:txBody>
+      </p:sp>
+      <p:graphicFrame>
+        <p:nvGraphicFramePr>
+          <p:cNvPr id="6" name="Content Placeholder 5"/>
+          <p:cNvGraphicFramePr>
+            <a:graphicFrameLocks noGrp="1"/>
+          </p:cNvGraphicFramePr>
+          <p:nvPr>
+            <p:ph idx="1"/>
+          </p:nvPr>
+        </p:nvGraphicFramePr>
+        <p:xfrm>
+          <a:off x="457200" y="1166099"/>
+          <a:ext cx="8229600" cy="3390900"/>
+        </p:xfrm>
+        <a:graphic>
+          <a:graphicData uri="http://schemas.openxmlformats.org/drawingml/2006/table">
+            <a:tbl>
+              <a:tblPr firstRow="1" bandRow="1">
+                <a:tableStyleId>{5C22544A-7EE6-4342-B048-85BDC9FD1C3A}</a:tableStyleId>
+              </a:tblPr>
+              <a:tblGrid>
+                <a:gridCol w="2057400"/>
+                <a:gridCol w="2057400"/>
+                <a:gridCol w="2057400"/>
+                <a:gridCol w="2057400"/>
+              </a:tblGrid>
+              <a:tr h="0">
+                <a:tc>
+                  <a:txBody>
+                    <a:bodyPr/>
+                    <a:lstStyle/>
+                    <a:p>
+                      <a:pPr lvl="0" indent="0" marL="0">
+                        <a:buNone/>
+                      </a:pPr>
+                      <a:r>
+                        <a:rPr/>
+                        <a:t>Drive</a:t>
+                      </a:r>
+                    </a:p>
+                  </a:txBody>
+                  <a:tcPr/>
+                </a:tc>
+                <a:tc>
+                  <a:txBody>
+                    <a:bodyPr/>
+                    <a:lstStyle/>
+                    <a:p>
+                      <a:pPr lvl="0" indent="0" marL="0">
+                        <a:buNone/>
+                      </a:pPr>
+                      <a:r>
+                        <a:rPr/>
+                        <a:t>y</a:t>
+                      </a:r>
+                    </a:p>
+                  </a:txBody>
+                  <a:tcPr/>
+                </a:tc>
+                <a:tc>
+                  <a:txBody>
+                    <a:bodyPr/>
+                    <a:lstStyle/>
+                    <a:p>
+                      <a:pPr lvl="0" indent="0" marL="0">
+                        <a:buNone/>
+                      </a:pPr>
+                      <a:r>
+                        <a:rPr/>
+                        <a:t>Setting 1: −log of probability of what happened</a:t>
+                      </a:r>
+                    </a:p>
+                  </a:txBody>
+                  <a:tcPr/>
+                </a:tc>
+                <a:tc>
+                  <a:txBody>
+                    <a:bodyPr/>
+                    <a:lstStyle/>
+                    <a:p>
+                      <a:pPr lvl="0" indent="0" marL="0">
+                        <a:buNone/>
+                      </a:pPr>
+                      <a:r>
+                        <a:rPr/>
+                        <a:t>Setting 2: −log of probability of what happened</a:t>
+                      </a:r>
+                    </a:p>
+                  </a:txBody>
+                  <a:tcPr/>
+                </a:tc>
+              </a:tr>
+              <a:tr h="0">
+                <a:tc>
+                  <a:txBody>
+                    <a:bodyPr/>
+                    <a:lstStyle/>
+                    <a:p>
+                      <a:pPr lvl="0" indent="0" marL="0">
+                        <a:buNone/>
+                      </a:pPr>
+                      <a:r>
+                        <a:rPr/>
+                        <a:t>A</a:t>
+                      </a:r>
+                    </a:p>
+                  </a:txBody>
+                </a:tc>
+                <a:tc>
+                  <a:txBody>
+                    <a:bodyPr/>
+                    <a:lstStyle/>
+                    <a:p>
+                      <a:pPr lvl="0" indent="0" marL="0">
+                        <a:buNone/>
+                      </a:pPr>
+                      <a:r>
+                        <a:rPr/>
+                        <a:t>1</a:t>
+                      </a:r>
+                    </a:p>
+                  </a:txBody>
+                </a:tc>
+                <a:tc>
+                  <a:txBody>
+                    <a:bodyPr/>
+                    <a:lstStyle/>
+                    <a:p>
+                      <a:pPr lvl="0" indent="0" marL="0">
+                        <a:buNone/>
+                      </a:pPr>
+                      <a:r>
+                        <a:rPr/>
+                        <a:t>−log 0.8 = 0.22</a:t>
+                      </a:r>
+                    </a:p>
+                  </a:txBody>
+                </a:tc>
+                <a:tc>
+                  <a:txBody>
+                    <a:bodyPr/>
+                    <a:lstStyle/>
+                    <a:p>
+                      <a:pPr lvl="0" indent="0" marL="0">
+                        <a:buNone/>
+                      </a:pPr>
+                      <a:r>
+                        <a:rPr/>
+                        <a:t>−log 0.3 = 1.20</a:t>
+                      </a:r>
+                    </a:p>
+                  </a:txBody>
+                </a:tc>
+              </a:tr>
+              <a:tr h="0">
+                <a:tc>
+                  <a:txBody>
+                    <a:bodyPr/>
+                    <a:lstStyle/>
+                    <a:p>
+                      <a:pPr lvl="0" indent="0" marL="0">
+                        <a:buNone/>
+                      </a:pPr>
+                      <a:r>
+                        <a:rPr/>
+                        <a:t>B</a:t>
+                      </a:r>
+                    </a:p>
+                  </a:txBody>
+                </a:tc>
+                <a:tc>
+                  <a:txBody>
+                    <a:bodyPr/>
+                    <a:lstStyle/>
+                    <a:p>
+                      <a:pPr lvl="0" indent="0" marL="0">
+                        <a:buNone/>
+                      </a:pPr>
+                      <a:r>
+                        <a:rPr/>
+                        <a:t>0</a:t>
+                      </a:r>
+                    </a:p>
+                  </a:txBody>
+                </a:tc>
+                <a:tc>
+                  <a:txBody>
+                    <a:bodyPr/>
+                    <a:lstStyle/>
+                    <a:p>
+                      <a:pPr lvl="0" indent="0" marL="0">
+                        <a:buNone/>
+                      </a:pPr>
+                      <a:r>
+                        <a:rPr/>
+                        <a:t>−log 0.9 = 0.11</a:t>
+                      </a:r>
+                    </a:p>
+                  </a:txBody>
+                </a:tc>
+                <a:tc>
+                  <a:txBody>
+                    <a:bodyPr/>
+                    <a:lstStyle/>
+                    <a:p>
+                      <a:pPr lvl="0" indent="0" marL="0">
+                        <a:buNone/>
+                      </a:pPr>
+                      <a:r>
+                        <a:rPr/>
+                        <a:t>−log 0.4 = 0.92</a:t>
+                      </a:r>
+                    </a:p>
+                  </a:txBody>
+                </a:tc>
+              </a:tr>
+              <a:tr h="0">
+                <a:tc>
+                  <a:txBody>
+                    <a:bodyPr/>
+                    <a:lstStyle/>
+                    <a:p>
+                      <a:pPr lvl="0" indent="0" marL="0">
+                        <a:buNone/>
+                      </a:pPr>
+                      <a:r>
+                        <a:rPr/>
+                        <a:t>C</a:t>
+                      </a:r>
+                    </a:p>
+                  </a:txBody>
+                </a:tc>
+                <a:tc>
+                  <a:txBody>
+                    <a:bodyPr/>
+                    <a:lstStyle/>
+                    <a:p>
+                      <a:pPr lvl="0" indent="0" marL="0">
+                        <a:buNone/>
+                      </a:pPr>
+                      <a:r>
+                        <a:rPr/>
+                        <a:t>0</a:t>
+                      </a:r>
+                    </a:p>
+                  </a:txBody>
+                </a:tc>
+                <a:tc>
+                  <a:txBody>
+                    <a:bodyPr/>
+                    <a:lstStyle/>
+                    <a:p>
+                      <a:pPr lvl="0" indent="0" marL="0">
+                        <a:buNone/>
+                      </a:pPr>
+                      <a:r>
+                        <a:rPr/>
+                        <a:t>−log 0.8 = 0.22</a:t>
+                      </a:r>
+                    </a:p>
+                  </a:txBody>
+                </a:tc>
+                <a:tc>
+                  <a:txBody>
+                    <a:bodyPr/>
+                    <a:lstStyle/>
+                    <a:p>
+                      <a:pPr lvl="0" indent="0" marL="0">
+                        <a:buNone/>
+                      </a:pPr>
+                      <a:r>
+                        <a:rPr/>
+                        <a:t>−log 0.5 = 0.69</a:t>
+                      </a:r>
+                    </a:p>
+                  </a:txBody>
+                </a:tc>
+              </a:tr>
+              <a:tr h="0">
+                <a:tc>
+                  <a:txBody>
+                    <a:bodyPr/>
+                    <a:lstStyle/>
+                    <a:p>
+                      <a:pPr lvl="0" indent="0" marL="0">
+                        <a:buNone/>
+                      </a:pPr>
+                      <a:r>
+                        <a:rPr/>
+                        <a:t>Sum = −log of the likelihood</a:t>
+                      </a:r>
+                    </a:p>
+                  </a:txBody>
+                </a:tc>
+                <a:tc>
+                  <a:txBody>
+                    <a:bodyPr/>
+                    <a:lstStyle/>
+                    <a:p>
+                      <a:endParaRPr/>
+                    </a:p>
+                  </a:txBody>
+                </a:tc>
+                <a:tc>
+                  <a:txBody>
+                    <a:bodyPr/>
+                    <a:lstStyle/>
+                    <a:p>
+                      <a:pPr lvl="0" indent="0" marL="0">
+                        <a:buNone/>
+                      </a:pPr>
+                      <a:r>
+                        <a:rPr b="1"/>
+                        <a:t>0.55</a:t>
+                      </a:r>
+                    </a:p>
+                  </a:txBody>
+                </a:tc>
+                <a:tc>
+                  <a:txBody>
+                    <a:bodyPr/>
+                    <a:lstStyle/>
+                    <a:p>
+                      <a:pPr lvl="0" indent="0" marL="0">
+                        <a:buNone/>
+                      </a:pPr>
+                      <a:r>
+                        <a:rPr b="1"/>
+                        <a:t>2.81</a:t>
+                      </a:r>
+                    </a:p>
+                  </a:txBody>
+                </a:tc>
+              </a:tr>
+            </a:tbl>
+          </a:graphicData>
+        </a:graphic>
+      </p:graphicFrame>
+    </p:spTree>
+  </p:cSld>
+</p:sld>
+</file>
+
+<file path=ppt/slides/slide21.xml><?xml version="1.0" encoding="utf-8"?>
 <p:sld xmlns:a="http://schemas.openxmlformats.org/drawingml/2006/main" xmlns:r="http://schemas.openxmlformats.org/officeDocument/2006/relationships" xmlns:p="http://schemas.openxmlformats.org/presentationml/2006/main">
   <p:cSld>
     <p:spTree>
@@ -11271,7 +13172,7 @@
 </p:sld>
 </file>
 
-<file path=ppt/slides/slide18.xml><?xml version="1.0" encoding="utf-8"?>
+<file path=ppt/slides/slide22.xml><?xml version="1.0" encoding="utf-8"?>
 <p:sld xmlns:a="http://schemas.openxmlformats.org/drawingml/2006/main" xmlns:r="http://schemas.openxmlformats.org/officeDocument/2006/relationships" xmlns:p="http://schemas.openxmlformats.org/presentationml/2006/main">
   <p:cSld>
     <p:spTree>
@@ -11353,7 +13254,7 @@
 </p:sld>
 </file>
 
-<file path=ppt/slides/slide19.xml><?xml version="1.0" encoding="utf-8"?>
+<file path=ppt/slides/slide23.xml><?xml version="1.0" encoding="utf-8"?>
 <p:sld xmlns:a="http://schemas.openxmlformats.org/drawingml/2006/main" xmlns:r="http://schemas.openxmlformats.org/officeDocument/2006/relationships" xmlns:p="http://schemas.openxmlformats.org/presentationml/2006/main">
   <p:cSld>
     <p:spTree>
@@ -11435,7 +13336,7 @@
 </p:sld>
 </file>
 
-<file path=ppt/slides/slide2.xml><?xml version="1.0" encoding="utf-8"?>
+<file path=ppt/slides/slide24.xml><?xml version="1.0" encoding="utf-8"?>
 <p:sld xmlns:a="http://schemas.openxmlformats.org/drawingml/2006/main" xmlns:r="http://schemas.openxmlformats.org/officeDocument/2006/relationships" xmlns:p="http://schemas.openxmlformats.org/presentationml/2006/main">
   <p:cSld>
     <p:spTree>
@@ -11477,7 +13378,7 @@
             </a:pPr>
             <a:r>
               <a:rPr/>
-              <a:t>Before we start</a:t>
+              <a:t>And it is convex, which squared error is not</a:t>
             </a:r>
           </a:p>
         </p:txBody>
@@ -11505,14 +13406,22 @@
             <a:pPr lvl="0"/>
             <a:r>
               <a:rPr/>
-              <a:t>Exercise 3, which we discuss now</a:t>
+              <a:t>Log loss is </a:t>
+            </a:r>
+            <a:r>
+              <a:rPr b="1"/>
+              <a:t>convex</a:t>
+            </a:r>
+            <a:r>
+              <a:rPr/>
+              <a:t> in the weights, so any local minimum is global</a:t>
             </a:r>
           </a:p>
           <a:p>
             <a:pPr lvl="0"/>
             <a:r>
               <a:rPr/>
-              <a:t>Ridge, Lasso, and the choice of the penalty strength</a:t>
+              <a:t>Squared error through a sigmoid is not</a:t>
             </a:r>
           </a:p>
         </p:txBody>
@@ -11522,7 +13431,7 @@
 </p:sld>
 </file>
 
-<file path=ppt/slides/slide20.xml><?xml version="1.0" encoding="utf-8"?>
+<file path=ppt/slides/slide25.xml><?xml version="1.0" encoding="utf-8"?>
 <p:sld xmlns:a="http://schemas.openxmlformats.org/drawingml/2006/main" xmlns:r="http://schemas.openxmlformats.org/officeDocument/2006/relationships" xmlns:p="http://schemas.openxmlformats.org/presentationml/2006/main">
   <p:cSld>
     <p:spTree>
@@ -11564,101 +13473,6 @@
             </a:pPr>
             <a:r>
               <a:rPr/>
-              <a:t>And it is convex, which squared error is not</a:t>
-            </a:r>
-          </a:p>
-        </p:txBody>
-      </p:sp>
-      <p:sp>
-        <p:nvSpPr>
-          <p:cNvPr id="3" name="Content Placeholder 2"/>
-          <p:cNvSpPr>
-            <a:spLocks noGrp="1"/>
-          </p:cNvSpPr>
-          <p:nvPr>
-            <p:ph idx="1"/>
-          </p:nvPr>
-        </p:nvSpPr>
-        <p:spPr>
-          <a:xfrm>
-            <a:off x="457200" y="1200151"/>
-            <a:ext cx="8229600" cy="3394472"/>
-          </a:xfrm>
-        </p:spPr>
-        <p:txBody>
-          <a:bodyPr/>
-          <a:lstStyle/>
-          <a:p>
-            <a:pPr lvl="0"/>
-            <a:r>
-              <a:rPr/>
-              <a:t>Log loss is </a:t>
-            </a:r>
-            <a:r>
-              <a:rPr b="1"/>
-              <a:t>convex</a:t>
-            </a:r>
-            <a:r>
-              <a:rPr/>
-              <a:t> in the weights, so any local minimum is global</a:t>
-            </a:r>
-          </a:p>
-          <a:p>
-            <a:pPr lvl="0"/>
-            <a:r>
-              <a:rPr/>
-              <a:t>Squared error through a sigmoid is not</a:t>
-            </a:r>
-          </a:p>
-        </p:txBody>
-      </p:sp>
-    </p:spTree>
-  </p:cSld>
-</p:sld>
-</file>
-
-<file path=ppt/slides/slide21.xml><?xml version="1.0" encoding="utf-8"?>
-<p:sld xmlns:a="http://schemas.openxmlformats.org/drawingml/2006/main" xmlns:r="http://schemas.openxmlformats.org/officeDocument/2006/relationships" xmlns:p="http://schemas.openxmlformats.org/presentationml/2006/main">
-  <p:cSld>
-    <p:spTree>
-      <p:nvGrpSpPr>
-        <p:cNvPr id="1" name=""/>
-        <p:cNvGrpSpPr/>
-        <p:nvPr/>
-      </p:nvGrpSpPr>
-      <p:grpSpPr>
-        <a:xfrm>
-          <a:off x="0" y="0"/>
-          <a:ext cx="0" cy="0"/>
-          <a:chOff x="0" y="0"/>
-          <a:chExt cx="0" cy="0"/>
-        </a:xfrm>
-      </p:grpSpPr>
-      <p:sp>
-        <p:nvSpPr>
-          <p:cNvPr id="2" name="Title 1"/>
-          <p:cNvSpPr>
-            <a:spLocks noGrp="1"/>
-          </p:cNvSpPr>
-          <p:nvPr>
-            <p:ph type="title"/>
-          </p:nvPr>
-        </p:nvSpPr>
-        <p:spPr>
-          <a:xfrm>
-            <a:off x="457200" y="205979"/>
-            <a:ext cx="8229600" cy="857250"/>
-          </a:xfrm>
-        </p:spPr>
-        <p:txBody>
-          <a:bodyPr/>
-          <a:lstStyle/>
-          <a:p>
-            <a:pPr lvl="0" indent="0" marL="0">
-              <a:buNone/>
-            </a:pPr>
-            <a:r>
-              <a:rPr/>
               <a:t>Notebook 1, live</a:t>
             </a:r>
           </a:p>
@@ -11771,7 +13585,7 @@
                       </a:pPr>
                       <a:r>
                         <a:rPr/>
-                        <a:t>odds, and why not squared error, 8-20</a:t>
+                        <a:t>odds, and why not squared error, 8-24</a:t>
                       </a:r>
                     </a:p>
                   </a:txBody>
@@ -11803,7 +13617,7 @@
                       </a:pPr>
                       <a:r>
                         <a:rPr/>
-                        <a:t>gradient descent, 18</a:t>
+                        <a:t>gradient descent, 22</a:t>
                       </a:r>
                     </a:p>
                   </a:txBody>
@@ -11851,7 +13665,7 @@
                       </a:pPr>
                       <a:r>
                         <a:rPr/>
-                        <a:t>the decision boundary, 22</a:t>
+                        <a:t>the decision boundary, 26</a:t>
                       </a:r>
                     </a:p>
                   </a:txBody>
@@ -11945,7 +13759,7 @@
 </p:sld>
 </file>
 
-<file path=ppt/slides/slide22.xml><?xml version="1.0" encoding="utf-8"?>
+<file path=ppt/slides/slide26.xml><?xml version="1.0" encoding="utf-8"?>
 <p:sld xmlns:a="http://schemas.openxmlformats.org/drawingml/2006/main" xmlns:r="http://schemas.openxmlformats.org/officeDocument/2006/relationships" xmlns:p="http://schemas.openxmlformats.org/presentationml/2006/main">
   <p:cSld>
     <p:spTree>
@@ -12027,7 +13841,7 @@
 </p:sld>
 </file>
 
-<file path=ppt/slides/slide23.xml><?xml version="1.0" encoding="utf-8"?>
+<file path=ppt/slides/slide27.xml><?xml version="1.0" encoding="utf-8"?>
 <p:sld xmlns:a="http://schemas.openxmlformats.org/drawingml/2006/main" xmlns:r="http://schemas.openxmlformats.org/officeDocument/2006/relationships" xmlns:p="http://schemas.openxmlformats.org/presentationml/2006/main">
   <p:cSld>
     <p:spTree>
@@ -12107,7 +13921,7 @@
 </p:sld>
 </file>
 
-<file path=ppt/slides/slide24.xml><?xml version="1.0" encoding="utf-8"?>
+<file path=ppt/slides/slide28.xml><?xml version="1.0" encoding="utf-8"?>
 <p:sld xmlns:a="http://schemas.openxmlformats.org/drawingml/2006/main" xmlns:r="http://schemas.openxmlformats.org/officeDocument/2006/relationships" xmlns:p="http://schemas.openxmlformats.org/presentationml/2006/main">
   <p:cSld>
     <p:spTree>
@@ -12332,7 +14146,7 @@
 </p:sld>
 </file>
 
-<file path=ppt/slides/slide25.xml><?xml version="1.0" encoding="utf-8"?>
+<file path=ppt/slides/slide29.xml><?xml version="1.0" encoding="utf-8"?>
 <p:sld xmlns:a="http://schemas.openxmlformats.org/drawingml/2006/main" xmlns:r="http://schemas.openxmlformats.org/officeDocument/2006/relationships" xmlns:p="http://schemas.openxmlformats.org/presentationml/2006/main">
   <p:cSld>
     <p:spTree>
@@ -12442,7 +14256,115 @@
 </p:sld>
 </file>
 
-<file path=ppt/slides/slide26.xml><?xml version="1.0" encoding="utf-8"?>
+<file path=ppt/slides/slide3.xml><?xml version="1.0" encoding="utf-8"?>
+<p:sld xmlns:a="http://schemas.openxmlformats.org/drawingml/2006/main" xmlns:r="http://schemas.openxmlformats.org/officeDocument/2006/relationships" xmlns:p="http://schemas.openxmlformats.org/presentationml/2006/main">
+  <p:cSld>
+    <p:spTree>
+      <p:nvGrpSpPr>
+        <p:cNvPr id="1" name=""/>
+        <p:cNvGrpSpPr/>
+        <p:nvPr/>
+      </p:nvGrpSpPr>
+      <p:grpSpPr>
+        <a:xfrm>
+          <a:off x="0" y="0"/>
+          <a:ext cx="0" cy="0"/>
+          <a:chOff x="0" y="0"/>
+          <a:chExt cx="0" cy="0"/>
+        </a:xfrm>
+      </p:grpSpPr>
+      <p:sp>
+        <p:nvSpPr>
+          <p:cNvPr id="2" name="Title 1"/>
+          <p:cNvSpPr>
+            <a:spLocks noGrp="1"/>
+          </p:cNvSpPr>
+          <p:nvPr>
+            <p:ph type="title"/>
+          </p:nvPr>
+        </p:nvSpPr>
+        <p:spPr>
+          <a:xfrm>
+            <a:off x="457200" y="205979"/>
+            <a:ext cx="8229600" cy="857250"/>
+          </a:xfrm>
+        </p:spPr>
+        <p:txBody>
+          <a:bodyPr/>
+          <a:lstStyle/>
+          <a:p>
+            <a:pPr lvl="0" indent="0" marL="0">
+              <a:buNone/>
+            </a:pPr>
+            <a:r>
+              <a:rPr/>
+              <a:t>Today: from a number to a decision</a:t>
+            </a:r>
+          </a:p>
+        </p:txBody>
+      </p:sp>
+      <p:sp>
+        <p:nvSpPr>
+          <p:cNvPr id="3" name="Content Placeholder 2"/>
+          <p:cNvSpPr>
+            <a:spLocks noGrp="1"/>
+          </p:cNvSpPr>
+          <p:nvPr>
+            <p:ph idx="1"/>
+          </p:nvPr>
+        </p:nvSpPr>
+        <p:spPr>
+          <a:xfrm>
+            <a:off x="457200" y="1200151"/>
+            <a:ext cx="8229600" cy="3394472"/>
+          </a:xfrm>
+        </p:spPr>
+        <p:txBody>
+          <a:bodyPr/>
+          <a:lstStyle/>
+          <a:p>
+            <a:pPr lvl="0"/>
+            <a:r>
+              <a:rPr/>
+              <a:t>Logistic regression: the model and why the cost had to change</a:t>
+            </a:r>
+          </a:p>
+          <a:p>
+            <a:pPr lvl="0"/>
+            <a:r>
+              <a:rPr/>
+              <a:t>The confusion matrix, and why accuracy lies</a:t>
+            </a:r>
+          </a:p>
+          <a:p>
+            <a:pPr lvl="0"/>
+            <a:r>
+              <a:rPr/>
+              <a:t>Precision, recall, F1, and the threshold nobody chose</a:t>
+            </a:r>
+          </a:p>
+          <a:p>
+            <a:pPr lvl="0"/>
+            <a:r>
+              <a:rPr/>
+              <a:t>Receiver operating characteristic (ROC) curves, and where they mislead</a:t>
+            </a:r>
+          </a:p>
+          <a:p>
+            <a:pPr lvl="0"/>
+            <a:r>
+              <a:rPr/>
+              <a:t>Choosing a threshold from money</a:t>
+            </a:r>
+          </a:p>
+        </p:txBody>
+      </p:sp>
+    </p:spTree>
+  </p:cSld>
+</p:sld>
+</file>
+
+<file path=ppt/slides/slide30.xml><?xml version="1.0" encoding="utf-8"?>
 <p:sld xmlns:a="http://schemas.openxmlformats.org/drawingml/2006/main" xmlns:r="http://schemas.openxmlformats.org/officeDocument/2006/relationships" xmlns:p="http://schemas.openxmlformats.org/presentationml/2006/main">
   <p:cSld>
     <p:spTree>
@@ -12524,7 +14446,7 @@
 </p:sld>
 </file>
 
-<file path=ppt/slides/slide27.xml><?xml version="1.0" encoding="utf-8"?>
+<file path=ppt/slides/slide31.xml><?xml version="1.0" encoding="utf-8"?>
 <p:sld xmlns:a="http://schemas.openxmlformats.org/drawingml/2006/main" xmlns:r="http://schemas.openxmlformats.org/officeDocument/2006/relationships" xmlns:p="http://schemas.openxmlformats.org/presentationml/2006/main">
   <p:cSld>
     <p:spTree>
@@ -12619,7 +14541,7 @@
 </p:sld>
 </file>
 
-<file path=ppt/slides/slide28.xml><?xml version="1.0" encoding="utf-8"?>
+<file path=ppt/slides/slide32.xml><?xml version="1.0" encoding="utf-8"?>
 <p:sld xmlns:a="http://schemas.openxmlformats.org/drawingml/2006/main" xmlns:r="http://schemas.openxmlformats.org/officeDocument/2006/relationships" xmlns:p="http://schemas.openxmlformats.org/presentationml/2006/main">
   <p:cSld>
     <p:spTree>
@@ -12701,7 +14623,7 @@
 </p:sld>
 </file>
 
-<file path=ppt/slides/slide29.xml><?xml version="1.0" encoding="utf-8"?>
+<file path=ppt/slides/slide33.xml><?xml version="1.0" encoding="utf-8"?>
 <p:sld xmlns:a="http://schemas.openxmlformats.org/drawingml/2006/main" xmlns:r="http://schemas.openxmlformats.org/officeDocument/2006/relationships" xmlns:p="http://schemas.openxmlformats.org/presentationml/2006/main">
   <p:cSld>
     <p:spTree>
@@ -12841,115 +14763,7 @@
 </p:sld>
 </file>
 
-<file path=ppt/slides/slide3.xml><?xml version="1.0" encoding="utf-8"?>
-<p:sld xmlns:a="http://schemas.openxmlformats.org/drawingml/2006/main" xmlns:r="http://schemas.openxmlformats.org/officeDocument/2006/relationships" xmlns:p="http://schemas.openxmlformats.org/presentationml/2006/main">
-  <p:cSld>
-    <p:spTree>
-      <p:nvGrpSpPr>
-        <p:cNvPr id="1" name=""/>
-        <p:cNvGrpSpPr/>
-        <p:nvPr/>
-      </p:nvGrpSpPr>
-      <p:grpSpPr>
-        <a:xfrm>
-          <a:off x="0" y="0"/>
-          <a:ext cx="0" cy="0"/>
-          <a:chOff x="0" y="0"/>
-          <a:chExt cx="0" cy="0"/>
-        </a:xfrm>
-      </p:grpSpPr>
-      <p:sp>
-        <p:nvSpPr>
-          <p:cNvPr id="2" name="Title 1"/>
-          <p:cNvSpPr>
-            <a:spLocks noGrp="1"/>
-          </p:cNvSpPr>
-          <p:nvPr>
-            <p:ph type="title"/>
-          </p:nvPr>
-        </p:nvSpPr>
-        <p:spPr>
-          <a:xfrm>
-            <a:off x="457200" y="205979"/>
-            <a:ext cx="8229600" cy="857250"/>
-          </a:xfrm>
-        </p:spPr>
-        <p:txBody>
-          <a:bodyPr/>
-          <a:lstStyle/>
-          <a:p>
-            <a:pPr lvl="0" indent="0" marL="0">
-              <a:buNone/>
-            </a:pPr>
-            <a:r>
-              <a:rPr/>
-              <a:t>Today: from a number to a decision</a:t>
-            </a:r>
-          </a:p>
-        </p:txBody>
-      </p:sp>
-      <p:sp>
-        <p:nvSpPr>
-          <p:cNvPr id="3" name="Content Placeholder 2"/>
-          <p:cNvSpPr>
-            <a:spLocks noGrp="1"/>
-          </p:cNvSpPr>
-          <p:nvPr>
-            <p:ph idx="1"/>
-          </p:nvPr>
-        </p:nvSpPr>
-        <p:spPr>
-          <a:xfrm>
-            <a:off x="457200" y="1200151"/>
-            <a:ext cx="8229600" cy="3394472"/>
-          </a:xfrm>
-        </p:spPr>
-        <p:txBody>
-          <a:bodyPr/>
-          <a:lstStyle/>
-          <a:p>
-            <a:pPr lvl="0"/>
-            <a:r>
-              <a:rPr/>
-              <a:t>Logistic regression: the model and why the cost had to change</a:t>
-            </a:r>
-          </a:p>
-          <a:p>
-            <a:pPr lvl="0"/>
-            <a:r>
-              <a:rPr/>
-              <a:t>The confusion matrix, and why accuracy lies</a:t>
-            </a:r>
-          </a:p>
-          <a:p>
-            <a:pPr lvl="0"/>
-            <a:r>
-              <a:rPr/>
-              <a:t>Precision, recall, F1, and the threshold nobody chose</a:t>
-            </a:r>
-          </a:p>
-          <a:p>
-            <a:pPr lvl="0"/>
-            <a:r>
-              <a:rPr/>
-              <a:t>Receiver operating characteristic (ROC) curves, and where they mislead</a:t>
-            </a:r>
-          </a:p>
-          <a:p>
-            <a:pPr lvl="0"/>
-            <a:r>
-              <a:rPr/>
-              <a:t>Choosing a threshold from money</a:t>
-            </a:r>
-          </a:p>
-        </p:txBody>
-      </p:sp>
-    </p:spTree>
-  </p:cSld>
-</p:sld>
-</file>
-
-<file path=ppt/slides/slide30.xml><?xml version="1.0" encoding="utf-8"?>
+<file path=ppt/slides/slide34.xml><?xml version="1.0" encoding="utf-8"?>
 <p:sld xmlns:a="http://schemas.openxmlformats.org/drawingml/2006/main" xmlns:r="http://schemas.openxmlformats.org/officeDocument/2006/relationships" xmlns:p="http://schemas.openxmlformats.org/presentationml/2006/main">
   <p:cSld>
     <p:spTree>
@@ -13191,7 +15005,7 @@
 </p:sld>
 </file>
 
-<file path=ppt/slides/slide31.xml><?xml version="1.0" encoding="utf-8"?>
+<file path=ppt/slides/slide35.xml><?xml version="1.0" encoding="utf-8"?>
 <p:sld xmlns:a="http://schemas.openxmlformats.org/drawingml/2006/main" xmlns:r="http://schemas.openxmlformats.org/officeDocument/2006/relationships" xmlns:p="http://schemas.openxmlformats.org/presentationml/2006/main">
   <p:cSld>
     <p:spTree>
@@ -13323,7 +15137,7 @@
 </p:sld>
 </file>
 
-<file path=ppt/slides/slide32.xml><?xml version="1.0" encoding="utf-8"?>
+<file path=ppt/slides/slide36.xml><?xml version="1.0" encoding="utf-8"?>
 <p:sld xmlns:a="http://schemas.openxmlformats.org/drawingml/2006/main" xmlns:r="http://schemas.openxmlformats.org/officeDocument/2006/relationships" xmlns:p="http://schemas.openxmlformats.org/presentationml/2006/main">
   <p:cSld>
     <p:spTree>
@@ -13439,7 +15253,7 @@
                       </a:pPr>
                       <a:r>
                         <a:rPr/>
-                        <a:t>the number that should worry you, 24</a:t>
+                        <a:t>the number that should worry you, 28</a:t>
                       </a:r>
                     </a:p>
                   </a:txBody>
@@ -13477,7 +15291,7 @@
                       </a:pPr>
                       <a:r>
                         <a:rPr/>
-                        <a:t>the confusion matrix, 26</a:t>
+                        <a:t>the confusion matrix, 30</a:t>
                       </a:r>
                     </a:p>
                   </a:txBody>
@@ -13529,7 +15343,7 @@
                       </a:pPr>
                       <a:r>
                         <a:rPr/>
-                        <a:t>precision and recall, 28-31</a:t>
+                        <a:t>precision and recall, 32-35</a:t>
                       </a:r>
                     </a:p>
                   </a:txBody>
@@ -13593,7 +15407,7 @@
                       </a:pPr>
                       <a:r>
                         <a:rPr/>
-                        <a:t>the threshold sweep, 33-34</a:t>
+                        <a:t>the threshold sweep, 37-38</a:t>
                       </a:r>
                     </a:p>
                   </a:txBody>
@@ -13631,7 +15445,7 @@
                       </a:pPr>
                       <a:r>
                         <a:rPr/>
-                        <a:t>the precision-recall curve, 35</a:t>
+                        <a:t>the precision-recall curve, 39</a:t>
                       </a:r>
                     </a:p>
                   </a:txBody>
@@ -13677,7 +15491,7 @@
 </p:sld>
 </file>
 
-<file path=ppt/slides/slide33.xml><?xml version="1.0" encoding="utf-8"?>
+<file path=ppt/slides/slide37.xml><?xml version="1.0" encoding="utf-8"?>
 <p:sld xmlns:a="http://schemas.openxmlformats.org/drawingml/2006/main" xmlns:r="http://schemas.openxmlformats.org/officeDocument/2006/relationships" xmlns:p="http://schemas.openxmlformats.org/presentationml/2006/main">
   <p:cSld>
     <p:spTree>
@@ -13759,7 +15573,7 @@
 </p:sld>
 </file>
 
-<file path=ppt/slides/slide34.xml><?xml version="1.0" encoding="utf-8"?>
+<file path=ppt/slides/slide38.xml><?xml version="1.0" encoding="utf-8"?>
 <p:sld xmlns:a="http://schemas.openxmlformats.org/drawingml/2006/main" xmlns:r="http://schemas.openxmlformats.org/officeDocument/2006/relationships" xmlns:p="http://schemas.openxmlformats.org/presentationml/2006/main">
   <p:cSld>
     <p:spTree>
@@ -14493,7 +16307,7 @@
 </p:sld>
 </file>
 
-<file path=ppt/slides/slide35.xml><?xml version="1.0" encoding="utf-8"?>
+<file path=ppt/slides/slide39.xml><?xml version="1.0" encoding="utf-8"?>
 <p:sld xmlns:a="http://schemas.openxmlformats.org/drawingml/2006/main" xmlns:r="http://schemas.openxmlformats.org/officeDocument/2006/relationships" xmlns:p="http://schemas.openxmlformats.org/presentationml/2006/main">
   <p:cSld>
     <p:spTree>
@@ -14575,7 +16389,7 @@
 </p:sld>
 </file>
 
-<file path=ppt/slides/slide36.xml><?xml version="1.0" encoding="utf-8"?>
+<file path=ppt/slides/slide4.xml><?xml version="1.0" encoding="utf-8"?>
 <p:sld xmlns:a="http://schemas.openxmlformats.org/drawingml/2006/main" xmlns:r="http://schemas.openxmlformats.org/officeDocument/2006/relationships" xmlns:p="http://schemas.openxmlformats.org/presentationml/2006/main">
   <p:cSld>
     <p:spTree>
@@ -14617,7 +16431,7 @@
             </a:pPr>
             <a:r>
               <a:rPr/>
-              <a:t>Comparing models without choosing a threshold</a:t>
+              <a:t>The question has changed</a:t>
             </a:r>
           </a:p>
         </p:txBody>
@@ -14645,22 +16459,36 @@
             <a:pPr lvl="0"/>
             <a:r>
               <a:rPr/>
-              <a:t>We keep evaluating at one threshold, but which?</a:t>
+              <a:t>Lesson 3: given a house, </a:t>
+            </a:r>
+            <a:r>
+              <a:rPr b="1"/>
+              <a:t>how many euros?</a:t>
             </a:r>
           </a:p>
           <a:p>
             <a:pPr lvl="0"/>
             <a:r>
               <a:rPr/>
-              <a:t>What if we score the whole </a:t>
+              <a:t>Lesson 4: given a disk drive, </a:t>
             </a:r>
             <a:r>
               <a:rPr b="1"/>
-              <a:t>ranking</a:t>
-            </a:r>
-            <a:r>
-              <a:rPr/>
-              <a:t> instead?</a:t>
+              <a:t>will it fail?</a:t>
+            </a:r>
+          </a:p>
+          <a:p>
+            <a:pPr lvl="0"/>
+            <a:r>
+              <a:rPr/>
+              <a:t>Answer with a probability: 0 ≤ P(y = 1 | x) ≤ 1</a:t>
+            </a:r>
+          </a:p>
+          <a:p>
+            <a:pPr lvl="0"/>
+            <a:r>
+              <a:rPr/>
+              <a:t>y = 1 if the drive failed, y = 0 if not; x holds its six counters</a:t>
             </a:r>
           </a:p>
         </p:txBody>
@@ -14670,7 +16498,102 @@
 </p:sld>
 </file>
 
-<file path=ppt/slides/slide37.xml><?xml version="1.0" encoding="utf-8"?>
+<file path=ppt/slides/slide40.xml><?xml version="1.0" encoding="utf-8"?>
+<p:sld xmlns:a="http://schemas.openxmlformats.org/drawingml/2006/main" xmlns:r="http://schemas.openxmlformats.org/officeDocument/2006/relationships" xmlns:p="http://schemas.openxmlformats.org/presentationml/2006/main">
+  <p:cSld>
+    <p:spTree>
+      <p:nvGrpSpPr>
+        <p:cNvPr id="1" name=""/>
+        <p:cNvGrpSpPr/>
+        <p:nvPr/>
+      </p:nvGrpSpPr>
+      <p:grpSpPr>
+        <a:xfrm>
+          <a:off x="0" y="0"/>
+          <a:ext cx="0" cy="0"/>
+          <a:chOff x="0" y="0"/>
+          <a:chExt cx="0" cy="0"/>
+        </a:xfrm>
+      </p:grpSpPr>
+      <p:sp>
+        <p:nvSpPr>
+          <p:cNvPr id="2" name="Title 1"/>
+          <p:cNvSpPr>
+            <a:spLocks noGrp="1"/>
+          </p:cNvSpPr>
+          <p:nvPr>
+            <p:ph type="title"/>
+          </p:nvPr>
+        </p:nvSpPr>
+        <p:spPr>
+          <a:xfrm>
+            <a:off x="457200" y="205979"/>
+            <a:ext cx="8229600" cy="857250"/>
+          </a:xfrm>
+        </p:spPr>
+        <p:txBody>
+          <a:bodyPr/>
+          <a:lstStyle/>
+          <a:p>
+            <a:pPr lvl="0" indent="0" marL="0">
+              <a:buNone/>
+            </a:pPr>
+            <a:r>
+              <a:rPr/>
+              <a:t>Comparing models without choosing a threshold</a:t>
+            </a:r>
+          </a:p>
+        </p:txBody>
+      </p:sp>
+      <p:sp>
+        <p:nvSpPr>
+          <p:cNvPr id="3" name="Content Placeholder 2"/>
+          <p:cNvSpPr>
+            <a:spLocks noGrp="1"/>
+          </p:cNvSpPr>
+          <p:nvPr>
+            <p:ph idx="1"/>
+          </p:nvPr>
+        </p:nvSpPr>
+        <p:spPr>
+          <a:xfrm>
+            <a:off x="457200" y="1200151"/>
+            <a:ext cx="8229600" cy="3394472"/>
+          </a:xfrm>
+        </p:spPr>
+        <p:txBody>
+          <a:bodyPr/>
+          <a:lstStyle/>
+          <a:p>
+            <a:pPr lvl="0"/>
+            <a:r>
+              <a:rPr/>
+              <a:t>We keep evaluating at one threshold, but which?</a:t>
+            </a:r>
+          </a:p>
+          <a:p>
+            <a:pPr lvl="0"/>
+            <a:r>
+              <a:rPr/>
+              <a:t>What if we score the whole </a:t>
+            </a:r>
+            <a:r>
+              <a:rPr b="1"/>
+              <a:t>ranking</a:t>
+            </a:r>
+            <a:r>
+              <a:rPr/>
+              <a:t> instead?</a:t>
+            </a:r>
+          </a:p>
+        </p:txBody>
+      </p:sp>
+    </p:spTree>
+  </p:cSld>
+</p:sld>
+</file>
+
+<file path=ppt/slides/slide41.xml><?xml version="1.0" encoding="utf-8"?>
 <p:sld xmlns:a="http://schemas.openxmlformats.org/drawingml/2006/main" xmlns:r="http://schemas.openxmlformats.org/officeDocument/2006/relationships" xmlns:p="http://schemas.openxmlformats.org/presentationml/2006/main">
   <p:cSld>
     <p:spTree>
@@ -14752,7 +16675,7 @@
 </p:sld>
 </file>
 
-<file path=ppt/slides/slide38.xml><?xml version="1.0" encoding="utf-8"?>
+<file path=ppt/slides/slide42.xml><?xml version="1.0" encoding="utf-8"?>
 <p:sld xmlns:a="http://schemas.openxmlformats.org/drawingml/2006/main" xmlns:r="http://schemas.openxmlformats.org/officeDocument/2006/relationships" xmlns:p="http://schemas.openxmlformats.org/presentationml/2006/main">
   <p:cSld>
     <p:spTree>
@@ -14852,7 +16775,7 @@
 </p:sld>
 </file>
 
-<file path=ppt/slides/slide39.xml><?xml version="1.0" encoding="utf-8"?>
+<file path=ppt/slides/slide43.xml><?xml version="1.0" encoding="utf-8"?>
 <p:sld xmlns:a="http://schemas.openxmlformats.org/drawingml/2006/main" xmlns:r="http://schemas.openxmlformats.org/officeDocument/2006/relationships" xmlns:p="http://schemas.openxmlformats.org/presentationml/2006/main">
   <p:cSld>
     <p:spTree>
@@ -14947,116 +16870,7 @@
 </p:sld>
 </file>
 
-<file path=ppt/slides/slide4.xml><?xml version="1.0" encoding="utf-8"?>
-<p:sld xmlns:a="http://schemas.openxmlformats.org/drawingml/2006/main" xmlns:r="http://schemas.openxmlformats.org/officeDocument/2006/relationships" xmlns:p="http://schemas.openxmlformats.org/presentationml/2006/main">
-  <p:cSld>
-    <p:spTree>
-      <p:nvGrpSpPr>
-        <p:cNvPr id="1" name=""/>
-        <p:cNvGrpSpPr/>
-        <p:nvPr/>
-      </p:nvGrpSpPr>
-      <p:grpSpPr>
-        <a:xfrm>
-          <a:off x="0" y="0"/>
-          <a:ext cx="0" cy="0"/>
-          <a:chOff x="0" y="0"/>
-          <a:chExt cx="0" cy="0"/>
-        </a:xfrm>
-      </p:grpSpPr>
-      <p:sp>
-        <p:nvSpPr>
-          <p:cNvPr id="2" name="Title 1"/>
-          <p:cNvSpPr>
-            <a:spLocks noGrp="1"/>
-          </p:cNvSpPr>
-          <p:nvPr>
-            <p:ph type="title"/>
-          </p:nvPr>
-        </p:nvSpPr>
-        <p:spPr>
-          <a:xfrm>
-            <a:off x="457200" y="205979"/>
-            <a:ext cx="8229600" cy="857250"/>
-          </a:xfrm>
-        </p:spPr>
-        <p:txBody>
-          <a:bodyPr/>
-          <a:lstStyle/>
-          <a:p>
-            <a:pPr lvl="0" indent="0" marL="0">
-              <a:buNone/>
-            </a:pPr>
-            <a:r>
-              <a:rPr/>
-              <a:t>The question has changed</a:t>
-            </a:r>
-          </a:p>
-        </p:txBody>
-      </p:sp>
-      <p:sp>
-        <p:nvSpPr>
-          <p:cNvPr id="3" name="Content Placeholder 2"/>
-          <p:cNvSpPr>
-            <a:spLocks noGrp="1"/>
-          </p:cNvSpPr>
-          <p:nvPr>
-            <p:ph idx="1"/>
-          </p:nvPr>
-        </p:nvSpPr>
-        <p:spPr>
-          <a:xfrm>
-            <a:off x="457200" y="1200151"/>
-            <a:ext cx="8229600" cy="3394472"/>
-          </a:xfrm>
-        </p:spPr>
-        <p:txBody>
-          <a:bodyPr/>
-          <a:lstStyle/>
-          <a:p>
-            <a:pPr lvl="0"/>
-            <a:r>
-              <a:rPr/>
-              <a:t>Lesson 3: given a house, </a:t>
-            </a:r>
-            <a:r>
-              <a:rPr b="1"/>
-              <a:t>how many euros?</a:t>
-            </a:r>
-          </a:p>
-          <a:p>
-            <a:pPr lvl="0"/>
-            <a:r>
-              <a:rPr/>
-              <a:t>Lesson 4: given a disk drive, </a:t>
-            </a:r>
-            <a:r>
-              <a:rPr b="1"/>
-              <a:t>will it fail?</a:t>
-            </a:r>
-          </a:p>
-          <a:p>
-            <a:pPr lvl="0"/>
-            <a:r>
-              <a:rPr/>
-              <a:t>Answer with a probability: 0 ≤ P(y = 1 | x) ≤ 1</a:t>
-            </a:r>
-          </a:p>
-          <a:p>
-            <a:pPr lvl="0"/>
-            <a:r>
-              <a:rPr/>
-              <a:t>y = 1 if the drive failed, y = 0 if not; x holds its six counters</a:t>
-            </a:r>
-          </a:p>
-        </p:txBody>
-      </p:sp>
-    </p:spTree>
-  </p:cSld>
-</p:sld>
-</file>
-
-<file path=ppt/slides/slide40.xml><?xml version="1.0" encoding="utf-8"?>
+<file path=ppt/slides/slide44.xml><?xml version="1.0" encoding="utf-8"?>
 <p:sld xmlns:a="http://schemas.openxmlformats.org/drawingml/2006/main" xmlns:r="http://schemas.openxmlformats.org/officeDocument/2006/relationships" xmlns:p="http://schemas.openxmlformats.org/presentationml/2006/main">
   <p:cSld>
     <p:spTree>
@@ -15138,7 +16952,7 @@
 </p:sld>
 </file>
 
-<file path=ppt/slides/slide41.xml><?xml version="1.0" encoding="utf-8"?>
+<file path=ppt/slides/slide45.xml><?xml version="1.0" encoding="utf-8"?>
 <p:sld xmlns:a="http://schemas.openxmlformats.org/drawingml/2006/main" xmlns:r="http://schemas.openxmlformats.org/officeDocument/2006/relationships" xmlns:p="http://schemas.openxmlformats.org/presentationml/2006/main">
   <p:cSld>
     <p:spTree>
@@ -15241,7 +17055,7 @@
 </p:sld>
 </file>
 
-<file path=ppt/slides/slide42.xml><?xml version="1.0" encoding="utf-8"?>
+<file path=ppt/slides/slide46.xml><?xml version="1.0" encoding="utf-8"?>
 <p:sld xmlns:a="http://schemas.openxmlformats.org/drawingml/2006/main" xmlns:r="http://schemas.openxmlformats.org/officeDocument/2006/relationships" xmlns:p="http://schemas.openxmlformats.org/presentationml/2006/main">
   <p:cSld>
     <p:spTree>
@@ -15357,7 +17171,7 @@
 </p:sld>
 </file>
 
-<file path=ppt/slides/slide43.xml><?xml version="1.0" encoding="utf-8"?>
+<file path=ppt/slides/slide47.xml><?xml version="1.0" encoding="utf-8"?>
 <p:sld xmlns:a="http://schemas.openxmlformats.org/drawingml/2006/main" xmlns:r="http://schemas.openxmlformats.org/officeDocument/2006/relationships" xmlns:p="http://schemas.openxmlformats.org/presentationml/2006/main">
   <p:cSld>
     <p:spTree>
@@ -15439,7 +17253,7 @@
 </p:sld>
 </file>
 
-<file path=ppt/slides/slide44.xml><?xml version="1.0" encoding="utf-8"?>
+<file path=ppt/slides/slide48.xml><?xml version="1.0" encoding="utf-8"?>
 <p:sld xmlns:a="http://schemas.openxmlformats.org/drawingml/2006/main" xmlns:r="http://schemas.openxmlformats.org/officeDocument/2006/relationships" xmlns:p="http://schemas.openxmlformats.org/presentationml/2006/main">
   <p:cSld>
     <p:spTree>
@@ -15521,7 +17335,7 @@
 </p:sld>
 </file>
 
-<file path=ppt/slides/slide45.xml><?xml version="1.0" encoding="utf-8"?>
+<file path=ppt/slides/slide49.xml><?xml version="1.0" encoding="utf-8"?>
 <p:sld xmlns:a="http://schemas.openxmlformats.org/drawingml/2006/main" xmlns:r="http://schemas.openxmlformats.org/officeDocument/2006/relationships" xmlns:p="http://schemas.openxmlformats.org/presentationml/2006/main">
   <p:cSld>
     <p:spTree>
@@ -15612,7 +17426,118 @@
 </p:sld>
 </file>
 
-<file path=ppt/slides/slide46.xml><?xml version="1.0" encoding="utf-8"?>
+<file path=ppt/slides/slide5.xml><?xml version="1.0" encoding="utf-8"?>
+<p:sld xmlns:a="http://schemas.openxmlformats.org/drawingml/2006/main" xmlns:r="http://schemas.openxmlformats.org/officeDocument/2006/relationships" xmlns:p="http://schemas.openxmlformats.org/presentationml/2006/main">
+  <p:cSld>
+    <p:spTree>
+      <p:nvGrpSpPr>
+        <p:cNvPr id="1" name=""/>
+        <p:cNvGrpSpPr/>
+        <p:nvPr/>
+      </p:nvGrpSpPr>
+      <p:grpSpPr>
+        <a:xfrm>
+          <a:off x="0" y="0"/>
+          <a:ext cx="0" cy="0"/>
+          <a:chOff x="0" y="0"/>
+          <a:chExt cx="0" cy="0"/>
+        </a:xfrm>
+      </p:grpSpPr>
+      <p:sp>
+        <p:nvSpPr>
+          <p:cNvPr id="2" name="Title 1"/>
+          <p:cNvSpPr>
+            <a:spLocks noGrp="1"/>
+          </p:cNvSpPr>
+          <p:nvPr>
+            <p:ph type="title"/>
+          </p:nvPr>
+        </p:nvSpPr>
+        <p:spPr>
+          <a:xfrm>
+            <a:off x="457200" y="205979"/>
+            <a:ext cx="8229600" cy="857250"/>
+          </a:xfrm>
+        </p:spPr>
+        <p:txBody>
+          <a:bodyPr/>
+          <a:lstStyle/>
+          <a:p>
+            <a:pPr lvl="0" indent="0" marL="0">
+              <a:buNone/>
+            </a:pPr>
+            <a:r>
+              <a:rPr/>
+              <a:t>The fleet</a:t>
+            </a:r>
+          </a:p>
+        </p:txBody>
+      </p:sp>
+      <p:sp>
+        <p:nvSpPr>
+          <p:cNvPr id="3" name="Content Placeholder 2"/>
+          <p:cNvSpPr>
+            <a:spLocks noGrp="1"/>
+          </p:cNvSpPr>
+          <p:nvPr>
+            <p:ph idx="1"/>
+          </p:nvPr>
+        </p:nvSpPr>
+        <p:spPr>
+          <a:xfrm>
+            <a:off x="457200" y="1200151"/>
+            <a:ext cx="8229600" cy="3394472"/>
+          </a:xfrm>
+        </p:spPr>
+        <p:txBody>
+          <a:bodyPr/>
+          <a:lstStyle/>
+          <a:p>
+            <a:pPr lvl="0"/>
+            <a:r>
+              <a:rPr b="1"/>
+              <a:t>8,000 disk drives</a:t>
+            </a:r>
+            <a:r>
+              <a:rPr/>
+              <a:t> in a data centre</a:t>
+            </a:r>
+          </a:p>
+          <a:p>
+            <a:pPr lvl="0"/>
+            <a:r>
+              <a:rPr/>
+              <a:t>Six SMART counters each: Self-Monitoring, Analysis and Reporting Technology</a:t>
+            </a:r>
+          </a:p>
+          <a:p>
+            <a:pPr lvl="0"/>
+            <a:r>
+              <a:rPr/>
+              <a:t>Label: did it fail within thirty days?</a:t>
+            </a:r>
+          </a:p>
+          <a:p>
+            <a:pPr lvl="0"/>
+            <a:r>
+              <a:rPr>
+                <a:latin typeface="Courier"/>
+              </a:rPr>
+              <a:t>train_test_split(..., stratify=y)</a:t>
+            </a:r>
+            <a:r>
+              <a:rPr/>
+              <a:t>: 6,000 to train, 2,000 to test</a:t>
+            </a:r>
+          </a:p>
+        </p:txBody>
+      </p:sp>
+    </p:spTree>
+  </p:cSld>
+</p:sld>
+</file>
+
+<file path=ppt/slides/slide50.xml><?xml version="1.0" encoding="utf-8"?>
 <p:sld xmlns:a="http://schemas.openxmlformats.org/drawingml/2006/main" xmlns:r="http://schemas.openxmlformats.org/officeDocument/2006/relationships" xmlns:p="http://schemas.openxmlformats.org/presentationml/2006/main">
   <p:cSld>
     <p:spTree>
@@ -16008,7 +17933,7 @@
 </p:sld>
 </file>
 
-<file path=ppt/slides/slide47.xml><?xml version="1.0" encoding="utf-8"?>
+<file path=ppt/slides/slide51.xml><?xml version="1.0" encoding="utf-8"?>
 <p:sld xmlns:a="http://schemas.openxmlformats.org/drawingml/2006/main" xmlns:r="http://schemas.openxmlformats.org/officeDocument/2006/relationships" xmlns:p="http://schemas.openxmlformats.org/presentationml/2006/main">
   <p:cSld>
     <p:spTree>
@@ -16124,7 +18049,7 @@
                       </a:pPr>
                       <a:r>
                         <a:rPr/>
-                        <a:t>the ROC curve by hand, 37</a:t>
+                        <a:t>the ROC curve by hand, 41</a:t>
                       </a:r>
                     </a:p>
                   </a:txBody>
@@ -16172,7 +18097,7 @@
                       </a:pPr>
                       <a:r>
                         <a:rPr/>
-                        <a:t>what AUC means, 38</a:t>
+                        <a:t>what AUC means, 42</a:t>
                       </a:r>
                     </a:p>
                   </a:txBody>
@@ -16204,7 +18129,7 @@
                       </a:pPr>
                       <a:r>
                         <a:rPr/>
-                        <a:t>the rare-positive trap, 40-41</a:t>
+                        <a:t>the rare-positive trap, 44-45</a:t>
                       </a:r>
                     </a:p>
                   </a:txBody>
@@ -16252,7 +18177,7 @@
                       </a:pPr>
                       <a:r>
                         <a:rPr/>
-                        <a:t>the threshold from costs, 43-45</a:t>
+                        <a:t>the threshold from costs, 47-49</a:t>
                       </a:r>
                     </a:p>
                   </a:txBody>
@@ -16290,7 +18215,7 @@
                       </a:pPr>
                       <a:r>
                         <a:rPr/>
-                        <a:t>class weights, 46</a:t>
+                        <a:t>class weights, 50</a:t>
                       </a:r>
                     </a:p>
                   </a:txBody>
@@ -16328,7 +18253,7 @@
                       </a:pPr>
                       <a:r>
                         <a:rPr/>
-                        <a:t>three classes, 48-49</a:t>
+                        <a:t>three classes, 52-53</a:t>
                       </a:r>
                     </a:p>
                   </a:txBody>
@@ -16364,7 +18289,7 @@
 </p:sld>
 </file>
 
-<file path=ppt/slides/slide48.xml><?xml version="1.0" encoding="utf-8"?>
+<file path=ppt/slides/slide52.xml><?xml version="1.0" encoding="utf-8"?>
 <p:sld xmlns:a="http://schemas.openxmlformats.org/drawingml/2006/main" xmlns:r="http://schemas.openxmlformats.org/officeDocument/2006/relationships" xmlns:p="http://schemas.openxmlformats.org/presentationml/2006/main">
   <p:cSld>
     <p:spTree>
@@ -16446,7 +18371,7 @@
 </p:sld>
 </file>
 
-<file path=ppt/slides/slide49.xml><?xml version="1.0" encoding="utf-8"?>
+<file path=ppt/slides/slide53.xml><?xml version="1.0" encoding="utf-8"?>
 <p:sld xmlns:a="http://schemas.openxmlformats.org/drawingml/2006/main" xmlns:r="http://schemas.openxmlformats.org/officeDocument/2006/relationships" xmlns:p="http://schemas.openxmlformats.org/presentationml/2006/main">
   <p:cSld>
     <p:spTree>
@@ -16541,7 +18466,7 @@
 </p:sld>
 </file>
 
-<file path=ppt/slides/slide5.xml><?xml version="1.0" encoding="utf-8"?>
+<file path=ppt/slides/slide54.xml><?xml version="1.0" encoding="utf-8"?>
 <p:sld xmlns:a="http://schemas.openxmlformats.org/drawingml/2006/main" xmlns:r="http://schemas.openxmlformats.org/officeDocument/2006/relationships" xmlns:p="http://schemas.openxmlformats.org/presentationml/2006/main">
   <p:cSld>
     <p:spTree>
@@ -16583,7 +18508,7 @@
             </a:pPr>
             <a:r>
               <a:rPr/>
-              <a:t>The fleet</a:t>
+              <a:t>What to take away</a:t>
             </a:r>
           </a:p>
         </p:txBody>
@@ -16611,38 +18536,56 @@
             <a:pPr lvl="0"/>
             <a:r>
               <a:rPr b="1"/>
-              <a:t>8,000 disk drives</a:t>
-            </a:r>
-            <a:r>
-              <a:rPr/>
-              <a:t> in a data centre</a:t>
+              <a:t>96.20% accuracy, nothing caught.</a:t>
+            </a:r>
+            <a:r>
+              <a:rPr/>
+              <a:t> Accuracy measures the majority class</a:t>
             </a:r>
           </a:p>
           <a:p>
             <a:pPr lvl="0"/>
             <a:r>
               <a:rPr/>
-              <a:t>Six SMART counters each: Self-Monitoring, Analysis and Reporting Technology</a:t>
+              <a:t>Precision is about the </a:t>
+            </a:r>
+            <a:r>
+              <a:rPr b="1"/>
+              <a:t>alarms</a:t>
+            </a:r>
+            <a:r>
+              <a:rPr/>
+              <a:t>, recall is about the </a:t>
+            </a:r>
+            <a:r>
+              <a:rPr b="1"/>
+              <a:t>failures</a:t>
             </a:r>
           </a:p>
           <a:p>
             <a:pPr lvl="0"/>
             <a:r>
               <a:rPr/>
-              <a:t>Label: did it fail within thirty days?</a:t>
+              <a:t>The </a:t>
+            </a:r>
+            <a:r>
+              <a:rPr b="1"/>
+              <a:t>threshold is a decision</a:t>
+            </a:r>
+            <a:r>
+              <a:rPr/>
+              <a:t>, and it has a formula</a:t>
             </a:r>
           </a:p>
           <a:p>
             <a:pPr lvl="0"/>
             <a:r>
-              <a:rPr>
-                <a:latin typeface="Courier"/>
-              </a:rPr>
-              <a:t>train_test_split(..., stratify=y)</a:t>
-            </a:r>
-            <a:r>
-              <a:rPr/>
-              <a:t>: 6,000 to train, 2,000 to test</a:t>
+              <a:rPr b="1"/>
+              <a:t>AUC measures ranking</a:t>
+            </a:r>
+            <a:r>
+              <a:rPr/>
+              <a:t> and hides imbalance</a:t>
             </a:r>
           </a:p>
         </p:txBody>
@@ -16652,136 +18595,7 @@
 </p:sld>
 </file>
 
-<file path=ppt/slides/slide50.xml><?xml version="1.0" encoding="utf-8"?>
-<p:sld xmlns:a="http://schemas.openxmlformats.org/drawingml/2006/main" xmlns:r="http://schemas.openxmlformats.org/officeDocument/2006/relationships" xmlns:p="http://schemas.openxmlformats.org/presentationml/2006/main">
-  <p:cSld>
-    <p:spTree>
-      <p:nvGrpSpPr>
-        <p:cNvPr id="1" name=""/>
-        <p:cNvGrpSpPr/>
-        <p:nvPr/>
-      </p:nvGrpSpPr>
-      <p:grpSpPr>
-        <a:xfrm>
-          <a:off x="0" y="0"/>
-          <a:ext cx="0" cy="0"/>
-          <a:chOff x="0" y="0"/>
-          <a:chExt cx="0" cy="0"/>
-        </a:xfrm>
-      </p:grpSpPr>
-      <p:sp>
-        <p:nvSpPr>
-          <p:cNvPr id="2" name="Title 1"/>
-          <p:cNvSpPr>
-            <a:spLocks noGrp="1"/>
-          </p:cNvSpPr>
-          <p:nvPr>
-            <p:ph type="title"/>
-          </p:nvPr>
-        </p:nvSpPr>
-        <p:spPr>
-          <a:xfrm>
-            <a:off x="457200" y="205979"/>
-            <a:ext cx="8229600" cy="857250"/>
-          </a:xfrm>
-        </p:spPr>
-        <p:txBody>
-          <a:bodyPr/>
-          <a:lstStyle/>
-          <a:p>
-            <a:pPr lvl="0" indent="0" marL="0">
-              <a:buNone/>
-            </a:pPr>
-            <a:r>
-              <a:rPr/>
-              <a:t>What to take away</a:t>
-            </a:r>
-          </a:p>
-        </p:txBody>
-      </p:sp>
-      <p:sp>
-        <p:nvSpPr>
-          <p:cNvPr id="3" name="Content Placeholder 2"/>
-          <p:cNvSpPr>
-            <a:spLocks noGrp="1"/>
-          </p:cNvSpPr>
-          <p:nvPr>
-            <p:ph idx="1"/>
-          </p:nvPr>
-        </p:nvSpPr>
-        <p:spPr>
-          <a:xfrm>
-            <a:off x="457200" y="1200151"/>
-            <a:ext cx="8229600" cy="3394472"/>
-          </a:xfrm>
-        </p:spPr>
-        <p:txBody>
-          <a:bodyPr/>
-          <a:lstStyle/>
-          <a:p>
-            <a:pPr lvl="0"/>
-            <a:r>
-              <a:rPr b="1"/>
-              <a:t>96.20% accuracy, nothing caught.</a:t>
-            </a:r>
-            <a:r>
-              <a:rPr/>
-              <a:t> Accuracy measures the majority class</a:t>
-            </a:r>
-          </a:p>
-          <a:p>
-            <a:pPr lvl="0"/>
-            <a:r>
-              <a:rPr/>
-              <a:t>Precision is about the </a:t>
-            </a:r>
-            <a:r>
-              <a:rPr b="1"/>
-              <a:t>alarms</a:t>
-            </a:r>
-            <a:r>
-              <a:rPr/>
-              <a:t>, recall is about the </a:t>
-            </a:r>
-            <a:r>
-              <a:rPr b="1"/>
-              <a:t>failures</a:t>
-            </a:r>
-          </a:p>
-          <a:p>
-            <a:pPr lvl="0"/>
-            <a:r>
-              <a:rPr/>
-              <a:t>The </a:t>
-            </a:r>
-            <a:r>
-              <a:rPr b="1"/>
-              <a:t>threshold is a decision</a:t>
-            </a:r>
-            <a:r>
-              <a:rPr/>
-              <a:t>, and it has a formula</a:t>
-            </a:r>
-          </a:p>
-          <a:p>
-            <a:pPr lvl="0"/>
-            <a:r>
-              <a:rPr b="1"/>
-              <a:t>AUC measures ranking</a:t>
-            </a:r>
-            <a:r>
-              <a:rPr/>
-              <a:t> and hides imbalance</a:t>
-            </a:r>
-          </a:p>
-        </p:txBody>
-      </p:sp>
-    </p:spTree>
-  </p:cSld>
-</p:sld>
-</file>
-
-<file path=ppt/slides/slide51.xml><?xml version="1.0" encoding="utf-8"?>
+<file path=ppt/slides/slide55.xml><?xml version="1.0" encoding="utf-8"?>
 <p:sld xmlns:a="http://schemas.openxmlformats.org/drawingml/2006/main" xmlns:r="http://schemas.openxmlformats.org/officeDocument/2006/relationships" xmlns:p="http://schemas.openxmlformats.org/presentationml/2006/main">
   <p:cSld>
     <p:spTree>

--- a/Lessons/04_classification_and_metrics/Slides/classification_and_metrics_slides.pptx
+++ b/Lessons/04_classification_and_metrics/Slides/classification_and_metrics_slides.pptx
@@ -2562,7 +2562,7 @@
             </a:pPr>
             <a:r>
               <a:rPr/>
-              <a:t>Fifteen lines of NumPy, then one line of scikit-learn, and the same answer. Run notebook 01. Twenty minutes. The parts worth stopping on:</a:t>
+              <a:t>Fifteen lines of NumPy, then one line of scikit-learn, and the same answer. Run notebook 01. Seventeen minutes, leaving three for the decision boundary on the next slide. The parts worth stopping on:</a:t>
             </a:r>
           </a:p>
           <a:p>

--- a/Lessons/04_classification_and_metrics/Slides/classification_and_metrics_slides.pptx
+++ b/Lessons/04_classification_and_metrics/Slides/classification_and_metrics_slides.pptx
@@ -1184,7 +1184,7 @@
             </a:pPr>
             <a:r>
               <a:rPr/>
-              <a:t>Squared error on the sigmoid IS differentiable, and it does produce a working model on easy problems. The reason to reject it is subtler and more interesting, which is what makes it worth ten minutes.</a:t>
+              <a:t>Squared error on the sigmoid IS differentiable, and it does produce a working model on easy problems. The reason to reject it is subtler, so do not give it yet. Slides 16 to 20 first build, on three drives, the cost that logistic regression does minimise; slide 23 then comes back to squared error and shows what goes wrong with it, on a drive the model is confidently wrong about.</a:t>
             </a:r>
           </a:p>
         </p:txBody>
@@ -1804,21 +1804,21 @@
             </a:pPr>
             <a:r>
               <a:rPr/>
-              <a:t>Two reasons we always work with the logarithm, worth saying aloud. A sum differentiates one term at a time. And the product itself is too small to store: gradient descent starts with all weights at zero, so z is 0 for every drive and every p is 0.5; 0.5 multiplied by itself 6,000 times, once per training drive, is about 10 to the minus 1806, while the smallest number a 64-bit float holds is about 10 to the minus 308. The computer would store exactly zero.</a:t>
-            </a:r>
-          </a:p>
-          <a:p>
-            <a:pPr lvl="0" indent="0" marL="0">
-              <a:buNone/>
-            </a:pPr>
-          </a:p>
-          <a:p>
-            <a:pPr lvl="0" indent="0" marL="0">
-              <a:buNone/>
-            </a:pPr>
-            <a:r>
-              <a:rPr/>
-              <a:t>Divide the sum by the number of drives and you have the average surprise: that is the log loss, and the next slide writes it as a formula. Handout sections 3.1 to 3.3.</a:t>
+              <a:t>Two reasons we always work with the logarithm, worth saying aloud. A sum differentiates one term at a time. And the product itself is too small to store. Notebook 1’s gradient descent starts with every coefficient and the intercept at zero, so z is 0 for every drive and every p is 0.5. 0.5 multiplied by itself 6,000 times, once per training drive, is about 10 to the minus 1806, while the smallest positive number a 64-bit float can hold is about 5 times 10 to the minus 324. The computer would store exactly zero.</a:t>
+            </a:r>
+          </a:p>
+          <a:p>
+            <a:pPr lvl="0" indent="0" marL="0">
+              <a:buNone/>
+            </a:pPr>
+          </a:p>
+          <a:p>
+            <a:pPr lvl="0" indent="0" marL="0">
+              <a:buNone/>
+            </a:pPr>
+            <a:r>
+              <a:rPr/>
+              <a:t>Divide the sum by the number of drives and you have the average surprise: that is the cost J that fitting minimises, and scikit-learn’s log_loss computes exactly this average. The next slide writes the surprise of one drive as a formula, the loss L; J is its average over the drives. Handout sections 3.1 to 3.3.</a:t>
             </a:r>
           </a:p>
         </p:txBody>
@@ -2010,21 +2010,21 @@
             </a:pPr>
             <a:r>
               <a:rPr/>
-              <a:t>This is the loss on ONE example, L, not the cost over the training set; p is the predicted probability, the same number the next slide writes as y-hat. Say the other half aloud rather than showing it: the cost J is the average of this over the m examples, one over m times the sum. Written out in full the formula reached the slide edge and came out at 26pt, smaller than the bullets on the slide before it.</a:t>
-            </a:r>
-          </a:p>
-          <a:p>
-            <a:pPr lvl="0" indent="0" marL="0">
-              <a:buNone/>
-            </a:pPr>
-          </a:p>
-          <a:p>
-            <a:pPr lvl="0" indent="0" marL="0">
-              <a:buNone/>
-            </a:pPr>
-            <a:r>
-              <a:rPr/>
-              <a:t>Do not derive it here - the handout, section 3, does it in full. Show it and read it.</a:t>
+              <a:t>This is the loss on ONE example, L, not the cost over the training set; p is the predicted probability, the same number the next slide writes as y-hat. Say the other half aloud rather than showing it: the cost J is the average of this over the m examples, one over m times the sum. It is left off the slide because, written out in full, the formula does not fit at a readable size.</a:t>
+            </a:r>
+          </a:p>
+          <a:p>
+            <a:pPr lvl="0" indent="0" marL="0">
+              <a:buNone/>
+            </a:pPr>
+          </a:p>
+          <a:p>
+            <a:pPr lvl="0" indent="0" marL="0">
+              <a:buNone/>
+            </a:pPr>
+            <a:r>
+              <a:rPr/>
+              <a:t>Nothing new to derive: this is slides 16 to 20 written for one drive in symbols. Check it on drive B of slide 16: y = 0 and p = 0.1, so the first term vanishes and L = -log(1 - 0.1) = -log 0.9 = 0.11, the number slide 20 gave B under setting 1. The handout, section 3, does it for m drives in full.</a:t>
             </a:r>
           </a:p>
           <a:p>

--- a/Lessons/04_classification_and_metrics/Slides/classification_and_metrics_slides.pptx
+++ b/Lessons/04_classification_and_metrics/Slides/classification_and_metrics_slides.pptx
@@ -2466,7 +2466,7 @@
             </a:pPr>
             <a:r>
               <a:rPr/>
-              <a:t>Now the caution that catches people, and it is worth ten seconds because they will hit it in the notebook. Convex does NOT mean there is a closed-form solution. Setting the gradient to zero gives X-transpose times sigma of Xw minus y equals zero, which is not linear in w - the sigmoid is in the way.</a:t>
+              <a:t>Now the caution that catches people, and it is worth ten seconds because they will see max_iter set in notebook 1 and wonder why. Convex does NOT mean there is a closed-form solution. Setting the gradient to zero gives X-transpose times the vector of errors, sigma(Xw + b) minus y, equal to zero. That equation is not linear in w - the sigmoid is in the way - so it cannot be solved in one step as lesson 3’s normal equation was.</a:t>
             </a:r>
           </a:p>
           <a:p>
@@ -2728,7 +2728,7 @@
             </a:pPr>
             <a:r>
               <a:rPr/>
-              <a:t>Second observation, and this is the bridge to the rest of the lesson: almost every gold point - every drive that actually failed - is on the blue side of the line. At a threshold of 0.5 this model calls nearly the whole fleet healthy, including most of the drives that failed.</a:t>
+              <a:t>Second observation, and this is the bridge to the rest of the lesson: most of the gold points - the drives that actually failed - are on the blue side of the line. At a threshold of 0.5 this two-feature model calls nearly the whole fleet healthy, including most of the drives that failed. It uses two counters only, so that it can be drawn; the six-counter model of slide 28 does better at the same 0.5, and still misses 33 of the 76 test failures.</a:t>
             </a:r>
           </a:p>
           <a:p>
@@ -2958,7 +2958,7 @@
             </a:pPr>
             <a:r>
               <a:rPr/>
-              <a:t>This is the 306 from the first ten minutes, coming back as an accuracy score.</a:t>
+              <a:t>This is the 306 of slide 6 coming back as an accuracy score: 96.20% is simply the share of test drives that are healthy.</a:t>
             </a:r>
           </a:p>
         </p:txBody>
@@ -4060,7 +4060,7 @@
             </a:pPr>
             <a:r>
               <a:rPr/>
-              <a:t>Spend time on the threshold sweep table. Do not explain it first - let them read the columns and say what they see. Somebody will notice that accuracy barely moves. That is the moment to make the next slide.</a:t>
+              <a:t>Spend time on the threshold sweep table. Do not explain it first - let them read the columns and say what they see. Somebody will notice that accuracy barely moves. That is the moment to show the next slide.</a:t>
             </a:r>
           </a:p>
         </p:txBody>
@@ -4156,7 +4156,7 @@
             </a:pPr>
             <a:r>
               <a:rPr/>
-              <a:t>That 0.5 is predict()’s default and nothing more. It is the right choice only when the two errors cost the same and the probabilities are trustworthy - slide 48 derives the threshold from the costs, and it is 0.5 exactly when they are equal. Here a miss costs about nineteen times a false alarm, and in most real problems the costs differ too.</a:t>
+              <a:t>That 0.5 is predict()’s default and nothing more. It is the right choice only when the two errors cost the same and the probabilities are calibrated: among drives given 0.3, about 30% really fail (slide 43 names the property). Slide 48 derives the threshold from the costs, and it is 0.5 exactly when they are equal. Here a miss costs about nineteen times a false alarm, and in most real problems the costs differ too.</a:t>
             </a:r>
           </a:p>
           <a:p>
@@ -4294,7 +4294,7 @@
             </a:pPr>
             <a:r>
               <a:rPr/>
-              <a:t>Say the consequence plainly: tune on accuracy and it will quietly recommend catching fewer failures, because every alarm it drops was a possible false positive.</a:t>
+              <a:t>Say the consequence plainly: tune on accuracy and it will quietly recommend catching fewer failures. Most of the alarms a higher threshold drops are false ones, so accuracy rises with each drop, even though some of the dropped alarms were failures being caught. From 0.30 to 0.50 the model drops 22 alarms: 12 were false and 10 were caught failures. Accuracy counts that as two more right answers, 0.976 to 0.977.</a:t>
             </a:r>
           </a:p>
         </p:txBody>
@@ -4886,7 +4886,7 @@
             </a:pPr>
             <a:r>
               <a:rPr/>
-              <a:t>The identity with the Mann-Whitney U statistic is in the handout, section 8.2, for anyone who wants the proof. But notebook 3 does something better than a proof for this audience: it draws 200,000 random pairs and counts. 0.9488 against roc_auc_score’s 0.9493.</a:t>
+              <a:t>The identity with the Mann-Whitney U statistic - a classical test that compares two groups by counting, over every pair, which member ranks higher - is in the handout, section 8.2, for anyone who wants the proof. But notebook 3 does something better than a proof for this audience: it draws 200,000 random pairs and counts. 0.9488 against roc_auc_score’s 0.9493.</a:t>
             </a:r>
           </a:p>
         </p:txBody>
@@ -4968,7 +4968,7 @@
             </a:pPr>
             <a:r>
               <a:rPr/>
-              <a:t>Short slide, important consequence. AUC depends only on the ordering, so it is invariant under any monotone transformation of the scores.</a:t>
+              <a:t>Short slide, important consequence. AUC depends only on the ordering, so it is unchanged by anything done to the scores that keeps their order.</a:t>
             </a:r>
           </a:p>
           <a:p>
@@ -5106,7 +5106,7 @@
             </a:pPr>
             <a:r>
               <a:rPr/>
-              <a:t>Someone will notice that at 3.8% the AUC reads 0.968, not the 0.949 of slide 42. Different drives: 0.949 rests on the 76 failures of our 2,000-drive test set, 0.968 on a fleet thirty times larger. Both are estimates of the same ranking ability.</a:t>
+              <a:t>Someone will notice that at 3.8% the AUC reads 0.968, not the 0.949 of slide 42. Different drives: 0.949 rests on the 76 failures of our 2,000-drive test set, 0.968 on a fleet thirty times larger. Both are estimates of the same ranking ability. The same goes for average precision: 0.706 on the large fleet, against slide 39’s 0.717 on the test set.</a:t>
             </a:r>
           </a:p>
           <a:p>
@@ -5134,7 +5134,7 @@
             </a:pPr>
             <a:r>
               <a:rPr/>
-              <a:t>Right panel: the precision-recall curves are in three different worlds. Average precision falls from 0.706 to 0.361, and precision at the same threshold falls from 0.79 to 0.26 - three alarms in four now false.</a:t>
+              <a:t>Right panel: the precision-recall curves are in three different worlds. Average precision falls from 0.706 to 0.361, and precision at the threshold of 0.5 falls from 0.79 to 0.26 - three alarms in four now false.</a:t>
             </a:r>
           </a:p>
           <a:p>
@@ -5272,7 +5272,7 @@
             </a:pPr>
             <a:r>
               <a:rPr/>
-              <a:t>This is the second predictable mistake of the lesson, and again defend the instinct: AUC is threshold-free, comparable across models and datasets, bounded in a familiar range. Those are real virtues. It simply answers a question about ranking when the question was about the alarm queue.</a:t>
+              <a:t>This is the lesson’s second big predictable mistake, after trusting accuracy on slide 28, and again defend the instinct: AUC is threshold-free, comparable across models and datasets, bounded in a familiar range. Those are real virtues. It simply answers a question about ranking when the question was about the alarm queue.</a:t>
             </a:r>
           </a:p>
         </p:txBody>
@@ -5892,7 +5892,7 @@
             </a:pPr>
             <a:r>
               <a:rPr/>
-              <a:t>The same reading holds for resampling and for SMOTE (synthetic minority oversampling technique, which builds artificial minority examples): they move the operating point too. And both must be applied to the training rows only - inside each cross-validation fold, once lesson 5 introduces folds - for the reasons lesson 2 gave about imputation.</a:t>
+              <a:t>The same reading holds for resampling and for SMOTE (synthetic minority oversampling technique, which builds artificial minority examples): they move the operating point too. And both must be applied to the training rows only - inside each cross-validation fold, once lesson 5 introduces folds. Duplicated or synthetic failures in the test set would be scored as if they were real drives, and the test score would stop describing the real fleet; lesson 2 made the same argument for fitting the imputer on the training rows only.</a:t>
             </a:r>
           </a:p>
         </p:txBody>
@@ -6442,7 +6442,7 @@
             </a:pPr>
             <a:r>
               <a:rPr/>
-              <a:t>The second thing: every metric on the slide depended on a threshold, and the threshold has an answer - C-FP over C-FP plus C-FN, for honest probabilities - that comes from the business, not from the data.</a:t>
+              <a:t>The second thing: accuracy, precision, recall and F1 all depended on a threshold, and the threshold has an answer - C-FP over C-FP plus C-FN, for honest probabilities - that comes from the business, not from the data.</a:t>
             </a:r>
           </a:p>
         </p:txBody>

--- a/Lessons/04_classification_and_metrics/Slides/classification_and_metrics_slides.pptx
+++ b/Lessons/04_classification_and_metrics/Slides/classification_and_metrics_slides.pptx
@@ -6524,7 +6524,7 @@
             </a:pPr>
             <a:r>
               <a:rPr/>
-              <a:t>Set it explicitly and say out loud when it comes back: the first ten minutes of next Friday, 30 October.</a:t>
+              <a:t>Set it explicitly and say out loud when it comes back: the first ten minutes of next Friday, 6 November.</a:t>
             </a:r>
           </a:p>
           <a:p>
@@ -10265,7 +10265,7 @@
             </a:pPr>
             <a:r>
               <a:rPr/>
-              <a:t>23 October 2026</a:t>
+              <a:t>30 October 2026</a:t>
             </a:r>
           </a:p>
         </p:txBody>
@@ -18673,7 +18673,7 @@
             </a:r>
             <a:r>
               <a:rPr b="1"/>
-              <a:t>Friday 30 October</a:t>
+              <a:t>Friday 6 November</a:t>
             </a:r>
           </a:p>
           <a:p>

--- a/Lessons/04_classification_and_metrics/Slides/classification_and_metrics_slides.pptx
+++ b/Lessons/04_classification_and_metrics/Slides/classification_and_metrics_slides.pptx
@@ -1528,21 +1528,21 @@
             </a:pPr>
             <a:r>
               <a:rPr/>
-              <a:t>Left: the probability of what happened to one drive. It is the rule “p if y = 1, 1 - p if y = 0” in a single expression. Check it with y = 1: p to the power 1 is p, and (1 - p) to the power 0 is 1, so it gives p. With y = 0 it gives 1 times (1 - p). Do drive B on the board: 0.1 to the power 0 times 0.9 to the power 1 is 0.9, the number in the table. The exponents are just a way of writing an if-statement.</a:t>
-            </a:r>
-          </a:p>
-          <a:p>
-            <a:pPr lvl="0" indent="0" marL="0">
-              <a:buNone/>
-            </a:pPr>
-          </a:p>
-          <a:p>
-            <a:pPr lvl="0" indent="0" marL="0">
-              <a:buNone/>
-            </a:pPr>
-            <a:r>
-              <a:rPr/>
-              <a:t>Right: the likelihood, script L, of a setting (w, b). The capital pi means “multiply over all the drives”, i from 1 to m, the way a capital sigma means “add”. Each drive contributes its factor from the left formula; the superscript (i) says which drive. For our three drives, m = 3 and the product is 0.8 times 0.9 times 0.8 = 0.576.</a:t>
+              <a:t>Top line: the probability of what happened to one drive. It is the rule “p if y = 1, 1 - p if y = 0” in a single expression. Check it with y = 1: p to the power 1 is p, and (1 - p) to the power 0 is 1, so it gives p. With y = 0 it gives 1 times (1 - p). Do drive B on the board: 0.1 to the power 0 times 0.9 to the power 1 is 0.9, the number in the table. The exponents are just a way of writing an if-statement.</a:t>
+            </a:r>
+          </a:p>
+          <a:p>
+            <a:pPr lvl="0" indent="0" marL="0">
+              <a:buNone/>
+            </a:pPr>
+          </a:p>
+          <a:p>
+            <a:pPr lvl="0" indent="0" marL="0">
+              <a:buNone/>
+            </a:pPr>
+            <a:r>
+              <a:rPr/>
+              <a:t>Bottom line: the likelihood, script L, of a setting (w, b). The capital pi means “multiply over all the drives”, i from 1 to m, the way a capital sigma means “add”. Each drive contributes its factor from the top line; the superscript (i) says which drive. For our three drives, m = 3 and the product is 0.8 times 0.9 times 0.8 = 0.576.</a:t>
             </a:r>
           </a:p>
           <a:p>
@@ -12048,7 +12048,7 @@
       </p:sp>
       <p:pic>
         <p:nvPicPr>
-          <p:cNvPr descr="eq_f8ebc3d590.png" id="0" name="Picture 1"/>
+          <p:cNvPr descr="eq_4374b8da02.png" id="0" name="Picture 1"/>
           <p:cNvPicPr>
             <a:picLocks noGrp="1" noChangeAspect="1"/>
           </p:cNvPicPr>
@@ -12062,8 +12062,8 @@
         </p:blipFill>
         <p:spPr bwMode="auto">
           <a:xfrm>
-            <a:off x="457200" y="2484239"/>
-            <a:ext cx="8229600" cy="723900"/>
+            <a:off x="457200" y="1512689"/>
+            <a:ext cx="8229600" cy="2667000"/>
           </a:xfrm>
           <a:prstGeom prst="rect">
             <a:avLst/>

--- a/Lessons/04_classification_and_metrics/Slides/classification_and_metrics_slides.pptx
+++ b/Lessons/04_classification_and_metrics/Slides/classification_and_metrics_slides.pptx
@@ -6800,7 +6800,49 @@
             </a:pPr>
             <a:r>
               <a:rPr/>
-              <a:t>Expect someone to object that the previous figure says otherwise: there the curve is flat at the START, where drives have few reallocated sectors, not only at the ends. The answer is the horizontal axis. That curve is drawn against raw reallocated sectors, not against z, so it is steepest at 13.2 sectors and the first four sectors move it by only 0.03. Both pictures are right. The model does not use the raw count: section 1.1 of the handout explains that four of the counters enter it as log(1 + count), so the first few sectors are a big step on the model’s own scale. On that scale four sectors add +4.7 to z: a drive with average telemetry and no reallocated sectors has a 0.012% chance of failing, and four sectors take it to 1.3%, about a hundred times more.</a:t>
+              <a:t>Expect someone to object with slide 7’s right panel. That curve barely moves over the first few reallocated sectors, where 90% of the drives sit - the first four move it by 0.03 - and it is steepest at 13.2 sectors. So do the first sectors say little? Two separate answers, in this order.</a:t>
+            </a:r>
+          </a:p>
+          <a:p>
+            <a:pPr lvl="0" indent="0" marL="0">
+              <a:buNone/>
+            </a:pPr>
+          </a:p>
+          <a:p>
+            <a:pPr lvl="0" indent="0" marL="0">
+              <a:buNone/>
+            </a:pPr>
+            <a:r>
+              <a:rPr/>
+              <a:t>First, it is the same sigmoid, drawn against a different axis. Slide 7’s model has one input, the raw count of reallocated sectors, so its z is a straight line in the count: z = 0.336 times the count, minus 4.43. With no sectors z is already -4.43, deep in the flat left end of this slide’s curve; z reaches 0, the steep middle, at 13.2 sectors. The flat start of slide 7 is the flat left end of slide 8, with sectors on the axis instead of z.</a:t>
+            </a:r>
+          </a:p>
+          <a:p>
+            <a:pPr lvl="0" indent="0" marL="0">
+              <a:buNone/>
+            </a:pPr>
+          </a:p>
+          <a:p>
+            <a:pPr lvl="0" indent="0" marL="0">
+              <a:buNone/>
+            </a:pPr>
+            <a:r>
+              <a:rPr/>
+              <a:t>Second, the flat start comes from using the raw count, not from the drives. A straight line gives every sector the same 0.336 of z, so for that model the first four sectors add 1.34 to z and take a drive from 1.2% to 4.4%. But the labels were generated from log(1 + count), on which the first sectors weigh the most (handout section 1.1): for a drive whose other counters are average, the first four sectors add 4.7 to z and take it from 0.012% to 1.3%, about a hundred times more. That is why the six-counter model of slide 11 onwards takes log(1 + count) as its input.</a:t>
+            </a:r>
+          </a:p>
+          <a:p>
+            <a:pPr lvl="0" indent="0" marL="0">
+              <a:buNone/>
+            </a:pPr>
+          </a:p>
+          <a:p>
+            <a:pPr lvl="0" indent="0" marL="0">
+              <a:buNone/>
+            </a:pPr>
+            <a:r>
+              <a:rPr/>
+              <a:t>If a sharp student notices that 0.012% to 1.3% is a smaller move in probability than slide 7’s 0.03: compare effects in z, not in probability. That drive starts so deep in the flat tail that even a hundredfold rise moves its probability by only 0.013. Handout section 2.2.</a:t>
             </a:r>
           </a:p>
           <a:p>

--- a/Lessons/04_classification_and_metrics/Slides/classification_and_metrics_slides.pptx
+++ b/Lessons/04_classification_and_metrics/Slides/classification_and_metrics_slides.pptx
@@ -4610,7 +4610,7 @@
             </a:pPr>
             <a:r>
               <a:rPr/>
-              <a:t>SMART is the diagnostic data a drive keeps about itself: reallocated sectors (bad patches of the disk the drive has had to replace), spin retries, read error rate, temperature, hours in service, and seek error rate. Expand the acronym on the slide and out loud - it is the kind of thing that gets skipped and then quietly blocks a student for the rest of the hour.</a:t>
+              <a:t>SMART is the diagnostic data a drive keeps about itself. The third bullet names the six: reallocated sectors (bad patches of the disk the drive has retired and replaced with spare ones), spin retries (times the motor needed a second attempt to bring the platters up to speed), the share of reads and of head movements that hit an error, temperature, and hours in service. Handout section 1.1 has them in a table, with a typical drive’s values. Expand the acronym on the slide and out loud - it is the kind of thing that gets skipped and then quietly blocks a student for the rest of the hour.</a:t>
             </a:r>
           </a:p>
           <a:p>
@@ -17550,6 +17550,13 @@
             <a:r>
               <a:rPr/>
               <a:t>Six SMART counters each: Self-Monitoring, Analysis and Reporting Technology</a:t>
+            </a:r>
+          </a:p>
+          <a:p>
+            <a:pPr lvl="0"/>
+            <a:r>
+              <a:rPr/>
+              <a:t>Reallocated sectors, spin retries, read and seek error rates, temperature, hours in service</a:t>
             </a:r>
           </a:p>
           <a:p>

--- a/Lessons/04_classification_and_metrics/Slides/classification_and_metrics_slides.pptx
+++ b/Lessons/04_classification_and_metrics/Slides/classification_and_metrics_slides.pptx
@@ -7251,77 +7251,105 @@
             </a:pPr>
             <a:r>
               <a:rPr/>
-              <a:t>Slide 9 said the log-odds has the range a line needs. That is true, but it is not a reason: plenty of other functions also stretch (0, 1) onto the whole line. This slide gives the reason, and it is about how evidence combines.</a:t>
-            </a:r>
-          </a:p>
-          <a:p>
-            <a:pPr lvl="0" indent="0" marL="0">
-              <a:buNone/>
-            </a:pPr>
-          </a:p>
-          <a:p>
-            <a:pPr lvl="0" indent="0" marL="0">
-              <a:buNone/>
-            </a:pPr>
-            <a:r>
-              <a:rPr/>
-              <a:t>Start from what a linear model does. It adds one contribution per feature, and each contribution is the same whatever the other features say. So we want the same evidence - say, one standard deviation more of reallocated sectors - to raise the risk by the same amount on every drive.</a:t>
-            </a:r>
-          </a:p>
-          <a:p>
-            <a:pPr lvl="0" indent="0" marL="0">
-              <a:buNone/>
-            </a:pPr>
-          </a:p>
-          <a:p>
-            <a:pPr lvl="0" indent="0" marL="0">
-              <a:buNone/>
-            </a:pPr>
-            <a:r>
-              <a:rPr/>
-              <a:t>Last column first. Try a fixed step in probability: plus 0.10. A drive at 50% goes to 60%, fine. A drive at 95% goes to 105%, which is not a probability. No step is small enough to be safe for every drive.</a:t>
-            </a:r>
-          </a:p>
-          <a:p>
-            <a:pPr lvl="0" indent="0" marL="0">
-              <a:buNone/>
-            </a:pPr>
-          </a:p>
-          <a:p>
-            <a:pPr lvl="0" indent="0" marL="0">
-              <a:buNone/>
-            </a:pPr>
-            <a:r>
-              <a:rPr/>
-              <a:t>Now the odds: the probability of failing divided by the probability of not failing, p over 1 minus p. Bayes’ rule, written with odds, says exactly how evidence acts on them: the odds after seeing a reading are the odds before, times how much more common that reading is among drives that fail than among drives that do not. That ratio is called the likelihood ratio. A reading six times more common among failing drives multiplies the odds by 6 - whatever they were. Six is realistic here: the coefficient of reallocated sectors used to generate the labels is 1.80 per standard deviation, and e to the 1.80 is 6.05 (slide 13 reads coefficients this way; slide 14 shows the true ones).</a:t>
-            </a:r>
-          </a:p>
-          <a:p>
-            <a:pPr lvl="0" indent="0" marL="0">
-              <a:buNone/>
-            </a:pPr>
-          </a:p>
-          <a:p>
-            <a:pPr lvl="0" indent="0" marL="0">
-              <a:buNone/>
-            </a:pPr>
-            <a:r>
-              <a:rPr/>
-              <a:t>Go along the rows. A factor never breaks anything: odds times 6 are still positive odds, so the last-but-one column is always a probability. And read how much it moves: 36 points at 50%, but 1 point at 0.2% and 4 points at 95%. Steep in the middle, flat at both ends - that is slide 8’s sigmoid, and nobody chose it. It is what multiplying the odds looks like on the probability scale.</a:t>
-            </a:r>
-          </a:p>
-          <a:p>
-            <a:pPr lvl="0" indent="0" marL="0">
-              <a:buNone/>
-            </a:pPr>
-          </a:p>
-          <a:p>
-            <a:pPr lvl="0" indent="0" marL="0">
-              <a:buNone/>
-            </a:pPr>
-            <a:r>
-              <a:rPr/>
-              <a:t>Then the step to the next slide. Several readings, if independent given the class, multiply the odds by one factor each. Take the logarithm and the factors become terms that add: log of the odds after equals log of the odds before plus one log-factor per reading. A starting value plus one term per feature is exactly w-transpose-x plus b. The intercept is the log-odds of an average drive, minus 6.20, which is the 0.2% in the first row; each term is the log of the factor its feature multiplies the odds by - log 6 is 1.79. That is why slide 11 puts the line on the log-odds. Handout section 2.3.</a:t>
+              <a:t>Slide 9 said the log-odds has the range a line needs. That is true, but it is not a reason: plenty of other functions also stretch (0, 1) onto the whole line. This slide gives the reason, by counting drives.</a:t>
+            </a:r>
+          </a:p>
+          <a:p>
+            <a:pPr lvl="0" indent="0" marL="0">
+              <a:buNone/>
+            </a:pPr>
+          </a:p>
+          <a:p>
+            <a:pPr lvl="0" indent="0" marL="0">
+              <a:buNone/>
+            </a:pPr>
+            <a:r>
+              <a:rPr/>
+              <a:t>Start from what a linear model does. It adds one contribution per feature, and each contribution is the same whatever the other features say. So we want the same evidence to act on every drive in the same way, whatever its risk.</a:t>
+            </a:r>
+          </a:p>
+          <a:p>
+            <a:pPr lvl="0" indent="0" marL="0">
+              <a:buNone/>
+            </a:pPr>
+          </a:p>
+          <a:p>
+            <a:pPr lvl="0" indent="0" marL="0">
+              <a:buNone/>
+            </a:pPr>
+            <a:r>
+              <a:rPr/>
+              <a:t>Read the table one column at a time, top to bottom. Take 1,000 drives that each have a 50% risk: 500 will fail and 500 will not. A reading arrives - say a high count of reallocated sectors - that shows up on 60% of the drives that are going to fail and on 10% of the healthy ones: six times more often. Among the drives that show it, 60% of 500 is 300 failing and 10% of 500 is 50 healthy. The risk after the reading is 300 out of 350, 86%.</a:t>
+            </a:r>
+          </a:p>
+          <a:p>
+            <a:pPr lvl="0" indent="0" marL="0">
+              <a:buNone/>
+            </a:pPr>
+          </a:p>
+          <a:p>
+            <a:pPr lvl="0" indent="0" marL="0">
+              <a:buNone/>
+            </a:pPr>
+            <a:r>
+              <a:rPr/>
+              <a:t>Same reading, drives at 95%: 950 will fail and 50 will not. Showing the reading: 60% of 950 is 570, 10% of 50 is 5. Risk after: 570 out of 575, 99.1%. It cannot pass 100%, because it is a count out of a total.</a:t>
+            </a:r>
+          </a:p>
+          <a:p>
+            <a:pPr lvl="0" indent="0" marL="0">
+              <a:buNone/>
+            </a:pPr>
+          </a:p>
+          <a:p>
+            <a:pPr lvl="0" indent="0" marL="0">
+              <a:buNone/>
+            </a:pPr>
+            <a:r>
+              <a:rPr/>
+              <a:t>Fourth row: try instead a fixed step in probability, plus 0.10. The drives at 50% go to 60%, fine; the drives at 95% go to 105%, which is not a probability. No step is small enough to be safe for every drive.</a:t>
+            </a:r>
+          </a:p>
+          <a:p>
+            <a:pPr lvl="0" indent="0" marL="0">
+              <a:buNone/>
+            </a:pPr>
+          </a:p>
+          <a:p>
+            <a:pPr lvl="0" indent="0" marL="0">
+              <a:buNone/>
+            </a:pPr>
+            <a:r>
+              <a:rPr/>
+              <a:t>Last row, the one that gives the slide its title. The odds are the failing drives divided by the healthy ones - the same thing as p divided by 1 minus p. Before the reading they are 500 over 500 = 1 and 950 over 50 = 19; after it, 6 and 114. Both multiplied by 6, which is 60% divided by 10%: the failing count is scaled by 0.6 and the healthy count by 0.1, whatever they were. That is Bayes’ rule written with odds: the odds after are the odds before times the likelihood ratio, how much more common the reading is among failing drives than among healthy ones. The 60% and 10% are only an illustration - any pair with ratio 6 gives the same risks. Six itself is realistic: the coefficient of reallocated sectors used to generate the labels is 1.80 per standard deviation, and e to the 1.80 is 6.05 (slide 13 reads coefficients this way; slide 14 shows the true ones).</a:t>
+            </a:r>
+          </a:p>
+          <a:p>
+            <a:pPr lvl="0" indent="0" marL="0">
+              <a:buNone/>
+            </a:pPr>
+          </a:p>
+          <a:p>
+            <a:pPr lvl="0" indent="0" marL="0">
+              <a:buNone/>
+            </a:pPr>
+            <a:r>
+              <a:rPr/>
+              <a:t>Now compare how far the same reading moved the risk: 36 points at 50%, 4 points at 95%. An average drive, at 0.2%, goes to 1.2% - one point (the handout’s table in section 2.3). Steep in the middle, flat at both ends: that is slide 8’s sigmoid, and nobody chose it. It is what multiplying the odds looks like on the probability scale.</a:t>
+            </a:r>
+          </a:p>
+          <a:p>
+            <a:pPr lvl="0" indent="0" marL="0">
+              <a:buNone/>
+            </a:pPr>
+          </a:p>
+          <a:p>
+            <a:pPr lvl="0" indent="0" marL="0">
+              <a:buNone/>
+            </a:pPr>
+            <a:r>
+              <a:rPr/>
+              <a:t>Then the step to the next slide. Several readings, if independent given the class, multiply the odds by one factor each. Take the logarithm and the factors become terms that add: log of the odds after equals log of the odds before plus one log-factor per reading. A starting value plus one term per feature is exactly w-transpose-x plus b. The intercept is the log-odds of an average drive, minus 6.20, which is the 0.2% above; each term is the log of the factor its feature multiplies the odds by - log 6 is 1.79. That is why slide 11 puts the line on the log-odds. Handout section 2.3.</a:t>
             </a:r>
           </a:p>
         </p:txBody>
@@ -10538,11 +10566,9 @@
                 <a:tableStyleId>{5C22544A-7EE6-4342-B048-85BDC9FD1C3A}</a:tableStyleId>
               </a:tblPr>
               <a:tblGrid>
-                <a:gridCol w="1645920"/>
-                <a:gridCol w="1645920"/>
-                <a:gridCol w="1645920"/>
-                <a:gridCol w="1645920"/>
-                <a:gridCol w="1645920"/>
+                <a:gridCol w="2743200"/>
+                <a:gridCol w="2743200"/>
+                <a:gridCol w="2743200"/>
               </a:tblGrid>
               <a:tr h="0">
                 <a:tc>
@@ -10555,7 +10581,7 @@
                       </a:pPr>
                       <a:r>
                         <a:rPr/>
-                        <a:t>Risk before, p</a:t>
+                        <a:t>One reading, 6 times more common among failing drives</a:t>
                       </a:r>
                     </a:p>
                   </a:txBody>
@@ -10571,7 +10597,7 @@
                       </a:pPr>
                       <a:r>
                         <a:rPr/>
-                        <a:t>Odds before, p ÷ (1 − p)</a:t>
+                        <a:t>Drives at 50% risk</a:t>
                       </a:r>
                     </a:p>
                   </a:txBody>
@@ -10587,39 +10613,7 @@
                       </a:pPr>
                       <a:r>
                         <a:rPr/>
-                        <a:t>A reading 6 times more common among failing drives: odds × 6</a:t>
-                      </a:r>
-                    </a:p>
-                  </a:txBody>
-                  <a:tcPr/>
-                </a:tc>
-                <a:tc>
-                  <a:txBody>
-                    <a:bodyPr/>
-                    <a:lstStyle/>
-                    <a:p>
-                      <a:pPr lvl="0" indent="0" marL="0">
-                        <a:buNone/>
-                      </a:pPr>
-                      <a:r>
-                        <a:rPr/>
-                        <a:t>Risk after, odds ÷ (1 + odds)</a:t>
-                      </a:r>
-                    </a:p>
-                  </a:txBody>
-                  <a:tcPr/>
-                </a:tc>
-                <a:tc>
-                  <a:txBody>
-                    <a:bodyPr/>
-                    <a:lstStyle/>
-                    <a:p>
-                      <a:pPr lvl="0" indent="0" marL="0">
-                        <a:buNone/>
-                      </a:pPr>
-                      <a:r>
-                        <a:rPr/>
-                        <a:t>Adding 0.10 to the risk instead</a:t>
+                        <a:t>Drives at 95% risk</a:t>
                       </a:r>
                     </a:p>
                   </a:txBody>
@@ -10637,67 +10631,37 @@
                       </a:pPr>
                       <a:r>
                         <a:rPr/>
-                        <a:t>0.2% (an average drive)</a:t>
-                      </a:r>
-                    </a:p>
-                  </a:txBody>
-                </a:tc>
-                <a:tc>
-                  <a:txBody>
-                    <a:bodyPr/>
-                    <a:lstStyle/>
-                    <a:p>
-                      <a:pPr lvl="0" indent="0" marL="0">
-                        <a:buNone/>
-                      </a:pPr>
-                      <a:r>
-                        <a:rPr/>
-                        <a:t>0.002</a:t>
-                      </a:r>
-                    </a:p>
-                  </a:txBody>
-                </a:tc>
-                <a:tc>
-                  <a:txBody>
-                    <a:bodyPr/>
-                    <a:lstStyle/>
-                    <a:p>
-                      <a:pPr lvl="0" indent="0" marL="0">
-                        <a:buNone/>
-                      </a:pPr>
-                      <a:r>
-                        <a:rPr/>
-                        <a:t>0.012</a:t>
-                      </a:r>
-                    </a:p>
-                  </a:txBody>
-                </a:tc>
-                <a:tc>
-                  <a:txBody>
-                    <a:bodyPr/>
-                    <a:lstStyle/>
-                    <a:p>
-                      <a:pPr lvl="0" indent="0" marL="0">
-                        <a:buNone/>
-                      </a:pPr>
-                      <a:r>
-                        <a:rPr/>
-                        <a:t>1.2%</a:t>
-                      </a:r>
-                    </a:p>
-                  </a:txBody>
-                </a:tc>
-                <a:tc>
-                  <a:txBody>
-                    <a:bodyPr/>
-                    <a:lstStyle/>
-                    <a:p>
-                      <a:pPr lvl="0" indent="0" marL="0">
-                        <a:buNone/>
-                      </a:pPr>
-                      <a:r>
-                        <a:rPr/>
-                        <a:t>10.2%</a:t>
+                        <a:t>1,000 such drives: will fail / stay healthy</a:t>
+                      </a:r>
+                    </a:p>
+                  </a:txBody>
+                </a:tc>
+                <a:tc>
+                  <a:txBody>
+                    <a:bodyPr/>
+                    <a:lstStyle/>
+                    <a:p>
+                      <a:pPr lvl="0" indent="0" marL="0">
+                        <a:buNone/>
+                      </a:pPr>
+                      <a:r>
+                        <a:rPr/>
+                        <a:t>500 / 500</a:t>
+                      </a:r>
+                    </a:p>
+                  </a:txBody>
+                </a:tc>
+                <a:tc>
+                  <a:txBody>
+                    <a:bodyPr/>
+                    <a:lstStyle/>
+                    <a:p>
+                      <a:pPr lvl="0" indent="0" marL="0">
+                        <a:buNone/>
+                      </a:pPr>
+                      <a:r>
+                        <a:rPr/>
+                        <a:t>950 / 50</a:t>
                       </a:r>
                     </a:p>
                   </a:txBody>
@@ -10714,67 +10678,37 @@
                       </a:pPr>
                       <a:r>
                         <a:rPr/>
-                        <a:t>50%</a:t>
-                      </a:r>
-                    </a:p>
-                  </a:txBody>
-                </a:tc>
-                <a:tc>
-                  <a:txBody>
-                    <a:bodyPr/>
-                    <a:lstStyle/>
-                    <a:p>
-                      <a:pPr lvl="0" indent="0" marL="0">
-                        <a:buNone/>
-                      </a:pPr>
-                      <a:r>
-                        <a:rPr/>
-                        <a:t>1</a:t>
-                      </a:r>
-                    </a:p>
-                  </a:txBody>
-                </a:tc>
-                <a:tc>
-                  <a:txBody>
-                    <a:bodyPr/>
-                    <a:lstStyle/>
-                    <a:p>
-                      <a:pPr lvl="0" indent="0" marL="0">
-                        <a:buNone/>
-                      </a:pPr>
-                      <a:r>
-                        <a:rPr/>
-                        <a:t>6</a:t>
-                      </a:r>
-                    </a:p>
-                  </a:txBody>
-                </a:tc>
-                <a:tc>
-                  <a:txBody>
-                    <a:bodyPr/>
-                    <a:lstStyle/>
-                    <a:p>
-                      <a:pPr lvl="0" indent="0" marL="0">
-                        <a:buNone/>
-                      </a:pPr>
-                      <a:r>
-                        <a:rPr/>
-                        <a:t>86%</a:t>
-                      </a:r>
-                    </a:p>
-                  </a:txBody>
-                </a:tc>
-                <a:tc>
-                  <a:txBody>
-                    <a:bodyPr/>
-                    <a:lstStyle/>
-                    <a:p>
-                      <a:pPr lvl="0" indent="0" marL="0">
-                        <a:buNone/>
-                      </a:pPr>
-                      <a:r>
-                        <a:rPr/>
-                        <a:t>60%</a:t>
+                        <a:t>Those showing the reading: 60% of failing, 10% of healthy</a:t>
+                      </a:r>
+                    </a:p>
+                  </a:txBody>
+                </a:tc>
+                <a:tc>
+                  <a:txBody>
+                    <a:bodyPr/>
+                    <a:lstStyle/>
+                    <a:p>
+                      <a:pPr lvl="0" indent="0" marL="0">
+                        <a:buNone/>
+                      </a:pPr>
+                      <a:r>
+                        <a:rPr/>
+                        <a:t>300 / 50</a:t>
+                      </a:r>
+                    </a:p>
+                  </a:txBody>
+                </a:tc>
+                <a:tc>
+                  <a:txBody>
+                    <a:bodyPr/>
+                    <a:lstStyle/>
+                    <a:p>
+                      <a:pPr lvl="0" indent="0" marL="0">
+                        <a:buNone/>
+                      </a:pPr>
+                      <a:r>
+                        <a:rPr/>
+                        <a:t>570 / 5</a:t>
                       </a:r>
                     </a:p>
                   </a:txBody>
@@ -10791,52 +10725,69 @@
                       </a:pPr>
                       <a:r>
                         <a:rPr/>
-                        <a:t>95%</a:t>
-                      </a:r>
-                    </a:p>
-                  </a:txBody>
-                </a:tc>
-                <a:tc>
-                  <a:txBody>
-                    <a:bodyPr/>
-                    <a:lstStyle/>
-                    <a:p>
-                      <a:pPr lvl="0" indent="0" marL="0">
-                        <a:buNone/>
-                      </a:pPr>
-                      <a:r>
-                        <a:rPr/>
-                        <a:t>19</a:t>
-                      </a:r>
-                    </a:p>
-                  </a:txBody>
-                </a:tc>
-                <a:tc>
-                  <a:txBody>
-                    <a:bodyPr/>
-                    <a:lstStyle/>
-                    <a:p>
-                      <a:pPr lvl="0" indent="0" marL="0">
-                        <a:buNone/>
-                      </a:pPr>
-                      <a:r>
-                        <a:rPr/>
-                        <a:t>114</a:t>
-                      </a:r>
-                    </a:p>
-                  </a:txBody>
-                </a:tc>
-                <a:tc>
-                  <a:txBody>
-                    <a:bodyPr/>
-                    <a:lstStyle/>
-                    <a:p>
-                      <a:pPr lvl="0" indent="0" marL="0">
-                        <a:buNone/>
-                      </a:pPr>
-                      <a:r>
-                        <a:rPr/>
-                        <a:t>99.1%</a:t>
+                        <a:t>Risk after the reading: failing ÷ all showing it</a:t>
+                      </a:r>
+                    </a:p>
+                  </a:txBody>
+                </a:tc>
+                <a:tc>
+                  <a:txBody>
+                    <a:bodyPr/>
+                    <a:lstStyle/>
+                    <a:p>
+                      <a:pPr lvl="0" indent="0" marL="0">
+                        <a:buNone/>
+                      </a:pPr>
+                      <a:r>
+                        <a:rPr/>
+                        <a:t>300 ÷ 350 = 86%</a:t>
+                      </a:r>
+                    </a:p>
+                  </a:txBody>
+                </a:tc>
+                <a:tc>
+                  <a:txBody>
+                    <a:bodyPr/>
+                    <a:lstStyle/>
+                    <a:p>
+                      <a:pPr lvl="0" indent="0" marL="0">
+                        <a:buNone/>
+                      </a:pPr>
+                      <a:r>
+                        <a:rPr/>
+                        <a:t>570 ÷ 575 = 99.1%</a:t>
+                      </a:r>
+                    </a:p>
+                  </a:txBody>
+                </a:tc>
+              </a:tr>
+              <a:tr h="0">
+                <a:tc>
+                  <a:txBody>
+                    <a:bodyPr/>
+                    <a:lstStyle/>
+                    <a:p>
+                      <a:pPr lvl="0" indent="0" marL="0">
+                        <a:buNone/>
+                      </a:pPr>
+                      <a:r>
+                        <a:rPr/>
+                        <a:t>Adding 0.10 to the risk instead</a:t>
+                      </a:r>
+                    </a:p>
+                  </a:txBody>
+                </a:tc>
+                <a:tc>
+                  <a:txBody>
+                    <a:bodyPr/>
+                    <a:lstStyle/>
+                    <a:p>
+                      <a:pPr lvl="0" indent="0" marL="0">
+                        <a:buNone/>
+                      </a:pPr>
+                      <a:r>
+                        <a:rPr/>
+                        <a:t>60%</a:t>
                       </a:r>
                     </a:p>
                   </a:txBody>
@@ -10852,6 +10803,53 @@
                       <a:r>
                         <a:rPr/>
                         <a:t>105%: impossible</a:t>
+                      </a:r>
+                    </a:p>
+                  </a:txBody>
+                </a:tc>
+              </a:tr>
+              <a:tr h="0">
+                <a:tc>
+                  <a:txBody>
+                    <a:bodyPr/>
+                    <a:lstStyle/>
+                    <a:p>
+                      <a:pPr lvl="0" indent="0" marL="0">
+                        <a:buNone/>
+                      </a:pPr>
+                      <a:r>
+                        <a:rPr/>
+                        <a:t>Odds = failing ÷ healthy, before and after</a:t>
+                      </a:r>
+                    </a:p>
+                  </a:txBody>
+                </a:tc>
+                <a:tc>
+                  <a:txBody>
+                    <a:bodyPr/>
+                    <a:lstStyle/>
+                    <a:p>
+                      <a:pPr lvl="0" indent="0" marL="0">
+                        <a:buNone/>
+                      </a:pPr>
+                      <a:r>
+                        <a:rPr/>
+                        <a:t>1, then 300 ÷ 50 = 6: × 6</a:t>
+                      </a:r>
+                    </a:p>
+                  </a:txBody>
+                </a:tc>
+                <a:tc>
+                  <a:txBody>
+                    <a:bodyPr/>
+                    <a:lstStyle/>
+                    <a:p>
+                      <a:pPr lvl="0" indent="0" marL="0">
+                        <a:buNone/>
+                      </a:pPr>
+                      <a:r>
+                        <a:rPr/>
+                        <a:t>19, then 570 ÷ 5 = 114: × 6</a:t>
                       </a:r>
                     </a:p>
                   </a:txBody>

--- a/Lessons/04_classification_and_metrics/Slides/classification_and_metrics_slides.pptx
+++ b/Lessons/04_classification_and_metrics/Slides/classification_and_metrics_slides.pptx
@@ -7251,7 +7251,7 @@
             </a:pPr>
             <a:r>
               <a:rPr/>
-              <a:t>Slide 9 said the log-odds has the range a line needs. That is true, but it is not a reason: plenty of other functions also stretch (0, 1) onto the whole line. This slide gives the reason, by counting drives.</a:t>
+              <a:t>Slide 9 said the log-odds has the range a line needs. That is true, but it is not a reason: plenty of other functions also stretch (0, 1) onto the whole line. This picture gives the reason.</a:t>
             </a:r>
           </a:p>
           <a:p>
@@ -7279,77 +7279,49 @@
             </a:pPr>
             <a:r>
               <a:rPr/>
-              <a:t>Read the table one column at a time, top to bottom. Take 1,000 drives that each have a 50% risk: 500 will fail and 500 will not. A reading arrives - say a high count of reallocated sectors - that shows up on 60% of the drives that are going to fail and on 10% of the healthy ones: six times more often. Among the drives that show it, 60% of 500 is 300 failing and 10% of 500 is 50 healthy. The risk after the reading is 300 out of 350, 86%.</a:t>
-            </a:r>
-          </a:p>
-          <a:p>
-            <a:pPr lvl="0" indent="0" marL="0">
-              <a:buNone/>
-            </a:pPr>
-          </a:p>
-          <a:p>
-            <a:pPr lvl="0" indent="0" marL="0">
-              <a:buNone/>
-            </a:pPr>
-            <a:r>
-              <a:rPr/>
-              <a:t>Same reading, drives at 95%: 950 will fail and 50 will not. Showing the reading: 60% of 950 is 570, 10% of 50 is 5. Risk after: 570 out of 575, 99.1%. It cannot pass 100%, because it is a count out of a total.</a:t>
-            </a:r>
-          </a:p>
-          <a:p>
-            <a:pPr lvl="0" indent="0" marL="0">
-              <a:buNone/>
-            </a:pPr>
-          </a:p>
-          <a:p>
-            <a:pPr lvl="0" indent="0" marL="0">
-              <a:buNone/>
-            </a:pPr>
-            <a:r>
-              <a:rPr/>
-              <a:t>Fourth row: try instead a fixed step in probability, plus 0.10. The drives at 50% go to 60%, fine; the drives at 95% go to 105%, which is not a probability. No step is small enough to be safe for every drive.</a:t>
-            </a:r>
-          </a:p>
-          <a:p>
-            <a:pPr lvl="0" indent="0" marL="0">
-              <a:buNone/>
-            </a:pPr>
-          </a:p>
-          <a:p>
-            <a:pPr lvl="0" indent="0" marL="0">
-              <a:buNone/>
-            </a:pPr>
-            <a:r>
-              <a:rPr/>
-              <a:t>Last row, the one that gives the slide its title. The odds are the failing drives divided by the healthy ones - the same thing as p divided by 1 minus p. Before the reading they are 500 over 500 = 1 and 950 over 50 = 19; after it, 6 and 114. Both multiplied by 6, which is 60% divided by 10%: the failing count is scaled by 0.6 and the healthy count by 0.1, whatever they were. That is Bayes’ rule written with odds: the odds after are the odds before times the likelihood ratio, how much more common the reading is among failing drives than among healthy ones. The 60% and 10% are only an illustration - any pair with ratio 6 gives the same risks. Six itself is realistic: the coefficient of reallocated sectors used to generate the labels is 1.80 per standard deviation, and e to the 1.80 is 6.05 (slide 13 reads coefficients this way; slide 14 shows the true ones).</a:t>
-            </a:r>
-          </a:p>
-          <a:p>
-            <a:pPr lvl="0" indent="0" marL="0">
-              <a:buNone/>
-            </a:pPr>
-          </a:p>
-          <a:p>
-            <a:pPr lvl="0" indent="0" marL="0">
-              <a:buNone/>
-            </a:pPr>
-            <a:r>
-              <a:rPr/>
-              <a:t>Now compare how far the same reading moved the risk: 36 points at 50%, 4 points at 95%. An average drive, at 0.2%, goes to 1.2% - one point (the handout’s table in section 2.3). Steep in the middle, flat at both ends: that is slide 8’s sigmoid, and nobody chose it. It is what multiplying the odds looks like on the probability scale.</a:t>
-            </a:r>
-          </a:p>
-          <a:p>
-            <a:pPr lvl="0" indent="0" marL="0">
-              <a:buNone/>
-            </a:pPr>
-          </a:p>
-          <a:p>
-            <a:pPr lvl="0" indent="0" marL="0">
-              <a:buNone/>
-            </a:pPr>
-            <a:r>
-              <a:rPr/>
-              <a:t>Then the step to the next slide. Several readings, if independent given the class, multiply the odds by one factor each. Take the logarithm and the factors become terms that add: log of the odds after equals log of the odds before plus one log-factor per reading. A starting value plus one term per feature is exactly w-transpose-x plus b. The intercept is the log-odds of an average drive, minus 6.20, which is the 0.2% above; each term is the log of the factor its feature multiplies the odds by - log 6 is 1.79. That is why slide 11 puts the line on the log-odds. Handout section 2.3.</a:t>
+              <a:t>The picture shows three drives, marked by the yellow dots: an average drive at 0.2%, one at 50% and one at 95%. Each receives the same reading, one that is six times more common among drives that fail than among healthy ones. Bayes’ rule says such a reading multiplies the odds - the probability of failing divided by the probability of not failing - by 6, whatever they were before (handout section 2.3 shows it by counting 1,000 drives). On the horizontal axis, the log-odds, multiplying by 6 is always the same step: the three teal arrows have the same length.</a:t>
+            </a:r>
+          </a:p>
+          <a:p>
+            <a:pPr lvl="0" indent="0" marL="0">
+              <a:buNone/>
+            </a:pPr>
+          </a:p>
+          <a:p>
+            <a:pPr lvl="0" indent="0" marL="0">
+              <a:buNone/>
+            </a:pPr>
+            <a:r>
+              <a:rPr/>
+              <a:t>Now the rust arrows: what that same step does to the probability. 36 points for the drive at 50%, 4 points for the drive at 95%, 1 point for the average drive. And it never passes 100%, because the curve cannot. A fixed step in probability would: plus 0.10 takes the drive at 95% to 105%.</a:t>
+            </a:r>
+          </a:p>
+          <a:p>
+            <a:pPr lvl="0" indent="0" marL="0">
+              <a:buNone/>
+            </a:pPr>
+          </a:p>
+          <a:p>
+            <a:pPr lvl="0" indent="0" marL="0">
+              <a:buNone/>
+            </a:pPr>
+            <a:r>
+              <a:rPr/>
+              <a:t>So nobody chose the S-shape of slide 8. It is what “evidence multiplies the odds” looks like when it is drawn as a probability: steep in the middle, flat at both ends.</a:t>
+            </a:r>
+          </a:p>
+          <a:p>
+            <a:pPr lvl="0" indent="0" marL="0">
+              <a:buNone/>
+            </a:pPr>
+          </a:p>
+          <a:p>
+            <a:pPr lvl="0" indent="0" marL="0">
+              <a:buNone/>
+            </a:pPr>
+            <a:r>
+              <a:rPr/>
+              <a:t>The step to the next slide: on the log-odds axis, evidence simply adds. Several readings, if independent given the class, are one fixed step each, starting from the average drive at minus 6.20. A starting value plus one step per feature is exactly w-transpose-x plus b, which is why slide 11 puts the line on the log-odds. Six is a realistic factor: the coefficient of reallocated sectors used to generate the labels is 1.80 per standard deviation, and e to the 1.80 is 6.05 (slide 13 reads coefficients this way; slide 14 shows the true ones).</a:t>
             </a:r>
           </a:p>
         </p:txBody>
@@ -10545,320 +10517,36 @@
           </a:p>
         </p:txBody>
       </p:sp>
-      <p:graphicFrame>
-        <p:nvGraphicFramePr>
-          <p:cNvPr id="6" name="Content Placeholder 5"/>
-          <p:cNvGraphicFramePr>
-            <a:graphicFrameLocks noGrp="1"/>
-          </p:cNvGraphicFramePr>
-          <p:nvPr>
-            <p:ph idx="1"/>
-          </p:nvPr>
-        </p:nvGraphicFramePr>
-        <p:xfrm>
-          <a:off x="457200" y="1166099"/>
-          <a:ext cx="8229600" cy="3390900"/>
-        </p:xfrm>
-        <a:graphic>
-          <a:graphicData uri="http://schemas.openxmlformats.org/drawingml/2006/table">
-            <a:tbl>
-              <a:tblPr firstRow="1" bandRow="1">
-                <a:tableStyleId>{5C22544A-7EE6-4342-B048-85BDC9FD1C3A}</a:tableStyleId>
-              </a:tblPr>
-              <a:tblGrid>
-                <a:gridCol w="2743200"/>
-                <a:gridCol w="2743200"/>
-                <a:gridCol w="2743200"/>
-              </a:tblGrid>
-              <a:tr h="0">
-                <a:tc>
-                  <a:txBody>
-                    <a:bodyPr/>
-                    <a:lstStyle/>
-                    <a:p>
-                      <a:pPr lvl="0" indent="0" marL="0">
-                        <a:buNone/>
-                      </a:pPr>
-                      <a:r>
-                        <a:rPr/>
-                        <a:t>One reading, 6 times more common among failing drives</a:t>
-                      </a:r>
-                    </a:p>
-                  </a:txBody>
-                  <a:tcPr/>
-                </a:tc>
-                <a:tc>
-                  <a:txBody>
-                    <a:bodyPr/>
-                    <a:lstStyle/>
-                    <a:p>
-                      <a:pPr lvl="0" indent="0" marL="0">
-                        <a:buNone/>
-                      </a:pPr>
-                      <a:r>
-                        <a:rPr/>
-                        <a:t>Drives at 50% risk</a:t>
-                      </a:r>
-                    </a:p>
-                  </a:txBody>
-                  <a:tcPr/>
-                </a:tc>
-                <a:tc>
-                  <a:txBody>
-                    <a:bodyPr/>
-                    <a:lstStyle/>
-                    <a:p>
-                      <a:pPr lvl="0" indent="0" marL="0">
-                        <a:buNone/>
-                      </a:pPr>
-                      <a:r>
-                        <a:rPr/>
-                        <a:t>Drives at 95% risk</a:t>
-                      </a:r>
-                    </a:p>
-                  </a:txBody>
-                  <a:tcPr/>
-                </a:tc>
-              </a:tr>
-              <a:tr h="0">
-                <a:tc>
-                  <a:txBody>
-                    <a:bodyPr/>
-                    <a:lstStyle/>
-                    <a:p>
-                      <a:pPr lvl="0" indent="0" marL="0">
-                        <a:buNone/>
-                      </a:pPr>
-                      <a:r>
-                        <a:rPr/>
-                        <a:t>1,000 such drives: will fail / stay healthy</a:t>
-                      </a:r>
-                    </a:p>
-                  </a:txBody>
-                </a:tc>
-                <a:tc>
-                  <a:txBody>
-                    <a:bodyPr/>
-                    <a:lstStyle/>
-                    <a:p>
-                      <a:pPr lvl="0" indent="0" marL="0">
-                        <a:buNone/>
-                      </a:pPr>
-                      <a:r>
-                        <a:rPr/>
-                        <a:t>500 / 500</a:t>
-                      </a:r>
-                    </a:p>
-                  </a:txBody>
-                </a:tc>
-                <a:tc>
-                  <a:txBody>
-                    <a:bodyPr/>
-                    <a:lstStyle/>
-                    <a:p>
-                      <a:pPr lvl="0" indent="0" marL="0">
-                        <a:buNone/>
-                      </a:pPr>
-                      <a:r>
-                        <a:rPr/>
-                        <a:t>950 / 50</a:t>
-                      </a:r>
-                    </a:p>
-                  </a:txBody>
-                </a:tc>
-              </a:tr>
-              <a:tr h="0">
-                <a:tc>
-                  <a:txBody>
-                    <a:bodyPr/>
-                    <a:lstStyle/>
-                    <a:p>
-                      <a:pPr lvl="0" indent="0" marL="0">
-                        <a:buNone/>
-                      </a:pPr>
-                      <a:r>
-                        <a:rPr/>
-                        <a:t>Those showing the reading: 60% of failing, 10% of healthy</a:t>
-                      </a:r>
-                    </a:p>
-                  </a:txBody>
-                </a:tc>
-                <a:tc>
-                  <a:txBody>
-                    <a:bodyPr/>
-                    <a:lstStyle/>
-                    <a:p>
-                      <a:pPr lvl="0" indent="0" marL="0">
-                        <a:buNone/>
-                      </a:pPr>
-                      <a:r>
-                        <a:rPr/>
-                        <a:t>300 / 50</a:t>
-                      </a:r>
-                    </a:p>
-                  </a:txBody>
-                </a:tc>
-                <a:tc>
-                  <a:txBody>
-                    <a:bodyPr/>
-                    <a:lstStyle/>
-                    <a:p>
-                      <a:pPr lvl="0" indent="0" marL="0">
-                        <a:buNone/>
-                      </a:pPr>
-                      <a:r>
-                        <a:rPr/>
-                        <a:t>570 / 5</a:t>
-                      </a:r>
-                    </a:p>
-                  </a:txBody>
-                </a:tc>
-              </a:tr>
-              <a:tr h="0">
-                <a:tc>
-                  <a:txBody>
-                    <a:bodyPr/>
-                    <a:lstStyle/>
-                    <a:p>
-                      <a:pPr lvl="0" indent="0" marL="0">
-                        <a:buNone/>
-                      </a:pPr>
-                      <a:r>
-                        <a:rPr/>
-                        <a:t>Risk after the reading: failing ÷ all showing it</a:t>
-                      </a:r>
-                    </a:p>
-                  </a:txBody>
-                </a:tc>
-                <a:tc>
-                  <a:txBody>
-                    <a:bodyPr/>
-                    <a:lstStyle/>
-                    <a:p>
-                      <a:pPr lvl="0" indent="0" marL="0">
-                        <a:buNone/>
-                      </a:pPr>
-                      <a:r>
-                        <a:rPr/>
-                        <a:t>300 ÷ 350 = 86%</a:t>
-                      </a:r>
-                    </a:p>
-                  </a:txBody>
-                </a:tc>
-                <a:tc>
-                  <a:txBody>
-                    <a:bodyPr/>
-                    <a:lstStyle/>
-                    <a:p>
-                      <a:pPr lvl="0" indent="0" marL="0">
-                        <a:buNone/>
-                      </a:pPr>
-                      <a:r>
-                        <a:rPr/>
-                        <a:t>570 ÷ 575 = 99.1%</a:t>
-                      </a:r>
-                    </a:p>
-                  </a:txBody>
-                </a:tc>
-              </a:tr>
-              <a:tr h="0">
-                <a:tc>
-                  <a:txBody>
-                    <a:bodyPr/>
-                    <a:lstStyle/>
-                    <a:p>
-                      <a:pPr lvl="0" indent="0" marL="0">
-                        <a:buNone/>
-                      </a:pPr>
-                      <a:r>
-                        <a:rPr/>
-                        <a:t>Adding 0.10 to the risk instead</a:t>
-                      </a:r>
-                    </a:p>
-                  </a:txBody>
-                </a:tc>
-                <a:tc>
-                  <a:txBody>
-                    <a:bodyPr/>
-                    <a:lstStyle/>
-                    <a:p>
-                      <a:pPr lvl="0" indent="0" marL="0">
-                        <a:buNone/>
-                      </a:pPr>
-                      <a:r>
-                        <a:rPr/>
-                        <a:t>60%</a:t>
-                      </a:r>
-                    </a:p>
-                  </a:txBody>
-                </a:tc>
-                <a:tc>
-                  <a:txBody>
-                    <a:bodyPr/>
-                    <a:lstStyle/>
-                    <a:p>
-                      <a:pPr lvl="0" indent="0" marL="0">
-                        <a:buNone/>
-                      </a:pPr>
-                      <a:r>
-                        <a:rPr/>
-                        <a:t>105%: impossible</a:t>
-                      </a:r>
-                    </a:p>
-                  </a:txBody>
-                </a:tc>
-              </a:tr>
-              <a:tr h="0">
-                <a:tc>
-                  <a:txBody>
-                    <a:bodyPr/>
-                    <a:lstStyle/>
-                    <a:p>
-                      <a:pPr lvl="0" indent="0" marL="0">
-                        <a:buNone/>
-                      </a:pPr>
-                      <a:r>
-                        <a:rPr/>
-                        <a:t>Odds = failing ÷ healthy, before and after</a:t>
-                      </a:r>
-                    </a:p>
-                  </a:txBody>
-                </a:tc>
-                <a:tc>
-                  <a:txBody>
-                    <a:bodyPr/>
-                    <a:lstStyle/>
-                    <a:p>
-                      <a:pPr lvl="0" indent="0" marL="0">
-                        <a:buNone/>
-                      </a:pPr>
-                      <a:r>
-                        <a:rPr/>
-                        <a:t>1, then 300 ÷ 50 = 6: × 6</a:t>
-                      </a:r>
-                    </a:p>
-                  </a:txBody>
-                </a:tc>
-                <a:tc>
-                  <a:txBody>
-                    <a:bodyPr/>
-                    <a:lstStyle/>
-                    <a:p>
-                      <a:pPr lvl="0" indent="0" marL="0">
-                        <a:buNone/>
-                      </a:pPr>
-                      <a:r>
-                        <a:rPr/>
-                        <a:t>19, then 570 ÷ 5 = 114: × 6</a:t>
-                      </a:r>
-                    </a:p>
-                  </a:txBody>
-                </a:tc>
-              </a:tr>
-            </a:tbl>
-          </a:graphicData>
-        </a:graphic>
-      </p:graphicFrame>
+      <p:pic>
+        <p:nvPicPr>
+          <p:cNvPr descr="evidence_on_the_sigmoid.png" id="0" name="Picture 1"/>
+          <p:cNvPicPr>
+            <a:picLocks noGrp="1" noChangeAspect="1"/>
+          </p:cNvPicPr>
+          <p:nvPr/>
+        </p:nvPicPr>
+        <p:blipFill>
+          <a:blip r:embed="rId3"/>
+          <a:stretch>
+            <a:fillRect/>
+          </a:stretch>
+        </p:blipFill>
+        <p:spPr bwMode="auto">
+          <a:xfrm>
+            <a:off x="1016752" y="1166099"/>
+            <a:ext cx="7110495" cy="3360181"/>
+          </a:xfrm>
+          <a:prstGeom prst="rect">
+            <a:avLst/>
+          </a:prstGeom>
+          <a:noFill/>
+          <a:ln w="9525">
+            <a:noFill/>
+            <a:headEnd/>
+            <a:tailEnd/>
+          </a:ln>
+        </p:spPr>
+      </p:pic>
     </p:spTree>
   </p:cSld>
 </p:sld>

--- a/Lessons/04_classification_and_metrics/Slides/classification_and_metrics_slides.pptx
+++ b/Lessons/04_classification_and_metrics/Slides/classification_and_metrics_slides.pptx
@@ -923,21 +923,63 @@
             </a:pPr>
             <a:r>
               <a:rPr/>
-              <a:t>This is the interpretability that keeps logistic regression in production in medicine and credit scoring. Standardising first (StandardScaler, lesson 3) puts every feature in the same unit, one standard deviation, so the coefficients can be compared with each other.</a:t>
-            </a:r>
-          </a:p>
-          <a:p>
-            <a:pPr lvl="0" indent="0" marL="0">
-              <a:buNone/>
-            </a:pPr>
-          </a:p>
-          <a:p>
-            <a:pPr lvl="0" indent="0" marL="0">
-              <a:buNone/>
-            </a:pPr>
-            <a:r>
-              <a:rPr/>
-              <a:t>1.80 is the true coefficient of reallocated_sectors, the one the data was generated with (next slide). It means: a drive one standard deviation worse on that counter has exp(1.80), about six times, the odds of failing. The fitted coefficient on the next slide is 1.66, a multiplier of 5.28.</a:t>
+              <a:t>This is the interpretability that keeps logistic regression in production in medicine and credit scoring. Three steps, one per bullet.</a:t>
+            </a:r>
+          </a:p>
+          <a:p>
+            <a:pPr lvl="0" indent="0" marL="0">
+              <a:buNone/>
+            </a:pPr>
+          </a:p>
+          <a:p>
+            <a:pPr lvl="0" indent="0" marL="0">
+              <a:buNone/>
+            </a:pPr>
+            <a:r>
+              <a:rPr/>
+              <a:t>First bullet, its first half. Standardising first (StandardScaler, lesson 3) puts every feature in the same unit, one standard deviation, so the coefficients can be compared with each other. For the four counters that the data puts on a logarithmic scale, it is one standard deviation of the transformed column.</a:t>
+            </a:r>
+          </a:p>
+          <a:p>
+            <a:pPr lvl="0" indent="0" marL="0">
+              <a:buNone/>
+            </a:pPr>
+          </a:p>
+          <a:p>
+            <a:pPr lvl="0" indent="0" marL="0">
+              <a:buNone/>
+            </a:pPr>
+            <a:r>
+              <a:rPr/>
+              <a:t>First bullet, its second half: this is slide 11’s line, log-odds = b + w1 x1 + … + w6 x6. Each feature contributes its coefficient times its value, so raising reallocated sectors by one standard deviation adds exactly its coefficient to the log-odds - 1.80 is the true coefficient, the one the data was generated with (next slide) - and it adds 1.80 whatever the other five counters say. That is what “linear” buys.</a:t>
+            </a:r>
+          </a:p>
+          <a:p>
+            <a:pPr lvl="0" indent="0" marL="0">
+              <a:buNone/>
+            </a:pPr>
+          </a:p>
+          <a:p>
+            <a:pPr lvl="0" indent="0" marL="0">
+              <a:buNone/>
+            </a:pPr>
+            <a:r>
+              <a:rPr/>
+              <a:t>Second bullet: why a sum on the log-odds becomes a product on the odds. The logarithm turns products into sums, log of a times b is log a plus log b. Read it backwards: adding 1.80 to the logarithm of the odds is the same as multiplying the odds by exp(1.80), which is 6.05. Check it on an average drive: its log-odds are the intercept, minus 6.20, so its odds are exp(-6.20) = 0.0020. One standard deviation more of reallocated sectors: log-odds minus 4.40, odds exp(-4.40) = 0.0123. Divide: 6.05.</a:t>
+            </a:r>
+          </a:p>
+          <a:p>
+            <a:pPr lvl="0" indent="0" marL="0">
+              <a:buNone/>
+            </a:pPr>
+          </a:p>
+          <a:p>
+            <a:pPr lvl="0" indent="0" marL="0">
+              <a:buNone/>
+            </a:pPr>
+            <a:r>
+              <a:rPr/>
+              <a:t>Third bullet: that is the arrow of slide 10’s figure. Every teal arrow was a multiplication of the odds by 6, and on the log-odds axis it had the same length - 1.79, almost exactly this coefficient. The fitted coefficient on the next slide is 1.66, a multiplier of 5.28.</a:t>
             </a:r>
           </a:p>
           <a:p>
@@ -10786,17 +10828,14 @@
             <a:pPr lvl="0"/>
             <a:r>
               <a:rPr/>
-              <a:t>The model is linear in the log-odds, log(p ÷ (1 − p)), so </a:t>
-            </a:r>
-            <a:r>
-              <a:rPr>
-                <a:latin typeface="Courier"/>
-              </a:rPr>
-              <a:t>exp(coefficient)</a:t>
-            </a:r>
-            <a:r>
-              <a:rPr/>
-              <a:t> multiplies the </a:t>
+              <a:t>Standardised: one standard deviation more of reallocated sectors adds 1.80 to the log-odds</a:t>
+            </a:r>
+          </a:p>
+          <a:p>
+            <a:pPr lvl="0"/>
+            <a:r>
+              <a:rPr/>
+              <a:t>Adding to a log multiplies the </a:t>
             </a:r>
             <a:r>
               <a:rPr b="1"/>
@@ -10804,21 +10843,14 @@
             </a:r>
             <a:r>
               <a:rPr/>
-              <a:t>, p ÷ (1 − p)</a:t>
+              <a:t>: log(odds) + 1.80 = log(odds × 6.05), since exp(1.80) = 6.05</a:t>
             </a:r>
           </a:p>
           <a:p>
             <a:pPr lvl="0"/>
             <a:r>
               <a:rPr/>
-              <a:t>Features standardised, so one unit = one standard deviation</a:t>
-            </a:r>
-          </a:p>
-          <a:p>
-            <a:pPr lvl="0"/>
-            <a:r>
-              <a:rPr/>
-              <a:t>A coefficient of 1.80 means </a:t>
+              <a:t>So: </a:t>
             </a:r>
             <a:r>
               <a:rPr b="1"/>
@@ -10826,7 +10858,7 @@
             </a:r>
             <a:r>
               <a:rPr/>
-              <a:t> of failing</a:t>
+              <a:t> of failing, slide 10’s teal step</a:t>
             </a:r>
           </a:p>
           <a:p>

--- a/Lessons/04_classification_and_metrics/Slides/classification_and_metrics_slides.pptx
+++ b/Lessons/04_classification_and_metrics/Slides/classification_and_metrics_slides.pptx
@@ -717,7 +717,7 @@
             </a:pPr>
             <a:r>
               <a:rPr/>
-              <a:t>Check it with a number from the handout’s table in section 2.3: a log-odds of +2.20 gives back 1 over (1 plus e to the minus 2.2), which is 0.90. A log-odds of 0 gives back exactly a half.</a:t>
+              <a:t>Check it with a number: a log-odds of +2.20 gives back 1 over (1 plus e to the minus 2.2) = 1 over (1 + 0.111) = 0.90. Going the other way, a probability of 0.90 is odds of 0.9 divided by 0.1 = 9, and log 9 = 2.20. A log-odds of 0 gives back exactly a half.</a:t>
             </a:r>
           </a:p>
           <a:p>
@@ -841,7 +841,7 @@
             </a:pPr>
             <a:r>
               <a:rPr/>
-              <a:t>That last one is the one to flag. It is largest in the middle, one quarter, and it decays to zero at both ends. That one fact does two jobs later. It is why the sigmoid behaves well: flat ends mean that once the model is sure, extra evidence changes little (slide 8). And it is why squared error fails with it: slide 24 shows that the same factor ends up inside squared error’s gradient and switches learning off exactly when the model is confidently wrong.</a:t>
+              <a:t>That last one is the one to flag. It is largest in the middle, at sigma = 0.5, where it is 0.5 times 0.5 = one quarter, and it decays to zero at both ends. That one fact does two jobs later. It is why the sigmoid behaves well: flat ends mean that once the model is sure, extra evidence changes little (slide 8). And it is why squared error fails with it: slide 24 shows that the same factor ends up inside squared error’s gradient and switches learning off exactly when the model is confidently wrong.</a:t>
             </a:r>
           </a:p>
         </p:txBody>
@@ -1007,7 +1007,7 @@
             </a:pPr>
             <a:r>
               <a:rPr/>
-              <a:t>Give them the counterexample out loud: odds of 9, a probability of 0.90, multiplied by 5 gives odds of 45 - a probability of 0.978. The odds went up fivefold; the probability moved eight points. Odds ratios multiply odds.</a:t>
+              <a:t>Give them the counterexample out loud: a probability of 0.90 is odds of 0.9 divided by 0.1 = 9; multiplied by 5 that gives odds of 45, which is a probability of 45 divided by 46 = 0.978. The odds went up fivefold; the probability moved eight points. Odds ratios multiply odds.</a:t>
             </a:r>
           </a:p>
         </p:txBody>
@@ -1117,7 +1117,7 @@
             </a:pPr>
             <a:r>
               <a:rPr/>
-              <a:t>Go down the column. Everything is close. Nothing is exact, and say why - 6,000 training drives carrying 230 failures is a modest amount of evidence, and 230 is the number that matters, not 6,000.</a:t>
+              <a:t>Go down the column. Everything is close. Nothing is exact, and say why - 6,000 training drives carrying 230 failures (306 in the fleet minus the 76 kept for the test set) is a modest amount of evidence, and 230 is the number that matters, not 6,000.</a:t>
             </a:r>
           </a:p>
           <a:p>
@@ -1847,7 +1847,7 @@
             </a:pPr>
             <a:r>
               <a:rPr/>
-              <a:t>Compare: 0.576 against 0.060. What actually happened is 9.6 times more probable under setting 1, so setting 1 explains the data better. Keep it.</a:t>
+              <a:t>Compare: 0.576 against 0.060. What actually happened is 0.576 divided by 0.060 = 9.6 times more probable under setting 1, so setting 1 explains the data better. Keep it.</a:t>
             </a:r>
           </a:p>
           <a:p>
@@ -2095,7 +2095,7 @@
             </a:pPr>
             <a:r>
               <a:rPr/>
-              <a:t>Two reasons we always work with the logarithm, worth saying aloud. A sum differentiates one term at a time. And the product itself is too small to store. Notebook 1’s gradient descent starts with every coefficient and the intercept at zero, so z is 0 for every drive and every p is 0.5. 0.5 multiplied by itself 6,000 times, once per training drive, is about 10 to the minus 1806, while the smallest positive number a 64-bit float can hold is about 5 times 10 to the minus 324. The computer would store exactly zero.</a:t>
+              <a:t>Two reasons we always work with the logarithm, worth saying aloud. A sum differentiates one term at a time. And the product itself is too small to store. Notebook 1’s gradient descent starts with every coefficient and the intercept at zero, so z is 0 for every drive and every p is 0.5. 0.5 multiplied by itself 6,000 times, once per training drive, is 10 to the power 6,000 times log10 of 0.5 = 6,000 times minus 0.301 = minus 1806, while the smallest positive number a 64-bit float can hold is about 5 times 10 to the minus 324. The computer would store exactly zero.</a:t>
             </a:r>
           </a:p>
           <a:p>
@@ -2495,7 +2495,7 @@
             </a:pPr>
             <a:r>
               <a:rPr/>
-              <a:t>Left panel, the costs. A drive failed and the model said 0.0001. Squared error charges 0.9998. An honest “don’t know” - 0.5 - costs 0.25. So the worst possible answer is four times worse than a shrug. Log loss charges 9.2 against 0.69, and the ratio grows without bound.</a:t>
+              <a:t>Left panel, the costs. A drive failed and the model said 0.0001. Squared error charges (0.0001 - 1) squared = 0.9998. An honest “don’t know” - 0.5 - costs (0.5 - 1) squared = 0.25. So the worst possible answer is four times worse than a shrug. Log loss charges minus log 0.0001 = 9.2 against minus log 0.5 = 0.69, and the ratio grows without bound.</a:t>
             </a:r>
           </a:p>
           <a:p>
@@ -2523,7 +2523,7 @@
             </a:pPr>
             <a:r>
               <a:rPr/>
-              <a:t>Say it as a sentence: the wronger the model gets, the less squared error asks it to change. At p = 0.001 the gradient is a five-hundredth of log loss’s. Log loss goes the other way, approaching its maximum push exactly where the error is worst.</a:t>
+              <a:t>Say it as a sentence: the wronger the model gets, the less squared error asks it to change. Divide one gradient by the other: squared error’s is log loss’s times 2p(1 - p). At p = 0.001 that factor is 2 times 0.001 times 0.999 = 0.002, a five-hundredth. Log loss goes the other way, approaching its maximum push exactly where the error is worst.</a:t>
             </a:r>
           </a:p>
           <a:p>
@@ -3111,21 +3111,21 @@
             </a:r>
             <a:r>
               <a:rPr/>
-              <a:t> - no learning, no data, no features - scores 96.20%. The model they just built, which finds more than half the failing drives, scores 97.70%. One and a half percentage points separate a real model from a worthless one.</a:t>
-            </a:r>
-          </a:p>
-          <a:p>
-            <a:pPr lvl="0" indent="0" marL="0">
-              <a:buNone/>
-            </a:pPr>
-          </a:p>
-          <a:p>
-            <a:pPr lvl="0" indent="0" marL="0">
-              <a:buNone/>
-            </a:pPr>
-            <a:r>
-              <a:rPr/>
-              <a:t>The arithmetic is not subtle: 1,924 of the 2,000 test drives are healthy, so answering “healthy” collects them all for free. Only 3.8% of the test set is left to compete over.</a:t>
+              <a:t> - no learning, no data, no features - scores 96.20%. The model they just built, which finds more than half the failing drives, scores 97.70%. 97.70 minus 96.20: one and a half percentage points separate a real model from a worthless one.</a:t>
+            </a:r>
+          </a:p>
+          <a:p>
+            <a:pPr lvl="0" indent="0" marL="0">
+              <a:buNone/>
+            </a:pPr>
+          </a:p>
+          <a:p>
+            <a:pPr lvl="0" indent="0" marL="0">
+              <a:buNone/>
+            </a:pPr>
+            <a:r>
+              <a:rPr/>
+              <a:t>The arithmetic is not subtle: 1,924 of the 2,000 test drives are healthy, so answering “healthy” collects them all for free. Only the 76 failures, 76 divided by 2,000 = 3.8% of the test set, are left to compete over.</a:t>
             </a:r>
           </a:p>
           <a:p>
@@ -3249,7 +3249,7 @@
             </a:pPr>
             <a:r>
               <a:rPr/>
-              <a:t>The general statement, worth putting on the board: if a share pi of the cases are positive (the positive rate), the trivial always-negative classifier scores 1 minus pi. Here 96.2%. In some fraud problems, where the rate is one in a thousand, 99.9%.</a:t>
+              <a:t>The general statement, worth putting on the board: if a share pi of the cases are positive (the positive rate), the trivial always-negative classifier scores 1 minus pi. Here 1 - 0.038 = 96.2%. In some fraud problems, where the rate is one in a thousand, 1 - 0.001 = 99.9%.</a:t>
             </a:r>
           </a:p>
           <a:p>
@@ -3993,7 +3993,7 @@
             </a:pPr>
             <a:r>
               <a:rPr/>
-              <a:t>Mention F-beta in one sentence: a version of F1 with a weight beta, where beta above 1 counts recall more than precision. That is what you want here, where a miss costs about nineteen times a false alarm (2,600 against 140 euros). F2 is the usual choice.</a:t>
+              <a:t>Mention F-beta in one sentence: a version of F1 with a weight beta, where beta above 1 counts recall more than precision. That is what you want here, where a miss costs about nineteen times a false alarm (2,600 divided by 140 = 18.6). F2 is the usual choice.</a:t>
             </a:r>
           </a:p>
         </p:txBody>
@@ -4337,7 +4337,7 @@
             </a:pPr>
             <a:r>
               <a:rPr/>
-              <a:t>That 0.5 is predict()’s default and nothing more. It is the right choice only when the two errors cost the same and the probabilities are calibrated: among drives given 0.3, about 30% really fail (slide 44 names the property). Slide 49 derives the threshold from the costs, and it is 0.5 exactly when they are equal. Here a miss costs about nineteen times a false alarm, and in most real problems the costs differ too.</a:t>
+              <a:t>That 0.5 is predict()’s default and nothing more. It is the right choice only when the two errors cost the same and the probabilities are calibrated: among drives given 0.3, about 30% really fail (slide 44 names the property). Slide 49 derives the threshold from the costs, and it is 0.5 exactly when they are equal. Here a miss costs about nineteen times a false alarm (2,600 divided by 140 = 18.6), and in most real problems the costs differ too.</a:t>
             </a:r>
           </a:p>
           <a:p>
@@ -4447,35 +4447,35 @@
             </a:pPr>
             <a:r>
               <a:rPr/>
-              <a:t>Lower the threshold: recall rises, precision falls. At 0.02 we catch 69 of 76 failures and replace 284 healthy drives to do it. At 0.90 every alarm is justified and we catch fewer than a quarter.</a:t>
-            </a:r>
-          </a:p>
-          <a:p>
-            <a:pPr lvl="0" indent="0" marL="0">
-              <a:buNone/>
-            </a:pPr>
-          </a:p>
-          <a:p>
-            <a:pPr lvl="0" indent="0" marL="0">
-              <a:buNone/>
-            </a:pPr>
-            <a:r>
-              <a:rPr/>
-              <a:t>Now the accuracy column, which is the slide’s real argument. From 0.10 upwards it moves by three and a half percentage points, 0.942 to 0.977, while recall falls from 0.803 to 0.184. And its maximum is at 0.5 - the threshold that misses 33 of the 76 failures.</a:t>
-            </a:r>
-          </a:p>
-          <a:p>
-            <a:pPr lvl="0" indent="0" marL="0">
-              <a:buNone/>
-            </a:pPr>
-          </a:p>
-          <a:p>
-            <a:pPr lvl="0" indent="0" marL="0">
-              <a:buNone/>
-            </a:pPr>
-            <a:r>
-              <a:rPr/>
-              <a:t>Say the consequence plainly: tune on accuracy and it will quietly recommend catching fewer failures. Most of the alarms a higher threshold drops are false ones, so accuracy rises with each drop, even though some of the dropped alarms were failures being caught. From 0.30 to 0.50 the model drops 22 alarms: 12 were false and 10 were caught failures. Accuracy counts that as two more right answers, 0.976 to 0.977.</a:t>
+              <a:t>Lower the threshold: recall rises, precision falls. At 0.02 we catch 69 of 76 failures and replace 284 healthy drives to do it. At 0.90 every alarm is justified and we catch 14 of 76, fewer than a quarter.</a:t>
+            </a:r>
+          </a:p>
+          <a:p>
+            <a:pPr lvl="0" indent="0" marL="0">
+              <a:buNone/>
+            </a:pPr>
+          </a:p>
+          <a:p>
+            <a:pPr lvl="0" indent="0" marL="0">
+              <a:buNone/>
+            </a:pPr>
+            <a:r>
+              <a:rPr/>
+              <a:t>Now the accuracy column, which is the slide’s real argument. From 0.10 upwards it moves by 0.977 - 0.942 = 0.035, three and a half percentage points, while recall falls from 0.803 to 0.184. And its maximum is at 0.5 - the threshold that misses 33 of the 76 failures.</a:t>
+            </a:r>
+          </a:p>
+          <a:p>
+            <a:pPr lvl="0" indent="0" marL="0">
+              <a:buNone/>
+            </a:pPr>
+          </a:p>
+          <a:p>
+            <a:pPr lvl="0" indent="0" marL="0">
+              <a:buNone/>
+            </a:pPr>
+            <a:r>
+              <a:rPr/>
+              <a:t>Say the consequence plainly: tune on accuracy and it will quietly recommend catching fewer failures. Most of the alarms a higher threshold drops are false ones, so accuracy rises with each drop, even though some of the dropped alarms were failures being caught. From 0.30 to 0.50 the alarms go from 53 + 25 = 78 to 43 + 13 = 56, 22 fewer: 25 - 13 = 12 were false and 53 - 43 = 10 were caught failures. Accuracy gains 12 right answers and loses 10, two more in all, 0.976 to 0.977.</a:t>
             </a:r>
           </a:p>
         </p:txBody>
@@ -4571,7 +4571,7 @@
             </a:pPr>
             <a:r>
               <a:rPr/>
-              <a:t>The part to teach is the baseline. A model with random scores has precision equal to the positive rate - 0.038 here - at every recall. That flat dashed line, not 0.5, is what “no skill” looks like on an imbalanced problem.</a:t>
+              <a:t>The part to teach is the baseline. A model with random scores has precision equal to the positive rate - 76 failures divided by 2,000 drives = 0.038 here - at every recall. That flat dashed line, not 0.5, is what “no skill” looks like on an imbalanced problem.</a:t>
             </a:r>
           </a:p>
           <a:p>
@@ -5315,7 +5315,7 @@
             </a:pPr>
             <a:r>
               <a:rPr/>
-              <a:t>Right panel: the precision-recall curves are in three different worlds. Average precision falls from 0.706 to 0.361, and precision at the threshold of 0.5 falls from 0.79 to 0.26 - three alarms in four now false.</a:t>
+              <a:t>Right panel: the precision-recall curves are in three different worlds. Average precision falls from 0.706 to 0.361, and precision at the threshold of 0.5 falls from 0.79 to 0.26 - 1 - 0.26 = 0.74, three alarms in four now false.</a:t>
             </a:r>
           </a:p>
           <a:p>
@@ -5659,7 +5659,7 @@
             </a:pPr>
             <a:r>
               <a:rPr/>
-              <a:t>Choosing the threshold on purpose HALVED the cost of the same model. No retraining, no new features, no better algorithm. One number, taken from the economics instead of from the library default.</a:t>
+              <a:t>Choosing the threshold on purpose HALVED the cost of the same model: 45,540 divided by 87,620 is 0.52. No retraining, no new features, no better algorithm. One number, taken from the economics instead of from the library default.</a:t>
             </a:r>
           </a:p>
           <a:p>
@@ -6127,7 +6127,7 @@
             </a:pPr>
             <a:r>
               <a:rPr/>
-              <a:t>class_weight=“balanced” makes each failed drive count, in the cost, as much as about 25 healthy ones - the ratio of healthy to failed drives in the training set. It changes the training rather than the decision.</a:t>
+              <a:t>class_weight=“balanced” makes each failed drive count, in the cost, as much as about 25 healthy ones - the ratio of healthy to failed drives in the training set, (6,000 - 230) divided by 230 = 25. It changes the training rather than the decision.</a:t>
             </a:r>
           </a:p>
           <a:p>
@@ -6265,7 +6265,7 @@
             </a:pPr>
             <a:r>
               <a:rPr/>
-              <a:t>The ROC curve by hand, the 200,000-pair experiment, the cost curve, then the multiclass matrix. Run notebook 03. Fifteen minutes, and the two multiclass slides that follow (52 and 53) are shown when the notebook reaches its last section, so they run alongside it rather than after it.</a:t>
+              <a:t>The ROC curve by hand, the 200,000-pair experiment, the cost curve, then the multiclass matrix. Run notebook 03. Fifteen minutes, and the two multiclass slides that follow (53 and 54) are shown when the notebook reaches its last section, so they run alongside it rather than after it.</a:t>
             </a:r>
           </a:p>
           <a:p>
@@ -6499,7 +6499,7 @@
             </a:pPr>
             <a:r>
               <a:rPr/>
-              <a:t>Macro treats the three conditions as equally important. Weighted lets the healthy class - five drives in six - do most of the talking.</a:t>
+              <a:t>Macro treats the three conditions as equally important. Weighted lets the healthy class - 1,665 of 2,000, five drives in six - do most of the talking.</a:t>
             </a:r>
           </a:p>
           <a:p>
@@ -6843,7 +6843,7 @@
             </a:pPr>
             <a:r>
               <a:rPr/>
-              <a:t>The left panel: the fitted line gives a NEGATIVE probability to 3,606 of the 8,000 drives - 45% of the fleet. Not a small negative number. A negative probability. And extend it slightly past the data, to 32 reallocated sectors, and it predicts more than 1.</a:t>
+              <a:t>The left panel: the fitted line gives a NEGATIVE probability to 3,606 of the 8,000 drives - 3,606 divided by 8,000 is 45% of the fleet. Not a small negative number. A negative probability. And extend it slightly past the data, to 32 reallocated sectors, and it predicts more than 1 (notebook 1 prints the line; the worst drive has 28).</a:t>
             </a:r>
           </a:p>
           <a:p>
@@ -6967,49 +6967,49 @@
             </a:pPr>
             <a:r>
               <a:rPr/>
-              <a:t>Steep in the middle, flat at both ends. Make the case that the flatness is the right behaviour, not a compromise - and be precise about what is diminishing. It is the total evidence z, not any one counter. Two more units of z starting from z = 0 take the probability from 0.50 to 0.88; the same two units starting from z = 6 take it from 0.9975 to 0.9997, 178 times less. Once the model is nearly sure, more evidence barely changes its answer.</a:t>
-            </a:r>
-          </a:p>
-          <a:p>
-            <a:pPr lvl="0" indent="0" marL="0">
-              <a:buNone/>
-            </a:pPr>
-          </a:p>
-          <a:p>
-            <a:pPr lvl="0" indent="0" marL="0">
-              <a:buNone/>
-            </a:pPr>
-            <a:r>
-              <a:rPr/>
-              <a:t>Expect someone to object with slide 7’s right panel. That curve barely moves over the first few reallocated sectors, where 90% of the drives sit - the first four move it by 0.03 - and it is steepest at 13.2 sectors. So do the first sectors say little? Two separate answers, in this order.</a:t>
-            </a:r>
-          </a:p>
-          <a:p>
-            <a:pPr lvl="0" indent="0" marL="0">
-              <a:buNone/>
-            </a:pPr>
-          </a:p>
-          <a:p>
-            <a:pPr lvl="0" indent="0" marL="0">
-              <a:buNone/>
-            </a:pPr>
-            <a:r>
-              <a:rPr/>
-              <a:t>First, it is the same sigmoid, drawn against a different axis. Slide 7’s model has one input, the raw count of reallocated sectors, so its z is a straight line in the count: z = 0.336 times the count, minus 4.43. With no sectors z is already -4.43, deep in the flat left end of this slide’s curve; z reaches 0, the steep middle, at 13.2 sectors. The flat start of slide 7 is the flat left end of slide 8, with sectors on the axis instead of z.</a:t>
-            </a:r>
-          </a:p>
-          <a:p>
-            <a:pPr lvl="0" indent="0" marL="0">
-              <a:buNone/>
-            </a:pPr>
-          </a:p>
-          <a:p>
-            <a:pPr lvl="0" indent="0" marL="0">
-              <a:buNone/>
-            </a:pPr>
-            <a:r>
-              <a:rPr/>
-              <a:t>Second, the flat start comes from using the raw count, not from the drives. A straight line gives every sector the same 0.336 of z, so for that model the first four sectors add 1.34 to z and take a drive from 1.2% to 4.4%. But the labels were generated from log(1 + count), on which the first sectors weigh the most (handout section 1.1): for a drive whose other counters are average, the first four sectors add 4.7 to z and take it from 0.012% to 1.3%, about a hundred times more. That is why the six-counter model of slide 12 onwards takes log(1 + count) as its input.</a:t>
+              <a:t>Steep in the middle, flat at both ends. Make the case that the flatness is the right behaviour, not a compromise - and be precise about what is diminishing. It is the total evidence z, not any one counter. Two more units of z starting from z = 0 take the probability from sigma(0) = 0.50 to sigma(2) = 1 over (1 + e to the minus 2) = 0.88, a rise of 0.38; the same two units starting from z = 6 take it from sigma(6) = 0.9975 to sigma(8) = 0.9997, a rise of 0.0021 - 0.38 divided by 0.0021 is 178 times less. Once the model is nearly sure, more evidence barely changes its answer.</a:t>
+            </a:r>
+          </a:p>
+          <a:p>
+            <a:pPr lvl="0" indent="0" marL="0">
+              <a:buNone/>
+            </a:pPr>
+          </a:p>
+          <a:p>
+            <a:pPr lvl="0" indent="0" marL="0">
+              <a:buNone/>
+            </a:pPr>
+            <a:r>
+              <a:rPr/>
+              <a:t>Expect someone to object with slide 7’s right panel. That curve barely moves over the first few reallocated sectors, where 90% of the drives sit (handout section 1.1) - the first four move it from 1.2% to 4.4%, by 0.03 - and it is steepest at 13.2 sectors. So do the first sectors say little? Two separate answers, in this order.</a:t>
+            </a:r>
+          </a:p>
+          <a:p>
+            <a:pPr lvl="0" indent="0" marL="0">
+              <a:buNone/>
+            </a:pPr>
+          </a:p>
+          <a:p>
+            <a:pPr lvl="0" indent="0" marL="0">
+              <a:buNone/>
+            </a:pPr>
+            <a:r>
+              <a:rPr/>
+              <a:t>First, it is the same sigmoid, drawn against a different axis. Slide 7’s model has one input, the raw count of reallocated sectors, so its z is a straight line in the count: z = 0.336 times the count, minus 4.43. With no sectors z is already -4.43, deep in the flat left end of this slide’s curve; z reaches 0, the steep middle, where 0.336 times the count equals 4.43: at 4.43 divided by 0.336 = 13.2 sectors. The flat start of slide 7 is the flat left end of slide 8, with sectors on the axis instead of z.</a:t>
+            </a:r>
+          </a:p>
+          <a:p>
+            <a:pPr lvl="0" indent="0" marL="0">
+              <a:buNone/>
+            </a:pPr>
+          </a:p>
+          <a:p>
+            <a:pPr lvl="0" indent="0" marL="0">
+              <a:buNone/>
+            </a:pPr>
+            <a:r>
+              <a:rPr/>
+              <a:t>Second, the flat start comes from using the raw count, not from the drives. A straight line gives every sector the same 0.336 of z, so for that model the first four sectors add 4 times 0.336 = 1.34 to z and take a drive from sigma(-4.43) = 1.2% to sigma(-4.43 + 1.34) = sigma(-3.09) = 4.4%. But the labels were generated from log(1 + count), on which the first sectors weigh the most (handout section 1.1): for a drive whose other counters are average, the first four sectors add 4.7 to z and take it from 0.012% to 1.3%, about a hundred times more. That is why the six-counter model of slide 12 onwards takes log(1 + count) as its input.</a:t>
             </a:r>
           </a:p>
           <a:p>
@@ -7133,7 +7133,7 @@
             </a:pPr>
             <a:r>
               <a:rPr/>
-              <a:t>This slide puts in words what the right panel of slide 8 shows. Go through the two steps slowly; each removes one limit. Odds: a probability of 0.2 is odds of 0.25, and as the probability approaches 1 the odds run off to infinity - no ceiling. But odds are never negative, so there is still a floor at 0. The logarithm sends 0 to minus infinity, and the floor is gone too.</a:t>
+              <a:t>This slide puts in words what the right panel of slide 8 shows. Go through the two steps slowly; each removes one limit. Odds: a probability of 0.2 is odds of 0.2 divided by 0.8 = 0.25, and as the probability approaches 1 the odds run off to infinity - no ceiling. But odds are never negative, so there is still a floor at 0. The logarithm sends 0 to minus infinity, and the floor is gone too.</a:t>
             </a:r>
           </a:p>
           <a:p>
@@ -10997,7 +10997,7 @@
                       </a:pPr>
                       <a:r>
                         <a:rPr/>
-                        <a:t>Fitted</a:t>
+                        <a:t>Fitted, notebook 1</a:t>
                       </a:r>
                     </a:p>
                   </a:txBody>
@@ -11013,7 +11013,7 @@
                       </a:pPr>
                       <a:r>
                         <a:rPr/>
-                        <a:t>Odds ×</a:t>
+                        <a:t>Odds ×, exp(Fitted)</a:t>
                       </a:r>
                     </a:p>
                   </a:txBody>
@@ -11477,19 +11477,23 @@
               <a:rPr b="1"/>
               <a:t>−6.09</a:t>
             </a:r>
+            <a:r>
+              <a:rPr/>
+              <a:t>, the log-odds of a drive average on every counter (all x = 0)</a:t>
+            </a:r>
           </a:p>
           <a:p>
             <a:pPr lvl="0"/>
             <a:r>
               <a:rPr/>
-              <a:t>σ(-6.09) = 0.0023: a 0.2% chance for a drive average on every counter</a:t>
+              <a:t>σ(−6.09) = 1 ÷ (1 + exp(6.09)) = 1 ÷ 442 = 0.0023: a 0.2% chance</a:t>
             </a:r>
           </a:p>
           <a:p>
             <a:pPr lvl="0"/>
             <a:r>
               <a:rPr/>
-              <a:t>The fleet fails at 3.8%: the failures come from the few drives far above average</a:t>
+              <a:t>The fleet fails at 3.8% (slide 6): the failures come from the few drives far above average</a:t>
             </a:r>
           </a:p>
         </p:txBody>
@@ -12798,7 +12802,7 @@
                       </a:pPr>
                       <a:r>
                         <a:rPr/>
-                        <a:t>0.9</a:t>
+                        <a:t>1 − 0.1 = 0.9</a:t>
                       </a:r>
                     </a:p>
                   </a:txBody>
@@ -12828,7 +12832,7 @@
                       </a:pPr>
                       <a:r>
                         <a:rPr/>
-                        <a:t>0.4</a:t>
+                        <a:t>1 − 0.6 = 0.4</a:t>
                       </a:r>
                     </a:p>
                   </a:txBody>
@@ -12890,7 +12894,7 @@
                       </a:pPr>
                       <a:r>
                         <a:rPr/>
-                        <a:t>0.8</a:t>
+                        <a:t>1 − 0.2 = 0.8</a:t>
                       </a:r>
                     </a:p>
                   </a:txBody>
@@ -12920,7 +12924,7 @@
                       </a:pPr>
                       <a:r>
                         <a:rPr/>
-                        <a:t>0.5</a:t>
+                        <a:t>1 − 0.5 = 0.5</a:t>
                       </a:r>
                     </a:p>
                   </a:txBody>
@@ -12969,6 +12973,10 @@
                         <a:buNone/>
                       </a:pPr>
                       <a:r>
+                        <a:rPr/>
+                        <a:t>0.8 × 0.9 × 0.8 = </a:t>
+                      </a:r>
+                      <a:r>
                         <a:rPr b="1"/>
                         <a:t>0.576</a:t>
                       </a:r>
@@ -12992,6 +13000,10 @@
                       <a:pPr lvl="0" indent="0" marL="0">
                         <a:buNone/>
                       </a:pPr>
+                      <a:r>
+                        <a:rPr/>
+                        <a:t>0.3 × 0.4 × 0.5 = </a:t>
+                      </a:r>
                       <a:r>
                         <a:rPr b="1"/>
                         <a:t>0.060</a:t>
@@ -13368,6 +13380,10 @@
                         <a:buNone/>
                       </a:pPr>
                       <a:r>
+                        <a:rPr/>
+                        <a:t>0.22 + 0.11 + 0.22 = </a:t>
+                      </a:r>
+                      <a:r>
                         <a:rPr b="1"/>
                         <a:t>0.55</a:t>
                       </a:r>
@@ -13382,6 +13398,10 @@
                       <a:pPr lvl="0" indent="0" marL="0">
                         <a:buNone/>
                       </a:pPr>
+                      <a:r>
+                        <a:rPr/>
+                        <a:t>1.20 + 0.92 + 0.69 = </a:t>
+                      </a:r>
                       <a:r>
                         <a:rPr b="1"/>
                         <a:t>2.81</a:t>
@@ -14313,7 +14333,7 @@
                       </a:pPr>
                       <a:r>
                         <a:rPr/>
-                        <a:t>Model</a:t>
+                        <a:t>Model, on the 2,000 test drives (76 fail)</a:t>
                       </a:r>
                     </a:p>
                   </a:txBody>
@@ -14329,7 +14349,7 @@
                       </a:pPr>
                       <a:r>
                         <a:rPr/>
-                        <a:t>Accuracy</a:t>
+                        <a:t>Accuracy = right ÷ 2,000</a:t>
                       </a:r>
                     </a:p>
                   </a:txBody>
@@ -14377,6 +14397,10 @@
                         <a:buNone/>
                       </a:pPr>
                       <a:r>
+                        <a:rPr/>
+                        <a:t>every healthy drive: 1,924 ÷ 2,000 = </a:t>
+                      </a:r>
+                      <a:r>
                         <a:rPr b="1"/>
                         <a:t>96.20%</a:t>
                       </a:r>
@@ -14425,7 +14449,7 @@
                       </a:pPr>
                       <a:r>
                         <a:rPr/>
-                        <a:t>97.70%</a:t>
+                        <a:t>43 failures + 1,911 healthy: 1,954 ÷ 2,000 = 97.70%</a:t>
                       </a:r>
                     </a:p>
                   </a:txBody>
@@ -14843,6 +14867,13 @@
               <a:t>: a drive dies in service. Callout, rebuild, risk, €2,600</a:t>
             </a:r>
           </a:p>
+          <a:p>
+            <a:pPr lvl="0"/>
+            <a:r>
+              <a:rPr/>
+              <a:t>Both costs are assumptions supplied from outside the data, not measured</a:t>
+            </a:r>
+          </a:p>
         </p:txBody>
       </p:sp>
     </p:spTree>
@@ -15009,7 +15040,7 @@
             <a:pPr lvl="0"/>
             <a:r>
               <a:rPr/>
-              <a:t>Precision = TP ÷ (TP + FP) = 43 ÷ 56 = </a:t>
+              <a:t>Precision = TP ÷ (TP + FP) = 43 ÷ (43 + 13) = </a:t>
             </a:r>
             <a:r>
               <a:rPr b="1"/>
@@ -15024,7 +15055,7 @@
             <a:pPr lvl="0"/>
             <a:r>
               <a:rPr/>
-              <a:t>Recall = TP ÷ (TP + FN) = 43 ÷ 76 = </a:t>
+              <a:t>Recall = TP ÷ (TP + FN) = 43 ÷ (43 + 33) = </a:t>
             </a:r>
             <a:r>
               <a:rPr b="1"/>
@@ -15039,7 +15070,7 @@
             <a:pPr lvl="0"/>
             <a:r>
               <a:rPr/>
-              <a:t>Specificity = TN ÷ (TN + FP) = 1,911 ÷ 1,924 = 0.993</a:t>
+              <a:t>Specificity = TN ÷ (TN + FP) = 1,911 ÷ (1,911 + 13) = 0.993</a:t>
             </a:r>
           </a:p>
           <a:p>
@@ -15254,49 +15285,53 @@
                       </a:pPr>
                       <a:r>
                         <a:rPr/>
-                        <a:t>0.038</a:t>
-                      </a:r>
-                    </a:p>
-                  </a:txBody>
-                </a:tc>
-                <a:tc>
-                  <a:txBody>
-                    <a:bodyPr/>
-                    <a:lstStyle/>
-                    <a:p>
-                      <a:pPr lvl="0" indent="0" marL="0">
-                        <a:buNone/>
-                      </a:pPr>
-                      <a:r>
-                        <a:rPr/>
-                        <a:t>1.000</a:t>
-                      </a:r>
-                    </a:p>
-                  </a:txBody>
-                </a:tc>
-                <a:tc>
-                  <a:txBody>
-                    <a:bodyPr/>
-                    <a:lstStyle/>
-                    <a:p>
-                      <a:pPr lvl="0" indent="0" marL="0">
-                        <a:buNone/>
-                      </a:pPr>
-                      <a:r>
-                        <a:rPr/>
-                        <a:t>0.519</a:t>
-                      </a:r>
-                    </a:p>
-                  </a:txBody>
-                </a:tc>
-                <a:tc>
-                  <a:txBody>
-                    <a:bodyPr/>
-                    <a:lstStyle/>
-                    <a:p>
-                      <a:pPr lvl="0" indent="0" marL="0">
-                        <a:buNone/>
-                      </a:pPr>
+                        <a:t>76 ÷ 2,000 = 0.038</a:t>
+                      </a:r>
+                    </a:p>
+                  </a:txBody>
+                </a:tc>
+                <a:tc>
+                  <a:txBody>
+                    <a:bodyPr/>
+                    <a:lstStyle/>
+                    <a:p>
+                      <a:pPr lvl="0" indent="0" marL="0">
+                        <a:buNone/>
+                      </a:pPr>
+                      <a:r>
+                        <a:rPr/>
+                        <a:t>76 ÷ 76 = 1</a:t>
+                      </a:r>
+                    </a:p>
+                  </a:txBody>
+                </a:tc>
+                <a:tc>
+                  <a:txBody>
+                    <a:bodyPr/>
+                    <a:lstStyle/>
+                    <a:p>
+                      <a:pPr lvl="0" indent="0" marL="0">
+                        <a:buNone/>
+                      </a:pPr>
+                      <a:r>
+                        <a:rPr/>
+                        <a:t>(0.038 + 1) ÷ 2 = 0.519</a:t>
+                      </a:r>
+                    </a:p>
+                  </a:txBody>
+                </a:tc>
+                <a:tc>
+                  <a:txBody>
+                    <a:bodyPr/>
+                    <a:lstStyle/>
+                    <a:p>
+                      <a:pPr lvl="0" indent="0" marL="0">
+                        <a:buNone/>
+                      </a:pPr>
+                      <a:r>
+                        <a:rPr/>
+                        <a:t>2 × 0.038 × 1 ÷ 1.038 = </a:t>
+                      </a:r>
                       <a:r>
                         <a:rPr b="1"/>
                         <a:t>0.073</a:t>
@@ -15383,6 +15418,34 @@
           <a:p>
             <a:pPr lvl="0"/>
             <a:r>
+              <a:rPr/>
+              <a:t>F1 per class: healthy 0.988 (1,924 drives), failed 0.652 (76 drives)</a:t>
+            </a:r>
+          </a:p>
+          <a:p>
+            <a:pPr lvl="0"/>
+            <a:r>
+              <a:rPr>
+                <a:latin typeface="Courier"/>
+              </a:rPr>
+              <a:t>macro avg</a:t>
+            </a:r>
+            <a:r>
+              <a:rPr/>
+              <a:t> F1 = (0.988 + 0.652) ÷ 2 = </a:t>
+            </a:r>
+            <a:r>
+              <a:rPr b="1"/>
+              <a:t>0.820</a:t>
+            </a:r>
+            <a:r>
+              <a:rPr/>
+              <a:t>: both classes count the same</a:t>
+            </a:r>
+          </a:p>
+          <a:p>
+            <a:pPr lvl="0"/>
+            <a:r>
               <a:rPr>
                 <a:latin typeface="Courier"/>
               </a:rPr>
@@ -15390,7 +15453,7 @@
             </a:r>
             <a:r>
               <a:rPr/>
-              <a:t> F1: </a:t>
+              <a:t> F1 = (1,924 × 0.988 + 76 × 0.652) ÷ 2,000 = </a:t>
             </a:r>
             <a:r>
               <a:rPr b="1"/>
@@ -15398,28 +15461,7 @@
             </a:r>
             <a:r>
               <a:rPr/>
-              <a:t> (dominated by the healthy class)</a:t>
-            </a:r>
-          </a:p>
-          <a:p>
-            <a:pPr lvl="0"/>
-            <a:r>
-              <a:rPr>
-                <a:latin typeface="Courier"/>
-              </a:rPr>
-              <a:t>macro avg</a:t>
-            </a:r>
-            <a:r>
-              <a:rPr/>
-              <a:t> F1: </a:t>
-            </a:r>
-            <a:r>
-              <a:rPr b="1"/>
-              <a:t>0.820</a:t>
-            </a:r>
-            <a:r>
-              <a:rPr/>
-              <a:t> (both classes get an equal say)</a:t>
+              <a:t>: the healthy class dominates</a:t>
             </a:r>
           </a:p>
           <a:p>
@@ -16033,7 +16075,7 @@
                       </a:pPr>
                       <a:r>
                         <a:rPr/>
-                        <a:t>Precision</a:t>
+                        <a:t>Precision, TP ÷ (TP + FP)</a:t>
                       </a:r>
                     </a:p>
                   </a:txBody>
@@ -16049,7 +16091,7 @@
                       </a:pPr>
                       <a:r>
                         <a:rPr/>
-                        <a:t>Recall</a:t>
+                        <a:t>Recall, TP ÷ (TP + FN)</a:t>
                       </a:r>
                     </a:p>
                   </a:txBody>
@@ -16065,7 +16107,7 @@
                       </a:pPr>
                       <a:r>
                         <a:rPr/>
-                        <a:t>Accuracy</a:t>
+                        <a:t>Accuracy, (TP + TN) ÷ 2,000</a:t>
                       </a:r>
                     </a:p>
                   </a:txBody>
@@ -17061,7 +17103,24 @@
             <a:pPr lvl="0"/>
             <a:r>
               <a:rPr/>
-              <a:t>Ours: 0.949</a:t>
+              <a:t>Ours: 0.949 (</a:t>
+            </a:r>
+            <a:r>
+              <a:rPr>
+                <a:latin typeface="Courier"/>
+              </a:rPr>
+              <a:t>roc_auc_score</a:t>
+            </a:r>
+            <a:r>
+              <a:rPr/>
+              <a:t>, notebook 3)</a:t>
+            </a:r>
+          </a:p>
+          <a:p>
+            <a:pPr lvl="0"/>
+            <a:r>
+              <a:rPr/>
+              <a:t>Check: in 200,000 random pairs, the failing drive scores higher 94.9% of the time</a:t>
             </a:r>
           </a:p>
           <a:p>
@@ -17470,7 +17529,7 @@
             </a:r>
             <a:r>
               <a:rPr/>
-              <a:t>: 0.717 here, against a floor of 0.038</a:t>
+              <a:t>: 0.717 here, against 0.038 = 76 ÷ 2,000 for a model that ranks at random</a:t>
             </a:r>
           </a:p>
         </p:txBody>
@@ -17954,7 +18013,7 @@
                       </a:pPr>
                       <a:r>
                         <a:rPr/>
-                        <a:t>Recall</a:t>
+                        <a:t>Failures missed, FN</a:t>
                       </a:r>
                     </a:p>
                   </a:txBody>
@@ -17970,7 +18029,7 @@
                       </a:pPr>
                       <a:r>
                         <a:rPr/>
-                        <a:t>Precision</a:t>
+                        <a:t>False alarms, FP</a:t>
                       </a:r>
                     </a:p>
                   </a:txBody>
@@ -17986,23 +18045,23 @@
                       </a:pPr>
                       <a:r>
                         <a:rPr/>
+                        <a:t>Cost = FN × €2,600 + FP × €140</a:t>
+                      </a:r>
+                    </a:p>
+                  </a:txBody>
+                  <a:tcPr/>
+                </a:tc>
+                <a:tc>
+                  <a:txBody>
+                    <a:bodyPr/>
+                    <a:lstStyle/>
+                    <a:p>
+                      <a:pPr lvl="0" indent="0" marL="0">
+                        <a:buNone/>
+                      </a:pPr>
+                      <a:r>
+                        <a:rPr/>
                         <a:t>AUC</a:t>
-                      </a:r>
-                    </a:p>
-                  </a:txBody>
-                  <a:tcPr/>
-                </a:tc>
-                <a:tc>
-                  <a:txBody>
-                    <a:bodyPr/>
-                    <a:lstStyle/>
-                    <a:p>
-                      <a:pPr lvl="0" indent="0" marL="0">
-                        <a:buNone/>
-                      </a:pPr>
-                      <a:r>
-                        <a:rPr/>
-                        <a:t>Cost</a:t>
                       </a:r>
                     </a:p>
                   </a:txBody>
@@ -18035,22 +18094,37 @@
                       </a:pPr>
                       <a:r>
                         <a:rPr/>
-                        <a:t>0.566</a:t>
-                      </a:r>
-                    </a:p>
-                  </a:txBody>
-                </a:tc>
-                <a:tc>
-                  <a:txBody>
-                    <a:bodyPr/>
-                    <a:lstStyle/>
-                    <a:p>
-                      <a:pPr lvl="0" indent="0" marL="0">
-                        <a:buNone/>
-                      </a:pPr>
-                      <a:r>
-                        <a:rPr/>
-                        <a:t>0.768</a:t>
+                        <a:t>33</a:t>
+                      </a:r>
+                    </a:p>
+                  </a:txBody>
+                </a:tc>
+                <a:tc>
+                  <a:txBody>
+                    <a:bodyPr/>
+                    <a:lstStyle/>
+                    <a:p>
+                      <a:pPr lvl="0" indent="0" marL="0">
+                        <a:buNone/>
+                      </a:pPr>
+                      <a:r>
+                        <a:rPr/>
+                        <a:t>13</a:t>
+                      </a:r>
+                    </a:p>
+                  </a:txBody>
+                </a:tc>
+                <a:tc>
+                  <a:txBody>
+                    <a:bodyPr/>
+                    <a:lstStyle/>
+                    <a:p>
+                      <a:pPr lvl="0" indent="0" marL="0">
+                        <a:buNone/>
+                      </a:pPr>
+                      <a:r>
+                        <a:rPr/>
+                        <a:t>33 × 2,600 + 13 × 140 = €87,620</a:t>
                       </a:r>
                     </a:p>
                   </a:txBody>
@@ -18066,21 +18140,6 @@
                       <a:r>
                         <a:rPr/>
                         <a:t>0.949</a:t>
-                      </a:r>
-                    </a:p>
-                  </a:txBody>
-                </a:tc>
-                <a:tc>
-                  <a:txBody>
-                    <a:bodyPr/>
-                    <a:lstStyle/>
-                    <a:p>
-                      <a:pPr lvl="0" indent="0" marL="0">
-                        <a:buNone/>
-                      </a:pPr>
-                      <a:r>
-                        <a:rPr/>
-                        <a:t>87,620</a:t>
                       </a:r>
                     </a:p>
                   </a:txBody>
@@ -18112,22 +18171,37 @@
                       </a:pPr>
                       <a:r>
                         <a:rPr/>
-                        <a:t>0.855</a:t>
-                      </a:r>
-                    </a:p>
-                  </a:txBody>
-                </a:tc>
-                <a:tc>
-                  <a:txBody>
-                    <a:bodyPr/>
-                    <a:lstStyle/>
-                    <a:p>
-                      <a:pPr lvl="0" indent="0" marL="0">
-                        <a:buNone/>
-                      </a:pPr>
-                      <a:r>
-                        <a:rPr/>
-                        <a:t>0.349</a:t>
+                        <a:t>11</a:t>
+                      </a:r>
+                    </a:p>
+                  </a:txBody>
+                </a:tc>
+                <a:tc>
+                  <a:txBody>
+                    <a:bodyPr/>
+                    <a:lstStyle/>
+                    <a:p>
+                      <a:pPr lvl="0" indent="0" marL="0">
+                        <a:buNone/>
+                      </a:pPr>
+                      <a:r>
+                        <a:rPr/>
+                        <a:t>121</a:t>
+                      </a:r>
+                    </a:p>
+                  </a:txBody>
+                </a:tc>
+                <a:tc>
+                  <a:txBody>
+                    <a:bodyPr/>
+                    <a:lstStyle/>
+                    <a:p>
+                      <a:pPr lvl="0" indent="0" marL="0">
+                        <a:buNone/>
+                      </a:pPr>
+                      <a:r>
+                        <a:rPr/>
+                        <a:t>11 × 2,600 + 121 × 140 = €45,540</a:t>
                       </a:r>
                     </a:p>
                   </a:txBody>
@@ -18143,21 +18217,6 @@
                       <a:r>
                         <a:rPr/>
                         <a:t>0.949</a:t>
-                      </a:r>
-                    </a:p>
-                  </a:txBody>
-                </a:tc>
-                <a:tc>
-                  <a:txBody>
-                    <a:bodyPr/>
-                    <a:lstStyle/>
-                    <a:p>
-                      <a:pPr lvl="0" indent="0" marL="0">
-                        <a:buNone/>
-                      </a:pPr>
-                      <a:r>
-                        <a:rPr/>
-                        <a:t>45,540</a:t>
                       </a:r>
                     </a:p>
                   </a:txBody>
@@ -18189,22 +18248,37 @@
                       </a:pPr>
                       <a:r>
                         <a:rPr/>
-                        <a:t>0.895</a:t>
-                      </a:r>
-                    </a:p>
-                  </a:txBody>
-                </a:tc>
-                <a:tc>
-                  <a:txBody>
-                    <a:bodyPr/>
-                    <a:lstStyle/>
-                    <a:p>
-                      <a:pPr lvl="0" indent="0" marL="0">
-                        <a:buNone/>
-                      </a:pPr>
-                      <a:r>
-                        <a:rPr/>
-                        <a:t>0.249</a:t>
+                        <a:t>8</a:t>
+                      </a:r>
+                    </a:p>
+                  </a:txBody>
+                </a:tc>
+                <a:tc>
+                  <a:txBody>
+                    <a:bodyPr/>
+                    <a:lstStyle/>
+                    <a:p>
+                      <a:pPr lvl="0" indent="0" marL="0">
+                        <a:buNone/>
+                      </a:pPr>
+                      <a:r>
+                        <a:rPr/>
+                        <a:t>205</a:t>
+                      </a:r>
+                    </a:p>
+                  </a:txBody>
+                </a:tc>
+                <a:tc>
+                  <a:txBody>
+                    <a:bodyPr/>
+                    <a:lstStyle/>
+                    <a:p>
+                      <a:pPr lvl="0" indent="0" marL="0">
+                        <a:buNone/>
+                      </a:pPr>
+                      <a:r>
+                        <a:rPr/>
+                        <a:t>8 × 2,600 + 205 × 140 = €49,500</a:t>
                       </a:r>
                     </a:p>
                   </a:txBody>
@@ -18220,21 +18294,6 @@
                       <a:r>
                         <a:rPr b="1"/>
                         <a:t>0.950</a:t>
-                      </a:r>
-                    </a:p>
-                  </a:txBody>
-                </a:tc>
-                <a:tc>
-                  <a:txBody>
-                    <a:bodyPr/>
-                    <a:lstStyle/>
-                    <a:p>
-                      <a:pPr lvl="0" indent="0" marL="0">
-                        <a:buNone/>
-                      </a:pPr>
-                      <a:r>
-                        <a:rPr/>
-                        <a:t>49,500</a:t>
                       </a:r>
                     </a:p>
                   </a:txBody>
@@ -18757,7 +18816,14 @@
             <a:pPr lvl="0"/>
             <a:r>
               <a:rPr/>
-              <a:t>macro avg F1: </a:t>
+              <a:t>F1 per class: healthy 0.947 (1,665 drives), degraded 0.545 (259), failed 0.629 (76)</a:t>
+            </a:r>
+          </a:p>
+          <a:p>
+            <a:pPr lvl="0"/>
+            <a:r>
+              <a:rPr/>
+              <a:t>macro avg F1 = (0.947 + 0.545 + 0.629) ÷ 3 = </a:t>
             </a:r>
             <a:r>
               <a:rPr b="1"/>
@@ -18768,7 +18834,7 @@
             <a:pPr lvl="0"/>
             <a:r>
               <a:rPr/>
-              <a:t>weighted avg F1: </a:t>
+              <a:t>weighted avg F1 = (1,665 × 0.947 + 259 × 0.545 + 76 × 0.629) ÷ 2,000 = </a:t>
             </a:r>
             <a:r>
               <a:rPr b="1"/>
@@ -19076,18 +19142,18 @@
             <a:pPr lvl="0"/>
             <a:r>
               <a:rPr b="1"/>
-              <a:t>306 of the 8,000 drives failed.</a:t>
-            </a:r>
-            <a:r>
-              <a:rPr/>
-              <a:t> 3.8% of the fleet</a:t>
+              <a:t>306 of the 8,000 drives failed</a:t>
+            </a:r>
+            <a:r>
+              <a:rPr/>
+              <a:t>: 306 ÷ 8,000 = 3.8% of the fleet</a:t>
             </a:r>
           </a:p>
           <a:p>
             <a:pPr lvl="0"/>
             <a:r>
               <a:rPr/>
-              <a:t>Which means 96.2% did not</a:t>
+              <a:t>Which means 100% − 3.8% = 96.2% did not</a:t>
             </a:r>
           </a:p>
         </p:txBody>
@@ -19352,7 +19418,7 @@
             <a:pPr lvl="0"/>
             <a:r>
               <a:rPr/>
-              <a:t>p = 0.01, 0.5, 0.99 → log-odds −4.60, 0, +4.60</a:t>
+              <a:t>p = 0.99: log(0.99 ÷ 0.01) = log 99 = +4.60; p = 0.5: log(0.5 ÷ 0.5) = log 1 = 0</a:t>
             </a:r>
           </a:p>
           <a:p>

--- a/Lessons/04_classification_and_metrics/Slides/classification_and_metrics_slides.pptx
+++ b/Lessons/04_classification_and_metrics/Slides/classification_and_metrics_slides.pptx
@@ -1131,7 +1131,7 @@
             </a:pPr>
             <a:r>
               <a:rPr/>
-              <a:t>Then the last row, which is the one to pause on. seek_error_rate was generated with a coefficient of exactly zero: a real-looking counter with no connection to failure. The model estimates 0.02, an odds multiplier of 1.03 (the table rounds the coefficient; the multiplier is computed from the unrounded value). It did not fall for it.</a:t>
+              <a:t>Then the last row, which is the one to pause on. seek_error_rate was generated with a coefficient of exactly zero: a real-looking counter with no connection to failure. The model estimates 0.02, an odds multiplier of exp(0.02) = 1.02. It did not fall for it.</a:t>
             </a:r>
           </a:p>
           <a:p>
@@ -4433,49 +4433,63 @@
             </a:pPr>
             <a:r>
               <a:rPr/>
-              <a:t>Read it column by column with the room.</a:t>
-            </a:r>
-          </a:p>
-          <a:p>
-            <a:pPr lvl="0" indent="0" marL="0">
-              <a:buNone/>
-            </a:pPr>
-          </a:p>
-          <a:p>
-            <a:pPr lvl="0" indent="0" marL="0">
-              <a:buNone/>
-            </a:pPr>
-            <a:r>
-              <a:rPr/>
-              <a:t>Lower the threshold: recall rises, precision falls. At 0.02 we catch 69 of 76 failures and replace 284 healthy drives to do it. At 0.90 every alarm is justified and we catch 14 of 76, fewer than a quarter.</a:t>
-            </a:r>
-          </a:p>
-          <a:p>
-            <a:pPr lvl="0" indent="0" marL="0">
-              <a:buNone/>
-            </a:pPr>
-          </a:p>
-          <a:p>
-            <a:pPr lvl="0" indent="0" marL="0">
-              <a:buNone/>
-            </a:pPr>
-            <a:r>
-              <a:rPr/>
-              <a:t>Now the accuracy column, which is the slide’s real argument. From 0.10 upwards it moves by 0.977 - 0.942 = 0.035, three and a half percentage points, while recall falls from 0.803 to 0.184. And its maximum is at 0.5 - the threshold that misses 33 of the 76 failures.</a:t>
-            </a:r>
-          </a:p>
-          <a:p>
-            <a:pPr lvl="0" indent="0" marL="0">
-              <a:buNone/>
-            </a:pPr>
-          </a:p>
-          <a:p>
-            <a:pPr lvl="0" indent="0" marL="0">
-              <a:buNone/>
-            </a:pPr>
-            <a:r>
-              <a:rPr/>
-              <a:t>Say the consequence plainly: tune on accuracy and it will quietly recommend catching fewer failures. Most of the alarms a higher threshold drops are false ones, so accuracy rises with each drop, even though some of the dropped alarms were failures being caught. From 0.30 to 0.50 the alarms go from 53 + 25 = 78 to 43 + 13 = 56, 22 fewer: 25 - 13 = 12 were false and 53 - 43 = 10 were caught failures. Accuracy gains 12 right answers and loses 10, two more in all, 0.976 to 0.977.</a:t>
+              <a:t>Notebook 2, the threshold sweep, five of its rows drawn as bars. Each pair of bars is one threshold: teal is the failures caught, out of the 76 in the test set; gold is the healthy drives flagged by mistake. On the right, the accuracy each threshold scores: right answers divided by 2,000.</a:t>
+            </a:r>
+          </a:p>
+          <a:p>
+            <a:pPr lvl="0" indent="0" marL="0">
+              <a:buNone/>
+            </a:pPr>
+          </a:p>
+          <a:p>
+            <a:pPr lvl="0" indent="0" marL="0">
+              <a:buNone/>
+            </a:pPr>
+            <a:r>
+              <a:rPr/>
+              <a:t>Lower the threshold - go up the figure: both bars grow. At 0.02 we catch 69 of 76 failures and replace 284 healthy drives to do it. At 0.90 there are no false alarms at all, and we catch 14 of 76, fewer than a quarter.</a:t>
+            </a:r>
+          </a:p>
+          <a:p>
+            <a:pPr lvl="0" indent="0" marL="0">
+              <a:buNone/>
+            </a:pPr>
+          </a:p>
+          <a:p>
+            <a:pPr lvl="0" indent="0" marL="0">
+              <a:buNone/>
+            </a:pPr>
+            <a:r>
+              <a:rPr/>
+              <a:t>Now the right-hand column, which is the slide’s real argument. For every threshold from 0.10 up to 0.90 it stays between 0.942 and 0.977, a range of 0.977 - 0.942 = 0.035, three and a half percentage points, while the teal bar shrinks from 61 to 14. And its maximum, in bold, is at 0.5 - the threshold that misses 76 - 43 = 33 failures.</a:t>
+            </a:r>
+          </a:p>
+          <a:p>
+            <a:pPr lvl="0" indent="0" marL="0">
+              <a:buNone/>
+            </a:pPr>
+          </a:p>
+          <a:p>
+            <a:pPr lvl="0" indent="0" marL="0">
+              <a:buNone/>
+            </a:pPr>
+            <a:r>
+              <a:rPr/>
+              <a:t>Say the consequence plainly: tune on accuracy and it will quietly recommend catching fewer failures. Most of the alarms a higher threshold drops are false ones, so accuracy rises with each drop, even though some of the dropped alarms were failures being caught. From 0.30 to 0.50 the gold bar loses 25 - 13 = 12 false alarms and the teal bar loses 53 - 43 = 10 caught failures. Accuracy gains 12 right answers and loses 10, two more in all, 0.976 to 0.977.</a:t>
+            </a:r>
+          </a:p>
+          <a:p>
+            <a:pPr lvl="0" indent="0" marL="0">
+              <a:buNone/>
+            </a:pPr>
+          </a:p>
+          <a:p>
+            <a:pPr lvl="0" indent="0" marL="0">
+              <a:buNone/>
+            </a:pPr>
+            <a:r>
+              <a:rPr/>
+              <a:t>Precision and recall at each threshold are in the handout’s table in section 7.1, computed with the formulas of slide 34.</a:t>
             </a:r>
           </a:p>
         </p:txBody>
@@ -6141,7 +6155,21 @@
             </a:pPr>
             <a:r>
               <a:rPr/>
-              <a:t>Point at the AUC column: 0.949 against 0.950. Reweighting taught the model essentially nothing new about disk failure. What it did was move where the model puts its 0.5 line - the same lever as the threshold, pulled at a different moment.</a:t>
+              <a:t>The figure is notebook 3’s comparison drawn as bills, one bar per model. Rust is the cost of the missed failures, FN times 2,600 euros; gold is the cost of the false alarms, FP times 140 euros. The default model misses 33 failures: 33 times 2,600 plus 13 times 140 is 87,620. The threshold at 0.08 misses 11 and raises 121 false alarms: 45,540. Balanced weights miss 8 and raise 205: 8 times 2,600 plus 205 times 140 is 49,500.</a:t>
+            </a:r>
+          </a:p>
+          <a:p>
+            <a:pPr lvl="0" indent="0" marL="0">
+              <a:buNone/>
+            </a:pPr>
+          </a:p>
+          <a:p>
+            <a:pPr lvl="0" indent="0" marL="0">
+              <a:buNone/>
+            </a:pPr>
+            <a:r>
+              <a:rPr/>
+              <a:t>Point at the AUC under each name: 0.949 against 0.950. Reweighting taught the model essentially nothing new about disk failure. What it did was move where the model puts its 0.5 line - the same lever as the threshold, pulled at a different moment.</a:t>
             </a:r>
           </a:p>
           <a:p>
@@ -6485,21 +6513,21 @@
             </a:pPr>
             <a:r>
               <a:rPr/>
-              <a:t>The same choice as before, now with a much starker gap on three classes.</a:t>
-            </a:r>
-          </a:p>
-          <a:p>
-            <a:pPr lvl="0" indent="0" marL="0">
-              <a:buNone/>
-            </a:pPr>
-          </a:p>
-          <a:p>
-            <a:pPr lvl="0" indent="0" marL="0">
-              <a:buNone/>
-            </a:pPr>
-            <a:r>
-              <a:rPr/>
-              <a:t>Macro treats the three conditions as equally important. Weighted lets the healthy class - 1,665 of 2,000, five drives in six - do most of the talking.</a:t>
+              <a:t>The same choice as before, now with a much starker gap on three classes. Notebook 3, the three-class model: one bar per class, its F1 from classification_report, and the two averages as lines.</a:t>
+            </a:r>
+          </a:p>
+          <a:p>
+            <a:pPr lvl="0" indent="0" marL="0">
+              <a:buNone/>
+            </a:pPr>
+          </a:p>
+          <a:p>
+            <a:pPr lvl="0" indent="0" marL="0">
+              <a:buNone/>
+            </a:pPr>
+            <a:r>
+              <a:rPr/>
+              <a:t>Macro treats the three conditions as equally important: (0.947 + 0.545 + 0.629) divided by 3 = 0.707, the dotted line. Weighted multiplies each class by its number of test drives: (1,665 times 0.947 + 259 times 0.545 + 76 times 0.629) divided by 2,000 = 0.883, the dashed line. The healthy class - 1,665 of 2,000, five drives in six - does most of the talking, so the dashed line sits close to the healthy bar.</a:t>
             </a:r>
           </a:p>
           <a:p>
@@ -6981,7 +7009,7 @@
             </a:pPr>
             <a:r>
               <a:rPr/>
-              <a:t>Expect someone to object with slide 7’s right panel. That curve barely moves over the first few reallocated sectors, where 90% of the drives sit (handout section 1.1) - the first four move it from 1.2% to 4.4%, by 0.03 - and it is steepest at 13.2 sectors. So do the first sectors say little? Two separate answers, in this order.</a:t>
+              <a:t>Expect someone to object with slide 7’s right panel. That curve barely moves over the first few reallocated sectors, where 90% of the drives sit (four sectors or fewer), and it is steepest at 13.2 sectors. So do the first sectors say little? Two separate answers, in this order.</a:t>
             </a:r>
           </a:p>
           <a:p>
@@ -7009,21 +7037,7 @@
             </a:pPr>
             <a:r>
               <a:rPr/>
-              <a:t>Second, the flat start comes from using the raw count, not from the drives. A straight line gives every sector the same 0.336 of z, so for that model the first four sectors add 4 times 0.336 = 1.34 to z and take a drive from sigma(-4.43) = 1.2% to sigma(-4.43 + 1.34) = sigma(-3.09) = 4.4%. But the labels were generated from log(1 + count), on which the first sectors weigh the most (handout section 1.1): for a drive whose other counters are average, the first four sectors add 4.7 to z and take it from 0.012% to 1.3%, about a hundred times more. That is why the six-counter model of slide 12 onwards takes log(1 + count) as its input.</a:t>
-            </a:r>
-          </a:p>
-          <a:p>
-            <a:pPr lvl="0" indent="0" marL="0">
-              <a:buNone/>
-            </a:pPr>
-          </a:p>
-          <a:p>
-            <a:pPr lvl="0" indent="0" marL="0">
-              <a:buNone/>
-            </a:pPr>
-            <a:r>
-              <a:rPr/>
-              <a:t>If a sharp student notices that 0.012% to 1.3% is a smaller move in probability than slide 7’s 0.03: compare effects in z, not in probability. That drive starts so deep in the flat tail that even a hundredfold rise moves its probability by only 0.013. Handout section 2.2.</a:t>
+              <a:t>Second, the flat start comes from using the raw count, not from the drives. A straight line in the count gives every sector the same weight: the first adds as much to z as the twentieth. But the labels were generated from log(1 + count), which gives the first sectors the most weight (handout section 1.1). The handout’s figure in section 2.2 draws what the sectors add to z under each of the two. That is why the six-counter model of slide 12 onwards takes log(1 + count) as its input.</a:t>
             </a:r>
           </a:p>
           <a:p>
@@ -11247,7 +11261,7 @@
                       </a:pPr>
                       <a:r>
                         <a:rPr/>
-                        <a:t>0.47</a:t>
+                        <a:t>0.46</a:t>
                       </a:r>
                     </a:p>
                   </a:txBody>
@@ -11386,7 +11400,7 @@
                       </a:pPr>
                       <a:r>
                         <a:rPr b="1"/>
-                        <a:t>1.03</a:t>
+                        <a:t>1.02</a:t>
                       </a:r>
                     </a:p>
                   </a:txBody>
@@ -15971,688 +15985,36 @@
           </a:p>
         </p:txBody>
       </p:sp>
-      <p:graphicFrame>
-        <p:nvGraphicFramePr>
-          <p:cNvPr id="6" name="Content Placeholder 5"/>
-          <p:cNvGraphicFramePr>
-            <a:graphicFrameLocks noGrp="1"/>
-          </p:cNvGraphicFramePr>
-          <p:nvPr>
-            <p:ph idx="1"/>
-          </p:nvPr>
-        </p:nvGraphicFramePr>
-        <p:xfrm>
-          <a:off x="457200" y="1166099"/>
-          <a:ext cx="8229600" cy="3390900"/>
-        </p:xfrm>
-        <a:graphic>
-          <a:graphicData uri="http://schemas.openxmlformats.org/drawingml/2006/table">
-            <a:tbl>
-              <a:tblPr firstRow="1" bandRow="1">
-                <a:tableStyleId>{5C22544A-7EE6-4342-B048-85BDC9FD1C3A}</a:tableStyleId>
-              </a:tblPr>
-              <a:tblGrid>
-                <a:gridCol w="1175657"/>
-                <a:gridCol w="1175657"/>
-                <a:gridCol w="1175657"/>
-                <a:gridCol w="1175657"/>
-                <a:gridCol w="1175657"/>
-                <a:gridCol w="1175657"/>
-                <a:gridCol w="1175658"/>
-              </a:tblGrid>
-              <a:tr h="0">
-                <a:tc>
-                  <a:txBody>
-                    <a:bodyPr/>
-                    <a:lstStyle/>
-                    <a:p>
-                      <a:pPr lvl="0" indent="0" marL="0">
-                        <a:buNone/>
-                      </a:pPr>
-                      <a:r>
-                        <a:rPr/>
-                        <a:t>Threshold</a:t>
-                      </a:r>
-                    </a:p>
-                  </a:txBody>
-                  <a:tcPr/>
-                </a:tc>
-                <a:tc>
-                  <a:txBody>
-                    <a:bodyPr/>
-                    <a:lstStyle/>
-                    <a:p>
-                      <a:pPr lvl="0" indent="0" marL="0">
-                        <a:buNone/>
-                      </a:pPr>
-                      <a:r>
-                        <a:rPr/>
-                        <a:t>TP</a:t>
-                      </a:r>
-                    </a:p>
-                  </a:txBody>
-                  <a:tcPr/>
-                </a:tc>
-                <a:tc>
-                  <a:txBody>
-                    <a:bodyPr/>
-                    <a:lstStyle/>
-                    <a:p>
-                      <a:pPr lvl="0" indent="0" marL="0">
-                        <a:buNone/>
-                      </a:pPr>
-                      <a:r>
-                        <a:rPr/>
-                        <a:t>FP</a:t>
-                      </a:r>
-                    </a:p>
-                  </a:txBody>
-                  <a:tcPr/>
-                </a:tc>
-                <a:tc>
-                  <a:txBody>
-                    <a:bodyPr/>
-                    <a:lstStyle/>
-                    <a:p>
-                      <a:pPr lvl="0" indent="0" marL="0">
-                        <a:buNone/>
-                      </a:pPr>
-                      <a:r>
-                        <a:rPr/>
-                        <a:t>FN</a:t>
-                      </a:r>
-                    </a:p>
-                  </a:txBody>
-                  <a:tcPr/>
-                </a:tc>
-                <a:tc>
-                  <a:txBody>
-                    <a:bodyPr/>
-                    <a:lstStyle/>
-                    <a:p>
-                      <a:pPr lvl="0" indent="0" marL="0">
-                        <a:buNone/>
-                      </a:pPr>
-                      <a:r>
-                        <a:rPr/>
-                        <a:t>Precision, TP ÷ (TP + FP)</a:t>
-                      </a:r>
-                    </a:p>
-                  </a:txBody>
-                  <a:tcPr/>
-                </a:tc>
-                <a:tc>
-                  <a:txBody>
-                    <a:bodyPr/>
-                    <a:lstStyle/>
-                    <a:p>
-                      <a:pPr lvl="0" indent="0" marL="0">
-                        <a:buNone/>
-                      </a:pPr>
-                      <a:r>
-                        <a:rPr/>
-                        <a:t>Recall, TP ÷ (TP + FN)</a:t>
-                      </a:r>
-                    </a:p>
-                  </a:txBody>
-                  <a:tcPr/>
-                </a:tc>
-                <a:tc>
-                  <a:txBody>
-                    <a:bodyPr/>
-                    <a:lstStyle/>
-                    <a:p>
-                      <a:pPr lvl="0" indent="0" marL="0">
-                        <a:buNone/>
-                      </a:pPr>
-                      <a:r>
-                        <a:rPr/>
-                        <a:t>Accuracy, (TP + TN) ÷ 2,000</a:t>
-                      </a:r>
-                    </a:p>
-                  </a:txBody>
-                  <a:tcPr/>
-                </a:tc>
-              </a:tr>
-              <a:tr h="0">
-                <a:tc>
-                  <a:txBody>
-                    <a:bodyPr/>
-                    <a:lstStyle/>
-                    <a:p>
-                      <a:pPr lvl="0" indent="0" marL="0">
-                        <a:buNone/>
-                      </a:pPr>
-                      <a:r>
-                        <a:rPr/>
-                        <a:t>0.02</a:t>
-                      </a:r>
-                    </a:p>
-                  </a:txBody>
-                </a:tc>
-                <a:tc>
-                  <a:txBody>
-                    <a:bodyPr/>
-                    <a:lstStyle/>
-                    <a:p>
-                      <a:pPr lvl="0" indent="0" marL="0">
-                        <a:buNone/>
-                      </a:pPr>
-                      <a:r>
-                        <a:rPr/>
-                        <a:t>69</a:t>
-                      </a:r>
-                    </a:p>
-                  </a:txBody>
-                </a:tc>
-                <a:tc>
-                  <a:txBody>
-                    <a:bodyPr/>
-                    <a:lstStyle/>
-                    <a:p>
-                      <a:pPr lvl="0" indent="0" marL="0">
-                        <a:buNone/>
-                      </a:pPr>
-                      <a:r>
-                        <a:rPr/>
-                        <a:t>284</a:t>
-                      </a:r>
-                    </a:p>
-                  </a:txBody>
-                </a:tc>
-                <a:tc>
-                  <a:txBody>
-                    <a:bodyPr/>
-                    <a:lstStyle/>
-                    <a:p>
-                      <a:pPr lvl="0" indent="0" marL="0">
-                        <a:buNone/>
-                      </a:pPr>
-                      <a:r>
-                        <a:rPr/>
-                        <a:t>7</a:t>
-                      </a:r>
-                    </a:p>
-                  </a:txBody>
-                </a:tc>
-                <a:tc>
-                  <a:txBody>
-                    <a:bodyPr/>
-                    <a:lstStyle/>
-                    <a:p>
-                      <a:pPr lvl="0" indent="0" marL="0">
-                        <a:buNone/>
-                      </a:pPr>
-                      <a:r>
-                        <a:rPr/>
-                        <a:t>0.195</a:t>
-                      </a:r>
-                    </a:p>
-                  </a:txBody>
-                </a:tc>
-                <a:tc>
-                  <a:txBody>
-                    <a:bodyPr/>
-                    <a:lstStyle/>
-                    <a:p>
-                      <a:pPr lvl="0" indent="0" marL="0">
-                        <a:buNone/>
-                      </a:pPr>
-                      <a:r>
-                        <a:rPr/>
-                        <a:t>0.908</a:t>
-                      </a:r>
-                    </a:p>
-                  </a:txBody>
-                </a:tc>
-                <a:tc>
-                  <a:txBody>
-                    <a:bodyPr/>
-                    <a:lstStyle/>
-                    <a:p>
-                      <a:pPr lvl="0" indent="0" marL="0">
-                        <a:buNone/>
-                      </a:pPr>
-                      <a:r>
-                        <a:rPr/>
-                        <a:t>0.855</a:t>
-                      </a:r>
-                    </a:p>
-                  </a:txBody>
-                </a:tc>
-              </a:tr>
-              <a:tr h="0">
-                <a:tc>
-                  <a:txBody>
-                    <a:bodyPr/>
-                    <a:lstStyle/>
-                    <a:p>
-                      <a:pPr lvl="0" indent="0" marL="0">
-                        <a:buNone/>
-                      </a:pPr>
-                      <a:r>
-                        <a:rPr/>
-                        <a:t>0.10</a:t>
-                      </a:r>
-                    </a:p>
-                  </a:txBody>
-                </a:tc>
-                <a:tc>
-                  <a:txBody>
-                    <a:bodyPr/>
-                    <a:lstStyle/>
-                    <a:p>
-                      <a:pPr lvl="0" indent="0" marL="0">
-                        <a:buNone/>
-                      </a:pPr>
-                      <a:r>
-                        <a:rPr/>
-                        <a:t>61</a:t>
-                      </a:r>
-                    </a:p>
-                  </a:txBody>
-                </a:tc>
-                <a:tc>
-                  <a:txBody>
-                    <a:bodyPr/>
-                    <a:lstStyle/>
-                    <a:p>
-                      <a:pPr lvl="0" indent="0" marL="0">
-                        <a:buNone/>
-                      </a:pPr>
-                      <a:r>
-                        <a:rPr/>
-                        <a:t>102</a:t>
-                      </a:r>
-                    </a:p>
-                  </a:txBody>
-                </a:tc>
-                <a:tc>
-                  <a:txBody>
-                    <a:bodyPr/>
-                    <a:lstStyle/>
-                    <a:p>
-                      <a:pPr lvl="0" indent="0" marL="0">
-                        <a:buNone/>
-                      </a:pPr>
-                      <a:r>
-                        <a:rPr/>
-                        <a:t>15</a:t>
-                      </a:r>
-                    </a:p>
-                  </a:txBody>
-                </a:tc>
-                <a:tc>
-                  <a:txBody>
-                    <a:bodyPr/>
-                    <a:lstStyle/>
-                    <a:p>
-                      <a:pPr lvl="0" indent="0" marL="0">
-                        <a:buNone/>
-                      </a:pPr>
-                      <a:r>
-                        <a:rPr/>
-                        <a:t>0.374</a:t>
-                      </a:r>
-                    </a:p>
-                  </a:txBody>
-                </a:tc>
-                <a:tc>
-                  <a:txBody>
-                    <a:bodyPr/>
-                    <a:lstStyle/>
-                    <a:p>
-                      <a:pPr lvl="0" indent="0" marL="0">
-                        <a:buNone/>
-                      </a:pPr>
-                      <a:r>
-                        <a:rPr/>
-                        <a:t>0.803</a:t>
-                      </a:r>
-                    </a:p>
-                  </a:txBody>
-                </a:tc>
-                <a:tc>
-                  <a:txBody>
-                    <a:bodyPr/>
-                    <a:lstStyle/>
-                    <a:p>
-                      <a:pPr lvl="0" indent="0" marL="0">
-                        <a:buNone/>
-                      </a:pPr>
-                      <a:r>
-                        <a:rPr/>
-                        <a:t>0.942</a:t>
-                      </a:r>
-                    </a:p>
-                  </a:txBody>
-                </a:tc>
-              </a:tr>
-              <a:tr h="0">
-                <a:tc>
-                  <a:txBody>
-                    <a:bodyPr/>
-                    <a:lstStyle/>
-                    <a:p>
-                      <a:pPr lvl="0" indent="0" marL="0">
-                        <a:buNone/>
-                      </a:pPr>
-                      <a:r>
-                        <a:rPr/>
-                        <a:t>0.30</a:t>
-                      </a:r>
-                    </a:p>
-                  </a:txBody>
-                </a:tc>
-                <a:tc>
-                  <a:txBody>
-                    <a:bodyPr/>
-                    <a:lstStyle/>
-                    <a:p>
-                      <a:pPr lvl="0" indent="0" marL="0">
-                        <a:buNone/>
-                      </a:pPr>
-                      <a:r>
-                        <a:rPr/>
-                        <a:t>53</a:t>
-                      </a:r>
-                    </a:p>
-                  </a:txBody>
-                </a:tc>
-                <a:tc>
-                  <a:txBody>
-                    <a:bodyPr/>
-                    <a:lstStyle/>
-                    <a:p>
-                      <a:pPr lvl="0" indent="0" marL="0">
-                        <a:buNone/>
-                      </a:pPr>
-                      <a:r>
-                        <a:rPr/>
-                        <a:t>25</a:t>
-                      </a:r>
-                    </a:p>
-                  </a:txBody>
-                </a:tc>
-                <a:tc>
-                  <a:txBody>
-                    <a:bodyPr/>
-                    <a:lstStyle/>
-                    <a:p>
-                      <a:pPr lvl="0" indent="0" marL="0">
-                        <a:buNone/>
-                      </a:pPr>
-                      <a:r>
-                        <a:rPr/>
-                        <a:t>23</a:t>
-                      </a:r>
-                    </a:p>
-                  </a:txBody>
-                </a:tc>
-                <a:tc>
-                  <a:txBody>
-                    <a:bodyPr/>
-                    <a:lstStyle/>
-                    <a:p>
-                      <a:pPr lvl="0" indent="0" marL="0">
-                        <a:buNone/>
-                      </a:pPr>
-                      <a:r>
-                        <a:rPr/>
-                        <a:t>0.679</a:t>
-                      </a:r>
-                    </a:p>
-                  </a:txBody>
-                </a:tc>
-                <a:tc>
-                  <a:txBody>
-                    <a:bodyPr/>
-                    <a:lstStyle/>
-                    <a:p>
-                      <a:pPr lvl="0" indent="0" marL="0">
-                        <a:buNone/>
-                      </a:pPr>
-                      <a:r>
-                        <a:rPr/>
-                        <a:t>0.697</a:t>
-                      </a:r>
-                    </a:p>
-                  </a:txBody>
-                </a:tc>
-                <a:tc>
-                  <a:txBody>
-                    <a:bodyPr/>
-                    <a:lstStyle/>
-                    <a:p>
-                      <a:pPr lvl="0" indent="0" marL="0">
-                        <a:buNone/>
-                      </a:pPr>
-                      <a:r>
-                        <a:rPr/>
-                        <a:t>0.976</a:t>
-                      </a:r>
-                    </a:p>
-                  </a:txBody>
-                </a:tc>
-              </a:tr>
-              <a:tr h="0">
-                <a:tc>
-                  <a:txBody>
-                    <a:bodyPr/>
-                    <a:lstStyle/>
-                    <a:p>
-                      <a:pPr lvl="0" indent="0" marL="0">
-                        <a:buNone/>
-                      </a:pPr>
-                      <a:r>
-                        <a:rPr/>
-                        <a:t>0.50</a:t>
-                      </a:r>
-                    </a:p>
-                  </a:txBody>
-                </a:tc>
-                <a:tc>
-                  <a:txBody>
-                    <a:bodyPr/>
-                    <a:lstStyle/>
-                    <a:p>
-                      <a:pPr lvl="0" indent="0" marL="0">
-                        <a:buNone/>
-                      </a:pPr>
-                      <a:r>
-                        <a:rPr/>
-                        <a:t>43</a:t>
-                      </a:r>
-                    </a:p>
-                  </a:txBody>
-                </a:tc>
-                <a:tc>
-                  <a:txBody>
-                    <a:bodyPr/>
-                    <a:lstStyle/>
-                    <a:p>
-                      <a:pPr lvl="0" indent="0" marL="0">
-                        <a:buNone/>
-                      </a:pPr>
-                      <a:r>
-                        <a:rPr/>
-                        <a:t>13</a:t>
-                      </a:r>
-                    </a:p>
-                  </a:txBody>
-                </a:tc>
-                <a:tc>
-                  <a:txBody>
-                    <a:bodyPr/>
-                    <a:lstStyle/>
-                    <a:p>
-                      <a:pPr lvl="0" indent="0" marL="0">
-                        <a:buNone/>
-                      </a:pPr>
-                      <a:r>
-                        <a:rPr/>
-                        <a:t>33</a:t>
-                      </a:r>
-                    </a:p>
-                  </a:txBody>
-                </a:tc>
-                <a:tc>
-                  <a:txBody>
-                    <a:bodyPr/>
-                    <a:lstStyle/>
-                    <a:p>
-                      <a:pPr lvl="0" indent="0" marL="0">
-                        <a:buNone/>
-                      </a:pPr>
-                      <a:r>
-                        <a:rPr/>
-                        <a:t>0.768</a:t>
-                      </a:r>
-                    </a:p>
-                  </a:txBody>
-                </a:tc>
-                <a:tc>
-                  <a:txBody>
-                    <a:bodyPr/>
-                    <a:lstStyle/>
-                    <a:p>
-                      <a:pPr lvl="0" indent="0" marL="0">
-                        <a:buNone/>
-                      </a:pPr>
-                      <a:r>
-                        <a:rPr/>
-                        <a:t>0.566</a:t>
-                      </a:r>
-                    </a:p>
-                  </a:txBody>
-                </a:tc>
-                <a:tc>
-                  <a:txBody>
-                    <a:bodyPr/>
-                    <a:lstStyle/>
-                    <a:p>
-                      <a:pPr lvl="0" indent="0" marL="0">
-                        <a:buNone/>
-                      </a:pPr>
-                      <a:r>
-                        <a:rPr b="1"/>
-                        <a:t>0.977</a:t>
-                      </a:r>
-                    </a:p>
-                  </a:txBody>
-                </a:tc>
-              </a:tr>
-              <a:tr h="0">
-                <a:tc>
-                  <a:txBody>
-                    <a:bodyPr/>
-                    <a:lstStyle/>
-                    <a:p>
-                      <a:pPr lvl="0" indent="0" marL="0">
-                        <a:buNone/>
-                      </a:pPr>
-                      <a:r>
-                        <a:rPr/>
-                        <a:t>0.90</a:t>
-                      </a:r>
-                    </a:p>
-                  </a:txBody>
-                </a:tc>
-                <a:tc>
-                  <a:txBody>
-                    <a:bodyPr/>
-                    <a:lstStyle/>
-                    <a:p>
-                      <a:pPr lvl="0" indent="0" marL="0">
-                        <a:buNone/>
-                      </a:pPr>
-                      <a:r>
-                        <a:rPr/>
-                        <a:t>14</a:t>
-                      </a:r>
-                    </a:p>
-                  </a:txBody>
-                </a:tc>
-                <a:tc>
-                  <a:txBody>
-                    <a:bodyPr/>
-                    <a:lstStyle/>
-                    <a:p>
-                      <a:pPr lvl="0" indent="0" marL="0">
-                        <a:buNone/>
-                      </a:pPr>
-                      <a:r>
-                        <a:rPr/>
-                        <a:t>0</a:t>
-                      </a:r>
-                    </a:p>
-                  </a:txBody>
-                </a:tc>
-                <a:tc>
-                  <a:txBody>
-                    <a:bodyPr/>
-                    <a:lstStyle/>
-                    <a:p>
-                      <a:pPr lvl="0" indent="0" marL="0">
-                        <a:buNone/>
-                      </a:pPr>
-                      <a:r>
-                        <a:rPr/>
-                        <a:t>62</a:t>
-                      </a:r>
-                    </a:p>
-                  </a:txBody>
-                </a:tc>
-                <a:tc>
-                  <a:txBody>
-                    <a:bodyPr/>
-                    <a:lstStyle/>
-                    <a:p>
-                      <a:pPr lvl="0" indent="0" marL="0">
-                        <a:buNone/>
-                      </a:pPr>
-                      <a:r>
-                        <a:rPr/>
-                        <a:t>1.000</a:t>
-                      </a:r>
-                    </a:p>
-                  </a:txBody>
-                </a:tc>
-                <a:tc>
-                  <a:txBody>
-                    <a:bodyPr/>
-                    <a:lstStyle/>
-                    <a:p>
-                      <a:pPr lvl="0" indent="0" marL="0">
-                        <a:buNone/>
-                      </a:pPr>
-                      <a:r>
-                        <a:rPr/>
-                        <a:t>0.184</a:t>
-                      </a:r>
-                    </a:p>
-                  </a:txBody>
-                </a:tc>
-                <a:tc>
-                  <a:txBody>
-                    <a:bodyPr/>
-                    <a:lstStyle/>
-                    <a:p>
-                      <a:pPr lvl="0" indent="0" marL="0">
-                        <a:buNone/>
-                      </a:pPr>
-                      <a:r>
-                        <a:rPr/>
-                        <a:t>0.969</a:t>
-                      </a:r>
-                    </a:p>
-                  </a:txBody>
-                </a:tc>
-              </a:tr>
-            </a:tbl>
-          </a:graphicData>
-        </a:graphic>
-      </p:graphicFrame>
+      <p:pic>
+        <p:nvPicPr>
+          <p:cNvPr descr="sweep_outcomes.png" id="0" name="Picture 1"/>
+          <p:cNvPicPr>
+            <a:picLocks noGrp="1" noChangeAspect="1"/>
+          </p:cNvPicPr>
+          <p:nvPr/>
+        </p:nvPicPr>
+        <p:blipFill>
+          <a:blip r:embed="rId3"/>
+          <a:stretch>
+            <a:fillRect/>
+          </a:stretch>
+        </p:blipFill>
+        <p:spPr bwMode="auto">
+          <a:xfrm>
+            <a:off x="1023045" y="1166099"/>
+            <a:ext cx="7097910" cy="3360181"/>
+          </a:xfrm>
+          <a:prstGeom prst="rect">
+            <a:avLst/>
+          </a:prstGeom>
+          <a:noFill/>
+          <a:ln w="9525">
+            <a:noFill/>
+            <a:headEnd/>
+            <a:tailEnd/>
+          </a:ln>
+        </p:spPr>
+      </p:pic>
     </p:spTree>
   </p:cSld>
 </p:sld>
@@ -17959,350 +17321,36 @@
           </a:p>
         </p:txBody>
       </p:sp>
-      <p:graphicFrame>
-        <p:nvGraphicFramePr>
-          <p:cNvPr id="6" name="Content Placeholder 5"/>
-          <p:cNvGraphicFramePr>
-            <a:graphicFrameLocks noGrp="1"/>
-          </p:cNvGraphicFramePr>
-          <p:nvPr>
-            <p:ph idx="1"/>
-          </p:nvPr>
-        </p:nvGraphicFramePr>
-        <p:xfrm>
-          <a:off x="457200" y="1166099"/>
-          <a:ext cx="8229600" cy="3390900"/>
-        </p:xfrm>
-        <a:graphic>
-          <a:graphicData uri="http://schemas.openxmlformats.org/drawingml/2006/table">
-            <a:tbl>
-              <a:tblPr firstRow="1" bandRow="1">
-                <a:tableStyleId>{5C22544A-7EE6-4342-B048-85BDC9FD1C3A}</a:tableStyleId>
-              </a:tblPr>
-              <a:tblGrid>
-                <a:gridCol w="1645920"/>
-                <a:gridCol w="1645920"/>
-                <a:gridCol w="1645920"/>
-                <a:gridCol w="1645920"/>
-                <a:gridCol w="1645920"/>
-              </a:tblGrid>
-              <a:tr h="0">
-                <a:tc>
-                  <a:txBody>
-                    <a:bodyPr/>
-                    <a:lstStyle/>
-                    <a:p>
-                      <a:pPr lvl="0" indent="0" marL="0">
-                        <a:buNone/>
-                      </a:pPr>
-                      <a:r>
-                        <a:rPr/>
-                        <a:t>Model</a:t>
-                      </a:r>
-                    </a:p>
-                  </a:txBody>
-                  <a:tcPr/>
-                </a:tc>
-                <a:tc>
-                  <a:txBody>
-                    <a:bodyPr/>
-                    <a:lstStyle/>
-                    <a:p>
-                      <a:pPr lvl="0" indent="0" marL="0">
-                        <a:buNone/>
-                      </a:pPr>
-                      <a:r>
-                        <a:rPr/>
-                        <a:t>Failures missed, FN</a:t>
-                      </a:r>
-                    </a:p>
-                  </a:txBody>
-                  <a:tcPr/>
-                </a:tc>
-                <a:tc>
-                  <a:txBody>
-                    <a:bodyPr/>
-                    <a:lstStyle/>
-                    <a:p>
-                      <a:pPr lvl="0" indent="0" marL="0">
-                        <a:buNone/>
-                      </a:pPr>
-                      <a:r>
-                        <a:rPr/>
-                        <a:t>False alarms, FP</a:t>
-                      </a:r>
-                    </a:p>
-                  </a:txBody>
-                  <a:tcPr/>
-                </a:tc>
-                <a:tc>
-                  <a:txBody>
-                    <a:bodyPr/>
-                    <a:lstStyle/>
-                    <a:p>
-                      <a:pPr lvl="0" indent="0" marL="0">
-                        <a:buNone/>
-                      </a:pPr>
-                      <a:r>
-                        <a:rPr/>
-                        <a:t>Cost = FN × €2,600 + FP × €140</a:t>
-                      </a:r>
-                    </a:p>
-                  </a:txBody>
-                  <a:tcPr/>
-                </a:tc>
-                <a:tc>
-                  <a:txBody>
-                    <a:bodyPr/>
-                    <a:lstStyle/>
-                    <a:p>
-                      <a:pPr lvl="0" indent="0" marL="0">
-                        <a:buNone/>
-                      </a:pPr>
-                      <a:r>
-                        <a:rPr/>
-                        <a:t>AUC</a:t>
-                      </a:r>
-                    </a:p>
-                  </a:txBody>
-                  <a:tcPr/>
-                </a:tc>
-              </a:tr>
-              <a:tr h="0">
-                <a:tc>
-                  <a:txBody>
-                    <a:bodyPr/>
-                    <a:lstStyle/>
-                    <a:p>
-                      <a:pPr lvl="0" indent="0" marL="0">
-                        <a:buNone/>
-                      </a:pPr>
-                      <a:r>
-                        <a:rPr/>
-                        <a:t>Plain, threshold 0.50</a:t>
-                      </a:r>
-                    </a:p>
-                  </a:txBody>
-                </a:tc>
-                <a:tc>
-                  <a:txBody>
-                    <a:bodyPr/>
-                    <a:lstStyle/>
-                    <a:p>
-                      <a:pPr lvl="0" indent="0" marL="0">
-                        <a:buNone/>
-                      </a:pPr>
-                      <a:r>
-                        <a:rPr/>
-                        <a:t>33</a:t>
-                      </a:r>
-                    </a:p>
-                  </a:txBody>
-                </a:tc>
-                <a:tc>
-                  <a:txBody>
-                    <a:bodyPr/>
-                    <a:lstStyle/>
-                    <a:p>
-                      <a:pPr lvl="0" indent="0" marL="0">
-                        <a:buNone/>
-                      </a:pPr>
-                      <a:r>
-                        <a:rPr/>
-                        <a:t>13</a:t>
-                      </a:r>
-                    </a:p>
-                  </a:txBody>
-                </a:tc>
-                <a:tc>
-                  <a:txBody>
-                    <a:bodyPr/>
-                    <a:lstStyle/>
-                    <a:p>
-                      <a:pPr lvl="0" indent="0" marL="0">
-                        <a:buNone/>
-                      </a:pPr>
-                      <a:r>
-                        <a:rPr/>
-                        <a:t>33 × 2,600 + 13 × 140 = €87,620</a:t>
-                      </a:r>
-                    </a:p>
-                  </a:txBody>
-                </a:tc>
-                <a:tc>
-                  <a:txBody>
-                    <a:bodyPr/>
-                    <a:lstStyle/>
-                    <a:p>
-                      <a:pPr lvl="0" indent="0" marL="0">
-                        <a:buNone/>
-                      </a:pPr>
-                      <a:r>
-                        <a:rPr/>
-                        <a:t>0.949</a:t>
-                      </a:r>
-                    </a:p>
-                  </a:txBody>
-                </a:tc>
-              </a:tr>
-              <a:tr h="0">
-                <a:tc>
-                  <a:txBody>
-                    <a:bodyPr/>
-                    <a:lstStyle/>
-                    <a:p>
-                      <a:pPr lvl="0" indent="0" marL="0">
-                        <a:buNone/>
-                      </a:pPr>
-                      <a:r>
-                        <a:rPr/>
-                        <a:t>Plain, threshold 0.08</a:t>
-                      </a:r>
-                    </a:p>
-                  </a:txBody>
-                </a:tc>
-                <a:tc>
-                  <a:txBody>
-                    <a:bodyPr/>
-                    <a:lstStyle/>
-                    <a:p>
-                      <a:pPr lvl="0" indent="0" marL="0">
-                        <a:buNone/>
-                      </a:pPr>
-                      <a:r>
-                        <a:rPr/>
-                        <a:t>11</a:t>
-                      </a:r>
-                    </a:p>
-                  </a:txBody>
-                </a:tc>
-                <a:tc>
-                  <a:txBody>
-                    <a:bodyPr/>
-                    <a:lstStyle/>
-                    <a:p>
-                      <a:pPr lvl="0" indent="0" marL="0">
-                        <a:buNone/>
-                      </a:pPr>
-                      <a:r>
-                        <a:rPr/>
-                        <a:t>121</a:t>
-                      </a:r>
-                    </a:p>
-                  </a:txBody>
-                </a:tc>
-                <a:tc>
-                  <a:txBody>
-                    <a:bodyPr/>
-                    <a:lstStyle/>
-                    <a:p>
-                      <a:pPr lvl="0" indent="0" marL="0">
-                        <a:buNone/>
-                      </a:pPr>
-                      <a:r>
-                        <a:rPr/>
-                        <a:t>11 × 2,600 + 121 × 140 = €45,540</a:t>
-                      </a:r>
-                    </a:p>
-                  </a:txBody>
-                </a:tc>
-                <a:tc>
-                  <a:txBody>
-                    <a:bodyPr/>
-                    <a:lstStyle/>
-                    <a:p>
-                      <a:pPr lvl="0" indent="0" marL="0">
-                        <a:buNone/>
-                      </a:pPr>
-                      <a:r>
-                        <a:rPr/>
-                        <a:t>0.949</a:t>
-                      </a:r>
-                    </a:p>
-                  </a:txBody>
-                </a:tc>
-              </a:tr>
-              <a:tr h="0">
-                <a:tc>
-                  <a:txBody>
-                    <a:bodyPr/>
-                    <a:lstStyle/>
-                    <a:p>
-                      <a:pPr lvl="0" indent="0" marL="0">
-                        <a:buNone/>
-                      </a:pPr>
-                      <a:r>
-                        <a:rPr/>
-                        <a:t>Balanced class weights, 0.50</a:t>
-                      </a:r>
-                    </a:p>
-                  </a:txBody>
-                </a:tc>
-                <a:tc>
-                  <a:txBody>
-                    <a:bodyPr/>
-                    <a:lstStyle/>
-                    <a:p>
-                      <a:pPr lvl="0" indent="0" marL="0">
-                        <a:buNone/>
-                      </a:pPr>
-                      <a:r>
-                        <a:rPr/>
-                        <a:t>8</a:t>
-                      </a:r>
-                    </a:p>
-                  </a:txBody>
-                </a:tc>
-                <a:tc>
-                  <a:txBody>
-                    <a:bodyPr/>
-                    <a:lstStyle/>
-                    <a:p>
-                      <a:pPr lvl="0" indent="0" marL="0">
-                        <a:buNone/>
-                      </a:pPr>
-                      <a:r>
-                        <a:rPr/>
-                        <a:t>205</a:t>
-                      </a:r>
-                    </a:p>
-                  </a:txBody>
-                </a:tc>
-                <a:tc>
-                  <a:txBody>
-                    <a:bodyPr/>
-                    <a:lstStyle/>
-                    <a:p>
-                      <a:pPr lvl="0" indent="0" marL="0">
-                        <a:buNone/>
-                      </a:pPr>
-                      <a:r>
-                        <a:rPr/>
-                        <a:t>8 × 2,600 + 205 × 140 = €49,500</a:t>
-                      </a:r>
-                    </a:p>
-                  </a:txBody>
-                </a:tc>
-                <a:tc>
-                  <a:txBody>
-                    <a:bodyPr/>
-                    <a:lstStyle/>
-                    <a:p>
-                      <a:pPr lvl="0" indent="0" marL="0">
-                        <a:buNone/>
-                      </a:pPr>
-                      <a:r>
-                        <a:rPr b="1"/>
-                        <a:t>0.950</a:t>
-                      </a:r>
-                    </a:p>
-                  </a:txBody>
-                </a:tc>
-              </a:tr>
-            </a:tbl>
-          </a:graphicData>
-        </a:graphic>
-      </p:graphicFrame>
+      <p:pic>
+        <p:nvPicPr>
+          <p:cNvPr descr="class_weight_costs.png" id="0" name="Picture 1"/>
+          <p:cNvPicPr>
+            <a:picLocks noGrp="1" noChangeAspect="1"/>
+          </p:cNvPicPr>
+          <p:nvPr/>
+        </p:nvPicPr>
+        <p:blipFill>
+          <a:blip r:embed="rId3"/>
+          <a:stretch>
+            <a:fillRect/>
+          </a:stretch>
+        </p:blipFill>
+        <p:spPr bwMode="auto">
+          <a:xfrm>
+            <a:off x="457200" y="1284089"/>
+            <a:ext cx="8229600" cy="3124200"/>
+          </a:xfrm>
+          <a:prstGeom prst="rect">
+            <a:avLst/>
+          </a:prstGeom>
+          <a:noFill/>
+          <a:ln w="9525">
+            <a:noFill/>
+            <a:headEnd/>
+            <a:tailEnd/>
+          </a:ln>
+        </p:spPr>
+      </p:pic>
     </p:spTree>
   </p:cSld>
 </p:sld>
@@ -18793,56 +17841,36 @@
           </a:p>
         </p:txBody>
       </p:sp>
-      <p:sp>
-        <p:nvSpPr>
-          <p:cNvPr id="3" name="Content Placeholder 2"/>
-          <p:cNvSpPr>
-            <a:spLocks noGrp="1"/>
-          </p:cNvSpPr>
-          <p:nvPr>
-            <p:ph idx="1"/>
-          </p:nvPr>
-        </p:nvSpPr>
-        <p:spPr>
+      <p:pic>
+        <p:nvPicPr>
+          <p:cNvPr descr="macro_vs_weighted.png" id="0" name="Picture 1"/>
+          <p:cNvPicPr>
+            <a:picLocks noGrp="1" noChangeAspect="1"/>
+          </p:cNvPicPr>
+          <p:nvPr/>
+        </p:nvPicPr>
+        <p:blipFill>
+          <a:blip r:embed="rId3"/>
+          <a:stretch>
+            <a:fillRect/>
+          </a:stretch>
+        </p:blipFill>
+        <p:spPr bwMode="auto">
           <a:xfrm>
-            <a:off x="457200" y="1200151"/>
-            <a:ext cx="8229600" cy="3394472"/>
+            <a:off x="1306206" y="1166099"/>
+            <a:ext cx="6531587" cy="3360181"/>
           </a:xfrm>
+          <a:prstGeom prst="rect">
+            <a:avLst/>
+          </a:prstGeom>
+          <a:noFill/>
+          <a:ln w="9525">
+            <a:noFill/>
+            <a:headEnd/>
+            <a:tailEnd/>
+          </a:ln>
         </p:spPr>
-        <p:txBody>
-          <a:bodyPr/>
-          <a:lstStyle/>
-          <a:p>
-            <a:pPr lvl="0"/>
-            <a:r>
-              <a:rPr/>
-              <a:t>F1 per class: healthy 0.947 (1,665 drives), degraded 0.545 (259), failed 0.629 (76)</a:t>
-            </a:r>
-          </a:p>
-          <a:p>
-            <a:pPr lvl="0"/>
-            <a:r>
-              <a:rPr/>
-              <a:t>macro avg F1 = (0.947 + 0.545 + 0.629) ÷ 3 = </a:t>
-            </a:r>
-            <a:r>
-              <a:rPr b="1"/>
-              <a:t>0.707</a:t>
-            </a:r>
-          </a:p>
-          <a:p>
-            <a:pPr lvl="0"/>
-            <a:r>
-              <a:rPr/>
-              <a:t>weighted avg F1 = (1,665 × 0.947 + 259 × 0.545 + 76 × 0.629) ÷ 2,000 = </a:t>
-            </a:r>
-            <a:r>
-              <a:rPr b="1"/>
-              <a:t>0.883</a:t>
-            </a:r>
-          </a:p>
-        </p:txBody>
-      </p:sp>
+      </p:pic>
     </p:spTree>
   </p:cSld>
 </p:sld>

--- a/Lessons/04_classification_and_metrics/Slides/classification_and_metrics_slides.pptx
+++ b/Lessons/04_classification_and_metrics/Slides/classification_and_metrics_slides.pptx
@@ -5,7 +5,7 @@
     <p:sldMasterId id="2147483648" r:id="rId1"/>
   </p:sldMasterIdLst>
   <p:notesMasterIdLst>
-    <p:notesMasterId r:id="rId58"/>
+    <p:notesMasterId r:id="rId61"/>
   </p:notesMasterIdLst>
   <p:sldIdLst>
     <p:sldId id="256" r:id="rId2"/>
@@ -64,6 +64,9 @@
     <p:sldId id="309" r:id="rId55"/>
     <p:sldId id="310" r:id="rId56"/>
     <p:sldId id="311" r:id="rId57"/>
+    <p:sldId id="312" r:id="rId58"/>
+    <p:sldId id="313" r:id="rId59"/>
+    <p:sldId id="314" r:id="rId60"/>
   </p:sldIdLst>
   <p:sldSz cx="9144000" cy="5143500" type="screen16x9"/>
   <p:notesSz cx="6858000" cy="9144000"/>
@@ -593,7 +596,7 @@
             </a:pPr>
             <a:r>
               <a:rPr/>
-              <a:t>The one to watch for: choosing the penalty by looking at the test error. It is the natural thing to do because the test error is the number they were told to care about. It is exactly the mistake lesson 1 named: once the test set has helped choose anything, its score is no longer an honest estimate of how the model does on new data, because the choice was fitted to it. Today’s lesson ends up in the same place from a different direction, on slide 50, when we choose a decision threshold by looking at the test set. Lesson 5 gives them the machinery to do both honestly.</a:t>
+              <a:t>The one to watch for: choosing the penalty by looking at the test error. It is the natural thing to do because the test error is the number they were told to care about. It is exactly the mistake lesson 1 named: once the test set has helped choose anything, its score is no longer an honest estimate of how the model does on new data, because the choice was fitted to it. Today’s lesson ends up in the same place from a different direction, on slide 53, when we choose a decision threshold by looking at the test set. Lesson 5 gives them the machinery to do both honestly.</a:t>
             </a:r>
           </a:p>
         </p:txBody>
@@ -841,7 +844,7 @@
             </a:pPr>
             <a:r>
               <a:rPr/>
-              <a:t>That last one is the one to flag. It is largest in the middle, at sigma = 0.5, where it is 0.5 times 0.5 = one quarter, and it decays to zero at both ends. That one fact does two jobs later. It is why the sigmoid behaves well: flat ends mean that once the model is sure, extra evidence changes little (slide 8). And it is why squared error fails with it: slide 24 shows that the same factor ends up inside squared error’s gradient and switches learning off exactly when the model is confidently wrong.</a:t>
+              <a:t>That last one is the one to flag. It is largest in the middle, at sigma = 0.5, where it is 0.5 times 0.5 = one quarter, and it decays to zero at both ends. That one fact does two jobs later. It is why the sigmoid behaves well: flat ends mean that once the model is sure, extra evidence changes little (slide 8). And it is why squared error fails with it: slide 25 shows that the same factor ends up inside squared error’s gradient and switches learning off exactly when the model is confidently wrong.</a:t>
             </a:r>
           </a:p>
         </p:txBody>
@@ -1365,7 +1368,7 @@
             </a:pPr>
             <a:r>
               <a:rPr/>
-              <a:t>Squared error on the sigmoid IS differentiable, and it does produce a working model on easy problems. The reason to reject it is subtler, so do not give it yet. Slides 17 to 21 first build, on three drives, the cost that logistic regression does minimise; slide 24 then comes back to squared error and shows what goes wrong with it, on a drive the model is confidently wrong about.</a:t>
+              <a:t>Squared error on the sigmoid IS differentiable, and it does produce a working model on easy problems. The reason to reject it is subtler, so do not give it yet. Slides 17 to 21 first build, on three drives, the cost that logistic regression does minimise; slide 25 then comes back to squared error and shows what goes wrong with it, on a drive the model is confidently wrong about.</a:t>
             </a:r>
           </a:p>
         </p:txBody>
@@ -2109,7 +2112,7 @@
             </a:pPr>
             <a:r>
               <a:rPr/>
-              <a:t>Divide the sum by the number of drives and you have the average surprise: that is the cost J that fitting minimises, and scikit-learn’s log_loss computes exactly this average. The next slide writes the surprise of one drive as a formula, the loss L; J is its average over the drives. Handout sections 3.1 to 3.3.</a:t>
+              <a:t>Divide the sum by the number of drives and you have the average surprise: that is the cost J that fitting minimises, and scikit-learn’s log_loss computes exactly this average. The next slide draws the surprise of one drive, and slide 23 writes it as a formula, the loss L; J is its average over the drives. Handout sections 3.1 to 3.3.</a:t>
             </a:r>
           </a:p>
         </p:txBody>
@@ -2191,63 +2194,49 @@
             </a:pPr>
             <a:r>
               <a:rPr/>
-              <a:t>This is the loss on ONE example, L, not the cost over the training set; p is the predicted probability, the same number the next slide writes as y-hat. Say the other half aloud rather than showing it: the cost J is the average of this over the m examples, one over m times the sum. It is left off the slide because, written out in full, the formula does not fit at a readable size.</a:t>
-            </a:r>
-          </a:p>
-          <a:p>
-            <a:pPr lvl="0" indent="0" marL="0">
-              <a:buNone/>
-            </a:pPr>
-          </a:p>
-          <a:p>
-            <a:pPr lvl="0" indent="0" marL="0">
-              <a:buNone/>
-            </a:pPr>
-            <a:r>
-              <a:rPr/>
-              <a:t>Nothing new to derive: this is slides 17 to 21 written for one drive in symbols. Check it on drive B of slide 17: y = 0 and p = 0.1, so the first term vanishes and L = -log(1 - 0.1) = -log 0.9 = 0.11, the number slide 21 gave B under setting 1. The handout, section 3, does it for m drives in full.</a:t>
-            </a:r>
-          </a:p>
-          <a:p>
-            <a:pPr lvl="0" indent="0" marL="0">
-              <a:buNone/>
-            </a:pPr>
-          </a:p>
-          <a:p>
-            <a:pPr lvl="0" indent="0" marL="0">
-              <a:buNone/>
-            </a:pPr>
-            <a:r>
-              <a:rPr/>
-              <a:t>The reading that makes it stick: the cost of an outcome is the SURPRISE of seeing it. Something you called certain costs nothing. Something you gave a probability of one in a thousand costs log 1000, about 6.9 (natural logarithm, as everywhere in this lesson). Something you declared impossible costs infinity.</a:t>
-            </a:r>
-          </a:p>
-          <a:p>
-            <a:pPr lvl="0" indent="0" marL="0">
-              <a:buNone/>
-            </a:pPr>
-          </a:p>
-          <a:p>
-            <a:pPr lvl="0" indent="0" marL="0">
-              <a:buNone/>
-            </a:pPr>
-            <a:r>
-              <a:rPr/>
-              <a:t>Only one of the two terms is ever active, because y is 0 or 1. The bracket is a way of writing an if-statement in algebra, nothing more.</a:t>
-            </a:r>
-          </a:p>
-          <a:p>
-            <a:pPr lvl="0" indent="0" marL="0">
-              <a:buNone/>
-            </a:pPr>
-          </a:p>
-          <a:p>
-            <a:pPr lvl="0" indent="0" marL="0">
-              <a:buNone/>
-            </a:pPr>
-            <a:r>
-              <a:rPr/>
-              <a:t>And the headline: nobody designed this function. It fell out of asking for the parameters that make the data least surprising.</a:t>
+              <a:t>Slide 21’s numbers, drawn. The horizontal axis is the probability the model gave to what actually happened - the factors of slides 18 and 20. The vertical axis is minus the log of it: the surprise.</a:t>
+            </a:r>
+          </a:p>
+          <a:p>
+            <a:pPr lvl="0" indent="0" marL="0">
+              <a:buNone/>
+            </a:pPr>
+          </a:p>
+          <a:p>
+            <a:pPr lvl="0" indent="0" marL="0">
+              <a:buNone/>
+            </a:pPr>
+            <a:r>
+              <a:rPr/>
+              <a:t>Read the curve from right to left. Something the model was sure of, p = 1, costs nothing: minus log 1 is 0. As p falls the surprise grows, slowly at first and then without limit: something the model called impossible costs infinity.</a:t>
+            </a:r>
+          </a:p>
+          <a:p>
+            <a:pPr lvl="0" indent="0" marL="0">
+              <a:buNone/>
+            </a:pPr>
+          </a:p>
+          <a:p>
+            <a:pPr lvl="0" indent="0" marL="0">
+              <a:buNone/>
+            </a:pPr>
+            <a:r>
+              <a:rPr/>
+              <a:t>Now the six dots. Setting 1’s factors, 0.8, 0.9 and 0.8, sit on the flat right-hand part: small surprises, 0.22 + 0.11 + 0.22 = 0.55 in all. Setting 2’s, 0.3, 0.4 and 0.5, sit higher up: 1.20 + 0.92 + 0.69 = 2.81. The highest dot is drive A under setting 2: it failed, and setting 2 had given its failure only 0.3, so minus log 0.3 = 1.20.</a:t>
+            </a:r>
+          </a:p>
+          <a:p>
+            <a:pPr lvl="0" indent="0" marL="0">
+              <a:buNone/>
+            </a:pPr>
+          </a:p>
+          <a:p>
+            <a:pPr lvl="0" indent="0" marL="0">
+              <a:buNone/>
+            </a:pPr>
+            <a:r>
+              <a:rPr/>
+              <a:t>The curve is the cost of one drive, which the next slide writes as a formula: the loss L. Handout section 3.1.</a:t>
             </a:r>
           </a:p>
         </p:txBody>
@@ -2329,77 +2318,63 @@
             </a:pPr>
             <a:r>
               <a:rPr/>
-              <a:t>What the formula says, in words. To find how the cost J changes when the coefficient w_j is nudged up: take each training drive, compute its error - the predicted probability y-hat minus the true label y, which is 0 or 1 - multiply that error by the drive’s value of feature j, and average over the m drives. Gradient descent then steps w_j in the opposite direction.</a:t>
-            </a:r>
-          </a:p>
-          <a:p>
-            <a:pPr lvl="0" indent="0" marL="0">
-              <a:buNone/>
-            </a:pPr>
-          </a:p>
-          <a:p>
-            <a:pPr lvl="0" indent="0" marL="0">
-              <a:buNone/>
-            </a:pPr>
-            <a:r>
-              <a:rPr/>
-              <a:t>What is new, and what is not. The formula is written with exactly the symbols of lesson 3’s slide 23. The difference is hidden in y-hat: in lesson 3 it was the straight line w-transpose-x plus b, and here it is the sigmoid of that line, the probability of slide 12 - which is why the title says so. The cost is different too: squared error there, log loss (slide 22) here. Different model, different cost, and yet the same gradient.</a:t>
-            </a:r>
-          </a:p>
-          <a:p>
-            <a:pPr lvl="0" indent="0" marL="0">
-              <a:buNone/>
-            </a:pPr>
-          </a:p>
-          <a:p>
-            <a:pPr lvl="0" indent="0" marL="0">
-              <a:buNone/>
-            </a:pPr>
-            <a:r>
-              <a:rPr/>
-              <a:t>A concrete drive. A drive that failed, y = 1, to which the model gives y-hat = 0.2: its error is 0.2 minus 1, which is minus 0.8. A negative term means the cost falls if w_j rises, so this drive pulls w_j up, and pulls harder the larger its value of feature j. A healthy drive, y = 0, given the same 0.2 has error plus 0.2 and pulls the other way, four times more gently. This is lesson 3’s weighted vote: each drive pulls in proportion to how wrong it was and how large the feature was for it.</a:t>
-            </a:r>
-          </a:p>
-          <a:p>
-            <a:pPr lvl="0" indent="0" marL="0">
-              <a:buNone/>
-            </a:pPr>
-          </a:p>
-          <a:p>
-            <a:pPr lvl="0" indent="0" marL="0">
-              <a:buNone/>
-            </a:pPr>
-            <a:r>
-              <a:rPr/>
-              <a:t>Why it comes out the same - worth the board if there is appetite, handout section 3.4 has it in full. Follow one drive through the chain rule, in three links, with p for y-hat and z for w-transpose-x plus b: - how the loss changes with p: (p - y) divided by p times (1 - p) - the denominator comes from the logarithms in the log loss; - how p changes with z: p times (1 - p), the sigmoid’s derivative from slide 12; - how z changes with w_j: x_j. Multiply the three: the p times (1 - p) cancels, and what is left is (p - y) times x_j.</a:t>
-            </a:r>
-          </a:p>
-          <a:p>
-            <a:pPr lvl="0" indent="0" marL="0">
-              <a:buNone/>
-            </a:pPr>
-          </a:p>
-          <a:p>
-            <a:pPr lvl="0" indent="0" marL="0">
-              <a:buNone/>
-            </a:pPr>
-            <a:r>
-              <a:rPr/>
-              <a:t>Why that cancellation matters, and it is the bridge to the next slide: with squared error in place of log loss, nothing cancels the factor p times (1 - p), and slide 24 shows what it does to a drive the model is confidently wrong about.</a:t>
-            </a:r>
-          </a:p>
-          <a:p>
-            <a:pPr lvl="0" indent="0" marL="0">
-              <a:buNone/>
-            </a:pPr>
-          </a:p>
-          <a:p>
-            <a:pPr lvl="0" indent="0" marL="0">
-              <a:buNone/>
-            </a:pPr>
-            <a:r>
-              <a:rPr/>
-              <a:t>If someone asks whether the match is a coincidence: no, and one sentence is enough. Both costs come from maximum likelihood - squared error when the noise on y is Gaussian (lesson 3, handout section 2.2), log loss when y is a 0/1 outcome - and each paired with its own model gives this same form. Statisticians call the family “generalised linear models”; the name is not examinable. The practical consequence is: the same gradient descent code trains both models, and only the line that computes y-hat changes.</a:t>
+              <a:t>This is the loss on ONE example, L, not the cost over the training set; p is the predicted probability, the same number the next slide writes as y-hat. Say the other half aloud rather than showing it: the cost J is the average of this over the m examples, one over m times the sum. It is left off the slide because, written out in full, the formula does not fit at a readable size.</a:t>
+            </a:r>
+          </a:p>
+          <a:p>
+            <a:pPr lvl="0" indent="0" marL="0">
+              <a:buNone/>
+            </a:pPr>
+          </a:p>
+          <a:p>
+            <a:pPr lvl="0" indent="0" marL="0">
+              <a:buNone/>
+            </a:pPr>
+            <a:r>
+              <a:rPr/>
+              <a:t>Nothing new to derive: this is slides 17 to 21 written for one drive in symbols. Check it on drive B of slide 17: y = 0 and p = 0.1, so the first term vanishes and L = -log(1 - 0.1) = -log 0.9 = 0.11, the number slide 21 gave B under setting 1. The handout, section 3, does it for m drives in full.</a:t>
+            </a:r>
+          </a:p>
+          <a:p>
+            <a:pPr lvl="0" indent="0" marL="0">
+              <a:buNone/>
+            </a:pPr>
+          </a:p>
+          <a:p>
+            <a:pPr lvl="0" indent="0" marL="0">
+              <a:buNone/>
+            </a:pPr>
+            <a:r>
+              <a:rPr/>
+              <a:t>The reading that makes it stick: the cost of an outcome is the SURPRISE of seeing it. Something you called certain costs nothing. Something you gave a probability of one in a thousand costs log 1000, about 6.9 (natural logarithm, as everywhere in this lesson). Something you declared impossible costs infinity.</a:t>
+            </a:r>
+          </a:p>
+          <a:p>
+            <a:pPr lvl="0" indent="0" marL="0">
+              <a:buNone/>
+            </a:pPr>
+          </a:p>
+          <a:p>
+            <a:pPr lvl="0" indent="0" marL="0">
+              <a:buNone/>
+            </a:pPr>
+            <a:r>
+              <a:rPr/>
+              <a:t>Only one of the two terms is ever active, because y is 0 or 1. The bracket is a way of writing an if-statement in algebra, nothing more.</a:t>
+            </a:r>
+          </a:p>
+          <a:p>
+            <a:pPr lvl="0" indent="0" marL="0">
+              <a:buNone/>
+            </a:pPr>
+          </a:p>
+          <a:p>
+            <a:pPr lvl="0" indent="0" marL="0">
+              <a:buNone/>
+            </a:pPr>
+            <a:r>
+              <a:rPr/>
+              <a:t>And the headline: nobody designed this function. It fell out of asking for the parameters that make the data least surprising.</a:t>
             </a:r>
           </a:p>
         </p:txBody>
@@ -2481,63 +2456,77 @@
             </a:pPr>
             <a:r>
               <a:rPr/>
-              <a:t>Both panels take a drive that failed, y = 1, and move the model’s probability p for it along the horizontal axis. Squared error here is (p - 1) squared, the handout’s convention in section 4.</a:t>
-            </a:r>
-          </a:p>
-          <a:p>
-            <a:pPr lvl="0" indent="0" marL="0">
-              <a:buNone/>
-            </a:pPr>
-          </a:p>
-          <a:p>
-            <a:pPr lvl="0" indent="0" marL="0">
-              <a:buNone/>
-            </a:pPr>
-            <a:r>
-              <a:rPr/>
-              <a:t>Left panel, the costs. A drive failed and the model said 0.0001. Squared error charges (0.0001 - 1) squared = 0.9998. An honest “don’t know” - 0.5 - costs (0.5 - 1) squared = 0.25. So the worst possible answer is four times worse than a shrug. Log loss charges minus log 0.0001 = 9.2 against minus log 0.5 = 0.69, and the ratio grows without bound.</a:t>
-            </a:r>
-          </a:p>
-          <a:p>
-            <a:pPr lvl="0" indent="0" marL="0">
-              <a:buNone/>
-            </a:pPr>
-          </a:p>
-          <a:p>
-            <a:pPr lvl="0" indent="0" marL="0">
-              <a:buNone/>
-            </a:pPr>
-            <a:r>
-              <a:rPr/>
-              <a:t>Right panel is the real argument, so spend the time here. It shows the size of the gradient with respect to z, the push gradient descent gives the model. Log loss’s gradient is p - 1 (slide 23). Squared error’s is 2(p - 1) times p times (1 - p): the chain rule through the sigmoid brings in its derivative, p times one-minus-p, from slide 12, and nothing cancels it. That factor goes to zero as p goes to zero.</a:t>
-            </a:r>
-          </a:p>
-          <a:p>
-            <a:pPr lvl="0" indent="0" marL="0">
-              <a:buNone/>
-            </a:pPr>
-          </a:p>
-          <a:p>
-            <a:pPr lvl="0" indent="0" marL="0">
-              <a:buNone/>
-            </a:pPr>
-            <a:r>
-              <a:rPr/>
-              <a:t>Say it as a sentence: the wronger the model gets, the less squared error asks it to change. Divide one gradient by the other: squared error’s is log loss’s times 2p(1 - p). At p = 0.001 that factor is 2 times 0.001 times 0.999 = 0.002, a five-hundredth. Log loss goes the other way, approaching its maximum push exactly where the error is worst.</a:t>
-            </a:r>
-          </a:p>
-          <a:p>
-            <a:pPr lvl="0" indent="0" marL="0">
-              <a:buNone/>
-            </a:pPr>
-          </a:p>
-          <a:p>
-            <a:pPr lvl="0" indent="0" marL="0">
-              <a:buNone/>
-            </a:pPr>
-            <a:r>
-              <a:rPr/>
-              <a:t>That is the failure. Not that squared error scores badly - that it stops teaching.</a:t>
+              <a:t>What the formula says, in words. To find how the cost J changes when the coefficient w_j is nudged up: take each training drive, compute its error - the predicted probability y-hat minus the true label y, which is 0 or 1 - multiply that error by the drive’s value of feature j, and average over the m drives. Gradient descent then steps w_j in the opposite direction.</a:t>
+            </a:r>
+          </a:p>
+          <a:p>
+            <a:pPr lvl="0" indent="0" marL="0">
+              <a:buNone/>
+            </a:pPr>
+          </a:p>
+          <a:p>
+            <a:pPr lvl="0" indent="0" marL="0">
+              <a:buNone/>
+            </a:pPr>
+            <a:r>
+              <a:rPr/>
+              <a:t>What is new, and what is not. The formula is written with exactly the symbols of lesson 3’s slide 23. The difference is hidden in y-hat: in lesson 3 it was the straight line w-transpose-x plus b, and here it is the sigmoid of that line, the probability of slide 12 - which is why the title says so. The cost is different too: squared error there, log loss (slide 23) here. Different model, different cost, and yet the same gradient.</a:t>
+            </a:r>
+          </a:p>
+          <a:p>
+            <a:pPr lvl="0" indent="0" marL="0">
+              <a:buNone/>
+            </a:pPr>
+          </a:p>
+          <a:p>
+            <a:pPr lvl="0" indent="0" marL="0">
+              <a:buNone/>
+            </a:pPr>
+            <a:r>
+              <a:rPr/>
+              <a:t>A concrete drive. A drive that failed, y = 1, to which the model gives y-hat = 0.2: its error is 0.2 minus 1, which is minus 0.8. A negative term means the cost falls if w_j rises, so this drive pulls w_j up, and pulls harder the larger its value of feature j. A healthy drive, y = 0, given the same 0.2 has error plus 0.2 and pulls the other way, four times more gently. This is lesson 3’s weighted vote: each drive pulls in proportion to how wrong it was and how large the feature was for it.</a:t>
+            </a:r>
+          </a:p>
+          <a:p>
+            <a:pPr lvl="0" indent="0" marL="0">
+              <a:buNone/>
+            </a:pPr>
+          </a:p>
+          <a:p>
+            <a:pPr lvl="0" indent="0" marL="0">
+              <a:buNone/>
+            </a:pPr>
+            <a:r>
+              <a:rPr/>
+              <a:t>Why it comes out the same - worth the board if there is appetite, handout section 3.4 has it in full. Follow one drive through the chain rule, in three links, with p for y-hat and z for w-transpose-x plus b: - how the loss changes with p: (p - y) divided by p times (1 - p) - the denominator comes from the logarithms in the log loss; - how p changes with z: p times (1 - p), the sigmoid’s derivative from slide 12; - how z changes with w_j: x_j. Multiply the three: the p times (1 - p) cancels, and what is left is (p - y) times x_j.</a:t>
+            </a:r>
+          </a:p>
+          <a:p>
+            <a:pPr lvl="0" indent="0" marL="0">
+              <a:buNone/>
+            </a:pPr>
+          </a:p>
+          <a:p>
+            <a:pPr lvl="0" indent="0" marL="0">
+              <a:buNone/>
+            </a:pPr>
+            <a:r>
+              <a:rPr/>
+              <a:t>Why that cancellation matters, and it is the bridge to the next slide: with squared error in place of log loss, nothing cancels the factor p times (1 - p), and slide 25 shows what it does to a drive the model is confidently wrong about.</a:t>
+            </a:r>
+          </a:p>
+          <a:p>
+            <a:pPr lvl="0" indent="0" marL="0">
+              <a:buNone/>
+            </a:pPr>
+          </a:p>
+          <a:p>
+            <a:pPr lvl="0" indent="0" marL="0">
+              <a:buNone/>
+            </a:pPr>
+            <a:r>
+              <a:rPr/>
+              <a:t>If someone asks whether the match is a coincidence: no, and one sentence is enough. Both costs come from maximum likelihood - squared error when the noise on y is Gaussian (lesson 3, handout section 2.2), log loss when y is a 0/1 outcome - and each paired with its own model gives this same form. Statisticians call the family “generalised linear models”; the name is not examinable. The practical consequence is: the same gradient descent code trains both models, and only the line that computes y-hat changes.</a:t>
             </a:r>
           </a:p>
         </p:txBody>
@@ -2619,49 +2608,63 @@
             </a:pPr>
             <a:r>
               <a:rPr/>
-              <a:t>State it, do not prove it; the handout section 4.3 has the argument.</a:t>
-            </a:r>
-          </a:p>
-          <a:p>
-            <a:pPr lvl="0" indent="0" marL="0">
-              <a:buNone/>
-            </a:pPr>
-          </a:p>
-          <a:p>
-            <a:pPr lvl="0" indent="0" marL="0">
-              <a:buNone/>
-            </a:pPr>
-            <a:r>
-              <a:rPr/>
-              <a:t>The consequence is practical: gradient descent on log loss cannot get trapped. Squared error through a sigmoid has no such guarantee and is in general non-convex.</a:t>
-            </a:r>
-          </a:p>
-          <a:p>
-            <a:pPr lvl="0" indent="0" marL="0">
-              <a:buNone/>
-            </a:pPr>
-          </a:p>
-          <a:p>
-            <a:pPr lvl="0" indent="0" marL="0">
-              <a:buNone/>
-            </a:pPr>
-            <a:r>
-              <a:rPr/>
-              <a:t>Now the caution that catches people, and it is worth ten seconds because they will see max_iter set in notebook 1 and wonder why. Convex does NOT mean there is a closed-form solution. Setting the gradient to zero gives X-transpose times the vector of errors, sigma(Xw + b) minus y, equal to zero. That equation is not linear in w - the sigmoid is in the way - so it cannot be solved in one step as lesson 3’s normal equation was.</a:t>
-            </a:r>
-          </a:p>
-          <a:p>
-            <a:pPr lvl="0" indent="0" marL="0">
-              <a:buNone/>
-            </a:pPr>
-          </a:p>
-          <a:p>
-            <a:pPr lvl="0" indent="0" marL="0">
-              <a:buNone/>
-            </a:pPr>
-            <a:r>
-              <a:rPr/>
-              <a:t>There is no normal equation for logistic regression. It has to be solved iteratively, which is why LogisticRegression has a max_iter argument and LinearRegression does not. If a student ever sees a convergence warning, that is what it is about.</a:t>
+              <a:t>Both panels take a drive that failed, y = 1, and move the model’s probability p for it along the horizontal axis. Squared error here is (p - 1) squared, the handout’s convention in section 4.</a:t>
+            </a:r>
+          </a:p>
+          <a:p>
+            <a:pPr lvl="0" indent="0" marL="0">
+              <a:buNone/>
+            </a:pPr>
+          </a:p>
+          <a:p>
+            <a:pPr lvl="0" indent="0" marL="0">
+              <a:buNone/>
+            </a:pPr>
+            <a:r>
+              <a:rPr/>
+              <a:t>Left panel, the costs. A drive failed and the model said 0.0001. Squared error charges (0.0001 - 1) squared = 0.9998. An honest “don’t know” - 0.5 - costs (0.5 - 1) squared = 0.25. So the worst possible answer is four times worse than a shrug. Log loss charges minus log 0.0001 = 9.2 against minus log 0.5 = 0.69, and the ratio grows without bound.</a:t>
+            </a:r>
+          </a:p>
+          <a:p>
+            <a:pPr lvl="0" indent="0" marL="0">
+              <a:buNone/>
+            </a:pPr>
+          </a:p>
+          <a:p>
+            <a:pPr lvl="0" indent="0" marL="0">
+              <a:buNone/>
+            </a:pPr>
+            <a:r>
+              <a:rPr/>
+              <a:t>Right panel is the real argument, so spend the time here. It shows the size of the gradient with respect to z, the push gradient descent gives the model. Log loss’s gradient is p - 1 (slide 24). Squared error’s is 2(p - 1) times p times (1 - p): the chain rule through the sigmoid brings in its derivative, p times one-minus-p, from slide 12, and nothing cancels it. That factor goes to zero as p goes to zero.</a:t>
+            </a:r>
+          </a:p>
+          <a:p>
+            <a:pPr lvl="0" indent="0" marL="0">
+              <a:buNone/>
+            </a:pPr>
+          </a:p>
+          <a:p>
+            <a:pPr lvl="0" indent="0" marL="0">
+              <a:buNone/>
+            </a:pPr>
+            <a:r>
+              <a:rPr/>
+              <a:t>Say it as a sentence: the wronger the model gets, the less squared error asks it to change. Divide one gradient by the other: squared error’s is log loss’s times 2p(1 - p). At p = 0.001 that factor is 2 times 0.001 times 0.999 = 0.002, a five-hundredth. Log loss goes the other way, approaching its maximum push exactly where the error is worst.</a:t>
+            </a:r>
+          </a:p>
+          <a:p>
+            <a:pPr lvl="0" indent="0" marL="0">
+              <a:buNone/>
+            </a:pPr>
+          </a:p>
+          <a:p>
+            <a:pPr lvl="0" indent="0" marL="0">
+              <a:buNone/>
+            </a:pPr>
+            <a:r>
+              <a:rPr/>
+              <a:t>That is the failure. Not that squared error scores badly - that it stops teaching.</a:t>
             </a:r>
           </a:p>
         </p:txBody>
@@ -2743,63 +2746,49 @@
             </a:pPr>
             <a:r>
               <a:rPr/>
-              <a:t>Fifteen lines of NumPy, then one line of scikit-learn, and the same answer. Run notebook 01. Seventeen minutes, leaving three for the decision boundary on the next slide. The parts worth stopping on:</a:t>
-            </a:r>
-          </a:p>
-          <a:p>
-            <a:pPr lvl="0" indent="0" marL="0">
-              <a:buNone/>
-            </a:pPr>
-          </a:p>
-          <a:p>
-            <a:pPr lvl="0" indent="0" marL="0">
-              <a:buNone/>
-            </a:pPr>
-            <a:r>
-              <a:rPr/>
-              <a:t>The linear-fit failure - let them see 3,606 negative probabilities printed rather than being told.</a:t>
-            </a:r>
-          </a:p>
-          <a:p>
-            <a:pPr lvl="0" indent="0" marL="0">
-              <a:buNone/>
-            </a:pPr>
-          </a:p>
-          <a:p>
-            <a:pPr lvl="0" indent="0" marL="0">
-              <a:buNone/>
-            </a:pPr>
-            <a:r>
-              <a:rPr/>
-              <a:t>The gradient/loss figure, which is the argument you just made, in code they can change. Invite them to change it: what happens to the squared-error gradient at p = 0.5?</a:t>
-            </a:r>
-          </a:p>
-          <a:p>
-            <a:pPr lvl="0" indent="0" marL="0">
-              <a:buNone/>
-            </a:pPr>
-          </a:p>
-          <a:p>
-            <a:pPr lvl="0" indent="0" marL="0">
-              <a:buNone/>
-            </a:pPr>
-            <a:r>
-              <a:rPr/>
-              <a:t>The coefficient recovery table, including the decoy.</a:t>
-            </a:r>
-          </a:p>
-          <a:p>
-            <a:pPr lvl="0" indent="0" marL="0">
-              <a:buNone/>
-            </a:pPr>
-          </a:p>
-          <a:p>
-            <a:pPr lvl="0" indent="0" marL="0">
-              <a:buNone/>
-            </a:pPr>
-            <a:r>
-              <a:rPr/>
-              <a:t>If time is short, skip the descent curve - it is the least surprising cell and they saw the same picture in lesson 3.</a:t>
+              <a:t>State it, do not prove it; the handout section 4.3 has the argument.</a:t>
+            </a:r>
+          </a:p>
+          <a:p>
+            <a:pPr lvl="0" indent="0" marL="0">
+              <a:buNone/>
+            </a:pPr>
+          </a:p>
+          <a:p>
+            <a:pPr lvl="0" indent="0" marL="0">
+              <a:buNone/>
+            </a:pPr>
+            <a:r>
+              <a:rPr/>
+              <a:t>The consequence is practical: gradient descent on log loss cannot get trapped. Squared error through a sigmoid has no such guarantee and is in general non-convex.</a:t>
+            </a:r>
+          </a:p>
+          <a:p>
+            <a:pPr lvl="0" indent="0" marL="0">
+              <a:buNone/>
+            </a:pPr>
+          </a:p>
+          <a:p>
+            <a:pPr lvl="0" indent="0" marL="0">
+              <a:buNone/>
+            </a:pPr>
+            <a:r>
+              <a:rPr/>
+              <a:t>Now the caution that catches people, and it is worth ten seconds because they will see max_iter set in notebook 1 and wonder why. Convex does NOT mean there is a closed-form solution. Setting the gradient to zero gives X-transpose times the vector of errors, sigma(Xw + b) minus y, equal to zero. That equation is not linear in w - the sigmoid is in the way - so it cannot be solved in one step as lesson 3’s normal equation was.</a:t>
+            </a:r>
+          </a:p>
+          <a:p>
+            <a:pPr lvl="0" indent="0" marL="0">
+              <a:buNone/>
+            </a:pPr>
+          </a:p>
+          <a:p>
+            <a:pPr lvl="0" indent="0" marL="0">
+              <a:buNone/>
+            </a:pPr>
+            <a:r>
+              <a:rPr/>
+              <a:t>There is no normal equation for logistic regression. It has to be solved iteratively, which is why LogisticRegression has a max_iter argument and LinearRegression does not. If a student ever sees a convergence warning, that is what it is about.</a:t>
             </a:r>
           </a:p>
         </p:txBody>
@@ -2881,49 +2870,63 @@
             </a:pPr>
             <a:r>
               <a:rPr/>
-              <a:t>Two features, so the model can be drawn. The black line is where the predicted probability is exactly 0.5 - equivalently, where the log-odds are zero.</a:t>
-            </a:r>
-          </a:p>
-          <a:p>
-            <a:pPr lvl="0" indent="0" marL="0">
-              <a:buNone/>
-            </a:pPr>
-          </a:p>
-          <a:p>
-            <a:pPr lvl="0" indent="0" marL="0">
-              <a:buNone/>
-            </a:pPr>
-            <a:r>
-              <a:rPr/>
-              <a:t>First observation: it is STRAIGHT. Logistic regression is a linear classifier. The curve is in the probabilities, not in the boundary. That surprises people who expected the sigmoid to bend it.</a:t>
-            </a:r>
-          </a:p>
-          <a:p>
-            <a:pPr lvl="0" indent="0" marL="0">
-              <a:buNone/>
-            </a:pPr>
-          </a:p>
-          <a:p>
-            <a:pPr lvl="0" indent="0" marL="0">
-              <a:buNone/>
-            </a:pPr>
-            <a:r>
-              <a:rPr/>
-              <a:t>Second observation, and this is the bridge to the rest of the lesson: most of the gold points - the drives that actually failed - are on the blue side of the line. At a threshold of 0.5 this two-feature model calls nearly the whole fleet healthy, including most of the drives that failed. It uses two counters only, so that it can be drawn; the six-counter model of slide 29 does better at the same 0.5, and still misses 33 of the 76 test failures.</a:t>
-            </a:r>
-          </a:p>
-          <a:p>
-            <a:pPr lvl="0" indent="0" marL="0">
-              <a:buNone/>
-            </a:pPr>
-          </a:p>
-          <a:p>
-            <a:pPr lvl="0" indent="0" marL="0">
-              <a:buNone/>
-            </a:pPr>
-            <a:r>
-              <a:rPr/>
-              <a:t>Ask: is that a bad model? Take answers. Then say: the probabilities are fine. The threshold of 0.5 is a habit. Telling those two apart is the rest of the lesson.</a:t>
+              <a:t>Fifteen lines of NumPy, then one line of scikit-learn, and the same answer. Run notebook 01. Seventeen minutes, leaving three for the decision boundary on the next slide. The parts worth stopping on:</a:t>
+            </a:r>
+          </a:p>
+          <a:p>
+            <a:pPr lvl="0" indent="0" marL="0">
+              <a:buNone/>
+            </a:pPr>
+          </a:p>
+          <a:p>
+            <a:pPr lvl="0" indent="0" marL="0">
+              <a:buNone/>
+            </a:pPr>
+            <a:r>
+              <a:rPr/>
+              <a:t>The linear-fit failure - let them see 3,606 negative probabilities printed rather than being told.</a:t>
+            </a:r>
+          </a:p>
+          <a:p>
+            <a:pPr lvl="0" indent="0" marL="0">
+              <a:buNone/>
+            </a:pPr>
+          </a:p>
+          <a:p>
+            <a:pPr lvl="0" indent="0" marL="0">
+              <a:buNone/>
+            </a:pPr>
+            <a:r>
+              <a:rPr/>
+              <a:t>The gradient/loss figure, which is the argument you just made, in code they can change. Invite them to change it: what happens to the squared-error gradient at p = 0.5?</a:t>
+            </a:r>
+          </a:p>
+          <a:p>
+            <a:pPr lvl="0" indent="0" marL="0">
+              <a:buNone/>
+            </a:pPr>
+          </a:p>
+          <a:p>
+            <a:pPr lvl="0" indent="0" marL="0">
+              <a:buNone/>
+            </a:pPr>
+            <a:r>
+              <a:rPr/>
+              <a:t>The coefficient recovery table, including the decoy.</a:t>
+            </a:r>
+          </a:p>
+          <a:p>
+            <a:pPr lvl="0" indent="0" marL="0">
+              <a:buNone/>
+            </a:pPr>
+          </a:p>
+          <a:p>
+            <a:pPr lvl="0" indent="0" marL="0">
+              <a:buNone/>
+            </a:pPr>
+            <a:r>
+              <a:rPr/>
+              <a:t>If time is short, skip the descent curve - it is the least surprising cell and they saw the same picture in lesson 3.</a:t>
             </a:r>
           </a:p>
         </p:txBody>
@@ -3005,7 +3008,49 @@
             </a:pPr>
             <a:r>
               <a:rPr/>
-              <a:t>Ten minutes. When they come back, the first slide is the trap, and it works best if they have not been thinking about it.</a:t>
+              <a:t>Two features, so the model can be drawn. The black line is where the predicted probability is exactly 0.5 - equivalently, where the log-odds are zero.</a:t>
+            </a:r>
+          </a:p>
+          <a:p>
+            <a:pPr lvl="0" indent="0" marL="0">
+              <a:buNone/>
+            </a:pPr>
+          </a:p>
+          <a:p>
+            <a:pPr lvl="0" indent="0" marL="0">
+              <a:buNone/>
+            </a:pPr>
+            <a:r>
+              <a:rPr/>
+              <a:t>First observation: it is STRAIGHT. Logistic regression is a linear classifier. The curve is in the probabilities, not in the boundary. That surprises people who expected the sigmoid to bend it.</a:t>
+            </a:r>
+          </a:p>
+          <a:p>
+            <a:pPr lvl="0" indent="0" marL="0">
+              <a:buNone/>
+            </a:pPr>
+          </a:p>
+          <a:p>
+            <a:pPr lvl="0" indent="0" marL="0">
+              <a:buNone/>
+            </a:pPr>
+            <a:r>
+              <a:rPr/>
+              <a:t>Second observation, and this is the bridge to the rest of the lesson: most of the gold points - the drives that actually failed - are on the blue side of the line. At a threshold of 0.5 this two-feature model calls nearly the whole fleet healthy, including most of the drives that failed. It uses two counters only, so that it can be drawn; the six-counter model of slide 30 does better at the same 0.5, and still misses 33 of the 76 test failures.</a:t>
+            </a:r>
+          </a:p>
+          <a:p>
+            <a:pPr lvl="0" indent="0" marL="0">
+              <a:buNone/>
+            </a:pPr>
+          </a:p>
+          <a:p>
+            <a:pPr lvl="0" indent="0" marL="0">
+              <a:buNone/>
+            </a:pPr>
+            <a:r>
+              <a:rPr/>
+              <a:t>Ask: is that a bad model? Take answers. Then say: the probabilities are fine. The threshold of 0.5 is a habit. Telling those two apart is the rest of the lesson.</a:t>
             </a:r>
           </a:p>
         </p:txBody>
@@ -3087,59 +3132,7 @@
             </a:pPr>
             <a:r>
               <a:rPr/>
-              <a:t>This is the number to remember from lesson 4. Put it up and say nothing for a moment.</a:t>
-            </a:r>
-          </a:p>
-          <a:p>
-            <a:pPr lvl="0" indent="0" marL="0">
-              <a:buNone/>
-            </a:pPr>
-          </a:p>
-          <a:p>
-            <a:pPr lvl="0" indent="0" marL="0">
-              <a:buNone/>
-            </a:pPr>
-            <a:r>
-              <a:rPr/>
-              <a:t>A model that could be written </a:t>
-            </a:r>
-            <a:r>
-              <a:rPr>
-                <a:latin typeface="Courier"/>
-              </a:rPr>
-              <a:t>return 0</a:t>
-            </a:r>
-            <a:r>
-              <a:rPr/>
-              <a:t> - no learning, no data, no features - scores 96.20%. The model they just built, which finds more than half the failing drives, scores 97.70%. 97.70 minus 96.20: one and a half percentage points separate a real model from a worthless one.</a:t>
-            </a:r>
-          </a:p>
-          <a:p>
-            <a:pPr lvl="0" indent="0" marL="0">
-              <a:buNone/>
-            </a:pPr>
-          </a:p>
-          <a:p>
-            <a:pPr lvl="0" indent="0" marL="0">
-              <a:buNone/>
-            </a:pPr>
-            <a:r>
-              <a:rPr/>
-              <a:t>The arithmetic is not subtle: 1,924 of the 2,000 test drives are healthy, so answering “healthy” collects them all for free. Only the 76 failures, 76 divided by 2,000 = 3.8% of the test set, are left to compete over.</a:t>
-            </a:r>
-          </a:p>
-          <a:p>
-            <a:pPr lvl="0" indent="0" marL="0">
-              <a:buNone/>
-            </a:pPr>
-          </a:p>
-          <a:p>
-            <a:pPr lvl="0" indent="0" marL="0">
-              <a:buNone/>
-            </a:pPr>
-            <a:r>
-              <a:rPr/>
-              <a:t>This is the 306 of slide 6 coming back as an accuracy score: 96.20% is simply the share of test drives that are healthy.</a:t>
+              <a:t>Ten minutes. When they come back, the first slide is the trap, and it works best if they have not been thinking about it.</a:t>
             </a:r>
           </a:p>
         </p:txBody>
@@ -3221,49 +3214,59 @@
             </a:pPr>
             <a:r>
               <a:rPr/>
-              <a:t>Be careful to defend the instinct rather than mock it. Accuracy is not a naive metric, and students who reached for it were not being lazy - on a balanced problem it is the correct summary and everything else is a complication.</a:t>
-            </a:r>
-          </a:p>
-          <a:p>
-            <a:pPr lvl="0" indent="0" marL="0">
-              <a:buNone/>
-            </a:pPr>
-          </a:p>
-          <a:p>
-            <a:pPr lvl="0" indent="0" marL="0">
-              <a:buNone/>
-            </a:pPr>
-            <a:r>
-              <a:rPr/>
-              <a:t>It stops being informative precisely when one class is rare. And then list the problems: fraud, disease screening, intrusion detection, equipment failure, spam. In every one of them the class you care about is the small one.</a:t>
-            </a:r>
-          </a:p>
-          <a:p>
-            <a:pPr lvl="0" indent="0" marL="0">
-              <a:buNone/>
-            </a:pPr>
-          </a:p>
-          <a:p>
-            <a:pPr lvl="0" indent="0" marL="0">
-              <a:buNone/>
-            </a:pPr>
-            <a:r>
-              <a:rPr/>
-              <a:t>The general statement, worth putting on the board: if a share pi of the cases are positive (the positive rate), the trivial always-negative classifier scores 1 minus pi. Here 1 - 0.038 = 96.2%. In some fraud problems, where the rate is one in a thousand, 1 - 0.001 = 99.9%.</a:t>
-            </a:r>
-          </a:p>
-          <a:p>
-            <a:pPr lvl="0" indent="0" marL="0">
-              <a:buNone/>
-            </a:pPr>
-          </a:p>
-          <a:p>
-            <a:pPr lvl="0" indent="0" marL="0">
-              <a:buNone/>
-            </a:pPr>
-            <a:r>
-              <a:rPr/>
-              <a:t>Accuracy is not wrong. It is answering a question nobody asked.</a:t>
+              <a:t>This is the number to remember from lesson 4. Put it up and say nothing for a moment.</a:t>
+            </a:r>
+          </a:p>
+          <a:p>
+            <a:pPr lvl="0" indent="0" marL="0">
+              <a:buNone/>
+            </a:pPr>
+          </a:p>
+          <a:p>
+            <a:pPr lvl="0" indent="0" marL="0">
+              <a:buNone/>
+            </a:pPr>
+            <a:r>
+              <a:rPr/>
+              <a:t>A model that could be written </a:t>
+            </a:r>
+            <a:r>
+              <a:rPr>
+                <a:latin typeface="Courier"/>
+              </a:rPr>
+              <a:t>return 0</a:t>
+            </a:r>
+            <a:r>
+              <a:rPr/>
+              <a:t> - no learning, no data, no features - scores 96.20%. The model they just built, which finds more than half the failing drives, scores 97.70%. 97.70 minus 96.20: one and a half percentage points separate a real model from a worthless one.</a:t>
+            </a:r>
+          </a:p>
+          <a:p>
+            <a:pPr lvl="0" indent="0" marL="0">
+              <a:buNone/>
+            </a:pPr>
+          </a:p>
+          <a:p>
+            <a:pPr lvl="0" indent="0" marL="0">
+              <a:buNone/>
+            </a:pPr>
+            <a:r>
+              <a:rPr/>
+              <a:t>The arithmetic is not subtle: 1,924 of the 2,000 test drives are healthy, so answering “healthy” collects them all for free. Only the 76 failures, 76 divided by 2,000 = 3.8% of the test set, are left to compete over.</a:t>
+            </a:r>
+          </a:p>
+          <a:p>
+            <a:pPr lvl="0" indent="0" marL="0">
+              <a:buNone/>
+            </a:pPr>
+          </a:p>
+          <a:p>
+            <a:pPr lvl="0" indent="0" marL="0">
+              <a:buNone/>
+            </a:pPr>
+            <a:r>
+              <a:rPr/>
+              <a:t>This is the 306 of slide 6 coming back as an accuracy score: 96.20% is simply the share of test drives that are healthy.</a:t>
             </a:r>
           </a:p>
         </p:txBody>
@@ -3469,49 +3472,49 @@
             </a:pPr>
             <a:r>
               <a:rPr/>
-              <a:t>The fix is to stop collapsing four outcomes into one number.</a:t>
-            </a:r>
-          </a:p>
-          <a:p>
-            <a:pPr lvl="0" indent="0" marL="0">
-              <a:buNone/>
-            </a:pPr>
-          </a:p>
-          <a:p>
-            <a:pPr lvl="0" indent="0" marL="0">
-              <a:buNone/>
-            </a:pPr>
-            <a:r>
-              <a:rPr/>
-              <a:t>Side by side, the two models are obviously not comparable - and the number that separates them, 0 caught against 43, is nowhere in the accuracy figure.</a:t>
-            </a:r>
-          </a:p>
-          <a:p>
-            <a:pPr lvl="0" indent="0" marL="0">
-              <a:buNone/>
-            </a:pPr>
-          </a:p>
-          <a:p>
-            <a:pPr lvl="0" indent="0" marL="0">
-              <a:buNone/>
-            </a:pPr>
-            <a:r>
-              <a:rPr/>
-              <a:t>Teach them to read the bottom-left cell first when misses are expensive: 33 drives failed and were called healthy. That is the cell that costs money, and it is the one a single-number metric hides.</a:t>
-            </a:r>
-          </a:p>
-          <a:p>
-            <a:pPr lvl="0" indent="0" marL="0">
-              <a:buNone/>
-            </a:pPr>
-          </a:p>
-          <a:p>
-            <a:pPr lvl="0" indent="0" marL="0">
-              <a:buNone/>
-            </a:pPr>
-            <a:r>
-              <a:rPr/>
-              <a:t>Worth naming the convention while it is on screen, because half the world uses the transpose: scikit-learn puts truth in rows and predictions in columns. Any time they read a confusion matrix from a paper, check which way round it is before drawing conclusions.</a:t>
+              <a:t>Be careful to defend the instinct rather than mock it. Accuracy is not a naive metric, and students who reached for it were not being lazy - on a balanced problem it is the correct summary and everything else is a complication.</a:t>
+            </a:r>
+          </a:p>
+          <a:p>
+            <a:pPr lvl="0" indent="0" marL="0">
+              <a:buNone/>
+            </a:pPr>
+          </a:p>
+          <a:p>
+            <a:pPr lvl="0" indent="0" marL="0">
+              <a:buNone/>
+            </a:pPr>
+            <a:r>
+              <a:rPr/>
+              <a:t>It stops being informative precisely when one class is rare. And then list the problems: fraud, disease screening, intrusion detection, equipment failure, spam. In every one of them the class you care about is the small one.</a:t>
+            </a:r>
+          </a:p>
+          <a:p>
+            <a:pPr lvl="0" indent="0" marL="0">
+              <a:buNone/>
+            </a:pPr>
+          </a:p>
+          <a:p>
+            <a:pPr lvl="0" indent="0" marL="0">
+              <a:buNone/>
+            </a:pPr>
+            <a:r>
+              <a:rPr/>
+              <a:t>The general statement, worth putting on the board: if a share pi of the cases are positive (the positive rate), the trivial always-negative classifier scores 1 minus pi. Here 1 - 0.038 = 96.2%. In some fraud problems, where the rate is one in a thousand, 1 - 0.001 = 99.9%.</a:t>
+            </a:r>
+          </a:p>
+          <a:p>
+            <a:pPr lvl="0" indent="0" marL="0">
+              <a:buNone/>
+            </a:pPr>
+          </a:p>
+          <a:p>
+            <a:pPr lvl="0" indent="0" marL="0">
+              <a:buNone/>
+            </a:pPr>
+            <a:r>
+              <a:rPr/>
+              <a:t>Accuracy is not wrong. It is answering a question nobody asked.</a:t>
             </a:r>
           </a:p>
         </p:txBody>
@@ -3593,35 +3596,49 @@
             </a:pPr>
             <a:r>
               <a:rPr/>
-              <a:t>The names are jargon until they are attached to consequences, so attach them here and keep the numbers visible - they come back at the end of the lesson when we choose a threshold.</a:t>
-            </a:r>
-          </a:p>
-          <a:p>
-            <a:pPr lvl="0" indent="0" marL="0">
-              <a:buNone/>
-            </a:pPr>
-          </a:p>
-          <a:p>
-            <a:pPr lvl="0" indent="0" marL="0">
-              <a:buNone/>
-            </a:pPr>
-            <a:r>
-              <a:rPr/>
-              <a:t>The essential point: these two errors are NOT the same size, and no single-number metric knows that. Accuracy treats them as identical. F1, the metric of slide 35, treats them as identical. Only a cost, supplied from outside the data, distinguishes them.</a:t>
-            </a:r>
-          </a:p>
-          <a:p>
-            <a:pPr lvl="0" indent="0" marL="0">
-              <a:buNone/>
-            </a:pPr>
-          </a:p>
-          <a:p>
-            <a:pPr lvl="0" indent="0" marL="0">
-              <a:buNone/>
-            </a:pPr>
-            <a:r>
-              <a:rPr/>
-              <a:t>Ask for a domain where the ratio goes the other way - where a false positive is the expensive one. Medical screening that triggers an invasive biopsy is the usual answer; content moderation that removes a legitimate post is another.</a:t>
+              <a:t>The fix is to stop collapsing four outcomes into one number.</a:t>
+            </a:r>
+          </a:p>
+          <a:p>
+            <a:pPr lvl="0" indent="0" marL="0">
+              <a:buNone/>
+            </a:pPr>
+          </a:p>
+          <a:p>
+            <a:pPr lvl="0" indent="0" marL="0">
+              <a:buNone/>
+            </a:pPr>
+            <a:r>
+              <a:rPr/>
+              <a:t>Side by side, the two models are obviously not comparable - and the number that separates them, 0 caught against 43, is nowhere in the accuracy figure.</a:t>
+            </a:r>
+          </a:p>
+          <a:p>
+            <a:pPr lvl="0" indent="0" marL="0">
+              <a:buNone/>
+            </a:pPr>
+          </a:p>
+          <a:p>
+            <a:pPr lvl="0" indent="0" marL="0">
+              <a:buNone/>
+            </a:pPr>
+            <a:r>
+              <a:rPr/>
+              <a:t>Teach them to read the bottom-left cell first when misses are expensive: 33 drives failed and were called healthy. That is the cell that costs money, and it is the one a single-number metric hides.</a:t>
+            </a:r>
+          </a:p>
+          <a:p>
+            <a:pPr lvl="0" indent="0" marL="0">
+              <a:buNone/>
+            </a:pPr>
+          </a:p>
+          <a:p>
+            <a:pPr lvl="0" indent="0" marL="0">
+              <a:buNone/>
+            </a:pPr>
+            <a:r>
+              <a:rPr/>
+              <a:t>Worth naming the convention while it is on screen, because half the world uses the transpose: scikit-learn puts truth in rows and predictions in columns. Any time they read a confusion matrix from a paper, check which way round it is before drawing conclusions.</a:t>
             </a:r>
           </a:p>
         </p:txBody>
@@ -3703,49 +3720,35 @@
             </a:pPr>
             <a:r>
               <a:rPr/>
-              <a:t>This picture prevents the most common confusion of the lesson. Both metrics put the true positives - failed drives we flagged - on top of the fraction. The difference is entirely in what goes underneath, and the shading shows it.</a:t>
-            </a:r>
-          </a:p>
-          <a:p>
-            <a:pPr lvl="0" indent="0" marL="0">
-              <a:buNone/>
-            </a:pPr>
-          </a:p>
-          <a:p>
-            <a:pPr lvl="0" indent="0" marL="0">
-              <a:buNone/>
-            </a:pPr>
-            <a:r>
-              <a:rPr/>
-              <a:t>Precision divides by the COLUMN - everything we flagged. When this model raises an alarm, how often is it right? That is the technician’s question: how much of my time are you wasting?</a:t>
-            </a:r>
-          </a:p>
-          <a:p>
-            <a:pPr lvl="0" indent="0" marL="0">
-              <a:buNone/>
-            </a:pPr>
-          </a:p>
-          <a:p>
-            <a:pPr lvl="0" indent="0" marL="0">
-              <a:buNone/>
-            </a:pPr>
-            <a:r>
-              <a:rPr/>
-              <a:t>Recall divides by the ROW - everything that actually failed. Of the drives that were going to fail, how many did we find? That is the operations manager’s question: how exposed am I still?</a:t>
-            </a:r>
-          </a:p>
-          <a:p>
-            <a:pPr lvl="0" indent="0" marL="0">
-              <a:buNone/>
-            </a:pPr>
-          </a:p>
-          <a:p>
-            <a:pPr lvl="0" indent="0" marL="0">
-              <a:buNone/>
-            </a:pPr>
-            <a:r>
-              <a:rPr/>
-              <a:t>Give them the hook and make them repeat it: precision is about the alarms, recall is about the failures. When in doubt, find the denominator and ask which population it is.</a:t>
+              <a:t>The names are jargon until they are attached to consequences, so attach them here and keep the numbers visible - they come back at the end of the lesson when we choose a threshold.</a:t>
+            </a:r>
+          </a:p>
+          <a:p>
+            <a:pPr lvl="0" indent="0" marL="0">
+              <a:buNone/>
+            </a:pPr>
+          </a:p>
+          <a:p>
+            <a:pPr lvl="0" indent="0" marL="0">
+              <a:buNone/>
+            </a:pPr>
+            <a:r>
+              <a:rPr/>
+              <a:t>The essential point: these two errors are NOT the same size, and no single-number metric knows that. Accuracy treats them as identical. F1, the metric of slide 36, treats them as identical. Only a cost, supplied from outside the data, distinguishes them.</a:t>
+            </a:r>
+          </a:p>
+          <a:p>
+            <a:pPr lvl="0" indent="0" marL="0">
+              <a:buNone/>
+            </a:pPr>
+          </a:p>
+          <a:p>
+            <a:pPr lvl="0" indent="0" marL="0">
+              <a:buNone/>
+            </a:pPr>
+            <a:r>
+              <a:rPr/>
+              <a:t>Ask for a domain where the ratio goes the other way - where a false positive is the expensive one. Medical screening that triggers an invasive biopsy is the usual answer; content moderation that removes a legitimate post is another.</a:t>
             </a:r>
           </a:p>
         </p:txBody>
@@ -3827,35 +3830,49 @@
             </a:pPr>
             <a:r>
               <a:rPr/>
-              <a:t>Read each line as an English sentence with the counts in it, not as a ratio. That is the habit worth building: a metric that cannot be said as a sentence about actual objects has not been understood.</a:t>
-            </a:r>
-          </a:p>
-          <a:p>
-            <a:pPr lvl="0" indent="0" marL="0">
-              <a:buNone/>
-            </a:pPr>
-          </a:p>
-          <a:p>
-            <a:pPr lvl="0" indent="0" marL="0">
-              <a:buNone/>
-            </a:pPr>
-            <a:r>
-              <a:rPr/>
-              <a:t>Specificity is recall for the negative class: of the healthy drives, how many did we leave alone. One minus it is the false positive rate, which comes back in the receiver operating characteristic (ROC) section. Mention it now so the term is not new later.</a:t>
-            </a:r>
-          </a:p>
-          <a:p>
-            <a:pPr lvl="0" indent="0" marL="0">
-              <a:buNone/>
-            </a:pPr>
-          </a:p>
-          <a:p>
-            <a:pPr lvl="0" indent="0" marL="0">
-              <a:buNone/>
-            </a:pPr>
-            <a:r>
-              <a:rPr/>
-              <a:t>If someone asks which of the three to report: the answer is that it depends on who is asking, which is the honest answer and also the lesson.</a:t>
+              <a:t>This picture prevents the most common confusion of the lesson. Both metrics put the true positives - failed drives we flagged - on top of the fraction. The difference is entirely in what goes underneath, and the shading shows it.</a:t>
+            </a:r>
+          </a:p>
+          <a:p>
+            <a:pPr lvl="0" indent="0" marL="0">
+              <a:buNone/>
+            </a:pPr>
+          </a:p>
+          <a:p>
+            <a:pPr lvl="0" indent="0" marL="0">
+              <a:buNone/>
+            </a:pPr>
+            <a:r>
+              <a:rPr/>
+              <a:t>Precision divides by the COLUMN - everything we flagged. When this model raises an alarm, how often is it right? That is the technician’s question: how much of my time are you wasting?</a:t>
+            </a:r>
+          </a:p>
+          <a:p>
+            <a:pPr lvl="0" indent="0" marL="0">
+              <a:buNone/>
+            </a:pPr>
+          </a:p>
+          <a:p>
+            <a:pPr lvl="0" indent="0" marL="0">
+              <a:buNone/>
+            </a:pPr>
+            <a:r>
+              <a:rPr/>
+              <a:t>Recall divides by the ROW - everything that actually failed. Of the drives that were going to fail, how many did we find? That is the operations manager’s question: how exposed am I still?</a:t>
+            </a:r>
+          </a:p>
+          <a:p>
+            <a:pPr lvl="0" indent="0" marL="0">
+              <a:buNone/>
+            </a:pPr>
+          </a:p>
+          <a:p>
+            <a:pPr lvl="0" indent="0" marL="0">
+              <a:buNone/>
+            </a:pPr>
+            <a:r>
+              <a:rPr/>
+              <a:t>Give them the hook and make them repeat it: precision is about the alarms, recall is about the failures. When in doubt, find the denominator and ask which population it is.</a:t>
             </a:r>
           </a:p>
         </p:txBody>
@@ -3937,63 +3954,35 @@
             </a:pPr>
             <a:r>
               <a:rPr/>
-              <a:t>Take the stupidest possible model - flag every single drive - and score it. Recall is a perfect 1.0. Precision is 0.038.</a:t>
-            </a:r>
-          </a:p>
-          <a:p>
-            <a:pPr lvl="0" indent="0" marL="0">
-              <a:buNone/>
-            </a:pPr>
-          </a:p>
-          <a:p>
-            <a:pPr lvl="0" indent="0" marL="0">
-              <a:buNone/>
-            </a:pPr>
-            <a:r>
-              <a:rPr/>
-              <a:t>The ordinary average gives that model 0.519, which looks respectable. Anyone scanning a results table would not blink at 0.519.</a:t>
-            </a:r>
-          </a:p>
-          <a:p>
-            <a:pPr lvl="0" indent="0" marL="0">
-              <a:buNone/>
-            </a:pPr>
-          </a:p>
-          <a:p>
-            <a:pPr lvl="0" indent="0" marL="0">
-              <a:buNone/>
-            </a:pPr>
-            <a:r>
-              <a:rPr/>
-              <a:t>The harmonic mean gives it 0.073, which is the truth.</a:t>
-            </a:r>
-          </a:p>
-          <a:p>
-            <a:pPr lvl="0" indent="0" marL="0">
-              <a:buNone/>
-            </a:pPr>
-          </a:p>
-          <a:p>
-            <a:pPr lvl="0" indent="0" marL="0">
-              <a:buNone/>
-            </a:pPr>
-            <a:r>
-              <a:rPr/>
-              <a:t>The reason: the harmonic mean is dominated by the smaller of the two numbers. A model is only as good as its weaker side, and F1 refuses to let a perfect score on one axis buy a pass on the other.</a:t>
-            </a:r>
-          </a:p>
-          <a:p>
-            <a:pPr lvl="0" indent="0" marL="0">
-              <a:buNone/>
-            </a:pPr>
-          </a:p>
-          <a:p>
-            <a:pPr lvl="0" indent="0" marL="0">
-              <a:buNone/>
-            </a:pPr>
-            <a:r>
-              <a:rPr/>
-              <a:t>Mention F-beta in one sentence: a version of F1 with a weight beta, where beta above 1 counts recall more than precision. That is what you want here, where a miss costs about nineteen times a false alarm (2,600 divided by 140 = 18.6). F2 is the usual choice.</a:t>
+              <a:t>Read each line as an English sentence with the counts in it, not as a ratio. That is the habit worth building: a metric that cannot be said as a sentence about actual objects has not been understood.</a:t>
+            </a:r>
+          </a:p>
+          <a:p>
+            <a:pPr lvl="0" indent="0" marL="0">
+              <a:buNone/>
+            </a:pPr>
+          </a:p>
+          <a:p>
+            <a:pPr lvl="0" indent="0" marL="0">
+              <a:buNone/>
+            </a:pPr>
+            <a:r>
+              <a:rPr/>
+              <a:t>Specificity is recall for the negative class: of the healthy drives, how many did we leave alone. One minus it is the false positive rate, which comes back in the receiver operating characteristic (ROC) section. Mention it now so the term is not new later.</a:t>
+            </a:r>
+          </a:p>
+          <a:p>
+            <a:pPr lvl="0" indent="0" marL="0">
+              <a:buNone/>
+            </a:pPr>
+          </a:p>
+          <a:p>
+            <a:pPr lvl="0" indent="0" marL="0">
+              <a:buNone/>
+            </a:pPr>
+            <a:r>
+              <a:rPr/>
+              <a:t>If someone asks which of the three to report: the answer is that it depends on who is asking, which is the honest answer and also the lesson.</a:t>
             </a:r>
           </a:p>
         </p:txBody>
@@ -4075,63 +4064,63 @@
             </a:pPr>
             <a:r>
               <a:rPr/>
-              <a:t>classification_report is scikit-learn’s summary table, and they will print it themselves in notebook 2 in about five minutes: one row per class, then three summary rows - accuracy, macro avg, weighted avg. The two numbers on this slide are the f1-score column of the last two.</a:t>
-            </a:r>
-          </a:p>
-          <a:p>
-            <a:pPr lvl="0" indent="0" marL="0">
-              <a:buNone/>
-            </a:pPr>
-          </a:p>
-          <a:p>
-            <a:pPr lvl="0" indent="0" marL="0">
-              <a:buNone/>
-            </a:pPr>
-            <a:r>
-              <a:rPr/>
-              <a:t>Anticipating it by one slide is deliberate. The rule for choosing between those rows is what they need in their heads while they run the notebook, not afterwards - left to themselves they quote whichever is biggest.</a:t>
-            </a:r>
-          </a:p>
-          <a:p>
-            <a:pPr lvl="0" indent="0" marL="0">
-              <a:buNone/>
-            </a:pPr>
-          </a:p>
-          <a:p>
-            <a:pPr lvl="0" indent="0" marL="0">
-              <a:buNone/>
-            </a:pPr>
-            <a:r>
-              <a:rPr/>
-              <a:t>The weighted average weights each class by how common it is, so on this problem it is essentially the healthy class talking, and it reads close to accuracy - inheriting exactly the blindness slides 29 to 32 were about.</a:t>
-            </a:r>
-          </a:p>
-          <a:p>
-            <a:pPr lvl="0" indent="0" marL="0">
-              <a:buNone/>
-            </a:pPr>
-          </a:p>
-          <a:p>
-            <a:pPr lvl="0" indent="0" marL="0">
-              <a:buNone/>
-            </a:pPr>
-            <a:r>
-              <a:rPr/>
-              <a:t>The macro average gives the two classes equal weight, so the rare class actually registers. 0.820 against 0.975 for the same model.</a:t>
-            </a:r>
-          </a:p>
-          <a:p>
-            <a:pPr lvl="0" indent="0" marL="0">
-              <a:buNone/>
-            </a:pPr>
-          </a:p>
-          <a:p>
-            <a:pPr lvl="0" indent="0" marL="0">
-              <a:buNone/>
-            </a:pPr>
-            <a:r>
-              <a:rPr/>
-              <a:t>The rule: on an imbalanced problem, quote the macro average or the minority class directly. Reporting the weighted average is not incorrect - it is the number that makes a mediocre model look finished, and choosing it without saying so is how a result gets oversold.</a:t>
+              <a:t>Take the stupidest possible model - flag every single drive - and score it. Recall is a perfect 76 out of 76 = 1. Precision is 76 out of 2,000 = 0.038, because all 2,000 drives are flagged and 76 of them fail.</a:t>
+            </a:r>
+          </a:p>
+          <a:p>
+            <a:pPr lvl="0" indent="0" marL="0">
+              <a:buNone/>
+            </a:pPr>
+          </a:p>
+          <a:p>
+            <a:pPr lvl="0" indent="0" marL="0">
+              <a:buNone/>
+            </a:pPr>
+            <a:r>
+              <a:rPr/>
+              <a:t>The figure holds recall at 1 and lets precision run along the horizontal axis. The grey line is the ordinary average, (P + 1) divided by 2: at the left edge, where our model sits, it gives (0.038 + 1) divided by 2 = 0.519, and it can never drop below one half however useless the model. Anyone scanning a results table would not blink at 0.519.</a:t>
+            </a:r>
+          </a:p>
+          <a:p>
+            <a:pPr lvl="0" indent="0" marL="0">
+              <a:buNone/>
+            </a:pPr>
+          </a:p>
+          <a:p>
+            <a:pPr lvl="0" indent="0" marL="0">
+              <a:buNone/>
+            </a:pPr>
+            <a:r>
+              <a:rPr/>
+              <a:t>The blue line is the harmonic mean, F1 = 2PR divided by (P + R), here 2P divided by (P + 1): 2 times 0.038 divided by 1.038 = 0.073, which is the truth.</a:t>
+            </a:r>
+          </a:p>
+          <a:p>
+            <a:pPr lvl="0" indent="0" marL="0">
+              <a:buNone/>
+            </a:pPr>
+          </a:p>
+          <a:p>
+            <a:pPr lvl="0" indent="0" marL="0">
+              <a:buNone/>
+            </a:pPr>
+            <a:r>
+              <a:rPr/>
+              <a:t>The reason: the harmonic mean is dominated by the smaller of the two numbers. A model is only as good as its weaker side, and F1 refuses to let a perfect score on one axis buy a pass on the other. The two lines meet only at the right edge, where both precision and recall are 1.</a:t>
+            </a:r>
+          </a:p>
+          <a:p>
+            <a:pPr lvl="0" indent="0" marL="0">
+              <a:buNone/>
+            </a:pPr>
+          </a:p>
+          <a:p>
+            <a:pPr lvl="0" indent="0" marL="0">
+              <a:buNone/>
+            </a:pPr>
+            <a:r>
+              <a:rPr/>
+              <a:t>Mention F-beta in one sentence: a version of F1 with a weight beta, where beta above 1 counts recall more than precision. That is what you want here, where a miss costs about nineteen times a false alarm (2,600 divided by 140 = 18.6). F2 is the usual choice. Handout section 6.3.</a:t>
             </a:r>
           </a:p>
         </p:txBody>
@@ -4213,35 +4202,63 @@
             </a:pPr>
             <a:r>
               <a:rPr/>
-              <a:t>The confusion matrix by hand, then from scikit-learn, then the threshold sweep. Run notebook 02. Twenty minutes.</a:t>
-            </a:r>
-          </a:p>
-          <a:p>
-            <a:pPr lvl="0" indent="0" marL="0">
-              <a:buNone/>
-            </a:pPr>
-          </a:p>
-          <a:p>
-            <a:pPr lvl="0" indent="0" marL="0">
-              <a:buNone/>
-            </a:pPr>
-            <a:r>
-              <a:rPr/>
-              <a:t>Have them build the four counts by hand before calling confusion_matrix. It is four comparisons and it takes two minutes, and it is what makes the jargon stop being jargon.</a:t>
-            </a:r>
-          </a:p>
-          <a:p>
-            <a:pPr lvl="0" indent="0" marL="0">
-              <a:buNone/>
-            </a:pPr>
-          </a:p>
-          <a:p>
-            <a:pPr lvl="0" indent="0" marL="0">
-              <a:buNone/>
-            </a:pPr>
-            <a:r>
-              <a:rPr/>
-              <a:t>Spend time on the threshold sweep table. Do not explain it first - let them read the columns and say what they see. Somebody will notice that accuracy barely moves. That is the moment to show the next slide.</a:t>
+              <a:t>classification_report is scikit-learn’s summary table, and they will print it themselves in notebook 2 in about five minutes: one row per class, then three summary rows - accuracy, macro avg, weighted avg. The two numbers on this slide are the f1-score column of the last two.</a:t>
+            </a:r>
+          </a:p>
+          <a:p>
+            <a:pPr lvl="0" indent="0" marL="0">
+              <a:buNone/>
+            </a:pPr>
+          </a:p>
+          <a:p>
+            <a:pPr lvl="0" indent="0" marL="0">
+              <a:buNone/>
+            </a:pPr>
+            <a:r>
+              <a:rPr/>
+              <a:t>Anticipating it by one slide is deliberate. The rule for choosing between those rows is what they need in their heads while they run the notebook, not afterwards - left to themselves they quote whichever is biggest.</a:t>
+            </a:r>
+          </a:p>
+          <a:p>
+            <a:pPr lvl="0" indent="0" marL="0">
+              <a:buNone/>
+            </a:pPr>
+          </a:p>
+          <a:p>
+            <a:pPr lvl="0" indent="0" marL="0">
+              <a:buNone/>
+            </a:pPr>
+            <a:r>
+              <a:rPr/>
+              <a:t>The weighted average weights each class by how common it is, so on this problem it is essentially the healthy class talking, and it reads close to accuracy - inheriting exactly the blindness slides 30 to 33 were about.</a:t>
+            </a:r>
+          </a:p>
+          <a:p>
+            <a:pPr lvl="0" indent="0" marL="0">
+              <a:buNone/>
+            </a:pPr>
+          </a:p>
+          <a:p>
+            <a:pPr lvl="0" indent="0" marL="0">
+              <a:buNone/>
+            </a:pPr>
+            <a:r>
+              <a:rPr/>
+              <a:t>The macro average gives the two classes equal weight, so the rare class actually registers. 0.820 against 0.975 for the same model.</a:t>
+            </a:r>
+          </a:p>
+          <a:p>
+            <a:pPr lvl="0" indent="0" marL="0">
+              <a:buNone/>
+            </a:pPr>
+          </a:p>
+          <a:p>
+            <a:pPr lvl="0" indent="0" marL="0">
+              <a:buNone/>
+            </a:pPr>
+            <a:r>
+              <a:rPr/>
+              <a:t>The rule: on an imbalanced problem, quote the macro average or the minority class directly. Reporting the weighted average is not incorrect - it is the number that makes a mediocre model look finished, and choosing it without saying so is how a result gets oversold.</a:t>
             </a:r>
           </a:p>
         </p:txBody>
@@ -4323,35 +4340,35 @@
             </a:pPr>
             <a:r>
               <a:rPr/>
-              <a:t>The title of that figure is the point: nothing about the model changes along the x-axis. Same coefficients, same probabilities, same drives. All that moves is where we draw the line between “leave it” and “replace it”.</a:t>
-            </a:r>
-          </a:p>
-          <a:p>
-            <a:pPr lvl="0" indent="0" marL="0">
-              <a:buNone/>
-            </a:pPr>
-          </a:p>
-          <a:p>
-            <a:pPr lvl="0" indent="0" marL="0">
-              <a:buNone/>
-            </a:pPr>
-            <a:r>
-              <a:rPr/>
-              <a:t>That 0.5 is predict()’s default and nothing more. It is the right choice only when the two errors cost the same and the probabilities are calibrated: among drives given 0.3, about 30% really fail (slide 44 names the property). Slide 49 derives the threshold from the costs, and it is 0.5 exactly when they are equal. Here a miss costs about nineteen times a false alarm (2,600 divided by 140 = 18.6), and in most real problems the costs differ too.</a:t>
-            </a:r>
-          </a:p>
-          <a:p>
-            <a:pPr lvl="0" indent="0" marL="0">
-              <a:buNone/>
-            </a:pPr>
-          </a:p>
-          <a:p>
-            <a:pPr lvl="0" indent="0" marL="0">
-              <a:buNone/>
-            </a:pPr>
-            <a:r>
-              <a:rPr/>
-              <a:t>So when a paper or a colleague reports 77% precision, the useful follow-up is: at what threshold, and why that one? Most of the time there is no answer, because nobody chose it.</a:t>
+              <a:t>The confusion matrix by hand, then from scikit-learn, then the threshold sweep. Run notebook 02. Twenty minutes.</a:t>
+            </a:r>
+          </a:p>
+          <a:p>
+            <a:pPr lvl="0" indent="0" marL="0">
+              <a:buNone/>
+            </a:pPr>
+          </a:p>
+          <a:p>
+            <a:pPr lvl="0" indent="0" marL="0">
+              <a:buNone/>
+            </a:pPr>
+            <a:r>
+              <a:rPr/>
+              <a:t>Have them build the four counts by hand before calling confusion_matrix. It is four comparisons and it takes two minutes, and it is what makes the jargon stop being jargon.</a:t>
+            </a:r>
+          </a:p>
+          <a:p>
+            <a:pPr lvl="0" indent="0" marL="0">
+              <a:buNone/>
+            </a:pPr>
+          </a:p>
+          <a:p>
+            <a:pPr lvl="0" indent="0" marL="0">
+              <a:buNone/>
+            </a:pPr>
+            <a:r>
+              <a:rPr/>
+              <a:t>Spend time on the threshold sweep table. Do not explain it first - let them read the columns and say what they see. Somebody will notice that accuracy barely moves. That is the moment to show the next slide.</a:t>
             </a:r>
           </a:p>
         </p:txBody>
@@ -4433,63 +4450,35 @@
             </a:pPr>
             <a:r>
               <a:rPr/>
-              <a:t>Notebook 2, the threshold sweep, five of its rows drawn as bars. Each pair of bars is one threshold: teal is the failures caught, out of the 76 in the test set; gold is the healthy drives flagged by mistake. On the right, the accuracy each threshold scores: right answers divided by 2,000.</a:t>
-            </a:r>
-          </a:p>
-          <a:p>
-            <a:pPr lvl="0" indent="0" marL="0">
-              <a:buNone/>
-            </a:pPr>
-          </a:p>
-          <a:p>
-            <a:pPr lvl="0" indent="0" marL="0">
-              <a:buNone/>
-            </a:pPr>
-            <a:r>
-              <a:rPr/>
-              <a:t>Lower the threshold - go up the figure: both bars grow. At 0.02 we catch 69 of 76 failures and replace 284 healthy drives to do it. At 0.90 there are no false alarms at all, and we catch 14 of 76, fewer than a quarter.</a:t>
-            </a:r>
-          </a:p>
-          <a:p>
-            <a:pPr lvl="0" indent="0" marL="0">
-              <a:buNone/>
-            </a:pPr>
-          </a:p>
-          <a:p>
-            <a:pPr lvl="0" indent="0" marL="0">
-              <a:buNone/>
-            </a:pPr>
-            <a:r>
-              <a:rPr/>
-              <a:t>Now the right-hand column, which is the slide’s real argument. For every threshold from 0.10 up to 0.90 it stays between 0.942 and 0.977, a range of 0.977 - 0.942 = 0.035, three and a half percentage points, while the teal bar shrinks from 61 to 14. And its maximum, in bold, is at 0.5 - the threshold that misses 76 - 43 = 33 failures.</a:t>
-            </a:r>
-          </a:p>
-          <a:p>
-            <a:pPr lvl="0" indent="0" marL="0">
-              <a:buNone/>
-            </a:pPr>
-          </a:p>
-          <a:p>
-            <a:pPr lvl="0" indent="0" marL="0">
-              <a:buNone/>
-            </a:pPr>
-            <a:r>
-              <a:rPr/>
-              <a:t>Say the consequence plainly: tune on accuracy and it will quietly recommend catching fewer failures. Most of the alarms a higher threshold drops are false ones, so accuracy rises with each drop, even though some of the dropped alarms were failures being caught. From 0.30 to 0.50 the gold bar loses 25 - 13 = 12 false alarms and the teal bar loses 53 - 43 = 10 caught failures. Accuracy gains 12 right answers and loses 10, two more in all, 0.976 to 0.977.</a:t>
-            </a:r>
-          </a:p>
-          <a:p>
-            <a:pPr lvl="0" indent="0" marL="0">
-              <a:buNone/>
-            </a:pPr>
-          </a:p>
-          <a:p>
-            <a:pPr lvl="0" indent="0" marL="0">
-              <a:buNone/>
-            </a:pPr>
-            <a:r>
-              <a:rPr/>
-              <a:t>Precision and recall at each threshold are in the handout’s table in section 7.1, computed with the formulas of slide 34.</a:t>
+              <a:t>The title of that figure is the point: nothing about the model changes along the x-axis. Same coefficients, same probabilities, same drives. All that moves is where we draw the line between “leave it” and “replace it”.</a:t>
+            </a:r>
+          </a:p>
+          <a:p>
+            <a:pPr lvl="0" indent="0" marL="0">
+              <a:buNone/>
+            </a:pPr>
+          </a:p>
+          <a:p>
+            <a:pPr lvl="0" indent="0" marL="0">
+              <a:buNone/>
+            </a:pPr>
+            <a:r>
+              <a:rPr/>
+              <a:t>That 0.5 is predict()’s default and nothing more. It is the right choice only when the two errors cost the same and the probabilities are calibrated: among drives given 0.3, about 30% really fail (slide 46 names the property). Slide 51 derives the threshold from the costs, and it is 0.5 exactly when they are equal. Here a miss costs about nineteen times a false alarm (2,600 divided by 140 = 18.6), and in most real problems the costs differ too.</a:t>
+            </a:r>
+          </a:p>
+          <a:p>
+            <a:pPr lvl="0" indent="0" marL="0">
+              <a:buNone/>
+            </a:pPr>
+          </a:p>
+          <a:p>
+            <a:pPr lvl="0" indent="0" marL="0">
+              <a:buNone/>
+            </a:pPr>
+            <a:r>
+              <a:rPr/>
+              <a:t>So when a paper or a colleague reports 77% precision, the useful follow-up is: at what threshold, and why that one? Most of the time there is no answer, because nobody chose it.</a:t>
             </a:r>
           </a:p>
         </p:txBody>
@@ -4571,49 +4560,63 @@
             </a:pPr>
             <a:r>
               <a:rPr/>
-              <a:t>The sweep traced a path through precision-recall space; this is that path drawn directly. Every threshold at once.</a:t>
-            </a:r>
-          </a:p>
-          <a:p>
-            <a:pPr lvl="0" indent="0" marL="0">
-              <a:buNone/>
-            </a:pPr>
-          </a:p>
-          <a:p>
-            <a:pPr lvl="0" indent="0" marL="0">
-              <a:buNone/>
-            </a:pPr>
-            <a:r>
-              <a:rPr/>
-              <a:t>The part to teach is the baseline. A model with random scores has precision equal to the positive rate - 76 failures divided by 2,000 drives = 0.038 here - at every recall. That flat dashed line, not 0.5, is what “no skill” looks like on an imbalanced problem.</a:t>
-            </a:r>
-          </a:p>
-          <a:p>
-            <a:pPr lvl="0" indent="0" marL="0">
-              <a:buNone/>
-            </a:pPr>
-          </a:p>
-          <a:p>
-            <a:pPr lvl="0" indent="0" marL="0">
-              <a:buNone/>
-            </a:pPr>
-            <a:r>
-              <a:rPr/>
-              <a:t>That is why this curve is so much more informative than accuracy when positives are rare: the floor is where the difficulty actually is. Our model’s area under it, the average precision, is 0.717 against a floor of 0.038.</a:t>
-            </a:r>
-          </a:p>
-          <a:p>
-            <a:pPr lvl="0" indent="0" marL="0">
-              <a:buNone/>
-            </a:pPr>
-          </a:p>
-          <a:p>
-            <a:pPr lvl="0" indent="0" marL="0">
-              <a:buNone/>
-            </a:pPr>
-            <a:r>
-              <a:rPr/>
-              <a:t>The three marked dots are thresholds 0.5, 0.3 and 0.05. The first two are rows of the table on the previous slide, so they can check the correspondence: at 0.5, recall 0.566 and precision 0.768.</a:t>
+              <a:t>Notebook 2, the threshold sweep, five of its rows drawn as bars. Each pair of bars is one threshold: teal is the failures caught, out of the 76 in the test set; gold is the healthy drives flagged by mistake. On the right, the accuracy each threshold scores: right answers divided by 2,000.</a:t>
+            </a:r>
+          </a:p>
+          <a:p>
+            <a:pPr lvl="0" indent="0" marL="0">
+              <a:buNone/>
+            </a:pPr>
+          </a:p>
+          <a:p>
+            <a:pPr lvl="0" indent="0" marL="0">
+              <a:buNone/>
+            </a:pPr>
+            <a:r>
+              <a:rPr/>
+              <a:t>Lower the threshold - go up the figure: both bars grow. At 0.02 we catch 69 of 76 failures and replace 284 healthy drives to do it. At 0.90 there are no false alarms at all, and we catch 14 of 76, fewer than a quarter.</a:t>
+            </a:r>
+          </a:p>
+          <a:p>
+            <a:pPr lvl="0" indent="0" marL="0">
+              <a:buNone/>
+            </a:pPr>
+          </a:p>
+          <a:p>
+            <a:pPr lvl="0" indent="0" marL="0">
+              <a:buNone/>
+            </a:pPr>
+            <a:r>
+              <a:rPr/>
+              <a:t>Now the right-hand column, which is the slide’s real argument. For every threshold from 0.10 up to 0.90 it stays between 0.942 and 0.977, a range of 0.977 - 0.942 = 0.035, three and a half percentage points, while the teal bar shrinks from 61 to 14. And its maximum, in bold, is at 0.5 - the threshold that misses 76 - 43 = 33 failures.</a:t>
+            </a:r>
+          </a:p>
+          <a:p>
+            <a:pPr lvl="0" indent="0" marL="0">
+              <a:buNone/>
+            </a:pPr>
+          </a:p>
+          <a:p>
+            <a:pPr lvl="0" indent="0" marL="0">
+              <a:buNone/>
+            </a:pPr>
+            <a:r>
+              <a:rPr/>
+              <a:t>Say the consequence plainly: tune on accuracy and it will quietly recommend catching fewer failures. Most of the alarms a higher threshold drops are false ones, so accuracy rises with each drop, even though some of the dropped alarms were failures being caught. From 0.30 to 0.50 the gold bar loses 25 - 13 = 12 false alarms and the teal bar loses 53 - 43 = 10 caught failures. Accuracy gains 12 right answers and loses 10, two more in all, 0.976 to 0.977.</a:t>
+            </a:r>
+          </a:p>
+          <a:p>
+            <a:pPr lvl="0" indent="0" marL="0">
+              <a:buNone/>
+            </a:pPr>
+          </a:p>
+          <a:p>
+            <a:pPr lvl="0" indent="0" marL="0">
+              <a:buNone/>
+            </a:pPr>
+            <a:r>
+              <a:rPr/>
+              <a:t>Precision and recall at each threshold are in the handout’s table in section 7.1, computed with the formulas of slide 35.</a:t>
             </a:r>
           </a:p>
         </p:txBody>
@@ -4805,35 +4808,49 @@
             </a:pPr>
             <a:r>
               <a:rPr/>
-              <a:t>Set up the next section as a question rather than announcing a tool.</a:t>
-            </a:r>
-          </a:p>
-          <a:p>
-            <a:pPr lvl="0" indent="0" marL="0">
-              <a:buNone/>
-            </a:pPr>
-          </a:p>
-          <a:p>
-            <a:pPr lvl="0" indent="0" marL="0">
-              <a:buNone/>
-            </a:pPr>
-            <a:r>
-              <a:rPr/>
-              <a:t>Everything so far has needed a threshold. That is fine when you know the costs, and we will come back to it. But often you want to compare two models before committing - is model A better than model B, at any operating point?</a:t>
-            </a:r>
-          </a:p>
-          <a:p>
-            <a:pPr lvl="0" indent="0" marL="0">
-              <a:buNone/>
-            </a:pPr>
-          </a:p>
-          <a:p>
-            <a:pPr lvl="0" indent="0" marL="0">
-              <a:buNone/>
-            </a:pPr>
-            <a:r>
-              <a:rPr/>
-              <a:t>The move is to stop asking “how many did it get right” and start asking “did it put the failures at the top of the list”. That is a question about ranking, and ranking has no threshold in it.</a:t>
+              <a:t>The sweep traced a path through precision-recall space; this is that path drawn directly. Every threshold at once.</a:t>
+            </a:r>
+          </a:p>
+          <a:p>
+            <a:pPr lvl="0" indent="0" marL="0">
+              <a:buNone/>
+            </a:pPr>
+          </a:p>
+          <a:p>
+            <a:pPr lvl="0" indent="0" marL="0">
+              <a:buNone/>
+            </a:pPr>
+            <a:r>
+              <a:rPr/>
+              <a:t>The part to teach is the baseline. A model with random scores has precision equal to the positive rate - 76 failures divided by 2,000 drives = 0.038 here - at every recall. That flat dashed line, not 0.5, is what “no skill” looks like on an imbalanced problem.</a:t>
+            </a:r>
+          </a:p>
+          <a:p>
+            <a:pPr lvl="0" indent="0" marL="0">
+              <a:buNone/>
+            </a:pPr>
+          </a:p>
+          <a:p>
+            <a:pPr lvl="0" indent="0" marL="0">
+              <a:buNone/>
+            </a:pPr>
+            <a:r>
+              <a:rPr/>
+              <a:t>That is why this curve is so much more informative than accuracy when positives are rare: the floor is where the difficulty actually is. Our model’s area under it, the average precision, is 0.717 against a floor of 0.038.</a:t>
+            </a:r>
+          </a:p>
+          <a:p>
+            <a:pPr lvl="0" indent="0" marL="0">
+              <a:buNone/>
+            </a:pPr>
+          </a:p>
+          <a:p>
+            <a:pPr lvl="0" indent="0" marL="0">
+              <a:buNone/>
+            </a:pPr>
+            <a:r>
+              <a:rPr/>
+              <a:t>The three marked dots are thresholds 0.5, 0.3 and 0.05. The first two are rows of the table on the previous slide, so they can check the correspondence: at 0.5, recall 0.566 and precision 0.768.</a:t>
             </a:r>
           </a:p>
         </p:txBody>
@@ -4915,49 +4932,35 @@
             </a:pPr>
             <a:r>
               <a:rPr/>
-              <a:t>Receiver operating characteristic - expand it, and say where the name comes from, because it makes the idea concrete. Wartime radar: operators tuning receivers to spot aircraft without chasing flocks of birds. Same problem shape, literally the same trade-off.</a:t>
-            </a:r>
-          </a:p>
-          <a:p>
-            <a:pPr lvl="0" indent="0" marL="0">
-              <a:buNone/>
-            </a:pPr>
-          </a:p>
-          <a:p>
-            <a:pPr lvl="0" indent="0" marL="0">
-              <a:buNone/>
-            </a:pPr>
-            <a:r>
-              <a:rPr/>
-              <a:t>The two axes: the true positive rate (TPR), which is recall under another name - the share of failures we catch. The false positive rate (FPR) - the share of healthy drives we condemn.</a:t>
-            </a:r>
-          </a:p>
-          <a:p>
-            <a:pPr lvl="0" indent="0" marL="0">
-              <a:buNone/>
-            </a:pPr>
-          </a:p>
-          <a:p>
-            <a:pPr lvl="0" indent="0" marL="0">
-              <a:buNone/>
-            </a:pPr>
-            <a:r>
-              <a:rPr/>
-              <a:t>The intuition worth saying slowly: at threshold 1 both are zero, flag nothing. At threshold 0 both are one. The entire content of the curve is the ORDER in which they get there. A good model raises TPR fast while FPR is still low, because its highest scores really are the failures. A useless model raises them together and traces the diagonal.</a:t>
-            </a:r>
-          </a:p>
-          <a:p>
-            <a:pPr lvl="0" indent="0" marL="0">
-              <a:buNone/>
-            </a:pPr>
-          </a:p>
-          <a:p>
-            <a:pPr lvl="0" indent="0" marL="0">
-              <a:buNone/>
-            </a:pPr>
-            <a:r>
-              <a:rPr/>
-              <a:t>So the curve asks: as we grow more willing to raise alarms, do we catch failures faster than we annoy technicians?</a:t>
+              <a:t>Set up the next section as a question rather than announcing a tool.</a:t>
+            </a:r>
+          </a:p>
+          <a:p>
+            <a:pPr lvl="0" indent="0" marL="0">
+              <a:buNone/>
+            </a:pPr>
+          </a:p>
+          <a:p>
+            <a:pPr lvl="0" indent="0" marL="0">
+              <a:buNone/>
+            </a:pPr>
+            <a:r>
+              <a:rPr/>
+              <a:t>Everything so far has needed a threshold. That is fine when you know the costs, and we will come back to it. But often you want to compare two models before committing - is model A better than model B, at any operating point?</a:t>
+            </a:r>
+          </a:p>
+          <a:p>
+            <a:pPr lvl="0" indent="0" marL="0">
+              <a:buNone/>
+            </a:pPr>
+          </a:p>
+          <a:p>
+            <a:pPr lvl="0" indent="0" marL="0">
+              <a:buNone/>
+            </a:pPr>
+            <a:r>
+              <a:rPr/>
+              <a:t>The move is to stop asking “how many did it get right” and start asking “did it put the failures at the top of the list”. That is a question about ranking, and ranking has no threshold in it.</a:t>
             </a:r>
           </a:p>
         </p:txBody>
@@ -5039,49 +5042,49 @@
             </a:pPr>
             <a:r>
               <a:rPr/>
-              <a:t>This is the definition to remember, and it is much more useful than “area under the curve”, which is a geometric fact rather than a meaning.</a:t>
-            </a:r>
-          </a:p>
-          <a:p>
-            <a:pPr lvl="0" indent="0" marL="0">
-              <a:buNone/>
-            </a:pPr>
-          </a:p>
-          <a:p>
-            <a:pPr lvl="0" indent="0" marL="0">
-              <a:buNone/>
-            </a:pPr>
-            <a:r>
-              <a:rPr/>
-              <a:t>Say it concretely: pick one drive that failed and one that did not, at random. 95 times out of 100 the model gave the failing one a higher score.</a:t>
-            </a:r>
-          </a:p>
-          <a:p>
-            <a:pPr lvl="0" indent="0" marL="0">
-              <a:buNone/>
-            </a:pPr>
-          </a:p>
-          <a:p>
-            <a:pPr lvl="0" indent="0" marL="0">
-              <a:buNone/>
-            </a:pPr>
-            <a:r>
-              <a:rPr/>
-              <a:t>That makes AUC a measure of RANKING quality. It is threshold-free because ranking is threshold-free.</a:t>
-            </a:r>
-          </a:p>
-          <a:p>
-            <a:pPr lvl="0" indent="0" marL="0">
-              <a:buNone/>
-            </a:pPr>
-          </a:p>
-          <a:p>
-            <a:pPr lvl="0" indent="0" marL="0">
-              <a:buNone/>
-            </a:pPr>
-            <a:r>
-              <a:rPr/>
-              <a:t>The identity with the Mann-Whitney U statistic - a classical test that compares two groups by counting, over every pair, which member ranks higher - is in the handout, section 8.2, for anyone who wants the proof. But notebook 3 does something better than a proof for this audience: it draws 200,000 random pairs and counts. 0.9488 against roc_auc_score’s 0.9493.</a:t>
+              <a:t>Receiver operating characteristic - expand it, and say where the name comes from, because it makes the idea concrete. Wartime radar: operators tuning receivers to spot aircraft without chasing flocks of birds. Same problem shape, literally the same trade-off.</a:t>
+            </a:r>
+          </a:p>
+          <a:p>
+            <a:pPr lvl="0" indent="0" marL="0">
+              <a:buNone/>
+            </a:pPr>
+          </a:p>
+          <a:p>
+            <a:pPr lvl="0" indent="0" marL="0">
+              <a:buNone/>
+            </a:pPr>
+            <a:r>
+              <a:rPr/>
+              <a:t>The two axes: the true positive rate (TPR), which is recall under another name - the share of failures we catch. The false positive rate (FPR) - the share of healthy drives we condemn.</a:t>
+            </a:r>
+          </a:p>
+          <a:p>
+            <a:pPr lvl="0" indent="0" marL="0">
+              <a:buNone/>
+            </a:pPr>
+          </a:p>
+          <a:p>
+            <a:pPr lvl="0" indent="0" marL="0">
+              <a:buNone/>
+            </a:pPr>
+            <a:r>
+              <a:rPr/>
+              <a:t>The intuition worth saying slowly: at threshold 1 both are zero, flag nothing. At threshold 0 both are one. The entire content of the curve is the ORDER in which they get there. A good model raises TPR fast while FPR is still low, because its highest scores really are the failures. A useless model raises them together and traces the diagonal.</a:t>
+            </a:r>
+          </a:p>
+          <a:p>
+            <a:pPr lvl="0" indent="0" marL="0">
+              <a:buNone/>
+            </a:pPr>
+          </a:p>
+          <a:p>
+            <a:pPr lvl="0" indent="0" marL="0">
+              <a:buNone/>
+            </a:pPr>
+            <a:r>
+              <a:rPr/>
+              <a:t>So the curve asks: as we grow more willing to raise alarms, do we catch failures faster than we annoy technicians?</a:t>
             </a:r>
           </a:p>
         </p:txBody>
@@ -5163,49 +5166,49 @@
             </a:pPr>
             <a:r>
               <a:rPr/>
-              <a:t>Short slide, important consequence. AUC depends only on the ordering, so it is unchanged by anything done to the scores that keeps their order.</a:t>
-            </a:r>
-          </a:p>
-          <a:p>
-            <a:pPr lvl="0" indent="0" marL="0">
-              <a:buNone/>
-            </a:pPr>
-          </a:p>
-          <a:p>
-            <a:pPr lvl="0" indent="0" marL="0">
-              <a:buNone/>
-            </a:pPr>
-            <a:r>
-              <a:rPr/>
-              <a:t>Divide all the probabilities by ten and the ranking is identical, so the AUC is identical - while the model is now badly calibrated and every threshold-based decision it makes is different.</a:t>
-            </a:r>
-          </a:p>
-          <a:p>
-            <a:pPr lvl="0" indent="0" marL="0">
-              <a:buNone/>
-            </a:pPr>
-          </a:p>
-          <a:p>
-            <a:pPr lvl="0" indent="0" marL="0">
-              <a:buNone/>
-            </a:pPr>
-            <a:r>
-              <a:rPr/>
-              <a:t>The consequence: AUC says nothing about whether “0.7” means anything. If you need the probabilities to be believable - because you are computing expected costs, as slide 49 does - AUC is not the check you want.</a:t>
-            </a:r>
-          </a:p>
-          <a:p>
-            <a:pPr lvl="0" indent="0" marL="0">
-              <a:buNone/>
-            </a:pPr>
-          </a:p>
-          <a:p>
-            <a:pPr lvl="0" indent="0" marL="0">
-              <a:buNone/>
-            </a:pPr>
-            <a:r>
-              <a:rPr/>
-              <a:t>Good place to mention that calibration - whether a predicted 0.7 really comes true 70% of the time - is a topic of its own, without going into it.</a:t>
+              <a:t>This is the definition to remember, and it is much more useful than “area under the curve”, which is a geometric fact rather than a meaning.</a:t>
+            </a:r>
+          </a:p>
+          <a:p>
+            <a:pPr lvl="0" indent="0" marL="0">
+              <a:buNone/>
+            </a:pPr>
+          </a:p>
+          <a:p>
+            <a:pPr lvl="0" indent="0" marL="0">
+              <a:buNone/>
+            </a:pPr>
+            <a:r>
+              <a:rPr/>
+              <a:t>Say it concretely: pick one drive that failed and one that did not, at random. 95 times out of 100 the model gave the failing one a higher score.</a:t>
+            </a:r>
+          </a:p>
+          <a:p>
+            <a:pPr lvl="0" indent="0" marL="0">
+              <a:buNone/>
+            </a:pPr>
+          </a:p>
+          <a:p>
+            <a:pPr lvl="0" indent="0" marL="0">
+              <a:buNone/>
+            </a:pPr>
+            <a:r>
+              <a:rPr/>
+              <a:t>That makes AUC a measure of RANKING quality. It is threshold-free because ranking is threshold-free.</a:t>
+            </a:r>
+          </a:p>
+          <a:p>
+            <a:pPr lvl="0" indent="0" marL="0">
+              <a:buNone/>
+            </a:pPr>
+          </a:p>
+          <a:p>
+            <a:pPr lvl="0" indent="0" marL="0">
+              <a:buNone/>
+            </a:pPr>
+            <a:r>
+              <a:rPr/>
+              <a:t>The identity with the Mann-Whitney U statistic - a classical test that compares two groups by counting, over every pair, which member ranks higher - is in the handout, section 8.2, for anyone who wants the proof. But notebook 3 does something better than a proof for this audience: it draws 200,000 random pairs and counts. 0.9488 against roc_auc_score’s 0.9493.</a:t>
             </a:r>
           </a:p>
         </p:txBody>
@@ -5287,63 +5290,49 @@
             </a:pPr>
             <a:r>
               <a:rPr/>
-              <a:t>Same model. Not retrained. Notebook 3 generates a new, larger fleet of 60,000 drives from the same simulator, keeps every healthy drive, and throws away failures at random until they are 0.4% instead of 3.8% - the direction reality moves in fraud, disease, hardware failure.</a:t>
-            </a:r>
-          </a:p>
-          <a:p>
-            <a:pPr lvl="0" indent="0" marL="0">
-              <a:buNone/>
-            </a:pPr>
-          </a:p>
-          <a:p>
-            <a:pPr lvl="0" indent="0" marL="0">
-              <a:buNone/>
-            </a:pPr>
-            <a:r>
-              <a:rPr/>
-              <a:t>Someone will notice that at 3.8% the AUC reads 0.968, not the 0.949 of slide 43. Different drives: 0.949 rests on the 76 failures of our 2,000-drive test set, 0.968 on a fleet thirty times larger. Both are estimates of the same ranking ability. The same goes for average precision: 0.706 on the large fleet, against slide 40’s 0.717 on the test set.</a:t>
-            </a:r>
-          </a:p>
-          <a:p>
-            <a:pPr lvl="0" indent="0" marL="0">
-              <a:buNone/>
-            </a:pPr>
-          </a:p>
-          <a:p>
-            <a:pPr lvl="0" indent="0" marL="0">
-              <a:buNone/>
-            </a:pPr>
-            <a:r>
-              <a:rPr/>
-              <a:t>Left panel: the three ROC curves sit on top of each other. AUC 0.968, 0.965, 0.974. It reports an excellent model throughout, and at the rarest setting a marginally better one, which is sampling noise on 231 positives.</a:t>
-            </a:r>
-          </a:p>
-          <a:p>
-            <a:pPr lvl="0" indent="0" marL="0">
-              <a:buNone/>
-            </a:pPr>
-          </a:p>
-          <a:p>
-            <a:pPr lvl="0" indent="0" marL="0">
-              <a:buNone/>
-            </a:pPr>
-            <a:r>
-              <a:rPr/>
-              <a:t>Right panel: the precision-recall curves are in three different worlds. Average precision falls from 0.706 to 0.361, and precision at the threshold of 0.5 falls from 0.79 to 0.26 - 1 - 0.26 = 0.74, three alarms in four now false.</a:t>
-            </a:r>
-          </a:p>
-          <a:p>
-            <a:pPr lvl="0" indent="0" marL="0">
-              <a:buNone/>
-            </a:pPr>
-          </a:p>
-          <a:p>
-            <a:pPr lvl="0" indent="0" marL="0">
-              <a:buNone/>
-            </a:pPr>
-            <a:r>
-              <a:rPr/>
-              <a:t>Three curves on the left, one model, no problem. Three curves on the right, same model, a disaster. Let that sit for a second before explaining.</a:t>
+              <a:t>Notebook 3, the scores the model gives the test drives, drawn as two histograms: teal for the 1,924 healthy drives, rust for the 76 that failed. Each group is scaled to add up to 1, so the two shapes can be compared although one group is 25 times the size of the other. The horizontal axis is logarithmic, because most healthy drives get scores of a thousandth or less.</a:t>
+            </a:r>
+          </a:p>
+          <a:p>
+            <a:pPr lvl="0" indent="0" marL="0">
+              <a:buNone/>
+            </a:pPr>
+          </a:p>
+          <a:p>
+            <a:pPr lvl="0" indent="0" marL="0">
+              <a:buNone/>
+            </a:pPr>
+            <a:r>
+              <a:rPr/>
+              <a:t>The rust sits far to the right of the teal: most failing drives get high scores, most healthy ones tiny scores. That separation is what the AUC measures. Pick one rust drive and one teal drive at random: the AUC, 0.949, is the chance that the rust one lies further right. Notebook 3 checks it by drawing 200,000 such pairs: 0.9488.</a:t>
+            </a:r>
+          </a:p>
+          <a:p>
+            <a:pPr lvl="0" indent="0" marL="0">
+              <a:buNone/>
+            </a:pPr>
+          </a:p>
+          <a:p>
+            <a:pPr lvl="0" indent="0" marL="0">
+              <a:buNone/>
+            </a:pPr>
+            <a:r>
+              <a:rPr/>
+              <a:t>The pairs the model gets wrong come from where the two colours overlap - a few failing drives with scores as low as many healthy ones. No threshold separates those, and the AUC counts them as the 5% it misses.</a:t>
+            </a:r>
+          </a:p>
+          <a:p>
+            <a:pPr lvl="0" indent="0" marL="0">
+              <a:buNone/>
+            </a:pPr>
+          </a:p>
+          <a:p>
+            <a:pPr lvl="0" indent="0" marL="0">
+              <a:buNone/>
+            </a:pPr>
+            <a:r>
+              <a:rPr/>
+              <a:t>Note what the figure does not show: where to put the threshold. Any vertical line splits it, and the AUC is the same whichever you pick - the next slide.</a:t>
             </a:r>
           </a:p>
         </p:txBody>
@@ -5425,49 +5414,49 @@
             </a:pPr>
             <a:r>
               <a:rPr/>
-              <a:t>The explanation is entirely in the denominators, and it is worth writing on the board.</a:t>
-            </a:r>
-          </a:p>
-          <a:p>
-            <a:pPr lvl="0" indent="0" marL="0">
-              <a:buNone/>
-            </a:pPr>
-          </a:p>
-          <a:p>
-            <a:pPr lvl="0" indent="0" marL="0">
-              <a:buNone/>
-            </a:pPr>
-            <a:r>
-              <a:rPr/>
-              <a:t>A thousand false alarms among a hundred thousand healthy drives is a false positive rate of 0.01 - invisible on the ROC axis, a rounding error. The same thousand false alarms, set against the alarms actually raised, may be most of them.</a:t>
-            </a:r>
-          </a:p>
-          <a:p>
-            <a:pPr lvl="0" indent="0" marL="0">
-              <a:buNone/>
-            </a:pPr>
-          </a:p>
-          <a:p>
-            <a:pPr lvl="0" indent="0" marL="0">
-              <a:buNone/>
-            </a:pPr>
-            <a:r>
-              <a:rPr/>
-              <a:t>So ROC is measuring the false alarms against a population nobody experiences. The technician does not see the 99,000 drives left alone; they see the alarm queue.</a:t>
-            </a:r>
-          </a:p>
-          <a:p>
-            <a:pPr lvl="0" indent="0" marL="0">
-              <a:buNone/>
-            </a:pPr>
-          </a:p>
-          <a:p>
-            <a:pPr lvl="0" indent="0" marL="0">
-              <a:buNone/>
-            </a:pPr>
-            <a:r>
-              <a:rPr/>
-              <a:t>This is the lesson’s second big predictable mistake, after trusting accuracy on slide 29, and again defend the instinct: AUC is threshold-free, comparable across models and datasets, bounded in a familiar range. Those are real virtues. It simply answers a question about ranking when the question was about the alarm queue.</a:t>
+              <a:t>Short slide, important consequence. AUC depends only on the ordering, so it is unchanged by anything done to the scores that keeps their order.</a:t>
+            </a:r>
+          </a:p>
+          <a:p>
+            <a:pPr lvl="0" indent="0" marL="0">
+              <a:buNone/>
+            </a:pPr>
+          </a:p>
+          <a:p>
+            <a:pPr lvl="0" indent="0" marL="0">
+              <a:buNone/>
+            </a:pPr>
+            <a:r>
+              <a:rPr/>
+              <a:t>Divide all the probabilities by ten and the ranking is identical, so the AUC is identical - while the model is now badly calibrated and every threshold-based decision it makes is different.</a:t>
+            </a:r>
+          </a:p>
+          <a:p>
+            <a:pPr lvl="0" indent="0" marL="0">
+              <a:buNone/>
+            </a:pPr>
+          </a:p>
+          <a:p>
+            <a:pPr lvl="0" indent="0" marL="0">
+              <a:buNone/>
+            </a:pPr>
+            <a:r>
+              <a:rPr/>
+              <a:t>The consequence: AUC says nothing about whether “0.7” means anything. If you need the probabilities to be believable - because you are computing expected costs, as slide 51 does - AUC is not the check you want.</a:t>
+            </a:r>
+          </a:p>
+          <a:p>
+            <a:pPr lvl="0" indent="0" marL="0">
+              <a:buNone/>
+            </a:pPr>
+          </a:p>
+          <a:p>
+            <a:pPr lvl="0" indent="0" marL="0">
+              <a:buNone/>
+            </a:pPr>
+            <a:r>
+              <a:rPr/>
+              <a:t>Good place to mention that calibration - whether a predicted 0.7 really comes true 70% of the time - is a topic of its own, without going into it.</a:t>
             </a:r>
           </a:p>
         </p:txBody>
@@ -5549,21 +5538,63 @@
             </a:pPr>
             <a:r>
               <a:rPr/>
-              <a:t>Short and quotable, and this is the thing to have on the board when they write their exercise reports.</a:t>
-            </a:r>
-          </a:p>
-          <a:p>
-            <a:pPr lvl="0" indent="0" marL="0">
-              <a:buNone/>
-            </a:pPr>
-          </a:p>
-          <a:p>
-            <a:pPr lvl="0" indent="0" marL="0">
-              <a:buNone/>
-            </a:pPr>
-            <a:r>
-              <a:rPr/>
-              <a:t>If someone asks which single number to use when a single number is demanded: average precision, because its baseline moves with the problem. But push back on the premise - the reason to demand a single number is usually to avoid thinking, and this lesson is about the thinking.</a:t>
+              <a:t>Same model. Not retrained. Notebook 3 generates a new, larger fleet of 60,000 drives from the same simulator, keeps every healthy drive, and throws away failures at random until they are 0.4% instead of 3.8% - the direction reality moves in fraud, disease, hardware failure.</a:t>
+            </a:r>
+          </a:p>
+          <a:p>
+            <a:pPr lvl="0" indent="0" marL="0">
+              <a:buNone/>
+            </a:pPr>
+          </a:p>
+          <a:p>
+            <a:pPr lvl="0" indent="0" marL="0">
+              <a:buNone/>
+            </a:pPr>
+            <a:r>
+              <a:rPr/>
+              <a:t>Someone will notice that at 3.8% the AUC reads 0.968, not the 0.949 of slide 44. Different drives: 0.949 rests on the 76 failures of our 2,000-drive test set, 0.968 on a fleet thirty times larger. Both are estimates of the same ranking ability. The same goes for average precision: 0.706 on the large fleet, against slide 41’s 0.717 on the test set.</a:t>
+            </a:r>
+          </a:p>
+          <a:p>
+            <a:pPr lvl="0" indent="0" marL="0">
+              <a:buNone/>
+            </a:pPr>
+          </a:p>
+          <a:p>
+            <a:pPr lvl="0" indent="0" marL="0">
+              <a:buNone/>
+            </a:pPr>
+            <a:r>
+              <a:rPr/>
+              <a:t>Left panel: the three ROC curves sit on top of each other. AUC 0.968, 0.965, 0.974. It reports an excellent model throughout, and at the rarest setting a marginally better one, which is sampling noise on 231 positives.</a:t>
+            </a:r>
+          </a:p>
+          <a:p>
+            <a:pPr lvl="0" indent="0" marL="0">
+              <a:buNone/>
+            </a:pPr>
+          </a:p>
+          <a:p>
+            <a:pPr lvl="0" indent="0" marL="0">
+              <a:buNone/>
+            </a:pPr>
+            <a:r>
+              <a:rPr/>
+              <a:t>Right panel: the precision-recall curves are in three different worlds. Average precision falls from 0.706 to 0.361, and precision at the threshold of 0.5 falls from 0.79 to 0.26 - 1 - 0.26 = 0.74, three alarms in four now false.</a:t>
+            </a:r>
+          </a:p>
+          <a:p>
+            <a:pPr lvl="0" indent="0" marL="0">
+              <a:buNone/>
+            </a:pPr>
+          </a:p>
+          <a:p>
+            <a:pPr lvl="0" indent="0" marL="0">
+              <a:buNone/>
+            </a:pPr>
+            <a:r>
+              <a:rPr/>
+              <a:t>Three curves on the left, one model, no problem. Three curves on the right, same model, a disaster. Let that sit for a second before explaining.</a:t>
             </a:r>
           </a:p>
         </p:txBody>
@@ -5645,49 +5676,49 @@
             </a:pPr>
             <a:r>
               <a:rPr/>
-              <a:t>Finally, the honest way to pick a threshold. It needs one ingredient no metric can supply: what the errors cost. We wrote those down on slide 32 - €140 for a needless replacement, €2,600 for a drive that dies in service.</a:t>
-            </a:r>
-          </a:p>
-          <a:p>
-            <a:pPr lvl="0" indent="0" marL="0">
-              <a:buNone/>
-            </a:pPr>
-          </a:p>
-          <a:p>
-            <a:pPr lvl="0" indent="0" marL="0">
-              <a:buNone/>
-            </a:pPr>
-            <a:r>
-              <a:rPr/>
-              <a:t>The curve is the total cost on the test set as the threshold moves. The default 0.5 costs €87,620. The cheapest, at 0.08, costs €45,540.</a:t>
-            </a:r>
-          </a:p>
-          <a:p>
-            <a:pPr lvl="0" indent="0" marL="0">
-              <a:buNone/>
-            </a:pPr>
-          </a:p>
-          <a:p>
-            <a:pPr lvl="0" indent="0" marL="0">
-              <a:buNone/>
-            </a:pPr>
-            <a:r>
-              <a:rPr/>
-              <a:t>Choosing the threshold on purpose HALVED the cost of the same model: 45,540 divided by 87,620 is 0.52. No retraining, no new features, no better algorithm. One number, taken from the economics instead of from the library default.</a:t>
-            </a:r>
-          </a:p>
-          <a:p>
-            <a:pPr lvl="0" indent="0" marL="0">
-              <a:buNone/>
-            </a:pPr>
-          </a:p>
-          <a:p>
-            <a:pPr lvl="0" indent="0" marL="0">
-              <a:buNone/>
-            </a:pPr>
-            <a:r>
-              <a:rPr/>
-              <a:t>Note the flatness around the minimum, and say why it is good news: the exact threshold does not have to be right. Which is fortunate, because cost estimates never are.</a:t>
+              <a:t>The explanation is entirely in the denominators, and it is worth writing on the board.</a:t>
+            </a:r>
+          </a:p>
+          <a:p>
+            <a:pPr lvl="0" indent="0" marL="0">
+              <a:buNone/>
+            </a:pPr>
+          </a:p>
+          <a:p>
+            <a:pPr lvl="0" indent="0" marL="0">
+              <a:buNone/>
+            </a:pPr>
+            <a:r>
+              <a:rPr/>
+              <a:t>A thousand false alarms among a hundred thousand healthy drives is a false positive rate of 0.01 - invisible on the ROC axis, a rounding error. The same thousand false alarms, set against the alarms actually raised, may be most of them.</a:t>
+            </a:r>
+          </a:p>
+          <a:p>
+            <a:pPr lvl="0" indent="0" marL="0">
+              <a:buNone/>
+            </a:pPr>
+          </a:p>
+          <a:p>
+            <a:pPr lvl="0" indent="0" marL="0">
+              <a:buNone/>
+            </a:pPr>
+            <a:r>
+              <a:rPr/>
+              <a:t>So ROC is measuring the false alarms against a population nobody experiences. The technician does not see the 99,000 drives left alone; they see the alarm queue.</a:t>
+            </a:r>
+          </a:p>
+          <a:p>
+            <a:pPr lvl="0" indent="0" marL="0">
+              <a:buNone/>
+            </a:pPr>
+          </a:p>
+          <a:p>
+            <a:pPr lvl="0" indent="0" marL="0">
+              <a:buNone/>
+            </a:pPr>
+            <a:r>
+              <a:rPr/>
+              <a:t>This is the lesson’s second big predictable mistake, after trusting accuracy on slide 30, and again defend the instinct: AUC is threshold-free, comparable across models and datasets, bounded in a familiar range. Those are real virtues. It simply answers a question about ranking when the question was about the alarm queue.</a:t>
             </a:r>
           </a:p>
         </p:txBody>
@@ -5769,63 +5800,21 @@
             </a:pPr>
             <a:r>
               <a:rPr/>
-              <a:t>Derive it in one line on the board, because it is two steps and it lands: flag the drive if the expected cost of flagging is lower than the expected cost of not. Flagging costs C-FP if the drive was healthy, which happens with probability 1 minus p. Leaving it costs C-FN if it fails, probability p. Set one below the other and solve.</a:t>
-            </a:r>
-          </a:p>
-          <a:p>
-            <a:pPr lvl="0" indent="0" marL="0">
-              <a:buNone/>
-            </a:pPr>
-          </a:p>
-          <a:p>
-            <a:pPr lvl="0" indent="0" marL="0">
-              <a:buNone/>
-            </a:pPr>
-            <a:r>
-              <a:rPr/>
-              <a:t>Then read the formula rather than the number, which is the part worth remembering: the optimal threshold does not depend on the model, the dataset, or the class balance. Only on the RATIO of the two costs.</a:t>
-            </a:r>
-          </a:p>
-          <a:p>
-            <a:pPr lvl="0" indent="0" marL="0">
-              <a:buNone/>
-            </a:pPr>
-          </a:p>
-          <a:p>
-            <a:pPr lvl="0" indent="0" marL="0">
-              <a:buNone/>
-            </a:pPr>
-            <a:r>
-              <a:rPr/>
-              <a:t>State the condition, because the derivation used it: p must be an honest probability - among drives given 0.05, about 5% really fail. That property is called calibration (slide 44). Divide every probability by ten, as slide 44 did, and the formula would still say 0.051 while flagging far too few drives.</a:t>
-            </a:r>
-          </a:p>
-          <a:p>
-            <a:pPr lvl="0" indent="0" marL="0">
-              <a:buNone/>
-            </a:pPr>
-          </a:p>
-          <a:p>
-            <a:pPr lvl="0" indent="0" marL="0">
-              <a:buNone/>
-            </a:pPr>
-            <a:r>
-              <a:rPr/>
-              <a:t>If the errors cost the same, t-star is 0.5 and the default was right all along. As misses grow more expensive, it falls towards zero.</a:t>
-            </a:r>
-          </a:p>
-          <a:p>
-            <a:pPr lvl="0" indent="0" marL="0">
-              <a:buNone/>
-            </a:pPr>
-          </a:p>
-          <a:p>
-            <a:pPr lvl="0" indent="0" marL="0">
-              <a:buNone/>
-            </a:pPr>
-            <a:r>
-              <a:rPr/>
-              <a:t>Empirically we found 0.08 against a theoretical 0.051, and the curve is flat between them. Two likely reasons for the gap: the test set holds only 76 failures, and the probabilities are good but not perfectly calibrated.</a:t>
+              <a:t>Short and quotable, and this is the thing to have on the board when they write their exercise reports.</a:t>
+            </a:r>
+          </a:p>
+          <a:p>
+            <a:pPr lvl="0" indent="0" marL="0">
+              <a:buNone/>
+            </a:pPr>
+          </a:p>
+          <a:p>
+            <a:pPr lvl="0" indent="0" marL="0">
+              <a:buNone/>
+            </a:pPr>
+            <a:r>
+              <a:rPr/>
+              <a:t>If someone asks which single number to use when a single number is demanded: average precision, because its baseline moves with the problem. But push back on the premise - the reason to demand a single number is usually to avoid thinking, and this lesson is about the thinking.</a:t>
             </a:r>
           </a:p>
         </p:txBody>
@@ -5907,49 +5896,49 @@
             </a:pPr>
             <a:r>
               <a:rPr/>
-              <a:t>Say this out loud rather than leaving it in the handout, because it is the same mistake you may have named at the start of today’s lesson, in the discussion of exercise 3.</a:t>
-            </a:r>
-          </a:p>
-          <a:p>
-            <a:pPr lvl="0" indent="0" marL="0">
-              <a:buNone/>
-            </a:pPr>
-          </a:p>
-          <a:p>
-            <a:pPr lvl="0" indent="0" marL="0">
-              <a:buNone/>
-            </a:pPr>
-            <a:r>
-              <a:rPr/>
-              <a:t>The threshold is a parameter. Choosing it by looking at the test set means the test set has influenced the model, and the number it then reports is optimistic.</a:t>
-            </a:r>
-          </a:p>
-          <a:p>
-            <a:pPr lvl="0" indent="0" marL="0">
-              <a:buNone/>
-            </a:pPr>
-          </a:p>
-          <a:p>
-            <a:pPr lvl="0" indent="0" marL="0">
-              <a:buNone/>
-            </a:pPr>
-            <a:r>
-              <a:rPr/>
-              <a:t>Done properly: choose the threshold on a validation set, then measure once on test. Lesson 5 builds exactly that machinery, and this is the concrete reason it is needed - not a hygiene rule, a thing that changes the number you report.</a:t>
-            </a:r>
-          </a:p>
-          <a:p>
-            <a:pPr lvl="0" indent="0" marL="0">
-              <a:buNone/>
-            </a:pPr>
-          </a:p>
-          <a:p>
-            <a:pPr lvl="0" indent="0" marL="0">
-              <a:buNone/>
-            </a:pPr>
-            <a:r>
-              <a:rPr/>
-              <a:t>Until then, treat the 0.08 as a demonstration of a method, not a result anyone could publish.</a:t>
+              <a:t>Finally, the honest way to pick a threshold. It needs one ingredient no metric can supply: what the errors cost. We wrote those down on slide 33 - €140 for a needless replacement, €2,600 for a drive that dies in service.</a:t>
+            </a:r>
+          </a:p>
+          <a:p>
+            <a:pPr lvl="0" indent="0" marL="0">
+              <a:buNone/>
+            </a:pPr>
+          </a:p>
+          <a:p>
+            <a:pPr lvl="0" indent="0" marL="0">
+              <a:buNone/>
+            </a:pPr>
+            <a:r>
+              <a:rPr/>
+              <a:t>The curve is the total cost on the test set as the threshold moves. The default 0.5 costs €87,620. The cheapest, at 0.08, costs €45,540.</a:t>
+            </a:r>
+          </a:p>
+          <a:p>
+            <a:pPr lvl="0" indent="0" marL="0">
+              <a:buNone/>
+            </a:pPr>
+          </a:p>
+          <a:p>
+            <a:pPr lvl="0" indent="0" marL="0">
+              <a:buNone/>
+            </a:pPr>
+            <a:r>
+              <a:rPr/>
+              <a:t>Choosing the threshold on purpose HALVED the cost of the same model: 45,540 divided by 87,620 is 0.52. No retraining, no new features, no better algorithm. One number, taken from the economics instead of from the library default.</a:t>
+            </a:r>
+          </a:p>
+          <a:p>
+            <a:pPr lvl="0" indent="0" marL="0">
+              <a:buNone/>
+            </a:pPr>
+          </a:p>
+          <a:p>
+            <a:pPr lvl="0" indent="0" marL="0">
+              <a:buNone/>
+            </a:pPr>
+            <a:r>
+              <a:rPr/>
+              <a:t>Note the flatness around the minimum, and say why it is good news: the exact threshold does not have to be right. Which is fortunate, because cost estimates never are.</a:t>
             </a:r>
           </a:p>
         </p:txBody>
@@ -6059,7 +6048,7 @@
             </a:pPr>
             <a:r>
               <a:rPr/>
-              <a:t>Somebody will say “healthy, every time”. Agree, and move on. Do not explain the consequence yet - it lands far harder on slide 29, after the break, when they see 96.2% printed as a model’s accuracy score.</a:t>
+              <a:t>Somebody will say “healthy, every time”. Agree, and move on. Do not explain the consequence yet - it lands far harder on slide 30, after the break, when they see 96.2% printed as a model’s accuracy score.</a:t>
             </a:r>
           </a:p>
         </p:txBody>
@@ -6141,77 +6130,63 @@
             </a:pPr>
             <a:r>
               <a:rPr/>
-              <a:t>class_weight=“balanced” makes each failed drive count, in the cost, as much as about 25 healthy ones - the ratio of healthy to failed drives in the training set, (6,000 - 230) divided by 230 = 25. It changes the training rather than the decision.</a:t>
-            </a:r>
-          </a:p>
-          <a:p>
-            <a:pPr lvl="0" indent="0" marL="0">
-              <a:buNone/>
-            </a:pPr>
-          </a:p>
-          <a:p>
-            <a:pPr lvl="0" indent="0" marL="0">
-              <a:buNone/>
-            </a:pPr>
-            <a:r>
-              <a:rPr/>
-              <a:t>The figure is notebook 3’s comparison drawn as bills, one bar per model. Rust is the cost of the missed failures, FN times 2,600 euros; gold is the cost of the false alarms, FP times 140 euros. The default model misses 33 failures: 33 times 2,600 plus 13 times 140 is 87,620. The threshold at 0.08 misses 11 and raises 121 false alarms: 45,540. Balanced weights miss 8 and raise 205: 8 times 2,600 plus 205 times 140 is 49,500.</a:t>
-            </a:r>
-          </a:p>
-          <a:p>
-            <a:pPr lvl="0" indent="0" marL="0">
-              <a:buNone/>
-            </a:pPr>
-          </a:p>
-          <a:p>
-            <a:pPr lvl="0" indent="0" marL="0">
-              <a:buNone/>
-            </a:pPr>
-            <a:r>
-              <a:rPr/>
-              <a:t>Point at the AUC under each name: 0.949 against 0.950. Reweighting taught the model essentially nothing new about disk failure. What it did was move where the model puts its 0.5 line - the same lever as the threshold, pulled at a different moment.</a:t>
-            </a:r>
-          </a:p>
-          <a:p>
-            <a:pPr lvl="0" indent="0" marL="0">
-              <a:buNone/>
-            </a:pPr>
-          </a:p>
-          <a:p>
-            <a:pPr lvl="0" indent="0" marL="0">
-              <a:buNone/>
-            </a:pPr>
-            <a:r>
-              <a:rPr/>
-              <a:t>That matters because class weighting is usually presented as a REMEDY for imbalance. It is not a remedy; it is another way of setting the same decision. The remedy, where one exists, is more positive examples.</a:t>
-            </a:r>
-          </a:p>
-          <a:p>
-            <a:pPr lvl="0" indent="0" marL="0">
-              <a:buNone/>
-            </a:pPr>
-          </a:p>
-          <a:p>
-            <a:pPr lvl="0" indent="0" marL="0">
-              <a:buNone/>
-            </a:pPr>
-            <a:r>
-              <a:rPr/>
-              <a:t>Where it earns its place: when a downstream tool insists on predict() and gives you no threshold to move. Then this is how you shift the operating point.</a:t>
-            </a:r>
-          </a:p>
-          <a:p>
-            <a:pPr lvl="0" indent="0" marL="0">
-              <a:buNone/>
-            </a:pPr>
-          </a:p>
-          <a:p>
-            <a:pPr lvl="0" indent="0" marL="0">
-              <a:buNone/>
-            </a:pPr>
-            <a:r>
-              <a:rPr/>
-              <a:t>The same reading holds for resampling and for SMOTE (synthetic minority oversampling technique, which builds artificial minority examples): they move the operating point too. And both must be applied to the training rows only - inside each cross-validation fold, once lesson 5 introduces folds. Duplicated or synthetic failures in the test set would be scored as if they were real drives, and the test score would stop describing the real fleet; lesson 2 made the same argument for fitting the imputer on the training rows only.</a:t>
+              <a:t>Derive it in one line on the board, because it is two steps and it lands: flag the drive if the expected cost of flagging is lower than the expected cost of not. Flagging costs C-FP if the drive was healthy, which happens with probability 1 minus p. Leaving it costs C-FN if it fails, probability p. Set one below the other and solve.</a:t>
+            </a:r>
+          </a:p>
+          <a:p>
+            <a:pPr lvl="0" indent="0" marL="0">
+              <a:buNone/>
+            </a:pPr>
+          </a:p>
+          <a:p>
+            <a:pPr lvl="0" indent="0" marL="0">
+              <a:buNone/>
+            </a:pPr>
+            <a:r>
+              <a:rPr/>
+              <a:t>Then read the formula rather than the number, which is the part worth remembering: the optimal threshold does not depend on the model, the dataset, or the class balance. Only on the RATIO of the two costs.</a:t>
+            </a:r>
+          </a:p>
+          <a:p>
+            <a:pPr lvl="0" indent="0" marL="0">
+              <a:buNone/>
+            </a:pPr>
+          </a:p>
+          <a:p>
+            <a:pPr lvl="0" indent="0" marL="0">
+              <a:buNone/>
+            </a:pPr>
+            <a:r>
+              <a:rPr/>
+              <a:t>State the condition, because the derivation used it: p must be an honest probability - among drives given 0.05, about 5% really fail. That property is called calibration (slide 46). Divide every probability by ten, as slide 46 did, and the formula would still say 0.051 while flagging far too few drives.</a:t>
+            </a:r>
+          </a:p>
+          <a:p>
+            <a:pPr lvl="0" indent="0" marL="0">
+              <a:buNone/>
+            </a:pPr>
+          </a:p>
+          <a:p>
+            <a:pPr lvl="0" indent="0" marL="0">
+              <a:buNone/>
+            </a:pPr>
+            <a:r>
+              <a:rPr/>
+              <a:t>If the errors cost the same, t-star is 0.5 and the default was right all along. As misses grow more expensive, it falls towards zero.</a:t>
+            </a:r>
+          </a:p>
+          <a:p>
+            <a:pPr lvl="0" indent="0" marL="0">
+              <a:buNone/>
+            </a:pPr>
+          </a:p>
+          <a:p>
+            <a:pPr lvl="0" indent="0" marL="0">
+              <a:buNone/>
+            </a:pPr>
+            <a:r>
+              <a:rPr/>
+              <a:t>Empirically we found 0.08 against a theoretical 0.051, and the curve is flat between them. Two likely reasons for the gap: the test set holds only 76 failures, and the probabilities are good but not perfectly calibrated.</a:t>
             </a:r>
           </a:p>
         </p:txBody>
@@ -6293,21 +6268,49 @@
             </a:pPr>
             <a:r>
               <a:rPr/>
-              <a:t>The ROC curve by hand, the 200,000-pair experiment, the cost curve, then the multiclass matrix. Run notebook 03. Fifteen minutes, and the two multiclass slides that follow (53 and 54) are shown when the notebook reaches its last section, so they run alongside it rather than after it.</a:t>
-            </a:r>
-          </a:p>
-          <a:p>
-            <a:pPr lvl="0" indent="0" marL="0">
-              <a:buNone/>
-            </a:pPr>
-          </a:p>
-          <a:p>
-            <a:pPr lvl="0" indent="0" marL="0">
-              <a:buNone/>
-            </a:pPr>
-            <a:r>
-              <a:rPr/>
-              <a:t>If time is short, keep the pairs experiment: it turns a definition they would otherwise memorise into something they watched happen.</a:t>
+              <a:t>The closed form of the previous slide, drawn. The horizontal axis is one drive’s probability of failing, p; the vertical axis is the expected cost of each decision for that drive.</a:t>
+            </a:r>
+          </a:p>
+          <a:p>
+            <a:pPr lvl="0" indent="0" marL="0">
+              <a:buNone/>
+            </a:pPr>
+          </a:p>
+          <a:p>
+            <a:pPr lvl="0" indent="0" marL="0">
+              <a:buNone/>
+            </a:pPr>
+            <a:r>
+              <a:rPr/>
+              <a:t>Teal: flag it. We pay 140 euros for the replacement only if the drive was healthy, which happens with probability 1 minus p, so the expected cost is (1 - p) times 140 - nearly flat, because 140 is small. Rust: leave it. We pay 2,600 euros only if it fails, probability p, so the expected cost is p times 2,600 - steep.</a:t>
+            </a:r>
+          </a:p>
+          <a:p>
+            <a:pPr lvl="0" indent="0" marL="0">
+              <a:buNone/>
+            </a:pPr>
+          </a:p>
+          <a:p>
+            <a:pPr lvl="0" indent="0" marL="0">
+              <a:buNone/>
+            </a:pPr>
+            <a:r>
+              <a:rPr/>
+              <a:t>Where the lines cross the two decisions cost the same: (1 - p) times 140 = p times 2,600, which gives p = 140 divided by (140 + 2,600) = 0.051, the t-star of slide 51. Left of the crossing, leaving the drive is cheaper; right of it, flagging is. So the rule is: flag every drive whose probability is above 0.051.</a:t>
+            </a:r>
+          </a:p>
+          <a:p>
+            <a:pPr lvl="0" indent="0" marL="0">
+              <a:buNone/>
+            </a:pPr>
+          </a:p>
+          <a:p>
+            <a:pPr lvl="0" indent="0" marL="0">
+              <a:buNone/>
+            </a:pPr>
+            <a:r>
+              <a:rPr/>
+              <a:t>Then ask the room what happens to the crossing if a failure cost 140 euros as well: both lines would have the same slope in opposite directions, and they would cross at 0.5 - the default threshold, right only when the costs are equal. Handout section 7.2.</a:t>
             </a:r>
           </a:p>
         </p:txBody>
@@ -6389,49 +6392,49 @@
             </a:pPr>
             <a:r>
               <a:rPr/>
-              <a:t>Real fleets are not healthy-or-dead. A drive can be degraded: readable, but reporting errors, and worth replacing at the next maintenance window rather than at three in the morning.</a:t>
-            </a:r>
-          </a:p>
-          <a:p>
-            <a:pPr lvl="0" indent="0" marL="0">
-              <a:buNone/>
-            </a:pPr>
-          </a:p>
-          <a:p>
-            <a:pPr lvl="0" indent="0" marL="0">
-              <a:buNone/>
-            </a:pPr>
-            <a:r>
-              <a:rPr/>
-              <a:t>For K classes the model produces one score per class and turns them into K probabilities that add up to 1 - the softmax, which for two classes reduces exactly to the sigmoid. The cost generalises to categorical cross-entropy, and it is the same idea: the negative log of the probability assigned to what actually happened. Handout section 10.</a:t>
-            </a:r>
-          </a:p>
-          <a:p>
-            <a:pPr lvl="0" indent="0" marL="0">
-              <a:buNone/>
-            </a:pPr>
-          </a:p>
-          <a:p>
-            <a:pPr lvl="0" indent="0" marL="0">
-              <a:buNone/>
-            </a:pPr>
-            <a:r>
-              <a:rPr/>
-              <a:t>Read the off-diagonal cells rather than the accuracy. Degraded is the hard class, and understandably - it sits between two neighbours that both look like it from a distance.</a:t>
-            </a:r>
-          </a:p>
-          <a:p>
-            <a:pPr lvl="0" indent="0" marL="0">
-              <a:buNone/>
-            </a:pPr>
-          </a:p>
-          <a:p>
-            <a:pPr lvl="0" indent="0" marL="0">
-              <a:buNone/>
-            </a:pPr>
-            <a:r>
-              <a:rPr/>
-              <a:t>Precision and recall are computed one class at a time: each class in turn is the positive one, the rest are negative.</a:t>
+              <a:t>Say this out loud rather than leaving it in the handout, because it is the same mistake you may have named at the start of today’s lesson, in the discussion of exercise 3.</a:t>
+            </a:r>
+          </a:p>
+          <a:p>
+            <a:pPr lvl="0" indent="0" marL="0">
+              <a:buNone/>
+            </a:pPr>
+          </a:p>
+          <a:p>
+            <a:pPr lvl="0" indent="0" marL="0">
+              <a:buNone/>
+            </a:pPr>
+            <a:r>
+              <a:rPr/>
+              <a:t>The threshold is a parameter. Choosing it by looking at the test set means the test set has influenced the model, and the number it then reports is optimistic.</a:t>
+            </a:r>
+          </a:p>
+          <a:p>
+            <a:pPr lvl="0" indent="0" marL="0">
+              <a:buNone/>
+            </a:pPr>
+          </a:p>
+          <a:p>
+            <a:pPr lvl="0" indent="0" marL="0">
+              <a:buNone/>
+            </a:pPr>
+            <a:r>
+              <a:rPr/>
+              <a:t>Done properly: choose the threshold on a validation set, then measure once on test. Lesson 5 builds exactly that machinery, and this is the concrete reason it is needed - not a hygiene rule, a thing that changes the number you report.</a:t>
+            </a:r>
+          </a:p>
+          <a:p>
+            <a:pPr lvl="0" indent="0" marL="0">
+              <a:buNone/>
+            </a:pPr>
+          </a:p>
+          <a:p>
+            <a:pPr lvl="0" indent="0" marL="0">
+              <a:buNone/>
+            </a:pPr>
+            <a:r>
+              <a:rPr/>
+              <a:t>Until then, treat the 0.08 as a demonstration of a method, not a result anyone could publish.</a:t>
             </a:r>
           </a:p>
         </p:txBody>
@@ -6513,35 +6516,77 @@
             </a:pPr>
             <a:r>
               <a:rPr/>
-              <a:t>The same choice as before, now with a much starker gap on three classes. Notebook 3, the three-class model: one bar per class, its F1 from classification_report, and the two averages as lines.</a:t>
-            </a:r>
-          </a:p>
-          <a:p>
-            <a:pPr lvl="0" indent="0" marL="0">
-              <a:buNone/>
-            </a:pPr>
-          </a:p>
-          <a:p>
-            <a:pPr lvl="0" indent="0" marL="0">
-              <a:buNone/>
-            </a:pPr>
-            <a:r>
-              <a:rPr/>
-              <a:t>Macro treats the three conditions as equally important: (0.947 + 0.545 + 0.629) divided by 3 = 0.707, the dotted line. Weighted multiplies each class by its number of test drives: (1,665 times 0.947 + 259 times 0.545 + 76 times 0.629) divided by 2,000 = 0.883, the dashed line. The healthy class - 1,665 of 2,000, five drives in six - does most of the talking, so the dashed line sits close to the healthy bar.</a:t>
-            </a:r>
-          </a:p>
-          <a:p>
-            <a:pPr lvl="0" indent="0" marL="0">
-              <a:buNone/>
-            </a:pPr>
-          </a:p>
-          <a:p>
-            <a:pPr lvl="0" indent="0" marL="0">
-              <a:buNone/>
-            </a:pPr>
-            <a:r>
-              <a:rPr/>
-              <a:t>Which to quote is a question about the application, not about statistics. If missing a failure matters as much as missing a healthy drive, macro is the honest one. Say which you used, always.</a:t>
+              <a:t>class_weight=“balanced” makes each failed drive count, in the cost, as much as about 25 healthy ones - the ratio of healthy to failed drives in the training set, (6,000 - 230) divided by 230 = 25. It changes the training rather than the decision.</a:t>
+            </a:r>
+          </a:p>
+          <a:p>
+            <a:pPr lvl="0" indent="0" marL="0">
+              <a:buNone/>
+            </a:pPr>
+          </a:p>
+          <a:p>
+            <a:pPr lvl="0" indent="0" marL="0">
+              <a:buNone/>
+            </a:pPr>
+            <a:r>
+              <a:rPr/>
+              <a:t>The figure is notebook 3’s comparison drawn as bills, one bar per model. Rust is the cost of the missed failures, FN times 2,600 euros; gold is the cost of the false alarms, FP times 140 euros. The default model misses 33 failures: 33 times 2,600 plus 13 times 140 is 87,620. The threshold at 0.08 misses 11 and raises 121 false alarms: 45,540. Balanced weights miss 8 and raise 205: 8 times 2,600 plus 205 times 140 is 49,500.</a:t>
+            </a:r>
+          </a:p>
+          <a:p>
+            <a:pPr lvl="0" indent="0" marL="0">
+              <a:buNone/>
+            </a:pPr>
+          </a:p>
+          <a:p>
+            <a:pPr lvl="0" indent="0" marL="0">
+              <a:buNone/>
+            </a:pPr>
+            <a:r>
+              <a:rPr/>
+              <a:t>Point at the AUC under each name: 0.949 against 0.950. Reweighting taught the model essentially nothing new about disk failure. What it did was move where the model puts its 0.5 line - the same lever as the threshold, pulled at a different moment.</a:t>
+            </a:r>
+          </a:p>
+          <a:p>
+            <a:pPr lvl="0" indent="0" marL="0">
+              <a:buNone/>
+            </a:pPr>
+          </a:p>
+          <a:p>
+            <a:pPr lvl="0" indent="0" marL="0">
+              <a:buNone/>
+            </a:pPr>
+            <a:r>
+              <a:rPr/>
+              <a:t>That matters because class weighting is usually presented as a REMEDY for imbalance. It is not a remedy; it is another way of setting the same decision. The remedy, where one exists, is more positive examples.</a:t>
+            </a:r>
+          </a:p>
+          <a:p>
+            <a:pPr lvl="0" indent="0" marL="0">
+              <a:buNone/>
+            </a:pPr>
+          </a:p>
+          <a:p>
+            <a:pPr lvl="0" indent="0" marL="0">
+              <a:buNone/>
+            </a:pPr>
+            <a:r>
+              <a:rPr/>
+              <a:t>Where it earns its place: when a downstream tool insists on predict() and gives you no threshold to move. Then this is how you shift the operating point.</a:t>
+            </a:r>
+          </a:p>
+          <a:p>
+            <a:pPr lvl="0" indent="0" marL="0">
+              <a:buNone/>
+            </a:pPr>
+          </a:p>
+          <a:p>
+            <a:pPr lvl="0" indent="0" marL="0">
+              <a:buNone/>
+            </a:pPr>
+            <a:r>
+              <a:rPr/>
+              <a:t>The same reading holds for resampling and for SMOTE (synthetic minority oversampling technique, which builds artificial minority examples): they move the operating point too. And both must be applied to the training rows only - inside each cross-validation fold, once lesson 5 introduces folds. Duplicated or synthetic failures in the test set would be scored as if they were real drives, and the test score would stop describing the real fleet; lesson 2 made the same argument for fitting the imputer on the training rows only.</a:t>
             </a:r>
           </a:p>
         </p:txBody>
@@ -6623,35 +6668,21 @@
             </a:pPr>
             <a:r>
               <a:rPr/>
-              <a:t>Close on the number they started with. 306 failures out of 8,000; 96.2% accuracy for a model that does nothing.</a:t>
-            </a:r>
-          </a:p>
-          <a:p>
-            <a:pPr lvl="0" indent="0" marL="0">
-              <a:buNone/>
-            </a:pPr>
-          </a:p>
-          <a:p>
-            <a:pPr lvl="0" indent="0" marL="0">
-              <a:buNone/>
-            </a:pPr>
-            <a:r>
-              <a:rPr/>
-              <a:t>If they remember one thing from today, it should be the reflex to ask “what’s the base rate?” before believing any accuracy figure. That reflex is worth more than any of the formulas.</a:t>
-            </a:r>
-          </a:p>
-          <a:p>
-            <a:pPr lvl="0" indent="0" marL="0">
-              <a:buNone/>
-            </a:pPr>
-          </a:p>
-          <a:p>
-            <a:pPr lvl="0" indent="0" marL="0">
-              <a:buNone/>
-            </a:pPr>
-            <a:r>
-              <a:rPr/>
-              <a:t>The second thing: accuracy, precision, recall and F1 all depended on a threshold, and the threshold has an answer - C-FP over C-FP plus C-FN, for honest probabilities - that comes from the business, not from the data.</a:t>
+              <a:t>The ROC curve by hand, the 200,000-pair experiment, the cost curve, then the multiclass matrix. Run notebook 03. Fifteen minutes, and the two multiclass slides that follow (56 and 57) are shown when the notebook reaches its last section, so they run alongside it rather than after it.</a:t>
+            </a:r>
+          </a:p>
+          <a:p>
+            <a:pPr lvl="0" indent="0" marL="0">
+              <a:buNone/>
+            </a:pPr>
+          </a:p>
+          <a:p>
+            <a:pPr lvl="0" indent="0" marL="0">
+              <a:buNone/>
+            </a:pPr>
+            <a:r>
+              <a:rPr/>
+              <a:t>If time is short, keep the pairs experiment: it turns a definition they would otherwise memorise into something they watched happen.</a:t>
             </a:r>
           </a:p>
         </p:txBody>
@@ -6733,49 +6764,49 @@
             </a:pPr>
             <a:r>
               <a:rPr/>
-              <a:t>Set it explicitly and say out loud when it comes back: the first ten minutes of next Friday, 6 November.</a:t>
-            </a:r>
-          </a:p>
-          <a:p>
-            <a:pPr lvl="0" indent="0" marL="0">
-              <a:buNone/>
-            </a:pPr>
-          </a:p>
-          <a:p>
-            <a:pPr lvl="0" indent="0" marL="0">
-              <a:buNone/>
-            </a:pPr>
-            <a:r>
-              <a:rPr/>
-              <a:t>Emphasise which part matters at the exam, where one of the ten exercises is drawn and they talk through their own notebook. The classifier is a few lines and everyone will get it. The paragraph defending the threshold choice is where the learning is, and it is what they will be asked to defend.</a:t>
-            </a:r>
-          </a:p>
-          <a:p>
-            <a:pPr lvl="0" indent="0" marL="0">
-              <a:buNone/>
-            </a:pPr>
-          </a:p>
-          <a:p>
-            <a:pPr lvl="0" indent="0" marL="0">
-              <a:buNone/>
-            </a:pPr>
-            <a:r>
-              <a:rPr/>
-              <a:t>Warn them about the trap deliberately planted: the dataset has a decoy column, as this one did, and the exercise asks them to report AUC and average precision together. Anyone reporting AUC alone will be reporting a number that looks better than the model is.</a:t>
-            </a:r>
-          </a:p>
-          <a:p>
-            <a:pPr lvl="0" indent="0" marL="0">
-              <a:buNone/>
-            </a:pPr>
-          </a:p>
-          <a:p>
-            <a:pPr lvl="0" indent="0" marL="0">
-              <a:buNone/>
-            </a:pPr>
-            <a:r>
-              <a:rPr/>
-              <a:t>Next week: experimental methodology. Cross-validation, bias-variance, and the honest way to make every choice we made by hand today.</a:t>
+              <a:t>Real fleets are not healthy-or-dead. A drive can be degraded: readable, but reporting errors, and worth replacing at the next maintenance window rather than at three in the morning.</a:t>
+            </a:r>
+          </a:p>
+          <a:p>
+            <a:pPr lvl="0" indent="0" marL="0">
+              <a:buNone/>
+            </a:pPr>
+          </a:p>
+          <a:p>
+            <a:pPr lvl="0" indent="0" marL="0">
+              <a:buNone/>
+            </a:pPr>
+            <a:r>
+              <a:rPr/>
+              <a:t>For K classes the model produces one score per class and turns them into K probabilities that add up to 1 - the softmax, which for two classes reduces exactly to the sigmoid. The cost generalises to categorical cross-entropy, and it is the same idea: the negative log of the probability assigned to what actually happened. Handout section 10.</a:t>
+            </a:r>
+          </a:p>
+          <a:p>
+            <a:pPr lvl="0" indent="0" marL="0">
+              <a:buNone/>
+            </a:pPr>
+          </a:p>
+          <a:p>
+            <a:pPr lvl="0" indent="0" marL="0">
+              <a:buNone/>
+            </a:pPr>
+            <a:r>
+              <a:rPr/>
+              <a:t>Read the off-diagonal cells rather than the accuracy. Degraded is the hard class, and understandably - it sits between two neighbours that both look like it from a distance.</a:t>
+            </a:r>
+          </a:p>
+          <a:p>
+            <a:pPr lvl="0" indent="0" marL="0">
+              <a:buNone/>
+            </a:pPr>
+          </a:p>
+          <a:p>
+            <a:pPr lvl="0" indent="0" marL="0">
+              <a:buNone/>
+            </a:pPr>
+            <a:r>
+              <a:rPr/>
+              <a:t>Precision and recall are computed one class at a time: each class in turn is the positive one, the rest are negative.</a:t>
             </a:r>
           </a:p>
         </p:txBody>
@@ -6798,6 +6829,350 @@
             <a:fld id="{18BDFEC3-8487-43E8-A154-7C12CBC1FFF2}" type="slidenum">
               <a:rPr lang="en-US"/>
               <a:t>56</a:t>
+            </a:fld>
+            <a:endParaRPr lang="en-US"/>
+          </a:p>
+        </p:txBody>
+      </p:sp>
+    </p:spTree>
+  </p:cSld>
+</p:notes>
+</file>
+
+<file path=ppt/notesSlides/notesSlide56.xml><?xml version="1.0" encoding="utf-8"?>
+<p:notes xmlns:a="http://schemas.openxmlformats.org/drawingml/2006/main" xmlns:r="http://schemas.openxmlformats.org/officeDocument/2006/relationships" xmlns:p="http://schemas.openxmlformats.org/presentationml/2006/main">
+  <p:cSld>
+    <p:spTree>
+      <p:nvGrpSpPr>
+        <p:cNvPr id="1" name=""/>
+        <p:cNvGrpSpPr/>
+        <p:nvPr/>
+      </p:nvGrpSpPr>
+      <p:grpSpPr>
+        <a:xfrm>
+          <a:off x="0" y="0"/>
+          <a:ext cx="0" cy="0"/>
+          <a:chOff x="0" y="0"/>
+          <a:chExt cx="0" cy="0"/>
+        </a:xfrm>
+      </p:grpSpPr>
+      <p:sp>
+        <p:nvSpPr>
+          <p:cNvPr id="2" name="Slide Image Placeholder 1"/>
+          <p:cNvSpPr>
+            <a:spLocks noGrp="1" noRot="1" noChangeAspect="1"/>
+          </p:cNvSpPr>
+          <p:nvPr>
+            <p:ph type="sldImg"/>
+          </p:nvPr>
+        </p:nvSpPr>
+        <p:spPr/>
+      </p:sp>
+      <p:sp>
+        <p:nvSpPr>
+          <p:cNvPr id="3" name="Notes Placeholder 2"/>
+          <p:cNvSpPr>
+            <a:spLocks noGrp="1"/>
+          </p:cNvSpPr>
+          <p:nvPr>
+            <p:ph type="body" idx="1"/>
+          </p:nvPr>
+        </p:nvSpPr>
+        <p:spPr/>
+        <p:txBody>
+          <a:bodyPr/>
+          <a:lstStyle/>
+          <a:p>
+            <a:pPr lvl="0" indent="0" marL="0">
+              <a:buNone/>
+            </a:pPr>
+            <a:r>
+              <a:rPr/>
+              <a:t>The same choice as before, now with a much starker gap on three classes. Notebook 3, the three-class model: one bar per class, its F1 from classification_report, and the two averages as lines.</a:t>
+            </a:r>
+          </a:p>
+          <a:p>
+            <a:pPr lvl="0" indent="0" marL="0">
+              <a:buNone/>
+            </a:pPr>
+          </a:p>
+          <a:p>
+            <a:pPr lvl="0" indent="0" marL="0">
+              <a:buNone/>
+            </a:pPr>
+            <a:r>
+              <a:rPr/>
+              <a:t>Macro treats the three conditions as equally important: (0.947 + 0.545 + 0.629) divided by 3 = 0.707, the dotted line. Weighted multiplies each class by its number of test drives: (1,665 times 0.947 + 259 times 0.545 + 76 times 0.629) divided by 2,000 = 0.883, the dashed line. The healthy class - 1,665 of 2,000, five drives in six - does most of the talking, so the dashed line sits close to the healthy bar.</a:t>
+            </a:r>
+          </a:p>
+          <a:p>
+            <a:pPr lvl="0" indent="0" marL="0">
+              <a:buNone/>
+            </a:pPr>
+          </a:p>
+          <a:p>
+            <a:pPr lvl="0" indent="0" marL="0">
+              <a:buNone/>
+            </a:pPr>
+            <a:r>
+              <a:rPr/>
+              <a:t>Which to quote is a question about the application, not about statistics. If missing a failure matters as much as missing a healthy drive, macro is the honest one. Say which you used, always.</a:t>
+            </a:r>
+          </a:p>
+        </p:txBody>
+      </p:sp>
+      <p:sp>
+        <p:nvSpPr>
+          <p:cNvPr id="4" name="Slide Number Placeholder 3"/>
+          <p:cNvSpPr>
+            <a:spLocks noGrp="1"/>
+          </p:cNvSpPr>
+          <p:nvPr>
+            <p:ph type="sldNum" sz="quarter" idx="10"/>
+          </p:nvPr>
+        </p:nvSpPr>
+        <p:spPr/>
+        <p:txBody>
+          <a:bodyPr/>
+          <a:lstStyle/>
+          <a:p>
+            <a:fld id="{18BDFEC3-8487-43E8-A154-7C12CBC1FFF2}" type="slidenum">
+              <a:rPr lang="en-US"/>
+              <a:t>57</a:t>
+            </a:fld>
+            <a:endParaRPr lang="en-US"/>
+          </a:p>
+        </p:txBody>
+      </p:sp>
+    </p:spTree>
+  </p:cSld>
+</p:notes>
+</file>
+
+<file path=ppt/notesSlides/notesSlide57.xml><?xml version="1.0" encoding="utf-8"?>
+<p:notes xmlns:a="http://schemas.openxmlformats.org/drawingml/2006/main" xmlns:r="http://schemas.openxmlformats.org/officeDocument/2006/relationships" xmlns:p="http://schemas.openxmlformats.org/presentationml/2006/main">
+  <p:cSld>
+    <p:spTree>
+      <p:nvGrpSpPr>
+        <p:cNvPr id="1" name=""/>
+        <p:cNvGrpSpPr/>
+        <p:nvPr/>
+      </p:nvGrpSpPr>
+      <p:grpSpPr>
+        <a:xfrm>
+          <a:off x="0" y="0"/>
+          <a:ext cx="0" cy="0"/>
+          <a:chOff x="0" y="0"/>
+          <a:chExt cx="0" cy="0"/>
+        </a:xfrm>
+      </p:grpSpPr>
+      <p:sp>
+        <p:nvSpPr>
+          <p:cNvPr id="2" name="Slide Image Placeholder 1"/>
+          <p:cNvSpPr>
+            <a:spLocks noGrp="1" noRot="1" noChangeAspect="1"/>
+          </p:cNvSpPr>
+          <p:nvPr>
+            <p:ph type="sldImg"/>
+          </p:nvPr>
+        </p:nvSpPr>
+        <p:spPr/>
+      </p:sp>
+      <p:sp>
+        <p:nvSpPr>
+          <p:cNvPr id="3" name="Notes Placeholder 2"/>
+          <p:cNvSpPr>
+            <a:spLocks noGrp="1"/>
+          </p:cNvSpPr>
+          <p:nvPr>
+            <p:ph type="body" idx="1"/>
+          </p:nvPr>
+        </p:nvSpPr>
+        <p:spPr/>
+        <p:txBody>
+          <a:bodyPr/>
+          <a:lstStyle/>
+          <a:p>
+            <a:pPr lvl="0" indent="0" marL="0">
+              <a:buNone/>
+            </a:pPr>
+            <a:r>
+              <a:rPr/>
+              <a:t>Close on the number they started with. 306 failures out of 8,000; 96.2% accuracy for a model that does nothing.</a:t>
+            </a:r>
+          </a:p>
+          <a:p>
+            <a:pPr lvl="0" indent="0" marL="0">
+              <a:buNone/>
+            </a:pPr>
+          </a:p>
+          <a:p>
+            <a:pPr lvl="0" indent="0" marL="0">
+              <a:buNone/>
+            </a:pPr>
+            <a:r>
+              <a:rPr/>
+              <a:t>If they remember one thing from today, it should be the reflex to ask “what’s the base rate?” before believing any accuracy figure. That reflex is worth more than any of the formulas.</a:t>
+            </a:r>
+          </a:p>
+          <a:p>
+            <a:pPr lvl="0" indent="0" marL="0">
+              <a:buNone/>
+            </a:pPr>
+          </a:p>
+          <a:p>
+            <a:pPr lvl="0" indent="0" marL="0">
+              <a:buNone/>
+            </a:pPr>
+            <a:r>
+              <a:rPr/>
+              <a:t>The second thing: accuracy, precision, recall and F1 all depended on a threshold, and the threshold has an answer - C-FP over C-FP plus C-FN, for honest probabilities - that comes from the business, not from the data.</a:t>
+            </a:r>
+          </a:p>
+        </p:txBody>
+      </p:sp>
+      <p:sp>
+        <p:nvSpPr>
+          <p:cNvPr id="4" name="Slide Number Placeholder 3"/>
+          <p:cNvSpPr>
+            <a:spLocks noGrp="1"/>
+          </p:cNvSpPr>
+          <p:nvPr>
+            <p:ph type="sldNum" sz="quarter" idx="10"/>
+          </p:nvPr>
+        </p:nvSpPr>
+        <p:spPr/>
+        <p:txBody>
+          <a:bodyPr/>
+          <a:lstStyle/>
+          <a:p>
+            <a:fld id="{18BDFEC3-8487-43E8-A154-7C12CBC1FFF2}" type="slidenum">
+              <a:rPr lang="en-US"/>
+              <a:t>58</a:t>
+            </a:fld>
+            <a:endParaRPr lang="en-US"/>
+          </a:p>
+        </p:txBody>
+      </p:sp>
+    </p:spTree>
+  </p:cSld>
+</p:notes>
+</file>
+
+<file path=ppt/notesSlides/notesSlide58.xml><?xml version="1.0" encoding="utf-8"?>
+<p:notes xmlns:a="http://schemas.openxmlformats.org/drawingml/2006/main" xmlns:r="http://schemas.openxmlformats.org/officeDocument/2006/relationships" xmlns:p="http://schemas.openxmlformats.org/presentationml/2006/main">
+  <p:cSld>
+    <p:spTree>
+      <p:nvGrpSpPr>
+        <p:cNvPr id="1" name=""/>
+        <p:cNvGrpSpPr/>
+        <p:nvPr/>
+      </p:nvGrpSpPr>
+      <p:grpSpPr>
+        <a:xfrm>
+          <a:off x="0" y="0"/>
+          <a:ext cx="0" cy="0"/>
+          <a:chOff x="0" y="0"/>
+          <a:chExt cx="0" cy="0"/>
+        </a:xfrm>
+      </p:grpSpPr>
+      <p:sp>
+        <p:nvSpPr>
+          <p:cNvPr id="2" name="Slide Image Placeholder 1"/>
+          <p:cNvSpPr>
+            <a:spLocks noGrp="1" noRot="1" noChangeAspect="1"/>
+          </p:cNvSpPr>
+          <p:nvPr>
+            <p:ph type="sldImg"/>
+          </p:nvPr>
+        </p:nvSpPr>
+        <p:spPr/>
+      </p:sp>
+      <p:sp>
+        <p:nvSpPr>
+          <p:cNvPr id="3" name="Notes Placeholder 2"/>
+          <p:cNvSpPr>
+            <a:spLocks noGrp="1"/>
+          </p:cNvSpPr>
+          <p:nvPr>
+            <p:ph type="body" idx="1"/>
+          </p:nvPr>
+        </p:nvSpPr>
+        <p:spPr/>
+        <p:txBody>
+          <a:bodyPr/>
+          <a:lstStyle/>
+          <a:p>
+            <a:pPr lvl="0" indent="0" marL="0">
+              <a:buNone/>
+            </a:pPr>
+            <a:r>
+              <a:rPr/>
+              <a:t>Set it explicitly and say out loud when it comes back: the first ten minutes of next Friday, 6 November.</a:t>
+            </a:r>
+          </a:p>
+          <a:p>
+            <a:pPr lvl="0" indent="0" marL="0">
+              <a:buNone/>
+            </a:pPr>
+          </a:p>
+          <a:p>
+            <a:pPr lvl="0" indent="0" marL="0">
+              <a:buNone/>
+            </a:pPr>
+            <a:r>
+              <a:rPr/>
+              <a:t>Emphasise which part matters at the exam, where one of the ten exercises is drawn and they talk through their own notebook. The classifier is a few lines and everyone will get it. The paragraph defending the threshold choice is where the learning is, and it is what they will be asked to defend.</a:t>
+            </a:r>
+          </a:p>
+          <a:p>
+            <a:pPr lvl="0" indent="0" marL="0">
+              <a:buNone/>
+            </a:pPr>
+          </a:p>
+          <a:p>
+            <a:pPr lvl="0" indent="0" marL="0">
+              <a:buNone/>
+            </a:pPr>
+            <a:r>
+              <a:rPr/>
+              <a:t>Warn them about the trap deliberately planted: the dataset has a decoy column, as this one did, and the exercise asks them to report AUC and average precision together. Anyone reporting AUC alone will be reporting a number that looks better than the model is.</a:t>
+            </a:r>
+          </a:p>
+          <a:p>
+            <a:pPr lvl="0" indent="0" marL="0">
+              <a:buNone/>
+            </a:pPr>
+          </a:p>
+          <a:p>
+            <a:pPr lvl="0" indent="0" marL="0">
+              <a:buNone/>
+            </a:pPr>
+            <a:r>
+              <a:rPr/>
+              <a:t>Next week: experimental methodology. Cross-validation, bias-variance, and the honest way to make every choice we made by hand today.</a:t>
+            </a:r>
+          </a:p>
+        </p:txBody>
+      </p:sp>
+      <p:sp>
+        <p:nvSpPr>
+          <p:cNvPr id="4" name="Slide Number Placeholder 3"/>
+          <p:cNvSpPr>
+            <a:spLocks noGrp="1"/>
+          </p:cNvSpPr>
+          <p:nvPr>
+            <p:ph type="sldNum" sz="quarter" idx="10"/>
+          </p:nvPr>
+        </p:nvSpPr>
+        <p:spPr/>
+        <p:txBody>
+          <a:bodyPr/>
+          <a:lstStyle/>
+          <a:p>
+            <a:fld id="{18BDFEC3-8487-43E8-A154-7C12CBC1FFF2}" type="slidenum">
+              <a:rPr lang="en-US"/>
+              <a:t>59</a:t>
             </a:fld>
             <a:endParaRPr lang="en-US"/>
           </a:p>
@@ -7211,7 +7586,7 @@
             <a:pPr lvl="0"/>
             <a:r>
               <a:rPr/>
-              <a:t>with the cross-entropy cost of slide 22 the gradient comes out as (prediction minus label) times x, and the cost is convex - handout sections 3.4 and 4.3.</a:t>
+              <a:t>with the cross-entropy cost of slide 23 the gradient comes out as (prediction minus label) times x, and the cost is convex - handout sections 3.4 and 4.3.</a:t>
             </a:r>
           </a:p>
           <a:p>
@@ -13475,6 +13850,88 @@
             </a:pPr>
             <a:r>
               <a:rPr/>
+              <a:t>Surprise: minus the log of a probability</a:t>
+            </a:r>
+          </a:p>
+        </p:txBody>
+      </p:sp>
+      <p:pic>
+        <p:nvPicPr>
+          <p:cNvPr descr="surprise_curve.png" id="0" name="Picture 1"/>
+          <p:cNvPicPr>
+            <a:picLocks noGrp="1" noChangeAspect="1"/>
+          </p:cNvPicPr>
+          <p:nvPr/>
+        </p:nvPicPr>
+        <p:blipFill>
+          <a:blip r:embed="rId3"/>
+          <a:stretch>
+            <a:fillRect/>
+          </a:stretch>
+        </p:blipFill>
+        <p:spPr bwMode="auto">
+          <a:xfrm>
+            <a:off x="1148894" y="1166099"/>
+            <a:ext cx="6846211" cy="3360181"/>
+          </a:xfrm>
+          <a:prstGeom prst="rect">
+            <a:avLst/>
+          </a:prstGeom>
+          <a:noFill/>
+          <a:ln w="9525">
+            <a:noFill/>
+            <a:headEnd/>
+            <a:tailEnd/>
+          </a:ln>
+        </p:spPr>
+      </p:pic>
+    </p:spTree>
+  </p:cSld>
+</p:sld>
+</file>
+
+<file path=ppt/slides/slide23.xml><?xml version="1.0" encoding="utf-8"?>
+<p:sld xmlns:a="http://schemas.openxmlformats.org/drawingml/2006/main" xmlns:r="http://schemas.openxmlformats.org/officeDocument/2006/relationships" xmlns:p="http://schemas.openxmlformats.org/presentationml/2006/main">
+  <p:cSld>
+    <p:spTree>
+      <p:nvGrpSpPr>
+        <p:cNvPr id="1" name=""/>
+        <p:cNvGrpSpPr/>
+        <p:nvPr/>
+      </p:nvGrpSpPr>
+      <p:grpSpPr>
+        <a:xfrm>
+          <a:off x="0" y="0"/>
+          <a:ext cx="0" cy="0"/>
+          <a:chOff x="0" y="0"/>
+          <a:chExt cx="0" cy="0"/>
+        </a:xfrm>
+      </p:grpSpPr>
+      <p:sp>
+        <p:nvSpPr>
+          <p:cNvPr id="2" name="Title 1"/>
+          <p:cNvSpPr>
+            <a:spLocks noGrp="1"/>
+          </p:cNvSpPr>
+          <p:nvPr>
+            <p:ph type="title"/>
+          </p:nvPr>
+        </p:nvSpPr>
+        <p:spPr>
+          <a:xfrm>
+            <a:off x="457200" y="205979"/>
+            <a:ext cx="8229600" cy="857250"/>
+          </a:xfrm>
+        </p:spPr>
+        <p:txBody>
+          <a:bodyPr/>
+          <a:lstStyle/>
+          <a:p>
+            <a:pPr lvl="0" indent="0" marL="0">
+              <a:buNone/>
+            </a:pPr>
+            <a:r>
+              <a:rPr/>
               <a:t>Cross-entropy, also called log loss</a:t>
             </a:r>
           </a:p>
@@ -13515,7 +13972,7 @@
 </p:sld>
 </file>
 
-<file path=ppt/slides/slide23.xml><?xml version="1.0" encoding="utf-8"?>
+<file path=ppt/slides/slide24.xml><?xml version="1.0" encoding="utf-8"?>
 <p:sld xmlns:a="http://schemas.openxmlformats.org/drawingml/2006/main" xmlns:r="http://schemas.openxmlformats.org/officeDocument/2006/relationships" xmlns:p="http://schemas.openxmlformats.org/presentationml/2006/main">
   <p:cSld>
     <p:spTree>
@@ -13597,7 +14054,7 @@
 </p:sld>
 </file>
 
-<file path=ppt/slides/slide24.xml><?xml version="1.0" encoding="utf-8"?>
+<file path=ppt/slides/slide25.xml><?xml version="1.0" encoding="utf-8"?>
 <p:sld xmlns:a="http://schemas.openxmlformats.org/drawingml/2006/main" xmlns:r="http://schemas.openxmlformats.org/officeDocument/2006/relationships" xmlns:p="http://schemas.openxmlformats.org/presentationml/2006/main">
   <p:cSld>
     <p:spTree>
@@ -13679,7 +14136,7 @@
 </p:sld>
 </file>
 
-<file path=ppt/slides/slide25.xml><?xml version="1.0" encoding="utf-8"?>
+<file path=ppt/slides/slide26.xml><?xml version="1.0" encoding="utf-8"?>
 <p:sld xmlns:a="http://schemas.openxmlformats.org/drawingml/2006/main" xmlns:r="http://schemas.openxmlformats.org/officeDocument/2006/relationships" xmlns:p="http://schemas.openxmlformats.org/presentationml/2006/main">
   <p:cSld>
     <p:spTree>
@@ -13774,7 +14231,7 @@
 </p:sld>
 </file>
 
-<file path=ppt/slides/slide26.xml><?xml version="1.0" encoding="utf-8"?>
+<file path=ppt/slides/slide27.xml><?xml version="1.0" encoding="utf-8"?>
 <p:sld xmlns:a="http://schemas.openxmlformats.org/drawingml/2006/main" xmlns:r="http://schemas.openxmlformats.org/officeDocument/2006/relationships" xmlns:p="http://schemas.openxmlformats.org/presentationml/2006/main">
   <p:cSld>
     <p:spTree>
@@ -13928,7 +14385,7 @@
                       </a:pPr>
                       <a:r>
                         <a:rPr/>
-                        <a:t>odds, and why not squared error, 8-25</a:t>
+                        <a:t>odds, and why not squared error, 8-26</a:t>
                       </a:r>
                     </a:p>
                   </a:txBody>
@@ -13960,7 +14417,7 @@
                       </a:pPr>
                       <a:r>
                         <a:rPr/>
-                        <a:t>gradient descent, 23</a:t>
+                        <a:t>gradient descent, 24</a:t>
                       </a:r>
                     </a:p>
                   </a:txBody>
@@ -14008,7 +14465,7 @@
                       </a:pPr>
                       <a:r>
                         <a:rPr/>
-                        <a:t>the decision boundary, 27</a:t>
+                        <a:t>the decision boundary, 28</a:t>
                       </a:r>
                     </a:p>
                   </a:txBody>
@@ -14102,7 +14559,7 @@
 </p:sld>
 </file>
 
-<file path=ppt/slides/slide27.xml><?xml version="1.0" encoding="utf-8"?>
+<file path=ppt/slides/slide28.xml><?xml version="1.0" encoding="utf-8"?>
 <p:sld xmlns:a="http://schemas.openxmlformats.org/drawingml/2006/main" xmlns:r="http://schemas.openxmlformats.org/officeDocument/2006/relationships" xmlns:p="http://schemas.openxmlformats.org/presentationml/2006/main">
   <p:cSld>
     <p:spTree>
@@ -14184,7 +14641,7 @@
 </p:sld>
 </file>
 
-<file path=ppt/slides/slide28.xml><?xml version="1.0" encoding="utf-8"?>
+<file path=ppt/slides/slide29.xml><?xml version="1.0" encoding="utf-8"?>
 <p:sld xmlns:a="http://schemas.openxmlformats.org/drawingml/2006/main" xmlns:r="http://schemas.openxmlformats.org/officeDocument/2006/relationships" xmlns:p="http://schemas.openxmlformats.org/presentationml/2006/main">
   <p:cSld>
     <p:spTree>
@@ -14264,7 +14721,115 @@
 </p:sld>
 </file>
 
-<file path=ppt/slides/slide29.xml><?xml version="1.0" encoding="utf-8"?>
+<file path=ppt/slides/slide3.xml><?xml version="1.0" encoding="utf-8"?>
+<p:sld xmlns:a="http://schemas.openxmlformats.org/drawingml/2006/main" xmlns:r="http://schemas.openxmlformats.org/officeDocument/2006/relationships" xmlns:p="http://schemas.openxmlformats.org/presentationml/2006/main">
+  <p:cSld>
+    <p:spTree>
+      <p:nvGrpSpPr>
+        <p:cNvPr id="1" name=""/>
+        <p:cNvGrpSpPr/>
+        <p:nvPr/>
+      </p:nvGrpSpPr>
+      <p:grpSpPr>
+        <a:xfrm>
+          <a:off x="0" y="0"/>
+          <a:ext cx="0" cy="0"/>
+          <a:chOff x="0" y="0"/>
+          <a:chExt cx="0" cy="0"/>
+        </a:xfrm>
+      </p:grpSpPr>
+      <p:sp>
+        <p:nvSpPr>
+          <p:cNvPr id="2" name="Title 1"/>
+          <p:cNvSpPr>
+            <a:spLocks noGrp="1"/>
+          </p:cNvSpPr>
+          <p:nvPr>
+            <p:ph type="title"/>
+          </p:nvPr>
+        </p:nvSpPr>
+        <p:spPr>
+          <a:xfrm>
+            <a:off x="457200" y="205979"/>
+            <a:ext cx="8229600" cy="857250"/>
+          </a:xfrm>
+        </p:spPr>
+        <p:txBody>
+          <a:bodyPr/>
+          <a:lstStyle/>
+          <a:p>
+            <a:pPr lvl="0" indent="0" marL="0">
+              <a:buNone/>
+            </a:pPr>
+            <a:r>
+              <a:rPr/>
+              <a:t>Today: from a number to a decision</a:t>
+            </a:r>
+          </a:p>
+        </p:txBody>
+      </p:sp>
+      <p:sp>
+        <p:nvSpPr>
+          <p:cNvPr id="3" name="Content Placeholder 2"/>
+          <p:cNvSpPr>
+            <a:spLocks noGrp="1"/>
+          </p:cNvSpPr>
+          <p:nvPr>
+            <p:ph idx="1"/>
+          </p:nvPr>
+        </p:nvSpPr>
+        <p:spPr>
+          <a:xfrm>
+            <a:off x="457200" y="1200151"/>
+            <a:ext cx="8229600" cy="3394472"/>
+          </a:xfrm>
+        </p:spPr>
+        <p:txBody>
+          <a:bodyPr/>
+          <a:lstStyle/>
+          <a:p>
+            <a:pPr lvl="0"/>
+            <a:r>
+              <a:rPr/>
+              <a:t>Logistic regression: the model and why the cost had to change</a:t>
+            </a:r>
+          </a:p>
+          <a:p>
+            <a:pPr lvl="0"/>
+            <a:r>
+              <a:rPr/>
+              <a:t>The confusion matrix, and why accuracy lies</a:t>
+            </a:r>
+          </a:p>
+          <a:p>
+            <a:pPr lvl="0"/>
+            <a:r>
+              <a:rPr/>
+              <a:t>Precision, recall, F1, and the threshold nobody chose</a:t>
+            </a:r>
+          </a:p>
+          <a:p>
+            <a:pPr lvl="0"/>
+            <a:r>
+              <a:rPr/>
+              <a:t>Receiver operating characteristic (ROC) curves, and where they mislead</a:t>
+            </a:r>
+          </a:p>
+          <a:p>
+            <a:pPr lvl="0"/>
+            <a:r>
+              <a:rPr/>
+              <a:t>Choosing a threshold from money</a:t>
+            </a:r>
+          </a:p>
+        </p:txBody>
+      </p:sp>
+    </p:spTree>
+  </p:cSld>
+</p:sld>
+</file>
+
+<file path=ppt/slides/slide30.xml><?xml version="1.0" encoding="utf-8"?>
 <p:sld xmlns:a="http://schemas.openxmlformats.org/drawingml/2006/main" xmlns:r="http://schemas.openxmlformats.org/officeDocument/2006/relationships" xmlns:p="http://schemas.openxmlformats.org/presentationml/2006/main">
   <p:cSld>
     <p:spTree>
@@ -14493,7 +15058,7 @@
 </p:sld>
 </file>
 
-<file path=ppt/slides/slide3.xml><?xml version="1.0" encoding="utf-8"?>
+<file path=ppt/slides/slide31.xml><?xml version="1.0" encoding="utf-8"?>
 <p:sld xmlns:a="http://schemas.openxmlformats.org/drawingml/2006/main" xmlns:r="http://schemas.openxmlformats.org/officeDocument/2006/relationships" xmlns:p="http://schemas.openxmlformats.org/presentationml/2006/main">
   <p:cSld>
     <p:spTree>
@@ -14535,7 +15100,7 @@
             </a:pPr>
             <a:r>
               <a:rPr/>
-              <a:t>Today: from a number to a decision</a:t>
+              <a:t>Why everyone makes this mistake once</a:t>
             </a:r>
           </a:p>
         </p:txBody>
@@ -14563,35 +15128,37 @@
             <a:pPr lvl="0"/>
             <a:r>
               <a:rPr/>
-              <a:t>Logistic regression: the model and why the cost had to change</a:t>
+              <a:t>Accuracy is the fraction of predictions that were right</a:t>
             </a:r>
           </a:p>
           <a:p>
             <a:pPr lvl="0"/>
             <a:r>
               <a:rPr/>
-              <a:t>The confusion matrix, and why accuracy lies</a:t>
+              <a:t>On a </a:t>
+            </a:r>
+            <a:r>
+              <a:rPr b="1"/>
+              <a:t>balanced</a:t>
+            </a:r>
+            <a:r>
+              <a:rPr/>
+              <a:t> problem that is exactly what you want</a:t>
             </a:r>
           </a:p>
           <a:p>
             <a:pPr lvl="0"/>
             <a:r>
               <a:rPr/>
-              <a:t>Precision, recall, F1, and the threshold nobody chose</a:t>
-            </a:r>
-          </a:p>
-          <a:p>
-            <a:pPr lvl="0"/>
-            <a:r>
-              <a:rPr/>
-              <a:t>Receiver operating characteristic (ROC) curves, and where they mislead</a:t>
-            </a:r>
-          </a:p>
-          <a:p>
-            <a:pPr lvl="0"/>
-            <a:r>
-              <a:rPr/>
-              <a:t>Choosing a threshold from money</a:t>
+              <a:t>The interesting class is almost always the </a:t>
+            </a:r>
+            <a:r>
+              <a:rPr b="1"/>
+              <a:t>rare</a:t>
+            </a:r>
+            <a:r>
+              <a:rPr/>
+              <a:t> one</a:t>
             </a:r>
           </a:p>
         </p:txBody>
@@ -14601,117 +15168,7 @@
 </p:sld>
 </file>
 
-<file path=ppt/slides/slide30.xml><?xml version="1.0" encoding="utf-8"?>
-<p:sld xmlns:a="http://schemas.openxmlformats.org/drawingml/2006/main" xmlns:r="http://schemas.openxmlformats.org/officeDocument/2006/relationships" xmlns:p="http://schemas.openxmlformats.org/presentationml/2006/main">
-  <p:cSld>
-    <p:spTree>
-      <p:nvGrpSpPr>
-        <p:cNvPr id="1" name=""/>
-        <p:cNvGrpSpPr/>
-        <p:nvPr/>
-      </p:nvGrpSpPr>
-      <p:grpSpPr>
-        <a:xfrm>
-          <a:off x="0" y="0"/>
-          <a:ext cx="0" cy="0"/>
-          <a:chOff x="0" y="0"/>
-          <a:chExt cx="0" cy="0"/>
-        </a:xfrm>
-      </p:grpSpPr>
-      <p:sp>
-        <p:nvSpPr>
-          <p:cNvPr id="2" name="Title 1"/>
-          <p:cNvSpPr>
-            <a:spLocks noGrp="1"/>
-          </p:cNvSpPr>
-          <p:nvPr>
-            <p:ph type="title"/>
-          </p:nvPr>
-        </p:nvSpPr>
-        <p:spPr>
-          <a:xfrm>
-            <a:off x="457200" y="205979"/>
-            <a:ext cx="8229600" cy="857250"/>
-          </a:xfrm>
-        </p:spPr>
-        <p:txBody>
-          <a:bodyPr/>
-          <a:lstStyle/>
-          <a:p>
-            <a:pPr lvl="0" indent="0" marL="0">
-              <a:buNone/>
-            </a:pPr>
-            <a:r>
-              <a:rPr/>
-              <a:t>Why everyone makes this mistake once</a:t>
-            </a:r>
-          </a:p>
-        </p:txBody>
-      </p:sp>
-      <p:sp>
-        <p:nvSpPr>
-          <p:cNvPr id="3" name="Content Placeholder 2"/>
-          <p:cNvSpPr>
-            <a:spLocks noGrp="1"/>
-          </p:cNvSpPr>
-          <p:nvPr>
-            <p:ph idx="1"/>
-          </p:nvPr>
-        </p:nvSpPr>
-        <p:spPr>
-          <a:xfrm>
-            <a:off x="457200" y="1200151"/>
-            <a:ext cx="8229600" cy="3394472"/>
-          </a:xfrm>
-        </p:spPr>
-        <p:txBody>
-          <a:bodyPr/>
-          <a:lstStyle/>
-          <a:p>
-            <a:pPr lvl="0"/>
-            <a:r>
-              <a:rPr/>
-              <a:t>Accuracy is the fraction of predictions that were right</a:t>
-            </a:r>
-          </a:p>
-          <a:p>
-            <a:pPr lvl="0"/>
-            <a:r>
-              <a:rPr/>
-              <a:t>On a </a:t>
-            </a:r>
-            <a:r>
-              <a:rPr b="1"/>
-              <a:t>balanced</a:t>
-            </a:r>
-            <a:r>
-              <a:rPr/>
-              <a:t> problem that is exactly what you want</a:t>
-            </a:r>
-          </a:p>
-          <a:p>
-            <a:pPr lvl="0"/>
-            <a:r>
-              <a:rPr/>
-              <a:t>The interesting class is almost always the </a:t>
-            </a:r>
-            <a:r>
-              <a:rPr b="1"/>
-              <a:t>rare</a:t>
-            </a:r>
-            <a:r>
-              <a:rPr/>
-              <a:t> one</a:t>
-            </a:r>
-          </a:p>
-        </p:txBody>
-      </p:sp>
-    </p:spTree>
-  </p:cSld>
-</p:sld>
-</file>
-
-<file path=ppt/slides/slide31.xml><?xml version="1.0" encoding="utf-8"?>
+<file path=ppt/slides/slide32.xml><?xml version="1.0" encoding="utf-8"?>
 <p:sld xmlns:a="http://schemas.openxmlformats.org/drawingml/2006/main" xmlns:r="http://schemas.openxmlformats.org/officeDocument/2006/relationships" xmlns:p="http://schemas.openxmlformats.org/presentationml/2006/main">
   <p:cSld>
     <p:spTree>
@@ -14793,7 +15250,7 @@
 </p:sld>
 </file>
 
-<file path=ppt/slides/slide32.xml><?xml version="1.0" encoding="utf-8"?>
+<file path=ppt/slides/slide33.xml><?xml version="1.0" encoding="utf-8"?>
 <p:sld xmlns:a="http://schemas.openxmlformats.org/drawingml/2006/main" xmlns:r="http://schemas.openxmlformats.org/officeDocument/2006/relationships" xmlns:p="http://schemas.openxmlformats.org/presentationml/2006/main">
   <p:cSld>
     <p:spTree>
@@ -14895,7 +15352,7 @@
 </p:sld>
 </file>
 
-<file path=ppt/slides/slide33.xml><?xml version="1.0" encoding="utf-8"?>
+<file path=ppt/slides/slide34.xml><?xml version="1.0" encoding="utf-8"?>
 <p:sld xmlns:a="http://schemas.openxmlformats.org/drawingml/2006/main" xmlns:r="http://schemas.openxmlformats.org/officeDocument/2006/relationships" xmlns:p="http://schemas.openxmlformats.org/presentationml/2006/main">
   <p:cSld>
     <p:spTree>
@@ -14977,146 +15434,6 @@
 </p:sld>
 </file>
 
-<file path=ppt/slides/slide34.xml><?xml version="1.0" encoding="utf-8"?>
-<p:sld xmlns:a="http://schemas.openxmlformats.org/drawingml/2006/main" xmlns:r="http://schemas.openxmlformats.org/officeDocument/2006/relationships" xmlns:p="http://schemas.openxmlformats.org/presentationml/2006/main">
-  <p:cSld>
-    <p:spTree>
-      <p:nvGrpSpPr>
-        <p:cNvPr id="1" name=""/>
-        <p:cNvGrpSpPr/>
-        <p:nvPr/>
-      </p:nvGrpSpPr>
-      <p:grpSpPr>
-        <a:xfrm>
-          <a:off x="0" y="0"/>
-          <a:ext cx="0" cy="0"/>
-          <a:chOff x="0" y="0"/>
-          <a:chExt cx="0" cy="0"/>
-        </a:xfrm>
-      </p:grpSpPr>
-      <p:sp>
-        <p:nvSpPr>
-          <p:cNvPr id="2" name="Title 1"/>
-          <p:cNvSpPr>
-            <a:spLocks noGrp="1"/>
-          </p:cNvSpPr>
-          <p:nvPr>
-            <p:ph type="title"/>
-          </p:nvPr>
-        </p:nvSpPr>
-        <p:spPr>
-          <a:xfrm>
-            <a:off x="457200" y="205979"/>
-            <a:ext cx="8229600" cy="857250"/>
-          </a:xfrm>
-        </p:spPr>
-        <p:txBody>
-          <a:bodyPr/>
-          <a:lstStyle/>
-          <a:p>
-            <a:pPr lvl="0" indent="0" marL="0">
-              <a:buNone/>
-            </a:pPr>
-            <a:r>
-              <a:rPr/>
-              <a:t>Our model, in those terms</a:t>
-            </a:r>
-          </a:p>
-        </p:txBody>
-      </p:sp>
-      <p:sp>
-        <p:nvSpPr>
-          <p:cNvPr id="3" name="Content Placeholder 2"/>
-          <p:cNvSpPr>
-            <a:spLocks noGrp="1"/>
-          </p:cNvSpPr>
-          <p:nvPr>
-            <p:ph idx="1"/>
-          </p:nvPr>
-        </p:nvSpPr>
-        <p:spPr>
-          <a:xfrm>
-            <a:off x="457200" y="1200151"/>
-            <a:ext cx="8229600" cy="3394472"/>
-          </a:xfrm>
-        </p:spPr>
-        <p:txBody>
-          <a:bodyPr/>
-          <a:lstStyle/>
-          <a:p>
-            <a:pPr lvl="0"/>
-            <a:r>
-              <a:rPr/>
-              <a:t>True and false positives and negatives: TP, FP, FN, TN</a:t>
-            </a:r>
-          </a:p>
-          <a:p>
-            <a:pPr lvl="0"/>
-            <a:r>
-              <a:rPr/>
-              <a:t>Precision = TP ÷ (TP + FP) = 43 ÷ (43 + 13) = </a:t>
-            </a:r>
-            <a:r>
-              <a:rPr b="1"/>
-              <a:t>0.768</a:t>
-            </a:r>
-            <a:r>
-              <a:rPr/>
-              <a:t>: of the drives flagged</a:t>
-            </a:r>
-          </a:p>
-          <a:p>
-            <a:pPr lvl="0"/>
-            <a:r>
-              <a:rPr/>
-              <a:t>Recall = TP ÷ (TP + FN) = 43 ÷ (43 + 33) = </a:t>
-            </a:r>
-            <a:r>
-              <a:rPr b="1"/>
-              <a:t>0.566</a:t>
-            </a:r>
-            <a:r>
-              <a:rPr/>
-              <a:t>: of the drives that failed</a:t>
-            </a:r>
-          </a:p>
-          <a:p>
-            <a:pPr lvl="0"/>
-            <a:r>
-              <a:rPr/>
-              <a:t>Specificity = TN ÷ (TN + FP) = 1,911 ÷ (1,911 + 13) = 0.993</a:t>
-            </a:r>
-          </a:p>
-          <a:p>
-            <a:pPr lvl="0"/>
-            <a:r>
-              <a:rPr/>
-              <a:t>In code: </a:t>
-            </a:r>
-            <a:r>
-              <a:rPr>
-                <a:latin typeface="Courier"/>
-              </a:rPr>
-              <a:t>precision_score</a:t>
-            </a:r>
-            <a:r>
-              <a:rPr/>
-              <a:t>, </a:t>
-            </a:r>
-            <a:r>
-              <a:rPr>
-                <a:latin typeface="Courier"/>
-              </a:rPr>
-              <a:t>recall_score</a:t>
-            </a:r>
-          </a:p>
-        </p:txBody>
-      </p:sp>
-    </p:spTree>
-  </p:cSld>
-</p:sld>
-</file>
-
 <file path=ppt/slides/slide35.xml><?xml version="1.0" encoding="utf-8"?>
 <p:sld xmlns:a="http://schemas.openxmlformats.org/drawingml/2006/main" xmlns:r="http://schemas.openxmlformats.org/officeDocument/2006/relationships" xmlns:p="http://schemas.openxmlformats.org/presentationml/2006/main">
   <p:cSld>
@@ -15159,205 +15476,99 @@
             </a:pPr>
             <a:r>
               <a:rPr/>
-              <a:t>F1: why the harmonic mean</a:t>
-            </a:r>
-          </a:p>
-        </p:txBody>
-      </p:sp>
-      <p:graphicFrame>
-        <p:nvGraphicFramePr>
-          <p:cNvPr id="6" name="Content Placeholder 5"/>
-          <p:cNvGraphicFramePr>
-            <a:graphicFrameLocks noGrp="1"/>
-          </p:cNvGraphicFramePr>
+              <a:t>Our model, in those terms</a:t>
+            </a:r>
+          </a:p>
+        </p:txBody>
+      </p:sp>
+      <p:sp>
+        <p:nvSpPr>
+          <p:cNvPr id="3" name="Content Placeholder 2"/>
+          <p:cNvSpPr>
+            <a:spLocks noGrp="1"/>
+          </p:cNvSpPr>
           <p:nvPr>
             <p:ph idx="1"/>
           </p:nvPr>
-        </p:nvGraphicFramePr>
-        <p:xfrm>
-          <a:off x="457200" y="1166099"/>
-          <a:ext cx="8229600" cy="3390900"/>
-        </p:xfrm>
-        <a:graphic>
-          <a:graphicData uri="http://schemas.openxmlformats.org/drawingml/2006/table">
-            <a:tbl>
-              <a:tblPr firstRow="1" bandRow="1">
-                <a:tableStyleId>{5C22544A-7EE6-4342-B048-85BDC9FD1C3A}</a:tableStyleId>
-              </a:tblPr>
-              <a:tblGrid>
-                <a:gridCol w="1645920"/>
-                <a:gridCol w="1645920"/>
-                <a:gridCol w="1645920"/>
-                <a:gridCol w="1645920"/>
-                <a:gridCol w="1645920"/>
-              </a:tblGrid>
-              <a:tr h="0">
-                <a:tc>
-                  <a:txBody>
-                    <a:bodyPr/>
-                    <a:lstStyle/>
-                    <a:p>
-                      <a:pPr lvl="0" indent="0" marL="0">
-                        <a:buNone/>
-                      </a:pPr>
-                      <a:r>
-                        <a:rPr/>
-                        <a:t>Model</a:t>
-                      </a:r>
-                    </a:p>
-                  </a:txBody>
-                  <a:tcPr/>
-                </a:tc>
-                <a:tc>
-                  <a:txBody>
-                    <a:bodyPr/>
-                    <a:lstStyle/>
-                    <a:p>
-                      <a:pPr lvl="0" indent="0" marL="0">
-                        <a:buNone/>
-                      </a:pPr>
-                      <a:r>
-                        <a:rPr/>
-                        <a:t>Precision</a:t>
-                      </a:r>
-                    </a:p>
-                  </a:txBody>
-                  <a:tcPr/>
-                </a:tc>
-                <a:tc>
-                  <a:txBody>
-                    <a:bodyPr/>
-                    <a:lstStyle/>
-                    <a:p>
-                      <a:pPr lvl="0" indent="0" marL="0">
-                        <a:buNone/>
-                      </a:pPr>
-                      <a:r>
-                        <a:rPr/>
-                        <a:t>Recall</a:t>
-                      </a:r>
-                    </a:p>
-                  </a:txBody>
-                  <a:tcPr/>
-                </a:tc>
-                <a:tc>
-                  <a:txBody>
-                    <a:bodyPr/>
-                    <a:lstStyle/>
-                    <a:p>
-                      <a:pPr lvl="0" indent="0" marL="0">
-                        <a:buNone/>
-                      </a:pPr>
-                      <a:r>
-                        <a:rPr/>
-                        <a:t>Arithmetic mean</a:t>
-                      </a:r>
-                    </a:p>
-                  </a:txBody>
-                  <a:tcPr/>
-                </a:tc>
-                <a:tc>
-                  <a:txBody>
-                    <a:bodyPr/>
-                    <a:lstStyle/>
-                    <a:p>
-                      <a:pPr lvl="0" indent="0" marL="0">
-                        <a:buNone/>
-                      </a:pPr>
-                      <a:r>
-                        <a:rPr/>
-                        <a:t>Harmonic, F1 = 2PR ÷ (P + R)</a:t>
-                      </a:r>
-                    </a:p>
-                  </a:txBody>
-                  <a:tcPr/>
-                </a:tc>
-              </a:tr>
-              <a:tr h="0">
-                <a:tc>
-                  <a:txBody>
-                    <a:bodyPr/>
-                    <a:lstStyle/>
-                    <a:p>
-                      <a:pPr lvl="0" indent="0" marL="0">
-                        <a:buNone/>
-                      </a:pPr>
-                      <a:r>
-                        <a:rPr/>
-                        <a:t>Flag every drive</a:t>
-                      </a:r>
-                    </a:p>
-                  </a:txBody>
-                </a:tc>
-                <a:tc>
-                  <a:txBody>
-                    <a:bodyPr/>
-                    <a:lstStyle/>
-                    <a:p>
-                      <a:pPr lvl="0" indent="0" marL="0">
-                        <a:buNone/>
-                      </a:pPr>
-                      <a:r>
-                        <a:rPr/>
-                        <a:t>76 ÷ 2,000 = 0.038</a:t>
-                      </a:r>
-                    </a:p>
-                  </a:txBody>
-                </a:tc>
-                <a:tc>
-                  <a:txBody>
-                    <a:bodyPr/>
-                    <a:lstStyle/>
-                    <a:p>
-                      <a:pPr lvl="0" indent="0" marL="0">
-                        <a:buNone/>
-                      </a:pPr>
-                      <a:r>
-                        <a:rPr/>
-                        <a:t>76 ÷ 76 = 1</a:t>
-                      </a:r>
-                    </a:p>
-                  </a:txBody>
-                </a:tc>
-                <a:tc>
-                  <a:txBody>
-                    <a:bodyPr/>
-                    <a:lstStyle/>
-                    <a:p>
-                      <a:pPr lvl="0" indent="0" marL="0">
-                        <a:buNone/>
-                      </a:pPr>
-                      <a:r>
-                        <a:rPr/>
-                        <a:t>(0.038 + 1) ÷ 2 = 0.519</a:t>
-                      </a:r>
-                    </a:p>
-                  </a:txBody>
-                </a:tc>
-                <a:tc>
-                  <a:txBody>
-                    <a:bodyPr/>
-                    <a:lstStyle/>
-                    <a:p>
-                      <a:pPr lvl="0" indent="0" marL="0">
-                        <a:buNone/>
-                      </a:pPr>
-                      <a:r>
-                        <a:rPr/>
-                        <a:t>2 × 0.038 × 1 ÷ 1.038 = </a:t>
-                      </a:r>
-                      <a:r>
-                        <a:rPr b="1"/>
-                        <a:t>0.073</a:t>
-                      </a:r>
-                    </a:p>
-                  </a:txBody>
-                </a:tc>
-              </a:tr>
-            </a:tbl>
-          </a:graphicData>
-        </a:graphic>
-      </p:graphicFrame>
+        </p:nvSpPr>
+        <p:spPr>
+          <a:xfrm>
+            <a:off x="457200" y="1200151"/>
+            <a:ext cx="8229600" cy="3394472"/>
+          </a:xfrm>
+        </p:spPr>
+        <p:txBody>
+          <a:bodyPr/>
+          <a:lstStyle/>
+          <a:p>
+            <a:pPr lvl="0"/>
+            <a:r>
+              <a:rPr/>
+              <a:t>True and false positives and negatives: TP, FP, FN, TN</a:t>
+            </a:r>
+          </a:p>
+          <a:p>
+            <a:pPr lvl="0"/>
+            <a:r>
+              <a:rPr/>
+              <a:t>Precision = TP ÷ (TP + FP) = 43 ÷ (43 + 13) = </a:t>
+            </a:r>
+            <a:r>
+              <a:rPr b="1"/>
+              <a:t>0.768</a:t>
+            </a:r>
+            <a:r>
+              <a:rPr/>
+              <a:t>: of the drives flagged</a:t>
+            </a:r>
+          </a:p>
+          <a:p>
+            <a:pPr lvl="0"/>
+            <a:r>
+              <a:rPr/>
+              <a:t>Recall = TP ÷ (TP + FN) = 43 ÷ (43 + 33) = </a:t>
+            </a:r>
+            <a:r>
+              <a:rPr b="1"/>
+              <a:t>0.566</a:t>
+            </a:r>
+            <a:r>
+              <a:rPr/>
+              <a:t>: of the drives that failed</a:t>
+            </a:r>
+          </a:p>
+          <a:p>
+            <a:pPr lvl="0"/>
+            <a:r>
+              <a:rPr/>
+              <a:t>Specificity = TN ÷ (TN + FP) = 1,911 ÷ (1,911 + 13) = 0.993</a:t>
+            </a:r>
+          </a:p>
+          <a:p>
+            <a:pPr lvl="0"/>
+            <a:r>
+              <a:rPr/>
+              <a:t>In code: </a:t>
+            </a:r>
+            <a:r>
+              <a:rPr>
+                <a:latin typeface="Courier"/>
+              </a:rPr>
+              <a:t>precision_score</a:t>
+            </a:r>
+            <a:r>
+              <a:rPr/>
+              <a:t>, </a:t>
+            </a:r>
+            <a:r>
+              <a:rPr>
+                <a:latin typeface="Courier"/>
+              </a:rPr>
+              <a:t>recall_score</a:t>
+            </a:r>
+          </a:p>
+        </p:txBody>
+      </p:sp>
     </p:spTree>
   </p:cSld>
 </p:sld>
@@ -15405,6 +15616,88 @@
             </a:pPr>
             <a:r>
               <a:rPr/>
+              <a:t>F1: why the harmonic mean</a:t>
+            </a:r>
+          </a:p>
+        </p:txBody>
+      </p:sp>
+      <p:pic>
+        <p:nvPicPr>
+          <p:cNvPr descr="harmonic_vs_arithmetic.png" id="0" name="Picture 1"/>
+          <p:cNvPicPr>
+            <a:picLocks noGrp="1" noChangeAspect="1"/>
+          </p:cNvPicPr>
+          <p:nvPr/>
+        </p:nvPicPr>
+        <p:blipFill>
+          <a:blip r:embed="rId3"/>
+          <a:stretch>
+            <a:fillRect/>
+          </a:stretch>
+        </p:blipFill>
+        <p:spPr bwMode="auto">
+          <a:xfrm>
+            <a:off x="1148894" y="1166099"/>
+            <a:ext cx="6846211" cy="3360181"/>
+          </a:xfrm>
+          <a:prstGeom prst="rect">
+            <a:avLst/>
+          </a:prstGeom>
+          <a:noFill/>
+          <a:ln w="9525">
+            <a:noFill/>
+            <a:headEnd/>
+            <a:tailEnd/>
+          </a:ln>
+        </p:spPr>
+      </p:pic>
+    </p:spTree>
+  </p:cSld>
+</p:sld>
+</file>
+
+<file path=ppt/slides/slide37.xml><?xml version="1.0" encoding="utf-8"?>
+<p:sld xmlns:a="http://schemas.openxmlformats.org/drawingml/2006/main" xmlns:r="http://schemas.openxmlformats.org/officeDocument/2006/relationships" xmlns:p="http://schemas.openxmlformats.org/presentationml/2006/main">
+  <p:cSld>
+    <p:spTree>
+      <p:nvGrpSpPr>
+        <p:cNvPr id="1" name=""/>
+        <p:cNvGrpSpPr/>
+        <p:nvPr/>
+      </p:nvGrpSpPr>
+      <p:grpSpPr>
+        <a:xfrm>
+          <a:off x="0" y="0"/>
+          <a:ext cx="0" cy="0"/>
+          <a:chOff x="0" y="0"/>
+          <a:chExt cx="0" cy="0"/>
+        </a:xfrm>
+      </p:grpSpPr>
+      <p:sp>
+        <p:nvSpPr>
+          <p:cNvPr id="2" name="Title 1"/>
+          <p:cNvSpPr>
+            <a:spLocks noGrp="1"/>
+          </p:cNvSpPr>
+          <p:nvPr>
+            <p:ph type="title"/>
+          </p:nvPr>
+        </p:nvSpPr>
+        <p:spPr>
+          <a:xfrm>
+            <a:off x="457200" y="205979"/>
+            <a:ext cx="8229600" cy="857250"/>
+          </a:xfrm>
+        </p:spPr>
+        <p:txBody>
+          <a:bodyPr/>
+          <a:lstStyle/>
+          <a:p>
+            <a:pPr lvl="0" indent="0" marL="0">
+              <a:buNone/>
+            </a:pPr>
+            <a:r>
+              <a:rPr/>
               <a:t>Read the minority class, not the average</a:t>
             </a:r>
           </a:p>
@@ -15502,7 +15795,7 @@
 </p:sld>
 </file>
 
-<file path=ppt/slides/slide37.xml><?xml version="1.0" encoding="utf-8"?>
+<file path=ppt/slides/slide38.xml><?xml version="1.0" encoding="utf-8"?>
 <p:sld xmlns:a="http://schemas.openxmlformats.org/drawingml/2006/main" xmlns:r="http://schemas.openxmlformats.org/officeDocument/2006/relationships" xmlns:p="http://schemas.openxmlformats.org/presentationml/2006/main">
   <p:cSld>
     <p:spTree>
@@ -15618,7 +15911,7 @@
                       </a:pPr>
                       <a:r>
                         <a:rPr/>
-                        <a:t>the number that should worry you, 29</a:t>
+                        <a:t>the number that should worry you, 30</a:t>
                       </a:r>
                     </a:p>
                   </a:txBody>
@@ -15656,7 +15949,7 @@
                       </a:pPr>
                       <a:r>
                         <a:rPr/>
-                        <a:t>the confusion matrix, 31</a:t>
+                        <a:t>the confusion matrix, 32</a:t>
                       </a:r>
                     </a:p>
                   </a:txBody>
@@ -15708,7 +16001,7 @@
                       </a:pPr>
                       <a:r>
                         <a:rPr/>
-                        <a:t>precision and recall, 33-36</a:t>
+                        <a:t>precision and recall, 34-37</a:t>
                       </a:r>
                     </a:p>
                   </a:txBody>
@@ -15772,7 +16065,7 @@
                       </a:pPr>
                       <a:r>
                         <a:rPr/>
-                        <a:t>the threshold sweep, 38-39</a:t>
+                        <a:t>the threshold sweep, 39-40</a:t>
                       </a:r>
                     </a:p>
                   </a:txBody>
@@ -15810,7 +16103,7 @@
                       </a:pPr>
                       <a:r>
                         <a:rPr/>
-                        <a:t>the precision-recall curve, 40</a:t>
+                        <a:t>the precision-recall curve, 41</a:t>
                       </a:r>
                     </a:p>
                   </a:txBody>
@@ -15856,7 +16149,7 @@
 </p:sld>
 </file>
 
-<file path=ppt/slides/slide38.xml><?xml version="1.0" encoding="utf-8"?>
+<file path=ppt/slides/slide39.xml><?xml version="1.0" encoding="utf-8"?>
 <p:sld xmlns:a="http://schemas.openxmlformats.org/drawingml/2006/main" xmlns:r="http://schemas.openxmlformats.org/officeDocument/2006/relationships" xmlns:p="http://schemas.openxmlformats.org/presentationml/2006/main">
   <p:cSld>
     <p:spTree>
@@ -15938,7 +16231,116 @@
 </p:sld>
 </file>
 
-<file path=ppt/slides/slide39.xml><?xml version="1.0" encoding="utf-8"?>
+<file path=ppt/slides/slide4.xml><?xml version="1.0" encoding="utf-8"?>
+<p:sld xmlns:a="http://schemas.openxmlformats.org/drawingml/2006/main" xmlns:r="http://schemas.openxmlformats.org/officeDocument/2006/relationships" xmlns:p="http://schemas.openxmlformats.org/presentationml/2006/main">
+  <p:cSld>
+    <p:spTree>
+      <p:nvGrpSpPr>
+        <p:cNvPr id="1" name=""/>
+        <p:cNvGrpSpPr/>
+        <p:nvPr/>
+      </p:nvGrpSpPr>
+      <p:grpSpPr>
+        <a:xfrm>
+          <a:off x="0" y="0"/>
+          <a:ext cx="0" cy="0"/>
+          <a:chOff x="0" y="0"/>
+          <a:chExt cx="0" cy="0"/>
+        </a:xfrm>
+      </p:grpSpPr>
+      <p:sp>
+        <p:nvSpPr>
+          <p:cNvPr id="2" name="Title 1"/>
+          <p:cNvSpPr>
+            <a:spLocks noGrp="1"/>
+          </p:cNvSpPr>
+          <p:nvPr>
+            <p:ph type="title"/>
+          </p:nvPr>
+        </p:nvSpPr>
+        <p:spPr>
+          <a:xfrm>
+            <a:off x="457200" y="205979"/>
+            <a:ext cx="8229600" cy="857250"/>
+          </a:xfrm>
+        </p:spPr>
+        <p:txBody>
+          <a:bodyPr/>
+          <a:lstStyle/>
+          <a:p>
+            <a:pPr lvl="0" indent="0" marL="0">
+              <a:buNone/>
+            </a:pPr>
+            <a:r>
+              <a:rPr/>
+              <a:t>The question has changed</a:t>
+            </a:r>
+          </a:p>
+        </p:txBody>
+      </p:sp>
+      <p:sp>
+        <p:nvSpPr>
+          <p:cNvPr id="3" name="Content Placeholder 2"/>
+          <p:cNvSpPr>
+            <a:spLocks noGrp="1"/>
+          </p:cNvSpPr>
+          <p:nvPr>
+            <p:ph idx="1"/>
+          </p:nvPr>
+        </p:nvSpPr>
+        <p:spPr>
+          <a:xfrm>
+            <a:off x="457200" y="1200151"/>
+            <a:ext cx="8229600" cy="3394472"/>
+          </a:xfrm>
+        </p:spPr>
+        <p:txBody>
+          <a:bodyPr/>
+          <a:lstStyle/>
+          <a:p>
+            <a:pPr lvl="0"/>
+            <a:r>
+              <a:rPr/>
+              <a:t>Lesson 3: given a house, </a:t>
+            </a:r>
+            <a:r>
+              <a:rPr b="1"/>
+              <a:t>how many euros?</a:t>
+            </a:r>
+          </a:p>
+          <a:p>
+            <a:pPr lvl="0"/>
+            <a:r>
+              <a:rPr/>
+              <a:t>Lesson 4: given a disk drive, </a:t>
+            </a:r>
+            <a:r>
+              <a:rPr b="1"/>
+              <a:t>will it fail?</a:t>
+            </a:r>
+          </a:p>
+          <a:p>
+            <a:pPr lvl="0"/>
+            <a:r>
+              <a:rPr/>
+              <a:t>Answer with a probability: 0 ≤ P(y = 1 | x) ≤ 1</a:t>
+            </a:r>
+          </a:p>
+          <a:p>
+            <a:pPr lvl="0"/>
+            <a:r>
+              <a:rPr/>
+              <a:t>y = 1 if the drive failed, y = 0 if not; x holds its six counters</a:t>
+            </a:r>
+          </a:p>
+        </p:txBody>
+      </p:sp>
+    </p:spTree>
+  </p:cSld>
+</p:sld>
+</file>
+
+<file path=ppt/slides/slide40.xml><?xml version="1.0" encoding="utf-8"?>
 <p:sld xmlns:a="http://schemas.openxmlformats.org/drawingml/2006/main" xmlns:r="http://schemas.openxmlformats.org/officeDocument/2006/relationships" xmlns:p="http://schemas.openxmlformats.org/presentationml/2006/main">
   <p:cSld>
     <p:spTree>
@@ -16020,116 +16422,7 @@
 </p:sld>
 </file>
 
-<file path=ppt/slides/slide4.xml><?xml version="1.0" encoding="utf-8"?>
-<p:sld xmlns:a="http://schemas.openxmlformats.org/drawingml/2006/main" xmlns:r="http://schemas.openxmlformats.org/officeDocument/2006/relationships" xmlns:p="http://schemas.openxmlformats.org/presentationml/2006/main">
-  <p:cSld>
-    <p:spTree>
-      <p:nvGrpSpPr>
-        <p:cNvPr id="1" name=""/>
-        <p:cNvGrpSpPr/>
-        <p:nvPr/>
-      </p:nvGrpSpPr>
-      <p:grpSpPr>
-        <a:xfrm>
-          <a:off x="0" y="0"/>
-          <a:ext cx="0" cy="0"/>
-          <a:chOff x="0" y="0"/>
-          <a:chExt cx="0" cy="0"/>
-        </a:xfrm>
-      </p:grpSpPr>
-      <p:sp>
-        <p:nvSpPr>
-          <p:cNvPr id="2" name="Title 1"/>
-          <p:cNvSpPr>
-            <a:spLocks noGrp="1"/>
-          </p:cNvSpPr>
-          <p:nvPr>
-            <p:ph type="title"/>
-          </p:nvPr>
-        </p:nvSpPr>
-        <p:spPr>
-          <a:xfrm>
-            <a:off x="457200" y="205979"/>
-            <a:ext cx="8229600" cy="857250"/>
-          </a:xfrm>
-        </p:spPr>
-        <p:txBody>
-          <a:bodyPr/>
-          <a:lstStyle/>
-          <a:p>
-            <a:pPr lvl="0" indent="0" marL="0">
-              <a:buNone/>
-            </a:pPr>
-            <a:r>
-              <a:rPr/>
-              <a:t>The question has changed</a:t>
-            </a:r>
-          </a:p>
-        </p:txBody>
-      </p:sp>
-      <p:sp>
-        <p:nvSpPr>
-          <p:cNvPr id="3" name="Content Placeholder 2"/>
-          <p:cNvSpPr>
-            <a:spLocks noGrp="1"/>
-          </p:cNvSpPr>
-          <p:nvPr>
-            <p:ph idx="1"/>
-          </p:nvPr>
-        </p:nvSpPr>
-        <p:spPr>
-          <a:xfrm>
-            <a:off x="457200" y="1200151"/>
-            <a:ext cx="8229600" cy="3394472"/>
-          </a:xfrm>
-        </p:spPr>
-        <p:txBody>
-          <a:bodyPr/>
-          <a:lstStyle/>
-          <a:p>
-            <a:pPr lvl="0"/>
-            <a:r>
-              <a:rPr/>
-              <a:t>Lesson 3: given a house, </a:t>
-            </a:r>
-            <a:r>
-              <a:rPr b="1"/>
-              <a:t>how many euros?</a:t>
-            </a:r>
-          </a:p>
-          <a:p>
-            <a:pPr lvl="0"/>
-            <a:r>
-              <a:rPr/>
-              <a:t>Lesson 4: given a disk drive, </a:t>
-            </a:r>
-            <a:r>
-              <a:rPr b="1"/>
-              <a:t>will it fail?</a:t>
-            </a:r>
-          </a:p>
-          <a:p>
-            <a:pPr lvl="0"/>
-            <a:r>
-              <a:rPr/>
-              <a:t>Answer with a probability: 0 ≤ P(y = 1 | x) ≤ 1</a:t>
-            </a:r>
-          </a:p>
-          <a:p>
-            <a:pPr lvl="0"/>
-            <a:r>
-              <a:rPr/>
-              <a:t>y = 1 if the drive failed, y = 0 if not; x holds its six counters</a:t>
-            </a:r>
-          </a:p>
-        </p:txBody>
-      </p:sp>
-    </p:spTree>
-  </p:cSld>
-</p:sld>
-</file>
-
-<file path=ppt/slides/slide40.xml><?xml version="1.0" encoding="utf-8"?>
+<file path=ppt/slides/slide41.xml><?xml version="1.0" encoding="utf-8"?>
 <p:sld xmlns:a="http://schemas.openxmlformats.org/drawingml/2006/main" xmlns:r="http://schemas.openxmlformats.org/officeDocument/2006/relationships" xmlns:p="http://schemas.openxmlformats.org/presentationml/2006/main">
   <p:cSld>
     <p:spTree>
@@ -16211,7 +16504,7 @@
 </p:sld>
 </file>
 
-<file path=ppt/slides/slide41.xml><?xml version="1.0" encoding="utf-8"?>
+<file path=ppt/slides/slide42.xml><?xml version="1.0" encoding="utf-8"?>
 <p:sld xmlns:a="http://schemas.openxmlformats.org/drawingml/2006/main" xmlns:r="http://schemas.openxmlformats.org/officeDocument/2006/relationships" xmlns:p="http://schemas.openxmlformats.org/presentationml/2006/main">
   <p:cSld>
     <p:spTree>
@@ -16306,7 +16599,7 @@
 </p:sld>
 </file>
 
-<file path=ppt/slides/slide42.xml><?xml version="1.0" encoding="utf-8"?>
+<file path=ppt/slides/slide43.xml><?xml version="1.0" encoding="utf-8"?>
 <p:sld xmlns:a="http://schemas.openxmlformats.org/drawingml/2006/main" xmlns:r="http://schemas.openxmlformats.org/officeDocument/2006/relationships" xmlns:p="http://schemas.openxmlformats.org/presentationml/2006/main">
   <p:cSld>
     <p:spTree>
@@ -16388,123 +16681,6 @@
 </p:sld>
 </file>
 
-<file path=ppt/slides/slide43.xml><?xml version="1.0" encoding="utf-8"?>
-<p:sld xmlns:a="http://schemas.openxmlformats.org/drawingml/2006/main" xmlns:r="http://schemas.openxmlformats.org/officeDocument/2006/relationships" xmlns:p="http://schemas.openxmlformats.org/presentationml/2006/main">
-  <p:cSld>
-    <p:spTree>
-      <p:nvGrpSpPr>
-        <p:cNvPr id="1" name=""/>
-        <p:cNvGrpSpPr/>
-        <p:nvPr/>
-      </p:nvGrpSpPr>
-      <p:grpSpPr>
-        <a:xfrm>
-          <a:off x="0" y="0"/>
-          <a:ext cx="0" cy="0"/>
-          <a:chOff x="0" y="0"/>
-          <a:chExt cx="0" cy="0"/>
-        </a:xfrm>
-      </p:grpSpPr>
-      <p:sp>
-        <p:nvSpPr>
-          <p:cNvPr id="2" name="Title 1"/>
-          <p:cNvSpPr>
-            <a:spLocks noGrp="1"/>
-          </p:cNvSpPr>
-          <p:nvPr>
-            <p:ph type="title"/>
-          </p:nvPr>
-        </p:nvSpPr>
-        <p:spPr>
-          <a:xfrm>
-            <a:off x="457200" y="205979"/>
-            <a:ext cx="8229600" cy="857250"/>
-          </a:xfrm>
-        </p:spPr>
-        <p:txBody>
-          <a:bodyPr/>
-          <a:lstStyle/>
-          <a:p>
-            <a:pPr lvl="0" indent="0" marL="0">
-              <a:buNone/>
-            </a:pPr>
-            <a:r>
-              <a:rPr/>
-              <a:t>What the area means</a:t>
-            </a:r>
-          </a:p>
-        </p:txBody>
-      </p:sp>
-      <p:sp>
-        <p:nvSpPr>
-          <p:cNvPr id="3" name="Content Placeholder 2"/>
-          <p:cNvSpPr>
-            <a:spLocks noGrp="1"/>
-          </p:cNvSpPr>
-          <p:nvPr>
-            <p:ph idx="1"/>
-          </p:nvPr>
-        </p:nvSpPr>
-        <p:spPr>
-          <a:xfrm>
-            <a:off x="457200" y="1200151"/>
-            <a:ext cx="8229600" cy="3394472"/>
-          </a:xfrm>
-        </p:spPr>
-        <p:txBody>
-          <a:bodyPr/>
-          <a:lstStyle/>
-          <a:p>
-            <a:pPr lvl="0"/>
-            <a:r>
-              <a:rPr b="1"/>
-              <a:t>Area under the curve (AUC) = the probability that a random failing drive scores above a random healthy one</a:t>
-            </a:r>
-          </a:p>
-          <a:p>
-            <a:pPr lvl="0"/>
-            <a:r>
-              <a:rPr/>
-              <a:t>Ours: 0.949 (</a:t>
-            </a:r>
-            <a:r>
-              <a:rPr>
-                <a:latin typeface="Courier"/>
-              </a:rPr>
-              <a:t>roc_auc_score</a:t>
-            </a:r>
-            <a:r>
-              <a:rPr/>
-              <a:t>, notebook 3)</a:t>
-            </a:r>
-          </a:p>
-          <a:p>
-            <a:pPr lvl="0"/>
-            <a:r>
-              <a:rPr/>
-              <a:t>Check: in 200,000 random pairs, the failing drive scores higher 94.9% of the time</a:t>
-            </a:r>
-          </a:p>
-          <a:p>
-            <a:pPr lvl="0"/>
-            <a:r>
-              <a:rPr/>
-              <a:t>In code: </a:t>
-            </a:r>
-            <a:r>
-              <a:rPr>
-                <a:latin typeface="Courier"/>
-              </a:rPr>
-              <a:t>roc_auc_score(y_test, scores)</a:t>
-            </a:r>
-          </a:p>
-        </p:txBody>
-      </p:sp>
-    </p:spTree>
-  </p:cSld>
-</p:sld>
-</file>
-
 <file path=ppt/slides/slide44.xml><?xml version="1.0" encoding="utf-8"?>
 <p:sld xmlns:a="http://schemas.openxmlformats.org/drawingml/2006/main" xmlns:r="http://schemas.openxmlformats.org/officeDocument/2006/relationships" xmlns:p="http://schemas.openxmlformats.org/presentationml/2006/main">
   <p:cSld>
@@ -16547,7 +16723,7 @@
             </a:pPr>
             <a:r>
               <a:rPr/>
-              <a:t>What AUC does not tell you</a:t>
+              <a:t>What the area means</a:t>
             </a:r>
           </a:p>
         </p:txBody>
@@ -16574,23 +16750,45 @@
           <a:p>
             <a:pPr lvl="0"/>
             <a:r>
-              <a:rPr/>
-              <a:t>Divide every predicted probability by 10</a:t>
+              <a:rPr b="1"/>
+              <a:t>Area under the curve (AUC) = the probability that a random failing drive scores above a random healthy one</a:t>
             </a:r>
           </a:p>
           <a:p>
             <a:pPr lvl="0"/>
             <a:r>
               <a:rPr/>
-              <a:t>AUC is </a:t>
-            </a:r>
-            <a:r>
-              <a:rPr b="1"/>
-              <a:t>unchanged</a:t>
-            </a:r>
-            <a:r>
-              <a:rPr/>
-              <a:t>; every decision changes</a:t>
+              <a:t>Ours: 0.949 (</a:t>
+            </a:r>
+            <a:r>
+              <a:rPr>
+                <a:latin typeface="Courier"/>
+              </a:rPr>
+              <a:t>roc_auc_score</a:t>
+            </a:r>
+            <a:r>
+              <a:rPr/>
+              <a:t>, notebook 3)</a:t>
+            </a:r>
+          </a:p>
+          <a:p>
+            <a:pPr lvl="0"/>
+            <a:r>
+              <a:rPr/>
+              <a:t>Check: in 200,000 random pairs, the failing drive scores higher 94.9% of the time</a:t>
+            </a:r>
+          </a:p>
+          <a:p>
+            <a:pPr lvl="0"/>
+            <a:r>
+              <a:rPr/>
+              <a:t>In code: </a:t>
+            </a:r>
+            <a:r>
+              <a:rPr>
+                <a:latin typeface="Courier"/>
+              </a:rPr>
+              <a:t>roc_auc_score(y_test, scores)</a:t>
             </a:r>
           </a:p>
         </p:txBody>
@@ -16601,6 +16799,183 @@
 </file>
 
 <file path=ppt/slides/slide45.xml><?xml version="1.0" encoding="utf-8"?>
+<p:sld xmlns:a="http://schemas.openxmlformats.org/drawingml/2006/main" xmlns:r="http://schemas.openxmlformats.org/officeDocument/2006/relationships" xmlns:p="http://schemas.openxmlformats.org/presentationml/2006/main">
+  <p:cSld>
+    <p:spTree>
+      <p:nvGrpSpPr>
+        <p:cNvPr id="1" name=""/>
+        <p:cNvGrpSpPr/>
+        <p:nvPr/>
+      </p:nvGrpSpPr>
+      <p:grpSpPr>
+        <a:xfrm>
+          <a:off x="0" y="0"/>
+          <a:ext cx="0" cy="0"/>
+          <a:chOff x="0" y="0"/>
+          <a:chExt cx="0" cy="0"/>
+        </a:xfrm>
+      </p:grpSpPr>
+      <p:sp>
+        <p:nvSpPr>
+          <p:cNvPr id="2" name="Title 1"/>
+          <p:cNvSpPr>
+            <a:spLocks noGrp="1"/>
+          </p:cNvSpPr>
+          <p:nvPr>
+            <p:ph type="title"/>
+          </p:nvPr>
+        </p:nvSpPr>
+        <p:spPr>
+          <a:xfrm>
+            <a:off x="457200" y="205979"/>
+            <a:ext cx="8229600" cy="857250"/>
+          </a:xfrm>
+        </p:spPr>
+        <p:txBody>
+          <a:bodyPr/>
+          <a:lstStyle/>
+          <a:p>
+            <a:pPr lvl="0" indent="0" marL="0">
+              <a:buNone/>
+            </a:pPr>
+            <a:r>
+              <a:rPr/>
+              <a:t>The scores behind the AUC</a:t>
+            </a:r>
+          </a:p>
+        </p:txBody>
+      </p:sp>
+      <p:pic>
+        <p:nvPicPr>
+          <p:cNvPr descr="score_distributions.png" id="0" name="Picture 1"/>
+          <p:cNvPicPr>
+            <a:picLocks noGrp="1" noChangeAspect="1"/>
+          </p:cNvPicPr>
+          <p:nvPr/>
+        </p:nvPicPr>
+        <p:blipFill>
+          <a:blip r:embed="rId3"/>
+          <a:stretch>
+            <a:fillRect/>
+          </a:stretch>
+        </p:blipFill>
+        <p:spPr bwMode="auto">
+          <a:xfrm>
+            <a:off x="1130017" y="1166099"/>
+            <a:ext cx="6883966" cy="3360181"/>
+          </a:xfrm>
+          <a:prstGeom prst="rect">
+            <a:avLst/>
+          </a:prstGeom>
+          <a:noFill/>
+          <a:ln w="9525">
+            <a:noFill/>
+            <a:headEnd/>
+            <a:tailEnd/>
+          </a:ln>
+        </p:spPr>
+      </p:pic>
+    </p:spTree>
+  </p:cSld>
+</p:sld>
+</file>
+
+<file path=ppt/slides/slide46.xml><?xml version="1.0" encoding="utf-8"?>
+<p:sld xmlns:a="http://schemas.openxmlformats.org/drawingml/2006/main" xmlns:r="http://schemas.openxmlformats.org/officeDocument/2006/relationships" xmlns:p="http://schemas.openxmlformats.org/presentationml/2006/main">
+  <p:cSld>
+    <p:spTree>
+      <p:nvGrpSpPr>
+        <p:cNvPr id="1" name=""/>
+        <p:cNvGrpSpPr/>
+        <p:nvPr/>
+      </p:nvGrpSpPr>
+      <p:grpSpPr>
+        <a:xfrm>
+          <a:off x="0" y="0"/>
+          <a:ext cx="0" cy="0"/>
+          <a:chOff x="0" y="0"/>
+          <a:chExt cx="0" cy="0"/>
+        </a:xfrm>
+      </p:grpSpPr>
+      <p:sp>
+        <p:nvSpPr>
+          <p:cNvPr id="2" name="Title 1"/>
+          <p:cNvSpPr>
+            <a:spLocks noGrp="1"/>
+          </p:cNvSpPr>
+          <p:nvPr>
+            <p:ph type="title"/>
+          </p:nvPr>
+        </p:nvSpPr>
+        <p:spPr>
+          <a:xfrm>
+            <a:off x="457200" y="205979"/>
+            <a:ext cx="8229600" cy="857250"/>
+          </a:xfrm>
+        </p:spPr>
+        <p:txBody>
+          <a:bodyPr/>
+          <a:lstStyle/>
+          <a:p>
+            <a:pPr lvl="0" indent="0" marL="0">
+              <a:buNone/>
+            </a:pPr>
+            <a:r>
+              <a:rPr/>
+              <a:t>What AUC does not tell you</a:t>
+            </a:r>
+          </a:p>
+        </p:txBody>
+      </p:sp>
+      <p:sp>
+        <p:nvSpPr>
+          <p:cNvPr id="3" name="Content Placeholder 2"/>
+          <p:cNvSpPr>
+            <a:spLocks noGrp="1"/>
+          </p:cNvSpPr>
+          <p:nvPr>
+            <p:ph idx="1"/>
+          </p:nvPr>
+        </p:nvSpPr>
+        <p:spPr>
+          <a:xfrm>
+            <a:off x="457200" y="1200151"/>
+            <a:ext cx="8229600" cy="3394472"/>
+          </a:xfrm>
+        </p:spPr>
+        <p:txBody>
+          <a:bodyPr/>
+          <a:lstStyle/>
+          <a:p>
+            <a:pPr lvl="0"/>
+            <a:r>
+              <a:rPr/>
+              <a:t>Divide every predicted probability by 10</a:t>
+            </a:r>
+          </a:p>
+          <a:p>
+            <a:pPr lvl="0"/>
+            <a:r>
+              <a:rPr/>
+              <a:t>AUC is </a:t>
+            </a:r>
+            <a:r>
+              <a:rPr b="1"/>
+              <a:t>unchanged</a:t>
+            </a:r>
+            <a:r>
+              <a:rPr/>
+              <a:t>; every decision changes</a:t>
+            </a:r>
+          </a:p>
+        </p:txBody>
+      </p:sp>
+    </p:spTree>
+  </p:cSld>
+</p:sld>
+</file>
+
+<file path=ppt/slides/slide47.xml><?xml version="1.0" encoding="utf-8"?>
 <p:sld xmlns:a="http://schemas.openxmlformats.org/drawingml/2006/main" xmlns:r="http://schemas.openxmlformats.org/officeDocument/2006/relationships" xmlns:p="http://schemas.openxmlformats.org/presentationml/2006/main">
   <p:cSld>
     <p:spTree>
@@ -16682,7 +17057,7 @@
 </p:sld>
 </file>
 
-<file path=ppt/slides/slide46.xml><?xml version="1.0" encoding="utf-8"?>
+<file path=ppt/slides/slide48.xml><?xml version="1.0" encoding="utf-8"?>
 <p:sld xmlns:a="http://schemas.openxmlformats.org/drawingml/2006/main" xmlns:r="http://schemas.openxmlformats.org/officeDocument/2006/relationships" xmlns:p="http://schemas.openxmlformats.org/presentationml/2006/main">
   <p:cSld>
     <p:spTree>
@@ -16785,7 +17160,7 @@
 </p:sld>
 </file>
 
-<file path=ppt/slides/slide47.xml><?xml version="1.0" encoding="utf-8"?>
+<file path=ppt/slides/slide49.xml><?xml version="1.0" encoding="utf-8"?>
 <p:sld xmlns:a="http://schemas.openxmlformats.org/drawingml/2006/main" xmlns:r="http://schemas.openxmlformats.org/officeDocument/2006/relationships" xmlns:p="http://schemas.openxmlformats.org/presentationml/2006/main">
   <p:cSld>
     <p:spTree>
@@ -16901,7 +17276,125 @@
 </p:sld>
 </file>
 
-<file path=ppt/slides/slide48.xml><?xml version="1.0" encoding="utf-8"?>
+<file path=ppt/slides/slide5.xml><?xml version="1.0" encoding="utf-8"?>
+<p:sld xmlns:a="http://schemas.openxmlformats.org/drawingml/2006/main" xmlns:r="http://schemas.openxmlformats.org/officeDocument/2006/relationships" xmlns:p="http://schemas.openxmlformats.org/presentationml/2006/main">
+  <p:cSld>
+    <p:spTree>
+      <p:nvGrpSpPr>
+        <p:cNvPr id="1" name=""/>
+        <p:cNvGrpSpPr/>
+        <p:nvPr/>
+      </p:nvGrpSpPr>
+      <p:grpSpPr>
+        <a:xfrm>
+          <a:off x="0" y="0"/>
+          <a:ext cx="0" cy="0"/>
+          <a:chOff x="0" y="0"/>
+          <a:chExt cx="0" cy="0"/>
+        </a:xfrm>
+      </p:grpSpPr>
+      <p:sp>
+        <p:nvSpPr>
+          <p:cNvPr id="2" name="Title 1"/>
+          <p:cNvSpPr>
+            <a:spLocks noGrp="1"/>
+          </p:cNvSpPr>
+          <p:nvPr>
+            <p:ph type="title"/>
+          </p:nvPr>
+        </p:nvSpPr>
+        <p:spPr>
+          <a:xfrm>
+            <a:off x="457200" y="205979"/>
+            <a:ext cx="8229600" cy="857250"/>
+          </a:xfrm>
+        </p:spPr>
+        <p:txBody>
+          <a:bodyPr/>
+          <a:lstStyle/>
+          <a:p>
+            <a:pPr lvl="0" indent="0" marL="0">
+              <a:buNone/>
+            </a:pPr>
+            <a:r>
+              <a:rPr/>
+              <a:t>The fleet</a:t>
+            </a:r>
+          </a:p>
+        </p:txBody>
+      </p:sp>
+      <p:sp>
+        <p:nvSpPr>
+          <p:cNvPr id="3" name="Content Placeholder 2"/>
+          <p:cNvSpPr>
+            <a:spLocks noGrp="1"/>
+          </p:cNvSpPr>
+          <p:nvPr>
+            <p:ph idx="1"/>
+          </p:nvPr>
+        </p:nvSpPr>
+        <p:spPr>
+          <a:xfrm>
+            <a:off x="457200" y="1200151"/>
+            <a:ext cx="8229600" cy="3394472"/>
+          </a:xfrm>
+        </p:spPr>
+        <p:txBody>
+          <a:bodyPr/>
+          <a:lstStyle/>
+          <a:p>
+            <a:pPr lvl="0"/>
+            <a:r>
+              <a:rPr b="1"/>
+              <a:t>8,000 disk drives</a:t>
+            </a:r>
+            <a:r>
+              <a:rPr/>
+              <a:t> in a data centre</a:t>
+            </a:r>
+          </a:p>
+          <a:p>
+            <a:pPr lvl="0"/>
+            <a:r>
+              <a:rPr/>
+              <a:t>Six SMART counters each: Self-Monitoring, Analysis and Reporting Technology</a:t>
+            </a:r>
+          </a:p>
+          <a:p>
+            <a:pPr lvl="0"/>
+            <a:r>
+              <a:rPr/>
+              <a:t>Reallocated sectors, spin retries, read and seek error rates, temperature, hours in service</a:t>
+            </a:r>
+          </a:p>
+          <a:p>
+            <a:pPr lvl="0"/>
+            <a:r>
+              <a:rPr/>
+              <a:t>Label: did it fail within thirty days?</a:t>
+            </a:r>
+          </a:p>
+          <a:p>
+            <a:pPr lvl="0"/>
+            <a:r>
+              <a:rPr>
+                <a:latin typeface="Courier"/>
+              </a:rPr>
+              <a:t>train_test_split(..., stratify=y)</a:t>
+            </a:r>
+            <a:r>
+              <a:rPr/>
+              <a:t>: 6,000 to train, 2,000 to test</a:t>
+            </a:r>
+          </a:p>
+        </p:txBody>
+      </p:sp>
+    </p:spTree>
+  </p:cSld>
+</p:sld>
+</file>
+
+<file path=ppt/slides/slide50.xml><?xml version="1.0" encoding="utf-8"?>
 <p:sld xmlns:a="http://schemas.openxmlformats.org/drawingml/2006/main" xmlns:r="http://schemas.openxmlformats.org/officeDocument/2006/relationships" xmlns:p="http://schemas.openxmlformats.org/presentationml/2006/main">
   <p:cSld>
     <p:spTree>
@@ -16983,7 +17476,7 @@
 </p:sld>
 </file>
 
-<file path=ppt/slides/slide49.xml><?xml version="1.0" encoding="utf-8"?>
+<file path=ppt/slides/slide51.xml><?xml version="1.0" encoding="utf-8"?>
 <p:sld xmlns:a="http://schemas.openxmlformats.org/drawingml/2006/main" xmlns:r="http://schemas.openxmlformats.org/officeDocument/2006/relationships" xmlns:p="http://schemas.openxmlformats.org/presentationml/2006/main">
   <p:cSld>
     <p:spTree>
@@ -17065,7 +17558,7 @@
 </p:sld>
 </file>
 
-<file path=ppt/slides/slide5.xml><?xml version="1.0" encoding="utf-8"?>
+<file path=ppt/slides/slide52.xml><?xml version="1.0" encoding="utf-8"?>
 <p:sld xmlns:a="http://schemas.openxmlformats.org/drawingml/2006/main" xmlns:r="http://schemas.openxmlformats.org/officeDocument/2006/relationships" xmlns:p="http://schemas.openxmlformats.org/presentationml/2006/main">
   <p:cSld>
     <p:spTree>
@@ -17107,83 +17600,47 @@
             </a:pPr>
             <a:r>
               <a:rPr/>
-              <a:t>The fleet</a:t>
-            </a:r>
-          </a:p>
-        </p:txBody>
-      </p:sp>
-      <p:sp>
-        <p:nvSpPr>
-          <p:cNvPr id="3" name="Content Placeholder 2"/>
-          <p:cNvSpPr>
-            <a:spLocks noGrp="1"/>
-          </p:cNvSpPr>
-          <p:nvPr>
-            <p:ph idx="1"/>
-          </p:nvPr>
-        </p:nvSpPr>
-        <p:spPr>
+              <a:t>Where the two costs cross</a:t>
+            </a:r>
+          </a:p>
+        </p:txBody>
+      </p:sp>
+      <p:pic>
+        <p:nvPicPr>
+          <p:cNvPr descr="expected_cost_lines.png" id="0" name="Picture 1"/>
+          <p:cNvPicPr>
+            <a:picLocks noGrp="1" noChangeAspect="1"/>
+          </p:cNvPicPr>
+          <p:nvPr/>
+        </p:nvPicPr>
+        <p:blipFill>
+          <a:blip r:embed="rId3"/>
+          <a:stretch>
+            <a:fillRect/>
+          </a:stretch>
+        </p:blipFill>
+        <p:spPr bwMode="auto">
           <a:xfrm>
-            <a:off x="457200" y="1200151"/>
-            <a:ext cx="8229600" cy="3394472"/>
+            <a:off x="1148894" y="1166099"/>
+            <a:ext cx="6846211" cy="3360181"/>
           </a:xfrm>
+          <a:prstGeom prst="rect">
+            <a:avLst/>
+          </a:prstGeom>
+          <a:noFill/>
+          <a:ln w="9525">
+            <a:noFill/>
+            <a:headEnd/>
+            <a:tailEnd/>
+          </a:ln>
         </p:spPr>
-        <p:txBody>
-          <a:bodyPr/>
-          <a:lstStyle/>
-          <a:p>
-            <a:pPr lvl="0"/>
-            <a:r>
-              <a:rPr b="1"/>
-              <a:t>8,000 disk drives</a:t>
-            </a:r>
-            <a:r>
-              <a:rPr/>
-              <a:t> in a data centre</a:t>
-            </a:r>
-          </a:p>
-          <a:p>
-            <a:pPr lvl="0"/>
-            <a:r>
-              <a:rPr/>
-              <a:t>Six SMART counters each: Self-Monitoring, Analysis and Reporting Technology</a:t>
-            </a:r>
-          </a:p>
-          <a:p>
-            <a:pPr lvl="0"/>
-            <a:r>
-              <a:rPr/>
-              <a:t>Reallocated sectors, spin retries, read and seek error rates, temperature, hours in service</a:t>
-            </a:r>
-          </a:p>
-          <a:p>
-            <a:pPr lvl="0"/>
-            <a:r>
-              <a:rPr/>
-              <a:t>Label: did it fail within thirty days?</a:t>
-            </a:r>
-          </a:p>
-          <a:p>
-            <a:pPr lvl="0"/>
-            <a:r>
-              <a:rPr>
-                <a:latin typeface="Courier"/>
-              </a:rPr>
-              <a:t>train_test_split(..., stratify=y)</a:t>
-            </a:r>
-            <a:r>
-              <a:rPr/>
-              <a:t>: 6,000 to train, 2,000 to test</a:t>
-            </a:r>
-          </a:p>
-        </p:txBody>
-      </p:sp>
+      </p:pic>
     </p:spTree>
   </p:cSld>
 </p:sld>
 </file>
 
-<file path=ppt/slides/slide50.xml><?xml version="1.0" encoding="utf-8"?>
+<file path=ppt/slides/slide53.xml><?xml version="1.0" encoding="utf-8"?>
 <p:sld xmlns:a="http://schemas.openxmlformats.org/drawingml/2006/main" xmlns:r="http://schemas.openxmlformats.org/officeDocument/2006/relationships" xmlns:p="http://schemas.openxmlformats.org/presentationml/2006/main">
   <p:cSld>
     <p:spTree>
@@ -17274,7 +17731,7 @@
 </p:sld>
 </file>
 
-<file path=ppt/slides/slide51.xml><?xml version="1.0" encoding="utf-8"?>
+<file path=ppt/slides/slide54.xml><?xml version="1.0" encoding="utf-8"?>
 <p:sld xmlns:a="http://schemas.openxmlformats.org/drawingml/2006/main" xmlns:r="http://schemas.openxmlformats.org/officeDocument/2006/relationships" xmlns:p="http://schemas.openxmlformats.org/presentationml/2006/main">
   <p:cSld>
     <p:spTree>
@@ -17356,7 +17813,7 @@
 </p:sld>
 </file>
 
-<file path=ppt/slides/slide52.xml><?xml version="1.0" encoding="utf-8"?>
+<file path=ppt/slides/slide55.xml><?xml version="1.0" encoding="utf-8"?>
 <p:sld xmlns:a="http://schemas.openxmlformats.org/drawingml/2006/main" xmlns:r="http://schemas.openxmlformats.org/officeDocument/2006/relationships" xmlns:p="http://schemas.openxmlformats.org/presentationml/2006/main">
   <p:cSld>
     <p:spTree>
@@ -17472,7 +17929,7 @@
                       </a:pPr>
                       <a:r>
                         <a:rPr/>
-                        <a:t>the ROC curve by hand, 42</a:t>
+                        <a:t>the ROC curve by hand, 43</a:t>
                       </a:r>
                     </a:p>
                   </a:txBody>
@@ -17520,7 +17977,7 @@
                       </a:pPr>
                       <a:r>
                         <a:rPr/>
-                        <a:t>what AUC means, 43</a:t>
+                        <a:t>what AUC means, 44-45</a:t>
                       </a:r>
                     </a:p>
                   </a:txBody>
@@ -17552,7 +18009,7 @@
                       </a:pPr>
                       <a:r>
                         <a:rPr/>
-                        <a:t>the rare-positive trap, 45-46</a:t>
+                        <a:t>the rare-positive trap, 47-48</a:t>
                       </a:r>
                     </a:p>
                   </a:txBody>
@@ -17600,7 +18057,7 @@
                       </a:pPr>
                       <a:r>
                         <a:rPr/>
-                        <a:t>the threshold from costs, 48-50</a:t>
+                        <a:t>the threshold from costs, 50-53</a:t>
                       </a:r>
                     </a:p>
                   </a:txBody>
@@ -17638,7 +18095,7 @@
                       </a:pPr>
                       <a:r>
                         <a:rPr/>
-                        <a:t>class weights, 51</a:t>
+                        <a:t>class weights, 54</a:t>
                       </a:r>
                     </a:p>
                   </a:txBody>
@@ -17676,7 +18133,7 @@
                       </a:pPr>
                       <a:r>
                         <a:rPr/>
-                        <a:t>three classes, 53-54</a:t>
+                        <a:t>three classes, 56-57</a:t>
                       </a:r>
                     </a:p>
                   </a:txBody>
@@ -17712,7 +18169,7 @@
 </p:sld>
 </file>
 
-<file path=ppt/slides/slide53.xml><?xml version="1.0" encoding="utf-8"?>
+<file path=ppt/slides/slide56.xml><?xml version="1.0" encoding="utf-8"?>
 <p:sld xmlns:a="http://schemas.openxmlformats.org/drawingml/2006/main" xmlns:r="http://schemas.openxmlformats.org/officeDocument/2006/relationships" xmlns:p="http://schemas.openxmlformats.org/presentationml/2006/main">
   <p:cSld>
     <p:spTree>
@@ -17794,7 +18251,7 @@
 </p:sld>
 </file>
 
-<file path=ppt/slides/slide54.xml><?xml version="1.0" encoding="utf-8"?>
+<file path=ppt/slides/slide57.xml><?xml version="1.0" encoding="utf-8"?>
 <p:sld xmlns:a="http://schemas.openxmlformats.org/drawingml/2006/main" xmlns:r="http://schemas.openxmlformats.org/officeDocument/2006/relationships" xmlns:p="http://schemas.openxmlformats.org/presentationml/2006/main">
   <p:cSld>
     <p:spTree>
@@ -17876,7 +18333,7 @@
 </p:sld>
 </file>
 
-<file path=ppt/slides/slide55.xml><?xml version="1.0" encoding="utf-8"?>
+<file path=ppt/slides/slide58.xml><?xml version="1.0" encoding="utf-8"?>
 <p:sld xmlns:a="http://schemas.openxmlformats.org/drawingml/2006/main" xmlns:r="http://schemas.openxmlformats.org/officeDocument/2006/relationships" xmlns:p="http://schemas.openxmlformats.org/presentationml/2006/main">
   <p:cSld>
     <p:spTree>
@@ -18005,7 +18462,7 @@
 </p:sld>
 </file>
 
-<file path=ppt/slides/slide56.xml><?xml version="1.0" encoding="utf-8"?>
+<file path=ppt/slides/slide59.xml><?xml version="1.0" encoding="utf-8"?>
 <p:sld xmlns:a="http://schemas.openxmlformats.org/drawingml/2006/main" xmlns:r="http://schemas.openxmlformats.org/officeDocument/2006/relationships" xmlns:p="http://schemas.openxmlformats.org/presentationml/2006/main">
   <p:cSld>
     <p:spTree>

--- a/Lessons/04_classification_and_metrics/Slides/classification_and_metrics_slides.pptx
+++ b/Lessons/04_classification_and_metrics/Slides/classification_and_metrics_slides.pptx
@@ -2346,7 +2346,7 @@
             </a:pPr>
             <a:r>
               <a:rPr/>
-              <a:t>The reading that makes it stick: the cost of an outcome is the SURPRISE of seeing it. Something you called certain costs nothing. Something you gave a probability of one in a thousand costs log 1000, about 6.9 (natural logarithm, as everywhere in this lesson). Something you declared impossible costs infinity.</a:t>
+              <a:t>The interpretation that makes it stick: the cost of an outcome is the SURPRISE of seeing it. Something you called certain costs nothing. Something you gave a probability of one in a thousand costs log 1000, about 6.9 (natural logarithm, as everywhere in this lesson). Something you declared impossible costs infinity.</a:t>
             </a:r>
           </a:p>
           <a:p>
@@ -6586,7 +6586,7 @@
             </a:pPr>
             <a:r>
               <a:rPr/>
-              <a:t>The same reading holds for resampling and for SMOTE (synthetic minority oversampling technique, which builds artificial minority examples): they move the operating point too. And both must be applied to the training rows only - inside each cross-validation fold, once lesson 5 introduces folds. Duplicated or synthetic failures in the test set would be scored as if they were real drives, and the test score would stop describing the real fleet; lesson 2 made the same argument for fitting the imputer on the training rows only.</a:t>
+              <a:t>The same argument holds for resampling and for SMOTE (synthetic minority oversampling technique, which builds artificial minority examples): they move the operating point too. And both must be applied to the training rows only - inside each cross-validation fold, once lesson 5 introduces folds. Duplicated or synthetic failures in the test set would be scored as if they were real drives, and the test score would stop describing the real fleet; lesson 2 made the same argument for fitting the imputer on the training rows only.</a:t>
             </a:r>
           </a:p>
         </p:txBody>
@@ -7600,7 +7600,7 @@
             </a:pPr>
             <a:r>
               <a:rPr/>
-              <a:t>The predictable mistake: students think the sigmoid was picked because it looks like the right S-shape. A reasonable reading, because the shape is what slide 8 shows first. But many curves have that shape; what singles this one out is the log-odds behind it. Handout section 2.3.</a:t>
+              <a:t>The predictable mistake: students think the sigmoid was picked because it looks like the right S-shape. A reasonable interpretation, because the shape is what slide 8 shows first. But many curves have that shape; what singles this one out is the log-odds behind it. Handout section 2.3.</a:t>
             </a:r>
           </a:p>
         </p:txBody>
@@ -7710,7 +7710,7 @@
             </a:pPr>
             <a:r>
               <a:rPr/>
-              <a:t>The picture shows three drives, marked by the yellow dots: an average drive at 0.2%, one at 50% and one at 95%. Each receives the same reading, one that is six times more common among drives that fail than among healthy ones. Bayes’ rule says such a reading multiplies the odds - the probability of failing divided by the probability of not failing - by 6, whatever they were before (handout section 2.3 shows it by counting 1,000 drives). On the horizontal axis, the log-odds, multiplying by 6 is always the same step: the three teal arrows have the same length.</a:t>
+              <a:t>The picture shows three drives, marked by the yellow dots: an average drive at 0.2%, one at 50% and one at 95%. Each receives the same reading - a value one of its counters reports, say a high count of reallocated sectors - and it is a reading six times more common among drives that fail than among healthy ones. Bayes’ rule says such a reading multiplies the odds - the probability of failing divided by the probability of not failing - by 6, whatever they were before (handout section 2.3 shows it by counting 1,000 drives). On the horizontal axis, the log-odds, multiplying by 6 is always the same step: the three teal arrows have the same length.</a:t>
             </a:r>
           </a:p>
           <a:p>

--- a/Lessons/04_classification_and_metrics/Slides/classification_and_metrics_slides.pptx
+++ b/Lessons/04_classification_and_metrics/Slides/classification_and_metrics_slides.pptx
@@ -940,7 +940,21 @@
             </a:pPr>
             <a:r>
               <a:rPr/>
-              <a:t>First bullet, its first half. Standardising first (StandardScaler, lesson 3) puts every feature in the same unit, one standard deviation, so the coefficients can be compared with each other. For the four counters that the data puts on a logarithmic scale, it is one standard deviation of the transformed column.</a:t>
+              <a:t>First bullet, its first half: why “standardised” comes first. A coefficient says how much z grows when its feature rises by one unit, and the raw units differ - a sector, a degree, an hour in service - so raw coefficients cannot be compared. StandardScaler (lesson 3) rescales every feature to mean 0 and standard deviation 1: from then on, one unit means one standard deviation for every feature, and the coefficients can be compared with each other.</a:t>
+            </a:r>
+          </a:p>
+          <a:p>
+            <a:pPr lvl="0" indent="0" marL="0">
+              <a:buNone/>
+            </a:pPr>
+          </a:p>
+          <a:p>
+            <a:pPr lvl="0" indent="0" marL="0">
+              <a:buNone/>
+            </a:pPr>
+            <a:r>
+              <a:rPr/>
+              <a:t>Say what one standard deviation means for this counter, because it is not “one sector more”. The four counters on a logarithmic scale are standardised after log(1 + x), so reallocated sectors contribute 1.80 times (log(1 + x) minus 0.96) divided by 0.62 to z, where 0.96 and 0.62 are the mean and the standard deviation of log(1 + x) over the fleet. One standard deviation more adds 0.62 to log(1 + x), which multiplies 1 + x by e to the 0.62 = 1.86: from 1 sector to 2.7, from 4 to 8.3, from 10 to 19.5. Roughly, the count doubles - and each such step multiplies the odds by the same 6.05. That is why the first sectors weigh so much: 1 to 2.7 sectors counts as much as 10 to 19.5. Temperature and hours are standardised on their own values, so for them one standard deviation is an ordinary additive step.</a:t>
             </a:r>
           </a:p>
           <a:p>
@@ -11217,7 +11231,7 @@
             <a:pPr lvl="0"/>
             <a:r>
               <a:rPr/>
-              <a:t>Standardised: one standard deviation more of reallocated sectors adds 1.80 to the log-odds</a:t>
+              <a:t>Standardised (mean 0, SD 1): one SD more of reallocated sectors adds its true coefficient, 1.80 (slide 14), to the log-odds</a:t>
             </a:r>
           </a:p>
           <a:p>

--- a/Lessons/04_classification_and_metrics/Slides/classification_and_metrics_slides.pptx
+++ b/Lessons/04_classification_and_metrics/Slides/classification_and_metrics_slides.pptx
@@ -1258,7 +1258,21 @@
             </a:pPr>
             <a:r>
               <a:rPr/>
-              <a:t>Say first what the intercept is NOT: it is not the base rate. The fleet fails at 3.8%; the intercept describes a drive whose every counter sits at the average, and such a drive almost never fails. The failures come from the small group of drives far above average on one or more counters. Handout section 2.4.</a:t>
+              <a:t>Start with what x = 0 means. The intercept is the value of the log-odds when every x is 0 - but the x are standardised (slide 13), so x = 0 is not a drive with no sectors and no errors: it is a drive sitting exactly at the fleet average on every counter.</a:t>
+            </a:r>
+          </a:p>
+          <a:p>
+            <a:pPr lvl="0" indent="0" marL="0">
+              <a:buNone/>
+            </a:pPr>
+          </a:p>
+          <a:p>
+            <a:pPr lvl="0" indent="0" marL="0">
+              <a:buNone/>
+            </a:pPr>
+            <a:r>
+              <a:rPr/>
+              <a:t>Then say what the intercept is NOT: it is not the base rate. The fleet fails at 3.8%; the intercept describes a drive whose every counter sits at the average, and such a drive almost never fails. The failures come from the small group of drives far above average on one or more counters. Handout section 2.4.</a:t>
             </a:r>
           </a:p>
           <a:p>
@@ -11882,7 +11896,7 @@
             </a:r>
             <a:r>
               <a:rPr/>
-              <a:t>, the log-odds of a drive average on every counter (all x = 0)</a:t>
+              <a:t>, the log-odds of a drive average on every counter (all standardised x = 0)</a:t>
             </a:r>
           </a:p>
           <a:p>

--- a/Lessons/04_classification_and_metrics/Slides/classification_and_metrics_slides.pptx
+++ b/Lessons/04_classification_and_metrics/Slides/classification_and_metrics_slides.pptx
@@ -12677,7 +12677,7 @@
                       </a:pPr>
                       <a:r>
                         <a:rPr/>
-                        <a:t>All three: multiply</a:t>
+                        <a:t>All three together, if the drives are independent: multiply, as for two coins (½ × ½ = ¼)</a:t>
                       </a:r>
                     </a:p>
                   </a:txBody>

--- a/Lessons/04_classification_and_metrics/Slides/classification_and_metrics_slides.pptx
+++ b/Lessons/04_classification_and_metrics/Slides/classification_and_metrics_slides.pptx
@@ -737,6 +737,20 @@
               <a:t>The handout runs the same algebra in the other direction, from the sigmoid to the log-odds, in section 2.3.</a:t>
             </a:r>
           </a:p>
+          <a:p>
+            <a:pPr lvl="0" indent="0" marL="0">
+              <a:buNone/>
+            </a:pPr>
+          </a:p>
+          <a:p>
+            <a:pPr lvl="0" indent="0" marL="0">
+              <a:buNone/>
+            </a:pPr>
+            <a:r>
+              <a:rPr/>
+              <a:t>Two predictable slips, worth correcting as soon as you hear them. First, p is not a vague “probability that the drive has problems”: it is P(y = 1 | x), the probability that this drive fails within thirty days, given its six counters. Second, the line has the same form as lesson 3’s, but it is not fitted by least squares: w and b are chosen by maximum likelihood, which slides 16 to 21 build.</a:t>
+            </a:r>
+          </a:p>
         </p:txBody>
       </p:sp>
       <p:sp>
@@ -1523,6 +1537,20 @@
               <a:t>Ask the room: is setting 1 a good setting? Let them argue it from the table. It gave the drive that failed a high p, and the two that survived a low one, so it looks good. The next slide turns that impression into a number.</a:t>
             </a:r>
           </a:p>
+          <a:p>
+            <a:pPr lvl="0" indent="0" marL="0">
+              <a:buNone/>
+            </a:pPr>
+          </a:p>
+          <a:p>
+            <a:pPr lvl="0" indent="0" marL="0">
+              <a:buNone/>
+            </a:pPr>
+            <a:r>
+              <a:rPr/>
+              <a:t>A predictable slip: reading B’s 0.1 as “the probability of what happened to B”. It is not. p is the probability of FAILING for every drive, including the two that stayed healthy; the probability of what happened to B is 1 - 0.1 = 0.9, and that conversion is exactly the next slide.</a:t>
+            </a:r>
+          </a:p>
         </p:txBody>
       </p:sp>
       <p:sp>
@@ -1647,6 +1675,20 @@
               <a:t>That product has a name: the likelihood of the setting. The next slide writes the same two rules as formulas.</a:t>
             </a:r>
           </a:p>
+          <a:p>
+            <a:pPr lvl="0" indent="0" marL="0">
+              <a:buNone/>
+            </a:pPr>
+          </a:p>
+          <a:p>
+            <a:pPr lvl="0" indent="0" marL="0">
+              <a:buNone/>
+            </a:pPr>
+            <a:r>
+              <a:rPr/>
+              <a:t>A predictable slip: describing this slide as “the probability of failing for the three drives”. The last column is the probability of WHAT HAPPENED - of failing for A, of staying healthy for B and C. And the multiplication needs its condition said aloud: the drives must be independent, as two coin tosses are, for the probability of all three outcomes to be the product.</a:t>
+            </a:r>
+          </a:p>
         </p:txBody>
       </p:sp>
       <p:sp>
@@ -1769,6 +1811,20 @@
             <a:r>
               <a:rPr/>
               <a:t>The p inside depends on w and b, through p = sigma(w-transpose-x + b). That is why L is written as a function of w and b: change the setting, every p changes, and the likelihood changes with them. Handout section 3.2.</a:t>
+            </a:r>
+          </a:p>
+          <a:p>
+            <a:pPr lvl="0" indent="0" marL="0">
+              <a:buNone/>
+            </a:pPr>
+          </a:p>
+          <a:p>
+            <a:pPr lvl="0" indent="0" marL="0">
+              <a:buNone/>
+            </a:pPr>
+            <a:r>
+              <a:rPr/>
+              <a:t>A predictable slip of language: calling the top line “the likelihood of one example”. It is one drive’s factor, the probability of what happened to that drive. The likelihood is the product on the bottom line, read as a function of w and b with the data held fixed - which is why it is written L(w, b).</a:t>
             </a:r>
           </a:p>
         </p:txBody>
@@ -12771,7 +12827,7 @@
             </a:pPr>
             <a:r>
               <a:rPr/>
-              <a:t>Step 2 as formulas: the likelihood</a:t>
+              <a:t>Step 2 as formulas: one drive, then the likelihood</a:t>
             </a:r>
           </a:p>
         </p:txBody>

--- a/Lessons/04_classification_and_metrics/Slides/classification_and_metrics_slides.pptx
+++ b/Lessons/04_classification_and_metrics/Slides/classification_and_metrics_slides.pptx
@@ -1906,6 +1906,20 @@
             </a:pPr>
             <a:r>
               <a:rPr/>
+              <a:t>Why a second setting at all: 0.576 on its own means nothing - there is no scale on which it is “high” or “low”. A likelihood is only useful as a comparison between settings, so we need a second one to compare against.</a:t>
+            </a:r>
+          </a:p>
+          <a:p>
+            <a:pPr lvl="0" indent="0" marL="0">
+              <a:buNone/>
+            </a:pPr>
+          </a:p>
+          <a:p>
+            <a:pPr lvl="0" indent="0" marL="0">
+              <a:buNone/>
+            </a:pPr>
+            <a:r>
+              <a:rPr/>
               <a:t>Now a second setting, a different choice of w and b. It gives the three drives p = 0.3, 0.6 and 0.5: a low p to the drive that failed, a high p to one that survived. It looks worse, and the likelihood says how much worse.</a:t>
             </a:r>
           </a:p>
@@ -2168,6 +2182,20 @@
             </a:pPr>
             <a:r>
               <a:rPr/>
+              <a:t>A predictable slip: calling setting 1 “the maximum” and 0.55 “the minimum cost”. Setting 1 only beats setting 2; other choices of w and b would surely make these three outcomes more probable still. The maximum likelihood over every possible (w, b) - the same point as the minimum cost - is what fitting finds.</a:t>
+            </a:r>
+          </a:p>
+          <a:p>
+            <a:pPr lvl="0" indent="0" marL="0">
+              <a:buNone/>
+            </a:pPr>
+          </a:p>
+          <a:p>
+            <a:pPr lvl="0" indent="0" marL="0">
+              <a:buNone/>
+            </a:pPr>
+            <a:r>
+              <a:rPr/>
               <a:t>Read the per-drive numbers too. Minus the log of a probability is called the surprise of an outcome: 0 for something you were certain of, large for something you said was unlikely. Setting 2 is most surprised by drive A, 1.20, because it gave A’s failure only 0.3. Maximum likelihood and least total surprise are the same choice.</a:t>
             </a:r>
           </a:p>
@@ -7766,7 +7794,21 @@
             </a:pPr>
             <a:r>
               <a:rPr/>
-              <a:t>Slide 9 said the log-odds has the range a line needs. That is true, but it is not a reason: plenty of other functions also stretch (0, 1) onto the whole line. This picture gives the reason.</a:t>
+              <a:t>Slide 9 said the log-odds has the range a line needs. That is true, but it is not a reason: plenty of other functions also stretch (0, 1) onto the whole line. This slide gives the reason, in two steps: first why evidence multiplies the odds, then what that looks like.</a:t>
+            </a:r>
+          </a:p>
+          <a:p>
+            <a:pPr lvl="0" indent="0" marL="0">
+              <a:buNone/>
+            </a:pPr>
+          </a:p>
+          <a:p>
+            <a:pPr lvl="0" indent="0" marL="0">
+              <a:buNone/>
+            </a:pPr>
+            <a:r>
+              <a:rPr/>
+              <a:t>Why it multiplies, by counting, before pointing at the figure. Take 1,000 drives at 50% risk: 500 will fail, 500 will not. A reading shows up on 60% of the failing drives and on 10% of the healthy ones. Among the drives that show it, 300 will fail and 50 will not: the odds, failing divided by healthy, go from 500 / 500 = 1 to 300 / 50 = 6. The reading scales the failing drives by 0.6 and the healthy ones by 0.1, so their ratio is multiplied by 0.6 / 0.1 = 6 whatever it was before - start from 950 and 50 and you get 570 and 5, odds 19 to 114. That is Bayes’ rule written with odds. The figure takes it as given and shows the consequence.</a:t>
             </a:r>
           </a:p>
           <a:p>
@@ -11027,7 +11069,7 @@
             </a:pPr>
             <a:r>
               <a:rPr/>
-              <a:t>Evidence multiplies the odds</a:t>
+              <a:t>The same evidence on three drives</a:t>
             </a:r>
           </a:p>
         </p:txBody>

--- a/Lessons/04_classification_and_metrics/Slides/classification_and_metrics_slides.pptx
+++ b/Lessons/04_classification_and_metrics/Slides/classification_and_metrics_slides.pptx
@@ -2335,6 +2335,20 @@
             <a:r>
               <a:rPr/>
               <a:t>Now the six dots. Setting 1’s factors, 0.8, 0.9 and 0.8, sit on the flat right-hand part: small surprises, 0.22 + 0.11 + 0.22 = 0.55 in all. Setting 2’s, 0.3, 0.4 and 0.5, sit higher up: 1.20 + 0.92 + 0.69 = 2.81. The highest dot is drive A under setting 2: it failed, and setting 2 had given its failure only 0.3, so minus log 0.3 = 1.20.</a:t>
+            </a:r>
+          </a:p>
+          <a:p>
+            <a:pPr lvl="0" indent="0" marL="0">
+              <a:buNone/>
+            </a:pPr>
+          </a:p>
+          <a:p>
+            <a:pPr lvl="0" indent="0" marL="0">
+              <a:buNone/>
+            </a:pPr>
+            <a:r>
+              <a:rPr/>
+              <a:t>Why it is called surprise: minus log p behaves the way surprise does. Zero when the model was certain and was right (minus log 1 = 0); large when it had called the outcome unlikely (minus log 0.001 = 6.9); infinite when it had called it impossible. And for independent outcomes the surprises add up, because the log of a product is the sum of the logs - which is why three drives cost the sum of their three surprises. The name comes from information theory, Shannon’s work, and is not examinable. The useful reading: the cost is the model’s average surprise at what really happened, and fitting makes the data as unsurprising as possible - the same thing as making it as likely as possible.</a:t>
             </a:r>
           </a:p>
           <a:p>

--- a/Lessons/04_classification_and_metrics/Slides/classification_and_metrics_slides.pptx
+++ b/Lessons/04_classification_and_metrics/Slides/classification_and_metrics_slides.pptx
@@ -2500,6 +2500,20 @@
             </a:pPr>
             <a:r>
               <a:rPr/>
+              <a:t>A predictable slip: “with y = 1 the second term is 0 times log 0, which is 0 times minus infinity”. The coefficient is 1 - y, but the logarithm’s argument is 1 - p, the model’s probability - and p = sigma(z) lies strictly between 0 and 1, so log(1 - p) is finite and 0 times it is 0. Only p exactly 1 would give log 0, and the sigmoid never reaches it. In a computer p can round to 1.0 when z is large, which is why code clips p into [epsilon, 1 - epsilon]: notebook 1 adds 1e-12 inside the log, and scikit-learn’s log_loss clips too.</a:t>
+            </a:r>
+          </a:p>
+          <a:p>
+            <a:pPr lvl="0" indent="0" marL="0">
+              <a:buNone/>
+            </a:pPr>
+          </a:p>
+          <a:p>
+            <a:pPr lvl="0" indent="0" marL="0">
+              <a:buNone/>
+            </a:pPr>
+            <a:r>
+              <a:rPr/>
               <a:t>And the headline: nobody designed this function. It fell out of asking for the parameters that make the data least surprising.</a:t>
             </a:r>
           </a:p>
@@ -2791,6 +2805,20 @@
             <a:r>
               <a:rPr/>
               <a:t>That is the failure. Not that squared error scores badly - that it stops teaching.</a:t>
+            </a:r>
+          </a:p>
+          <a:p>
+            <a:pPr lvl="0" indent="0" marL="0">
+              <a:buNone/>
+            </a:pPr>
+          </a:p>
+          <a:p>
+            <a:pPr lvl="0" indent="0" marL="0">
+              <a:buNone/>
+            </a:pPr>
+            <a:r>
+              <a:rPr/>
+              <a:t>A predictable slip, from the left panel alone: “log loss charges more, so gradient descent works better with it”. The size of a cost does not matter to gradient descent - multiply a cost by 100 and its minimum is in the same place. What matters is the gradient, the right panel: the push squared error gives dies away exactly when the model is confidently wrong, and log loss’s does not.</a:t>
             </a:r>
           </a:p>
         </p:txBody>

--- a/Lessons/04_classification_and_metrics/Slides/classification_and_metrics_slides.pptx
+++ b/Lessons/04_classification_and_metrics/Slides/classification_and_metrics_slides.pptx
@@ -5,7 +5,7 @@
     <p:sldMasterId id="2147483648" r:id="rId1"/>
   </p:sldMasterIdLst>
   <p:notesMasterIdLst>
-    <p:notesMasterId r:id="rId61"/>
+    <p:notesMasterId r:id="rId62"/>
   </p:notesMasterIdLst>
   <p:sldIdLst>
     <p:sldId id="256" r:id="rId2"/>
@@ -67,6 +67,7 @@
     <p:sldId id="312" r:id="rId58"/>
     <p:sldId id="313" r:id="rId59"/>
     <p:sldId id="314" r:id="rId60"/>
+    <p:sldId id="315" r:id="rId61"/>
   </p:sldIdLst>
   <p:sldSz cx="9144000" cy="5143500" type="screen16x9"/>
   <p:notesSz cx="6858000" cy="9144000"/>
@@ -596,7 +597,7 @@
             </a:pPr>
             <a:r>
               <a:rPr/>
-              <a:t>The one to watch for: choosing the penalty by looking at the test error. It is the natural thing to do because the test error is the number they were told to care about. It is exactly the mistake lesson 1 named: once the test set has helped choose anything, its score is no longer an honest estimate of how the model does on new data, because the choice was fitted to it. Today’s lesson ends up in the same place from a different direction, on slide 53, when we choose a decision threshold by looking at the test set. Lesson 5 gives them the machinery to do both honestly.</a:t>
+              <a:t>The one to watch for: choosing the penalty by looking at the test error. It is the natural thing to do because the test error is the number they were told to care about. It is exactly the mistake lesson 1 named: once the test set has helped choose anything, its score is no longer an honest estimate of how the model does on new data, because the choice was fitted to it. Today’s lesson ends up in the same place from a different direction, on slide 54, when we choose a decision threshold by looking at the test set. Lesson 5 gives them the machinery to do both honestly.</a:t>
             </a:r>
           </a:p>
         </p:txBody>
@@ -748,7 +749,7 @@
             </a:pPr>
             <a:r>
               <a:rPr/>
-              <a:t>Two predictable slips, worth correcting as soon as you hear them. First, p is not a vague “probability that the drive has problems”: it is P(y = 1 | x), the probability that this drive fails within thirty days, given its six counters. Second, the line has the same form as lesson 3’s, but it is not fitted by least squares: w and b are chosen by maximum likelihood, which slides 16 to 21 build.</a:t>
+              <a:t>Two predictable slips, worth correcting as soon as you hear them. First, p is not a vague “probability that the drive has problems”: it is P(y = 1 | x), the probability that this drive fails within thirty days, given its six counters. Second, the line has the same form as lesson 3’s, but it is not fitted by least squares: w and b are chosen by maximum likelihood, which slides 17 to 22 build.</a:t>
             </a:r>
           </a:p>
         </p:txBody>
@@ -858,7 +859,7 @@
             </a:pPr>
             <a:r>
               <a:rPr/>
-              <a:t>That last one is the one to flag. It is largest in the middle, at sigma = 0.5, where it is 0.5 times 0.5 = one quarter, and it decays to zero at both ends. That one fact does two jobs later. It is why the sigmoid behaves well: flat ends mean that once the model is sure, extra evidence changes little (slide 8). And it is why squared error fails with it: slide 25 shows that the same factor ends up inside squared error’s gradient and switches learning off exactly when the model is confidently wrong.</a:t>
+              <a:t>That last one is the one to flag. It is largest in the middle, at sigma = 0.5, where it is 0.5 times 0.5 = one quarter, and it decays to zero at both ends. That one fact does two jobs later. It is why the sigmoid behaves well: flat ends mean that once the model is sure, extra evidence changes little (slide 8). And it is why squared error fails with it: slide 26 shows that the same factor ends up inside squared error’s gradient and switches learning off exactly when the model is confidently wrong.</a:t>
             </a:r>
           </a:p>
         </p:txBody>
@@ -940,105 +941,49 @@
             </a:pPr>
             <a:r>
               <a:rPr/>
-              <a:t>This is the interpretability that keeps logistic regression in production in medicine and credit scoring. Three steps, one per bullet.</a:t>
-            </a:r>
-          </a:p>
-          <a:p>
-            <a:pPr lvl="0" indent="0" marL="0">
-              <a:buNone/>
-            </a:pPr>
-          </a:p>
-          <a:p>
-            <a:pPr lvl="0" indent="0" marL="0">
-              <a:buNone/>
-            </a:pPr>
-            <a:r>
-              <a:rPr/>
-              <a:t>First bullet, its first half: why “standardised” comes first. A coefficient says how much z grows when its feature rises by one unit, and the raw units differ - a sector, a degree, an hour in service - so raw coefficients cannot be compared. StandardScaler (lesson 3) rescales every feature to mean 0 and standard deviation 1: from then on, one unit means one standard deviation for every feature, and the coefficients can be compared with each other.</a:t>
-            </a:r>
-          </a:p>
-          <a:p>
-            <a:pPr lvl="0" indent="0" marL="0">
-              <a:buNone/>
-            </a:pPr>
-          </a:p>
-          <a:p>
-            <a:pPr lvl="0" indent="0" marL="0">
-              <a:buNone/>
-            </a:pPr>
-            <a:r>
-              <a:rPr/>
-              <a:t>Say what one standard deviation means for this counter, because it is not “one sector more”. The four counters on a logarithmic scale are standardised after log(1 + x), so reallocated sectors contribute 1.80 times (log(1 + x) minus 0.96) divided by 0.62 to z, where 0.96 and 0.62 are the mean and the standard deviation of log(1 + x) over the fleet. One standard deviation more adds 0.62 to log(1 + x), which multiplies 1 + x by e to the 0.62 = 1.86: from 1 sector to 2.7, from 4 to 8.3, from 10 to 19.5. Roughly, the count doubles - and each such step multiplies the odds by the same 6.05. That is why the first sectors weigh so much: 1 to 2.7 sectors counts as much as 10 to 19.5. Temperature and hours are standardised on their own values, so for them one standard deviation is an ordinary additive step.</a:t>
-            </a:r>
-          </a:p>
-          <a:p>
-            <a:pPr lvl="0" indent="0" marL="0">
-              <a:buNone/>
-            </a:pPr>
-          </a:p>
-          <a:p>
-            <a:pPr lvl="0" indent="0" marL="0">
-              <a:buNone/>
-            </a:pPr>
-            <a:r>
-              <a:rPr/>
-              <a:t>First bullet, its second half: this is slide 11’s line, log-odds = b + w1 x1 + … + w6 x6. Each feature contributes its coefficient times its value, so raising reallocated sectors by one standard deviation adds exactly its coefficient to the log-odds - 1.80 is the true coefficient, the one the data was generated with (next slide) - and it adds 1.80 whatever the other five counters say. That is what “linear” buys.</a:t>
-            </a:r>
-          </a:p>
-          <a:p>
-            <a:pPr lvl="0" indent="0" marL="0">
-              <a:buNone/>
-            </a:pPr>
-          </a:p>
-          <a:p>
-            <a:pPr lvl="0" indent="0" marL="0">
-              <a:buNone/>
-            </a:pPr>
-            <a:r>
-              <a:rPr/>
-              <a:t>Second bullet: why a sum on the log-odds becomes a product on the odds. The logarithm turns products into sums, log of a times b is log a plus log b. Read it backwards: adding 1.80 to the logarithm of the odds is the same as multiplying the odds by exp(1.80), which is 6.05. Check it on an average drive: its log-odds are the intercept, minus 6.20, so its odds are exp(-6.20) = 0.0020. One standard deviation more of reallocated sectors: log-odds minus 4.40, odds exp(-4.40) = 0.0123. Divide: 6.05.</a:t>
-            </a:r>
-          </a:p>
-          <a:p>
-            <a:pPr lvl="0" indent="0" marL="0">
-              <a:buNone/>
-            </a:pPr>
-          </a:p>
-          <a:p>
-            <a:pPr lvl="0" indent="0" marL="0">
-              <a:buNone/>
-            </a:pPr>
-            <a:r>
-              <a:rPr/>
-              <a:t>Third bullet: that is the arrow of slide 10’s figure. Every teal arrow was a multiplication of the odds by 6, and on the log-odds axis it had the same length - 1.79, almost exactly this coefficient. The fitted coefficient on the next slide is 1.66, a multiplier of 5.28.</a:t>
-            </a:r>
-          </a:p>
-          <a:p>
-            <a:pPr lvl="0" indent="0" marL="0">
-              <a:buNone/>
-            </a:pPr>
-          </a:p>
-          <a:p>
-            <a:pPr lvl="0" indent="0" marL="0">
-              <a:buNone/>
-            </a:pPr>
-            <a:r>
-              <a:rPr/>
-              <a:t>Now the mistake they will make, and it is a reasonable one. They will read “six times the odds” as “six times as likely”. For rare events those are nearly the same number, so here it is almost right - which is exactly why the habit survives until it does damage.</a:t>
-            </a:r>
-          </a:p>
-          <a:p>
-            <a:pPr lvl="0" indent="0" marL="0">
-              <a:buNone/>
-            </a:pPr>
-          </a:p>
-          <a:p>
-            <a:pPr lvl="0" indent="0" marL="0">
-              <a:buNone/>
-            </a:pPr>
-            <a:r>
-              <a:rPr/>
-              <a:t>Give them the counterexample out loud: a probability of 0.90 is odds of 0.9 divided by 0.1 = 9; multiplied by 5 that gives odds of 45, which is a probability of 45 divided by 46 = 0.978. The odds went up fivefold; the probability moved eight points. Odds ratios multiply odds.</a:t>
+              <a:t>The same model as the previous slide, drawn instead of written. Each counter x is multiplied by its weight w, the products are added together with b - drawn as the weight on a constant input of 1 - and the sum z goes through the sigmoid. Out comes p, the probability that the drive fails.</a:t>
+            </a:r>
+          </a:p>
+          <a:p>
+            <a:pPr lvl="0" indent="0" marL="0">
+              <a:buNone/>
+            </a:pPr>
+          </a:p>
+          <a:p>
+            <a:pPr lvl="0" indent="0" marL="0">
+              <a:buNone/>
+            </a:pPr>
+            <a:r>
+              <a:rPr/>
+              <a:t>This diagram has a history. In 1958 Frank Rosenblatt published the perceptron: the same weigh-and-add, followed by a hard step instead of the sigmoid, so its output was a label, 0 or 1, and never a probability. It also learned by its own rule, adjusting the weights only after a mistake, where logistic regression minimises log loss. Lesson 1 told that story; lesson 9 picks it up again.</a:t>
+            </a:r>
+          </a:p>
+          <a:p>
+            <a:pPr lvl="0" indent="0" marL="0">
+              <a:buNone/>
+            </a:pPr>
+          </a:p>
+          <a:p>
+            <a:pPr lvl="0" indent="0" marL="0">
+              <a:buNone/>
+            </a:pPr>
+            <a:r>
+              <a:rPr/>
+              <a:t>Say the point plainly: logistic regression is one neuron. A neural network, lesson 9, is many of these units side by side and one after another. Nothing on this slide is new mathematics; what is new is the picture, and it is the building block of everything in the last two lessons.</a:t>
+            </a:r>
+          </a:p>
+          <a:p>
+            <a:pPr lvl="0" indent="0" marL="0">
+              <a:buNone/>
+            </a:pPr>
+          </a:p>
+          <a:p>
+            <a:pPr lvl="0" indent="0" marL="0">
+              <a:buNone/>
+            </a:pPr>
+            <a:r>
+              <a:rPr/>
+              <a:t>A predictable slip: “the perceptron is logistic regression”. Same diagram, different squash and different training. The step’s slope is 0 everywhere except at z = 0, where it has none, so it gives gradient descent nothing to follow; the smooth sigmoid does.</a:t>
             </a:r>
           </a:p>
         </p:txBody>
@@ -1120,63 +1065,105 @@
             </a:pPr>
             <a:r>
               <a:rPr/>
-              <a:t>Notebook 1, last section. This is the payoff of using synthetic data: we do not just look at the estimates, we check them against the truth.</a:t>
-            </a:r>
-          </a:p>
-          <a:p>
-            <a:pPr lvl="0" indent="0" marL="0">
-              <a:buNone/>
-            </a:pPr>
-          </a:p>
-          <a:p>
-            <a:pPr lvl="0" indent="0" marL="0">
-              <a:buNone/>
-            </a:pPr>
-            <a:r>
-              <a:rPr/>
-              <a:t>The columns: True is the coefficient disk_data.py generated the labels with, Fitted is what LogisticRegression estimated from 6,000 training drives, and “Odds ×” is exp(Fitted), the multiplier of slide 13.</a:t>
-            </a:r>
-          </a:p>
-          <a:p>
-            <a:pPr lvl="0" indent="0" marL="0">
-              <a:buNone/>
-            </a:pPr>
-          </a:p>
-          <a:p>
-            <a:pPr lvl="0" indent="0" marL="0">
-              <a:buNone/>
-            </a:pPr>
-            <a:r>
-              <a:rPr/>
-              <a:t>Go down the column. Everything is close. Nothing is exact, and say why - 6,000 training drives carrying 230 failures (306 in the fleet minus the 76 kept for the test set) is a modest amount of evidence, and 230 is the number that matters, not 6,000.</a:t>
-            </a:r>
-          </a:p>
-          <a:p>
-            <a:pPr lvl="0" indent="0" marL="0">
-              <a:buNone/>
-            </a:pPr>
-          </a:p>
-          <a:p>
-            <a:pPr lvl="0" indent="0" marL="0">
-              <a:buNone/>
-            </a:pPr>
-            <a:r>
-              <a:rPr/>
-              <a:t>Then the last row, which is the one to pause on. seek_error_rate was generated with a coefficient of exactly zero: a real-looking counter with no connection to failure. The model estimates 0.02, an odds multiplier of exp(0.02) = 1.02. It did not fall for it.</a:t>
-            </a:r>
-          </a:p>
-          <a:p>
-            <a:pPr lvl="0" indent="0" marL="0">
-              <a:buNone/>
-            </a:pPr>
-          </a:p>
-          <a:p>
-            <a:pPr lvl="0" indent="0" marL="0">
-              <a:buNone/>
-            </a:pPr>
-            <a:r>
-              <a:rPr/>
-              <a:t>Then ask the room the harder question: would you have noticed, if I had not told you? Leave it hanging. It is lesson 5.</a:t>
+              <a:t>This is the interpretability that keeps logistic regression in production in medicine and credit scoring. Three steps, one per bullet.</a:t>
+            </a:r>
+          </a:p>
+          <a:p>
+            <a:pPr lvl="0" indent="0" marL="0">
+              <a:buNone/>
+            </a:pPr>
+          </a:p>
+          <a:p>
+            <a:pPr lvl="0" indent="0" marL="0">
+              <a:buNone/>
+            </a:pPr>
+            <a:r>
+              <a:rPr/>
+              <a:t>First bullet, its first half: why “standardised” comes first. A coefficient says how much z grows when its feature rises by one unit, and the raw units differ - a sector, a degree, an hour in service - so raw coefficients cannot be compared. StandardScaler (lesson 3) rescales every feature to mean 0 and standard deviation 1: from then on, one unit means one standard deviation for every feature, and the coefficients can be compared with each other.</a:t>
+            </a:r>
+          </a:p>
+          <a:p>
+            <a:pPr lvl="0" indent="0" marL="0">
+              <a:buNone/>
+            </a:pPr>
+          </a:p>
+          <a:p>
+            <a:pPr lvl="0" indent="0" marL="0">
+              <a:buNone/>
+            </a:pPr>
+            <a:r>
+              <a:rPr/>
+              <a:t>Say what one standard deviation means for this counter, because it is not “one sector more”. The four counters on a logarithmic scale are standardised after log(1 + x), so reallocated sectors contribute 1.80 times (log(1 + x) minus 0.96) divided by 0.62 to z, where 0.96 and 0.62 are the mean and the standard deviation of log(1 + x) over the fleet. One standard deviation more adds 0.62 to log(1 + x), which multiplies 1 + x by e to the 0.62 = 1.86: from 1 sector to 2.7, from 4 to 8.3, from 10 to 19.5. Roughly, the count doubles - and each such step multiplies the odds by the same 6.05. That is why the first sectors weigh so much: 1 to 2.7 sectors counts as much as 10 to 19.5. Temperature and hours are standardised on their own values, so for them one standard deviation is an ordinary additive step.</a:t>
+            </a:r>
+          </a:p>
+          <a:p>
+            <a:pPr lvl="0" indent="0" marL="0">
+              <a:buNone/>
+            </a:pPr>
+          </a:p>
+          <a:p>
+            <a:pPr lvl="0" indent="0" marL="0">
+              <a:buNone/>
+            </a:pPr>
+            <a:r>
+              <a:rPr/>
+              <a:t>First bullet, its second half: this is slide 11’s line, log-odds = b + w1 x1 + … + w6 x6. Each feature contributes its coefficient times its value, so raising reallocated sectors by one standard deviation adds exactly its coefficient to the log-odds - 1.80 is the true coefficient, the one the data was generated with (next slide) - and it adds 1.80 whatever the other five counters say. That is what “linear” buys.</a:t>
+            </a:r>
+          </a:p>
+          <a:p>
+            <a:pPr lvl="0" indent="0" marL="0">
+              <a:buNone/>
+            </a:pPr>
+          </a:p>
+          <a:p>
+            <a:pPr lvl="0" indent="0" marL="0">
+              <a:buNone/>
+            </a:pPr>
+            <a:r>
+              <a:rPr/>
+              <a:t>Second bullet: why a sum on the log-odds becomes a product on the odds. The logarithm turns products into sums, log of a times b is log a plus log b. Read it backwards: adding 1.80 to the logarithm of the odds is the same as multiplying the odds by exp(1.80), which is 6.05. Check it on an average drive: its log-odds are the intercept, minus 6.20, so its odds are exp(-6.20) = 0.0020. One standard deviation more of reallocated sectors: log-odds minus 4.40, odds exp(-4.40) = 0.0123. Divide: 6.05.</a:t>
+            </a:r>
+          </a:p>
+          <a:p>
+            <a:pPr lvl="0" indent="0" marL="0">
+              <a:buNone/>
+            </a:pPr>
+          </a:p>
+          <a:p>
+            <a:pPr lvl="0" indent="0" marL="0">
+              <a:buNone/>
+            </a:pPr>
+            <a:r>
+              <a:rPr/>
+              <a:t>Third bullet: that is the arrow of slide 10’s figure. Every teal arrow was a multiplication of the odds by 6, and on the log-odds axis it had the same length - 1.79, almost exactly this coefficient. The fitted coefficient on the next slide is 1.66, a multiplier of 5.28.</a:t>
+            </a:r>
+          </a:p>
+          <a:p>
+            <a:pPr lvl="0" indent="0" marL="0">
+              <a:buNone/>
+            </a:pPr>
+          </a:p>
+          <a:p>
+            <a:pPr lvl="0" indent="0" marL="0">
+              <a:buNone/>
+            </a:pPr>
+            <a:r>
+              <a:rPr/>
+              <a:t>Now the mistake they will make, and it is a reasonable one. They will read “six times the odds” as “six times as likely”. For rare events those are nearly the same number, so here it is almost right - which is exactly why the habit survives until it does damage.</a:t>
+            </a:r>
+          </a:p>
+          <a:p>
+            <a:pPr lvl="0" indent="0" marL="0">
+              <a:buNone/>
+            </a:pPr>
+          </a:p>
+          <a:p>
+            <a:pPr lvl="0" indent="0" marL="0">
+              <a:buNone/>
+            </a:pPr>
+            <a:r>
+              <a:rPr/>
+              <a:t>Give them the counterexample out loud: a probability of 0.90 is odds of 0.9 divided by 0.1 = 9; multiplied by 5 that gives odds of 45, which is a probability of 45 divided by 46 = 0.978. The odds went up fivefold; the probability moved eight points. Odds ratios multiply odds.</a:t>
             </a:r>
           </a:p>
         </p:txBody>
@@ -1258,63 +1245,63 @@
             </a:pPr>
             <a:r>
               <a:rPr/>
-              <a:t>This is the slide that quietly explains everything in the second half of the lesson, so do not rush it.</a:t>
-            </a:r>
-          </a:p>
-          <a:p>
-            <a:pPr lvl="0" indent="0" marL="0">
-              <a:buNone/>
-            </a:pPr>
-          </a:p>
-          <a:p>
-            <a:pPr lvl="0" indent="0" marL="0">
-              <a:buNone/>
-            </a:pPr>
-            <a:r>
-              <a:rPr/>
-              <a:t>Start with what x = 0 means. The intercept is the value of the log-odds when every x is 0 - but the x are standardised (slide 13), so x = 0 is not a drive with no sectors and no errors: it is a drive sitting exactly at the fleet average on every counter.</a:t>
-            </a:r>
-          </a:p>
-          <a:p>
-            <a:pPr lvl="0" indent="0" marL="0">
-              <a:buNone/>
-            </a:pPr>
-          </a:p>
-          <a:p>
-            <a:pPr lvl="0" indent="0" marL="0">
-              <a:buNone/>
-            </a:pPr>
-            <a:r>
-              <a:rPr/>
-              <a:t>Then say what the intercept is NOT: it is not the base rate. The fleet fails at 3.8%; the intercept describes a drive whose every counter sits at the average, and such a drive almost never fails. The failures come from the small group of drives far above average on one or more counters. Handout section 2.4.</a:t>
-            </a:r>
-          </a:p>
-          <a:p>
-            <a:pPr lvl="0" indent="0" marL="0">
-              <a:buNone/>
-            </a:pPr>
-          </a:p>
-          <a:p>
-            <a:pPr lvl="0" indent="0" marL="0">
-              <a:buNone/>
-            </a:pPr>
-            <a:r>
-              <a:rPr/>
-              <a:t>An average drive has a 0.2% chance of failing in thirty days. For the model to reach an even bet - probability one half, log-odds zero - the counters have to add more than 6.09 to the intercept’s -6.09. Only badly degraded drives manage that.</a:t>
-            </a:r>
-          </a:p>
-          <a:p>
-            <a:pPr lvl="0" indent="0" marL="0">
-              <a:buNone/>
-            </a:pPr>
-          </a:p>
-          <a:p>
-            <a:pPr lvl="0" indent="0" marL="0">
-              <a:buNone/>
-            </a:pPr>
-            <a:r>
-              <a:rPr/>
-              <a:t>So the model will assign small probabilities to almost everything. Introduce the word now: a model that outputs a probability still has to decide “fail” or “healthy”, and it does so with a threshold - flag the drive if its probability is at least the threshold. scikit-learn’s predict() uses 0.5. With these probabilities, a threshold of 0.5 will flag almost nothing. That is not the model being timid. It is the model being correct about a rare event. Everything that looks like a failure of the classifier in the next hour traces back to this number.</a:t>
+              <a:t>Notebook 1, last section. This is the payoff of using synthetic data: we do not just look at the estimates, we check them against the truth.</a:t>
+            </a:r>
+          </a:p>
+          <a:p>
+            <a:pPr lvl="0" indent="0" marL="0">
+              <a:buNone/>
+            </a:pPr>
+          </a:p>
+          <a:p>
+            <a:pPr lvl="0" indent="0" marL="0">
+              <a:buNone/>
+            </a:pPr>
+            <a:r>
+              <a:rPr/>
+              <a:t>The columns: True is the coefficient disk_data.py generated the labels with, Fitted is what LogisticRegression estimated from 6,000 training drives, and “Odds ×” is exp(Fitted), the multiplier of slide 14.</a:t>
+            </a:r>
+          </a:p>
+          <a:p>
+            <a:pPr lvl="0" indent="0" marL="0">
+              <a:buNone/>
+            </a:pPr>
+          </a:p>
+          <a:p>
+            <a:pPr lvl="0" indent="0" marL="0">
+              <a:buNone/>
+            </a:pPr>
+            <a:r>
+              <a:rPr/>
+              <a:t>Go down the column. Everything is close. Nothing is exact, and say why - 6,000 training drives carrying 230 failures (306 in the fleet minus the 76 kept for the test set) is a modest amount of evidence, and 230 is the number that matters, not 6,000.</a:t>
+            </a:r>
+          </a:p>
+          <a:p>
+            <a:pPr lvl="0" indent="0" marL="0">
+              <a:buNone/>
+            </a:pPr>
+          </a:p>
+          <a:p>
+            <a:pPr lvl="0" indent="0" marL="0">
+              <a:buNone/>
+            </a:pPr>
+            <a:r>
+              <a:rPr/>
+              <a:t>Then the last row, which is the one to pause on. seek_error_rate was generated with a coefficient of exactly zero: a real-looking counter with no connection to failure. The model estimates 0.02, an odds multiplier of exp(0.02) = 1.02. It did not fall for it.</a:t>
+            </a:r>
+          </a:p>
+          <a:p>
+            <a:pPr lvl="0" indent="0" marL="0">
+              <a:buNone/>
+            </a:pPr>
+          </a:p>
+          <a:p>
+            <a:pPr lvl="0" indent="0" marL="0">
+              <a:buNone/>
+            </a:pPr>
+            <a:r>
+              <a:rPr/>
+              <a:t>Then ask the room the harder question: would you have noticed, if I had not told you? Leave it hanging. It is lesson 5.</a:t>
             </a:r>
           </a:p>
         </p:txBody>
@@ -1396,21 +1383,63 @@
             </a:pPr>
             <a:r>
               <a:rPr/>
-              <a:t>Put the question to the room and take answers before showing the next slide. This is a good place for them to be wrong out loud, because the honest answer is not obvious and the usual first guesses (“it’s not differentiable”, “it doesn’t work for categories”) are wrong.</a:t>
-            </a:r>
-          </a:p>
-          <a:p>
-            <a:pPr lvl="0" indent="0" marL="0">
-              <a:buNone/>
-            </a:pPr>
-          </a:p>
-          <a:p>
-            <a:pPr lvl="0" indent="0" marL="0">
-              <a:buNone/>
-            </a:pPr>
-            <a:r>
-              <a:rPr/>
-              <a:t>Squared error on the sigmoid IS differentiable, and it does produce a working model on easy problems. The reason to reject it is subtler, so do not give it yet. Slides 17 to 21 first build, on three drives, the cost that logistic regression does minimise; slide 25 then comes back to squared error and shows what goes wrong with it, on a drive the model is confidently wrong about.</a:t>
+              <a:t>This is the slide that quietly explains everything in the second half of the lesson, so do not rush it.</a:t>
+            </a:r>
+          </a:p>
+          <a:p>
+            <a:pPr lvl="0" indent="0" marL="0">
+              <a:buNone/>
+            </a:pPr>
+          </a:p>
+          <a:p>
+            <a:pPr lvl="0" indent="0" marL="0">
+              <a:buNone/>
+            </a:pPr>
+            <a:r>
+              <a:rPr/>
+              <a:t>Start with what x = 0 means. The intercept is the value of the log-odds when every x is 0 - but the x are standardised (slide 14), so x = 0 is not a drive with no sectors and no errors: it is a drive sitting exactly at the fleet average on every counter.</a:t>
+            </a:r>
+          </a:p>
+          <a:p>
+            <a:pPr lvl="0" indent="0" marL="0">
+              <a:buNone/>
+            </a:pPr>
+          </a:p>
+          <a:p>
+            <a:pPr lvl="0" indent="0" marL="0">
+              <a:buNone/>
+            </a:pPr>
+            <a:r>
+              <a:rPr/>
+              <a:t>Then say what the intercept is NOT: it is not the base rate. The fleet fails at 3.8%; the intercept describes a drive whose every counter sits at the average, and such a drive almost never fails. The failures come from the small group of drives far above average on one or more counters. Handout section 2.4.</a:t>
+            </a:r>
+          </a:p>
+          <a:p>
+            <a:pPr lvl="0" indent="0" marL="0">
+              <a:buNone/>
+            </a:pPr>
+          </a:p>
+          <a:p>
+            <a:pPr lvl="0" indent="0" marL="0">
+              <a:buNone/>
+            </a:pPr>
+            <a:r>
+              <a:rPr/>
+              <a:t>An average drive has a 0.2% chance of failing in thirty days. For the model to reach an even bet - probability one half, log-odds zero - the counters have to add more than 6.09 to the intercept’s -6.09. Only badly degraded drives manage that.</a:t>
+            </a:r>
+          </a:p>
+          <a:p>
+            <a:pPr lvl="0" indent="0" marL="0">
+              <a:buNone/>
+            </a:pPr>
+          </a:p>
+          <a:p>
+            <a:pPr lvl="0" indent="0" marL="0">
+              <a:buNone/>
+            </a:pPr>
+            <a:r>
+              <a:rPr/>
+              <a:t>So the model will assign small probabilities to almost everything. Introduce the word now: a model that outputs a probability still has to decide “fail” or “healthy”, and it does so with a threshold - flag the drive if its probability is at least the threshold. scikit-learn’s predict() uses 0.5. With these probabilities, a threshold of 0.5 will flag almost nothing. That is not the model being timid. It is the model being correct about a rare event. Everything that looks like a failure of the classifier in the next hour traces back to this number.</a:t>
             </a:r>
           </a:p>
         </p:txBody>
@@ -1492,63 +1521,21 @@
             </a:pPr>
             <a:r>
               <a:rPr/>
-              <a:t>The next five slides answer the question of slide 16 - what should fitting minimise? - one step at a time, on three drives. The numbers are made up for the example; drives A, B and C are not from the dataset.</a:t>
-            </a:r>
-          </a:p>
-          <a:p>
-            <a:pPr lvl="0" indent="0" marL="0">
-              <a:buNone/>
-            </a:pPr>
-          </a:p>
-          <a:p>
-            <a:pPr lvl="0" indent="0" marL="0">
-              <a:buNone/>
-            </a:pPr>
-            <a:r>
-              <a:rPr/>
-              <a:t>Start from what the model does. Fitting means choosing the coefficients w and the intercept b. Call one particular choice of w and b a “setting”. Given a setting, the model of slide 12 turns each drive’s counters x into a probability of failing: p = sigma(w-transpose-x + b). This slide shows the p that one setting, setting 1, gives to each of the three drives.</a:t>
-            </a:r>
-          </a:p>
-          <a:p>
-            <a:pPr lvl="0" indent="0" marL="0">
-              <a:buNone/>
-            </a:pPr>
-          </a:p>
-          <a:p>
-            <a:pPr lvl="0" indent="0" marL="0">
-              <a:buNone/>
-            </a:pPr>
-            <a:r>
-              <a:rPr/>
-              <a:t>Next to it, what actually happened, and its label y: 1 for a drive that failed, 0 for one that stayed healthy - the convention of slide 4.</a:t>
-            </a:r>
-          </a:p>
-          <a:p>
-            <a:pPr lvl="0" indent="0" marL="0">
-              <a:buNone/>
-            </a:pPr>
-          </a:p>
-          <a:p>
-            <a:pPr lvl="0" indent="0" marL="0">
-              <a:buNone/>
-            </a:pPr>
-            <a:r>
-              <a:rPr/>
-              <a:t>Ask the room: is setting 1 a good setting? Let them argue it from the table. It gave the drive that failed a high p, and the two that survived a low one, so it looks good. The next slide turns that impression into a number.</a:t>
-            </a:r>
-          </a:p>
-          <a:p>
-            <a:pPr lvl="0" indent="0" marL="0">
-              <a:buNone/>
-            </a:pPr>
-          </a:p>
-          <a:p>
-            <a:pPr lvl="0" indent="0" marL="0">
-              <a:buNone/>
-            </a:pPr>
-            <a:r>
-              <a:rPr/>
-              <a:t>A predictable slip: reading B’s 0.1 as “the probability of what happened to B”. It is not. p is the probability of FAILING for every drive, including the two that stayed healthy; the probability of what happened to B is 1 - 0.1 = 0.9, and that conversion is exactly the next slide.</a:t>
+              <a:t>Put the question to the room and take answers before showing the next slide. This is a good place for them to be wrong out loud, because the honest answer is not obvious and the usual first guesses (“it’s not differentiable”, “it doesn’t work for categories”) are wrong.</a:t>
+            </a:r>
+          </a:p>
+          <a:p>
+            <a:pPr lvl="0" indent="0" marL="0">
+              <a:buNone/>
+            </a:pPr>
+          </a:p>
+          <a:p>
+            <a:pPr lvl="0" indent="0" marL="0">
+              <a:buNone/>
+            </a:pPr>
+            <a:r>
+              <a:rPr/>
+              <a:t>Squared error on the sigmoid IS differentiable, and it does produce a working model on easy problems. The reason to reject it is subtler, so do not give it yet. Slides 18 to 22 first build, on three drives, the cost that logistic regression does minimise; slide 26 then comes back to squared error and shows what goes wrong with it, on a drive the model is confidently wrong about.</a:t>
             </a:r>
           </a:p>
         </p:txBody>
@@ -1630,63 +1617,63 @@
             </a:pPr>
             <a:r>
               <a:rPr/>
-              <a:t>The idea: judge a setting by how probable it made what really happened.</a:t>
-            </a:r>
-          </a:p>
-          <a:p>
-            <a:pPr lvl="0" indent="0" marL="0">
-              <a:buNone/>
-            </a:pPr>
-          </a:p>
-          <a:p>
-            <a:pPr lvl="0" indent="0" marL="0">
-              <a:buNone/>
-            </a:pPr>
-            <a:r>
-              <a:rPr/>
-              <a:t>p is the probability of failing. For drive A, which did fail, that is exactly the probability of what happened: 0.8. For drives B and C, which stayed healthy, the probability of what happened is the probability of staying healthy, which is 1 minus p: 1 - 0.1 = 0.9 and 1 - 0.2 = 0.8. That is the rule in the last column header: p if y = 1, 1 - p if y = 0.</a:t>
-            </a:r>
-          </a:p>
-          <a:p>
-            <a:pPr lvl="0" indent="0" marL="0">
-              <a:buNone/>
-            </a:pPr>
-          </a:p>
-          <a:p>
-            <a:pPr lvl="0" indent="0" marL="0">
-              <a:buNone/>
-            </a:pPr>
-            <a:r>
-              <a:rPr/>
-              <a:t>Then the three drives together. If the drives fail or survive independently of each other, the probability that all three outcomes happen is the product of the three: 0.8 times 0.9 times 0.8, which is 0.576. Under setting 1, what we observed had a 57.6% chance of happening.</a:t>
-            </a:r>
-          </a:p>
-          <a:p>
-            <a:pPr lvl="0" indent="0" marL="0">
-              <a:buNone/>
-            </a:pPr>
-          </a:p>
-          <a:p>
-            <a:pPr lvl="0" indent="0" marL="0">
-              <a:buNone/>
-            </a:pPr>
-            <a:r>
-              <a:rPr/>
-              <a:t>That product has a name: the likelihood of the setting. The next slide writes the same two rules as formulas.</a:t>
-            </a:r>
-          </a:p>
-          <a:p>
-            <a:pPr lvl="0" indent="0" marL="0">
-              <a:buNone/>
-            </a:pPr>
-          </a:p>
-          <a:p>
-            <a:pPr lvl="0" indent="0" marL="0">
-              <a:buNone/>
-            </a:pPr>
-            <a:r>
-              <a:rPr/>
-              <a:t>A predictable slip: describing this slide as “the probability of failing for the three drives”. The last column is the probability of WHAT HAPPENED - of failing for A, of staying healthy for B and C. And the multiplication needs its condition said aloud: the drives must be independent, as two coin tosses are, for the probability of all three outcomes to be the product.</a:t>
+              <a:t>The next five slides answer the question of slide 17 - what should fitting minimise? - one step at a time, on three drives. The numbers are made up for the example; drives A, B and C are not from the dataset.</a:t>
+            </a:r>
+          </a:p>
+          <a:p>
+            <a:pPr lvl="0" indent="0" marL="0">
+              <a:buNone/>
+            </a:pPr>
+          </a:p>
+          <a:p>
+            <a:pPr lvl="0" indent="0" marL="0">
+              <a:buNone/>
+            </a:pPr>
+            <a:r>
+              <a:rPr/>
+              <a:t>Start from what the model does. Fitting means choosing the coefficients w and the intercept b. Call one particular choice of w and b a “setting”. Given a setting, the model of slide 13 turns each drive’s counters x into a probability of failing: p = sigma(w-transpose-x + b). This slide shows the p that one setting, setting 1, gives to each of the three drives.</a:t>
+            </a:r>
+          </a:p>
+          <a:p>
+            <a:pPr lvl="0" indent="0" marL="0">
+              <a:buNone/>
+            </a:pPr>
+          </a:p>
+          <a:p>
+            <a:pPr lvl="0" indent="0" marL="0">
+              <a:buNone/>
+            </a:pPr>
+            <a:r>
+              <a:rPr/>
+              <a:t>Next to it, what actually happened, and its label y: 1 for a drive that failed, 0 for one that stayed healthy - the convention of slide 4.</a:t>
+            </a:r>
+          </a:p>
+          <a:p>
+            <a:pPr lvl="0" indent="0" marL="0">
+              <a:buNone/>
+            </a:pPr>
+          </a:p>
+          <a:p>
+            <a:pPr lvl="0" indent="0" marL="0">
+              <a:buNone/>
+            </a:pPr>
+            <a:r>
+              <a:rPr/>
+              <a:t>Ask the room: is setting 1 a good setting? Let them argue it from the table. It gave the drive that failed a high p, and the two that survived a low one, so it looks good. The next slide turns that impression into a number.</a:t>
+            </a:r>
+          </a:p>
+          <a:p>
+            <a:pPr lvl="0" indent="0" marL="0">
+              <a:buNone/>
+            </a:pPr>
+          </a:p>
+          <a:p>
+            <a:pPr lvl="0" indent="0" marL="0">
+              <a:buNone/>
+            </a:pPr>
+            <a:r>
+              <a:rPr/>
+              <a:t>A predictable slip: reading B’s 0.1 as “the probability of what happened to B”. It is not. p is the probability of FAILING for every drive, including the two that stayed healthy; the probability of what happened to B is 1 - 0.1 = 0.9, and that conversion is exactly the next slide.</a:t>
             </a:r>
           </a:p>
         </p:txBody>
@@ -1768,63 +1755,63 @@
             </a:pPr>
             <a:r>
               <a:rPr/>
-              <a:t>Two formulas, and both are the previous slide written in symbols.</a:t>
-            </a:r>
-          </a:p>
-          <a:p>
-            <a:pPr lvl="0" indent="0" marL="0">
-              <a:buNone/>
-            </a:pPr>
-          </a:p>
-          <a:p>
-            <a:pPr lvl="0" indent="0" marL="0">
-              <a:buNone/>
-            </a:pPr>
-            <a:r>
-              <a:rPr/>
-              <a:t>Top line: the probability of what happened to one drive. It is the rule “p if y = 1, 1 - p if y = 0” in a single expression. Check it with y = 1: p to the power 1 is p, and (1 - p) to the power 0 is 1, so it gives p. With y = 0 it gives 1 times (1 - p). Do drive B on the board: 0.1 to the power 0 times 0.9 to the power 1 is 0.9, the number in the table. The exponents are just a way of writing an if-statement.</a:t>
-            </a:r>
-          </a:p>
-          <a:p>
-            <a:pPr lvl="0" indent="0" marL="0">
-              <a:buNone/>
-            </a:pPr>
-          </a:p>
-          <a:p>
-            <a:pPr lvl="0" indent="0" marL="0">
-              <a:buNone/>
-            </a:pPr>
-            <a:r>
-              <a:rPr/>
-              <a:t>Bottom line: the likelihood, script L, of a setting (w, b). The capital pi means “multiply over all the drives”, i from 1 to m, the way a capital sigma means “add”. Each drive contributes its factor from the top line; the superscript (i) says which drive. For our three drives, m = 3 and the product is 0.8 times 0.9 times 0.8 = 0.576.</a:t>
-            </a:r>
-          </a:p>
-          <a:p>
-            <a:pPr lvl="0" indent="0" marL="0">
-              <a:buNone/>
-            </a:pPr>
-          </a:p>
-          <a:p>
-            <a:pPr lvl="0" indent="0" marL="0">
-              <a:buNone/>
-            </a:pPr>
-            <a:r>
-              <a:rPr/>
-              <a:t>The p inside depends on w and b, through p = sigma(w-transpose-x + b). That is why L is written as a function of w and b: change the setting, every p changes, and the likelihood changes with them. Handout section 3.2.</a:t>
-            </a:r>
-          </a:p>
-          <a:p>
-            <a:pPr lvl="0" indent="0" marL="0">
-              <a:buNone/>
-            </a:pPr>
-          </a:p>
-          <a:p>
-            <a:pPr lvl="0" indent="0" marL="0">
-              <a:buNone/>
-            </a:pPr>
-            <a:r>
-              <a:rPr/>
-              <a:t>A predictable slip of language: calling the top line “the likelihood of one example”. It is one drive’s factor, the probability of what happened to that drive. The likelihood is the product on the bottom line, read as a function of w and b with the data held fixed - which is why it is written L(w, b).</a:t>
+              <a:t>The idea: judge a setting by how probable it made what really happened.</a:t>
+            </a:r>
+          </a:p>
+          <a:p>
+            <a:pPr lvl="0" indent="0" marL="0">
+              <a:buNone/>
+            </a:pPr>
+          </a:p>
+          <a:p>
+            <a:pPr lvl="0" indent="0" marL="0">
+              <a:buNone/>
+            </a:pPr>
+            <a:r>
+              <a:rPr/>
+              <a:t>p is the probability of failing. For drive A, which did fail, that is exactly the probability of what happened: 0.8. For drives B and C, which stayed healthy, the probability of what happened is the probability of staying healthy, which is 1 minus p: 1 - 0.1 = 0.9 and 1 - 0.2 = 0.8. That is the rule in the last column header: p if y = 1, 1 - p if y = 0.</a:t>
+            </a:r>
+          </a:p>
+          <a:p>
+            <a:pPr lvl="0" indent="0" marL="0">
+              <a:buNone/>
+            </a:pPr>
+          </a:p>
+          <a:p>
+            <a:pPr lvl="0" indent="0" marL="0">
+              <a:buNone/>
+            </a:pPr>
+            <a:r>
+              <a:rPr/>
+              <a:t>Then the three drives together. If the drives fail or survive independently of each other, the probability that all three outcomes happen is the product of the three: 0.8 times 0.9 times 0.8, which is 0.576. Under setting 1, what we observed had a 57.6% chance of happening.</a:t>
+            </a:r>
+          </a:p>
+          <a:p>
+            <a:pPr lvl="0" indent="0" marL="0">
+              <a:buNone/>
+            </a:pPr>
+          </a:p>
+          <a:p>
+            <a:pPr lvl="0" indent="0" marL="0">
+              <a:buNone/>
+            </a:pPr>
+            <a:r>
+              <a:rPr/>
+              <a:t>That product has a name: the likelihood of the setting. The next slide writes the same two rules as formulas.</a:t>
+            </a:r>
+          </a:p>
+          <a:p>
+            <a:pPr lvl="0" indent="0" marL="0">
+              <a:buNone/>
+            </a:pPr>
+          </a:p>
+          <a:p>
+            <a:pPr lvl="0" indent="0" marL="0">
+              <a:buNone/>
+            </a:pPr>
+            <a:r>
+              <a:rPr/>
+              <a:t>A predictable slip: describing this slide as “the probability of failing for the three drives”. The last column is the probability of WHAT HAPPENED - of failing for A, of staying healthy for B and C. And the multiplication needs its condition said aloud: the drives must be independent, as two coin tosses are, for the probability of all three outcomes to be the product.</a:t>
             </a:r>
           </a:p>
         </p:txBody>
@@ -1906,63 +1893,63 @@
             </a:pPr>
             <a:r>
               <a:rPr/>
-              <a:t>Why a second setting at all: 0.576 on its own means nothing - there is no scale on which it is “high” or “low”. A likelihood is only useful as a comparison between settings, so we need a second one to compare against.</a:t>
-            </a:r>
-          </a:p>
-          <a:p>
-            <a:pPr lvl="0" indent="0" marL="0">
-              <a:buNone/>
-            </a:pPr>
-          </a:p>
-          <a:p>
-            <a:pPr lvl="0" indent="0" marL="0">
-              <a:buNone/>
-            </a:pPr>
-            <a:r>
-              <a:rPr/>
-              <a:t>Now a second setting, a different choice of w and b. It gives the three drives p = 0.3, 0.6 and 0.5: a low p to the drive that failed, a high p to one that survived. It looks worse, and the likelihood says how much worse.</a:t>
-            </a:r>
-          </a:p>
-          <a:p>
-            <a:pPr lvl="0" indent="0" marL="0">
-              <a:buNone/>
-            </a:pPr>
-          </a:p>
-          <a:p>
-            <a:pPr lvl="0" indent="0" marL="0">
-              <a:buNone/>
-            </a:pPr>
-            <a:r>
-              <a:rPr/>
-              <a:t>Apply the same rule, column by column. A failed, so its factor is p = 0.3. B and C survived, so their factors are 1 - 0.6 = 0.4 and 1 - 0.5 = 0.5. Multiply: 0.3 times 0.4 times 0.5 = 0.060.</a:t>
-            </a:r>
-          </a:p>
-          <a:p>
-            <a:pPr lvl="0" indent="0" marL="0">
-              <a:buNone/>
-            </a:pPr>
-          </a:p>
-          <a:p>
-            <a:pPr lvl="0" indent="0" marL="0">
-              <a:buNone/>
-            </a:pPr>
-            <a:r>
-              <a:rPr/>
-              <a:t>Compare: 0.576 against 0.060. What actually happened is 0.576 divided by 0.060 = 9.6 times more probable under setting 1, so setting 1 explains the data better. Keep it.</a:t>
-            </a:r>
-          </a:p>
-          <a:p>
-            <a:pPr lvl="0" indent="0" marL="0">
-              <a:buNone/>
-            </a:pPr>
-          </a:p>
-          <a:p>
-            <a:pPr lvl="0" indent="0" marL="0">
-              <a:buNone/>
-            </a:pPr>
-            <a:r>
-              <a:rPr/>
-              <a:t>That comparison is maximum likelihood. Fitting a logistic regression is the same comparison made over every possible setting rather than two: choose the w and b with the largest likelihood. Nobody tries them one by one - gradient descent does the searching, as in lesson 3.</a:t>
+              <a:t>Two formulas, and both are the previous slide written in symbols.</a:t>
+            </a:r>
+          </a:p>
+          <a:p>
+            <a:pPr lvl="0" indent="0" marL="0">
+              <a:buNone/>
+            </a:pPr>
+          </a:p>
+          <a:p>
+            <a:pPr lvl="0" indent="0" marL="0">
+              <a:buNone/>
+            </a:pPr>
+            <a:r>
+              <a:rPr/>
+              <a:t>Top line: the probability of what happened to one drive. It is the rule “p if y = 1, 1 - p if y = 0” in a single expression. Check it with y = 1: p to the power 1 is p, and (1 - p) to the power 0 is 1, so it gives p. With y = 0 it gives 1 times (1 - p). Do drive B on the board: 0.1 to the power 0 times 0.9 to the power 1 is 0.9, the number in the table. The exponents are just a way of writing an if-statement.</a:t>
+            </a:r>
+          </a:p>
+          <a:p>
+            <a:pPr lvl="0" indent="0" marL="0">
+              <a:buNone/>
+            </a:pPr>
+          </a:p>
+          <a:p>
+            <a:pPr lvl="0" indent="0" marL="0">
+              <a:buNone/>
+            </a:pPr>
+            <a:r>
+              <a:rPr/>
+              <a:t>Bottom line: the likelihood, script L, of a setting (w, b). The capital pi means “multiply over all the drives”, i from 1 to m, the way a capital sigma means “add”. Each drive contributes its factor from the top line; the superscript (i) says which drive. For our three drives, m = 3 and the product is 0.8 times 0.9 times 0.8 = 0.576.</a:t>
+            </a:r>
+          </a:p>
+          <a:p>
+            <a:pPr lvl="0" indent="0" marL="0">
+              <a:buNone/>
+            </a:pPr>
+          </a:p>
+          <a:p>
+            <a:pPr lvl="0" indent="0" marL="0">
+              <a:buNone/>
+            </a:pPr>
+            <a:r>
+              <a:rPr/>
+              <a:t>The p inside depends on w and b, through p = sigma(w-transpose-x + b). That is why L is written as a function of w and b: change the setting, every p changes, and the likelihood changes with them. Handout section 3.2.</a:t>
+            </a:r>
+          </a:p>
+          <a:p>
+            <a:pPr lvl="0" indent="0" marL="0">
+              <a:buNone/>
+            </a:pPr>
+          </a:p>
+          <a:p>
+            <a:pPr lvl="0" indent="0" marL="0">
+              <a:buNone/>
+            </a:pPr>
+            <a:r>
+              <a:rPr/>
+              <a:t>A predictable slip of language: calling the top line “the likelihood of one example”. It is one drive’s factor, the probability of what happened to that drive. The likelihood is the product on the bottom line, read as a function of w and b with the data held fixed - which is why it is written L(w, b).</a:t>
             </a:r>
           </a:p>
         </p:txBody>
@@ -2154,77 +2141,63 @@
             </a:pPr>
             <a:r>
               <a:rPr/>
-              <a:t>The last step turns “largest likelihood” into “smallest cost”, so it can be minimised as in lesson 3. Natural logarithms throughout.</a:t>
-            </a:r>
-          </a:p>
-          <a:p>
-            <a:pPr lvl="0" indent="0" marL="0">
-              <a:buNone/>
-            </a:pPr>
-          </a:p>
-          <a:p>
-            <a:pPr lvl="0" indent="0" marL="0">
-              <a:buNone/>
-            </a:pPr>
-            <a:r>
-              <a:rPr/>
-              <a:t>Take minus the logarithm of each drive’s factor and add them up. Because the log of a product is the sum of the logs, the sum is minus the log of the likelihood: 0.55 is minus the log of 0.576, and 2.81 is minus the log of 0.060. The logarithm keeps the order and the minus sign reverses it, so the better setting now has the SMALLER number - 0.55 against 2.81. Setting 1 still wins.</a:t>
-            </a:r>
-          </a:p>
-          <a:p>
-            <a:pPr lvl="0" indent="0" marL="0">
-              <a:buNone/>
-            </a:pPr>
-          </a:p>
-          <a:p>
-            <a:pPr lvl="0" indent="0" marL="0">
-              <a:buNone/>
-            </a:pPr>
-            <a:r>
-              <a:rPr/>
-              <a:t>A predictable slip: calling setting 1 “the maximum” and 0.55 “the minimum cost”. Setting 1 only beats setting 2; other choices of w and b would surely make these three outcomes more probable still. The maximum likelihood over every possible (w, b) - the same point as the minimum cost - is what fitting finds.</a:t>
-            </a:r>
-          </a:p>
-          <a:p>
-            <a:pPr lvl="0" indent="0" marL="0">
-              <a:buNone/>
-            </a:pPr>
-          </a:p>
-          <a:p>
-            <a:pPr lvl="0" indent="0" marL="0">
-              <a:buNone/>
-            </a:pPr>
-            <a:r>
-              <a:rPr/>
-              <a:t>Read the per-drive numbers too. Minus the log of a probability is called the surprise of an outcome: 0 for something you were certain of, large for something you said was unlikely. Setting 2 is most surprised by drive A, 1.20, because it gave A’s failure only 0.3. Maximum likelihood and least total surprise are the same choice.</a:t>
-            </a:r>
-          </a:p>
-          <a:p>
-            <a:pPr lvl="0" indent="0" marL="0">
-              <a:buNone/>
-            </a:pPr>
-          </a:p>
-          <a:p>
-            <a:pPr lvl="0" indent="0" marL="0">
-              <a:buNone/>
-            </a:pPr>
-            <a:r>
-              <a:rPr/>
-              <a:t>Two reasons we always work with the logarithm, worth saying aloud. A sum differentiates one term at a time. And the product itself is too small to store. Notebook 1’s gradient descent starts with every coefficient and the intercept at zero, so z is 0 for every drive and every p is 0.5. 0.5 multiplied by itself 6,000 times, once per training drive, is 10 to the power 6,000 times log10 of 0.5 = 6,000 times minus 0.301 = minus 1806, while the smallest positive number a 64-bit float can hold is about 5 times 10 to the minus 324. The computer would store exactly zero.</a:t>
-            </a:r>
-          </a:p>
-          <a:p>
-            <a:pPr lvl="0" indent="0" marL="0">
-              <a:buNone/>
-            </a:pPr>
-          </a:p>
-          <a:p>
-            <a:pPr lvl="0" indent="0" marL="0">
-              <a:buNone/>
-            </a:pPr>
-            <a:r>
-              <a:rPr/>
-              <a:t>Divide the sum by the number of drives and you have the average surprise: that is the cost J that fitting minimises, and scikit-learn’s log_loss computes exactly this average. The next slide draws the surprise of one drive, and slide 23 writes it as a formula, the loss L; J is its average over the drives. Handout sections 3.1 to 3.3.</a:t>
+              <a:t>Why a second setting at all: 0.576 on its own means nothing - there is no scale on which it is “high” or “low”. A likelihood is only useful as a comparison between settings, so we need a second one to compare against.</a:t>
+            </a:r>
+          </a:p>
+          <a:p>
+            <a:pPr lvl="0" indent="0" marL="0">
+              <a:buNone/>
+            </a:pPr>
+          </a:p>
+          <a:p>
+            <a:pPr lvl="0" indent="0" marL="0">
+              <a:buNone/>
+            </a:pPr>
+            <a:r>
+              <a:rPr/>
+              <a:t>Now a second setting, a different choice of w and b. It gives the three drives p = 0.3, 0.6 and 0.5: a low p to the drive that failed, a high p to one that survived. It looks worse, and the likelihood says how much worse.</a:t>
+            </a:r>
+          </a:p>
+          <a:p>
+            <a:pPr lvl="0" indent="0" marL="0">
+              <a:buNone/>
+            </a:pPr>
+          </a:p>
+          <a:p>
+            <a:pPr lvl="0" indent="0" marL="0">
+              <a:buNone/>
+            </a:pPr>
+            <a:r>
+              <a:rPr/>
+              <a:t>Apply the same rule, column by column. A failed, so its factor is p = 0.3. B and C survived, so their factors are 1 - 0.6 = 0.4 and 1 - 0.5 = 0.5. Multiply: 0.3 times 0.4 times 0.5 = 0.060.</a:t>
+            </a:r>
+          </a:p>
+          <a:p>
+            <a:pPr lvl="0" indent="0" marL="0">
+              <a:buNone/>
+            </a:pPr>
+          </a:p>
+          <a:p>
+            <a:pPr lvl="0" indent="0" marL="0">
+              <a:buNone/>
+            </a:pPr>
+            <a:r>
+              <a:rPr/>
+              <a:t>Compare: 0.576 against 0.060. What actually happened is 0.576 divided by 0.060 = 9.6 times more probable under setting 1, so setting 1 explains the data better. Keep it.</a:t>
+            </a:r>
+          </a:p>
+          <a:p>
+            <a:pPr lvl="0" indent="0" marL="0">
+              <a:buNone/>
+            </a:pPr>
+          </a:p>
+          <a:p>
+            <a:pPr lvl="0" indent="0" marL="0">
+              <a:buNone/>
+            </a:pPr>
+            <a:r>
+              <a:rPr/>
+              <a:t>That comparison is maximum likelihood. Fitting a logistic regression is the same comparison made over every possible setting rather than two: choose the w and b with the largest likelihood. Nobody tries them one by one - gradient descent does the searching, as in lesson 3.</a:t>
             </a:r>
           </a:p>
         </p:txBody>
@@ -2306,63 +2279,77 @@
             </a:pPr>
             <a:r>
               <a:rPr/>
-              <a:t>Slide 21’s numbers, drawn. The horizontal axis is the probability the model gave to what actually happened - the factors of slides 18 and 20. The vertical axis is minus the log of it: the surprise.</a:t>
-            </a:r>
-          </a:p>
-          <a:p>
-            <a:pPr lvl="0" indent="0" marL="0">
-              <a:buNone/>
-            </a:pPr>
-          </a:p>
-          <a:p>
-            <a:pPr lvl="0" indent="0" marL="0">
-              <a:buNone/>
-            </a:pPr>
-            <a:r>
-              <a:rPr/>
-              <a:t>Read the curve from right to left. Something the model was sure of, p = 1, costs nothing: minus log 1 is 0. As p falls the surprise grows, slowly at first and then without limit: something the model called impossible costs infinity.</a:t>
-            </a:r>
-          </a:p>
-          <a:p>
-            <a:pPr lvl="0" indent="0" marL="0">
-              <a:buNone/>
-            </a:pPr>
-          </a:p>
-          <a:p>
-            <a:pPr lvl="0" indent="0" marL="0">
-              <a:buNone/>
-            </a:pPr>
-            <a:r>
-              <a:rPr/>
-              <a:t>Now the six dots. Setting 1’s factors, 0.8, 0.9 and 0.8, sit on the flat right-hand part: small surprises, 0.22 + 0.11 + 0.22 = 0.55 in all. Setting 2’s, 0.3, 0.4 and 0.5, sit higher up: 1.20 + 0.92 + 0.69 = 2.81. The highest dot is drive A under setting 2: it failed, and setting 2 had given its failure only 0.3, so minus log 0.3 = 1.20.</a:t>
-            </a:r>
-          </a:p>
-          <a:p>
-            <a:pPr lvl="0" indent="0" marL="0">
-              <a:buNone/>
-            </a:pPr>
-          </a:p>
-          <a:p>
-            <a:pPr lvl="0" indent="0" marL="0">
-              <a:buNone/>
-            </a:pPr>
-            <a:r>
-              <a:rPr/>
-              <a:t>Why it is called surprise: minus log p behaves the way surprise does. Zero when the model was certain and was right (minus log 1 = 0); large when it had called the outcome unlikely (minus log 0.001 = 6.9); infinite when it had called it impossible. And for independent outcomes the surprises add up, because the log of a product is the sum of the logs - which is why three drives cost the sum of their three surprises. The name comes from information theory, Shannon’s work, and is not examinable. The useful reading: the cost is the model’s average surprise at what really happened, and fitting makes the data as unsurprising as possible - the same thing as making it as likely as possible.</a:t>
-            </a:r>
-          </a:p>
-          <a:p>
-            <a:pPr lvl="0" indent="0" marL="0">
-              <a:buNone/>
-            </a:pPr>
-          </a:p>
-          <a:p>
-            <a:pPr lvl="0" indent="0" marL="0">
-              <a:buNone/>
-            </a:pPr>
-            <a:r>
-              <a:rPr/>
-              <a:t>The curve is the cost of one drive, which the next slide writes as a formula: the loss L. Handout section 3.1.</a:t>
+              <a:t>The last step turns “largest likelihood” into “smallest cost”, so it can be minimised as in lesson 3. Natural logarithms throughout.</a:t>
+            </a:r>
+          </a:p>
+          <a:p>
+            <a:pPr lvl="0" indent="0" marL="0">
+              <a:buNone/>
+            </a:pPr>
+          </a:p>
+          <a:p>
+            <a:pPr lvl="0" indent="0" marL="0">
+              <a:buNone/>
+            </a:pPr>
+            <a:r>
+              <a:rPr/>
+              <a:t>Take minus the logarithm of each drive’s factor and add them up. Because the log of a product is the sum of the logs, the sum is minus the log of the likelihood: 0.55 is minus the log of 0.576, and 2.81 is minus the log of 0.060. The logarithm keeps the order and the minus sign reverses it, so the better setting now has the SMALLER number - 0.55 against 2.81. Setting 1 still wins.</a:t>
+            </a:r>
+          </a:p>
+          <a:p>
+            <a:pPr lvl="0" indent="0" marL="0">
+              <a:buNone/>
+            </a:pPr>
+          </a:p>
+          <a:p>
+            <a:pPr lvl="0" indent="0" marL="0">
+              <a:buNone/>
+            </a:pPr>
+            <a:r>
+              <a:rPr/>
+              <a:t>A predictable slip: calling setting 1 “the maximum” and 0.55 “the minimum cost”. Setting 1 only beats setting 2; other choices of w and b would surely make these three outcomes more probable still. The maximum likelihood over every possible (w, b) - the same point as the minimum cost - is what fitting finds.</a:t>
+            </a:r>
+          </a:p>
+          <a:p>
+            <a:pPr lvl="0" indent="0" marL="0">
+              <a:buNone/>
+            </a:pPr>
+          </a:p>
+          <a:p>
+            <a:pPr lvl="0" indent="0" marL="0">
+              <a:buNone/>
+            </a:pPr>
+            <a:r>
+              <a:rPr/>
+              <a:t>Read the per-drive numbers too. Minus the log of a probability is called the surprise of an outcome: 0 for something you were certain of, large for something you said was unlikely. Setting 2 is most surprised by drive A, 1.20, because it gave A’s failure only 0.3. Maximum likelihood and least total surprise are the same choice.</a:t>
+            </a:r>
+          </a:p>
+          <a:p>
+            <a:pPr lvl="0" indent="0" marL="0">
+              <a:buNone/>
+            </a:pPr>
+          </a:p>
+          <a:p>
+            <a:pPr lvl="0" indent="0" marL="0">
+              <a:buNone/>
+            </a:pPr>
+            <a:r>
+              <a:rPr/>
+              <a:t>Two reasons we always work with the logarithm, worth saying aloud. A sum differentiates one term at a time. And the product itself is too small to store. Notebook 1’s gradient descent starts with every coefficient and the intercept at zero, so z is 0 for every drive and every p is 0.5. 0.5 multiplied by itself 6,000 times, once per training drive, is 10 to the power 6,000 times log10 of 0.5 = 6,000 times minus 0.301 = minus 1806, while the smallest positive number a 64-bit float can hold is about 5 times 10 to the minus 324. The computer would store exactly zero.</a:t>
+            </a:r>
+          </a:p>
+          <a:p>
+            <a:pPr lvl="0" indent="0" marL="0">
+              <a:buNone/>
+            </a:pPr>
+          </a:p>
+          <a:p>
+            <a:pPr lvl="0" indent="0" marL="0">
+              <a:buNone/>
+            </a:pPr>
+            <a:r>
+              <a:rPr/>
+              <a:t>Divide the sum by the number of drives and you have the average surprise: that is the cost J that fitting minimises, and scikit-learn’s log_loss computes exactly this average. The next slide draws the surprise of one drive, and slide 24 writes it as a formula, the loss L; J is its average over the drives. Handout sections 3.1 to 3.3.</a:t>
             </a:r>
           </a:p>
         </p:txBody>
@@ -2444,77 +2431,63 @@
             </a:pPr>
             <a:r>
               <a:rPr/>
-              <a:t>This is the loss on ONE example, L, not the cost over the training set; p is the predicted probability, the same number the next slide writes as y-hat. Say the other half aloud rather than showing it: the cost J is the average of this over the m examples, one over m times the sum. It is left off the slide because, written out in full, the formula does not fit at a readable size.</a:t>
-            </a:r>
-          </a:p>
-          <a:p>
-            <a:pPr lvl="0" indent="0" marL="0">
-              <a:buNone/>
-            </a:pPr>
-          </a:p>
-          <a:p>
-            <a:pPr lvl="0" indent="0" marL="0">
-              <a:buNone/>
-            </a:pPr>
-            <a:r>
-              <a:rPr/>
-              <a:t>Nothing new to derive: this is slides 17 to 21 written for one drive in symbols. Check it on drive B of slide 17: y = 0 and p = 0.1, so the first term vanishes and L = -log(1 - 0.1) = -log 0.9 = 0.11, the number slide 21 gave B under setting 1. The handout, section 3, does it for m drives in full.</a:t>
-            </a:r>
-          </a:p>
-          <a:p>
-            <a:pPr lvl="0" indent="0" marL="0">
-              <a:buNone/>
-            </a:pPr>
-          </a:p>
-          <a:p>
-            <a:pPr lvl="0" indent="0" marL="0">
-              <a:buNone/>
-            </a:pPr>
-            <a:r>
-              <a:rPr/>
-              <a:t>The interpretation that makes it stick: the cost of an outcome is the SURPRISE of seeing it. Something you called certain costs nothing. Something you gave a probability of one in a thousand costs log 1000, about 6.9 (natural logarithm, as everywhere in this lesson). Something you declared impossible costs infinity.</a:t>
-            </a:r>
-          </a:p>
-          <a:p>
-            <a:pPr lvl="0" indent="0" marL="0">
-              <a:buNone/>
-            </a:pPr>
-          </a:p>
-          <a:p>
-            <a:pPr lvl="0" indent="0" marL="0">
-              <a:buNone/>
-            </a:pPr>
-            <a:r>
-              <a:rPr/>
-              <a:t>Only one of the two terms is ever active, because y is 0 or 1. The bracket is a way of writing an if-statement in algebra, nothing more.</a:t>
-            </a:r>
-          </a:p>
-          <a:p>
-            <a:pPr lvl="0" indent="0" marL="0">
-              <a:buNone/>
-            </a:pPr>
-          </a:p>
-          <a:p>
-            <a:pPr lvl="0" indent="0" marL="0">
-              <a:buNone/>
-            </a:pPr>
-            <a:r>
-              <a:rPr/>
-              <a:t>A predictable slip: “with y = 1 the second term is 0 times log 0, which is 0 times minus infinity”. The coefficient is 1 - y, but the logarithm’s argument is 1 - p, the model’s probability - and p = sigma(z) lies strictly between 0 and 1, so log(1 - p) is finite and 0 times it is 0. Only p exactly 1 would give log 0, and the sigmoid never reaches it. In a computer p can round to 1.0 when z is large, which is why code clips p into [epsilon, 1 - epsilon]: notebook 1 adds 1e-12 inside the log, and scikit-learn’s log_loss clips too.</a:t>
-            </a:r>
-          </a:p>
-          <a:p>
-            <a:pPr lvl="0" indent="0" marL="0">
-              <a:buNone/>
-            </a:pPr>
-          </a:p>
-          <a:p>
-            <a:pPr lvl="0" indent="0" marL="0">
-              <a:buNone/>
-            </a:pPr>
-            <a:r>
-              <a:rPr/>
-              <a:t>And the headline: nobody designed this function. It fell out of asking for the parameters that make the data least surprising.</a:t>
+              <a:t>Slide 22’s numbers, drawn. The horizontal axis is the probability the model gave to what actually happened - the factors of slides 19 and 21. The vertical axis is minus the log of it: the surprise.</a:t>
+            </a:r>
+          </a:p>
+          <a:p>
+            <a:pPr lvl="0" indent="0" marL="0">
+              <a:buNone/>
+            </a:pPr>
+          </a:p>
+          <a:p>
+            <a:pPr lvl="0" indent="0" marL="0">
+              <a:buNone/>
+            </a:pPr>
+            <a:r>
+              <a:rPr/>
+              <a:t>Read the curve from right to left. Something the model was sure of, p = 1, costs nothing: minus log 1 is 0. As p falls the surprise grows, slowly at first and then without limit: something the model called impossible costs infinity.</a:t>
+            </a:r>
+          </a:p>
+          <a:p>
+            <a:pPr lvl="0" indent="0" marL="0">
+              <a:buNone/>
+            </a:pPr>
+          </a:p>
+          <a:p>
+            <a:pPr lvl="0" indent="0" marL="0">
+              <a:buNone/>
+            </a:pPr>
+            <a:r>
+              <a:rPr/>
+              <a:t>Now the six dots. Setting 1’s factors, 0.8, 0.9 and 0.8, sit on the flat right-hand part: small surprises, 0.22 + 0.11 + 0.22 = 0.55 in all. Setting 2’s, 0.3, 0.4 and 0.5, sit higher up: 1.20 + 0.92 + 0.69 = 2.81. The highest dot is drive A under setting 2: it failed, and setting 2 had given its failure only 0.3, so minus log 0.3 = 1.20.</a:t>
+            </a:r>
+          </a:p>
+          <a:p>
+            <a:pPr lvl="0" indent="0" marL="0">
+              <a:buNone/>
+            </a:pPr>
+          </a:p>
+          <a:p>
+            <a:pPr lvl="0" indent="0" marL="0">
+              <a:buNone/>
+            </a:pPr>
+            <a:r>
+              <a:rPr/>
+              <a:t>Why it is called surprise: minus log p behaves the way surprise does. Zero when the model was certain and was right (minus log 1 = 0); large when it had called the outcome unlikely (minus log 0.001 = 6.9); infinite when it had called it impossible. And for independent outcomes the surprises add up, because the log of a product is the sum of the logs - which is why three drives cost the sum of their three surprises. The name comes from information theory, Shannon’s work, and is not examinable. The useful reading: the cost is the model’s average surprise at what really happened, and fitting makes the data as unsurprising as possible - the same thing as making it as likely as possible.</a:t>
+            </a:r>
+          </a:p>
+          <a:p>
+            <a:pPr lvl="0" indent="0" marL="0">
+              <a:buNone/>
+            </a:pPr>
+          </a:p>
+          <a:p>
+            <a:pPr lvl="0" indent="0" marL="0">
+              <a:buNone/>
+            </a:pPr>
+            <a:r>
+              <a:rPr/>
+              <a:t>The curve is the cost of one drive, which the next slide writes as a formula: the loss L. Handout section 3.1.</a:t>
             </a:r>
           </a:p>
         </p:txBody>
@@ -2596,77 +2569,77 @@
             </a:pPr>
             <a:r>
               <a:rPr/>
-              <a:t>What the formula says, in words. To find how the cost J changes when the coefficient w_j is nudged up: take each training drive, compute its error - the predicted probability y-hat minus the true label y, which is 0 or 1 - multiply that error by the drive’s value of feature j, and average over the m drives. Gradient descent then steps w_j in the opposite direction.</a:t>
-            </a:r>
-          </a:p>
-          <a:p>
-            <a:pPr lvl="0" indent="0" marL="0">
-              <a:buNone/>
-            </a:pPr>
-          </a:p>
-          <a:p>
-            <a:pPr lvl="0" indent="0" marL="0">
-              <a:buNone/>
-            </a:pPr>
-            <a:r>
-              <a:rPr/>
-              <a:t>What is new, and what is not. The formula is written with exactly the symbols of lesson 3’s slide 23. The difference is hidden in y-hat: in lesson 3 it was the straight line w-transpose-x plus b, and here it is the sigmoid of that line, the probability of slide 12 - which is why the title says so. The cost is different too: squared error there, log loss (slide 23) here. Different model, different cost, and yet the same gradient.</a:t>
-            </a:r>
-          </a:p>
-          <a:p>
-            <a:pPr lvl="0" indent="0" marL="0">
-              <a:buNone/>
-            </a:pPr>
-          </a:p>
-          <a:p>
-            <a:pPr lvl="0" indent="0" marL="0">
-              <a:buNone/>
-            </a:pPr>
-            <a:r>
-              <a:rPr/>
-              <a:t>A concrete drive. A drive that failed, y = 1, to which the model gives y-hat = 0.2: its error is 0.2 minus 1, which is minus 0.8. A negative term means the cost falls if w_j rises, so this drive pulls w_j up, and pulls harder the larger its value of feature j. A healthy drive, y = 0, given the same 0.2 has error plus 0.2 and pulls the other way, four times more gently. This is lesson 3’s weighted vote: each drive pulls in proportion to how wrong it was and how large the feature was for it.</a:t>
-            </a:r>
-          </a:p>
-          <a:p>
-            <a:pPr lvl="0" indent="0" marL="0">
-              <a:buNone/>
-            </a:pPr>
-          </a:p>
-          <a:p>
-            <a:pPr lvl="0" indent="0" marL="0">
-              <a:buNone/>
-            </a:pPr>
-            <a:r>
-              <a:rPr/>
-              <a:t>Why it comes out the same - worth the board if there is appetite, handout section 3.4 has it in full. Follow one drive through the chain rule, in three links, with p for y-hat and z for w-transpose-x plus b: - how the loss changes with p: (p - y) divided by p times (1 - p) - the denominator comes from the logarithms in the log loss; - how p changes with z: p times (1 - p), the sigmoid’s derivative from slide 12; - how z changes with w_j: x_j. Multiply the three: the p times (1 - p) cancels, and what is left is (p - y) times x_j.</a:t>
-            </a:r>
-          </a:p>
-          <a:p>
-            <a:pPr lvl="0" indent="0" marL="0">
-              <a:buNone/>
-            </a:pPr>
-          </a:p>
-          <a:p>
-            <a:pPr lvl="0" indent="0" marL="0">
-              <a:buNone/>
-            </a:pPr>
-            <a:r>
-              <a:rPr/>
-              <a:t>Why that cancellation matters, and it is the bridge to the next slide: with squared error in place of log loss, nothing cancels the factor p times (1 - p), and slide 25 shows what it does to a drive the model is confidently wrong about.</a:t>
-            </a:r>
-          </a:p>
-          <a:p>
-            <a:pPr lvl="0" indent="0" marL="0">
-              <a:buNone/>
-            </a:pPr>
-          </a:p>
-          <a:p>
-            <a:pPr lvl="0" indent="0" marL="0">
-              <a:buNone/>
-            </a:pPr>
-            <a:r>
-              <a:rPr/>
-              <a:t>If someone asks whether the match is a coincidence: no, and one sentence is enough. Both costs come from maximum likelihood - squared error when the noise on y is Gaussian (lesson 3, handout section 2.2), log loss when y is a 0/1 outcome - and each paired with its own model gives this same form. Statisticians call the family “generalised linear models”; the name is not examinable. The practical consequence is: the same gradient descent code trains both models, and only the line that computes y-hat changes.</a:t>
+              <a:t>This is the loss on ONE example, L, not the cost over the training set; p is the predicted probability, the same number the next slide writes as y-hat. Say the other half aloud rather than showing it: the cost J is the average of this over the m examples, one over m times the sum. It is left off the slide because, written out in full, the formula does not fit at a readable size.</a:t>
+            </a:r>
+          </a:p>
+          <a:p>
+            <a:pPr lvl="0" indent="0" marL="0">
+              <a:buNone/>
+            </a:pPr>
+          </a:p>
+          <a:p>
+            <a:pPr lvl="0" indent="0" marL="0">
+              <a:buNone/>
+            </a:pPr>
+            <a:r>
+              <a:rPr/>
+              <a:t>Nothing new to derive: this is slides 18 to 22 written for one drive in symbols. Check it on drive B of slide 18: y = 0 and p = 0.1, so the first term vanishes and L = -log(1 - 0.1) = -log 0.9 = 0.11, the number slide 22 gave B under setting 1. The handout, section 3, does it for m drives in full.</a:t>
+            </a:r>
+          </a:p>
+          <a:p>
+            <a:pPr lvl="0" indent="0" marL="0">
+              <a:buNone/>
+            </a:pPr>
+          </a:p>
+          <a:p>
+            <a:pPr lvl="0" indent="0" marL="0">
+              <a:buNone/>
+            </a:pPr>
+            <a:r>
+              <a:rPr/>
+              <a:t>The interpretation that makes it stick: the cost of an outcome is the SURPRISE of seeing it. Something you called certain costs nothing. Something you gave a probability of one in a thousand costs log 1000, about 6.9 (natural logarithm, as everywhere in this lesson). Something you declared impossible costs infinity.</a:t>
+            </a:r>
+          </a:p>
+          <a:p>
+            <a:pPr lvl="0" indent="0" marL="0">
+              <a:buNone/>
+            </a:pPr>
+          </a:p>
+          <a:p>
+            <a:pPr lvl="0" indent="0" marL="0">
+              <a:buNone/>
+            </a:pPr>
+            <a:r>
+              <a:rPr/>
+              <a:t>Only one of the two terms is ever active, because y is 0 or 1. The bracket is a way of writing an if-statement in algebra, nothing more.</a:t>
+            </a:r>
+          </a:p>
+          <a:p>
+            <a:pPr lvl="0" indent="0" marL="0">
+              <a:buNone/>
+            </a:pPr>
+          </a:p>
+          <a:p>
+            <a:pPr lvl="0" indent="0" marL="0">
+              <a:buNone/>
+            </a:pPr>
+            <a:r>
+              <a:rPr/>
+              <a:t>A predictable slip: “with y = 1 the second term is 0 times log 0, which is 0 times minus infinity”. The coefficient is 1 - y, but the logarithm’s argument is 1 - p, the model’s probability - and p = sigma(z) lies strictly between 0 and 1, so log(1 - p) is finite and 0 times it is 0. Only p exactly 1 would give log 0, and the sigmoid never reaches it. In a computer p can round to 1.0 when z is large, which is why code clips p into [epsilon, 1 - epsilon]: notebook 1 adds 1e-12 inside the log, and scikit-learn’s log_loss clips too.</a:t>
+            </a:r>
+          </a:p>
+          <a:p>
+            <a:pPr lvl="0" indent="0" marL="0">
+              <a:buNone/>
+            </a:pPr>
+          </a:p>
+          <a:p>
+            <a:pPr lvl="0" indent="0" marL="0">
+              <a:buNone/>
+            </a:pPr>
+            <a:r>
+              <a:rPr/>
+              <a:t>And the headline: nobody designed this function. It fell out of asking for the parameters that make the data least surprising.</a:t>
             </a:r>
           </a:p>
         </p:txBody>
@@ -2748,77 +2721,77 @@
             </a:pPr>
             <a:r>
               <a:rPr/>
-              <a:t>Both panels take a drive that failed, y = 1, and move the model’s probability p for it along the horizontal axis. Squared error here is (p - 1) squared, the handout’s convention in section 4.</a:t>
-            </a:r>
-          </a:p>
-          <a:p>
-            <a:pPr lvl="0" indent="0" marL="0">
-              <a:buNone/>
-            </a:pPr>
-          </a:p>
-          <a:p>
-            <a:pPr lvl="0" indent="0" marL="0">
-              <a:buNone/>
-            </a:pPr>
-            <a:r>
-              <a:rPr/>
-              <a:t>Left panel, the costs. A drive failed and the model said 0.0001. Squared error charges (0.0001 - 1) squared = 0.9998. An honest “don’t know” - 0.5 - costs (0.5 - 1) squared = 0.25. So the worst possible answer is four times worse than a shrug. Log loss charges minus log 0.0001 = 9.2 against minus log 0.5 = 0.69, and the ratio grows without bound.</a:t>
-            </a:r>
-          </a:p>
-          <a:p>
-            <a:pPr lvl="0" indent="0" marL="0">
-              <a:buNone/>
-            </a:pPr>
-          </a:p>
-          <a:p>
-            <a:pPr lvl="0" indent="0" marL="0">
-              <a:buNone/>
-            </a:pPr>
-            <a:r>
-              <a:rPr/>
-              <a:t>Right panel is the real argument, so spend the time here. It shows the size of the gradient with respect to z, the push gradient descent gives the model. Log loss’s gradient is p - 1 (slide 24). Squared error’s is 2(p - 1) times p times (1 - p): the chain rule through the sigmoid brings in its derivative, p times one-minus-p, from slide 12, and nothing cancels it. That factor goes to zero as p goes to zero.</a:t>
-            </a:r>
-          </a:p>
-          <a:p>
-            <a:pPr lvl="0" indent="0" marL="0">
-              <a:buNone/>
-            </a:pPr>
-          </a:p>
-          <a:p>
-            <a:pPr lvl="0" indent="0" marL="0">
-              <a:buNone/>
-            </a:pPr>
-            <a:r>
-              <a:rPr/>
-              <a:t>Say it as a sentence: the wronger the model gets, the less squared error asks it to change. Divide one gradient by the other: squared error’s is log loss’s times 2p(1 - p). At p = 0.001 that factor is 2 times 0.001 times 0.999 = 0.002, a five-hundredth. Log loss goes the other way, approaching its maximum push exactly where the error is worst.</a:t>
-            </a:r>
-          </a:p>
-          <a:p>
-            <a:pPr lvl="0" indent="0" marL="0">
-              <a:buNone/>
-            </a:pPr>
-          </a:p>
-          <a:p>
-            <a:pPr lvl="0" indent="0" marL="0">
-              <a:buNone/>
-            </a:pPr>
-            <a:r>
-              <a:rPr/>
-              <a:t>That is the failure. Not that squared error scores badly - that it stops teaching.</a:t>
-            </a:r>
-          </a:p>
-          <a:p>
-            <a:pPr lvl="0" indent="0" marL="0">
-              <a:buNone/>
-            </a:pPr>
-          </a:p>
-          <a:p>
-            <a:pPr lvl="0" indent="0" marL="0">
-              <a:buNone/>
-            </a:pPr>
-            <a:r>
-              <a:rPr/>
-              <a:t>A predictable slip, from the left panel alone: “log loss charges more, so gradient descent works better with it”. The size of a cost does not matter to gradient descent - multiply a cost by 100 and its minimum is in the same place. What matters is the gradient, the right panel: the push squared error gives dies away exactly when the model is confidently wrong, and log loss’s does not.</a:t>
+              <a:t>What the formula says, in words. To find how the cost J changes when the coefficient w_j is nudged up: take each training drive, compute its error - the predicted probability y-hat minus the true label y, which is 0 or 1 - multiply that error by the drive’s value of feature j, and average over the m drives. Gradient descent then steps w_j in the opposite direction.</a:t>
+            </a:r>
+          </a:p>
+          <a:p>
+            <a:pPr lvl="0" indent="0" marL="0">
+              <a:buNone/>
+            </a:pPr>
+          </a:p>
+          <a:p>
+            <a:pPr lvl="0" indent="0" marL="0">
+              <a:buNone/>
+            </a:pPr>
+            <a:r>
+              <a:rPr/>
+              <a:t>What is new, and what is not. The formula is written with exactly the symbols of lesson 3’s slide 23. The difference is hidden in y-hat: in lesson 3 it was the straight line w-transpose-x plus b, and here it is the sigmoid of that line, the probability of slide 13 - which is why the title says so. The cost is different too: squared error there, log loss (slide 24) here. Different model, different cost, and yet the same gradient.</a:t>
+            </a:r>
+          </a:p>
+          <a:p>
+            <a:pPr lvl="0" indent="0" marL="0">
+              <a:buNone/>
+            </a:pPr>
+          </a:p>
+          <a:p>
+            <a:pPr lvl="0" indent="0" marL="0">
+              <a:buNone/>
+            </a:pPr>
+            <a:r>
+              <a:rPr/>
+              <a:t>A concrete drive. A drive that failed, y = 1, to which the model gives y-hat = 0.2: its error is 0.2 minus 1, which is minus 0.8. A negative term means the cost falls if w_j rises, so this drive pulls w_j up, and pulls harder the larger its value of feature j. A healthy drive, y = 0, given the same 0.2 has error plus 0.2 and pulls the other way, four times more gently. This is lesson 3’s weighted vote: each drive pulls in proportion to how wrong it was and how large the feature was for it.</a:t>
+            </a:r>
+          </a:p>
+          <a:p>
+            <a:pPr lvl="0" indent="0" marL="0">
+              <a:buNone/>
+            </a:pPr>
+          </a:p>
+          <a:p>
+            <a:pPr lvl="0" indent="0" marL="0">
+              <a:buNone/>
+            </a:pPr>
+            <a:r>
+              <a:rPr/>
+              <a:t>Why it comes out the same - worth the board if there is appetite, handout section 3.4 has it in full. Follow one drive through the chain rule, in three links, with p for y-hat and z for w-transpose-x plus b: - how the loss changes with p: (p - y) divided by p times (1 - p) - the denominator comes from the logarithms in the log loss; - how p changes with z: p times (1 - p), the sigmoid’s derivative from slide 13; - how z changes with w_j: x_j. Multiply the three: the p times (1 - p) cancels, and what is left is (p - y) times x_j.</a:t>
+            </a:r>
+          </a:p>
+          <a:p>
+            <a:pPr lvl="0" indent="0" marL="0">
+              <a:buNone/>
+            </a:pPr>
+          </a:p>
+          <a:p>
+            <a:pPr lvl="0" indent="0" marL="0">
+              <a:buNone/>
+            </a:pPr>
+            <a:r>
+              <a:rPr/>
+              <a:t>Why that cancellation matters, and it is the bridge to the next slide: with squared error in place of log loss, nothing cancels the factor p times (1 - p), and slide 26 shows what it does to a drive the model is confidently wrong about.</a:t>
+            </a:r>
+          </a:p>
+          <a:p>
+            <a:pPr lvl="0" indent="0" marL="0">
+              <a:buNone/>
+            </a:pPr>
+          </a:p>
+          <a:p>
+            <a:pPr lvl="0" indent="0" marL="0">
+              <a:buNone/>
+            </a:pPr>
+            <a:r>
+              <a:rPr/>
+              <a:t>If someone asks whether the match is a coincidence: no, and one sentence is enough. Both costs come from maximum likelihood - squared error when the noise on y is Gaussian (lesson 3, handout section 2.2), log loss when y is a 0/1 outcome - and each paired with its own model gives this same form. Statisticians call the family “generalised linear models”; the name is not examinable. The practical consequence is: the same gradient descent code trains both models, and only the line that computes y-hat changes.</a:t>
             </a:r>
           </a:p>
         </p:txBody>
@@ -2900,49 +2873,91 @@
             </a:pPr>
             <a:r>
               <a:rPr/>
-              <a:t>State it, do not prove it; the handout section 4.3 has the argument.</a:t>
-            </a:r>
-          </a:p>
-          <a:p>
-            <a:pPr lvl="0" indent="0" marL="0">
-              <a:buNone/>
-            </a:pPr>
-          </a:p>
-          <a:p>
-            <a:pPr lvl="0" indent="0" marL="0">
-              <a:buNone/>
-            </a:pPr>
-            <a:r>
-              <a:rPr/>
-              <a:t>The consequence is practical: gradient descent on log loss cannot get trapped. Squared error through a sigmoid has no such guarantee and is in general non-convex.</a:t>
-            </a:r>
-          </a:p>
-          <a:p>
-            <a:pPr lvl="0" indent="0" marL="0">
-              <a:buNone/>
-            </a:pPr>
-          </a:p>
-          <a:p>
-            <a:pPr lvl="0" indent="0" marL="0">
-              <a:buNone/>
-            </a:pPr>
-            <a:r>
-              <a:rPr/>
-              <a:t>Now the caution that catches people, and it is worth ten seconds because they will see max_iter set in notebook 1 and wonder why. Convex does NOT mean there is a closed-form solution. Setting the gradient to zero gives X-transpose times the vector of errors, sigma(Xw + b) minus y, equal to zero. That equation is not linear in w - the sigmoid is in the way - so it cannot be solved in one step as lesson 3’s normal equation was.</a:t>
-            </a:r>
-          </a:p>
-          <a:p>
-            <a:pPr lvl="0" indent="0" marL="0">
-              <a:buNone/>
-            </a:pPr>
-          </a:p>
-          <a:p>
-            <a:pPr lvl="0" indent="0" marL="0">
-              <a:buNone/>
-            </a:pPr>
-            <a:r>
-              <a:rPr/>
-              <a:t>There is no normal equation for logistic regression. It has to be solved iteratively, which is why LogisticRegression has a max_iter argument and LinearRegression does not. If a student ever sees a convergence warning, that is what it is about.</a:t>
+              <a:t>Both panels take a drive that failed, y = 1, and move the model’s probability p for it along the horizontal axis. Squared error here is (p - 1) squared, the handout’s convention in section 4.</a:t>
+            </a:r>
+          </a:p>
+          <a:p>
+            <a:pPr lvl="0" indent="0" marL="0">
+              <a:buNone/>
+            </a:pPr>
+          </a:p>
+          <a:p>
+            <a:pPr lvl="0" indent="0" marL="0">
+              <a:buNone/>
+            </a:pPr>
+            <a:r>
+              <a:rPr/>
+              <a:t>Left panel, the costs. A drive failed and the model said 0.0001. Squared error charges (0.0001 - 1) squared = 0.9998. An honest “don’t know” - 0.5 - costs (0.5 - 1) squared = 0.25. So the worst possible answer is four times worse than a shrug. Log loss charges minus log 0.0001 = 9.2 against minus log 0.5 = 0.69, and the ratio grows without bound.</a:t>
+            </a:r>
+          </a:p>
+          <a:p>
+            <a:pPr lvl="0" indent="0" marL="0">
+              <a:buNone/>
+            </a:pPr>
+          </a:p>
+          <a:p>
+            <a:pPr lvl="0" indent="0" marL="0">
+              <a:buNone/>
+            </a:pPr>
+            <a:r>
+              <a:rPr/>
+              <a:t>Right panel is the real argument, so spend the time here. It shows the size of the gradient with respect to z, the push gradient descent gives the model. Log loss’s gradient is p - 1 (slide 25). Squared error’s is 2(p - 1) times p times (1 - p): the chain rule through the sigmoid brings in its derivative, p times one-minus-p, from slide 13, and nothing cancels it. That factor goes to zero as p goes to zero.</a:t>
+            </a:r>
+          </a:p>
+          <a:p>
+            <a:pPr lvl="0" indent="0" marL="0">
+              <a:buNone/>
+            </a:pPr>
+          </a:p>
+          <a:p>
+            <a:pPr lvl="0" indent="0" marL="0">
+              <a:buNone/>
+            </a:pPr>
+            <a:r>
+              <a:rPr/>
+              <a:t>Say it as a sentence: the wronger the model gets, the less squared error asks it to change. Divide one gradient by the other: squared error’s is log loss’s times 2p(1 - p). At p = 0.001 that factor is 2 times 0.001 times 0.999 = 0.002, a five-hundredth. Log loss goes the other way, approaching its maximum push exactly where the error is worst.</a:t>
+            </a:r>
+          </a:p>
+          <a:p>
+            <a:pPr lvl="0" indent="0" marL="0">
+              <a:buNone/>
+            </a:pPr>
+          </a:p>
+          <a:p>
+            <a:pPr lvl="0" indent="0" marL="0">
+              <a:buNone/>
+            </a:pPr>
+            <a:r>
+              <a:rPr/>
+              <a:t>That is the failure. Not that squared error scores badly - that it stops teaching.</a:t>
+            </a:r>
+          </a:p>
+          <a:p>
+            <a:pPr lvl="0" indent="0" marL="0">
+              <a:buNone/>
+            </a:pPr>
+          </a:p>
+          <a:p>
+            <a:pPr lvl="0" indent="0" marL="0">
+              <a:buNone/>
+            </a:pPr>
+            <a:r>
+              <a:rPr/>
+              <a:t>A predictable slip, from the left panel alone: “log loss charges more, so gradient descent works better with it”. The size of a cost does not matter to gradient descent - multiply a cost by 100 and its minimum is in the same place. What matters is the gradient, the right panel: the push squared error gives dies away exactly when the model is confidently wrong, and log loss’s does not.</a:t>
+            </a:r>
+          </a:p>
+          <a:p>
+            <a:pPr lvl="0" indent="0" marL="0">
+              <a:buNone/>
+            </a:pPr>
+          </a:p>
+          <a:p>
+            <a:pPr lvl="0" indent="0" marL="0">
+              <a:buNone/>
+            </a:pPr>
+            <a:r>
+              <a:rPr/>
+              <a:t>A second predictable slip, from reading the two panels together: “log loss’s slope is minus 1 over p”. That is the slope of the LEFT blue curve, the derivative of minus log p with respect to p. The right panel differentiates with respect to z, the log-odds, and there log loss’s gradient is p - 1: size 1 - p, the straight line from 1 down to 0, as its legend says. The chain rule joins the two panels: minus 1 over p, times the sigmoid’s derivative p(1 - p), gives minus (1 - p). The 1 over p cancels the sigmoid’s p, which is why log loss’s push does not die; squared error has no 1 over p to cancel it.</a:t>
             </a:r>
           </a:p>
         </p:txBody>
@@ -3024,63 +3039,49 @@
             </a:pPr>
             <a:r>
               <a:rPr/>
-              <a:t>Fifteen lines of NumPy, then one line of scikit-learn, and the same answer. Run notebook 01. Seventeen minutes, leaving three for the decision boundary on the next slide. The parts worth stopping on:</a:t>
-            </a:r>
-          </a:p>
-          <a:p>
-            <a:pPr lvl="0" indent="0" marL="0">
-              <a:buNone/>
-            </a:pPr>
-          </a:p>
-          <a:p>
-            <a:pPr lvl="0" indent="0" marL="0">
-              <a:buNone/>
-            </a:pPr>
-            <a:r>
-              <a:rPr/>
-              <a:t>The linear-fit failure - let them see 3,606 negative probabilities printed rather than being told.</a:t>
-            </a:r>
-          </a:p>
-          <a:p>
-            <a:pPr lvl="0" indent="0" marL="0">
-              <a:buNone/>
-            </a:pPr>
-          </a:p>
-          <a:p>
-            <a:pPr lvl="0" indent="0" marL="0">
-              <a:buNone/>
-            </a:pPr>
-            <a:r>
-              <a:rPr/>
-              <a:t>The gradient/loss figure, which is the argument you just made, in code they can change. Invite them to change it: what happens to the squared-error gradient at p = 0.5?</a:t>
-            </a:r>
-          </a:p>
-          <a:p>
-            <a:pPr lvl="0" indent="0" marL="0">
-              <a:buNone/>
-            </a:pPr>
-          </a:p>
-          <a:p>
-            <a:pPr lvl="0" indent="0" marL="0">
-              <a:buNone/>
-            </a:pPr>
-            <a:r>
-              <a:rPr/>
-              <a:t>The coefficient recovery table, including the decoy.</a:t>
-            </a:r>
-          </a:p>
-          <a:p>
-            <a:pPr lvl="0" indent="0" marL="0">
-              <a:buNone/>
-            </a:pPr>
-          </a:p>
-          <a:p>
-            <a:pPr lvl="0" indent="0" marL="0">
-              <a:buNone/>
-            </a:pPr>
-            <a:r>
-              <a:rPr/>
-              <a:t>If time is short, skip the descent curve - it is the least surprising cell and they saw the same picture in lesson 3.</a:t>
+              <a:t>State it, do not prove it; the handout section 4.3 has the argument.</a:t>
+            </a:r>
+          </a:p>
+          <a:p>
+            <a:pPr lvl="0" indent="0" marL="0">
+              <a:buNone/>
+            </a:pPr>
+          </a:p>
+          <a:p>
+            <a:pPr lvl="0" indent="0" marL="0">
+              <a:buNone/>
+            </a:pPr>
+            <a:r>
+              <a:rPr/>
+              <a:t>The consequence is practical: gradient descent on log loss cannot get trapped. Squared error through a sigmoid has no such guarantee and is in general non-convex. Slide 26’s right panel already shows why, for one failed drive taken as a function of z. Far to the left squared error’s slope is 0 (the push that died), in the middle it is negative, far to the right it is 0 again. A convex function’s slope can only grow as z grows; this one falls and then rises, so the curve is not convex. The vanishing push and the lost convexity are the same fact.</a:t>
+            </a:r>
+          </a:p>
+          <a:p>
+            <a:pPr lvl="0" indent="0" marL="0">
+              <a:buNone/>
+            </a:pPr>
+          </a:p>
+          <a:p>
+            <a:pPr lvl="0" indent="0" marL="0">
+              <a:buNone/>
+            </a:pPr>
+            <a:r>
+              <a:rPr/>
+              <a:t>Now the caution that catches people, and it is worth ten seconds because they will see max_iter set in notebook 1 and wonder why. Convex does NOT mean there is a closed-form solution. Setting the gradient to zero gives X-transpose times the vector of errors, sigma(Xw + b) minus y, equal to zero. That equation is not linear in w - the sigmoid is in the way - so it cannot be solved in one step as lesson 3’s normal equation was.</a:t>
+            </a:r>
+          </a:p>
+          <a:p>
+            <a:pPr lvl="0" indent="0" marL="0">
+              <a:buNone/>
+            </a:pPr>
+          </a:p>
+          <a:p>
+            <a:pPr lvl="0" indent="0" marL="0">
+              <a:buNone/>
+            </a:pPr>
+            <a:r>
+              <a:rPr/>
+              <a:t>There is no normal equation for logistic regression. It has to be solved iteratively, which is why LogisticRegression has a max_iter argument and LinearRegression does not. If a student ever sees a convergence warning, that is what it is about.</a:t>
             </a:r>
           </a:p>
         </p:txBody>
@@ -3162,7 +3163,7 @@
             </a:pPr>
             <a:r>
               <a:rPr/>
-              <a:t>Two features, so the model can be drawn. The black line is where the predicted probability is exactly 0.5 - equivalently, where the log-odds are zero.</a:t>
+              <a:t>A separate model, fitted on two counters only - reallocated sectors and temperature - so that it can be drawn. It is not a slice of the six-counter model, which would need the other four counters fixed at some value. The white points are a random sample of 900 healthy training drives; every training failure is shown, so gold looks far more common than it is. The black line is where the predicted probability is exactly 0.5 - equivalently, where the log-odds are zero.</a:t>
             </a:r>
           </a:p>
           <a:p>
@@ -3190,7 +3191,7 @@
             </a:pPr>
             <a:r>
               <a:rPr/>
-              <a:t>Second observation, and this is the bridge to the rest of the lesson: most of the gold points - the drives that actually failed - are on the blue side of the line. At a threshold of 0.5 this two-feature model calls nearly the whole fleet healthy, including most of the drives that failed. It uses two counters only, so that it can be drawn; the six-counter model of slide 30 does better at the same 0.5, and still misses 33 of the 76 test failures.</a:t>
+              <a:t>Second observation, and this is the bridge to the rest of the lesson: most of the gold points - the drives that actually failed - are on the blue side of the line. At a threshold of 0.5 this two-feature model calls nearly the whole fleet healthy, including most of the drives that failed. It uses two counters only, so that it can be drawn; the six-counter model of slide 31 does better at the same 0.5, and still misses 33 of the 76 test failures.</a:t>
             </a:r>
           </a:p>
           <a:p>
@@ -3205,6 +3206,20 @@
             <a:r>
               <a:rPr/>
               <a:t>Ask: is that a bad model? Take answers. Then say: the probabilities are fine. The threshold of 0.5 is a habit. Telling those two apart is the rest of the lesson.</a:t>
+            </a:r>
+          </a:p>
+          <a:p>
+            <a:pPr lvl="0" indent="0" marL="0">
+              <a:buNone/>
+            </a:pPr>
+          </a:p>
+          <a:p>
+            <a:pPr lvl="0" indent="0" marL="0">
+              <a:buNone/>
+            </a:pPr>
+            <a:r>
+              <a:rPr/>
+              <a:t>A predictable slip: “the drives above the line are flagged”. A line has two sides, not an above and a below: the model flags the side where w-transpose x plus b is positive, here the red side, to the right. The line is almost vertical because sectors weigh far more than temperature, which only tilts it.</a:t>
             </a:r>
           </a:p>
         </p:txBody>
@@ -3286,7 +3301,63 @@
             </a:pPr>
             <a:r>
               <a:rPr/>
-              <a:t>Ten minutes. When they come back, the first slide is the trap, and it works best if they have not been thinking about it.</a:t>
+              <a:t>Fifteen lines of NumPy, then one line of scikit-learn, and the same answer. Run notebook 01: seventeen minutes, after three on the decision boundary of the previous slide, which section 5 of the notebook draws live. The parts worth stopping on:</a:t>
+            </a:r>
+          </a:p>
+          <a:p>
+            <a:pPr lvl="0" indent="0" marL="0">
+              <a:buNone/>
+            </a:pPr>
+          </a:p>
+          <a:p>
+            <a:pPr lvl="0" indent="0" marL="0">
+              <a:buNone/>
+            </a:pPr>
+            <a:r>
+              <a:rPr/>
+              <a:t>The linear-fit failure - let them see 3,606 negative probabilities printed rather than being told.</a:t>
+            </a:r>
+          </a:p>
+          <a:p>
+            <a:pPr lvl="0" indent="0" marL="0">
+              <a:buNone/>
+            </a:pPr>
+          </a:p>
+          <a:p>
+            <a:pPr lvl="0" indent="0" marL="0">
+              <a:buNone/>
+            </a:pPr>
+            <a:r>
+              <a:rPr/>
+              <a:t>The gradient/loss figure, which is the argument you just made, in code they can change. Invite them to change it: what happens to the squared-error gradient at p = 0.5?</a:t>
+            </a:r>
+          </a:p>
+          <a:p>
+            <a:pPr lvl="0" indent="0" marL="0">
+              <a:buNone/>
+            </a:pPr>
+          </a:p>
+          <a:p>
+            <a:pPr lvl="0" indent="0" marL="0">
+              <a:buNone/>
+            </a:pPr>
+            <a:r>
+              <a:rPr/>
+              <a:t>The coefficient recovery table, including the decoy.</a:t>
+            </a:r>
+          </a:p>
+          <a:p>
+            <a:pPr lvl="0" indent="0" marL="0">
+              <a:buNone/>
+            </a:pPr>
+          </a:p>
+          <a:p>
+            <a:pPr lvl="0" indent="0" marL="0">
+              <a:buNone/>
+            </a:pPr>
+            <a:r>
+              <a:rPr/>
+              <a:t>If time is short, skip the descent curve - it is the least surprising cell and they saw the same picture in lesson 3.</a:t>
             </a:r>
           </a:p>
         </p:txBody>
@@ -3368,59 +3439,7 @@
             </a:pPr>
             <a:r>
               <a:rPr/>
-              <a:t>This is the number to remember from lesson 4. Put it up and say nothing for a moment.</a:t>
-            </a:r>
-          </a:p>
-          <a:p>
-            <a:pPr lvl="0" indent="0" marL="0">
-              <a:buNone/>
-            </a:pPr>
-          </a:p>
-          <a:p>
-            <a:pPr lvl="0" indent="0" marL="0">
-              <a:buNone/>
-            </a:pPr>
-            <a:r>
-              <a:rPr/>
-              <a:t>A model that could be written </a:t>
-            </a:r>
-            <a:r>
-              <a:rPr>
-                <a:latin typeface="Courier"/>
-              </a:rPr>
-              <a:t>return 0</a:t>
-            </a:r>
-            <a:r>
-              <a:rPr/>
-              <a:t> - no learning, no data, no features - scores 96.20%. The model they just built, which finds more than half the failing drives, scores 97.70%. 97.70 minus 96.20: one and a half percentage points separate a real model from a worthless one.</a:t>
-            </a:r>
-          </a:p>
-          <a:p>
-            <a:pPr lvl="0" indent="0" marL="0">
-              <a:buNone/>
-            </a:pPr>
-          </a:p>
-          <a:p>
-            <a:pPr lvl="0" indent="0" marL="0">
-              <a:buNone/>
-            </a:pPr>
-            <a:r>
-              <a:rPr/>
-              <a:t>The arithmetic is not subtle: 1,924 of the 2,000 test drives are healthy, so answering “healthy” collects them all for free. Only the 76 failures, 76 divided by 2,000 = 3.8% of the test set, are left to compete over.</a:t>
-            </a:r>
-          </a:p>
-          <a:p>
-            <a:pPr lvl="0" indent="0" marL="0">
-              <a:buNone/>
-            </a:pPr>
-          </a:p>
-          <a:p>
-            <a:pPr lvl="0" indent="0" marL="0">
-              <a:buNone/>
-            </a:pPr>
-            <a:r>
-              <a:rPr/>
-              <a:t>This is the 306 of slide 6 coming back as an accuracy score: 96.20% is simply the share of test drives that are healthy.</a:t>
+              <a:t>Ten minutes. When they come back, the first slide is the trap, and it works best if they have not been thinking about it.</a:t>
             </a:r>
           </a:p>
         </p:txBody>
@@ -3626,49 +3645,59 @@
             </a:pPr>
             <a:r>
               <a:rPr/>
-              <a:t>Be careful to defend the instinct rather than mock it. Accuracy is not a naive metric, and students who reached for it were not being lazy - on a balanced problem it is the correct summary and everything else is a complication.</a:t>
-            </a:r>
-          </a:p>
-          <a:p>
-            <a:pPr lvl="0" indent="0" marL="0">
-              <a:buNone/>
-            </a:pPr>
-          </a:p>
-          <a:p>
-            <a:pPr lvl="0" indent="0" marL="0">
-              <a:buNone/>
-            </a:pPr>
-            <a:r>
-              <a:rPr/>
-              <a:t>It stops being informative precisely when one class is rare. And then list the problems: fraud, disease screening, intrusion detection, equipment failure, spam. In every one of them the class you care about is the small one.</a:t>
-            </a:r>
-          </a:p>
-          <a:p>
-            <a:pPr lvl="0" indent="0" marL="0">
-              <a:buNone/>
-            </a:pPr>
-          </a:p>
-          <a:p>
-            <a:pPr lvl="0" indent="0" marL="0">
-              <a:buNone/>
-            </a:pPr>
-            <a:r>
-              <a:rPr/>
-              <a:t>The general statement, worth putting on the board: if a share pi of the cases are positive (the positive rate), the trivial always-negative classifier scores 1 minus pi. Here 1 - 0.038 = 96.2%. In some fraud problems, where the rate is one in a thousand, 1 - 0.001 = 99.9%.</a:t>
-            </a:r>
-          </a:p>
-          <a:p>
-            <a:pPr lvl="0" indent="0" marL="0">
-              <a:buNone/>
-            </a:pPr>
-          </a:p>
-          <a:p>
-            <a:pPr lvl="0" indent="0" marL="0">
-              <a:buNone/>
-            </a:pPr>
-            <a:r>
-              <a:rPr/>
-              <a:t>Accuracy is not wrong. It is answering a question nobody asked.</a:t>
+              <a:t>This is the number to remember from lesson 4. Put it up and say nothing for a moment.</a:t>
+            </a:r>
+          </a:p>
+          <a:p>
+            <a:pPr lvl="0" indent="0" marL="0">
+              <a:buNone/>
+            </a:pPr>
+          </a:p>
+          <a:p>
+            <a:pPr lvl="0" indent="0" marL="0">
+              <a:buNone/>
+            </a:pPr>
+            <a:r>
+              <a:rPr/>
+              <a:t>A model that could be written </a:t>
+            </a:r>
+            <a:r>
+              <a:rPr>
+                <a:latin typeface="Courier"/>
+              </a:rPr>
+              <a:t>return 0</a:t>
+            </a:r>
+            <a:r>
+              <a:rPr/>
+              <a:t> - no learning, no data, no features - scores 96.20%. The model they just built, which finds more than half the failing drives, scores 97.70%. 97.70 minus 96.20: one and a half percentage points separate a real model from a worthless one.</a:t>
+            </a:r>
+          </a:p>
+          <a:p>
+            <a:pPr lvl="0" indent="0" marL="0">
+              <a:buNone/>
+            </a:pPr>
+          </a:p>
+          <a:p>
+            <a:pPr lvl="0" indent="0" marL="0">
+              <a:buNone/>
+            </a:pPr>
+            <a:r>
+              <a:rPr/>
+              <a:t>The arithmetic is not subtle: 1,924 of the 2,000 test drives are healthy, so answering “healthy” collects them all for free. Only the 76 failures, 76 divided by 2,000 = 3.8% of the test set, are left to compete over.</a:t>
+            </a:r>
+          </a:p>
+          <a:p>
+            <a:pPr lvl="0" indent="0" marL="0">
+              <a:buNone/>
+            </a:pPr>
+          </a:p>
+          <a:p>
+            <a:pPr lvl="0" indent="0" marL="0">
+              <a:buNone/>
+            </a:pPr>
+            <a:r>
+              <a:rPr/>
+              <a:t>This is the 306 of slide 6 coming back as an accuracy score: 96.20% is simply the share of test drives that are healthy.</a:t>
             </a:r>
           </a:p>
         </p:txBody>
@@ -3750,49 +3779,77 @@
             </a:pPr>
             <a:r>
               <a:rPr/>
-              <a:t>The fix is to stop collapsing four outcomes into one number.</a:t>
-            </a:r>
-          </a:p>
-          <a:p>
-            <a:pPr lvl="0" indent="0" marL="0">
-              <a:buNone/>
-            </a:pPr>
-          </a:p>
-          <a:p>
-            <a:pPr lvl="0" indent="0" marL="0">
-              <a:buNone/>
-            </a:pPr>
-            <a:r>
-              <a:rPr/>
-              <a:t>Side by side, the two models are obviously not comparable - and the number that separates them, 0 caught against 43, is nowhere in the accuracy figure.</a:t>
-            </a:r>
-          </a:p>
-          <a:p>
-            <a:pPr lvl="0" indent="0" marL="0">
-              <a:buNone/>
-            </a:pPr>
-          </a:p>
-          <a:p>
-            <a:pPr lvl="0" indent="0" marL="0">
-              <a:buNone/>
-            </a:pPr>
-            <a:r>
-              <a:rPr/>
-              <a:t>Teach them to read the bottom-left cell first when misses are expensive: 33 drives failed and were called healthy. That is the cell that costs money, and it is the one a single-number metric hides.</a:t>
-            </a:r>
-          </a:p>
-          <a:p>
-            <a:pPr lvl="0" indent="0" marL="0">
-              <a:buNone/>
-            </a:pPr>
-          </a:p>
-          <a:p>
-            <a:pPr lvl="0" indent="0" marL="0">
-              <a:buNone/>
-            </a:pPr>
-            <a:r>
-              <a:rPr/>
-              <a:t>Worth naming the convention while it is on screen, because half the world uses the transpose: scikit-learn puts truth in rows and predictions in columns. Any time they read a confusion matrix from a paper, check which way round it is before drawing conclusions.</a:t>
+              <a:t>Be careful to defend the instinct rather than mock it. Accuracy is not a naive metric, and students who reached for it were not being lazy - on a balanced problem it is the correct summary and everything else is a complication.</a:t>
+            </a:r>
+          </a:p>
+          <a:p>
+            <a:pPr lvl="0" indent="0" marL="0">
+              <a:buNone/>
+            </a:pPr>
+          </a:p>
+          <a:p>
+            <a:pPr lvl="0" indent="0" marL="0">
+              <a:buNone/>
+            </a:pPr>
+            <a:r>
+              <a:rPr/>
+              <a:t>It stops being informative precisely when one class is rare. And then list the problems: fraud, disease screening, intrusion detection, equipment failure, spam. In every one of them the class you care about is the small one.</a:t>
+            </a:r>
+          </a:p>
+          <a:p>
+            <a:pPr lvl="0" indent="0" marL="0">
+              <a:buNone/>
+            </a:pPr>
+          </a:p>
+          <a:p>
+            <a:pPr lvl="0" indent="0" marL="0">
+              <a:buNone/>
+            </a:pPr>
+            <a:r>
+              <a:rPr/>
+              <a:t>The general statement, worth putting on the board: if a share pi of the cases are positive (the positive rate), the trivial always-negative classifier scores 1 minus pi. Here 1 - 0.038 = 96.2%. In some fraud problems, where the rate is one in a thousand, 1 - 0.001 = 99.9%.</a:t>
+            </a:r>
+          </a:p>
+          <a:p>
+            <a:pPr lvl="0" indent="0" marL="0">
+              <a:buNone/>
+            </a:pPr>
+          </a:p>
+          <a:p>
+            <a:pPr lvl="0" indent="0" marL="0">
+              <a:buNone/>
+            </a:pPr>
+            <a:r>
+              <a:rPr/>
+              <a:t>Accuracy is not wrong. It is answering a question nobody asked.</a:t>
+            </a:r>
+          </a:p>
+          <a:p>
+            <a:pPr lvl="0" indent="0" marL="0">
+              <a:buNone/>
+            </a:pPr>
+          </a:p>
+          <a:p>
+            <a:pPr lvl="0" indent="0" marL="0">
+              <a:buNone/>
+            </a:pPr>
+            <a:r>
+              <a:rPr/>
+              <a:t>The condition on the second bullet matters: accuracy counts every error the same, so even on a balanced fleet it is the wrong summary when a miss costs more than a false alarm - as here, slide 34.</a:t>
+            </a:r>
+          </a:p>
+          <a:p>
+            <a:pPr lvl="0" indent="0" marL="0">
+              <a:buNone/>
+            </a:pPr>
+          </a:p>
+          <a:p>
+            <a:pPr lvl="0" indent="0" marL="0">
+              <a:buNone/>
+            </a:pPr>
+            <a:r>
+              <a:rPr/>
+              <a:t>A predictable slip, the over-correction: “so accuracy is useless”. It is a number with a baseline. Read it against 1 minus pi, here 96.20%, and remember that alone it never says which errors were made.</a:t>
             </a:r>
           </a:p>
         </p:txBody>
@@ -3874,35 +3931,77 @@
             </a:pPr>
             <a:r>
               <a:rPr/>
-              <a:t>The names are jargon until they are attached to consequences, so attach them here and keep the numbers visible - they come back at the end of the lesson when we choose a threshold.</a:t>
-            </a:r>
-          </a:p>
-          <a:p>
-            <a:pPr lvl="0" indent="0" marL="0">
-              <a:buNone/>
-            </a:pPr>
-          </a:p>
-          <a:p>
-            <a:pPr lvl="0" indent="0" marL="0">
-              <a:buNone/>
-            </a:pPr>
-            <a:r>
-              <a:rPr/>
-              <a:t>The essential point: these two errors are NOT the same size, and no single-number metric knows that. Accuracy treats them as identical. F1, the metric of slide 36, treats them as identical. Only a cost, supplied from outside the data, distinguishes them.</a:t>
-            </a:r>
-          </a:p>
-          <a:p>
-            <a:pPr lvl="0" indent="0" marL="0">
-              <a:buNone/>
-            </a:pPr>
-          </a:p>
-          <a:p>
-            <a:pPr lvl="0" indent="0" marL="0">
-              <a:buNone/>
-            </a:pPr>
-            <a:r>
-              <a:rPr/>
-              <a:t>Ask for a domain where the ratio goes the other way - where a false positive is the expensive one. Medical screening that triggers an invasive biopsy is the usual answer; content moderation that removes a legitimate post is another.</a:t>
+              <a:t>The fix is to stop collapsing four outcomes into one number.</a:t>
+            </a:r>
+          </a:p>
+          <a:p>
+            <a:pPr lvl="0" indent="0" marL="0">
+              <a:buNone/>
+            </a:pPr>
+          </a:p>
+          <a:p>
+            <a:pPr lvl="0" indent="0" marL="0">
+              <a:buNone/>
+            </a:pPr>
+            <a:r>
+              <a:rPr/>
+              <a:t>Side by side, the two models are obviously not comparable - and the number that separates them, 0 caught against 43, is nowhere in the accuracy figure.</a:t>
+            </a:r>
+          </a:p>
+          <a:p>
+            <a:pPr lvl="0" indent="0" marL="0">
+              <a:buNone/>
+            </a:pPr>
+          </a:p>
+          <a:p>
+            <a:pPr lvl="0" indent="0" marL="0">
+              <a:buNone/>
+            </a:pPr>
+            <a:r>
+              <a:rPr/>
+              <a:t>Teach them to read the bottom-left cell first when misses are expensive: 33 drives failed and were called healthy. That is the cell that costs money, and it is the one a single-number metric hides.</a:t>
+            </a:r>
+          </a:p>
+          <a:p>
+            <a:pPr lvl="0" indent="0" marL="0">
+              <a:buNone/>
+            </a:pPr>
+          </a:p>
+          <a:p>
+            <a:pPr lvl="0" indent="0" marL="0">
+              <a:buNone/>
+            </a:pPr>
+            <a:r>
+              <a:rPr/>
+              <a:t>Worth naming the convention while it is on screen, because half the world uses the transpose: scikit-learn puts truth in rows and predictions in columns. Any time they read a confusion matrix from a paper, check which way round it is before drawing conclusions.</a:t>
+            </a:r>
+          </a:p>
+          <a:p>
+            <a:pPr lvl="0" indent="0" marL="0">
+              <a:buNone/>
+            </a:pPr>
+          </a:p>
+          <a:p>
+            <a:pPr lvl="0" indent="0" marL="0">
+              <a:buNone/>
+            </a:pPr>
+            <a:r>
+              <a:rPr/>
+              <a:t>The top-right cell is the price of the 43: 13 healthy drives flagged, false alarms.</a:t>
+            </a:r>
+          </a:p>
+          <a:p>
+            <a:pPr lvl="0" indent="0" marL="0">
+              <a:buNone/>
+            </a:pPr>
+          </a:p>
+          <a:p>
+            <a:pPr lvl="0" indent="0" marL="0">
+              <a:buNone/>
+            </a:pPr>
+            <a:r>
+              <a:rPr/>
+              <a:t>A predictable slip: “33 misses, so the model needs improving”. Perhaps, but that is not the first lever. The probabilities stay the same and 0.5 is a habit: a lower threshold catches more failures with the same model, at the price of more false alarms (slides 40 to 42, and the threshold derived from the costs, slide 52). The threshold trades one error for the other; only a better model reduces both.</a:t>
             </a:r>
           </a:p>
         </p:txBody>
@@ -3984,49 +4083,49 @@
             </a:pPr>
             <a:r>
               <a:rPr/>
-              <a:t>This picture prevents the most common confusion of the lesson. Both metrics put the true positives - failed drives we flagged - on top of the fraction. The difference is entirely in what goes underneath, and the shading shows it.</a:t>
-            </a:r>
-          </a:p>
-          <a:p>
-            <a:pPr lvl="0" indent="0" marL="0">
-              <a:buNone/>
-            </a:pPr>
-          </a:p>
-          <a:p>
-            <a:pPr lvl="0" indent="0" marL="0">
-              <a:buNone/>
-            </a:pPr>
-            <a:r>
-              <a:rPr/>
-              <a:t>Precision divides by the COLUMN - everything we flagged. When this model raises an alarm, how often is it right? That is the technician’s question: how much of my time are you wasting?</a:t>
-            </a:r>
-          </a:p>
-          <a:p>
-            <a:pPr lvl="0" indent="0" marL="0">
-              <a:buNone/>
-            </a:pPr>
-          </a:p>
-          <a:p>
-            <a:pPr lvl="0" indent="0" marL="0">
-              <a:buNone/>
-            </a:pPr>
-            <a:r>
-              <a:rPr/>
-              <a:t>Recall divides by the ROW - everything that actually failed. Of the drives that were going to fail, how many did we find? That is the operations manager’s question: how exposed am I still?</a:t>
-            </a:r>
-          </a:p>
-          <a:p>
-            <a:pPr lvl="0" indent="0" marL="0">
-              <a:buNone/>
-            </a:pPr>
-          </a:p>
-          <a:p>
-            <a:pPr lvl="0" indent="0" marL="0">
-              <a:buNone/>
-            </a:pPr>
-            <a:r>
-              <a:rPr/>
-              <a:t>Give them the hook and make them repeat it: precision is about the alarms, recall is about the failures. When in doubt, find the denominator and ask which population it is.</a:t>
+              <a:t>The names are jargon until they are attached to consequences, so attach them here and keep the numbers visible - they come back at the end of the lesson when we choose a threshold.</a:t>
+            </a:r>
+          </a:p>
+          <a:p>
+            <a:pPr lvl="0" indent="0" marL="0">
+              <a:buNone/>
+            </a:pPr>
+          </a:p>
+          <a:p>
+            <a:pPr lvl="0" indent="0" marL="0">
+              <a:buNone/>
+            </a:pPr>
+            <a:r>
+              <a:rPr/>
+              <a:t>The essential point: these two errors are NOT the same size, and no single-number metric knows that. Accuracy treats them as identical. F1, the metric of slide 37, treats them as identical. Only a cost, supplied from outside the data, distinguishes them.</a:t>
+            </a:r>
+          </a:p>
+          <a:p>
+            <a:pPr lvl="0" indent="0" marL="0">
+              <a:buNone/>
+            </a:pPr>
+          </a:p>
+          <a:p>
+            <a:pPr lvl="0" indent="0" marL="0">
+              <a:buNone/>
+            </a:pPr>
+            <a:r>
+              <a:rPr/>
+              <a:t>The fourth bullet answers the question someone will ask: does replacing a drive that really was failing cost nothing? It costs a technician’s hour, but a failing drive has to be replaced anyway, so the model did not cause that cost. Each figure is what the error adds over the right decision; correct decisions add nothing.</a:t>
+            </a:r>
+          </a:p>
+          <a:p>
+            <a:pPr lvl="0" indent="0" marL="0">
+              <a:buNone/>
+            </a:pPr>
+          </a:p>
+          <a:p>
+            <a:pPr lvl="0" indent="0" marL="0">
+              <a:buNone/>
+            </a:pPr>
+            <a:r>
+              <a:rPr/>
+              <a:t>Ask for a domain where the ratio goes the other way - where a false positive is the expensive one. Medical screening that triggers an invasive biopsy is the usual answer; content moderation that removes a legitimate post is another.</a:t>
             </a:r>
           </a:p>
         </p:txBody>
@@ -4108,35 +4207,49 @@
             </a:pPr>
             <a:r>
               <a:rPr/>
-              <a:t>Read each line as an English sentence with the counts in it, not as a ratio. That is the habit worth building: a metric that cannot be said as a sentence about actual objects has not been understood.</a:t>
-            </a:r>
-          </a:p>
-          <a:p>
-            <a:pPr lvl="0" indent="0" marL="0">
-              <a:buNone/>
-            </a:pPr>
-          </a:p>
-          <a:p>
-            <a:pPr lvl="0" indent="0" marL="0">
-              <a:buNone/>
-            </a:pPr>
-            <a:r>
-              <a:rPr/>
-              <a:t>Specificity is recall for the negative class: of the healthy drives, how many did we leave alone. One minus it is the false positive rate, which comes back in the receiver operating characteristic (ROC) section. Mention it now so the term is not new later.</a:t>
-            </a:r>
-          </a:p>
-          <a:p>
-            <a:pPr lvl="0" indent="0" marL="0">
-              <a:buNone/>
-            </a:pPr>
-          </a:p>
-          <a:p>
-            <a:pPr lvl="0" indent="0" marL="0">
-              <a:buNone/>
-            </a:pPr>
-            <a:r>
-              <a:rPr/>
-              <a:t>If someone asks which of the three to report: the answer is that it depends on who is asking, which is the honest answer and also the lesson.</a:t>
+              <a:t>This picture prevents the most common confusion of the lesson. Both metrics put the true positives - failed drives we flagged - on top of the fraction. The difference is entirely in what goes underneath, and the shading shows it.</a:t>
+            </a:r>
+          </a:p>
+          <a:p>
+            <a:pPr lvl="0" indent="0" marL="0">
+              <a:buNone/>
+            </a:pPr>
+          </a:p>
+          <a:p>
+            <a:pPr lvl="0" indent="0" marL="0">
+              <a:buNone/>
+            </a:pPr>
+            <a:r>
+              <a:rPr/>
+              <a:t>Precision divides by the COLUMN - everything we flagged. When this model raises an alarm, how often is it right? That is the technician’s question: how much of my time are you wasting?</a:t>
+            </a:r>
+          </a:p>
+          <a:p>
+            <a:pPr lvl="0" indent="0" marL="0">
+              <a:buNone/>
+            </a:pPr>
+          </a:p>
+          <a:p>
+            <a:pPr lvl="0" indent="0" marL="0">
+              <a:buNone/>
+            </a:pPr>
+            <a:r>
+              <a:rPr/>
+              <a:t>Recall divides by the ROW - everything that actually failed. Of the drives that were going to fail, how many did we find? That is the operations manager’s question: how exposed am I still?</a:t>
+            </a:r>
+          </a:p>
+          <a:p>
+            <a:pPr lvl="0" indent="0" marL="0">
+              <a:buNone/>
+            </a:pPr>
+          </a:p>
+          <a:p>
+            <a:pPr lvl="0" indent="0" marL="0">
+              <a:buNone/>
+            </a:pPr>
+            <a:r>
+              <a:rPr/>
+              <a:t>Give them the hook and make them repeat it: precision is about the alarms, recall is about the failures. When in doubt, find the denominator and ask which population it is.</a:t>
             </a:r>
           </a:p>
         </p:txBody>
@@ -4218,63 +4331,35 @@
             </a:pPr>
             <a:r>
               <a:rPr/>
-              <a:t>Take the stupidest possible model - flag every single drive - and score it. Recall is a perfect 76 out of 76 = 1. Precision is 76 out of 2,000 = 0.038, because all 2,000 drives are flagged and 76 of them fail.</a:t>
-            </a:r>
-          </a:p>
-          <a:p>
-            <a:pPr lvl="0" indent="0" marL="0">
-              <a:buNone/>
-            </a:pPr>
-          </a:p>
-          <a:p>
-            <a:pPr lvl="0" indent="0" marL="0">
-              <a:buNone/>
-            </a:pPr>
-            <a:r>
-              <a:rPr/>
-              <a:t>The figure holds recall at 1 and lets precision run along the horizontal axis. The grey line is the ordinary average, (P + 1) divided by 2: at the left edge, where our model sits, it gives (0.038 + 1) divided by 2 = 0.519, and it can never drop below one half however useless the model. Anyone scanning a results table would not blink at 0.519.</a:t>
-            </a:r>
-          </a:p>
-          <a:p>
-            <a:pPr lvl="0" indent="0" marL="0">
-              <a:buNone/>
-            </a:pPr>
-          </a:p>
-          <a:p>
-            <a:pPr lvl="0" indent="0" marL="0">
-              <a:buNone/>
-            </a:pPr>
-            <a:r>
-              <a:rPr/>
-              <a:t>The blue line is the harmonic mean, F1 = 2PR divided by (P + R), here 2P divided by (P + 1): 2 times 0.038 divided by 1.038 = 0.073, which is the truth.</a:t>
-            </a:r>
-          </a:p>
-          <a:p>
-            <a:pPr lvl="0" indent="0" marL="0">
-              <a:buNone/>
-            </a:pPr>
-          </a:p>
-          <a:p>
-            <a:pPr lvl="0" indent="0" marL="0">
-              <a:buNone/>
-            </a:pPr>
-            <a:r>
-              <a:rPr/>
-              <a:t>The reason: the harmonic mean is dominated by the smaller of the two numbers. A model is only as good as its weaker side, and F1 refuses to let a perfect score on one axis buy a pass on the other. The two lines meet only at the right edge, where both precision and recall are 1.</a:t>
-            </a:r>
-          </a:p>
-          <a:p>
-            <a:pPr lvl="0" indent="0" marL="0">
-              <a:buNone/>
-            </a:pPr>
-          </a:p>
-          <a:p>
-            <a:pPr lvl="0" indent="0" marL="0">
-              <a:buNone/>
-            </a:pPr>
-            <a:r>
-              <a:rPr/>
-              <a:t>Mention F-beta in one sentence: a version of F1 with a weight beta, where beta above 1 counts recall more than precision. That is what you want here, where a miss costs about nineteen times a false alarm (2,600 divided by 140 = 18.6). F2 is the usual choice. Handout section 6.3.</a:t>
+              <a:t>Read each line as an English sentence with the counts in it, not as a ratio. That is the habit worth building: a metric that cannot be said as a sentence about actual objects has not been understood.</a:t>
+            </a:r>
+          </a:p>
+          <a:p>
+            <a:pPr lvl="0" indent="0" marL="0">
+              <a:buNone/>
+            </a:pPr>
+          </a:p>
+          <a:p>
+            <a:pPr lvl="0" indent="0" marL="0">
+              <a:buNone/>
+            </a:pPr>
+            <a:r>
+              <a:rPr/>
+              <a:t>Specificity is recall for the negative class: of the healthy drives, how many did we leave alone. One minus it is the false positive rate, FP divided by (TN + FP), which comes back as the horizontal axis of the receiver operating characteristic (ROC) curve, slide 44. Mention it now so the term is not new later.</a:t>
+            </a:r>
+          </a:p>
+          <a:p>
+            <a:pPr lvl="0" indent="0" marL="0">
+              <a:buNone/>
+            </a:pPr>
+          </a:p>
+          <a:p>
+            <a:pPr lvl="0" indent="0" marL="0">
+              <a:buNone/>
+            </a:pPr>
+            <a:r>
+              <a:rPr/>
+              <a:t>If someone asks which of the three to report: the answer is that it depends on who is asking, which is the honest answer and also the lesson.</a:t>
             </a:r>
           </a:p>
         </p:txBody>
@@ -4356,63 +4441,105 @@
             </a:pPr>
             <a:r>
               <a:rPr/>
-              <a:t>classification_report is scikit-learn’s summary table, and they will print it themselves in notebook 2 in about five minutes: one row per class, then three summary rows - accuracy, macro avg, weighted avg. The two numbers on this slide are the f1-score column of the last two.</a:t>
-            </a:r>
-          </a:p>
-          <a:p>
-            <a:pPr lvl="0" indent="0" marL="0">
-              <a:buNone/>
-            </a:pPr>
-          </a:p>
-          <a:p>
-            <a:pPr lvl="0" indent="0" marL="0">
-              <a:buNone/>
-            </a:pPr>
-            <a:r>
-              <a:rPr/>
-              <a:t>Anticipating it by one slide is deliberate. The rule for choosing between those rows is what they need in their heads while they run the notebook, not afterwards - left to themselves they quote whichever is biggest.</a:t>
-            </a:r>
-          </a:p>
-          <a:p>
-            <a:pPr lvl="0" indent="0" marL="0">
-              <a:buNone/>
-            </a:pPr>
-          </a:p>
-          <a:p>
-            <a:pPr lvl="0" indent="0" marL="0">
-              <a:buNone/>
-            </a:pPr>
-            <a:r>
-              <a:rPr/>
-              <a:t>The weighted average weights each class by how common it is, so on this problem it is essentially the healthy class talking, and it reads close to accuracy - inheriting exactly the blindness slides 30 to 33 were about.</a:t>
-            </a:r>
-          </a:p>
-          <a:p>
-            <a:pPr lvl="0" indent="0" marL="0">
-              <a:buNone/>
-            </a:pPr>
-          </a:p>
-          <a:p>
-            <a:pPr lvl="0" indent="0" marL="0">
-              <a:buNone/>
-            </a:pPr>
-            <a:r>
-              <a:rPr/>
-              <a:t>The macro average gives the two classes equal weight, so the rare class actually registers. 0.820 against 0.975 for the same model.</a:t>
-            </a:r>
-          </a:p>
-          <a:p>
-            <a:pPr lvl="0" indent="0" marL="0">
-              <a:buNone/>
-            </a:pPr>
-          </a:p>
-          <a:p>
-            <a:pPr lvl="0" indent="0" marL="0">
-              <a:buNone/>
-            </a:pPr>
-            <a:r>
-              <a:rPr/>
-              <a:t>The rule: on an imbalanced problem, quote the macro average or the minority class directly. Reporting the weighted average is not incorrect - it is the number that makes a mediocre model look finished, and choosing it without saying so is how a result gets oversold.</a:t>
+              <a:t>Take the stupidest possible model - flag every single drive - and score it. Recall is a perfect 76 out of 76 = 1. Precision is 76 out of 2,000 = 0.038, because all 2,000 drives are flagged and 76 of them fail.</a:t>
+            </a:r>
+          </a:p>
+          <a:p>
+            <a:pPr lvl="0" indent="0" marL="0">
+              <a:buNone/>
+            </a:pPr>
+          </a:p>
+          <a:p>
+            <a:pPr lvl="0" indent="0" marL="0">
+              <a:buNone/>
+            </a:pPr>
+            <a:r>
+              <a:rPr/>
+              <a:t>The figure holds recall at 1 and lets precision run along the horizontal axis. The dashed rust line is the ordinary average, (P + 1) divided by 2: at the left edge, where our model sits, it gives (0.038 + 1) divided by 2 = 0.519, and it can never drop below one half however useless the model. Anyone scanning a results table would not blink at 0.519.</a:t>
+            </a:r>
+          </a:p>
+          <a:p>
+            <a:pPr lvl="0" indent="0" marL="0">
+              <a:buNone/>
+            </a:pPr>
+          </a:p>
+          <a:p>
+            <a:pPr lvl="0" indent="0" marL="0">
+              <a:buNone/>
+            </a:pPr>
+            <a:r>
+              <a:rPr/>
+              <a:t>The blue line is the harmonic mean, F1 = 2PR divided by (P + R), here 2P divided by (P + 1): 2 times 0.038 divided by 1.038 = 0.073, which is the truth.</a:t>
+            </a:r>
+          </a:p>
+          <a:p>
+            <a:pPr lvl="0" indent="0" marL="0">
+              <a:buNone/>
+            </a:pPr>
+          </a:p>
+          <a:p>
+            <a:pPr lvl="0" indent="0" marL="0">
+              <a:buNone/>
+            </a:pPr>
+            <a:r>
+              <a:rPr/>
+              <a:t>The reason: the harmonic mean is dominated by the smaller of the two numbers. A model is only as good as its weaker side, and F1 refuses to let a perfect score on one axis buy a pass on the other. The two lines meet only at the right edge, where both precision and recall are 1.</a:t>
+            </a:r>
+          </a:p>
+          <a:p>
+            <a:pPr lvl="0" indent="0" marL="0">
+              <a:buNone/>
+            </a:pPr>
+          </a:p>
+          <a:p>
+            <a:pPr lvl="0" indent="0" marL="0">
+              <a:buNone/>
+            </a:pPr>
+            <a:r>
+              <a:rPr/>
+              <a:t>A second reason, in counts: F1 = 2TP divided by (2TP + FP + FN), which is TP divided by TP plus the average of FP and FN. Precision and recall share the numerator TP and differ in the denominator, and for two such ratios the harmonic mean is the one that is still a ratio of drives: TP over the average denominator. Ours: 2 times 43 = 86, divided by 86 + 13 + 33 = 132, gives 0.652.</a:t>
+            </a:r>
+          </a:p>
+          <a:p>
+            <a:pPr lvl="0" indent="0" marL="0">
+              <a:buNone/>
+            </a:pPr>
+          </a:p>
+          <a:p>
+            <a:pPr lvl="0" indent="0" marL="0">
+              <a:buNone/>
+            </a:pPr>
+            <a:r>
+              <a:rPr/>
+              <a:t>A predictable slip: “at P = 0 the arithmetic mean is 0.5 and F1 is 0.073”. The 0.073 belongs to the flag-everything model, P = 0.038; at P = 0 exactly, F1 is 0.</a:t>
+            </a:r>
+          </a:p>
+          <a:p>
+            <a:pPr lvl="0" indent="0" marL="0">
+              <a:buNone/>
+            </a:pPr>
+          </a:p>
+          <a:p>
+            <a:pPr lvl="0" indent="0" marL="0">
+              <a:buNone/>
+            </a:pPr>
+            <a:r>
+              <a:rPr/>
+              <a:t>Mention F-beta in one sentence: a version of F1 with a weight beta, where beta above 1 counts recall more than precision. That is what you want here, where a miss costs about nineteen times a false alarm (2,600 divided by 140 = 18.6). F2 is the usual choice. Handout section 6.3.</a:t>
+            </a:r>
+          </a:p>
+          <a:p>
+            <a:pPr lvl="0" indent="0" marL="0">
+              <a:buNone/>
+            </a:pPr>
+          </a:p>
+          <a:p>
+            <a:pPr lvl="0" indent="0" marL="0">
+              <a:buNone/>
+            </a:pPr>
+            <a:r>
+              <a:rPr/>
+              <a:t>A predictable slip: “F2 multiplies recall by 2”. In the weighted harmonic mean it is recall’s reciprocal that gets the weight beta squared = 4, against 1 for precision’s: F2 = 5PR divided by (4P + R). Ours: 5 times 0.768 times 0.566 divided by (4 times 0.768 + 0.566) = 0.597, below F1 because recall is our weak side.</a:t>
             </a:r>
           </a:p>
         </p:txBody>
@@ -4494,35 +4621,91 @@
             </a:pPr>
             <a:r>
               <a:rPr/>
-              <a:t>The confusion matrix by hand, then from scikit-learn, then the threshold sweep. Run notebook 02. Twenty minutes.</a:t>
-            </a:r>
-          </a:p>
-          <a:p>
-            <a:pPr lvl="0" indent="0" marL="0">
-              <a:buNone/>
-            </a:pPr>
-          </a:p>
-          <a:p>
-            <a:pPr lvl="0" indent="0" marL="0">
-              <a:buNone/>
-            </a:pPr>
-            <a:r>
-              <a:rPr/>
-              <a:t>Have them build the four counts by hand before calling confusion_matrix. It is four comparisons and it takes two minutes, and it is what makes the jargon stop being jargon.</a:t>
-            </a:r>
-          </a:p>
-          <a:p>
-            <a:pPr lvl="0" indent="0" marL="0">
-              <a:buNone/>
-            </a:pPr>
-          </a:p>
-          <a:p>
-            <a:pPr lvl="0" indent="0" marL="0">
-              <a:buNone/>
-            </a:pPr>
-            <a:r>
-              <a:rPr/>
-              <a:t>Spend time on the threshold sweep table. Do not explain it first - let them read the columns and say what they see. Somebody will notice that accuracy barely moves. That is the moment to show the next slide.</a:t>
+              <a:t>classification_report is scikit-learn’s summary table, and they will print it themselves in notebook 2 in about five minutes: one row per class, then three summary rows - accuracy, macro avg, weighted avg. The two numbers on this slide are the f1-score column of the last two.</a:t>
+            </a:r>
+          </a:p>
+          <a:p>
+            <a:pPr lvl="0" indent="0" marL="0">
+              <a:buNone/>
+            </a:pPr>
+          </a:p>
+          <a:p>
+            <a:pPr lvl="0" indent="0" marL="0">
+              <a:buNone/>
+            </a:pPr>
+            <a:r>
+              <a:rPr/>
+              <a:t>Anticipating it by one slide is deliberate. The rule for choosing between those rows is what they need in their heads while they run the notebook, not afterwards - left to themselves they quote whichever is biggest.</a:t>
+            </a:r>
+          </a:p>
+          <a:p>
+            <a:pPr lvl="0" indent="0" marL="0">
+              <a:buNone/>
+            </a:pPr>
+          </a:p>
+          <a:p>
+            <a:pPr lvl="0" indent="0" marL="0">
+              <a:buNone/>
+            </a:pPr>
+            <a:r>
+              <a:rPr/>
+              <a:t>The weighted average weights each class by how common it is, so on this problem it is essentially the healthy class talking, and it reads close to accuracy - inheriting exactly the blindness slides 31 to 34 were about.</a:t>
+            </a:r>
+          </a:p>
+          <a:p>
+            <a:pPr lvl="0" indent="0" marL="0">
+              <a:buNone/>
+            </a:pPr>
+          </a:p>
+          <a:p>
+            <a:pPr lvl="0" indent="0" marL="0">
+              <a:buNone/>
+            </a:pPr>
+            <a:r>
+              <a:rPr/>
+              <a:t>The macro average gives the two classes equal weight, so the rare class actually registers. 0.820 against 0.975 for the same model.</a:t>
+            </a:r>
+          </a:p>
+          <a:p>
+            <a:pPr lvl="0" indent="0" marL="0">
+              <a:buNone/>
+            </a:pPr>
+          </a:p>
+          <a:p>
+            <a:pPr lvl="0" indent="0" marL="0">
+              <a:buNone/>
+            </a:pPr>
+            <a:r>
+              <a:rPr/>
+              <a:t>The rule: on an imbalanced problem, quote the macro average or the minority class directly. Reporting the weighted average is not incorrect - it is the number that makes a mediocre model look finished, and choosing it without saying so is how a result gets oversold.</a:t>
+            </a:r>
+          </a:p>
+          <a:p>
+            <a:pPr lvl="0" indent="0" marL="0">
+              <a:buNone/>
+            </a:pPr>
+          </a:p>
+          <a:p>
+            <a:pPr lvl="0" indent="0" marL="0">
+              <a:buNone/>
+            </a:pPr>
+            <a:r>
+              <a:rPr/>
+              <a:t>A predictable slip: “macro average is a new metric”. Macro and weighted are two ways of averaging over classes, and classification_report applies both to every column - precision, recall and F1. The weights of the weighted average are the support, the number of true drives in each class.</a:t>
+            </a:r>
+          </a:p>
+          <a:p>
+            <a:pPr lvl="0" indent="0" marL="0">
+              <a:buNone/>
+            </a:pPr>
+          </a:p>
+          <a:p>
+            <a:pPr lvl="0" indent="0" marL="0">
+              <a:buNone/>
+            </a:pPr>
+            <a:r>
+              <a:rPr/>
+              <a:t>Someone will ask why an arithmetic mean is fine here, one slide after F1 rejected it. Slide 37 combined two different quantities of one class; here it is the same metric on two classes, and the point is to give the rare class an equal voice.</a:t>
             </a:r>
           </a:p>
         </p:txBody>
@@ -4604,35 +4787,35 @@
             </a:pPr>
             <a:r>
               <a:rPr/>
-              <a:t>The title of that figure is the point: nothing about the model changes along the x-axis. Same coefficients, same probabilities, same drives. All that moves is where we draw the line between “leave it” and “replace it”.</a:t>
-            </a:r>
-          </a:p>
-          <a:p>
-            <a:pPr lvl="0" indent="0" marL="0">
-              <a:buNone/>
-            </a:pPr>
-          </a:p>
-          <a:p>
-            <a:pPr lvl="0" indent="0" marL="0">
-              <a:buNone/>
-            </a:pPr>
-            <a:r>
-              <a:rPr/>
-              <a:t>That 0.5 is predict()’s default and nothing more. It is the right choice only when the two errors cost the same and the probabilities are calibrated: among drives given 0.3, about 30% really fail (slide 46 names the property). Slide 51 derives the threshold from the costs, and it is 0.5 exactly when they are equal. Here a miss costs about nineteen times a false alarm (2,600 divided by 140 = 18.6), and in most real problems the costs differ too.</a:t>
-            </a:r>
-          </a:p>
-          <a:p>
-            <a:pPr lvl="0" indent="0" marL="0">
-              <a:buNone/>
-            </a:pPr>
-          </a:p>
-          <a:p>
-            <a:pPr lvl="0" indent="0" marL="0">
-              <a:buNone/>
-            </a:pPr>
-            <a:r>
-              <a:rPr/>
-              <a:t>So when a paper or a colleague reports 77% precision, the useful follow-up is: at what threshold, and why that one? Most of the time there is no answer, because nobody chose it.</a:t>
+              <a:t>The confusion matrix by hand, then from scikit-learn, then the threshold sweep. Run notebook 02. Twenty minutes.</a:t>
+            </a:r>
+          </a:p>
+          <a:p>
+            <a:pPr lvl="0" indent="0" marL="0">
+              <a:buNone/>
+            </a:pPr>
+          </a:p>
+          <a:p>
+            <a:pPr lvl="0" indent="0" marL="0">
+              <a:buNone/>
+            </a:pPr>
+            <a:r>
+              <a:rPr/>
+              <a:t>Have them build the four counts by hand before calling confusion_matrix. It is four comparisons and it takes two minutes, and it is what makes the jargon stop being jargon.</a:t>
+            </a:r>
+          </a:p>
+          <a:p>
+            <a:pPr lvl="0" indent="0" marL="0">
+              <a:buNone/>
+            </a:pPr>
+          </a:p>
+          <a:p>
+            <a:pPr lvl="0" indent="0" marL="0">
+              <a:buNone/>
+            </a:pPr>
+            <a:r>
+              <a:rPr/>
+              <a:t>Spend time on the threshold sweep table. Do not explain it first - let them read the columns and say what they see. Somebody will notice that accuracy barely moves. That is the moment to show the next slide.</a:t>
             </a:r>
           </a:p>
         </p:txBody>
@@ -4714,63 +4897,35 @@
             </a:pPr>
             <a:r>
               <a:rPr/>
-              <a:t>Notebook 2, the threshold sweep, five of its rows drawn as bars. Each pair of bars is one threshold: teal is the failures caught, out of the 76 in the test set; gold is the healthy drives flagged by mistake. On the right, the accuracy each threshold scores: right answers divided by 2,000.</a:t>
-            </a:r>
-          </a:p>
-          <a:p>
-            <a:pPr lvl="0" indent="0" marL="0">
-              <a:buNone/>
-            </a:pPr>
-          </a:p>
-          <a:p>
-            <a:pPr lvl="0" indent="0" marL="0">
-              <a:buNone/>
-            </a:pPr>
-            <a:r>
-              <a:rPr/>
-              <a:t>Lower the threshold - go up the figure: both bars grow. At 0.02 we catch 69 of 76 failures and replace 284 healthy drives to do it. At 0.90 there are no false alarms at all, and we catch 14 of 76, fewer than a quarter.</a:t>
-            </a:r>
-          </a:p>
-          <a:p>
-            <a:pPr lvl="0" indent="0" marL="0">
-              <a:buNone/>
-            </a:pPr>
-          </a:p>
-          <a:p>
-            <a:pPr lvl="0" indent="0" marL="0">
-              <a:buNone/>
-            </a:pPr>
-            <a:r>
-              <a:rPr/>
-              <a:t>Now the right-hand column, which is the slide’s real argument. For every threshold from 0.10 up to 0.90 it stays between 0.942 and 0.977, a range of 0.977 - 0.942 = 0.035, three and a half percentage points, while the teal bar shrinks from 61 to 14. And its maximum, in bold, is at 0.5 - the threshold that misses 76 - 43 = 33 failures.</a:t>
-            </a:r>
-          </a:p>
-          <a:p>
-            <a:pPr lvl="0" indent="0" marL="0">
-              <a:buNone/>
-            </a:pPr>
-          </a:p>
-          <a:p>
-            <a:pPr lvl="0" indent="0" marL="0">
-              <a:buNone/>
-            </a:pPr>
-            <a:r>
-              <a:rPr/>
-              <a:t>Say the consequence plainly: tune on accuracy and it will quietly recommend catching fewer failures. Most of the alarms a higher threshold drops are false ones, so accuracy rises with each drop, even though some of the dropped alarms were failures being caught. From 0.30 to 0.50 the gold bar loses 25 - 13 = 12 false alarms and the teal bar loses 53 - 43 = 10 caught failures. Accuracy gains 12 right answers and loses 10, two more in all, 0.976 to 0.977.</a:t>
-            </a:r>
-          </a:p>
-          <a:p>
-            <a:pPr lvl="0" indent="0" marL="0">
-              <a:buNone/>
-            </a:pPr>
-          </a:p>
-          <a:p>
-            <a:pPr lvl="0" indent="0" marL="0">
-              <a:buNone/>
-            </a:pPr>
-            <a:r>
-              <a:rPr/>
-              <a:t>Precision and recall at each threshold are in the handout’s table in section 7.1, computed with the formulas of slide 35.</a:t>
+              <a:t>The title of that figure is the point: nothing about the model changes along the x-axis. Same coefficients, same probabilities, same drives. All that moves is where we draw the line between “leave it” and “replace it”.</a:t>
+            </a:r>
+          </a:p>
+          <a:p>
+            <a:pPr lvl="0" indent="0" marL="0">
+              <a:buNone/>
+            </a:pPr>
+          </a:p>
+          <a:p>
+            <a:pPr lvl="0" indent="0" marL="0">
+              <a:buNone/>
+            </a:pPr>
+            <a:r>
+              <a:rPr/>
+              <a:t>That 0.5 is predict()’s default and nothing more. It is the right choice only when the two errors cost the same and the probabilities are calibrated: among drives given 0.3, about 30% really fail (slide 47 names the property). Slide 52 derives the threshold from the costs, and it is 0.5 exactly when they are equal. Here a miss costs about nineteen times a false alarm (2,600 divided by 140 = 18.6), and in most real problems the costs differ too.</a:t>
+            </a:r>
+          </a:p>
+          <a:p>
+            <a:pPr lvl="0" indent="0" marL="0">
+              <a:buNone/>
+            </a:pPr>
+          </a:p>
+          <a:p>
+            <a:pPr lvl="0" indent="0" marL="0">
+              <a:buNone/>
+            </a:pPr>
+            <a:r>
+              <a:rPr/>
+              <a:t>So when a paper or a colleague reports 77% precision, the useful follow-up is: at what threshold, and why that one? Most of the time there is no answer, because nobody chose it.</a:t>
             </a:r>
           </a:p>
         </p:txBody>
@@ -4962,49 +5117,63 @@
             </a:pPr>
             <a:r>
               <a:rPr/>
-              <a:t>The sweep traced a path through precision-recall space; this is that path drawn directly. Every threshold at once.</a:t>
-            </a:r>
-          </a:p>
-          <a:p>
-            <a:pPr lvl="0" indent="0" marL="0">
-              <a:buNone/>
-            </a:pPr>
-          </a:p>
-          <a:p>
-            <a:pPr lvl="0" indent="0" marL="0">
-              <a:buNone/>
-            </a:pPr>
-            <a:r>
-              <a:rPr/>
-              <a:t>The part to teach is the baseline. A model with random scores has precision equal to the positive rate - 76 failures divided by 2,000 drives = 0.038 here - at every recall. That flat dashed line, not 0.5, is what “no skill” looks like on an imbalanced problem.</a:t>
-            </a:r>
-          </a:p>
-          <a:p>
-            <a:pPr lvl="0" indent="0" marL="0">
-              <a:buNone/>
-            </a:pPr>
-          </a:p>
-          <a:p>
-            <a:pPr lvl="0" indent="0" marL="0">
-              <a:buNone/>
-            </a:pPr>
-            <a:r>
-              <a:rPr/>
-              <a:t>That is why this curve is so much more informative than accuracy when positives are rare: the floor is where the difficulty actually is. Our model’s area under it, the average precision, is 0.717 against a floor of 0.038.</a:t>
-            </a:r>
-          </a:p>
-          <a:p>
-            <a:pPr lvl="0" indent="0" marL="0">
-              <a:buNone/>
-            </a:pPr>
-          </a:p>
-          <a:p>
-            <a:pPr lvl="0" indent="0" marL="0">
-              <a:buNone/>
-            </a:pPr>
-            <a:r>
-              <a:rPr/>
-              <a:t>The three marked dots are thresholds 0.5, 0.3 and 0.05. The first two are rows of the table on the previous slide, so they can check the correspondence: at 0.5, recall 0.566 and precision 0.768.</a:t>
+              <a:t>Notebook 2, the threshold sweep, five of its rows drawn as bars. Each pair of bars is one threshold: teal is the failures caught, out of the 76 in the test set; gold is the healthy drives flagged by mistake. On the right, the accuracy each threshold scores: right answers divided by 2,000.</a:t>
+            </a:r>
+          </a:p>
+          <a:p>
+            <a:pPr lvl="0" indent="0" marL="0">
+              <a:buNone/>
+            </a:pPr>
+          </a:p>
+          <a:p>
+            <a:pPr lvl="0" indent="0" marL="0">
+              <a:buNone/>
+            </a:pPr>
+            <a:r>
+              <a:rPr/>
+              <a:t>Lower the threshold - go up the figure: both bars grow. At 0.02 we catch 69 of 76 failures and replace 284 healthy drives to do it. At 0.90 there are no false alarms at all, and we catch 14 of 76, fewer than a quarter.</a:t>
+            </a:r>
+          </a:p>
+          <a:p>
+            <a:pPr lvl="0" indent="0" marL="0">
+              <a:buNone/>
+            </a:pPr>
+          </a:p>
+          <a:p>
+            <a:pPr lvl="0" indent="0" marL="0">
+              <a:buNone/>
+            </a:pPr>
+            <a:r>
+              <a:rPr/>
+              <a:t>Now the right-hand column, which is the slide’s real argument. For every threshold from 0.10 up to 0.90 it stays between 0.942 and 0.977, a range of 0.977 - 0.942 = 0.035, three and a half percentage points, while the teal bar shrinks from 61 to 14. And its maximum, in bold, is at 0.5 - the threshold that misses 76 - 43 = 33 failures.</a:t>
+            </a:r>
+          </a:p>
+          <a:p>
+            <a:pPr lvl="0" indent="0" marL="0">
+              <a:buNone/>
+            </a:pPr>
+          </a:p>
+          <a:p>
+            <a:pPr lvl="0" indent="0" marL="0">
+              <a:buNone/>
+            </a:pPr>
+            <a:r>
+              <a:rPr/>
+              <a:t>Say the consequence plainly: tune on accuracy and it will quietly recommend catching fewer failures. Most of the alarms a higher threshold drops are false ones, so accuracy rises with each drop, even though some of the dropped alarms were failures being caught. From 0.30 to 0.50 the gold bar loses 25 - 13 = 12 false alarms and the teal bar loses 53 - 43 = 10 caught failures. Accuracy gains 12 right answers and loses 10, two more in all, 0.976 to 0.977.</a:t>
+            </a:r>
+          </a:p>
+          <a:p>
+            <a:pPr lvl="0" indent="0" marL="0">
+              <a:buNone/>
+            </a:pPr>
+          </a:p>
+          <a:p>
+            <a:pPr lvl="0" indent="0" marL="0">
+              <a:buNone/>
+            </a:pPr>
+            <a:r>
+              <a:rPr/>
+              <a:t>Precision and recall at each threshold are in the handout’s table in section 7.1, computed with the formulas of slide 36.</a:t>
             </a:r>
           </a:p>
         </p:txBody>
@@ -5086,35 +5255,49 @@
             </a:pPr>
             <a:r>
               <a:rPr/>
-              <a:t>Set up the next section as a question rather than announcing a tool.</a:t>
-            </a:r>
-          </a:p>
-          <a:p>
-            <a:pPr lvl="0" indent="0" marL="0">
-              <a:buNone/>
-            </a:pPr>
-          </a:p>
-          <a:p>
-            <a:pPr lvl="0" indent="0" marL="0">
-              <a:buNone/>
-            </a:pPr>
-            <a:r>
-              <a:rPr/>
-              <a:t>Everything so far has needed a threshold. That is fine when you know the costs, and we will come back to it. But often you want to compare two models before committing - is model A better than model B, at any operating point?</a:t>
-            </a:r>
-          </a:p>
-          <a:p>
-            <a:pPr lvl="0" indent="0" marL="0">
-              <a:buNone/>
-            </a:pPr>
-          </a:p>
-          <a:p>
-            <a:pPr lvl="0" indent="0" marL="0">
-              <a:buNone/>
-            </a:pPr>
-            <a:r>
-              <a:rPr/>
-              <a:t>The move is to stop asking “how many did it get right” and start asking “did it put the failures at the top of the list”. That is a question about ranking, and ranking has no threshold in it.</a:t>
+              <a:t>The sweep traced a path through precision-recall space; this is that path drawn directly. Every threshold at once.</a:t>
+            </a:r>
+          </a:p>
+          <a:p>
+            <a:pPr lvl="0" indent="0" marL="0">
+              <a:buNone/>
+            </a:pPr>
+          </a:p>
+          <a:p>
+            <a:pPr lvl="0" indent="0" marL="0">
+              <a:buNone/>
+            </a:pPr>
+            <a:r>
+              <a:rPr/>
+              <a:t>The part to teach is the baseline. A model with random scores has precision equal to the positive rate - 76 failures divided by 2,000 drives = 0.038 here - at every recall. Count it: flag 500 drives at random and on average 500 times 0.038 = 19 of them fail, so precision is 19 divided by 500 = 0.038 and recall 19 divided by 76 = 0.25. Flag 1,000: 38 fail, precision 0.038 again, recall 0.50. Flagging more moves recall, never precision. That flat dashed line, not 0.5, is what “no skill” looks like on an imbalanced problem.</a:t>
+            </a:r>
+          </a:p>
+          <a:p>
+            <a:pPr lvl="0" indent="0" marL="0">
+              <a:buNone/>
+            </a:pPr>
+          </a:p>
+          <a:p>
+            <a:pPr lvl="0" indent="0" marL="0">
+              <a:buNone/>
+            </a:pPr>
+            <a:r>
+              <a:rPr/>
+              <a:t>That is why this curve is so much more informative than accuracy when positives are rare: the floor is where the difficulty actually is. Our model’s area under it, the average precision, is 0.717 against a floor of 0.038.</a:t>
+            </a:r>
+          </a:p>
+          <a:p>
+            <a:pPr lvl="0" indent="0" marL="0">
+              <a:buNone/>
+            </a:pPr>
+          </a:p>
+          <a:p>
+            <a:pPr lvl="0" indent="0" marL="0">
+              <a:buNone/>
+            </a:pPr>
+            <a:r>
+              <a:rPr/>
+              <a:t>The three marked dots are thresholds 0.5, 0.3 and 0.05. The first two are rows of the table on the previous slide, so they can check the correspondence: at 0.5, recall 0.566 and precision 0.768.</a:t>
             </a:r>
           </a:p>
         </p:txBody>
@@ -5196,49 +5379,35 @@
             </a:pPr>
             <a:r>
               <a:rPr/>
-              <a:t>Receiver operating characteristic - expand it, and say where the name comes from, because it makes the idea concrete. Wartime radar: operators tuning receivers to spot aircraft without chasing flocks of birds. Same problem shape, literally the same trade-off.</a:t>
-            </a:r>
-          </a:p>
-          <a:p>
-            <a:pPr lvl="0" indent="0" marL="0">
-              <a:buNone/>
-            </a:pPr>
-          </a:p>
-          <a:p>
-            <a:pPr lvl="0" indent="0" marL="0">
-              <a:buNone/>
-            </a:pPr>
-            <a:r>
-              <a:rPr/>
-              <a:t>The two axes: the true positive rate (TPR), which is recall under another name - the share of failures we catch. The false positive rate (FPR) - the share of healthy drives we condemn.</a:t>
-            </a:r>
-          </a:p>
-          <a:p>
-            <a:pPr lvl="0" indent="0" marL="0">
-              <a:buNone/>
-            </a:pPr>
-          </a:p>
-          <a:p>
-            <a:pPr lvl="0" indent="0" marL="0">
-              <a:buNone/>
-            </a:pPr>
-            <a:r>
-              <a:rPr/>
-              <a:t>The intuition worth saying slowly: at threshold 1 both are zero, flag nothing. At threshold 0 both are one. The entire content of the curve is the ORDER in which they get there. A good model raises TPR fast while FPR is still low, because its highest scores really are the failures. A useless model raises them together and traces the diagonal.</a:t>
-            </a:r>
-          </a:p>
-          <a:p>
-            <a:pPr lvl="0" indent="0" marL="0">
-              <a:buNone/>
-            </a:pPr>
-          </a:p>
-          <a:p>
-            <a:pPr lvl="0" indent="0" marL="0">
-              <a:buNone/>
-            </a:pPr>
-            <a:r>
-              <a:rPr/>
-              <a:t>So the curve asks: as we grow more willing to raise alarms, do we catch failures faster than we annoy technicians?</a:t>
+              <a:t>Set up the next section as a question rather than announcing a tool.</a:t>
+            </a:r>
+          </a:p>
+          <a:p>
+            <a:pPr lvl="0" indent="0" marL="0">
+              <a:buNone/>
+            </a:pPr>
+          </a:p>
+          <a:p>
+            <a:pPr lvl="0" indent="0" marL="0">
+              <a:buNone/>
+            </a:pPr>
+            <a:r>
+              <a:rPr/>
+              <a:t>Everything so far has needed a threshold. That is fine when you know the costs, and we will come back to it. But often you want to compare two models before committing - is model A better than model B, at any operating point?</a:t>
+            </a:r>
+          </a:p>
+          <a:p>
+            <a:pPr lvl="0" indent="0" marL="0">
+              <a:buNone/>
+            </a:pPr>
+          </a:p>
+          <a:p>
+            <a:pPr lvl="0" indent="0" marL="0">
+              <a:buNone/>
+            </a:pPr>
+            <a:r>
+              <a:rPr/>
+              <a:t>The move is to stop asking “how many did it get right” and start asking “did it put the failures at the top of the list”. That is a question about ranking, and ranking has no threshold in it.</a:t>
             </a:r>
           </a:p>
         </p:txBody>
@@ -5320,49 +5489,49 @@
             </a:pPr>
             <a:r>
               <a:rPr/>
-              <a:t>This is the definition to remember, and it is much more useful than “area under the curve”, which is a geometric fact rather than a meaning.</a:t>
-            </a:r>
-          </a:p>
-          <a:p>
-            <a:pPr lvl="0" indent="0" marL="0">
-              <a:buNone/>
-            </a:pPr>
-          </a:p>
-          <a:p>
-            <a:pPr lvl="0" indent="0" marL="0">
-              <a:buNone/>
-            </a:pPr>
-            <a:r>
-              <a:rPr/>
-              <a:t>Say it concretely: pick one drive that failed and one that did not, at random. 95 times out of 100 the model gave the failing one a higher score.</a:t>
-            </a:r>
-          </a:p>
-          <a:p>
-            <a:pPr lvl="0" indent="0" marL="0">
-              <a:buNone/>
-            </a:pPr>
-          </a:p>
-          <a:p>
-            <a:pPr lvl="0" indent="0" marL="0">
-              <a:buNone/>
-            </a:pPr>
-            <a:r>
-              <a:rPr/>
-              <a:t>That makes AUC a measure of RANKING quality. It is threshold-free because ranking is threshold-free.</a:t>
-            </a:r>
-          </a:p>
-          <a:p>
-            <a:pPr lvl="0" indent="0" marL="0">
-              <a:buNone/>
-            </a:pPr>
-          </a:p>
-          <a:p>
-            <a:pPr lvl="0" indent="0" marL="0">
-              <a:buNone/>
-            </a:pPr>
-            <a:r>
-              <a:rPr/>
-              <a:t>The identity with the Mann-Whitney U statistic - a classical test that compares two groups by counting, over every pair, which member ranks higher - is in the handout, section 8.2, for anyone who wants the proof. But notebook 3 does something better than a proof for this audience: it draws 200,000 random pairs and counts. 0.9488 against roc_auc_score’s 0.9493.</a:t>
+              <a:t>Receiver operating characteristic - expand it, and say where the name comes from, because it makes the idea concrete. Wartime radar: operators tuning receivers to spot aircraft without chasing flocks of birds. Same problem shape, literally the same trade-off.</a:t>
+            </a:r>
+          </a:p>
+          <a:p>
+            <a:pPr lvl="0" indent="0" marL="0">
+              <a:buNone/>
+            </a:pPr>
+          </a:p>
+          <a:p>
+            <a:pPr lvl="0" indent="0" marL="0">
+              <a:buNone/>
+            </a:pPr>
+            <a:r>
+              <a:rPr/>
+              <a:t>The two axes: the true positive rate (TPR), which is recall under another name - the share of failures we catch. The false positive rate (FPR) - the share of healthy drives we condemn.</a:t>
+            </a:r>
+          </a:p>
+          <a:p>
+            <a:pPr lvl="0" indent="0" marL="0">
+              <a:buNone/>
+            </a:pPr>
+          </a:p>
+          <a:p>
+            <a:pPr lvl="0" indent="0" marL="0">
+              <a:buNone/>
+            </a:pPr>
+            <a:r>
+              <a:rPr/>
+              <a:t>The intuition worth saying slowly: at threshold 1 both are zero, flag nothing. At threshold 0 both are one. The entire content of the curve is the ORDER in which they get there. A good model raises TPR fast while FPR is still low, because its highest scores really are the failures. A useless model raises them together and traces the diagonal.</a:t>
+            </a:r>
+          </a:p>
+          <a:p>
+            <a:pPr lvl="0" indent="0" marL="0">
+              <a:buNone/>
+            </a:pPr>
+          </a:p>
+          <a:p>
+            <a:pPr lvl="0" indent="0" marL="0">
+              <a:buNone/>
+            </a:pPr>
+            <a:r>
+              <a:rPr/>
+              <a:t>So the curve asks: as we grow more willing to raise alarms, do we catch failures faster than we annoy technicians?</a:t>
             </a:r>
           </a:p>
         </p:txBody>
@@ -5444,49 +5613,49 @@
             </a:pPr>
             <a:r>
               <a:rPr/>
-              <a:t>Notebook 3, the scores the model gives the test drives, drawn as two histograms: teal for the 1,924 healthy drives, rust for the 76 that failed. Each group is scaled to add up to 1, so the two shapes can be compared although one group is 25 times the size of the other. The horizontal axis is logarithmic, because most healthy drives get scores of a thousandth or less.</a:t>
-            </a:r>
-          </a:p>
-          <a:p>
-            <a:pPr lvl="0" indent="0" marL="0">
-              <a:buNone/>
-            </a:pPr>
-          </a:p>
-          <a:p>
-            <a:pPr lvl="0" indent="0" marL="0">
-              <a:buNone/>
-            </a:pPr>
-            <a:r>
-              <a:rPr/>
-              <a:t>The rust sits far to the right of the teal: most failing drives get high scores, most healthy ones tiny scores. That separation is what the AUC measures. Pick one rust drive and one teal drive at random: the AUC, 0.949, is the chance that the rust one lies further right. Notebook 3 checks it by drawing 200,000 such pairs: 0.9488.</a:t>
-            </a:r>
-          </a:p>
-          <a:p>
-            <a:pPr lvl="0" indent="0" marL="0">
-              <a:buNone/>
-            </a:pPr>
-          </a:p>
-          <a:p>
-            <a:pPr lvl="0" indent="0" marL="0">
-              <a:buNone/>
-            </a:pPr>
-            <a:r>
-              <a:rPr/>
-              <a:t>The pairs the model gets wrong come from where the two colours overlap - a few failing drives with scores as low as many healthy ones. No threshold separates those, and the AUC counts them as the 5% it misses.</a:t>
-            </a:r>
-          </a:p>
-          <a:p>
-            <a:pPr lvl="0" indent="0" marL="0">
-              <a:buNone/>
-            </a:pPr>
-          </a:p>
-          <a:p>
-            <a:pPr lvl="0" indent="0" marL="0">
-              <a:buNone/>
-            </a:pPr>
-            <a:r>
-              <a:rPr/>
-              <a:t>Note what the figure does not show: where to put the threshold. Any vertical line splits it, and the AUC is the same whichever you pick - the next slide.</a:t>
+              <a:t>This is the definition to remember, and it is much more useful than “area under the curve”, which is a geometric fact rather than a meaning.</a:t>
+            </a:r>
+          </a:p>
+          <a:p>
+            <a:pPr lvl="0" indent="0" marL="0">
+              <a:buNone/>
+            </a:pPr>
+          </a:p>
+          <a:p>
+            <a:pPr lvl="0" indent="0" marL="0">
+              <a:buNone/>
+            </a:pPr>
+            <a:r>
+              <a:rPr/>
+              <a:t>Say it concretely: pick one drive that failed and one that did not, at random. 95 times out of 100 the model gave the failing one a higher score.</a:t>
+            </a:r>
+          </a:p>
+          <a:p>
+            <a:pPr lvl="0" indent="0" marL="0">
+              <a:buNone/>
+            </a:pPr>
+          </a:p>
+          <a:p>
+            <a:pPr lvl="0" indent="0" marL="0">
+              <a:buNone/>
+            </a:pPr>
+            <a:r>
+              <a:rPr/>
+              <a:t>That makes AUC a measure of RANKING quality. It is threshold-free because ranking is threshold-free.</a:t>
+            </a:r>
+          </a:p>
+          <a:p>
+            <a:pPr lvl="0" indent="0" marL="0">
+              <a:buNone/>
+            </a:pPr>
+          </a:p>
+          <a:p>
+            <a:pPr lvl="0" indent="0" marL="0">
+              <a:buNone/>
+            </a:pPr>
+            <a:r>
+              <a:rPr/>
+              <a:t>The identity with the Mann-Whitney U statistic - a classical test that compares two groups by counting, over every pair, which member ranks higher - is in the handout, section 8.2, for anyone who wants the proof. But notebook 3 does something better than a proof for this audience: it draws 200,000 random pairs and counts. 0.9488 against roc_auc_score’s 0.9493.</a:t>
             </a:r>
           </a:p>
         </p:txBody>
@@ -5568,49 +5737,49 @@
             </a:pPr>
             <a:r>
               <a:rPr/>
-              <a:t>Short slide, important consequence. AUC depends only on the ordering, so it is unchanged by anything done to the scores that keeps their order.</a:t>
-            </a:r>
-          </a:p>
-          <a:p>
-            <a:pPr lvl="0" indent="0" marL="0">
-              <a:buNone/>
-            </a:pPr>
-          </a:p>
-          <a:p>
-            <a:pPr lvl="0" indent="0" marL="0">
-              <a:buNone/>
-            </a:pPr>
-            <a:r>
-              <a:rPr/>
-              <a:t>Divide all the probabilities by ten and the ranking is identical, so the AUC is identical - while the model is now badly calibrated and every threshold-based decision it makes is different.</a:t>
-            </a:r>
-          </a:p>
-          <a:p>
-            <a:pPr lvl="0" indent="0" marL="0">
-              <a:buNone/>
-            </a:pPr>
-          </a:p>
-          <a:p>
-            <a:pPr lvl="0" indent="0" marL="0">
-              <a:buNone/>
-            </a:pPr>
-            <a:r>
-              <a:rPr/>
-              <a:t>The consequence: AUC says nothing about whether “0.7” means anything. If you need the probabilities to be believable - because you are computing expected costs, as slide 51 does - AUC is not the check you want.</a:t>
-            </a:r>
-          </a:p>
-          <a:p>
-            <a:pPr lvl="0" indent="0" marL="0">
-              <a:buNone/>
-            </a:pPr>
-          </a:p>
-          <a:p>
-            <a:pPr lvl="0" indent="0" marL="0">
-              <a:buNone/>
-            </a:pPr>
-            <a:r>
-              <a:rPr/>
-              <a:t>Good place to mention that calibration - whether a predicted 0.7 really comes true 70% of the time - is a topic of its own, without going into it.</a:t>
+              <a:t>Notebook 3, the scores the model gives the test drives, drawn as two histograms: teal for the 1,924 healthy drives, rust for the 76 that failed. Each group is scaled to add up to 1, so the two shapes can be compared although one group is 25 times the size of the other. The horizontal axis is logarithmic, because most healthy drives get scores of a thousandth or less.</a:t>
+            </a:r>
+          </a:p>
+          <a:p>
+            <a:pPr lvl="0" indent="0" marL="0">
+              <a:buNone/>
+            </a:pPr>
+          </a:p>
+          <a:p>
+            <a:pPr lvl="0" indent="0" marL="0">
+              <a:buNone/>
+            </a:pPr>
+            <a:r>
+              <a:rPr/>
+              <a:t>The rust sits far to the right of the teal: most failing drives get high scores, most healthy ones tiny scores. That separation is what the AUC measures. Pick one rust drive and one teal drive at random: the AUC, 0.949, is the chance that the rust one lies further right. Notebook 3 checks it by drawing 200,000 such pairs: 0.9488.</a:t>
+            </a:r>
+          </a:p>
+          <a:p>
+            <a:pPr lvl="0" indent="0" marL="0">
+              <a:buNone/>
+            </a:pPr>
+          </a:p>
+          <a:p>
+            <a:pPr lvl="0" indent="0" marL="0">
+              <a:buNone/>
+            </a:pPr>
+            <a:r>
+              <a:rPr/>
+              <a:t>The pairs the model gets wrong come from where the two colours overlap - a few failing drives with scores as low as many healthy ones. No threshold separates those, and the AUC counts them as the 5% it misses.</a:t>
+            </a:r>
+          </a:p>
+          <a:p>
+            <a:pPr lvl="0" indent="0" marL="0">
+              <a:buNone/>
+            </a:pPr>
+          </a:p>
+          <a:p>
+            <a:pPr lvl="0" indent="0" marL="0">
+              <a:buNone/>
+            </a:pPr>
+            <a:r>
+              <a:rPr/>
+              <a:t>Note what the figure does not show: where to put the threshold. Any vertical line splits it, and the AUC is the same whichever you pick - the next slide.</a:t>
             </a:r>
           </a:p>
         </p:txBody>
@@ -5692,63 +5861,49 @@
             </a:pPr>
             <a:r>
               <a:rPr/>
-              <a:t>Same model. Not retrained. Notebook 3 generates a new, larger fleet of 60,000 drives from the same simulator, keeps every healthy drive, and throws away failures at random until they are 0.4% instead of 3.8% - the direction reality moves in fraud, disease, hardware failure.</a:t>
-            </a:r>
-          </a:p>
-          <a:p>
-            <a:pPr lvl="0" indent="0" marL="0">
-              <a:buNone/>
-            </a:pPr>
-          </a:p>
-          <a:p>
-            <a:pPr lvl="0" indent="0" marL="0">
-              <a:buNone/>
-            </a:pPr>
-            <a:r>
-              <a:rPr/>
-              <a:t>Someone will notice that at 3.8% the AUC reads 0.968, not the 0.949 of slide 44. Different drives: 0.949 rests on the 76 failures of our 2,000-drive test set, 0.968 on a fleet thirty times larger. Both are estimates of the same ranking ability. The same goes for average precision: 0.706 on the large fleet, against slide 41’s 0.717 on the test set.</a:t>
-            </a:r>
-          </a:p>
-          <a:p>
-            <a:pPr lvl="0" indent="0" marL="0">
-              <a:buNone/>
-            </a:pPr>
-          </a:p>
-          <a:p>
-            <a:pPr lvl="0" indent="0" marL="0">
-              <a:buNone/>
-            </a:pPr>
-            <a:r>
-              <a:rPr/>
-              <a:t>Left panel: the three ROC curves sit on top of each other. AUC 0.968, 0.965, 0.974. It reports an excellent model throughout, and at the rarest setting a marginally better one, which is sampling noise on 231 positives.</a:t>
-            </a:r>
-          </a:p>
-          <a:p>
-            <a:pPr lvl="0" indent="0" marL="0">
-              <a:buNone/>
-            </a:pPr>
-          </a:p>
-          <a:p>
-            <a:pPr lvl="0" indent="0" marL="0">
-              <a:buNone/>
-            </a:pPr>
-            <a:r>
-              <a:rPr/>
-              <a:t>Right panel: the precision-recall curves are in three different worlds. Average precision falls from 0.706 to 0.361, and precision at the threshold of 0.5 falls from 0.79 to 0.26 - 1 - 0.26 = 0.74, three alarms in four now false.</a:t>
-            </a:r>
-          </a:p>
-          <a:p>
-            <a:pPr lvl="0" indent="0" marL="0">
-              <a:buNone/>
-            </a:pPr>
-          </a:p>
-          <a:p>
-            <a:pPr lvl="0" indent="0" marL="0">
-              <a:buNone/>
-            </a:pPr>
-            <a:r>
-              <a:rPr/>
-              <a:t>Three curves on the left, one model, no problem. Three curves on the right, same model, a disaster. Let that sit for a second before explaining.</a:t>
+              <a:t>Short slide, important consequence. AUC depends only on the ordering, so it is unchanged by anything done to the scores that keeps their order.</a:t>
+            </a:r>
+          </a:p>
+          <a:p>
+            <a:pPr lvl="0" indent="0" marL="0">
+              <a:buNone/>
+            </a:pPr>
+          </a:p>
+          <a:p>
+            <a:pPr lvl="0" indent="0" marL="0">
+              <a:buNone/>
+            </a:pPr>
+            <a:r>
+              <a:rPr/>
+              <a:t>Divide all the probabilities by ten and the ranking is identical, so the AUC is identical - while the model is now badly calibrated and every threshold-based decision it makes is different.</a:t>
+            </a:r>
+          </a:p>
+          <a:p>
+            <a:pPr lvl="0" indent="0" marL="0">
+              <a:buNone/>
+            </a:pPr>
+          </a:p>
+          <a:p>
+            <a:pPr lvl="0" indent="0" marL="0">
+              <a:buNone/>
+            </a:pPr>
+            <a:r>
+              <a:rPr/>
+              <a:t>The consequence: AUC says nothing about whether “0.7” means anything. If you need the probabilities to be believable - because you are computing expected costs, as slide 52 does - AUC is not the check you want.</a:t>
+            </a:r>
+          </a:p>
+          <a:p>
+            <a:pPr lvl="0" indent="0" marL="0">
+              <a:buNone/>
+            </a:pPr>
+          </a:p>
+          <a:p>
+            <a:pPr lvl="0" indent="0" marL="0">
+              <a:buNone/>
+            </a:pPr>
+            <a:r>
+              <a:rPr/>
+              <a:t>Good place to mention that calibration - whether a predicted 0.7 really comes true 70% of the time - is a topic of its own, without going into it.</a:t>
             </a:r>
           </a:p>
         </p:txBody>
@@ -5830,49 +5985,63 @@
             </a:pPr>
             <a:r>
               <a:rPr/>
-              <a:t>The explanation is entirely in the denominators, and it is worth writing on the board.</a:t>
-            </a:r>
-          </a:p>
-          <a:p>
-            <a:pPr lvl="0" indent="0" marL="0">
-              <a:buNone/>
-            </a:pPr>
-          </a:p>
-          <a:p>
-            <a:pPr lvl="0" indent="0" marL="0">
-              <a:buNone/>
-            </a:pPr>
-            <a:r>
-              <a:rPr/>
-              <a:t>A thousand false alarms among a hundred thousand healthy drives is a false positive rate of 0.01 - invisible on the ROC axis, a rounding error. The same thousand false alarms, set against the alarms actually raised, may be most of them.</a:t>
-            </a:r>
-          </a:p>
-          <a:p>
-            <a:pPr lvl="0" indent="0" marL="0">
-              <a:buNone/>
-            </a:pPr>
-          </a:p>
-          <a:p>
-            <a:pPr lvl="0" indent="0" marL="0">
-              <a:buNone/>
-            </a:pPr>
-            <a:r>
-              <a:rPr/>
-              <a:t>So ROC is measuring the false alarms against a population nobody experiences. The technician does not see the 99,000 drives left alone; they see the alarm queue.</a:t>
-            </a:r>
-          </a:p>
-          <a:p>
-            <a:pPr lvl="0" indent="0" marL="0">
-              <a:buNone/>
-            </a:pPr>
-          </a:p>
-          <a:p>
-            <a:pPr lvl="0" indent="0" marL="0">
-              <a:buNone/>
-            </a:pPr>
-            <a:r>
-              <a:rPr/>
-              <a:t>This is the lesson’s second big predictable mistake, after trusting accuracy on slide 30, and again defend the instinct: AUC is threshold-free, comparable across models and datasets, bounded in a familiar range. Those are real virtues. It simply answers a question about ranking when the question was about the alarm queue.</a:t>
+              <a:t>Same model. Not retrained. Notebook 3 generates a new, larger fleet of 60,000 drives from the same simulator, keeps every healthy drive, and throws away failures at random until they are 0.4% instead of 3.8% - the direction reality moves in fraud, disease, hardware failure.</a:t>
+            </a:r>
+          </a:p>
+          <a:p>
+            <a:pPr lvl="0" indent="0" marL="0">
+              <a:buNone/>
+            </a:pPr>
+          </a:p>
+          <a:p>
+            <a:pPr lvl="0" indent="0" marL="0">
+              <a:buNone/>
+            </a:pPr>
+            <a:r>
+              <a:rPr/>
+              <a:t>Someone will notice that at 3.8% the AUC reads 0.968, not the 0.949 of slide 45. Different drives: 0.949 rests on the 76 failures of our 2,000-drive test set, 0.968 on a fleet thirty times larger. Both are estimates of the same ranking ability. The same goes for average precision: 0.706 on the large fleet, against slide 42’s 0.717 on the test set.</a:t>
+            </a:r>
+          </a:p>
+          <a:p>
+            <a:pPr lvl="0" indent="0" marL="0">
+              <a:buNone/>
+            </a:pPr>
+          </a:p>
+          <a:p>
+            <a:pPr lvl="0" indent="0" marL="0">
+              <a:buNone/>
+            </a:pPr>
+            <a:r>
+              <a:rPr/>
+              <a:t>Left panel: the three ROC curves sit on top of each other. AUC 0.968, 0.965, 0.974. It reports an excellent model throughout, and at the rarest setting a marginally better one, which is sampling noise on 231 positives.</a:t>
+            </a:r>
+          </a:p>
+          <a:p>
+            <a:pPr lvl="0" indent="0" marL="0">
+              <a:buNone/>
+            </a:pPr>
+          </a:p>
+          <a:p>
+            <a:pPr lvl="0" indent="0" marL="0">
+              <a:buNone/>
+            </a:pPr>
+            <a:r>
+              <a:rPr/>
+              <a:t>Right panel: the precision-recall curves are in three different worlds. Average precision falls from 0.706 to 0.361, and precision at the threshold of 0.5 falls from 0.79 to 0.26 - 1 - 0.26 = 0.74, three alarms in four now false.</a:t>
+            </a:r>
+          </a:p>
+          <a:p>
+            <a:pPr lvl="0" indent="0" marL="0">
+              <a:buNone/>
+            </a:pPr>
+          </a:p>
+          <a:p>
+            <a:pPr lvl="0" indent="0" marL="0">
+              <a:buNone/>
+            </a:pPr>
+            <a:r>
+              <a:rPr/>
+              <a:t>Three curves on the left, one model, no problem. Three curves on the right, same model, a disaster. Let that sit for a second before explaining.</a:t>
             </a:r>
           </a:p>
         </p:txBody>
@@ -5954,21 +6123,49 @@
             </a:pPr>
             <a:r>
               <a:rPr/>
-              <a:t>Short and quotable, and this is the thing to have on the board when they write their exercise reports.</a:t>
-            </a:r>
-          </a:p>
-          <a:p>
-            <a:pPr lvl="0" indent="0" marL="0">
-              <a:buNone/>
-            </a:pPr>
-          </a:p>
-          <a:p>
-            <a:pPr lvl="0" indent="0" marL="0">
-              <a:buNone/>
-            </a:pPr>
-            <a:r>
-              <a:rPr/>
-              <a:t>If someone asks which single number to use when a single number is demanded: average precision, because its baseline moves with the problem. But push back on the premise - the reason to demand a single number is usually to avoid thinking, and this lesson is about the thinking.</a:t>
+              <a:t>The explanation is entirely in the denominators, and it is worth writing on the board.</a:t>
+            </a:r>
+          </a:p>
+          <a:p>
+            <a:pPr lvl="0" indent="0" marL="0">
+              <a:buNone/>
+            </a:pPr>
+          </a:p>
+          <a:p>
+            <a:pPr lvl="0" indent="0" marL="0">
+              <a:buNone/>
+            </a:pPr>
+            <a:r>
+              <a:rPr/>
+              <a:t>A thousand false alarms among a hundred thousand healthy drives is a false positive rate of 0.01 - invisible on the ROC axis, a rounding error. The same thousand false alarms, set against the alarms actually raised, may be most of them.</a:t>
+            </a:r>
+          </a:p>
+          <a:p>
+            <a:pPr lvl="0" indent="0" marL="0">
+              <a:buNone/>
+            </a:pPr>
+          </a:p>
+          <a:p>
+            <a:pPr lvl="0" indent="0" marL="0">
+              <a:buNone/>
+            </a:pPr>
+            <a:r>
+              <a:rPr/>
+              <a:t>So ROC is measuring the false alarms against a population nobody experiences. The technician does not see the 99,000 drives left alone; they see the alarm queue.</a:t>
+            </a:r>
+          </a:p>
+          <a:p>
+            <a:pPr lvl="0" indent="0" marL="0">
+              <a:buNone/>
+            </a:pPr>
+          </a:p>
+          <a:p>
+            <a:pPr lvl="0" indent="0" marL="0">
+              <a:buNone/>
+            </a:pPr>
+            <a:r>
+              <a:rPr/>
+              <a:t>This is the lesson’s second big predictable mistake, after trusting accuracy on slide 31, and again defend the instinct: AUC is threshold-free, comparable across models and datasets, bounded in a familiar range. Those are real virtues. It simply answers a question about ranking when the question was about the alarm queue.</a:t>
             </a:r>
           </a:p>
         </p:txBody>
@@ -6050,49 +6247,21 @@
             </a:pPr>
             <a:r>
               <a:rPr/>
-              <a:t>Finally, the honest way to pick a threshold. It needs one ingredient no metric can supply: what the errors cost. We wrote those down on slide 33 - €140 for a needless replacement, €2,600 for a drive that dies in service.</a:t>
-            </a:r>
-          </a:p>
-          <a:p>
-            <a:pPr lvl="0" indent="0" marL="0">
-              <a:buNone/>
-            </a:pPr>
-          </a:p>
-          <a:p>
-            <a:pPr lvl="0" indent="0" marL="0">
-              <a:buNone/>
-            </a:pPr>
-            <a:r>
-              <a:rPr/>
-              <a:t>The curve is the total cost on the test set as the threshold moves. The default 0.5 costs €87,620. The cheapest, at 0.08, costs €45,540.</a:t>
-            </a:r>
-          </a:p>
-          <a:p>
-            <a:pPr lvl="0" indent="0" marL="0">
-              <a:buNone/>
-            </a:pPr>
-          </a:p>
-          <a:p>
-            <a:pPr lvl="0" indent="0" marL="0">
-              <a:buNone/>
-            </a:pPr>
-            <a:r>
-              <a:rPr/>
-              <a:t>Choosing the threshold on purpose HALVED the cost of the same model: 45,540 divided by 87,620 is 0.52. No retraining, no new features, no better algorithm. One number, taken from the economics instead of from the library default.</a:t>
-            </a:r>
-          </a:p>
-          <a:p>
-            <a:pPr lvl="0" indent="0" marL="0">
-              <a:buNone/>
-            </a:pPr>
-          </a:p>
-          <a:p>
-            <a:pPr lvl="0" indent="0" marL="0">
-              <a:buNone/>
-            </a:pPr>
-            <a:r>
-              <a:rPr/>
-              <a:t>Note the flatness around the minimum, and say why it is good news: the exact threshold does not have to be right. Which is fortunate, because cost estimates never are.</a:t>
+              <a:t>Short and quotable, and this is the thing to have on the board when they write their exercise reports.</a:t>
+            </a:r>
+          </a:p>
+          <a:p>
+            <a:pPr lvl="0" indent="0" marL="0">
+              <a:buNone/>
+            </a:pPr>
+          </a:p>
+          <a:p>
+            <a:pPr lvl="0" indent="0" marL="0">
+              <a:buNone/>
+            </a:pPr>
+            <a:r>
+              <a:rPr/>
+              <a:t>If someone asks which single number to use when a single number is demanded: average precision, because its baseline moves with the problem. But push back on the premise - the reason to demand a single number is usually to avoid thinking, and this lesson is about the thinking.</a:t>
             </a:r>
           </a:p>
         </p:txBody>
@@ -6202,7 +6371,7 @@
             </a:pPr>
             <a:r>
               <a:rPr/>
-              <a:t>Somebody will say “healthy, every time”. Agree, and move on. Do not explain the consequence yet - it lands far harder on slide 30, after the break, when they see 96.2% printed as a model’s accuracy score.</a:t>
+              <a:t>Somebody will say “healthy, every time”. Agree, and move on. Do not explain the consequence yet - it lands far harder on slide 31, after the break, when they see 96.2% printed as a model’s accuracy score.</a:t>
             </a:r>
           </a:p>
         </p:txBody>
@@ -6284,63 +6453,49 @@
             </a:pPr>
             <a:r>
               <a:rPr/>
-              <a:t>Derive it in one line on the board, because it is two steps and it lands: flag the drive if the expected cost of flagging is lower than the expected cost of not. Flagging costs C-FP if the drive was healthy, which happens with probability 1 minus p. Leaving it costs C-FN if it fails, probability p. Set one below the other and solve.</a:t>
-            </a:r>
-          </a:p>
-          <a:p>
-            <a:pPr lvl="0" indent="0" marL="0">
-              <a:buNone/>
-            </a:pPr>
-          </a:p>
-          <a:p>
-            <a:pPr lvl="0" indent="0" marL="0">
-              <a:buNone/>
-            </a:pPr>
-            <a:r>
-              <a:rPr/>
-              <a:t>Then read the formula rather than the number, which is the part worth remembering: the optimal threshold does not depend on the model, the dataset, or the class balance. Only on the RATIO of the two costs.</a:t>
-            </a:r>
-          </a:p>
-          <a:p>
-            <a:pPr lvl="0" indent="0" marL="0">
-              <a:buNone/>
-            </a:pPr>
-          </a:p>
-          <a:p>
-            <a:pPr lvl="0" indent="0" marL="0">
-              <a:buNone/>
-            </a:pPr>
-            <a:r>
-              <a:rPr/>
-              <a:t>State the condition, because the derivation used it: p must be an honest probability - among drives given 0.05, about 5% really fail. That property is called calibration (slide 46). Divide every probability by ten, as slide 46 did, and the formula would still say 0.051 while flagging far too few drives.</a:t>
-            </a:r>
-          </a:p>
-          <a:p>
-            <a:pPr lvl="0" indent="0" marL="0">
-              <a:buNone/>
-            </a:pPr>
-          </a:p>
-          <a:p>
-            <a:pPr lvl="0" indent="0" marL="0">
-              <a:buNone/>
-            </a:pPr>
-            <a:r>
-              <a:rPr/>
-              <a:t>If the errors cost the same, t-star is 0.5 and the default was right all along. As misses grow more expensive, it falls towards zero.</a:t>
-            </a:r>
-          </a:p>
-          <a:p>
-            <a:pPr lvl="0" indent="0" marL="0">
-              <a:buNone/>
-            </a:pPr>
-          </a:p>
-          <a:p>
-            <a:pPr lvl="0" indent="0" marL="0">
-              <a:buNone/>
-            </a:pPr>
-            <a:r>
-              <a:rPr/>
-              <a:t>Empirically we found 0.08 against a theoretical 0.051, and the curve is flat between them. Two likely reasons for the gap: the test set holds only 76 failures, and the probabilities are good but not perfectly calibrated.</a:t>
+              <a:t>Finally, the honest way to pick a threshold. It needs one ingredient no metric can supply: what the errors cost. We wrote those down on slide 34 - €140 for a needless replacement, €2,600 for a drive that dies in service.</a:t>
+            </a:r>
+          </a:p>
+          <a:p>
+            <a:pPr lvl="0" indent="0" marL="0">
+              <a:buNone/>
+            </a:pPr>
+          </a:p>
+          <a:p>
+            <a:pPr lvl="0" indent="0" marL="0">
+              <a:buNone/>
+            </a:pPr>
+            <a:r>
+              <a:rPr/>
+              <a:t>The curve is the total cost on the test set as the threshold moves. The default 0.5 costs €87,620. The cheapest, at 0.08, costs €45,540.</a:t>
+            </a:r>
+          </a:p>
+          <a:p>
+            <a:pPr lvl="0" indent="0" marL="0">
+              <a:buNone/>
+            </a:pPr>
+          </a:p>
+          <a:p>
+            <a:pPr lvl="0" indent="0" marL="0">
+              <a:buNone/>
+            </a:pPr>
+            <a:r>
+              <a:rPr/>
+              <a:t>Choosing the threshold on purpose HALVED the cost of the same model: 45,540 divided by 87,620 is 0.52. No retraining, no new features, no better algorithm. One number, taken from the economics instead of from the library default.</a:t>
+            </a:r>
+          </a:p>
+          <a:p>
+            <a:pPr lvl="0" indent="0" marL="0">
+              <a:buNone/>
+            </a:pPr>
+          </a:p>
+          <a:p>
+            <a:pPr lvl="0" indent="0" marL="0">
+              <a:buNone/>
+            </a:pPr>
+            <a:r>
+              <a:rPr/>
+              <a:t>Note the flatness around the minimum, and say why it is good news: the exact threshold does not have to be right. Which is fortunate, because cost estimates never are.</a:t>
             </a:r>
           </a:p>
         </p:txBody>
@@ -6422,49 +6577,63 @@
             </a:pPr>
             <a:r>
               <a:rPr/>
-              <a:t>The closed form of the previous slide, drawn. The horizontal axis is one drive’s probability of failing, p; the vertical axis is the expected cost of each decision for that drive.</a:t>
-            </a:r>
-          </a:p>
-          <a:p>
-            <a:pPr lvl="0" indent="0" marL="0">
-              <a:buNone/>
-            </a:pPr>
-          </a:p>
-          <a:p>
-            <a:pPr lvl="0" indent="0" marL="0">
-              <a:buNone/>
-            </a:pPr>
-            <a:r>
-              <a:rPr/>
-              <a:t>Teal: flag it. We pay 140 euros for the replacement only if the drive was healthy, which happens with probability 1 minus p, so the expected cost is (1 - p) times 140 - nearly flat, because 140 is small. Rust: leave it. We pay 2,600 euros only if it fails, probability p, so the expected cost is p times 2,600 - steep.</a:t>
-            </a:r>
-          </a:p>
-          <a:p>
-            <a:pPr lvl="0" indent="0" marL="0">
-              <a:buNone/>
-            </a:pPr>
-          </a:p>
-          <a:p>
-            <a:pPr lvl="0" indent="0" marL="0">
-              <a:buNone/>
-            </a:pPr>
-            <a:r>
-              <a:rPr/>
-              <a:t>Where the lines cross the two decisions cost the same: (1 - p) times 140 = p times 2,600, which gives p = 140 divided by (140 + 2,600) = 0.051, the t-star of slide 51. Left of the crossing, leaving the drive is cheaper; right of it, flagging is. So the rule is: flag every drive whose probability is above 0.051.</a:t>
-            </a:r>
-          </a:p>
-          <a:p>
-            <a:pPr lvl="0" indent="0" marL="0">
-              <a:buNone/>
-            </a:pPr>
-          </a:p>
-          <a:p>
-            <a:pPr lvl="0" indent="0" marL="0">
-              <a:buNone/>
-            </a:pPr>
-            <a:r>
-              <a:rPr/>
-              <a:t>Then ask the room what happens to the crossing if a failure cost 140 euros as well: both lines would have the same slope in opposite directions, and they would cross at 0.5 - the default threshold, right only when the costs are equal. Handout section 7.2.</a:t>
+              <a:t>Derive it in one line on the board, because it is two steps and it lands: flag the drive if the expected cost of flagging is lower than the expected cost of not. Flagging costs C-FP if the drive was healthy, which happens with probability 1 minus p. Leaving it costs C-FN if it fails, probability p. Set one below the other and solve.</a:t>
+            </a:r>
+          </a:p>
+          <a:p>
+            <a:pPr lvl="0" indent="0" marL="0">
+              <a:buNone/>
+            </a:pPr>
+          </a:p>
+          <a:p>
+            <a:pPr lvl="0" indent="0" marL="0">
+              <a:buNone/>
+            </a:pPr>
+            <a:r>
+              <a:rPr/>
+              <a:t>Then read the formula rather than the number, which is the part worth remembering: the optimal threshold does not depend on the model, the dataset, or the class balance. Only on the RATIO of the two costs.</a:t>
+            </a:r>
+          </a:p>
+          <a:p>
+            <a:pPr lvl="0" indent="0" marL="0">
+              <a:buNone/>
+            </a:pPr>
+          </a:p>
+          <a:p>
+            <a:pPr lvl="0" indent="0" marL="0">
+              <a:buNone/>
+            </a:pPr>
+            <a:r>
+              <a:rPr/>
+              <a:t>State the condition, because the derivation used it: p must be an honest probability - among drives given 0.05, about 5% really fail. That property is called calibration (slide 47). Divide every probability by ten, as slide 47 did, and the formula would still say 0.051 while flagging far too few drives.</a:t>
+            </a:r>
+          </a:p>
+          <a:p>
+            <a:pPr lvl="0" indent="0" marL="0">
+              <a:buNone/>
+            </a:pPr>
+          </a:p>
+          <a:p>
+            <a:pPr lvl="0" indent="0" marL="0">
+              <a:buNone/>
+            </a:pPr>
+            <a:r>
+              <a:rPr/>
+              <a:t>If the errors cost the same, t-star is 0.5 and the default was right all along. As misses grow more expensive, it falls towards zero.</a:t>
+            </a:r>
+          </a:p>
+          <a:p>
+            <a:pPr lvl="0" indent="0" marL="0">
+              <a:buNone/>
+            </a:pPr>
+          </a:p>
+          <a:p>
+            <a:pPr lvl="0" indent="0" marL="0">
+              <a:buNone/>
+            </a:pPr>
+            <a:r>
+              <a:rPr/>
+              <a:t>Empirically we found 0.08 against a theoretical 0.051, and the curve is flat between them. Two likely reasons for the gap: the test set holds only 76 failures, and the probabilities are good but not perfectly calibrated.</a:t>
             </a:r>
           </a:p>
         </p:txBody>
@@ -6546,49 +6715,49 @@
             </a:pPr>
             <a:r>
               <a:rPr/>
-              <a:t>Say this out loud rather than leaving it in the handout, because it is the same mistake you may have named at the start of today’s lesson, in the discussion of exercise 3.</a:t>
-            </a:r>
-          </a:p>
-          <a:p>
-            <a:pPr lvl="0" indent="0" marL="0">
-              <a:buNone/>
-            </a:pPr>
-          </a:p>
-          <a:p>
-            <a:pPr lvl="0" indent="0" marL="0">
-              <a:buNone/>
-            </a:pPr>
-            <a:r>
-              <a:rPr/>
-              <a:t>The threshold is a parameter. Choosing it by looking at the test set means the test set has influenced the model, and the number it then reports is optimistic.</a:t>
-            </a:r>
-          </a:p>
-          <a:p>
-            <a:pPr lvl="0" indent="0" marL="0">
-              <a:buNone/>
-            </a:pPr>
-          </a:p>
-          <a:p>
-            <a:pPr lvl="0" indent="0" marL="0">
-              <a:buNone/>
-            </a:pPr>
-            <a:r>
-              <a:rPr/>
-              <a:t>Done properly: choose the threshold on a validation set, then measure once on test. Lesson 5 builds exactly that machinery, and this is the concrete reason it is needed - not a hygiene rule, a thing that changes the number you report.</a:t>
-            </a:r>
-          </a:p>
-          <a:p>
-            <a:pPr lvl="0" indent="0" marL="0">
-              <a:buNone/>
-            </a:pPr>
-          </a:p>
-          <a:p>
-            <a:pPr lvl="0" indent="0" marL="0">
-              <a:buNone/>
-            </a:pPr>
-            <a:r>
-              <a:rPr/>
-              <a:t>Until then, treat the 0.08 as a demonstration of a method, not a result anyone could publish.</a:t>
+              <a:t>The closed form of the previous slide, drawn. The horizontal axis is one drive’s probability of failing, p; the vertical axis is the expected cost of each decision for that drive.</a:t>
+            </a:r>
+          </a:p>
+          <a:p>
+            <a:pPr lvl="0" indent="0" marL="0">
+              <a:buNone/>
+            </a:pPr>
+          </a:p>
+          <a:p>
+            <a:pPr lvl="0" indent="0" marL="0">
+              <a:buNone/>
+            </a:pPr>
+            <a:r>
+              <a:rPr/>
+              <a:t>Teal: flag it. We pay 140 euros for the replacement only if the drive was healthy, which happens with probability 1 minus p, so the expected cost is (1 - p) times 140 - nearly flat, because 140 is small. Rust: leave it. We pay 2,600 euros only if it fails, probability p, so the expected cost is p times 2,600 - steep.</a:t>
+            </a:r>
+          </a:p>
+          <a:p>
+            <a:pPr lvl="0" indent="0" marL="0">
+              <a:buNone/>
+            </a:pPr>
+          </a:p>
+          <a:p>
+            <a:pPr lvl="0" indent="0" marL="0">
+              <a:buNone/>
+            </a:pPr>
+            <a:r>
+              <a:rPr/>
+              <a:t>Where the lines cross the two decisions cost the same: (1 - p) times 140 = p times 2,600, which gives p = 140 divided by (140 + 2,600) = 0.051, the t-star of slide 52. Left of the crossing, leaving the drive is cheaper; right of it, flagging is. So the rule is: flag every drive whose probability is above 0.051.</a:t>
+            </a:r>
+          </a:p>
+          <a:p>
+            <a:pPr lvl="0" indent="0" marL="0">
+              <a:buNone/>
+            </a:pPr>
+          </a:p>
+          <a:p>
+            <a:pPr lvl="0" indent="0" marL="0">
+              <a:buNone/>
+            </a:pPr>
+            <a:r>
+              <a:rPr/>
+              <a:t>Then ask the room what happens to the crossing if a failure cost 140 euros as well: both lines would have the same slope in opposite directions, and they would cross at 0.5 - the default threshold, right only when the costs are equal. Handout section 7.2.</a:t>
             </a:r>
           </a:p>
         </p:txBody>
@@ -6670,77 +6839,49 @@
             </a:pPr>
             <a:r>
               <a:rPr/>
-              <a:t>class_weight=“balanced” makes each failed drive count, in the cost, as much as about 25 healthy ones - the ratio of healthy to failed drives in the training set, (6,000 - 230) divided by 230 = 25. It changes the training rather than the decision.</a:t>
-            </a:r>
-          </a:p>
-          <a:p>
-            <a:pPr lvl="0" indent="0" marL="0">
-              <a:buNone/>
-            </a:pPr>
-          </a:p>
-          <a:p>
-            <a:pPr lvl="0" indent="0" marL="0">
-              <a:buNone/>
-            </a:pPr>
-            <a:r>
-              <a:rPr/>
-              <a:t>The figure is notebook 3’s comparison drawn as bills, one bar per model. Rust is the cost of the missed failures, FN times 2,600 euros; gold is the cost of the false alarms, FP times 140 euros. The default model misses 33 failures: 33 times 2,600 plus 13 times 140 is 87,620. The threshold at 0.08 misses 11 and raises 121 false alarms: 45,540. Balanced weights miss 8 and raise 205: 8 times 2,600 plus 205 times 140 is 49,500.</a:t>
-            </a:r>
-          </a:p>
-          <a:p>
-            <a:pPr lvl="0" indent="0" marL="0">
-              <a:buNone/>
-            </a:pPr>
-          </a:p>
-          <a:p>
-            <a:pPr lvl="0" indent="0" marL="0">
-              <a:buNone/>
-            </a:pPr>
-            <a:r>
-              <a:rPr/>
-              <a:t>Point at the AUC under each name: 0.949 against 0.950. Reweighting taught the model essentially nothing new about disk failure. What it did was move where the model puts its 0.5 line - the same lever as the threshold, pulled at a different moment.</a:t>
-            </a:r>
-          </a:p>
-          <a:p>
-            <a:pPr lvl="0" indent="0" marL="0">
-              <a:buNone/>
-            </a:pPr>
-          </a:p>
-          <a:p>
-            <a:pPr lvl="0" indent="0" marL="0">
-              <a:buNone/>
-            </a:pPr>
-            <a:r>
-              <a:rPr/>
-              <a:t>That matters because class weighting is usually presented as a REMEDY for imbalance. It is not a remedy; it is another way of setting the same decision. The remedy, where one exists, is more positive examples.</a:t>
-            </a:r>
-          </a:p>
-          <a:p>
-            <a:pPr lvl="0" indent="0" marL="0">
-              <a:buNone/>
-            </a:pPr>
-          </a:p>
-          <a:p>
-            <a:pPr lvl="0" indent="0" marL="0">
-              <a:buNone/>
-            </a:pPr>
-            <a:r>
-              <a:rPr/>
-              <a:t>Where it earns its place: when a downstream tool insists on predict() and gives you no threshold to move. Then this is how you shift the operating point.</a:t>
-            </a:r>
-          </a:p>
-          <a:p>
-            <a:pPr lvl="0" indent="0" marL="0">
-              <a:buNone/>
-            </a:pPr>
-          </a:p>
-          <a:p>
-            <a:pPr lvl="0" indent="0" marL="0">
-              <a:buNone/>
-            </a:pPr>
-            <a:r>
-              <a:rPr/>
-              <a:t>The same argument holds for resampling and for SMOTE (synthetic minority oversampling technique, which builds artificial minority examples): they move the operating point too. And both must be applied to the training rows only - inside each cross-validation fold, once lesson 5 introduces folds. Duplicated or synthetic failures in the test set would be scored as if they were real drives, and the test score would stop describing the real fleet; lesson 2 made the same argument for fitting the imputer on the training rows only.</a:t>
+              <a:t>Say this out loud rather than leaving it in the handout, because it is the same mistake you may have named at the start of today’s lesson, in the discussion of exercise 3.</a:t>
+            </a:r>
+          </a:p>
+          <a:p>
+            <a:pPr lvl="0" indent="0" marL="0">
+              <a:buNone/>
+            </a:pPr>
+          </a:p>
+          <a:p>
+            <a:pPr lvl="0" indent="0" marL="0">
+              <a:buNone/>
+            </a:pPr>
+            <a:r>
+              <a:rPr/>
+              <a:t>The threshold is a parameter. Choosing it by looking at the test set means the test set has influenced the model, and the number it then reports is optimistic.</a:t>
+            </a:r>
+          </a:p>
+          <a:p>
+            <a:pPr lvl="0" indent="0" marL="0">
+              <a:buNone/>
+            </a:pPr>
+          </a:p>
+          <a:p>
+            <a:pPr lvl="0" indent="0" marL="0">
+              <a:buNone/>
+            </a:pPr>
+            <a:r>
+              <a:rPr/>
+              <a:t>Done properly: choose the threshold on a validation set, then measure once on test. Lesson 5 builds exactly that machinery, and this is the concrete reason it is needed - not a hygiene rule, a thing that changes the number you report.</a:t>
+            </a:r>
+          </a:p>
+          <a:p>
+            <a:pPr lvl="0" indent="0" marL="0">
+              <a:buNone/>
+            </a:pPr>
+          </a:p>
+          <a:p>
+            <a:pPr lvl="0" indent="0" marL="0">
+              <a:buNone/>
+            </a:pPr>
+            <a:r>
+              <a:rPr/>
+              <a:t>Until then, treat the 0.08 as a demonstration of a method, not a result anyone could publish.</a:t>
             </a:r>
           </a:p>
         </p:txBody>
@@ -6822,21 +6963,77 @@
             </a:pPr>
             <a:r>
               <a:rPr/>
-              <a:t>The ROC curve by hand, the 200,000-pair experiment, the cost curve, then the multiclass matrix. Run notebook 03. Fifteen minutes, and the two multiclass slides that follow (56 and 57) are shown when the notebook reaches its last section, so they run alongside it rather than after it.</a:t>
-            </a:r>
-          </a:p>
-          <a:p>
-            <a:pPr lvl="0" indent="0" marL="0">
-              <a:buNone/>
-            </a:pPr>
-          </a:p>
-          <a:p>
-            <a:pPr lvl="0" indent="0" marL="0">
-              <a:buNone/>
-            </a:pPr>
-            <a:r>
-              <a:rPr/>
-              <a:t>If time is short, keep the pairs experiment: it turns a definition they would otherwise memorise into something they watched happen.</a:t>
+              <a:t>class_weight=“balanced” makes each failed drive count, in the cost, as much as about 25 healthy ones - the ratio of healthy to failed drives in the training set, (6,000 - 230) divided by 230 = 25. It changes the training rather than the decision.</a:t>
+            </a:r>
+          </a:p>
+          <a:p>
+            <a:pPr lvl="0" indent="0" marL="0">
+              <a:buNone/>
+            </a:pPr>
+          </a:p>
+          <a:p>
+            <a:pPr lvl="0" indent="0" marL="0">
+              <a:buNone/>
+            </a:pPr>
+            <a:r>
+              <a:rPr/>
+              <a:t>The figure is notebook 3’s comparison drawn as bills, one bar per model. Rust is the cost of the missed failures, FN times 2,600 euros; gold is the cost of the false alarms, FP times 140 euros. The default model misses 33 failures: 33 times 2,600 plus 13 times 140 is 87,620. The threshold at 0.08 misses 11 and raises 121 false alarms: 45,540. Balanced weights miss 8 and raise 205: 8 times 2,600 plus 205 times 140 is 49,500.</a:t>
+            </a:r>
+          </a:p>
+          <a:p>
+            <a:pPr lvl="0" indent="0" marL="0">
+              <a:buNone/>
+            </a:pPr>
+          </a:p>
+          <a:p>
+            <a:pPr lvl="0" indent="0" marL="0">
+              <a:buNone/>
+            </a:pPr>
+            <a:r>
+              <a:rPr/>
+              <a:t>Point at the AUC under each name: 0.949 against 0.950. Reweighting taught the model essentially nothing new about disk failure. What it did was move where the model puts its 0.5 line - the same lever as the threshold, pulled at a different moment.</a:t>
+            </a:r>
+          </a:p>
+          <a:p>
+            <a:pPr lvl="0" indent="0" marL="0">
+              <a:buNone/>
+            </a:pPr>
+          </a:p>
+          <a:p>
+            <a:pPr lvl="0" indent="0" marL="0">
+              <a:buNone/>
+            </a:pPr>
+            <a:r>
+              <a:rPr/>
+              <a:t>That matters because class weighting is usually presented as a REMEDY for imbalance. It is not a remedy; it is another way of setting the same decision. The remedy, where one exists, is more positive examples.</a:t>
+            </a:r>
+          </a:p>
+          <a:p>
+            <a:pPr lvl="0" indent="0" marL="0">
+              <a:buNone/>
+            </a:pPr>
+          </a:p>
+          <a:p>
+            <a:pPr lvl="0" indent="0" marL="0">
+              <a:buNone/>
+            </a:pPr>
+            <a:r>
+              <a:rPr/>
+              <a:t>Where it earns its place: when a downstream tool insists on predict() and gives you no threshold to move. Then this is how you shift the operating point.</a:t>
+            </a:r>
+          </a:p>
+          <a:p>
+            <a:pPr lvl="0" indent="0" marL="0">
+              <a:buNone/>
+            </a:pPr>
+          </a:p>
+          <a:p>
+            <a:pPr lvl="0" indent="0" marL="0">
+              <a:buNone/>
+            </a:pPr>
+            <a:r>
+              <a:rPr/>
+              <a:t>The same argument holds for resampling and for SMOTE (synthetic minority oversampling technique, which builds artificial minority examples): they move the operating point too. And both must be applied to the training rows only - inside each cross-validation fold, once lesson 5 introduces folds. Duplicated or synthetic failures in the test set would be scored as if they were real drives, and the test score would stop describing the real fleet; lesson 2 made the same argument for fitting the imputer on the training rows only.</a:t>
             </a:r>
           </a:p>
         </p:txBody>
@@ -6918,49 +7115,21 @@
             </a:pPr>
             <a:r>
               <a:rPr/>
-              <a:t>Real fleets are not healthy-or-dead. A drive can be degraded: readable, but reporting errors, and worth replacing at the next maintenance window rather than at three in the morning.</a:t>
-            </a:r>
-          </a:p>
-          <a:p>
-            <a:pPr lvl="0" indent="0" marL="0">
-              <a:buNone/>
-            </a:pPr>
-          </a:p>
-          <a:p>
-            <a:pPr lvl="0" indent="0" marL="0">
-              <a:buNone/>
-            </a:pPr>
-            <a:r>
-              <a:rPr/>
-              <a:t>For K classes the model produces one score per class and turns them into K probabilities that add up to 1 - the softmax, which for two classes reduces exactly to the sigmoid. The cost generalises to categorical cross-entropy, and it is the same idea: the negative log of the probability assigned to what actually happened. Handout section 10.</a:t>
-            </a:r>
-          </a:p>
-          <a:p>
-            <a:pPr lvl="0" indent="0" marL="0">
-              <a:buNone/>
-            </a:pPr>
-          </a:p>
-          <a:p>
-            <a:pPr lvl="0" indent="0" marL="0">
-              <a:buNone/>
-            </a:pPr>
-            <a:r>
-              <a:rPr/>
-              <a:t>Read the off-diagonal cells rather than the accuracy. Degraded is the hard class, and understandably - it sits between two neighbours that both look like it from a distance.</a:t>
-            </a:r>
-          </a:p>
-          <a:p>
-            <a:pPr lvl="0" indent="0" marL="0">
-              <a:buNone/>
-            </a:pPr>
-          </a:p>
-          <a:p>
-            <a:pPr lvl="0" indent="0" marL="0">
-              <a:buNone/>
-            </a:pPr>
-            <a:r>
-              <a:rPr/>
-              <a:t>Precision and recall are computed one class at a time: each class in turn is the positive one, the rest are negative.</a:t>
+              <a:t>The ROC curve by hand, the 200,000-pair experiment, the cost curve, then the multiclass matrix. Run notebook 03. Fifteen minutes, and the two multiclass slides that follow (57 and 58) are shown when the notebook reaches its last section, so they run alongside it rather than after it.</a:t>
+            </a:r>
+          </a:p>
+          <a:p>
+            <a:pPr lvl="0" indent="0" marL="0">
+              <a:buNone/>
+            </a:pPr>
+          </a:p>
+          <a:p>
+            <a:pPr lvl="0" indent="0" marL="0">
+              <a:buNone/>
+            </a:pPr>
+            <a:r>
+              <a:rPr/>
+              <a:t>If time is short, keep the pairs experiment: it turns a definition they would otherwise memorise into something they watched happen.</a:t>
             </a:r>
           </a:p>
         </p:txBody>
@@ -7042,35 +7211,49 @@
             </a:pPr>
             <a:r>
               <a:rPr/>
-              <a:t>The same choice as before, now with a much starker gap on three classes. Notebook 3, the three-class model: one bar per class, its F1 from classification_report, and the two averages as lines.</a:t>
-            </a:r>
-          </a:p>
-          <a:p>
-            <a:pPr lvl="0" indent="0" marL="0">
-              <a:buNone/>
-            </a:pPr>
-          </a:p>
-          <a:p>
-            <a:pPr lvl="0" indent="0" marL="0">
-              <a:buNone/>
-            </a:pPr>
-            <a:r>
-              <a:rPr/>
-              <a:t>Macro treats the three conditions as equally important: (0.947 + 0.545 + 0.629) divided by 3 = 0.707, the dotted line. Weighted multiplies each class by its number of test drives: (1,665 times 0.947 + 259 times 0.545 + 76 times 0.629) divided by 2,000 = 0.883, the dashed line. The healthy class - 1,665 of 2,000, five drives in six - does most of the talking, so the dashed line sits close to the healthy bar.</a:t>
-            </a:r>
-          </a:p>
-          <a:p>
-            <a:pPr lvl="0" indent="0" marL="0">
-              <a:buNone/>
-            </a:pPr>
-          </a:p>
-          <a:p>
-            <a:pPr lvl="0" indent="0" marL="0">
-              <a:buNone/>
-            </a:pPr>
-            <a:r>
-              <a:rPr/>
-              <a:t>Which to quote is a question about the application, not about statistics. If missing a failure matters as much as missing a healthy drive, macro is the honest one. Say which you used, always.</a:t>
+              <a:t>Real fleets are not healthy-or-dead. A drive can be degraded: readable, but reporting errors, and worth replacing at the next maintenance window rather than at three in the morning.</a:t>
+            </a:r>
+          </a:p>
+          <a:p>
+            <a:pPr lvl="0" indent="0" marL="0">
+              <a:buNone/>
+            </a:pPr>
+          </a:p>
+          <a:p>
+            <a:pPr lvl="0" indent="0" marL="0">
+              <a:buNone/>
+            </a:pPr>
+            <a:r>
+              <a:rPr/>
+              <a:t>For K classes the model produces one score per class and turns them into K probabilities that add up to 1 - the softmax, which for two classes reduces exactly to the sigmoid. The cost generalises to categorical cross-entropy, and it is the same idea: the negative log of the probability assigned to what actually happened. Handout section 10.</a:t>
+            </a:r>
+          </a:p>
+          <a:p>
+            <a:pPr lvl="0" indent="0" marL="0">
+              <a:buNone/>
+            </a:pPr>
+          </a:p>
+          <a:p>
+            <a:pPr lvl="0" indent="0" marL="0">
+              <a:buNone/>
+            </a:pPr>
+            <a:r>
+              <a:rPr/>
+              <a:t>Read the off-diagonal cells rather than the accuracy. Degraded is the hard class, and understandably - it sits between two neighbours that both look like it from a distance.</a:t>
+            </a:r>
+          </a:p>
+          <a:p>
+            <a:pPr lvl="0" indent="0" marL="0">
+              <a:buNone/>
+            </a:pPr>
+          </a:p>
+          <a:p>
+            <a:pPr lvl="0" indent="0" marL="0">
+              <a:buNone/>
+            </a:pPr>
+            <a:r>
+              <a:rPr/>
+              <a:t>Precision and recall are computed one class at a time: each class in turn is the positive one, the rest are negative.</a:t>
             </a:r>
           </a:p>
         </p:txBody>
@@ -7152,35 +7335,35 @@
             </a:pPr>
             <a:r>
               <a:rPr/>
-              <a:t>Close on the number they started with. 306 failures out of 8,000; 96.2% accuracy for a model that does nothing.</a:t>
-            </a:r>
-          </a:p>
-          <a:p>
-            <a:pPr lvl="0" indent="0" marL="0">
-              <a:buNone/>
-            </a:pPr>
-          </a:p>
-          <a:p>
-            <a:pPr lvl="0" indent="0" marL="0">
-              <a:buNone/>
-            </a:pPr>
-            <a:r>
-              <a:rPr/>
-              <a:t>If they remember one thing from today, it should be the reflex to ask “what’s the base rate?” before believing any accuracy figure. That reflex is worth more than any of the formulas.</a:t>
-            </a:r>
-          </a:p>
-          <a:p>
-            <a:pPr lvl="0" indent="0" marL="0">
-              <a:buNone/>
-            </a:pPr>
-          </a:p>
-          <a:p>
-            <a:pPr lvl="0" indent="0" marL="0">
-              <a:buNone/>
-            </a:pPr>
-            <a:r>
-              <a:rPr/>
-              <a:t>The second thing: accuracy, precision, recall and F1 all depended on a threshold, and the threshold has an answer - C-FP over C-FP plus C-FN, for honest probabilities - that comes from the business, not from the data.</a:t>
+              <a:t>The same choice as before, now with a much starker gap on three classes. Notebook 3, the three-class model: one bar per class, its F1 from classification_report, and the two averages as lines.</a:t>
+            </a:r>
+          </a:p>
+          <a:p>
+            <a:pPr lvl="0" indent="0" marL="0">
+              <a:buNone/>
+            </a:pPr>
+          </a:p>
+          <a:p>
+            <a:pPr lvl="0" indent="0" marL="0">
+              <a:buNone/>
+            </a:pPr>
+            <a:r>
+              <a:rPr/>
+              <a:t>Macro treats the three conditions as equally important: (0.947 + 0.545 + 0.629) divided by 3 = 0.707, the dotted line. Weighted multiplies each class by its number of test drives: (1,665 times 0.947 + 259 times 0.545 + 76 times 0.629) divided by 2,000 = 0.883, the dashed line. The healthy class - 1,665 of 2,000, five drives in six - does most of the talking, so the dashed line sits close to the healthy bar.</a:t>
+            </a:r>
+          </a:p>
+          <a:p>
+            <a:pPr lvl="0" indent="0" marL="0">
+              <a:buNone/>
+            </a:pPr>
+          </a:p>
+          <a:p>
+            <a:pPr lvl="0" indent="0" marL="0">
+              <a:buNone/>
+            </a:pPr>
+            <a:r>
+              <a:rPr/>
+              <a:t>Which to quote is a question about the application, not about statistics. If missing a failure matters as much as missing a healthy drive, macro is the honest one. Say which you used, always.</a:t>
             </a:r>
           </a:p>
         </p:txBody>
@@ -7262,49 +7445,35 @@
             </a:pPr>
             <a:r>
               <a:rPr/>
-              <a:t>Set it explicitly and say out loud when it comes back: the first ten minutes of next Friday, 6 November.</a:t>
-            </a:r>
-          </a:p>
-          <a:p>
-            <a:pPr lvl="0" indent="0" marL="0">
-              <a:buNone/>
-            </a:pPr>
-          </a:p>
-          <a:p>
-            <a:pPr lvl="0" indent="0" marL="0">
-              <a:buNone/>
-            </a:pPr>
-            <a:r>
-              <a:rPr/>
-              <a:t>Emphasise which part matters at the exam, where one of the ten exercises is drawn and they talk through their own notebook. The classifier is a few lines and everyone will get it. The paragraph defending the threshold choice is where the learning is, and it is what they will be asked to defend.</a:t>
-            </a:r>
-          </a:p>
-          <a:p>
-            <a:pPr lvl="0" indent="0" marL="0">
-              <a:buNone/>
-            </a:pPr>
-          </a:p>
-          <a:p>
-            <a:pPr lvl="0" indent="0" marL="0">
-              <a:buNone/>
-            </a:pPr>
-            <a:r>
-              <a:rPr/>
-              <a:t>Warn them about the trap deliberately planted: the dataset has a decoy column, as this one did, and the exercise asks them to report AUC and average precision together. Anyone reporting AUC alone will be reporting a number that looks better than the model is.</a:t>
-            </a:r>
-          </a:p>
-          <a:p>
-            <a:pPr lvl="0" indent="0" marL="0">
-              <a:buNone/>
-            </a:pPr>
-          </a:p>
-          <a:p>
-            <a:pPr lvl="0" indent="0" marL="0">
-              <a:buNone/>
-            </a:pPr>
-            <a:r>
-              <a:rPr/>
-              <a:t>Next week: experimental methodology. Cross-validation, bias-variance, and the honest way to make every choice we made by hand today.</a:t>
+              <a:t>Close on the number they started with. 306 failures out of 8,000; 96.2% accuracy for a model that does nothing.</a:t>
+            </a:r>
+          </a:p>
+          <a:p>
+            <a:pPr lvl="0" indent="0" marL="0">
+              <a:buNone/>
+            </a:pPr>
+          </a:p>
+          <a:p>
+            <a:pPr lvl="0" indent="0" marL="0">
+              <a:buNone/>
+            </a:pPr>
+            <a:r>
+              <a:rPr/>
+              <a:t>If they remember one thing from today, it should be the reflex to ask “what’s the base rate?” before believing any accuracy figure. That reflex is worth more than any of the formulas.</a:t>
+            </a:r>
+          </a:p>
+          <a:p>
+            <a:pPr lvl="0" indent="0" marL="0">
+              <a:buNone/>
+            </a:pPr>
+          </a:p>
+          <a:p>
+            <a:pPr lvl="0" indent="0" marL="0">
+              <a:buNone/>
+            </a:pPr>
+            <a:r>
+              <a:rPr/>
+              <a:t>The second thing: accuracy, precision, recall and F1 all depended on a threshold, and the threshold has an answer - C-FP over C-FP plus C-FN, for honest probabilities - that comes from the business, not from the data.</a:t>
             </a:r>
           </a:p>
         </p:txBody>
@@ -7327,6 +7496,130 @@
             <a:fld id="{18BDFEC3-8487-43E8-A154-7C12CBC1FFF2}" type="slidenum">
               <a:rPr lang="en-US"/>
               <a:t>59</a:t>
+            </a:fld>
+            <a:endParaRPr lang="en-US"/>
+          </a:p>
+        </p:txBody>
+      </p:sp>
+    </p:spTree>
+  </p:cSld>
+</p:notes>
+</file>
+
+<file path=ppt/notesSlides/notesSlide59.xml><?xml version="1.0" encoding="utf-8"?>
+<p:notes xmlns:a="http://schemas.openxmlformats.org/drawingml/2006/main" xmlns:r="http://schemas.openxmlformats.org/officeDocument/2006/relationships" xmlns:p="http://schemas.openxmlformats.org/presentationml/2006/main">
+  <p:cSld>
+    <p:spTree>
+      <p:nvGrpSpPr>
+        <p:cNvPr id="1" name=""/>
+        <p:cNvGrpSpPr/>
+        <p:nvPr/>
+      </p:nvGrpSpPr>
+      <p:grpSpPr>
+        <a:xfrm>
+          <a:off x="0" y="0"/>
+          <a:ext cx="0" cy="0"/>
+          <a:chOff x="0" y="0"/>
+          <a:chExt cx="0" cy="0"/>
+        </a:xfrm>
+      </p:grpSpPr>
+      <p:sp>
+        <p:nvSpPr>
+          <p:cNvPr id="2" name="Slide Image Placeholder 1"/>
+          <p:cNvSpPr>
+            <a:spLocks noGrp="1" noRot="1" noChangeAspect="1"/>
+          </p:cNvSpPr>
+          <p:nvPr>
+            <p:ph type="sldImg"/>
+          </p:nvPr>
+        </p:nvSpPr>
+        <p:spPr/>
+      </p:sp>
+      <p:sp>
+        <p:nvSpPr>
+          <p:cNvPr id="3" name="Notes Placeholder 2"/>
+          <p:cNvSpPr>
+            <a:spLocks noGrp="1"/>
+          </p:cNvSpPr>
+          <p:nvPr>
+            <p:ph type="body" idx="1"/>
+          </p:nvPr>
+        </p:nvSpPr>
+        <p:spPr/>
+        <p:txBody>
+          <a:bodyPr/>
+          <a:lstStyle/>
+          <a:p>
+            <a:pPr lvl="0" indent="0" marL="0">
+              <a:buNone/>
+            </a:pPr>
+            <a:r>
+              <a:rPr/>
+              <a:t>Set it explicitly and say out loud when it comes back: the first ten minutes of next Friday, 6 November.</a:t>
+            </a:r>
+          </a:p>
+          <a:p>
+            <a:pPr lvl="0" indent="0" marL="0">
+              <a:buNone/>
+            </a:pPr>
+          </a:p>
+          <a:p>
+            <a:pPr lvl="0" indent="0" marL="0">
+              <a:buNone/>
+            </a:pPr>
+            <a:r>
+              <a:rPr/>
+              <a:t>Emphasise which part matters at the exam, where one of the ten exercises is drawn and they talk through their own notebook. The classifier is a few lines and everyone will get it. The paragraph defending the threshold choice is where the learning is, and it is what they will be asked to defend.</a:t>
+            </a:r>
+          </a:p>
+          <a:p>
+            <a:pPr lvl="0" indent="0" marL="0">
+              <a:buNone/>
+            </a:pPr>
+          </a:p>
+          <a:p>
+            <a:pPr lvl="0" indent="0" marL="0">
+              <a:buNone/>
+            </a:pPr>
+            <a:r>
+              <a:rPr/>
+              <a:t>Warn them about the trap deliberately planted: the dataset has a decoy column, as this one did, and the exercise asks them to report AUC and average precision together. Anyone reporting AUC alone will be reporting a number that looks better than the model is.</a:t>
+            </a:r>
+          </a:p>
+          <a:p>
+            <a:pPr lvl="0" indent="0" marL="0">
+              <a:buNone/>
+            </a:pPr>
+          </a:p>
+          <a:p>
+            <a:pPr lvl="0" indent="0" marL="0">
+              <a:buNone/>
+            </a:pPr>
+            <a:r>
+              <a:rPr/>
+              <a:t>Next week: experimental methodology. Cross-validation, bias-variance, and the honest way to make every choice we made by hand today.</a:t>
+            </a:r>
+          </a:p>
+        </p:txBody>
+      </p:sp>
+      <p:sp>
+        <p:nvSpPr>
+          <p:cNvPr id="4" name="Slide Number Placeholder 3"/>
+          <p:cNvSpPr>
+            <a:spLocks noGrp="1"/>
+          </p:cNvSpPr>
+          <p:nvPr>
+            <p:ph type="sldNum" sz="quarter" idx="10"/>
+          </p:nvPr>
+        </p:nvSpPr>
+        <p:spPr/>
+        <p:txBody>
+          <a:bodyPr/>
+          <a:lstStyle/>
+          <a:p>
+            <a:fld id="{18BDFEC3-8487-43E8-A154-7C12CBC1FFF2}" type="slidenum">
+              <a:rPr lang="en-US"/>
+              <a:t>60</a:t>
             </a:fld>
             <a:endParaRPr lang="en-US"/>
           </a:p>
@@ -7566,7 +7859,7 @@
             </a:pPr>
             <a:r>
               <a:rPr/>
-              <a:t>Second, the flat start comes from using the raw count, not from the drives. A straight line in the count gives every sector the same weight: the first adds as much to z as the twentieth. But the labels were generated from log(1 + count), which gives the first sectors the most weight (handout section 1.1). The handout’s figure in section 2.2 draws what the sectors add to z under each of the two. That is why the six-counter model of slide 12 onwards takes log(1 + count) as its input.</a:t>
+              <a:t>Second, the flat start comes from using the raw count, not from the drives. A straight line in the count gives every sector the same weight: the first adds as much to z as the twentieth. But the labels were generated from log(1 + count), which gives the first sectors the most weight (handout section 1.1). The handout’s figure in section 2.2 draws what the sectors add to z under each of the two. That is why the six-counter model of slide 13 onwards takes log(1 + count) as its input.</a:t>
             </a:r>
           </a:p>
           <a:p>
@@ -7716,7 +8009,7 @@
             <a:pPr lvl="0"/>
             <a:r>
               <a:rPr/>
-              <a:t>the coefficients read as odds multipliers, which is slide 13;</a:t>
+              <a:t>the coefficients read as odds multipliers, which is slide 14;</a:t>
             </a:r>
           </a:p>
           <a:p>
@@ -7740,7 +8033,7 @@
             <a:pPr lvl="0"/>
             <a:r>
               <a:rPr/>
-              <a:t>with the cross-entropy cost of slide 23 the gradient comes out as (prediction minus label) times x, and the cost is convex - handout sections 3.4 and 4.3.</a:t>
+              <a:t>with the cross-entropy cost of slide 24 the gradient comes out as (prediction minus label) times x, and the cost is convex - handout sections 3.4 and 4.3.</a:t>
             </a:r>
           </a:p>
           <a:p>
@@ -7920,7 +8213,7 @@
             </a:pPr>
             <a:r>
               <a:rPr/>
-              <a:t>The step to the next slide: on the log-odds axis, evidence simply adds. Several readings, if independent given the class, are one fixed step each, starting from the average drive at minus 6.20. A starting value plus one step per feature is exactly w-transpose-x plus b, which is why slide 11 puts the line on the log-odds. Six is a realistic factor: the coefficient of reallocated sectors used to generate the labels is 1.80 per standard deviation, and e to the 1.80 is 6.05 (slide 13 reads coefficients this way; slide 14 shows the true ones).</a:t>
+              <a:t>The step to the next slide: on the log-odds axis, evidence simply adds. Several readings, if independent given the class, are one fixed step each, starting from the average drive at minus 6.20. A starting value plus one step per feature is exactly w-transpose-x plus b, which is why slide 11 puts the line on the log-odds. Six is a realistic factor: the coefficient of reallocated sectors used to generate the labels is 1.80 per standard deviation, and e to the 1.80 is 6.05 (slide 14 reads coefficients this way; slide 15 shows the true ones).</a:t>
             </a:r>
           </a:p>
         </p:txBody>
@@ -11357,6 +11650,88 @@
             </a:pPr>
             <a:r>
               <a:rPr/>
+              <a:t>The model, drawn: one neuron</a:t>
+            </a:r>
+          </a:p>
+        </p:txBody>
+      </p:sp>
+      <p:pic>
+        <p:nvPicPr>
+          <p:cNvPr descr="logistic_neuron.png" id="0" name="Picture 1"/>
+          <p:cNvPicPr>
+            <a:picLocks noGrp="1" noChangeAspect="1"/>
+          </p:cNvPicPr>
+          <p:nvPr/>
+        </p:nvPicPr>
+        <p:blipFill>
+          <a:blip r:embed="rId3"/>
+          <a:stretch>
+            <a:fillRect/>
+          </a:stretch>
+        </p:blipFill>
+        <p:spPr bwMode="auto">
+          <a:xfrm>
+            <a:off x="457200" y="1169789"/>
+            <a:ext cx="8229600" cy="3352800"/>
+          </a:xfrm>
+          <a:prstGeom prst="rect">
+            <a:avLst/>
+          </a:prstGeom>
+          <a:noFill/>
+          <a:ln w="9525">
+            <a:noFill/>
+            <a:headEnd/>
+            <a:tailEnd/>
+          </a:ln>
+        </p:spPr>
+      </p:pic>
+    </p:spTree>
+  </p:cSld>
+</p:sld>
+</file>
+
+<file path=ppt/slides/slide14.xml><?xml version="1.0" encoding="utf-8"?>
+<p:sld xmlns:a="http://schemas.openxmlformats.org/drawingml/2006/main" xmlns:r="http://schemas.openxmlformats.org/officeDocument/2006/relationships" xmlns:p="http://schemas.openxmlformats.org/presentationml/2006/main">
+  <p:cSld>
+    <p:spTree>
+      <p:nvGrpSpPr>
+        <p:cNvPr id="1" name=""/>
+        <p:cNvGrpSpPr/>
+        <p:nvPr/>
+      </p:nvGrpSpPr>
+      <p:grpSpPr>
+        <a:xfrm>
+          <a:off x="0" y="0"/>
+          <a:ext cx="0" cy="0"/>
+          <a:chOff x="0" y="0"/>
+          <a:chExt cx="0" cy="0"/>
+        </a:xfrm>
+      </p:grpSpPr>
+      <p:sp>
+        <p:nvSpPr>
+          <p:cNvPr id="2" name="Title 1"/>
+          <p:cNvSpPr>
+            <a:spLocks noGrp="1"/>
+          </p:cNvSpPr>
+          <p:nvPr>
+            <p:ph type="title"/>
+          </p:nvPr>
+        </p:nvSpPr>
+        <p:spPr>
+          <a:xfrm>
+            <a:off x="457200" y="205979"/>
+            <a:ext cx="8229600" cy="857250"/>
+          </a:xfrm>
+        </p:spPr>
+        <p:txBody>
+          <a:bodyPr/>
+          <a:lstStyle/>
+          <a:p>
+            <a:pPr lvl="0" indent="0" marL="0">
+              <a:buNone/>
+            </a:pPr>
+            <a:r>
+              <a:rPr/>
               <a:t>What the coefficients mean</a:t>
             </a:r>
           </a:p>
@@ -11385,7 +11760,7 @@
             <a:pPr lvl="0"/>
             <a:r>
               <a:rPr/>
-              <a:t>Standardised (mean 0, SD 1): one SD more of reallocated sectors adds its true coefficient, 1.80 (slide 14), to the log-odds</a:t>
+              <a:t>Standardised (mean 0, SD 1): one SD more of reallocated sectors adds its true coefficient, 1.80 (slide 15), to the log-odds</a:t>
             </a:r>
           </a:p>
           <a:p>
@@ -11438,7 +11813,7 @@
 </p:sld>
 </file>
 
-<file path=ppt/slides/slide14.xml><?xml version="1.0" encoding="utf-8"?>
+<file path=ppt/slides/slide15.xml><?xml version="1.0" encoding="utf-8"?>
 <p:sld xmlns:a="http://schemas.openxmlformats.org/drawingml/2006/main" xmlns:r="http://schemas.openxmlformats.org/officeDocument/2006/relationships" xmlns:p="http://schemas.openxmlformats.org/presentationml/2006/main">
   <p:cSld>
     <p:spTree>
@@ -11958,108 +12333,6 @@
 </p:sld>
 </file>
 
-<file path=ppt/slides/slide15.xml><?xml version="1.0" encoding="utf-8"?>
-<p:sld xmlns:a="http://schemas.openxmlformats.org/drawingml/2006/main" xmlns:r="http://schemas.openxmlformats.org/officeDocument/2006/relationships" xmlns:p="http://schemas.openxmlformats.org/presentationml/2006/main">
-  <p:cSld>
-    <p:spTree>
-      <p:nvGrpSpPr>
-        <p:cNvPr id="1" name=""/>
-        <p:cNvGrpSpPr/>
-        <p:nvPr/>
-      </p:nvGrpSpPr>
-      <p:grpSpPr>
-        <a:xfrm>
-          <a:off x="0" y="0"/>
-          <a:ext cx="0" cy="0"/>
-          <a:chOff x="0" y="0"/>
-          <a:chExt cx="0" cy="0"/>
-        </a:xfrm>
-      </p:grpSpPr>
-      <p:sp>
-        <p:nvSpPr>
-          <p:cNvPr id="2" name="Title 1"/>
-          <p:cNvSpPr>
-            <a:spLocks noGrp="1"/>
-          </p:cNvSpPr>
-          <p:nvPr>
-            <p:ph type="title"/>
-          </p:nvPr>
-        </p:nvSpPr>
-        <p:spPr>
-          <a:xfrm>
-            <a:off x="457200" y="205979"/>
-            <a:ext cx="8229600" cy="857250"/>
-          </a:xfrm>
-        </p:spPr>
-        <p:txBody>
-          <a:bodyPr/>
-          <a:lstStyle/>
-          <a:p>
-            <a:pPr lvl="0" indent="0" marL="0">
-              <a:buNone/>
-            </a:pPr>
-            <a:r>
-              <a:rPr/>
-              <a:t>The intercept is the average drive’s chance</a:t>
-            </a:r>
-          </a:p>
-        </p:txBody>
-      </p:sp>
-      <p:sp>
-        <p:nvSpPr>
-          <p:cNvPr id="3" name="Content Placeholder 2"/>
-          <p:cNvSpPr>
-            <a:spLocks noGrp="1"/>
-          </p:cNvSpPr>
-          <p:nvPr>
-            <p:ph idx="1"/>
-          </p:nvPr>
-        </p:nvSpPr>
-        <p:spPr>
-          <a:xfrm>
-            <a:off x="457200" y="1200151"/>
-            <a:ext cx="8229600" cy="3394472"/>
-          </a:xfrm>
-        </p:spPr>
-        <p:txBody>
-          <a:bodyPr/>
-          <a:lstStyle/>
-          <a:p>
-            <a:pPr lvl="0"/>
-            <a:r>
-              <a:rPr/>
-              <a:t>Fitted intercept: </a:t>
-            </a:r>
-            <a:r>
-              <a:rPr b="1"/>
-              <a:t>−6.09</a:t>
-            </a:r>
-            <a:r>
-              <a:rPr/>
-              <a:t>, the log-odds of a drive average on every counter (all standardised x = 0)</a:t>
-            </a:r>
-          </a:p>
-          <a:p>
-            <a:pPr lvl="0"/>
-            <a:r>
-              <a:rPr/>
-              <a:t>σ(−6.09) = 1 ÷ (1 + exp(6.09)) = 1 ÷ 442 = 0.0023: a 0.2% chance</a:t>
-            </a:r>
-          </a:p>
-          <a:p>
-            <a:pPr lvl="0"/>
-            <a:r>
-              <a:rPr/>
-              <a:t>The fleet fails at 3.8% (slide 6): the failures come from the few drives far above average</a:t>
-            </a:r>
-          </a:p>
-        </p:txBody>
-      </p:sp>
-    </p:spTree>
-  </p:cSld>
-</p:sld>
-</file>
-
 <file path=ppt/slides/slide16.xml><?xml version="1.0" encoding="utf-8"?>
 <p:sld xmlns:a="http://schemas.openxmlformats.org/drawingml/2006/main" xmlns:r="http://schemas.openxmlformats.org/officeDocument/2006/relationships" xmlns:p="http://schemas.openxmlformats.org/presentationml/2006/main">
   <p:cSld>
@@ -12102,7 +12375,7 @@
             </a:pPr>
             <a:r>
               <a:rPr/>
-              <a:t>Fitting means minimising something, but what?</a:t>
+              <a:t>The intercept is the average drive’s chance</a:t>
             </a:r>
           </a:p>
         </p:txBody>
@@ -12130,14 +12403,29 @@
             <a:pPr lvl="0"/>
             <a:r>
               <a:rPr/>
-              <a:t>Squared error worked for lesson 3</a:t>
+              <a:t>Fitted intercept: </a:t>
+            </a:r>
+            <a:r>
+              <a:rPr b="1"/>
+              <a:t>−6.09</a:t>
+            </a:r>
+            <a:r>
+              <a:rPr/>
+              <a:t>, the log-odds of a drive average on every counter (all standardised x = 0)</a:t>
             </a:r>
           </a:p>
           <a:p>
             <a:pPr lvl="0"/>
             <a:r>
               <a:rPr/>
-              <a:t>Why not just apply it to the sigmoid’s output?</a:t>
+              <a:t>σ(−6.09) = 1 ÷ (1 + exp(6.09)) = 1 ÷ 442 = 0.0023: a 0.2% chance</a:t>
+            </a:r>
+          </a:p>
+          <a:p>
+            <a:pPr lvl="0"/>
+            <a:r>
+              <a:rPr/>
+              <a:t>The fleet fails at 3.8% (slide 6): the failures come from the few drives far above average</a:t>
             </a:r>
           </a:p>
         </p:txBody>
@@ -12148,6 +12436,93 @@
 </file>
 
 <file path=ppt/slides/slide17.xml><?xml version="1.0" encoding="utf-8"?>
+<p:sld xmlns:a="http://schemas.openxmlformats.org/drawingml/2006/main" xmlns:r="http://schemas.openxmlformats.org/officeDocument/2006/relationships" xmlns:p="http://schemas.openxmlformats.org/presentationml/2006/main">
+  <p:cSld>
+    <p:spTree>
+      <p:nvGrpSpPr>
+        <p:cNvPr id="1" name=""/>
+        <p:cNvGrpSpPr/>
+        <p:nvPr/>
+      </p:nvGrpSpPr>
+      <p:grpSpPr>
+        <a:xfrm>
+          <a:off x="0" y="0"/>
+          <a:ext cx="0" cy="0"/>
+          <a:chOff x="0" y="0"/>
+          <a:chExt cx="0" cy="0"/>
+        </a:xfrm>
+      </p:grpSpPr>
+      <p:sp>
+        <p:nvSpPr>
+          <p:cNvPr id="2" name="Title 1"/>
+          <p:cNvSpPr>
+            <a:spLocks noGrp="1"/>
+          </p:cNvSpPr>
+          <p:nvPr>
+            <p:ph type="title"/>
+          </p:nvPr>
+        </p:nvSpPr>
+        <p:spPr>
+          <a:xfrm>
+            <a:off x="457200" y="205979"/>
+            <a:ext cx="8229600" cy="857250"/>
+          </a:xfrm>
+        </p:spPr>
+        <p:txBody>
+          <a:bodyPr/>
+          <a:lstStyle/>
+          <a:p>
+            <a:pPr lvl="0" indent="0" marL="0">
+              <a:buNone/>
+            </a:pPr>
+            <a:r>
+              <a:rPr/>
+              <a:t>Fitting means minimising something, but what?</a:t>
+            </a:r>
+          </a:p>
+        </p:txBody>
+      </p:sp>
+      <p:sp>
+        <p:nvSpPr>
+          <p:cNvPr id="3" name="Content Placeholder 2"/>
+          <p:cNvSpPr>
+            <a:spLocks noGrp="1"/>
+          </p:cNvSpPr>
+          <p:nvPr>
+            <p:ph idx="1"/>
+          </p:nvPr>
+        </p:nvSpPr>
+        <p:spPr>
+          <a:xfrm>
+            <a:off x="457200" y="1200151"/>
+            <a:ext cx="8229600" cy="3394472"/>
+          </a:xfrm>
+        </p:spPr>
+        <p:txBody>
+          <a:bodyPr/>
+          <a:lstStyle/>
+          <a:p>
+            <a:pPr lvl="0"/>
+            <a:r>
+              <a:rPr/>
+              <a:t>Squared error worked for lesson 3</a:t>
+            </a:r>
+          </a:p>
+          <a:p>
+            <a:pPr lvl="0"/>
+            <a:r>
+              <a:rPr/>
+              <a:t>Why not just apply it to the sigmoid’s output?</a:t>
+            </a:r>
+          </a:p>
+        </p:txBody>
+      </p:sp>
+    </p:spTree>
+  </p:cSld>
+</p:sld>
+</file>
+
+<file path=ppt/slides/slide18.xml><?xml version="1.0" encoding="utf-8"?>
 <p:sld xmlns:a="http://schemas.openxmlformats.org/drawingml/2006/main" xmlns:r="http://schemas.openxmlformats.org/officeDocument/2006/relationships" xmlns:p="http://schemas.openxmlformats.org/presentationml/2006/main">
   <p:cSld>
     <p:spTree>
@@ -12481,7 +12856,7 @@
 </p:sld>
 </file>
 
-<file path=ppt/slides/slide18.xml><?xml version="1.0" encoding="utf-8"?>
+<file path=ppt/slides/slide19.xml><?xml version="1.0" encoding="utf-8"?>
 <p:sld xmlns:a="http://schemas.openxmlformats.org/drawingml/2006/main" xmlns:r="http://schemas.openxmlformats.org/officeDocument/2006/relationships" xmlns:p="http://schemas.openxmlformats.org/presentationml/2006/main">
   <p:cSld>
     <p:spTree>
@@ -12869,7 +13244,94 @@
 </p:sld>
 </file>
 
-<file path=ppt/slides/slide19.xml><?xml version="1.0" encoding="utf-8"?>
+<file path=ppt/slides/slide2.xml><?xml version="1.0" encoding="utf-8"?>
+<p:sld xmlns:a="http://schemas.openxmlformats.org/drawingml/2006/main" xmlns:r="http://schemas.openxmlformats.org/officeDocument/2006/relationships" xmlns:p="http://schemas.openxmlformats.org/presentationml/2006/main">
+  <p:cSld>
+    <p:spTree>
+      <p:nvGrpSpPr>
+        <p:cNvPr id="1" name=""/>
+        <p:cNvGrpSpPr/>
+        <p:nvPr/>
+      </p:nvGrpSpPr>
+      <p:grpSpPr>
+        <a:xfrm>
+          <a:off x="0" y="0"/>
+          <a:ext cx="0" cy="0"/>
+          <a:chOff x="0" y="0"/>
+          <a:chExt cx="0" cy="0"/>
+        </a:xfrm>
+      </p:grpSpPr>
+      <p:sp>
+        <p:nvSpPr>
+          <p:cNvPr id="2" name="Title 1"/>
+          <p:cNvSpPr>
+            <a:spLocks noGrp="1"/>
+          </p:cNvSpPr>
+          <p:nvPr>
+            <p:ph type="title"/>
+          </p:nvPr>
+        </p:nvSpPr>
+        <p:spPr>
+          <a:xfrm>
+            <a:off x="457200" y="205979"/>
+            <a:ext cx="8229600" cy="857250"/>
+          </a:xfrm>
+        </p:spPr>
+        <p:txBody>
+          <a:bodyPr/>
+          <a:lstStyle/>
+          <a:p>
+            <a:pPr lvl="0" indent="0" marL="0">
+              <a:buNone/>
+            </a:pPr>
+            <a:r>
+              <a:rPr/>
+              <a:t>Before we start</a:t>
+            </a:r>
+          </a:p>
+        </p:txBody>
+      </p:sp>
+      <p:sp>
+        <p:nvSpPr>
+          <p:cNvPr id="3" name="Content Placeholder 2"/>
+          <p:cNvSpPr>
+            <a:spLocks noGrp="1"/>
+          </p:cNvSpPr>
+          <p:nvPr>
+            <p:ph idx="1"/>
+          </p:nvPr>
+        </p:nvSpPr>
+        <p:spPr>
+          <a:xfrm>
+            <a:off x="457200" y="1200151"/>
+            <a:ext cx="8229600" cy="3394472"/>
+          </a:xfrm>
+        </p:spPr>
+        <p:txBody>
+          <a:bodyPr/>
+          <a:lstStyle/>
+          <a:p>
+            <a:pPr lvl="0"/>
+            <a:r>
+              <a:rPr/>
+              <a:t>Exercise 3, which we discuss now</a:t>
+            </a:r>
+          </a:p>
+          <a:p>
+            <a:pPr lvl="0"/>
+            <a:r>
+              <a:rPr/>
+              <a:t>Ridge, Lasso, and the choice of the penalty strength</a:t>
+            </a:r>
+          </a:p>
+        </p:txBody>
+      </p:sp>
+    </p:spTree>
+  </p:cSld>
+</p:sld>
+</file>
+
+<file path=ppt/slides/slide20.xml><?xml version="1.0" encoding="utf-8"?>
 <p:sld xmlns:a="http://schemas.openxmlformats.org/drawingml/2006/main" xmlns:r="http://schemas.openxmlformats.org/officeDocument/2006/relationships" xmlns:p="http://schemas.openxmlformats.org/presentationml/2006/main">
   <p:cSld>
     <p:spTree>
@@ -12951,94 +13413,7 @@
 </p:sld>
 </file>
 
-<file path=ppt/slides/slide2.xml><?xml version="1.0" encoding="utf-8"?>
-<p:sld xmlns:a="http://schemas.openxmlformats.org/drawingml/2006/main" xmlns:r="http://schemas.openxmlformats.org/officeDocument/2006/relationships" xmlns:p="http://schemas.openxmlformats.org/presentationml/2006/main">
-  <p:cSld>
-    <p:spTree>
-      <p:nvGrpSpPr>
-        <p:cNvPr id="1" name=""/>
-        <p:cNvGrpSpPr/>
-        <p:nvPr/>
-      </p:nvGrpSpPr>
-      <p:grpSpPr>
-        <a:xfrm>
-          <a:off x="0" y="0"/>
-          <a:ext cx="0" cy="0"/>
-          <a:chOff x="0" y="0"/>
-          <a:chExt cx="0" cy="0"/>
-        </a:xfrm>
-      </p:grpSpPr>
-      <p:sp>
-        <p:nvSpPr>
-          <p:cNvPr id="2" name="Title 1"/>
-          <p:cNvSpPr>
-            <a:spLocks noGrp="1"/>
-          </p:cNvSpPr>
-          <p:nvPr>
-            <p:ph type="title"/>
-          </p:nvPr>
-        </p:nvSpPr>
-        <p:spPr>
-          <a:xfrm>
-            <a:off x="457200" y="205979"/>
-            <a:ext cx="8229600" cy="857250"/>
-          </a:xfrm>
-        </p:spPr>
-        <p:txBody>
-          <a:bodyPr/>
-          <a:lstStyle/>
-          <a:p>
-            <a:pPr lvl="0" indent="0" marL="0">
-              <a:buNone/>
-            </a:pPr>
-            <a:r>
-              <a:rPr/>
-              <a:t>Before we start</a:t>
-            </a:r>
-          </a:p>
-        </p:txBody>
-      </p:sp>
-      <p:sp>
-        <p:nvSpPr>
-          <p:cNvPr id="3" name="Content Placeholder 2"/>
-          <p:cNvSpPr>
-            <a:spLocks noGrp="1"/>
-          </p:cNvSpPr>
-          <p:nvPr>
-            <p:ph idx="1"/>
-          </p:nvPr>
-        </p:nvSpPr>
-        <p:spPr>
-          <a:xfrm>
-            <a:off x="457200" y="1200151"/>
-            <a:ext cx="8229600" cy="3394472"/>
-          </a:xfrm>
-        </p:spPr>
-        <p:txBody>
-          <a:bodyPr/>
-          <a:lstStyle/>
-          <a:p>
-            <a:pPr lvl="0"/>
-            <a:r>
-              <a:rPr/>
-              <a:t>Exercise 3, which we discuss now</a:t>
-            </a:r>
-          </a:p>
-          <a:p>
-            <a:pPr lvl="0"/>
-            <a:r>
-              <a:rPr/>
-              <a:t>Ridge, Lasso, and the choice of the penalty strength</a:t>
-            </a:r>
-          </a:p>
-        </p:txBody>
-      </p:sp>
-    </p:spTree>
-  </p:cSld>
-</p:sld>
-</file>
-
-<file path=ppt/slides/slide20.xml><?xml version="1.0" encoding="utf-8"?>
+<file path=ppt/slides/slide21.xml><?xml version="1.0" encoding="utf-8"?>
 <p:sld xmlns:a="http://schemas.openxmlformats.org/drawingml/2006/main" xmlns:r="http://schemas.openxmlformats.org/officeDocument/2006/relationships" xmlns:p="http://schemas.openxmlformats.org/presentationml/2006/main">
   <p:cSld>
     <p:spTree>
@@ -13578,7 +13953,7 @@
 </p:sld>
 </file>
 
-<file path=ppt/slides/slide21.xml><?xml version="1.0" encoding="utf-8"?>
+<file path=ppt/slides/slide22.xml><?xml version="1.0" encoding="utf-8"?>
 <p:sld xmlns:a="http://schemas.openxmlformats.org/drawingml/2006/main" xmlns:r="http://schemas.openxmlformats.org/officeDocument/2006/relationships" xmlns:p="http://schemas.openxmlformats.org/presentationml/2006/main">
   <p:cSld>
     <p:spTree>
@@ -13976,7 +14351,7 @@
 </p:sld>
 </file>
 
-<file path=ppt/slides/slide22.xml><?xml version="1.0" encoding="utf-8"?>
+<file path=ppt/slides/slide23.xml><?xml version="1.0" encoding="utf-8"?>
 <p:sld xmlns:a="http://schemas.openxmlformats.org/drawingml/2006/main" xmlns:r="http://schemas.openxmlformats.org/officeDocument/2006/relationships" xmlns:p="http://schemas.openxmlformats.org/presentationml/2006/main">
   <p:cSld>
     <p:spTree>
@@ -14058,7 +14433,7 @@
 </p:sld>
 </file>
 
-<file path=ppt/slides/slide23.xml><?xml version="1.0" encoding="utf-8"?>
+<file path=ppt/slides/slide24.xml><?xml version="1.0" encoding="utf-8"?>
 <p:sld xmlns:a="http://schemas.openxmlformats.org/drawingml/2006/main" xmlns:r="http://schemas.openxmlformats.org/officeDocument/2006/relationships" xmlns:p="http://schemas.openxmlformats.org/presentationml/2006/main">
   <p:cSld>
     <p:spTree>
@@ -14140,7 +14515,7 @@
 </p:sld>
 </file>
 
-<file path=ppt/slides/slide24.xml><?xml version="1.0" encoding="utf-8"?>
+<file path=ppt/slides/slide25.xml><?xml version="1.0" encoding="utf-8"?>
 <p:sld xmlns:a="http://schemas.openxmlformats.org/drawingml/2006/main" xmlns:r="http://schemas.openxmlformats.org/officeDocument/2006/relationships" xmlns:p="http://schemas.openxmlformats.org/presentationml/2006/main">
   <p:cSld>
     <p:spTree>
@@ -14222,7 +14597,7 @@
 </p:sld>
 </file>
 
-<file path=ppt/slides/slide25.xml><?xml version="1.0" encoding="utf-8"?>
+<file path=ppt/slides/slide26.xml><?xml version="1.0" encoding="utf-8"?>
 <p:sld xmlns:a="http://schemas.openxmlformats.org/drawingml/2006/main" xmlns:r="http://schemas.openxmlformats.org/officeDocument/2006/relationships" xmlns:p="http://schemas.openxmlformats.org/presentationml/2006/main">
   <p:cSld>
     <p:spTree>
@@ -14304,7 +14679,7 @@
 </p:sld>
 </file>
 
-<file path=ppt/slides/slide26.xml><?xml version="1.0" encoding="utf-8"?>
+<file path=ppt/slides/slide27.xml><?xml version="1.0" encoding="utf-8"?>
 <p:sld xmlns:a="http://schemas.openxmlformats.org/drawingml/2006/main" xmlns:r="http://schemas.openxmlformats.org/officeDocument/2006/relationships" xmlns:p="http://schemas.openxmlformats.org/presentationml/2006/main">
   <p:cSld>
     <p:spTree>
@@ -14392,6 +14767,13 @@
               <a:t>Squared error through a sigmoid is not</a:t>
             </a:r>
           </a:p>
+          <a:p>
+            <a:pPr lvl="0"/>
+            <a:r>
+              <a:rPr/>
+              <a:t>Why not, from slide 26: its slope falls from 0, then climbs back to 0; a convex curve’s slope only grows</a:t>
+            </a:r>
+          </a:p>
         </p:txBody>
       </p:sp>
     </p:spTree>
@@ -14399,7 +14781,89 @@
 </p:sld>
 </file>
 
-<file path=ppt/slides/slide27.xml><?xml version="1.0" encoding="utf-8"?>
+<file path=ppt/slides/slide28.xml><?xml version="1.0" encoding="utf-8"?>
+<p:sld xmlns:a="http://schemas.openxmlformats.org/drawingml/2006/main" xmlns:r="http://schemas.openxmlformats.org/officeDocument/2006/relationships" xmlns:p="http://schemas.openxmlformats.org/presentationml/2006/main">
+  <p:cSld>
+    <p:spTree>
+      <p:nvGrpSpPr>
+        <p:cNvPr id="1" name=""/>
+        <p:cNvGrpSpPr/>
+        <p:nvPr/>
+      </p:nvGrpSpPr>
+      <p:grpSpPr>
+        <a:xfrm>
+          <a:off x="0" y="0"/>
+          <a:ext cx="0" cy="0"/>
+          <a:chOff x="0" y="0"/>
+          <a:chExt cx="0" cy="0"/>
+        </a:xfrm>
+      </p:grpSpPr>
+      <p:sp>
+        <p:nvSpPr>
+          <p:cNvPr id="2" name="Title 1"/>
+          <p:cNvSpPr>
+            <a:spLocks noGrp="1"/>
+          </p:cNvSpPr>
+          <p:nvPr>
+            <p:ph type="title"/>
+          </p:nvPr>
+        </p:nvSpPr>
+        <p:spPr>
+          <a:xfrm>
+            <a:off x="457200" y="205979"/>
+            <a:ext cx="8229600" cy="857250"/>
+          </a:xfrm>
+        </p:spPr>
+        <p:txBody>
+          <a:bodyPr/>
+          <a:lstStyle/>
+          <a:p>
+            <a:pPr lvl="0" indent="0" marL="0">
+              <a:buNone/>
+            </a:pPr>
+            <a:r>
+              <a:rPr/>
+              <a:t>The decision boundary of a two-counter model</a:t>
+            </a:r>
+          </a:p>
+        </p:txBody>
+      </p:sp>
+      <p:pic>
+        <p:nvPicPr>
+          <p:cNvPr descr="decision_boundary.png" id="0" name="Picture 1"/>
+          <p:cNvPicPr>
+            <a:picLocks noGrp="1" noChangeAspect="1"/>
+          </p:cNvPicPr>
+          <p:nvPr/>
+        </p:nvPicPr>
+        <p:blipFill>
+          <a:blip r:embed="rId3"/>
+          <a:stretch>
+            <a:fillRect/>
+          </a:stretch>
+        </p:blipFill>
+        <p:spPr bwMode="auto">
+          <a:xfrm>
+            <a:off x="1841066" y="1166099"/>
+            <a:ext cx="5461867" cy="3360181"/>
+          </a:xfrm>
+          <a:prstGeom prst="rect">
+            <a:avLst/>
+          </a:prstGeom>
+          <a:noFill/>
+          <a:ln w="9525">
+            <a:noFill/>
+            <a:headEnd/>
+            <a:tailEnd/>
+          </a:ln>
+        </p:spPr>
+      </p:pic>
+    </p:spTree>
+  </p:cSld>
+</p:sld>
+</file>
+
+<file path=ppt/slides/slide29.xml><?xml version="1.0" encoding="utf-8"?>
 <p:sld xmlns:a="http://schemas.openxmlformats.org/drawingml/2006/main" xmlns:r="http://schemas.openxmlformats.org/officeDocument/2006/relationships" xmlns:p="http://schemas.openxmlformats.org/presentationml/2006/main">
   <p:cSld>
     <p:spTree>
@@ -14553,7 +15017,7 @@
                       </a:pPr>
                       <a:r>
                         <a:rPr/>
-                        <a:t>odds, and why not squared error, 8-26</a:t>
+                        <a:t>odds, and why not squared error, 8-27</a:t>
                       </a:r>
                     </a:p>
                   </a:txBody>
@@ -14585,7 +15049,7 @@
                       </a:pPr>
                       <a:r>
                         <a:rPr/>
-                        <a:t>gradient descent, 24</a:t>
+                        <a:t>gradient descent, 25</a:t>
                       </a:r>
                     </a:p>
                   </a:txBody>
@@ -14671,7 +15135,7 @@
                       </a:pPr>
                       <a:r>
                         <a:rPr/>
-                        <a:t>the truth, recovered, 14-15</a:t>
+                        <a:t>the truth, recovered, 15-16</a:t>
                       </a:r>
                     </a:p>
                   </a:txBody>
@@ -14727,168 +15191,6 @@
 </p:sld>
 </file>
 
-<file path=ppt/slides/slide28.xml><?xml version="1.0" encoding="utf-8"?>
-<p:sld xmlns:a="http://schemas.openxmlformats.org/drawingml/2006/main" xmlns:r="http://schemas.openxmlformats.org/officeDocument/2006/relationships" xmlns:p="http://schemas.openxmlformats.org/presentationml/2006/main">
-  <p:cSld>
-    <p:spTree>
-      <p:nvGrpSpPr>
-        <p:cNvPr id="1" name=""/>
-        <p:cNvGrpSpPr/>
-        <p:nvPr/>
-      </p:nvGrpSpPr>
-      <p:grpSpPr>
-        <a:xfrm>
-          <a:off x="0" y="0"/>
-          <a:ext cx="0" cy="0"/>
-          <a:chOff x="0" y="0"/>
-          <a:chExt cx="0" cy="0"/>
-        </a:xfrm>
-      </p:grpSpPr>
-      <p:sp>
-        <p:nvSpPr>
-          <p:cNvPr id="2" name="Title 1"/>
-          <p:cNvSpPr>
-            <a:spLocks noGrp="1"/>
-          </p:cNvSpPr>
-          <p:nvPr>
-            <p:ph type="title"/>
-          </p:nvPr>
-        </p:nvSpPr>
-        <p:spPr>
-          <a:xfrm>
-            <a:off x="457200" y="205979"/>
-            <a:ext cx="8229600" cy="857250"/>
-          </a:xfrm>
-        </p:spPr>
-        <p:txBody>
-          <a:bodyPr/>
-          <a:lstStyle/>
-          <a:p>
-            <a:pPr lvl="0" indent="0" marL="0">
-              <a:buNone/>
-            </a:pPr>
-            <a:r>
-              <a:rPr/>
-              <a:t>The decision boundary</a:t>
-            </a:r>
-          </a:p>
-        </p:txBody>
-      </p:sp>
-      <p:pic>
-        <p:nvPicPr>
-          <p:cNvPr descr="decision_boundary.png" id="0" name="Picture 1"/>
-          <p:cNvPicPr>
-            <a:picLocks noGrp="1" noChangeAspect="1"/>
-          </p:cNvPicPr>
-          <p:nvPr/>
-        </p:nvPicPr>
-        <p:blipFill>
-          <a:blip r:embed="rId3"/>
-          <a:stretch>
-            <a:fillRect/>
-          </a:stretch>
-        </p:blipFill>
-        <p:spPr bwMode="auto">
-          <a:xfrm>
-            <a:off x="1834774" y="1166099"/>
-            <a:ext cx="5474452" cy="3360181"/>
-          </a:xfrm>
-          <a:prstGeom prst="rect">
-            <a:avLst/>
-          </a:prstGeom>
-          <a:noFill/>
-          <a:ln w="9525">
-            <a:noFill/>
-            <a:headEnd/>
-            <a:tailEnd/>
-          </a:ln>
-        </p:spPr>
-      </p:pic>
-    </p:spTree>
-  </p:cSld>
-</p:sld>
-</file>
-
-<file path=ppt/slides/slide29.xml><?xml version="1.0" encoding="utf-8"?>
-<p:sld xmlns:a="http://schemas.openxmlformats.org/drawingml/2006/main" xmlns:r="http://schemas.openxmlformats.org/officeDocument/2006/relationships" xmlns:p="http://schemas.openxmlformats.org/presentationml/2006/main">
-  <p:cSld>
-    <p:spTree>
-      <p:nvGrpSpPr>
-        <p:cNvPr id="1" name=""/>
-        <p:cNvGrpSpPr/>
-        <p:nvPr/>
-      </p:nvGrpSpPr>
-      <p:grpSpPr>
-        <a:xfrm>
-          <a:off x="0" y="0"/>
-          <a:ext cx="0" cy="0"/>
-          <a:chOff x="0" y="0"/>
-          <a:chExt cx="0" cy="0"/>
-        </a:xfrm>
-      </p:grpSpPr>
-      <p:sp>
-        <p:nvSpPr>
-          <p:cNvPr id="2" name="Title 1"/>
-          <p:cNvSpPr>
-            <a:spLocks noGrp="1"/>
-          </p:cNvSpPr>
-          <p:nvPr>
-            <p:ph type="title"/>
-          </p:nvPr>
-        </p:nvSpPr>
-        <p:spPr>
-          <a:xfrm>
-            <a:off x="457200" y="205979"/>
-            <a:ext cx="8229600" cy="857250"/>
-          </a:xfrm>
-        </p:spPr>
-        <p:txBody>
-          <a:bodyPr/>
-          <a:lstStyle/>
-          <a:p>
-            <a:pPr lvl="0" indent="0" marL="0">
-              <a:buNone/>
-            </a:pPr>
-            <a:r>
-              <a:rPr/>
-              <a:t>Break</a:t>
-            </a:r>
-          </a:p>
-        </p:txBody>
-      </p:sp>
-      <p:sp>
-        <p:nvSpPr>
-          <p:cNvPr id="3" name="Content Placeholder 2"/>
-          <p:cNvSpPr>
-            <a:spLocks noGrp="1"/>
-          </p:cNvSpPr>
-          <p:nvPr>
-            <p:ph idx="1"/>
-          </p:nvPr>
-        </p:nvSpPr>
-        <p:spPr>
-          <a:xfrm>
-            <a:off x="457200" y="1200151"/>
-            <a:ext cx="8229600" cy="3394472"/>
-          </a:xfrm>
-        </p:spPr>
-        <p:txBody>
-          <a:bodyPr/>
-          <a:lstStyle/>
-          <a:p>
-            <a:pPr lvl="0"/>
-            <a:r>
-              <a:rPr/>
-              <a:t>Ten minutes</a:t>
-            </a:r>
-          </a:p>
-        </p:txBody>
-      </p:sp>
-    </p:spTree>
-  </p:cSld>
-</p:sld>
-</file>
-
 <file path=ppt/slides/slide3.xml><?xml version="1.0" encoding="utf-8"?>
 <p:sld xmlns:a="http://schemas.openxmlformats.org/drawingml/2006/main" xmlns:r="http://schemas.openxmlformats.org/officeDocument/2006/relationships" xmlns:p="http://schemas.openxmlformats.org/presentationml/2006/main">
   <p:cSld>
@@ -14998,6 +15300,86 @@
 </file>
 
 <file path=ppt/slides/slide30.xml><?xml version="1.0" encoding="utf-8"?>
+<p:sld xmlns:a="http://schemas.openxmlformats.org/drawingml/2006/main" xmlns:r="http://schemas.openxmlformats.org/officeDocument/2006/relationships" xmlns:p="http://schemas.openxmlformats.org/presentationml/2006/main">
+  <p:cSld>
+    <p:spTree>
+      <p:nvGrpSpPr>
+        <p:cNvPr id="1" name=""/>
+        <p:cNvGrpSpPr/>
+        <p:nvPr/>
+      </p:nvGrpSpPr>
+      <p:grpSpPr>
+        <a:xfrm>
+          <a:off x="0" y="0"/>
+          <a:ext cx="0" cy="0"/>
+          <a:chOff x="0" y="0"/>
+          <a:chExt cx="0" cy="0"/>
+        </a:xfrm>
+      </p:grpSpPr>
+      <p:sp>
+        <p:nvSpPr>
+          <p:cNvPr id="2" name="Title 1"/>
+          <p:cNvSpPr>
+            <a:spLocks noGrp="1"/>
+          </p:cNvSpPr>
+          <p:nvPr>
+            <p:ph type="title"/>
+          </p:nvPr>
+        </p:nvSpPr>
+        <p:spPr>
+          <a:xfrm>
+            <a:off x="457200" y="205979"/>
+            <a:ext cx="8229600" cy="857250"/>
+          </a:xfrm>
+        </p:spPr>
+        <p:txBody>
+          <a:bodyPr/>
+          <a:lstStyle/>
+          <a:p>
+            <a:pPr lvl="0" indent="0" marL="0">
+              <a:buNone/>
+            </a:pPr>
+            <a:r>
+              <a:rPr/>
+              <a:t>Break</a:t>
+            </a:r>
+          </a:p>
+        </p:txBody>
+      </p:sp>
+      <p:sp>
+        <p:nvSpPr>
+          <p:cNvPr id="3" name="Content Placeholder 2"/>
+          <p:cNvSpPr>
+            <a:spLocks noGrp="1"/>
+          </p:cNvSpPr>
+          <p:nvPr>
+            <p:ph idx="1"/>
+          </p:nvPr>
+        </p:nvSpPr>
+        <p:spPr>
+          <a:xfrm>
+            <a:off x="457200" y="1200151"/>
+            <a:ext cx="8229600" cy="3394472"/>
+          </a:xfrm>
+        </p:spPr>
+        <p:txBody>
+          <a:bodyPr/>
+          <a:lstStyle/>
+          <a:p>
+            <a:pPr lvl="0"/>
+            <a:r>
+              <a:rPr/>
+              <a:t>Ten minutes</a:t>
+            </a:r>
+          </a:p>
+        </p:txBody>
+      </p:sp>
+    </p:spTree>
+  </p:cSld>
+</p:sld>
+</file>
+
+<file path=ppt/slides/slide31.xml><?xml version="1.0" encoding="utf-8"?>
 <p:sld xmlns:a="http://schemas.openxmlformats.org/drawingml/2006/main" xmlns:r="http://schemas.openxmlformats.org/officeDocument/2006/relationships" xmlns:p="http://schemas.openxmlformats.org/presentationml/2006/main">
   <p:cSld>
     <p:spTree>
@@ -15226,7 +15608,7 @@
 </p:sld>
 </file>
 
-<file path=ppt/slides/slide31.xml><?xml version="1.0" encoding="utf-8"?>
+<file path=ppt/slides/slide32.xml><?xml version="1.0" encoding="utf-8"?>
 <p:sld xmlns:a="http://schemas.openxmlformats.org/drawingml/2006/main" xmlns:r="http://schemas.openxmlformats.org/officeDocument/2006/relationships" xmlns:p="http://schemas.openxmlformats.org/presentationml/2006/main">
   <p:cSld>
     <p:spTree>
@@ -15311,7 +15693,7 @@
             </a:r>
             <a:r>
               <a:rPr/>
-              <a:t> problem that is exactly what you want</a:t>
+              <a:t> problem whose two errors cost the same, that is exactly what you want</a:t>
             </a:r>
           </a:p>
           <a:p>
@@ -15336,7 +15718,7 @@
 </p:sld>
 </file>
 
-<file path=ppt/slides/slide32.xml><?xml version="1.0" encoding="utf-8"?>
+<file path=ppt/slides/slide33.xml><?xml version="1.0" encoding="utf-8"?>
 <p:sld xmlns:a="http://schemas.openxmlformats.org/drawingml/2006/main" xmlns:r="http://schemas.openxmlformats.org/officeDocument/2006/relationships" xmlns:p="http://schemas.openxmlformats.org/presentationml/2006/main">
   <p:cSld>
     <p:spTree>
@@ -15418,7 +15800,7 @@
 </p:sld>
 </file>
 
-<file path=ppt/slides/slide33.xml><?xml version="1.0" encoding="utf-8"?>
+<file path=ppt/slides/slide34.xml><?xml version="1.0" encoding="utf-8"?>
 <p:sld xmlns:a="http://schemas.openxmlformats.org/drawingml/2006/main" xmlns:r="http://schemas.openxmlformats.org/officeDocument/2006/relationships" xmlns:p="http://schemas.openxmlformats.org/presentationml/2006/main">
   <p:cSld>
     <p:spTree>
@@ -15513,6 +15895,13 @@
               <a:t>Both costs are assumptions supplied from outside the data, not measured</a:t>
             </a:r>
           </a:p>
+          <a:p>
+            <a:pPr lvl="0"/>
+            <a:r>
+              <a:rPr/>
+              <a:t>A correct decision counts as €0: each cost is what the error adds over the right call</a:t>
+            </a:r>
+          </a:p>
         </p:txBody>
       </p:sp>
     </p:spTree>
@@ -15520,7 +15909,7 @@
 </p:sld>
 </file>
 
-<file path=ppt/slides/slide34.xml><?xml version="1.0" encoding="utf-8"?>
+<file path=ppt/slides/slide35.xml><?xml version="1.0" encoding="utf-8"?>
 <p:sld xmlns:a="http://schemas.openxmlformats.org/drawingml/2006/main" xmlns:r="http://schemas.openxmlformats.org/officeDocument/2006/relationships" xmlns:p="http://schemas.openxmlformats.org/presentationml/2006/main">
   <p:cSld>
     <p:spTree>
@@ -15602,7 +15991,7 @@
 </p:sld>
 </file>
 
-<file path=ppt/slides/slide35.xml><?xml version="1.0" encoding="utf-8"?>
+<file path=ppt/slides/slide36.xml><?xml version="1.0" encoding="utf-8"?>
 <p:sld xmlns:a="http://schemas.openxmlformats.org/drawingml/2006/main" xmlns:r="http://schemas.openxmlformats.org/officeDocument/2006/relationships" xmlns:p="http://schemas.openxmlformats.org/presentationml/2006/main">
   <p:cSld>
     <p:spTree>
@@ -15709,7 +16098,7 @@
             <a:pPr lvl="0"/>
             <a:r>
               <a:rPr/>
-              <a:t>Specificity = TN ÷ (TN + FP) = 1,911 ÷ (1,911 + 13) = 0.993</a:t>
+              <a:t>Specificity = TN ÷ (TN + FP) = 1,911 ÷ 1,924 = 0.993; 1 − 0.993 is the false positive rate (FPR)</a:t>
             </a:r>
           </a:p>
           <a:p>
@@ -15742,7 +16131,7 @@
 </p:sld>
 </file>
 
-<file path=ppt/slides/slide36.xml><?xml version="1.0" encoding="utf-8"?>
+<file path=ppt/slides/slide37.xml><?xml version="1.0" encoding="utf-8"?>
 <p:sld xmlns:a="http://schemas.openxmlformats.org/drawingml/2006/main" xmlns:r="http://schemas.openxmlformats.org/officeDocument/2006/relationships" xmlns:p="http://schemas.openxmlformats.org/presentationml/2006/main">
   <p:cSld>
     <p:spTree>
@@ -15824,7 +16213,7 @@
 </p:sld>
 </file>
 
-<file path=ppt/slides/slide37.xml><?xml version="1.0" encoding="utf-8"?>
+<file path=ppt/slides/slide38.xml><?xml version="1.0" encoding="utf-8"?>
 <p:sld xmlns:a="http://schemas.openxmlformats.org/drawingml/2006/main" xmlns:r="http://schemas.openxmlformats.org/officeDocument/2006/relationships" xmlns:p="http://schemas.openxmlformats.org/presentationml/2006/main">
   <p:cSld>
     <p:spTree>
@@ -15963,7 +16352,7 @@
 </p:sld>
 </file>
 
-<file path=ppt/slides/slide38.xml><?xml version="1.0" encoding="utf-8"?>
+<file path=ppt/slides/slide39.xml><?xml version="1.0" encoding="utf-8"?>
 <p:sld xmlns:a="http://schemas.openxmlformats.org/drawingml/2006/main" xmlns:r="http://schemas.openxmlformats.org/officeDocument/2006/relationships" xmlns:p="http://schemas.openxmlformats.org/presentationml/2006/main">
   <p:cSld>
     <p:spTree>
@@ -16079,7 +16468,7 @@
                       </a:pPr>
                       <a:r>
                         <a:rPr/>
-                        <a:t>the number that should worry you, 30</a:t>
+                        <a:t>the number that should worry you, 31</a:t>
                       </a:r>
                     </a:p>
                   </a:txBody>
@@ -16117,7 +16506,7 @@
                       </a:pPr>
                       <a:r>
                         <a:rPr/>
-                        <a:t>the confusion matrix, 32</a:t>
+                        <a:t>the confusion matrix, 33</a:t>
                       </a:r>
                     </a:p>
                   </a:txBody>
@@ -16169,7 +16558,7 @@
                       </a:pPr>
                       <a:r>
                         <a:rPr/>
-                        <a:t>precision and recall, 34-37</a:t>
+                        <a:t>precision and recall, 35-38</a:t>
                       </a:r>
                     </a:p>
                   </a:txBody>
@@ -16233,7 +16622,7 @@
                       </a:pPr>
                       <a:r>
                         <a:rPr/>
-                        <a:t>the threshold sweep, 39-40</a:t>
+                        <a:t>the threshold sweep, 40-41</a:t>
                       </a:r>
                     </a:p>
                   </a:txBody>
@@ -16271,7 +16660,7 @@
                       </a:pPr>
                       <a:r>
                         <a:rPr/>
-                        <a:t>the precision-recall curve, 41</a:t>
+                        <a:t>the precision-recall curve, 42</a:t>
                       </a:r>
                     </a:p>
                   </a:txBody>
@@ -16317,7 +16706,116 @@
 </p:sld>
 </file>
 
-<file path=ppt/slides/slide39.xml><?xml version="1.0" encoding="utf-8"?>
+<file path=ppt/slides/slide4.xml><?xml version="1.0" encoding="utf-8"?>
+<p:sld xmlns:a="http://schemas.openxmlformats.org/drawingml/2006/main" xmlns:r="http://schemas.openxmlformats.org/officeDocument/2006/relationships" xmlns:p="http://schemas.openxmlformats.org/presentationml/2006/main">
+  <p:cSld>
+    <p:spTree>
+      <p:nvGrpSpPr>
+        <p:cNvPr id="1" name=""/>
+        <p:cNvGrpSpPr/>
+        <p:nvPr/>
+      </p:nvGrpSpPr>
+      <p:grpSpPr>
+        <a:xfrm>
+          <a:off x="0" y="0"/>
+          <a:ext cx="0" cy="0"/>
+          <a:chOff x="0" y="0"/>
+          <a:chExt cx="0" cy="0"/>
+        </a:xfrm>
+      </p:grpSpPr>
+      <p:sp>
+        <p:nvSpPr>
+          <p:cNvPr id="2" name="Title 1"/>
+          <p:cNvSpPr>
+            <a:spLocks noGrp="1"/>
+          </p:cNvSpPr>
+          <p:nvPr>
+            <p:ph type="title"/>
+          </p:nvPr>
+        </p:nvSpPr>
+        <p:spPr>
+          <a:xfrm>
+            <a:off x="457200" y="205979"/>
+            <a:ext cx="8229600" cy="857250"/>
+          </a:xfrm>
+        </p:spPr>
+        <p:txBody>
+          <a:bodyPr/>
+          <a:lstStyle/>
+          <a:p>
+            <a:pPr lvl="0" indent="0" marL="0">
+              <a:buNone/>
+            </a:pPr>
+            <a:r>
+              <a:rPr/>
+              <a:t>The question has changed</a:t>
+            </a:r>
+          </a:p>
+        </p:txBody>
+      </p:sp>
+      <p:sp>
+        <p:nvSpPr>
+          <p:cNvPr id="3" name="Content Placeholder 2"/>
+          <p:cNvSpPr>
+            <a:spLocks noGrp="1"/>
+          </p:cNvSpPr>
+          <p:nvPr>
+            <p:ph idx="1"/>
+          </p:nvPr>
+        </p:nvSpPr>
+        <p:spPr>
+          <a:xfrm>
+            <a:off x="457200" y="1200151"/>
+            <a:ext cx="8229600" cy="3394472"/>
+          </a:xfrm>
+        </p:spPr>
+        <p:txBody>
+          <a:bodyPr/>
+          <a:lstStyle/>
+          <a:p>
+            <a:pPr lvl="0"/>
+            <a:r>
+              <a:rPr/>
+              <a:t>Lesson 3: given a house, </a:t>
+            </a:r>
+            <a:r>
+              <a:rPr b="1"/>
+              <a:t>how many euros?</a:t>
+            </a:r>
+          </a:p>
+          <a:p>
+            <a:pPr lvl="0"/>
+            <a:r>
+              <a:rPr/>
+              <a:t>Lesson 4: given a disk drive, </a:t>
+            </a:r>
+            <a:r>
+              <a:rPr b="1"/>
+              <a:t>will it fail?</a:t>
+            </a:r>
+          </a:p>
+          <a:p>
+            <a:pPr lvl="0"/>
+            <a:r>
+              <a:rPr/>
+              <a:t>Answer with a probability: 0 ≤ P(y = 1 | x) ≤ 1</a:t>
+            </a:r>
+          </a:p>
+          <a:p>
+            <a:pPr lvl="0"/>
+            <a:r>
+              <a:rPr/>
+              <a:t>y = 1 if the drive failed, y = 0 if not; x holds its six counters</a:t>
+            </a:r>
+          </a:p>
+        </p:txBody>
+      </p:sp>
+    </p:spTree>
+  </p:cSld>
+</p:sld>
+</file>
+
+<file path=ppt/slides/slide40.xml><?xml version="1.0" encoding="utf-8"?>
 <p:sld xmlns:a="http://schemas.openxmlformats.org/drawingml/2006/main" xmlns:r="http://schemas.openxmlformats.org/officeDocument/2006/relationships" xmlns:p="http://schemas.openxmlformats.org/presentationml/2006/main">
   <p:cSld>
     <p:spTree>
@@ -16399,116 +16897,7 @@
 </p:sld>
 </file>
 
-<file path=ppt/slides/slide4.xml><?xml version="1.0" encoding="utf-8"?>
-<p:sld xmlns:a="http://schemas.openxmlformats.org/drawingml/2006/main" xmlns:r="http://schemas.openxmlformats.org/officeDocument/2006/relationships" xmlns:p="http://schemas.openxmlformats.org/presentationml/2006/main">
-  <p:cSld>
-    <p:spTree>
-      <p:nvGrpSpPr>
-        <p:cNvPr id="1" name=""/>
-        <p:cNvGrpSpPr/>
-        <p:nvPr/>
-      </p:nvGrpSpPr>
-      <p:grpSpPr>
-        <a:xfrm>
-          <a:off x="0" y="0"/>
-          <a:ext cx="0" cy="0"/>
-          <a:chOff x="0" y="0"/>
-          <a:chExt cx="0" cy="0"/>
-        </a:xfrm>
-      </p:grpSpPr>
-      <p:sp>
-        <p:nvSpPr>
-          <p:cNvPr id="2" name="Title 1"/>
-          <p:cNvSpPr>
-            <a:spLocks noGrp="1"/>
-          </p:cNvSpPr>
-          <p:nvPr>
-            <p:ph type="title"/>
-          </p:nvPr>
-        </p:nvSpPr>
-        <p:spPr>
-          <a:xfrm>
-            <a:off x="457200" y="205979"/>
-            <a:ext cx="8229600" cy="857250"/>
-          </a:xfrm>
-        </p:spPr>
-        <p:txBody>
-          <a:bodyPr/>
-          <a:lstStyle/>
-          <a:p>
-            <a:pPr lvl="0" indent="0" marL="0">
-              <a:buNone/>
-            </a:pPr>
-            <a:r>
-              <a:rPr/>
-              <a:t>The question has changed</a:t>
-            </a:r>
-          </a:p>
-        </p:txBody>
-      </p:sp>
-      <p:sp>
-        <p:nvSpPr>
-          <p:cNvPr id="3" name="Content Placeholder 2"/>
-          <p:cNvSpPr>
-            <a:spLocks noGrp="1"/>
-          </p:cNvSpPr>
-          <p:nvPr>
-            <p:ph idx="1"/>
-          </p:nvPr>
-        </p:nvSpPr>
-        <p:spPr>
-          <a:xfrm>
-            <a:off x="457200" y="1200151"/>
-            <a:ext cx="8229600" cy="3394472"/>
-          </a:xfrm>
-        </p:spPr>
-        <p:txBody>
-          <a:bodyPr/>
-          <a:lstStyle/>
-          <a:p>
-            <a:pPr lvl="0"/>
-            <a:r>
-              <a:rPr/>
-              <a:t>Lesson 3: given a house, </a:t>
-            </a:r>
-            <a:r>
-              <a:rPr b="1"/>
-              <a:t>how many euros?</a:t>
-            </a:r>
-          </a:p>
-          <a:p>
-            <a:pPr lvl="0"/>
-            <a:r>
-              <a:rPr/>
-              <a:t>Lesson 4: given a disk drive, </a:t>
-            </a:r>
-            <a:r>
-              <a:rPr b="1"/>
-              <a:t>will it fail?</a:t>
-            </a:r>
-          </a:p>
-          <a:p>
-            <a:pPr lvl="0"/>
-            <a:r>
-              <a:rPr/>
-              <a:t>Answer with a probability: 0 ≤ P(y = 1 | x) ≤ 1</a:t>
-            </a:r>
-          </a:p>
-          <a:p>
-            <a:pPr lvl="0"/>
-            <a:r>
-              <a:rPr/>
-              <a:t>y = 1 if the drive failed, y = 0 if not; x holds its six counters</a:t>
-            </a:r>
-          </a:p>
-        </p:txBody>
-      </p:sp>
-    </p:spTree>
-  </p:cSld>
-</p:sld>
-</file>
-
-<file path=ppt/slides/slide40.xml><?xml version="1.0" encoding="utf-8"?>
+<file path=ppt/slides/slide41.xml><?xml version="1.0" encoding="utf-8"?>
 <p:sld xmlns:a="http://schemas.openxmlformats.org/drawingml/2006/main" xmlns:r="http://schemas.openxmlformats.org/officeDocument/2006/relationships" xmlns:p="http://schemas.openxmlformats.org/presentationml/2006/main">
   <p:cSld>
     <p:spTree>
@@ -16590,7 +16979,7 @@
 </p:sld>
 </file>
 
-<file path=ppt/slides/slide41.xml><?xml version="1.0" encoding="utf-8"?>
+<file path=ppt/slides/slide42.xml><?xml version="1.0" encoding="utf-8"?>
 <p:sld xmlns:a="http://schemas.openxmlformats.org/drawingml/2006/main" xmlns:r="http://schemas.openxmlformats.org/officeDocument/2006/relationships" xmlns:p="http://schemas.openxmlformats.org/presentationml/2006/main">
   <p:cSld>
     <p:spTree>
@@ -16672,7 +17061,7 @@
 </p:sld>
 </file>
 
-<file path=ppt/slides/slide42.xml><?xml version="1.0" encoding="utf-8"?>
+<file path=ppt/slides/slide43.xml><?xml version="1.0" encoding="utf-8"?>
 <p:sld xmlns:a="http://schemas.openxmlformats.org/drawingml/2006/main" xmlns:r="http://schemas.openxmlformats.org/officeDocument/2006/relationships" xmlns:p="http://schemas.openxmlformats.org/presentationml/2006/main">
   <p:cSld>
     <p:spTree>
@@ -16767,7 +17156,7 @@
 </p:sld>
 </file>
 
-<file path=ppt/slides/slide43.xml><?xml version="1.0" encoding="utf-8"?>
+<file path=ppt/slides/slide44.xml><?xml version="1.0" encoding="utf-8"?>
 <p:sld xmlns:a="http://schemas.openxmlformats.org/drawingml/2006/main" xmlns:r="http://schemas.openxmlformats.org/officeDocument/2006/relationships" xmlns:p="http://schemas.openxmlformats.org/presentationml/2006/main">
   <p:cSld>
     <p:spTree>
@@ -16849,7 +17238,7 @@
 </p:sld>
 </file>
 
-<file path=ppt/slides/slide44.xml><?xml version="1.0" encoding="utf-8"?>
+<file path=ppt/slides/slide45.xml><?xml version="1.0" encoding="utf-8"?>
 <p:sld xmlns:a="http://schemas.openxmlformats.org/drawingml/2006/main" xmlns:r="http://schemas.openxmlformats.org/officeDocument/2006/relationships" xmlns:p="http://schemas.openxmlformats.org/presentationml/2006/main">
   <p:cSld>
     <p:spTree>
@@ -16966,7 +17355,7 @@
 </p:sld>
 </file>
 
-<file path=ppt/slides/slide45.xml><?xml version="1.0" encoding="utf-8"?>
+<file path=ppt/slides/slide46.xml><?xml version="1.0" encoding="utf-8"?>
 <p:sld xmlns:a="http://schemas.openxmlformats.org/drawingml/2006/main" xmlns:r="http://schemas.openxmlformats.org/officeDocument/2006/relationships" xmlns:p="http://schemas.openxmlformats.org/presentationml/2006/main">
   <p:cSld>
     <p:spTree>
@@ -17048,7 +17437,7 @@
 </p:sld>
 </file>
 
-<file path=ppt/slides/slide46.xml><?xml version="1.0" encoding="utf-8"?>
+<file path=ppt/slides/slide47.xml><?xml version="1.0" encoding="utf-8"?>
 <p:sld xmlns:a="http://schemas.openxmlformats.org/drawingml/2006/main" xmlns:r="http://schemas.openxmlformats.org/officeDocument/2006/relationships" xmlns:p="http://schemas.openxmlformats.org/presentationml/2006/main">
   <p:cSld>
     <p:spTree>
@@ -17143,7 +17532,7 @@
 </p:sld>
 </file>
 
-<file path=ppt/slides/slide47.xml><?xml version="1.0" encoding="utf-8"?>
+<file path=ppt/slides/slide48.xml><?xml version="1.0" encoding="utf-8"?>
 <p:sld xmlns:a="http://schemas.openxmlformats.org/drawingml/2006/main" xmlns:r="http://schemas.openxmlformats.org/officeDocument/2006/relationships" xmlns:p="http://schemas.openxmlformats.org/presentationml/2006/main">
   <p:cSld>
     <p:spTree>
@@ -17225,109 +17614,6 @@
 </p:sld>
 </file>
 
-<file path=ppt/slides/slide48.xml><?xml version="1.0" encoding="utf-8"?>
-<p:sld xmlns:a="http://schemas.openxmlformats.org/drawingml/2006/main" xmlns:r="http://schemas.openxmlformats.org/officeDocument/2006/relationships" xmlns:p="http://schemas.openxmlformats.org/presentationml/2006/main">
-  <p:cSld>
-    <p:spTree>
-      <p:nvGrpSpPr>
-        <p:cNvPr id="1" name=""/>
-        <p:cNvGrpSpPr/>
-        <p:nvPr/>
-      </p:nvGrpSpPr>
-      <p:grpSpPr>
-        <a:xfrm>
-          <a:off x="0" y="0"/>
-          <a:ext cx="0" cy="0"/>
-          <a:chOff x="0" y="0"/>
-          <a:chExt cx="0" cy="0"/>
-        </a:xfrm>
-      </p:grpSpPr>
-      <p:sp>
-        <p:nvSpPr>
-          <p:cNvPr id="2" name="Title 1"/>
-          <p:cNvSpPr>
-            <a:spLocks noGrp="1"/>
-          </p:cNvSpPr>
-          <p:nvPr>
-            <p:ph type="title"/>
-          </p:nvPr>
-        </p:nvSpPr>
-        <p:spPr>
-          <a:xfrm>
-            <a:off x="457200" y="205979"/>
-            <a:ext cx="8229600" cy="857250"/>
-          </a:xfrm>
-        </p:spPr>
-        <p:txBody>
-          <a:bodyPr/>
-          <a:lstStyle/>
-          <a:p>
-            <a:pPr lvl="0" indent="0" marL="0">
-              <a:buNone/>
-            </a:pPr>
-            <a:r>
-              <a:rPr/>
-              <a:t>Why the two disagree</a:t>
-            </a:r>
-          </a:p>
-        </p:txBody>
-      </p:sp>
-      <p:sp>
-        <p:nvSpPr>
-          <p:cNvPr id="3" name="Content Placeholder 2"/>
-          <p:cNvSpPr>
-            <a:spLocks noGrp="1"/>
-          </p:cNvSpPr>
-          <p:nvPr>
-            <p:ph idx="1"/>
-          </p:nvPr>
-        </p:nvSpPr>
-        <p:spPr>
-          <a:xfrm>
-            <a:off x="457200" y="1200151"/>
-            <a:ext cx="8229600" cy="3394472"/>
-          </a:xfrm>
-        </p:spPr>
-        <p:txBody>
-          <a:bodyPr/>
-          <a:lstStyle/>
-          <a:p>
-            <a:pPr lvl="0"/>
-            <a:r>
-              <a:rPr/>
-              <a:t>False positive rate (FPR) divides by </a:t>
-            </a:r>
-            <a:r>
-              <a:rPr b="1"/>
-              <a:t>all healthy drives</a:t>
-            </a:r>
-            <a:r>
-              <a:rPr/>
-              <a:t>: an enormous, growing denominator</a:t>
-            </a:r>
-          </a:p>
-          <a:p>
-            <a:pPr lvl="0"/>
-            <a:r>
-              <a:rPr/>
-              <a:t>Precision divides by </a:t>
-            </a:r>
-            <a:r>
-              <a:rPr b="1"/>
-              <a:t>the alarms raised</a:t>
-            </a:r>
-            <a:r>
-              <a:rPr/>
-              <a:t>, where the false ones dominate</a:t>
-            </a:r>
-          </a:p>
-        </p:txBody>
-      </p:sp>
-    </p:spTree>
-  </p:cSld>
-</p:sld>
-</file>
-
 <file path=ppt/slides/slide49.xml><?xml version="1.0" encoding="utf-8"?>
 <p:sld xmlns:a="http://schemas.openxmlformats.org/drawingml/2006/main" xmlns:r="http://schemas.openxmlformats.org/officeDocument/2006/relationships" xmlns:p="http://schemas.openxmlformats.org/presentationml/2006/main">
   <p:cSld>
@@ -17370,7 +17656,7 @@
             </a:pPr>
             <a:r>
               <a:rPr/>
-              <a:t>The rule</a:t>
+              <a:t>Why the two disagree</a:t>
             </a:r>
           </a:p>
         </p:txBody>
@@ -17398,43 +17684,30 @@
             <a:pPr lvl="0"/>
             <a:r>
               <a:rPr/>
-              <a:t>On an imbalanced problem, report the </a:t>
+              <a:t>False positive rate (FPR) divides by </a:t>
             </a:r>
             <a:r>
               <a:rPr b="1"/>
-              <a:t>precision-recall curve alongside AUC</a:t>
+              <a:t>all healthy drives</a:t>
+            </a:r>
+            <a:r>
+              <a:rPr/>
+              <a:t>: an enormous, growing denominator</a:t>
             </a:r>
           </a:p>
           <a:p>
             <a:pPr lvl="0"/>
             <a:r>
               <a:rPr/>
-              <a:t>Never instead of it, and never AUC alone</a:t>
-            </a:r>
-          </a:p>
-          <a:p>
-            <a:pPr lvl="0"/>
-            <a:r>
-              <a:rPr/>
-              <a:t>Its area is the </a:t>
+              <a:t>Precision divides by </a:t>
             </a:r>
             <a:r>
               <a:rPr b="1"/>
-              <a:t>average precision</a:t>
-            </a:r>
-            <a:r>
-              <a:rPr/>
-              <a:t>, </a:t>
-            </a:r>
-            <a:r>
-              <a:rPr>
-                <a:latin typeface="Courier"/>
-              </a:rPr>
-              <a:t>average_precision_score</a:t>
-            </a:r>
-            <a:r>
-              <a:rPr/>
-              <a:t>: 0.717 here, against 0.038 = 76 ÷ 2,000 for a model that ranks at random</a:t>
+              <a:t>the alarms raised</a:t>
+            </a:r>
+            <a:r>
+              <a:rPr/>
+              <a:t>, where the false ones dominate</a:t>
             </a:r>
           </a:p>
         </p:txBody>
@@ -17563,6 +17836,122 @@
 </file>
 
 <file path=ppt/slides/slide50.xml><?xml version="1.0" encoding="utf-8"?>
+<p:sld xmlns:a="http://schemas.openxmlformats.org/drawingml/2006/main" xmlns:r="http://schemas.openxmlformats.org/officeDocument/2006/relationships" xmlns:p="http://schemas.openxmlformats.org/presentationml/2006/main">
+  <p:cSld>
+    <p:spTree>
+      <p:nvGrpSpPr>
+        <p:cNvPr id="1" name=""/>
+        <p:cNvGrpSpPr/>
+        <p:nvPr/>
+      </p:nvGrpSpPr>
+      <p:grpSpPr>
+        <a:xfrm>
+          <a:off x="0" y="0"/>
+          <a:ext cx="0" cy="0"/>
+          <a:chOff x="0" y="0"/>
+          <a:chExt cx="0" cy="0"/>
+        </a:xfrm>
+      </p:grpSpPr>
+      <p:sp>
+        <p:nvSpPr>
+          <p:cNvPr id="2" name="Title 1"/>
+          <p:cNvSpPr>
+            <a:spLocks noGrp="1"/>
+          </p:cNvSpPr>
+          <p:nvPr>
+            <p:ph type="title"/>
+          </p:nvPr>
+        </p:nvSpPr>
+        <p:spPr>
+          <a:xfrm>
+            <a:off x="457200" y="205979"/>
+            <a:ext cx="8229600" cy="857250"/>
+          </a:xfrm>
+        </p:spPr>
+        <p:txBody>
+          <a:bodyPr/>
+          <a:lstStyle/>
+          <a:p>
+            <a:pPr lvl="0" indent="0" marL="0">
+              <a:buNone/>
+            </a:pPr>
+            <a:r>
+              <a:rPr/>
+              <a:t>The rule</a:t>
+            </a:r>
+          </a:p>
+        </p:txBody>
+      </p:sp>
+      <p:sp>
+        <p:nvSpPr>
+          <p:cNvPr id="3" name="Content Placeholder 2"/>
+          <p:cNvSpPr>
+            <a:spLocks noGrp="1"/>
+          </p:cNvSpPr>
+          <p:nvPr>
+            <p:ph idx="1"/>
+          </p:nvPr>
+        </p:nvSpPr>
+        <p:spPr>
+          <a:xfrm>
+            <a:off x="457200" y="1200151"/>
+            <a:ext cx="8229600" cy="3394472"/>
+          </a:xfrm>
+        </p:spPr>
+        <p:txBody>
+          <a:bodyPr/>
+          <a:lstStyle/>
+          <a:p>
+            <a:pPr lvl="0"/>
+            <a:r>
+              <a:rPr/>
+              <a:t>On an imbalanced problem, report the </a:t>
+            </a:r>
+            <a:r>
+              <a:rPr b="1"/>
+              <a:t>precision-recall curve alongside AUC</a:t>
+            </a:r>
+          </a:p>
+          <a:p>
+            <a:pPr lvl="0"/>
+            <a:r>
+              <a:rPr/>
+              <a:t>Never instead of it, and never AUC alone</a:t>
+            </a:r>
+          </a:p>
+          <a:p>
+            <a:pPr lvl="0"/>
+            <a:r>
+              <a:rPr/>
+              <a:t>Its area is the </a:t>
+            </a:r>
+            <a:r>
+              <a:rPr b="1"/>
+              <a:t>average precision</a:t>
+            </a:r>
+            <a:r>
+              <a:rPr/>
+              <a:t>, </a:t>
+            </a:r>
+            <a:r>
+              <a:rPr>
+                <a:latin typeface="Courier"/>
+              </a:rPr>
+              <a:t>average_precision_score</a:t>
+            </a:r>
+            <a:r>
+              <a:rPr/>
+              <a:t>: 0.717 here, against 0.038 = 76 ÷ 2,000 for a model that ranks at random</a:t>
+            </a:r>
+          </a:p>
+        </p:txBody>
+      </p:sp>
+    </p:spTree>
+  </p:cSld>
+</p:sld>
+</file>
+
+<file path=ppt/slides/slide51.xml><?xml version="1.0" encoding="utf-8"?>
 <p:sld xmlns:a="http://schemas.openxmlformats.org/drawingml/2006/main" xmlns:r="http://schemas.openxmlformats.org/officeDocument/2006/relationships" xmlns:p="http://schemas.openxmlformats.org/presentationml/2006/main">
   <p:cSld>
     <p:spTree>
@@ -17644,7 +18033,7 @@
 </p:sld>
 </file>
 
-<file path=ppt/slides/slide51.xml><?xml version="1.0" encoding="utf-8"?>
+<file path=ppt/slides/slide52.xml><?xml version="1.0" encoding="utf-8"?>
 <p:sld xmlns:a="http://schemas.openxmlformats.org/drawingml/2006/main" xmlns:r="http://schemas.openxmlformats.org/officeDocument/2006/relationships" xmlns:p="http://schemas.openxmlformats.org/presentationml/2006/main">
   <p:cSld>
     <p:spTree>
@@ -17726,7 +18115,7 @@
 </p:sld>
 </file>
 
-<file path=ppt/slides/slide52.xml><?xml version="1.0" encoding="utf-8"?>
+<file path=ppt/slides/slide53.xml><?xml version="1.0" encoding="utf-8"?>
 <p:sld xmlns:a="http://schemas.openxmlformats.org/drawingml/2006/main" xmlns:r="http://schemas.openxmlformats.org/officeDocument/2006/relationships" xmlns:p="http://schemas.openxmlformats.org/presentationml/2006/main">
   <p:cSld>
     <p:spTree>
@@ -17808,7 +18197,7 @@
 </p:sld>
 </file>
 
-<file path=ppt/slides/slide53.xml><?xml version="1.0" encoding="utf-8"?>
+<file path=ppt/slides/slide54.xml><?xml version="1.0" encoding="utf-8"?>
 <p:sld xmlns:a="http://schemas.openxmlformats.org/drawingml/2006/main" xmlns:r="http://schemas.openxmlformats.org/officeDocument/2006/relationships" xmlns:p="http://schemas.openxmlformats.org/presentationml/2006/main">
   <p:cSld>
     <p:spTree>
@@ -17899,7 +18288,7 @@
 </p:sld>
 </file>
 
-<file path=ppt/slides/slide54.xml><?xml version="1.0" encoding="utf-8"?>
+<file path=ppt/slides/slide55.xml><?xml version="1.0" encoding="utf-8"?>
 <p:sld xmlns:a="http://schemas.openxmlformats.org/drawingml/2006/main" xmlns:r="http://schemas.openxmlformats.org/officeDocument/2006/relationships" xmlns:p="http://schemas.openxmlformats.org/presentationml/2006/main">
   <p:cSld>
     <p:spTree>
@@ -17981,7 +18370,7 @@
 </p:sld>
 </file>
 
-<file path=ppt/slides/slide55.xml><?xml version="1.0" encoding="utf-8"?>
+<file path=ppt/slides/slide56.xml><?xml version="1.0" encoding="utf-8"?>
 <p:sld xmlns:a="http://schemas.openxmlformats.org/drawingml/2006/main" xmlns:r="http://schemas.openxmlformats.org/officeDocument/2006/relationships" xmlns:p="http://schemas.openxmlformats.org/presentationml/2006/main">
   <p:cSld>
     <p:spTree>
@@ -18097,7 +18486,7 @@
                       </a:pPr>
                       <a:r>
                         <a:rPr/>
-                        <a:t>the ROC curve by hand, 43</a:t>
+                        <a:t>the ROC curve by hand, 44</a:t>
                       </a:r>
                     </a:p>
                   </a:txBody>
@@ -18145,7 +18534,7 @@
                       </a:pPr>
                       <a:r>
                         <a:rPr/>
-                        <a:t>what AUC means, 44-45</a:t>
+                        <a:t>what AUC means, 45-46</a:t>
                       </a:r>
                     </a:p>
                   </a:txBody>
@@ -18177,7 +18566,7 @@
                       </a:pPr>
                       <a:r>
                         <a:rPr/>
-                        <a:t>the rare-positive trap, 47-48</a:t>
+                        <a:t>the rare-positive trap, 48-49</a:t>
                       </a:r>
                     </a:p>
                   </a:txBody>
@@ -18225,7 +18614,7 @@
                       </a:pPr>
                       <a:r>
                         <a:rPr/>
-                        <a:t>the threshold from costs, 50-53</a:t>
+                        <a:t>the threshold from costs, 51-54</a:t>
                       </a:r>
                     </a:p>
                   </a:txBody>
@@ -18263,7 +18652,7 @@
                       </a:pPr>
                       <a:r>
                         <a:rPr/>
-                        <a:t>class weights, 54</a:t>
+                        <a:t>class weights, 55</a:t>
                       </a:r>
                     </a:p>
                   </a:txBody>
@@ -18301,7 +18690,7 @@
                       </a:pPr>
                       <a:r>
                         <a:rPr/>
-                        <a:t>three classes, 56-57</a:t>
+                        <a:t>three classes, 57-58</a:t>
                       </a:r>
                     </a:p>
                   </a:txBody>
@@ -18337,7 +18726,7 @@
 </p:sld>
 </file>
 
-<file path=ppt/slides/slide56.xml><?xml version="1.0" encoding="utf-8"?>
+<file path=ppt/slides/slide57.xml><?xml version="1.0" encoding="utf-8"?>
 <p:sld xmlns:a="http://schemas.openxmlformats.org/drawingml/2006/main" xmlns:r="http://schemas.openxmlformats.org/officeDocument/2006/relationships" xmlns:p="http://schemas.openxmlformats.org/presentationml/2006/main">
   <p:cSld>
     <p:spTree>
@@ -18419,7 +18808,7 @@
 </p:sld>
 </file>
 
-<file path=ppt/slides/slide57.xml><?xml version="1.0" encoding="utf-8"?>
+<file path=ppt/slides/slide58.xml><?xml version="1.0" encoding="utf-8"?>
 <p:sld xmlns:a="http://schemas.openxmlformats.org/drawingml/2006/main" xmlns:r="http://schemas.openxmlformats.org/officeDocument/2006/relationships" xmlns:p="http://schemas.openxmlformats.org/presentationml/2006/main">
   <p:cSld>
     <p:spTree>
@@ -18501,135 +18890,6 @@
 </p:sld>
 </file>
 
-<file path=ppt/slides/slide58.xml><?xml version="1.0" encoding="utf-8"?>
-<p:sld xmlns:a="http://schemas.openxmlformats.org/drawingml/2006/main" xmlns:r="http://schemas.openxmlformats.org/officeDocument/2006/relationships" xmlns:p="http://schemas.openxmlformats.org/presentationml/2006/main">
-  <p:cSld>
-    <p:spTree>
-      <p:nvGrpSpPr>
-        <p:cNvPr id="1" name=""/>
-        <p:cNvGrpSpPr/>
-        <p:nvPr/>
-      </p:nvGrpSpPr>
-      <p:grpSpPr>
-        <a:xfrm>
-          <a:off x="0" y="0"/>
-          <a:ext cx="0" cy="0"/>
-          <a:chOff x="0" y="0"/>
-          <a:chExt cx="0" cy="0"/>
-        </a:xfrm>
-      </p:grpSpPr>
-      <p:sp>
-        <p:nvSpPr>
-          <p:cNvPr id="2" name="Title 1"/>
-          <p:cNvSpPr>
-            <a:spLocks noGrp="1"/>
-          </p:cNvSpPr>
-          <p:nvPr>
-            <p:ph type="title"/>
-          </p:nvPr>
-        </p:nvSpPr>
-        <p:spPr>
-          <a:xfrm>
-            <a:off x="457200" y="205979"/>
-            <a:ext cx="8229600" cy="857250"/>
-          </a:xfrm>
-        </p:spPr>
-        <p:txBody>
-          <a:bodyPr/>
-          <a:lstStyle/>
-          <a:p>
-            <a:pPr lvl="0" indent="0" marL="0">
-              <a:buNone/>
-            </a:pPr>
-            <a:r>
-              <a:rPr/>
-              <a:t>What to take away</a:t>
-            </a:r>
-          </a:p>
-        </p:txBody>
-      </p:sp>
-      <p:sp>
-        <p:nvSpPr>
-          <p:cNvPr id="3" name="Content Placeholder 2"/>
-          <p:cNvSpPr>
-            <a:spLocks noGrp="1"/>
-          </p:cNvSpPr>
-          <p:nvPr>
-            <p:ph idx="1"/>
-          </p:nvPr>
-        </p:nvSpPr>
-        <p:spPr>
-          <a:xfrm>
-            <a:off x="457200" y="1200151"/>
-            <a:ext cx="8229600" cy="3394472"/>
-          </a:xfrm>
-        </p:spPr>
-        <p:txBody>
-          <a:bodyPr/>
-          <a:lstStyle/>
-          <a:p>
-            <a:pPr lvl="0"/>
-            <a:r>
-              <a:rPr b="1"/>
-              <a:t>96.20% accuracy, nothing caught.</a:t>
-            </a:r>
-            <a:r>
-              <a:rPr/>
-              <a:t> Accuracy measures the majority class</a:t>
-            </a:r>
-          </a:p>
-          <a:p>
-            <a:pPr lvl="0"/>
-            <a:r>
-              <a:rPr/>
-              <a:t>Precision is about the </a:t>
-            </a:r>
-            <a:r>
-              <a:rPr b="1"/>
-              <a:t>alarms</a:t>
-            </a:r>
-            <a:r>
-              <a:rPr/>
-              <a:t>, recall is about the </a:t>
-            </a:r>
-            <a:r>
-              <a:rPr b="1"/>
-              <a:t>failures</a:t>
-            </a:r>
-          </a:p>
-          <a:p>
-            <a:pPr lvl="0"/>
-            <a:r>
-              <a:rPr/>
-              <a:t>The </a:t>
-            </a:r>
-            <a:r>
-              <a:rPr b="1"/>
-              <a:t>threshold is a decision</a:t>
-            </a:r>
-            <a:r>
-              <a:rPr/>
-              <a:t>, and it has a formula</a:t>
-            </a:r>
-          </a:p>
-          <a:p>
-            <a:pPr lvl="0"/>
-            <a:r>
-              <a:rPr b="1"/>
-              <a:t>AUC measures ranking</a:t>
-            </a:r>
-            <a:r>
-              <a:rPr/>
-              <a:t> and hides imbalance</a:t>
-            </a:r>
-          </a:p>
-        </p:txBody>
-      </p:sp>
-    </p:spTree>
-  </p:cSld>
-</p:sld>
-</file>
-
 <file path=ppt/slides/slide59.xml><?xml version="1.0" encoding="utf-8"?>
 <p:sld xmlns:a="http://schemas.openxmlformats.org/drawingml/2006/main" xmlns:r="http://schemas.openxmlformats.org/officeDocument/2006/relationships" xmlns:p="http://schemas.openxmlformats.org/presentationml/2006/main">
   <p:cSld>
@@ -18672,7 +18932,7 @@
             </a:pPr>
             <a:r>
               <a:rPr/>
-              <a:t>Homework</a:t>
+              <a:t>What to take away</a:t>
             </a:r>
           </a:p>
         </p:txBody>
@@ -18700,22 +18960,56 @@
             <a:pPr lvl="0"/>
             <a:r>
               <a:rPr b="1"/>
-              <a:t>Exercise 4</a:t>
-            </a:r>
-            <a:r>
-              <a:rPr/>
-              <a:t>, discussed at the start of </a:t>
+              <a:t>96.20% accuracy, nothing caught.</a:t>
+            </a:r>
+            <a:r>
+              <a:rPr/>
+              <a:t> Accuracy measures the majority class</a:t>
+            </a:r>
+          </a:p>
+          <a:p>
+            <a:pPr lvl="0"/>
+            <a:r>
+              <a:rPr/>
+              <a:t>Precision is about the </a:t>
             </a:r>
             <a:r>
               <a:rPr b="1"/>
-              <a:t>Friday 6 November</a:t>
+              <a:t>alarms</a:t>
+            </a:r>
+            <a:r>
+              <a:rPr/>
+              <a:t>, recall is about the </a:t>
+            </a:r>
+            <a:r>
+              <a:rPr b="1"/>
+              <a:t>failures</a:t>
             </a:r>
           </a:p>
           <a:p>
             <a:pPr lvl="0"/>
             <a:r>
               <a:rPr/>
-              <a:t>Build a classifier, choose a threshold from a stated cost ratio, defend it</a:t>
+              <a:t>The </a:t>
+            </a:r>
+            <a:r>
+              <a:rPr b="1"/>
+              <a:t>threshold is a decision</a:t>
+            </a:r>
+            <a:r>
+              <a:rPr/>
+              <a:t>, and it has a formula</a:t>
+            </a:r>
+          </a:p>
+          <a:p>
+            <a:pPr lvl="0"/>
+            <a:r>
+              <a:rPr b="1"/>
+              <a:t>AUC measures ranking</a:t>
+            </a:r>
+            <a:r>
+              <a:rPr/>
+              <a:t> and hides imbalance</a:t>
             </a:r>
           </a:p>
         </p:txBody>
@@ -18807,6 +19101,101 @@
             <a:r>
               <a:rPr/>
               <a:t>Which means 100% − 3.8% = 96.2% did not</a:t>
+            </a:r>
+          </a:p>
+        </p:txBody>
+      </p:sp>
+    </p:spTree>
+  </p:cSld>
+</p:sld>
+</file>
+
+<file path=ppt/slides/slide60.xml><?xml version="1.0" encoding="utf-8"?>
+<p:sld xmlns:a="http://schemas.openxmlformats.org/drawingml/2006/main" xmlns:r="http://schemas.openxmlformats.org/officeDocument/2006/relationships" xmlns:p="http://schemas.openxmlformats.org/presentationml/2006/main">
+  <p:cSld>
+    <p:spTree>
+      <p:nvGrpSpPr>
+        <p:cNvPr id="1" name=""/>
+        <p:cNvGrpSpPr/>
+        <p:nvPr/>
+      </p:nvGrpSpPr>
+      <p:grpSpPr>
+        <a:xfrm>
+          <a:off x="0" y="0"/>
+          <a:ext cx="0" cy="0"/>
+          <a:chOff x="0" y="0"/>
+          <a:chExt cx="0" cy="0"/>
+        </a:xfrm>
+      </p:grpSpPr>
+      <p:sp>
+        <p:nvSpPr>
+          <p:cNvPr id="2" name="Title 1"/>
+          <p:cNvSpPr>
+            <a:spLocks noGrp="1"/>
+          </p:cNvSpPr>
+          <p:nvPr>
+            <p:ph type="title"/>
+          </p:nvPr>
+        </p:nvSpPr>
+        <p:spPr>
+          <a:xfrm>
+            <a:off x="457200" y="205979"/>
+            <a:ext cx="8229600" cy="857250"/>
+          </a:xfrm>
+        </p:spPr>
+        <p:txBody>
+          <a:bodyPr/>
+          <a:lstStyle/>
+          <a:p>
+            <a:pPr lvl="0" indent="0" marL="0">
+              <a:buNone/>
+            </a:pPr>
+            <a:r>
+              <a:rPr/>
+              <a:t>Homework</a:t>
+            </a:r>
+          </a:p>
+        </p:txBody>
+      </p:sp>
+      <p:sp>
+        <p:nvSpPr>
+          <p:cNvPr id="3" name="Content Placeholder 2"/>
+          <p:cNvSpPr>
+            <a:spLocks noGrp="1"/>
+          </p:cNvSpPr>
+          <p:nvPr>
+            <p:ph idx="1"/>
+          </p:nvPr>
+        </p:nvSpPr>
+        <p:spPr>
+          <a:xfrm>
+            <a:off x="457200" y="1200151"/>
+            <a:ext cx="8229600" cy="3394472"/>
+          </a:xfrm>
+        </p:spPr>
+        <p:txBody>
+          <a:bodyPr/>
+          <a:lstStyle/>
+          <a:p>
+            <a:pPr lvl="0"/>
+            <a:r>
+              <a:rPr b="1"/>
+              <a:t>Exercise 4</a:t>
+            </a:r>
+            <a:r>
+              <a:rPr/>
+              <a:t>, discussed at the start of </a:t>
+            </a:r>
+            <a:r>
+              <a:rPr b="1"/>
+              <a:t>Friday 6 November</a:t>
+            </a:r>
+          </a:p>
+          <a:p>
+            <a:pPr lvl="0"/>
+            <a:r>
+              <a:rPr/>
+              <a:t>Build a classifier, choose a threshold from a stated cost ratio, defend it</a:t>
             </a:r>
           </a:p>
         </p:txBody>
@@ -19078,7 +19467,7 @@
             <a:pPr lvl="0"/>
             <a:r>
               <a:rPr/>
-              <a:t>Bonus: coefficients multiply the odds (slide 13)</a:t>
+              <a:t>Bonus: coefficients multiply the odds (slide 14)</a:t>
             </a:r>
           </a:p>
         </p:txBody>

--- a/Lessons/04_classification_and_metrics/Slides/classification_and_metrics_slides.pptx
+++ b/Lessons/04_classification_and_metrics/Slides/classification_and_metrics_slides.pptx
@@ -5410,6 +5410,34 @@
               <a:t>The move is to stop asking “how many did it get right” and start asking “did it put the failures at the top of the list”. That is a question about ranking, and ranking has no threshold in it.</a:t>
             </a:r>
           </a:p>
+          <a:p>
+            <a:pPr lvl="0" indent="0" marL="0">
+              <a:buNone/>
+            </a:pPr>
+          </a:p>
+          <a:p>
+            <a:pPr lvl="0" indent="0" marL="0">
+              <a:buNone/>
+            </a:pPr>
+            <a:r>
+              <a:rPr/>
+              <a:t>Say what the ranking is before using the word: sort the 2,000 test drives by the probability the model gave them, highest first. Then a threshold is nothing but a place to cut that list - everything above the cut is flagged - and lowering the threshold moves the cut down. So a threshold-free evaluation does not throw the threshold away: it looks at every cut of the same list at once. The precision-recall curve of slide 42 was already a first step, every threshold on one curve.</a:t>
+            </a:r>
+          </a:p>
+          <a:p>
+            <a:pPr lvl="0" indent="0" marL="0">
+              <a:buNone/>
+            </a:pPr>
+          </a:p>
+          <a:p>
+            <a:pPr lvl="0" indent="0" marL="0">
+              <a:buNone/>
+            </a:pPr>
+            <a:r>
+              <a:rPr/>
+              <a:t>Two conditions to keep in mind, both coming back later: only the order counts, not the values of p, so a ranking measure cannot see calibration (slide 47); and the day the model is used, one cut still has to be chosen (slides 51-53).</a:t>
+            </a:r>
+          </a:p>
         </p:txBody>
       </p:sp>
       <p:sp>
@@ -5534,6 +5562,34 @@
               <a:t>So the curve asks: as we grow more willing to raise alarms, do we catch failures faster than we annoy technicians?</a:t>
             </a:r>
           </a:p>
+          <a:p>
+            <a:pPr lvl="0" indent="0" marL="0">
+              <a:buNone/>
+            </a:pPr>
+          </a:p>
+          <a:p>
+            <a:pPr lvl="0" indent="0" marL="0">
+              <a:buNone/>
+            </a:pPr>
+            <a:r>
+              <a:rPr/>
+              <a:t>Make the steps concrete. Walk down the ranking one drive at a time: a failing drive moves the curve up by 1/76, a healthy one moves it right by 1/1,924. A steep start means the top of the ranking is failures. The ideal curve goes straight up to (0, 1), then across. Every curve ends at (1, 1), so a curve that is steep at the start is flat at the end - and the area under it, next slide, measures exactly that. Check one point: threshold 0.5 gives TPR = 43 ÷ 76 = 0.57 and FPR = 13 ÷ 1,924 = 0.007.</a:t>
+            </a:r>
+          </a:p>
+          <a:p>
+            <a:pPr lvl="0" indent="0" marL="0">
+              <a:buNone/>
+            </a:pPr>
+          </a:p>
+          <a:p>
+            <a:pPr lvl="0" indent="0" marL="0">
+              <a:buNone/>
+            </a:pPr>
+            <a:r>
+              <a:rPr/>
+              <a:t>The sweep is the same as the precision-recall curve’s; the reading is not. The precision-recall curve’s ideal is the top-right corner, and precision divides by the alarms raised. The ROC’s ideal is the top-left corner, and FPR divides by the 1,924 healthy drives, so its random baseline is the diagonal whatever the class balance, against 0.038 for precision-recall. That denominator is why ROC can hide imbalance (slides 48-49).</a:t>
+            </a:r>
+          </a:p>
         </p:txBody>
       </p:sp>
       <p:sp>
@@ -5658,6 +5714,20 @@
               <a:t>The identity with the Mann-Whitney U statistic - a classical test that compares two groups by counting, over every pair, which member ranks higher - is in the handout, section 8.2, for anyone who wants the proof. But notebook 3 does something better than a proof for this audience: it draws 200,000 random pairs and counts. 0.9488 against roc_auc_score’s 0.9493.</a:t>
             </a:r>
           </a:p>
+          <a:p>
+            <a:pPr lvl="0" indent="0" marL="0">
+              <a:buNone/>
+            </a:pPr>
+          </a:p>
+          <a:p>
+            <a:pPr lvl="0" indent="0" marL="0">
+              <a:buNone/>
+            </a:pPr>
+            <a:r>
+              <a:rPr/>
+              <a:t>Which pairs, and why the two differ. The test set has 76 × 1,924 = 146,224 (failing, healthy) pairs. The exact AUC is the share of them in which the failing drive scores higher, a tie counting half: notebook 3 counts 7,409 pairs in the wrong order, and 1 − 7,409 ÷ 146,224 = 0.9493. So “probability” and “share of pairs” are the same number. The 200,000 random pairs are an estimate of that share, which is why they give 0.9488: sampling noise.</a:t>
+            </a:r>
+          </a:p>
         </p:txBody>
       </p:sp>
       <p:sp>
@@ -5782,6 +5852,34 @@
               <a:t>Note what the figure does not show: where to put the threshold. Any vertical line splits it, and the AUC is the same whichever you pick - the next slide.</a:t>
             </a:r>
           </a:p>
+          <a:p>
+            <a:pPr lvl="0" indent="0" marL="0">
+              <a:buNone/>
+            </a:pPr>
+          </a:p>
+          <a:p>
+            <a:pPr lvl="0" indent="0" marL="0">
+              <a:buNone/>
+            </a:pPr>
+            <a:r>
+              <a:rPr/>
+              <a:t>A predictable slip: reading the heights as numbers of drives. They are shares of each group, each colour adding up to 1; as counts the 76 rust drives would be invisible next to the 1,924 teal ones. The reading is reasonable because a histogram usually counts. Notebook 3 converts back: the tallest rust bar, 0.342, is 26 drives; the tallest teal bar, 0.056, is 108. The low bar holds four times as many drives.</a:t>
+            </a:r>
+          </a:p>
+          <a:p>
+            <a:pPr lvl="0" indent="0" marL="0">
+              <a:buNone/>
+            </a:pPr>
+          </a:p>
+          <a:p>
+            <a:pPr lvl="0" indent="0" marL="0">
+              <a:buNone/>
+            </a:pPr>
+            <a:r>
+              <a:rPr/>
+              <a:t>Where the 5% comes from, counted in notebook 3: 7,409 of the 146,224 pairs are in the wrong order. A failing drive costs one wrong pair for every healthy drive scored above it, so a failure far to the left costs a lot: the lowest-scoring one (p = 0.0004) is outscored by 1,408 healthy drives, a fifth of all the wrong pairs by itself. The 5 worst failures make 61% of them; 19 failures score above every healthy drive and cost nothing.</a:t>
+            </a:r>
+          </a:p>
         </p:txBody>
       </p:sp>
       <p:sp>
@@ -5904,6 +6002,34 @@
             <a:r>
               <a:rPr/>
               <a:t>Good place to mention that calibration - whether a predicted 0.7 really comes true 70% of the time - is a topic of its own, without going into it.</a:t>
+            </a:r>
+          </a:p>
+          <a:p>
+            <a:pPr lvl="0" indent="0" marL="0">
+              <a:buNone/>
+            </a:pPr>
+          </a:p>
+          <a:p>
+            <a:pPr lvl="0" indent="0" marL="0">
+              <a:buNone/>
+            </a:pPr>
+            <a:r>
+              <a:rPr/>
+              <a:t>The 56: at threshold 0.5 the fitted model flags 43 + 13 = 56 drives. Divided by 10, the largest score is 0.100, so nothing reaches 0.5: recall 0, AUC still 0.949. The condition: this holds for any change that keeps the order, that is any strictly increasing one; a change that reverses the order turns the AUC into 1 − AUC. “Multiply by 10” would keep the AUC too, but the scores would stop being probabilities.</a:t>
+            </a:r>
+          </a:p>
+          <a:p>
+            <a:pPr lvl="0" indent="0" marL="0">
+              <a:buNone/>
+            </a:pPr>
+          </a:p>
+          <a:p>
+            <a:pPr lvl="0" indent="0" marL="0">
+              <a:buNone/>
+            </a:pPr>
+            <a:r>
+              <a:rPr/>
+              <a:t>The converse is worth one sentence, because it shows the two properties are independent: give every drive 0.038, the fleet’s failure rate. On average that is right - calibrated - and it ranks nothing: AUC 0.5 (notebook 3).</a:t>
             </a:r>
           </a:p>
         </p:txBody>
@@ -17138,7 +17264,7 @@
             <a:pPr lvl="0"/>
             <a:r>
               <a:rPr/>
-              <a:t>What if we score the whole </a:t>
+              <a:t>The </a:t>
             </a:r>
             <a:r>
               <a:rPr b="1"/>
@@ -17146,7 +17272,21 @@
             </a:r>
             <a:r>
               <a:rPr/>
-              <a:t> instead?</a:t>
+              <a:t>: the 2,000 test drives sorted by predicted probability, riskiest first</a:t>
+            </a:r>
+          </a:p>
+          <a:p>
+            <a:pPr lvl="0"/>
+            <a:r>
+              <a:rPr/>
+              <a:t>A threshold is a cut in this list: every drive above the cut is flagged</a:t>
+            </a:r>
+          </a:p>
+          <a:p>
+            <a:pPr lvl="0"/>
+            <a:r>
+              <a:rPr/>
+              <a:t>What if we score the whole ranking, every cut at once?</a:t>
             </a:r>
           </a:p>
         </p:txBody>
@@ -17522,7 +17662,29 @@
             </a:r>
             <a:r>
               <a:rPr/>
-              <a:t>; every decision changes</a:t>
+              <a:t>, 0.949: the order of the drives is the same</a:t>
+            </a:r>
+          </a:p>
+          <a:p>
+            <a:pPr lvl="0"/>
+            <a:r>
+              <a:rPr/>
+              <a:t>Every decision changes: at threshold 0.5, 56 drives flagged before, none after (notebook 3)</a:t>
+            </a:r>
+          </a:p>
+          <a:p>
+            <a:pPr lvl="0"/>
+            <a:r>
+              <a:rPr/>
+              <a:t>The model is now badly </a:t>
+            </a:r>
+            <a:r>
+              <a:rPr b="1"/>
+              <a:t>calibrated</a:t>
+            </a:r>
+            <a:r>
+              <a:rPr/>
+              <a:t>: calibrated means a predicted 0.7 comes true about 70% of the time</a:t>
             </a:r>
           </a:p>
         </p:txBody>

--- a/Lessons/04_classification_and_metrics/Slides/classification_and_metrics_slides.pptx
+++ b/Lessons/04_classification_and_metrics/Slides/classification_and_metrics_slides.pptx
@@ -5,7 +5,7 @@
     <p:sldMasterId id="2147483648" r:id="rId1"/>
   </p:sldMasterIdLst>
   <p:notesMasterIdLst>
-    <p:notesMasterId r:id="rId62"/>
+    <p:notesMasterId r:id="rId64"/>
   </p:notesMasterIdLst>
   <p:sldIdLst>
     <p:sldId id="256" r:id="rId2"/>
@@ -68,6 +68,8 @@
     <p:sldId id="313" r:id="rId59"/>
     <p:sldId id="314" r:id="rId60"/>
     <p:sldId id="315" r:id="rId61"/>
+    <p:sldId id="316" r:id="rId62"/>
+    <p:sldId id="317" r:id="rId63"/>
   </p:sldIdLst>
   <p:sldSz cx="9144000" cy="5143500" type="screen16x9"/>
   <p:notesSz cx="6858000" cy="9144000"/>
@@ -4001,7 +4003,7 @@
             </a:pPr>
             <a:r>
               <a:rPr/>
-              <a:t>A predictable slip: “33 misses, so the model needs improving”. Perhaps, but that is not the first lever. The probabilities stay the same and 0.5 is a habit: a lower threshold catches more failures with the same model, at the price of more false alarms (slides 40 to 42, and the threshold derived from the costs, slide 52). The threshold trades one error for the other; only a better model reduces both.</a:t>
+              <a:t>A predictable slip: “33 misses, so the model needs improving”. Perhaps, but that is not the first lever. The probabilities stay the same and 0.5 is a habit: a lower threshold catches more failures with the same model, at the price of more false alarms (slides 40 to 42, and the threshold derived from the costs, slide 53). The threshold trades one error for the other; only a better model reduces both.</a:t>
             </a:r>
           </a:p>
         </p:txBody>
@@ -4911,7 +4913,7 @@
             </a:pPr>
             <a:r>
               <a:rPr/>
-              <a:t>That 0.5 is predict()’s default and nothing more. It is the right choice only when the two errors cost the same and the probabilities are calibrated: among drives given 0.3, about 30% really fail (slide 47 names the property). Slide 52 derives the threshold from the costs, and it is 0.5 exactly when they are equal. Here a miss costs about nineteen times a false alarm (2,600 divided by 140 = 18.6), and in most real problems the costs differ too.</a:t>
+              <a:t>That 0.5 is predict()’s default and nothing more. It is the right choice only when the two errors cost the same and the probabilities are calibrated: among drives given 0.3, about 30% really fail (slide 47 names the property). Slide 53 derives the threshold from the costs, and it is 0.5 exactly when they are equal. Here a miss costs about nineteen times a false alarm (2,600 divided by 140 = 18.6), and in most real problems the costs differ too.</a:t>
             </a:r>
           </a:p>
           <a:p>
@@ -5283,7 +5285,7 @@
             </a:pPr>
             <a:r>
               <a:rPr/>
-              <a:t>That is why this curve is so much more informative than accuracy when positives are rare: the floor is where the difficulty actually is. Our model’s area under it, the average precision, is 0.717 against a floor of 0.038.</a:t>
+              <a:t>That is why this curve is so much more informative than accuracy when positives are rare: the floor is where the difficulty actually is. Our model’s area under it, the average precision (AP), is 0.717 against a floor of 0.038.</a:t>
             </a:r>
           </a:p>
           <a:p>
@@ -5987,7 +5989,7 @@
             </a:pPr>
             <a:r>
               <a:rPr/>
-              <a:t>The consequence: AUC says nothing about whether “0.7” means anything. If you need the probabilities to be believable - because you are computing expected costs, as slide 52 does - AUC is not the check you want.</a:t>
+              <a:t>The consequence: AUC says nothing about whether “0.7” means anything. If you need the probabilities to be believable - because you are computing expected costs, as slides 52-53 do - AUC is not the check you want.</a:t>
             </a:r>
           </a:p>
           <a:p>
@@ -6170,6 +6172,20 @@
               <a:t>Three curves on the left, one model, no problem. Three curves on the right, same model, a disaster. Let that sit for a second before explaining.</a:t>
             </a:r>
           </a:p>
+          <a:p>
+            <a:pPr lvl="0" indent="0" marL="0">
+              <a:buNone/>
+            </a:pPr>
+          </a:p>
+          <a:p>
+            <a:pPr lvl="0" indent="0" marL="0">
+              <a:buNone/>
+            </a:pPr>
+            <a:r>
+              <a:rPr/>
+              <a:t>The fleets, precisely: 60,000 drives are generated, all 57,575 healthy ones are kept, and only failures are discarded, so the three fleets hold 59,849, 58,157 and 57,806 drives. The counts behind the right panel, at threshold 0.5: the false alarms are 304 in all three fleets, the true alarms 1,127, 261 and 106. The next slide reads them.</a:t>
+            </a:r>
+          </a:p>
         </p:txBody>
       </p:sp>
       <p:sp>
@@ -6263,21 +6279,35 @@
             </a:pPr>
             <a:r>
               <a:rPr/>
-              <a:t>A thousand false alarms among a hundred thousand healthy drives is a false positive rate of 0.01 - invisible on the ROC axis, a rounding error. The same thousand false alarms, set against the alarms actually raised, may be most of them.</a:t>
-            </a:r>
-          </a:p>
-          <a:p>
-            <a:pPr lvl="0" indent="0" marL="0">
-              <a:buNone/>
-            </a:pPr>
-          </a:p>
-          <a:p>
-            <a:pPr lvl="0" indent="0" marL="0">
-              <a:buNone/>
-            </a:pPr>
-            <a:r>
-              <a:rPr/>
-              <a:t>So ROC is measuring the false alarms against a population nobody experiences. The technician does not see the 99,000 drives left alone; they see the alarm queue.</a:t>
+              <a:t>Both ROC axes are shares inside one class. Recall is a share of the failures, and thinning the failures at random leaves it where it was: 0.50, 0.45, 0.46 at threshold 0.5, noise around one value. FPR is a share of the healthy drives, which are not touched: 304 ÷ 57,575 = 0.0053 every time. So the ROC curve cannot move. Precision is the one number that mixes the classes: TP over TP + 304, with TP falling 1,127 → 261 → 106, so precision falls 0.788 → 0.462 → 0.259. In one formula, with π the positive rate: precision = R·π ÷ (R·π + FPR · (1 − π)). R and FPR are the ROC’s axes and stay put; only π moves. Check the rarest fleet: 0.459 × 0.004 ÷ (0.459 × 0.004 + 0.0053 × 0.996) = 0.26.</a:t>
+            </a:r>
+          </a:p>
+          <a:p>
+            <a:pPr lvl="0" indent="0" marL="0">
+              <a:buNone/>
+            </a:pPr>
+          </a:p>
+          <a:p>
+            <a:pPr lvl="0" indent="0" marL="0">
+              <a:buNone/>
+            </a:pPr>
+            <a:r>
+              <a:rPr/>
+              <a:t>A predictable slip: “precision falls because the false positives grow”. They do not - 304 in every fleet. What grows is their share of the alarms, 304 ÷ (1,127 + 304) = 0.21 at 3.8% and 304 ÷ (106 + 304) = 0.74 at 0.4%, which is 1 − precision. The slip is natural: “the false alarms take over” sounds like “there are more of them”.</a:t>
+            </a:r>
+          </a:p>
+          <a:p>
+            <a:pPr lvl="0" indent="0" marL="0">
+              <a:buNone/>
+            </a:pPr>
+          </a:p>
+          <a:p>
+            <a:pPr lvl="0" indent="0" marL="0">
+              <a:buNone/>
+            </a:pPr>
+            <a:r>
+              <a:rPr/>
+              <a:t>So ROC measures the false alarms against a population nobody experiences. The technician does not see the 57,000 drives left alone; they see the alarm queue.</a:t>
             </a:r>
           </a:p>
           <a:p>
@@ -6387,6 +6417,34 @@
             </a:pPr>
             <a:r>
               <a:rPr/>
+              <a:t>The two measures answer two different questions, which is why neither replaces the other. AUC: does the model put the failures above the healthy drives? The precision-recall curve: of the alarms it raises, how many are real? On a balanced problem the answers travel together; on an imbalanced one the second can collapse while the first stands still, as slide 48 showed.</a:t>
+            </a:r>
+          </a:p>
+          <a:p>
+            <a:pPr lvl="0" indent="0" marL="0">
+              <a:buNone/>
+            </a:pPr>
+          </a:p>
+          <a:p>
+            <a:pPr lvl="0" indent="0" marL="0">
+              <a:buNone/>
+            </a:pPr>
+            <a:r>
+              <a:rPr/>
+              <a:t>Average precision reads as it is computed: walk down the thresholds from the top; each time recall goes up by a step, take the precision at that point; add the precisions, each weighted by its recall step. Why a random ranking scores 0.038: its precision is the positive rate π at every recall (slide 42 counted it), so the weighted average of a constant is that constant, π = 76 ÷ 2,000. So AP is read against π, not against 0.5 - which is also why it travels across problems with different class balance badly, and must always be quoted with the positive rate beside it.</a:t>
+            </a:r>
+          </a:p>
+          <a:p>
+            <a:pPr lvl="0" indent="0" marL="0">
+              <a:buNone/>
+            </a:pPr>
+          </a:p>
+          <a:p>
+            <a:pPr lvl="0" indent="0" marL="0">
+              <a:buNone/>
+            </a:pPr>
+            <a:r>
+              <a:rPr/>
               <a:t>If someone asks which single number to use when a single number is demanded: average precision, because its baseline moves with the problem. But push back on the premise - the reason to demand a single number is usually to avoid thinking, and this lesson is about the thinking.</a:t>
             </a:r>
           </a:p>
@@ -6593,7 +6651,21 @@
             </a:pPr>
             <a:r>
               <a:rPr/>
-              <a:t>The curve is the total cost on the test set as the threshold moves. The default 0.5 costs €87,620. The cheapest, at 0.08, costs €45,540.</a:t>
+              <a:t>The curve is the total cost on the test set as the threshold moves: FP × 140 + FN × 2,600, the formula on the vertical axis. The default 0.5 costs 13 × 140 + 33 × 2,600 = 1,820 + 85,800 = €87,620. The cheapest, at 0.078, costs 121 × 140 + 11 × 2,600 = 16,940 + 28,600 = €45,540. Read the shape: going down from 0.5, each miss at €2,600 becomes a false alarm at €140, a good trade until false alarms pile up near 0; to the right the cost climbs towards doing nothing, 76 × 2,600 = €197,600. Each little step is one drive crossing the threshold.</a:t>
+            </a:r>
+          </a:p>
+          <a:p>
+            <a:pPr lvl="0" indent="0" marL="0">
+              <a:buNone/>
+            </a:pPr>
+          </a:p>
+          <a:p>
+            <a:pPr lvl="0" indent="0" marL="0">
+              <a:buNone/>
+            </a:pPr>
+            <a:r>
+              <a:rPr/>
+              <a:t>One condition to say now, because slide 54 comes back to it: 0.078 was found by looking at the test set. Properly it is chosen on a validation set (lesson 5).</a:t>
             </a:r>
           </a:p>
           <a:p>
@@ -6703,63 +6775,49 @@
             </a:pPr>
             <a:r>
               <a:rPr/>
-              <a:t>Derive it in one line on the board, because it is two steps and it lands: flag the drive if the expected cost of flagging is lower than the expected cost of not. Flagging costs C-FP if the drive was healthy, which happens with probability 1 minus p. Leaving it costs C-FN if it fails, probability p. Set one below the other and solve.</a:t>
-            </a:r>
-          </a:p>
-          <a:p>
-            <a:pPr lvl="0" indent="0" marL="0">
-              <a:buNone/>
-            </a:pPr>
-          </a:p>
-          <a:p>
-            <a:pPr lvl="0" indent="0" marL="0">
-              <a:buNone/>
-            </a:pPr>
-            <a:r>
-              <a:rPr/>
-              <a:t>Then read the formula rather than the number, which is the part worth remembering: the optimal threshold does not depend on the model, the dataset, or the class balance. Only on the RATIO of the two costs.</a:t>
-            </a:r>
-          </a:p>
-          <a:p>
-            <a:pPr lvl="0" indent="0" marL="0">
-              <a:buNone/>
-            </a:pPr>
-          </a:p>
-          <a:p>
-            <a:pPr lvl="0" indent="0" marL="0">
-              <a:buNone/>
-            </a:pPr>
-            <a:r>
-              <a:rPr/>
-              <a:t>State the condition, because the derivation used it: p must be an honest probability - among drives given 0.05, about 5% really fail. That property is called calibration (slide 47). Divide every probability by ten, as slide 47 did, and the formula would still say 0.051 while flagging far too few drives.</a:t>
-            </a:r>
-          </a:p>
-          <a:p>
-            <a:pPr lvl="0" indent="0" marL="0">
-              <a:buNone/>
-            </a:pPr>
-          </a:p>
-          <a:p>
-            <a:pPr lvl="0" indent="0" marL="0">
-              <a:buNone/>
-            </a:pPr>
-            <a:r>
-              <a:rPr/>
-              <a:t>If the errors cost the same, t-star is 0.5 and the default was right all along. As misses grow more expensive, it falls towards zero.</a:t>
-            </a:r>
-          </a:p>
-          <a:p>
-            <a:pPr lvl="0" indent="0" marL="0">
-              <a:buNone/>
-            </a:pPr>
-          </a:p>
-          <a:p>
-            <a:pPr lvl="0" indent="0" marL="0">
-              <a:buNone/>
-            </a:pPr>
-            <a:r>
-              <a:rPr/>
-              <a:t>Empirically we found 0.08 against a theoretical 0.051, and the curve is flat between them. Two likely reasons for the gap: the test set holds only 76 failures, and the probabilities are good but not perfectly calibrated.</a:t>
+              <a:t>Before any formula, the picture. The horizontal axis is one drive’s probability of failing, p; the vertical axis is the expected cost of each decision for that drive.</a:t>
+            </a:r>
+          </a:p>
+          <a:p>
+            <a:pPr lvl="0" indent="0" marL="0">
+              <a:buNone/>
+            </a:pPr>
+          </a:p>
+          <a:p>
+            <a:pPr lvl="0" indent="0" marL="0">
+              <a:buNone/>
+            </a:pPr>
+            <a:r>
+              <a:rPr/>
+              <a:t>Teal: flag it. We pay 140 euros for the replacement only if the drive was healthy, which happens with probability 1 minus p, so the expected cost is (1 - p) times 140 - nearly flat, because 140 is small. Rust: leave it. We pay 2,600 euros only if it fails, probability p, so the expected cost is p times 2,600 - steep.</a:t>
+            </a:r>
+          </a:p>
+          <a:p>
+            <a:pPr lvl="0" indent="0" marL="0">
+              <a:buNone/>
+            </a:pPr>
+          </a:p>
+          <a:p>
+            <a:pPr lvl="0" indent="0" marL="0">
+              <a:buNone/>
+            </a:pPr>
+            <a:r>
+              <a:rPr/>
+              <a:t>Left of the crossing, leaving the drive is cheaper; right of it, flagging is. So the rule is: flag every drive whose probability is beyond the crossing. The next slide finds where the crossing is.</a:t>
+            </a:r>
+          </a:p>
+          <a:p>
+            <a:pPr lvl="0" indent="0" marL="0">
+              <a:buNone/>
+            </a:pPr>
+          </a:p>
+          <a:p>
+            <a:pPr lvl="0" indent="0" marL="0">
+              <a:buNone/>
+            </a:pPr>
+            <a:r>
+              <a:rPr/>
+              <a:t>Then ask the room what happens to the crossing if a failure cost 140 euros as well: both lines would have the same slope in opposite directions, and they would cross at 0.5 - the default threshold, right only when the costs are equal. Handout section 7.2.</a:t>
             </a:r>
           </a:p>
         </p:txBody>
@@ -6841,49 +6899,63 @@
             </a:pPr>
             <a:r>
               <a:rPr/>
-              <a:t>The closed form of the previous slide, drawn. The horizontal axis is one drive’s probability of failing, p; the vertical axis is the expected cost of each decision for that drive.</a:t>
-            </a:r>
-          </a:p>
-          <a:p>
-            <a:pPr lvl="0" indent="0" marL="0">
-              <a:buNone/>
-            </a:pPr>
-          </a:p>
-          <a:p>
-            <a:pPr lvl="0" indent="0" marL="0">
-              <a:buNone/>
-            </a:pPr>
-            <a:r>
-              <a:rPr/>
-              <a:t>Teal: flag it. We pay 140 euros for the replacement only if the drive was healthy, which happens with probability 1 minus p, so the expected cost is (1 - p) times 140 - nearly flat, because 140 is small. Rust: leave it. We pay 2,600 euros only if it fails, probability p, so the expected cost is p times 2,600 - steep.</a:t>
-            </a:r>
-          </a:p>
-          <a:p>
-            <a:pPr lvl="0" indent="0" marL="0">
-              <a:buNone/>
-            </a:pPr>
-          </a:p>
-          <a:p>
-            <a:pPr lvl="0" indent="0" marL="0">
-              <a:buNone/>
-            </a:pPr>
-            <a:r>
-              <a:rPr/>
-              <a:t>Where the lines cross the two decisions cost the same: (1 - p) times 140 = p times 2,600, which gives p = 140 divided by (140 + 2,600) = 0.051, the t-star of slide 52. Left of the crossing, leaving the drive is cheaper; right of it, flagging is. So the rule is: flag every drive whose probability is above 0.051.</a:t>
-            </a:r>
-          </a:p>
-          <a:p>
-            <a:pPr lvl="0" indent="0" marL="0">
-              <a:buNone/>
-            </a:pPr>
-          </a:p>
-          <a:p>
-            <a:pPr lvl="0" indent="0" marL="0">
-              <a:buNone/>
-            </a:pPr>
-            <a:r>
-              <a:rPr/>
-              <a:t>Then ask the room what happens to the crossing if a failure cost 140 euros as well: both lines would have the same slope in opposite directions, and they would cross at 0.5 - the default threshold, right only when the costs are equal. Handout section 7.2.</a:t>
+              <a:t>Derive it on the board, because it is two steps and it lands. Flag the drive when leaving it costs more in expectation than flagging it: p times 2,600 &gt; (1 - p) times 140. Multiply out: 140 &lt; p × (2,600 + 140) = p × 2,740, so p &gt; 140 ÷ 2,740 = 0.051. The probability does not simplify away: it is the unknown we solve for, and t* is a value of p - the one at which the two expected costs are equal, the crossing of the previous slide. The rule reads “flag every drive with p above t*“.</a:t>
+            </a:r>
+          </a:p>
+          <a:p>
+            <a:pPr lvl="0" indent="0" marL="0">
+              <a:buNone/>
+            </a:pPr>
+          </a:p>
+          <a:p>
+            <a:pPr lvl="0" indent="0" marL="0">
+              <a:buNone/>
+            </a:pPr>
+            <a:r>
+              <a:rPr/>
+              <a:t>Then read the formula rather than the number, which is the part worth remembering: the optimal threshold does not depend on the model, the dataset, or the class balance. Only on the RATIO of the two costs.</a:t>
+            </a:r>
+          </a:p>
+          <a:p>
+            <a:pPr lvl="0" indent="0" marL="0">
+              <a:buNone/>
+            </a:pPr>
+          </a:p>
+          <a:p>
+            <a:pPr lvl="0" indent="0" marL="0">
+              <a:buNone/>
+            </a:pPr>
+            <a:r>
+              <a:rPr/>
+              <a:t>State the condition, because the derivation used it: p must be an honest probability - among drives given 0.05, about 5% really fail. That property is called calibration (slide 47). Divide every probability by ten, as slide 47 did, and the formula would still say 0.051 while flagging far too few drives.</a:t>
+            </a:r>
+          </a:p>
+          <a:p>
+            <a:pPr lvl="0" indent="0" marL="0">
+              <a:buNone/>
+            </a:pPr>
+          </a:p>
+          <a:p>
+            <a:pPr lvl="0" indent="0" marL="0">
+              <a:buNone/>
+            </a:pPr>
+            <a:r>
+              <a:rPr/>
+              <a:t>If the errors cost the same, t-star is 0.5 and the default was right all along. As misses grow more expensive, it falls towards zero.</a:t>
+            </a:r>
+          </a:p>
+          <a:p>
+            <a:pPr lvl="0" indent="0" marL="0">
+              <a:buNone/>
+            </a:pPr>
+          </a:p>
+          <a:p>
+            <a:pPr lvl="0" indent="0" marL="0">
+              <a:buNone/>
+            </a:pPr>
+            <a:r>
+              <a:rPr/>
+              <a:t>Empirically we found 0.078 against a theoretical 0.051, and notebook 3 counts what separates them: 45 test drives are scored between the two, and 1 of them failed. Flagging them would cost 44 × 140 = €6,160, leaving them cost that one failure, €2,600 - so on this test set leaving them was cheaper. But their probabilities add up to 2.76 expected failures: for a calibrated model, leaving them costs about 2.76 × 2,600 = €7,176 against (45 − 2.76) × 140 = €5,914 for flagging, and the rule is right. The gap is 45 drives with one failure where the model expected almost three: sampling noise on 76 failures, plus calibration that is good but not perfect. At t* itself the cost is €49,100, 8% above the minimum - the flat bottom of slide 51.</a:t>
             </a:r>
           </a:p>
         </p:txBody>
@@ -7007,7 +7079,21 @@
             </a:pPr>
             <a:r>
               <a:rPr/>
-              <a:t>Until then, treat the 0.08 as a demonstration of a method, not a result anyone could publish.</a:t>
+              <a:t>The two prices on the slide show what is at stake. t* was fixed by the costs before anyone looked at the test set; 0.078 is the best of 300 thresholds tried on it. The €3,560 between them (8%) is in part luck the test set handed us - the 45 drives with one failure where almost three were expected - and the minimum of many tries on the same data is biased downwards. The test score is an unbiased estimate only if the test set played no part in any choice and is used once, at the end.</a:t>
+            </a:r>
+          </a:p>
+          <a:p>
+            <a:pPr lvl="0" indent="0" marL="0">
+              <a:buNone/>
+            </a:pPr>
+          </a:p>
+          <a:p>
+            <a:pPr lvl="0" indent="0" marL="0">
+              <a:buNone/>
+            </a:pPr>
+            <a:r>
+              <a:rPr/>
+              <a:t>Until then, treat the 0.078 as a demonstration of a method, not a result anyone could publish.</a:t>
             </a:r>
           </a:p>
         </p:txBody>
@@ -7089,77 +7175,49 @@
             </a:pPr>
             <a:r>
               <a:rPr/>
-              <a:t>class_weight=“balanced” makes each failed drive count, in the cost, as much as about 25 healthy ones - the ratio of healthy to failed drives in the training set, (6,000 - 230) divided by 230 = 25. It changes the training rather than the decision.</a:t>
-            </a:r>
-          </a:p>
-          <a:p>
-            <a:pPr lvl="0" indent="0" marL="0">
-              <a:buNone/>
-            </a:pPr>
-          </a:p>
-          <a:p>
-            <a:pPr lvl="0" indent="0" marL="0">
-              <a:buNone/>
-            </a:pPr>
-            <a:r>
-              <a:rPr/>
-              <a:t>The figure is notebook 3’s comparison drawn as bills, one bar per model. Rust is the cost of the missed failures, FN times 2,600 euros; gold is the cost of the false alarms, FP times 140 euros. The default model misses 33 failures: 33 times 2,600 plus 13 times 140 is 87,620. The threshold at 0.08 misses 11 and raises 121 false alarms: 45,540. Balanced weights miss 8 and raise 205: 8 times 2,600 plus 205 times 140 is 49,500.</a:t>
-            </a:r>
-          </a:p>
-          <a:p>
-            <a:pPr lvl="0" indent="0" marL="0">
-              <a:buNone/>
-            </a:pPr>
-          </a:p>
-          <a:p>
-            <a:pPr lvl="0" indent="0" marL="0">
-              <a:buNone/>
-            </a:pPr>
-            <a:r>
-              <a:rPr/>
-              <a:t>Point at the AUC under each name: 0.949 against 0.950. Reweighting taught the model essentially nothing new about disk failure. What it did was move where the model puts its 0.5 line - the same lever as the threshold, pulled at a different moment.</a:t>
-            </a:r>
-          </a:p>
-          <a:p>
-            <a:pPr lvl="0" indent="0" marL="0">
-              <a:buNone/>
-            </a:pPr>
-          </a:p>
-          <a:p>
-            <a:pPr lvl="0" indent="0" marL="0">
-              <a:buNone/>
-            </a:pPr>
-            <a:r>
-              <a:rPr/>
-              <a:t>That matters because class weighting is usually presented as a REMEDY for imbalance. It is not a remedy; it is another way of setting the same decision. The remedy, where one exists, is more positive examples.</a:t>
-            </a:r>
-          </a:p>
-          <a:p>
-            <a:pPr lvl="0" indent="0" marL="0">
-              <a:buNone/>
-            </a:pPr>
-          </a:p>
-          <a:p>
-            <a:pPr lvl="0" indent="0" marL="0">
-              <a:buNone/>
-            </a:pPr>
-            <a:r>
-              <a:rPr/>
-              <a:t>Where it earns its place: when a downstream tool insists on predict() and gives you no threshold to move. Then this is how you shift the operating point.</a:t>
-            </a:r>
-          </a:p>
-          <a:p>
-            <a:pPr lvl="0" indent="0" marL="0">
-              <a:buNone/>
-            </a:pPr>
-          </a:p>
-          <a:p>
-            <a:pPr lvl="0" indent="0" marL="0">
-              <a:buNone/>
-            </a:pPr>
-            <a:r>
-              <a:rPr/>
-              <a:t>The same argument holds for resampling and for SMOTE (synthetic minority oversampling technique, which builds artificial minority examples): they move the operating point too. And both must be applied to the training rows only - inside each cross-validation fold, once lesson 5 introduces folds. Duplicated or synthetic failures in the test set would be scored as if they were real drives, and the test score would stop describing the real fleet; lesson 2 made the same argument for fitting the imputer on the training rows only.</a:t>
+              <a:t>Three steps, in order.</a:t>
+            </a:r>
+          </a:p>
+          <a:p>
+            <a:pPr lvl="0" indent="0" marL="0">
+              <a:buNone/>
+            </a:pPr>
+          </a:p>
+          <a:p>
+            <a:pPr lvl="0" indent="0" marL="0">
+              <a:buNone/>
+            </a:pPr>
+            <a:r>
+              <a:rPr/>
+              <a:t>What the weights are. The two numbers on the slide: 6,000 ÷ (2 × 5,770) = 0.52 and 6,000 ÷ (2 × 230) = 13.0. The log loss adds one term per training drive. A class weight multiplies the term of every drive in that class. “balanced” sets the weight to m divided by (2 times the number of drives in the class): 0.52 for a healthy drive, 13.0 for a failed one. Each failure therefore counts as 25 healthy drives - as if the training set held 25 copies of every failure.</a:t>
+            </a:r>
+          </a:p>
+          <a:p>
+            <a:pPr lvl="0" indent="0" marL="0">
+              <a:buNone/>
+            </a:pPr>
+          </a:p>
+          <a:p>
+            <a:pPr lvl="0" indent="0" marL="0">
+              <a:buNone/>
+            </a:pPr>
+            <a:r>
+              <a:rPr/>
+              <a:t>Where the 25 comes from: the class frequencies, 5,770 healthy against 230 failed in training. Not the costs. A predictable slip: reading “balanced” as “weighted by what the errors cost”. Both are weights and both push towards the failures, so the reading is natural - but balanced would give 25 whatever a miss cost. Weights from the costs exist too, and they are a separate choice: class_weight={0: 140, 1: 2600}, ratio 18.6. Notebook 3 fits that model as well: at 0.5 it raises 164 false alarms and misses 9, close to the plain model at t* (165 and 10).</a:t>
+            </a:r>
+          </a:p>
+          <a:p>
+            <a:pPr lvl="0" indent="0" marL="0">
+              <a:buNone/>
+            </a:pPr>
+          </a:p>
+          <a:p>
+            <a:pPr lvl="0" indent="0" marL="0">
+              <a:buNone/>
+            </a:pPr>
+            <a:r>
+              <a:rPr/>
+              <a:t>What the weights do. For logistic regression the main effect is on the intercept: it rises from −6.09 to −2.95, by 3.14, close to log 25 = 3.22. Every probability goes up, and the weighted model’s 0.5 lands where the plain model’s 1 ÷ (1 + 25) = 0.038 was. Notebook 3 checks it: the plain model at 0.038 raises 208 false alarms and misses 8; the weighted model at 0.5 raises 205 and misses 8; the two agree on 1,987 of the 2,000 test drives. The general rule: weights with ratio k behave like a threshold of 1 ÷ (1 + k). Balanced weights land near the cost optimum here only because 25 happens to be close to 18.6.</a:t>
             </a:r>
           </a:p>
         </p:txBody>
@@ -7241,21 +7299,63 @@
             </a:pPr>
             <a:r>
               <a:rPr/>
-              <a:t>The ROC curve by hand, the 200,000-pair experiment, the cost curve, then the multiclass matrix. Run notebook 03. Fifteen minutes, and the two multiclass slides that follow (57 and 58) are shown when the notebook reaches its last section, so they run alongside it rather than after it.</a:t>
-            </a:r>
-          </a:p>
-          <a:p>
-            <a:pPr lvl="0" indent="0" marL="0">
-              <a:buNone/>
-            </a:pPr>
-          </a:p>
-          <a:p>
-            <a:pPr lvl="0" indent="0" marL="0">
-              <a:buNone/>
-            </a:pPr>
-            <a:r>
-              <a:rPr/>
-              <a:t>If time is short, keep the pairs experiment: it turns a definition they would otherwise memorise into something they watched happen.</a:t>
+              <a:t>The figure is notebook 3’s comparison drawn as bills, one bar per model. Rust is the cost of the missed failures, FN times 2,600 euros; gold is the cost of the false alarms, FP times 140 euros. The default model misses 33 failures: 33 times 2,600 plus 13 times 140 is 87,620. The threshold at 0.078 misses 11 and raises 121 false alarms: 45,540. Balanced weights miss 8 and raise 205: 8 times 2,600 plus 205 times 140 is 49,500.</a:t>
+            </a:r>
+          </a:p>
+          <a:p>
+            <a:pPr lvl="0" indent="0" marL="0">
+              <a:buNone/>
+            </a:pPr>
+          </a:p>
+          <a:p>
+            <a:pPr lvl="0" indent="0" marL="0">
+              <a:buNone/>
+            </a:pPr>
+            <a:r>
+              <a:rPr/>
+              <a:t>Point at the AUC under each name: 0.949 against 0.950. Reweighting taught the model essentially nothing new about disk failure. What it did was move where the model puts its 0.5 line - the same lever as the threshold, pulled at training time instead of after it, as the previous slide showed.</a:t>
+            </a:r>
+          </a:p>
+          <a:p>
+            <a:pPr lvl="0" indent="0" marL="0">
+              <a:buNone/>
+            </a:pPr>
+          </a:p>
+          <a:p>
+            <a:pPr lvl="0" indent="0" marL="0">
+              <a:buNone/>
+            </a:pPr>
+            <a:r>
+              <a:rPr/>
+              <a:t>That matters because class weighting is usually presented as a REMEDY for imbalance. It is not a remedy; it is another way of setting the same decision. The remedy, where one exists, is more positive examples.</a:t>
+            </a:r>
+          </a:p>
+          <a:p>
+            <a:pPr lvl="0" indent="0" marL="0">
+              <a:buNone/>
+            </a:pPr>
+          </a:p>
+          <a:p>
+            <a:pPr lvl="0" indent="0" marL="0">
+              <a:buNone/>
+            </a:pPr>
+            <a:r>
+              <a:rPr/>
+              <a:t>Where it earns its place: when a downstream tool insists on predict() and gives you no threshold to move. Then this is how you shift the operating point.</a:t>
+            </a:r>
+          </a:p>
+          <a:p>
+            <a:pPr lvl="0" indent="0" marL="0">
+              <a:buNone/>
+            </a:pPr>
+          </a:p>
+          <a:p>
+            <a:pPr lvl="0" indent="0" marL="0">
+              <a:buNone/>
+            </a:pPr>
+            <a:r>
+              <a:rPr/>
+              <a:t>The same argument holds for resampling and for SMOTE (synthetic minority oversampling technique, which builds artificial minority examples): they move the operating point too. And both must be applied to the training rows only - inside each cross-validation fold, once lesson 5 introduces folds. Duplicated or synthetic failures in the test set would be scored as if they were real drives, and the test score would stop describing the real fleet; lesson 2 made the same argument for fitting the imputer on the training rows only.</a:t>
             </a:r>
           </a:p>
         </p:txBody>
@@ -7337,49 +7437,21 @@
             </a:pPr>
             <a:r>
               <a:rPr/>
-              <a:t>Real fleets are not healthy-or-dead. A drive can be degraded: readable, but reporting errors, and worth replacing at the next maintenance window rather than at three in the morning.</a:t>
-            </a:r>
-          </a:p>
-          <a:p>
-            <a:pPr lvl="0" indent="0" marL="0">
-              <a:buNone/>
-            </a:pPr>
-          </a:p>
-          <a:p>
-            <a:pPr lvl="0" indent="0" marL="0">
-              <a:buNone/>
-            </a:pPr>
-            <a:r>
-              <a:rPr/>
-              <a:t>For K classes the model produces one score per class and turns them into K probabilities that add up to 1 - the softmax, which for two classes reduces exactly to the sigmoid. The cost generalises to categorical cross-entropy, and it is the same idea: the negative log of the probability assigned to what actually happened. Handout section 10.</a:t>
-            </a:r>
-          </a:p>
-          <a:p>
-            <a:pPr lvl="0" indent="0" marL="0">
-              <a:buNone/>
-            </a:pPr>
-          </a:p>
-          <a:p>
-            <a:pPr lvl="0" indent="0" marL="0">
-              <a:buNone/>
-            </a:pPr>
-            <a:r>
-              <a:rPr/>
-              <a:t>Read the off-diagonal cells rather than the accuracy. Degraded is the hard class, and understandably - it sits between two neighbours that both look like it from a distance.</a:t>
-            </a:r>
-          </a:p>
-          <a:p>
-            <a:pPr lvl="0" indent="0" marL="0">
-              <a:buNone/>
-            </a:pPr>
-          </a:p>
-          <a:p>
-            <a:pPr lvl="0" indent="0" marL="0">
-              <a:buNone/>
-            </a:pPr>
-            <a:r>
-              <a:rPr/>
-              <a:t>Precision and recall are computed one class at a time: each class in turn is the positive one, the rest are negative.</a:t>
+              <a:t>The ROC curve by hand, the 200,000-pair experiment, the cost curve, then the multiclass matrix. Run notebook 03. Fifteen minutes, and the three multiclass slides that follow (58 to 60) are shown when the notebook reaches its last section, so they run alongside it rather than after it.</a:t>
+            </a:r>
+          </a:p>
+          <a:p>
+            <a:pPr lvl="0" indent="0" marL="0">
+              <a:buNone/>
+            </a:pPr>
+          </a:p>
+          <a:p>
+            <a:pPr lvl="0" indent="0" marL="0">
+              <a:buNone/>
+            </a:pPr>
+            <a:r>
+              <a:rPr/>
+              <a:t>If time is short, keep the pairs experiment: it turns a definition they would otherwise memorise into something they watched happen.</a:t>
             </a:r>
           </a:p>
         </p:txBody>
@@ -7461,35 +7533,49 @@
             </a:pPr>
             <a:r>
               <a:rPr/>
-              <a:t>The same choice as before, now with a much starker gap on three classes. Notebook 3, the three-class model: one bar per class, its F1 from classification_report, and the two averages as lines.</a:t>
-            </a:r>
-          </a:p>
-          <a:p>
-            <a:pPr lvl="0" indent="0" marL="0">
-              <a:buNone/>
-            </a:pPr>
-          </a:p>
-          <a:p>
-            <a:pPr lvl="0" indent="0" marL="0">
-              <a:buNone/>
-            </a:pPr>
-            <a:r>
-              <a:rPr/>
-              <a:t>Macro treats the three conditions as equally important: (0.947 + 0.545 + 0.629) divided by 3 = 0.707, the dotted line. Weighted multiplies each class by its number of test drives: (1,665 times 0.947 + 259 times 0.545 + 76 times 0.629) divided by 2,000 = 0.883, the dashed line. The healthy class - 1,665 of 2,000, five drives in six - does most of the talking, so the dashed line sits close to the healthy bar.</a:t>
-            </a:r>
-          </a:p>
-          <a:p>
-            <a:pPr lvl="0" indent="0" marL="0">
-              <a:buNone/>
-            </a:pPr>
-          </a:p>
-          <a:p>
-            <a:pPr lvl="0" indent="0" marL="0">
-              <a:buNone/>
-            </a:pPr>
-            <a:r>
-              <a:rPr/>
-              <a:t>Which to quote is a question about the application, not about statistics. If missing a failure matters as much as missing a healthy drive, macro is the honest one. Say which you used, always.</a:t>
+              <a:t>Real fleets are not healthy-or-dead. A drive can be degraded: readable, but reporting errors, and worth replacing at the next maintenance window rather than at three in the morning. So three classes.</a:t>
+            </a:r>
+          </a:p>
+          <a:p>
+            <a:pPr lvl="0" indent="0" marL="0">
+              <a:buNone/>
+            </a:pPr>
+          </a:p>
+          <a:p>
+            <a:pPr lvl="0" indent="0" marL="0">
+              <a:buNone/>
+            </a:pPr>
+            <a:r>
+              <a:rPr/>
+              <a:t>The model keeps the idea of lesson 4’s first half and triplicates it: one linear score per class, each with its own coefficients. The softmax turns three scores into three probabilities in two moves - exponentiate, so all three are positive; divide by their sum, so they add up to 1. The largest score keeps the largest share. With two classes, subtract z₀ from both scores and the softmax becomes the sigmoid of z₁ − z₀: nothing new, the same model seen from further away.</a:t>
+            </a:r>
+          </a:p>
+          <a:p>
+            <a:pPr lvl="0" indent="0" marL="0">
+              <a:buNone/>
+            </a:pPr>
+          </a:p>
+          <a:p>
+            <a:pPr lvl="0" indent="0" marL="0">
+              <a:buNone/>
+            </a:pPr>
+            <a:r>
+              <a:rPr/>
+              <a:t>Work the drive on the slide if there is time: e to the 0.615 is 1.85, e to the 0.603 is 1.83, e to the −1.218 is 0.30; the sum is 3.97; dividing gives 0.466, 0.460, 0.074. Healthy wins by 0.006 - and the drive was degraded. That is what “degraded is the hard class” looks like from the inside.</a:t>
+            </a:r>
+          </a:p>
+          <a:p>
+            <a:pPr lvl="0" indent="0" marL="0">
+              <a:buNone/>
+            </a:pPr>
+          </a:p>
+          <a:p>
+            <a:pPr lvl="0" indent="0" marL="0">
+              <a:buNone/>
+            </a:pPr>
+            <a:r>
+              <a:rPr/>
+              <a:t>The decision is the largest probability, so there is no 0.5 threshold here: notebook 3 counts 33 test drives assigned a class whose probability is below 0.5. The cost generalises to categorical cross-entropy, the same idea as the log loss: the negative log of the probability assigned to what actually happened. Handout section 10.1. Lesson 9 uses the same softmax for ten digits.</a:t>
             </a:r>
           </a:p>
         </p:txBody>
@@ -7571,35 +7657,35 @@
             </a:pPr>
             <a:r>
               <a:rPr/>
-              <a:t>Close on the number they started with. 306 failures out of 8,000; 96.2% accuracy for a model that does nothing.</a:t>
-            </a:r>
-          </a:p>
-          <a:p>
-            <a:pPr lvl="0" indent="0" marL="0">
-              <a:buNone/>
-            </a:pPr>
-          </a:p>
-          <a:p>
-            <a:pPr lvl="0" indent="0" marL="0">
-              <a:buNone/>
-            </a:pPr>
-            <a:r>
-              <a:rPr/>
-              <a:t>If they remember one thing from today, it should be the reflex to ask “what’s the base rate?” before believing any accuracy figure. That reflex is worth more than any of the formulas.</a:t>
-            </a:r>
-          </a:p>
-          <a:p>
-            <a:pPr lvl="0" indent="0" marL="0">
-              <a:buNone/>
-            </a:pPr>
-          </a:p>
-          <a:p>
-            <a:pPr lvl="0" indent="0" marL="0">
-              <a:buNone/>
-            </a:pPr>
-            <a:r>
-              <a:rPr/>
-              <a:t>The second thing: accuracy, precision, recall and F1 all depended on a threshold, and the threshold has an answer - C-FP over C-FP plus C-FN, for honest probabilities - that comes from the business, not from the data.</a:t>
+              <a:t>The previous slide gave the probabilities; this is where the decisions land.</a:t>
+            </a:r>
+          </a:p>
+          <a:p>
+            <a:pPr lvl="0" indent="0" marL="0">
+              <a:buNone/>
+            </a:pPr>
+          </a:p>
+          <a:p>
+            <a:pPr lvl="0" indent="0" marL="0">
+              <a:buNone/>
+            </a:pPr>
+            <a:r>
+              <a:rPr/>
+              <a:t>Read the off-diagonal cells rather than the accuracy. Degraded is the hard class, and understandably - it sits between two neighbours that both look like it from a distance: 121 degraded drives were called healthy, 31 failed drives were called degraded.</a:t>
+            </a:r>
+          </a:p>
+          <a:p>
+            <a:pPr lvl="0" indent="0" marL="0">
+              <a:buNone/>
+            </a:pPr>
+          </a:p>
+          <a:p>
+            <a:pPr lvl="0" indent="0" marL="0">
+              <a:buNone/>
+            </a:pPr>
+            <a:r>
+              <a:rPr/>
+              <a:t>Precision and recall are computed one class at a time: each class in turn is the positive one, the rest are negative.</a:t>
             </a:r>
           </a:p>
         </p:txBody>
@@ -7681,49 +7767,49 @@
             </a:pPr>
             <a:r>
               <a:rPr/>
-              <a:t>Set it explicitly and say out loud when it comes back: the first ten minutes of next Friday, 6 November.</a:t>
-            </a:r>
-          </a:p>
-          <a:p>
-            <a:pPr lvl="0" indent="0" marL="0">
-              <a:buNone/>
-            </a:pPr>
-          </a:p>
-          <a:p>
-            <a:pPr lvl="0" indent="0" marL="0">
-              <a:buNone/>
-            </a:pPr>
-            <a:r>
-              <a:rPr/>
-              <a:t>Emphasise which part matters at the exam, where one of the ten exercises is drawn and they talk through their own notebook. The classifier is a few lines and everyone will get it. The paragraph defending the threshold choice is where the learning is, and it is what they will be asked to defend.</a:t>
-            </a:r>
-          </a:p>
-          <a:p>
-            <a:pPr lvl="0" indent="0" marL="0">
-              <a:buNone/>
-            </a:pPr>
-          </a:p>
-          <a:p>
-            <a:pPr lvl="0" indent="0" marL="0">
-              <a:buNone/>
-            </a:pPr>
-            <a:r>
-              <a:rPr/>
-              <a:t>Warn them about the trap deliberately planted: the dataset has a decoy column, as this one did, and the exercise asks them to report AUC and average precision together. Anyone reporting AUC alone will be reporting a number that looks better than the model is.</a:t>
-            </a:r>
-          </a:p>
-          <a:p>
-            <a:pPr lvl="0" indent="0" marL="0">
-              <a:buNone/>
-            </a:pPr>
-          </a:p>
-          <a:p>
-            <a:pPr lvl="0" indent="0" marL="0">
-              <a:buNone/>
-            </a:pPr>
-            <a:r>
-              <a:rPr/>
-              <a:t>Next week: experimental methodology. Cross-validation, bias-variance, and the honest way to make every choice we made by hand today.</a:t>
+              <a:t>The same choice as before, now with a much starker gap on three classes. Notebook 3, the three-class model: one bar per class, its F1 from classification_report, and the two averages as lines.</a:t>
+            </a:r>
+          </a:p>
+          <a:p>
+            <a:pPr lvl="0" indent="0" marL="0">
+              <a:buNone/>
+            </a:pPr>
+          </a:p>
+          <a:p>
+            <a:pPr lvl="0" indent="0" marL="0">
+              <a:buNone/>
+            </a:pPr>
+            <a:r>
+              <a:rPr/>
+              <a:t>Macro treats the three conditions as equally important: (0.947 + 0.545 + 0.629) divided by 3 = 0.707, the dotted line. Weighted multiplies each class by its number of test drives: (1,665 times 0.947 + 259 times 0.545 + 76 times 0.629) divided by 2,000 = 0.883, the dashed line. The healthy class - 1,665 of 2,000, five drives in six - does most of the talking, so the dashed line sits close to the healthy bar.</a:t>
+            </a:r>
+          </a:p>
+          <a:p>
+            <a:pPr lvl="0" indent="0" marL="0">
+              <a:buNone/>
+            </a:pPr>
+          </a:p>
+          <a:p>
+            <a:pPr lvl="0" indent="0" marL="0">
+              <a:buNone/>
+            </a:pPr>
+            <a:r>
+              <a:rPr/>
+              <a:t>The weights are the support: the number of test drives whose TRUE class is that one, not the number predicted. The gap between the two averages, 0.883 − 0.707 = 0.18, is itself the finding: the small classes are handled much worse than the big one. A question that may come: the weighted average of recall is always the accuracy, 0.889 here, because support times recall is the number of drives of that class classified correctly.</a:t>
+            </a:r>
+          </a:p>
+          <a:p>
+            <a:pPr lvl="0" indent="0" marL="0">
+              <a:buNone/>
+            </a:pPr>
+          </a:p>
+          <a:p>
+            <a:pPr lvl="0" indent="0" marL="0">
+              <a:buNone/>
+            </a:pPr>
+            <a:r>
+              <a:rPr/>
+              <a:t>Which to quote is a question about the application, not about statistics. If missing a failure matters as much as missing a healthy drive, macro is the honest one. Say which you used, always.</a:t>
             </a:r>
           </a:p>
         </p:txBody>
@@ -7870,6 +7956,254 @@
             <a:fld id="{18BDFEC3-8487-43E8-A154-7C12CBC1FFF2}" type="slidenum">
               <a:rPr lang="en-US"/>
               <a:t>7</a:t>
+            </a:fld>
+            <a:endParaRPr lang="en-US"/>
+          </a:p>
+        </p:txBody>
+      </p:sp>
+    </p:spTree>
+  </p:cSld>
+</p:notes>
+</file>
+
+<file path=ppt/notesSlides/notesSlide60.xml><?xml version="1.0" encoding="utf-8"?>
+<p:notes xmlns:a="http://schemas.openxmlformats.org/drawingml/2006/main" xmlns:r="http://schemas.openxmlformats.org/officeDocument/2006/relationships" xmlns:p="http://schemas.openxmlformats.org/presentationml/2006/main">
+  <p:cSld>
+    <p:spTree>
+      <p:nvGrpSpPr>
+        <p:cNvPr id="1" name=""/>
+        <p:cNvGrpSpPr/>
+        <p:nvPr/>
+      </p:nvGrpSpPr>
+      <p:grpSpPr>
+        <a:xfrm>
+          <a:off x="0" y="0"/>
+          <a:ext cx="0" cy="0"/>
+          <a:chOff x="0" y="0"/>
+          <a:chExt cx="0" cy="0"/>
+        </a:xfrm>
+      </p:grpSpPr>
+      <p:sp>
+        <p:nvSpPr>
+          <p:cNvPr id="2" name="Slide Image Placeholder 1"/>
+          <p:cNvSpPr>
+            <a:spLocks noGrp="1" noRot="1" noChangeAspect="1"/>
+          </p:cNvSpPr>
+          <p:nvPr>
+            <p:ph type="sldImg"/>
+          </p:nvPr>
+        </p:nvSpPr>
+        <p:spPr/>
+      </p:sp>
+      <p:sp>
+        <p:nvSpPr>
+          <p:cNvPr id="3" name="Notes Placeholder 2"/>
+          <p:cNvSpPr>
+            <a:spLocks noGrp="1"/>
+          </p:cNvSpPr>
+          <p:nvPr>
+            <p:ph type="body" idx="1"/>
+          </p:nvPr>
+        </p:nvSpPr>
+        <p:spPr/>
+        <p:txBody>
+          <a:bodyPr/>
+          <a:lstStyle/>
+          <a:p>
+            <a:pPr lvl="0" indent="0" marL="0">
+              <a:buNone/>
+            </a:pPr>
+            <a:r>
+              <a:rPr/>
+              <a:t>Close on the number they started with. On the test set, 1,924 of the 2,000 drives are healthy: 1,924 ÷ 2,000 = 96.20% accuracy for a model that does nothing and catches none of the 76 failures.</a:t>
+            </a:r>
+          </a:p>
+          <a:p>
+            <a:pPr lvl="0" indent="0" marL="0">
+              <a:buNone/>
+            </a:pPr>
+          </a:p>
+          <a:p>
+            <a:pPr lvl="0" indent="0" marL="0">
+              <a:buNone/>
+            </a:pPr>
+            <a:r>
+              <a:rPr/>
+              <a:t>If they remember one thing from today, it should be the reflex to ask “what’s the base rate?” before believing any accuracy figure. Not “accuracy is useless”: against its baseline, the model’s 97.70% does say something. That reflex is worth more than any of the formulas.</a:t>
+            </a:r>
+          </a:p>
+          <a:p>
+            <a:pPr lvl="0" indent="0" marL="0">
+              <a:buNone/>
+            </a:pPr>
+          </a:p>
+          <a:p>
+            <a:pPr lvl="0" indent="0" marL="0">
+              <a:buNone/>
+            </a:pPr>
+            <a:r>
+              <a:rPr/>
+              <a:t>The second thing: accuracy, precision, recall and F1 all depended on a threshold, and the threshold has an answer - C-FP over C-FP plus C-FN, for honest probabilities - that comes from the business, not from the data. Class weights move the same line at training time.</a:t>
+            </a:r>
+          </a:p>
+          <a:p>
+            <a:pPr lvl="0" indent="0" marL="0">
+              <a:buNone/>
+            </a:pPr>
+          </a:p>
+          <a:p>
+            <a:pPr lvl="0" indent="0" marL="0">
+              <a:buNone/>
+            </a:pPr>
+            <a:r>
+              <a:rPr/>
+              <a:t>The first bullet is the first half of the lesson in one line: log loss is what maximum likelihood gives, and unlike squared error through the sigmoid it is convex, so gradient descent finds the one minimum.</a:t>
+            </a:r>
+          </a:p>
+        </p:txBody>
+      </p:sp>
+      <p:sp>
+        <p:nvSpPr>
+          <p:cNvPr id="4" name="Slide Number Placeholder 3"/>
+          <p:cNvSpPr>
+            <a:spLocks noGrp="1"/>
+          </p:cNvSpPr>
+          <p:nvPr>
+            <p:ph type="sldNum" sz="quarter" idx="10"/>
+          </p:nvPr>
+        </p:nvSpPr>
+        <p:spPr/>
+        <p:txBody>
+          <a:bodyPr/>
+          <a:lstStyle/>
+          <a:p>
+            <a:fld id="{18BDFEC3-8487-43E8-A154-7C12CBC1FFF2}" type="slidenum">
+              <a:rPr lang="en-US"/>
+              <a:t>61</a:t>
+            </a:fld>
+            <a:endParaRPr lang="en-US"/>
+          </a:p>
+        </p:txBody>
+      </p:sp>
+    </p:spTree>
+  </p:cSld>
+</p:notes>
+</file>
+
+<file path=ppt/notesSlides/notesSlide61.xml><?xml version="1.0" encoding="utf-8"?>
+<p:notes xmlns:a="http://schemas.openxmlformats.org/drawingml/2006/main" xmlns:r="http://schemas.openxmlformats.org/officeDocument/2006/relationships" xmlns:p="http://schemas.openxmlformats.org/presentationml/2006/main">
+  <p:cSld>
+    <p:spTree>
+      <p:nvGrpSpPr>
+        <p:cNvPr id="1" name=""/>
+        <p:cNvGrpSpPr/>
+        <p:nvPr/>
+      </p:nvGrpSpPr>
+      <p:grpSpPr>
+        <a:xfrm>
+          <a:off x="0" y="0"/>
+          <a:ext cx="0" cy="0"/>
+          <a:chOff x="0" y="0"/>
+          <a:chExt cx="0" cy="0"/>
+        </a:xfrm>
+      </p:grpSpPr>
+      <p:sp>
+        <p:nvSpPr>
+          <p:cNvPr id="2" name="Slide Image Placeholder 1"/>
+          <p:cNvSpPr>
+            <a:spLocks noGrp="1" noRot="1" noChangeAspect="1"/>
+          </p:cNvSpPr>
+          <p:nvPr>
+            <p:ph type="sldImg"/>
+          </p:nvPr>
+        </p:nvSpPr>
+        <p:spPr/>
+      </p:sp>
+      <p:sp>
+        <p:nvSpPr>
+          <p:cNvPr id="3" name="Notes Placeholder 2"/>
+          <p:cNvSpPr>
+            <a:spLocks noGrp="1"/>
+          </p:cNvSpPr>
+          <p:nvPr>
+            <p:ph type="body" idx="1"/>
+          </p:nvPr>
+        </p:nvSpPr>
+        <p:spPr/>
+        <p:txBody>
+          <a:bodyPr/>
+          <a:lstStyle/>
+          <a:p>
+            <a:pPr lvl="0" indent="0" marL="0">
+              <a:buNone/>
+            </a:pPr>
+            <a:r>
+              <a:rPr/>
+              <a:t>Set it explicitly and say out loud when it comes back: the first ten minutes of next Friday, 6 November.</a:t>
+            </a:r>
+          </a:p>
+          <a:p>
+            <a:pPr lvl="0" indent="0" marL="0">
+              <a:buNone/>
+            </a:pPr>
+          </a:p>
+          <a:p>
+            <a:pPr lvl="0" indent="0" marL="0">
+              <a:buNone/>
+            </a:pPr>
+            <a:r>
+              <a:rPr/>
+              <a:t>Emphasise which part matters at the exam, where one of the ten exercises is drawn and they talk through their own notebook. The classifier is a few lines and everyone will get it. The paragraph defending the threshold choice is where the learning is, and it is what they will be asked to defend.</a:t>
+            </a:r>
+          </a:p>
+          <a:p>
+            <a:pPr lvl="0" indent="0" marL="0">
+              <a:buNone/>
+            </a:pPr>
+          </a:p>
+          <a:p>
+            <a:pPr lvl="0" indent="0" marL="0">
+              <a:buNone/>
+            </a:pPr>
+            <a:r>
+              <a:rPr/>
+              <a:t>Warn them about the trap deliberately planted: the dataset has a decoy column, as this one did, and the exercise asks them to report AUC and average precision together. Anyone reporting AUC alone will be reporting a number that looks better than the model is.</a:t>
+            </a:r>
+          </a:p>
+          <a:p>
+            <a:pPr lvl="0" indent="0" marL="0">
+              <a:buNone/>
+            </a:pPr>
+          </a:p>
+          <a:p>
+            <a:pPr lvl="0" indent="0" marL="0">
+              <a:buNone/>
+            </a:pPr>
+            <a:r>
+              <a:rPr/>
+              <a:t>Next week: experimental methodology. Cross-validation, bias-variance, and the honest way to make every choice we made by hand today.</a:t>
+            </a:r>
+          </a:p>
+        </p:txBody>
+      </p:sp>
+      <p:sp>
+        <p:nvSpPr>
+          <p:cNvPr id="4" name="Slide Number Placeholder 3"/>
+          <p:cNvSpPr>
+            <a:spLocks noGrp="1"/>
+          </p:cNvSpPr>
+          <p:nvPr>
+            <p:ph type="sldNum" sz="quarter" idx="10"/>
+          </p:nvPr>
+        </p:nvSpPr>
+        <p:spPr/>
+        <p:txBody>
+          <a:bodyPr/>
+          <a:lstStyle/>
+          <a:p>
+            <a:fld id="{18BDFEC3-8487-43E8-A154-7C12CBC1FFF2}" type="slidenum">
+              <a:rPr lang="en-US"/>
+              <a:t>62</a:t>
             </a:fld>
             <a:endParaRPr lang="en-US"/>
           </a:p>
@@ -17846,30 +18180,30 @@
             <a:pPr lvl="0"/>
             <a:r>
               <a:rPr/>
-              <a:t>False positive rate (FPR) divides by </a:t>
+              <a:t>False positive rate (FPR) = FP ÷ (FP + TN) divides by </a:t>
             </a:r>
             <a:r>
               <a:rPr b="1"/>
-              <a:t>all healthy drives</a:t>
-            </a:r>
-            <a:r>
-              <a:rPr/>
-              <a:t>: an enormous, growing denominator</a:t>
+              <a:t>all 57,575 healthy drives</a:t>
+            </a:r>
+            <a:r>
+              <a:rPr/>
+              <a:t>, untouched by the thinning: 304 ÷ 57,575 = 0.0053 in all three fleets</a:t>
             </a:r>
           </a:p>
           <a:p>
             <a:pPr lvl="0"/>
             <a:r>
               <a:rPr/>
-              <a:t>Precision divides by </a:t>
+              <a:t>Precision = TP ÷ (TP + FP): FP </a:t>
             </a:r>
             <a:r>
               <a:rPr b="1"/>
-              <a:t>the alarms raised</a:t>
-            </a:r>
-            <a:r>
-              <a:rPr/>
-              <a:t>, where the false ones dominate</a:t>
+              <a:t>stays 304</a:t>
+            </a:r>
+            <a:r>
+              <a:rPr/>
+              <a:t> while TP falls from 1,127 to 106, so the false alarms’ share of the alarms grows from 0.21 to 0.74</a:t>
             </a:r>
           </a:p>
         </p:txBody>
@@ -18039,7 +18373,7 @@
             </a:pPr>
             <a:r>
               <a:rPr/>
-              <a:t>The rule</a:t>
+              <a:t>The rule: report both</a:t>
             </a:r>
           </a:p>
         </p:txBody>
@@ -18067,43 +18401,40 @@
             <a:pPr lvl="0"/>
             <a:r>
               <a:rPr/>
-              <a:t>On an imbalanced problem, report the </a:t>
+              <a:t>AUC: are failures ranked above healthy drives? Precision-recall: how many alarms are real?</a:t>
+            </a:r>
+          </a:p>
+          <a:p>
+            <a:pPr lvl="0"/>
+            <a:r>
+              <a:rPr/>
+              <a:t>On imbalanced data report the </a:t>
             </a:r>
             <a:r>
               <a:rPr b="1"/>
-              <a:t>precision-recall curve alongside AUC</a:t>
+              <a:t>precision-recall curve beside the AUC</a:t>
+            </a:r>
+            <a:r>
+              <a:rPr/>
+              <a:t>, not instead</a:t>
             </a:r>
           </a:p>
           <a:p>
             <a:pPr lvl="0"/>
             <a:r>
-              <a:rPr/>
-              <a:t>Never instead of it, and never AUC alone</a:t>
+              <a:rPr b="1"/>
+              <a:t>Average precision (AP)</a:t>
+            </a:r>
+            <a:r>
+              <a:rPr/>
+              <a:t>: the area under that curve, Σₖ (Rₖ − Rₖ₋₁) × Pₖ, each threshold’s precision weighted by the recall it adds</a:t>
             </a:r>
           </a:p>
           <a:p>
             <a:pPr lvl="0"/>
             <a:r>
               <a:rPr/>
-              <a:t>Its area is the </a:t>
-            </a:r>
-            <a:r>
-              <a:rPr b="1"/>
-              <a:t>average precision</a:t>
-            </a:r>
-            <a:r>
-              <a:rPr/>
-              <a:t>, </a:t>
-            </a:r>
-            <a:r>
-              <a:rPr>
-                <a:latin typeface="Courier"/>
-              </a:rPr>
-              <a:t>average_precision_score</a:t>
-            </a:r>
-            <a:r>
-              <a:rPr/>
-              <a:t>: 0.717 here, against 0.038 = 76 ÷ 2,000 for a model that ranks at random</a:t>
+              <a:t>Ours: 0.717 (notebook 2); a random ranking: 76 ÷ 2,000 = 0.038</a:t>
             </a:r>
           </a:p>
         </p:txBody>
@@ -18237,88 +18568,6 @@
             </a:pPr>
             <a:r>
               <a:rPr/>
-              <a:t>And it has a closed form</a:t>
-            </a:r>
-          </a:p>
-        </p:txBody>
-      </p:sp>
-      <p:pic>
-        <p:nvPicPr>
-          <p:cNvPr descr="eq_fe4d0730d7.png" id="0" name="Picture 1"/>
-          <p:cNvPicPr>
-            <a:picLocks noGrp="1" noChangeAspect="1"/>
-          </p:cNvPicPr>
-          <p:nvPr/>
-        </p:nvPicPr>
-        <p:blipFill>
-          <a:blip r:embed="rId3"/>
-          <a:stretch>
-            <a:fillRect/>
-          </a:stretch>
-        </p:blipFill>
-        <p:spPr bwMode="auto">
-          <a:xfrm>
-            <a:off x="457204" y="2363590"/>
-            <a:ext cx="8229591" cy="965199"/>
-          </a:xfrm>
-          <a:prstGeom prst="rect">
-            <a:avLst/>
-          </a:prstGeom>
-          <a:noFill/>
-          <a:ln w="9525">
-            <a:noFill/>
-            <a:headEnd/>
-            <a:tailEnd/>
-          </a:ln>
-        </p:spPr>
-      </p:pic>
-    </p:spTree>
-  </p:cSld>
-</p:sld>
-</file>
-
-<file path=ppt/slides/slide53.xml><?xml version="1.0" encoding="utf-8"?>
-<p:sld xmlns:a="http://schemas.openxmlformats.org/drawingml/2006/main" xmlns:r="http://schemas.openxmlformats.org/officeDocument/2006/relationships" xmlns:p="http://schemas.openxmlformats.org/presentationml/2006/main">
-  <p:cSld>
-    <p:spTree>
-      <p:nvGrpSpPr>
-        <p:cNvPr id="1" name=""/>
-        <p:cNvGrpSpPr/>
-        <p:nvPr/>
-      </p:nvGrpSpPr>
-      <p:grpSpPr>
-        <a:xfrm>
-          <a:off x="0" y="0"/>
-          <a:ext cx="0" cy="0"/>
-          <a:chOff x="0" y="0"/>
-          <a:chExt cx="0" cy="0"/>
-        </a:xfrm>
-      </p:grpSpPr>
-      <p:sp>
-        <p:nvSpPr>
-          <p:cNvPr id="2" name="Title 1"/>
-          <p:cNvSpPr>
-            <a:spLocks noGrp="1"/>
-          </p:cNvSpPr>
-          <p:nvPr>
-            <p:ph type="title"/>
-          </p:nvPr>
-        </p:nvSpPr>
-        <p:spPr>
-          <a:xfrm>
-            <a:off x="457200" y="205979"/>
-            <a:ext cx="8229600" cy="857250"/>
-          </a:xfrm>
-        </p:spPr>
-        <p:txBody>
-          <a:bodyPr/>
-          <a:lstStyle/>
-          <a:p>
-            <a:pPr lvl="0" indent="0" marL="0">
-              <a:buNone/>
-            </a:pPr>
-            <a:r>
-              <a:rPr/>
               <a:t>Where the two costs cross</a:t>
             </a:r>
           </a:p>
@@ -18359,6 +18608,88 @@
 </p:sld>
 </file>
 
+<file path=ppt/slides/slide53.xml><?xml version="1.0" encoding="utf-8"?>
+<p:sld xmlns:a="http://schemas.openxmlformats.org/drawingml/2006/main" xmlns:r="http://schemas.openxmlformats.org/officeDocument/2006/relationships" xmlns:p="http://schemas.openxmlformats.org/presentationml/2006/main">
+  <p:cSld>
+    <p:spTree>
+      <p:nvGrpSpPr>
+        <p:cNvPr id="1" name=""/>
+        <p:cNvGrpSpPr/>
+        <p:nvPr/>
+      </p:nvGrpSpPr>
+      <p:grpSpPr>
+        <a:xfrm>
+          <a:off x="0" y="0"/>
+          <a:ext cx="0" cy="0"/>
+          <a:chOff x="0" y="0"/>
+          <a:chExt cx="0" cy="0"/>
+        </a:xfrm>
+      </p:grpSpPr>
+      <p:sp>
+        <p:nvSpPr>
+          <p:cNvPr id="2" name="Title 1"/>
+          <p:cNvSpPr>
+            <a:spLocks noGrp="1"/>
+          </p:cNvSpPr>
+          <p:nvPr>
+            <p:ph type="title"/>
+          </p:nvPr>
+        </p:nvSpPr>
+        <p:spPr>
+          <a:xfrm>
+            <a:off x="457200" y="205979"/>
+            <a:ext cx="8229600" cy="857250"/>
+          </a:xfrm>
+        </p:spPr>
+        <p:txBody>
+          <a:bodyPr/>
+          <a:lstStyle/>
+          <a:p>
+            <a:pPr lvl="0" indent="0" marL="0">
+              <a:buNone/>
+            </a:pPr>
+            <a:r>
+              <a:rPr/>
+              <a:t>Where they cross, in one line</a:t>
+            </a:r>
+          </a:p>
+        </p:txBody>
+      </p:sp>
+      <p:pic>
+        <p:nvPicPr>
+          <p:cNvPr descr="eq_fa0fcf9718.png" id="0" name="Picture 1"/>
+          <p:cNvPicPr>
+            <a:picLocks noGrp="1" noChangeAspect="1"/>
+          </p:cNvPicPr>
+          <p:nvPr/>
+        </p:nvPicPr>
+        <p:blipFill>
+          <a:blip r:embed="rId3"/>
+          <a:stretch>
+            <a:fillRect/>
+          </a:stretch>
+        </p:blipFill>
+        <p:spPr bwMode="auto">
+          <a:xfrm>
+            <a:off x="457200" y="1925439"/>
+            <a:ext cx="8229600" cy="1841500"/>
+          </a:xfrm>
+          <a:prstGeom prst="rect">
+            <a:avLst/>
+          </a:prstGeom>
+          <a:noFill/>
+          <a:ln w="9525">
+            <a:noFill/>
+            <a:headEnd/>
+            <a:tailEnd/>
+          </a:ln>
+        </p:spPr>
+      </p:pic>
+    </p:spTree>
+  </p:cSld>
+</p:sld>
+</file>
+
 <file path=ppt/slides/slide54.xml><?xml version="1.0" encoding="utf-8"?>
 <p:sld xmlns:a="http://schemas.openxmlformats.org/drawingml/2006/main" xmlns:r="http://schemas.openxmlformats.org/officeDocument/2006/relationships" xmlns:p="http://schemas.openxmlformats.org/presentationml/2006/main">
   <p:cSld>
@@ -18443,6 +18774,28 @@
               <a:t>That is precisely what lesson 1 forbade</a:t>
             </a:r>
           </a:p>
+          <a:p>
+            <a:pPr lvl="0"/>
+            <a:r>
+              <a:rPr/>
+              <a:t>Done properly: choose it on a </a:t>
+            </a:r>
+            <a:r>
+              <a:rPr b="1"/>
+              <a:t>validation set</a:t>
+            </a:r>
+            <a:r>
+              <a:rPr/>
+              <a:t>, then measure once on the test set (lesson 5)</a:t>
+            </a:r>
+          </a:p>
+          <a:p>
+            <a:pPr lvl="0"/>
+            <a:r>
+              <a:rPr/>
+              <a:t>The price of looking, here: t* = 0.051, fixed before looking, costs €49,100 on the test set; 0.078, picked by looking, €45,540</a:t>
+            </a:r>
+          </a:p>
         </p:txBody>
       </p:sp>
     </p:spTree>
@@ -18451,6 +18804,125 @@
 </file>
 
 <file path=ppt/slides/slide55.xml><?xml version="1.0" encoding="utf-8"?>
+<p:sld xmlns:a="http://schemas.openxmlformats.org/drawingml/2006/main" xmlns:r="http://schemas.openxmlformats.org/officeDocument/2006/relationships" xmlns:p="http://schemas.openxmlformats.org/presentationml/2006/main">
+  <p:cSld>
+    <p:spTree>
+      <p:nvGrpSpPr>
+        <p:cNvPr id="1" name=""/>
+        <p:cNvGrpSpPr/>
+        <p:nvPr/>
+      </p:nvGrpSpPr>
+      <p:grpSpPr>
+        <a:xfrm>
+          <a:off x="0" y="0"/>
+          <a:ext cx="0" cy="0"/>
+          <a:chOff x="0" y="0"/>
+          <a:chExt cx="0" cy="0"/>
+        </a:xfrm>
+      </p:grpSpPr>
+      <p:sp>
+        <p:nvSpPr>
+          <p:cNvPr id="2" name="Title 1"/>
+          <p:cNvSpPr>
+            <a:spLocks noGrp="1"/>
+          </p:cNvSpPr>
+          <p:nvPr>
+            <p:ph type="title"/>
+          </p:nvPr>
+        </p:nvSpPr>
+        <p:spPr>
+          <a:xfrm>
+            <a:off x="457200" y="205979"/>
+            <a:ext cx="8229600" cy="857250"/>
+          </a:xfrm>
+        </p:spPr>
+        <p:txBody>
+          <a:bodyPr/>
+          <a:lstStyle/>
+          <a:p>
+            <a:pPr lvl="0" indent="0" marL="0">
+              <a:buNone/>
+            </a:pPr>
+            <a:r>
+              <a:rPr/>
+              <a:t>What class weights do</a:t>
+            </a:r>
+          </a:p>
+        </p:txBody>
+      </p:sp>
+      <p:sp>
+        <p:nvSpPr>
+          <p:cNvPr id="3" name="Content Placeholder 2"/>
+          <p:cNvSpPr>
+            <a:spLocks noGrp="1"/>
+          </p:cNvSpPr>
+          <p:nvPr>
+            <p:ph idx="1"/>
+          </p:nvPr>
+        </p:nvSpPr>
+        <p:spPr>
+          <a:xfrm>
+            <a:off x="457200" y="1200151"/>
+            <a:ext cx="8229600" cy="3394472"/>
+          </a:xfrm>
+        </p:spPr>
+        <p:txBody>
+          <a:bodyPr/>
+          <a:lstStyle/>
+          <a:p>
+            <a:pPr lvl="0"/>
+            <a:r>
+              <a:rPr/>
+              <a:t>Training multiplies each drive’s log-loss term by its </a:t>
+            </a:r>
+            <a:r>
+              <a:rPr b="1"/>
+              <a:t>class weight</a:t>
+            </a:r>
+          </a:p>
+          <a:p>
+            <a:pPr lvl="0"/>
+            <a:r>
+              <a:rPr>
+                <a:latin typeface="Courier"/>
+              </a:rPr>
+              <a:t>class_weight="balanced"</a:t>
+            </a:r>
+            <a:r>
+              <a:rPr/>
+              <a:t>: m ÷ (2 × class size), 0.52 healthy, 13.0 failed</a:t>
+            </a:r>
+          </a:p>
+          <a:p>
+            <a:pPr lvl="0"/>
+            <a:r>
+              <a:rPr/>
+              <a:t>A failure counts as 25 healthy drives: </a:t>
+            </a:r>
+            <a:r>
+              <a:rPr b="1"/>
+              <a:t>class frequencies</a:t>
+            </a:r>
+            <a:r>
+              <a:rPr/>
+              <a:t>, not costs</a:t>
+            </a:r>
+          </a:p>
+          <a:p>
+            <a:pPr lvl="0"/>
+            <a:r>
+              <a:rPr/>
+              <a:t>Same decisions as the plain model at 1 ÷ 26 = 0.038, on 1,987 of 2,000 drives</a:t>
+            </a:r>
+          </a:p>
+        </p:txBody>
+      </p:sp>
+    </p:spTree>
+  </p:cSld>
+</p:sld>
+</file>
+
+<file path=ppt/slides/slide56.xml><?xml version="1.0" encoding="utf-8"?>
 <p:sld xmlns:a="http://schemas.openxmlformats.org/drawingml/2006/main" xmlns:r="http://schemas.openxmlformats.org/officeDocument/2006/relationships" xmlns:p="http://schemas.openxmlformats.org/presentationml/2006/main">
   <p:cSld>
     <p:spTree>
@@ -18532,7 +19004,7 @@
 </p:sld>
 </file>
 
-<file path=ppt/slides/slide56.xml><?xml version="1.0" encoding="utf-8"?>
+<file path=ppt/slides/slide57.xml><?xml version="1.0" encoding="utf-8"?>
 <p:sld xmlns:a="http://schemas.openxmlformats.org/drawingml/2006/main" xmlns:r="http://schemas.openxmlformats.org/officeDocument/2006/relationships" xmlns:p="http://schemas.openxmlformats.org/presentationml/2006/main">
   <p:cSld>
     <p:spTree>
@@ -18797,7 +19269,7 @@
                       </a:r>
                       <a:r>
                         <a:rPr/>
-                        <a:t> at each threshold → 45,540 EUR at 0.08, against 87,620 at 0.50</a:t>
+                        <a:t> at each threshold → 45,540 EUR at 0.078, against 87,620 at 0.50</a:t>
                       </a:r>
                     </a:p>
                   </a:txBody>
@@ -18814,7 +19286,7 @@
                       </a:pPr>
                       <a:r>
                         <a:rPr/>
-                        <a:t>class weights, 55</a:t>
+                        <a:t>class weights, 55-56</a:t>
                       </a:r>
                     </a:p>
                   </a:txBody>
@@ -18852,7 +19324,7 @@
                       </a:pPr>
                       <a:r>
                         <a:rPr/>
-                        <a:t>three classes, 57-58</a:t>
+                        <a:t>three classes, 58-60</a:t>
                       </a:r>
                     </a:p>
                   </a:txBody>
@@ -18888,7 +19360,136 @@
 </p:sld>
 </file>
 
-<file path=ppt/slides/slide57.xml><?xml version="1.0" encoding="utf-8"?>
+<file path=ppt/slides/slide58.xml><?xml version="1.0" encoding="utf-8"?>
+<p:sld xmlns:a="http://schemas.openxmlformats.org/drawingml/2006/main" xmlns:r="http://schemas.openxmlformats.org/officeDocument/2006/relationships" xmlns:p="http://schemas.openxmlformats.org/presentationml/2006/main">
+  <p:cSld>
+    <p:spTree>
+      <p:nvGrpSpPr>
+        <p:cNvPr id="1" name=""/>
+        <p:cNvGrpSpPr/>
+        <p:nvPr/>
+      </p:nvGrpSpPr>
+      <p:grpSpPr>
+        <a:xfrm>
+          <a:off x="0" y="0"/>
+          <a:ext cx="0" cy="0"/>
+          <a:chOff x="0" y="0"/>
+          <a:chExt cx="0" cy="0"/>
+        </a:xfrm>
+      </p:grpSpPr>
+      <p:sp>
+        <p:nvSpPr>
+          <p:cNvPr id="2" name="Title 1"/>
+          <p:cNvSpPr>
+            <a:spLocks noGrp="1"/>
+          </p:cNvSpPr>
+          <p:nvPr>
+            <p:ph type="title"/>
+          </p:nvPr>
+        </p:nvSpPr>
+        <p:spPr>
+          <a:xfrm>
+            <a:off x="457200" y="205979"/>
+            <a:ext cx="8229600" cy="857250"/>
+          </a:xfrm>
+        </p:spPr>
+        <p:txBody>
+          <a:bodyPr/>
+          <a:lstStyle/>
+          <a:p>
+            <a:pPr lvl="0" indent="0" marL="0">
+              <a:buNone/>
+            </a:pPr>
+            <a:r>
+              <a:rPr/>
+              <a:t>Three classes: softmax</a:t>
+            </a:r>
+          </a:p>
+        </p:txBody>
+      </p:sp>
+      <p:sp>
+        <p:nvSpPr>
+          <p:cNvPr id="3" name="Content Placeholder 2"/>
+          <p:cNvSpPr>
+            <a:spLocks noGrp="1"/>
+          </p:cNvSpPr>
+          <p:nvPr>
+            <p:ph idx="1"/>
+          </p:nvPr>
+        </p:nvSpPr>
+        <p:spPr>
+          <a:xfrm>
+            <a:off x="457200" y="1200151"/>
+            <a:ext cx="8229600" cy="3394472"/>
+          </a:xfrm>
+        </p:spPr>
+        <p:txBody>
+          <a:bodyPr/>
+          <a:lstStyle/>
+          <a:p>
+            <a:pPr lvl="0"/>
+            <a:r>
+              <a:rPr/>
+              <a:t>One score per class, zₖ = wₖᵀx + bₖ; </a:t>
+            </a:r>
+            <a:r>
+              <a:rPr b="1"/>
+              <a:t>softmax</a:t>
+            </a:r>
+            <a:r>
+              <a:rPr/>
+              <a:t>: exponentiate, divide by the sum</a:t>
+            </a:r>
+          </a:p>
+          <a:p>
+            <a:pPr lvl="0"/>
+            <a:r>
+              <a:rPr/>
+              <a:t>A degraded drive: scores 0.615, 0.603, −1.218 → 0.466, 0.460, 0.074, called healthy</a:t>
+            </a:r>
+          </a:p>
+          <a:p>
+            <a:pPr lvl="0"/>
+            <a:r>
+              <a:rPr/>
+              <a:t>Predicted class = the largest probability, no 0.5 threshold; two classes: the sigmoid of z₁ − z₀</a:t>
+            </a:r>
+          </a:p>
+          <a:p>
+            <a:pPr lvl="0"/>
+            <a:r>
+              <a:rPr/>
+              <a:t>In code: </a:t>
+            </a:r>
+            <a:r>
+              <a:rPr>
+                <a:latin typeface="Courier"/>
+              </a:rPr>
+              <a:t>decision_function</a:t>
+            </a:r>
+            <a:r>
+              <a:rPr/>
+              <a:t> (scores), </a:t>
+            </a:r>
+            <a:r>
+              <a:rPr>
+                <a:latin typeface="Courier"/>
+              </a:rPr>
+              <a:t>predict_proba</a:t>
+            </a:r>
+            <a:r>
+              <a:rPr/>
+              <a:t> (softmax)</a:t>
+            </a:r>
+          </a:p>
+        </p:txBody>
+      </p:sp>
+    </p:spTree>
+  </p:cSld>
+</p:sld>
+</file>
+
+<file path=ppt/slides/slide59.xml><?xml version="1.0" encoding="utf-8"?>
 <p:sld xmlns:a="http://schemas.openxmlformats.org/drawingml/2006/main" xmlns:r="http://schemas.openxmlformats.org/officeDocument/2006/relationships" xmlns:p="http://schemas.openxmlformats.org/presentationml/2006/main">
   <p:cSld>
     <p:spTree>
@@ -18970,7 +19571,98 @@
 </p:sld>
 </file>
 
-<file path=ppt/slides/slide58.xml><?xml version="1.0" encoding="utf-8"?>
+<file path=ppt/slides/slide6.xml><?xml version="1.0" encoding="utf-8"?>
+<p:sld xmlns:a="http://schemas.openxmlformats.org/drawingml/2006/main" xmlns:r="http://schemas.openxmlformats.org/officeDocument/2006/relationships" xmlns:p="http://schemas.openxmlformats.org/presentationml/2006/main">
+  <p:cSld>
+    <p:spTree>
+      <p:nvGrpSpPr>
+        <p:cNvPr id="1" name=""/>
+        <p:cNvGrpSpPr/>
+        <p:nvPr/>
+      </p:nvGrpSpPr>
+      <p:grpSpPr>
+        <a:xfrm>
+          <a:off x="0" y="0"/>
+          <a:ext cx="0" cy="0"/>
+          <a:chOff x="0" y="0"/>
+          <a:chExt cx="0" cy="0"/>
+        </a:xfrm>
+      </p:grpSpPr>
+      <p:sp>
+        <p:nvSpPr>
+          <p:cNvPr id="2" name="Title 1"/>
+          <p:cNvSpPr>
+            <a:spLocks noGrp="1"/>
+          </p:cNvSpPr>
+          <p:nvPr>
+            <p:ph type="title"/>
+          </p:nvPr>
+        </p:nvSpPr>
+        <p:spPr>
+          <a:xfrm>
+            <a:off x="457200" y="205979"/>
+            <a:ext cx="8229600" cy="857250"/>
+          </a:xfrm>
+        </p:spPr>
+        <p:txBody>
+          <a:bodyPr/>
+          <a:lstStyle/>
+          <a:p>
+            <a:pPr lvl="0" indent="0" marL="0">
+              <a:buNone/>
+            </a:pPr>
+            <a:r>
+              <a:rPr/>
+              <a:t>306</a:t>
+            </a:r>
+          </a:p>
+        </p:txBody>
+      </p:sp>
+      <p:sp>
+        <p:nvSpPr>
+          <p:cNvPr id="3" name="Content Placeholder 2"/>
+          <p:cNvSpPr>
+            <a:spLocks noGrp="1"/>
+          </p:cNvSpPr>
+          <p:nvPr>
+            <p:ph idx="1"/>
+          </p:nvPr>
+        </p:nvSpPr>
+        <p:spPr>
+          <a:xfrm>
+            <a:off x="457200" y="1200151"/>
+            <a:ext cx="8229600" cy="3394472"/>
+          </a:xfrm>
+        </p:spPr>
+        <p:txBody>
+          <a:bodyPr/>
+          <a:lstStyle/>
+          <a:p>
+            <a:pPr lvl="0"/>
+            <a:r>
+              <a:rPr b="1"/>
+              <a:t>306 of the 8,000 drives failed</a:t>
+            </a:r>
+            <a:r>
+              <a:rPr/>
+              <a:t>: 306 ÷ 8,000 = 3.8% of the fleet</a:t>
+            </a:r>
+          </a:p>
+          <a:p>
+            <a:pPr lvl="0"/>
+            <a:r>
+              <a:rPr/>
+              <a:t>Which means 100% − 3.8% = 96.2% did not</a:t>
+            </a:r>
+          </a:p>
+        </p:txBody>
+      </p:sp>
+    </p:spTree>
+  </p:cSld>
+</p:sld>
+</file>
+
+<file path=ppt/slides/slide60.xml><?xml version="1.0" encoding="utf-8"?>
 <p:sld xmlns:a="http://schemas.openxmlformats.org/drawingml/2006/main" xmlns:r="http://schemas.openxmlformats.org/officeDocument/2006/relationships" xmlns:p="http://schemas.openxmlformats.org/presentationml/2006/main">
   <p:cSld>
     <p:spTree>
@@ -19052,7 +19744,7 @@
 </p:sld>
 </file>
 
-<file path=ppt/slides/slide59.xml><?xml version="1.0" encoding="utf-8"?>
+<file path=ppt/slides/slide61.xml><?xml version="1.0" encoding="utf-8"?>
 <p:sld xmlns:a="http://schemas.openxmlformats.org/drawingml/2006/main" xmlns:r="http://schemas.openxmlformats.org/officeDocument/2006/relationships" xmlns:p="http://schemas.openxmlformats.org/presentationml/2006/main">
   <p:cSld>
     <p:spTree>
@@ -19121,19 +19813,26 @@
           <a:p>
             <a:pPr lvl="0"/>
             <a:r>
+              <a:rPr/>
+              <a:t>Logistic regression: sigmoid of a linear score, fitted by log loss</a:t>
+            </a:r>
+          </a:p>
+          <a:p>
+            <a:pPr lvl="0"/>
+            <a:r>
               <a:rPr b="1"/>
-              <a:t>96.20% accuracy, nothing caught.</a:t>
-            </a:r>
-            <a:r>
-              <a:rPr/>
-              <a:t> Accuracy measures the majority class</a:t>
+              <a:t>96.20% accuracy, nothing caught</a:t>
+            </a:r>
+            <a:r>
+              <a:rPr/>
+              <a:t>: check the baseline, 1,924 ÷ 2,000</a:t>
             </a:r>
           </a:p>
           <a:p>
             <a:pPr lvl="0"/>
             <a:r>
               <a:rPr/>
-              <a:t>Precision is about the </a:t>
+              <a:t>Precision: the </a:t>
             </a:r>
             <a:r>
               <a:rPr b="1"/>
@@ -19141,7 +19840,7 @@
             </a:r>
             <a:r>
               <a:rPr/>
-              <a:t>, recall is about the </a:t>
+              <a:t>; recall: the </a:t>
             </a:r>
             <a:r>
               <a:rPr b="1"/>
@@ -19151,27 +19850,23 @@
           <a:p>
             <a:pPr lvl="0"/>
             <a:r>
-              <a:rPr/>
-              <a:t>The </a:t>
-            </a:r>
-            <a:r>
               <a:rPr b="1"/>
-              <a:t>threshold is a decision</a:t>
-            </a:r>
-            <a:r>
-              <a:rPr/>
-              <a:t>, and it has a formula</a:t>
+              <a:t>Threshold</a:t>
+            </a:r>
+            <a:r>
+              <a:rPr/>
+              <a:t> from costs: 140 ÷ 2,740 = 0.051, if calibrated</a:t>
             </a:r>
           </a:p>
           <a:p>
             <a:pPr lvl="0"/>
             <a:r>
               <a:rPr b="1"/>
-              <a:t>AUC measures ranking</a:t>
-            </a:r>
-            <a:r>
-              <a:rPr/>
-              <a:t> and hides imbalance</a:t>
+              <a:t>AUC = ranking</a:t>
+            </a:r>
+            <a:r>
+              <a:rPr/>
+              <a:t>: blind to calibration, hides imbalance</a:t>
             </a:r>
           </a:p>
         </p:txBody>
@@ -19181,98 +19876,7 @@
 </p:sld>
 </file>
 
-<file path=ppt/slides/slide6.xml><?xml version="1.0" encoding="utf-8"?>
-<p:sld xmlns:a="http://schemas.openxmlformats.org/drawingml/2006/main" xmlns:r="http://schemas.openxmlformats.org/officeDocument/2006/relationships" xmlns:p="http://schemas.openxmlformats.org/presentationml/2006/main">
-  <p:cSld>
-    <p:spTree>
-      <p:nvGrpSpPr>
-        <p:cNvPr id="1" name=""/>
-        <p:cNvGrpSpPr/>
-        <p:nvPr/>
-      </p:nvGrpSpPr>
-      <p:grpSpPr>
-        <a:xfrm>
-          <a:off x="0" y="0"/>
-          <a:ext cx="0" cy="0"/>
-          <a:chOff x="0" y="0"/>
-          <a:chExt cx="0" cy="0"/>
-        </a:xfrm>
-      </p:grpSpPr>
-      <p:sp>
-        <p:nvSpPr>
-          <p:cNvPr id="2" name="Title 1"/>
-          <p:cNvSpPr>
-            <a:spLocks noGrp="1"/>
-          </p:cNvSpPr>
-          <p:nvPr>
-            <p:ph type="title"/>
-          </p:nvPr>
-        </p:nvSpPr>
-        <p:spPr>
-          <a:xfrm>
-            <a:off x="457200" y="205979"/>
-            <a:ext cx="8229600" cy="857250"/>
-          </a:xfrm>
-        </p:spPr>
-        <p:txBody>
-          <a:bodyPr/>
-          <a:lstStyle/>
-          <a:p>
-            <a:pPr lvl="0" indent="0" marL="0">
-              <a:buNone/>
-            </a:pPr>
-            <a:r>
-              <a:rPr/>
-              <a:t>306</a:t>
-            </a:r>
-          </a:p>
-        </p:txBody>
-      </p:sp>
-      <p:sp>
-        <p:nvSpPr>
-          <p:cNvPr id="3" name="Content Placeholder 2"/>
-          <p:cNvSpPr>
-            <a:spLocks noGrp="1"/>
-          </p:cNvSpPr>
-          <p:nvPr>
-            <p:ph idx="1"/>
-          </p:nvPr>
-        </p:nvSpPr>
-        <p:spPr>
-          <a:xfrm>
-            <a:off x="457200" y="1200151"/>
-            <a:ext cx="8229600" cy="3394472"/>
-          </a:xfrm>
-        </p:spPr>
-        <p:txBody>
-          <a:bodyPr/>
-          <a:lstStyle/>
-          <a:p>
-            <a:pPr lvl="0"/>
-            <a:r>
-              <a:rPr b="1"/>
-              <a:t>306 of the 8,000 drives failed</a:t>
-            </a:r>
-            <a:r>
-              <a:rPr/>
-              <a:t>: 306 ÷ 8,000 = 3.8% of the fleet</a:t>
-            </a:r>
-          </a:p>
-          <a:p>
-            <a:pPr lvl="0"/>
-            <a:r>
-              <a:rPr/>
-              <a:t>Which means 100% − 3.8% = 96.2% did not</a:t>
-            </a:r>
-          </a:p>
-        </p:txBody>
-      </p:sp>
-    </p:spTree>
-  </p:cSld>
-</p:sld>
-</file>
-
-<file path=ppt/slides/slide60.xml><?xml version="1.0" encoding="utf-8"?>
+<file path=ppt/slides/slide62.xml><?xml version="1.0" encoding="utf-8"?>
 <p:sld xmlns:a="http://schemas.openxmlformats.org/drawingml/2006/main" xmlns:r="http://schemas.openxmlformats.org/officeDocument/2006/relationships" xmlns:p="http://schemas.openxmlformats.org/presentationml/2006/main">
   <p:cSld>
     <p:spTree>

--- a/Lessons/04_classification_and_metrics/Slides/classification_and_metrics_slides.pptx
+++ b/Lessons/04_classification_and_metrics/Slides/classification_and_metrics_slides.pptx
@@ -8319,7 +8319,7 @@
             </a:pPr>
             <a:r>
               <a:rPr/>
-              <a:t>Second, the flat start comes from using the raw count, not from the drives. A straight line in the count gives every sector the same weight: the first adds as much to z as the twentieth. But the labels were generated from log(1 + count), which gives the first sectors the most weight (handout section 1.1). The handout’s figure in section 2.2 draws what the sectors add to z under each of the two. That is why the six-counter model of slide 13 onwards takes log(1 + count) as its input.</a:t>
+              <a:t>Second, the flat start comes from using the raw count, not from how the drives fail. A straight line in the count gives every sector the same weight: the first adds as much to z as the twentieth. But the labels were generated from log(1 + count), which gives the first sectors the most weight (handout section 1.1). The handout’s figure in section 2.2 draws what the sectors add to z under each of the two. That is why the six-counter model of slide 13 onwards takes log(1 + count) as its input.</a:t>
             </a:r>
           </a:p>
           <a:p>

--- a/Lessons/04_classification_and_metrics/Slides/classification_and_metrics_slides.pptx
+++ b/Lessons/04_classification_and_metrics/Slides/classification_and_metrics_slides.pptx
@@ -8319,7 +8319,7 @@
             </a:pPr>
             <a:r>
               <a:rPr/>
-              <a:t>Second, the flat start comes from using the raw count, not from how the drives fail. A straight line in the count gives every sector the same weight: the first adds as much to z as the twentieth. But the labels were generated from log(1 + count), which gives the first sectors the most weight (handout section 1.1). The handout’s figure in section 2.2 draws what the sectors add to z under each of the two. That is why the six-counter model of slide 13 onwards takes log(1 + count) as its input.</a:t>
+              <a:t>Second, the flat start is a fault of the model, not a fact about the drives. A drive with a few sectors is not safe; the model cannot see it, because a straight line in the count gives every sector the same weight: the first adds as much to z as the twentieth. But the labels were generated from log(1 + count), which gives the first sectors the most weight (handout section 1.1). The handout’s figure in section 2.2 draws what the sectors add to z under each of the two. That is why the six-counter model of slide 13 onwards takes log(1 + count) as its input.</a:t>
             </a:r>
           </a:p>
           <a:p>

--- a/Lessons/04_classification_and_metrics/Slides/classification_and_metrics_slides.pptx
+++ b/Lessons/04_classification_and_metrics/Slides/classification_and_metrics_slides.pptx
@@ -3207,7 +3207,7 @@
             </a:pPr>
             <a:r>
               <a:rPr/>
-              <a:t>Ask: is that a bad model? Take answers. Then say: the probabilities are fine. The threshold of 0.5 is a habit. Telling those two apart is the rest of the lesson.</a:t>
+              <a:t>Ask: is that a bad model? Take answers. Then say: this plot cannot tell. It says nothing about whether the probabilities are calibrated; what it shows is that moving the threshold trades misses for false alarms without refitting anything. The threshold of 0.5 is a habit. Telling those two apart is the rest of the lesson.</a:t>
             </a:r>
           </a:p>
           <a:p>
@@ -4527,7 +4527,7 @@
             </a:pPr>
             <a:r>
               <a:rPr/>
-              <a:t>Mention F-beta in one sentence: a version of F1 with a weight beta, where beta above 1 counts recall more than precision. That is what you want here, where a miss costs about nineteen times a false alarm (2,600 divided by 140 = 18.6). F2 is the usual choice. Handout section 6.3.</a:t>
+              <a:t>Mention F-beta in one sentence: a version of F1 with a weight beta, where beta above 1 counts recall more than precision. That suits this problem, where a miss costs about nineteen times a false alarm (2,600 divided by 140 = 18.6), and F2 is a common choice. A predictable slip: “a miss costs 19 times more, so pick a beta to match”. Beta is a preference, not the costs: nothing turns 18.6 into a beta. To act on the costs, derive the threshold from them, slide 53. Handout section 6.3.</a:t>
             </a:r>
           </a:p>
           <a:p>
@@ -6955,6 +6955,20 @@
             </a:pPr>
             <a:r>
               <a:rPr/>
+              <a:t>A predictable slip: “on imbalanced data the threshold belongs below 0.5”. Every threshold in this lesson moves down, so the pattern is easy to generalise. But the class balance is not in the formula: with calibrated probabilities and equal costs, t-star is 0.5 however rare the failures. It falls here because a miss costs 18.6 false alarms.</a:t>
+            </a:r>
+          </a:p>
+          <a:p>
+            <a:pPr lvl="0" indent="0" marL="0">
+              <a:buNone/>
+            </a:pPr>
+          </a:p>
+          <a:p>
+            <a:pPr lvl="0" indent="0" marL="0">
+              <a:buNone/>
+            </a:pPr>
+            <a:r>
+              <a:rPr/>
               <a:t>Empirically we found 0.078 against a theoretical 0.051, and notebook 3 counts what separates them: 45 test drives are scored between the two, and 1 of them failed. Flagging them would cost 44 × 140 = €6,160, leaving them cost that one failure, €2,600 - so on this test set leaving them was cheaper. But their probabilities add up to 2.76 expected failures: for a calibrated model, leaving them costs about 2.76 × 2,600 = €7,176 against (45 − 2.76) × 140 = €5,914 for flagging, and the rule is right. The gap is 45 drives with one failure where the model expected almost three: sampling noise on 76 failures, plus calibration that is good but not perfect. At t* itself the cost is €49,100, 8% above the minimum - the flat bottom of slide 51.</a:t>
             </a:r>
           </a:p>
@@ -7217,7 +7231,7 @@
             </a:pPr>
             <a:r>
               <a:rPr/>
-              <a:t>What the weights do. For logistic regression the main effect is on the intercept: it rises from −6.09 to −2.95, by 3.14, close to log 25 = 3.22. Every probability goes up, and the weighted model’s 0.5 lands where the plain model’s 1 ÷ (1 + 25) = 0.038 was. Notebook 3 checks it: the plain model at 0.038 raises 208 false alarms and misses 8; the weighted model at 0.5 raises 205 and misses 8; the two agree on 1,987 of the 2,000 test drives. The general rule: weights with ratio k behave like a threshold of 1 ÷ (1 + k). Balanced weights land near the cost optimum here only because 25 happens to be close to 18.6.</a:t>
+              <a:t>What the weights do. For logistic regression the main effect is on the intercept: it rises from −6.09 to −2.95, by 3.14, close to log 25 = 3.22. Every probability goes up, and the weighted model’s 0.5 lands where the plain model’s 1 ÷ (1 + 25) = 0.038 was. Notebook 3 checks it: the plain model at 0.038 raises 208 false alarms and misses 8; the weighted model at 0.5 raises 205 and misses 8; the two agree on 1,987 of the 2,000 test drives. The general rule, approximately: weights with ratio k behave like a threshold of 1 ÷ (1 + k). It is close here because the labels came from a logistic model in these very features; with a misspecified model, few data or a strong penalty, weights also change the slopes and the ranking. Balanced weights land near the cost optimum here only because 25 happens to be close to 18.6.</a:t>
             </a:r>
           </a:p>
         </p:txBody>
@@ -8057,7 +8071,7 @@
             </a:pPr>
             <a:r>
               <a:rPr/>
-              <a:t>The first bullet is the first half of the lesson in one line: log loss is what maximum likelihood gives, and unlike squared error through the sigmoid it is convex, so gradient descent finds the one minimum.</a:t>
+              <a:t>The first bullet is the first half of the lesson in one line: log loss is what maximum likelihood gives, and unlike squared error through the sigmoid it is convex, so any minimum gradient descent finds is the global one.</a:t>
             </a:r>
           </a:p>
         </p:txBody>
@@ -8673,7 +8687,21 @@
             </a:pPr>
             <a:r>
               <a:rPr/>
-              <a:t>The step to the next slide: on the log-odds axis, evidence simply adds. Several readings, if independent given the class, are one fixed step each, starting from the average drive at minus 6.20. A starting value plus one step per feature is exactly w-transpose-x plus b, which is why slide 11 puts the line on the log-odds. Six is a realistic factor: the coefficient of reallocated sectors used to generate the labels is 1.80 per standard deviation, and e to the 1.80 is 6.05 (slide 14 reads coefficients this way; slide 15 shows the true ones).</a:t>
+              <a:t>The step to the next slide: on the log-odds axis, evidence simply adds. Several readings, if independent given the class, are one fixed step each, starting from the base rate: the fleet’s log-odds before any reading, log(306 / 7,694) = -3.22. Centre the features and the constant parts of those steps fold, with the base rate, into one number: the intercept b = -6.20, the log-odds of the average drive, not of a drive drawn at random. A starting value plus one step per feature is exactly w-transpose-x plus b, which is why slide 11 puts the line on the log-odds. Six is a realistic factor: the coefficient of reallocated sectors used to generate the labels is 1.80 per standard deviation, and e to the 1.80 is 6.05 (slide 14 reads coefficients this way; slide 15 shows the true ones).</a:t>
+            </a:r>
+          </a:p>
+          <a:p>
+            <a:pPr lvl="0" indent="0" marL="0">
+              <a:buNone/>
+            </a:pPr>
+          </a:p>
+          <a:p>
+            <a:pPr lvl="0" indent="0" marL="0">
+              <a:buNone/>
+            </a:pPr>
+            <a:r>
+              <a:rPr/>
+              <a:t>Two predictable slips. “The intercept is the risk before looking at the counters”: that is the base rate, 3.8%; the intercept is the average drive’s log-odds, 0.2% (slide 16). The difference comes from the tail: the failures are the drives with bad telemetry, not the average one. And “logistic regression assumes the counters are independent”: independence given the class only motivates why evidence adds on the log-odds scale. Fitting the model does not need it; correlated counters share the weight through their coefficients.</a:t>
             </a:r>
           </a:p>
         </p:txBody>
@@ -12373,7 +12401,13 @@
                       </a:pPr>
                       <a:r>
                         <a:rPr/>
-                        <a:t>True</a:t>
+                        <a:t>True, </a:t>
+                      </a:r>
+                      <a:r>
+                        <a:rPr>
+                          <a:latin typeface="Courier"/>
+                        </a:rPr>
+                        <a:t>disk_data.py</a:t>
                       </a:r>
                     </a:p>
                   </a:txBody>
@@ -16330,7 +16364,7 @@
             <a:pPr lvl="0"/>
             <a:r>
               <a:rPr b="1"/>
-              <a:t>False positive</a:t>
+              <a:t>False positive (FP)</a:t>
             </a:r>
             <a:r>
               <a:rPr/>
@@ -16341,7 +16375,7 @@
             <a:pPr lvl="0"/>
             <a:r>
               <a:rPr b="1"/>
-              <a:t>False negative</a:t>
+              <a:t>False negative (FN)</a:t>
             </a:r>
             <a:r>
               <a:rPr/>
@@ -16358,8 +16392,20 @@
           <a:p>
             <a:pPr lvl="0"/>
             <a:r>
-              <a:rPr/>
-              <a:t>A correct decision counts as €0: each cost is what the error adds over the right call</a:t>
+              <a:rPr b="1"/>
+              <a:t>True positive (TP)</a:t>
+            </a:r>
+            <a:r>
+              <a:rPr/>
+              <a:t> and </a:t>
+            </a:r>
+            <a:r>
+              <a:rPr b="1"/>
+              <a:t>true negative (TN)</a:t>
+            </a:r>
+            <a:r>
+              <a:rPr/>
+              <a:t>, the right calls, count as €0: each cost is what the error adds</a:t>
             </a:r>
           </a:p>
         </p:txBody>
@@ -18427,7 +18473,7 @@
             </a:r>
             <a:r>
               <a:rPr/>
-              <a:t>: the area under that curve, Σₖ (Rₖ − Rₖ₋₁) × Pₖ, each threshold’s precision weighted by the recall it adds</a:t>
+              <a:t>: Σₖ (Rₖ − Rₖ₋₁) × Pₖ, a step-sum area: each threshold’s precision weighted by the recall it adds</a:t>
             </a:r>
           </a:p>
           <a:p>

--- a/Lessons/04_classification_and_metrics/Slides/classification_and_metrics_slides.pptx
+++ b/Lessons/04_classification_and_metrics/Slides/classification_and_metrics_slides.pptx
@@ -4679,7 +4679,7 @@
             </a:pPr>
             <a:r>
               <a:rPr/>
-              <a:t>The rule: on an imbalanced problem, quote the macro average or the minority class directly. Reporting the weighted average is not incorrect - it is the number that makes a mediocre model look finished, and choosing it without saying so is how a result gets oversold.</a:t>
+              <a:t>The rule: on an imbalanced problem, quote the minority class directly, and the macro average when the classes should count equally. Reporting the weighted average is not incorrect - it is the number that makes a mediocre model look finished, and choosing it without saying so is how a result gets oversold.</a:t>
             </a:r>
           </a:p>
           <a:p>
@@ -6321,7 +6321,7 @@
             </a:pPr>
             <a:r>
               <a:rPr/>
-              <a:t>This is the lesson’s second big predictable mistake, after trusting accuracy on slide 31, and again defend the instinct: AUC is threshold-free, comparable across models and datasets, bounded in a familiar range. Those are real virtues. It simply answers a question about ranking when the question was about the alarm queue.</a:t>
+              <a:t>This is the lesson’s second big predictable mistake, after trusting accuracy on slide 31, and again defend the instinct: AUC is threshold-free, comparable across models, unmoved by the class balance. Those are real virtues. It simply answers a question about ranking when the question was about the alarm queue.</a:t>
             </a:r>
           </a:p>
         </p:txBody>
@@ -7341,7 +7341,7 @@
             </a:pPr>
             <a:r>
               <a:rPr/>
-              <a:t>That matters because class weighting is usually presented as a REMEDY for imbalance. It is not a remedy; it is another way of setting the same decision. The remedy, where one exists, is more positive examples.</a:t>
+              <a:t>That matters because class weighting is usually presented as a REMEDY for imbalance. It is not a remedy; here it is almost exactly another way of setting the same decision. The remedy, where one exists, is more positive examples.</a:t>
             </a:r>
           </a:p>
           <a:p>

--- a/Lessons/04_classification_and_metrics/Slides/classification_and_metrics_slides.pptx
+++ b/Lessons/04_classification_and_metrics/Slides/classification_and_metrics_slides.pptx
@@ -847,7 +847,7 @@
             </a:pPr>
             <a:r>
               <a:rPr/>
-              <a:t>Name the three properties we will use, without deriving them here - the handout section 2.2 does that: sigma of 0 is a half; sigma of minus z is 1 minus sigma of z; and the derivative is sigma times one minus sigma.</a:t>
+              <a:t>The second line carries the three properties we will use, each needed later; name them without deriving them here - the handout section 2.2 does that. Sigma of 0 is a half: that is why a probability of 0.5 is z = 0, the decision boundary of slide 28. Sigma of minus z is 1 minus sigma of z: the probability of staying healthy is the same curve read from the other side, which gives the y = 0 term of the log loss (slide 24). And the derivative is sigma times one minus sigma.</a:t>
             </a:r>
           </a:p>
           <a:p>
@@ -1067,77 +1067,91 @@
             </a:pPr>
             <a:r>
               <a:rPr/>
-              <a:t>This is the interpretability that keeps logistic regression in production in medicine and credit scoring. Three steps, one per bullet.</a:t>
-            </a:r>
-          </a:p>
-          <a:p>
-            <a:pPr lvl="0" indent="0" marL="0">
-              <a:buNone/>
-            </a:pPr>
-          </a:p>
-          <a:p>
-            <a:pPr lvl="0" indent="0" marL="0">
-              <a:buNone/>
-            </a:pPr>
-            <a:r>
-              <a:rPr/>
-              <a:t>First bullet, its first half: why “standardised” comes first. A coefficient says how much z grows when its feature rises by one unit, and the raw units differ - a sector, a degree, an hour in service - so raw coefficients cannot be compared. StandardScaler (lesson 3) rescales every feature to mean 0 and standard deviation 1: from then on, one unit means one standard deviation for every feature, and the coefficients can be compared with each other.</a:t>
-            </a:r>
-          </a:p>
-          <a:p>
-            <a:pPr lvl="0" indent="0" marL="0">
-              <a:buNone/>
-            </a:pPr>
-          </a:p>
-          <a:p>
-            <a:pPr lvl="0" indent="0" marL="0">
-              <a:buNone/>
-            </a:pPr>
-            <a:r>
-              <a:rPr/>
-              <a:t>Say what one standard deviation means for this counter, because it is not “one sector more”. The four counters on a logarithmic scale are standardised after log(1 + x), so reallocated sectors contribute 1.80 times (log(1 + x) minus 0.96) divided by 0.62 to z, where 0.96 and 0.62 are the mean and the standard deviation of log(1 + x) over the fleet. One standard deviation more adds 0.62 to log(1 + x), which multiplies 1 + x by e to the 0.62 = 1.86: from 1 sector to 2.7, from 4 to 8.3, from 10 to 19.5. Roughly, the count doubles - and each such step multiplies the odds by the same 6.05. That is why the first sectors weigh so much: 1 to 2.7 sectors counts as much as 10 to 19.5. Temperature and hours are standardised on their own values, so for them one standard deviation is an ordinary additive step.</a:t>
-            </a:r>
-          </a:p>
-          <a:p>
-            <a:pPr lvl="0" indent="0" marL="0">
-              <a:buNone/>
-            </a:pPr>
-          </a:p>
-          <a:p>
-            <a:pPr lvl="0" indent="0" marL="0">
-              <a:buNone/>
-            </a:pPr>
-            <a:r>
-              <a:rPr/>
-              <a:t>First bullet, its second half: this is slide 11’s line, log-odds = b + w1 x1 + … + w6 x6. Each feature contributes its coefficient times its value, so raising reallocated sectors by one standard deviation adds exactly its coefficient to the log-odds - 1.80 is the true coefficient, the one the data was generated with (next slide) - and it adds 1.80 whatever the other five counters say. That is what “linear” buys.</a:t>
-            </a:r>
-          </a:p>
-          <a:p>
-            <a:pPr lvl="0" indent="0" marL="0">
-              <a:buNone/>
-            </a:pPr>
-          </a:p>
-          <a:p>
-            <a:pPr lvl="0" indent="0" marL="0">
-              <a:buNone/>
-            </a:pPr>
-            <a:r>
-              <a:rPr/>
-              <a:t>Second bullet: why a sum on the log-odds becomes a product on the odds. The logarithm turns products into sums, log of a times b is log a plus log b. Read it backwards: adding 1.80 to the logarithm of the odds is the same as multiplying the odds by exp(1.80), which is 6.05. Check it on an average drive: its log-odds are the intercept, minus 6.20, so its odds are exp(-6.20) = 0.0020. One standard deviation more of reallocated sectors: log-odds minus 4.40, odds exp(-4.40) = 0.0123. Divide: 6.05.</a:t>
-            </a:r>
-          </a:p>
-          <a:p>
-            <a:pPr lvl="0" indent="0" marL="0">
-              <a:buNone/>
-            </a:pPr>
-          </a:p>
-          <a:p>
-            <a:pPr lvl="0" indent="0" marL="0">
-              <a:buNone/>
-            </a:pPr>
-            <a:r>
-              <a:rPr/>
-              <a:t>Third bullet: that is the arrow of slide 10’s figure. Every teal arrow was a multiplication of the odds by 6, and on the log-odds axis it had the same length - 1.79, almost exactly this coefficient. The fitted coefficient on the next slide is 1.66, a multiplier of 5.28.</a:t>
+              <a:t>This is the interpretability that keeps logistic regression in production in medicine and credit scoring. The vocabulary first, then two bullets, each in two halves.</a:t>
+            </a:r>
+          </a:p>
+          <a:p>
+            <a:pPr lvl="0" indent="0" marL="0">
+              <a:buNone/>
+            </a:pPr>
+          </a:p>
+          <a:p>
+            <a:pPr lvl="0" indent="0" marL="0">
+              <a:buNone/>
+            </a:pPr>
+            <a:r>
+              <a:rPr/>
+              <a:t>First bullet: the vocabulary. The coefficients are the numbers w1 to w6 of slide 12’s equation, one per feature; machine learning calls them weights, and scikit-learn stores them in coef_. The constant b is the intercept, in intercept_; neural networks call it the bias (lesson 9). Warn now about one collision: the “class weights” of slides 55 to 57 are something else - how much each training example counts in the cost - and not these w.</a:t>
+            </a:r>
+          </a:p>
+          <a:p>
+            <a:pPr lvl="0" indent="0" marL="0">
+              <a:buNone/>
+            </a:pPr>
+          </a:p>
+          <a:p>
+            <a:pPr lvl="0" indent="0" marL="0">
+              <a:buNone/>
+            </a:pPr>
+            <a:r>
+              <a:rPr/>
+              <a:t>Second bullet, its first half: why “standardised” comes first. A coefficient says how much z grows when its feature rises by one unit, and the raw units differ - a sector, a degree, an hour in service - so raw coefficients cannot be compared. StandardScaler (lesson 3) rescales every feature to mean 0 and standard deviation 1: from then on, one unit means one standard deviation for every feature, and the coefficients can be compared with each other.</a:t>
+            </a:r>
+          </a:p>
+          <a:p>
+            <a:pPr lvl="0" indent="0" marL="0">
+              <a:buNone/>
+            </a:pPr>
+          </a:p>
+          <a:p>
+            <a:pPr lvl="0" indent="0" marL="0">
+              <a:buNone/>
+            </a:pPr>
+            <a:r>
+              <a:rPr/>
+              <a:t>Say what one standard deviation means for this counter, because it is not “one sector more”. Go in four steps; handout section 2.4 has them with tables. One: the model does not see the count x but log(1 + x), standardised, so reallocated sectors contribute 1.80 times (log(1 + x) minus 0.96) divided by 0.62 to z, where 0.96 and 0.62 are the mean and the standard deviation of log(1 + x) over the fleet. Two: one standard deviation more is therefore 0.62 more on log(1 + x), not one sector more. Three: adding 0.62 to a logarithm multiplies what is inside it by e to the 0.62 = 1.86, so 1 + x goes from 2 to 3.7 (1 sector to 2.7), from 5 to 9.3 (4 to 8.3), from 11 to 20.5 (10 to 19.5): roughly, the count doubles, and each such step multiplies the odds by the same 6.05. Four, the consequence: one extra sector is worth a lot at the start and little later. From 0 to 1 sector the odds are multiplied by 7.5, from 1 to 2 by 3.2, from 4 to 5 by 1.7, from 10 to 11 by 1.3. Temperature and hours are standardised on their own values, so for them one standard deviation is an ordinary additive step.</a:t>
+            </a:r>
+          </a:p>
+          <a:p>
+            <a:pPr lvl="0" indent="0" marL="0">
+              <a:buNone/>
+            </a:pPr>
+          </a:p>
+          <a:p>
+            <a:pPr lvl="0" indent="0" marL="0">
+              <a:buNone/>
+            </a:pPr>
+            <a:r>
+              <a:rPr/>
+              <a:t>Second bullet, its second half: this is slide 11’s line, log-odds = b + w1 x1 + … + w6 x6. Each feature contributes its coefficient times its value, so raising reallocated sectors by one standard deviation adds exactly its coefficient to the log-odds - 1.80 is the true coefficient, the one the data was generated with (next slide) - and it adds 1.80 whatever the other five counters say. That is what “linear” buys.</a:t>
+            </a:r>
+          </a:p>
+          <a:p>
+            <a:pPr lvl="0" indent="0" marL="0">
+              <a:buNone/>
+            </a:pPr>
+          </a:p>
+          <a:p>
+            <a:pPr lvl="0" indent="0" marL="0">
+              <a:buNone/>
+            </a:pPr>
+            <a:r>
+              <a:rPr/>
+              <a:t>Third bullet, its first half: why a sum on the log-odds becomes a product on the odds. The logarithm turns products into sums, log of a times b is log a plus log b. Read it backwards: adding 1.80 to the logarithm of the odds is the same as multiplying the odds by exp(1.80), which is 6.05. Check it on an average drive: its log-odds are the intercept, minus 6.20, so its odds are exp(-6.20) = 0.0020. One standard deviation more of reallocated sectors: log-odds minus 4.40, odds exp(-4.40) = 0.0123. Divide: 6.05.</a:t>
+            </a:r>
+          </a:p>
+          <a:p>
+            <a:pPr lvl="0" indent="0" marL="0">
+              <a:buNone/>
+            </a:pPr>
+          </a:p>
+          <a:p>
+            <a:pPr lvl="0" indent="0" marL="0">
+              <a:buNone/>
+            </a:pPr>
+            <a:r>
+              <a:rPr/>
+              <a:t>Third bullet, its second half: that is the arrow of slide 10’s figure. Every teal arrow was a multiplication of the odds by 6, and on the log-odds axis it had the same length - 1.79, almost exactly this coefficient. The fitted coefficient on the next slide is 1.66, a multiplier of 5.28.</a:t>
             </a:r>
           </a:p>
           <a:p>
@@ -1633,7 +1647,7 @@
             </a:pPr>
             <a:r>
               <a:rPr/>
-              <a:t>Start from what the model does. Fitting means choosing the coefficients w and the intercept b. Call one particular choice of w and b a “setting”. Given a setting, the model of slide 13 turns each drive’s counters x into a probability of failing: p = sigma(w-transpose-x + b). This slide shows the p that one setting, setting 1, gives to each of the three drives.</a:t>
+              <a:t>Start from what the model does. Fitting means choosing the coefficients w and the intercept b. Call one particular choice of w and b a “setting”. Given a setting, the model of slide 12 turns each drive’s counters x into a probability of failing: p = sigma(w-transpose-x + b). This slide shows the p that one setting, setting 1, gives to each of the three drives.</a:t>
             </a:r>
           </a:p>
           <a:p>
@@ -2281,21 +2295,63 @@
             </a:pPr>
             <a:r>
               <a:rPr/>
-              <a:t>The last step turns “largest likelihood” into “smallest cost”, so it can be minimised as in lesson 3. Natural logarithms throughout.</a:t>
-            </a:r>
-          </a:p>
-          <a:p>
-            <a:pPr lvl="0" indent="0" marL="0">
-              <a:buNone/>
-            </a:pPr>
-          </a:p>
-          <a:p>
-            <a:pPr lvl="0" indent="0" marL="0">
-              <a:buNone/>
-            </a:pPr>
-            <a:r>
-              <a:rPr/>
-              <a:t>Take minus the logarithm of each drive’s factor and add them up. Because the log of a product is the sum of the logs, the sum is minus the log of the likelihood: 0.55 is minus the log of 0.576, and 2.81 is minus the log of 0.060. The logarithm keeps the order and the minus sign reverses it, so the better setting now has the SMALLER number - 0.55 against 2.81. Setting 1 still wins.</a:t>
+              <a:t>The last step turns “largest likelihood” into “smallest cost”, so it can be minimised as in lesson 3. Natural logarithms throughout. It is two moves, and each has its own reason - the line above the table says both.</a:t>
+            </a:r>
+          </a:p>
+          <a:p>
+            <a:pPr lvl="0" indent="0" marL="0">
+              <a:buNone/>
+            </a:pPr>
+          </a:p>
+          <a:p>
+            <a:pPr lvl="0" indent="0" marL="0">
+              <a:buNone/>
+            </a:pPr>
+            <a:r>
+              <a:rPr/>
+              <a:t>Why the logarithm. Three reasons, in this order. First, it does not change the winner: the log is increasing, so the setting with the larger likelihood also has the larger log-likelihood - 0.576 beats 0.060, and log 0.576 = -0.55 beats log 0.060 = -2.81. Any increasing function would keep the winner; the log is chosen because, second, it turns the product into a sum: log of a times b times c is log a plus log b plus log c, so each drive contributes its own term, and a sum differentiates one term at a time - that is where slide 25’s gradient comes from. Third, it makes the computation possible at all. Notebook 1’s gradient descent starts with every coefficient and the intercept at zero, so z is 0 for every drive and every p is 0.5. 0.5 multiplied by itself 6,000 times, once per training drive, is 10 to the power 6,000 times log10 of 0.5 = 6,000 times minus 0.301 = minus 1806, while the smallest positive number a 64-bit float can hold is about 5 times 10 to the minus 324. The computer would store exactly zero.</a:t>
+            </a:r>
+          </a:p>
+          <a:p>
+            <a:pPr lvl="0" indent="0" marL="0">
+              <a:buNone/>
+            </a:pPr>
+          </a:p>
+          <a:p>
+            <a:pPr lvl="0" indent="0" marL="0">
+              <a:buNone/>
+            </a:pPr>
+            <a:r>
+              <a:rPr/>
+              <a:t>The point to stress: the logarithm is a convenience, not a new assumption. The best setting is the same with it or without it.</a:t>
+            </a:r>
+          </a:p>
+          <a:p>
+            <a:pPr lvl="0" indent="0" marL="0">
+              <a:buNone/>
+            </a:pPr>
+          </a:p>
+          <a:p>
+            <a:pPr lvl="0" indent="0" marL="0">
+              <a:buNone/>
+            </a:pPr>
+            <a:r>
+              <a:rPr/>
+              <a:t>Why the minus. A probability is at most 1, so its logarithm is at most 0. The minus makes every term 0 or more and reverses the order, so the better setting now has the SMALLER number - 0.55 against 2.81 - and we minimise, as gradient descent does. Read the sum: because the log of a product is the sum of the logs, 0.55 is minus the log of 0.576, and 2.81 is minus the log of 0.060. Setting 1 still wins.</a:t>
+            </a:r>
+          </a:p>
+          <a:p>
+            <a:pPr lvl="0" indent="0" marL="0">
+              <a:buNone/>
+            </a:pPr>
+          </a:p>
+          <a:p>
+            <a:pPr lvl="0" indent="0" marL="0">
+              <a:buNone/>
+            </a:pPr>
+            <a:r>
+              <a:rPr/>
+              <a:t>Read the per-drive numbers too. Minus the log of a probability is called the surprise of an outcome: 0 for something you were certain of, large for something you said was unlikely. Setting 2 is most surprised by drive A, 1.20, because it gave A’s failure only 0.3. Maximum likelihood and least total surprise are the same choice.</a:t>
             </a:r>
           </a:p>
           <a:p>
@@ -2323,35 +2379,7 @@
             </a:pPr>
             <a:r>
               <a:rPr/>
-              <a:t>Read the per-drive numbers too. Minus the log of a probability is called the surprise of an outcome: 0 for something you were certain of, large for something you said was unlikely. Setting 2 is most surprised by drive A, 1.20, because it gave A’s failure only 0.3. Maximum likelihood and least total surprise are the same choice.</a:t>
-            </a:r>
-          </a:p>
-          <a:p>
-            <a:pPr lvl="0" indent="0" marL="0">
-              <a:buNone/>
-            </a:pPr>
-          </a:p>
-          <a:p>
-            <a:pPr lvl="0" indent="0" marL="0">
-              <a:buNone/>
-            </a:pPr>
-            <a:r>
-              <a:rPr/>
-              <a:t>Two reasons we always work with the logarithm, worth saying aloud. A sum differentiates one term at a time. And the product itself is too small to store. Notebook 1’s gradient descent starts with every coefficient and the intercept at zero, so z is 0 for every drive and every p is 0.5. 0.5 multiplied by itself 6,000 times, once per training drive, is 10 to the power 6,000 times log10 of 0.5 = 6,000 times minus 0.301 = minus 1806, while the smallest positive number a 64-bit float can hold is about 5 times 10 to the minus 324. The computer would store exactly zero.</a:t>
-            </a:r>
-          </a:p>
-          <a:p>
-            <a:pPr lvl="0" indent="0" marL="0">
-              <a:buNone/>
-            </a:pPr>
-          </a:p>
-          <a:p>
-            <a:pPr lvl="0" indent="0" marL="0">
-              <a:buNone/>
-            </a:pPr>
-            <a:r>
-              <a:rPr/>
-              <a:t>Divide the sum by the number of drives and you have the average surprise: that is the cost J that fitting minimises, and scikit-learn’s log_loss computes exactly this average. The next slide draws the surprise of one drive, and slide 24 writes it as a formula, the loss L; J is its average over the drives. Handout sections 3.1 to 3.3.</a:t>
+              <a:t>Divide the sum by the number of drives and you have the average surprise: that is the cost J that fitting minimises, and scikit-learn’s log_loss computes exactly this average. The next slide draws the surprise of one drive, and slide 24 writes it as a formula, the loss L, with J, its average over the drives, under it. Handout sections 3.1 to 3.3.</a:t>
             </a:r>
           </a:p>
         </p:txBody>
@@ -2571,7 +2599,7 @@
             </a:pPr>
             <a:r>
               <a:rPr/>
-              <a:t>This is the loss on ONE example, L, not the cost over the training set; p is the predicted probability, the same number the next slide writes as y-hat. Say the other half aloud rather than showing it: the cost J is the average of this over the m examples, one over m times the sum. It is left off the slide because, written out in full, the formula does not fit at a readable size.</a:t>
+              <a:t>Two lines, and the difference between them matters. The top line is the loss on ONE example, L; p is the predicted probability, the same number the next slide writes as y-hat. The bottom line is the cost J: the average of L over the m training examples, each with its own p, the model’s probability for drive i. J is what fitting minimises, and it is the J whose gradient slide 25 takes. Written in terms of L it fits; the handout, section 3, writes it out in full.</a:t>
             </a:r>
           </a:p>
           <a:p>
@@ -2737,7 +2765,7 @@
             </a:pPr>
             <a:r>
               <a:rPr/>
-              <a:t>What is new, and what is not. The formula is written with exactly the symbols of lesson 3’s slide 23. The difference is hidden in y-hat: in lesson 3 it was the straight line w-transpose-x plus b, and here it is the sigmoid of that line, the probability of slide 13 - which is why the title says so. The cost is different too: squared error there, log loss (slide 24) here. Different model, different cost, and yet the same gradient.</a:t>
+              <a:t>What is new, and what is not. The formula is written with exactly the symbols of lesson 3’s slide 23. The difference is hidden in y-hat: in lesson 3 it was the straight line w-transpose-x plus b, and here it is the sigmoid of that line, the probability of slide 12 - which is why the title says so. The cost is different too: squared error there, log loss (slide 24) here. Different model, different cost, and yet the same gradient.</a:t>
             </a:r>
           </a:p>
           <a:p>
@@ -2765,7 +2793,7 @@
             </a:pPr>
             <a:r>
               <a:rPr/>
-              <a:t>Why it comes out the same - worth the board if there is appetite, handout section 3.4 has it in full. Follow one drive through the chain rule, in three links, with p for y-hat and z for w-transpose-x plus b: - how the loss changes with p: (p - y) divided by p times (1 - p) - the denominator comes from the logarithms in the log loss; - how p changes with z: p times (1 - p), the sigmoid’s derivative from slide 13; - how z changes with w_j: x_j. Multiply the three: the p times (1 - p) cancels, and what is left is (p - y) times x_j.</a:t>
+              <a:t>Why it comes out the same - worth the board if there is appetite, handout section 3.4 has it in full. Follow one drive through the chain rule, in three links, with p for y-hat and z for w-transpose-x plus b: - how the loss changes with p: (p - y) divided by p times (1 - p) - the denominator comes from the logarithms in the log loss; - how p changes with z: p times (1 - p), the sigmoid’s derivative from slide 12; - how z changes with w_j: x_j. Multiply the three: the p times (1 - p) cancels, and what is left is (p - y) times x_j.</a:t>
             </a:r>
           </a:p>
           <a:p>
@@ -2903,7 +2931,7 @@
             </a:pPr>
             <a:r>
               <a:rPr/>
-              <a:t>Right panel is the real argument, so spend the time here. It shows the size of the gradient with respect to z, the push gradient descent gives the model. Log loss’s gradient is p - 1 (slide 25). Squared error’s is 2(p - 1) times p times (1 - p): the chain rule through the sigmoid brings in its derivative, p times one-minus-p, from slide 13, and nothing cancels it. That factor goes to zero as p goes to zero.</a:t>
+              <a:t>Right panel is the real argument, so spend the time here. It shows the size of the gradient with respect to z, the push gradient descent gives the model. Log loss’s gradient is p - 1 (slide 25). Squared error’s is 2(p - 1) times p times (1 - p): the chain rule through the sigmoid brings in its derivative, p times one-minus-p, from slide 12, and nothing cancels it. That factor goes to zero as p goes to zero.</a:t>
             </a:r>
           </a:p>
           <a:p>
@@ -3086,6 +3114,20 @@
               <a:t>There is no normal equation for logistic regression. It has to be solved iteratively, which is why LogisticRegression has a max_iter argument and LinearRegression does not. If a student ever sees a convergence warning, that is what it is about.</a:t>
             </a:r>
           </a:p>
+          <a:p>
+            <a:pPr lvl="0" indent="0" marL="0">
+              <a:buNone/>
+            </a:pPr>
+          </a:p>
+          <a:p>
+            <a:pPr lvl="0" indent="0" marL="0">
+              <a:buNone/>
+            </a:pPr>
+            <a:r>
+              <a:rPr/>
+              <a:t>Someone will ask which algorithm scikit-learn uses. Not our gradient descent: the default is solver=“lbfgs”, limited-memory BFGS, a quasi-Newton method. It estimates the curvature of the cost from the last few gradients and uses it to choose both the direction and the length of each step, so there is no learning rate to set; on notebook 1’s data it stops after 15 iterations. And it does not minimise the log loss alone: the default adds an L2 penalty, as in lesson 3’s ridge, with C = 1 (C is the inverse of the penalty strength: the smaller C, the stronger the penalty). That penalty is why notebook 1’s from-scratch coefficients and scikit-learn’s differ in the second decimal; notebook 1 refits with penalty=None and the two agree. The default is wanted, not a bug: with classes a line separates perfectly, the unpenalised weights grow without limit (handout section 4.3), and lesson 5 chooses C by cross-validation.</a:t>
+            </a:r>
+          </a:p>
         </p:txBody>
       </p:sp>
       <p:sp>
@@ -7203,7 +7245,7 @@
             </a:pPr>
             <a:r>
               <a:rPr/>
-              <a:t>What the weights are. The two numbers on the slide: 6,000 ÷ (2 × 5,770) = 0.52 and 6,000 ÷ (2 × 230) = 13.0. The log loss adds one term per training drive. A class weight multiplies the term of every drive in that class. “balanced” sets the weight to m divided by (2 times the number of drives in the class): 0.52 for a healthy drive, 13.0 for a failed one. Each failure therefore counts as 25 healthy drives - as if the training set held 25 copies of every failure.</a:t>
+              <a:t>What the weights are - and first, what they are not: these class weights are not the weights w of slide 12, the coefficients. A class weight says how much each training example counts in the cost; w is what the fitting chooses. The two numbers on the slide: 6,000 ÷ (2 × 5,770) = 0.52 and 6,000 ÷ (2 × 230) = 13.0. The log loss adds one term per training drive. A class weight multiplies the term of every drive in that class. “balanced” sets the weight to m divided by (2 times the number of drives in the class): 0.52 for a healthy drive, 13.0 for a failed one. Each failure therefore counts as 25 healthy drives - as if the training set held 25 copies of every failure.</a:t>
             </a:r>
           </a:p>
           <a:p>
@@ -8333,7 +8375,7 @@
             </a:pPr>
             <a:r>
               <a:rPr/>
-              <a:t>Second, the flat start is a fault of the model, not a fact about the drives. A drive with a few sectors is not safe; the model cannot see it, because a straight line in the count gives every sector the same weight: the first adds as much to z as the twentieth. But the labels were generated from log(1 + count), which gives the first sectors the most weight (handout section 1.1). The handout’s figure in section 2.2 draws what the sectors add to z under each of the two. That is why the six-counter model of slide 13 onwards takes log(1 + count) as its input.</a:t>
+              <a:t>Second, the flat start is a fault of the model, not a fact about the drives. A drive with a few sectors is not safe; the model cannot see it, because a straight line in the count gives every sector the same weight: the first adds as much to z as the twentieth. But the labels were generated from log(1 + count), which gives the first sectors the most weight (handout section 1.1). The handout’s figure in section 2.2 draws what the sectors add to z under each of the two. That is why the six-counter model of slide 12 onwards takes log(1 + count) as its input.</a:t>
             </a:r>
           </a:p>
           <a:p>
@@ -8483,7 +8525,7 @@
             <a:pPr lvl="0"/>
             <a:r>
               <a:rPr/>
-              <a:t>the coefficients read as odds multipliers, which is slide 14;</a:t>
+              <a:t>the coefficients read as odds multipliers, which is slide 14. The bullet says “each feature will add” because there is no model yet: the coefficients, the weights w, arrive on slide 12, and slide 14 reads them;</a:t>
             </a:r>
           </a:p>
           <a:p>
@@ -8617,7 +8659,21 @@
             </a:pPr>
             <a:r>
               <a:rPr/>
-              <a:t>Why it multiplies, by counting, before pointing at the figure. Take 1,000 drives at 50% risk: 500 will fail, 500 will not. A reading shows up on 60% of the failing drives and on 10% of the healthy ones. Among the drives that show it, 300 will fail and 50 will not: the odds, failing divided by healthy, go from 500 / 500 = 1 to 300 / 50 = 6. The reading scales the failing drives by 0.6 and the healthy ones by 0.1, so their ratio is multiplied by 0.6 / 0.1 = 6 whatever it was before - start from 950 and 50 and you get 570 and 5, odds 19 to 114. That is Bayes’ rule written with odds. The figure takes it as given and shows the consequence.</a:t>
+              <a:t>First the word the figure’s legend uses. A reading is what one counter shows on one drive: a particular value, or range of values, of one feature - say “a high count of reallocated sectors”. For counting it is a yes-or-no fact: the drive shows it or it does not.</a:t>
+            </a:r>
+          </a:p>
+          <a:p>
+            <a:pPr lvl="0" indent="0" marL="0">
+              <a:buNone/>
+            </a:pPr>
+          </a:p>
+          <a:p>
+            <a:pPr lvl="0" indent="0" marL="0">
+              <a:buNone/>
+            </a:pPr>
+            <a:r>
+              <a:rPr/>
+              <a:t>Why evidence multiplies, by counting, before pointing at the figure. Take 1,000 drives at 50% risk: 500 will fail, 500 will not. They are imagined, all like the drive in question, only so that percentages become counts. Suppose a reading shows up on 60% of the failing drives and on 10% of the healthy ones - the two shares are an illustration, not measured on the fleet, and only their ratio, 6, matters. Among the drives that show it, 300 will fail and 50 will not; our drive shows it, so it is one of the 350. The odds, failing divided by healthy, go from 500 / 500 = 1 to 300 / 50 = 6. The reading is a sieve that keeps a share of each group, 0.6 of the failing drives and 0.1 of the healthy ones, so their ratio is multiplied by 0.6 / 0.1 = 6 whatever it was before - start from 950 and 50 and you get 570 and 5, odds 19 to 114. That ratio, P(reading | fail) divided by P(reading | healthy), is called the likelihood ratio, and it belongs to the reading, not to the drive: that is Bayes’ rule written with odds. The probability cannot be multiplied the same way: it is failing divided by failing plus healthy, both groups sit in its denominator, shrunk by different shares, so its change depends on where it started. The figure takes the multiplication as given and shows the consequence.</a:t>
             </a:r>
           </a:p>
           <a:p>
@@ -8645,7 +8701,7 @@
             </a:pPr>
             <a:r>
               <a:rPr/>
-              <a:t>The picture shows three drives, marked by the yellow dots: an average drive at 0.2%, one at 50% and one at 95%. Each receives the same reading - a value one of its counters reports, say a high count of reallocated sectors - and it is a reading six times more common among drives that fail than among healthy ones. Bayes’ rule says such a reading multiplies the odds - the probability of failing divided by the probability of not failing - by 6, whatever they were before (handout section 2.3 shows it by counting 1,000 drives). On the horizontal axis, the log-odds, multiplying by 6 is always the same step: the three teal arrows have the same length.</a:t>
+              <a:t>The picture shows three drives, marked by the yellow dots: an average drive at 0.2%, one at 50% and one at 95%. Each receives the same reading, one six times more common among drives that fail than among healthy ones. Bayes’ rule says such a reading multiplies the odds - the probability of failing divided by the probability of not failing - by 6, whatever they were before (handout section 2.3 shows it by counting 1,000 drives). On the horizontal axis, the log-odds, multiplying by 6 is always the same step: the three teal arrows have the same length.</a:t>
             </a:r>
           </a:p>
           <a:p>
@@ -11892,7 +11948,7 @@
             </a:pPr>
             <a:r>
               <a:rPr/>
-              <a:t>The same evidence on three drives</a:t>
+              <a:t>One reading, three different jumps</a:t>
             </a:r>
           </a:p>
         </p:txBody>
@@ -12056,14 +12112,14 @@
             </a:pPr>
             <a:r>
               <a:rPr/>
-              <a:t>The model, in one line</a:t>
+              <a:t>The model, and three properties of the sigmoid</a:t>
             </a:r>
           </a:p>
         </p:txBody>
       </p:sp>
       <p:pic>
         <p:nvPicPr>
-          <p:cNvPr descr="eq_e936e058d0.png" id="0" name="Picture 1"/>
+          <p:cNvPr descr="eq_6df234eb57.png" id="0" name="Picture 1"/>
           <p:cNvPicPr>
             <a:picLocks noGrp="1" noChangeAspect="1"/>
           </p:cNvPicPr>
@@ -12077,8 +12133,8 @@
         </p:blipFill>
         <p:spPr bwMode="auto">
           <a:xfrm>
-            <a:off x="457200" y="2535039"/>
-            <a:ext cx="8229600" cy="622300"/>
+            <a:off x="457200" y="1677789"/>
+            <a:ext cx="8229600" cy="2336800"/>
           </a:xfrm>
           <a:prstGeom prst="rect">
             <a:avLst/>
@@ -12248,29 +12304,41 @@
             <a:pPr lvl="0"/>
             <a:r>
               <a:rPr/>
-              <a:t>Standardised (mean 0, SD 1): one SD more of reallocated sectors adds its true coefficient, 1.80 (slide 15), to the log-odds</a:t>
+              <a:t>Coefficients = weights w (</a:t>
+            </a:r>
+            <a:r>
+              <a:rPr>
+                <a:latin typeface="Courier"/>
+              </a:rPr>
+              <a:t>coef_</a:t>
+            </a:r>
+            <a:r>
+              <a:rPr/>
+              <a:t>); intercept b (</a:t>
+            </a:r>
+            <a:r>
+              <a:rPr>
+                <a:latin typeface="Courier"/>
+              </a:rPr>
+              <a:t>intercept_</a:t>
+            </a:r>
+            <a:r>
+              <a:rPr/>
+              <a:t>)</a:t>
             </a:r>
           </a:p>
           <a:p>
             <a:pPr lvl="0"/>
             <a:r>
               <a:rPr/>
-              <a:t>Adding to a log multiplies the </a:t>
-            </a:r>
-            <a:r>
-              <a:rPr b="1"/>
-              <a:t>odds</a:t>
-            </a:r>
-            <a:r>
-              <a:rPr/>
-              <a:t>: log(odds) + 1.80 = log(odds × 6.05), since exp(1.80) = 6.05</a:t>
+              <a:t>Standardised (mean 0, SD 1): one SD more of reallocated sectors adds its true coefficient, 1.80, to the log-odds</a:t>
             </a:r>
           </a:p>
           <a:p>
             <a:pPr lvl="0"/>
             <a:r>
               <a:rPr/>
-              <a:t>So: </a:t>
+              <a:t>log(odds) + 1.80 = log(odds × 6.05): </a:t>
             </a:r>
             <a:r>
               <a:rPr b="1"/>
@@ -12278,7 +12346,7 @@
             </a:r>
             <a:r>
               <a:rPr/>
-              <a:t> of failing, slide 10’s teal step</a:t>
+              <a:t>, slide 10’s teal step</a:t>
             </a:r>
           </a:p>
           <a:p>
@@ -14476,8 +14544,8 @@
         </p:nvSpPr>
         <p:spPr>
           <a:xfrm>
-            <a:off x="457200" y="205979"/>
-            <a:ext cx="8229600" cy="857250"/>
+            <a:off x="457200" y="205740"/>
+            <a:ext cx="8229600" cy="874395"/>
           </a:xfrm>
         </p:spPr>
         <p:txBody>
@@ -14490,6 +14558,36 @@
             <a:r>
               <a:rPr/>
               <a:t>Step 4: minus the log, a cost</a:t>
+            </a:r>
+          </a:p>
+        </p:txBody>
+      </p:sp>
+      <p:sp>
+        <p:nvSpPr>
+          <p:cNvPr id="4" name="Text Placeholder 3"/>
+          <p:cNvSpPr>
+            <a:spLocks noGrp="1"/>
+          </p:cNvSpPr>
+          <p:nvPr>
+            <p:ph idx="2" sz="half" type="body"/>
+          </p:nvPr>
+        </p:nvSpPr>
+        <p:spPr>
+          <a:xfrm>
+            <a:off x="457200" y="1183005"/>
+            <a:ext cx="8229600" cy="1311592"/>
+          </a:xfrm>
+        </p:spPr>
+        <p:txBody>
+          <a:bodyPr/>
+          <a:lstStyle/>
+          <a:p>
+            <a:pPr lvl="0" indent="0" marL="0">
+              <a:buNone/>
+            </a:pPr>
+            <a:r>
+              <a:rPr/>
+              <a:t>The log turns the product into a sum, one term per drive, and keeps the winner; the minus turns largest into smallest: a cost to minimise, as in lesson 3.</a:t>
             </a:r>
           </a:p>
         </p:txBody>
@@ -14505,8 +14603,8 @@
           </p:nvPr>
         </p:nvGraphicFramePr>
         <p:xfrm>
-          <a:off x="457200" y="1166099"/>
-          <a:ext cx="8229600" cy="3390900"/>
+          <a:off x="457200" y="2597467"/>
+          <a:ext cx="8229600" cy="4381500"/>
         </p:xfrm>
         <a:graphic>
           <a:graphicData uri="http://schemas.openxmlformats.org/drawingml/2006/table">
@@ -14976,7 +15074,7 @@
       </p:sp>
       <p:pic>
         <p:nvPicPr>
-          <p:cNvPr descr="eq_9de37afc79.png" id="0" name="Picture 1"/>
+          <p:cNvPr descr="eq_c25cdd8644.png" id="0" name="Picture 1"/>
           <p:cNvPicPr>
             <a:picLocks noGrp="1" noChangeAspect="1"/>
           </p:cNvPicPr>
@@ -14990,8 +15088,8 @@
         </p:blipFill>
         <p:spPr bwMode="auto">
           <a:xfrm>
-            <a:off x="457200" y="2560439"/>
-            <a:ext cx="8229600" cy="571500"/>
+            <a:off x="457200" y="1798439"/>
+            <a:ext cx="8229600" cy="2095500"/>
           </a:xfrm>
           <a:prstGeom prst="rect">
             <a:avLst/>
@@ -20279,7 +20377,7 @@
             <a:pPr lvl="0"/>
             <a:r>
               <a:rPr/>
-              <a:t>Bonus: coefficients multiply the odds (slide 14)</a:t>
+              <a:t>Bonus: on this scale each feature will add a fixed amount, so it will multiply the odds by a fixed factor (slide 14)</a:t>
             </a:r>
           </a:p>
         </p:txBody>

--- a/Lessons/04_classification_and_metrics/Slides/classification_and_metrics_slides.pptx
+++ b/Lessons/04_classification_and_metrics/Slides/classification_and_metrics_slides.pptx
@@ -2751,7 +2751,21 @@
             </a:pPr>
             <a:r>
               <a:rPr/>
-              <a:t>What the formula says, in words. To find how the cost J changes when the coefficient w_j is nudged up: take each training drive, compute its error - the predicted probability y-hat minus the true label y, which is 0 or 1 - multiply that error by the drive’s value of feature j, and average over the m drives. Gradient descent then steps w_j in the opposite direction.</a:t>
+              <a:t>What the formulas say, in words. To find how the cost J changes when the coefficient w_j is nudged up: take each training drive, compute its error - the predicted probability y-hat minus the true label y, which is 0 or 1 - multiply that error by the drive’s value of feature j, and average over the m drives. Gradient descent then steps w_j in the opposite direction.</a:t>
+            </a:r>
+          </a:p>
+          <a:p>
+            <a:pPr lvl="0" indent="0" marL="0">
+              <a:buNone/>
+            </a:pPr>
+          </a:p>
+          <a:p>
+            <a:pPr lvl="0" indent="0" marL="0">
+              <a:buNone/>
+            </a:pPr>
+            <a:r>
+              <a:rPr/>
+              <a:t>The second line is the intercept’s, and it is the same formula with x_j = 1: slide 13 drew b as the weight on a constant input of 1. So the gradient with respect to b is simply the average error. If the model over-predicts failure on average, b goes down. Notebook 1’s code has one line for each: w moves by the learning rate times X-transpose times the errors over m, b by the learning rate times the mean error.</a:t>
             </a:r>
           </a:p>
           <a:p>
@@ -2987,7 +3001,7 @@
             </a:pPr>
             <a:r>
               <a:rPr/>
-              <a:t>A second predictable slip, from reading the two panels together: “log loss’s slope is minus 1 over p”. That is the slope of the LEFT blue curve, the derivative of minus log p with respect to p. The right panel differentiates with respect to z, the log-odds, and there log loss’s gradient is p - 1: size 1 - p, the straight line from 1 down to 0, as its legend says. The chain rule joins the two panels: minus 1 over p, times the sigmoid’s derivative p(1 - p), gives minus (1 - p). The 1 over p cancels the sigmoid’s p, which is why log loss’s push does not die; squared error has no 1 over p to cancel it.</a:t>
+              <a:t>A second predictable slip, from reading the two panels together: “log loss’s slope is minus 1 over p”. That is the slope of the LEFT blue curve, the derivative of minus log p with respect to p. The right panel differentiates with respect to z, the log-odds, and there log loss’s gradient is p - 1: size 1 - p, the straight line from 1 down to 0, as its legend says. The panel draws the SIZE of each gradient - the bars around “gradient” on its vertical axis. A third predictable slip follows from that: “the figure says 1 - p and the notebook p - 1, so one of them has the sign wrong”. Both are right: the gradient is p - 1, negative for a failed drive, which makes gradient descent raise z; its size is 1 - p. The full derivation, both labels and both costs, is in handout section 3.4. The chain rule joins the two panels: minus 1 over p, times the sigmoid’s derivative p(1 - p), gives minus (1 - p). The 1 over p cancels the sigmoid’s p, which is why log loss’s push does not die; squared error has no 1 over p to cancel it.</a:t>
             </a:r>
           </a:p>
         </p:txBody>
@@ -6307,7 +6321,7 @@
             </a:pPr>
             <a:r>
               <a:rPr/>
-              <a:t>The explanation is entirely in the denominators, and it is worth writing on the board.</a:t>
+              <a:t>The explanation is entirely in the denominators, and it is worth writing on the board. First say which two numbers the slide compares, and why: the two curves of slide 48 share one axis, recall, and differ in one axis each - the false positive rate on the ROC, precision on the precision-recall curve. Recall does not move, so the disagreement must come from FPR against precision. The three bullets go in that order.</a:t>
             </a:r>
           </a:p>
           <a:p>
@@ -6335,7 +6349,21 @@
             </a:pPr>
             <a:r>
               <a:rPr/>
-              <a:t>A predictable slip: “precision falls because the false positives grow”. They do not - 304 in every fleet. What grows is their share of the alarms, 304 ÷ (1,127 + 304) = 0.21 at 3.8% and 304 ÷ (106 + 304) = 0.74 at 0.4%, which is 1 − precision. The slip is natural: “the false alarms take over” sounds like “there are more of them”.</a:t>
+              <a:t>Two predictable slips. First, “recall falls too, only more slowly”: it does not fall at all; TP and FN are both failures, thinned in the same proportion, and 0.50, 0.45, 0.46 is noise on few remaining failures. A related wording slip is calling FN “the false ones”: they are failures the model called healthy.</a:t>
+            </a:r>
+          </a:p>
+          <a:p>
+            <a:pPr lvl="0" indent="0" marL="0">
+              <a:buNone/>
+            </a:pPr>
+          </a:p>
+          <a:p>
+            <a:pPr lvl="0" indent="0" marL="0">
+              <a:buNone/>
+            </a:pPr>
+            <a:r>
+              <a:rPr/>
+              <a:t>Second, “precision falls because the false positives grow”. They do not - 304 in every fleet. What grows is their share of the alarms, 304 ÷ (1,127 + 304) = 0.21 at 3.8% and 304 ÷ (106 + 304) = 0.74 at 0.4%, which is 1 − precision. The slip is natural: “the false alarms take over” sounds like “there are more of them”.</a:t>
             </a:r>
           </a:p>
           <a:p>
@@ -6473,7 +6501,7 @@
             </a:pPr>
             <a:r>
               <a:rPr/>
-              <a:t>Average precision reads as it is computed: walk down the thresholds from the top; each time recall goes up by a step, take the precision at that point; add the precisions, each weighted by its recall step. Why a random ranking scores 0.038: its precision is the positive rate π at every recall (slide 42 counted it), so the weighted average of a constant is that constant, π = 76 ÷ 2,000. So AP is read against π, not against 0.5 - which is also why it travels across problems with different class balance badly, and must always be quoted with the positive rate beside it.</a:t>
+              <a:t>Average precision, the idea first, as the bullet now says: every time the ranking reaches a failing drive, ask how clean the alarm queue is at that moment - the precision there - and average those precisions over the failures. That is where the name comes from. The formula says the same thing as an area: walk down the thresholds from the top; recall goes up only at a failing drive, by 1 ÷ 76 each time; take the precision at that point; add the precisions, each weighted by its recall step. The steps are all 1 ÷ 76, so the weighted sum is the plain average. Handout section 7.1 draws it for seven drives as three rectangles. Why a random ranking scores 0.038: its precision is the positive rate π at every recall (slide 42 counted it), so the weighted average of a constant is that constant, π = 76 ÷ 2,000. So AP is read against π, not against 0.5 - which is also why it travels across problems with different class balance badly, and must always be quoted with the positive rate beside it.</a:t>
             </a:r>
           </a:p>
           <a:p>
@@ -7152,6 +7180,20 @@
               <a:t>Until then, treat the 0.078 as a demonstration of a method, not a result anyone could publish.</a:t>
             </a:r>
           </a:p>
+          <a:p>
+            <a:pPr lvl="0" indent="0" marL="0">
+              <a:buNone/>
+            </a:pPr>
+          </a:p>
+          <a:p>
+            <a:pPr lvl="0" indent="0" marL="0">
+              <a:buNone/>
+            </a:pPr>
+            <a:r>
+              <a:rPr/>
+              <a:t>The last bullet answers the question the room will ask: which one do we use? 0.051. A predictable slip: “0.078 costs less, so it is the better threshold”. It costs less on the 2,000 drives it was chosen on. Expected over new drives, the 45 drives between the two thresholds should hold about 2.76 failures - their probabilities add up to that - and leaving them would cost about 2.76 × 2,600 = 7,176 euros against (45 − 2.76) × 140 = 5,914 for flagging them: the rule of t* is right, and this test set simply held one failure among them where almost three were expected.</a:t>
+            </a:r>
+          </a:p>
         </p:txBody>
       </p:sp>
       <p:sp>
@@ -7231,21 +7273,21 @@
             </a:pPr>
             <a:r>
               <a:rPr/>
-              <a:t>Three steps, in order.</a:t>
-            </a:r>
-          </a:p>
-          <a:p>
-            <a:pPr lvl="0" indent="0" marL="0">
-              <a:buNone/>
-            </a:pPr>
-          </a:p>
-          <a:p>
-            <a:pPr lvl="0" indent="0" marL="0">
-              <a:buNone/>
-            </a:pPr>
-            <a:r>
-              <a:rPr/>
-              <a:t>What the weights are - and first, what they are not: these class weights are not the weights w of slide 12, the coefficients. A class weight says how much each training example counts in the cost; w is what the fitting chooses. The two numbers on the slide: 6,000 ÷ (2 × 5,770) = 0.52 and 6,000 ÷ (2 × 230) = 13.0. The log loss adds one term per training drive. A class weight multiplies the term of every drive in that class. “balanced” sets the weight to m divided by (2 times the number of drives in the class): 0.52 for a healthy drive, 13.0 for a failed one. Each failure therefore counts as 25 healthy drives - as if the training set held 25 copies of every failure.</a:t>
+              <a:t>This slide is optional: skip it if time is short, because slide 56 carries the message on its own. If you do show it, three steps, in order.</a:t>
+            </a:r>
+          </a:p>
+          <a:p>
+            <a:pPr lvl="0" indent="0" marL="0">
+              <a:buNone/>
+            </a:pPr>
+          </a:p>
+          <a:p>
+            <a:pPr lvl="0" indent="0" marL="0">
+              <a:buNone/>
+            </a:pPr>
+            <a:r>
+              <a:rPr/>
+              <a:t>What the weights are - and first, what they are not: these class weights are not the weights w of slide 12, the coefficients. A class weight says how much each training example counts in the cost; w is what the fitting chooses. The two numbers on the slide: 6,000 ÷ (2 × 5,770) = 0.52 and 6,000 ÷ (2 × 230) = 13.0. The log loss adds one term per training drive. A class weight multiplies the term of every drive in that class. “balanced” sets the weight to m divided by (2 times the number of drives in the class): 0.52 for a healthy drive, 13.0 for a failed one. Each failure therefore counts as 25 healthy drives - as if the training set held 25 copies of every failure. Why the name “balanced”: weight times class size is the same for both classes, 0.52 × 5,770 and 13.0 × 230, both about 3,000, which is m ÷ 2. After weighting, each class carries half of the total weight, however many examples it has. The 2 in the formula is the number of classes; with three classes each would carry a third.</a:t>
             </a:r>
           </a:p>
           <a:p>
@@ -7273,7 +7315,7 @@
             </a:pPr>
             <a:r>
               <a:rPr/>
-              <a:t>What the weights do. For logistic regression the main effect is on the intercept: it rises from −6.09 to −2.95, by 3.14, close to log 25 = 3.22. Every probability goes up, and the weighted model’s 0.5 lands where the plain model’s 1 ÷ (1 + 25) = 0.038 was. Notebook 3 checks it: the plain model at 0.038 raises 208 false alarms and misses 8; the weighted model at 0.5 raises 205 and misses 8; the two agree on 1,987 of the 2,000 test drives. The general rule, approximately: weights with ratio k behave like a threshold of 1 ÷ (1 + k). It is close here because the labels came from a logistic model in these very features; with a misspecified model, few data or a strong penalty, weights also change the slopes and the ranking. Balanced weights land near the cost optimum here only because 25 happens to be close to 18.6.</a:t>
+              <a:t>What the weights do. For logistic regression the main effect is on the intercept: it rises from −6.09 to −2.95, by 3.14, close to log 25 = 3.22. Every probability goes up, and the weighted model’s 0.5 lands where the plain model’s 1 ÷ (1 + 25) = 0.038 was - that is the last bullet. The steps, if someone asks: the weights multiply every drive’s odds by about 25; the weighted model flags at p = 0.5, odds of 1; that is plain odds of 1 ÷ 25, and back to a probability, (1 ÷ 25) ÷ (1 + 1 ÷ 25) = 1 ÷ 26 = 0.038. Not a coincidence: 1 ÷ (1 + 5,770 ÷ 230) = 230 ÷ 6,000, the failure rate of the training set, so balanced weights always act like thresholding the plain model at the rare class’s training frequency. Notebook 3 checks it: the plain model at 0.038 raises 208 false alarms and misses 8; the weighted model at 0.5 raises 205 and misses 8; the two agree on 1,987 of the 2,000 test drives. The general rule, approximately: weights with ratio k behave like a threshold of 1 ÷ (1 + k). It is close here because the labels came from a logistic model in these very features; with a misspecified model, few data or a strong penalty, weights also change the slopes and the ranking. Balanced weights land near the cost optimum here only because 25 happens to be close to 18.6.</a:t>
             </a:r>
           </a:p>
         </p:txBody>
@@ -7355,7 +7397,35 @@
             </a:pPr>
             <a:r>
               <a:rPr/>
+              <a:t>If slide 55 was skipped, one sentence is enough to start: class weights make each failure count more in training, and in effect they only lower the threshold. The figure shows how much that is worth.</a:t>
+            </a:r>
+          </a:p>
+          <a:p>
+            <a:pPr lvl="0" indent="0" marL="0">
+              <a:buNone/>
+            </a:pPr>
+          </a:p>
+          <a:p>
+            <a:pPr lvl="0" indent="0" marL="0">
+              <a:buNone/>
+            </a:pPr>
+            <a:r>
+              <a:rPr/>
               <a:t>The figure is notebook 3’s comparison drawn as bills, one bar per model. Rust is the cost of the missed failures, FN times 2,600 euros; gold is the cost of the false alarms, FP times 140 euros. The default model misses 33 failures: 33 times 2,600 plus 13 times 140 is 87,620. The threshold at 0.078 misses 11 and raises 121 false alarms: 45,540. Balanced weights miss 8 and raise 205: 8 times 2,600 plus 205 times 140 is 49,500.</a:t>
+            </a:r>
+          </a:p>
+          <a:p>
+            <a:pPr lvl="0" indent="0" marL="0">
+              <a:buNone/>
+            </a:pPr>
+          </a:p>
+          <a:p>
+            <a:pPr lvl="0" indent="0" marL="0">
+              <a:buNone/>
+            </a:pPr>
+            <a:r>
+              <a:rPr/>
+              <a:t>Compare the weighted model with the right bar. The 0.078 was found by looking at the test set (slide 54), so the fair comparison is the bar at t* = 0.051, fixed from the costs: 10 missed and 165 false alarms, 49,100. Balanced weights, 49,500, and the threshold from the costs, 49,100, cost practically the same.</a:t>
             </a:r>
           </a:p>
           <a:p>
@@ -7583,6 +7653,20 @@
         <p:txBody>
           <a:bodyPr/>
           <a:lstStyle/>
+          <a:p>
+            <a:pPr lvl="0" indent="0" marL="0">
+              <a:buNone/>
+            </a:pPr>
+            <a:r>
+              <a:rPr/>
+              <a:t>Slides 58 to 60 are optional: exercise 4 is a two-class problem and needs none of them, and lesson 9 introduces the softmax again for the handwritten digits. Show them if there is time after notebook 3.</a:t>
+            </a:r>
+          </a:p>
+          <a:p>
+            <a:pPr lvl="0" indent="0" marL="0">
+              <a:buNone/>
+            </a:pPr>
+          </a:p>
           <a:p>
             <a:pPr lvl="0" indent="0" marL="0">
               <a:buNone/>
@@ -15156,7 +15240,7 @@
       </p:sp>
       <p:pic>
         <p:nvPicPr>
-          <p:cNvPr descr="eq_65f9b62493.png" id="0" name="Picture 1"/>
+          <p:cNvPr descr="eq_170140be31.png" id="0" name="Picture 1"/>
           <p:cNvPicPr>
             <a:picLocks noGrp="1" noChangeAspect="1"/>
           </p:cNvPicPr>
@@ -15170,8 +15254,8 @@
         </p:blipFill>
         <p:spPr bwMode="auto">
           <a:xfrm>
-            <a:off x="631768" y="1861131"/>
-            <a:ext cx="7880464" cy="1970116"/>
+            <a:off x="1784434" y="1166099"/>
+            <a:ext cx="5575131" cy="3360181"/>
           </a:xfrm>
           <a:prstGeom prst="rect">
             <a:avLst/>
@@ -16777,7 +16861,7 @@
             </a:pPr>
             <a:r>
               <a:rPr/>
-              <a:t>F1: why the harmonic mean</a:t>
+              <a:t>F1 = 2PR ÷ (P + R): why the harmonic mean</a:t>
             </a:r>
           </a:p>
         </p:txBody>
@@ -18235,8 +18319,8 @@
         </p:blipFill>
         <p:spPr bwMode="auto">
           <a:xfrm>
-            <a:off x="494477" y="1166099"/>
-            <a:ext cx="8155046" cy="3360181"/>
+            <a:off x="551109" y="1166099"/>
+            <a:ext cx="8041781" cy="3360181"/>
           </a:xfrm>
           <a:prstGeom prst="rect">
             <a:avLst/>
@@ -18296,7 +18380,7 @@
             </a:pPr>
             <a:r>
               <a:rPr/>
-              <a:t>Why the two disagree</a:t>
+              <a:t>Why the two curves disagree</a:t>
             </a:r>
           </a:p>
         </p:txBody>
@@ -18324,7 +18408,18 @@
             <a:pPr lvl="0"/>
             <a:r>
               <a:rPr/>
-              <a:t>False positive rate (FPR) = FP ÷ (FP + TN) divides by </a:t>
+              <a:t>Recall, shared by both curves: TP ÷ (TP + FN), all failures, thinned together: </a:t>
+            </a:r>
+            <a:r>
+              <a:rPr b="1"/>
+              <a:t>stays put</a:t>
+            </a:r>
+          </a:p>
+          <a:p>
+            <a:pPr lvl="0"/>
+            <a:r>
+              <a:rPr/>
+              <a:t>False positive rate (FPR), the ROC’s: FP ÷ (FP + TN), over </a:t>
             </a:r>
             <a:r>
               <a:rPr b="1"/>
@@ -18332,14 +18427,14 @@
             </a:r>
             <a:r>
               <a:rPr/>
-              <a:t>, untouched by the thinning: 304 ÷ 57,575 = 0.0053 in all three fleets</a:t>
+              <a:t>, untouched: 0.0053</a:t>
             </a:r>
           </a:p>
           <a:p>
             <a:pPr lvl="0"/>
             <a:r>
               <a:rPr/>
-              <a:t>Precision = TP ÷ (TP + FP): FP </a:t>
+              <a:t>Precision, the other curve’s: TP ÷ (TP + FP); FP </a:t>
             </a:r>
             <a:r>
               <a:rPr b="1"/>
@@ -18347,7 +18442,7 @@
             </a:r>
             <a:r>
               <a:rPr/>
-              <a:t> while TP falls from 1,127 to 106, so the false alarms’ share of the alarms grows from 0.21 to 0.74</a:t>
+              <a:t>, TP falls from 1,127 to 106</a:t>
             </a:r>
           </a:p>
         </p:txBody>
@@ -18545,7 +18640,7 @@
             <a:pPr lvl="0"/>
             <a:r>
               <a:rPr/>
-              <a:t>AUC: are failures ranked above healthy drives? Precision-recall: how many alarms are real?</a:t>
+              <a:t>AUC: are failures ranked first? Precision-recall: how many alarms are real?</a:t>
             </a:r>
           </a:p>
           <a:p>
@@ -18558,10 +18653,6 @@
               <a:rPr b="1"/>
               <a:t>precision-recall curve beside the AUC</a:t>
             </a:r>
-            <a:r>
-              <a:rPr/>
-              <a:t>, not instead</a:t>
-            </a:r>
           </a:p>
           <a:p>
             <a:pPr lvl="0"/>
@@ -18571,7 +18662,7 @@
             </a:r>
             <a:r>
               <a:rPr/>
-              <a:t>: Σₖ (Rₖ − Rₖ₋₁) × Pₖ, a step-sum area: each threshold’s precision weighted by the recall it adds</a:t>
+              <a:t>: the precision at each failure’s place in the ranking, averaged; Σₖ (Rₖ − Rₖ₋₁) × Pₖ</a:t>
             </a:r>
           </a:p>
           <a:p>
@@ -18910,19 +19001,16 @@
               <a:rPr b="1"/>
               <a:t>by looking at the test set</a:t>
             </a:r>
+            <a:r>
+              <a:rPr/>
+              <a:t>: what lesson 1 forbade</a:t>
+            </a:r>
           </a:p>
           <a:p>
             <a:pPr lvl="0"/>
             <a:r>
               <a:rPr/>
-              <a:t>That is precisely what lesson 1 forbade</a:t>
-            </a:r>
-          </a:p>
-          <a:p>
-            <a:pPr lvl="0"/>
-            <a:r>
-              <a:rPr/>
-              <a:t>Done properly: choose it on a </a:t>
+              <a:t>Properly: choose it on a </a:t>
             </a:r>
             <a:r>
               <a:rPr b="1"/>
@@ -18930,14 +19018,25 @@
             </a:r>
             <a:r>
               <a:rPr/>
-              <a:t>, then measure once on the test set (lesson 5)</a:t>
+              <a:t>, measure once on the test set (lesson 5)</a:t>
             </a:r>
           </a:p>
           <a:p>
             <a:pPr lvl="0"/>
             <a:r>
               <a:rPr/>
-              <a:t>The price of looking, here: t* = 0.051, fixed before looking, costs €49,100 on the test set; 0.078, picked by looking, €45,540</a:t>
+              <a:t>t* = 0.051, fixed before looking: €49,100 on the test set; 0.078, picked by looking: €45,540</a:t>
+            </a:r>
+          </a:p>
+          <a:p>
+            <a:pPr lvl="0"/>
+            <a:r>
+              <a:rPr b="1"/>
+              <a:t>Deploy 0.051</a:t>
+            </a:r>
+            <a:r>
+              <a:rPr/>
+              <a:t>: 0.078’s €3,560 was found on the very drives it is measured on</a:t>
             </a:r>
           </a:p>
         </p:txBody>
@@ -19055,8 +19154,12 @@
           <a:p>
             <a:pPr lvl="0"/>
             <a:r>
-              <a:rPr/>
-              <a:t>Same decisions as the plain model at 1 ÷ 26 = 0.038, on 1,987 of 2,000 drives</a:t>
+              <a:rPr b="1"/>
+              <a:t>In effect it only lowers the threshold</a:t>
+            </a:r>
+            <a:r>
+              <a:rPr/>
+              <a:t>: at 0.5 the weighted model decides like the plain one at 0.038</a:t>
             </a:r>
           </a:p>
         </p:txBody>
@@ -19129,8 +19232,8 @@
         </p:blipFill>
         <p:spPr bwMode="auto">
           <a:xfrm>
-            <a:off x="457200" y="1284089"/>
-            <a:ext cx="8229600" cy="3124200"/>
+            <a:off x="853148" y="1166099"/>
+            <a:ext cx="7437704" cy="3360181"/>
           </a:xfrm>
           <a:prstGeom prst="rect">
             <a:avLst/>
@@ -19546,7 +19649,7 @@
             </a:pPr>
             <a:r>
               <a:rPr/>
-              <a:t>Three classes: softmax</a:t>
+              <a:t>Three classes: softmax (optional)</a:t>
             </a:r>
           </a:p>
         </p:txBody>
@@ -19582,7 +19685,7 @@
             </a:r>
             <a:r>
               <a:rPr/>
-              <a:t>: exponentiate, divide by the sum</a:t>
+              <a:t>: P(class k) = exp(zₖ) ÷ Σⱼ exp(zⱼ): exponentiate, divide by the sum</a:t>
             </a:r>
           </a:p>
           <a:p>
@@ -19675,7 +19778,7 @@
             </a:pPr>
             <a:r>
               <a:rPr/>
-              <a:t>More than two classes</a:t>
+              <a:t>More than two classes (optional)</a:t>
             </a:r>
           </a:p>
         </p:txBody>
@@ -19848,7 +19951,7 @@
             </a:pPr>
             <a:r>
               <a:rPr/>
-              <a:t>Macro against weighted, one last time</a:t>
+              <a:t>Macro against weighted, one last time (optional)</a:t>
             </a:r>
           </a:p>
         </p:txBody>

--- a/Lessons/04_classification_and_metrics/Slides/classification_and_metrics_slides.pptx
+++ b/Lessons/04_classification_and_metrics/Slides/classification_and_metrics_slides.pptx
@@ -8279,7 +8279,7 @@
             </a:pPr>
             <a:r>
               <a:rPr/>
-              <a:t>Set it explicitly and say out loud when it comes back: the first ten minutes of next Friday, 6 November.</a:t>
+              <a:t>Set it explicitly and say out loud when it comes back: the start of Friday 13 November, together with exercise 5. (Lesson 4 ran over two Fridays: this slide is reached on 6 November, after which lesson 5 begins the same day.)</a:t>
             </a:r>
           </a:p>
           <a:p>
@@ -8321,7 +8321,7 @@
             </a:pPr>
             <a:r>
               <a:rPr/>
-              <a:t>Next week: experimental methodology. Cross-validation, bias-variance, and the honest way to make every choice we made by hand today.</a:t>
+              <a:t>Next: experimental methodology, straight after this slide. Cross-validation, bias-variance, and the honest way to make every choice we made by hand in this lesson.</a:t>
             </a:r>
           </a:p>
         </p:txBody>
@@ -20201,7 +20201,7 @@
             </a:r>
             <a:r>
               <a:rPr b="1"/>
-              <a:t>Friday 6 November</a:t>
+              <a:t>Friday 13 November</a:t>
             </a:r>
           </a:p>
           <a:p>
